--- a/docs/retirement_income_planner_architecture.pptx
+++ b/docs/retirement_income_planner_architecture.pptx
@@ -5,16 +5,16 @@
     <p:sldMasterId id="2147483648" r:id="rId1"/>
   </p:sldMasterIdLst>
   <p:sldIdLst>
-    <p:sldId id="256" r:id="rId7"/>
-    <p:sldId id="257" r:id="rId8"/>
-    <p:sldId id="258" r:id="rId9"/>
-    <p:sldId id="259" r:id="rId10"/>
-    <p:sldId id="260" r:id="rId11"/>
-    <p:sldId id="261" r:id="rId12"/>
-    <p:sldId id="262" r:id="rId13"/>
-    <p:sldId id="263" r:id="rId14"/>
+    <p:sldId id="256" r:id="rId2"/>
+    <p:sldId id="257" r:id="rId3"/>
+    <p:sldId id="258" r:id="rId4"/>
+    <p:sldId id="259" r:id="rId5"/>
+    <p:sldId id="260" r:id="rId6"/>
+    <p:sldId id="261" r:id="rId7"/>
+    <p:sldId id="262" r:id="rId8"/>
+    <p:sldId id="263" r:id="rId9"/>
   </p:sldIdLst>
-  <p:sldSz cx="12191695" cy="6858000" type="screen4x3"/>
+  <p:sldSz cx="12192000" cy="6858000"/>
   <p:notesSz cx="6858000" cy="9144000"/>
   <p:defaultTextStyle>
     <a:defPPr>
@@ -111,6 +111,22 @@
       </a:defRPr>
     </a:lvl9pPr>
   </p:defaultTextStyle>
+  <p:extLst>
+    <p:ext uri="{EFAFB233-063F-42B5-8137-9DF3F51BA10A}">
+      <p15:sldGuideLst xmlns:p15="http://schemas.microsoft.com/office/powerpoint/2012/main">
+        <p15:guide id="1" orient="horz" pos="2160">
+          <p15:clr>
+            <a:srgbClr val="A4A3A4"/>
+          </p15:clr>
+        </p15:guide>
+        <p15:guide id="2" pos="2880">
+          <p15:clr>
+            <a:srgbClr val="A4A3A4"/>
+          </p15:clr>
+        </p15:guide>
+      </p15:sldGuideLst>
+    </p:ext>
+  </p:extLst>
 </p:presentation>
 </file>
 
@@ -152,10 +168,9 @@
           <a:lstStyle/>
           <a:p>
             <a:r>
-              <a:rPr lang="en-US" smtClean="0"/>
+              <a:rPr lang="en-US"/>
               <a:t>Click to edit Master title style</a:t>
             </a:r>
-            <a:endParaRPr lang="en-US"/>
           </a:p>
         </p:txBody>
       </p:sp>
@@ -271,10 +286,9 @@
           </a:lstStyle>
           <a:p>
             <a:r>
-              <a:rPr lang="en-US" smtClean="0"/>
+              <a:rPr lang="en-US"/>
               <a:t>Click to edit Master subtitle style</a:t>
             </a:r>
-            <a:endParaRPr lang="en-US"/>
           </a:p>
         </p:txBody>
       </p:sp>
@@ -295,7 +309,7 @@
           <a:p>
             <a:fld id="{5BCAD085-E8A6-8845-BD4E-CB4CCA059FC4}" type="datetimeFigureOut">
               <a:rPr lang="en-US" smtClean="0"/>
-              <a:t>1/27/13</a:t>
+              <a:t>9/26/26</a:t>
             </a:fld>
             <a:endParaRPr lang="en-US"/>
           </a:p>
@@ -389,10 +403,9 @@
           <a:lstStyle/>
           <a:p>
             <a:r>
-              <a:rPr lang="en-US" smtClean="0"/>
+              <a:rPr lang="en-US"/>
               <a:t>Click to edit Master title style</a:t>
             </a:r>
-            <a:endParaRPr lang="en-US"/>
           </a:p>
         </p:txBody>
       </p:sp>
@@ -413,38 +426,37 @@
           <a:p>
             <a:pPr lvl="0"/>
             <a:r>
-              <a:rPr lang="en-US" smtClean="0"/>
+              <a:rPr lang="en-US"/>
               <a:t>Click to edit Master text styles</a:t>
             </a:r>
           </a:p>
           <a:p>
             <a:pPr lvl="1"/>
             <a:r>
-              <a:rPr lang="en-US" smtClean="0"/>
+              <a:rPr lang="en-US"/>
               <a:t>Second level</a:t>
             </a:r>
           </a:p>
           <a:p>
             <a:pPr lvl="2"/>
             <a:r>
-              <a:rPr lang="en-US" smtClean="0"/>
+              <a:rPr lang="en-US"/>
               <a:t>Third level</a:t>
             </a:r>
           </a:p>
           <a:p>
             <a:pPr lvl="3"/>
             <a:r>
-              <a:rPr lang="en-US" smtClean="0"/>
+              <a:rPr lang="en-US"/>
               <a:t>Fourth level</a:t>
             </a:r>
           </a:p>
           <a:p>
             <a:pPr lvl="4"/>
             <a:r>
-              <a:rPr lang="en-US" smtClean="0"/>
+              <a:rPr lang="en-US"/>
               <a:t>Fifth level</a:t>
             </a:r>
-            <a:endParaRPr lang="en-US"/>
           </a:p>
         </p:txBody>
       </p:sp>
@@ -465,7 +477,7 @@
           <a:p>
             <a:fld id="{5BCAD085-E8A6-8845-BD4E-CB4CCA059FC4}" type="datetimeFigureOut">
               <a:rPr lang="en-US" smtClean="0"/>
-              <a:t>1/27/13</a:t>
+              <a:t>9/26/26</a:t>
             </a:fld>
             <a:endParaRPr lang="en-US"/>
           </a:p>
@@ -564,10 +576,9 @@
           <a:lstStyle/>
           <a:p>
             <a:r>
-              <a:rPr lang="en-US" smtClean="0"/>
+              <a:rPr lang="en-US"/>
               <a:t>Click to edit Master title style</a:t>
             </a:r>
-            <a:endParaRPr lang="en-US"/>
           </a:p>
         </p:txBody>
       </p:sp>
@@ -593,38 +604,37 @@
           <a:p>
             <a:pPr lvl="0"/>
             <a:r>
-              <a:rPr lang="en-US" smtClean="0"/>
+              <a:rPr lang="en-US"/>
               <a:t>Click to edit Master text styles</a:t>
             </a:r>
           </a:p>
           <a:p>
             <a:pPr lvl="1"/>
             <a:r>
-              <a:rPr lang="en-US" smtClean="0"/>
+              <a:rPr lang="en-US"/>
               <a:t>Second level</a:t>
             </a:r>
           </a:p>
           <a:p>
             <a:pPr lvl="2"/>
             <a:r>
-              <a:rPr lang="en-US" smtClean="0"/>
+              <a:rPr lang="en-US"/>
               <a:t>Third level</a:t>
             </a:r>
           </a:p>
           <a:p>
             <a:pPr lvl="3"/>
             <a:r>
-              <a:rPr lang="en-US" smtClean="0"/>
+              <a:rPr lang="en-US"/>
               <a:t>Fourth level</a:t>
             </a:r>
           </a:p>
           <a:p>
             <a:pPr lvl="4"/>
             <a:r>
-              <a:rPr lang="en-US" smtClean="0"/>
+              <a:rPr lang="en-US"/>
               <a:t>Fifth level</a:t>
             </a:r>
-            <a:endParaRPr lang="en-US"/>
           </a:p>
         </p:txBody>
       </p:sp>
@@ -645,7 +655,7 @@
           <a:p>
             <a:fld id="{5BCAD085-E8A6-8845-BD4E-CB4CCA059FC4}" type="datetimeFigureOut">
               <a:rPr lang="en-US" smtClean="0"/>
-              <a:t>1/27/13</a:t>
+              <a:t>9/26/26</a:t>
             </a:fld>
             <a:endParaRPr lang="en-US"/>
           </a:p>
@@ -739,10 +749,9 @@
           <a:lstStyle/>
           <a:p>
             <a:r>
-              <a:rPr lang="en-US" smtClean="0"/>
+              <a:rPr lang="en-US"/>
               <a:t>Click to edit Master title style</a:t>
             </a:r>
-            <a:endParaRPr lang="en-US"/>
           </a:p>
         </p:txBody>
       </p:sp>
@@ -763,38 +772,37 @@
           <a:p>
             <a:pPr lvl="0"/>
             <a:r>
-              <a:rPr lang="en-US" smtClean="0"/>
+              <a:rPr lang="en-US"/>
               <a:t>Click to edit Master text styles</a:t>
             </a:r>
           </a:p>
           <a:p>
             <a:pPr lvl="1"/>
             <a:r>
-              <a:rPr lang="en-US" smtClean="0"/>
+              <a:rPr lang="en-US"/>
               <a:t>Second level</a:t>
             </a:r>
           </a:p>
           <a:p>
             <a:pPr lvl="2"/>
             <a:r>
-              <a:rPr lang="en-US" smtClean="0"/>
+              <a:rPr lang="en-US"/>
               <a:t>Third level</a:t>
             </a:r>
           </a:p>
           <a:p>
             <a:pPr lvl="3"/>
             <a:r>
-              <a:rPr lang="en-US" smtClean="0"/>
+              <a:rPr lang="en-US"/>
               <a:t>Fourth level</a:t>
             </a:r>
           </a:p>
           <a:p>
             <a:pPr lvl="4"/>
             <a:r>
-              <a:rPr lang="en-US" smtClean="0"/>
+              <a:rPr lang="en-US"/>
               <a:t>Fifth level</a:t>
             </a:r>
-            <a:endParaRPr lang="en-US"/>
           </a:p>
         </p:txBody>
       </p:sp>
@@ -815,7 +823,7 @@
           <a:p>
             <a:fld id="{5BCAD085-E8A6-8845-BD4E-CB4CCA059FC4}" type="datetimeFigureOut">
               <a:rPr lang="en-US" smtClean="0"/>
-              <a:t>1/27/13</a:t>
+              <a:t>9/26/26</a:t>
             </a:fld>
             <a:endParaRPr lang="en-US"/>
           </a:p>
@@ -918,10 +926,9 @@
           </a:lstStyle>
           <a:p>
             <a:r>
-              <a:rPr lang="en-US" smtClean="0"/>
+              <a:rPr lang="en-US"/>
               <a:t>Click to edit Master title style</a:t>
             </a:r>
-            <a:endParaRPr lang="en-US"/>
           </a:p>
         </p:txBody>
       </p:sp>
@@ -1038,7 +1045,7 @@
           <a:p>
             <a:pPr lvl="0"/>
             <a:r>
-              <a:rPr lang="en-US" smtClean="0"/>
+              <a:rPr lang="en-US"/>
               <a:t>Click to edit Master text styles</a:t>
             </a:r>
           </a:p>
@@ -1061,7 +1068,7 @@
           <a:p>
             <a:fld id="{5BCAD085-E8A6-8845-BD4E-CB4CCA059FC4}" type="datetimeFigureOut">
               <a:rPr lang="en-US" smtClean="0"/>
-              <a:t>1/27/13</a:t>
+              <a:t>9/26/26</a:t>
             </a:fld>
             <a:endParaRPr lang="en-US"/>
           </a:p>
@@ -1155,10 +1162,9 @@
           <a:lstStyle/>
           <a:p>
             <a:r>
-              <a:rPr lang="en-US" smtClean="0"/>
+              <a:rPr lang="en-US"/>
               <a:t>Click to edit Master title style</a:t>
             </a:r>
-            <a:endParaRPr lang="en-US"/>
           </a:p>
         </p:txBody>
       </p:sp>
@@ -1212,38 +1218,37 @@
           <a:p>
             <a:pPr lvl="0"/>
             <a:r>
-              <a:rPr lang="en-US" smtClean="0"/>
+              <a:rPr lang="en-US"/>
               <a:t>Click to edit Master text styles</a:t>
             </a:r>
           </a:p>
           <a:p>
             <a:pPr lvl="1"/>
             <a:r>
-              <a:rPr lang="en-US" smtClean="0"/>
+              <a:rPr lang="en-US"/>
               <a:t>Second level</a:t>
             </a:r>
           </a:p>
           <a:p>
             <a:pPr lvl="2"/>
             <a:r>
-              <a:rPr lang="en-US" smtClean="0"/>
+              <a:rPr lang="en-US"/>
               <a:t>Third level</a:t>
             </a:r>
           </a:p>
           <a:p>
             <a:pPr lvl="3"/>
             <a:r>
-              <a:rPr lang="en-US" smtClean="0"/>
+              <a:rPr lang="en-US"/>
               <a:t>Fourth level</a:t>
             </a:r>
           </a:p>
           <a:p>
             <a:pPr lvl="4"/>
             <a:r>
-              <a:rPr lang="en-US" smtClean="0"/>
+              <a:rPr lang="en-US"/>
               <a:t>Fifth level</a:t>
             </a:r>
-            <a:endParaRPr lang="en-US"/>
           </a:p>
         </p:txBody>
       </p:sp>
@@ -1297,38 +1302,37 @@
           <a:p>
             <a:pPr lvl="0"/>
             <a:r>
-              <a:rPr lang="en-US" smtClean="0"/>
+              <a:rPr lang="en-US"/>
               <a:t>Click to edit Master text styles</a:t>
             </a:r>
           </a:p>
           <a:p>
             <a:pPr lvl="1"/>
             <a:r>
-              <a:rPr lang="en-US" smtClean="0"/>
+              <a:rPr lang="en-US"/>
               <a:t>Second level</a:t>
             </a:r>
           </a:p>
           <a:p>
             <a:pPr lvl="2"/>
             <a:r>
-              <a:rPr lang="en-US" smtClean="0"/>
+              <a:rPr lang="en-US"/>
               <a:t>Third level</a:t>
             </a:r>
           </a:p>
           <a:p>
             <a:pPr lvl="3"/>
             <a:r>
-              <a:rPr lang="en-US" smtClean="0"/>
+              <a:rPr lang="en-US"/>
               <a:t>Fourth level</a:t>
             </a:r>
           </a:p>
           <a:p>
             <a:pPr lvl="4"/>
             <a:r>
-              <a:rPr lang="en-US" smtClean="0"/>
+              <a:rPr lang="en-US"/>
               <a:t>Fifth level</a:t>
             </a:r>
-            <a:endParaRPr lang="en-US"/>
           </a:p>
         </p:txBody>
       </p:sp>
@@ -1349,7 +1353,7 @@
           <a:p>
             <a:fld id="{5BCAD085-E8A6-8845-BD4E-CB4CCA059FC4}" type="datetimeFigureOut">
               <a:rPr lang="en-US" smtClean="0"/>
-              <a:t>1/27/13</a:t>
+              <a:t>9/26/26</a:t>
             </a:fld>
             <a:endParaRPr lang="en-US"/>
           </a:p>
@@ -1447,10 +1451,9 @@
           </a:lstStyle>
           <a:p>
             <a:r>
-              <a:rPr lang="en-US" smtClean="0"/>
+              <a:rPr lang="en-US"/>
               <a:t>Click to edit Master title style</a:t>
             </a:r>
-            <a:endParaRPr lang="en-US"/>
           </a:p>
         </p:txBody>
       </p:sp>
@@ -1513,7 +1516,7 @@
           <a:p>
             <a:pPr lvl="0"/>
             <a:r>
-              <a:rPr lang="en-US" smtClean="0"/>
+              <a:rPr lang="en-US"/>
               <a:t>Click to edit Master text styles</a:t>
             </a:r>
           </a:p>
@@ -1569,38 +1572,37 @@
           <a:p>
             <a:pPr lvl="0"/>
             <a:r>
-              <a:rPr lang="en-US" smtClean="0"/>
+              <a:rPr lang="en-US"/>
               <a:t>Click to edit Master text styles</a:t>
             </a:r>
           </a:p>
           <a:p>
             <a:pPr lvl="1"/>
             <a:r>
-              <a:rPr lang="en-US" smtClean="0"/>
+              <a:rPr lang="en-US"/>
               <a:t>Second level</a:t>
             </a:r>
           </a:p>
           <a:p>
             <a:pPr lvl="2"/>
             <a:r>
-              <a:rPr lang="en-US" smtClean="0"/>
+              <a:rPr lang="en-US"/>
               <a:t>Third level</a:t>
             </a:r>
           </a:p>
           <a:p>
             <a:pPr lvl="3"/>
             <a:r>
-              <a:rPr lang="en-US" smtClean="0"/>
+              <a:rPr lang="en-US"/>
               <a:t>Fourth level</a:t>
             </a:r>
           </a:p>
           <a:p>
             <a:pPr lvl="4"/>
             <a:r>
-              <a:rPr lang="en-US" smtClean="0"/>
+              <a:rPr lang="en-US"/>
               <a:t>Fifth level</a:t>
             </a:r>
-            <a:endParaRPr lang="en-US"/>
           </a:p>
         </p:txBody>
       </p:sp>
@@ -1663,7 +1665,7 @@
           <a:p>
             <a:pPr lvl="0"/>
             <a:r>
-              <a:rPr lang="en-US" smtClean="0"/>
+              <a:rPr lang="en-US"/>
               <a:t>Click to edit Master text styles</a:t>
             </a:r>
           </a:p>
@@ -1719,38 +1721,37 @@
           <a:p>
             <a:pPr lvl="0"/>
             <a:r>
-              <a:rPr lang="en-US" smtClean="0"/>
+              <a:rPr lang="en-US"/>
               <a:t>Click to edit Master text styles</a:t>
             </a:r>
           </a:p>
           <a:p>
             <a:pPr lvl="1"/>
             <a:r>
-              <a:rPr lang="en-US" smtClean="0"/>
+              <a:rPr lang="en-US"/>
               <a:t>Second level</a:t>
             </a:r>
           </a:p>
           <a:p>
             <a:pPr lvl="2"/>
             <a:r>
-              <a:rPr lang="en-US" smtClean="0"/>
+              <a:rPr lang="en-US"/>
               <a:t>Third level</a:t>
             </a:r>
           </a:p>
           <a:p>
             <a:pPr lvl="3"/>
             <a:r>
-              <a:rPr lang="en-US" smtClean="0"/>
+              <a:rPr lang="en-US"/>
               <a:t>Fourth level</a:t>
             </a:r>
           </a:p>
           <a:p>
             <a:pPr lvl="4"/>
             <a:r>
-              <a:rPr lang="en-US" smtClean="0"/>
+              <a:rPr lang="en-US"/>
               <a:t>Fifth level</a:t>
             </a:r>
-            <a:endParaRPr lang="en-US"/>
           </a:p>
         </p:txBody>
       </p:sp>
@@ -1771,7 +1772,7 @@
           <a:p>
             <a:fld id="{5BCAD085-E8A6-8845-BD4E-CB4CCA059FC4}" type="datetimeFigureOut">
               <a:rPr lang="en-US" smtClean="0"/>
-              <a:t>1/27/13</a:t>
+              <a:t>9/26/26</a:t>
             </a:fld>
             <a:endParaRPr lang="en-US"/>
           </a:p>
@@ -1865,10 +1866,9 @@
           <a:lstStyle/>
           <a:p>
             <a:r>
-              <a:rPr lang="en-US" smtClean="0"/>
+              <a:rPr lang="en-US"/>
               <a:t>Click to edit Master title style</a:t>
             </a:r>
-            <a:endParaRPr lang="en-US"/>
           </a:p>
         </p:txBody>
       </p:sp>
@@ -1889,7 +1889,7 @@
           <a:p>
             <a:fld id="{5BCAD085-E8A6-8845-BD4E-CB4CCA059FC4}" type="datetimeFigureOut">
               <a:rPr lang="en-US" smtClean="0"/>
-              <a:t>1/27/13</a:t>
+              <a:t>9/26/26</a:t>
             </a:fld>
             <a:endParaRPr lang="en-US"/>
           </a:p>
@@ -1984,7 +1984,7 @@
           <a:p>
             <a:fld id="{5BCAD085-E8A6-8845-BD4E-CB4CCA059FC4}" type="datetimeFigureOut">
               <a:rPr lang="en-US" smtClean="0"/>
-              <a:t>1/27/13</a:t>
+              <a:t>9/26/26</a:t>
             </a:fld>
             <a:endParaRPr lang="en-US"/>
           </a:p>
@@ -2087,10 +2087,9 @@
           </a:lstStyle>
           <a:p>
             <a:r>
-              <a:rPr lang="en-US" smtClean="0"/>
+              <a:rPr lang="en-US"/>
               <a:t>Click to edit Master title style</a:t>
             </a:r>
-            <a:endParaRPr lang="en-US"/>
           </a:p>
         </p:txBody>
       </p:sp>
@@ -2144,38 +2143,37 @@
           <a:p>
             <a:pPr lvl="0"/>
             <a:r>
-              <a:rPr lang="en-US" smtClean="0"/>
+              <a:rPr lang="en-US"/>
               <a:t>Click to edit Master text styles</a:t>
             </a:r>
           </a:p>
           <a:p>
             <a:pPr lvl="1"/>
             <a:r>
-              <a:rPr lang="en-US" smtClean="0"/>
+              <a:rPr lang="en-US"/>
               <a:t>Second level</a:t>
             </a:r>
           </a:p>
           <a:p>
             <a:pPr lvl="2"/>
             <a:r>
-              <a:rPr lang="en-US" smtClean="0"/>
+              <a:rPr lang="en-US"/>
               <a:t>Third level</a:t>
             </a:r>
           </a:p>
           <a:p>
             <a:pPr lvl="3"/>
             <a:r>
-              <a:rPr lang="en-US" smtClean="0"/>
+              <a:rPr lang="en-US"/>
               <a:t>Fourth level</a:t>
             </a:r>
           </a:p>
           <a:p>
             <a:pPr lvl="4"/>
             <a:r>
-              <a:rPr lang="en-US" smtClean="0"/>
+              <a:rPr lang="en-US"/>
               <a:t>Fifth level</a:t>
             </a:r>
-            <a:endParaRPr lang="en-US"/>
           </a:p>
         </p:txBody>
       </p:sp>
@@ -2238,7 +2236,7 @@
           <a:p>
             <a:pPr lvl="0"/>
             <a:r>
-              <a:rPr lang="en-US" smtClean="0"/>
+              <a:rPr lang="en-US"/>
               <a:t>Click to edit Master text styles</a:t>
             </a:r>
           </a:p>
@@ -2261,7 +2259,7 @@
           <a:p>
             <a:fld id="{5BCAD085-E8A6-8845-BD4E-CB4CCA059FC4}" type="datetimeFigureOut">
               <a:rPr lang="en-US" smtClean="0"/>
-              <a:t>1/27/13</a:t>
+              <a:t>9/26/26</a:t>
             </a:fld>
             <a:endParaRPr lang="en-US"/>
           </a:p>
@@ -2364,10 +2362,9 @@
           </a:lstStyle>
           <a:p>
             <a:r>
-              <a:rPr lang="en-US" smtClean="0"/>
+              <a:rPr lang="en-US"/>
               <a:t>Click to edit Master title style</a:t>
             </a:r>
-            <a:endParaRPr lang="en-US"/>
           </a:p>
         </p:txBody>
       </p:sp>
@@ -2491,7 +2488,7 @@
           <a:p>
             <a:pPr lvl="0"/>
             <a:r>
-              <a:rPr lang="en-US" smtClean="0"/>
+              <a:rPr lang="en-US"/>
               <a:t>Click to edit Master text styles</a:t>
             </a:r>
           </a:p>
@@ -2514,7 +2511,7 @@
           <a:p>
             <a:fld id="{5BCAD085-E8A6-8845-BD4E-CB4CCA059FC4}" type="datetimeFigureOut">
               <a:rPr lang="en-US" smtClean="0"/>
-              <a:t>1/27/13</a:t>
+              <a:t>9/26/26</a:t>
             </a:fld>
             <a:endParaRPr lang="en-US"/>
           </a:p>
@@ -2623,10 +2620,9 @@
           <a:lstStyle/>
           <a:p>
             <a:r>
-              <a:rPr lang="en-US" smtClean="0"/>
+              <a:rPr lang="en-US"/>
               <a:t>Click to edit Master title style</a:t>
             </a:r>
-            <a:endParaRPr lang="en-US"/>
           </a:p>
         </p:txBody>
       </p:sp>
@@ -2657,38 +2653,37 @@
           <a:p>
             <a:pPr lvl="0"/>
             <a:r>
-              <a:rPr lang="en-US" smtClean="0"/>
+              <a:rPr lang="en-US"/>
               <a:t>Click to edit Master text styles</a:t>
             </a:r>
           </a:p>
           <a:p>
             <a:pPr lvl="1"/>
             <a:r>
-              <a:rPr lang="en-US" smtClean="0"/>
+              <a:rPr lang="en-US"/>
               <a:t>Second level</a:t>
             </a:r>
           </a:p>
           <a:p>
             <a:pPr lvl="2"/>
             <a:r>
-              <a:rPr lang="en-US" smtClean="0"/>
+              <a:rPr lang="en-US"/>
               <a:t>Third level</a:t>
             </a:r>
           </a:p>
           <a:p>
             <a:pPr lvl="3"/>
             <a:r>
-              <a:rPr lang="en-US" smtClean="0"/>
+              <a:rPr lang="en-US"/>
               <a:t>Fourth level</a:t>
             </a:r>
           </a:p>
           <a:p>
             <a:pPr lvl="4"/>
             <a:r>
-              <a:rPr lang="en-US" smtClean="0"/>
+              <a:rPr lang="en-US"/>
               <a:t>Fifth level</a:t>
             </a:r>
-            <a:endParaRPr lang="en-US"/>
           </a:p>
         </p:txBody>
       </p:sp>
@@ -2727,7 +2722,7 @@
           <a:p>
             <a:fld id="{5BCAD085-E8A6-8845-BD4E-CB4CCA059FC4}" type="datetimeFigureOut">
               <a:rPr lang="en-US" smtClean="0"/>
-              <a:t>1/27/13</a:t>
+              <a:t>9/26/26</a:t>
             </a:fld>
             <a:endParaRPr lang="en-US"/>
           </a:p>
@@ -3086,7 +3081,7 @@
 </file>
 
 <file path=ppt/slides/slide1.xml><?xml version="1.0" encoding="utf-8"?>
-<p:sld xmlns:a="http://schemas.openxmlformats.org/drawingml/2006/main" xmlns:p="http://schemas.openxmlformats.org/presentationml/2006/main" xmlns:r="http://schemas.openxmlformats.org/officeDocument/2006/relationships">
+<p:sld xmlns:a="http://schemas.openxmlformats.org/drawingml/2006/main" xmlns:r="http://schemas.openxmlformats.org/officeDocument/2006/relationships" xmlns:p="http://schemas.openxmlformats.org/presentationml/2006/main">
   <p:cSld>
     <p:bg>
       <p:bgPr>
@@ -3102,7 +3097,14 @@
         <p:cNvGrpSpPr/>
         <p:nvPr/>
       </p:nvGrpSpPr>
-      <p:grpSpPr/>
+      <p:grpSpPr>
+        <a:xfrm>
+          <a:off x="0" y="0"/>
+          <a:ext cx="0" cy="0"/>
+          <a:chOff x="0" y="0"/>
+          <a:chExt cx="0" cy="0"/>
+        </a:xfrm>
+      </p:grpSpPr>
       <p:sp>
         <p:nvSpPr>
           <p:cNvPr id="2" name="Rectangle 1"/>
@@ -3143,6 +3145,7 @@
           <a:lstStyle/>
           <a:p>
             <a:pPr algn="ctr"/>
+            <a:endParaRPr/>
           </a:p>
         </p:txBody>
       </p:sp>
@@ -3256,7 +3259,7 @@
           </a:fontRef>
         </p:style>
         <p:txBody>
-          <a:bodyPr rtlCol="0" anchor="ctr" lIns="201168" rIns="109728" tIns="118872" bIns="73152"/>
+          <a:bodyPr lIns="201168" tIns="118872" rIns="109728" bIns="73152" rtlCol="0" anchor="ctr"/>
           <a:lstStyle/>
           <a:p>
             <a:pPr algn="ctr">
@@ -3361,6 +3364,7 @@
           <a:lstStyle/>
           <a:p>
             <a:pPr algn="ctr"/>
+            <a:endParaRPr/>
           </a:p>
         </p:txBody>
       </p:sp>
@@ -3402,7 +3406,7 @@
           </a:fontRef>
         </p:style>
         <p:txBody>
-          <a:bodyPr rtlCol="0" anchor="ctr" lIns="201168" rIns="109728" tIns="118872" bIns="73152"/>
+          <a:bodyPr lIns="201168" tIns="118872" rIns="109728" bIns="73152" rtlCol="0" anchor="ctr"/>
           <a:lstStyle/>
           <a:p>
             <a:pPr algn="ctr">
@@ -3507,6 +3511,7 @@
           <a:lstStyle/>
           <a:p>
             <a:pPr algn="ctr"/>
+            <a:endParaRPr/>
           </a:p>
         </p:txBody>
       </p:sp>
@@ -3548,7 +3553,7 @@
           </a:fontRef>
         </p:style>
         <p:txBody>
-          <a:bodyPr rtlCol="0" anchor="ctr" lIns="201168" rIns="109728" tIns="118872" bIns="73152"/>
+          <a:bodyPr lIns="201168" tIns="118872" rIns="109728" bIns="73152" rtlCol="0" anchor="ctr"/>
           <a:lstStyle/>
           <a:p>
             <a:pPr algn="ctr">
@@ -3653,6 +3658,7 @@
           <a:lstStyle/>
           <a:p>
             <a:pPr algn="ctr"/>
+            <a:endParaRPr/>
           </a:p>
         </p:txBody>
       </p:sp>
@@ -3836,7 +3842,7 @@
           </a:fontRef>
         </p:style>
         <p:txBody>
-          <a:bodyPr rtlCol="0" anchor="ctr" lIns="201168" rIns="109728" tIns="118872" bIns="73152"/>
+          <a:bodyPr lIns="201168" tIns="118872" rIns="109728" bIns="73152" rtlCol="0" anchor="ctr"/>
           <a:lstStyle/>
           <a:p>
             <a:pPr algn="ctr">
@@ -3909,6 +3915,7 @@
           <a:lstStyle/>
           <a:p>
             <a:pPr algn="ctr"/>
+            <a:endParaRPr/>
           </a:p>
         </p:txBody>
       </p:sp>
@@ -3952,6 +3959,7 @@
           <a:lstStyle/>
           <a:p>
             <a:pPr algn="ctr"/>
+            <a:endParaRPr/>
           </a:p>
         </p:txBody>
       </p:sp>
@@ -4000,7 +4008,7 @@
 </file>
 
 <file path=ppt/slides/slide2.xml><?xml version="1.0" encoding="utf-8"?>
-<p:sld xmlns:a="http://schemas.openxmlformats.org/drawingml/2006/main" xmlns:p="http://schemas.openxmlformats.org/presentationml/2006/main" xmlns:r="http://schemas.openxmlformats.org/officeDocument/2006/relationships">
+<p:sld xmlns:a="http://schemas.openxmlformats.org/drawingml/2006/main" xmlns:r="http://schemas.openxmlformats.org/officeDocument/2006/relationships" xmlns:p="http://schemas.openxmlformats.org/presentationml/2006/main">
   <p:cSld>
     <p:bg>
       <p:bgPr>
@@ -4016,7 +4024,14 @@
         <p:cNvGrpSpPr/>
         <p:nvPr/>
       </p:nvGrpSpPr>
-      <p:grpSpPr/>
+      <p:grpSpPr>
+        <a:xfrm>
+          <a:off x="0" y="0"/>
+          <a:ext cx="0" cy="0"/>
+          <a:chOff x="0" y="0"/>
+          <a:chExt cx="0" cy="0"/>
+        </a:xfrm>
+      </p:grpSpPr>
       <p:sp>
         <p:nvSpPr>
           <p:cNvPr id="2" name="TextBox 1"/>
@@ -4127,7 +4142,7 @@
           </a:fontRef>
         </p:style>
         <p:txBody>
-          <a:bodyPr rtlCol="0" anchor="ctr" lIns="201168" rIns="109728" tIns="118872" bIns="73152"/>
+          <a:bodyPr lIns="201168" tIns="118872" rIns="109728" bIns="73152" rtlCol="0" anchor="ctr"/>
           <a:lstStyle/>
           <a:p>
             <a:pPr algn="ctr">
@@ -4200,6 +4215,7 @@
           <a:lstStyle/>
           <a:p>
             <a:pPr algn="ctr"/>
+            <a:endParaRPr/>
           </a:p>
         </p:txBody>
       </p:sp>
@@ -4241,7 +4257,7 @@
           </a:fontRef>
         </p:style>
         <p:txBody>
-          <a:bodyPr rtlCol="0" anchor="ctr" lIns="201168" rIns="109728" tIns="118872" bIns="73152"/>
+          <a:bodyPr lIns="201168" tIns="118872" rIns="109728" bIns="73152" rtlCol="0" anchor="ctr"/>
           <a:lstStyle/>
           <a:p>
             <a:pPr algn="ctr">
@@ -4314,6 +4330,7 @@
           <a:lstStyle/>
           <a:p>
             <a:pPr algn="ctr"/>
+            <a:endParaRPr/>
           </a:p>
         </p:txBody>
       </p:sp>
@@ -4355,7 +4372,7 @@
           </a:fontRef>
         </p:style>
         <p:txBody>
-          <a:bodyPr rtlCol="0" anchor="ctr" lIns="201168" rIns="109728" tIns="118872" bIns="73152"/>
+          <a:bodyPr lIns="201168" tIns="118872" rIns="109728" bIns="73152" rtlCol="0" anchor="ctr"/>
           <a:lstStyle/>
           <a:p>
             <a:pPr algn="ctr">
@@ -4428,6 +4445,7 @@
           <a:lstStyle/>
           <a:p>
             <a:pPr algn="ctr"/>
+            <a:endParaRPr/>
           </a:p>
         </p:txBody>
       </p:sp>
@@ -4469,7 +4487,7 @@
           </a:fontRef>
         </p:style>
         <p:txBody>
-          <a:bodyPr rtlCol="0" anchor="ctr" lIns="201168" rIns="109728" tIns="118872" bIns="73152"/>
+          <a:bodyPr lIns="201168" tIns="118872" rIns="109728" bIns="73152" rtlCol="0" anchor="ctr"/>
           <a:lstStyle/>
           <a:p>
             <a:pPr algn="ctr">
@@ -4542,6 +4560,7 @@
           <a:lstStyle/>
           <a:p>
             <a:pPr algn="ctr"/>
+            <a:endParaRPr/>
           </a:p>
         </p:txBody>
       </p:sp>
@@ -4583,7 +4602,7 @@
           </a:fontRef>
         </p:style>
         <p:txBody>
-          <a:bodyPr rtlCol="0" anchor="ctr" lIns="201168" rIns="109728" tIns="118872" bIns="73152"/>
+          <a:bodyPr lIns="201168" tIns="118872" rIns="109728" bIns="73152" rtlCol="0" anchor="ctr"/>
           <a:lstStyle/>
           <a:p>
             <a:pPr algn="ctr">
@@ -4656,6 +4675,7 @@
           <a:lstStyle/>
           <a:p>
             <a:pPr algn="ctr"/>
+            <a:endParaRPr/>
           </a:p>
         </p:txBody>
       </p:sp>
@@ -4837,7 +4857,7 @@
           </a:fontRef>
         </p:style>
         <p:txBody>
-          <a:bodyPr rtlCol="0" anchor="ctr" lIns="201168" rIns="109728" tIns="118872" bIns="73152"/>
+          <a:bodyPr lIns="201168" tIns="118872" rIns="109728" bIns="73152" rtlCol="0" anchor="ctr"/>
           <a:lstStyle/>
           <a:p>
             <a:pPr algn="ctr">
@@ -4926,6 +4946,7 @@
           <a:lstStyle/>
           <a:p>
             <a:pPr algn="ctr"/>
+            <a:endParaRPr/>
           </a:p>
         </p:txBody>
       </p:sp>
@@ -4967,7 +4988,7 @@
           </a:fontRef>
         </p:style>
         <p:txBody>
-          <a:bodyPr rtlCol="0" anchor="ctr" lIns="201168" rIns="109728" tIns="118872" bIns="73152"/>
+          <a:bodyPr lIns="201168" tIns="118872" rIns="109728" bIns="73152" rtlCol="0" anchor="ctr"/>
           <a:lstStyle/>
           <a:p>
             <a:pPr algn="ctr">
@@ -5056,6 +5077,7 @@
           <a:lstStyle/>
           <a:p>
             <a:pPr algn="ctr"/>
+            <a:endParaRPr/>
           </a:p>
         </p:txBody>
       </p:sp>
@@ -5168,7 +5190,7 @@
           </a:fontRef>
         </p:style>
         <p:txBody>
-          <a:bodyPr rtlCol="0" anchor="ctr" lIns="201168" rIns="109728" tIns="118872" bIns="73152"/>
+          <a:bodyPr lIns="201168" tIns="118872" rIns="109728" bIns="73152" rtlCol="0" anchor="ctr"/>
           <a:lstStyle/>
           <a:p>
             <a:pPr algn="ctr">
@@ -5241,6 +5263,7 @@
           <a:lstStyle/>
           <a:p>
             <a:pPr algn="ctr"/>
+            <a:endParaRPr/>
           </a:p>
         </p:txBody>
       </p:sp>
@@ -5284,6 +5307,7 @@
           <a:lstStyle/>
           <a:p>
             <a:pPr algn="ctr"/>
+            <a:endParaRPr/>
           </a:p>
         </p:txBody>
       </p:sp>
@@ -5332,7 +5356,7 @@
 </file>
 
 <file path=ppt/slides/slide3.xml><?xml version="1.0" encoding="utf-8"?>
-<p:sld xmlns:a="http://schemas.openxmlformats.org/drawingml/2006/main" xmlns:p="http://schemas.openxmlformats.org/presentationml/2006/main" xmlns:r="http://schemas.openxmlformats.org/officeDocument/2006/relationships">
+<p:sld xmlns:a="http://schemas.openxmlformats.org/drawingml/2006/main" xmlns:r="http://schemas.openxmlformats.org/officeDocument/2006/relationships" xmlns:p="http://schemas.openxmlformats.org/presentationml/2006/main">
   <p:cSld>
     <p:bg>
       <p:bgPr>
@@ -5348,7 +5372,14 @@
         <p:cNvGrpSpPr/>
         <p:nvPr/>
       </p:nvGrpSpPr>
-      <p:grpSpPr/>
+      <p:grpSpPr>
+        <a:xfrm>
+          <a:off x="0" y="0"/>
+          <a:ext cx="0" cy="0"/>
+          <a:chOff x="0" y="0"/>
+          <a:chExt cx="0" cy="0"/>
+        </a:xfrm>
+      </p:grpSpPr>
       <p:sp>
         <p:nvSpPr>
           <p:cNvPr id="2" name="TextBox 1"/>
@@ -5459,7 +5490,7 @@
           </a:fontRef>
         </p:style>
         <p:txBody>
-          <a:bodyPr rtlCol="0" anchor="ctr" lIns="201168" rIns="109728" tIns="118872" bIns="73152"/>
+          <a:bodyPr lIns="201168" tIns="118872" rIns="109728" bIns="73152" rtlCol="0" anchor="ctr"/>
           <a:lstStyle/>
           <a:p>
             <a:pPr algn="ctr">
@@ -5612,6 +5643,7 @@
           <a:lstStyle/>
           <a:p>
             <a:pPr algn="ctr"/>
+            <a:endParaRPr/>
           </a:p>
         </p:txBody>
       </p:sp>
@@ -5653,7 +5685,7 @@
           </a:fontRef>
         </p:style>
         <p:txBody>
-          <a:bodyPr rtlCol="0" anchor="ctr" lIns="201168" rIns="109728" tIns="118872" bIns="73152"/>
+          <a:bodyPr lIns="201168" tIns="118872" rIns="109728" bIns="73152" rtlCol="0" anchor="ctr"/>
           <a:lstStyle/>
           <a:p>
             <a:pPr algn="ctr">
@@ -5790,6 +5822,7 @@
           <a:lstStyle/>
           <a:p>
             <a:pPr algn="ctr"/>
+            <a:endParaRPr/>
           </a:p>
         </p:txBody>
       </p:sp>
@@ -5831,7 +5864,7 @@
           </a:fontRef>
         </p:style>
         <p:txBody>
-          <a:bodyPr rtlCol="0" anchor="ctr" lIns="201168" rIns="109728" tIns="118872" bIns="73152"/>
+          <a:bodyPr lIns="201168" tIns="118872" rIns="109728" bIns="73152" rtlCol="0" anchor="ctr"/>
           <a:lstStyle/>
           <a:p>
             <a:pPr algn="ctr">
@@ -5936,6 +5969,7 @@
           <a:lstStyle/>
           <a:p>
             <a:pPr algn="ctr"/>
+            <a:endParaRPr/>
           </a:p>
         </p:txBody>
       </p:sp>
@@ -5977,7 +6011,7 @@
           </a:fontRef>
         </p:style>
         <p:txBody>
-          <a:bodyPr rtlCol="0" anchor="ctr" lIns="201168" rIns="109728" tIns="118872" bIns="73152"/>
+          <a:bodyPr lIns="201168" tIns="118872" rIns="109728" bIns="73152" rtlCol="0" anchor="ctr"/>
           <a:lstStyle/>
           <a:p>
             <a:pPr algn="ctr">
@@ -6114,6 +6148,7 @@
           <a:lstStyle/>
           <a:p>
             <a:pPr algn="ctr"/>
+            <a:endParaRPr/>
           </a:p>
         </p:txBody>
       </p:sp>
@@ -6263,6 +6298,7 @@
           <a:lstStyle/>
           <a:p>
             <a:pPr algn="ctr"/>
+            <a:endParaRPr/>
           </a:p>
         </p:txBody>
       </p:sp>
@@ -6311,7 +6347,7 @@
 </file>
 
 <file path=ppt/slides/slide4.xml><?xml version="1.0" encoding="utf-8"?>
-<p:sld xmlns:a="http://schemas.openxmlformats.org/drawingml/2006/main" xmlns:p="http://schemas.openxmlformats.org/presentationml/2006/main" xmlns:r="http://schemas.openxmlformats.org/officeDocument/2006/relationships">
+<p:sld xmlns:a="http://schemas.openxmlformats.org/drawingml/2006/main" xmlns:r="http://schemas.openxmlformats.org/officeDocument/2006/relationships" xmlns:p="http://schemas.openxmlformats.org/presentationml/2006/main">
   <p:cSld>
     <p:bg>
       <p:bgPr>
@@ -6327,7 +6363,14 @@
         <p:cNvGrpSpPr/>
         <p:nvPr/>
       </p:nvGrpSpPr>
-      <p:grpSpPr/>
+      <p:grpSpPr>
+        <a:xfrm>
+          <a:off x="0" y="0"/>
+          <a:ext cx="0" cy="0"/>
+          <a:chOff x="0" y="0"/>
+          <a:chExt cx="0" cy="0"/>
+        </a:xfrm>
+      </p:grpSpPr>
       <p:sp>
         <p:nvSpPr>
           <p:cNvPr id="2" name="TextBox 1"/>
@@ -6438,7 +6481,7 @@
           </a:fontRef>
         </p:style>
         <p:txBody>
-          <a:bodyPr rtlCol="0" anchor="ctr" lIns="201168" rIns="109728" tIns="118872" bIns="73152"/>
+          <a:bodyPr lIns="201168" tIns="118872" rIns="109728" bIns="73152" rtlCol="0" anchor="ctr"/>
           <a:lstStyle/>
           <a:p>
             <a:pPr algn="ctr">
@@ -6511,6 +6554,7 @@
           <a:lstStyle/>
           <a:p>
             <a:pPr algn="ctr"/>
+            <a:endParaRPr/>
           </a:p>
         </p:txBody>
       </p:sp>
@@ -6552,7 +6596,7 @@
           </a:fontRef>
         </p:style>
         <p:txBody>
-          <a:bodyPr rtlCol="0" anchor="ctr" lIns="201168" rIns="109728" tIns="118872" bIns="73152"/>
+          <a:bodyPr lIns="201168" tIns="118872" rIns="109728" bIns="73152" rtlCol="0" anchor="ctr"/>
           <a:lstStyle/>
           <a:p>
             <a:pPr algn="ctr">
@@ -6625,6 +6669,7 @@
           <a:lstStyle/>
           <a:p>
             <a:pPr algn="ctr"/>
+            <a:endParaRPr/>
           </a:p>
         </p:txBody>
       </p:sp>
@@ -6666,7 +6711,7 @@
           </a:fontRef>
         </p:style>
         <p:txBody>
-          <a:bodyPr rtlCol="0" anchor="ctr" lIns="201168" rIns="109728" tIns="118872" bIns="73152"/>
+          <a:bodyPr lIns="201168" tIns="118872" rIns="109728" bIns="73152" rtlCol="0" anchor="ctr"/>
           <a:lstStyle/>
           <a:p>
             <a:pPr algn="ctr">
@@ -6739,6 +6784,7 @@
           <a:lstStyle/>
           <a:p>
             <a:pPr algn="ctr"/>
+            <a:endParaRPr/>
           </a:p>
         </p:txBody>
       </p:sp>
@@ -6780,7 +6826,7 @@
           </a:fontRef>
         </p:style>
         <p:txBody>
-          <a:bodyPr rtlCol="0" anchor="ctr" lIns="201168" rIns="109728" tIns="118872" bIns="73152"/>
+          <a:bodyPr lIns="201168" tIns="118872" rIns="109728" bIns="73152" rtlCol="0" anchor="ctr"/>
           <a:lstStyle/>
           <a:p>
             <a:pPr algn="ctr">
@@ -6853,6 +6899,7 @@
           <a:lstStyle/>
           <a:p>
             <a:pPr algn="ctr"/>
+            <a:endParaRPr/>
           </a:p>
         </p:txBody>
       </p:sp>
@@ -6894,7 +6941,7 @@
           </a:fontRef>
         </p:style>
         <p:txBody>
-          <a:bodyPr rtlCol="0" anchor="ctr" lIns="201168" rIns="109728" tIns="118872" bIns="73152"/>
+          <a:bodyPr lIns="201168" tIns="118872" rIns="109728" bIns="73152" rtlCol="0" anchor="ctr"/>
           <a:lstStyle/>
           <a:p>
             <a:pPr algn="ctr">
@@ -6967,6 +7014,7 @@
           <a:lstStyle/>
           <a:p>
             <a:pPr algn="ctr"/>
+            <a:endParaRPr/>
           </a:p>
         </p:txBody>
       </p:sp>
@@ -7008,7 +7056,7 @@
           </a:fontRef>
         </p:style>
         <p:txBody>
-          <a:bodyPr rtlCol="0" anchor="ctr" lIns="201168" rIns="109728" tIns="118872" bIns="73152"/>
+          <a:bodyPr lIns="201168" tIns="118872" rIns="109728" bIns="73152" rtlCol="0" anchor="ctr"/>
           <a:lstStyle/>
           <a:p>
             <a:pPr algn="ctr">
@@ -7081,6 +7129,7 @@
           <a:lstStyle/>
           <a:p>
             <a:pPr algn="ctr"/>
+            <a:endParaRPr/>
           </a:p>
         </p:txBody>
       </p:sp>
@@ -7297,7 +7346,7 @@
           </a:fontRef>
         </p:style>
         <p:txBody>
-          <a:bodyPr rtlCol="0" anchor="ctr" lIns="201168" rIns="109728" tIns="118872" bIns="73152"/>
+          <a:bodyPr lIns="201168" tIns="118872" rIns="109728" bIns="73152" rtlCol="0" anchor="ctr"/>
           <a:lstStyle/>
           <a:p>
             <a:pPr algn="ctr">
@@ -7370,6 +7419,7 @@
           <a:lstStyle/>
           <a:p>
             <a:pPr algn="ctr"/>
+            <a:endParaRPr/>
           </a:p>
         </p:txBody>
       </p:sp>
@@ -7449,6 +7499,7 @@
           <a:lstStyle/>
           <a:p>
             <a:pPr algn="ctr"/>
+            <a:endParaRPr/>
           </a:p>
         </p:txBody>
       </p:sp>
@@ -7497,7 +7548,7 @@
 </file>
 
 <file path=ppt/slides/slide5.xml><?xml version="1.0" encoding="utf-8"?>
-<p:sld xmlns:a="http://schemas.openxmlformats.org/drawingml/2006/main" xmlns:p="http://schemas.openxmlformats.org/presentationml/2006/main" xmlns:r="http://schemas.openxmlformats.org/officeDocument/2006/relationships">
+<p:sld xmlns:a="http://schemas.openxmlformats.org/drawingml/2006/main" xmlns:r="http://schemas.openxmlformats.org/officeDocument/2006/relationships" xmlns:p="http://schemas.openxmlformats.org/presentationml/2006/main">
   <p:cSld>
     <p:bg>
       <p:bgPr>
@@ -7513,7 +7564,14 @@
         <p:cNvGrpSpPr/>
         <p:nvPr/>
       </p:nvGrpSpPr>
-      <p:grpSpPr/>
+      <p:grpSpPr>
+        <a:xfrm>
+          <a:off x="0" y="0"/>
+          <a:ext cx="0" cy="0"/>
+          <a:chOff x="0" y="0"/>
+          <a:chExt cx="0" cy="0"/>
+        </a:xfrm>
+      </p:grpSpPr>
       <p:sp>
         <p:nvSpPr>
           <p:cNvPr id="2" name="TextBox 1"/>
@@ -7624,7 +7682,7 @@
           </a:fontRef>
         </p:style>
         <p:txBody>
-          <a:bodyPr rtlCol="0" anchor="ctr" lIns="201168" rIns="109728" tIns="118872" bIns="73152"/>
+          <a:bodyPr lIns="201168" tIns="118872" rIns="109728" bIns="73152" rtlCol="0" anchor="ctr"/>
           <a:lstStyle/>
           <a:p>
             <a:pPr algn="ctr">
@@ -7697,6 +7755,7 @@
           <a:lstStyle/>
           <a:p>
             <a:pPr algn="ctr"/>
+            <a:endParaRPr/>
           </a:p>
         </p:txBody>
       </p:sp>
@@ -7738,7 +7797,7 @@
           </a:fontRef>
         </p:style>
         <p:txBody>
-          <a:bodyPr rtlCol="0" anchor="ctr" lIns="201168" rIns="109728" tIns="118872" bIns="73152"/>
+          <a:bodyPr lIns="201168" tIns="118872" rIns="109728" bIns="73152" rtlCol="0" anchor="ctr"/>
           <a:lstStyle/>
           <a:p>
             <a:pPr algn="ctr">
@@ -7811,6 +7870,7 @@
           <a:lstStyle/>
           <a:p>
             <a:pPr algn="ctr"/>
+            <a:endParaRPr/>
           </a:p>
         </p:txBody>
       </p:sp>
@@ -7852,7 +7912,7 @@
           </a:fontRef>
         </p:style>
         <p:txBody>
-          <a:bodyPr rtlCol="0" anchor="ctr" lIns="201168" rIns="109728" tIns="118872" bIns="73152"/>
+          <a:bodyPr lIns="201168" tIns="118872" rIns="109728" bIns="73152" rtlCol="0" anchor="ctr"/>
           <a:lstStyle/>
           <a:p>
             <a:pPr algn="ctr">
@@ -7925,6 +7985,7 @@
           <a:lstStyle/>
           <a:p>
             <a:pPr algn="ctr"/>
+            <a:endParaRPr/>
           </a:p>
         </p:txBody>
       </p:sp>
@@ -7966,7 +8027,7 @@
           </a:fontRef>
         </p:style>
         <p:txBody>
-          <a:bodyPr rtlCol="0" anchor="ctr" lIns="201168" rIns="109728" tIns="118872" bIns="73152"/>
+          <a:bodyPr lIns="201168" tIns="118872" rIns="109728" bIns="73152" rtlCol="0" anchor="ctr"/>
           <a:lstStyle/>
           <a:p>
             <a:pPr algn="ctr">
@@ -8039,6 +8100,7 @@
           <a:lstStyle/>
           <a:p>
             <a:pPr algn="ctr"/>
+            <a:endParaRPr/>
           </a:p>
         </p:txBody>
       </p:sp>
@@ -8080,7 +8142,7 @@
           </a:fontRef>
         </p:style>
         <p:txBody>
-          <a:bodyPr rtlCol="0" anchor="ctr" lIns="201168" rIns="109728" tIns="118872" bIns="73152"/>
+          <a:bodyPr lIns="201168" tIns="118872" rIns="109728" bIns="73152" rtlCol="0" anchor="ctr"/>
           <a:lstStyle/>
           <a:p>
             <a:pPr algn="ctr">
@@ -8153,6 +8215,7 @@
           <a:lstStyle/>
           <a:p>
             <a:pPr algn="ctr"/>
+            <a:endParaRPr/>
           </a:p>
         </p:txBody>
       </p:sp>
@@ -8194,7 +8257,7 @@
           </a:fontRef>
         </p:style>
         <p:txBody>
-          <a:bodyPr rtlCol="0" anchor="ctr" lIns="201168" rIns="109728" tIns="118872" bIns="73152"/>
+          <a:bodyPr lIns="201168" tIns="118872" rIns="109728" bIns="73152" rtlCol="0" anchor="ctr"/>
           <a:lstStyle/>
           <a:p>
             <a:pPr algn="ctr">
@@ -8267,6 +8330,7 @@
           <a:lstStyle/>
           <a:p>
             <a:pPr algn="ctr"/>
+            <a:endParaRPr/>
           </a:p>
         </p:txBody>
       </p:sp>
@@ -8308,7 +8372,7 @@
           </a:fontRef>
         </p:style>
         <p:txBody>
-          <a:bodyPr rtlCol="0" anchor="ctr" lIns="201168" rIns="109728" tIns="118872" bIns="73152"/>
+          <a:bodyPr lIns="201168" tIns="118872" rIns="109728" bIns="73152" rtlCol="0" anchor="ctr"/>
           <a:lstStyle/>
           <a:p>
             <a:pPr algn="ctr">
@@ -8381,6 +8445,7 @@
           <a:lstStyle/>
           <a:p>
             <a:pPr algn="ctr"/>
+            <a:endParaRPr/>
           </a:p>
         </p:txBody>
       </p:sp>
@@ -8422,7 +8487,7 @@
           </a:fontRef>
         </p:style>
         <p:txBody>
-          <a:bodyPr rtlCol="0" anchor="ctr" lIns="201168" rIns="109728" tIns="118872" bIns="73152"/>
+          <a:bodyPr lIns="201168" tIns="118872" rIns="109728" bIns="73152" rtlCol="0" anchor="ctr"/>
           <a:lstStyle/>
           <a:p>
             <a:pPr algn="ctr">
@@ -8495,6 +8560,7 @@
           <a:lstStyle/>
           <a:p>
             <a:pPr algn="ctr"/>
+            <a:endParaRPr/>
           </a:p>
         </p:txBody>
       </p:sp>
@@ -8816,7 +8882,7 @@
           </a:fontRef>
         </p:style>
         <p:txBody>
-          <a:bodyPr rtlCol="0" anchor="ctr" lIns="201168" rIns="109728" tIns="118872" bIns="73152"/>
+          <a:bodyPr lIns="201168" tIns="118872" rIns="109728" bIns="73152" rtlCol="0" anchor="ctr"/>
           <a:lstStyle/>
           <a:p>
             <a:pPr algn="ctr">
@@ -8889,6 +8955,7 @@
           <a:lstStyle/>
           <a:p>
             <a:pPr algn="ctr"/>
+            <a:endParaRPr/>
           </a:p>
         </p:txBody>
       </p:sp>
@@ -8932,6 +8999,7 @@
           <a:lstStyle/>
           <a:p>
             <a:pPr algn="ctr"/>
+            <a:endParaRPr/>
           </a:p>
         </p:txBody>
       </p:sp>
@@ -8980,7 +9048,7 @@
 </file>
 
 <file path=ppt/slides/slide6.xml><?xml version="1.0" encoding="utf-8"?>
-<p:sld xmlns:a="http://schemas.openxmlformats.org/drawingml/2006/main" xmlns:p="http://schemas.openxmlformats.org/presentationml/2006/main" xmlns:r="http://schemas.openxmlformats.org/officeDocument/2006/relationships">
+<p:sld xmlns:a="http://schemas.openxmlformats.org/drawingml/2006/main" xmlns:r="http://schemas.openxmlformats.org/officeDocument/2006/relationships" xmlns:p="http://schemas.openxmlformats.org/presentationml/2006/main">
   <p:cSld>
     <p:bg>
       <p:bgPr>
@@ -8996,7 +9064,14 @@
         <p:cNvGrpSpPr/>
         <p:nvPr/>
       </p:nvGrpSpPr>
-      <p:grpSpPr/>
+      <p:grpSpPr>
+        <a:xfrm>
+          <a:off x="0" y="0"/>
+          <a:ext cx="0" cy="0"/>
+          <a:chOff x="0" y="0"/>
+          <a:chExt cx="0" cy="0"/>
+        </a:xfrm>
+      </p:grpSpPr>
       <p:sp>
         <p:nvSpPr>
           <p:cNvPr id="2" name="TextBox 1"/>
@@ -9107,7 +9182,7 @@
           </a:fontRef>
         </p:style>
         <p:txBody>
-          <a:bodyPr rtlCol="0" anchor="ctr" lIns="201168" rIns="109728" tIns="118872" bIns="73152"/>
+          <a:bodyPr lIns="201168" tIns="118872" rIns="109728" bIns="73152" rtlCol="0" anchor="ctr"/>
           <a:lstStyle/>
           <a:p>
             <a:pPr algn="ctr">
@@ -9276,6 +9351,7 @@
           <a:lstStyle/>
           <a:p>
             <a:pPr algn="ctr"/>
+            <a:endParaRPr/>
           </a:p>
         </p:txBody>
       </p:sp>
@@ -9317,7 +9393,7 @@
           </a:fontRef>
         </p:style>
         <p:txBody>
-          <a:bodyPr rtlCol="0" anchor="ctr" lIns="201168" rIns="109728" tIns="118872" bIns="73152"/>
+          <a:bodyPr lIns="201168" tIns="118872" rIns="109728" bIns="73152" rtlCol="0" anchor="ctr"/>
           <a:lstStyle/>
           <a:p>
             <a:pPr algn="ctr">
@@ -9390,6 +9466,7 @@
           <a:lstStyle/>
           <a:p>
             <a:pPr algn="ctr"/>
+            <a:endParaRPr/>
           </a:p>
         </p:txBody>
       </p:sp>
@@ -9466,7 +9543,7 @@
           </a:fontRef>
         </p:style>
         <p:txBody>
-          <a:bodyPr rtlCol="0" anchor="ctr" lIns="201168" rIns="109728" tIns="118872" bIns="73152"/>
+          <a:bodyPr lIns="201168" tIns="118872" rIns="109728" bIns="73152" rtlCol="0" anchor="ctr"/>
           <a:lstStyle/>
           <a:p>
             <a:pPr algn="ctr">
@@ -9539,6 +9616,7 @@
           <a:lstStyle/>
           <a:p>
             <a:pPr algn="ctr"/>
+            <a:endParaRPr/>
           </a:p>
         </p:txBody>
       </p:sp>
@@ -9580,7 +9658,7 @@
           </a:fontRef>
         </p:style>
         <p:txBody>
-          <a:bodyPr rtlCol="0" anchor="ctr" lIns="201168" rIns="109728" tIns="118872" bIns="73152"/>
+          <a:bodyPr lIns="201168" tIns="118872" rIns="109728" bIns="73152" rtlCol="0" anchor="ctr"/>
           <a:lstStyle/>
           <a:p>
             <a:pPr algn="ctr">
@@ -9653,6 +9731,7 @@
           <a:lstStyle/>
           <a:p>
             <a:pPr algn="ctr"/>
+            <a:endParaRPr/>
           </a:p>
         </p:txBody>
       </p:sp>
@@ -9729,7 +9808,7 @@
           </a:fontRef>
         </p:style>
         <p:txBody>
-          <a:bodyPr rtlCol="0" anchor="ctr" lIns="201168" rIns="109728" tIns="118872" bIns="73152"/>
+          <a:bodyPr lIns="201168" tIns="118872" rIns="109728" bIns="73152" rtlCol="0" anchor="ctr"/>
           <a:lstStyle/>
           <a:p>
             <a:pPr algn="ctr">
@@ -9802,6 +9881,7 @@
           <a:lstStyle/>
           <a:p>
             <a:pPr algn="ctr"/>
+            <a:endParaRPr/>
           </a:p>
         </p:txBody>
       </p:sp>
@@ -9843,7 +9923,7 @@
           </a:fontRef>
         </p:style>
         <p:txBody>
-          <a:bodyPr rtlCol="0" anchor="ctr" lIns="201168" rIns="109728" tIns="118872" bIns="73152"/>
+          <a:bodyPr lIns="201168" tIns="118872" rIns="109728" bIns="73152" rtlCol="0" anchor="ctr"/>
           <a:lstStyle/>
           <a:p>
             <a:pPr algn="ctr">
@@ -9916,6 +9996,7 @@
           <a:lstStyle/>
           <a:p>
             <a:pPr algn="ctr"/>
+            <a:endParaRPr/>
           </a:p>
         </p:txBody>
       </p:sp>
@@ -9992,7 +10073,7 @@
           </a:fontRef>
         </p:style>
         <p:txBody>
-          <a:bodyPr rtlCol="0" anchor="ctr" lIns="201168" rIns="109728" tIns="118872" bIns="73152"/>
+          <a:bodyPr lIns="201168" tIns="118872" rIns="109728" bIns="73152" rtlCol="0" anchor="ctr"/>
           <a:lstStyle/>
           <a:p>
             <a:pPr algn="ctr">
@@ -10065,6 +10146,7 @@
           <a:lstStyle/>
           <a:p>
             <a:pPr algn="ctr"/>
+            <a:endParaRPr/>
           </a:p>
         </p:txBody>
       </p:sp>
@@ -10106,7 +10188,7 @@
           </a:fontRef>
         </p:style>
         <p:txBody>
-          <a:bodyPr rtlCol="0" anchor="ctr" lIns="201168" rIns="109728" tIns="118872" bIns="73152"/>
+          <a:bodyPr lIns="201168" tIns="118872" rIns="109728" bIns="73152" rtlCol="0" anchor="ctr"/>
           <a:lstStyle/>
           <a:p>
             <a:pPr algn="ctr">
@@ -10179,6 +10261,7 @@
           <a:lstStyle/>
           <a:p>
             <a:pPr algn="ctr"/>
+            <a:endParaRPr/>
           </a:p>
         </p:txBody>
       </p:sp>
@@ -10255,7 +10338,7 @@
           </a:fontRef>
         </p:style>
         <p:txBody>
-          <a:bodyPr rtlCol="0" anchor="ctr" lIns="201168" rIns="109728" tIns="118872" bIns="73152"/>
+          <a:bodyPr lIns="201168" tIns="118872" rIns="109728" bIns="73152" rtlCol="0" anchor="ctr"/>
           <a:lstStyle/>
           <a:p>
             <a:pPr algn="ctr">
@@ -10328,6 +10411,7 @@
           <a:lstStyle/>
           <a:p>
             <a:pPr algn="ctr"/>
+            <a:endParaRPr/>
           </a:p>
         </p:txBody>
       </p:sp>
@@ -10369,7 +10453,7 @@
           </a:fontRef>
         </p:style>
         <p:txBody>
-          <a:bodyPr rtlCol="0" anchor="ctr" lIns="201168" rIns="109728" tIns="118872" bIns="73152"/>
+          <a:bodyPr lIns="201168" tIns="118872" rIns="109728" bIns="73152" rtlCol="0" anchor="ctr"/>
           <a:lstStyle/>
           <a:p>
             <a:pPr algn="ctr">
@@ -10442,6 +10526,7 @@
           <a:lstStyle/>
           <a:p>
             <a:pPr algn="ctr"/>
+            <a:endParaRPr/>
           </a:p>
         </p:txBody>
       </p:sp>
@@ -10518,7 +10603,7 @@
           </a:fontRef>
         </p:style>
         <p:txBody>
-          <a:bodyPr rtlCol="0" anchor="ctr" lIns="201168" rIns="109728" tIns="118872" bIns="73152"/>
+          <a:bodyPr lIns="201168" tIns="118872" rIns="109728" bIns="73152" rtlCol="0" anchor="ctr"/>
           <a:lstStyle/>
           <a:p>
             <a:pPr algn="ctr">
@@ -10591,6 +10676,7 @@
           <a:lstStyle/>
           <a:p>
             <a:pPr algn="ctr"/>
+            <a:endParaRPr/>
           </a:p>
         </p:txBody>
       </p:sp>
@@ -10670,6 +10756,7 @@
           <a:lstStyle/>
           <a:p>
             <a:pPr algn="ctr"/>
+            <a:endParaRPr/>
           </a:p>
         </p:txBody>
       </p:sp>
@@ -10718,7 +10805,7 @@
 </file>
 
 <file path=ppt/slides/slide7.xml><?xml version="1.0" encoding="utf-8"?>
-<p:sld xmlns:a="http://schemas.openxmlformats.org/drawingml/2006/main" xmlns:p="http://schemas.openxmlformats.org/presentationml/2006/main" xmlns:r="http://schemas.openxmlformats.org/officeDocument/2006/relationships">
+<p:sld xmlns:a="http://schemas.openxmlformats.org/drawingml/2006/main" xmlns:r="http://schemas.openxmlformats.org/officeDocument/2006/relationships" xmlns:p="http://schemas.openxmlformats.org/presentationml/2006/main">
   <p:cSld>
     <p:bg>
       <p:bgPr>
@@ -10734,7 +10821,14 @@
         <p:cNvGrpSpPr/>
         <p:nvPr/>
       </p:nvGrpSpPr>
-      <p:grpSpPr/>
+      <p:grpSpPr>
+        <a:xfrm>
+          <a:off x="0" y="0"/>
+          <a:ext cx="0" cy="0"/>
+          <a:chOff x="0" y="0"/>
+          <a:chExt cx="0" cy="0"/>
+        </a:xfrm>
+      </p:grpSpPr>
       <p:sp>
         <p:nvSpPr>
           <p:cNvPr id="2" name="TextBox 1"/>
@@ -10845,7 +10939,7 @@
           </a:fontRef>
         </p:style>
         <p:txBody>
-          <a:bodyPr rtlCol="0" anchor="ctr" lIns="201168" rIns="109728" tIns="118872" bIns="73152"/>
+          <a:bodyPr lIns="201168" tIns="118872" rIns="109728" bIns="73152" rtlCol="0" anchor="ctr"/>
           <a:lstStyle/>
           <a:p>
             <a:pPr algn="ctr">
@@ -10966,6 +11060,7 @@
           <a:lstStyle/>
           <a:p>
             <a:pPr algn="ctr"/>
+            <a:endParaRPr/>
           </a:p>
         </p:txBody>
       </p:sp>
@@ -11007,7 +11102,7 @@
           </a:fontRef>
         </p:style>
         <p:txBody>
-          <a:bodyPr rtlCol="0" anchor="ctr" lIns="201168" rIns="109728" tIns="118872" bIns="73152"/>
+          <a:bodyPr lIns="201168" tIns="118872" rIns="109728" bIns="73152" rtlCol="0" anchor="ctr"/>
           <a:lstStyle/>
           <a:p>
             <a:pPr algn="ctr">
@@ -11128,6 +11223,7 @@
           <a:lstStyle/>
           <a:p>
             <a:pPr algn="ctr"/>
+            <a:endParaRPr/>
           </a:p>
         </p:txBody>
       </p:sp>
@@ -11169,7 +11265,7 @@
           </a:fontRef>
         </p:style>
         <p:txBody>
-          <a:bodyPr rtlCol="0" anchor="ctr" lIns="201168" rIns="109728" tIns="118872" bIns="73152"/>
+          <a:bodyPr lIns="201168" tIns="118872" rIns="109728" bIns="73152" rtlCol="0" anchor="ctr"/>
           <a:lstStyle/>
           <a:p>
             <a:pPr algn="ctr">
@@ -11290,6 +11386,7 @@
           <a:lstStyle/>
           <a:p>
             <a:pPr algn="ctr"/>
+            <a:endParaRPr/>
           </a:p>
         </p:txBody>
       </p:sp>
@@ -11331,7 +11428,7 @@
           </a:fontRef>
         </p:style>
         <p:txBody>
-          <a:bodyPr rtlCol="0" anchor="ctr" lIns="201168" rIns="109728" tIns="118872" bIns="73152"/>
+          <a:bodyPr lIns="201168" tIns="118872" rIns="109728" bIns="73152" rtlCol="0" anchor="ctr"/>
           <a:lstStyle/>
           <a:p>
             <a:pPr algn="ctr">
@@ -11452,6 +11549,7 @@
           <a:lstStyle/>
           <a:p>
             <a:pPr algn="ctr"/>
+            <a:endParaRPr/>
           </a:p>
         </p:txBody>
       </p:sp>
@@ -11598,7 +11696,7 @@
           </a:fontRef>
         </p:style>
         <p:txBody>
-          <a:bodyPr rtlCol="0" anchor="ctr" lIns="201168" rIns="109728" tIns="118872" bIns="73152"/>
+          <a:bodyPr lIns="201168" tIns="118872" rIns="109728" bIns="73152" rtlCol="0" anchor="ctr"/>
           <a:lstStyle/>
           <a:p>
             <a:pPr algn="ctr">
@@ -11671,6 +11769,7 @@
           <a:lstStyle/>
           <a:p>
             <a:pPr algn="ctr"/>
+            <a:endParaRPr/>
           </a:p>
         </p:txBody>
       </p:sp>
@@ -11714,6 +11813,7 @@
           <a:lstStyle/>
           <a:p>
             <a:pPr algn="ctr"/>
+            <a:endParaRPr/>
           </a:p>
         </p:txBody>
       </p:sp>
@@ -11762,7 +11862,7 @@
 </file>
 
 <file path=ppt/slides/slide8.xml><?xml version="1.0" encoding="utf-8"?>
-<p:sld xmlns:a="http://schemas.openxmlformats.org/drawingml/2006/main" xmlns:p="http://schemas.openxmlformats.org/presentationml/2006/main" xmlns:r="http://schemas.openxmlformats.org/officeDocument/2006/relationships">
+<p:sld xmlns:a="http://schemas.openxmlformats.org/drawingml/2006/main" xmlns:r="http://schemas.openxmlformats.org/officeDocument/2006/relationships" xmlns:p="http://schemas.openxmlformats.org/presentationml/2006/main">
   <p:cSld>
     <p:bg>
       <p:bgPr>
@@ -11778,7 +11878,14 @@
         <p:cNvGrpSpPr/>
         <p:nvPr/>
       </p:nvGrpSpPr>
-      <p:grpSpPr/>
+      <p:grpSpPr>
+        <a:xfrm>
+          <a:off x="0" y="0"/>
+          <a:ext cx="0" cy="0"/>
+          <a:chOff x="0" y="0"/>
+          <a:chExt cx="0" cy="0"/>
+        </a:xfrm>
+      </p:grpSpPr>
       <p:sp>
         <p:nvSpPr>
           <p:cNvPr id="2" name="TextBox 1"/>
@@ -11889,7 +11996,7 @@
           </a:fontRef>
         </p:style>
         <p:txBody>
-          <a:bodyPr rtlCol="0" anchor="ctr" lIns="201168" rIns="109728" tIns="118872" bIns="73152"/>
+          <a:bodyPr lIns="201168" tIns="118872" rIns="109728" bIns="73152" rtlCol="0" anchor="ctr"/>
           <a:lstStyle/>
           <a:p>
             <a:pPr algn="ctr">
@@ -11978,6 +12085,7 @@
           <a:lstStyle/>
           <a:p>
             <a:pPr algn="ctr"/>
+            <a:endParaRPr/>
           </a:p>
         </p:txBody>
       </p:sp>
@@ -12054,7 +12162,7 @@
           </a:fontRef>
         </p:style>
         <p:txBody>
-          <a:bodyPr rtlCol="0" anchor="ctr" lIns="201168" rIns="109728" tIns="118872" bIns="73152"/>
+          <a:bodyPr lIns="201168" tIns="118872" rIns="109728" bIns="73152" rtlCol="0" anchor="ctr"/>
           <a:lstStyle/>
           <a:p>
             <a:pPr algn="ctr">
@@ -12143,6 +12251,7 @@
           <a:lstStyle/>
           <a:p>
             <a:pPr algn="ctr"/>
+            <a:endParaRPr/>
           </a:p>
         </p:txBody>
       </p:sp>
@@ -12219,7 +12328,7 @@
           </a:fontRef>
         </p:style>
         <p:txBody>
-          <a:bodyPr rtlCol="0" anchor="ctr" lIns="201168" rIns="109728" tIns="118872" bIns="73152"/>
+          <a:bodyPr lIns="201168" tIns="118872" rIns="109728" bIns="73152" rtlCol="0" anchor="ctr"/>
           <a:lstStyle/>
           <a:p>
             <a:pPr algn="ctr">
@@ -12308,6 +12417,7 @@
           <a:lstStyle/>
           <a:p>
             <a:pPr algn="ctr"/>
+            <a:endParaRPr/>
           </a:p>
         </p:txBody>
       </p:sp>
@@ -12384,7 +12494,7 @@
           </a:fontRef>
         </p:style>
         <p:txBody>
-          <a:bodyPr rtlCol="0" anchor="ctr" lIns="201168" rIns="109728" tIns="118872" bIns="73152"/>
+          <a:bodyPr lIns="201168" tIns="118872" rIns="109728" bIns="73152" rtlCol="0" anchor="ctr"/>
           <a:lstStyle/>
           <a:p>
             <a:pPr algn="ctr">
@@ -12473,6 +12583,7 @@
           <a:lstStyle/>
           <a:p>
             <a:pPr algn="ctr"/>
+            <a:endParaRPr/>
           </a:p>
         </p:txBody>
       </p:sp>
@@ -12549,7 +12660,7 @@
           </a:fontRef>
         </p:style>
         <p:txBody>
-          <a:bodyPr rtlCol="0" anchor="ctr" lIns="201168" rIns="109728" tIns="118872" bIns="73152"/>
+          <a:bodyPr lIns="201168" tIns="118872" rIns="109728" bIns="73152" rtlCol="0" anchor="ctr"/>
           <a:lstStyle/>
           <a:p>
             <a:pPr algn="ctr">
@@ -12638,6 +12749,7 @@
           <a:lstStyle/>
           <a:p>
             <a:pPr algn="ctr"/>
+            <a:endParaRPr/>
           </a:p>
         </p:txBody>
       </p:sp>
@@ -12679,7 +12791,7 @@
           </a:fontRef>
         </p:style>
         <p:txBody>
-          <a:bodyPr rtlCol="0" anchor="ctr" lIns="201168" rIns="109728" tIns="118872" bIns="73152"/>
+          <a:bodyPr lIns="201168" tIns="118872" rIns="109728" bIns="73152" rtlCol="0" anchor="ctr"/>
           <a:lstStyle/>
           <a:p>
             <a:pPr algn="ctr">
@@ -12768,6 +12880,7 @@
           <a:lstStyle/>
           <a:p>
             <a:pPr algn="ctr"/>
+            <a:endParaRPr/>
           </a:p>
         </p:txBody>
       </p:sp>
@@ -12809,7 +12922,7 @@
           </a:fontRef>
         </p:style>
         <p:txBody>
-          <a:bodyPr rtlCol="0" anchor="ctr" lIns="201168" rIns="109728" tIns="118872" bIns="73152"/>
+          <a:bodyPr lIns="201168" tIns="118872" rIns="109728" bIns="73152" rtlCol="0" anchor="ctr"/>
           <a:lstStyle/>
           <a:p>
             <a:pPr algn="ctr">
@@ -12898,6 +13011,7 @@
           <a:lstStyle/>
           <a:p>
             <a:pPr algn="ctr"/>
+            <a:endParaRPr/>
           </a:p>
         </p:txBody>
       </p:sp>
@@ -12939,7 +13053,7 @@
           </a:fontRef>
         </p:style>
         <p:txBody>
-          <a:bodyPr rtlCol="0" anchor="ctr" lIns="201168" rIns="109728" tIns="118872" bIns="73152"/>
+          <a:bodyPr lIns="201168" tIns="118872" rIns="109728" bIns="73152" rtlCol="0" anchor="ctr"/>
           <a:lstStyle/>
           <a:p>
             <a:pPr algn="ctr">
@@ -13028,6 +13142,7 @@
           <a:lstStyle/>
           <a:p>
             <a:pPr algn="ctr"/>
+            <a:endParaRPr/>
           </a:p>
         </p:txBody>
       </p:sp>
@@ -13107,6 +13222,7 @@
           <a:lstStyle/>
           <a:p>
             <a:pPr algn="ctr"/>
+            <a:endParaRPr/>
           </a:p>
         </p:txBody>
       </p:sp>

--- a/docs/retirement_income_planner_architecture.pptx
+++ b/docs/retirement_income_planner_architecture.pptx
@@ -13,6 +13,7 @@
     <p:sldId id="261" r:id="rId12"/>
     <p:sldId id="262" r:id="rId13"/>
     <p:sldId id="263" r:id="rId14"/>
+    <p:sldId id="264" r:id="rId15"/>
   </p:sldIdLst>
   <p:sldSz cx="12191695" cy="6858000" type="screen4x3"/>
   <p:notesSz cx="6858000" cy="9144000"/>
@@ -3154,8 +3155,8 @@
         </p:nvSpPr>
         <p:spPr>
           <a:xfrm>
-            <a:off x="566928" y="237744"/>
-            <a:ext cx="10789920" cy="411480"/>
+            <a:off x="566928" y="246888"/>
+            <a:ext cx="10789920" cy="393192"/>
           </a:xfrm>
           <a:prstGeom prst="rect">
             <a:avLst/>
@@ -3190,8 +3191,8 @@
         </p:nvSpPr>
         <p:spPr>
           <a:xfrm>
-            <a:off x="594360" y="722376"/>
-            <a:ext cx="10515600" cy="201168"/>
+            <a:off x="594360" y="731520"/>
+            <a:ext cx="10972800" cy="182880"/>
           </a:xfrm>
           <a:prstGeom prst="rect">
             <a:avLst/>
@@ -3213,7 +3214,7 @@
               </a:defRPr>
             </a:pPr>
             <a:r>
-              <a:t>Updated architecture: computation, interactive controls, content pages, and plan-loading workflow</a:t>
+              <a:t>Updated architecture: portfolio-paid IRMAA, richer expense waterfall, and Excel projection export</a:t>
             </a:r>
           </a:p>
         </p:txBody>
@@ -3235,7 +3236,7 @@
           <a:solidFill>
             <a:srgbClr val="E9F4FF"/>
           </a:solidFill>
-          <a:ln w="14604">
+          <a:ln w="13970">
             <a:solidFill>
               <a:srgbClr val="266EB2"/>
             </a:solidFill>
@@ -3256,7 +3257,7 @@
           </a:fontRef>
         </p:style>
         <p:txBody>
-          <a:bodyPr rtlCol="0" anchor="ctr" lIns="182880" tIns="100584"/>
+          <a:bodyPr rtlCol="0" anchor="ctr" lIns="182880" rIns="100584" tIns="91440"/>
           <a:lstStyle/>
           <a:p>
             <a:pPr algn="ctr">
@@ -3274,7 +3275,7 @@
           <a:p>
             <a:pPr>
               <a:spcBef>
-                <a:spcPts val="400"/>
+                <a:spcPts val="300"/>
               </a:spcBef>
               <a:defRPr sz="1400">
                 <a:solidFill>
@@ -3284,13 +3285,13 @@
               </a:defRPr>
             </a:pPr>
             <a:r>
-              <a:t>Cards, controls, Load menu</a:t>
+              <a:t>Cards, controls, load menu</a:t>
             </a:r>
           </a:p>
           <a:p>
             <a:pPr>
               <a:spcBef>
-                <a:spcPts val="400"/>
+                <a:spcPts val="300"/>
               </a:spcBef>
               <a:defRPr sz="1400">
                 <a:solidFill>
@@ -3300,7 +3301,7 @@
               </a:defRPr>
             </a:pPr>
             <a:r>
-              <a:t>Writes mutable state</a:t>
+              <a:t>Writes plan state</a:t>
             </a:r>
           </a:p>
         </p:txBody>
@@ -3365,7 +3366,7 @@
           <a:solidFill>
             <a:srgbClr val="EAF9F4"/>
           </a:solidFill>
-          <a:ln w="14604">
+          <a:ln w="13970">
             <a:solidFill>
               <a:srgbClr val="429761"/>
             </a:solidFill>
@@ -3386,7 +3387,7 @@
           </a:fontRef>
         </p:style>
         <p:txBody>
-          <a:bodyPr rtlCol="0" anchor="ctr" lIns="182880" tIns="100584"/>
+          <a:bodyPr rtlCol="0" anchor="ctr" lIns="182880" rIns="100584" tIns="91440"/>
           <a:lstStyle/>
           <a:p>
             <a:pPr algn="ctr">
@@ -3404,7 +3405,7 @@
           <a:p>
             <a:pPr>
               <a:spcBef>
-                <a:spcPts val="400"/>
+                <a:spcPts val="300"/>
               </a:spcBef>
               <a:defRPr sz="1400">
                 <a:solidFill>
@@ -3414,13 +3415,13 @@
               </a:defRPr>
             </a:pPr>
             <a:r>
-              <a:t>Pure annual projection</a:t>
+              <a:t>Annual projection</a:t>
             </a:r>
           </a:p>
           <a:p>
             <a:pPr>
               <a:spcBef>
-                <a:spcPts val="400"/>
+                <a:spcPts val="300"/>
               </a:spcBef>
               <a:defRPr sz="1400">
                 <a:solidFill>
@@ -3430,7 +3431,7 @@
               </a:defRPr>
             </a:pPr>
             <a:r>
-              <a:t>What-if scenarios</a:t>
+              <a:t>Tax, IRMAA, basis, balances</a:t>
             </a:r>
           </a:p>
         </p:txBody>
@@ -3495,7 +3496,7 @@
           <a:solidFill>
             <a:srgbClr val="F7EFFF"/>
           </a:solidFill>
-          <a:ln w="14604">
+          <a:ln w="13970">
             <a:solidFill>
               <a:srgbClr val="7852B0"/>
             </a:solidFill>
@@ -3516,7 +3517,7 @@
           </a:fontRef>
         </p:style>
         <p:txBody>
-          <a:bodyPr rtlCol="0" anchor="ctr" lIns="182880" tIns="100584"/>
+          <a:bodyPr rtlCol="0" anchor="ctr" lIns="182880" rIns="100584" tIns="91440"/>
           <a:lstStyle/>
           <a:p>
             <a:pPr algn="ctr">
@@ -3528,13 +3529,13 @@
               </a:defRPr>
             </a:pPr>
             <a:r>
-              <a:t>Display</a:t>
+              <a:t>Display &amp; export</a:t>
             </a:r>
           </a:p>
           <a:p>
             <a:pPr>
               <a:spcBef>
-                <a:spcPts val="400"/>
+                <a:spcPts val="300"/>
               </a:spcBef>
               <a:defRPr sz="1400">
                 <a:solidFill>
@@ -3544,13 +3545,13 @@
               </a:defRPr>
             </a:pPr>
             <a:r>
-              <a:t>Charts, Formulas, Notes</a:t>
+              <a:t>Charts, pages, XLSX workbook</a:t>
             </a:r>
           </a:p>
           <a:p>
             <a:pPr>
               <a:spcBef>
-                <a:spcPts val="400"/>
+                <a:spcPts val="300"/>
               </a:spcBef>
               <a:defRPr sz="1400">
                 <a:solidFill>
@@ -3560,7 +3561,7 @@
               </a:defRPr>
             </a:pPr>
             <a:r>
-              <a:t>Consumes projection rows</a:t>
+              <a:t>Reads projection output</a:t>
             </a:r>
           </a:p>
         </p:txBody>
@@ -3686,8 +3687,8 @@
         </p:nvSpPr>
         <p:spPr>
           <a:xfrm>
-            <a:off x="3794760" y="3300984"/>
-            <a:ext cx="777240" cy="182880"/>
+            <a:off x="3749039" y="3291840"/>
+            <a:ext cx="868680" cy="182880"/>
           </a:xfrm>
           <a:prstGeom prst="rect">
             <a:avLst/>
@@ -3722,8 +3723,8 @@
         </p:nvSpPr>
         <p:spPr>
           <a:xfrm>
-            <a:off x="7406640" y="3300984"/>
-            <a:ext cx="1143000" cy="182880"/>
+            <a:off x="7360920" y="3291840"/>
+            <a:ext cx="1234440" cy="182880"/>
           </a:xfrm>
           <a:prstGeom prst="rect">
             <a:avLst/>
@@ -3758,8 +3759,8 @@
         </p:nvSpPr>
         <p:spPr>
           <a:xfrm>
-            <a:off x="1828800" y="5029200"/>
-            <a:ext cx="8503920" cy="777240"/>
+            <a:off x="1783080" y="5029200"/>
+            <a:ext cx="8595360" cy="777240"/>
           </a:xfrm>
           <a:prstGeom prst="roundRect">
             <a:avLst/>
@@ -3767,7 +3768,7 @@
           <a:solidFill>
             <a:srgbClr val="FFFFFF"/>
           </a:solidFill>
-          <a:ln w="14604">
+          <a:ln w="13970">
             <a:solidFill>
               <a:srgbClr val="0F2647"/>
             </a:solidFill>
@@ -3788,7 +3789,7 @@
           </a:fontRef>
         </p:style>
         <p:txBody>
-          <a:bodyPr rtlCol="0" anchor="ctr" lIns="182880" tIns="100584"/>
+          <a:bodyPr rtlCol="0" anchor="ctr" lIns="182880" rIns="100584" tIns="91440"/>
           <a:lstStyle/>
           <a:p>
             <a:pPr algn="ctr">
@@ -3800,13 +3801,13 @@
               </a:defRPr>
             </a:pPr>
             <a:r>
-              <a:t>Orchestrator</a:t>
+              <a:t>App orchestration</a:t>
             </a:r>
           </a:p>
           <a:p>
             <a:pPr>
               <a:spcBef>
-                <a:spcPts val="400"/>
+                <a:spcPts val="300"/>
               </a:spcBef>
               <a:defRPr sz="1200">
                 <a:solidFill>
@@ -3816,7 +3817,7 @@
               </a:defRPr>
             </a:pPr>
             <a:r>
-              <a:t>app.js boots the application and is the only place where Compute meets Display.</a:t>
+              <a:t>app.js connects computeProjection() to rendering; export reads the current cached projection without changing state.</a:t>
             </a:r>
           </a:p>
         </p:txBody>
@@ -3829,7 +3830,7 @@
         </p:nvSpPr>
         <p:spPr>
           <a:xfrm>
-            <a:off x="1828800" y="5029200"/>
+            <a:off x="1783080" y="5029200"/>
             <a:ext cx="82296" cy="777240"/>
           </a:xfrm>
           <a:prstGeom prst="rect">
@@ -3916,7 +3917,7 @@
         <p:spPr>
           <a:xfrm>
             <a:off x="530352" y="6510528"/>
-            <a:ext cx="10881360" cy="164592"/>
+            <a:ext cx="10881360" cy="146304"/>
           </a:xfrm>
           <a:prstGeom prst="rect">
             <a:avLst/>
@@ -3938,7 +3939,7 @@
               </a:defRPr>
             </a:pPr>
             <a:r>
-              <a:t>Retirement Income Planner • Architecture overview • Updated specification</a:t>
+              <a:t>Retirement Income Planner • Architecture overview • IRMAA and Excel-export update</a:t>
             </a:r>
           </a:p>
         </p:txBody>
@@ -3977,8 +3978,8 @@
         </p:nvSpPr>
         <p:spPr>
           <a:xfrm>
-            <a:off x="502920" y="237744"/>
-            <a:ext cx="11155680" cy="457200"/>
+            <a:off x="502920" y="246888"/>
+            <a:ext cx="11155680" cy="438912"/>
           </a:xfrm>
           <a:prstGeom prst="rect">
             <a:avLst/>
@@ -4000,7 +4001,7 @@
               </a:defRPr>
             </a:pPr>
             <a:r>
-              <a:t>Runtime flow and responsibilities</a:t>
+              <a:t>What changed in this version</a:t>
             </a:r>
           </a:p>
         </p:txBody>
@@ -4014,7 +4015,7 @@
         <p:spPr>
           <a:xfrm>
             <a:off x="530352" y="786384"/>
-            <a:ext cx="10972800" cy="256032"/>
+            <a:ext cx="10972800" cy="219456"/>
           </a:xfrm>
           <a:prstGeom prst="rect">
             <a:avLst/>
@@ -4036,7 +4037,7 @@
               </a:defRPr>
             </a:pPr>
             <a:r>
-              <a:t>The app separates interaction, persistence, financial modeling, and visualization.</a:t>
+              <a:t>Three additions extend brokerage expense modeling and make the full projection portable.</a:t>
             </a:r>
           </a:p>
         </p:txBody>
@@ -4049,16 +4050,16 @@
         </p:nvSpPr>
         <p:spPr>
           <a:xfrm>
-            <a:off x="411480" y="1417320"/>
-            <a:ext cx="1993392" cy="1325880"/>
+            <a:off x="594360" y="1234440"/>
+            <a:ext cx="3383280" cy="4480560"/>
           </a:xfrm>
           <a:prstGeom prst="roundRect">
             <a:avLst/>
           </a:prstGeom>
           <a:solidFill>
-            <a:srgbClr val="FAFBFD"/>
+            <a:srgbClr val="E9F4FF"/>
           </a:solidFill>
-          <a:ln w="14604">
+          <a:ln w="13970">
             <a:solidFill>
               <a:srgbClr val="266EB2"/>
             </a:solidFill>
@@ -4079,11 +4080,11 @@
           </a:fontRef>
         </p:style>
         <p:txBody>
-          <a:bodyPr rtlCol="0" anchor="ctr" lIns="182880" tIns="100584"/>
+          <a:bodyPr rtlCol="0" anchor="ctr" lIns="182880" rIns="100584" tIns="91440"/>
           <a:lstStyle/>
           <a:p>
             <a:pPr algn="ctr">
-              <a:defRPr sz="1500" b="1">
+              <a:defRPr sz="1800" b="1">
                 <a:solidFill>
                   <a:srgbClr val="232D37"/>
                 </a:solidFill>
@@ -4091,23 +4092,55 @@
               </a:defRPr>
             </a:pPr>
             <a:r>
-              <a:t>User action</a:t>
+              <a:t>1. IRMAA toggle</a:t>
             </a:r>
           </a:p>
           <a:p>
             <a:pPr>
               <a:spcBef>
-                <a:spcPts val="400"/>
+                <a:spcPts val="300"/>
               </a:spcBef>
-              <a:defRPr sz="1100">
-                <a:solidFill>
-                  <a:srgbClr val="232D37"/>
-                </a:solidFill>
-                <a:latin typeface="Aptos"/>
-              </a:defRPr>
-            </a:pPr>
-            <a:r>
-              <a:t>Field, slider, enable/hide, menu</a:t>
+              <a:defRPr sz="1300">
+                <a:solidFill>
+                  <a:srgbClr val="232D37"/>
+                </a:solidFill>
+                <a:latin typeface="Aptos"/>
+              </a:defRPr>
+            </a:pPr>
+            <a:r>
+              <a:t>Each brokerage portfolio adds irmaa: boolean.</a:t>
+            </a:r>
+          </a:p>
+          <a:p>
+            <a:pPr>
+              <a:spcBef>
+                <a:spcPts val="300"/>
+              </a:spcBef>
+              <a:defRPr sz="1300">
+                <a:solidFill>
+                  <a:srgbClr val="232D37"/>
+                </a:solidFill>
+                <a:latin typeface="Aptos"/>
+              </a:defRPr>
+            </a:pPr>
+            <a:r>
+              <a:t>It is an optional expense only when Expenses is on.</a:t>
+            </a:r>
+          </a:p>
+          <a:p>
+            <a:pPr>
+              <a:spcBef>
+                <a:spcPts val="300"/>
+              </a:spcBef>
+              <a:defRPr sz="1300">
+                <a:solidFill>
+                  <a:srgbClr val="232D37"/>
+                </a:solidFill>
+                <a:latin typeface="Aptos"/>
+              </a:defRPr>
+            </a:pPr>
+            <a:r>
+              <a:t>The household surcharge is allocated across eligible checked portfolios.</a:t>
             </a:r>
           </a:p>
         </p:txBody>
@@ -4120,8 +4153,8 @@
         </p:nvSpPr>
         <p:spPr>
           <a:xfrm>
-            <a:off x="411480" y="1417320"/>
-            <a:ext cx="82296" cy="1325880"/>
+            <a:off x="594360" y="1234440"/>
+            <a:ext cx="82296" cy="4480560"/>
           </a:xfrm>
           <a:prstGeom prst="rect">
             <a:avLst/>
@@ -4155,61 +4188,26 @@
           </a:p>
         </p:txBody>
       </p:sp>
-      <p:cxnSp>
-        <p:nvCxnSpPr>
-          <p:cNvPr id="6" name="Connector 5"/>
-          <p:cNvCxnSpPr/>
-          <p:nvPr/>
-        </p:nvCxnSpPr>
-        <p:spPr>
-          <a:xfrm>
-            <a:off x="2423160" y="2075688"/>
-            <a:ext cx="256032" cy="0"/>
-          </a:xfrm>
-          <a:prstGeom prst="line">
-            <a:avLst/>
-          </a:prstGeom>
-          <a:ln w="22860">
+      <p:sp>
+        <p:nvSpPr>
+          <p:cNvPr id="6" name="Rounded Rectangle 5"/>
+          <p:cNvSpPr/>
+          <p:nvPr/>
+        </p:nvSpPr>
+        <p:spPr>
+          <a:xfrm>
+            <a:off x="4407408" y="1234440"/>
+            <a:ext cx="3383280" cy="4480560"/>
+          </a:xfrm>
+          <a:prstGeom prst="roundRect">
+            <a:avLst/>
+          </a:prstGeom>
+          <a:solidFill>
+            <a:srgbClr val="EAF9F4"/>
+          </a:solidFill>
+          <a:ln w="13970">
             <a:solidFill>
-              <a:srgbClr val="266EB2"/>
-            </a:solidFill>
-          </a:ln>
-        </p:spPr>
-        <p:style>
-          <a:lnRef idx="2">
-            <a:schemeClr val="accent1"/>
-          </a:lnRef>
-          <a:fillRef idx="0">
-            <a:schemeClr val="accent1"/>
-          </a:fillRef>
-          <a:effectRef idx="1">
-            <a:schemeClr val="accent1"/>
-          </a:effectRef>
-          <a:fontRef idx="minor">
-            <a:schemeClr val="tx1"/>
-          </a:fontRef>
-        </p:style>
-      </p:cxnSp>
-      <p:sp>
-        <p:nvSpPr>
-          <p:cNvPr id="7" name="Rounded Rectangle 6"/>
-          <p:cNvSpPr/>
-          <p:nvPr/>
-        </p:nvSpPr>
-        <p:spPr>
-          <a:xfrm>
-            <a:off x="2761488" y="1417320"/>
-            <a:ext cx="1993392" cy="1325880"/>
-          </a:xfrm>
-          <a:prstGeom prst="roundRect">
-            <a:avLst/>
-          </a:prstGeom>
-          <a:solidFill>
-            <a:srgbClr val="FAFBFD"/>
-          </a:solidFill>
-          <a:ln w="14604">
-            <a:solidFill>
-              <a:srgbClr val="168F8D"/>
+              <a:srgbClr val="429761"/>
             </a:solidFill>
           </a:ln>
         </p:spPr>
@@ -4228,11 +4226,11 @@
           </a:fontRef>
         </p:style>
         <p:txBody>
-          <a:bodyPr rtlCol="0" anchor="ctr" lIns="182880" tIns="100584"/>
+          <a:bodyPr rtlCol="0" anchor="ctr" lIns="182880" rIns="100584" tIns="91440"/>
           <a:lstStyle/>
           <a:p>
             <a:pPr algn="ctr">
-              <a:defRPr sz="1500" b="1">
+              <a:defRPr sz="1800" b="1">
                 <a:solidFill>
                   <a:srgbClr val="232D37"/>
                 </a:solidFill>
@@ -4240,186 +4238,69 @@
               </a:defRPr>
             </a:pPr>
             <a:r>
-              <a:t>State mutation</a:t>
+              <a:t>2. Expense waterfall</a:t>
             </a:r>
           </a:p>
           <a:p>
             <a:pPr>
               <a:spcBef>
-                <a:spcPts val="400"/>
+                <a:spcPts val="300"/>
               </a:spcBef>
-              <a:defRPr sz="1100">
-                <a:solidFill>
-                  <a:srgbClr val="232D37"/>
-                </a:solidFill>
-                <a:latin typeface="Aptos"/>
-              </a:defRPr>
-            </a:pPr>
-            <a:r>
-              <a:t>setPath() + autosave</a:t>
-            </a:r>
-          </a:p>
-        </p:txBody>
-      </p:sp>
-      <p:sp>
-        <p:nvSpPr>
-          <p:cNvPr id="8" name="Rectangle 7"/>
-          <p:cNvSpPr/>
-          <p:nvPr/>
-        </p:nvSpPr>
-        <p:spPr>
-          <a:xfrm>
-            <a:off x="2761488" y="1417320"/>
-            <a:ext cx="82296" cy="1325880"/>
-          </a:xfrm>
-          <a:prstGeom prst="rect">
-            <a:avLst/>
-          </a:prstGeom>
-          <a:solidFill>
-            <a:srgbClr val="168F8D"/>
-          </a:solidFill>
-          <a:ln>
-            <a:noFill/>
-          </a:ln>
-        </p:spPr>
-        <p:style>
-          <a:lnRef idx="1">
-            <a:schemeClr val="accent1"/>
-          </a:lnRef>
-          <a:fillRef idx="3">
-            <a:schemeClr val="accent1"/>
-          </a:fillRef>
-          <a:effectRef idx="2">
-            <a:schemeClr val="accent1"/>
-          </a:effectRef>
-          <a:fontRef idx="minor">
-            <a:schemeClr val="lt1"/>
-          </a:fontRef>
-        </p:style>
-        <p:txBody>
-          <a:bodyPr rtlCol="0" anchor="ctr"/>
-          <a:lstStyle/>
-          <a:p>
-            <a:pPr algn="ctr"/>
-          </a:p>
-        </p:txBody>
-      </p:sp>
-      <p:cxnSp>
-        <p:nvCxnSpPr>
-          <p:cNvPr id="9" name="Connector 8"/>
-          <p:cNvCxnSpPr/>
-          <p:nvPr/>
-        </p:nvCxnSpPr>
-        <p:spPr>
-          <a:xfrm>
-            <a:off x="4773168" y="2075688"/>
-            <a:ext cx="256032" cy="0"/>
-          </a:xfrm>
-          <a:prstGeom prst="line">
-            <a:avLst/>
-          </a:prstGeom>
-          <a:ln w="22860">
-            <a:solidFill>
-              <a:srgbClr val="168F8D"/>
-            </a:solidFill>
-          </a:ln>
-        </p:spPr>
-        <p:style>
-          <a:lnRef idx="2">
-            <a:schemeClr val="accent1"/>
-          </a:lnRef>
-          <a:fillRef idx="0">
-            <a:schemeClr val="accent1"/>
-          </a:fillRef>
-          <a:effectRef idx="1">
-            <a:schemeClr val="accent1"/>
-          </a:effectRef>
-          <a:fontRef idx="minor">
-            <a:schemeClr val="tx1"/>
-          </a:fontRef>
-        </p:style>
-      </p:cxnSp>
-      <p:sp>
-        <p:nvSpPr>
-          <p:cNvPr id="10" name="Rounded Rectangle 9"/>
-          <p:cNvSpPr/>
-          <p:nvPr/>
-        </p:nvSpPr>
-        <p:spPr>
-          <a:xfrm>
-            <a:off x="5111496" y="1417320"/>
-            <a:ext cx="1993392" cy="1325880"/>
-          </a:xfrm>
-          <a:prstGeom prst="roundRect">
-            <a:avLst/>
-          </a:prstGeom>
-          <a:solidFill>
-            <a:srgbClr val="FAFBFD"/>
-          </a:solidFill>
-          <a:ln w="14604">
-            <a:solidFill>
-              <a:srgbClr val="429761"/>
-            </a:solidFill>
-          </a:ln>
-        </p:spPr>
-        <p:style>
-          <a:lnRef idx="1">
-            <a:schemeClr val="accent1"/>
-          </a:lnRef>
-          <a:fillRef idx="3">
-            <a:schemeClr val="accent1"/>
-          </a:fillRef>
-          <a:effectRef idx="2">
-            <a:schemeClr val="accent1"/>
-          </a:effectRef>
-          <a:fontRef idx="minor">
-            <a:schemeClr val="lt1"/>
-          </a:fontRef>
-        </p:style>
-        <p:txBody>
-          <a:bodyPr rtlCol="0" anchor="ctr" lIns="182880" tIns="100584"/>
-          <a:lstStyle/>
-          <a:p>
-            <a:pPr algn="ctr">
-              <a:defRPr sz="1500" b="1">
-                <a:solidFill>
-                  <a:srgbClr val="232D37"/>
-                </a:solidFill>
-                <a:latin typeface="Aptos Display"/>
-              </a:defRPr>
-            </a:pPr>
-            <a:r>
-              <a:t>Projection</a:t>
+              <a:defRPr sz="1300">
+                <a:solidFill>
+                  <a:srgbClr val="232D37"/>
+                </a:solidFill>
+                <a:latin typeface="Aptos"/>
+              </a:defRPr>
+            </a:pPr>
+            <a:r>
+              <a:t>Portfolio expenses now include withdrawal, fee, tax drag, and IRMAA.</a:t>
             </a:r>
           </a:p>
           <a:p>
             <a:pPr>
               <a:spcBef>
-                <a:spcPts val="400"/>
+                <a:spcPts val="300"/>
               </a:spcBef>
-              <a:defRPr sz="1100">
-                <a:solidFill>
-                  <a:srgbClr val="232D37"/>
-                </a:solidFill>
-                <a:latin typeface="Aptos"/>
-              </a:defRPr>
-            </a:pPr>
-            <a:r>
-              <a:t>computeProjection()</a:t>
-            </a:r>
-          </a:p>
-        </p:txBody>
-      </p:sp>
-      <p:sp>
-        <p:nvSpPr>
-          <p:cNvPr id="11" name="Rectangle 10"/>
+              <a:defRPr sz="1300">
+                <a:solidFill>
+                  <a:srgbClr val="232D37"/>
+                </a:solidFill>
+                <a:latin typeface="Aptos"/>
+              </a:defRPr>
+            </a:pPr>
+            <a:r>
+              <a:t>Each portfolio pays only with its own dividends and share sales.</a:t>
+            </a:r>
+          </a:p>
+          <a:p>
+            <a:pPr>
+              <a:spcBef>
+                <a:spcPts val="300"/>
+              </a:spcBef>
+              <a:defRPr sz="1300">
+                <a:solidFill>
+                  <a:srgbClr val="232D37"/>
+                </a:solidFill>
+                <a:latin typeface="Aptos"/>
+              </a:defRPr>
+            </a:pPr>
+            <a:r>
+              <a:t>Prior-year AGI and prior-year tax prevent circular calculations.</a:t>
+            </a:r>
+          </a:p>
+        </p:txBody>
+      </p:sp>
+      <p:sp>
+        <p:nvSpPr>
+          <p:cNvPr id="7" name="Rectangle 6"/>
           <p:cNvSpPr/>
           <p:nvPr/>
         </p:nvSpPr>
         <p:spPr>
           <a:xfrm>
-            <a:off x="5111496" y="1417320"/>
-            <a:ext cx="82296" cy="1325880"/>
+            <a:off x="4407408" y="1234440"/>
+            <a:ext cx="82296" cy="4480560"/>
           </a:xfrm>
           <a:prstGeom prst="rect">
             <a:avLst/>
@@ -4453,59 +4334,24 @@
           </a:p>
         </p:txBody>
       </p:sp>
-      <p:cxnSp>
-        <p:nvCxnSpPr>
-          <p:cNvPr id="12" name="Connector 11"/>
-          <p:cNvCxnSpPr/>
-          <p:nvPr/>
-        </p:nvCxnSpPr>
-        <p:spPr>
-          <a:xfrm>
-            <a:off x="7123176" y="2075688"/>
-            <a:ext cx="256032" cy="0"/>
-          </a:xfrm>
-          <a:prstGeom prst="line">
-            <a:avLst/>
-          </a:prstGeom>
-          <a:ln w="22860">
-            <a:solidFill>
-              <a:srgbClr val="429761"/>
-            </a:solidFill>
-          </a:ln>
-        </p:spPr>
-        <p:style>
-          <a:lnRef idx="2">
-            <a:schemeClr val="accent1"/>
-          </a:lnRef>
-          <a:fillRef idx="0">
-            <a:schemeClr val="accent1"/>
-          </a:fillRef>
-          <a:effectRef idx="1">
-            <a:schemeClr val="accent1"/>
-          </a:effectRef>
-          <a:fontRef idx="minor">
-            <a:schemeClr val="tx1"/>
-          </a:fontRef>
-        </p:style>
-      </p:cxnSp>
-      <p:sp>
-        <p:nvSpPr>
-          <p:cNvPr id="13" name="Rounded Rectangle 12"/>
+      <p:sp>
+        <p:nvSpPr>
+          <p:cNvPr id="8" name="Rounded Rectangle 7"/>
           <p:cNvSpPr/>
           <p:nvPr/>
         </p:nvSpPr>
         <p:spPr>
           <a:xfrm>
-            <a:off x="7461503" y="1417320"/>
-            <a:ext cx="1993392" cy="1325880"/>
+            <a:off x="8220456" y="1234440"/>
+            <a:ext cx="3383280" cy="4480560"/>
           </a:xfrm>
           <a:prstGeom prst="roundRect">
             <a:avLst/>
           </a:prstGeom>
           <a:solidFill>
-            <a:srgbClr val="FAFBFD"/>
+            <a:srgbClr val="F7EFFF"/>
           </a:solidFill>
-          <a:ln w="14604">
+          <a:ln w="13970">
             <a:solidFill>
               <a:srgbClr val="7852B0"/>
             </a:solidFill>
@@ -4526,11 +4372,11 @@
           </a:fontRef>
         </p:style>
         <p:txBody>
-          <a:bodyPr rtlCol="0" anchor="ctr" lIns="182880" tIns="100584"/>
+          <a:bodyPr rtlCol="0" anchor="ctr" lIns="182880" rIns="100584" tIns="91440"/>
           <a:lstStyle/>
           <a:p>
             <a:pPr algn="ctr">
-              <a:defRPr sz="1500" b="1">
+              <a:defRPr sz="1800" b="1">
                 <a:solidFill>
                   <a:srgbClr val="232D37"/>
                 </a:solidFill>
@@ -4538,37 +4384,69 @@
               </a:defRPr>
             </a:pPr>
             <a:r>
-              <a:t>Charts</a:t>
+              <a:t>3. Excel export</a:t>
             </a:r>
           </a:p>
           <a:p>
             <a:pPr>
               <a:spcBef>
-                <a:spcPts val="400"/>
+                <a:spcPts val="300"/>
               </a:spcBef>
-              <a:defRPr sz="1100">
-                <a:solidFill>
-                  <a:srgbClr val="232D37"/>
-                </a:solidFill>
-                <a:latin typeface="Aptos"/>
-              </a:defRPr>
-            </a:pPr>
-            <a:r>
-              <a:t>renderCharts()</a:t>
-            </a:r>
-          </a:p>
-        </p:txBody>
-      </p:sp>
-      <p:sp>
-        <p:nvSpPr>
-          <p:cNvPr id="14" name="Rectangle 13"/>
+              <a:defRPr sz="1300">
+                <a:solidFill>
+                  <a:srgbClr val="232D37"/>
+                </a:solidFill>
+                <a:latin typeface="Aptos"/>
+              </a:defRPr>
+            </a:pPr>
+            <a:r>
+              <a:t>New Export to Excel action uses SheetJS.</a:t>
+            </a:r>
+          </a:p>
+          <a:p>
+            <a:pPr>
+              <a:spcBef>
+                <a:spcPts val="300"/>
+              </a:spcBef>
+              <a:defRPr sz="1300">
+                <a:solidFill>
+                  <a:srgbClr val="232D37"/>
+                </a:solidFill>
+                <a:latin typeface="Aptos"/>
+              </a:defRPr>
+            </a:pPr>
+            <a:r>
+              <a:t>Projection-by-year and brokerage-detail sheets.</a:t>
+            </a:r>
+          </a:p>
+          <a:p>
+            <a:pPr>
+              <a:spcBef>
+                <a:spcPts val="300"/>
+              </a:spcBef>
+              <a:defRPr sz="1300">
+                <a:solidFill>
+                  <a:srgbClr val="232D37"/>
+                </a:solidFill>
+                <a:latin typeface="Aptos"/>
+              </a:defRPr>
+            </a:pPr>
+            <a:r>
+              <a:t>Read-only operation from lastProjection.</a:t>
+            </a:r>
+          </a:p>
+        </p:txBody>
+      </p:sp>
+      <p:sp>
+        <p:nvSpPr>
+          <p:cNvPr id="9" name="Rectangle 8"/>
           <p:cNvSpPr/>
           <p:nvPr/>
         </p:nvSpPr>
         <p:spPr>
           <a:xfrm>
-            <a:off x="7461503" y="1417320"/>
-            <a:ext cx="82296" cy="1325880"/>
+            <a:off x="8220456" y="1234440"/>
+            <a:ext cx="82296" cy="4480560"/>
           </a:xfrm>
           <a:prstGeom prst="rect">
             <a:avLst/>
@@ -4602,710 +4480,9 @@
           </a:p>
         </p:txBody>
       </p:sp>
-      <p:cxnSp>
-        <p:nvCxnSpPr>
-          <p:cNvPr id="15" name="Connector 14"/>
-          <p:cNvCxnSpPr/>
-          <p:nvPr/>
-        </p:nvCxnSpPr>
-        <p:spPr>
-          <a:xfrm>
-            <a:off x="9473184" y="2075688"/>
-            <a:ext cx="256031" cy="0"/>
-          </a:xfrm>
-          <a:prstGeom prst="line">
-            <a:avLst/>
-          </a:prstGeom>
-          <a:ln w="22860">
-            <a:solidFill>
-              <a:srgbClr val="7852B0"/>
-            </a:solidFill>
-          </a:ln>
-        </p:spPr>
-        <p:style>
-          <a:lnRef idx="2">
-            <a:schemeClr val="accent1"/>
-          </a:lnRef>
-          <a:fillRef idx="0">
-            <a:schemeClr val="accent1"/>
-          </a:fillRef>
-          <a:effectRef idx="1">
-            <a:schemeClr val="accent1"/>
-          </a:effectRef>
-          <a:fontRef idx="minor">
-            <a:schemeClr val="tx1"/>
-          </a:fontRef>
-        </p:style>
-      </p:cxnSp>
-      <p:sp>
-        <p:nvSpPr>
-          <p:cNvPr id="16" name="Rounded Rectangle 15"/>
-          <p:cNvSpPr/>
-          <p:nvPr/>
-        </p:nvSpPr>
-        <p:spPr>
-          <a:xfrm>
-            <a:off x="9811511" y="1417320"/>
-            <a:ext cx="1993392" cy="1325880"/>
-          </a:xfrm>
-          <a:prstGeom prst="roundRect">
-            <a:avLst/>
-          </a:prstGeom>
-          <a:solidFill>
-            <a:srgbClr val="FAFBFD"/>
-          </a:solidFill>
-          <a:ln w="14604">
-            <a:solidFill>
-              <a:srgbClr val="E5892A"/>
-            </a:solidFill>
-          </a:ln>
-        </p:spPr>
-        <p:style>
-          <a:lnRef idx="1">
-            <a:schemeClr val="accent1"/>
-          </a:lnRef>
-          <a:fillRef idx="3">
-            <a:schemeClr val="accent1"/>
-          </a:fillRef>
-          <a:effectRef idx="2">
-            <a:schemeClr val="accent1"/>
-          </a:effectRef>
-          <a:fontRef idx="minor">
-            <a:schemeClr val="lt1"/>
-          </a:fontRef>
-        </p:style>
-        <p:txBody>
-          <a:bodyPr rtlCol="0" anchor="ctr" lIns="182880" tIns="100584"/>
-          <a:lstStyle/>
-          <a:p>
-            <a:pPr algn="ctr">
-              <a:defRPr sz="1500" b="1">
-                <a:solidFill>
-                  <a:srgbClr val="232D37"/>
-                </a:solidFill>
-                <a:latin typeface="Aptos Display"/>
-              </a:defRPr>
-            </a:pPr>
-            <a:r>
-              <a:t>Pages</a:t>
-            </a:r>
-          </a:p>
-          <a:p>
-            <a:pPr>
-              <a:spcBef>
-                <a:spcPts val="400"/>
-              </a:spcBef>
-              <a:defRPr sz="1100">
-                <a:solidFill>
-                  <a:srgbClr val="232D37"/>
-                </a:solidFill>
-                <a:latin typeface="Aptos"/>
-              </a:defRPr>
-            </a:pPr>
-            <a:r>
-              <a:t>Formulas / Notes</a:t>
-            </a:r>
-          </a:p>
-        </p:txBody>
-      </p:sp>
-      <p:sp>
-        <p:nvSpPr>
-          <p:cNvPr id="17" name="Rectangle 16"/>
-          <p:cNvSpPr/>
-          <p:nvPr/>
-        </p:nvSpPr>
-        <p:spPr>
-          <a:xfrm>
-            <a:off x="9811511" y="1417320"/>
-            <a:ext cx="82296" cy="1325880"/>
-          </a:xfrm>
-          <a:prstGeom prst="rect">
-            <a:avLst/>
-          </a:prstGeom>
-          <a:solidFill>
-            <a:srgbClr val="E5892A"/>
-          </a:solidFill>
-          <a:ln>
-            <a:noFill/>
-          </a:ln>
-        </p:spPr>
-        <p:style>
-          <a:lnRef idx="1">
-            <a:schemeClr val="accent1"/>
-          </a:lnRef>
-          <a:fillRef idx="3">
-            <a:schemeClr val="accent1"/>
-          </a:fillRef>
-          <a:effectRef idx="2">
-            <a:schemeClr val="accent1"/>
-          </a:effectRef>
-          <a:fontRef idx="minor">
-            <a:schemeClr val="lt1"/>
-          </a:fontRef>
-        </p:style>
-        <p:txBody>
-          <a:bodyPr rtlCol="0" anchor="ctr"/>
-          <a:lstStyle/>
-          <a:p>
-            <a:pPr algn="ctr"/>
-          </a:p>
-        </p:txBody>
-      </p:sp>
-      <p:sp>
-        <p:nvSpPr>
-          <p:cNvPr id="18" name="Rounded Rectangle 17"/>
-          <p:cNvSpPr/>
-          <p:nvPr/>
-        </p:nvSpPr>
-        <p:spPr>
-          <a:xfrm>
-            <a:off x="777240" y="3429000"/>
-            <a:ext cx="3383280" cy="1508760"/>
-          </a:xfrm>
-          <a:prstGeom prst="roundRect">
-            <a:avLst/>
-          </a:prstGeom>
-          <a:solidFill>
-            <a:srgbClr val="EAF9F4"/>
-          </a:solidFill>
-          <a:ln w="14604">
-            <a:solidFill>
-              <a:srgbClr val="429761"/>
-            </a:solidFill>
-          </a:ln>
-        </p:spPr>
-        <p:style>
-          <a:lnRef idx="1">
-            <a:schemeClr val="accent1"/>
-          </a:lnRef>
-          <a:fillRef idx="3">
-            <a:schemeClr val="accent1"/>
-          </a:fillRef>
-          <a:effectRef idx="2">
-            <a:schemeClr val="accent1"/>
-          </a:effectRef>
-          <a:fontRef idx="minor">
-            <a:schemeClr val="lt1"/>
-          </a:fontRef>
-        </p:style>
-        <p:txBody>
-          <a:bodyPr rtlCol="0" anchor="ctr" lIns="182880" tIns="100584"/>
-          <a:lstStyle/>
-          <a:p>
-            <a:pPr algn="ctr">
-              <a:defRPr sz="1700" b="1">
-                <a:solidFill>
-                  <a:srgbClr val="232D37"/>
-                </a:solidFill>
-                <a:latin typeface="Aptos Display"/>
-              </a:defRPr>
-            </a:pPr>
-            <a:r>
-              <a:t>Compute boundary</a:t>
-            </a:r>
-          </a:p>
-          <a:p>
-            <a:pPr>
-              <a:spcBef>
-                <a:spcPts val="400"/>
-              </a:spcBef>
-              <a:defRPr sz="1200">
-                <a:solidFill>
-                  <a:srgbClr val="232D37"/>
-                </a:solidFill>
-                <a:latin typeface="Aptos"/>
-              </a:defRPr>
-            </a:pPr>
-            <a:r>
-              <a:t>Reads state.</a:t>
-            </a:r>
-          </a:p>
-          <a:p>
-            <a:pPr>
-              <a:spcBef>
-                <a:spcPts val="400"/>
-              </a:spcBef>
-              <a:defRPr sz="1200">
-                <a:solidFill>
-                  <a:srgbClr val="232D37"/>
-                </a:solidFill>
-                <a:latin typeface="Aptos"/>
-              </a:defRPr>
-            </a:pPr>
-            <a:r>
-              <a:t>Produces one row per projected year.</a:t>
-            </a:r>
-          </a:p>
-          <a:p>
-            <a:pPr>
-              <a:spcBef>
-                <a:spcPts val="400"/>
-              </a:spcBef>
-              <a:defRPr sz="1200">
-                <a:solidFill>
-                  <a:srgbClr val="232D37"/>
-                </a:solidFill>
-                <a:latin typeface="Aptos"/>
-              </a:defRPr>
-            </a:pPr>
-            <a:r>
-              <a:t>Never touches the DOM.</a:t>
-            </a:r>
-          </a:p>
-        </p:txBody>
-      </p:sp>
-      <p:sp>
-        <p:nvSpPr>
-          <p:cNvPr id="19" name="Rectangle 18"/>
-          <p:cNvSpPr/>
-          <p:nvPr/>
-        </p:nvSpPr>
-        <p:spPr>
-          <a:xfrm>
-            <a:off x="777240" y="3429000"/>
-            <a:ext cx="82296" cy="1508760"/>
-          </a:xfrm>
-          <a:prstGeom prst="rect">
-            <a:avLst/>
-          </a:prstGeom>
-          <a:solidFill>
-            <a:srgbClr val="429761"/>
-          </a:solidFill>
-          <a:ln>
-            <a:noFill/>
-          </a:ln>
-        </p:spPr>
-        <p:style>
-          <a:lnRef idx="1">
-            <a:schemeClr val="accent1"/>
-          </a:lnRef>
-          <a:fillRef idx="3">
-            <a:schemeClr val="accent1"/>
-          </a:fillRef>
-          <a:effectRef idx="2">
-            <a:schemeClr val="accent1"/>
-          </a:effectRef>
-          <a:fontRef idx="minor">
-            <a:schemeClr val="lt1"/>
-          </a:fontRef>
-        </p:style>
-        <p:txBody>
-          <a:bodyPr rtlCol="0" anchor="ctr"/>
-          <a:lstStyle/>
-          <a:p>
-            <a:pPr algn="ctr"/>
-          </a:p>
-        </p:txBody>
-      </p:sp>
-      <p:sp>
-        <p:nvSpPr>
-          <p:cNvPr id="20" name="Rounded Rectangle 19"/>
-          <p:cNvSpPr/>
-          <p:nvPr/>
-        </p:nvSpPr>
-        <p:spPr>
-          <a:xfrm>
-            <a:off x="4407408" y="3429000"/>
-            <a:ext cx="3383280" cy="1508760"/>
-          </a:xfrm>
-          <a:prstGeom prst="roundRect">
-            <a:avLst/>
-          </a:prstGeom>
-          <a:solidFill>
-            <a:srgbClr val="F7EFFF"/>
-          </a:solidFill>
-          <a:ln w="14604">
-            <a:solidFill>
-              <a:srgbClr val="7852B0"/>
-            </a:solidFill>
-          </a:ln>
-        </p:spPr>
-        <p:style>
-          <a:lnRef idx="1">
-            <a:schemeClr val="accent1"/>
-          </a:lnRef>
-          <a:fillRef idx="3">
-            <a:schemeClr val="accent1"/>
-          </a:fillRef>
-          <a:effectRef idx="2">
-            <a:schemeClr val="accent1"/>
-          </a:effectRef>
-          <a:fontRef idx="minor">
-            <a:schemeClr val="lt1"/>
-          </a:fontRef>
-        </p:style>
-        <p:txBody>
-          <a:bodyPr rtlCol="0" anchor="ctr" lIns="182880" tIns="100584"/>
-          <a:lstStyle/>
-          <a:p>
-            <a:pPr algn="ctr">
-              <a:defRPr sz="1700" b="1">
-                <a:solidFill>
-                  <a:srgbClr val="232D37"/>
-                </a:solidFill>
-                <a:latin typeface="Aptos Display"/>
-              </a:defRPr>
-            </a:pPr>
-            <a:r>
-              <a:t>Display boundary</a:t>
-            </a:r>
-          </a:p>
-          <a:p>
-            <a:pPr>
-              <a:spcBef>
-                <a:spcPts val="400"/>
-              </a:spcBef>
-              <a:defRPr sz="1200">
-                <a:solidFill>
-                  <a:srgbClr val="232D37"/>
-                </a:solidFill>
-                <a:latin typeface="Aptos"/>
-              </a:defRPr>
-            </a:pPr>
-            <a:r>
-              <a:t>Reads projection rows.</a:t>
-            </a:r>
-          </a:p>
-          <a:p>
-            <a:pPr>
-              <a:spcBef>
-                <a:spcPts val="400"/>
-              </a:spcBef>
-              <a:defRPr sz="1200">
-                <a:solidFill>
-                  <a:srgbClr val="232D37"/>
-                </a:solidFill>
-                <a:latin typeface="Aptos"/>
-              </a:defRPr>
-            </a:pPr>
-            <a:r>
-              <a:t>Builds Chart.js datasets and pages.</a:t>
-            </a:r>
-          </a:p>
-          <a:p>
-            <a:pPr>
-              <a:spcBef>
-                <a:spcPts val="400"/>
-              </a:spcBef>
-              <a:defRPr sz="1200">
-                <a:solidFill>
-                  <a:srgbClr val="232D37"/>
-                </a:solidFill>
-                <a:latin typeface="Aptos"/>
-              </a:defRPr>
-            </a:pPr>
-            <a:r>
-              <a:t>Never recomputes finance.</a:t>
-            </a:r>
-          </a:p>
-        </p:txBody>
-      </p:sp>
-      <p:sp>
-        <p:nvSpPr>
-          <p:cNvPr id="21" name="Rectangle 20"/>
-          <p:cNvSpPr/>
-          <p:nvPr/>
-        </p:nvSpPr>
-        <p:spPr>
-          <a:xfrm>
-            <a:off x="4407408" y="3429000"/>
-            <a:ext cx="82296" cy="1508760"/>
-          </a:xfrm>
-          <a:prstGeom prst="rect">
-            <a:avLst/>
-          </a:prstGeom>
-          <a:solidFill>
-            <a:srgbClr val="7852B0"/>
-          </a:solidFill>
-          <a:ln>
-            <a:noFill/>
-          </a:ln>
-        </p:spPr>
-        <p:style>
-          <a:lnRef idx="1">
-            <a:schemeClr val="accent1"/>
-          </a:lnRef>
-          <a:fillRef idx="3">
-            <a:schemeClr val="accent1"/>
-          </a:fillRef>
-          <a:effectRef idx="2">
-            <a:schemeClr val="accent1"/>
-          </a:effectRef>
-          <a:fontRef idx="minor">
-            <a:schemeClr val="lt1"/>
-          </a:fontRef>
-        </p:style>
-        <p:txBody>
-          <a:bodyPr rtlCol="0" anchor="ctr"/>
-          <a:lstStyle/>
-          <a:p>
-            <a:pPr algn="ctr"/>
-          </a:p>
-        </p:txBody>
-      </p:sp>
-      <p:sp>
-        <p:nvSpPr>
-          <p:cNvPr id="22" name="Rounded Rectangle 21"/>
-          <p:cNvSpPr/>
-          <p:nvPr/>
-        </p:nvSpPr>
-        <p:spPr>
-          <a:xfrm>
-            <a:off x="8037575" y="3429000"/>
-            <a:ext cx="3383280" cy="1508760"/>
-          </a:xfrm>
-          <a:prstGeom prst="roundRect">
-            <a:avLst/>
-          </a:prstGeom>
-          <a:solidFill>
-            <a:srgbClr val="E9F4FF"/>
-          </a:solidFill>
-          <a:ln w="14604">
-            <a:solidFill>
-              <a:srgbClr val="266EB2"/>
-            </a:solidFill>
-          </a:ln>
-        </p:spPr>
-        <p:style>
-          <a:lnRef idx="1">
-            <a:schemeClr val="accent1"/>
-          </a:lnRef>
-          <a:fillRef idx="3">
-            <a:schemeClr val="accent1"/>
-          </a:fillRef>
-          <a:effectRef idx="2">
-            <a:schemeClr val="accent1"/>
-          </a:effectRef>
-          <a:fontRef idx="minor">
-            <a:schemeClr val="lt1"/>
-          </a:fontRef>
-        </p:style>
-        <p:txBody>
-          <a:bodyPr rtlCol="0" anchor="ctr" lIns="182880" tIns="100584"/>
-          <a:lstStyle/>
-          <a:p>
-            <a:pPr algn="ctr">
-              <a:defRPr sz="1700" b="1">
-                <a:solidFill>
-                  <a:srgbClr val="232D37"/>
-                </a:solidFill>
-                <a:latin typeface="Aptos Display"/>
-              </a:defRPr>
-            </a:pPr>
-            <a:r>
-              <a:t>Input boundary</a:t>
-            </a:r>
-          </a:p>
-          <a:p>
-            <a:pPr>
-              <a:spcBef>
-                <a:spcPts val="400"/>
-              </a:spcBef>
-              <a:defRPr sz="1200">
-                <a:solidFill>
-                  <a:srgbClr val="232D37"/>
-                </a:solidFill>
-                <a:latin typeface="Aptos"/>
-              </a:defRPr>
-            </a:pPr>
-            <a:r>
-              <a:t>Renders controls and cards.</a:t>
-            </a:r>
-          </a:p>
-          <a:p>
-            <a:pPr>
-              <a:spcBef>
-                <a:spcPts val="400"/>
-              </a:spcBef>
-              <a:defRPr sz="1200">
-                <a:solidFill>
-                  <a:srgbClr val="232D37"/>
-                </a:solidFill>
-                <a:latin typeface="Aptos"/>
-              </a:defRPr>
-            </a:pPr>
-            <a:r>
-              <a:t>Updates state.</a:t>
-            </a:r>
-          </a:p>
-          <a:p>
-            <a:pPr>
-              <a:spcBef>
-                <a:spcPts val="400"/>
-              </a:spcBef>
-              <a:defRPr sz="1200">
-                <a:solidFill>
-                  <a:srgbClr val="232D37"/>
-                </a:solidFill>
-                <a:latin typeface="Aptos"/>
-              </a:defRPr>
-            </a:pPr>
-            <a:r>
-              <a:t>Hide actions do not recompute.</a:t>
-            </a:r>
-          </a:p>
-        </p:txBody>
-      </p:sp>
-      <p:sp>
-        <p:nvSpPr>
-          <p:cNvPr id="23" name="Rectangle 22"/>
-          <p:cNvSpPr/>
-          <p:nvPr/>
-        </p:nvSpPr>
-        <p:spPr>
-          <a:xfrm>
-            <a:off x="8037575" y="3429000"/>
-            <a:ext cx="82296" cy="1508760"/>
-          </a:xfrm>
-          <a:prstGeom prst="rect">
-            <a:avLst/>
-          </a:prstGeom>
-          <a:solidFill>
-            <a:srgbClr val="266EB2"/>
-          </a:solidFill>
-          <a:ln>
-            <a:noFill/>
-          </a:ln>
-        </p:spPr>
-        <p:style>
-          <a:lnRef idx="1">
-            <a:schemeClr val="accent1"/>
-          </a:lnRef>
-          <a:fillRef idx="3">
-            <a:schemeClr val="accent1"/>
-          </a:fillRef>
-          <a:effectRef idx="2">
-            <a:schemeClr val="accent1"/>
-          </a:effectRef>
-          <a:fontRef idx="minor">
-            <a:schemeClr val="lt1"/>
-          </a:fontRef>
-        </p:style>
-        <p:txBody>
-          <a:bodyPr rtlCol="0" anchor="ctr"/>
-          <a:lstStyle/>
-          <a:p>
-            <a:pPr algn="ctr"/>
-          </a:p>
-        </p:txBody>
-      </p:sp>
-      <p:sp>
-        <p:nvSpPr>
-          <p:cNvPr id="24" name="Rounded Rectangle 23"/>
-          <p:cNvSpPr/>
-          <p:nvPr/>
-        </p:nvSpPr>
-        <p:spPr>
-          <a:xfrm>
-            <a:off x="2011680" y="5440680"/>
-            <a:ext cx="8138160" cy="548640"/>
-          </a:xfrm>
-          <a:prstGeom prst="roundRect">
-            <a:avLst/>
-          </a:prstGeom>
-          <a:solidFill>
-            <a:srgbClr val="F8FAFC"/>
-          </a:solidFill>
-          <a:ln w="14604">
-            <a:solidFill>
-              <a:srgbClr val="168F8D"/>
-            </a:solidFill>
-          </a:ln>
-        </p:spPr>
-        <p:style>
-          <a:lnRef idx="1">
-            <a:schemeClr val="accent1"/>
-          </a:lnRef>
-          <a:fillRef idx="3">
-            <a:schemeClr val="accent1"/>
-          </a:fillRef>
-          <a:effectRef idx="2">
-            <a:schemeClr val="accent1"/>
-          </a:effectRef>
-          <a:fontRef idx="minor">
-            <a:schemeClr val="lt1"/>
-          </a:fontRef>
-        </p:style>
-        <p:txBody>
-          <a:bodyPr rtlCol="0" anchor="ctr" lIns="182880" tIns="100584"/>
-          <a:lstStyle/>
-          <a:p>
-            <a:pPr algn="ctr">
-              <a:defRPr sz="1400" b="1">
-                <a:solidFill>
-                  <a:srgbClr val="232D37"/>
-                </a:solidFill>
-                <a:latin typeface="Aptos Display"/>
-              </a:defRPr>
-            </a:pPr>
-            <a:r>
-              <a:t>Interaction performance</a:t>
-            </a:r>
-          </a:p>
-          <a:p>
-            <a:pPr>
-              <a:spcBef>
-                <a:spcPts val="400"/>
-              </a:spcBef>
-              <a:defRPr sz="1000">
-                <a:solidFill>
-                  <a:srgbClr val="232D37"/>
-                </a:solidFill>
-                <a:latin typeface="Aptos"/>
-              </a:defRPr>
-            </a:pPr>
-            <a:r>
-              <a:t>Typing/sliders are debounced; checkbox and add/remove actions recompute immediately.</a:t>
-            </a:r>
-          </a:p>
-        </p:txBody>
-      </p:sp>
-      <p:sp>
-        <p:nvSpPr>
-          <p:cNvPr id="25" name="Rectangle 24"/>
-          <p:cNvSpPr/>
-          <p:nvPr/>
-        </p:nvSpPr>
-        <p:spPr>
-          <a:xfrm>
-            <a:off x="2011680" y="5440680"/>
-            <a:ext cx="82296" cy="548640"/>
-          </a:xfrm>
-          <a:prstGeom prst="rect">
-            <a:avLst/>
-          </a:prstGeom>
-          <a:solidFill>
-            <a:srgbClr val="168F8D"/>
-          </a:solidFill>
-          <a:ln>
-            <a:noFill/>
-          </a:ln>
-        </p:spPr>
-        <p:style>
-          <a:lnRef idx="1">
-            <a:schemeClr val="accent1"/>
-          </a:lnRef>
-          <a:fillRef idx="3">
-            <a:schemeClr val="accent1"/>
-          </a:fillRef>
-          <a:effectRef idx="2">
-            <a:schemeClr val="accent1"/>
-          </a:effectRef>
-          <a:fontRef idx="minor">
-            <a:schemeClr val="lt1"/>
-          </a:fontRef>
-        </p:style>
-        <p:txBody>
-          <a:bodyPr rtlCol="0" anchor="ctr"/>
-          <a:lstStyle/>
-          <a:p>
-            <a:pPr algn="ctr"/>
-          </a:p>
-        </p:txBody>
-      </p:sp>
-      <p:sp>
-        <p:nvSpPr>
-          <p:cNvPr id="26" name="Rectangle 25"/>
+      <p:sp>
+        <p:nvSpPr>
+          <p:cNvPr id="10" name="Rectangle 9"/>
           <p:cNvSpPr/>
           <p:nvPr/>
         </p:nvSpPr>
@@ -5348,14 +4525,14 @@
       </p:sp>
       <p:sp>
         <p:nvSpPr>
-          <p:cNvPr id="27" name="TextBox 26"/>
+          <p:cNvPr id="11" name="TextBox 10"/>
           <p:cNvSpPr txBox="1"/>
           <p:nvPr/>
         </p:nvSpPr>
         <p:spPr>
           <a:xfrm>
             <a:off x="530352" y="6510528"/>
-            <a:ext cx="10881360" cy="164592"/>
+            <a:ext cx="10881360" cy="146304"/>
           </a:xfrm>
           <a:prstGeom prst="rect">
             <a:avLst/>
@@ -5377,7 +4554,7 @@
               </a:defRPr>
             </a:pPr>
             <a:r>
-              <a:t>Retirement Income Planner • Architecture overview • Updated specification</a:t>
+              <a:t>Retirement Income Planner • Architecture overview • IRMAA and Excel-export update</a:t>
             </a:r>
           </a:p>
         </p:txBody>
@@ -5416,8 +4593,8 @@
         </p:nvSpPr>
         <p:spPr>
           <a:xfrm>
-            <a:off x="502920" y="237744"/>
-            <a:ext cx="11155680" cy="457200"/>
+            <a:off x="502920" y="246888"/>
+            <a:ext cx="11155680" cy="438912"/>
           </a:xfrm>
           <a:prstGeom prst="rect">
             <a:avLst/>
@@ -5439,7 +4616,7 @@
               </a:defRPr>
             </a:pPr>
             <a:r>
-              <a:t>State model: compute inclusion is separate from screen visibility</a:t>
+              <a:t>IRMAA expense: household calculation and portfolio allocation</a:t>
             </a:r>
           </a:p>
         </p:txBody>
@@ -5453,7 +4630,7 @@
         <p:spPr>
           <a:xfrm>
             <a:off x="530352" y="786384"/>
-            <a:ext cx="10972800" cy="256032"/>
+            <a:ext cx="10972800" cy="219456"/>
           </a:xfrm>
           <a:prstGeom prst="rect">
             <a:avLst/>
@@ -5475,7 +4652,7 @@
               </a:defRPr>
             </a:pPr>
             <a:r>
-              <a:t>The updated schema adds independent enabled and hidden flags to every income-source item.</a:t>
+              <a:t>IRMAA is calculated once for the household, then charged only to opted-in eligible portfolios.</a:t>
             </a:r>
           </a:p>
         </p:txBody>
@@ -5488,18 +4665,18 @@
         </p:nvSpPr>
         <p:spPr>
           <a:xfrm>
-            <a:off x="685800" y="1280160"/>
-            <a:ext cx="3383280" cy="1143000"/>
+            <a:off x="502920" y="1143000"/>
+            <a:ext cx="2240280" cy="1325880"/>
           </a:xfrm>
           <a:prstGeom prst="roundRect">
             <a:avLst/>
           </a:prstGeom>
           <a:solidFill>
-            <a:srgbClr val="EAF9F4"/>
+            <a:srgbClr val="E9F4FF"/>
           </a:solidFill>
-          <a:ln w="14604">
+          <a:ln w="13970">
             <a:solidFill>
-              <a:srgbClr val="429761"/>
+              <a:srgbClr val="266EB2"/>
             </a:solidFill>
           </a:ln>
         </p:spPr>
@@ -5518,11 +4695,11 @@
           </a:fontRef>
         </p:style>
         <p:txBody>
-          <a:bodyPr rtlCol="0" anchor="ctr" lIns="182880" tIns="100584"/>
+          <a:bodyPr rtlCol="0" anchor="ctr" lIns="182880" rIns="100584" tIns="91440"/>
           <a:lstStyle/>
           <a:p>
             <a:pPr algn="ctr">
-              <a:defRPr sz="1700" b="1">
+              <a:defRPr sz="1600" b="1">
                 <a:solidFill>
                   <a:srgbClr val="232D37"/>
                 </a:solidFill>
@@ -5530,13 +4707,13 @@
               </a:defRPr>
             </a:pPr>
             <a:r>
-              <a:t>enabled = financial participation</a:t>
+              <a:t>Prior-year AGI</a:t>
             </a:r>
           </a:p>
           <a:p>
             <a:pPr>
               <a:spcBef>
-                <a:spcPts val="400"/>
+                <a:spcPts val="300"/>
               </a:spcBef>
               <a:defRPr sz="1200">
                 <a:solidFill>
@@ -5546,7 +4723,23 @@
               </a:defRPr>
             </a:pPr>
             <a:r>
-              <a:t>When true, the item is used by Compute and can appear in charts.</a:t>
+              <a:t>Use prior-year AGI</a:t>
+            </a:r>
+          </a:p>
+          <a:p>
+            <a:pPr>
+              <a:spcBef>
+                <a:spcPts val="300"/>
+              </a:spcBef>
+              <a:defRPr sz="1200">
+                <a:solidFill>
+                  <a:srgbClr val="232D37"/>
+                </a:solidFill>
+                <a:latin typeface="Aptos"/>
+              </a:defRPr>
+            </a:pPr>
+            <a:r>
+              <a:t>Year 0 surcharge = $0</a:t>
             </a:r>
           </a:p>
         </p:txBody>
@@ -5559,8 +4752,138 @@
         </p:nvSpPr>
         <p:spPr>
           <a:xfrm>
-            <a:off x="685800" y="1280160"/>
-            <a:ext cx="82296" cy="1143000"/>
+            <a:off x="502920" y="1143000"/>
+            <a:ext cx="82296" cy="1325880"/>
+          </a:xfrm>
+          <a:prstGeom prst="rect">
+            <a:avLst/>
+          </a:prstGeom>
+          <a:solidFill>
+            <a:srgbClr val="266EB2"/>
+          </a:solidFill>
+          <a:ln>
+            <a:noFill/>
+          </a:ln>
+        </p:spPr>
+        <p:style>
+          <a:lnRef idx="1">
+            <a:schemeClr val="accent1"/>
+          </a:lnRef>
+          <a:fillRef idx="3">
+            <a:schemeClr val="accent1"/>
+          </a:fillRef>
+          <a:effectRef idx="2">
+            <a:schemeClr val="accent1"/>
+          </a:effectRef>
+          <a:fontRef idx="minor">
+            <a:schemeClr val="lt1"/>
+          </a:fontRef>
+        </p:style>
+        <p:txBody>
+          <a:bodyPr rtlCol="0" anchor="ctr"/>
+          <a:lstStyle/>
+          <a:p>
+            <a:pPr algn="ctr"/>
+          </a:p>
+        </p:txBody>
+      </p:sp>
+      <p:sp>
+        <p:nvSpPr>
+          <p:cNvPr id="6" name="Rounded Rectangle 5"/>
+          <p:cNvSpPr/>
+          <p:nvPr/>
+        </p:nvSpPr>
+        <p:spPr>
+          <a:xfrm>
+            <a:off x="3063240" y="1143000"/>
+            <a:ext cx="2240280" cy="1325880"/>
+          </a:xfrm>
+          <a:prstGeom prst="roundRect">
+            <a:avLst/>
+          </a:prstGeom>
+          <a:solidFill>
+            <a:srgbClr val="EAF9F4"/>
+          </a:solidFill>
+          <a:ln w="13970">
+            <a:solidFill>
+              <a:srgbClr val="429761"/>
+            </a:solidFill>
+          </a:ln>
+        </p:spPr>
+        <p:style>
+          <a:lnRef idx="1">
+            <a:schemeClr val="accent1"/>
+          </a:lnRef>
+          <a:fillRef idx="3">
+            <a:schemeClr val="accent1"/>
+          </a:fillRef>
+          <a:effectRef idx="2">
+            <a:schemeClr val="accent1"/>
+          </a:effectRef>
+          <a:fontRef idx="minor">
+            <a:schemeClr val="lt1"/>
+          </a:fontRef>
+        </p:style>
+        <p:txBody>
+          <a:bodyPr rtlCol="0" anchor="ctr" lIns="182880" rIns="100584" tIns="91440"/>
+          <a:lstStyle/>
+          <a:p>
+            <a:pPr algn="ctr">
+              <a:defRPr sz="1600" b="1">
+                <a:solidFill>
+                  <a:srgbClr val="232D37"/>
+                </a:solidFill>
+                <a:latin typeface="Aptos Display"/>
+              </a:defRPr>
+            </a:pPr>
+            <a:r>
+              <a:t>IRMAA tier</a:t>
+            </a:r>
+          </a:p>
+          <a:p>
+            <a:pPr>
+              <a:spcBef>
+                <a:spcPts val="300"/>
+              </a:spcBef>
+              <a:defRPr sz="1200">
+                <a:solidFill>
+                  <a:srgbClr val="232D37"/>
+                </a:solidFill>
+                <a:latin typeface="Aptos"/>
+              </a:defRPr>
+            </a:pPr>
+            <a:r>
+              <a:t>Apply current filing-status tier</a:t>
+            </a:r>
+          </a:p>
+          <a:p>
+            <a:pPr>
+              <a:spcBef>
+                <a:spcPts val="300"/>
+              </a:spcBef>
+              <a:defRPr sz="1200">
+                <a:solidFill>
+                  <a:srgbClr val="232D37"/>
+                </a:solidFill>
+                <a:latin typeface="Aptos"/>
+              </a:defRPr>
+            </a:pPr>
+            <a:r>
+              <a:t>Tables are indexed</a:t>
+            </a:r>
+          </a:p>
+        </p:txBody>
+      </p:sp>
+      <p:sp>
+        <p:nvSpPr>
+          <p:cNvPr id="7" name="Rectangle 6"/>
+          <p:cNvSpPr/>
+          <p:nvPr/>
+        </p:nvSpPr>
+        <p:spPr>
+          <a:xfrm>
+            <a:off x="3063240" y="1143000"/>
+            <a:ext cx="82296" cy="1325880"/>
           </a:xfrm>
           <a:prstGeom prst="rect">
             <a:avLst/>
@@ -5596,24 +4919,24 @@
       </p:sp>
       <p:sp>
         <p:nvSpPr>
-          <p:cNvPr id="6" name="Rounded Rectangle 5"/>
+          <p:cNvPr id="8" name="Rounded Rectangle 7"/>
           <p:cNvSpPr/>
           <p:nvPr/>
         </p:nvSpPr>
         <p:spPr>
           <a:xfrm>
-            <a:off x="685800" y="2743200"/>
-            <a:ext cx="3383280" cy="1143000"/>
+            <a:off x="5623560" y="1143000"/>
+            <a:ext cx="2240280" cy="1325880"/>
           </a:xfrm>
           <a:prstGeom prst="roundRect">
             <a:avLst/>
           </a:prstGeom>
           <a:solidFill>
-            <a:srgbClr val="E9F4FF"/>
+            <a:srgbClr val="FFF6E8"/>
           </a:solidFill>
-          <a:ln w="14604">
+          <a:ln w="13970">
             <a:solidFill>
-              <a:srgbClr val="266EB2"/>
+              <a:srgbClr val="E5892A"/>
             </a:solidFill>
           </a:ln>
         </p:spPr>
@@ -5632,11 +4955,11 @@
           </a:fontRef>
         </p:style>
         <p:txBody>
-          <a:bodyPr rtlCol="0" anchor="ctr" lIns="182880" tIns="100584"/>
+          <a:bodyPr rtlCol="0" anchor="ctr" lIns="182880" rIns="100584" tIns="91440"/>
           <a:lstStyle/>
           <a:p>
             <a:pPr algn="ctr">
-              <a:defRPr sz="1700" b="1">
+              <a:defRPr sz="1600" b="1">
                 <a:solidFill>
                   <a:srgbClr val="232D37"/>
                 </a:solidFill>
@@ -5644,13 +4967,13 @@
               </a:defRPr>
             </a:pPr>
             <a:r>
-              <a:t>hidden = visual collapse</a:t>
+              <a:t>Enrolled people</a:t>
             </a:r>
           </a:p>
           <a:p>
             <a:pPr>
               <a:spcBef>
-                <a:spcPts val="400"/>
+                <a:spcPts val="300"/>
               </a:spcBef>
               <a:defRPr sz="1200">
                 <a:solidFill>
@@ -5660,121 +4983,7 @@
               </a:defRPr>
             </a:pPr>
             <a:r>
-              <a:t>When true, only the input card body is collapsed. Data remains intact and editable.</a:t>
-            </a:r>
-          </a:p>
-        </p:txBody>
-      </p:sp>
-      <p:sp>
-        <p:nvSpPr>
-          <p:cNvPr id="7" name="Rectangle 6"/>
-          <p:cNvSpPr/>
-          <p:nvPr/>
-        </p:nvSpPr>
-        <p:spPr>
-          <a:xfrm>
-            <a:off x="685800" y="2743200"/>
-            <a:ext cx="82296" cy="1143000"/>
-          </a:xfrm>
-          <a:prstGeom prst="rect">
-            <a:avLst/>
-          </a:prstGeom>
-          <a:solidFill>
-            <a:srgbClr val="266EB2"/>
-          </a:solidFill>
-          <a:ln>
-            <a:noFill/>
-          </a:ln>
-        </p:spPr>
-        <p:style>
-          <a:lnRef idx="1">
-            <a:schemeClr val="accent1"/>
-          </a:lnRef>
-          <a:fillRef idx="3">
-            <a:schemeClr val="accent1"/>
-          </a:fillRef>
-          <a:effectRef idx="2">
-            <a:schemeClr val="accent1"/>
-          </a:effectRef>
-          <a:fontRef idx="minor">
-            <a:schemeClr val="lt1"/>
-          </a:fontRef>
-        </p:style>
-        <p:txBody>
-          <a:bodyPr rtlCol="0" anchor="ctr"/>
-          <a:lstStyle/>
-          <a:p>
-            <a:pPr algn="ctr"/>
-          </a:p>
-        </p:txBody>
-      </p:sp>
-      <p:sp>
-        <p:nvSpPr>
-          <p:cNvPr id="8" name="Rounded Rectangle 7"/>
-          <p:cNvSpPr/>
-          <p:nvPr/>
-        </p:nvSpPr>
-        <p:spPr>
-          <a:xfrm>
-            <a:off x="685800" y="4206240"/>
-            <a:ext cx="3383280" cy="1143000"/>
-          </a:xfrm>
-          <a:prstGeom prst="roundRect">
-            <a:avLst/>
-          </a:prstGeom>
-          <a:solidFill>
-            <a:srgbClr val="FFF6E8"/>
-          </a:solidFill>
-          <a:ln w="14604">
-            <a:solidFill>
-              <a:srgbClr val="E5892A"/>
-            </a:solidFill>
-          </a:ln>
-        </p:spPr>
-        <p:style>
-          <a:lnRef idx="1">
-            <a:schemeClr val="accent1"/>
-          </a:lnRef>
-          <a:fillRef idx="3">
-            <a:schemeClr val="accent1"/>
-          </a:fillRef>
-          <a:effectRef idx="2">
-            <a:schemeClr val="accent1"/>
-          </a:effectRef>
-          <a:fontRef idx="minor">
-            <a:schemeClr val="lt1"/>
-          </a:fontRef>
-        </p:style>
-        <p:txBody>
-          <a:bodyPr rtlCol="0" anchor="ctr" lIns="182880" tIns="100584"/>
-          <a:lstStyle/>
-          <a:p>
-            <a:pPr algn="ctr">
-              <a:defRPr sz="1700" b="1">
-                <a:solidFill>
-                  <a:srgbClr val="232D37"/>
-                </a:solidFill>
-                <a:latin typeface="Aptos Display"/>
-              </a:defRPr>
-            </a:pPr>
-            <a:r>
-              <a:t>Default coupling</a:t>
-            </a:r>
-          </a:p>
-          <a:p>
-            <a:pPr>
-              <a:spcBef>
-                <a:spcPts val="400"/>
-              </a:spcBef>
-              <a:defRPr sz="1200">
-                <a:solidFill>
-                  <a:srgbClr val="232D37"/>
-                </a:solidFill>
-                <a:latin typeface="Aptos"/>
-              </a:defRPr>
-            </a:pPr>
-            <a:r>
-              <a:t>At fresh boot, reset, and file load: hidden is derived as !enabled.</a:t>
+              <a:t>Tier surcharge × living people age 65+</a:t>
             </a:r>
           </a:p>
         </p:txBody>
@@ -5787,8 +4996,8 @@
         </p:nvSpPr>
         <p:spPr>
           <a:xfrm>
-            <a:off x="685800" y="4206240"/>
-            <a:ext cx="82296" cy="1143000"/>
+            <a:off x="5623560" y="1143000"/>
+            <a:ext cx="82296" cy="1325880"/>
           </a:xfrm>
           <a:prstGeom prst="rect">
             <a:avLst/>
@@ -5830,18 +5039,18 @@
         </p:nvSpPr>
         <p:spPr>
           <a:xfrm>
-            <a:off x="4800600" y="1051560"/>
-            <a:ext cx="6309360" cy="4389120"/>
+            <a:off x="8183879" y="1143000"/>
+            <a:ext cx="2880360" cy="1325880"/>
           </a:xfrm>
           <a:prstGeom prst="roundRect">
             <a:avLst/>
           </a:prstGeom>
           <a:solidFill>
-            <a:srgbClr val="F8FAFC"/>
+            <a:srgbClr val="F7EFFF"/>
           </a:solidFill>
-          <a:ln w="14604">
+          <a:ln w="13970">
             <a:solidFill>
-              <a:srgbClr val="0F2647"/>
+              <a:srgbClr val="7852B0"/>
             </a:solidFill>
           </a:ln>
         </p:spPr>
@@ -5860,11 +5069,11 @@
           </a:fontRef>
         </p:style>
         <p:txBody>
-          <a:bodyPr rtlCol="0" anchor="ctr" lIns="182880" tIns="100584"/>
+          <a:bodyPr rtlCol="0" anchor="ctr" lIns="182880" rIns="100584" tIns="91440"/>
           <a:lstStyle/>
           <a:p>
             <a:pPr algn="ctr">
-              <a:defRPr sz="1900" b="1">
+              <a:defRPr sz="1600" b="1">
                 <a:solidFill>
                   <a:srgbClr val="232D37"/>
                 </a:solidFill>
@@ -5872,100 +5081,23 @@
               </a:defRPr>
             </a:pPr>
             <a:r>
-              <a:t>Four valid item states</a:t>
+              <a:t>Household surcharge</a:t>
             </a:r>
           </a:p>
           <a:p>
             <a:pPr>
               <a:spcBef>
-                <a:spcPts val="400"/>
+                <a:spcPts val="300"/>
               </a:spcBef>
-              <a:defRPr sz="1400">
-                <a:solidFill>
-                  <a:srgbClr val="232D37"/>
-                </a:solidFill>
-                <a:latin typeface="Aptos"/>
-              </a:defRPr>
-            </a:pPr>
-            <a:r>
-              <a:t>Enabled + shown: active and expanded</a:t>
-            </a:r>
-          </a:p>
-          <a:p>
-            <a:pPr>
-              <a:spcBef>
-                <a:spcPts val="400"/>
-              </a:spcBef>
-              <a:defRPr sz="1400">
-                <a:solidFill>
-                  <a:srgbClr val="232D37"/>
-                </a:solidFill>
-                <a:latin typeface="Aptos"/>
-              </a:defRPr>
-            </a:pPr>
-            <a:r>
-              <a:t>Enabled + hidden: active but compact</a:t>
-            </a:r>
-          </a:p>
-          <a:p>
-            <a:pPr>
-              <a:spcBef>
-                <a:spcPts val="400"/>
-              </a:spcBef>
-              <a:defRPr sz="1400">
-                <a:solidFill>
-                  <a:srgbClr val="232D37"/>
-                </a:solidFill>
-                <a:latin typeface="Aptos"/>
-              </a:defRPr>
-            </a:pPr>
-            <a:r>
-              <a:t>Disabled + shown: editable but excluded</a:t>
-            </a:r>
-          </a:p>
-          <a:p>
-            <a:pPr>
-              <a:spcBef>
-                <a:spcPts val="400"/>
-              </a:spcBef>
-              <a:defRPr sz="1400">
-                <a:solidFill>
-                  <a:srgbClr val="232D37"/>
-                </a:solidFill>
-                <a:latin typeface="Aptos"/>
-              </a:defRPr>
-            </a:pPr>
-            <a:r>
-              <a:t>Disabled + hidden: excluded and compact</a:t>
-            </a:r>
-          </a:p>
-          <a:p>
-            <a:pPr>
-              <a:spcBef>
-                <a:spcPts val="400"/>
-              </a:spcBef>
-              <a:defRPr sz="1400">
-                <a:solidFill>
-                  <a:srgbClr val="232D37"/>
-                </a:solidFill>
-                <a:latin typeface="Aptos"/>
-              </a:defRPr>
-            </a:pPr>
-          </a:p>
-          <a:p>
-            <a:pPr>
-              <a:spcBef>
-                <a:spcPts val="400"/>
-              </a:spcBef>
-              <a:defRPr sz="1400">
-                <a:solidFill>
-                  <a:srgbClr val="232D37"/>
-                </a:solidFill>
-                <a:latin typeface="Aptos"/>
-              </a:defRPr>
-            </a:pPr>
-            <a:r>
-              <a:t>Autosave preserves a user’s manual Hide/Show choices; only reset/load re-derives defaults.</a:t>
+              <a:defRPr sz="1200">
+                <a:solidFill>
+                  <a:srgbClr val="232D37"/>
+                </a:solidFill>
+                <a:latin typeface="Aptos"/>
+              </a:defRPr>
+            </a:pPr>
+            <a:r>
+              <a:t>Reported every year as irmaaSurcharge</a:t>
             </a:r>
           </a:p>
         </p:txBody>
@@ -5978,14 +5110,14 @@
         </p:nvSpPr>
         <p:spPr>
           <a:xfrm>
-            <a:off x="4800600" y="1051560"/>
-            <a:ext cx="82296" cy="4389120"/>
+            <a:off x="8183879" y="1143000"/>
+            <a:ext cx="82296" cy="1325880"/>
           </a:xfrm>
           <a:prstGeom prst="rect">
             <a:avLst/>
           </a:prstGeom>
           <a:solidFill>
-            <a:srgbClr val="0F2647"/>
+            <a:srgbClr val="7852B0"/>
           </a:solidFill>
           <a:ln>
             <a:noFill/>
@@ -6021,15 +5153,15 @@
         </p:nvCxnSpPr>
         <p:spPr>
           <a:xfrm>
-            <a:off x="4160520" y="1856231"/>
-            <a:ext cx="530352" cy="0"/>
+            <a:off x="2788920" y="1810512"/>
+            <a:ext cx="201168" cy="0"/>
           </a:xfrm>
           <a:prstGeom prst="line">
             <a:avLst/>
           </a:prstGeom>
-          <a:ln w="25400">
+          <a:ln w="22860">
             <a:solidFill>
-              <a:srgbClr val="429761"/>
+              <a:srgbClr val="266EB2"/>
             </a:solidFill>
           </a:ln>
         </p:spPr>
@@ -6056,15 +5188,15 @@
         </p:nvCxnSpPr>
         <p:spPr>
           <a:xfrm>
-            <a:off x="4160520" y="3319272"/>
-            <a:ext cx="530352" cy="0"/>
+            <a:off x="5349240" y="1810512"/>
+            <a:ext cx="201167" cy="0"/>
           </a:xfrm>
           <a:prstGeom prst="line">
             <a:avLst/>
           </a:prstGeom>
-          <a:ln w="25400">
+          <a:ln w="22860">
             <a:solidFill>
-              <a:srgbClr val="266EB2"/>
+              <a:srgbClr val="429761"/>
             </a:solidFill>
           </a:ln>
         </p:spPr>
@@ -6091,13 +5223,13 @@
         </p:nvCxnSpPr>
         <p:spPr>
           <a:xfrm>
-            <a:off x="4160520" y="4782312"/>
-            <a:ext cx="530352" cy="0"/>
+            <a:off x="7909560" y="1810512"/>
+            <a:ext cx="201168" cy="0"/>
           </a:xfrm>
           <a:prstGeom prst="line">
             <a:avLst/>
           </a:prstGeom>
-          <a:ln w="25400">
+          <a:ln w="22860">
             <a:solidFill>
               <a:srgbClr val="E5892A"/>
             </a:solidFill>
@@ -6120,7 +5252,283 @@
       </p:cxnSp>
       <p:sp>
         <p:nvSpPr>
-          <p:cNvPr id="15" name="Rectangle 14"/>
+          <p:cNvPr id="15" name="Rounded Rectangle 14"/>
+          <p:cNvSpPr/>
+          <p:nvPr/>
+        </p:nvSpPr>
+        <p:spPr>
+          <a:xfrm>
+            <a:off x="1005840" y="3246120"/>
+            <a:ext cx="4663440" cy="1508760"/>
+          </a:xfrm>
+          <a:prstGeom prst="roundRect">
+            <a:avLst/>
+          </a:prstGeom>
+          <a:solidFill>
+            <a:srgbClr val="F8FAFC"/>
+          </a:solidFill>
+          <a:ln w="13970">
+            <a:solidFill>
+              <a:srgbClr val="0F2647"/>
+            </a:solidFill>
+          </a:ln>
+        </p:spPr>
+        <p:style>
+          <a:lnRef idx="1">
+            <a:schemeClr val="accent1"/>
+          </a:lnRef>
+          <a:fillRef idx="3">
+            <a:schemeClr val="accent1"/>
+          </a:fillRef>
+          <a:effectRef idx="2">
+            <a:schemeClr val="accent1"/>
+          </a:effectRef>
+          <a:fontRef idx="minor">
+            <a:schemeClr val="lt1"/>
+          </a:fontRef>
+        </p:style>
+        <p:txBody>
+          <a:bodyPr rtlCol="0" anchor="ctr" lIns="182880" rIns="100584" tIns="91440"/>
+          <a:lstStyle/>
+          <a:p>
+            <a:pPr algn="ctr">
+              <a:defRPr sz="1700" b="1">
+                <a:solidFill>
+                  <a:srgbClr val="232D37"/>
+                </a:solidFill>
+                <a:latin typeface="Aptos Display"/>
+              </a:defRPr>
+            </a:pPr>
+            <a:r>
+              <a:t>Eligible allocation pool</a:t>
+            </a:r>
+          </a:p>
+          <a:p>
+            <a:pPr>
+              <a:spcBef>
+                <a:spcPts val="300"/>
+              </a:spcBef>
+              <a:defRPr sz="1200">
+                <a:solidFill>
+                  <a:srgbClr val="232D37"/>
+                </a:solidFill>
+                <a:latin typeface="Aptos"/>
+              </a:defRPr>
+            </a:pPr>
+            <a:r>
+              <a:t>Enabled + funded + Expenses-on + IRMAA-checked portfolios.</a:t>
+            </a:r>
+          </a:p>
+          <a:p>
+            <a:pPr>
+              <a:spcBef>
+                <a:spcPts val="300"/>
+              </a:spcBef>
+              <a:defRPr sz="1200">
+                <a:solidFill>
+                  <a:srgbClr val="232D37"/>
+                </a:solidFill>
+                <a:latin typeface="Aptos"/>
+              </a:defRPr>
+            </a:pPr>
+            <a:r>
+              <a:t>IDGT portfolios may participate.</a:t>
+            </a:r>
+          </a:p>
+          <a:p>
+            <a:pPr>
+              <a:spcBef>
+                <a:spcPts val="300"/>
+              </a:spcBef>
+              <a:defRPr sz="1200">
+                <a:solidFill>
+                  <a:srgbClr val="232D37"/>
+                </a:solidFill>
+                <a:latin typeface="Aptos"/>
+              </a:defRPr>
+            </a:pPr>
+            <a:r>
+              <a:t>Allocation is pro rata by start-of-year balance.</a:t>
+            </a:r>
+          </a:p>
+        </p:txBody>
+      </p:sp>
+      <p:sp>
+        <p:nvSpPr>
+          <p:cNvPr id="16" name="Rectangle 15"/>
+          <p:cNvSpPr/>
+          <p:nvPr/>
+        </p:nvSpPr>
+        <p:spPr>
+          <a:xfrm>
+            <a:off x="1005840" y="3246120"/>
+            <a:ext cx="82296" cy="1508760"/>
+          </a:xfrm>
+          <a:prstGeom prst="rect">
+            <a:avLst/>
+          </a:prstGeom>
+          <a:solidFill>
+            <a:srgbClr val="0F2647"/>
+          </a:solidFill>
+          <a:ln>
+            <a:noFill/>
+          </a:ln>
+        </p:spPr>
+        <p:style>
+          <a:lnRef idx="1">
+            <a:schemeClr val="accent1"/>
+          </a:lnRef>
+          <a:fillRef idx="3">
+            <a:schemeClr val="accent1"/>
+          </a:fillRef>
+          <a:effectRef idx="2">
+            <a:schemeClr val="accent1"/>
+          </a:effectRef>
+          <a:fontRef idx="minor">
+            <a:schemeClr val="lt1"/>
+          </a:fontRef>
+        </p:style>
+        <p:txBody>
+          <a:bodyPr rtlCol="0" anchor="ctr"/>
+          <a:lstStyle/>
+          <a:p>
+            <a:pPr algn="ctr"/>
+          </a:p>
+        </p:txBody>
+      </p:sp>
+      <p:sp>
+        <p:nvSpPr>
+          <p:cNvPr id="17" name="Rounded Rectangle 16"/>
+          <p:cNvSpPr/>
+          <p:nvPr/>
+        </p:nvSpPr>
+        <p:spPr>
+          <a:xfrm>
+            <a:off x="6492240" y="3246120"/>
+            <a:ext cx="4663440" cy="1508760"/>
+          </a:xfrm>
+          <a:prstGeom prst="roundRect">
+            <a:avLst/>
+          </a:prstGeom>
+          <a:solidFill>
+            <a:srgbClr val="F8FAFC"/>
+          </a:solidFill>
+          <a:ln w="13970">
+            <a:solidFill>
+              <a:srgbClr val="168F8D"/>
+            </a:solidFill>
+          </a:ln>
+        </p:spPr>
+        <p:style>
+          <a:lnRef idx="1">
+            <a:schemeClr val="accent1"/>
+          </a:lnRef>
+          <a:fillRef idx="3">
+            <a:schemeClr val="accent1"/>
+          </a:fillRef>
+          <a:effectRef idx="2">
+            <a:schemeClr val="accent1"/>
+          </a:effectRef>
+          <a:fontRef idx="minor">
+            <a:schemeClr val="lt1"/>
+          </a:fontRef>
+        </p:style>
+        <p:txBody>
+          <a:bodyPr rtlCol="0" anchor="ctr" lIns="182880" rIns="100584" tIns="91440"/>
+          <a:lstStyle/>
+          <a:p>
+            <a:pPr algn="ctr">
+              <a:defRPr sz="1700" b="1">
+                <a:solidFill>
+                  <a:srgbClr val="232D37"/>
+                </a:solidFill>
+                <a:latin typeface="Aptos Display"/>
+              </a:defRPr>
+            </a:pPr>
+            <a:r>
+              <a:t>Why the one-year lag?</a:t>
+            </a:r>
+          </a:p>
+          <a:p>
+            <a:pPr>
+              <a:spcBef>
+                <a:spcPts val="300"/>
+              </a:spcBef>
+              <a:defRPr sz="1200">
+                <a:solidFill>
+                  <a:srgbClr val="232D37"/>
+                </a:solidFill>
+                <a:latin typeface="Aptos"/>
+              </a:defRPr>
+            </a:pPr>
+            <a:r>
+              <a:t>Current AGI can depend on LTCG; LTCG can depend on expenses; expenses can include IRMAA.</a:t>
+            </a:r>
+          </a:p>
+          <a:p>
+            <a:pPr>
+              <a:spcBef>
+                <a:spcPts val="300"/>
+              </a:spcBef>
+              <a:defRPr sz="1200">
+                <a:solidFill>
+                  <a:srgbClr val="232D37"/>
+                </a:solidFill>
+                <a:latin typeface="Aptos"/>
+              </a:defRPr>
+            </a:pPr>
+            <a:r>
+              <a:t>Prior-year AGI avoids circularity and mirrors IRMAA look-back behavior.</a:t>
+            </a:r>
+          </a:p>
+        </p:txBody>
+      </p:sp>
+      <p:sp>
+        <p:nvSpPr>
+          <p:cNvPr id="18" name="Rectangle 17"/>
+          <p:cNvSpPr/>
+          <p:nvPr/>
+        </p:nvSpPr>
+        <p:spPr>
+          <a:xfrm>
+            <a:off x="6492240" y="3246120"/>
+            <a:ext cx="82296" cy="1508760"/>
+          </a:xfrm>
+          <a:prstGeom prst="rect">
+            <a:avLst/>
+          </a:prstGeom>
+          <a:solidFill>
+            <a:srgbClr val="168F8D"/>
+          </a:solidFill>
+          <a:ln>
+            <a:noFill/>
+          </a:ln>
+        </p:spPr>
+        <p:style>
+          <a:lnRef idx="1">
+            <a:schemeClr val="accent1"/>
+          </a:lnRef>
+          <a:fillRef idx="3">
+            <a:schemeClr val="accent1"/>
+          </a:fillRef>
+          <a:effectRef idx="2">
+            <a:schemeClr val="accent1"/>
+          </a:effectRef>
+          <a:fontRef idx="minor">
+            <a:schemeClr val="lt1"/>
+          </a:fontRef>
+        </p:style>
+        <p:txBody>
+          <a:bodyPr rtlCol="0" anchor="ctr"/>
+          <a:lstStyle/>
+          <a:p>
+            <a:pPr algn="ctr"/>
+          </a:p>
+        </p:txBody>
+      </p:sp>
+      <p:sp>
+        <p:nvSpPr>
+          <p:cNvPr id="19" name="Rectangle 18"/>
           <p:cNvSpPr/>
           <p:nvPr/>
         </p:nvSpPr>
@@ -6163,14 +5571,14 @@
       </p:sp>
       <p:sp>
         <p:nvSpPr>
-          <p:cNvPr id="16" name="TextBox 15"/>
+          <p:cNvPr id="20" name="TextBox 19"/>
           <p:cNvSpPr txBox="1"/>
           <p:nvPr/>
         </p:nvSpPr>
         <p:spPr>
           <a:xfrm>
             <a:off x="530352" y="6510528"/>
-            <a:ext cx="10881360" cy="164592"/>
+            <a:ext cx="10881360" cy="146304"/>
           </a:xfrm>
           <a:prstGeom prst="rect">
             <a:avLst/>
@@ -6192,7 +5600,7 @@
               </a:defRPr>
             </a:pPr>
             <a:r>
-              <a:t>Retirement Income Planner • Architecture overview • Updated specification</a:t>
+              <a:t>Retirement Income Planner • Architecture overview • IRMAA and Excel-export update</a:t>
             </a:r>
           </a:p>
         </p:txBody>
@@ -6231,8 +5639,8 @@
         </p:nvSpPr>
         <p:spPr>
           <a:xfrm>
-            <a:off x="502920" y="237744"/>
-            <a:ext cx="11155680" cy="457200"/>
+            <a:off x="502920" y="246888"/>
+            <a:ext cx="11155680" cy="438912"/>
           </a:xfrm>
           <a:prstGeom prst="rect">
             <a:avLst/>
@@ -6254,7 +5662,7 @@
               </a:defRPr>
             </a:pPr>
             <a:r>
-              <a:t>Input layer and plan-management workflow</a:t>
+              <a:t>Portfolio expense waterfall</a:t>
             </a:r>
           </a:p>
         </p:txBody>
@@ -6268,7 +5676,7 @@
         <p:spPr>
           <a:xfrm>
             <a:off x="530352" y="786384"/>
-            <a:ext cx="10972800" cy="256032"/>
+            <a:ext cx="10972800" cy="219456"/>
           </a:xfrm>
           <a:prstGeom prst="rect">
             <a:avLst/>
@@ -6290,7 +5698,7 @@
               </a:defRPr>
             </a:pPr>
             <a:r>
-              <a:t>New components add reusable card headers and a sample-aware Load file menu.</a:t>
+              <a:t>Expenses are paid by each portfolio’s own cash flows—never by wages, Social Security, pensions, rental income, or IRA withdrawals.</a:t>
             </a:r>
           </a:p>
         </p:txBody>
@@ -6303,18 +5711,18 @@
         </p:nvSpPr>
         <p:spPr>
           <a:xfrm>
-            <a:off x="502920" y="1234440"/>
-            <a:ext cx="3154680" cy="4526280"/>
+            <a:off x="502920" y="1170432"/>
+            <a:ext cx="2148840" cy="1115568"/>
           </a:xfrm>
           <a:prstGeom prst="roundRect">
             <a:avLst/>
           </a:prstGeom>
           <a:solidFill>
-            <a:srgbClr val="E9F4FF"/>
+            <a:srgbClr val="FFF6E8"/>
           </a:solidFill>
-          <a:ln w="14604">
+          <a:ln w="13970">
             <a:solidFill>
-              <a:srgbClr val="266EB2"/>
+              <a:srgbClr val="E5892A"/>
             </a:solidFill>
           </a:ln>
         </p:spPr>
@@ -6333,11 +5741,11 @@
           </a:fontRef>
         </p:style>
         <p:txBody>
-          <a:bodyPr rtlCol="0" anchor="ctr" lIns="182880" tIns="100584"/>
+          <a:bodyPr rtlCol="0" anchor="ctr" lIns="182880" rIns="100584" tIns="91440"/>
           <a:lstStyle/>
           <a:p>
             <a:pPr algn="ctr">
-              <a:defRPr sz="1700" b="1">
+              <a:defRPr sz="1600" b="1">
                 <a:solidFill>
                   <a:srgbClr val="232D37"/>
                 </a:solidFill>
@@ -6345,101 +5753,183 @@
               </a:defRPr>
             </a:pPr>
             <a:r>
-              <a:t>Shared controls</a:t>
+              <a:t>Portfolio expenses</a:t>
             </a:r>
           </a:p>
           <a:p>
             <a:pPr>
               <a:spcBef>
-                <a:spcPts val="400"/>
+                <a:spcPts val="300"/>
               </a:spcBef>
-              <a:defRPr sz="1200">
-                <a:solidFill>
-                  <a:srgbClr val="232D37"/>
-                </a:solidFill>
-                <a:latin typeface="Aptos"/>
-              </a:defRPr>
-            </a:pPr>
-            <a:r>
-              <a:t>cardHeader() standardizes Enable + Hide</a:t>
+              <a:defRPr sz="1100">
+                <a:solidFill>
+                  <a:srgbClr val="232D37"/>
+                </a:solidFill>
+                <a:latin typeface="Aptos"/>
+              </a:defRPr>
+            </a:pPr>
+            <a:r>
+              <a:t>Fee → tax drag → IRMAA → withdrawal</a:t>
             </a:r>
           </a:p>
           <a:p>
             <a:pPr>
               <a:spcBef>
-                <a:spcPts val="400"/>
+                <a:spcPts val="300"/>
               </a:spcBef>
-              <a:defRPr sz="1200">
-                <a:solidFill>
-                  <a:srgbClr val="232D37"/>
-                </a:solidFill>
-                <a:latin typeface="Aptos"/>
-              </a:defRPr>
-            </a:pPr>
-            <a:r>
-              <a:t>onEnableToggle() changes compute inclusion</a:t>
+              <a:defRPr sz="1100">
+                <a:solidFill>
+                  <a:srgbClr val="232D37"/>
+                </a:solidFill>
+                <a:latin typeface="Aptos"/>
+              </a:defRPr>
+            </a:pPr>
+            <a:r>
+              <a:t>Each capped by portfolio capacity</a:t>
+            </a:r>
+          </a:p>
+        </p:txBody>
+      </p:sp>
+      <p:sp>
+        <p:nvSpPr>
+          <p:cNvPr id="5" name="Rectangle 4"/>
+          <p:cNvSpPr/>
+          <p:nvPr/>
+        </p:nvSpPr>
+        <p:spPr>
+          <a:xfrm>
+            <a:off x="502920" y="1170432"/>
+            <a:ext cx="82296" cy="1115568"/>
+          </a:xfrm>
+          <a:prstGeom prst="rect">
+            <a:avLst/>
+          </a:prstGeom>
+          <a:solidFill>
+            <a:srgbClr val="E5892A"/>
+          </a:solidFill>
+          <a:ln>
+            <a:noFill/>
+          </a:ln>
+        </p:spPr>
+        <p:style>
+          <a:lnRef idx="1">
+            <a:schemeClr val="accent1"/>
+          </a:lnRef>
+          <a:fillRef idx="3">
+            <a:schemeClr val="accent1"/>
+          </a:fillRef>
+          <a:effectRef idx="2">
+            <a:schemeClr val="accent1"/>
+          </a:effectRef>
+          <a:fontRef idx="minor">
+            <a:schemeClr val="lt1"/>
+          </a:fontRef>
+        </p:style>
+        <p:txBody>
+          <a:bodyPr rtlCol="0" anchor="ctr"/>
+          <a:lstStyle/>
+          <a:p>
+            <a:pPr algn="ctr"/>
+          </a:p>
+        </p:txBody>
+      </p:sp>
+      <p:sp>
+        <p:nvSpPr>
+          <p:cNvPr id="6" name="Rounded Rectangle 5"/>
+          <p:cNvSpPr/>
+          <p:nvPr/>
+        </p:nvSpPr>
+        <p:spPr>
+          <a:xfrm>
+            <a:off x="3063240" y="1170432"/>
+            <a:ext cx="2148840" cy="1115568"/>
+          </a:xfrm>
+          <a:prstGeom prst="roundRect">
+            <a:avLst/>
+          </a:prstGeom>
+          <a:solidFill>
+            <a:srgbClr val="E9F4FF"/>
+          </a:solidFill>
+          <a:ln w="13970">
+            <a:solidFill>
+              <a:srgbClr val="266EB2"/>
+            </a:solidFill>
+          </a:ln>
+        </p:spPr>
+        <p:style>
+          <a:lnRef idx="1">
+            <a:schemeClr val="accent1"/>
+          </a:lnRef>
+          <a:fillRef idx="3">
+            <a:schemeClr val="accent1"/>
+          </a:fillRef>
+          <a:effectRef idx="2">
+            <a:schemeClr val="accent1"/>
+          </a:effectRef>
+          <a:fontRef idx="minor">
+            <a:schemeClr val="lt1"/>
+          </a:fontRef>
+        </p:style>
+        <p:txBody>
+          <a:bodyPr rtlCol="0" anchor="ctr" lIns="182880" rIns="100584" tIns="91440"/>
+          <a:lstStyle/>
+          <a:p>
+            <a:pPr algn="ctr">
+              <a:defRPr sz="1600" b="1">
+                <a:solidFill>
+                  <a:srgbClr val="232D37"/>
+                </a:solidFill>
+                <a:latin typeface="Aptos Display"/>
+              </a:defRPr>
+            </a:pPr>
+            <a:r>
+              <a:t>Own dividends</a:t>
             </a:r>
           </a:p>
           <a:p>
             <a:pPr>
               <a:spcBef>
-                <a:spcPts val="400"/>
+                <a:spcPts val="300"/>
               </a:spcBef>
-              <a:defRPr sz="1200">
-                <a:solidFill>
-                  <a:srgbClr val="232D37"/>
-                </a:solidFill>
-                <a:latin typeface="Aptos"/>
-              </a:defRPr>
-            </a:pPr>
-            <a:r>
-              <a:t>onHideToggle() only changes visual state</a:t>
+              <a:defRPr sz="1100">
+                <a:solidFill>
+                  <a:srgbClr val="232D37"/>
+                </a:solidFill>
+                <a:latin typeface="Aptos"/>
+              </a:defRPr>
+            </a:pPr>
+            <a:r>
+              <a:t>ODIV = balance × yield</a:t>
             </a:r>
           </a:p>
           <a:p>
             <a:pPr>
               <a:spcBef>
-                <a:spcPts val="400"/>
+                <a:spcPts val="300"/>
               </a:spcBef>
-              <a:defRPr sz="1200">
-                <a:solidFill>
-                  <a:srgbClr val="232D37"/>
-                </a:solidFill>
-                <a:latin typeface="Aptos"/>
-              </a:defRPr>
-            </a:pPr>
-            <a:r>
-              <a:t>Age-range and annual-change widgets stay shared</a:t>
-            </a:r>
-          </a:p>
-          <a:p>
-            <a:pPr>
-              <a:spcBef>
-                <a:spcPts val="400"/>
-              </a:spcBef>
-              <a:defRPr sz="1200">
-                <a:solidFill>
-                  <a:srgbClr val="232D37"/>
-                </a:solidFill>
-                <a:latin typeface="Aptos"/>
-              </a:defRPr>
-            </a:pPr>
-            <a:r>
-              <a:t>Brokerage container has no global enable/hide: portfolios are independent</a:t>
-            </a:r>
-          </a:p>
-        </p:txBody>
-      </p:sp>
-      <p:sp>
-        <p:nvSpPr>
-          <p:cNvPr id="5" name="Rectangle 4"/>
+              <a:defRPr sz="1100">
+                <a:solidFill>
+                  <a:srgbClr val="232D37"/>
+                </a:solidFill>
+                <a:latin typeface="Aptos"/>
+              </a:defRPr>
+            </a:pPr>
+            <a:r>
+              <a:t>First source of payment</a:t>
+            </a:r>
+          </a:p>
+        </p:txBody>
+      </p:sp>
+      <p:sp>
+        <p:nvSpPr>
+          <p:cNvPr id="7" name="Rectangle 6"/>
           <p:cNvSpPr/>
           <p:nvPr/>
         </p:nvSpPr>
         <p:spPr>
           <a:xfrm>
-            <a:off x="502920" y="1234440"/>
-            <a:ext cx="82296" cy="4526280"/>
+            <a:off x="3063240" y="1170432"/>
+            <a:ext cx="82296" cy="1115568"/>
           </a:xfrm>
           <a:prstGeom prst="rect">
             <a:avLst/>
@@ -6475,24 +5965,24 @@
       </p:sp>
       <p:sp>
         <p:nvSpPr>
-          <p:cNvPr id="6" name="Rounded Rectangle 5"/>
+          <p:cNvPr id="8" name="Rounded Rectangle 7"/>
           <p:cNvSpPr/>
           <p:nvPr/>
         </p:nvSpPr>
         <p:spPr>
           <a:xfrm>
-            <a:off x="4069080" y="1234440"/>
-            <a:ext cx="3154680" cy="4526280"/>
+            <a:off x="5623560" y="1170432"/>
+            <a:ext cx="2148840" cy="1115568"/>
           </a:xfrm>
           <a:prstGeom prst="roundRect">
             <a:avLst/>
           </a:prstGeom>
           <a:solidFill>
-            <a:srgbClr val="FFF6E8"/>
+            <a:srgbClr val="EAF9F4"/>
           </a:solidFill>
-          <a:ln w="14604">
+          <a:ln w="13970">
             <a:solidFill>
-              <a:srgbClr val="E5892A"/>
+              <a:srgbClr val="429761"/>
             </a:solidFill>
           </a:ln>
         </p:spPr>
@@ -6511,11 +6001,11 @@
           </a:fontRef>
         </p:style>
         <p:txBody>
-          <a:bodyPr rtlCol="0" anchor="ctr" lIns="182880" tIns="100584"/>
+          <a:bodyPr rtlCol="0" anchor="ctr" lIns="182880" rIns="100584" tIns="91440"/>
           <a:lstStyle/>
           <a:p>
             <a:pPr algn="ctr">
-              <a:defRPr sz="1700" b="1">
+              <a:defRPr sz="1600" b="1">
                 <a:solidFill>
                   <a:srgbClr val="232D37"/>
                 </a:solidFill>
@@ -6523,107 +6013,59 @@
               </a:defRPr>
             </a:pPr>
             <a:r>
-              <a:t>Load file ▾</a:t>
+              <a:t>Shortfall sale</a:t>
             </a:r>
           </a:p>
           <a:p>
             <a:pPr>
               <a:spcBef>
-                <a:spcPts val="400"/>
+                <a:spcPts val="300"/>
               </a:spcBef>
-              <a:defRPr sz="1200">
-                <a:solidFill>
-                  <a:srgbClr val="232D37"/>
-                </a:solidFill>
-                <a:latin typeface="Aptos"/>
-              </a:defRPr>
-            </a:pPr>
-            <a:r>
-              <a:t>Choose local file uses browser picker</a:t>
+              <a:defRPr sz="1100">
+                <a:solidFill>
+                  <a:srgbClr val="232D37"/>
+                </a:solidFill>
+                <a:latin typeface="Aptos"/>
+              </a:defRPr>
+            </a:pPr>
+            <a:r>
+              <a:t>Only if expenses exceed dividends</a:t>
             </a:r>
           </a:p>
           <a:p>
             <a:pPr>
               <a:spcBef>
-                <a:spcPts val="400"/>
+                <a:spcPts val="300"/>
               </a:spcBef>
-              <a:defRPr sz="1200">
-                <a:solidFill>
-                  <a:srgbClr val="232D37"/>
-                </a:solidFill>
-                <a:latin typeface="Aptos"/>
-              </a:defRPr>
-            </a:pPr>
-            <a:r>
-              <a:t>Samples are discovered from manifest.json</a:t>
-            </a:r>
-          </a:p>
-          <a:p>
-            <a:pPr>
-              <a:spcBef>
-                <a:spcPts val="400"/>
-              </a:spcBef>
-              <a:defRPr sz="1200">
-                <a:solidFill>
-                  <a:srgbClr val="232D37"/>
-                </a:solidFill>
-                <a:latin typeface="Aptos"/>
-              </a:defRPr>
-            </a:pPr>
-            <a:r>
-              <a:t>Selecting a sample fetches JSON then applies normal load path</a:t>
-            </a:r>
-          </a:p>
-          <a:p>
-            <a:pPr>
-              <a:spcBef>
-                <a:spcPts val="400"/>
-              </a:spcBef>
-              <a:defRPr sz="1200">
-                <a:solidFill>
-                  <a:srgbClr val="232D37"/>
-                </a:solidFill>
-                <a:latin typeface="Aptos"/>
-              </a:defRPr>
-            </a:pPr>
-            <a:r>
-              <a:t>Menu opens quickly; sample discovery fills asynchronously</a:t>
-            </a:r>
-          </a:p>
-          <a:p>
-            <a:pPr>
-              <a:spcBef>
-                <a:spcPts val="400"/>
-              </a:spcBef>
-              <a:defRPr sz="1200">
-                <a:solidFill>
-                  <a:srgbClr val="232D37"/>
-                </a:solidFill>
-                <a:latin typeface="Aptos"/>
-              </a:defRPr>
-            </a:pPr>
-            <a:r>
-              <a:t>File:// limitations are explained in the UI</a:t>
-            </a:r>
-          </a:p>
-        </p:txBody>
-      </p:sp>
-      <p:sp>
-        <p:nvSpPr>
-          <p:cNvPr id="7" name="Rectangle 6"/>
+              <a:defRPr sz="1100">
+                <a:solidFill>
+                  <a:srgbClr val="232D37"/>
+                </a:solidFill>
+                <a:latin typeface="Aptos"/>
+              </a:defRPr>
+            </a:pPr>
+            <a:r>
+              <a:t>LTCG = shortfall × gain fraction</a:t>
+            </a:r>
+          </a:p>
+        </p:txBody>
+      </p:sp>
+      <p:sp>
+        <p:nvSpPr>
+          <p:cNvPr id="9" name="Rectangle 8"/>
           <p:cNvSpPr/>
           <p:nvPr/>
         </p:nvSpPr>
         <p:spPr>
           <a:xfrm>
-            <a:off x="4069080" y="1234440"/>
-            <a:ext cx="82296" cy="4526280"/>
+            <a:off x="5623560" y="1170432"/>
+            <a:ext cx="82296" cy="1115568"/>
           </a:xfrm>
           <a:prstGeom prst="rect">
             <a:avLst/>
           </a:prstGeom>
           <a:solidFill>
-            <a:srgbClr val="E5892A"/>
+            <a:srgbClr val="429761"/>
           </a:solidFill>
           <a:ln>
             <a:noFill/>
@@ -6653,14 +6095,14 @@
       </p:sp>
       <p:sp>
         <p:nvSpPr>
-          <p:cNvPr id="8" name="Rounded Rectangle 7"/>
+          <p:cNvPr id="10" name="Rounded Rectangle 9"/>
           <p:cNvSpPr/>
           <p:nvPr/>
         </p:nvSpPr>
         <p:spPr>
           <a:xfrm>
-            <a:off x="7635240" y="1234440"/>
-            <a:ext cx="3886200" cy="4526280"/>
+            <a:off x="8183879" y="1170432"/>
+            <a:ext cx="3474720" cy="1115568"/>
           </a:xfrm>
           <a:prstGeom prst="roundRect">
             <a:avLst/>
@@ -6668,7 +6110,7 @@
           <a:solidFill>
             <a:srgbClr val="F7EFFF"/>
           </a:solidFill>
-          <a:ln w="14604">
+          <a:ln w="13970">
             <a:solidFill>
               <a:srgbClr val="7852B0"/>
             </a:solidFill>
@@ -6689,11 +6131,11 @@
           </a:fontRef>
         </p:style>
         <p:txBody>
-          <a:bodyPr rtlCol="0" anchor="ctr" lIns="182880" tIns="100584"/>
+          <a:bodyPr rtlCol="0" anchor="ctr" lIns="182880" rIns="100584" tIns="91440"/>
           <a:lstStyle/>
           <a:p>
             <a:pPr algn="ctr">
-              <a:defRPr sz="1700" b="1">
+              <a:defRPr sz="1600" b="1">
                 <a:solidFill>
                   <a:srgbClr val="232D37"/>
                 </a:solidFill>
@@ -6701,130 +6143,53 @@
               </a:defRPr>
             </a:pPr>
             <a:r>
-              <a:t>Safe load sequence</a:t>
+              <a:t>Roll forward</a:t>
             </a:r>
           </a:p>
           <a:p>
             <a:pPr>
               <a:spcBef>
-                <a:spcPts val="400"/>
+                <a:spcPts val="300"/>
               </a:spcBef>
-              <a:defRPr sz="1200">
-                <a:solidFill>
-                  <a:srgbClr val="232D37"/>
-                </a:solidFill>
-                <a:latin typeface="Aptos"/>
-              </a:defRPr>
-            </a:pPr>
-            <a:r>
-              <a:t>1. Destroy existing chart instances</a:t>
+              <a:defRPr sz="1100">
+                <a:solidFill>
+                  <a:srgbClr val="232D37"/>
+                </a:solidFill>
+                <a:latin typeface="Aptos"/>
+              </a:defRPr>
+            </a:pPr>
+            <a:r>
+              <a:t>balance = growth-adjusted balance − actual expenses</a:t>
             </a:r>
           </a:p>
           <a:p>
             <a:pPr>
               <a:spcBef>
-                <a:spcPts val="400"/>
+                <a:spcPts val="300"/>
               </a:spcBef>
-              <a:defRPr sz="1200">
-                <a:solidFill>
-                  <a:srgbClr val="232D37"/>
-                </a:solidFill>
-                <a:latin typeface="Aptos"/>
-              </a:defRPr>
-            </a:pPr>
-            <a:r>
-              <a:t>2. Reset to defaults</a:t>
-            </a:r>
-          </a:p>
-          <a:p>
-            <a:pPr>
-              <a:spcBef>
-                <a:spcPts val="400"/>
-              </a:spcBef>
-              <a:defRPr sz="1200">
-                <a:solidFill>
-                  <a:srgbClr val="232D37"/>
-                </a:solidFill>
-                <a:latin typeface="Aptos"/>
-              </a:defRPr>
-            </a:pPr>
-            <a:r>
-              <a:t>3. Hydrate imported JSON</a:t>
-            </a:r>
-          </a:p>
-          <a:p>
-            <a:pPr>
-              <a:spcBef>
-                <a:spcPts val="400"/>
-              </a:spcBef>
-              <a:defRPr sz="1200">
-                <a:solidFill>
-                  <a:srgbClr val="232D37"/>
-                </a:solidFill>
-                <a:latin typeface="Aptos"/>
-              </a:defRPr>
-            </a:pPr>
-            <a:r>
-              <a:t>4. Apply default hidden-from-enabled</a:t>
-            </a:r>
-          </a:p>
-          <a:p>
-            <a:pPr>
-              <a:spcBef>
-                <a:spcPts val="400"/>
-              </a:spcBef>
-              <a:defRPr sz="1200">
-                <a:solidFill>
-                  <a:srgbClr val="232D37"/>
-                </a:solidFill>
-                <a:latin typeface="Aptos"/>
-              </a:defRPr>
-            </a:pPr>
-            <a:r>
-              <a:t>5. Full render and recompute</a:t>
-            </a:r>
-          </a:p>
-          <a:p>
-            <a:pPr>
-              <a:spcBef>
-                <a:spcPts val="400"/>
-              </a:spcBef>
-              <a:defRPr sz="1200">
-                <a:solidFill>
-                  <a:srgbClr val="232D37"/>
-                </a:solidFill>
-                <a:latin typeface="Aptos"/>
-              </a:defRPr>
-            </a:pPr>
-          </a:p>
-          <a:p>
-            <a:pPr>
-              <a:spcBef>
-                <a:spcPts val="400"/>
-              </a:spcBef>
-              <a:defRPr sz="1200">
-                <a:solidFill>
-                  <a:srgbClr val="232D37"/>
-                </a:solidFill>
-                <a:latin typeface="Aptos"/>
-              </a:defRPr>
-            </a:pPr>
-            <a:r>
-              <a:t>This sequence avoids stale charts and stale fields after a restore.</a:t>
-            </a:r>
-          </a:p>
-        </p:txBody>
-      </p:sp>
-      <p:sp>
-        <p:nvSpPr>
-          <p:cNvPr id="9" name="Rectangle 8"/>
+              <a:defRPr sz="1100">
+                <a:solidFill>
+                  <a:srgbClr val="232D37"/>
+                </a:solidFill>
+                <a:latin typeface="Aptos"/>
+              </a:defRPr>
+            </a:pPr>
+            <a:r>
+              <a:t>Basis follows sales, reinvestment, inflation</a:t>
+            </a:r>
+          </a:p>
+        </p:txBody>
+      </p:sp>
+      <p:sp>
+        <p:nvSpPr>
+          <p:cNvPr id="11" name="Rectangle 10"/>
           <p:cNvSpPr/>
           <p:nvPr/>
         </p:nvSpPr>
         <p:spPr>
           <a:xfrm>
-            <a:off x="7635240" y="1234440"/>
-            <a:ext cx="82296" cy="4526280"/>
+            <a:off x="8183879" y="1170432"/>
+            <a:ext cx="82296" cy="1115568"/>
           </a:xfrm>
           <a:prstGeom prst="rect">
             <a:avLst/>
@@ -6858,9 +6223,374 @@
           </a:p>
         </p:txBody>
       </p:sp>
-      <p:sp>
-        <p:nvSpPr>
-          <p:cNvPr id="10" name="Rectangle 9"/>
+      <p:cxnSp>
+        <p:nvCxnSpPr>
+          <p:cNvPr id="12" name="Connector 11"/>
+          <p:cNvCxnSpPr/>
+          <p:nvPr/>
+        </p:nvCxnSpPr>
+        <p:spPr>
+          <a:xfrm>
+            <a:off x="2697480" y="1728216"/>
+            <a:ext cx="292608" cy="0"/>
+          </a:xfrm>
+          <a:prstGeom prst="line">
+            <a:avLst/>
+          </a:prstGeom>
+          <a:ln w="22860">
+            <a:solidFill>
+              <a:srgbClr val="E5892A"/>
+            </a:solidFill>
+          </a:ln>
+        </p:spPr>
+        <p:style>
+          <a:lnRef idx="2">
+            <a:schemeClr val="accent1"/>
+          </a:lnRef>
+          <a:fillRef idx="0">
+            <a:schemeClr val="accent1"/>
+          </a:fillRef>
+          <a:effectRef idx="1">
+            <a:schemeClr val="accent1"/>
+          </a:effectRef>
+          <a:fontRef idx="minor">
+            <a:schemeClr val="tx1"/>
+          </a:fontRef>
+        </p:style>
+      </p:cxnSp>
+      <p:cxnSp>
+        <p:nvCxnSpPr>
+          <p:cNvPr id="13" name="Connector 12"/>
+          <p:cNvCxnSpPr/>
+          <p:nvPr/>
+        </p:nvCxnSpPr>
+        <p:spPr>
+          <a:xfrm>
+            <a:off x="5257800" y="1728216"/>
+            <a:ext cx="292608" cy="0"/>
+          </a:xfrm>
+          <a:prstGeom prst="line">
+            <a:avLst/>
+          </a:prstGeom>
+          <a:ln w="22860">
+            <a:solidFill>
+              <a:srgbClr val="266EB2"/>
+            </a:solidFill>
+          </a:ln>
+        </p:spPr>
+        <p:style>
+          <a:lnRef idx="2">
+            <a:schemeClr val="accent1"/>
+          </a:lnRef>
+          <a:fillRef idx="0">
+            <a:schemeClr val="accent1"/>
+          </a:fillRef>
+          <a:effectRef idx="1">
+            <a:schemeClr val="accent1"/>
+          </a:effectRef>
+          <a:fontRef idx="minor">
+            <a:schemeClr val="tx1"/>
+          </a:fontRef>
+        </p:style>
+      </p:cxnSp>
+      <p:cxnSp>
+        <p:nvCxnSpPr>
+          <p:cNvPr id="14" name="Connector 13"/>
+          <p:cNvCxnSpPr/>
+          <p:nvPr/>
+        </p:nvCxnSpPr>
+        <p:spPr>
+          <a:xfrm>
+            <a:off x="7818120" y="1728216"/>
+            <a:ext cx="292608" cy="0"/>
+          </a:xfrm>
+          <a:prstGeom prst="line">
+            <a:avLst/>
+          </a:prstGeom>
+          <a:ln w="22860">
+            <a:solidFill>
+              <a:srgbClr val="429761"/>
+            </a:solidFill>
+          </a:ln>
+        </p:spPr>
+        <p:style>
+          <a:lnRef idx="2">
+            <a:schemeClr val="accent1"/>
+          </a:lnRef>
+          <a:fillRef idx="0">
+            <a:schemeClr val="accent1"/>
+          </a:fillRef>
+          <a:effectRef idx="1">
+            <a:schemeClr val="accent1"/>
+          </a:effectRef>
+          <a:fontRef idx="minor">
+            <a:schemeClr val="tx1"/>
+          </a:fontRef>
+        </p:style>
+      </p:cxnSp>
+      <p:sp>
+        <p:nvSpPr>
+          <p:cNvPr id="15" name="Rounded Rectangle 14"/>
+          <p:cNvSpPr/>
+          <p:nvPr/>
+        </p:nvSpPr>
+        <p:spPr>
+          <a:xfrm>
+            <a:off x="960120" y="3154680"/>
+            <a:ext cx="4937760" cy="1417320"/>
+          </a:xfrm>
+          <a:prstGeom prst="roundRect">
+            <a:avLst/>
+          </a:prstGeom>
+          <a:solidFill>
+            <a:srgbClr val="F8FAFC"/>
+          </a:solidFill>
+          <a:ln w="13970">
+            <a:solidFill>
+              <a:srgbClr val="168F8D"/>
+            </a:solidFill>
+          </a:ln>
+        </p:spPr>
+        <p:style>
+          <a:lnRef idx="1">
+            <a:schemeClr val="accent1"/>
+          </a:lnRef>
+          <a:fillRef idx="3">
+            <a:schemeClr val="accent1"/>
+          </a:fillRef>
+          <a:effectRef idx="2">
+            <a:schemeClr val="accent1"/>
+          </a:effectRef>
+          <a:fontRef idx="minor">
+            <a:schemeClr val="lt1"/>
+          </a:fontRef>
+        </p:style>
+        <p:txBody>
+          <a:bodyPr rtlCol="0" anchor="ctr" lIns="182880" rIns="100584" tIns="91440"/>
+          <a:lstStyle/>
+          <a:p>
+            <a:pPr algn="ctr">
+              <a:defRPr sz="1700" b="1">
+                <a:solidFill>
+                  <a:srgbClr val="232D37"/>
+                </a:solidFill>
+                <a:latin typeface="Aptos Display"/>
+              </a:defRPr>
+            </a:pPr>
+            <a:r>
+              <a:t>Tax-drag estimation</a:t>
+            </a:r>
+          </a:p>
+          <a:p>
+            <a:pPr>
+              <a:spcBef>
+                <a:spcPts val="300"/>
+              </a:spcBef>
+              <a:defRPr sz="1200">
+                <a:solidFill>
+                  <a:srgbClr val="232D37"/>
+                </a:solidFill>
+                <a:latin typeface="Aptos"/>
+              </a:defRPr>
+            </a:pPr>
+            <a:r>
+              <a:t>This year’s tax drag uses prior-year Total Tax for the LTCG estimate.</a:t>
+            </a:r>
+          </a:p>
+          <a:p>
+            <a:pPr>
+              <a:spcBef>
+                <a:spcPts val="300"/>
+              </a:spcBef>
+              <a:defRPr sz="1200">
+                <a:solidFill>
+                  <a:srgbClr val="232D37"/>
+                </a:solidFill>
+                <a:latin typeface="Aptos"/>
+              </a:defRPr>
+            </a:pPr>
+            <a:r>
+              <a:t>The actual roll-forward uses current-year Total Tax, so taxed LTCG and removed basis can differ slightly.</a:t>
+            </a:r>
+          </a:p>
+        </p:txBody>
+      </p:sp>
+      <p:sp>
+        <p:nvSpPr>
+          <p:cNvPr id="16" name="Rectangle 15"/>
+          <p:cNvSpPr/>
+          <p:nvPr/>
+        </p:nvSpPr>
+        <p:spPr>
+          <a:xfrm>
+            <a:off x="960120" y="3154680"/>
+            <a:ext cx="82296" cy="1417320"/>
+          </a:xfrm>
+          <a:prstGeom prst="rect">
+            <a:avLst/>
+          </a:prstGeom>
+          <a:solidFill>
+            <a:srgbClr val="168F8D"/>
+          </a:solidFill>
+          <a:ln>
+            <a:noFill/>
+          </a:ln>
+        </p:spPr>
+        <p:style>
+          <a:lnRef idx="1">
+            <a:schemeClr val="accent1"/>
+          </a:lnRef>
+          <a:fillRef idx="3">
+            <a:schemeClr val="accent1"/>
+          </a:fillRef>
+          <a:effectRef idx="2">
+            <a:schemeClr val="accent1"/>
+          </a:effectRef>
+          <a:fontRef idx="minor">
+            <a:schemeClr val="lt1"/>
+          </a:fontRef>
+        </p:style>
+        <p:txBody>
+          <a:bodyPr rtlCol="0" anchor="ctr"/>
+          <a:lstStyle/>
+          <a:p>
+            <a:pPr algn="ctr"/>
+          </a:p>
+        </p:txBody>
+      </p:sp>
+      <p:sp>
+        <p:nvSpPr>
+          <p:cNvPr id="17" name="Rounded Rectangle 16"/>
+          <p:cNvSpPr/>
+          <p:nvPr/>
+        </p:nvSpPr>
+        <p:spPr>
+          <a:xfrm>
+            <a:off x="6400800" y="3154680"/>
+            <a:ext cx="4800600" cy="1417320"/>
+          </a:xfrm>
+          <a:prstGeom prst="roundRect">
+            <a:avLst/>
+          </a:prstGeom>
+          <a:solidFill>
+            <a:srgbClr val="F8FAFC"/>
+          </a:solidFill>
+          <a:ln w="13970">
+            <a:solidFill>
+              <a:srgbClr val="0F2647"/>
+            </a:solidFill>
+          </a:ln>
+        </p:spPr>
+        <p:style>
+          <a:lnRef idx="1">
+            <a:schemeClr val="accent1"/>
+          </a:lnRef>
+          <a:fillRef idx="3">
+            <a:schemeClr val="accent1"/>
+          </a:fillRef>
+          <a:effectRef idx="2">
+            <a:schemeClr val="accent1"/>
+          </a:effectRef>
+          <a:fontRef idx="minor">
+            <a:schemeClr val="lt1"/>
+          </a:fontRef>
+        </p:style>
+        <p:txBody>
+          <a:bodyPr rtlCol="0" anchor="ctr" lIns="182880" rIns="100584" tIns="91440"/>
+          <a:lstStyle/>
+          <a:p>
+            <a:pPr algn="ctr">
+              <a:defRPr sz="1700" b="1">
+                <a:solidFill>
+                  <a:srgbClr val="232D37"/>
+                </a:solidFill>
+                <a:latin typeface="Aptos Display"/>
+              </a:defRPr>
+            </a:pPr>
+            <a:r>
+              <a:t>Reconciliation</a:t>
+            </a:r>
+          </a:p>
+          <a:p>
+            <a:pPr>
+              <a:spcBef>
+                <a:spcPts val="300"/>
+              </a:spcBef>
+              <a:defRPr sz="1200">
+                <a:solidFill>
+                  <a:srgbClr val="232D37"/>
+                </a:solidFill>
+                <a:latin typeface="Aptos"/>
+              </a:defRPr>
+            </a:pPr>
+            <a:r>
+              <a:t>tax drag + fee drag + IRMAA drag + living cost = dividends used + shares sold.</a:t>
+            </a:r>
+          </a:p>
+          <a:p>
+            <a:pPr>
+              <a:spcBef>
+                <a:spcPts val="300"/>
+              </a:spcBef>
+              <a:defRPr sz="1200">
+                <a:solidFill>
+                  <a:srgbClr val="232D37"/>
+                </a:solidFill>
+                <a:latin typeface="Aptos"/>
+              </a:defRPr>
+            </a:pPr>
+            <a:r>
+              <a:t>This equality is carried in each portfolio row.</a:t>
+            </a:r>
+          </a:p>
+        </p:txBody>
+      </p:sp>
+      <p:sp>
+        <p:nvSpPr>
+          <p:cNvPr id="18" name="Rectangle 17"/>
+          <p:cNvSpPr/>
+          <p:nvPr/>
+        </p:nvSpPr>
+        <p:spPr>
+          <a:xfrm>
+            <a:off x="6400800" y="3154680"/>
+            <a:ext cx="82296" cy="1417320"/>
+          </a:xfrm>
+          <a:prstGeom prst="rect">
+            <a:avLst/>
+          </a:prstGeom>
+          <a:solidFill>
+            <a:srgbClr val="0F2647"/>
+          </a:solidFill>
+          <a:ln>
+            <a:noFill/>
+          </a:ln>
+        </p:spPr>
+        <p:style>
+          <a:lnRef idx="1">
+            <a:schemeClr val="accent1"/>
+          </a:lnRef>
+          <a:fillRef idx="3">
+            <a:schemeClr val="accent1"/>
+          </a:fillRef>
+          <a:effectRef idx="2">
+            <a:schemeClr val="accent1"/>
+          </a:effectRef>
+          <a:fontRef idx="minor">
+            <a:schemeClr val="lt1"/>
+          </a:fontRef>
+        </p:style>
+        <p:txBody>
+          <a:bodyPr rtlCol="0" anchor="ctr"/>
+          <a:lstStyle/>
+          <a:p>
+            <a:pPr algn="ctr"/>
+          </a:p>
+        </p:txBody>
+      </p:sp>
+      <p:sp>
+        <p:nvSpPr>
+          <p:cNvPr id="19" name="Rectangle 18"/>
           <p:cNvSpPr/>
           <p:nvPr/>
         </p:nvSpPr>
@@ -6903,14 +6633,14 @@
       </p:sp>
       <p:sp>
         <p:nvSpPr>
-          <p:cNvPr id="11" name="TextBox 10"/>
+          <p:cNvPr id="20" name="TextBox 19"/>
           <p:cNvSpPr txBox="1"/>
           <p:nvPr/>
         </p:nvSpPr>
         <p:spPr>
           <a:xfrm>
             <a:off x="530352" y="6510528"/>
-            <a:ext cx="10881360" cy="164592"/>
+            <a:ext cx="10881360" cy="146304"/>
           </a:xfrm>
           <a:prstGeom prst="rect">
             <a:avLst/>
@@ -6932,7 +6662,7 @@
               </a:defRPr>
             </a:pPr>
             <a:r>
-              <a:t>Retirement Income Planner • Architecture overview • Updated specification</a:t>
+              <a:t>Retirement Income Planner • Architecture overview • IRMAA and Excel-export update</a:t>
             </a:r>
           </a:p>
         </p:txBody>
@@ -6971,8 +6701,8 @@
         </p:nvSpPr>
         <p:spPr>
           <a:xfrm>
-            <a:off x="502920" y="237744"/>
-            <a:ext cx="11155680" cy="457200"/>
+            <a:off x="502920" y="246888"/>
+            <a:ext cx="11155680" cy="438912"/>
           </a:xfrm>
           <a:prstGeom prst="rect">
             <a:avLst/>
@@ -6994,7 +6724,7 @@
               </a:defRPr>
             </a:pPr>
             <a:r>
-              <a:t>Projection engine: annual modeling with new portfolio rules</a:t>
+              <a:t>Projection contract: new IRMAA fields</a:t>
             </a:r>
           </a:p>
         </p:txBody>
@@ -7008,7 +6738,7 @@
         <p:spPr>
           <a:xfrm>
             <a:off x="530352" y="786384"/>
-            <a:ext cx="10972800" cy="256032"/>
+            <a:ext cx="10972800" cy="219456"/>
           </a:xfrm>
           <a:prstGeom prst="rect">
             <a:avLst/>
@@ -7030,7 +6760,7 @@
               </a:defRPr>
             </a:pPr>
             <a:r>
-              <a:t>computeProjection() remains the single source of all derived financial values.</a:t>
+              <a:t>The annual projection continues to be the single source of truth for charts, tooltips, and exports.</a:t>
             </a:r>
           </a:p>
         </p:txBody>
@@ -7043,16 +6773,16 @@
         </p:nvSpPr>
         <p:spPr>
           <a:xfrm>
-            <a:off x="457200" y="1298448"/>
-            <a:ext cx="1618488" cy="2423160"/>
+            <a:off x="594360" y="1234440"/>
+            <a:ext cx="3429000" cy="4434840"/>
           </a:xfrm>
           <a:prstGeom prst="roundRect">
             <a:avLst/>
           </a:prstGeom>
           <a:solidFill>
-            <a:srgbClr val="FAFBFD"/>
+            <a:srgbClr val="E9F4FF"/>
           </a:solidFill>
-          <a:ln w="14604">
+          <a:ln w="13970">
             <a:solidFill>
               <a:srgbClr val="266EB2"/>
             </a:solidFill>
@@ -7073,11 +6803,11 @@
           </a:fontRef>
         </p:style>
         <p:txBody>
-          <a:bodyPr rtlCol="0" anchor="ctr" lIns="182880" tIns="100584"/>
+          <a:bodyPr rtlCol="0" anchor="ctr" lIns="182880" rIns="100584" tIns="91440"/>
           <a:lstStyle/>
           <a:p>
             <a:pPr algn="ctr">
-              <a:defRPr sz="1400" b="1">
+              <a:defRPr sz="1800" b="1">
                 <a:solidFill>
                   <a:srgbClr val="232D37"/>
                 </a:solidFill>
@@ -7085,23 +6815,87 @@
               </a:defRPr>
             </a:pPr>
             <a:r>
-              <a:t>Life</a:t>
+              <a:t>State and input</a:t>
             </a:r>
           </a:p>
           <a:p>
             <a:pPr>
               <a:spcBef>
-                <a:spcPts val="400"/>
+                <a:spcPts val="300"/>
               </a:spcBef>
-              <a:defRPr sz="1000">
-                <a:solidFill>
-                  <a:srgbClr val="232D37"/>
-                </a:solidFill>
-                <a:latin typeface="Aptos"/>
-              </a:defRPr>
-            </a:pPr>
-            <a:r>
-              <a:t>Ages, survival, filing</a:t>
+              <a:defRPr sz="1300">
+                <a:solidFill>
+                  <a:srgbClr val="232D37"/>
+                </a:solidFill>
+                <a:latin typeface="Aptos"/>
+              </a:defRPr>
+            </a:pPr>
+            <a:r>
+              <a:t>BrokeragePortfolio.irmaa</a:t>
+            </a:r>
+          </a:p>
+          <a:p>
+            <a:pPr>
+              <a:spcBef>
+                <a:spcPts val="300"/>
+              </a:spcBef>
+              <a:defRPr sz="1300">
+                <a:solidFill>
+                  <a:srgbClr val="232D37"/>
+                </a:solidFill>
+                <a:latin typeface="Aptos"/>
+              </a:defRPr>
+            </a:pPr>
+            <a:r>
+              <a:t>Checkbox appears inside the Expenses panel</a:t>
+            </a:r>
+          </a:p>
+          <a:p>
+            <a:pPr>
+              <a:spcBef>
+                <a:spcPts val="300"/>
+              </a:spcBef>
+              <a:defRPr sz="1300">
+                <a:solidFill>
+                  <a:srgbClr val="232D37"/>
+                </a:solidFill>
+                <a:latin typeface="Aptos"/>
+              </a:defRPr>
+            </a:pPr>
+            <a:r>
+              <a:t>IRMAA is inactive unless Expenses is enabled</a:t>
+            </a:r>
+          </a:p>
+          <a:p>
+            <a:pPr>
+              <a:spcBef>
+                <a:spcPts val="300"/>
+              </a:spcBef>
+              <a:defRPr sz="1300">
+                <a:solidFill>
+                  <a:srgbClr val="232D37"/>
+                </a:solidFill>
+                <a:latin typeface="Aptos"/>
+              </a:defRPr>
+            </a:pPr>
+            <a:r>
+              <a:t>Age range moved directly below brokerage name</a:t>
+            </a:r>
+          </a:p>
+          <a:p>
+            <a:pPr>
+              <a:spcBef>
+                <a:spcPts val="300"/>
+              </a:spcBef>
+              <a:defRPr sz="1300">
+                <a:solidFill>
+                  <a:srgbClr val="232D37"/>
+                </a:solidFill>
+                <a:latin typeface="Aptos"/>
+              </a:defRPr>
+            </a:pPr>
+            <a:r>
+              <a:t>Start balance label clarified</a:t>
             </a:r>
           </a:p>
         </p:txBody>
@@ -7114,8 +6908,8 @@
         </p:nvSpPr>
         <p:spPr>
           <a:xfrm>
-            <a:off x="457200" y="1298448"/>
-            <a:ext cx="82296" cy="2423160"/>
+            <a:off x="594360" y="1234440"/>
+            <a:ext cx="82296" cy="4434840"/>
           </a:xfrm>
           <a:prstGeom prst="rect">
             <a:avLst/>
@@ -7149,61 +6943,26 @@
           </a:p>
         </p:txBody>
       </p:sp>
-      <p:cxnSp>
-        <p:nvCxnSpPr>
-          <p:cNvPr id="6" name="Connector 5"/>
-          <p:cNvCxnSpPr/>
-          <p:nvPr/>
-        </p:nvCxnSpPr>
-        <p:spPr>
-          <a:xfrm>
-            <a:off x="2103120" y="2487168"/>
-            <a:ext cx="228600" cy="0"/>
-          </a:xfrm>
-          <a:prstGeom prst="line">
-            <a:avLst/>
-          </a:prstGeom>
-          <a:ln w="19050">
+      <p:sp>
+        <p:nvSpPr>
+          <p:cNvPr id="6" name="Rounded Rectangle 5"/>
+          <p:cNvSpPr/>
+          <p:nvPr/>
+        </p:nvSpPr>
+        <p:spPr>
+          <a:xfrm>
+            <a:off x="4389120" y="1234440"/>
+            <a:ext cx="3429000" cy="4434840"/>
+          </a:xfrm>
+          <a:prstGeom prst="roundRect">
+            <a:avLst/>
+          </a:prstGeom>
+          <a:solidFill>
+            <a:srgbClr val="EAF9F4"/>
+          </a:solidFill>
+          <a:ln w="13970">
             <a:solidFill>
-              <a:srgbClr val="266EB2"/>
-            </a:solidFill>
-          </a:ln>
-        </p:spPr>
-        <p:style>
-          <a:lnRef idx="2">
-            <a:schemeClr val="accent1"/>
-          </a:lnRef>
-          <a:fillRef idx="0">
-            <a:schemeClr val="accent1"/>
-          </a:fillRef>
-          <a:effectRef idx="1">
-            <a:schemeClr val="accent1"/>
-          </a:effectRef>
-          <a:fontRef idx="minor">
-            <a:schemeClr val="tx1"/>
-          </a:fontRef>
-        </p:style>
-      </p:cxnSp>
-      <p:sp>
-        <p:nvSpPr>
-          <p:cNvPr id="7" name="Rounded Rectangle 6"/>
-          <p:cNvSpPr/>
-          <p:nvPr/>
-        </p:nvSpPr>
-        <p:spPr>
-          <a:xfrm>
-            <a:off x="2395728" y="1298448"/>
-            <a:ext cx="1618488" cy="2423160"/>
-          </a:xfrm>
-          <a:prstGeom prst="roundRect">
-            <a:avLst/>
-          </a:prstGeom>
-          <a:solidFill>
-            <a:srgbClr val="FAFBFD"/>
-          </a:solidFill>
-          <a:ln w="14604">
-            <a:solidFill>
-              <a:srgbClr val="168F8D"/>
+              <a:srgbClr val="429761"/>
             </a:solidFill>
           </a:ln>
         </p:spPr>
@@ -7222,11 +6981,11 @@
           </a:fontRef>
         </p:style>
         <p:txBody>
-          <a:bodyPr rtlCol="0" anchor="ctr" lIns="182880" tIns="100584"/>
+          <a:bodyPr rtlCol="0" anchor="ctr" lIns="182880" rIns="100584" tIns="91440"/>
           <a:lstStyle/>
           <a:p>
             <a:pPr algn="ctr">
-              <a:defRPr sz="1400" b="1">
+              <a:defRPr sz="1800" b="1">
                 <a:solidFill>
                   <a:srgbClr val="232D37"/>
                 </a:solidFill>
@@ -7234,186 +6993,69 @@
               </a:defRPr>
             </a:pPr>
             <a:r>
-              <a:t>Income</a:t>
+              <a:t>Portfolio row fields</a:t>
             </a:r>
           </a:p>
           <a:p>
             <a:pPr>
               <a:spcBef>
-                <a:spcPts val="400"/>
+                <a:spcPts val="300"/>
               </a:spcBef>
-              <a:defRPr sz="1000">
-                <a:solidFill>
-                  <a:srgbClr val="232D37"/>
-                </a:solidFill>
-                <a:latin typeface="Aptos"/>
-              </a:defRPr>
-            </a:pPr>
-            <a:r>
-              <a:t>Wages, SS, pension, rental</a:t>
-            </a:r>
-          </a:p>
-        </p:txBody>
-      </p:sp>
-      <p:sp>
-        <p:nvSpPr>
-          <p:cNvPr id="8" name="Rectangle 7"/>
-          <p:cNvSpPr/>
-          <p:nvPr/>
-        </p:nvSpPr>
-        <p:spPr>
-          <a:xfrm>
-            <a:off x="2395728" y="1298448"/>
-            <a:ext cx="82296" cy="2423160"/>
-          </a:xfrm>
-          <a:prstGeom prst="rect">
-            <a:avLst/>
-          </a:prstGeom>
-          <a:solidFill>
-            <a:srgbClr val="168F8D"/>
-          </a:solidFill>
-          <a:ln>
-            <a:noFill/>
-          </a:ln>
-        </p:spPr>
-        <p:style>
-          <a:lnRef idx="1">
-            <a:schemeClr val="accent1"/>
-          </a:lnRef>
-          <a:fillRef idx="3">
-            <a:schemeClr val="accent1"/>
-          </a:fillRef>
-          <a:effectRef idx="2">
-            <a:schemeClr val="accent1"/>
-          </a:effectRef>
-          <a:fontRef idx="minor">
-            <a:schemeClr val="lt1"/>
-          </a:fontRef>
-        </p:style>
-        <p:txBody>
-          <a:bodyPr rtlCol="0" anchor="ctr"/>
-          <a:lstStyle/>
-          <a:p>
-            <a:pPr algn="ctr"/>
-          </a:p>
-        </p:txBody>
-      </p:sp>
-      <p:cxnSp>
-        <p:nvCxnSpPr>
-          <p:cNvPr id="9" name="Connector 8"/>
-          <p:cNvCxnSpPr/>
-          <p:nvPr/>
-        </p:nvCxnSpPr>
-        <p:spPr>
-          <a:xfrm>
-            <a:off x="4041648" y="2487168"/>
-            <a:ext cx="228600" cy="0"/>
-          </a:xfrm>
-          <a:prstGeom prst="line">
-            <a:avLst/>
-          </a:prstGeom>
-          <a:ln w="19050">
-            <a:solidFill>
-              <a:srgbClr val="168F8D"/>
-            </a:solidFill>
-          </a:ln>
-        </p:spPr>
-        <p:style>
-          <a:lnRef idx="2">
-            <a:schemeClr val="accent1"/>
-          </a:lnRef>
-          <a:fillRef idx="0">
-            <a:schemeClr val="accent1"/>
-          </a:fillRef>
-          <a:effectRef idx="1">
-            <a:schemeClr val="accent1"/>
-          </a:effectRef>
-          <a:fontRef idx="minor">
-            <a:schemeClr val="tx1"/>
-          </a:fontRef>
-        </p:style>
-      </p:cxnSp>
-      <p:sp>
-        <p:nvSpPr>
-          <p:cNvPr id="10" name="Rounded Rectangle 9"/>
-          <p:cNvSpPr/>
-          <p:nvPr/>
-        </p:nvSpPr>
-        <p:spPr>
-          <a:xfrm>
-            <a:off x="4334256" y="1298448"/>
-            <a:ext cx="1618488" cy="2423160"/>
-          </a:xfrm>
-          <a:prstGeom prst="roundRect">
-            <a:avLst/>
-          </a:prstGeom>
-          <a:solidFill>
-            <a:srgbClr val="FAFBFD"/>
-          </a:solidFill>
-          <a:ln w="14604">
-            <a:solidFill>
-              <a:srgbClr val="429761"/>
-            </a:solidFill>
-          </a:ln>
-        </p:spPr>
-        <p:style>
-          <a:lnRef idx="1">
-            <a:schemeClr val="accent1"/>
-          </a:lnRef>
-          <a:fillRef idx="3">
-            <a:schemeClr val="accent1"/>
-          </a:fillRef>
-          <a:effectRef idx="2">
-            <a:schemeClr val="accent1"/>
-          </a:effectRef>
-          <a:fontRef idx="minor">
-            <a:schemeClr val="lt1"/>
-          </a:fontRef>
-        </p:style>
-        <p:txBody>
-          <a:bodyPr rtlCol="0" anchor="ctr" lIns="182880" tIns="100584"/>
-          <a:lstStyle/>
-          <a:p>
-            <a:pPr algn="ctr">
-              <a:defRPr sz="1400" b="1">
-                <a:solidFill>
-                  <a:srgbClr val="232D37"/>
-                </a:solidFill>
-                <a:latin typeface="Aptos Display"/>
-              </a:defRPr>
-            </a:pPr>
-            <a:r>
-              <a:t>Portfolio</a:t>
+              <a:defRPr sz="1300">
+                <a:solidFill>
+                  <a:srgbClr val="232D37"/>
+                </a:solidFill>
+                <a:latin typeface="Aptos"/>
+              </a:defRPr>
+            </a:pPr>
+            <a:r>
+              <a:t>irmaaDrag added beside taxDrag, feeDrag, livingCost</a:t>
             </a:r>
           </a:p>
           <a:p>
             <a:pPr>
               <a:spcBef>
-                <a:spcPts val="400"/>
+                <a:spcPts val="300"/>
               </a:spcBef>
-              <a:defRPr sz="1000">
-                <a:solidFill>
-                  <a:srgbClr val="232D37"/>
-                </a:solidFill>
-                <a:latin typeface="Aptos"/>
-              </a:defRPr>
-            </a:pPr>
-            <a:r>
-              <a:t>Dividends, LTCG, FTC</a:t>
-            </a:r>
-          </a:p>
-        </p:txBody>
-      </p:sp>
-      <p:sp>
-        <p:nvSpPr>
-          <p:cNvPr id="11" name="Rectangle 10"/>
+              <a:defRPr sz="1300">
+                <a:solidFill>
+                  <a:srgbClr val="232D37"/>
+                </a:solidFill>
+                <a:latin typeface="Aptos"/>
+              </a:defRPr>
+            </a:pPr>
+            <a:r>
+              <a:t>divUsed, divReinvested, sold retain waterfall detail</a:t>
+            </a:r>
+          </a:p>
+          <a:p>
+            <a:pPr>
+              <a:spcBef>
+                <a:spcPts val="300"/>
+              </a:spcBef>
+              <a:defRPr sz="1300">
+                <a:solidFill>
+                  <a:srgbClr val="232D37"/>
+                </a:solidFill>
+                <a:latin typeface="Aptos"/>
+              </a:defRPr>
+            </a:pPr>
+            <a:r>
+              <a:t>basis, unrealizedGain, steppedUp preserve gain history</a:t>
+            </a:r>
+          </a:p>
+        </p:txBody>
+      </p:sp>
+      <p:sp>
+        <p:nvSpPr>
+          <p:cNvPr id="7" name="Rectangle 6"/>
           <p:cNvSpPr/>
           <p:nvPr/>
         </p:nvSpPr>
         <p:spPr>
           <a:xfrm>
-            <a:off x="4334256" y="1298448"/>
-            <a:ext cx="82296" cy="2423160"/>
+            <a:off x="4389120" y="1234440"/>
+            <a:ext cx="82296" cy="4434840"/>
           </a:xfrm>
           <a:prstGeom prst="rect">
             <a:avLst/>
@@ -7447,59 +7089,24 @@
           </a:p>
         </p:txBody>
       </p:sp>
-      <p:cxnSp>
-        <p:nvCxnSpPr>
-          <p:cNvPr id="12" name="Connector 11"/>
-          <p:cNvCxnSpPr/>
-          <p:nvPr/>
-        </p:nvCxnSpPr>
-        <p:spPr>
-          <a:xfrm>
-            <a:off x="5980176" y="2487168"/>
-            <a:ext cx="228600" cy="0"/>
-          </a:xfrm>
-          <a:prstGeom prst="line">
-            <a:avLst/>
-          </a:prstGeom>
-          <a:ln w="19050">
-            <a:solidFill>
-              <a:srgbClr val="429761"/>
-            </a:solidFill>
-          </a:ln>
-        </p:spPr>
-        <p:style>
-          <a:lnRef idx="2">
-            <a:schemeClr val="accent1"/>
-          </a:lnRef>
-          <a:fillRef idx="0">
-            <a:schemeClr val="accent1"/>
-          </a:fillRef>
-          <a:effectRef idx="1">
-            <a:schemeClr val="accent1"/>
-          </a:effectRef>
-          <a:fontRef idx="minor">
-            <a:schemeClr val="tx1"/>
-          </a:fontRef>
-        </p:style>
-      </p:cxnSp>
-      <p:sp>
-        <p:nvSpPr>
-          <p:cNvPr id="13" name="Rounded Rectangle 12"/>
+      <p:sp>
+        <p:nvSpPr>
+          <p:cNvPr id="8" name="Rounded Rectangle 7"/>
           <p:cNvSpPr/>
           <p:nvPr/>
         </p:nvSpPr>
         <p:spPr>
           <a:xfrm>
-            <a:off x="6272784" y="1298448"/>
-            <a:ext cx="1618488" cy="2423160"/>
+            <a:off x="8183879" y="1234440"/>
+            <a:ext cx="3429000" cy="4434840"/>
           </a:xfrm>
           <a:prstGeom prst="roundRect">
             <a:avLst/>
           </a:prstGeom>
           <a:solidFill>
-            <a:srgbClr val="FAFBFD"/>
+            <a:srgbClr val="FFF6E8"/>
           </a:solidFill>
-          <a:ln w="14604">
+          <a:ln w="13970">
             <a:solidFill>
               <a:srgbClr val="E5892A"/>
             </a:solidFill>
@@ -7520,11 +7127,11 @@
           </a:fontRef>
         </p:style>
         <p:txBody>
-          <a:bodyPr rtlCol="0" anchor="ctr" lIns="182880" tIns="100584"/>
+          <a:bodyPr rtlCol="0" anchor="ctr" lIns="182880" rIns="100584" tIns="91440"/>
           <a:lstStyle/>
           <a:p>
             <a:pPr algn="ctr">
-              <a:defRPr sz="1400" b="1">
+              <a:defRPr sz="1800" b="1">
                 <a:solidFill>
                   <a:srgbClr val="232D37"/>
                 </a:solidFill>
@@ -7532,37 +7139,69 @@
               </a:defRPr>
             </a:pPr>
             <a:r>
-              <a:t>Retirement</a:t>
+              <a:t>Household row fields</a:t>
             </a:r>
           </a:p>
           <a:p>
             <a:pPr>
               <a:spcBef>
-                <a:spcPts val="400"/>
+                <a:spcPts val="300"/>
               </a:spcBef>
-              <a:defRPr sz="1000">
-                <a:solidFill>
-                  <a:srgbClr val="232D37"/>
-                </a:solidFill>
-                <a:latin typeface="Aptos"/>
-              </a:defRPr>
-            </a:pPr>
-            <a:r>
-              <a:t>RMD + Roth conversion</a:t>
-            </a:r>
-          </a:p>
-        </p:txBody>
-      </p:sp>
-      <p:sp>
-        <p:nvSpPr>
-          <p:cNvPr id="14" name="Rectangle 13"/>
+              <a:defRPr sz="1300">
+                <a:solidFill>
+                  <a:srgbClr val="232D37"/>
+                </a:solidFill>
+                <a:latin typeface="Aptos"/>
+              </a:defRPr>
+            </a:pPr>
+            <a:r>
+              <a:t>irmaaSurcharge reported each year</a:t>
+            </a:r>
+          </a:p>
+          <a:p>
+            <a:pPr>
+              <a:spcBef>
+                <a:spcPts val="300"/>
+              </a:spcBef>
+              <a:defRPr sz="1300">
+                <a:solidFill>
+                  <a:srgbClr val="232D37"/>
+                </a:solidFill>
+                <a:latin typeface="Aptos"/>
+              </a:defRPr>
+            </a:pPr>
+            <a:r>
+              <a:t>Prior-year AGI tier × enrolled people 65+</a:t>
+            </a:r>
+          </a:p>
+          <a:p>
+            <a:pPr>
+              <a:spcBef>
+                <a:spcPts val="300"/>
+              </a:spcBef>
+              <a:defRPr sz="1300">
+                <a:solidFill>
+                  <a:srgbClr val="232D37"/>
+                </a:solidFill>
+                <a:latin typeface="Aptos"/>
+              </a:defRPr>
+            </a:pPr>
+            <a:r>
+              <a:t>Only checked eligible portfolios receive an allocation</a:t>
+            </a:r>
+          </a:p>
+        </p:txBody>
+      </p:sp>
+      <p:sp>
+        <p:nvSpPr>
+          <p:cNvPr id="9" name="Rectangle 8"/>
           <p:cNvSpPr/>
           <p:nvPr/>
         </p:nvSpPr>
         <p:spPr>
           <a:xfrm>
-            <a:off x="6272784" y="1298448"/>
-            <a:ext cx="82296" cy="2423160"/>
+            <a:off x="8183879" y="1234440"/>
+            <a:ext cx="82296" cy="4434840"/>
           </a:xfrm>
           <a:prstGeom prst="rect">
             <a:avLst/>
@@ -7596,535 +7235,9 @@
           </a:p>
         </p:txBody>
       </p:sp>
-      <p:cxnSp>
-        <p:nvCxnSpPr>
-          <p:cNvPr id="15" name="Connector 14"/>
-          <p:cNvCxnSpPr/>
-          <p:nvPr/>
-        </p:nvCxnSpPr>
-        <p:spPr>
-          <a:xfrm>
-            <a:off x="7918704" y="2487168"/>
-            <a:ext cx="228600" cy="0"/>
-          </a:xfrm>
-          <a:prstGeom prst="line">
-            <a:avLst/>
-          </a:prstGeom>
-          <a:ln w="19050">
-            <a:solidFill>
-              <a:srgbClr val="E5892A"/>
-            </a:solidFill>
-          </a:ln>
-        </p:spPr>
-        <p:style>
-          <a:lnRef idx="2">
-            <a:schemeClr val="accent1"/>
-          </a:lnRef>
-          <a:fillRef idx="0">
-            <a:schemeClr val="accent1"/>
-          </a:fillRef>
-          <a:effectRef idx="1">
-            <a:schemeClr val="accent1"/>
-          </a:effectRef>
-          <a:fontRef idx="minor">
-            <a:schemeClr val="tx1"/>
-          </a:fontRef>
-        </p:style>
-      </p:cxnSp>
-      <p:sp>
-        <p:nvSpPr>
-          <p:cNvPr id="16" name="Rounded Rectangle 15"/>
-          <p:cNvSpPr/>
-          <p:nvPr/>
-        </p:nvSpPr>
-        <p:spPr>
-          <a:xfrm>
-            <a:off x="8211312" y="1298448"/>
-            <a:ext cx="1618488" cy="2423160"/>
-          </a:xfrm>
-          <a:prstGeom prst="roundRect">
-            <a:avLst/>
-          </a:prstGeom>
-          <a:solidFill>
-            <a:srgbClr val="FAFBFD"/>
-          </a:solidFill>
-          <a:ln w="14604">
-            <a:solidFill>
-              <a:srgbClr val="BF4747"/>
-            </a:solidFill>
-          </a:ln>
-        </p:spPr>
-        <p:style>
-          <a:lnRef idx="1">
-            <a:schemeClr val="accent1"/>
-          </a:lnRef>
-          <a:fillRef idx="3">
-            <a:schemeClr val="accent1"/>
-          </a:fillRef>
-          <a:effectRef idx="2">
-            <a:schemeClr val="accent1"/>
-          </a:effectRef>
-          <a:fontRef idx="minor">
-            <a:schemeClr val="lt1"/>
-          </a:fontRef>
-        </p:style>
-        <p:txBody>
-          <a:bodyPr rtlCol="0" anchor="ctr" lIns="182880" tIns="100584"/>
-          <a:lstStyle/>
-          <a:p>
-            <a:pPr algn="ctr">
-              <a:defRPr sz="1400" b="1">
-                <a:solidFill>
-                  <a:srgbClr val="232D37"/>
-                </a:solidFill>
-                <a:latin typeface="Aptos Display"/>
-              </a:defRPr>
-            </a:pPr>
-            <a:r>
-              <a:t>Tax</a:t>
-            </a:r>
-          </a:p>
-          <a:p>
-            <a:pPr>
-              <a:spcBef>
-                <a:spcPts val="400"/>
-              </a:spcBef>
-              <a:defRPr sz="1000">
-                <a:solidFill>
-                  <a:srgbClr val="232D37"/>
-                </a:solidFill>
-                <a:latin typeface="Aptos"/>
-              </a:defRPr>
-            </a:pPr>
-            <a:r>
-              <a:t>AGI, SS tax, NIIT</a:t>
-            </a:r>
-          </a:p>
-        </p:txBody>
-      </p:sp>
-      <p:sp>
-        <p:nvSpPr>
-          <p:cNvPr id="17" name="Rectangle 16"/>
-          <p:cNvSpPr/>
-          <p:nvPr/>
-        </p:nvSpPr>
-        <p:spPr>
-          <a:xfrm>
-            <a:off x="8211312" y="1298448"/>
-            <a:ext cx="82296" cy="2423160"/>
-          </a:xfrm>
-          <a:prstGeom prst="rect">
-            <a:avLst/>
-          </a:prstGeom>
-          <a:solidFill>
-            <a:srgbClr val="BF4747"/>
-          </a:solidFill>
-          <a:ln>
-            <a:noFill/>
-          </a:ln>
-        </p:spPr>
-        <p:style>
-          <a:lnRef idx="1">
-            <a:schemeClr val="accent1"/>
-          </a:lnRef>
-          <a:fillRef idx="3">
-            <a:schemeClr val="accent1"/>
-          </a:fillRef>
-          <a:effectRef idx="2">
-            <a:schemeClr val="accent1"/>
-          </a:effectRef>
-          <a:fontRef idx="minor">
-            <a:schemeClr val="lt1"/>
-          </a:fontRef>
-        </p:style>
-        <p:txBody>
-          <a:bodyPr rtlCol="0" anchor="ctr"/>
-          <a:lstStyle/>
-          <a:p>
-            <a:pPr algn="ctr"/>
-          </a:p>
-        </p:txBody>
-      </p:sp>
-      <p:cxnSp>
-        <p:nvCxnSpPr>
-          <p:cNvPr id="18" name="Connector 17"/>
-          <p:cNvCxnSpPr/>
-          <p:nvPr/>
-        </p:nvCxnSpPr>
-        <p:spPr>
-          <a:xfrm>
-            <a:off x="9857232" y="2487168"/>
-            <a:ext cx="228600" cy="0"/>
-          </a:xfrm>
-          <a:prstGeom prst="line">
-            <a:avLst/>
-          </a:prstGeom>
-          <a:ln w="19050">
-            <a:solidFill>
-              <a:srgbClr val="BF4747"/>
-            </a:solidFill>
-          </a:ln>
-        </p:spPr>
-        <p:style>
-          <a:lnRef idx="2">
-            <a:schemeClr val="accent1"/>
-          </a:lnRef>
-          <a:fillRef idx="0">
-            <a:schemeClr val="accent1"/>
-          </a:fillRef>
-          <a:effectRef idx="1">
-            <a:schemeClr val="accent1"/>
-          </a:effectRef>
-          <a:fontRef idx="minor">
-            <a:schemeClr val="tx1"/>
-          </a:fontRef>
-        </p:style>
-      </p:cxnSp>
-      <p:sp>
-        <p:nvSpPr>
-          <p:cNvPr id="19" name="Rounded Rectangle 18"/>
-          <p:cNvSpPr/>
-          <p:nvPr/>
-        </p:nvSpPr>
-        <p:spPr>
-          <a:xfrm>
-            <a:off x="10149840" y="1298448"/>
-            <a:ext cx="1618488" cy="2423160"/>
-          </a:xfrm>
-          <a:prstGeom prst="roundRect">
-            <a:avLst/>
-          </a:prstGeom>
-          <a:solidFill>
-            <a:srgbClr val="FAFBFD"/>
-          </a:solidFill>
-          <a:ln w="14604">
-            <a:solidFill>
-              <a:srgbClr val="7852B0"/>
-            </a:solidFill>
-          </a:ln>
-        </p:spPr>
-        <p:style>
-          <a:lnRef idx="1">
-            <a:schemeClr val="accent1"/>
-          </a:lnRef>
-          <a:fillRef idx="3">
-            <a:schemeClr val="accent1"/>
-          </a:fillRef>
-          <a:effectRef idx="2">
-            <a:schemeClr val="accent1"/>
-          </a:effectRef>
-          <a:fontRef idx="minor">
-            <a:schemeClr val="lt1"/>
-          </a:fontRef>
-        </p:style>
-        <p:txBody>
-          <a:bodyPr rtlCol="0" anchor="ctr" lIns="182880" tIns="100584"/>
-          <a:lstStyle/>
-          <a:p>
-            <a:pPr algn="ctr">
-              <a:defRPr sz="1400" b="1">
-                <a:solidFill>
-                  <a:srgbClr val="232D37"/>
-                </a:solidFill>
-                <a:latin typeface="Aptos Display"/>
-              </a:defRPr>
-            </a:pPr>
-            <a:r>
-              <a:t>Balances</a:t>
-            </a:r>
-          </a:p>
-          <a:p>
-            <a:pPr>
-              <a:spcBef>
-                <a:spcPts val="400"/>
-              </a:spcBef>
-              <a:defRPr sz="1000">
-                <a:solidFill>
-                  <a:srgbClr val="232D37"/>
-                </a:solidFill>
-                <a:latin typeface="Aptos"/>
-              </a:defRPr>
-            </a:pPr>
-            <a:r>
-              <a:t>Growth, fees, withdrawals</a:t>
-            </a:r>
-          </a:p>
-        </p:txBody>
-      </p:sp>
-      <p:sp>
-        <p:nvSpPr>
-          <p:cNvPr id="20" name="Rectangle 19"/>
-          <p:cNvSpPr/>
-          <p:nvPr/>
-        </p:nvSpPr>
-        <p:spPr>
-          <a:xfrm>
-            <a:off x="10149840" y="1298448"/>
-            <a:ext cx="82296" cy="2423160"/>
-          </a:xfrm>
-          <a:prstGeom prst="rect">
-            <a:avLst/>
-          </a:prstGeom>
-          <a:solidFill>
-            <a:srgbClr val="7852B0"/>
-          </a:solidFill>
-          <a:ln>
-            <a:noFill/>
-          </a:ln>
-        </p:spPr>
-        <p:style>
-          <a:lnRef idx="1">
-            <a:schemeClr val="accent1"/>
-          </a:lnRef>
-          <a:fillRef idx="3">
-            <a:schemeClr val="accent1"/>
-          </a:fillRef>
-          <a:effectRef idx="2">
-            <a:schemeClr val="accent1"/>
-          </a:effectRef>
-          <a:fontRef idx="minor">
-            <a:schemeClr val="lt1"/>
-          </a:fontRef>
-        </p:style>
-        <p:txBody>
-          <a:bodyPr rtlCol="0" anchor="ctr"/>
-          <a:lstStyle/>
-          <a:p>
-            <a:pPr algn="ctr"/>
-          </a:p>
-        </p:txBody>
-      </p:sp>
-      <p:sp>
-        <p:nvSpPr>
-          <p:cNvPr id="21" name="Rounded Rectangle 20"/>
-          <p:cNvSpPr/>
-          <p:nvPr/>
-        </p:nvSpPr>
-        <p:spPr>
-          <a:xfrm>
-            <a:off x="731520" y="4251960"/>
-            <a:ext cx="5166360" cy="1143000"/>
-          </a:xfrm>
-          <a:prstGeom prst="roundRect">
-            <a:avLst/>
-          </a:prstGeom>
-          <a:solidFill>
-            <a:srgbClr val="EAF9F4"/>
-          </a:solidFill>
-          <a:ln w="14604">
-            <a:solidFill>
-              <a:srgbClr val="429761"/>
-            </a:solidFill>
-          </a:ln>
-        </p:spPr>
-        <p:style>
-          <a:lnRef idx="1">
-            <a:schemeClr val="accent1"/>
-          </a:lnRef>
-          <a:fillRef idx="3">
-            <a:schemeClr val="accent1"/>
-          </a:fillRef>
-          <a:effectRef idx="2">
-            <a:schemeClr val="accent1"/>
-          </a:effectRef>
-          <a:fontRef idx="minor">
-            <a:schemeClr val="lt1"/>
-          </a:fontRef>
-        </p:style>
-        <p:txBody>
-          <a:bodyPr rtlCol="0" anchor="ctr" lIns="182880" tIns="100584"/>
-          <a:lstStyle/>
-          <a:p>
-            <a:pPr algn="ctr">
-              <a:defRPr sz="1600" b="1">
-                <a:solidFill>
-                  <a:srgbClr val="232D37"/>
-                </a:solidFill>
-                <a:latin typeface="Aptos Display"/>
-              </a:defRPr>
-            </a:pPr>
-            <a:r>
-              <a:t>Updated brokerage behavior</a:t>
-            </a:r>
-          </a:p>
-          <a:p>
-            <a:pPr>
-              <a:spcBef>
-                <a:spcPts val="400"/>
-              </a:spcBef>
-              <a:defRPr sz="1200">
-                <a:solidFill>
-                  <a:srgbClr val="232D37"/>
-                </a:solidFill>
-                <a:latin typeface="Aptos"/>
-              </a:defRPr>
-            </a:pPr>
-            <a:r>
-              <a:t>Foreign assets and foreign-tax credit are always active, independent of Expenses and IDGT settings.</a:t>
-            </a:r>
-          </a:p>
-        </p:txBody>
-      </p:sp>
-      <p:sp>
-        <p:nvSpPr>
-          <p:cNvPr id="22" name="Rectangle 21"/>
-          <p:cNvSpPr/>
-          <p:nvPr/>
-        </p:nvSpPr>
-        <p:spPr>
-          <a:xfrm>
-            <a:off x="731520" y="4251960"/>
-            <a:ext cx="82296" cy="1143000"/>
-          </a:xfrm>
-          <a:prstGeom prst="rect">
-            <a:avLst/>
-          </a:prstGeom>
-          <a:solidFill>
-            <a:srgbClr val="429761"/>
-          </a:solidFill>
-          <a:ln>
-            <a:noFill/>
-          </a:ln>
-        </p:spPr>
-        <p:style>
-          <a:lnRef idx="1">
-            <a:schemeClr val="accent1"/>
-          </a:lnRef>
-          <a:fillRef idx="3">
-            <a:schemeClr val="accent1"/>
-          </a:fillRef>
-          <a:effectRef idx="2">
-            <a:schemeClr val="accent1"/>
-          </a:effectRef>
-          <a:fontRef idx="minor">
-            <a:schemeClr val="lt1"/>
-          </a:fontRef>
-        </p:style>
-        <p:txBody>
-          <a:bodyPr rtlCol="0" anchor="ctr"/>
-          <a:lstStyle/>
-          <a:p>
-            <a:pPr algn="ctr"/>
-          </a:p>
-        </p:txBody>
-      </p:sp>
-      <p:sp>
-        <p:nvSpPr>
-          <p:cNvPr id="23" name="Rounded Rectangle 22"/>
-          <p:cNvSpPr/>
-          <p:nvPr/>
-        </p:nvSpPr>
-        <p:spPr>
-          <a:xfrm>
-            <a:off x="6263640" y="4251960"/>
-            <a:ext cx="5166360" cy="1143000"/>
-          </a:xfrm>
-          <a:prstGeom prst="roundRect">
-            <a:avLst/>
-          </a:prstGeom>
-          <a:solidFill>
-            <a:srgbClr val="FFF6E8"/>
-          </a:solidFill>
-          <a:ln w="14604">
-            <a:solidFill>
-              <a:srgbClr val="E5892A"/>
-            </a:solidFill>
-          </a:ln>
-        </p:spPr>
-        <p:style>
-          <a:lnRef idx="1">
-            <a:schemeClr val="accent1"/>
-          </a:lnRef>
-          <a:fillRef idx="3">
-            <a:schemeClr val="accent1"/>
-          </a:fillRef>
-          <a:effectRef idx="2">
-            <a:schemeClr val="accent1"/>
-          </a:effectRef>
-          <a:fontRef idx="minor">
-            <a:schemeClr val="lt1"/>
-          </a:fontRef>
-        </p:style>
-        <p:txBody>
-          <a:bodyPr rtlCol="0" anchor="ctr" lIns="182880" tIns="100584"/>
-          <a:lstStyle/>
-          <a:p>
-            <a:pPr algn="ctr">
-              <a:defRPr sz="1600" b="1">
-                <a:solidFill>
-                  <a:srgbClr val="232D37"/>
-                </a:solidFill>
-                <a:latin typeface="Aptos Display"/>
-              </a:defRPr>
-            </a:pPr>
-            <a:r>
-              <a:t>Avoiding circular LTCG logic</a:t>
-            </a:r>
-          </a:p>
-          <a:p>
-            <a:pPr>
-              <a:spcBef>
-                <a:spcPts val="400"/>
-              </a:spcBef>
-              <a:defRPr sz="1200">
-                <a:solidFill>
-                  <a:srgbClr val="232D37"/>
-                </a:solidFill>
-                <a:latin typeface="Aptos"/>
-              </a:defRPr>
-            </a:pPr>
-            <a:r>
-              <a:t>Percentage-based realized LTCG uses prior-year total tax; year zero uses 0. This removes any same-year fixed-point loop.</a:t>
-            </a:r>
-          </a:p>
-        </p:txBody>
-      </p:sp>
-      <p:sp>
-        <p:nvSpPr>
-          <p:cNvPr id="24" name="Rectangle 23"/>
-          <p:cNvSpPr/>
-          <p:nvPr/>
-        </p:nvSpPr>
-        <p:spPr>
-          <a:xfrm>
-            <a:off x="6263640" y="4251960"/>
-            <a:ext cx="82296" cy="1143000"/>
-          </a:xfrm>
-          <a:prstGeom prst="rect">
-            <a:avLst/>
-          </a:prstGeom>
-          <a:solidFill>
-            <a:srgbClr val="E5892A"/>
-          </a:solidFill>
-          <a:ln>
-            <a:noFill/>
-          </a:ln>
-        </p:spPr>
-        <p:style>
-          <a:lnRef idx="1">
-            <a:schemeClr val="accent1"/>
-          </a:lnRef>
-          <a:fillRef idx="3">
-            <a:schemeClr val="accent1"/>
-          </a:fillRef>
-          <a:effectRef idx="2">
-            <a:schemeClr val="accent1"/>
-          </a:effectRef>
-          <a:fontRef idx="minor">
-            <a:schemeClr val="lt1"/>
-          </a:fontRef>
-        </p:style>
-        <p:txBody>
-          <a:bodyPr rtlCol="0" anchor="ctr"/>
-          <a:lstStyle/>
-          <a:p>
-            <a:pPr algn="ctr"/>
-          </a:p>
-        </p:txBody>
-      </p:sp>
-      <p:sp>
-        <p:nvSpPr>
-          <p:cNvPr id="25" name="Rectangle 24"/>
+      <p:sp>
+        <p:nvSpPr>
+          <p:cNvPr id="10" name="Rectangle 9"/>
           <p:cNvSpPr/>
           <p:nvPr/>
         </p:nvSpPr>
@@ -8167,14 +7280,14 @@
       </p:sp>
       <p:sp>
         <p:nvSpPr>
-          <p:cNvPr id="26" name="TextBox 25"/>
+          <p:cNvPr id="11" name="TextBox 10"/>
           <p:cNvSpPr txBox="1"/>
           <p:nvPr/>
         </p:nvSpPr>
         <p:spPr>
           <a:xfrm>
             <a:off x="530352" y="6510528"/>
-            <a:ext cx="10881360" cy="164592"/>
+            <a:ext cx="10881360" cy="146304"/>
           </a:xfrm>
           <a:prstGeom prst="rect">
             <a:avLst/>
@@ -8196,7 +7309,7 @@
               </a:defRPr>
             </a:pPr>
             <a:r>
-              <a:t>Retirement Income Planner • Architecture overview • Updated specification</a:t>
+              <a:t>Retirement Income Planner • Architecture overview • IRMAA and Excel-export update</a:t>
             </a:r>
           </a:p>
         </p:txBody>
@@ -8235,8 +7348,8 @@
         </p:nvSpPr>
         <p:spPr>
           <a:xfrm>
-            <a:off x="502920" y="237744"/>
-            <a:ext cx="11155680" cy="457200"/>
+            <a:off x="502920" y="246888"/>
+            <a:ext cx="11155680" cy="438912"/>
           </a:xfrm>
           <a:prstGeom prst="rect">
             <a:avLst/>
@@ -8258,7 +7371,7 @@
               </a:defRPr>
             </a:pPr>
             <a:r>
-              <a:t>Display layer: charts plus transparent reference pages</a:t>
+              <a:t>Display updates: expense transparency</a:t>
             </a:r>
           </a:p>
         </p:txBody>
@@ -8272,7 +7385,7 @@
         <p:spPr>
           <a:xfrm>
             <a:off x="530352" y="786384"/>
-            <a:ext cx="10972800" cy="256032"/>
+            <a:ext cx="10972800" cy="219456"/>
           </a:xfrm>
           <a:prstGeom prst="rect">
             <a:avLst/>
@@ -8294,7 +7407,7 @@
               </a:defRPr>
             </a:pPr>
             <a:r>
-              <a:t>The updated display layer has two additional browser-tab pages alongside the Chart.js views.</a:t>
+              <a:t>Asset views expose the new expense component while retaining the separation between data preparation and presentation.</a:t>
             </a:r>
           </a:p>
         </p:txBody>
@@ -8307,8 +7420,8 @@
         </p:nvSpPr>
         <p:spPr>
           <a:xfrm>
-            <a:off x="548640" y="1234440"/>
-            <a:ext cx="2743200" cy="4480560"/>
+            <a:off x="594360" y="1280160"/>
+            <a:ext cx="3337560" cy="4297680"/>
           </a:xfrm>
           <a:prstGeom prst="roundRect">
             <a:avLst/>
@@ -8316,7 +7429,7 @@
           <a:solidFill>
             <a:srgbClr val="F7EFFF"/>
           </a:solidFill>
-          <a:ln w="14604">
+          <a:ln w="13970">
             <a:solidFill>
               <a:srgbClr val="7852B0"/>
             </a:solidFill>
@@ -8337,7 +7450,7 @@
           </a:fontRef>
         </p:style>
         <p:txBody>
-          <a:bodyPr rtlCol="0" anchor="ctr" lIns="182880" tIns="100584"/>
+          <a:bodyPr rtlCol="0" anchor="ctr" lIns="182880" rIns="100584" tIns="91440"/>
           <a:lstStyle/>
           <a:p>
             <a:pPr algn="ctr">
@@ -8349,13 +7462,13 @@
               </a:defRPr>
             </a:pPr>
             <a:r>
-              <a:t>Charts</a:t>
+              <a:t>Asset charts</a:t>
             </a:r>
           </a:p>
           <a:p>
             <a:pPr>
               <a:spcBef>
-                <a:spcPts val="400"/>
+                <a:spcPts val="300"/>
               </a:spcBef>
               <a:defRPr sz="1200">
                 <a:solidFill>
@@ -8365,13 +7478,13 @@
               </a:defRPr>
             </a:pPr>
             <a:r>
-              <a:t>SS breakeven scenarios</a:t>
+              <a:t>Balances for taxable brokerage, IRA, Roth, and separate IDGT portfolios</a:t>
             </a:r>
           </a:p>
           <a:p>
             <a:pPr>
               <a:spcBef>
-                <a:spcPts val="400"/>
+                <a:spcPts val="300"/>
               </a:spcBef>
               <a:defRPr sz="1200">
                 <a:solidFill>
@@ -8381,13 +7494,13 @@
               </a:defRPr>
             </a:pPr>
             <a:r>
-              <a:t>Annual income stack + IRMAA</a:t>
+              <a:t>Tooltips show net growth when Expenses is enabled</a:t>
             </a:r>
           </a:p>
           <a:p>
             <a:pPr>
               <a:spcBef>
-                <a:spcPts val="400"/>
+                <a:spcPts val="300"/>
               </a:spcBef>
               <a:defRPr sz="1200">
                 <a:solidFill>
@@ -8397,55 +7510,7 @@
               </a:defRPr>
             </a:pPr>
             <a:r>
-              <a:t>Taxable SS and marginal rate</a:t>
-            </a:r>
-          </a:p>
-          <a:p>
-            <a:pPr>
-              <a:spcBef>
-                <a:spcPts val="400"/>
-              </a:spcBef>
-              <a:defRPr sz="1200">
-                <a:solidFill>
-                  <a:srgbClr val="232D37"/>
-                </a:solidFill>
-                <a:latin typeface="Aptos"/>
-              </a:defRPr>
-            </a:pPr>
-            <a:r>
-              <a:t>Income-tax stack + rates</a:t>
-            </a:r>
-          </a:p>
-          <a:p>
-            <a:pPr>
-              <a:spcBef>
-                <a:spcPts val="400"/>
-              </a:spcBef>
-              <a:defRPr sz="1200">
-                <a:solidFill>
-                  <a:srgbClr val="232D37"/>
-                </a:solidFill>
-                <a:latin typeface="Aptos"/>
-              </a:defRPr>
-            </a:pPr>
-            <a:r>
-              <a:t>Assets, including separate IDGT view</a:t>
-            </a:r>
-          </a:p>
-          <a:p>
-            <a:pPr>
-              <a:spcBef>
-                <a:spcPts val="400"/>
-              </a:spcBef>
-              <a:defRPr sz="1200">
-                <a:solidFill>
-                  <a:srgbClr val="232D37"/>
-                </a:solidFill>
-                <a:latin typeface="Aptos"/>
-              </a:defRPr>
-            </a:pPr>
-            <a:r>
-              <a:t>Shared overlays, tooltips, locked scales</a:t>
+              <a:t>Unrealized-gain end-of-plan note remains available for tracked portfolios</a:t>
             </a:r>
           </a:p>
         </p:txBody>
@@ -8458,8 +7523,8 @@
         </p:nvSpPr>
         <p:spPr>
           <a:xfrm>
-            <a:off x="548640" y="1234440"/>
-            <a:ext cx="82296" cy="4480560"/>
+            <a:off x="594360" y="1280160"/>
+            <a:ext cx="82296" cy="4297680"/>
           </a:xfrm>
           <a:prstGeom prst="rect">
             <a:avLst/>
@@ -8501,8 +7566,8 @@
         </p:nvSpPr>
         <p:spPr>
           <a:xfrm>
-            <a:off x="3657600" y="1234440"/>
-            <a:ext cx="3566160" cy="4480560"/>
+            <a:off x="4425696" y="1280160"/>
+            <a:ext cx="3337560" cy="4297680"/>
           </a:xfrm>
           <a:prstGeom prst="roundRect">
             <a:avLst/>
@@ -8510,7 +7575,7 @@
           <a:solidFill>
             <a:srgbClr val="E9F4FF"/>
           </a:solidFill>
-          <a:ln w="14604">
+          <a:ln w="13970">
             <a:solidFill>
               <a:srgbClr val="266EB2"/>
             </a:solidFill>
@@ -8531,7 +7596,7 @@
           </a:fontRef>
         </p:style>
         <p:txBody>
-          <a:bodyPr rtlCol="0" anchor="ctr" lIns="182880" tIns="100584"/>
+          <a:bodyPr rtlCol="0" anchor="ctr" lIns="182880" rIns="100584" tIns="91440"/>
           <a:lstStyle/>
           <a:p>
             <a:pPr algn="ctr">
@@ -8543,13 +7608,13 @@
               </a:defRPr>
             </a:pPr>
             <a:r>
-              <a:t>Formulas page</a:t>
+              <a:t>show_details tooltip</a:t>
             </a:r>
           </a:p>
           <a:p>
             <a:pPr>
               <a:spcBef>
-                <a:spcPts val="400"/>
+                <a:spcPts val="300"/>
               </a:spcBef>
               <a:defRPr sz="1200">
                 <a:solidFill>
@@ -8559,13 +7624,13 @@
               </a:defRPr>
             </a:pPr>
             <a:r>
-              <a:t>Opened in a new tab</a:t>
+              <a:t>Expenses paid by other income</a:t>
             </a:r>
           </a:p>
           <a:p>
             <a:pPr>
               <a:spcBef>
-                <a:spcPts val="400"/>
+                <a:spcPts val="300"/>
               </a:spcBef>
               <a:defRPr sz="1200">
                 <a:solidFill>
@@ -8575,13 +7640,13 @@
               </a:defRPr>
             </a:pPr>
             <a:r>
-              <a:t>Glossary, reference tables, and equations</a:t>
+              <a:t>Dividends used for expenses</a:t>
             </a:r>
           </a:p>
           <a:p>
             <a:pPr>
               <a:spcBef>
-                <a:spcPts val="400"/>
+                <a:spcPts val="300"/>
               </a:spcBef>
               <a:defRPr sz="1200">
                 <a:solidFill>
@@ -8591,13 +7656,13 @@
               </a:defRPr>
             </a:pPr>
             <a:r>
-              <a:t>Tables are generated from the same constants used by Compute</a:t>
+              <a:t>Dividends reinvested</a:t>
             </a:r>
           </a:p>
           <a:p>
             <a:pPr>
               <a:spcBef>
-                <a:spcPts val="400"/>
+                <a:spcPts val="300"/>
               </a:spcBef>
               <a:defRPr sz="1200">
                 <a:solidFill>
@@ -8607,7 +7672,55 @@
               </a:defRPr>
             </a:pPr>
             <a:r>
-              <a:t>No duplicated tax/RMD constants in page code</a:t>
+              <a:t>Sold to cover shortfall</a:t>
+            </a:r>
+          </a:p>
+          <a:p>
+            <a:pPr>
+              <a:spcBef>
+                <a:spcPts val="300"/>
+              </a:spcBef>
+              <a:defRPr sz="1200">
+                <a:solidFill>
+                  <a:srgbClr val="232D37"/>
+                </a:solidFill>
+                <a:latin typeface="Aptos"/>
+              </a:defRPr>
+            </a:pPr>
+            <a:r>
+              <a:t>Cost basis and unrealized gain</a:t>
+            </a:r>
+          </a:p>
+          <a:p>
+            <a:pPr>
+              <a:spcBef>
+                <a:spcPts val="300"/>
+              </a:spcBef>
+              <a:defRPr sz="1200">
+                <a:solidFill>
+                  <a:srgbClr val="232D37"/>
+                </a:solidFill>
+                <a:latin typeface="Aptos"/>
+              </a:defRPr>
+            </a:pPr>
+            <a:r>
+              <a:t>IRMAA surcharge / IRMAA drag</a:t>
+            </a:r>
+          </a:p>
+          <a:p>
+            <a:pPr>
+              <a:spcBef>
+                <a:spcPts val="300"/>
+              </a:spcBef>
+              <a:defRPr sz="1200">
+                <a:solidFill>
+                  <a:srgbClr val="232D37"/>
+                </a:solidFill>
+                <a:latin typeface="Aptos"/>
+              </a:defRPr>
+            </a:pPr>
+            <a:r>
+              <a:t>Death-year basis step-up</a:t>
             </a:r>
           </a:p>
         </p:txBody>
@@ -8620,8 +7733,8 @@
         </p:nvSpPr>
         <p:spPr>
           <a:xfrm>
-            <a:off x="3657600" y="1234440"/>
-            <a:ext cx="82296" cy="4480560"/>
+            <a:off x="4425696" y="1280160"/>
+            <a:ext cx="82296" cy="4297680"/>
           </a:xfrm>
           <a:prstGeom prst="rect">
             <a:avLst/>
@@ -8663,18 +7776,18 @@
         </p:nvSpPr>
         <p:spPr>
           <a:xfrm>
-            <a:off x="7589520" y="1234440"/>
-            <a:ext cx="3977639" cy="4480560"/>
+            <a:off x="8257031" y="1280160"/>
+            <a:ext cx="3337560" cy="4297680"/>
           </a:xfrm>
           <a:prstGeom prst="roundRect">
             <a:avLst/>
           </a:prstGeom>
           <a:solidFill>
-            <a:srgbClr val="FFF6E8"/>
+            <a:srgbClr val="F8FAFC"/>
           </a:solidFill>
-          <a:ln w="14604">
+          <a:ln w="13970">
             <a:solidFill>
-              <a:srgbClr val="E5892A"/>
+              <a:srgbClr val="0F2647"/>
             </a:solidFill>
           </a:ln>
         </p:spPr>
@@ -8693,7 +7806,7 @@
           </a:fontRef>
         </p:style>
         <p:txBody>
-          <a:bodyPr rtlCol="0" anchor="ctr" lIns="182880" tIns="100584"/>
+          <a:bodyPr rtlCol="0" anchor="ctr" lIns="182880" rIns="100584" tIns="91440"/>
           <a:lstStyle/>
           <a:p>
             <a:pPr algn="ctr">
@@ -8705,13 +7818,13 @@
               </a:defRPr>
             </a:pPr>
             <a:r>
-              <a:t>Notes page</a:t>
+              <a:t>Other chart behavior</a:t>
             </a:r>
           </a:p>
           <a:p>
             <a:pPr>
               <a:spcBef>
-                <a:spcPts val="400"/>
+                <a:spcPts val="300"/>
               </a:spcBef>
               <a:defRPr sz="1200">
                 <a:solidFill>
@@ -8721,13 +7834,13 @@
               </a:defRPr>
             </a:pPr>
             <a:r>
-              <a:t>Opened in a new tab</a:t>
+              <a:t>Income chart retains IRMAA-tier reference lines.</a:t>
             </a:r>
           </a:p>
           <a:p>
             <a:pPr>
               <a:spcBef>
-                <a:spcPts val="400"/>
+                <a:spcPts val="300"/>
               </a:spcBef>
               <a:defRPr sz="1200">
                 <a:solidFill>
@@ -8737,13 +7850,13 @@
               </a:defRPr>
             </a:pPr>
             <a:r>
-              <a:t>Fetches misc/Note4User.md at click time</a:t>
+              <a:t>Tax chart remains driven by tax components and rates.</a:t>
             </a:r>
           </a:p>
           <a:p>
             <a:pPr>
               <a:spcBef>
-                <a:spcPts val="400"/>
+                <a:spcPts val="300"/>
               </a:spcBef>
               <a:defRPr sz="1200">
                 <a:solidFill>
@@ -8753,39 +7866,7 @@
               </a:defRPr>
             </a:pPr>
             <a:r>
-              <a:t>Small built-in Markdown converter</a:t>
-            </a:r>
-          </a:p>
-          <a:p>
-            <a:pPr>
-              <a:spcBef>
-                <a:spcPts val="400"/>
-              </a:spcBef>
-              <a:defRPr sz="1200">
-                <a:solidFill>
-                  <a:srgbClr val="232D37"/>
-                </a:solidFill>
-                <a:latin typeface="Aptos"/>
-              </a:defRPr>
-            </a:pPr>
-            <a:r>
-              <a:t>No code change needed when notes change</a:t>
-            </a:r>
-          </a:p>
-          <a:p>
-            <a:pPr>
-              <a:spcBef>
-                <a:spcPts val="400"/>
-              </a:spcBef>
-              <a:defRPr sz="1200">
-                <a:solidFill>
-                  <a:srgbClr val="232D37"/>
-                </a:solidFill>
-                <a:latin typeface="Aptos"/>
-              </a:defRPr>
-            </a:pPr>
-            <a:r>
-              <a:t>Explains file:// fetch limitation and workarounds</a:t>
+              <a:t>No display file calculates an IRMAA, basis, or LTCG result.</a:t>
             </a:r>
           </a:p>
         </p:txBody>
@@ -8798,14 +7879,14 @@
         </p:nvSpPr>
         <p:spPr>
           <a:xfrm>
-            <a:off x="7589520" y="1234440"/>
-            <a:ext cx="82296" cy="4480560"/>
+            <a:off x="8257031" y="1280160"/>
+            <a:ext cx="82296" cy="4297680"/>
           </a:xfrm>
           <a:prstGeom prst="rect">
             <a:avLst/>
           </a:prstGeom>
           <a:solidFill>
-            <a:srgbClr val="E5892A"/>
+            <a:srgbClr val="0F2647"/>
           </a:solidFill>
           <a:ln>
             <a:noFill/>
@@ -8885,7 +7966,7 @@
         <p:spPr>
           <a:xfrm>
             <a:off x="530352" y="6510528"/>
-            <a:ext cx="10881360" cy="164592"/>
+            <a:ext cx="10881360" cy="146304"/>
           </a:xfrm>
           <a:prstGeom prst="rect">
             <a:avLst/>
@@ -8907,7 +7988,7 @@
               </a:defRPr>
             </a:pPr>
             <a:r>
-              <a:t>Retirement Income Planner • Architecture overview • Updated specification</a:t>
+              <a:t>Retirement Income Planner • Architecture overview • IRMAA and Excel-export update</a:t>
             </a:r>
           </a:p>
         </p:txBody>
@@ -8946,8 +8027,8 @@
         </p:nvSpPr>
         <p:spPr>
           <a:xfrm>
-            <a:off x="502920" y="237744"/>
-            <a:ext cx="11155680" cy="457200"/>
+            <a:off x="502920" y="246888"/>
+            <a:ext cx="11155680" cy="438912"/>
           </a:xfrm>
           <a:prstGeom prst="rect">
             <a:avLst/>
@@ -8969,7 +8050,7 @@
               </a:defRPr>
             </a:pPr>
             <a:r>
-              <a:t>Expanded project structure and browser loading</a:t>
+              <a:t>Excel export: projection data becomes a workbook</a:t>
             </a:r>
           </a:p>
         </p:txBody>
@@ -8983,7 +8064,7 @@
         <p:spPr>
           <a:xfrm>
             <a:off x="530352" y="786384"/>
-            <a:ext cx="10972800" cy="256032"/>
+            <a:ext cx="10972800" cy="219456"/>
           </a:xfrm>
           <a:prstGeom prst="rect">
             <a:avLst/>
@@ -9005,7 +8086,7 @@
               </a:defRPr>
             </a:pPr>
             <a:r>
-              <a:t>The app still uses plain non-module scripts in dependency order—no build step is required.</a:t>
+              <a:t>The new export path is deliberately read-only and uses the already-computed projection.</a:t>
             </a:r>
           </a:p>
         </p:txBody>
@@ -9018,18 +8099,18 @@
         </p:nvSpPr>
         <p:spPr>
           <a:xfrm>
-            <a:off x="502920" y="1143000"/>
-            <a:ext cx="2423160" cy="4526280"/>
+            <a:off x="685800" y="1097280"/>
+            <a:ext cx="2331720" cy="4434840"/>
           </a:xfrm>
           <a:prstGeom prst="roundRect">
             <a:avLst/>
           </a:prstGeom>
           <a:solidFill>
-            <a:srgbClr val="F8FAFC"/>
+            <a:srgbClr val="E9F4FF"/>
           </a:solidFill>
-          <a:ln w="14604">
+          <a:ln w="13970">
             <a:solidFill>
-              <a:srgbClr val="0F2647"/>
+              <a:srgbClr val="266EB2"/>
             </a:solidFill>
           </a:ln>
         </p:spPr>
@@ -9048,7 +8129,7 @@
           </a:fontRef>
         </p:style>
         <p:txBody>
-          <a:bodyPr rtlCol="0" anchor="ctr" lIns="182880" tIns="100584"/>
+          <a:bodyPr rtlCol="0" anchor="ctr" lIns="182880" rIns="100584" tIns="91440"/>
           <a:lstStyle/>
           <a:p>
             <a:pPr algn="ctr">
@@ -9060,13 +8141,13 @@
               </a:defRPr>
             </a:pPr>
             <a:r>
-              <a:t>Core</a:t>
+              <a:t>Trigger</a:t>
             </a:r>
           </a:p>
           <a:p>
             <a:pPr>
               <a:spcBef>
-                <a:spcPts val="400"/>
+                <a:spcPts val="300"/>
               </a:spcBef>
               <a:defRPr sz="1200">
                 <a:solidFill>
@@ -9076,13 +8157,13 @@
               </a:defRPr>
             </a:pPr>
             <a:r>
-              <a:t>constants.js</a:t>
+              <a:t>Topbar: Export to Excel</a:t>
             </a:r>
           </a:p>
           <a:p>
             <a:pPr>
               <a:spcBef>
-                <a:spcPts val="400"/>
+                <a:spcPts val="300"/>
               </a:spcBef>
               <a:defRPr sz="1200">
                 <a:solidFill>
@@ -9092,13 +8173,13 @@
               </a:defRPr>
             </a:pPr>
             <a:r>
-              <a:t>helpers.js</a:t>
+              <a:t>Calls exportToExcel()</a:t>
             </a:r>
           </a:p>
           <a:p>
             <a:pPr>
               <a:spcBef>
-                <a:spcPts val="400"/>
+                <a:spcPts val="300"/>
               </a:spcBef>
               <a:defRPr sz="1200">
                 <a:solidFill>
@@ -9108,23 +8189,7 @@
               </a:defRPr>
             </a:pPr>
             <a:r>
-              <a:t>state.js</a:t>
-            </a:r>
-          </a:p>
-          <a:p>
-            <a:pPr>
-              <a:spcBef>
-                <a:spcPts val="400"/>
-              </a:spcBef>
-              <a:defRPr sz="1200">
-                <a:solidFill>
-                  <a:srgbClr val="232D37"/>
-                </a:solidFill>
-                <a:latin typeface="Aptos"/>
-              </a:defRPr>
-            </a:pPr>
-            <a:r>
-              <a:t>Owns data tables, utilities, persistence, and defaults</a:t>
+              <a:t>Uses SheetJS XLSX library loaded from pinned CDN</a:t>
             </a:r>
           </a:p>
         </p:txBody>
@@ -9137,14 +8202,14 @@
         </p:nvSpPr>
         <p:spPr>
           <a:xfrm>
-            <a:off x="502920" y="1143000"/>
-            <a:ext cx="82296" cy="4526280"/>
+            <a:off x="685800" y="1097280"/>
+            <a:ext cx="82296" cy="4434840"/>
           </a:xfrm>
           <a:prstGeom prst="rect">
             <a:avLst/>
           </a:prstGeom>
           <a:solidFill>
-            <a:srgbClr val="0F2647"/>
+            <a:srgbClr val="266EB2"/>
           </a:solidFill>
           <a:ln>
             <a:noFill/>
@@ -9180,8 +8245,8 @@
         </p:nvSpPr>
         <p:spPr>
           <a:xfrm>
-            <a:off x="3246120" y="1143000"/>
-            <a:ext cx="2423160" cy="4526280"/>
+            <a:off x="3401568" y="1097280"/>
+            <a:ext cx="2331720" cy="4434840"/>
           </a:xfrm>
           <a:prstGeom prst="roundRect">
             <a:avLst/>
@@ -9189,7 +8254,7 @@
           <a:solidFill>
             <a:srgbClr val="EAF9F4"/>
           </a:solidFill>
-          <a:ln w="14604">
+          <a:ln w="13970">
             <a:solidFill>
               <a:srgbClr val="429761"/>
             </a:solidFill>
@@ -9210,7 +8275,7 @@
           </a:fontRef>
         </p:style>
         <p:txBody>
-          <a:bodyPr rtlCol="0" anchor="ctr" lIns="182880" tIns="100584"/>
+          <a:bodyPr rtlCol="0" anchor="ctr" lIns="182880" rIns="100584" tIns="91440"/>
           <a:lstStyle/>
           <a:p>
             <a:pPr algn="ctr">
@@ -9222,13 +8287,13 @@
               </a:defRPr>
             </a:pPr>
             <a:r>
-              <a:t>Compute</a:t>
+              <a:t>Input</a:t>
             </a:r>
           </a:p>
           <a:p>
             <a:pPr>
               <a:spcBef>
-                <a:spcPts val="400"/>
+                <a:spcPts val="300"/>
               </a:spcBef>
               <a:defRPr sz="1200">
                 <a:solidFill>
@@ -9238,13 +8303,13 @@
               </a:defRPr>
             </a:pPr>
             <a:r>
-              <a:t>Social Security</a:t>
+              <a:t>lastProjection from the app</a:t>
             </a:r>
           </a:p>
           <a:p>
             <a:pPr>
               <a:spcBef>
-                <a:spcPts val="400"/>
+                <a:spcPts val="300"/>
               </a:spcBef>
               <a:defRPr sz="1200">
                 <a:solidFill>
@@ -9254,13 +8319,13 @@
               </a:defRPr>
             </a:pPr>
             <a:r>
-              <a:t>RMD</a:t>
+              <a:t>No state writes</a:t>
             </a:r>
           </a:p>
           <a:p>
             <a:pPr>
               <a:spcBef>
-                <a:spcPts val="400"/>
+                <a:spcPts val="300"/>
               </a:spcBef>
               <a:defRPr sz="1200">
                 <a:solidFill>
@@ -9270,55 +8335,7 @@
               </a:defRPr>
             </a:pPr>
             <a:r>
-              <a:t>Tax</a:t>
-            </a:r>
-          </a:p>
-          <a:p>
-            <a:pPr>
-              <a:spcBef>
-                <a:spcPts val="400"/>
-              </a:spcBef>
-              <a:defRPr sz="1200">
-                <a:solidFill>
-                  <a:srgbClr val="232D37"/>
-                </a:solidFill>
-                <a:latin typeface="Aptos"/>
-              </a:defRPr>
-            </a:pPr>
-            <a:r>
-              <a:t>Dates &amp; age range</a:t>
-            </a:r>
-          </a:p>
-          <a:p>
-            <a:pPr>
-              <a:spcBef>
-                <a:spcPts val="400"/>
-              </a:spcBef>
-              <a:defRPr sz="1200">
-                <a:solidFill>
-                  <a:srgbClr val="232D37"/>
-                </a:solidFill>
-                <a:latin typeface="Aptos"/>
-              </a:defRPr>
-            </a:pPr>
-            <a:r>
-              <a:t>Projection</a:t>
-            </a:r>
-          </a:p>
-          <a:p>
-            <a:pPr>
-              <a:spcBef>
-                <a:spcPts val="400"/>
-              </a:spcBef>
-              <a:defRPr sz="1200">
-                <a:solidFill>
-                  <a:srgbClr val="232D37"/>
-                </a:solidFill>
-                <a:latin typeface="Aptos"/>
-              </a:defRPr>
-            </a:pPr>
-            <a:r>
-              <a:t>What-if</a:t>
+              <a:t>Checks for rows and library availability before download</a:t>
             </a:r>
           </a:p>
         </p:txBody>
@@ -9331,8 +8348,8 @@
         </p:nvSpPr>
         <p:spPr>
           <a:xfrm>
-            <a:off x="3246120" y="1143000"/>
-            <a:ext cx="82296" cy="4526280"/>
+            <a:off x="3401568" y="1097280"/>
+            <a:ext cx="82296" cy="4434840"/>
           </a:xfrm>
           <a:prstGeom prst="rect">
             <a:avLst/>
@@ -9374,18 +8391,18 @@
         </p:nvSpPr>
         <p:spPr>
           <a:xfrm>
-            <a:off x="5989320" y="1143000"/>
-            <a:ext cx="2423160" cy="4526280"/>
+            <a:off x="6117336" y="1097280"/>
+            <a:ext cx="2331720" cy="4434840"/>
           </a:xfrm>
           <a:prstGeom prst="roundRect">
             <a:avLst/>
           </a:prstGeom>
           <a:solidFill>
-            <a:srgbClr val="E9F4FF"/>
+            <a:srgbClr val="FFF6E8"/>
           </a:solidFill>
-          <a:ln w="14604">
+          <a:ln w="13970">
             <a:solidFill>
-              <a:srgbClr val="266EB2"/>
+              <a:srgbClr val="E5892A"/>
             </a:solidFill>
           </a:ln>
         </p:spPr>
@@ -9404,7 +8421,7 @@
           </a:fontRef>
         </p:style>
         <p:txBody>
-          <a:bodyPr rtlCol="0" anchor="ctr" lIns="182880" tIns="100584"/>
+          <a:bodyPr rtlCol="0" anchor="ctr" lIns="182880" rIns="100584" tIns="91440"/>
           <a:lstStyle/>
           <a:p>
             <a:pPr algn="ctr">
@@ -9416,13 +8433,13 @@
               </a:defRPr>
             </a:pPr>
             <a:r>
-              <a:t>Input</a:t>
+              <a:t>Sheet 1</a:t>
             </a:r>
           </a:p>
           <a:p>
             <a:pPr>
               <a:spcBef>
-                <a:spcPts val="400"/>
+                <a:spcPts val="300"/>
               </a:spcBef>
               <a:defRPr sz="1200">
                 <a:solidFill>
@@ -9432,13 +8449,13 @@
               </a:defRPr>
             </a:pPr>
             <a:r>
-              <a:t>Controls &amp; household</a:t>
+              <a:t>Projection by year</a:t>
             </a:r>
           </a:p>
           <a:p>
             <a:pPr>
               <a:spcBef>
-                <a:spcPts val="400"/>
+                <a:spcPts val="300"/>
               </a:spcBef>
               <a:defRPr sz="1200">
                 <a:solidFill>
@@ -9448,13 +8465,13 @@
               </a:defRPr>
             </a:pPr>
             <a:r>
-              <a:t>Assumptions &amp; income cards</a:t>
+              <a:t>One row per projected year</a:t>
             </a:r>
           </a:p>
           <a:p>
             <a:pPr>
               <a:spcBef>
-                <a:spcPts val="400"/>
+                <a:spcPts val="300"/>
               </a:spcBef>
               <a:defRPr sz="1200">
                 <a:solidFill>
@@ -9464,23 +8481,7 @@
               </a:defRPr>
             </a:pPr>
             <a:r>
-              <a:t>incomeForms.js</a:t>
-            </a:r>
-          </a:p>
-          <a:p>
-            <a:pPr>
-              <a:spcBef>
-                <a:spcPts val="400"/>
-              </a:spcBef>
-              <a:defRPr sz="1200">
-                <a:solidFill>
-                  <a:srgbClr val="232D37"/>
-                </a:solidFill>
-                <a:latin typeface="Aptos"/>
-              </a:defRPr>
-            </a:pPr>
-            <a:r>
-              <a:t>loadMenu.js</a:t>
+              <a:t>Income, tax, SST, NIIT, IRMAA, AGI, rates, and balances</a:t>
             </a:r>
           </a:p>
         </p:txBody>
@@ -9493,14 +8494,14 @@
         </p:nvSpPr>
         <p:spPr>
           <a:xfrm>
-            <a:off x="5989320" y="1143000"/>
-            <a:ext cx="82296" cy="4526280"/>
+            <a:off x="6117336" y="1097280"/>
+            <a:ext cx="82296" cy="4434840"/>
           </a:xfrm>
           <a:prstGeom prst="rect">
             <a:avLst/>
           </a:prstGeom>
           <a:solidFill>
-            <a:srgbClr val="266EB2"/>
+            <a:srgbClr val="E5892A"/>
           </a:solidFill>
           <a:ln>
             <a:noFill/>
@@ -9536,8 +8537,8 @@
         </p:nvSpPr>
         <p:spPr>
           <a:xfrm>
-            <a:off x="8732520" y="1143000"/>
-            <a:ext cx="2926080" cy="4526280"/>
+            <a:off x="8833104" y="1097280"/>
+            <a:ext cx="2331720" cy="4434840"/>
           </a:xfrm>
           <a:prstGeom prst="roundRect">
             <a:avLst/>
@@ -9545,7 +8546,7 @@
           <a:solidFill>
             <a:srgbClr val="F7EFFF"/>
           </a:solidFill>
-          <a:ln w="14604">
+          <a:ln w="13970">
             <a:solidFill>
               <a:srgbClr val="7852B0"/>
             </a:solidFill>
@@ -9566,7 +8567,7 @@
           </a:fontRef>
         </p:style>
         <p:txBody>
-          <a:bodyPr rtlCol="0" anchor="ctr" lIns="182880" tIns="100584"/>
+          <a:bodyPr rtlCol="0" anchor="ctr" lIns="182880" rIns="100584" tIns="91440"/>
           <a:lstStyle/>
           <a:p>
             <a:pPr algn="ctr">
@@ -9578,13 +8579,13 @@
               </a:defRPr>
             </a:pPr>
             <a:r>
-              <a:t>Display &amp; content</a:t>
+              <a:t>Sheet 2</a:t>
             </a:r>
           </a:p>
           <a:p>
             <a:pPr>
               <a:spcBef>
-                <a:spcPts val="400"/>
+                <a:spcPts val="300"/>
               </a:spcBef>
               <a:defRPr sz="1200">
                 <a:solidFill>
@@ -9594,13 +8595,13 @@
               </a:defRPr>
             </a:pPr>
             <a:r>
-              <a:t>Chart helpers and chart files</a:t>
+              <a:t>Brokerage portfolios</a:t>
             </a:r>
           </a:p>
           <a:p>
             <a:pPr>
               <a:spcBef>
-                <a:spcPts val="400"/>
+                <a:spcPts val="300"/>
               </a:spcBef>
               <a:defRPr sz="1200">
                 <a:solidFill>
@@ -9610,13 +8611,13 @@
               </a:defRPr>
             </a:pPr>
             <a:r>
-              <a:t>footer.js</a:t>
+              <a:t>One row per person × portfolio × year</a:t>
             </a:r>
           </a:p>
           <a:p>
             <a:pPr>
               <a:spcBef>
-                <a:spcPts val="400"/>
+                <a:spcPts val="300"/>
               </a:spcBef>
               <a:defRPr sz="1200">
                 <a:solidFill>
@@ -9626,55 +8627,7 @@
               </a:defRPr>
             </a:pPr>
             <a:r>
-              <a:t>formulasPage.js</a:t>
-            </a:r>
-          </a:p>
-          <a:p>
-            <a:pPr>
-              <a:spcBef>
-                <a:spcPts val="400"/>
-              </a:spcBef>
-              <a:defRPr sz="1200">
-                <a:solidFill>
-                  <a:srgbClr val="232D37"/>
-                </a:solidFill>
-                <a:latin typeface="Aptos"/>
-              </a:defRPr>
-            </a:pPr>
-            <a:r>
-              <a:t>notesPage.js</a:t>
-            </a:r>
-          </a:p>
-          <a:p>
-            <a:pPr>
-              <a:spcBef>
-                <a:spcPts val="400"/>
-              </a:spcBef>
-              <a:defRPr sz="1200">
-                <a:solidFill>
-                  <a:srgbClr val="232D37"/>
-                </a:solidFill>
-                <a:latin typeface="Aptos"/>
-              </a:defRPr>
-            </a:pPr>
-            <a:r>
-              <a:t>misc/Note4User.md</a:t>
-            </a:r>
-          </a:p>
-          <a:p>
-            <a:pPr>
-              <a:spcBef>
-                <a:spcPts val="400"/>
-              </a:spcBef>
-              <a:defRPr sz="1200">
-                <a:solidFill>
-                  <a:srgbClr val="232D37"/>
-                </a:solidFill>
-                <a:latin typeface="Aptos"/>
-              </a:defRPr>
-            </a:pPr>
-            <a:r>
-              <a:t>Samples/*.json + manifest.json</a:t>
+              <a:t>Cost basis and expense-waterfall detail</a:t>
             </a:r>
           </a:p>
         </p:txBody>
@@ -9687,8 +8640,8 @@
         </p:nvSpPr>
         <p:spPr>
           <a:xfrm>
-            <a:off x="8732520" y="1143000"/>
-            <a:ext cx="82296" cy="4526280"/>
+            <a:off x="8833104" y="1097280"/>
+            <a:ext cx="82296" cy="4434840"/>
           </a:xfrm>
           <a:prstGeom prst="rect">
             <a:avLst/>
@@ -9730,15 +8683,15 @@
         </p:nvCxnSpPr>
         <p:spPr>
           <a:xfrm>
-            <a:off x="2971800" y="3383280"/>
-            <a:ext cx="201168" cy="0"/>
+            <a:off x="3063240" y="3319272"/>
+            <a:ext cx="256032" cy="0"/>
           </a:xfrm>
           <a:prstGeom prst="line">
             <a:avLst/>
           </a:prstGeom>
           <a:ln w="22860">
             <a:solidFill>
-              <a:srgbClr val="0F2647"/>
+              <a:srgbClr val="266EB2"/>
             </a:solidFill>
           </a:ln>
         </p:spPr>
@@ -9765,8 +8718,8 @@
         </p:nvCxnSpPr>
         <p:spPr>
           <a:xfrm>
-            <a:off x="5715000" y="3383280"/>
-            <a:ext cx="201168" cy="0"/>
+            <a:off x="5779008" y="3319272"/>
+            <a:ext cx="256032" cy="0"/>
           </a:xfrm>
           <a:prstGeom prst="line">
             <a:avLst/>
@@ -9800,15 +8753,15 @@
         </p:nvCxnSpPr>
         <p:spPr>
           <a:xfrm>
-            <a:off x="8458200" y="3383280"/>
-            <a:ext cx="201168" cy="0"/>
+            <a:off x="8494776" y="3319272"/>
+            <a:ext cx="256031" cy="0"/>
           </a:xfrm>
           <a:prstGeom prst="line">
             <a:avLst/>
           </a:prstGeom>
           <a:ln w="22860">
             <a:solidFill>
-              <a:srgbClr val="266EB2"/>
+              <a:srgbClr val="E5892A"/>
             </a:solidFill>
           </a:ln>
         </p:spPr>
@@ -9835,8 +8788,8 @@
         </p:nvSpPr>
         <p:spPr>
           <a:xfrm>
-            <a:off x="685800" y="5943600"/>
-            <a:ext cx="10881360" cy="228600"/>
+            <a:off x="685800" y="5806440"/>
+            <a:ext cx="10789920" cy="274320"/>
           </a:xfrm>
           <a:prstGeom prst="rect">
             <a:avLst/>
@@ -9858,7 +8811,7 @@
               </a:defRPr>
             </a:pPr>
             <a:r>
-              <a:t>Load-order rule: a script may only rely on names defined by scripts loaded earlier.</a:t>
+              <a:t>If the projection is empty or XLSX did not load, the app alerts instead of downloading an empty or broken workbook.</a:t>
             </a:r>
           </a:p>
         </p:txBody>
@@ -9915,7 +8868,7 @@
         <p:spPr>
           <a:xfrm>
             <a:off x="530352" y="6510528"/>
-            <a:ext cx="10881360" cy="164592"/>
+            <a:ext cx="10881360" cy="146304"/>
           </a:xfrm>
           <a:prstGeom prst="rect">
             <a:avLst/>
@@ -9937,7 +8890,7 @@
               </a:defRPr>
             </a:pPr>
             <a:r>
-              <a:t>Retirement Income Planner • Architecture overview • Updated specification</a:t>
+              <a:t>Retirement Income Planner • Architecture overview • IRMAA and Excel-export update</a:t>
             </a:r>
           </a:p>
         </p:txBody>
@@ -9951,6 +8904,972 @@
 </file>
 
 <file path=ppt/slides/slide8.xml><?xml version="1.0" encoding="utf-8"?>
+<p:sld xmlns:a="http://schemas.openxmlformats.org/drawingml/2006/main" xmlns:p="http://schemas.openxmlformats.org/presentationml/2006/main" xmlns:r="http://schemas.openxmlformats.org/officeDocument/2006/relationships">
+  <p:cSld>
+    <p:bg>
+      <p:bgPr>
+        <a:solidFill>
+          <a:srgbClr val="FFFFFF"/>
+        </a:solidFill>
+        <a:effectLst/>
+      </p:bgPr>
+    </p:bg>
+    <p:spTree>
+      <p:nvGrpSpPr>
+        <p:cNvPr id="1" name=""/>
+        <p:cNvGrpSpPr/>
+        <p:nvPr/>
+      </p:nvGrpSpPr>
+      <p:grpSpPr/>
+      <p:sp>
+        <p:nvSpPr>
+          <p:cNvPr id="2" name="TextBox 1"/>
+          <p:cNvSpPr txBox="1"/>
+          <p:nvPr/>
+        </p:nvSpPr>
+        <p:spPr>
+          <a:xfrm>
+            <a:off x="502920" y="246888"/>
+            <a:ext cx="11155680" cy="438912"/>
+          </a:xfrm>
+          <a:prstGeom prst="rect">
+            <a:avLst/>
+          </a:prstGeom>
+          <a:noFill/>
+        </p:spPr>
+        <p:txBody>
+          <a:bodyPr wrap="none" anchor="ctr">
+            <a:spAutoFit/>
+          </a:bodyPr>
+          <a:lstStyle/>
+          <a:p>
+            <a:pPr algn="l">
+              <a:defRPr sz="2700" b="1">
+                <a:solidFill>
+                  <a:srgbClr val="0F2647"/>
+                </a:solidFill>
+                <a:latin typeface="Aptos"/>
+              </a:defRPr>
+            </a:pPr>
+            <a:r>
+              <a:t>Updated project structure and load sequence</a:t>
+            </a:r>
+          </a:p>
+        </p:txBody>
+      </p:sp>
+      <p:sp>
+        <p:nvSpPr>
+          <p:cNvPr id="3" name="TextBox 2"/>
+          <p:cNvSpPr txBox="1"/>
+          <p:nvPr/>
+        </p:nvSpPr>
+        <p:spPr>
+          <a:xfrm>
+            <a:off x="530352" y="786384"/>
+            <a:ext cx="10972800" cy="219456"/>
+          </a:xfrm>
+          <a:prstGeom prst="rect">
+            <a:avLst/>
+          </a:prstGeom>
+          <a:noFill/>
+        </p:spPr>
+        <p:txBody>
+          <a:bodyPr wrap="none" anchor="ctr">
+            <a:spAutoFit/>
+          </a:bodyPr>
+          <a:lstStyle/>
+          <a:p>
+            <a:pPr algn="l">
+              <a:defRPr sz="1150" b="0">
+                <a:solidFill>
+                  <a:srgbClr val="5D6C7A"/>
+                </a:solidFill>
+                <a:latin typeface="Aptos"/>
+              </a:defRPr>
+            </a:pPr>
+            <a:r>
+              <a:t>excelExport.js joins the display utilities; the app otherwise retains its plain-script, no-build architecture.</a:t>
+            </a:r>
+          </a:p>
+        </p:txBody>
+      </p:sp>
+      <p:sp>
+        <p:nvSpPr>
+          <p:cNvPr id="4" name="Rounded Rectangle 3"/>
+          <p:cNvSpPr/>
+          <p:nvPr/>
+        </p:nvSpPr>
+        <p:spPr>
+          <a:xfrm>
+            <a:off x="502920" y="1124712"/>
+            <a:ext cx="2331720" cy="4526280"/>
+          </a:xfrm>
+          <a:prstGeom prst="roundRect">
+            <a:avLst/>
+          </a:prstGeom>
+          <a:solidFill>
+            <a:srgbClr val="F8FAFC"/>
+          </a:solidFill>
+          <a:ln w="13970">
+            <a:solidFill>
+              <a:srgbClr val="0F2647"/>
+            </a:solidFill>
+          </a:ln>
+        </p:spPr>
+        <p:style>
+          <a:lnRef idx="1">
+            <a:schemeClr val="accent1"/>
+          </a:lnRef>
+          <a:fillRef idx="3">
+            <a:schemeClr val="accent1"/>
+          </a:fillRef>
+          <a:effectRef idx="2">
+            <a:schemeClr val="accent1"/>
+          </a:effectRef>
+          <a:fontRef idx="minor">
+            <a:schemeClr val="lt1"/>
+          </a:fontRef>
+        </p:style>
+        <p:txBody>
+          <a:bodyPr rtlCol="0" anchor="ctr" lIns="182880" rIns="100584" tIns="91440"/>
+          <a:lstStyle/>
+          <a:p>
+            <a:pPr algn="ctr">
+              <a:defRPr sz="1700" b="1">
+                <a:solidFill>
+                  <a:srgbClr val="232D37"/>
+                </a:solidFill>
+                <a:latin typeface="Aptos Display"/>
+              </a:defRPr>
+            </a:pPr>
+            <a:r>
+              <a:t>Core</a:t>
+            </a:r>
+          </a:p>
+          <a:p>
+            <a:pPr>
+              <a:spcBef>
+                <a:spcPts val="300"/>
+              </a:spcBef>
+              <a:defRPr sz="1200">
+                <a:solidFill>
+                  <a:srgbClr val="232D37"/>
+                </a:solidFill>
+                <a:latin typeface="Aptos"/>
+              </a:defRPr>
+            </a:pPr>
+            <a:r>
+              <a:t>constants.js</a:t>
+            </a:r>
+          </a:p>
+          <a:p>
+            <a:pPr>
+              <a:spcBef>
+                <a:spcPts val="300"/>
+              </a:spcBef>
+              <a:defRPr sz="1200">
+                <a:solidFill>
+                  <a:srgbClr val="232D37"/>
+                </a:solidFill>
+                <a:latin typeface="Aptos"/>
+              </a:defRPr>
+            </a:pPr>
+            <a:r>
+              <a:t>helpers.js</a:t>
+            </a:r>
+          </a:p>
+          <a:p>
+            <a:pPr>
+              <a:spcBef>
+                <a:spcPts val="300"/>
+              </a:spcBef>
+              <a:defRPr sz="1200">
+                <a:solidFill>
+                  <a:srgbClr val="232D37"/>
+                </a:solidFill>
+                <a:latin typeface="Aptos"/>
+              </a:defRPr>
+            </a:pPr>
+            <a:r>
+              <a:t>state.js</a:t>
+            </a:r>
+          </a:p>
+          <a:p>
+            <a:pPr>
+              <a:spcBef>
+                <a:spcPts val="300"/>
+              </a:spcBef>
+              <a:defRPr sz="1200">
+                <a:solidFill>
+                  <a:srgbClr val="232D37"/>
+                </a:solidFill>
+                <a:latin typeface="Aptos"/>
+              </a:defRPr>
+            </a:pPr>
+            <a:r>
+              <a:t>Reference data, utilities, defaults, persistence</a:t>
+            </a:r>
+          </a:p>
+        </p:txBody>
+      </p:sp>
+      <p:sp>
+        <p:nvSpPr>
+          <p:cNvPr id="5" name="Rectangle 4"/>
+          <p:cNvSpPr/>
+          <p:nvPr/>
+        </p:nvSpPr>
+        <p:spPr>
+          <a:xfrm>
+            <a:off x="502920" y="1124712"/>
+            <a:ext cx="82296" cy="4526280"/>
+          </a:xfrm>
+          <a:prstGeom prst="rect">
+            <a:avLst/>
+          </a:prstGeom>
+          <a:solidFill>
+            <a:srgbClr val="0F2647"/>
+          </a:solidFill>
+          <a:ln>
+            <a:noFill/>
+          </a:ln>
+        </p:spPr>
+        <p:style>
+          <a:lnRef idx="1">
+            <a:schemeClr val="accent1"/>
+          </a:lnRef>
+          <a:fillRef idx="3">
+            <a:schemeClr val="accent1"/>
+          </a:fillRef>
+          <a:effectRef idx="2">
+            <a:schemeClr val="accent1"/>
+          </a:effectRef>
+          <a:fontRef idx="minor">
+            <a:schemeClr val="lt1"/>
+          </a:fontRef>
+        </p:style>
+        <p:txBody>
+          <a:bodyPr rtlCol="0" anchor="ctr"/>
+          <a:lstStyle/>
+          <a:p>
+            <a:pPr algn="ctr"/>
+          </a:p>
+        </p:txBody>
+      </p:sp>
+      <p:sp>
+        <p:nvSpPr>
+          <p:cNvPr id="6" name="Rounded Rectangle 5"/>
+          <p:cNvSpPr/>
+          <p:nvPr/>
+        </p:nvSpPr>
+        <p:spPr>
+          <a:xfrm>
+            <a:off x="3218688" y="1124712"/>
+            <a:ext cx="2331720" cy="4526280"/>
+          </a:xfrm>
+          <a:prstGeom prst="roundRect">
+            <a:avLst/>
+          </a:prstGeom>
+          <a:solidFill>
+            <a:srgbClr val="EAF9F4"/>
+          </a:solidFill>
+          <a:ln w="13970">
+            <a:solidFill>
+              <a:srgbClr val="429761"/>
+            </a:solidFill>
+          </a:ln>
+        </p:spPr>
+        <p:style>
+          <a:lnRef idx="1">
+            <a:schemeClr val="accent1"/>
+          </a:lnRef>
+          <a:fillRef idx="3">
+            <a:schemeClr val="accent1"/>
+          </a:fillRef>
+          <a:effectRef idx="2">
+            <a:schemeClr val="accent1"/>
+          </a:effectRef>
+          <a:fontRef idx="minor">
+            <a:schemeClr val="lt1"/>
+          </a:fontRef>
+        </p:style>
+        <p:txBody>
+          <a:bodyPr rtlCol="0" anchor="ctr" lIns="182880" rIns="100584" tIns="91440"/>
+          <a:lstStyle/>
+          <a:p>
+            <a:pPr algn="ctr">
+              <a:defRPr sz="1700" b="1">
+                <a:solidFill>
+                  <a:srgbClr val="232D37"/>
+                </a:solidFill>
+                <a:latin typeface="Aptos Display"/>
+              </a:defRPr>
+            </a:pPr>
+            <a:r>
+              <a:t>Compute</a:t>
+            </a:r>
+          </a:p>
+          <a:p>
+            <a:pPr>
+              <a:spcBef>
+                <a:spcPts val="300"/>
+              </a:spcBef>
+              <a:defRPr sz="1200">
+                <a:solidFill>
+                  <a:srgbClr val="232D37"/>
+                </a:solidFill>
+                <a:latin typeface="Aptos"/>
+              </a:defRPr>
+            </a:pPr>
+            <a:r>
+              <a:t>SS, RMD, tax</a:t>
+            </a:r>
+          </a:p>
+          <a:p>
+            <a:pPr>
+              <a:spcBef>
+                <a:spcPts val="300"/>
+              </a:spcBef>
+              <a:defRPr sz="1200">
+                <a:solidFill>
+                  <a:srgbClr val="232D37"/>
+                </a:solidFill>
+                <a:latin typeface="Aptos"/>
+              </a:defRPr>
+            </a:pPr>
+            <a:r>
+              <a:t>dates, age range</a:t>
+            </a:r>
+          </a:p>
+          <a:p>
+            <a:pPr>
+              <a:spcBef>
+                <a:spcPts val="300"/>
+              </a:spcBef>
+              <a:defRPr sz="1200">
+                <a:solidFill>
+                  <a:srgbClr val="232D37"/>
+                </a:solidFill>
+                <a:latin typeface="Aptos"/>
+              </a:defRPr>
+            </a:pPr>
+            <a:r>
+              <a:t>projection</a:t>
+            </a:r>
+          </a:p>
+          <a:p>
+            <a:pPr>
+              <a:spcBef>
+                <a:spcPts val="300"/>
+              </a:spcBef>
+              <a:defRPr sz="1200">
+                <a:solidFill>
+                  <a:srgbClr val="232D37"/>
+                </a:solidFill>
+                <a:latin typeface="Aptos"/>
+              </a:defRPr>
+            </a:pPr>
+            <a:r>
+              <a:t>what-if</a:t>
+            </a:r>
+          </a:p>
+        </p:txBody>
+      </p:sp>
+      <p:sp>
+        <p:nvSpPr>
+          <p:cNvPr id="7" name="Rectangle 6"/>
+          <p:cNvSpPr/>
+          <p:nvPr/>
+        </p:nvSpPr>
+        <p:spPr>
+          <a:xfrm>
+            <a:off x="3218688" y="1124712"/>
+            <a:ext cx="82296" cy="4526280"/>
+          </a:xfrm>
+          <a:prstGeom prst="rect">
+            <a:avLst/>
+          </a:prstGeom>
+          <a:solidFill>
+            <a:srgbClr val="429761"/>
+          </a:solidFill>
+          <a:ln>
+            <a:noFill/>
+          </a:ln>
+        </p:spPr>
+        <p:style>
+          <a:lnRef idx="1">
+            <a:schemeClr val="accent1"/>
+          </a:lnRef>
+          <a:fillRef idx="3">
+            <a:schemeClr val="accent1"/>
+          </a:fillRef>
+          <a:effectRef idx="2">
+            <a:schemeClr val="accent1"/>
+          </a:effectRef>
+          <a:fontRef idx="minor">
+            <a:schemeClr val="lt1"/>
+          </a:fontRef>
+        </p:style>
+        <p:txBody>
+          <a:bodyPr rtlCol="0" anchor="ctr"/>
+          <a:lstStyle/>
+          <a:p>
+            <a:pPr algn="ctr"/>
+          </a:p>
+        </p:txBody>
+      </p:sp>
+      <p:sp>
+        <p:nvSpPr>
+          <p:cNvPr id="8" name="Rounded Rectangle 7"/>
+          <p:cNvSpPr/>
+          <p:nvPr/>
+        </p:nvSpPr>
+        <p:spPr>
+          <a:xfrm>
+            <a:off x="5934456" y="1124712"/>
+            <a:ext cx="2331720" cy="4526280"/>
+          </a:xfrm>
+          <a:prstGeom prst="roundRect">
+            <a:avLst/>
+          </a:prstGeom>
+          <a:solidFill>
+            <a:srgbClr val="E9F4FF"/>
+          </a:solidFill>
+          <a:ln w="13970">
+            <a:solidFill>
+              <a:srgbClr val="266EB2"/>
+            </a:solidFill>
+          </a:ln>
+        </p:spPr>
+        <p:style>
+          <a:lnRef idx="1">
+            <a:schemeClr val="accent1"/>
+          </a:lnRef>
+          <a:fillRef idx="3">
+            <a:schemeClr val="accent1"/>
+          </a:fillRef>
+          <a:effectRef idx="2">
+            <a:schemeClr val="accent1"/>
+          </a:effectRef>
+          <a:fontRef idx="minor">
+            <a:schemeClr val="lt1"/>
+          </a:fontRef>
+        </p:style>
+        <p:txBody>
+          <a:bodyPr rtlCol="0" anchor="ctr" lIns="182880" rIns="100584" tIns="91440"/>
+          <a:lstStyle/>
+          <a:p>
+            <a:pPr algn="ctr">
+              <a:defRPr sz="1700" b="1">
+                <a:solidFill>
+                  <a:srgbClr val="232D37"/>
+                </a:solidFill>
+                <a:latin typeface="Aptos Display"/>
+              </a:defRPr>
+            </a:pPr>
+            <a:r>
+              <a:t>Input</a:t>
+            </a:r>
+          </a:p>
+          <a:p>
+            <a:pPr>
+              <a:spcBef>
+                <a:spcPts val="300"/>
+              </a:spcBef>
+              <a:defRPr sz="1200">
+                <a:solidFill>
+                  <a:srgbClr val="232D37"/>
+                </a:solidFill>
+                <a:latin typeface="Aptos"/>
+              </a:defRPr>
+            </a:pPr>
+            <a:r>
+              <a:t>Shared controls</a:t>
+            </a:r>
+          </a:p>
+          <a:p>
+            <a:pPr>
+              <a:spcBef>
+                <a:spcPts val="300"/>
+              </a:spcBef>
+              <a:defRPr sz="1200">
+                <a:solidFill>
+                  <a:srgbClr val="232D37"/>
+                </a:solidFill>
+                <a:latin typeface="Aptos"/>
+              </a:defRPr>
+            </a:pPr>
+            <a:r>
+              <a:t>Household &amp; assumptions</a:t>
+            </a:r>
+          </a:p>
+          <a:p>
+            <a:pPr>
+              <a:spcBef>
+                <a:spcPts val="300"/>
+              </a:spcBef>
+              <a:defRPr sz="1200">
+                <a:solidFill>
+                  <a:srgbClr val="232D37"/>
+                </a:solidFill>
+                <a:latin typeface="Aptos"/>
+              </a:defRPr>
+            </a:pPr>
+            <a:r>
+              <a:t>Income cards</a:t>
+            </a:r>
+          </a:p>
+          <a:p>
+            <a:pPr>
+              <a:spcBef>
+                <a:spcPts val="300"/>
+              </a:spcBef>
+              <a:defRPr sz="1200">
+                <a:solidFill>
+                  <a:srgbClr val="232D37"/>
+                </a:solidFill>
+                <a:latin typeface="Aptos"/>
+              </a:defRPr>
+            </a:pPr>
+            <a:r>
+              <a:t>Load menu</a:t>
+            </a:r>
+          </a:p>
+        </p:txBody>
+      </p:sp>
+      <p:sp>
+        <p:nvSpPr>
+          <p:cNvPr id="9" name="Rectangle 8"/>
+          <p:cNvSpPr/>
+          <p:nvPr/>
+        </p:nvSpPr>
+        <p:spPr>
+          <a:xfrm>
+            <a:off x="5934456" y="1124712"/>
+            <a:ext cx="82296" cy="4526280"/>
+          </a:xfrm>
+          <a:prstGeom prst="rect">
+            <a:avLst/>
+          </a:prstGeom>
+          <a:solidFill>
+            <a:srgbClr val="266EB2"/>
+          </a:solidFill>
+          <a:ln>
+            <a:noFill/>
+          </a:ln>
+        </p:spPr>
+        <p:style>
+          <a:lnRef idx="1">
+            <a:schemeClr val="accent1"/>
+          </a:lnRef>
+          <a:fillRef idx="3">
+            <a:schemeClr val="accent1"/>
+          </a:fillRef>
+          <a:effectRef idx="2">
+            <a:schemeClr val="accent1"/>
+          </a:effectRef>
+          <a:fontRef idx="minor">
+            <a:schemeClr val="lt1"/>
+          </a:fontRef>
+        </p:style>
+        <p:txBody>
+          <a:bodyPr rtlCol="0" anchor="ctr"/>
+          <a:lstStyle/>
+          <a:p>
+            <a:pPr algn="ctr"/>
+          </a:p>
+        </p:txBody>
+      </p:sp>
+      <p:sp>
+        <p:nvSpPr>
+          <p:cNvPr id="10" name="Rounded Rectangle 9"/>
+          <p:cNvSpPr/>
+          <p:nvPr/>
+        </p:nvSpPr>
+        <p:spPr>
+          <a:xfrm>
+            <a:off x="8650224" y="1124712"/>
+            <a:ext cx="2926080" cy="4526280"/>
+          </a:xfrm>
+          <a:prstGeom prst="roundRect">
+            <a:avLst/>
+          </a:prstGeom>
+          <a:solidFill>
+            <a:srgbClr val="F7EFFF"/>
+          </a:solidFill>
+          <a:ln w="13970">
+            <a:solidFill>
+              <a:srgbClr val="7852B0"/>
+            </a:solidFill>
+          </a:ln>
+        </p:spPr>
+        <p:style>
+          <a:lnRef idx="1">
+            <a:schemeClr val="accent1"/>
+          </a:lnRef>
+          <a:fillRef idx="3">
+            <a:schemeClr val="accent1"/>
+          </a:fillRef>
+          <a:effectRef idx="2">
+            <a:schemeClr val="accent1"/>
+          </a:effectRef>
+          <a:fontRef idx="minor">
+            <a:schemeClr val="lt1"/>
+          </a:fontRef>
+        </p:style>
+        <p:txBody>
+          <a:bodyPr rtlCol="0" anchor="ctr" lIns="182880" rIns="100584" tIns="91440"/>
+          <a:lstStyle/>
+          <a:p>
+            <a:pPr algn="ctr">
+              <a:defRPr sz="1700" b="1">
+                <a:solidFill>
+                  <a:srgbClr val="232D37"/>
+                </a:solidFill>
+                <a:latin typeface="Aptos Display"/>
+              </a:defRPr>
+            </a:pPr>
+            <a:r>
+              <a:t>Display &amp; export</a:t>
+            </a:r>
+          </a:p>
+          <a:p>
+            <a:pPr>
+              <a:spcBef>
+                <a:spcPts val="300"/>
+              </a:spcBef>
+              <a:defRPr sz="1200">
+                <a:solidFill>
+                  <a:srgbClr val="232D37"/>
+                </a:solidFill>
+                <a:latin typeface="Aptos"/>
+              </a:defRPr>
+            </a:pPr>
+            <a:r>
+              <a:t>Charts / overlays / footer</a:t>
+            </a:r>
+          </a:p>
+          <a:p>
+            <a:pPr>
+              <a:spcBef>
+                <a:spcPts val="300"/>
+              </a:spcBef>
+              <a:defRPr sz="1200">
+                <a:solidFill>
+                  <a:srgbClr val="232D37"/>
+                </a:solidFill>
+                <a:latin typeface="Aptos"/>
+              </a:defRPr>
+            </a:pPr>
+            <a:r>
+              <a:t>Formulas and Notes pages</a:t>
+            </a:r>
+          </a:p>
+          <a:p>
+            <a:pPr>
+              <a:spcBef>
+                <a:spcPts val="300"/>
+              </a:spcBef>
+              <a:defRPr sz="1200">
+                <a:solidFill>
+                  <a:srgbClr val="232D37"/>
+                </a:solidFill>
+                <a:latin typeface="Aptos"/>
+              </a:defRPr>
+            </a:pPr>
+            <a:r>
+              <a:t>excelExport.js</a:t>
+            </a:r>
+          </a:p>
+          <a:p>
+            <a:pPr>
+              <a:spcBef>
+                <a:spcPts val="300"/>
+              </a:spcBef>
+              <a:defRPr sz="1200">
+                <a:solidFill>
+                  <a:srgbClr val="232D37"/>
+                </a:solidFill>
+                <a:latin typeface="Aptos"/>
+              </a:defRPr>
+            </a:pPr>
+            <a:r>
+              <a:t>SheetJS CDN dependency</a:t>
+            </a:r>
+          </a:p>
+        </p:txBody>
+      </p:sp>
+      <p:sp>
+        <p:nvSpPr>
+          <p:cNvPr id="11" name="Rectangle 10"/>
+          <p:cNvSpPr/>
+          <p:nvPr/>
+        </p:nvSpPr>
+        <p:spPr>
+          <a:xfrm>
+            <a:off x="8650224" y="1124712"/>
+            <a:ext cx="82296" cy="4526280"/>
+          </a:xfrm>
+          <a:prstGeom prst="rect">
+            <a:avLst/>
+          </a:prstGeom>
+          <a:solidFill>
+            <a:srgbClr val="7852B0"/>
+          </a:solidFill>
+          <a:ln>
+            <a:noFill/>
+          </a:ln>
+        </p:spPr>
+        <p:style>
+          <a:lnRef idx="1">
+            <a:schemeClr val="accent1"/>
+          </a:lnRef>
+          <a:fillRef idx="3">
+            <a:schemeClr val="accent1"/>
+          </a:fillRef>
+          <a:effectRef idx="2">
+            <a:schemeClr val="accent1"/>
+          </a:effectRef>
+          <a:fontRef idx="minor">
+            <a:schemeClr val="lt1"/>
+          </a:fontRef>
+        </p:style>
+        <p:txBody>
+          <a:bodyPr rtlCol="0" anchor="ctr"/>
+          <a:lstStyle/>
+          <a:p>
+            <a:pPr algn="ctr"/>
+          </a:p>
+        </p:txBody>
+      </p:sp>
+      <p:cxnSp>
+        <p:nvCxnSpPr>
+          <p:cNvPr id="12" name="Connector 11"/>
+          <p:cNvCxnSpPr/>
+          <p:nvPr/>
+        </p:nvCxnSpPr>
+        <p:spPr>
+          <a:xfrm>
+            <a:off x="2880360" y="3383280"/>
+            <a:ext cx="201168" cy="0"/>
+          </a:xfrm>
+          <a:prstGeom prst="line">
+            <a:avLst/>
+          </a:prstGeom>
+          <a:ln w="22860">
+            <a:solidFill>
+              <a:srgbClr val="0F2647"/>
+            </a:solidFill>
+          </a:ln>
+        </p:spPr>
+        <p:style>
+          <a:lnRef idx="2">
+            <a:schemeClr val="accent1"/>
+          </a:lnRef>
+          <a:fillRef idx="0">
+            <a:schemeClr val="accent1"/>
+          </a:fillRef>
+          <a:effectRef idx="1">
+            <a:schemeClr val="accent1"/>
+          </a:effectRef>
+          <a:fontRef idx="minor">
+            <a:schemeClr val="tx1"/>
+          </a:fontRef>
+        </p:style>
+      </p:cxnSp>
+      <p:cxnSp>
+        <p:nvCxnSpPr>
+          <p:cNvPr id="13" name="Connector 12"/>
+          <p:cNvCxnSpPr/>
+          <p:nvPr/>
+        </p:nvCxnSpPr>
+        <p:spPr>
+          <a:xfrm>
+            <a:off x="5596128" y="3383280"/>
+            <a:ext cx="201168" cy="0"/>
+          </a:xfrm>
+          <a:prstGeom prst="line">
+            <a:avLst/>
+          </a:prstGeom>
+          <a:ln w="22860">
+            <a:solidFill>
+              <a:srgbClr val="429761"/>
+            </a:solidFill>
+          </a:ln>
+        </p:spPr>
+        <p:style>
+          <a:lnRef idx="2">
+            <a:schemeClr val="accent1"/>
+          </a:lnRef>
+          <a:fillRef idx="0">
+            <a:schemeClr val="accent1"/>
+          </a:fillRef>
+          <a:effectRef idx="1">
+            <a:schemeClr val="accent1"/>
+          </a:effectRef>
+          <a:fontRef idx="minor">
+            <a:schemeClr val="tx1"/>
+          </a:fontRef>
+        </p:style>
+      </p:cxnSp>
+      <p:cxnSp>
+        <p:nvCxnSpPr>
+          <p:cNvPr id="14" name="Connector 13"/>
+          <p:cNvCxnSpPr/>
+          <p:nvPr/>
+        </p:nvCxnSpPr>
+        <p:spPr>
+          <a:xfrm>
+            <a:off x="8311896" y="3383280"/>
+            <a:ext cx="201168" cy="0"/>
+          </a:xfrm>
+          <a:prstGeom prst="line">
+            <a:avLst/>
+          </a:prstGeom>
+          <a:ln w="22860">
+            <a:solidFill>
+              <a:srgbClr val="266EB2"/>
+            </a:solidFill>
+          </a:ln>
+        </p:spPr>
+        <p:style>
+          <a:lnRef idx="2">
+            <a:schemeClr val="accent1"/>
+          </a:lnRef>
+          <a:fillRef idx="0">
+            <a:schemeClr val="accent1"/>
+          </a:fillRef>
+          <a:effectRef idx="1">
+            <a:schemeClr val="accent1"/>
+          </a:effectRef>
+          <a:fontRef idx="minor">
+            <a:schemeClr val="tx1"/>
+          </a:fontRef>
+        </p:style>
+      </p:cxnSp>
+      <p:sp>
+        <p:nvSpPr>
+          <p:cNvPr id="15" name="TextBox 14"/>
+          <p:cNvSpPr txBox="1"/>
+          <p:nvPr/>
+        </p:nvSpPr>
+        <p:spPr>
+          <a:xfrm>
+            <a:off x="640080" y="5943600"/>
+            <a:ext cx="10881360" cy="228600"/>
+          </a:xfrm>
+          <a:prstGeom prst="rect">
+            <a:avLst/>
+          </a:prstGeom>
+          <a:noFill/>
+        </p:spPr>
+        <p:txBody>
+          <a:bodyPr wrap="none" anchor="ctr">
+            <a:spAutoFit/>
+          </a:bodyPr>
+          <a:lstStyle/>
+          <a:p>
+            <a:pPr algn="ctr">
+              <a:defRPr sz="1200" b="1">
+                <a:solidFill>
+                  <a:srgbClr val="0F2647"/>
+                </a:solidFill>
+                <a:latin typeface="Aptos"/>
+              </a:defRPr>
+            </a:pPr>
+            <a:r>
+              <a:t>Dependency rule: load a script only after every global it needs is available.</a:t>
+            </a:r>
+          </a:p>
+        </p:txBody>
+      </p:sp>
+      <p:sp>
+        <p:nvSpPr>
+          <p:cNvPr id="16" name="Rectangle 15"/>
+          <p:cNvSpPr/>
+          <p:nvPr/>
+        </p:nvSpPr>
+        <p:spPr>
+          <a:xfrm>
+            <a:off x="502920" y="6473952"/>
+            <a:ext cx="11183112" cy="13716"/>
+          </a:xfrm>
+          <a:prstGeom prst="rect">
+            <a:avLst/>
+          </a:prstGeom>
+          <a:solidFill>
+            <a:srgbClr val="D2DCE5"/>
+          </a:solidFill>
+          <a:ln>
+            <a:noFill/>
+          </a:ln>
+        </p:spPr>
+        <p:style>
+          <a:lnRef idx="1">
+            <a:schemeClr val="accent1"/>
+          </a:lnRef>
+          <a:fillRef idx="3">
+            <a:schemeClr val="accent1"/>
+          </a:fillRef>
+          <a:effectRef idx="2">
+            <a:schemeClr val="accent1"/>
+          </a:effectRef>
+          <a:fontRef idx="minor">
+            <a:schemeClr val="lt1"/>
+          </a:fontRef>
+        </p:style>
+        <p:txBody>
+          <a:bodyPr rtlCol="0" anchor="ctr"/>
+          <a:lstStyle/>
+          <a:p>
+            <a:pPr algn="ctr"/>
+          </a:p>
+        </p:txBody>
+      </p:sp>
+      <p:sp>
+        <p:nvSpPr>
+          <p:cNvPr id="17" name="TextBox 16"/>
+          <p:cNvSpPr txBox="1"/>
+          <p:nvPr/>
+        </p:nvSpPr>
+        <p:spPr>
+          <a:xfrm>
+            <a:off x="530352" y="6510528"/>
+            <a:ext cx="10881360" cy="146304"/>
+          </a:xfrm>
+          <a:prstGeom prst="rect">
+            <a:avLst/>
+          </a:prstGeom>
+          <a:noFill/>
+        </p:spPr>
+        <p:txBody>
+          <a:bodyPr wrap="none" anchor="ctr">
+            <a:spAutoFit/>
+          </a:bodyPr>
+          <a:lstStyle/>
+          <a:p>
+            <a:pPr algn="l">
+              <a:defRPr sz="850" b="0">
+                <a:solidFill>
+                  <a:srgbClr val="5D6C7A"/>
+                </a:solidFill>
+                <a:latin typeface="Aptos"/>
+              </a:defRPr>
+            </a:pPr>
+            <a:r>
+              <a:t>Retirement Income Planner • Architecture overview • IRMAA and Excel-export update</a:t>
+            </a:r>
+          </a:p>
+        </p:txBody>
+      </p:sp>
+    </p:spTree>
+  </p:cSld>
+  <p:clrMapOvr>
+    <a:masterClrMapping/>
+  </p:clrMapOvr>
+</p:sld>
+</file>
+
+<file path=ppt/slides/slide9.xml><?xml version="1.0" encoding="utf-8"?>
 <p:sld xmlns:a="http://schemas.openxmlformats.org/drawingml/2006/main" xmlns:p="http://schemas.openxmlformats.org/presentationml/2006/main" xmlns:r="http://schemas.openxmlformats.org/officeDocument/2006/relationships">
   <p:cSld>
     <p:bg>
@@ -9976,8 +9895,8 @@
         </p:nvSpPr>
         <p:spPr>
           <a:xfrm>
-            <a:off x="502920" y="237744"/>
-            <a:ext cx="11155680" cy="457200"/>
+            <a:off x="502920" y="246888"/>
+            <a:ext cx="11155680" cy="438912"/>
           </a:xfrm>
           <a:prstGeom prst="rect">
             <a:avLst/>
@@ -9999,7 +9918,7 @@
               </a:defRPr>
             </a:pPr>
             <a:r>
-              <a:t>Extension workflow and guardrails</a:t>
+              <a:t>Implementation guardrails</a:t>
             </a:r>
           </a:p>
         </p:txBody>
@@ -10013,7 +9932,7 @@
         <p:spPr>
           <a:xfrm>
             <a:off x="530352" y="786384"/>
-            <a:ext cx="10972800" cy="256032"/>
+            <a:ext cx="10972800" cy="219456"/>
           </a:xfrm>
           <a:prstGeom prst="rect">
             <a:avLst/>
@@ -10035,7 +9954,7 @@
               </a:defRPr>
             </a:pPr>
             <a:r>
-              <a:t>Preserve the contracts to add features without mixing responsibilities.</a:t>
+              <a:t>The new features preserve the original separation of responsibilities and data contracts.</a:t>
             </a:r>
           </a:p>
         </p:txBody>
@@ -10048,18 +9967,18 @@
         </p:nvSpPr>
         <p:spPr>
           <a:xfrm>
-            <a:off x="457200" y="1325880"/>
-            <a:ext cx="1993392" cy="1783080"/>
+            <a:off x="640080" y="1234440"/>
+            <a:ext cx="3383280" cy="4434840"/>
           </a:xfrm>
           <a:prstGeom prst="roundRect">
             <a:avLst/>
           </a:prstGeom>
           <a:solidFill>
-            <a:srgbClr val="FFFFFF"/>
+            <a:srgbClr val="EAF9F4"/>
           </a:solidFill>
-          <a:ln w="14604">
+          <a:ln w="13970">
             <a:solidFill>
-              <a:srgbClr val="266EB2"/>
+              <a:srgbClr val="429761"/>
             </a:solidFill>
           </a:ln>
         </p:spPr>
@@ -10078,11 +9997,11 @@
           </a:fontRef>
         </p:style>
         <p:txBody>
-          <a:bodyPr rtlCol="0" anchor="ctr" lIns="182880" tIns="100584"/>
+          <a:bodyPr rtlCol="0" anchor="ctr" lIns="182880" rIns="100584" tIns="91440"/>
           <a:lstStyle/>
           <a:p>
             <a:pPr algn="ctr">
-              <a:defRPr sz="1500" b="1">
+              <a:defRPr sz="1700" b="1">
                 <a:solidFill>
                   <a:srgbClr val="232D37"/>
                 </a:solidFill>
@@ -10090,39 +10009,55 @@
               </a:defRPr>
             </a:pPr>
             <a:r>
-              <a:t>1. State</a:t>
+              <a:t>Model correctly</a:t>
             </a:r>
           </a:p>
           <a:p>
             <a:pPr>
               <a:spcBef>
-                <a:spcPts val="400"/>
+                <a:spcPts val="300"/>
               </a:spcBef>
-              <a:defRPr sz="1100">
-                <a:solidFill>
-                  <a:srgbClr val="232D37"/>
-                </a:solidFill>
-                <a:latin typeface="Aptos"/>
-              </a:defRPr>
-            </a:pPr>
-            <a:r>
-              <a:t>Schema + defaults</a:t>
+              <a:defRPr sz="1200">
+                <a:solidFill>
+                  <a:srgbClr val="232D37"/>
+                </a:solidFill>
+                <a:latin typeface="Aptos"/>
+              </a:defRPr>
+            </a:pPr>
+            <a:r>
+              <a:t>IRMAA is a household amount, but an optional portfolio-funded expense.</a:t>
             </a:r>
           </a:p>
           <a:p>
             <a:pPr>
               <a:spcBef>
-                <a:spcPts val="400"/>
+                <a:spcPts val="300"/>
               </a:spcBef>
-              <a:defRPr sz="1100">
-                <a:solidFill>
-                  <a:srgbClr val="232D37"/>
-                </a:solidFill>
-                <a:latin typeface="Aptos"/>
-              </a:defRPr>
-            </a:pPr>
-            <a:r>
-              <a:t>core/state.js</a:t>
+              <a:defRPr sz="1200">
+                <a:solidFill>
+                  <a:srgbClr val="232D37"/>
+                </a:solidFill>
+                <a:latin typeface="Aptos"/>
+              </a:defRPr>
+            </a:pPr>
+            <a:r>
+              <a:t>Use prior-year AGI for surcharge tier and prior-year tax for LTCG estimation.</a:t>
+            </a:r>
+          </a:p>
+          <a:p>
+            <a:pPr>
+              <a:spcBef>
+                <a:spcPts val="300"/>
+              </a:spcBef>
+              <a:defRPr sz="1200">
+                <a:solidFill>
+                  <a:srgbClr val="232D37"/>
+                </a:solidFill>
+                <a:latin typeface="Aptos"/>
+              </a:defRPr>
+            </a:pPr>
+            <a:r>
+              <a:t>Never fund one portfolio’s expenses with another portfolio or household income.</a:t>
             </a:r>
           </a:p>
         </p:txBody>
@@ -10135,8 +10070,154 @@
         </p:nvSpPr>
         <p:spPr>
           <a:xfrm>
-            <a:off x="457200" y="1325880"/>
-            <a:ext cx="82296" cy="1783080"/>
+            <a:off x="640080" y="1234440"/>
+            <a:ext cx="82296" cy="4434840"/>
+          </a:xfrm>
+          <a:prstGeom prst="rect">
+            <a:avLst/>
+          </a:prstGeom>
+          <a:solidFill>
+            <a:srgbClr val="429761"/>
+          </a:solidFill>
+          <a:ln>
+            <a:noFill/>
+          </a:ln>
+        </p:spPr>
+        <p:style>
+          <a:lnRef idx="1">
+            <a:schemeClr val="accent1"/>
+          </a:lnRef>
+          <a:fillRef idx="3">
+            <a:schemeClr val="accent1"/>
+          </a:fillRef>
+          <a:effectRef idx="2">
+            <a:schemeClr val="accent1"/>
+          </a:effectRef>
+          <a:fontRef idx="minor">
+            <a:schemeClr val="lt1"/>
+          </a:fontRef>
+        </p:style>
+        <p:txBody>
+          <a:bodyPr rtlCol="0" anchor="ctr"/>
+          <a:lstStyle/>
+          <a:p>
+            <a:pPr algn="ctr"/>
+          </a:p>
+        </p:txBody>
+      </p:sp>
+      <p:sp>
+        <p:nvSpPr>
+          <p:cNvPr id="6" name="Rounded Rectangle 5"/>
+          <p:cNvSpPr/>
+          <p:nvPr/>
+        </p:nvSpPr>
+        <p:spPr>
+          <a:xfrm>
+            <a:off x="4407408" y="1234440"/>
+            <a:ext cx="3383280" cy="4434840"/>
+          </a:xfrm>
+          <a:prstGeom prst="roundRect">
+            <a:avLst/>
+          </a:prstGeom>
+          <a:solidFill>
+            <a:srgbClr val="E9F4FF"/>
+          </a:solidFill>
+          <a:ln w="13970">
+            <a:solidFill>
+              <a:srgbClr val="266EB2"/>
+            </a:solidFill>
+          </a:ln>
+        </p:spPr>
+        <p:style>
+          <a:lnRef idx="1">
+            <a:schemeClr val="accent1"/>
+          </a:lnRef>
+          <a:fillRef idx="3">
+            <a:schemeClr val="accent1"/>
+          </a:fillRef>
+          <a:effectRef idx="2">
+            <a:schemeClr val="accent1"/>
+          </a:effectRef>
+          <a:fontRef idx="minor">
+            <a:schemeClr val="lt1"/>
+          </a:fontRef>
+        </p:style>
+        <p:txBody>
+          <a:bodyPr rtlCol="0" anchor="ctr" lIns="182880" rIns="100584" tIns="91440"/>
+          <a:lstStyle/>
+          <a:p>
+            <a:pPr algn="ctr">
+              <a:defRPr sz="1700" b="1">
+                <a:solidFill>
+                  <a:srgbClr val="232D37"/>
+                </a:solidFill>
+                <a:latin typeface="Aptos Display"/>
+              </a:defRPr>
+            </a:pPr>
+            <a:r>
+              <a:t>Expose via rows</a:t>
+            </a:r>
+          </a:p>
+          <a:p>
+            <a:pPr>
+              <a:spcBef>
+                <a:spcPts val="300"/>
+              </a:spcBef>
+              <a:defRPr sz="1200">
+                <a:solidFill>
+                  <a:srgbClr val="232D37"/>
+                </a:solidFill>
+                <a:latin typeface="Aptos"/>
+              </a:defRPr>
+            </a:pPr>
+            <a:r>
+              <a:t>Compute owns IRMAA allocation, expense waterfall, basis, and gains.</a:t>
+            </a:r>
+          </a:p>
+          <a:p>
+            <a:pPr>
+              <a:spcBef>
+                <a:spcPts val="300"/>
+              </a:spcBef>
+              <a:defRPr sz="1200">
+                <a:solidFill>
+                  <a:srgbClr val="232D37"/>
+                </a:solidFill>
+                <a:latin typeface="Aptos"/>
+              </a:defRPr>
+            </a:pPr>
+            <a:r>
+              <a:t>Add fields to the projection contract before using them in charts or export.</a:t>
+            </a:r>
+          </a:p>
+          <a:p>
+            <a:pPr>
+              <a:spcBef>
+                <a:spcPts val="300"/>
+              </a:spcBef>
+              <a:defRPr sz="1200">
+                <a:solidFill>
+                  <a:srgbClr val="232D37"/>
+                </a:solidFill>
+                <a:latin typeface="Aptos"/>
+              </a:defRPr>
+            </a:pPr>
+            <a:r>
+              <a:t>Display remains presentation-only.</a:t>
+            </a:r>
+          </a:p>
+        </p:txBody>
+      </p:sp>
+      <p:sp>
+        <p:nvSpPr>
+          <p:cNvPr id="7" name="Rectangle 6"/>
+          <p:cNvSpPr/>
+          <p:nvPr/>
+        </p:nvSpPr>
+        <p:spPr>
+          <a:xfrm>
+            <a:off x="4407408" y="1234440"/>
+            <a:ext cx="82296" cy="4434840"/>
           </a:xfrm>
           <a:prstGeom prst="rect">
             <a:avLst/>
@@ -10170,61 +10251,26 @@
           </a:p>
         </p:txBody>
       </p:sp>
-      <p:cxnSp>
-        <p:nvCxnSpPr>
-          <p:cNvPr id="6" name="Connector 5"/>
-          <p:cNvCxnSpPr/>
-          <p:nvPr/>
-        </p:nvCxnSpPr>
-        <p:spPr>
-          <a:xfrm>
-            <a:off x="2468880" y="2221992"/>
-            <a:ext cx="246888" cy="0"/>
-          </a:xfrm>
-          <a:prstGeom prst="line">
-            <a:avLst/>
-          </a:prstGeom>
-          <a:ln w="25400">
+      <p:sp>
+        <p:nvSpPr>
+          <p:cNvPr id="8" name="Rounded Rectangle 7"/>
+          <p:cNvSpPr/>
+          <p:nvPr/>
+        </p:nvSpPr>
+        <p:spPr>
+          <a:xfrm>
+            <a:off x="8174736" y="1234440"/>
+            <a:ext cx="3383280" cy="4434840"/>
+          </a:xfrm>
+          <a:prstGeom prst="roundRect">
+            <a:avLst/>
+          </a:prstGeom>
+          <a:solidFill>
+            <a:srgbClr val="F7EFFF"/>
+          </a:solidFill>
+          <a:ln w="13970">
             <a:solidFill>
-              <a:srgbClr val="266EB2"/>
-            </a:solidFill>
-          </a:ln>
-        </p:spPr>
-        <p:style>
-          <a:lnRef idx="2">
-            <a:schemeClr val="accent1"/>
-          </a:lnRef>
-          <a:fillRef idx="0">
-            <a:schemeClr val="accent1"/>
-          </a:fillRef>
-          <a:effectRef idx="1">
-            <a:schemeClr val="accent1"/>
-          </a:effectRef>
-          <a:fontRef idx="minor">
-            <a:schemeClr val="tx1"/>
-          </a:fontRef>
-        </p:style>
-      </p:cxnSp>
-      <p:sp>
-        <p:nvSpPr>
-          <p:cNvPr id="7" name="Rounded Rectangle 6"/>
-          <p:cNvSpPr/>
-          <p:nvPr/>
-        </p:nvSpPr>
-        <p:spPr>
-          <a:xfrm>
-            <a:off x="2788920" y="1325880"/>
-            <a:ext cx="1993392" cy="1783080"/>
-          </a:xfrm>
-          <a:prstGeom prst="roundRect">
-            <a:avLst/>
-          </a:prstGeom>
-          <a:solidFill>
-            <a:srgbClr val="FFFFFF"/>
-          </a:solidFill>
-          <a:ln w="14604">
-            <a:solidFill>
-              <a:srgbClr val="168F8D"/>
+              <a:srgbClr val="7852B0"/>
             </a:solidFill>
           </a:ln>
         </p:spPr>
@@ -10243,11 +10289,11 @@
           </a:fontRef>
         </p:style>
         <p:txBody>
-          <a:bodyPr rtlCol="0" anchor="ctr" lIns="182880" tIns="100584"/>
+          <a:bodyPr rtlCol="0" anchor="ctr" lIns="182880" rIns="100584" tIns="91440"/>
           <a:lstStyle/>
           <a:p>
             <a:pPr algn="ctr">
-              <a:defRPr sz="1500" b="1">
+              <a:defRPr sz="1700" b="1">
                 <a:solidFill>
                   <a:srgbClr val="232D37"/>
                 </a:solidFill>
@@ -10255,383 +10301,69 @@
               </a:defRPr>
             </a:pPr>
             <a:r>
-              <a:t>2. Input</a:t>
+              <a:t>Export safely</a:t>
             </a:r>
           </a:p>
           <a:p>
             <a:pPr>
               <a:spcBef>
-                <a:spcPts val="400"/>
+                <a:spcPts val="300"/>
               </a:spcBef>
-              <a:defRPr sz="1100">
-                <a:solidFill>
-                  <a:srgbClr val="232D37"/>
-                </a:solidFill>
-                <a:latin typeface="Aptos"/>
-              </a:defRPr>
-            </a:pPr>
-            <a:r>
-              <a:t>Card/control behavior</a:t>
+              <a:defRPr sz="1200">
+                <a:solidFill>
+                  <a:srgbClr val="232D37"/>
+                </a:solidFill>
+                <a:latin typeface="Aptos"/>
+              </a:defRPr>
+            </a:pPr>
+            <a:r>
+              <a:t>Export reads lastProjection only.</a:t>
             </a:r>
           </a:p>
           <a:p>
             <a:pPr>
               <a:spcBef>
-                <a:spcPts val="400"/>
+                <a:spcPts val="300"/>
               </a:spcBef>
-              <a:defRPr sz="1100">
-                <a:solidFill>
-                  <a:srgbClr val="232D37"/>
-                </a:solidFill>
-                <a:latin typeface="Aptos"/>
-              </a:defRPr>
-            </a:pPr>
-            <a:r>
-              <a:t>js/input/</a:t>
-            </a:r>
-          </a:p>
-        </p:txBody>
-      </p:sp>
-      <p:sp>
-        <p:nvSpPr>
-          <p:cNvPr id="8" name="Rectangle 7"/>
-          <p:cNvSpPr/>
-          <p:nvPr/>
-        </p:nvSpPr>
-        <p:spPr>
-          <a:xfrm>
-            <a:off x="2788920" y="1325880"/>
-            <a:ext cx="82296" cy="1783080"/>
-          </a:xfrm>
-          <a:prstGeom prst="rect">
-            <a:avLst/>
-          </a:prstGeom>
-          <a:solidFill>
-            <a:srgbClr val="168F8D"/>
-          </a:solidFill>
-          <a:ln>
-            <a:noFill/>
-          </a:ln>
-        </p:spPr>
-        <p:style>
-          <a:lnRef idx="1">
-            <a:schemeClr val="accent1"/>
-          </a:lnRef>
-          <a:fillRef idx="3">
-            <a:schemeClr val="accent1"/>
-          </a:fillRef>
-          <a:effectRef idx="2">
-            <a:schemeClr val="accent1"/>
-          </a:effectRef>
-          <a:fontRef idx="minor">
-            <a:schemeClr val="lt1"/>
-          </a:fontRef>
-        </p:style>
-        <p:txBody>
-          <a:bodyPr rtlCol="0" anchor="ctr"/>
-          <a:lstStyle/>
-          <a:p>
-            <a:pPr algn="ctr"/>
-          </a:p>
-        </p:txBody>
-      </p:sp>
-      <p:cxnSp>
-        <p:nvCxnSpPr>
-          <p:cNvPr id="9" name="Connector 8"/>
-          <p:cNvCxnSpPr/>
-          <p:nvPr/>
-        </p:nvCxnSpPr>
-        <p:spPr>
-          <a:xfrm>
-            <a:off x="4800600" y="2221992"/>
-            <a:ext cx="246888" cy="0"/>
-          </a:xfrm>
-          <a:prstGeom prst="line">
-            <a:avLst/>
-          </a:prstGeom>
-          <a:ln w="25400">
-            <a:solidFill>
-              <a:srgbClr val="168F8D"/>
-            </a:solidFill>
-          </a:ln>
-        </p:spPr>
-        <p:style>
-          <a:lnRef idx="2">
-            <a:schemeClr val="accent1"/>
-          </a:lnRef>
-          <a:fillRef idx="0">
-            <a:schemeClr val="accent1"/>
-          </a:fillRef>
-          <a:effectRef idx="1">
-            <a:schemeClr val="accent1"/>
-          </a:effectRef>
-          <a:fontRef idx="minor">
-            <a:schemeClr val="tx1"/>
-          </a:fontRef>
-        </p:style>
-      </p:cxnSp>
-      <p:sp>
-        <p:nvSpPr>
-          <p:cNvPr id="10" name="Rounded Rectangle 9"/>
-          <p:cNvSpPr/>
-          <p:nvPr/>
-        </p:nvSpPr>
-        <p:spPr>
-          <a:xfrm>
-            <a:off x="5120640" y="1325880"/>
-            <a:ext cx="1993392" cy="1783080"/>
-          </a:xfrm>
-          <a:prstGeom prst="roundRect">
-            <a:avLst/>
-          </a:prstGeom>
-          <a:solidFill>
-            <a:srgbClr val="FFFFFF"/>
-          </a:solidFill>
-          <a:ln w="14604">
-            <a:solidFill>
-              <a:srgbClr val="429761"/>
-            </a:solidFill>
-          </a:ln>
-        </p:spPr>
-        <p:style>
-          <a:lnRef idx="1">
-            <a:schemeClr val="accent1"/>
-          </a:lnRef>
-          <a:fillRef idx="3">
-            <a:schemeClr val="accent1"/>
-          </a:fillRef>
-          <a:effectRef idx="2">
-            <a:schemeClr val="accent1"/>
-          </a:effectRef>
-          <a:fontRef idx="minor">
-            <a:schemeClr val="lt1"/>
-          </a:fontRef>
-        </p:style>
-        <p:txBody>
-          <a:bodyPr rtlCol="0" anchor="ctr" lIns="182880" tIns="100584"/>
-          <a:lstStyle/>
-          <a:p>
-            <a:pPr algn="ctr">
-              <a:defRPr sz="1500" b="1">
-                <a:solidFill>
-                  <a:srgbClr val="232D37"/>
-                </a:solidFill>
-                <a:latin typeface="Aptos Display"/>
-              </a:defRPr>
-            </a:pPr>
-            <a:r>
-              <a:t>3. Compute</a:t>
+              <a:defRPr sz="1200">
+                <a:solidFill>
+                  <a:srgbClr val="232D37"/>
+                </a:solidFill>
+                <a:latin typeface="Aptos"/>
+              </a:defRPr>
+            </a:pPr>
+            <a:r>
+              <a:t>Avoid an empty workbook if no rows exist.</a:t>
             </a:r>
           </a:p>
           <a:p>
             <a:pPr>
               <a:spcBef>
-                <a:spcPts val="400"/>
+                <a:spcPts val="300"/>
               </a:spcBef>
-              <a:defRPr sz="1100">
-                <a:solidFill>
-                  <a:srgbClr val="232D37"/>
-                </a:solidFill>
-                <a:latin typeface="Aptos"/>
-              </a:defRPr>
-            </a:pPr>
-            <a:r>
-              <a:t>Projection fields</a:t>
-            </a:r>
-          </a:p>
-          <a:p>
-            <a:pPr>
-              <a:spcBef>
-                <a:spcPts val="400"/>
-              </a:spcBef>
-              <a:defRPr sz="1100">
-                <a:solidFill>
-                  <a:srgbClr val="232D37"/>
-                </a:solidFill>
-                <a:latin typeface="Aptos"/>
-              </a:defRPr>
-            </a:pPr>
-            <a:r>
-              <a:t>projection.js</a:t>
-            </a:r>
-          </a:p>
-        </p:txBody>
-      </p:sp>
-      <p:sp>
-        <p:nvSpPr>
-          <p:cNvPr id="11" name="Rectangle 10"/>
+              <a:defRPr sz="1200">
+                <a:solidFill>
+                  <a:srgbClr val="232D37"/>
+                </a:solidFill>
+                <a:latin typeface="Aptos"/>
+              </a:defRPr>
+            </a:pPr>
+            <a:r>
+              <a:t>Keep user inputs and active chart state unchanged by export.</a:t>
+            </a:r>
+          </a:p>
+        </p:txBody>
+      </p:sp>
+      <p:sp>
+        <p:nvSpPr>
+          <p:cNvPr id="9" name="Rectangle 8"/>
           <p:cNvSpPr/>
           <p:nvPr/>
         </p:nvSpPr>
         <p:spPr>
           <a:xfrm>
-            <a:off x="5120640" y="1325880"/>
-            <a:ext cx="82296" cy="1783080"/>
-          </a:xfrm>
-          <a:prstGeom prst="rect">
-            <a:avLst/>
-          </a:prstGeom>
-          <a:solidFill>
-            <a:srgbClr val="429761"/>
-          </a:solidFill>
-          <a:ln>
-            <a:noFill/>
-          </a:ln>
-        </p:spPr>
-        <p:style>
-          <a:lnRef idx="1">
-            <a:schemeClr val="accent1"/>
-          </a:lnRef>
-          <a:fillRef idx="3">
-            <a:schemeClr val="accent1"/>
-          </a:fillRef>
-          <a:effectRef idx="2">
-            <a:schemeClr val="accent1"/>
-          </a:effectRef>
-          <a:fontRef idx="minor">
-            <a:schemeClr val="lt1"/>
-          </a:fontRef>
-        </p:style>
-        <p:txBody>
-          <a:bodyPr rtlCol="0" anchor="ctr"/>
-          <a:lstStyle/>
-          <a:p>
-            <a:pPr algn="ctr"/>
-          </a:p>
-        </p:txBody>
-      </p:sp>
-      <p:cxnSp>
-        <p:nvCxnSpPr>
-          <p:cNvPr id="12" name="Connector 11"/>
-          <p:cNvCxnSpPr/>
-          <p:nvPr/>
-        </p:nvCxnSpPr>
-        <p:spPr>
-          <a:xfrm>
-            <a:off x="7132320" y="2221992"/>
-            <a:ext cx="246888" cy="0"/>
-          </a:xfrm>
-          <a:prstGeom prst="line">
-            <a:avLst/>
-          </a:prstGeom>
-          <a:ln w="25400">
-            <a:solidFill>
-              <a:srgbClr val="429761"/>
-            </a:solidFill>
-          </a:ln>
-        </p:spPr>
-        <p:style>
-          <a:lnRef idx="2">
-            <a:schemeClr val="accent1"/>
-          </a:lnRef>
-          <a:fillRef idx="0">
-            <a:schemeClr val="accent1"/>
-          </a:fillRef>
-          <a:effectRef idx="1">
-            <a:schemeClr val="accent1"/>
-          </a:effectRef>
-          <a:fontRef idx="minor">
-            <a:schemeClr val="tx1"/>
-          </a:fontRef>
-        </p:style>
-      </p:cxnSp>
-      <p:sp>
-        <p:nvSpPr>
-          <p:cNvPr id="13" name="Rounded Rectangle 12"/>
-          <p:cNvSpPr/>
-          <p:nvPr/>
-        </p:nvSpPr>
-        <p:spPr>
-          <a:xfrm>
-            <a:off x="7452359" y="1325880"/>
-            <a:ext cx="1993392" cy="1783080"/>
-          </a:xfrm>
-          <a:prstGeom prst="roundRect">
-            <a:avLst/>
-          </a:prstGeom>
-          <a:solidFill>
-            <a:srgbClr val="FFFFFF"/>
-          </a:solidFill>
-          <a:ln w="14604">
-            <a:solidFill>
-              <a:srgbClr val="7852B0"/>
-            </a:solidFill>
-          </a:ln>
-        </p:spPr>
-        <p:style>
-          <a:lnRef idx="1">
-            <a:schemeClr val="accent1"/>
-          </a:lnRef>
-          <a:fillRef idx="3">
-            <a:schemeClr val="accent1"/>
-          </a:fillRef>
-          <a:effectRef idx="2">
-            <a:schemeClr val="accent1"/>
-          </a:effectRef>
-          <a:fontRef idx="minor">
-            <a:schemeClr val="lt1"/>
-          </a:fontRef>
-        </p:style>
-        <p:txBody>
-          <a:bodyPr rtlCol="0" anchor="ctr" lIns="182880" tIns="100584"/>
-          <a:lstStyle/>
-          <a:p>
-            <a:pPr algn="ctr">
-              <a:defRPr sz="1500" b="1">
-                <a:solidFill>
-                  <a:srgbClr val="232D37"/>
-                </a:solidFill>
-                <a:latin typeface="Aptos Display"/>
-              </a:defRPr>
-            </a:pPr>
-            <a:r>
-              <a:t>4. Display</a:t>
-            </a:r>
-          </a:p>
-          <a:p>
-            <a:pPr>
-              <a:spcBef>
-                <a:spcPts val="400"/>
-              </a:spcBef>
-              <a:defRPr sz="1100">
-                <a:solidFill>
-                  <a:srgbClr val="232D37"/>
-                </a:solidFill>
-                <a:latin typeface="Aptos"/>
-              </a:defRPr>
-            </a:pPr>
-            <a:r>
-              <a:t>Chart/page presentation</a:t>
-            </a:r>
-          </a:p>
-          <a:p>
-            <a:pPr>
-              <a:spcBef>
-                <a:spcPts val="400"/>
-              </a:spcBef>
-              <a:defRPr sz="1100">
-                <a:solidFill>
-                  <a:srgbClr val="232D37"/>
-                </a:solidFill>
-                <a:latin typeface="Aptos"/>
-              </a:defRPr>
-            </a:pPr>
-            <a:r>
-              <a:t>js/display/</a:t>
-            </a:r>
-          </a:p>
-        </p:txBody>
-      </p:sp>
-      <p:sp>
-        <p:nvSpPr>
-          <p:cNvPr id="14" name="Rectangle 13"/>
-          <p:cNvSpPr/>
-          <p:nvPr/>
-        </p:nvSpPr>
-        <p:spPr>
-          <a:xfrm>
-            <a:off x="7452359" y="1325880"/>
-            <a:ext cx="82296" cy="1783080"/>
+            <a:off x="8174736" y="1234440"/>
+            <a:ext cx="82296" cy="4434840"/>
           </a:xfrm>
           <a:prstGeom prst="rect">
             <a:avLst/>
@@ -10665,552 +10397,9 @@
           </a:p>
         </p:txBody>
       </p:sp>
-      <p:cxnSp>
-        <p:nvCxnSpPr>
-          <p:cNvPr id="15" name="Connector 14"/>
-          <p:cNvCxnSpPr/>
-          <p:nvPr/>
-        </p:nvCxnSpPr>
-        <p:spPr>
-          <a:xfrm>
-            <a:off x="9464039" y="2221992"/>
-            <a:ext cx="246889" cy="0"/>
-          </a:xfrm>
-          <a:prstGeom prst="line">
-            <a:avLst/>
-          </a:prstGeom>
-          <a:ln w="25400">
-            <a:solidFill>
-              <a:srgbClr val="7852B0"/>
-            </a:solidFill>
-          </a:ln>
-        </p:spPr>
-        <p:style>
-          <a:lnRef idx="2">
-            <a:schemeClr val="accent1"/>
-          </a:lnRef>
-          <a:fillRef idx="0">
-            <a:schemeClr val="accent1"/>
-          </a:fillRef>
-          <a:effectRef idx="1">
-            <a:schemeClr val="accent1"/>
-          </a:effectRef>
-          <a:fontRef idx="minor">
-            <a:schemeClr val="tx1"/>
-          </a:fontRef>
-        </p:style>
-      </p:cxnSp>
-      <p:sp>
-        <p:nvSpPr>
-          <p:cNvPr id="16" name="Rounded Rectangle 15"/>
-          <p:cNvSpPr/>
-          <p:nvPr/>
-        </p:nvSpPr>
-        <p:spPr>
-          <a:xfrm>
-            <a:off x="9784080" y="1325880"/>
-            <a:ext cx="1993392" cy="1783080"/>
-          </a:xfrm>
-          <a:prstGeom prst="roundRect">
-            <a:avLst/>
-          </a:prstGeom>
-          <a:solidFill>
-            <a:srgbClr val="FFFFFF"/>
-          </a:solidFill>
-          <a:ln w="14604">
-            <a:solidFill>
-              <a:srgbClr val="E5892A"/>
-            </a:solidFill>
-          </a:ln>
-        </p:spPr>
-        <p:style>
-          <a:lnRef idx="1">
-            <a:schemeClr val="accent1"/>
-          </a:lnRef>
-          <a:fillRef idx="3">
-            <a:schemeClr val="accent1"/>
-          </a:fillRef>
-          <a:effectRef idx="2">
-            <a:schemeClr val="accent1"/>
-          </a:effectRef>
-          <a:fontRef idx="minor">
-            <a:schemeClr val="lt1"/>
-          </a:fontRef>
-        </p:style>
-        <p:txBody>
-          <a:bodyPr rtlCol="0" anchor="ctr" lIns="182880" tIns="100584"/>
-          <a:lstStyle/>
-          <a:p>
-            <a:pPr algn="ctr">
-              <a:defRPr sz="1500" b="1">
-                <a:solidFill>
-                  <a:srgbClr val="232D37"/>
-                </a:solidFill>
-                <a:latin typeface="Aptos Display"/>
-              </a:defRPr>
-            </a:pPr>
-            <a:r>
-              <a:t>5. Docs</a:t>
-            </a:r>
-          </a:p>
-          <a:p>
-            <a:pPr>
-              <a:spcBef>
-                <a:spcPts val="400"/>
-              </a:spcBef>
-              <a:defRPr sz="1100">
-                <a:solidFill>
-                  <a:srgbClr val="232D37"/>
-                </a:solidFill>
-                <a:latin typeface="Aptos"/>
-              </a:defRPr>
-            </a:pPr>
-            <a:r>
-              <a:t>File-level contracts</a:t>
-            </a:r>
-          </a:p>
-          <a:p>
-            <a:pPr>
-              <a:spcBef>
-                <a:spcPts val="400"/>
-              </a:spcBef>
-              <a:defRPr sz="1100">
-                <a:solidFill>
-                  <a:srgbClr val="232D37"/>
-                </a:solidFill>
-                <a:latin typeface="Aptos"/>
-              </a:defRPr>
-            </a:pPr>
-            <a:r>
-              <a:t>ARCHITECTURE.md</a:t>
-            </a:r>
-          </a:p>
-        </p:txBody>
-      </p:sp>
-      <p:sp>
-        <p:nvSpPr>
-          <p:cNvPr id="17" name="Rectangle 16"/>
-          <p:cNvSpPr/>
-          <p:nvPr/>
-        </p:nvSpPr>
-        <p:spPr>
-          <a:xfrm>
-            <a:off x="9784080" y="1325880"/>
-            <a:ext cx="82296" cy="1783080"/>
-          </a:xfrm>
-          <a:prstGeom prst="rect">
-            <a:avLst/>
-          </a:prstGeom>
-          <a:solidFill>
-            <a:srgbClr val="E5892A"/>
-          </a:solidFill>
-          <a:ln>
-            <a:noFill/>
-          </a:ln>
-        </p:spPr>
-        <p:style>
-          <a:lnRef idx="1">
-            <a:schemeClr val="accent1"/>
-          </a:lnRef>
-          <a:fillRef idx="3">
-            <a:schemeClr val="accent1"/>
-          </a:fillRef>
-          <a:effectRef idx="2">
-            <a:schemeClr val="accent1"/>
-          </a:effectRef>
-          <a:fontRef idx="minor">
-            <a:schemeClr val="lt1"/>
-          </a:fontRef>
-        </p:style>
-        <p:txBody>
-          <a:bodyPr rtlCol="0" anchor="ctr"/>
-          <a:lstStyle/>
-          <a:p>
-            <a:pPr algn="ctr"/>
-          </a:p>
-        </p:txBody>
-      </p:sp>
-      <p:sp>
-        <p:nvSpPr>
-          <p:cNvPr id="18" name="Rounded Rectangle 17"/>
-          <p:cNvSpPr/>
-          <p:nvPr/>
-        </p:nvSpPr>
-        <p:spPr>
-          <a:xfrm>
-            <a:off x="685800" y="3977639"/>
-            <a:ext cx="3429000" cy="1325880"/>
-          </a:xfrm>
-          <a:prstGeom prst="roundRect">
-            <a:avLst/>
-          </a:prstGeom>
-          <a:solidFill>
-            <a:srgbClr val="E9F4FF"/>
-          </a:solidFill>
-          <a:ln w="14604">
-            <a:solidFill>
-              <a:srgbClr val="266EB2"/>
-            </a:solidFill>
-          </a:ln>
-        </p:spPr>
-        <p:style>
-          <a:lnRef idx="1">
-            <a:schemeClr val="accent1"/>
-          </a:lnRef>
-          <a:fillRef idx="3">
-            <a:schemeClr val="accent1"/>
-          </a:fillRef>
-          <a:effectRef idx="2">
-            <a:schemeClr val="accent1"/>
-          </a:effectRef>
-          <a:fontRef idx="minor">
-            <a:schemeClr val="lt1"/>
-          </a:fontRef>
-        </p:style>
-        <p:txBody>
-          <a:bodyPr rtlCol="0" anchor="ctr" lIns="182880" tIns="100584"/>
-          <a:lstStyle/>
-          <a:p>
-            <a:pPr algn="ctr">
-              <a:defRPr sz="1600" b="1">
-                <a:solidFill>
-                  <a:srgbClr val="232D37"/>
-                </a:solidFill>
-                <a:latin typeface="Aptos Display"/>
-              </a:defRPr>
-            </a:pPr>
-            <a:r>
-              <a:t>Source of truth</a:t>
-            </a:r>
-          </a:p>
-          <a:p>
-            <a:pPr>
-              <a:spcBef>
-                <a:spcPts val="400"/>
-              </a:spcBef>
-              <a:defRPr sz="1200">
-                <a:solidFill>
-                  <a:srgbClr val="232D37"/>
-                </a:solidFill>
-                <a:latin typeface="Aptos"/>
-              </a:defRPr>
-            </a:pPr>
-            <a:r>
-              <a:t>State owns inputs; projection rows own derived values.</a:t>
-            </a:r>
-          </a:p>
-        </p:txBody>
-      </p:sp>
-      <p:sp>
-        <p:nvSpPr>
-          <p:cNvPr id="19" name="Rectangle 18"/>
-          <p:cNvSpPr/>
-          <p:nvPr/>
-        </p:nvSpPr>
-        <p:spPr>
-          <a:xfrm>
-            <a:off x="685800" y="3977639"/>
-            <a:ext cx="82296" cy="1325880"/>
-          </a:xfrm>
-          <a:prstGeom prst="rect">
-            <a:avLst/>
-          </a:prstGeom>
-          <a:solidFill>
-            <a:srgbClr val="266EB2"/>
-          </a:solidFill>
-          <a:ln>
-            <a:noFill/>
-          </a:ln>
-        </p:spPr>
-        <p:style>
-          <a:lnRef idx="1">
-            <a:schemeClr val="accent1"/>
-          </a:lnRef>
-          <a:fillRef idx="3">
-            <a:schemeClr val="accent1"/>
-          </a:fillRef>
-          <a:effectRef idx="2">
-            <a:schemeClr val="accent1"/>
-          </a:effectRef>
-          <a:fontRef idx="minor">
-            <a:schemeClr val="lt1"/>
-          </a:fontRef>
-        </p:style>
-        <p:txBody>
-          <a:bodyPr rtlCol="0" anchor="ctr"/>
-          <a:lstStyle/>
-          <a:p>
-            <a:pPr algn="ctr"/>
-          </a:p>
-        </p:txBody>
-      </p:sp>
-      <p:sp>
-        <p:nvSpPr>
-          <p:cNvPr id="20" name="Rounded Rectangle 19"/>
-          <p:cNvSpPr/>
-          <p:nvPr/>
-        </p:nvSpPr>
-        <p:spPr>
-          <a:xfrm>
-            <a:off x="4389120" y="3977639"/>
-            <a:ext cx="3429000" cy="1325880"/>
-          </a:xfrm>
-          <a:prstGeom prst="roundRect">
-            <a:avLst/>
-          </a:prstGeom>
-          <a:solidFill>
-            <a:srgbClr val="EAF9F4"/>
-          </a:solidFill>
-          <a:ln w="14604">
-            <a:solidFill>
-              <a:srgbClr val="429761"/>
-            </a:solidFill>
-          </a:ln>
-        </p:spPr>
-        <p:style>
-          <a:lnRef idx="1">
-            <a:schemeClr val="accent1"/>
-          </a:lnRef>
-          <a:fillRef idx="3">
-            <a:schemeClr val="accent1"/>
-          </a:fillRef>
-          <a:effectRef idx="2">
-            <a:schemeClr val="accent1"/>
-          </a:effectRef>
-          <a:fontRef idx="minor">
-            <a:schemeClr val="lt1"/>
-          </a:fontRef>
-        </p:style>
-        <p:txBody>
-          <a:bodyPr rtlCol="0" anchor="ctr" lIns="182880" tIns="100584"/>
-          <a:lstStyle/>
-          <a:p>
-            <a:pPr algn="ctr">
-              <a:defRPr sz="1600" b="1">
-                <a:solidFill>
-                  <a:srgbClr val="232D37"/>
-                </a:solidFill>
-                <a:latin typeface="Aptos Display"/>
-              </a:defRPr>
-            </a:pPr>
-            <a:r>
-              <a:t>Layer discipline</a:t>
-            </a:r>
-          </a:p>
-          <a:p>
-            <a:pPr>
-              <a:spcBef>
-                <a:spcPts val="400"/>
-              </a:spcBef>
-              <a:defRPr sz="1200">
-                <a:solidFill>
-                  <a:srgbClr val="232D37"/>
-                </a:solidFill>
-                <a:latin typeface="Aptos"/>
-              </a:defRPr>
-            </a:pPr>
-            <a:r>
-              <a:t>Compute stays DOM-free; Display avoids financial recomputation.</a:t>
-            </a:r>
-          </a:p>
-        </p:txBody>
-      </p:sp>
-      <p:sp>
-        <p:nvSpPr>
-          <p:cNvPr id="21" name="Rectangle 20"/>
-          <p:cNvSpPr/>
-          <p:nvPr/>
-        </p:nvSpPr>
-        <p:spPr>
-          <a:xfrm>
-            <a:off x="4389120" y="3977639"/>
-            <a:ext cx="82296" cy="1325880"/>
-          </a:xfrm>
-          <a:prstGeom prst="rect">
-            <a:avLst/>
-          </a:prstGeom>
-          <a:solidFill>
-            <a:srgbClr val="429761"/>
-          </a:solidFill>
-          <a:ln>
-            <a:noFill/>
-          </a:ln>
-        </p:spPr>
-        <p:style>
-          <a:lnRef idx="1">
-            <a:schemeClr val="accent1"/>
-          </a:lnRef>
-          <a:fillRef idx="3">
-            <a:schemeClr val="accent1"/>
-          </a:fillRef>
-          <a:effectRef idx="2">
-            <a:schemeClr val="accent1"/>
-          </a:effectRef>
-          <a:fontRef idx="minor">
-            <a:schemeClr val="lt1"/>
-          </a:fontRef>
-        </p:style>
-        <p:txBody>
-          <a:bodyPr rtlCol="0" anchor="ctr"/>
-          <a:lstStyle/>
-          <a:p>
-            <a:pPr algn="ctr"/>
-          </a:p>
-        </p:txBody>
-      </p:sp>
-      <p:sp>
-        <p:nvSpPr>
-          <p:cNvPr id="22" name="Rounded Rectangle 21"/>
-          <p:cNvSpPr/>
-          <p:nvPr/>
-        </p:nvSpPr>
-        <p:spPr>
-          <a:xfrm>
-            <a:off x="8092440" y="3977639"/>
-            <a:ext cx="3429000" cy="1325880"/>
-          </a:xfrm>
-          <a:prstGeom prst="roundRect">
-            <a:avLst/>
-          </a:prstGeom>
-          <a:solidFill>
-            <a:srgbClr val="FFF6E8"/>
-          </a:solidFill>
-          <a:ln w="14604">
-            <a:solidFill>
-              <a:srgbClr val="E5892A"/>
-            </a:solidFill>
-          </a:ln>
-        </p:spPr>
-        <p:style>
-          <a:lnRef idx="1">
-            <a:schemeClr val="accent1"/>
-          </a:lnRef>
-          <a:fillRef idx="3">
-            <a:schemeClr val="accent1"/>
-          </a:fillRef>
-          <a:effectRef idx="2">
-            <a:schemeClr val="accent1"/>
-          </a:effectRef>
-          <a:fontRef idx="minor">
-            <a:schemeClr val="lt1"/>
-          </a:fontRef>
-        </p:style>
-        <p:txBody>
-          <a:bodyPr rtlCol="0" anchor="ctr" lIns="182880" tIns="100584"/>
-          <a:lstStyle/>
-          <a:p>
-            <a:pPr algn="ctr">
-              <a:defRPr sz="1600" b="1">
-                <a:solidFill>
-                  <a:srgbClr val="232D37"/>
-                </a:solidFill>
-                <a:latin typeface="Aptos Display"/>
-              </a:defRPr>
-            </a:pPr>
-            <a:r>
-              <a:t>User experience</a:t>
-            </a:r>
-          </a:p>
-          <a:p>
-            <a:pPr>
-              <a:spcBef>
-                <a:spcPts val="400"/>
-              </a:spcBef>
-              <a:defRPr sz="1200">
-                <a:solidFill>
-                  <a:srgbClr val="232D37"/>
-                </a:solidFill>
-                <a:latin typeface="Aptos"/>
-              </a:defRPr>
-            </a:pPr>
-            <a:r>
-              <a:t>Reuse controls; preserve enable/hide independence; document local-file limits clearly.</a:t>
-            </a:r>
-          </a:p>
-        </p:txBody>
-      </p:sp>
-      <p:sp>
-        <p:nvSpPr>
-          <p:cNvPr id="23" name="Rectangle 22"/>
-          <p:cNvSpPr/>
-          <p:nvPr/>
-        </p:nvSpPr>
-        <p:spPr>
-          <a:xfrm>
-            <a:off x="8092440" y="3977639"/>
-            <a:ext cx="82296" cy="1325880"/>
-          </a:xfrm>
-          <a:prstGeom prst="rect">
-            <a:avLst/>
-          </a:prstGeom>
-          <a:solidFill>
-            <a:srgbClr val="E5892A"/>
-          </a:solidFill>
-          <a:ln>
-            <a:noFill/>
-          </a:ln>
-        </p:spPr>
-        <p:style>
-          <a:lnRef idx="1">
-            <a:schemeClr val="accent1"/>
-          </a:lnRef>
-          <a:fillRef idx="3">
-            <a:schemeClr val="accent1"/>
-          </a:fillRef>
-          <a:effectRef idx="2">
-            <a:schemeClr val="accent1"/>
-          </a:effectRef>
-          <a:fontRef idx="minor">
-            <a:schemeClr val="lt1"/>
-          </a:fontRef>
-        </p:style>
-        <p:txBody>
-          <a:bodyPr rtlCol="0" anchor="ctr"/>
-          <a:lstStyle/>
-          <a:p>
-            <a:pPr algn="ctr"/>
-          </a:p>
-        </p:txBody>
-      </p:sp>
-      <p:sp>
-        <p:nvSpPr>
-          <p:cNvPr id="24" name="TextBox 23"/>
-          <p:cNvSpPr txBox="1"/>
-          <p:nvPr/>
-        </p:nvSpPr>
-        <p:spPr>
-          <a:xfrm>
-            <a:off x="685800" y="5806440"/>
-            <a:ext cx="10881360" cy="274320"/>
-          </a:xfrm>
-          <a:prstGeom prst="rect">
-            <a:avLst/>
-          </a:prstGeom>
-          <a:noFill/>
-        </p:spPr>
-        <p:txBody>
-          <a:bodyPr wrap="none" anchor="ctr">
-            <a:spAutoFit/>
-          </a:bodyPr>
-          <a:lstStyle/>
-          <a:p>
-            <a:pPr algn="ctr">
-              <a:defRPr sz="1300" b="1">
-                <a:solidFill>
-                  <a:srgbClr val="0F2647"/>
-                </a:solidFill>
-                <a:latin typeface="Aptos"/>
-              </a:defRPr>
-            </a:pPr>
-            <a:r>
-              <a:t>This updated architecture supports richer plan management and documentation without weakening the core Input → Compute → Display boundaries.</a:t>
-            </a:r>
-          </a:p>
-        </p:txBody>
-      </p:sp>
-      <p:sp>
-        <p:nvSpPr>
-          <p:cNvPr id="25" name="Rectangle 24"/>
+      <p:sp>
+        <p:nvSpPr>
+          <p:cNvPr id="10" name="Rectangle 9"/>
           <p:cNvSpPr/>
           <p:nvPr/>
         </p:nvSpPr>
@@ -11253,14 +10442,14 @@
       </p:sp>
       <p:sp>
         <p:nvSpPr>
-          <p:cNvPr id="26" name="TextBox 25"/>
+          <p:cNvPr id="11" name="TextBox 10"/>
           <p:cNvSpPr txBox="1"/>
           <p:nvPr/>
         </p:nvSpPr>
         <p:spPr>
           <a:xfrm>
             <a:off x="530352" y="6510528"/>
-            <a:ext cx="10881360" cy="164592"/>
+            <a:ext cx="10881360" cy="146304"/>
           </a:xfrm>
           <a:prstGeom prst="rect">
             <a:avLst/>
@@ -11282,7 +10471,7 @@
               </a:defRPr>
             </a:pPr>
             <a:r>
-              <a:t>Retirement Income Planner • Architecture overview • Updated specification</a:t>
+              <a:t>Retirement Income Planner • Architecture overview • IRMAA and Excel-export update</a:t>
             </a:r>
           </a:p>
         </p:txBody>

--- a/docs/retirement_income_planner_architecture.pptx
+++ b/docs/retirement_income_planner_architecture.pptx
@@ -3214,7 +3214,7 @@
               </a:defRPr>
             </a:pPr>
             <a:r>
-              <a:t>Updated architecture: portfolio-paid IRMAA, richer expense waterfall, and Excel projection export</a:t>
+              <a:t>Updated architecture: percentage-based cost basis, backward-compatible migration, and textbook-style formulas</a:t>
             </a:r>
           </a:p>
         </p:txBody>
@@ -3285,7 +3285,7 @@
               </a:defRPr>
             </a:pPr>
             <a:r>
-              <a:t>Cards, controls, load menu</a:t>
+              <a:t>Cards, controls, plan loading</a:t>
             </a:r>
           </a:p>
           <a:p>
@@ -3431,7 +3431,7 @@
               </a:defRPr>
             </a:pPr>
             <a:r>
-              <a:t>Tax, IRMAA, basis, balances</a:t>
+              <a:t>Basis, taxes, IRMAA, balances</a:t>
             </a:r>
           </a:p>
         </p:txBody>
@@ -3545,7 +3545,7 @@
               </a:defRPr>
             </a:pPr>
             <a:r>
-              <a:t>Charts, pages, XLSX workbook</a:t>
+              <a:t>Charts, formula reference, notes, XLSX</a:t>
             </a:r>
           </a:p>
           <a:p>
@@ -3759,8 +3759,8 @@
         </p:nvSpPr>
         <p:spPr>
           <a:xfrm>
-            <a:off x="1783080" y="5029200"/>
-            <a:ext cx="8595360" cy="777240"/>
+            <a:off x="1737360" y="5029200"/>
+            <a:ext cx="8686800" cy="777240"/>
           </a:xfrm>
           <a:prstGeom prst="roundRect">
             <a:avLst/>
@@ -3801,7 +3801,7 @@
               </a:defRPr>
             </a:pPr>
             <a:r>
-              <a:t>App orchestration</a:t>
+              <a:t>Foundational contracts</a:t>
             </a:r>
           </a:p>
           <a:p>
@@ -3817,7 +3817,7 @@
               </a:defRPr>
             </a:pPr>
             <a:r>
-              <a:t>app.js connects computeProjection() to rendering; export reads the current cached projection without changing state.</a:t>
+              <a:t>state owns user inputs; computeProjection() owns derived values; Display and export consume projection rows.</a:t>
             </a:r>
           </a:p>
         </p:txBody>
@@ -3830,7 +3830,7 @@
         </p:nvSpPr>
         <p:spPr>
           <a:xfrm>
-            <a:off x="1783080" y="5029200"/>
+            <a:off x="1737360" y="5029200"/>
             <a:ext cx="82296" cy="777240"/>
           </a:xfrm>
           <a:prstGeom prst="rect">
@@ -3939,7 +3939,7 @@
               </a:defRPr>
             </a:pPr>
             <a:r>
-              <a:t>Retirement Income Planner • Architecture overview • IRMAA and Excel-export update</a:t>
+              <a:t>Retirement Income Planner • Architecture overview • Basis-percentage and formula-page update</a:t>
             </a:r>
           </a:p>
         </p:txBody>
@@ -4015,7 +4015,7 @@
         <p:spPr>
           <a:xfrm>
             <a:off x="530352" y="786384"/>
-            <a:ext cx="10972800" cy="219456"/>
+            <a:ext cx="10972800" cy="228600"/>
           </a:xfrm>
           <a:prstGeom prst="rect">
             <a:avLst/>
@@ -4037,7 +4037,7 @@
               </a:defRPr>
             </a:pPr>
             <a:r>
-              <a:t>Three additions extend brokerage expense modeling and make the full projection portable.</a:t>
+              <a:t>The latest revision changes how brokerage cost basis is entered and documented, not how the core layers interact.</a:t>
             </a:r>
           </a:p>
         </p:txBody>
@@ -4092,7 +4092,7 @@
               </a:defRPr>
             </a:pPr>
             <a:r>
-              <a:t>1. IRMAA toggle</a:t>
+              <a:t>Cost-basis input</a:t>
             </a:r>
           </a:p>
           <a:p>
@@ -4108,7 +4108,7 @@
               </a:defRPr>
             </a:pPr>
             <a:r>
-              <a:t>Each brokerage portfolio adds irmaa: boolean.</a:t>
+              <a:t>basisPct replaces dollar basis.</a:t>
             </a:r>
           </a:p>
           <a:p>
@@ -4124,7 +4124,7 @@
               </a:defRPr>
             </a:pPr>
             <a:r>
-              <a:t>It is an optional expense only when Expenses is on.</a:t>
+              <a:t>User enters 0–100% of start balance.</a:t>
             </a:r>
           </a:p>
           <a:p>
@@ -4140,7 +4140,23 @@
               </a:defRPr>
             </a:pPr>
             <a:r>
-              <a:t>The household surcharge is allocated across eligible checked portfolios.</a:t>
+              <a:t>Blank remains null—not zero.</a:t>
+            </a:r>
+          </a:p>
+          <a:p>
+            <a:pPr>
+              <a:spcBef>
+                <a:spcPts val="300"/>
+              </a:spcBef>
+              <a:defRPr sz="1300">
+                <a:solidFill>
+                  <a:srgbClr val="232D37"/>
+                </a:solidFill>
+                <a:latin typeface="Aptos"/>
+              </a:defRPr>
+            </a:pPr>
+            <a:r>
+              <a:t>Input is clamped to the permitted range.</a:t>
             </a:r>
           </a:p>
         </p:txBody>
@@ -4238,7 +4254,7 @@
               </a:defRPr>
             </a:pPr>
             <a:r>
-              <a:t>2. Expense waterfall</a:t>
+              <a:t>Load migration</a:t>
             </a:r>
           </a:p>
           <a:p>
@@ -4254,7 +4270,7 @@
               </a:defRPr>
             </a:pPr>
             <a:r>
-              <a:t>Portfolio expenses now include withdrawal, fee, tax drag, and IRMAA.</a:t>
+              <a:t>Older dollar basis is converted to a percentage during hydrateState().</a:t>
             </a:r>
           </a:p>
           <a:p>
@@ -4270,7 +4286,7 @@
               </a:defRPr>
             </a:pPr>
             <a:r>
-              <a:t>Each portfolio pays only with its own dividends and share sales.</a:t>
+              <a:t>Older manual LTCG fields remain dropped.</a:t>
             </a:r>
           </a:p>
           <a:p>
@@ -4286,7 +4302,7 @@
               </a:defRPr>
             </a:pPr>
             <a:r>
-              <a:t>Prior-year AGI and prior-year tax prevent circular calculations.</a:t>
+              <a:t>Default fields and safe reset/hydration sequence stay intact.</a:t>
             </a:r>
           </a:p>
         </p:txBody>
@@ -4384,7 +4400,7 @@
               </a:defRPr>
             </a:pPr>
             <a:r>
-              <a:t>3. Excel export</a:t>
+              <a:t>Formula presentation</a:t>
             </a:r>
           </a:p>
           <a:p>
@@ -4400,7 +4416,7 @@
               </a:defRPr>
             </a:pPr>
             <a:r>
-              <a:t>New Export to Excel action uses SheetJS.</a:t>
+              <a:t>Formula page now sets equations as centered display math.</a:t>
             </a:r>
           </a:p>
           <a:p>
@@ -4416,7 +4432,7 @@
               </a:defRPr>
             </a:pPr>
             <a:r>
-              <a:t>Projection-by-year and brokerage-detail sheets.</a:t>
+              <a:t>Reusable helpers format equations, fractions, piecewise cases, and “where” captions.</a:t>
             </a:r>
           </a:p>
           <a:p>
@@ -4432,7 +4448,7 @@
               </a:defRPr>
             </a:pPr>
             <a:r>
-              <a:t>Read-only operation from lastProjection.</a:t>
+              <a:t>Reference tables still come from Compute constants.</a:t>
             </a:r>
           </a:p>
         </p:txBody>
@@ -4554,7 +4570,7 @@
               </a:defRPr>
             </a:pPr>
             <a:r>
-              <a:t>Retirement Income Planner • Architecture overview • IRMAA and Excel-export update</a:t>
+              <a:t>Retirement Income Planner • Architecture overview • Basis-percentage and formula-page update</a:t>
             </a:r>
           </a:p>
         </p:txBody>
@@ -4616,7 +4632,7 @@
               </a:defRPr>
             </a:pPr>
             <a:r>
-              <a:t>IRMAA expense: household calculation and portfolio allocation</a:t>
+              <a:t>Percentage-based cost basis: input-to-model flow</a:t>
             </a:r>
           </a:p>
         </p:txBody>
@@ -4630,7 +4646,7 @@
         <p:spPr>
           <a:xfrm>
             <a:off x="530352" y="786384"/>
-            <a:ext cx="10972800" cy="219456"/>
+            <a:ext cx="10972800" cy="228600"/>
           </a:xfrm>
           <a:prstGeom prst="rect">
             <a:avLst/>
@@ -4652,7 +4668,7 @@
               </a:defRPr>
             </a:pPr>
             <a:r>
-              <a:t>IRMAA is calculated once for the household, then charged only to opted-in eligible portfolios.</a:t>
+              <a:t>The UI captures an intuitive starting-basis percentage; the projection converts it to a dollar basis at the start of the plan.</a:t>
             </a:r>
           </a:p>
         </p:txBody>
@@ -4665,8 +4681,8 @@
         </p:nvSpPr>
         <p:spPr>
           <a:xfrm>
-            <a:off x="502920" y="1143000"/>
-            <a:ext cx="2240280" cy="1325880"/>
+            <a:off x="548640" y="1298448"/>
+            <a:ext cx="2148840" cy="1325880"/>
           </a:xfrm>
           <a:prstGeom prst="roundRect">
             <a:avLst/>
@@ -4707,7 +4723,7 @@
               </a:defRPr>
             </a:pPr>
             <a:r>
-              <a:t>Prior-year AGI</a:t>
+              <a:t>User input</a:t>
             </a:r>
           </a:p>
           <a:p>
@@ -4715,15 +4731,15 @@
               <a:spcBef>
                 <a:spcPts val="300"/>
               </a:spcBef>
-              <a:defRPr sz="1200">
-                <a:solidFill>
-                  <a:srgbClr val="232D37"/>
-                </a:solidFill>
-                <a:latin typeface="Aptos"/>
-              </a:defRPr>
-            </a:pPr>
-            <a:r>
-              <a:t>Use prior-year AGI</a:t>
+              <a:defRPr sz="1100">
+                <a:solidFill>
+                  <a:srgbClr val="232D37"/>
+                </a:solidFill>
+                <a:latin typeface="Aptos"/>
+              </a:defRPr>
+            </a:pPr>
+            <a:r>
+              <a:t>Cost basis % of start balance</a:t>
             </a:r>
           </a:p>
           <a:p>
@@ -4731,15 +4747,31 @@
               <a:spcBef>
                 <a:spcPts val="300"/>
               </a:spcBef>
-              <a:defRPr sz="1200">
-                <a:solidFill>
-                  <a:srgbClr val="232D37"/>
-                </a:solidFill>
-                <a:latin typeface="Aptos"/>
-              </a:defRPr>
-            </a:pPr>
-            <a:r>
-              <a:t>Year 0 surcharge = $0</a:t>
+              <a:defRPr sz="1100">
+                <a:solidFill>
+                  <a:srgbClr val="232D37"/>
+                </a:solidFill>
+                <a:latin typeface="Aptos"/>
+              </a:defRPr>
+            </a:pPr>
+            <a:r>
+              <a:t>Allowed range: 0–100</a:t>
+            </a:r>
+          </a:p>
+          <a:p>
+            <a:pPr>
+              <a:spcBef>
+                <a:spcPts val="300"/>
+              </a:spcBef>
+              <a:defRPr sz="1100">
+                <a:solidFill>
+                  <a:srgbClr val="232D37"/>
+                </a:solidFill>
+                <a:latin typeface="Aptos"/>
+              </a:defRPr>
+            </a:pPr>
+            <a:r>
+              <a:t>Blank = not entered</a:t>
             </a:r>
           </a:p>
         </p:txBody>
@@ -4752,7 +4784,7 @@
         </p:nvSpPr>
         <p:spPr>
           <a:xfrm>
-            <a:off x="502920" y="1143000"/>
+            <a:off x="548640" y="1298448"/>
             <a:ext cx="82296" cy="1325880"/>
           </a:xfrm>
           <a:prstGeom prst="rect">
@@ -4795,8 +4827,154 @@
         </p:nvSpPr>
         <p:spPr>
           <a:xfrm>
-            <a:off x="3063240" y="1143000"/>
-            <a:ext cx="2240280" cy="1325880"/>
+            <a:off x="3154680" y="1298448"/>
+            <a:ext cx="2148840" cy="1325880"/>
+          </a:xfrm>
+          <a:prstGeom prst="roundRect">
+            <a:avLst/>
+          </a:prstGeom>
+          <a:solidFill>
+            <a:srgbClr val="F8FAFC"/>
+          </a:solidFill>
+          <a:ln w="13970">
+            <a:solidFill>
+              <a:srgbClr val="0F2647"/>
+            </a:solidFill>
+          </a:ln>
+        </p:spPr>
+        <p:style>
+          <a:lnRef idx="1">
+            <a:schemeClr val="accent1"/>
+          </a:lnRef>
+          <a:fillRef idx="3">
+            <a:schemeClr val="accent1"/>
+          </a:fillRef>
+          <a:effectRef idx="2">
+            <a:schemeClr val="accent1"/>
+          </a:effectRef>
+          <a:fontRef idx="minor">
+            <a:schemeClr val="lt1"/>
+          </a:fontRef>
+        </p:style>
+        <p:txBody>
+          <a:bodyPr rtlCol="0" anchor="ctr" lIns="182880" rIns="100584" tIns="91440"/>
+          <a:lstStyle/>
+          <a:p>
+            <a:pPr algn="ctr">
+              <a:defRPr sz="1600" b="1">
+                <a:solidFill>
+                  <a:srgbClr val="232D37"/>
+                </a:solidFill>
+                <a:latin typeface="Aptos Display"/>
+              </a:defRPr>
+            </a:pPr>
+            <a:r>
+              <a:t>State</a:t>
+            </a:r>
+          </a:p>
+          <a:p>
+            <a:pPr>
+              <a:spcBef>
+                <a:spcPts val="300"/>
+              </a:spcBef>
+              <a:defRPr sz="1100">
+                <a:solidFill>
+                  <a:srgbClr val="232D37"/>
+                </a:solidFill>
+                <a:latin typeface="Aptos"/>
+              </a:defRPr>
+            </a:pPr>
+            <a:r>
+              <a:t>basisPct: number | null</a:t>
+            </a:r>
+          </a:p>
+          <a:p>
+            <a:pPr>
+              <a:spcBef>
+                <a:spcPts val="300"/>
+              </a:spcBef>
+              <a:defRPr sz="1100">
+                <a:solidFill>
+                  <a:srgbClr val="232D37"/>
+                </a:solidFill>
+                <a:latin typeface="Aptos"/>
+              </a:defRPr>
+            </a:pPr>
+            <a:r>
+              <a:t>Persisted in plan JSON</a:t>
+            </a:r>
+          </a:p>
+          <a:p>
+            <a:pPr>
+              <a:spcBef>
+                <a:spcPts val="300"/>
+              </a:spcBef>
+              <a:defRPr sz="1100">
+                <a:solidFill>
+                  <a:srgbClr val="232D37"/>
+                </a:solidFill>
+                <a:latin typeface="Aptos"/>
+              </a:defRPr>
+            </a:pPr>
+            <a:r>
+              <a:t>No dollar basis stored as input</a:t>
+            </a:r>
+          </a:p>
+        </p:txBody>
+      </p:sp>
+      <p:sp>
+        <p:nvSpPr>
+          <p:cNvPr id="7" name="Rectangle 6"/>
+          <p:cNvSpPr/>
+          <p:nvPr/>
+        </p:nvSpPr>
+        <p:spPr>
+          <a:xfrm>
+            <a:off x="3154680" y="1298448"/>
+            <a:ext cx="82296" cy="1325880"/>
+          </a:xfrm>
+          <a:prstGeom prst="rect">
+            <a:avLst/>
+          </a:prstGeom>
+          <a:solidFill>
+            <a:srgbClr val="0F2647"/>
+          </a:solidFill>
+          <a:ln>
+            <a:noFill/>
+          </a:ln>
+        </p:spPr>
+        <p:style>
+          <a:lnRef idx="1">
+            <a:schemeClr val="accent1"/>
+          </a:lnRef>
+          <a:fillRef idx="3">
+            <a:schemeClr val="accent1"/>
+          </a:fillRef>
+          <a:effectRef idx="2">
+            <a:schemeClr val="accent1"/>
+          </a:effectRef>
+          <a:fontRef idx="minor">
+            <a:schemeClr val="lt1"/>
+          </a:fontRef>
+        </p:style>
+        <p:txBody>
+          <a:bodyPr rtlCol="0" anchor="ctr"/>
+          <a:lstStyle/>
+          <a:p>
+            <a:pPr algn="ctr"/>
+          </a:p>
+        </p:txBody>
+      </p:sp>
+      <p:sp>
+        <p:nvSpPr>
+          <p:cNvPr id="8" name="Rounded Rectangle 7"/>
+          <p:cNvSpPr/>
+          <p:nvPr/>
+        </p:nvSpPr>
+        <p:spPr>
+          <a:xfrm>
+            <a:off x="5760720" y="1298448"/>
+            <a:ext cx="2331720" cy="1325880"/>
           </a:xfrm>
           <a:prstGeom prst="roundRect">
             <a:avLst/>
@@ -4837,7 +5015,7 @@
               </a:defRPr>
             </a:pPr>
             <a:r>
-              <a:t>IRMAA tier</a:t>
+              <a:t>Projection start</a:t>
             </a:r>
           </a:p>
           <a:p>
@@ -4845,15 +5023,15 @@
               <a:spcBef>
                 <a:spcPts val="300"/>
               </a:spcBef>
-              <a:defRPr sz="1200">
-                <a:solidFill>
-                  <a:srgbClr val="232D37"/>
-                </a:solidFill>
-                <a:latin typeface="Aptos"/>
-              </a:defRPr>
-            </a:pPr>
-            <a:r>
-              <a:t>Apply current filing-status tier</a:t>
+              <a:defRPr sz="1100">
+                <a:solidFill>
+                  <a:srgbClr val="232D37"/>
+                </a:solidFill>
+                <a:latin typeface="Aptos"/>
+              </a:defRPr>
+            </a:pPr>
+            <a:r>
+              <a:t>basis = basisPct / 100 × balance</a:t>
             </a:r>
           </a:p>
           <a:p>
@@ -4861,28 +5039,28 @@
               <a:spcBef>
                 <a:spcPts val="300"/>
               </a:spcBef>
-              <a:defRPr sz="1200">
-                <a:solidFill>
-                  <a:srgbClr val="232D37"/>
-                </a:solidFill>
-                <a:latin typeface="Aptos"/>
-              </a:defRPr>
-            </a:pPr>
-            <a:r>
-              <a:t>Tables are indexed</a:t>
-            </a:r>
-          </a:p>
-        </p:txBody>
-      </p:sp>
-      <p:sp>
-        <p:nvSpPr>
-          <p:cNvPr id="7" name="Rectangle 6"/>
+              <a:defRPr sz="1100">
+                <a:solidFill>
+                  <a:srgbClr val="232D37"/>
+                </a:solidFill>
+                <a:latin typeface="Aptos"/>
+              </a:defRPr>
+            </a:pPr>
+            <a:r>
+              <a:t>Clamp to [0, balance]</a:t>
+            </a:r>
+          </a:p>
+        </p:txBody>
+      </p:sp>
+      <p:sp>
+        <p:nvSpPr>
+          <p:cNvPr id="9" name="Rectangle 8"/>
           <p:cNvSpPr/>
           <p:nvPr/>
         </p:nvSpPr>
         <p:spPr>
           <a:xfrm>
-            <a:off x="3063240" y="1143000"/>
+            <a:off x="5760720" y="1298448"/>
             <a:ext cx="82296" cy="1325880"/>
           </a:xfrm>
           <a:prstGeom prst="rect">
@@ -4919,128 +5097,14 @@
       </p:sp>
       <p:sp>
         <p:nvSpPr>
-          <p:cNvPr id="8" name="Rounded Rectangle 7"/>
-          <p:cNvSpPr/>
-          <p:nvPr/>
-        </p:nvSpPr>
-        <p:spPr>
-          <a:xfrm>
-            <a:off x="5623560" y="1143000"/>
-            <a:ext cx="2240280" cy="1325880"/>
-          </a:xfrm>
-          <a:prstGeom prst="roundRect">
-            <a:avLst/>
-          </a:prstGeom>
-          <a:solidFill>
-            <a:srgbClr val="FFF6E8"/>
-          </a:solidFill>
-          <a:ln w="13970">
-            <a:solidFill>
-              <a:srgbClr val="E5892A"/>
-            </a:solidFill>
-          </a:ln>
-        </p:spPr>
-        <p:style>
-          <a:lnRef idx="1">
-            <a:schemeClr val="accent1"/>
-          </a:lnRef>
-          <a:fillRef idx="3">
-            <a:schemeClr val="accent1"/>
-          </a:fillRef>
-          <a:effectRef idx="2">
-            <a:schemeClr val="accent1"/>
-          </a:effectRef>
-          <a:fontRef idx="minor">
-            <a:schemeClr val="lt1"/>
-          </a:fontRef>
-        </p:style>
-        <p:txBody>
-          <a:bodyPr rtlCol="0" anchor="ctr" lIns="182880" rIns="100584" tIns="91440"/>
-          <a:lstStyle/>
-          <a:p>
-            <a:pPr algn="ctr">
-              <a:defRPr sz="1600" b="1">
-                <a:solidFill>
-                  <a:srgbClr val="232D37"/>
-                </a:solidFill>
-                <a:latin typeface="Aptos Display"/>
-              </a:defRPr>
-            </a:pPr>
-            <a:r>
-              <a:t>Enrolled people</a:t>
-            </a:r>
-          </a:p>
-          <a:p>
-            <a:pPr>
-              <a:spcBef>
-                <a:spcPts val="300"/>
-              </a:spcBef>
-              <a:defRPr sz="1200">
-                <a:solidFill>
-                  <a:srgbClr val="232D37"/>
-                </a:solidFill>
-                <a:latin typeface="Aptos"/>
-              </a:defRPr>
-            </a:pPr>
-            <a:r>
-              <a:t>Tier surcharge × living people age 65+</a:t>
-            </a:r>
-          </a:p>
-        </p:txBody>
-      </p:sp>
-      <p:sp>
-        <p:nvSpPr>
-          <p:cNvPr id="9" name="Rectangle 8"/>
-          <p:cNvSpPr/>
-          <p:nvPr/>
-        </p:nvSpPr>
-        <p:spPr>
-          <a:xfrm>
-            <a:off x="5623560" y="1143000"/>
-            <a:ext cx="82296" cy="1325880"/>
-          </a:xfrm>
-          <a:prstGeom prst="rect">
-            <a:avLst/>
-          </a:prstGeom>
-          <a:solidFill>
-            <a:srgbClr val="E5892A"/>
-          </a:solidFill>
-          <a:ln>
-            <a:noFill/>
-          </a:ln>
-        </p:spPr>
-        <p:style>
-          <a:lnRef idx="1">
-            <a:schemeClr val="accent1"/>
-          </a:lnRef>
-          <a:fillRef idx="3">
-            <a:schemeClr val="accent1"/>
-          </a:fillRef>
-          <a:effectRef idx="2">
-            <a:schemeClr val="accent1"/>
-          </a:effectRef>
-          <a:fontRef idx="minor">
-            <a:schemeClr val="lt1"/>
-          </a:fontRef>
-        </p:style>
-        <p:txBody>
-          <a:bodyPr rtlCol="0" anchor="ctr"/>
-          <a:lstStyle/>
-          <a:p>
-            <a:pPr algn="ctr"/>
-          </a:p>
-        </p:txBody>
-      </p:sp>
-      <p:sp>
-        <p:nvSpPr>
           <p:cNvPr id="10" name="Rounded Rectangle 9"/>
           <p:cNvSpPr/>
           <p:nvPr/>
         </p:nvSpPr>
         <p:spPr>
           <a:xfrm>
-            <a:off x="8183879" y="1143000"/>
-            <a:ext cx="2880360" cy="1325880"/>
+            <a:off x="8549640" y="1298448"/>
+            <a:ext cx="3063240" cy="1325880"/>
           </a:xfrm>
           <a:prstGeom prst="roundRect">
             <a:avLst/>
@@ -5081,7 +5145,7 @@
               </a:defRPr>
             </a:pPr>
             <a:r>
-              <a:t>Household surcharge</a:t>
+              <a:t>Ongoing model</a:t>
             </a:r>
           </a:p>
           <a:p>
@@ -5089,15 +5153,31 @@
               <a:spcBef>
                 <a:spcPts val="300"/>
               </a:spcBef>
-              <a:defRPr sz="1200">
-                <a:solidFill>
-                  <a:srgbClr val="232D37"/>
-                </a:solidFill>
-                <a:latin typeface="Aptos"/>
-              </a:defRPr>
-            </a:pPr>
-            <a:r>
-              <a:t>Reported every year as irmaaSurcharge</a:t>
+              <a:defRPr sz="1100">
+                <a:solidFill>
+                  <a:srgbClr val="232D37"/>
+                </a:solidFill>
+                <a:latin typeface="Aptos"/>
+              </a:defRPr>
+            </a:pPr>
+            <a:r>
+              <a:t>Average-cost basis rolls forward</a:t>
+            </a:r>
+          </a:p>
+          <a:p>
+            <a:pPr>
+              <a:spcBef>
+                <a:spcPts val="300"/>
+              </a:spcBef>
+              <a:defRPr sz="1100">
+                <a:solidFill>
+                  <a:srgbClr val="232D37"/>
+                </a:solidFill>
+                <a:latin typeface="Aptos"/>
+              </a:defRPr>
+            </a:pPr>
+            <a:r>
+              <a:t>Drives gain fraction, realized LTCG, and unrealized gain</a:t>
             </a:r>
           </a:p>
         </p:txBody>
@@ -5110,7 +5190,7 @@
         </p:nvSpPr>
         <p:spPr>
           <a:xfrm>
-            <a:off x="8183879" y="1143000"/>
+            <a:off x="8549640" y="1298448"/>
             <a:ext cx="82296" cy="1325880"/>
           </a:xfrm>
           <a:prstGeom prst="rect">
@@ -5153,8 +5233,8 @@
         </p:nvCxnSpPr>
         <p:spPr>
           <a:xfrm>
-            <a:off x="2788920" y="1810512"/>
-            <a:ext cx="201168" cy="0"/>
+            <a:off x="2743200" y="1965960"/>
+            <a:ext cx="256032" cy="0"/>
           </a:xfrm>
           <a:prstGeom prst="line">
             <a:avLst/>
@@ -5188,15 +5268,15 @@
         </p:nvCxnSpPr>
         <p:spPr>
           <a:xfrm>
-            <a:off x="5349240" y="1810512"/>
-            <a:ext cx="201167" cy="0"/>
+            <a:off x="5349240" y="1965960"/>
+            <a:ext cx="256032" cy="0"/>
           </a:xfrm>
           <a:prstGeom prst="line">
             <a:avLst/>
           </a:prstGeom>
           <a:ln w="22860">
             <a:solidFill>
-              <a:srgbClr val="429761"/>
+              <a:srgbClr val="0F2647"/>
             </a:solidFill>
           </a:ln>
         </p:spPr>
@@ -5223,15 +5303,15 @@
         </p:nvCxnSpPr>
         <p:spPr>
           <a:xfrm>
-            <a:off x="7909560" y="1810512"/>
-            <a:ext cx="201168" cy="0"/>
+            <a:off x="8138160" y="1965960"/>
+            <a:ext cx="256032" cy="0"/>
           </a:xfrm>
           <a:prstGeom prst="line">
             <a:avLst/>
           </a:prstGeom>
           <a:ln w="22860">
             <a:solidFill>
-              <a:srgbClr val="E5892A"/>
+              <a:srgbClr val="429761"/>
             </a:solidFill>
           </a:ln>
         </p:spPr>
@@ -5258,18 +5338,18 @@
         </p:nvSpPr>
         <p:spPr>
           <a:xfrm>
-            <a:off x="1005840" y="3246120"/>
-            <a:ext cx="4663440" cy="1508760"/>
+            <a:off x="1234440" y="3703320"/>
+            <a:ext cx="4389120" cy="1325880"/>
           </a:xfrm>
           <a:prstGeom prst="roundRect">
             <a:avLst/>
           </a:prstGeom>
           <a:solidFill>
-            <a:srgbClr val="F8FAFC"/>
+            <a:srgbClr val="FFF6E8"/>
           </a:solidFill>
           <a:ln w="13970">
             <a:solidFill>
-              <a:srgbClr val="0F2647"/>
+              <a:srgbClr val="E5892A"/>
             </a:solidFill>
           </a:ln>
         </p:spPr>
@@ -5292,7 +5372,7 @@
           <a:lstStyle/>
           <a:p>
             <a:pPr algn="ctr">
-              <a:defRPr sz="1700" b="1">
+              <a:defRPr sz="1600" b="1">
                 <a:solidFill>
                   <a:srgbClr val="232D37"/>
                 </a:solidFill>
@@ -5300,7 +5380,7 @@
               </a:defRPr>
             </a:pPr>
             <a:r>
-              <a:t>Eligible allocation pool</a:t>
+              <a:t>Blank-basis behavior</a:t>
             </a:r>
           </a:p>
           <a:p>
@@ -5316,39 +5396,7 @@
               </a:defRPr>
             </a:pPr>
             <a:r>
-              <a:t>Enabled + funded + Expenses-on + IRMAA-checked portfolios.</a:t>
-            </a:r>
-          </a:p>
-          <a:p>
-            <a:pPr>
-              <a:spcBef>
-                <a:spcPts val="300"/>
-              </a:spcBef>
-              <a:defRPr sz="1200">
-                <a:solidFill>
-                  <a:srgbClr val="232D37"/>
-                </a:solidFill>
-                <a:latin typeface="Aptos"/>
-              </a:defRPr>
-            </a:pPr>
-            <a:r>
-              <a:t>IDGT portfolios may participate.</a:t>
-            </a:r>
-          </a:p>
-          <a:p>
-            <a:pPr>
-              <a:spcBef>
-                <a:spcPts val="300"/>
-              </a:spcBef>
-              <a:defRPr sz="1200">
-                <a:solidFill>
-                  <a:srgbClr val="232D37"/>
-                </a:solidFill>
-                <a:latin typeface="Aptos"/>
-              </a:defRPr>
-            </a:pPr>
-            <a:r>
-              <a:t>Allocation is pro rata by start-of-year balance.</a:t>
+              <a:t>If Expenses is on but basisPct is blank, the model initializes basis = balance: no embedded gain today, but tracking remains active.</a:t>
             </a:r>
           </a:p>
         </p:txBody>
@@ -5361,14 +5409,14 @@
         </p:nvSpPr>
         <p:spPr>
           <a:xfrm>
-            <a:off x="1005840" y="3246120"/>
-            <a:ext cx="82296" cy="1508760"/>
+            <a:off x="1234440" y="3703320"/>
+            <a:ext cx="82296" cy="1325880"/>
           </a:xfrm>
           <a:prstGeom prst="rect">
             <a:avLst/>
           </a:prstGeom>
           <a:solidFill>
-            <a:srgbClr val="0F2647"/>
+            <a:srgbClr val="E5892A"/>
           </a:solidFill>
           <a:ln>
             <a:noFill/>
@@ -5404,8 +5452,8 @@
         </p:nvSpPr>
         <p:spPr>
           <a:xfrm>
-            <a:off x="6492240" y="3246120"/>
-            <a:ext cx="4663440" cy="1508760"/>
+            <a:off x="6537960" y="3703320"/>
+            <a:ext cx="4389120" cy="1325880"/>
           </a:xfrm>
           <a:prstGeom prst="roundRect">
             <a:avLst/>
@@ -5438,7 +5486,7 @@
           <a:lstStyle/>
           <a:p>
             <a:pPr algn="ctr">
-              <a:defRPr sz="1700" b="1">
+              <a:defRPr sz="1600" b="1">
                 <a:solidFill>
                   <a:srgbClr val="232D37"/>
                 </a:solidFill>
@@ -5446,7 +5494,7 @@
               </a:defRPr>
             </a:pPr>
             <a:r>
-              <a:t>Why the one-year lag?</a:t>
+              <a:t>Why percentage input?</a:t>
             </a:r>
           </a:p>
           <a:p>
@@ -5462,23 +5510,7 @@
               </a:defRPr>
             </a:pPr>
             <a:r>
-              <a:t>Current AGI can depend on LTCG; LTCG can depend on expenses; expenses can include IRMAA.</a:t>
-            </a:r>
-          </a:p>
-          <a:p>
-            <a:pPr>
-              <a:spcBef>
-                <a:spcPts val="300"/>
-              </a:spcBef>
-              <a:defRPr sz="1200">
-                <a:solidFill>
-                  <a:srgbClr val="232D37"/>
-                </a:solidFill>
-                <a:latin typeface="Aptos"/>
-              </a:defRPr>
-            </a:pPr>
-            <a:r>
-              <a:t>Prior-year AGI avoids circularity and mirrors IRMAA look-back behavior.</a:t>
+              <a:t>It communicates basis relative to the starting portfolio size and avoids presenting a dollar field that becomes context-dependent as balances change.</a:t>
             </a:r>
           </a:p>
         </p:txBody>
@@ -5491,8 +5523,8 @@
         </p:nvSpPr>
         <p:spPr>
           <a:xfrm>
-            <a:off x="6492240" y="3246120"/>
-            <a:ext cx="82296" cy="1508760"/>
+            <a:off x="6537960" y="3703320"/>
+            <a:ext cx="82296" cy="1325880"/>
           </a:xfrm>
           <a:prstGeom prst="rect">
             <a:avLst/>
@@ -5600,7 +5632,7 @@
               </a:defRPr>
             </a:pPr>
             <a:r>
-              <a:t>Retirement Income Planner • Architecture overview • IRMAA and Excel-export update</a:t>
+              <a:t>Retirement Income Planner • Architecture overview • Basis-percentage and formula-page update</a:t>
             </a:r>
           </a:p>
         </p:txBody>
@@ -5662,7 +5694,7 @@
               </a:defRPr>
             </a:pPr>
             <a:r>
-              <a:t>Portfolio expense waterfall</a:t>
+              <a:t>Backward-compatible state hydration</a:t>
             </a:r>
           </a:p>
         </p:txBody>
@@ -5676,7 +5708,7 @@
         <p:spPr>
           <a:xfrm>
             <a:off x="530352" y="786384"/>
-            <a:ext cx="10972800" cy="219456"/>
+            <a:ext cx="10972800" cy="228600"/>
           </a:xfrm>
           <a:prstGeom prst="rect">
             <a:avLst/>
@@ -5698,7 +5730,7 @@
               </a:defRPr>
             </a:pPr>
             <a:r>
-              <a:t>Expenses are paid by each portfolio’s own cash flows—never by wages, Social Security, pensions, rental income, or IRA withdrawals.</a:t>
+              <a:t>hydrateState() acts as the boundary between saved-plan versions and the current state contract.</a:t>
             </a:r>
           </a:p>
         </p:txBody>
@@ -5711,8 +5743,8 @@
         </p:nvSpPr>
         <p:spPr>
           <a:xfrm>
-            <a:off x="502920" y="1170432"/>
-            <a:ext cx="2148840" cy="1115568"/>
+            <a:off x="502920" y="1143000"/>
+            <a:ext cx="2286000" cy="4526280"/>
           </a:xfrm>
           <a:prstGeom prst="roundRect">
             <a:avLst/>
@@ -5745,7 +5777,7 @@
           <a:lstStyle/>
           <a:p>
             <a:pPr algn="ctr">
-              <a:defRPr sz="1600" b="1">
+              <a:defRPr sz="1700" b="1">
                 <a:solidFill>
                   <a:srgbClr val="232D37"/>
                 </a:solidFill>
@@ -5753,7 +5785,7 @@
               </a:defRPr>
             </a:pPr>
             <a:r>
-              <a:t>Portfolio expenses</a:t>
+              <a:t>Legacy plan</a:t>
             </a:r>
           </a:p>
           <a:p>
@@ -5761,15 +5793,15 @@
               <a:spcBef>
                 <a:spcPts val="300"/>
               </a:spcBef>
-              <a:defRPr sz="1100">
-                <a:solidFill>
-                  <a:srgbClr val="232D37"/>
-                </a:solidFill>
-                <a:latin typeface="Aptos"/>
-              </a:defRPr>
-            </a:pPr>
-            <a:r>
-              <a:t>Fee → tax drag → IRMAA → withdrawal</a:t>
+              <a:defRPr sz="1200">
+                <a:solidFill>
+                  <a:srgbClr val="232D37"/>
+                </a:solidFill>
+                <a:latin typeface="Aptos"/>
+              </a:defRPr>
+            </a:pPr>
+            <a:r>
+              <a:t>May contain basis in dollars</a:t>
             </a:r>
           </a:p>
           <a:p>
@@ -5777,15 +5809,31 @@
               <a:spcBef>
                 <a:spcPts val="300"/>
               </a:spcBef>
-              <a:defRPr sz="1100">
-                <a:solidFill>
-                  <a:srgbClr val="232D37"/>
-                </a:solidFill>
-                <a:latin typeface="Aptos"/>
-              </a:defRPr>
-            </a:pPr>
-            <a:r>
-              <a:t>Each capped by portfolio capacity</a:t>
+              <a:defRPr sz="1200">
+                <a:solidFill>
+                  <a:srgbClr val="232D37"/>
+                </a:solidFill>
+                <a:latin typeface="Aptos"/>
+              </a:defRPr>
+            </a:pPr>
+            <a:r>
+              <a:t>May contain ltcg / ltcgMode</a:t>
+            </a:r>
+          </a:p>
+          <a:p>
+            <a:pPr>
+              <a:spcBef>
+                <a:spcPts val="300"/>
+              </a:spcBef>
+              <a:defRPr sz="1200">
+                <a:solidFill>
+                  <a:srgbClr val="232D37"/>
+                </a:solidFill>
+                <a:latin typeface="Aptos"/>
+              </a:defRPr>
+            </a:pPr>
+            <a:r>
+              <a:t>May omit newer defaults</a:t>
             </a:r>
           </a:p>
         </p:txBody>
@@ -5798,8 +5846,8 @@
         </p:nvSpPr>
         <p:spPr>
           <a:xfrm>
-            <a:off x="502920" y="1170432"/>
-            <a:ext cx="82296" cy="1115568"/>
+            <a:off x="502920" y="1143000"/>
+            <a:ext cx="82296" cy="4526280"/>
           </a:xfrm>
           <a:prstGeom prst="rect">
             <a:avLst/>
@@ -5841,8 +5889,8 @@
         </p:nvSpPr>
         <p:spPr>
           <a:xfrm>
-            <a:off x="3063240" y="1170432"/>
-            <a:ext cx="2148840" cy="1115568"/>
+            <a:off x="3246120" y="1143000"/>
+            <a:ext cx="2286000" cy="4526280"/>
           </a:xfrm>
           <a:prstGeom prst="roundRect">
             <a:avLst/>
@@ -5875,7 +5923,7 @@
           <a:lstStyle/>
           <a:p>
             <a:pPr algn="ctr">
-              <a:defRPr sz="1600" b="1">
+              <a:defRPr sz="1700" b="1">
                 <a:solidFill>
                   <a:srgbClr val="232D37"/>
                 </a:solidFill>
@@ -5883,7 +5931,7 @@
               </a:defRPr>
             </a:pPr>
             <a:r>
-              <a:t>Own dividends</a:t>
+              <a:t>Hydration</a:t>
             </a:r>
           </a:p>
           <a:p>
@@ -5891,15 +5939,15 @@
               <a:spcBef>
                 <a:spcPts val="300"/>
               </a:spcBef>
-              <a:defRPr sz="1100">
-                <a:solidFill>
-                  <a:srgbClr val="232D37"/>
-                </a:solidFill>
-                <a:latin typeface="Aptos"/>
-              </a:defRPr>
-            </a:pPr>
-            <a:r>
-              <a:t>ODIV = balance × yield</a:t>
+              <a:defRPr sz="1200">
+                <a:solidFill>
+                  <a:srgbClr val="232D37"/>
+                </a:solidFill>
+                <a:latin typeface="Aptos"/>
+              </a:defRPr>
+            </a:pPr>
+            <a:r>
+              <a:t>Merge onto default state</a:t>
             </a:r>
           </a:p>
           <a:p>
@@ -5907,15 +5955,31 @@
               <a:spcBef>
                 <a:spcPts val="300"/>
               </a:spcBef>
-              <a:defRPr sz="1100">
-                <a:solidFill>
-                  <a:srgbClr val="232D37"/>
-                </a:solidFill>
-                <a:latin typeface="Aptos"/>
-              </a:defRPr>
-            </a:pPr>
-            <a:r>
-              <a:t>First source of payment</a:t>
+              <a:defRPr sz="1200">
+                <a:solidFill>
+                  <a:srgbClr val="232D37"/>
+                </a:solidFill>
+                <a:latin typeface="Aptos"/>
+              </a:defRPr>
+            </a:pPr>
+            <a:r>
+              <a:t>Preserve array entries</a:t>
+            </a:r>
+          </a:p>
+          <a:p>
+            <a:pPr>
+              <a:spcBef>
+                <a:spcPts val="300"/>
+              </a:spcBef>
+              <a:defRPr sz="1200">
+                <a:solidFill>
+                  <a:srgbClr val="232D37"/>
+                </a:solidFill>
+                <a:latin typeface="Aptos"/>
+              </a:defRPr>
+            </a:pPr>
+            <a:r>
+              <a:t>Drop unknown or stale fields</a:t>
             </a:r>
           </a:p>
         </p:txBody>
@@ -5928,8 +5992,8 @@
         </p:nvSpPr>
         <p:spPr>
           <a:xfrm>
-            <a:off x="3063240" y="1170432"/>
-            <a:ext cx="82296" cy="1115568"/>
+            <a:off x="3246120" y="1143000"/>
+            <a:ext cx="82296" cy="4526280"/>
           </a:xfrm>
           <a:prstGeom prst="rect">
             <a:avLst/>
@@ -5971,8 +6035,8 @@
         </p:nvSpPr>
         <p:spPr>
           <a:xfrm>
-            <a:off x="5623560" y="1170432"/>
-            <a:ext cx="2148840" cy="1115568"/>
+            <a:off x="5989320" y="1143000"/>
+            <a:ext cx="2286000" cy="4526280"/>
           </a:xfrm>
           <a:prstGeom prst="roundRect">
             <a:avLst/>
@@ -6005,7 +6069,7 @@
           <a:lstStyle/>
           <a:p>
             <a:pPr algn="ctr">
-              <a:defRPr sz="1600" b="1">
+              <a:defRPr sz="1700" b="1">
                 <a:solidFill>
                   <a:srgbClr val="232D37"/>
                 </a:solidFill>
@@ -6013,7 +6077,7 @@
               </a:defRPr>
             </a:pPr>
             <a:r>
-              <a:t>Shortfall sale</a:t>
+              <a:t>Migration</a:t>
             </a:r>
           </a:p>
           <a:p>
@@ -6021,15 +6085,15 @@
               <a:spcBef>
                 <a:spcPts val="300"/>
               </a:spcBef>
-              <a:defRPr sz="1100">
-                <a:solidFill>
-                  <a:srgbClr val="232D37"/>
-                </a:solidFill>
-                <a:latin typeface="Aptos"/>
-              </a:defRPr>
-            </a:pPr>
-            <a:r>
-              <a:t>Only if expenses exceed dividends</a:t>
+              <a:defRPr sz="1200">
+                <a:solidFill>
+                  <a:srgbClr val="232D37"/>
+                </a:solidFill>
+                <a:latin typeface="Aptos"/>
+              </a:defRPr>
+            </a:pPr>
+            <a:r>
+              <a:t>Dollar basis → basisPct</a:t>
             </a:r>
           </a:p>
           <a:p>
@@ -6037,15 +6101,47 @@
               <a:spcBef>
                 <a:spcPts val="300"/>
               </a:spcBef>
-              <a:defRPr sz="1100">
-                <a:solidFill>
-                  <a:srgbClr val="232D37"/>
-                </a:solidFill>
-                <a:latin typeface="Aptos"/>
-              </a:defRPr>
-            </a:pPr>
-            <a:r>
-              <a:t>LTCG = shortfall × gain fraction</a:t>
+              <a:defRPr sz="1200">
+                <a:solidFill>
+                  <a:srgbClr val="232D37"/>
+                </a:solidFill>
+                <a:latin typeface="Aptos"/>
+              </a:defRPr>
+            </a:pPr>
+            <a:r>
+              <a:t>Blank remains null</a:t>
+            </a:r>
+          </a:p>
+          <a:p>
+            <a:pPr>
+              <a:spcBef>
+                <a:spcPts val="300"/>
+              </a:spcBef>
+              <a:defRPr sz="1200">
+                <a:solidFill>
+                  <a:srgbClr val="232D37"/>
+                </a:solidFill>
+                <a:latin typeface="Aptos"/>
+              </a:defRPr>
+            </a:pPr>
+            <a:r>
+              <a:t>Clamp valid percentage range</a:t>
+            </a:r>
+          </a:p>
+          <a:p>
+            <a:pPr>
+              <a:spcBef>
+                <a:spcPts val="300"/>
+              </a:spcBef>
+              <a:defRPr sz="1200">
+                <a:solidFill>
+                  <a:srgbClr val="232D37"/>
+                </a:solidFill>
+                <a:latin typeface="Aptos"/>
+              </a:defRPr>
+            </a:pPr>
+            <a:r>
+              <a:t>Remove retired LTCG inputs</a:t>
             </a:r>
           </a:p>
         </p:txBody>
@@ -6058,8 +6154,8 @@
         </p:nvSpPr>
         <p:spPr>
           <a:xfrm>
-            <a:off x="5623560" y="1170432"/>
-            <a:ext cx="82296" cy="1115568"/>
+            <a:off x="5989320" y="1143000"/>
+            <a:ext cx="82296" cy="4526280"/>
           </a:xfrm>
           <a:prstGeom prst="rect">
             <a:avLst/>
@@ -6101,8 +6197,8 @@
         </p:nvSpPr>
         <p:spPr>
           <a:xfrm>
-            <a:off x="8183879" y="1170432"/>
-            <a:ext cx="3474720" cy="1115568"/>
+            <a:off x="8732520" y="1143000"/>
+            <a:ext cx="2697480" cy="4526280"/>
           </a:xfrm>
           <a:prstGeom prst="roundRect">
             <a:avLst/>
@@ -6135,7 +6231,7 @@
           <a:lstStyle/>
           <a:p>
             <a:pPr algn="ctr">
-              <a:defRPr sz="1600" b="1">
+              <a:defRPr sz="1700" b="1">
                 <a:solidFill>
                   <a:srgbClr val="232D37"/>
                 </a:solidFill>
@@ -6143,7 +6239,7 @@
               </a:defRPr>
             </a:pPr>
             <a:r>
-              <a:t>Roll forward</a:t>
+              <a:t>Current plan</a:t>
             </a:r>
           </a:p>
           <a:p>
@@ -6151,15 +6247,15 @@
               <a:spcBef>
                 <a:spcPts val="300"/>
               </a:spcBef>
-              <a:defRPr sz="1100">
-                <a:solidFill>
-                  <a:srgbClr val="232D37"/>
-                </a:solidFill>
-                <a:latin typeface="Aptos"/>
-              </a:defRPr>
-            </a:pPr>
-            <a:r>
-              <a:t>balance = growth-adjusted balance − actual expenses</a:t>
+              <a:defRPr sz="1200">
+                <a:solidFill>
+                  <a:srgbClr val="232D37"/>
+                </a:solidFill>
+                <a:latin typeface="Aptos"/>
+              </a:defRPr>
+            </a:pPr>
+            <a:r>
+              <a:t>Canonical basisPct input</a:t>
             </a:r>
           </a:p>
           <a:p>
@@ -6167,15 +6263,31 @@
               <a:spcBef>
                 <a:spcPts val="300"/>
               </a:spcBef>
-              <a:defRPr sz="1100">
-                <a:solidFill>
-                  <a:srgbClr val="232D37"/>
-                </a:solidFill>
-                <a:latin typeface="Aptos"/>
-              </a:defRPr>
-            </a:pPr>
-            <a:r>
-              <a:t>Basis follows sales, reinvestment, inflation</a:t>
+              <a:defRPr sz="1200">
+                <a:solidFill>
+                  <a:srgbClr val="232D37"/>
+                </a:solidFill>
+                <a:latin typeface="Aptos"/>
+              </a:defRPr>
+            </a:pPr>
+            <a:r>
+              <a:t>Default hidden states applied on load/reset</a:t>
+            </a:r>
+          </a:p>
+          <a:p>
+            <a:pPr>
+              <a:spcBef>
+                <a:spcPts val="300"/>
+              </a:spcBef>
+              <a:defRPr sz="1200">
+                <a:solidFill>
+                  <a:srgbClr val="232D37"/>
+                </a:solidFill>
+                <a:latin typeface="Aptos"/>
+              </a:defRPr>
+            </a:pPr>
+            <a:r>
+              <a:t>Ready for recompute and rendering</a:t>
             </a:r>
           </a:p>
         </p:txBody>
@@ -6188,8 +6300,8 @@
         </p:nvSpPr>
         <p:spPr>
           <a:xfrm>
-            <a:off x="8183879" y="1170432"/>
-            <a:ext cx="82296" cy="1115568"/>
+            <a:off x="8732520" y="1143000"/>
+            <a:ext cx="82296" cy="4526280"/>
           </a:xfrm>
           <a:prstGeom prst="rect">
             <a:avLst/>
@@ -6231,8 +6343,8 @@
         </p:nvCxnSpPr>
         <p:spPr>
           <a:xfrm>
-            <a:off x="2697480" y="1728216"/>
-            <a:ext cx="292608" cy="0"/>
+            <a:off x="2834640" y="3383280"/>
+            <a:ext cx="274320" cy="0"/>
           </a:xfrm>
           <a:prstGeom prst="line">
             <a:avLst/>
@@ -6266,8 +6378,8 @@
         </p:nvCxnSpPr>
         <p:spPr>
           <a:xfrm>
-            <a:off x="5257800" y="1728216"/>
-            <a:ext cx="292608" cy="0"/>
+            <a:off x="5577840" y="3383280"/>
+            <a:ext cx="274319" cy="0"/>
           </a:xfrm>
           <a:prstGeom prst="line">
             <a:avLst/>
@@ -6301,8 +6413,8 @@
         </p:nvCxnSpPr>
         <p:spPr>
           <a:xfrm>
-            <a:off x="7818120" y="1728216"/>
-            <a:ext cx="292608" cy="0"/>
+            <a:off x="8321040" y="3383280"/>
+            <a:ext cx="274320" cy="0"/>
           </a:xfrm>
           <a:prstGeom prst="line">
             <a:avLst/>
@@ -6330,87 +6442,36 @@
       </p:cxnSp>
       <p:sp>
         <p:nvSpPr>
-          <p:cNvPr id="15" name="Rounded Rectangle 14"/>
-          <p:cNvSpPr/>
-          <p:nvPr/>
-        </p:nvSpPr>
-        <p:spPr>
-          <a:xfrm>
-            <a:off x="960120" y="3154680"/>
-            <a:ext cx="4937760" cy="1417320"/>
-          </a:xfrm>
-          <a:prstGeom prst="roundRect">
-            <a:avLst/>
-          </a:prstGeom>
-          <a:solidFill>
-            <a:srgbClr val="F8FAFC"/>
-          </a:solidFill>
-          <a:ln w="13970">
-            <a:solidFill>
-              <a:srgbClr val="168F8D"/>
-            </a:solidFill>
-          </a:ln>
-        </p:spPr>
-        <p:style>
-          <a:lnRef idx="1">
-            <a:schemeClr val="accent1"/>
-          </a:lnRef>
-          <a:fillRef idx="3">
-            <a:schemeClr val="accent1"/>
-          </a:fillRef>
-          <a:effectRef idx="2">
-            <a:schemeClr val="accent1"/>
-          </a:effectRef>
-          <a:fontRef idx="minor">
-            <a:schemeClr val="lt1"/>
-          </a:fontRef>
-        </p:style>
-        <p:txBody>
-          <a:bodyPr rtlCol="0" anchor="ctr" lIns="182880" rIns="100584" tIns="91440"/>
+          <p:cNvPr id="15" name="TextBox 14"/>
+          <p:cNvSpPr txBox="1"/>
+          <p:nvPr/>
+        </p:nvSpPr>
+        <p:spPr>
+          <a:xfrm>
+            <a:off x="731520" y="5925312"/>
+            <a:ext cx="10698480" cy="228600"/>
+          </a:xfrm>
+          <a:prstGeom prst="rect">
+            <a:avLst/>
+          </a:prstGeom>
+          <a:noFill/>
+        </p:spPr>
+        <p:txBody>
+          <a:bodyPr wrap="none" anchor="ctr">
+            <a:spAutoFit/>
+          </a:bodyPr>
           <a:lstStyle/>
           <a:p>
             <a:pPr algn="ctr">
-              <a:defRPr sz="1700" b="1">
-                <a:solidFill>
-                  <a:srgbClr val="232D37"/>
-                </a:solidFill>
-                <a:latin typeface="Aptos Display"/>
-              </a:defRPr>
-            </a:pPr>
-            <a:r>
-              <a:t>Tax-drag estimation</a:t>
-            </a:r>
-          </a:p>
-          <a:p>
-            <a:pPr>
-              <a:spcBef>
-                <a:spcPts val="300"/>
-              </a:spcBef>
-              <a:defRPr sz="1200">
-                <a:solidFill>
-                  <a:srgbClr val="232D37"/>
-                </a:solidFill>
-                <a:latin typeface="Aptos"/>
-              </a:defRPr>
-            </a:pPr>
-            <a:r>
-              <a:t>This year’s tax drag uses prior-year Total Tax for the LTCG estimate.</a:t>
-            </a:r>
-          </a:p>
-          <a:p>
-            <a:pPr>
-              <a:spcBef>
-                <a:spcPts val="300"/>
-              </a:spcBef>
-              <a:defRPr sz="1200">
-                <a:solidFill>
-                  <a:srgbClr val="232D37"/>
-                </a:solidFill>
-                <a:latin typeface="Aptos"/>
-              </a:defRPr>
-            </a:pPr>
-            <a:r>
-              <a:t>The actual roll-forward uses current-year Total Tax, so taxed LTCG and removed basis can differ slightly.</a:t>
+              <a:defRPr sz="1200" b="1">
+                <a:solidFill>
+                  <a:srgbClr val="0F2647"/>
+                </a:solidFill>
+                <a:latin typeface="Aptos"/>
+              </a:defRPr>
+            </a:pPr>
+            <a:r>
+              <a:t>Compatibility rule: state.js alone owns canonical defaults and normalizes old save formats before any computation runs.</a:t>
             </a:r>
           </a:p>
         </p:txBody>
@@ -6418,179 +6479,6 @@
       <p:sp>
         <p:nvSpPr>
           <p:cNvPr id="16" name="Rectangle 15"/>
-          <p:cNvSpPr/>
-          <p:nvPr/>
-        </p:nvSpPr>
-        <p:spPr>
-          <a:xfrm>
-            <a:off x="960120" y="3154680"/>
-            <a:ext cx="82296" cy="1417320"/>
-          </a:xfrm>
-          <a:prstGeom prst="rect">
-            <a:avLst/>
-          </a:prstGeom>
-          <a:solidFill>
-            <a:srgbClr val="168F8D"/>
-          </a:solidFill>
-          <a:ln>
-            <a:noFill/>
-          </a:ln>
-        </p:spPr>
-        <p:style>
-          <a:lnRef idx="1">
-            <a:schemeClr val="accent1"/>
-          </a:lnRef>
-          <a:fillRef idx="3">
-            <a:schemeClr val="accent1"/>
-          </a:fillRef>
-          <a:effectRef idx="2">
-            <a:schemeClr val="accent1"/>
-          </a:effectRef>
-          <a:fontRef idx="minor">
-            <a:schemeClr val="lt1"/>
-          </a:fontRef>
-        </p:style>
-        <p:txBody>
-          <a:bodyPr rtlCol="0" anchor="ctr"/>
-          <a:lstStyle/>
-          <a:p>
-            <a:pPr algn="ctr"/>
-          </a:p>
-        </p:txBody>
-      </p:sp>
-      <p:sp>
-        <p:nvSpPr>
-          <p:cNvPr id="17" name="Rounded Rectangle 16"/>
-          <p:cNvSpPr/>
-          <p:nvPr/>
-        </p:nvSpPr>
-        <p:spPr>
-          <a:xfrm>
-            <a:off x="6400800" y="3154680"/>
-            <a:ext cx="4800600" cy="1417320"/>
-          </a:xfrm>
-          <a:prstGeom prst="roundRect">
-            <a:avLst/>
-          </a:prstGeom>
-          <a:solidFill>
-            <a:srgbClr val="F8FAFC"/>
-          </a:solidFill>
-          <a:ln w="13970">
-            <a:solidFill>
-              <a:srgbClr val="0F2647"/>
-            </a:solidFill>
-          </a:ln>
-        </p:spPr>
-        <p:style>
-          <a:lnRef idx="1">
-            <a:schemeClr val="accent1"/>
-          </a:lnRef>
-          <a:fillRef idx="3">
-            <a:schemeClr val="accent1"/>
-          </a:fillRef>
-          <a:effectRef idx="2">
-            <a:schemeClr val="accent1"/>
-          </a:effectRef>
-          <a:fontRef idx="minor">
-            <a:schemeClr val="lt1"/>
-          </a:fontRef>
-        </p:style>
-        <p:txBody>
-          <a:bodyPr rtlCol="0" anchor="ctr" lIns="182880" rIns="100584" tIns="91440"/>
-          <a:lstStyle/>
-          <a:p>
-            <a:pPr algn="ctr">
-              <a:defRPr sz="1700" b="1">
-                <a:solidFill>
-                  <a:srgbClr val="232D37"/>
-                </a:solidFill>
-                <a:latin typeface="Aptos Display"/>
-              </a:defRPr>
-            </a:pPr>
-            <a:r>
-              <a:t>Reconciliation</a:t>
-            </a:r>
-          </a:p>
-          <a:p>
-            <a:pPr>
-              <a:spcBef>
-                <a:spcPts val="300"/>
-              </a:spcBef>
-              <a:defRPr sz="1200">
-                <a:solidFill>
-                  <a:srgbClr val="232D37"/>
-                </a:solidFill>
-                <a:latin typeface="Aptos"/>
-              </a:defRPr>
-            </a:pPr>
-            <a:r>
-              <a:t>tax drag + fee drag + IRMAA drag + living cost = dividends used + shares sold.</a:t>
-            </a:r>
-          </a:p>
-          <a:p>
-            <a:pPr>
-              <a:spcBef>
-                <a:spcPts val="300"/>
-              </a:spcBef>
-              <a:defRPr sz="1200">
-                <a:solidFill>
-                  <a:srgbClr val="232D37"/>
-                </a:solidFill>
-                <a:latin typeface="Aptos"/>
-              </a:defRPr>
-            </a:pPr>
-            <a:r>
-              <a:t>This equality is carried in each portfolio row.</a:t>
-            </a:r>
-          </a:p>
-        </p:txBody>
-      </p:sp>
-      <p:sp>
-        <p:nvSpPr>
-          <p:cNvPr id="18" name="Rectangle 17"/>
-          <p:cNvSpPr/>
-          <p:nvPr/>
-        </p:nvSpPr>
-        <p:spPr>
-          <a:xfrm>
-            <a:off x="6400800" y="3154680"/>
-            <a:ext cx="82296" cy="1417320"/>
-          </a:xfrm>
-          <a:prstGeom prst="rect">
-            <a:avLst/>
-          </a:prstGeom>
-          <a:solidFill>
-            <a:srgbClr val="0F2647"/>
-          </a:solidFill>
-          <a:ln>
-            <a:noFill/>
-          </a:ln>
-        </p:spPr>
-        <p:style>
-          <a:lnRef idx="1">
-            <a:schemeClr val="accent1"/>
-          </a:lnRef>
-          <a:fillRef idx="3">
-            <a:schemeClr val="accent1"/>
-          </a:fillRef>
-          <a:effectRef idx="2">
-            <a:schemeClr val="accent1"/>
-          </a:effectRef>
-          <a:fontRef idx="minor">
-            <a:schemeClr val="lt1"/>
-          </a:fontRef>
-        </p:style>
-        <p:txBody>
-          <a:bodyPr rtlCol="0" anchor="ctr"/>
-          <a:lstStyle/>
-          <a:p>
-            <a:pPr algn="ctr"/>
-          </a:p>
-        </p:txBody>
-      </p:sp>
-      <p:sp>
-        <p:nvSpPr>
-          <p:cNvPr id="19" name="Rectangle 18"/>
           <p:cNvSpPr/>
           <p:nvPr/>
         </p:nvSpPr>
@@ -6633,7 +6521,7 @@
       </p:sp>
       <p:sp>
         <p:nvSpPr>
-          <p:cNvPr id="20" name="TextBox 19"/>
+          <p:cNvPr id="17" name="TextBox 16"/>
           <p:cNvSpPr txBox="1"/>
           <p:nvPr/>
         </p:nvSpPr>
@@ -6662,7 +6550,7 @@
               </a:defRPr>
             </a:pPr>
             <a:r>
-              <a:t>Retirement Income Planner • Architecture overview • IRMAA and Excel-export update</a:t>
+              <a:t>Retirement Income Planner • Architecture overview • Basis-percentage and formula-page update</a:t>
             </a:r>
           </a:p>
         </p:txBody>
@@ -6724,7 +6612,7 @@
               </a:defRPr>
             </a:pPr>
             <a:r>
-              <a:t>Projection contract: new IRMAA fields</a:t>
+              <a:t>Cost basis remains inside the annual projection</a:t>
             </a:r>
           </a:p>
         </p:txBody>
@@ -6738,7 +6626,7 @@
         <p:spPr>
           <a:xfrm>
             <a:off x="530352" y="786384"/>
-            <a:ext cx="10972800" cy="219456"/>
+            <a:ext cx="10972800" cy="228600"/>
           </a:xfrm>
           <a:prstGeom prst="rect">
             <a:avLst/>
@@ -6760,7 +6648,7 @@
               </a:defRPr>
             </a:pPr>
             <a:r>
-              <a:t>The annual projection continues to be the single source of truth for charts, tooltips, and exports.</a:t>
+              <a:t>The input unit changed; the calculation contract remains an annual, today’s-dollar average-cost model.</a:t>
             </a:r>
           </a:p>
         </p:txBody>
@@ -6773,14 +6661,14 @@
         </p:nvSpPr>
         <p:spPr>
           <a:xfrm>
-            <a:off x="594360" y="1234440"/>
-            <a:ext cx="3429000" cy="4434840"/>
+            <a:off x="320040" y="1298448"/>
+            <a:ext cx="2029968" cy="1965960"/>
           </a:xfrm>
           <a:prstGeom prst="roundRect">
             <a:avLst/>
           </a:prstGeom>
           <a:solidFill>
-            <a:srgbClr val="E9F4FF"/>
+            <a:srgbClr val="FAFBFD"/>
           </a:solidFill>
           <a:ln w="13970">
             <a:solidFill>
@@ -6807,7 +6695,7 @@
           <a:lstStyle/>
           <a:p>
             <a:pPr algn="ctr">
-              <a:defRPr sz="1800" b="1">
+              <a:defRPr sz="1500" b="1">
                 <a:solidFill>
                   <a:srgbClr val="232D37"/>
                 </a:solidFill>
@@ -6815,7 +6703,7 @@
               </a:defRPr>
             </a:pPr>
             <a:r>
-              <a:t>State and input</a:t>
+              <a:t>Start basis</a:t>
             </a:r>
           </a:p>
           <a:p>
@@ -6823,79 +6711,15 @@
               <a:spcBef>
                 <a:spcPts val="300"/>
               </a:spcBef>
-              <a:defRPr sz="1300">
-                <a:solidFill>
-                  <a:srgbClr val="232D37"/>
-                </a:solidFill>
-                <a:latin typeface="Aptos"/>
-              </a:defRPr>
-            </a:pPr>
-            <a:r>
-              <a:t>BrokeragePortfolio.irmaa</a:t>
-            </a:r>
-          </a:p>
-          <a:p>
-            <a:pPr>
-              <a:spcBef>
-                <a:spcPts val="300"/>
-              </a:spcBef>
-              <a:defRPr sz="1300">
-                <a:solidFill>
-                  <a:srgbClr val="232D37"/>
-                </a:solidFill>
-                <a:latin typeface="Aptos"/>
-              </a:defRPr>
-            </a:pPr>
-            <a:r>
-              <a:t>Checkbox appears inside the Expenses panel</a:t>
-            </a:r>
-          </a:p>
-          <a:p>
-            <a:pPr>
-              <a:spcBef>
-                <a:spcPts val="300"/>
-              </a:spcBef>
-              <a:defRPr sz="1300">
-                <a:solidFill>
-                  <a:srgbClr val="232D37"/>
-                </a:solidFill>
-                <a:latin typeface="Aptos"/>
-              </a:defRPr>
-            </a:pPr>
-            <a:r>
-              <a:t>IRMAA is inactive unless Expenses is enabled</a:t>
-            </a:r>
-          </a:p>
-          <a:p>
-            <a:pPr>
-              <a:spcBef>
-                <a:spcPts val="300"/>
-              </a:spcBef>
-              <a:defRPr sz="1300">
-                <a:solidFill>
-                  <a:srgbClr val="232D37"/>
-                </a:solidFill>
-                <a:latin typeface="Aptos"/>
-              </a:defRPr>
-            </a:pPr>
-            <a:r>
-              <a:t>Age range moved directly below brokerage name</a:t>
-            </a:r>
-          </a:p>
-          <a:p>
-            <a:pPr>
-              <a:spcBef>
-                <a:spcPts val="300"/>
-              </a:spcBef>
-              <a:defRPr sz="1300">
-                <a:solidFill>
-                  <a:srgbClr val="232D37"/>
-                </a:solidFill>
-                <a:latin typeface="Aptos"/>
-              </a:defRPr>
-            </a:pPr>
-            <a:r>
-              <a:t>Start balance label clarified</a:t>
+              <a:defRPr sz="1100">
+                <a:solidFill>
+                  <a:srgbClr val="232D37"/>
+                </a:solidFill>
+                <a:latin typeface="Aptos"/>
+              </a:defRPr>
+            </a:pPr>
+            <a:r>
+              <a:t>basisPct × balance</a:t>
             </a:r>
           </a:p>
         </p:txBody>
@@ -6908,8 +6732,8 @@
         </p:nvSpPr>
         <p:spPr>
           <a:xfrm>
-            <a:off x="594360" y="1234440"/>
-            <a:ext cx="82296" cy="4434840"/>
+            <a:off x="320040" y="1298448"/>
+            <a:ext cx="82296" cy="1965960"/>
           </a:xfrm>
           <a:prstGeom prst="rect">
             <a:avLst/>
@@ -6943,22 +6767,355 @@
           </a:p>
         </p:txBody>
       </p:sp>
-      <p:sp>
-        <p:nvSpPr>
-          <p:cNvPr id="6" name="Rounded Rectangle 5"/>
+      <p:cxnSp>
+        <p:nvCxnSpPr>
+          <p:cNvPr id="6" name="Connector 5"/>
+          <p:cNvCxnSpPr/>
+          <p:nvPr/>
+        </p:nvCxnSpPr>
+        <p:spPr>
+          <a:xfrm>
+            <a:off x="2377440" y="2286000"/>
+            <a:ext cx="228600" cy="0"/>
+          </a:xfrm>
+          <a:prstGeom prst="line">
+            <a:avLst/>
+          </a:prstGeom>
+          <a:ln w="22860">
+            <a:solidFill>
+              <a:srgbClr val="266EB2"/>
+            </a:solidFill>
+          </a:ln>
+        </p:spPr>
+        <p:style>
+          <a:lnRef idx="2">
+            <a:schemeClr val="accent1"/>
+          </a:lnRef>
+          <a:fillRef idx="0">
+            <a:schemeClr val="accent1"/>
+          </a:fillRef>
+          <a:effectRef idx="1">
+            <a:schemeClr val="accent1"/>
+          </a:effectRef>
+          <a:fontRef idx="minor">
+            <a:schemeClr val="tx1"/>
+          </a:fontRef>
+        </p:style>
+      </p:cxnSp>
+      <p:sp>
+        <p:nvSpPr>
+          <p:cNvPr id="7" name="Rounded Rectangle 6"/>
           <p:cNvSpPr/>
           <p:nvPr/>
         </p:nvSpPr>
         <p:spPr>
           <a:xfrm>
-            <a:off x="4389120" y="1234440"/>
-            <a:ext cx="3429000" cy="4434840"/>
+            <a:off x="2679192" y="1298448"/>
+            <a:ext cx="2029968" cy="1965960"/>
           </a:xfrm>
           <a:prstGeom prst="roundRect">
             <a:avLst/>
           </a:prstGeom>
           <a:solidFill>
-            <a:srgbClr val="EAF9F4"/>
+            <a:srgbClr val="FAFBFD"/>
+          </a:solidFill>
+          <a:ln w="13970">
+            <a:solidFill>
+              <a:srgbClr val="168F8D"/>
+            </a:solidFill>
+          </a:ln>
+        </p:spPr>
+        <p:style>
+          <a:lnRef idx="1">
+            <a:schemeClr val="accent1"/>
+          </a:lnRef>
+          <a:fillRef idx="3">
+            <a:schemeClr val="accent1"/>
+          </a:fillRef>
+          <a:effectRef idx="2">
+            <a:schemeClr val="accent1"/>
+          </a:effectRef>
+          <a:fontRef idx="minor">
+            <a:schemeClr val="lt1"/>
+          </a:fontRef>
+        </p:style>
+        <p:txBody>
+          <a:bodyPr rtlCol="0" anchor="ctr" lIns="182880" rIns="100584" tIns="91440"/>
+          <a:lstStyle/>
+          <a:p>
+            <a:pPr algn="ctr">
+              <a:defRPr sz="1500" b="1">
+                <a:solidFill>
+                  <a:srgbClr val="232D37"/>
+                </a:solidFill>
+                <a:latin typeface="Aptos Display"/>
+              </a:defRPr>
+            </a:pPr>
+            <a:r>
+              <a:t>Gain fraction</a:t>
+            </a:r>
+          </a:p>
+          <a:p>
+            <a:pPr>
+              <a:spcBef>
+                <a:spcPts val="300"/>
+              </a:spcBef>
+              <a:defRPr sz="1100">
+                <a:solidFill>
+                  <a:srgbClr val="232D37"/>
+                </a:solidFill>
+                <a:latin typeface="Aptos"/>
+              </a:defRPr>
+            </a:pPr>
+            <a:r>
+              <a:t>(balance − basis) / balance</a:t>
+            </a:r>
+          </a:p>
+        </p:txBody>
+      </p:sp>
+      <p:sp>
+        <p:nvSpPr>
+          <p:cNvPr id="8" name="Rectangle 7"/>
+          <p:cNvSpPr/>
+          <p:nvPr/>
+        </p:nvSpPr>
+        <p:spPr>
+          <a:xfrm>
+            <a:off x="2679192" y="1298448"/>
+            <a:ext cx="82296" cy="1965960"/>
+          </a:xfrm>
+          <a:prstGeom prst="rect">
+            <a:avLst/>
+          </a:prstGeom>
+          <a:solidFill>
+            <a:srgbClr val="168F8D"/>
+          </a:solidFill>
+          <a:ln>
+            <a:noFill/>
+          </a:ln>
+        </p:spPr>
+        <p:style>
+          <a:lnRef idx="1">
+            <a:schemeClr val="accent1"/>
+          </a:lnRef>
+          <a:fillRef idx="3">
+            <a:schemeClr val="accent1"/>
+          </a:fillRef>
+          <a:effectRef idx="2">
+            <a:schemeClr val="accent1"/>
+          </a:effectRef>
+          <a:fontRef idx="minor">
+            <a:schemeClr val="lt1"/>
+          </a:fontRef>
+        </p:style>
+        <p:txBody>
+          <a:bodyPr rtlCol="0" anchor="ctr"/>
+          <a:lstStyle/>
+          <a:p>
+            <a:pPr algn="ctr"/>
+          </a:p>
+        </p:txBody>
+      </p:sp>
+      <p:cxnSp>
+        <p:nvCxnSpPr>
+          <p:cNvPr id="9" name="Connector 8"/>
+          <p:cNvCxnSpPr/>
+          <p:nvPr/>
+        </p:nvCxnSpPr>
+        <p:spPr>
+          <a:xfrm>
+            <a:off x="4736592" y="2286000"/>
+            <a:ext cx="228600" cy="0"/>
+          </a:xfrm>
+          <a:prstGeom prst="line">
+            <a:avLst/>
+          </a:prstGeom>
+          <a:ln w="22860">
+            <a:solidFill>
+              <a:srgbClr val="168F8D"/>
+            </a:solidFill>
+          </a:ln>
+        </p:spPr>
+        <p:style>
+          <a:lnRef idx="2">
+            <a:schemeClr val="accent1"/>
+          </a:lnRef>
+          <a:fillRef idx="0">
+            <a:schemeClr val="accent1"/>
+          </a:fillRef>
+          <a:effectRef idx="1">
+            <a:schemeClr val="accent1"/>
+          </a:effectRef>
+          <a:fontRef idx="minor">
+            <a:schemeClr val="tx1"/>
+          </a:fontRef>
+        </p:style>
+      </p:cxnSp>
+      <p:sp>
+        <p:nvSpPr>
+          <p:cNvPr id="10" name="Rounded Rectangle 9"/>
+          <p:cNvSpPr/>
+          <p:nvPr/>
+        </p:nvSpPr>
+        <p:spPr>
+          <a:xfrm>
+            <a:off x="5038344" y="1298448"/>
+            <a:ext cx="2029968" cy="1965960"/>
+          </a:xfrm>
+          <a:prstGeom prst="roundRect">
+            <a:avLst/>
+          </a:prstGeom>
+          <a:solidFill>
+            <a:srgbClr val="FAFBFD"/>
+          </a:solidFill>
+          <a:ln w="13970">
+            <a:solidFill>
+              <a:srgbClr val="E5892A"/>
+            </a:solidFill>
+          </a:ln>
+        </p:spPr>
+        <p:style>
+          <a:lnRef idx="1">
+            <a:schemeClr val="accent1"/>
+          </a:lnRef>
+          <a:fillRef idx="3">
+            <a:schemeClr val="accent1"/>
+          </a:fillRef>
+          <a:effectRef idx="2">
+            <a:schemeClr val="accent1"/>
+          </a:effectRef>
+          <a:fontRef idx="minor">
+            <a:schemeClr val="lt1"/>
+          </a:fontRef>
+        </p:style>
+        <p:txBody>
+          <a:bodyPr rtlCol="0" anchor="ctr" lIns="182880" rIns="100584" tIns="91440"/>
+          <a:lstStyle/>
+          <a:p>
+            <a:pPr algn="ctr">
+              <a:defRPr sz="1500" b="1">
+                <a:solidFill>
+                  <a:srgbClr val="232D37"/>
+                </a:solidFill>
+                <a:latin typeface="Aptos Display"/>
+              </a:defRPr>
+            </a:pPr>
+            <a:r>
+              <a:t>Expenses</a:t>
+            </a:r>
+          </a:p>
+          <a:p>
+            <a:pPr>
+              <a:spcBef>
+                <a:spcPts val="300"/>
+              </a:spcBef>
+              <a:defRPr sz="1100">
+                <a:solidFill>
+                  <a:srgbClr val="232D37"/>
+                </a:solidFill>
+                <a:latin typeface="Aptos"/>
+              </a:defRPr>
+            </a:pPr>
+            <a:r>
+              <a:t>Fee + tax drag + IRMAA + withdrawal</a:t>
+            </a:r>
+          </a:p>
+        </p:txBody>
+      </p:sp>
+      <p:sp>
+        <p:nvSpPr>
+          <p:cNvPr id="11" name="Rectangle 10"/>
+          <p:cNvSpPr/>
+          <p:nvPr/>
+        </p:nvSpPr>
+        <p:spPr>
+          <a:xfrm>
+            <a:off x="5038344" y="1298448"/>
+            <a:ext cx="82296" cy="1965960"/>
+          </a:xfrm>
+          <a:prstGeom prst="rect">
+            <a:avLst/>
+          </a:prstGeom>
+          <a:solidFill>
+            <a:srgbClr val="E5892A"/>
+          </a:solidFill>
+          <a:ln>
+            <a:noFill/>
+          </a:ln>
+        </p:spPr>
+        <p:style>
+          <a:lnRef idx="1">
+            <a:schemeClr val="accent1"/>
+          </a:lnRef>
+          <a:fillRef idx="3">
+            <a:schemeClr val="accent1"/>
+          </a:fillRef>
+          <a:effectRef idx="2">
+            <a:schemeClr val="accent1"/>
+          </a:effectRef>
+          <a:fontRef idx="minor">
+            <a:schemeClr val="lt1"/>
+          </a:fontRef>
+        </p:style>
+        <p:txBody>
+          <a:bodyPr rtlCol="0" anchor="ctr"/>
+          <a:lstStyle/>
+          <a:p>
+            <a:pPr algn="ctr"/>
+          </a:p>
+        </p:txBody>
+      </p:sp>
+      <p:cxnSp>
+        <p:nvCxnSpPr>
+          <p:cNvPr id="12" name="Connector 11"/>
+          <p:cNvCxnSpPr/>
+          <p:nvPr/>
+        </p:nvCxnSpPr>
+        <p:spPr>
+          <a:xfrm>
+            <a:off x="7095744" y="2286000"/>
+            <a:ext cx="228600" cy="0"/>
+          </a:xfrm>
+          <a:prstGeom prst="line">
+            <a:avLst/>
+          </a:prstGeom>
+          <a:ln w="22860">
+            <a:solidFill>
+              <a:srgbClr val="E5892A"/>
+            </a:solidFill>
+          </a:ln>
+        </p:spPr>
+        <p:style>
+          <a:lnRef idx="2">
+            <a:schemeClr val="accent1"/>
+          </a:lnRef>
+          <a:fillRef idx="0">
+            <a:schemeClr val="accent1"/>
+          </a:fillRef>
+          <a:effectRef idx="1">
+            <a:schemeClr val="accent1"/>
+          </a:effectRef>
+          <a:fontRef idx="minor">
+            <a:schemeClr val="tx1"/>
+          </a:fontRef>
+        </p:style>
+      </p:cxnSp>
+      <p:sp>
+        <p:nvSpPr>
+          <p:cNvPr id="13" name="Rounded Rectangle 12"/>
+          <p:cNvSpPr/>
+          <p:nvPr/>
+        </p:nvSpPr>
+        <p:spPr>
+          <a:xfrm>
+            <a:off x="7397496" y="1298448"/>
+            <a:ext cx="2029968" cy="1965960"/>
+          </a:xfrm>
+          <a:prstGeom prst="roundRect">
+            <a:avLst/>
+          </a:prstGeom>
+          <a:solidFill>
+            <a:srgbClr val="FAFBFD"/>
           </a:solidFill>
           <a:ln w="13970">
             <a:solidFill>
@@ -6985,7 +7142,7 @@
           <a:lstStyle/>
           <a:p>
             <a:pPr algn="ctr">
-              <a:defRPr sz="1800" b="1">
+              <a:defRPr sz="1500" b="1">
                 <a:solidFill>
                   <a:srgbClr val="232D37"/>
                 </a:solidFill>
@@ -6993,7 +7150,7 @@
               </a:defRPr>
             </a:pPr>
             <a:r>
-              <a:t>Portfolio row fields</a:t>
+              <a:t>Waterfall</a:t>
             </a:r>
           </a:p>
           <a:p>
@@ -7001,61 +7158,29 @@
               <a:spcBef>
                 <a:spcPts val="300"/>
               </a:spcBef>
-              <a:defRPr sz="1300">
-                <a:solidFill>
-                  <a:srgbClr val="232D37"/>
-                </a:solidFill>
-                <a:latin typeface="Aptos"/>
-              </a:defRPr>
-            </a:pPr>
-            <a:r>
-              <a:t>irmaaDrag added beside taxDrag, feeDrag, livingCost</a:t>
-            </a:r>
-          </a:p>
-          <a:p>
-            <a:pPr>
-              <a:spcBef>
-                <a:spcPts val="300"/>
-              </a:spcBef>
-              <a:defRPr sz="1300">
-                <a:solidFill>
-                  <a:srgbClr val="232D37"/>
-                </a:solidFill>
-                <a:latin typeface="Aptos"/>
-              </a:defRPr>
-            </a:pPr>
-            <a:r>
-              <a:t>divUsed, divReinvested, sold retain waterfall detail</a:t>
-            </a:r>
-          </a:p>
-          <a:p>
-            <a:pPr>
-              <a:spcBef>
-                <a:spcPts val="300"/>
-              </a:spcBef>
-              <a:defRPr sz="1300">
-                <a:solidFill>
-                  <a:srgbClr val="232D37"/>
-                </a:solidFill>
-                <a:latin typeface="Aptos"/>
-              </a:defRPr>
-            </a:pPr>
-            <a:r>
-              <a:t>basis, unrealizedGain, steppedUp preserve gain history</a:t>
-            </a:r>
-          </a:p>
-        </p:txBody>
-      </p:sp>
-      <p:sp>
-        <p:nvSpPr>
-          <p:cNvPr id="7" name="Rectangle 6"/>
+              <a:defRPr sz="1100">
+                <a:solidFill>
+                  <a:srgbClr val="232D37"/>
+                </a:solidFill>
+                <a:latin typeface="Aptos"/>
+              </a:defRPr>
+            </a:pPr>
+            <a:r>
+              <a:t>Dividends first; sell shortfall</a:t>
+            </a:r>
+          </a:p>
+        </p:txBody>
+      </p:sp>
+      <p:sp>
+        <p:nvSpPr>
+          <p:cNvPr id="14" name="Rectangle 13"/>
           <p:cNvSpPr/>
           <p:nvPr/>
         </p:nvSpPr>
         <p:spPr>
           <a:xfrm>
-            <a:off x="4389120" y="1234440"/>
-            <a:ext cx="82296" cy="4434840"/>
+            <a:off x="7397496" y="1298448"/>
+            <a:ext cx="82296" cy="1965960"/>
           </a:xfrm>
           <a:prstGeom prst="rect">
             <a:avLst/>
@@ -7089,26 +7214,61 @@
           </a:p>
         </p:txBody>
       </p:sp>
-      <p:sp>
-        <p:nvSpPr>
-          <p:cNvPr id="8" name="Rounded Rectangle 7"/>
+      <p:cxnSp>
+        <p:nvCxnSpPr>
+          <p:cNvPr id="15" name="Connector 14"/>
+          <p:cNvCxnSpPr/>
+          <p:nvPr/>
+        </p:nvCxnSpPr>
+        <p:spPr>
+          <a:xfrm>
+            <a:off x="9454896" y="2286000"/>
+            <a:ext cx="228600" cy="0"/>
+          </a:xfrm>
+          <a:prstGeom prst="line">
+            <a:avLst/>
+          </a:prstGeom>
+          <a:ln w="22860">
+            <a:solidFill>
+              <a:srgbClr val="429761"/>
+            </a:solidFill>
+          </a:ln>
+        </p:spPr>
+        <p:style>
+          <a:lnRef idx="2">
+            <a:schemeClr val="accent1"/>
+          </a:lnRef>
+          <a:fillRef idx="0">
+            <a:schemeClr val="accent1"/>
+          </a:fillRef>
+          <a:effectRef idx="1">
+            <a:schemeClr val="accent1"/>
+          </a:effectRef>
+          <a:fontRef idx="minor">
+            <a:schemeClr val="tx1"/>
+          </a:fontRef>
+        </p:style>
+      </p:cxnSp>
+      <p:sp>
+        <p:nvSpPr>
+          <p:cNvPr id="16" name="Rounded Rectangle 15"/>
           <p:cNvSpPr/>
           <p:nvPr/>
         </p:nvSpPr>
         <p:spPr>
           <a:xfrm>
-            <a:off x="8183879" y="1234440"/>
-            <a:ext cx="3429000" cy="4434840"/>
+            <a:off x="9756648" y="1298448"/>
+            <a:ext cx="2029968" cy="1965960"/>
           </a:xfrm>
           <a:prstGeom prst="roundRect">
             <a:avLst/>
           </a:prstGeom>
           <a:solidFill>
-            <a:srgbClr val="FFF6E8"/>
+            <a:srgbClr val="FAFBFD"/>
           </a:solidFill>
           <a:ln w="13970">
             <a:solidFill>
-              <a:srgbClr val="E5892A"/>
+              <a:srgbClr val="7852B0"/>
             </a:solidFill>
           </a:ln>
         </p:spPr>
@@ -7131,7 +7291,7 @@
           <a:lstStyle/>
           <a:p>
             <a:pPr algn="ctr">
-              <a:defRPr sz="1800" b="1">
+              <a:defRPr sz="1500" b="1">
                 <a:solidFill>
                   <a:srgbClr val="232D37"/>
                 </a:solidFill>
@@ -7139,7 +7299,7 @@
               </a:defRPr>
             </a:pPr>
             <a:r>
-              <a:t>Household row fields</a:t>
+              <a:t>Basis roll</a:t>
             </a:r>
           </a:p>
           <a:p>
@@ -7147,67 +7307,35 @@
               <a:spcBef>
                 <a:spcPts val="300"/>
               </a:spcBef>
-              <a:defRPr sz="1300">
-                <a:solidFill>
-                  <a:srgbClr val="232D37"/>
-                </a:solidFill>
-                <a:latin typeface="Aptos"/>
-              </a:defRPr>
-            </a:pPr>
-            <a:r>
-              <a:t>irmaaSurcharge reported each year</a:t>
-            </a:r>
-          </a:p>
-          <a:p>
-            <a:pPr>
-              <a:spcBef>
-                <a:spcPts val="300"/>
-              </a:spcBef>
-              <a:defRPr sz="1300">
-                <a:solidFill>
-                  <a:srgbClr val="232D37"/>
-                </a:solidFill>
-                <a:latin typeface="Aptos"/>
-              </a:defRPr>
-            </a:pPr>
-            <a:r>
-              <a:t>Prior-year AGI tier × enrolled people 65+</a:t>
-            </a:r>
-          </a:p>
-          <a:p>
-            <a:pPr>
-              <a:spcBef>
-                <a:spcPts val="300"/>
-              </a:spcBef>
-              <a:defRPr sz="1300">
-                <a:solidFill>
-                  <a:srgbClr val="232D37"/>
-                </a:solidFill>
-                <a:latin typeface="Aptos"/>
-              </a:defRPr>
-            </a:pPr>
-            <a:r>
-              <a:t>Only checked eligible portfolios receive an allocation</a:t>
-            </a:r>
-          </a:p>
-        </p:txBody>
-      </p:sp>
-      <p:sp>
-        <p:nvSpPr>
-          <p:cNvPr id="9" name="Rectangle 8"/>
+              <a:defRPr sz="1100">
+                <a:solidFill>
+                  <a:srgbClr val="232D37"/>
+                </a:solidFill>
+                <a:latin typeface="Aptos"/>
+              </a:defRPr>
+            </a:pPr>
+            <a:r>
+              <a:t>Cost recovery + reinvestment − inflation</a:t>
+            </a:r>
+          </a:p>
+        </p:txBody>
+      </p:sp>
+      <p:sp>
+        <p:nvSpPr>
+          <p:cNvPr id="17" name="Rectangle 16"/>
           <p:cNvSpPr/>
           <p:nvPr/>
         </p:nvSpPr>
         <p:spPr>
           <a:xfrm>
-            <a:off x="8183879" y="1234440"/>
-            <a:ext cx="82296" cy="4434840"/>
+            <a:off x="9756648" y="1298448"/>
+            <a:ext cx="82296" cy="1965960"/>
           </a:xfrm>
           <a:prstGeom prst="rect">
             <a:avLst/>
           </a:prstGeom>
           <a:solidFill>
-            <a:srgbClr val="E5892A"/>
+            <a:srgbClr val="7852B0"/>
           </a:solidFill>
           <a:ln>
             <a:noFill/>
@@ -7237,7 +7365,235 @@
       </p:sp>
       <p:sp>
         <p:nvSpPr>
-          <p:cNvPr id="10" name="Rectangle 9"/>
+          <p:cNvPr id="18" name="Rounded Rectangle 17"/>
+          <p:cNvSpPr/>
+          <p:nvPr/>
+        </p:nvSpPr>
+        <p:spPr>
+          <a:xfrm>
+            <a:off x="822960" y="4069080"/>
+            <a:ext cx="5074920" cy="1188720"/>
+          </a:xfrm>
+          <a:prstGeom prst="roundRect">
+            <a:avLst/>
+          </a:prstGeom>
+          <a:solidFill>
+            <a:srgbClr val="F8FAFC"/>
+          </a:solidFill>
+          <a:ln w="13970">
+            <a:solidFill>
+              <a:srgbClr val="0F2647"/>
+            </a:solidFill>
+          </a:ln>
+        </p:spPr>
+        <p:style>
+          <a:lnRef idx="1">
+            <a:schemeClr val="accent1"/>
+          </a:lnRef>
+          <a:fillRef idx="3">
+            <a:schemeClr val="accent1"/>
+          </a:fillRef>
+          <a:effectRef idx="2">
+            <a:schemeClr val="accent1"/>
+          </a:effectRef>
+          <a:fontRef idx="minor">
+            <a:schemeClr val="lt1"/>
+          </a:fontRef>
+        </p:style>
+        <p:txBody>
+          <a:bodyPr rtlCol="0" anchor="ctr" lIns="182880" rIns="100584" tIns="91440"/>
+          <a:lstStyle/>
+          <a:p>
+            <a:pPr algn="ctr">
+              <a:defRPr sz="1600" b="1">
+                <a:solidFill>
+                  <a:srgbClr val="232D37"/>
+                </a:solidFill>
+                <a:latin typeface="Aptos Display"/>
+              </a:defRPr>
+            </a:pPr>
+            <a:r>
+              <a:t>Tax and cash-flow discipline</a:t>
+            </a:r>
+          </a:p>
+          <a:p>
+            <a:pPr>
+              <a:spcBef>
+                <a:spcPts val="300"/>
+              </a:spcBef>
+              <a:defRPr sz="1200">
+                <a:solidFill>
+                  <a:srgbClr val="232D37"/>
+                </a:solidFill>
+                <a:latin typeface="Aptos"/>
+              </a:defRPr>
+            </a:pPr>
+            <a:r>
+              <a:t>Each portfolio’s expenses are funded only by its own dividends and share sales. Realized LTCG comes only from the sold shortfall.</a:t>
+            </a:r>
+          </a:p>
+        </p:txBody>
+      </p:sp>
+      <p:sp>
+        <p:nvSpPr>
+          <p:cNvPr id="19" name="Rectangle 18"/>
+          <p:cNvSpPr/>
+          <p:nvPr/>
+        </p:nvSpPr>
+        <p:spPr>
+          <a:xfrm>
+            <a:off x="822960" y="4069080"/>
+            <a:ext cx="82296" cy="1188720"/>
+          </a:xfrm>
+          <a:prstGeom prst="rect">
+            <a:avLst/>
+          </a:prstGeom>
+          <a:solidFill>
+            <a:srgbClr val="0F2647"/>
+          </a:solidFill>
+          <a:ln>
+            <a:noFill/>
+          </a:ln>
+        </p:spPr>
+        <p:style>
+          <a:lnRef idx="1">
+            <a:schemeClr val="accent1"/>
+          </a:lnRef>
+          <a:fillRef idx="3">
+            <a:schemeClr val="accent1"/>
+          </a:fillRef>
+          <a:effectRef idx="2">
+            <a:schemeClr val="accent1"/>
+          </a:effectRef>
+          <a:fontRef idx="minor">
+            <a:schemeClr val="lt1"/>
+          </a:fontRef>
+        </p:style>
+        <p:txBody>
+          <a:bodyPr rtlCol="0" anchor="ctr"/>
+          <a:lstStyle/>
+          <a:p>
+            <a:pPr algn="ctr"/>
+          </a:p>
+        </p:txBody>
+      </p:sp>
+      <p:sp>
+        <p:nvSpPr>
+          <p:cNvPr id="20" name="Rounded Rectangle 19"/>
+          <p:cNvSpPr/>
+          <p:nvPr/>
+        </p:nvSpPr>
+        <p:spPr>
+          <a:xfrm>
+            <a:off x="6263640" y="4069080"/>
+            <a:ext cx="5074920" cy="1188720"/>
+          </a:xfrm>
+          <a:prstGeom prst="roundRect">
+            <a:avLst/>
+          </a:prstGeom>
+          <a:solidFill>
+            <a:srgbClr val="F8FAFC"/>
+          </a:solidFill>
+          <a:ln w="13970">
+            <a:solidFill>
+              <a:srgbClr val="168F8D"/>
+            </a:solidFill>
+          </a:ln>
+        </p:spPr>
+        <p:style>
+          <a:lnRef idx="1">
+            <a:schemeClr val="accent1"/>
+          </a:lnRef>
+          <a:fillRef idx="3">
+            <a:schemeClr val="accent1"/>
+          </a:fillRef>
+          <a:effectRef idx="2">
+            <a:schemeClr val="accent1"/>
+          </a:effectRef>
+          <a:fontRef idx="minor">
+            <a:schemeClr val="lt1"/>
+          </a:fontRef>
+        </p:style>
+        <p:txBody>
+          <a:bodyPr rtlCol="0" anchor="ctr" lIns="182880" rIns="100584" tIns="91440"/>
+          <a:lstStyle/>
+          <a:p>
+            <a:pPr algn="ctr">
+              <a:defRPr sz="1600" b="1">
+                <a:solidFill>
+                  <a:srgbClr val="232D37"/>
+                </a:solidFill>
+                <a:latin typeface="Aptos Display"/>
+              </a:defRPr>
+            </a:pPr>
+            <a:r>
+              <a:t>Estate and reporting continuity</a:t>
+            </a:r>
+          </a:p>
+          <a:p>
+            <a:pPr>
+              <a:spcBef>
+                <a:spcPts val="300"/>
+              </a:spcBef>
+              <a:defRPr sz="1200">
+                <a:solidFill>
+                  <a:srgbClr val="232D37"/>
+                </a:solidFill>
+                <a:latin typeface="Aptos"/>
+              </a:defRPr>
+            </a:pPr>
+            <a:r>
+              <a:t>Non-IDGT continuation can step basis up at death; IDGT retains carryover basis. Projection rows still expose basis and unrealized gain for Display and export.</a:t>
+            </a:r>
+          </a:p>
+        </p:txBody>
+      </p:sp>
+      <p:sp>
+        <p:nvSpPr>
+          <p:cNvPr id="21" name="Rectangle 20"/>
+          <p:cNvSpPr/>
+          <p:nvPr/>
+        </p:nvSpPr>
+        <p:spPr>
+          <a:xfrm>
+            <a:off x="6263640" y="4069080"/>
+            <a:ext cx="82296" cy="1188720"/>
+          </a:xfrm>
+          <a:prstGeom prst="rect">
+            <a:avLst/>
+          </a:prstGeom>
+          <a:solidFill>
+            <a:srgbClr val="168F8D"/>
+          </a:solidFill>
+          <a:ln>
+            <a:noFill/>
+          </a:ln>
+        </p:spPr>
+        <p:style>
+          <a:lnRef idx="1">
+            <a:schemeClr val="accent1"/>
+          </a:lnRef>
+          <a:fillRef idx="3">
+            <a:schemeClr val="accent1"/>
+          </a:fillRef>
+          <a:effectRef idx="2">
+            <a:schemeClr val="accent1"/>
+          </a:effectRef>
+          <a:fontRef idx="minor">
+            <a:schemeClr val="lt1"/>
+          </a:fontRef>
+        </p:style>
+        <p:txBody>
+          <a:bodyPr rtlCol="0" anchor="ctr"/>
+          <a:lstStyle/>
+          <a:p>
+            <a:pPr algn="ctr"/>
+          </a:p>
+        </p:txBody>
+      </p:sp>
+      <p:sp>
+        <p:nvSpPr>
+          <p:cNvPr id="22" name="Rectangle 21"/>
           <p:cNvSpPr/>
           <p:nvPr/>
         </p:nvSpPr>
@@ -7280,7 +7636,7 @@
       </p:sp>
       <p:sp>
         <p:nvSpPr>
-          <p:cNvPr id="11" name="TextBox 10"/>
+          <p:cNvPr id="23" name="TextBox 22"/>
           <p:cNvSpPr txBox="1"/>
           <p:nvPr/>
         </p:nvSpPr>
@@ -7309,7 +7665,7 @@
               </a:defRPr>
             </a:pPr>
             <a:r>
-              <a:t>Retirement Income Planner • Architecture overview • IRMAA and Excel-export update</a:t>
+              <a:t>Retirement Income Planner • Architecture overview • Basis-percentage and formula-page update</a:t>
             </a:r>
           </a:p>
         </p:txBody>
@@ -7371,7 +7727,7 @@
               </a:defRPr>
             </a:pPr>
             <a:r>
-              <a:t>Display updates: expense transparency</a:t>
+              <a:t>Formulas page: a human-checkable model reference</a:t>
             </a:r>
           </a:p>
         </p:txBody>
@@ -7385,7 +7741,7 @@
         <p:spPr>
           <a:xfrm>
             <a:off x="530352" y="786384"/>
-            <a:ext cx="10972800" cy="219456"/>
+            <a:ext cx="10972800" cy="228600"/>
           </a:xfrm>
           <a:prstGeom prst="rect">
             <a:avLst/>
@@ -7407,7 +7763,7 @@
               </a:defRPr>
             </a:pPr>
             <a:r>
-              <a:t>Asset views expose the new expense component while retaining the separation between data preparation and presentation.</a:t>
+              <a:t>The formulas reference is now designed as a mathematical document while remaining tied to live application data.</a:t>
             </a:r>
           </a:p>
         </p:txBody>
@@ -7420,8 +7776,8 @@
         </p:nvSpPr>
         <p:spPr>
           <a:xfrm>
-            <a:off x="594360" y="1280160"/>
-            <a:ext cx="3337560" cy="4297680"/>
+            <a:off x="640080" y="1234440"/>
+            <a:ext cx="3246120" cy="4526280"/>
           </a:xfrm>
           <a:prstGeom prst="roundRect">
             <a:avLst/>
@@ -7462,7 +7818,7 @@
               </a:defRPr>
             </a:pPr>
             <a:r>
-              <a:t>Asset charts</a:t>
+              <a:t>Presentation layer</a:t>
             </a:r>
           </a:p>
           <a:p>
@@ -7478,7 +7834,7 @@
               </a:defRPr>
             </a:pPr>
             <a:r>
-              <a:t>Balances for taxable brokerage, IRA, Roth, and separate IDGT portfolios</a:t>
+              <a:t>Centered display equations</a:t>
             </a:r>
           </a:p>
           <a:p>
@@ -7494,7 +7850,7 @@
               </a:defRPr>
             </a:pPr>
             <a:r>
-              <a:t>Tooltips show net growth when Expenses is enabled</a:t>
+              <a:t>One equation per line</a:t>
             </a:r>
           </a:p>
           <a:p>
@@ -7510,7 +7866,39 @@
               </a:defRPr>
             </a:pPr>
             <a:r>
-              <a:t>Unrealized-gain end-of-plan note remains available for tracked portfolios</a:t>
+              <a:t>Fractions, powers, piecewise definitions</a:t>
+            </a:r>
+          </a:p>
+          <a:p>
+            <a:pPr>
+              <a:spcBef>
+                <a:spcPts val="300"/>
+              </a:spcBef>
+              <a:defRPr sz="1200">
+                <a:solidFill>
+                  <a:srgbClr val="232D37"/>
+                </a:solidFill>
+                <a:latin typeface="Aptos"/>
+              </a:defRPr>
+            </a:pPr>
+            <a:r>
+              <a:t>Small “where …” captions</a:t>
+            </a:r>
+          </a:p>
+          <a:p>
+            <a:pPr>
+              <a:spcBef>
+                <a:spcPts val="300"/>
+              </a:spcBef>
+              <a:defRPr sz="1200">
+                <a:solidFill>
+                  <a:srgbClr val="232D37"/>
+                </a:solidFill>
+                <a:latin typeface="Aptos"/>
+              </a:defRPr>
+            </a:pPr>
+            <a:r>
+              <a:t>Prose introduces equations rather than embedding math inline</a:t>
             </a:r>
           </a:p>
         </p:txBody>
@@ -7523,8 +7911,8 @@
         </p:nvSpPr>
         <p:spPr>
           <a:xfrm>
-            <a:off x="594360" y="1280160"/>
-            <a:ext cx="82296" cy="4297680"/>
+            <a:off x="640080" y="1234440"/>
+            <a:ext cx="82296" cy="4526280"/>
           </a:xfrm>
           <a:prstGeom prst="rect">
             <a:avLst/>
@@ -7566,8 +7954,154 @@
         </p:nvSpPr>
         <p:spPr>
           <a:xfrm>
-            <a:off x="4425696" y="1280160"/>
-            <a:ext cx="3337560" cy="4297680"/>
+            <a:off x="4480560" y="1234440"/>
+            <a:ext cx="3246120" cy="4526280"/>
+          </a:xfrm>
+          <a:prstGeom prst="roundRect">
+            <a:avLst/>
+          </a:prstGeom>
+          <a:solidFill>
+            <a:srgbClr val="EAF9F4"/>
+          </a:solidFill>
+          <a:ln w="13970">
+            <a:solidFill>
+              <a:srgbClr val="429761"/>
+            </a:solidFill>
+          </a:ln>
+        </p:spPr>
+        <p:style>
+          <a:lnRef idx="1">
+            <a:schemeClr val="accent1"/>
+          </a:lnRef>
+          <a:fillRef idx="3">
+            <a:schemeClr val="accent1"/>
+          </a:fillRef>
+          <a:effectRef idx="2">
+            <a:schemeClr val="accent1"/>
+          </a:effectRef>
+          <a:fontRef idx="minor">
+            <a:schemeClr val="lt1"/>
+          </a:fontRef>
+        </p:style>
+        <p:txBody>
+          <a:bodyPr rtlCol="0" anchor="ctr" lIns="182880" rIns="100584" tIns="91440"/>
+          <a:lstStyle/>
+          <a:p>
+            <a:pPr algn="ctr">
+              <a:defRPr sz="1700" b="1">
+                <a:solidFill>
+                  <a:srgbClr val="232D37"/>
+                </a:solidFill>
+                <a:latin typeface="Aptos Display"/>
+              </a:defRPr>
+            </a:pPr>
+            <a:r>
+              <a:t>Reference-data integrity</a:t>
+            </a:r>
+          </a:p>
+          <a:p>
+            <a:pPr>
+              <a:spcBef>
+                <a:spcPts val="300"/>
+              </a:spcBef>
+              <a:defRPr sz="1200">
+                <a:solidFill>
+                  <a:srgbClr val="232D37"/>
+                </a:solidFill>
+                <a:latin typeface="Aptos"/>
+              </a:defRPr>
+            </a:pPr>
+            <a:r>
+              <a:t>Bracket, IRMAA, and RMD tables are built directly from constants.js globals.</a:t>
+            </a:r>
+          </a:p>
+          <a:p>
+            <a:pPr>
+              <a:spcBef>
+                <a:spcPts val="300"/>
+              </a:spcBef>
+              <a:defRPr sz="1200">
+                <a:solidFill>
+                  <a:srgbClr val="232D37"/>
+                </a:solidFill>
+                <a:latin typeface="Aptos"/>
+              </a:defRPr>
+            </a:pPr>
+            <a:r>
+              <a:t>Tax-year updates automatically appear in the page.</a:t>
+            </a:r>
+          </a:p>
+          <a:p>
+            <a:pPr>
+              <a:spcBef>
+                <a:spcPts val="300"/>
+              </a:spcBef>
+              <a:defRPr sz="1200">
+                <a:solidFill>
+                  <a:srgbClr val="232D37"/>
+                </a:solidFill>
+                <a:latin typeface="Aptos"/>
+              </a:defRPr>
+            </a:pPr>
+            <a:r>
+              <a:t>Formula prose is maintained alongside computation changes.</a:t>
+            </a:r>
+          </a:p>
+        </p:txBody>
+      </p:sp>
+      <p:sp>
+        <p:nvSpPr>
+          <p:cNvPr id="7" name="Rectangle 6"/>
+          <p:cNvSpPr/>
+          <p:nvPr/>
+        </p:nvSpPr>
+        <p:spPr>
+          <a:xfrm>
+            <a:off x="4480560" y="1234440"/>
+            <a:ext cx="82296" cy="4526280"/>
+          </a:xfrm>
+          <a:prstGeom prst="rect">
+            <a:avLst/>
+          </a:prstGeom>
+          <a:solidFill>
+            <a:srgbClr val="429761"/>
+          </a:solidFill>
+          <a:ln>
+            <a:noFill/>
+          </a:ln>
+        </p:spPr>
+        <p:style>
+          <a:lnRef idx="1">
+            <a:schemeClr val="accent1"/>
+          </a:lnRef>
+          <a:fillRef idx="3">
+            <a:schemeClr val="accent1"/>
+          </a:fillRef>
+          <a:effectRef idx="2">
+            <a:schemeClr val="accent1"/>
+          </a:effectRef>
+          <a:fontRef idx="minor">
+            <a:schemeClr val="lt1"/>
+          </a:fontRef>
+        </p:style>
+        <p:txBody>
+          <a:bodyPr rtlCol="0" anchor="ctr"/>
+          <a:lstStyle/>
+          <a:p>
+            <a:pPr algn="ctr"/>
+          </a:p>
+        </p:txBody>
+      </p:sp>
+      <p:sp>
+        <p:nvSpPr>
+          <p:cNvPr id="8" name="Rounded Rectangle 7"/>
+          <p:cNvSpPr/>
+          <p:nvPr/>
+        </p:nvSpPr>
+        <p:spPr>
+          <a:xfrm>
+            <a:off x="8321040" y="1234440"/>
+            <a:ext cx="3246120" cy="4526280"/>
           </a:xfrm>
           <a:prstGeom prst="roundRect">
             <a:avLst/>
@@ -7608,7 +8142,7 @@
               </a:defRPr>
             </a:pPr>
             <a:r>
-              <a:t>show_details tooltip</a:t>
+              <a:t>New helpers</a:t>
             </a:r>
           </a:p>
           <a:p>
@@ -7624,7 +8158,7 @@
               </a:defRPr>
             </a:pPr>
             <a:r>
-              <a:t>Expenses paid by other income</a:t>
+              <a:t>fpEq: display equation</a:t>
             </a:r>
           </a:p>
           <a:p>
@@ -7640,7 +8174,7 @@
               </a:defRPr>
             </a:pPr>
             <a:r>
-              <a:t>Dividends used for expenses</a:t>
+              <a:t>fpFr: stacked fraction</a:t>
             </a:r>
           </a:p>
           <a:p>
@@ -7656,7 +8190,7 @@
               </a:defRPr>
             </a:pPr>
             <a:r>
-              <a:t>Dividends reinvested</a:t>
+              <a:t>fpPw: piecewise expression</a:t>
             </a:r>
           </a:p>
           <a:p>
@@ -7672,7 +8206,7 @@
               </a:defRPr>
             </a:pPr>
             <a:r>
-              <a:t>Sold to cover shortfall</a:t>
+              <a:t>fpWhere: notation caption</a:t>
             </a:r>
           </a:p>
           <a:p>
@@ -7688,53 +8222,21 @@
               </a:defRPr>
             </a:pPr>
             <a:r>
-              <a:t>Cost basis and unrealized gain</a:t>
-            </a:r>
-          </a:p>
-          <a:p>
-            <a:pPr>
-              <a:spcBef>
-                <a:spcPts val="300"/>
-              </a:spcBef>
-              <a:defRPr sz="1200">
-                <a:solidFill>
-                  <a:srgbClr val="232D37"/>
-                </a:solidFill>
-                <a:latin typeface="Aptos"/>
-              </a:defRPr>
-            </a:pPr>
-            <a:r>
-              <a:t>IRMAA surcharge / IRMAA drag</a:t>
-            </a:r>
-          </a:p>
-          <a:p>
-            <a:pPr>
-              <a:spcBef>
-                <a:spcPts val="300"/>
-              </a:spcBef>
-              <a:defRPr sz="1200">
-                <a:solidFill>
-                  <a:srgbClr val="232D37"/>
-                </a:solidFill>
-                <a:latin typeface="Aptos"/>
-              </a:defRPr>
-            </a:pPr>
-            <a:r>
-              <a:t>Death-year basis step-up</a:t>
-            </a:r>
-          </a:p>
-        </p:txBody>
-      </p:sp>
-      <p:sp>
-        <p:nvSpPr>
-          <p:cNvPr id="7" name="Rectangle 6"/>
+              <a:t>The page remains a standalone new-tab document.</a:t>
+            </a:r>
+          </a:p>
+        </p:txBody>
+      </p:sp>
+      <p:sp>
+        <p:nvSpPr>
+          <p:cNvPr id="9" name="Rectangle 8"/>
           <p:cNvSpPr/>
           <p:nvPr/>
         </p:nvSpPr>
         <p:spPr>
           <a:xfrm>
-            <a:off x="4425696" y="1280160"/>
-            <a:ext cx="82296" cy="4297680"/>
+            <a:off x="8321040" y="1234440"/>
+            <a:ext cx="82296" cy="4526280"/>
           </a:xfrm>
           <a:prstGeom prst="rect">
             <a:avLst/>
@@ -7770,152 +8272,6 @@
       </p:sp>
       <p:sp>
         <p:nvSpPr>
-          <p:cNvPr id="8" name="Rounded Rectangle 7"/>
-          <p:cNvSpPr/>
-          <p:nvPr/>
-        </p:nvSpPr>
-        <p:spPr>
-          <a:xfrm>
-            <a:off x="8257031" y="1280160"/>
-            <a:ext cx="3337560" cy="4297680"/>
-          </a:xfrm>
-          <a:prstGeom prst="roundRect">
-            <a:avLst/>
-          </a:prstGeom>
-          <a:solidFill>
-            <a:srgbClr val="F8FAFC"/>
-          </a:solidFill>
-          <a:ln w="13970">
-            <a:solidFill>
-              <a:srgbClr val="0F2647"/>
-            </a:solidFill>
-          </a:ln>
-        </p:spPr>
-        <p:style>
-          <a:lnRef idx="1">
-            <a:schemeClr val="accent1"/>
-          </a:lnRef>
-          <a:fillRef idx="3">
-            <a:schemeClr val="accent1"/>
-          </a:fillRef>
-          <a:effectRef idx="2">
-            <a:schemeClr val="accent1"/>
-          </a:effectRef>
-          <a:fontRef idx="minor">
-            <a:schemeClr val="lt1"/>
-          </a:fontRef>
-        </p:style>
-        <p:txBody>
-          <a:bodyPr rtlCol="0" anchor="ctr" lIns="182880" rIns="100584" tIns="91440"/>
-          <a:lstStyle/>
-          <a:p>
-            <a:pPr algn="ctr">
-              <a:defRPr sz="1700" b="1">
-                <a:solidFill>
-                  <a:srgbClr val="232D37"/>
-                </a:solidFill>
-                <a:latin typeface="Aptos Display"/>
-              </a:defRPr>
-            </a:pPr>
-            <a:r>
-              <a:t>Other chart behavior</a:t>
-            </a:r>
-          </a:p>
-          <a:p>
-            <a:pPr>
-              <a:spcBef>
-                <a:spcPts val="300"/>
-              </a:spcBef>
-              <a:defRPr sz="1200">
-                <a:solidFill>
-                  <a:srgbClr val="232D37"/>
-                </a:solidFill>
-                <a:latin typeface="Aptos"/>
-              </a:defRPr>
-            </a:pPr>
-            <a:r>
-              <a:t>Income chart retains IRMAA-tier reference lines.</a:t>
-            </a:r>
-          </a:p>
-          <a:p>
-            <a:pPr>
-              <a:spcBef>
-                <a:spcPts val="300"/>
-              </a:spcBef>
-              <a:defRPr sz="1200">
-                <a:solidFill>
-                  <a:srgbClr val="232D37"/>
-                </a:solidFill>
-                <a:latin typeface="Aptos"/>
-              </a:defRPr>
-            </a:pPr>
-            <a:r>
-              <a:t>Tax chart remains driven by tax components and rates.</a:t>
-            </a:r>
-          </a:p>
-          <a:p>
-            <a:pPr>
-              <a:spcBef>
-                <a:spcPts val="300"/>
-              </a:spcBef>
-              <a:defRPr sz="1200">
-                <a:solidFill>
-                  <a:srgbClr val="232D37"/>
-                </a:solidFill>
-                <a:latin typeface="Aptos"/>
-              </a:defRPr>
-            </a:pPr>
-            <a:r>
-              <a:t>No display file calculates an IRMAA, basis, or LTCG result.</a:t>
-            </a:r>
-          </a:p>
-        </p:txBody>
-      </p:sp>
-      <p:sp>
-        <p:nvSpPr>
-          <p:cNvPr id="9" name="Rectangle 8"/>
-          <p:cNvSpPr/>
-          <p:nvPr/>
-        </p:nvSpPr>
-        <p:spPr>
-          <a:xfrm>
-            <a:off x="8257031" y="1280160"/>
-            <a:ext cx="82296" cy="4297680"/>
-          </a:xfrm>
-          <a:prstGeom prst="rect">
-            <a:avLst/>
-          </a:prstGeom>
-          <a:solidFill>
-            <a:srgbClr val="0F2647"/>
-          </a:solidFill>
-          <a:ln>
-            <a:noFill/>
-          </a:ln>
-        </p:spPr>
-        <p:style>
-          <a:lnRef idx="1">
-            <a:schemeClr val="accent1"/>
-          </a:lnRef>
-          <a:fillRef idx="3">
-            <a:schemeClr val="accent1"/>
-          </a:fillRef>
-          <a:effectRef idx="2">
-            <a:schemeClr val="accent1"/>
-          </a:effectRef>
-          <a:fontRef idx="minor">
-            <a:schemeClr val="lt1"/>
-          </a:fontRef>
-        </p:style>
-        <p:txBody>
-          <a:bodyPr rtlCol="0" anchor="ctr"/>
-          <a:lstStyle/>
-          <a:p>
-            <a:pPr algn="ctr"/>
-          </a:p>
-        </p:txBody>
-      </p:sp>
-      <p:sp>
-        <p:nvSpPr>
           <p:cNvPr id="10" name="Rectangle 9"/>
           <p:cNvSpPr/>
           <p:nvPr/>
@@ -7988,7 +8344,7 @@
               </a:defRPr>
             </a:pPr>
             <a:r>
-              <a:t>Retirement Income Planner • Architecture overview • IRMAA and Excel-export update</a:t>
+              <a:t>Retirement Income Planner • Architecture overview • Basis-percentage and formula-page update</a:t>
             </a:r>
           </a:p>
         </p:txBody>
@@ -8050,7 +8406,7 @@
               </a:defRPr>
             </a:pPr>
             <a:r>
-              <a:t>Excel export: projection data becomes a workbook</a:t>
+              <a:t>Example: the same model equation, clearly documented</a:t>
             </a:r>
           </a:p>
         </p:txBody>
@@ -8064,7 +8420,7 @@
         <p:spPr>
           <a:xfrm>
             <a:off x="530352" y="786384"/>
-            <a:ext cx="10972800" cy="219456"/>
+            <a:ext cx="10972800" cy="228600"/>
           </a:xfrm>
           <a:prstGeom prst="rect">
             <a:avLst/>
@@ -8086,7 +8442,7 @@
               </a:defRPr>
             </a:pPr>
             <a:r>
-              <a:t>The new export path is deliberately read-only and uses the already-computed projection.</a:t>
+              <a:t>Formulas are separated from prose so a reader can compare the page with the projection logic by hand.</a:t>
             </a:r>
           </a:p>
         </p:txBody>
@@ -8099,8 +8455,308 @@
         </p:nvSpPr>
         <p:spPr>
           <a:xfrm>
-            <a:off x="685800" y="1097280"/>
-            <a:ext cx="2331720" cy="4434840"/>
+            <a:off x="822960" y="1188720"/>
+            <a:ext cx="10515600" cy="731520"/>
+          </a:xfrm>
+          <a:prstGeom prst="roundRect">
+            <a:avLst/>
+          </a:prstGeom>
+          <a:solidFill>
+            <a:srgbClr val="F8FAFC"/>
+          </a:solidFill>
+          <a:ln w="13970">
+            <a:solidFill>
+              <a:srgbClr val="0F2647"/>
+            </a:solidFill>
+          </a:ln>
+        </p:spPr>
+        <p:style>
+          <a:lnRef idx="1">
+            <a:schemeClr val="accent1"/>
+          </a:lnRef>
+          <a:fillRef idx="3">
+            <a:schemeClr val="accent1"/>
+          </a:fillRef>
+          <a:effectRef idx="2">
+            <a:schemeClr val="accent1"/>
+          </a:effectRef>
+          <a:fontRef idx="minor">
+            <a:schemeClr val="lt1"/>
+          </a:fontRef>
+        </p:style>
+        <p:txBody>
+          <a:bodyPr rtlCol="0" anchor="ctr" lIns="182880" rIns="100584" tIns="91440"/>
+          <a:lstStyle/>
+          <a:p>
+            <a:pPr algn="ctr">
+              <a:defRPr sz="1600" b="1">
+                <a:solidFill>
+                  <a:srgbClr val="232D37"/>
+                </a:solidFill>
+                <a:latin typeface="Aptos Display"/>
+              </a:defRPr>
+            </a:pPr>
+            <a:r>
+              <a:t>Prose introduction</a:t>
+            </a:r>
+          </a:p>
+          <a:p>
+            <a:pPr>
+              <a:spcBef>
+                <a:spcPts val="300"/>
+              </a:spcBef>
+              <a:defRPr sz="1200">
+                <a:solidFill>
+                  <a:srgbClr val="232D37"/>
+                </a:solidFill>
+                <a:latin typeface="Aptos"/>
+              </a:defRPr>
+            </a:pPr>
+            <a:r>
+              <a:t>The initial cost basis is calculated from the optional entered percentage and the portfolio’s opening balance.</a:t>
+            </a:r>
+          </a:p>
+        </p:txBody>
+      </p:sp>
+      <p:sp>
+        <p:nvSpPr>
+          <p:cNvPr id="5" name="Rectangle 4"/>
+          <p:cNvSpPr/>
+          <p:nvPr/>
+        </p:nvSpPr>
+        <p:spPr>
+          <a:xfrm>
+            <a:off x="822960" y="1188720"/>
+            <a:ext cx="82296" cy="731520"/>
+          </a:xfrm>
+          <a:prstGeom prst="rect">
+            <a:avLst/>
+          </a:prstGeom>
+          <a:solidFill>
+            <a:srgbClr val="0F2647"/>
+          </a:solidFill>
+          <a:ln>
+            <a:noFill/>
+          </a:ln>
+        </p:spPr>
+        <p:style>
+          <a:lnRef idx="1">
+            <a:schemeClr val="accent1"/>
+          </a:lnRef>
+          <a:fillRef idx="3">
+            <a:schemeClr val="accent1"/>
+          </a:fillRef>
+          <a:effectRef idx="2">
+            <a:schemeClr val="accent1"/>
+          </a:effectRef>
+          <a:fontRef idx="minor">
+            <a:schemeClr val="lt1"/>
+          </a:fontRef>
+        </p:style>
+        <p:txBody>
+          <a:bodyPr rtlCol="0" anchor="ctr"/>
+          <a:lstStyle/>
+          <a:p>
+            <a:pPr algn="ctr"/>
+          </a:p>
+        </p:txBody>
+      </p:sp>
+      <p:sp>
+        <p:nvSpPr>
+          <p:cNvPr id="6" name="TextBox 5"/>
+          <p:cNvSpPr txBox="1"/>
+          <p:nvPr/>
+        </p:nvSpPr>
+        <p:spPr>
+          <a:xfrm>
+            <a:off x="1828800" y="2212848"/>
+            <a:ext cx="8503920" cy="457200"/>
+          </a:xfrm>
+          <a:prstGeom prst="rect">
+            <a:avLst/>
+          </a:prstGeom>
+          <a:noFill/>
+        </p:spPr>
+        <p:txBody>
+          <a:bodyPr wrap="none" anchor="ctr">
+            <a:spAutoFit/>
+          </a:bodyPr>
+          <a:lstStyle/>
+          <a:p>
+            <a:pPr algn="ctr">
+              <a:defRPr sz="2800" b="1">
+                <a:solidFill>
+                  <a:srgbClr val="0F2647"/>
+                </a:solidFill>
+                <a:latin typeface="Aptos"/>
+              </a:defRPr>
+            </a:pPr>
+            <a:r>
+              <a:t>basis₀ = (basisPct / 100) × balance₀</a:t>
+            </a:r>
+          </a:p>
+        </p:txBody>
+      </p:sp>
+      <p:sp>
+        <p:nvSpPr>
+          <p:cNvPr id="7" name="TextBox 6"/>
+          <p:cNvSpPr txBox="1"/>
+          <p:nvPr/>
+        </p:nvSpPr>
+        <p:spPr>
+          <a:xfrm>
+            <a:off x="1828800" y="2779776"/>
+            <a:ext cx="8503920" cy="274320"/>
+          </a:xfrm>
+          <a:prstGeom prst="rect">
+            <a:avLst/>
+          </a:prstGeom>
+          <a:noFill/>
+        </p:spPr>
+        <p:txBody>
+          <a:bodyPr wrap="none" anchor="ctr">
+            <a:spAutoFit/>
+          </a:bodyPr>
+          <a:lstStyle/>
+          <a:p>
+            <a:pPr algn="ctr">
+              <a:defRPr sz="1200" b="0">
+                <a:solidFill>
+                  <a:srgbClr val="5D6C7A"/>
+                </a:solidFill>
+                <a:latin typeface="Aptos"/>
+              </a:defRPr>
+            </a:pPr>
+            <a:r>
+              <a:t>where basisPct is clamped to 0–100 and basis₀ is clamped to [0, balance₀]</a:t>
+            </a:r>
+          </a:p>
+        </p:txBody>
+      </p:sp>
+      <p:sp>
+        <p:nvSpPr>
+          <p:cNvPr id="8" name="Rounded Rectangle 7"/>
+          <p:cNvSpPr/>
+          <p:nvPr/>
+        </p:nvSpPr>
+        <p:spPr>
+          <a:xfrm>
+            <a:off x="822960" y="3657600"/>
+            <a:ext cx="4937760" cy="1234440"/>
+          </a:xfrm>
+          <a:prstGeom prst="roundRect">
+            <a:avLst/>
+          </a:prstGeom>
+          <a:solidFill>
+            <a:srgbClr val="EAF9F4"/>
+          </a:solidFill>
+          <a:ln w="13970">
+            <a:solidFill>
+              <a:srgbClr val="429761"/>
+            </a:solidFill>
+          </a:ln>
+        </p:spPr>
+        <p:style>
+          <a:lnRef idx="1">
+            <a:schemeClr val="accent1"/>
+          </a:lnRef>
+          <a:fillRef idx="3">
+            <a:schemeClr val="accent1"/>
+          </a:fillRef>
+          <a:effectRef idx="2">
+            <a:schemeClr val="accent1"/>
+          </a:effectRef>
+          <a:fontRef idx="minor">
+            <a:schemeClr val="lt1"/>
+          </a:fontRef>
+        </p:style>
+        <p:txBody>
+          <a:bodyPr rtlCol="0" anchor="ctr" lIns="182880" rIns="100584" tIns="91440"/>
+          <a:lstStyle/>
+          <a:p>
+            <a:pPr algn="ctr">
+              <a:defRPr sz="1600" b="1">
+                <a:solidFill>
+                  <a:srgbClr val="232D37"/>
+                </a:solidFill>
+                <a:latin typeface="Aptos Display"/>
+              </a:defRPr>
+            </a:pPr>
+            <a:r>
+              <a:t>Computational use</a:t>
+            </a:r>
+          </a:p>
+          <a:p>
+            <a:pPr>
+              <a:spcBef>
+                <a:spcPts val="300"/>
+              </a:spcBef>
+              <a:defRPr sz="1200">
+                <a:solidFill>
+                  <a:srgbClr val="232D37"/>
+                </a:solidFill>
+                <a:latin typeface="Aptos"/>
+              </a:defRPr>
+            </a:pPr>
+            <a:r>
+              <a:t>This basis drives the gain fraction and is subsequently rolled forward after sales, reinvested dividends, and inflation.</a:t>
+            </a:r>
+          </a:p>
+        </p:txBody>
+      </p:sp>
+      <p:sp>
+        <p:nvSpPr>
+          <p:cNvPr id="9" name="Rectangle 8"/>
+          <p:cNvSpPr/>
+          <p:nvPr/>
+        </p:nvSpPr>
+        <p:spPr>
+          <a:xfrm>
+            <a:off x="822960" y="3657600"/>
+            <a:ext cx="82296" cy="1234440"/>
+          </a:xfrm>
+          <a:prstGeom prst="rect">
+            <a:avLst/>
+          </a:prstGeom>
+          <a:solidFill>
+            <a:srgbClr val="429761"/>
+          </a:solidFill>
+          <a:ln>
+            <a:noFill/>
+          </a:ln>
+        </p:spPr>
+        <p:style>
+          <a:lnRef idx="1">
+            <a:schemeClr val="accent1"/>
+          </a:lnRef>
+          <a:fillRef idx="3">
+            <a:schemeClr val="accent1"/>
+          </a:fillRef>
+          <a:effectRef idx="2">
+            <a:schemeClr val="accent1"/>
+          </a:effectRef>
+          <a:fontRef idx="minor">
+            <a:schemeClr val="lt1"/>
+          </a:fontRef>
+        </p:style>
+        <p:txBody>
+          <a:bodyPr rtlCol="0" anchor="ctr"/>
+          <a:lstStyle/>
+          <a:p>
+            <a:pPr algn="ctr"/>
+          </a:p>
+        </p:txBody>
+      </p:sp>
+      <p:sp>
+        <p:nvSpPr>
+          <p:cNvPr id="10" name="Rounded Rectangle 9"/>
+          <p:cNvSpPr/>
+          <p:nvPr/>
+        </p:nvSpPr>
+        <p:spPr>
+          <a:xfrm>
+            <a:off x="6400800" y="3657600"/>
+            <a:ext cx="4937760" cy="1234440"/>
           </a:xfrm>
           <a:prstGeom prst="roundRect">
             <a:avLst/>
@@ -8133,7 +8789,7 @@
           <a:lstStyle/>
           <a:p>
             <a:pPr algn="ctr">
-              <a:defRPr sz="1700" b="1">
+              <a:defRPr sz="1600" b="1">
                 <a:solidFill>
                   <a:srgbClr val="232D37"/>
                 </a:solidFill>
@@ -8141,7 +8797,7 @@
               </a:defRPr>
             </a:pPr>
             <a:r>
-              <a:t>Trigger</a:t>
+              <a:t>Documentation guarantee</a:t>
             </a:r>
           </a:p>
           <a:p>
@@ -8157,53 +8813,21 @@
               </a:defRPr>
             </a:pPr>
             <a:r>
-              <a:t>Topbar: Export to Excel</a:t>
-            </a:r>
-          </a:p>
-          <a:p>
-            <a:pPr>
-              <a:spcBef>
-                <a:spcPts val="300"/>
-              </a:spcBef>
-              <a:defRPr sz="1200">
-                <a:solidFill>
-                  <a:srgbClr val="232D37"/>
-                </a:solidFill>
-                <a:latin typeface="Aptos"/>
-              </a:defRPr>
-            </a:pPr>
-            <a:r>
-              <a:t>Calls exportToExcel()</a:t>
-            </a:r>
-          </a:p>
-          <a:p>
-            <a:pPr>
-              <a:spcBef>
-                <a:spcPts val="300"/>
-              </a:spcBef>
-              <a:defRPr sz="1200">
-                <a:solidFill>
-                  <a:srgbClr val="232D37"/>
-                </a:solidFill>
-                <a:latin typeface="Aptos"/>
-              </a:defRPr>
-            </a:pPr>
-            <a:r>
-              <a:t>Uses SheetJS XLSX library loaded from pinned CDN</a:t>
-            </a:r>
-          </a:p>
-        </p:txBody>
-      </p:sp>
-      <p:sp>
-        <p:nvSpPr>
-          <p:cNvPr id="5" name="Rectangle 4"/>
+              <a:t>The reference page formats the expression; projection.js remains the authoritative implementation of the behavior.</a:t>
+            </a:r>
+          </a:p>
+        </p:txBody>
+      </p:sp>
+      <p:sp>
+        <p:nvSpPr>
+          <p:cNvPr id="11" name="Rectangle 10"/>
           <p:cNvSpPr/>
           <p:nvPr/>
         </p:nvSpPr>
         <p:spPr>
           <a:xfrm>
-            <a:off x="685800" y="1097280"/>
-            <a:ext cx="82296" cy="4434840"/>
+            <a:off x="6400800" y="3657600"/>
+            <a:ext cx="82296" cy="1234440"/>
           </a:xfrm>
           <a:prstGeom prst="rect">
             <a:avLst/>
@@ -8239,586 +8863,7 @@
       </p:sp>
       <p:sp>
         <p:nvSpPr>
-          <p:cNvPr id="6" name="Rounded Rectangle 5"/>
-          <p:cNvSpPr/>
-          <p:nvPr/>
-        </p:nvSpPr>
-        <p:spPr>
-          <a:xfrm>
-            <a:off x="3401568" y="1097280"/>
-            <a:ext cx="2331720" cy="4434840"/>
-          </a:xfrm>
-          <a:prstGeom prst="roundRect">
-            <a:avLst/>
-          </a:prstGeom>
-          <a:solidFill>
-            <a:srgbClr val="EAF9F4"/>
-          </a:solidFill>
-          <a:ln w="13970">
-            <a:solidFill>
-              <a:srgbClr val="429761"/>
-            </a:solidFill>
-          </a:ln>
-        </p:spPr>
-        <p:style>
-          <a:lnRef idx="1">
-            <a:schemeClr val="accent1"/>
-          </a:lnRef>
-          <a:fillRef idx="3">
-            <a:schemeClr val="accent1"/>
-          </a:fillRef>
-          <a:effectRef idx="2">
-            <a:schemeClr val="accent1"/>
-          </a:effectRef>
-          <a:fontRef idx="minor">
-            <a:schemeClr val="lt1"/>
-          </a:fontRef>
-        </p:style>
-        <p:txBody>
-          <a:bodyPr rtlCol="0" anchor="ctr" lIns="182880" rIns="100584" tIns="91440"/>
-          <a:lstStyle/>
-          <a:p>
-            <a:pPr algn="ctr">
-              <a:defRPr sz="1700" b="1">
-                <a:solidFill>
-                  <a:srgbClr val="232D37"/>
-                </a:solidFill>
-                <a:latin typeface="Aptos Display"/>
-              </a:defRPr>
-            </a:pPr>
-            <a:r>
-              <a:t>Input</a:t>
-            </a:r>
-          </a:p>
-          <a:p>
-            <a:pPr>
-              <a:spcBef>
-                <a:spcPts val="300"/>
-              </a:spcBef>
-              <a:defRPr sz="1200">
-                <a:solidFill>
-                  <a:srgbClr val="232D37"/>
-                </a:solidFill>
-                <a:latin typeface="Aptos"/>
-              </a:defRPr>
-            </a:pPr>
-            <a:r>
-              <a:t>lastProjection from the app</a:t>
-            </a:r>
-          </a:p>
-          <a:p>
-            <a:pPr>
-              <a:spcBef>
-                <a:spcPts val="300"/>
-              </a:spcBef>
-              <a:defRPr sz="1200">
-                <a:solidFill>
-                  <a:srgbClr val="232D37"/>
-                </a:solidFill>
-                <a:latin typeface="Aptos"/>
-              </a:defRPr>
-            </a:pPr>
-            <a:r>
-              <a:t>No state writes</a:t>
-            </a:r>
-          </a:p>
-          <a:p>
-            <a:pPr>
-              <a:spcBef>
-                <a:spcPts val="300"/>
-              </a:spcBef>
-              <a:defRPr sz="1200">
-                <a:solidFill>
-                  <a:srgbClr val="232D37"/>
-                </a:solidFill>
-                <a:latin typeface="Aptos"/>
-              </a:defRPr>
-            </a:pPr>
-            <a:r>
-              <a:t>Checks for rows and library availability before download</a:t>
-            </a:r>
-          </a:p>
-        </p:txBody>
-      </p:sp>
-      <p:sp>
-        <p:nvSpPr>
-          <p:cNvPr id="7" name="Rectangle 6"/>
-          <p:cNvSpPr/>
-          <p:nvPr/>
-        </p:nvSpPr>
-        <p:spPr>
-          <a:xfrm>
-            <a:off x="3401568" y="1097280"/>
-            <a:ext cx="82296" cy="4434840"/>
-          </a:xfrm>
-          <a:prstGeom prst="rect">
-            <a:avLst/>
-          </a:prstGeom>
-          <a:solidFill>
-            <a:srgbClr val="429761"/>
-          </a:solidFill>
-          <a:ln>
-            <a:noFill/>
-          </a:ln>
-        </p:spPr>
-        <p:style>
-          <a:lnRef idx="1">
-            <a:schemeClr val="accent1"/>
-          </a:lnRef>
-          <a:fillRef idx="3">
-            <a:schemeClr val="accent1"/>
-          </a:fillRef>
-          <a:effectRef idx="2">
-            <a:schemeClr val="accent1"/>
-          </a:effectRef>
-          <a:fontRef idx="minor">
-            <a:schemeClr val="lt1"/>
-          </a:fontRef>
-        </p:style>
-        <p:txBody>
-          <a:bodyPr rtlCol="0" anchor="ctr"/>
-          <a:lstStyle/>
-          <a:p>
-            <a:pPr algn="ctr"/>
-          </a:p>
-        </p:txBody>
-      </p:sp>
-      <p:sp>
-        <p:nvSpPr>
-          <p:cNvPr id="8" name="Rounded Rectangle 7"/>
-          <p:cNvSpPr/>
-          <p:nvPr/>
-        </p:nvSpPr>
-        <p:spPr>
-          <a:xfrm>
-            <a:off x="6117336" y="1097280"/>
-            <a:ext cx="2331720" cy="4434840"/>
-          </a:xfrm>
-          <a:prstGeom prst="roundRect">
-            <a:avLst/>
-          </a:prstGeom>
-          <a:solidFill>
-            <a:srgbClr val="FFF6E8"/>
-          </a:solidFill>
-          <a:ln w="13970">
-            <a:solidFill>
-              <a:srgbClr val="E5892A"/>
-            </a:solidFill>
-          </a:ln>
-        </p:spPr>
-        <p:style>
-          <a:lnRef idx="1">
-            <a:schemeClr val="accent1"/>
-          </a:lnRef>
-          <a:fillRef idx="3">
-            <a:schemeClr val="accent1"/>
-          </a:fillRef>
-          <a:effectRef idx="2">
-            <a:schemeClr val="accent1"/>
-          </a:effectRef>
-          <a:fontRef idx="minor">
-            <a:schemeClr val="lt1"/>
-          </a:fontRef>
-        </p:style>
-        <p:txBody>
-          <a:bodyPr rtlCol="0" anchor="ctr" lIns="182880" rIns="100584" tIns="91440"/>
-          <a:lstStyle/>
-          <a:p>
-            <a:pPr algn="ctr">
-              <a:defRPr sz="1700" b="1">
-                <a:solidFill>
-                  <a:srgbClr val="232D37"/>
-                </a:solidFill>
-                <a:latin typeface="Aptos Display"/>
-              </a:defRPr>
-            </a:pPr>
-            <a:r>
-              <a:t>Sheet 1</a:t>
-            </a:r>
-          </a:p>
-          <a:p>
-            <a:pPr>
-              <a:spcBef>
-                <a:spcPts val="300"/>
-              </a:spcBef>
-              <a:defRPr sz="1200">
-                <a:solidFill>
-                  <a:srgbClr val="232D37"/>
-                </a:solidFill>
-                <a:latin typeface="Aptos"/>
-              </a:defRPr>
-            </a:pPr>
-            <a:r>
-              <a:t>Projection by year</a:t>
-            </a:r>
-          </a:p>
-          <a:p>
-            <a:pPr>
-              <a:spcBef>
-                <a:spcPts val="300"/>
-              </a:spcBef>
-              <a:defRPr sz="1200">
-                <a:solidFill>
-                  <a:srgbClr val="232D37"/>
-                </a:solidFill>
-                <a:latin typeface="Aptos"/>
-              </a:defRPr>
-            </a:pPr>
-            <a:r>
-              <a:t>One row per projected year</a:t>
-            </a:r>
-          </a:p>
-          <a:p>
-            <a:pPr>
-              <a:spcBef>
-                <a:spcPts val="300"/>
-              </a:spcBef>
-              <a:defRPr sz="1200">
-                <a:solidFill>
-                  <a:srgbClr val="232D37"/>
-                </a:solidFill>
-                <a:latin typeface="Aptos"/>
-              </a:defRPr>
-            </a:pPr>
-            <a:r>
-              <a:t>Income, tax, SST, NIIT, IRMAA, AGI, rates, and balances</a:t>
-            </a:r>
-          </a:p>
-        </p:txBody>
-      </p:sp>
-      <p:sp>
-        <p:nvSpPr>
-          <p:cNvPr id="9" name="Rectangle 8"/>
-          <p:cNvSpPr/>
-          <p:nvPr/>
-        </p:nvSpPr>
-        <p:spPr>
-          <a:xfrm>
-            <a:off x="6117336" y="1097280"/>
-            <a:ext cx="82296" cy="4434840"/>
-          </a:xfrm>
-          <a:prstGeom prst="rect">
-            <a:avLst/>
-          </a:prstGeom>
-          <a:solidFill>
-            <a:srgbClr val="E5892A"/>
-          </a:solidFill>
-          <a:ln>
-            <a:noFill/>
-          </a:ln>
-        </p:spPr>
-        <p:style>
-          <a:lnRef idx="1">
-            <a:schemeClr val="accent1"/>
-          </a:lnRef>
-          <a:fillRef idx="3">
-            <a:schemeClr val="accent1"/>
-          </a:fillRef>
-          <a:effectRef idx="2">
-            <a:schemeClr val="accent1"/>
-          </a:effectRef>
-          <a:fontRef idx="minor">
-            <a:schemeClr val="lt1"/>
-          </a:fontRef>
-        </p:style>
-        <p:txBody>
-          <a:bodyPr rtlCol="0" anchor="ctr"/>
-          <a:lstStyle/>
-          <a:p>
-            <a:pPr algn="ctr"/>
-          </a:p>
-        </p:txBody>
-      </p:sp>
-      <p:sp>
-        <p:nvSpPr>
-          <p:cNvPr id="10" name="Rounded Rectangle 9"/>
-          <p:cNvSpPr/>
-          <p:nvPr/>
-        </p:nvSpPr>
-        <p:spPr>
-          <a:xfrm>
-            <a:off x="8833104" y="1097280"/>
-            <a:ext cx="2331720" cy="4434840"/>
-          </a:xfrm>
-          <a:prstGeom prst="roundRect">
-            <a:avLst/>
-          </a:prstGeom>
-          <a:solidFill>
-            <a:srgbClr val="F7EFFF"/>
-          </a:solidFill>
-          <a:ln w="13970">
-            <a:solidFill>
-              <a:srgbClr val="7852B0"/>
-            </a:solidFill>
-          </a:ln>
-        </p:spPr>
-        <p:style>
-          <a:lnRef idx="1">
-            <a:schemeClr val="accent1"/>
-          </a:lnRef>
-          <a:fillRef idx="3">
-            <a:schemeClr val="accent1"/>
-          </a:fillRef>
-          <a:effectRef idx="2">
-            <a:schemeClr val="accent1"/>
-          </a:effectRef>
-          <a:fontRef idx="minor">
-            <a:schemeClr val="lt1"/>
-          </a:fontRef>
-        </p:style>
-        <p:txBody>
-          <a:bodyPr rtlCol="0" anchor="ctr" lIns="182880" rIns="100584" tIns="91440"/>
-          <a:lstStyle/>
-          <a:p>
-            <a:pPr algn="ctr">
-              <a:defRPr sz="1700" b="1">
-                <a:solidFill>
-                  <a:srgbClr val="232D37"/>
-                </a:solidFill>
-                <a:latin typeface="Aptos Display"/>
-              </a:defRPr>
-            </a:pPr>
-            <a:r>
-              <a:t>Sheet 2</a:t>
-            </a:r>
-          </a:p>
-          <a:p>
-            <a:pPr>
-              <a:spcBef>
-                <a:spcPts val="300"/>
-              </a:spcBef>
-              <a:defRPr sz="1200">
-                <a:solidFill>
-                  <a:srgbClr val="232D37"/>
-                </a:solidFill>
-                <a:latin typeface="Aptos"/>
-              </a:defRPr>
-            </a:pPr>
-            <a:r>
-              <a:t>Brokerage portfolios</a:t>
-            </a:r>
-          </a:p>
-          <a:p>
-            <a:pPr>
-              <a:spcBef>
-                <a:spcPts val="300"/>
-              </a:spcBef>
-              <a:defRPr sz="1200">
-                <a:solidFill>
-                  <a:srgbClr val="232D37"/>
-                </a:solidFill>
-                <a:latin typeface="Aptos"/>
-              </a:defRPr>
-            </a:pPr>
-            <a:r>
-              <a:t>One row per person × portfolio × year</a:t>
-            </a:r>
-          </a:p>
-          <a:p>
-            <a:pPr>
-              <a:spcBef>
-                <a:spcPts val="300"/>
-              </a:spcBef>
-              <a:defRPr sz="1200">
-                <a:solidFill>
-                  <a:srgbClr val="232D37"/>
-                </a:solidFill>
-                <a:latin typeface="Aptos"/>
-              </a:defRPr>
-            </a:pPr>
-            <a:r>
-              <a:t>Cost basis and expense-waterfall detail</a:t>
-            </a:r>
-          </a:p>
-        </p:txBody>
-      </p:sp>
-      <p:sp>
-        <p:nvSpPr>
-          <p:cNvPr id="11" name="Rectangle 10"/>
-          <p:cNvSpPr/>
-          <p:nvPr/>
-        </p:nvSpPr>
-        <p:spPr>
-          <a:xfrm>
-            <a:off x="8833104" y="1097280"/>
-            <a:ext cx="82296" cy="4434840"/>
-          </a:xfrm>
-          <a:prstGeom prst="rect">
-            <a:avLst/>
-          </a:prstGeom>
-          <a:solidFill>
-            <a:srgbClr val="7852B0"/>
-          </a:solidFill>
-          <a:ln>
-            <a:noFill/>
-          </a:ln>
-        </p:spPr>
-        <p:style>
-          <a:lnRef idx="1">
-            <a:schemeClr val="accent1"/>
-          </a:lnRef>
-          <a:fillRef idx="3">
-            <a:schemeClr val="accent1"/>
-          </a:fillRef>
-          <a:effectRef idx="2">
-            <a:schemeClr val="accent1"/>
-          </a:effectRef>
-          <a:fontRef idx="minor">
-            <a:schemeClr val="lt1"/>
-          </a:fontRef>
-        </p:style>
-        <p:txBody>
-          <a:bodyPr rtlCol="0" anchor="ctr"/>
-          <a:lstStyle/>
-          <a:p>
-            <a:pPr algn="ctr"/>
-          </a:p>
-        </p:txBody>
-      </p:sp>
-      <p:cxnSp>
-        <p:nvCxnSpPr>
-          <p:cNvPr id="12" name="Connector 11"/>
-          <p:cNvCxnSpPr/>
-          <p:nvPr/>
-        </p:nvCxnSpPr>
-        <p:spPr>
-          <a:xfrm>
-            <a:off x="3063240" y="3319272"/>
-            <a:ext cx="256032" cy="0"/>
-          </a:xfrm>
-          <a:prstGeom prst="line">
-            <a:avLst/>
-          </a:prstGeom>
-          <a:ln w="22860">
-            <a:solidFill>
-              <a:srgbClr val="266EB2"/>
-            </a:solidFill>
-          </a:ln>
-        </p:spPr>
-        <p:style>
-          <a:lnRef idx="2">
-            <a:schemeClr val="accent1"/>
-          </a:lnRef>
-          <a:fillRef idx="0">
-            <a:schemeClr val="accent1"/>
-          </a:fillRef>
-          <a:effectRef idx="1">
-            <a:schemeClr val="accent1"/>
-          </a:effectRef>
-          <a:fontRef idx="minor">
-            <a:schemeClr val="tx1"/>
-          </a:fontRef>
-        </p:style>
-      </p:cxnSp>
-      <p:cxnSp>
-        <p:nvCxnSpPr>
-          <p:cNvPr id="13" name="Connector 12"/>
-          <p:cNvCxnSpPr/>
-          <p:nvPr/>
-        </p:nvCxnSpPr>
-        <p:spPr>
-          <a:xfrm>
-            <a:off x="5779008" y="3319272"/>
-            <a:ext cx="256032" cy="0"/>
-          </a:xfrm>
-          <a:prstGeom prst="line">
-            <a:avLst/>
-          </a:prstGeom>
-          <a:ln w="22860">
-            <a:solidFill>
-              <a:srgbClr val="429761"/>
-            </a:solidFill>
-          </a:ln>
-        </p:spPr>
-        <p:style>
-          <a:lnRef idx="2">
-            <a:schemeClr val="accent1"/>
-          </a:lnRef>
-          <a:fillRef idx="0">
-            <a:schemeClr val="accent1"/>
-          </a:fillRef>
-          <a:effectRef idx="1">
-            <a:schemeClr val="accent1"/>
-          </a:effectRef>
-          <a:fontRef idx="minor">
-            <a:schemeClr val="tx1"/>
-          </a:fontRef>
-        </p:style>
-      </p:cxnSp>
-      <p:cxnSp>
-        <p:nvCxnSpPr>
-          <p:cNvPr id="14" name="Connector 13"/>
-          <p:cNvCxnSpPr/>
-          <p:nvPr/>
-        </p:nvCxnSpPr>
-        <p:spPr>
-          <a:xfrm>
-            <a:off x="8494776" y="3319272"/>
-            <a:ext cx="256031" cy="0"/>
-          </a:xfrm>
-          <a:prstGeom prst="line">
-            <a:avLst/>
-          </a:prstGeom>
-          <a:ln w="22860">
-            <a:solidFill>
-              <a:srgbClr val="E5892A"/>
-            </a:solidFill>
-          </a:ln>
-        </p:spPr>
-        <p:style>
-          <a:lnRef idx="2">
-            <a:schemeClr val="accent1"/>
-          </a:lnRef>
-          <a:fillRef idx="0">
-            <a:schemeClr val="accent1"/>
-          </a:fillRef>
-          <a:effectRef idx="1">
-            <a:schemeClr val="accent1"/>
-          </a:effectRef>
-          <a:fontRef idx="minor">
-            <a:schemeClr val="tx1"/>
-          </a:fontRef>
-        </p:style>
-      </p:cxnSp>
-      <p:sp>
-        <p:nvSpPr>
-          <p:cNvPr id="15" name="TextBox 14"/>
-          <p:cNvSpPr txBox="1"/>
-          <p:nvPr/>
-        </p:nvSpPr>
-        <p:spPr>
-          <a:xfrm>
-            <a:off x="685800" y="5806440"/>
-            <a:ext cx="10789920" cy="274320"/>
-          </a:xfrm>
-          <a:prstGeom prst="rect">
-            <a:avLst/>
-          </a:prstGeom>
-          <a:noFill/>
-        </p:spPr>
-        <p:txBody>
-          <a:bodyPr wrap="none" anchor="ctr">
-            <a:spAutoFit/>
-          </a:bodyPr>
-          <a:lstStyle/>
-          <a:p>
-            <a:pPr algn="ctr">
-              <a:defRPr sz="1200" b="1">
-                <a:solidFill>
-                  <a:srgbClr val="0F2647"/>
-                </a:solidFill>
-                <a:latin typeface="Aptos"/>
-              </a:defRPr>
-            </a:pPr>
-            <a:r>
-              <a:t>If the projection is empty or XLSX did not load, the app alerts instead of downloading an empty or broken workbook.</a:t>
-            </a:r>
-          </a:p>
-        </p:txBody>
-      </p:sp>
-      <p:sp>
-        <p:nvSpPr>
-          <p:cNvPr id="16" name="Rectangle 15"/>
+          <p:cNvPr id="12" name="Rectangle 11"/>
           <p:cNvSpPr/>
           <p:nvPr/>
         </p:nvSpPr>
@@ -8861,7 +8906,7 @@
       </p:sp>
       <p:sp>
         <p:nvSpPr>
-          <p:cNvPr id="17" name="TextBox 16"/>
+          <p:cNvPr id="13" name="TextBox 12"/>
           <p:cNvSpPr txBox="1"/>
           <p:nvPr/>
         </p:nvSpPr>
@@ -8890,7 +8935,7 @@
               </a:defRPr>
             </a:pPr>
             <a:r>
-              <a:t>Retirement Income Planner • Architecture overview • IRMAA and Excel-export update</a:t>
+              <a:t>Retirement Income Planner • Architecture overview • Basis-percentage and formula-page update</a:t>
             </a:r>
           </a:p>
         </p:txBody>
@@ -8952,7 +8997,7 @@
               </a:defRPr>
             </a:pPr>
             <a:r>
-              <a:t>Updated project structure and load sequence</a:t>
+              <a:t>Inputs, outputs, and export remain aligned</a:t>
             </a:r>
           </a:p>
         </p:txBody>
@@ -8966,7 +9011,7 @@
         <p:spPr>
           <a:xfrm>
             <a:off x="530352" y="786384"/>
-            <a:ext cx="10972800" cy="219456"/>
+            <a:ext cx="10972800" cy="228600"/>
           </a:xfrm>
           <a:prstGeom prst="rect">
             <a:avLst/>
@@ -8988,7 +9033,7 @@
               </a:defRPr>
             </a:pPr>
             <a:r>
-              <a:t>excelExport.js joins the display utilities; the app otherwise retains its plain-script, no-build architecture.</a:t>
+              <a:t>The field rename does not alter the core data-flow boundary: input state → projection rows → presentation and workbook.</a:t>
             </a:r>
           </a:p>
         </p:txBody>
@@ -9001,18 +9046,18 @@
         </p:nvSpPr>
         <p:spPr>
           <a:xfrm>
-            <a:off x="502920" y="1124712"/>
-            <a:ext cx="2331720" cy="4526280"/>
+            <a:off x="548640" y="1188720"/>
+            <a:ext cx="2606040" cy="4526280"/>
           </a:xfrm>
           <a:prstGeom prst="roundRect">
             <a:avLst/>
           </a:prstGeom>
           <a:solidFill>
-            <a:srgbClr val="F8FAFC"/>
+            <a:srgbClr val="E9F4FF"/>
           </a:solidFill>
           <a:ln w="13970">
             <a:solidFill>
-              <a:srgbClr val="0F2647"/>
+              <a:srgbClr val="266EB2"/>
             </a:solidFill>
           </a:ln>
         </p:spPr>
@@ -9043,7 +9088,7 @@
               </a:defRPr>
             </a:pPr>
             <a:r>
-              <a:t>Core</a:t>
+              <a:t>Brokerage input</a:t>
             </a:r>
           </a:p>
           <a:p>
@@ -9059,7 +9104,7 @@
               </a:defRPr>
             </a:pPr>
             <a:r>
-              <a:t>constants.js</a:t>
+              <a:t>basisPct % field</a:t>
             </a:r>
           </a:p>
           <a:p>
@@ -9075,7 +9120,7 @@
               </a:defRPr>
             </a:pPr>
             <a:r>
-              <a:t>helpers.js</a:t>
+              <a:t>0–100, blank = null</a:t>
             </a:r>
           </a:p>
           <a:p>
@@ -9091,7 +9136,7 @@
               </a:defRPr>
             </a:pPr>
             <a:r>
-              <a:t>state.js</a:t>
+              <a:t>Enable / Hide independent</a:t>
             </a:r>
           </a:p>
           <a:p>
@@ -9107,7 +9152,7 @@
               </a:defRPr>
             </a:pPr>
             <a:r>
-              <a:t>Reference data, utilities, defaults, persistence</a:t>
+              <a:t>IRMAA option remains within Expenses</a:t>
             </a:r>
           </a:p>
         </p:txBody>
@@ -9120,14 +9165,14 @@
         </p:nvSpPr>
         <p:spPr>
           <a:xfrm>
-            <a:off x="502920" y="1124712"/>
+            <a:off x="548640" y="1188720"/>
             <a:ext cx="82296" cy="4526280"/>
           </a:xfrm>
           <a:prstGeom prst="rect">
             <a:avLst/>
           </a:prstGeom>
           <a:solidFill>
-            <a:srgbClr val="0F2647"/>
+            <a:srgbClr val="266EB2"/>
           </a:solidFill>
           <a:ln>
             <a:noFill/>
@@ -9163,8 +9208,8 @@
         </p:nvSpPr>
         <p:spPr>
           <a:xfrm>
-            <a:off x="3218688" y="1124712"/>
-            <a:ext cx="2331720" cy="4526280"/>
+            <a:off x="3520440" y="1188720"/>
+            <a:ext cx="2606040" cy="4526280"/>
           </a:xfrm>
           <a:prstGeom prst="roundRect">
             <a:avLst/>
@@ -9205,7 +9250,7 @@
               </a:defRPr>
             </a:pPr>
             <a:r>
-              <a:t>Compute</a:t>
+              <a:t>State &amp; compute</a:t>
             </a:r>
           </a:p>
           <a:p>
@@ -9221,7 +9266,7 @@
               </a:defRPr>
             </a:pPr>
             <a:r>
-              <a:t>SS, RMD, tax</a:t>
+              <a:t>hydrate migrates legacy data</a:t>
             </a:r>
           </a:p>
           <a:p>
@@ -9237,7 +9282,7 @@
               </a:defRPr>
             </a:pPr>
             <a:r>
-              <a:t>dates, age range</a:t>
+              <a:t>projection converts % to dollar basis</a:t>
             </a:r>
           </a:p>
           <a:p>
@@ -9253,23 +9298,7 @@
               </a:defRPr>
             </a:pPr>
             <a:r>
-              <a:t>projection</a:t>
-            </a:r>
-          </a:p>
-          <a:p>
-            <a:pPr>
-              <a:spcBef>
-                <a:spcPts val="300"/>
-              </a:spcBef>
-              <a:defRPr sz="1200">
-                <a:solidFill>
-                  <a:srgbClr val="232D37"/>
-                </a:solidFill>
-                <a:latin typeface="Aptos"/>
-              </a:defRPr>
-            </a:pPr>
-            <a:r>
-              <a:t>what-if</a:t>
+              <a:t>Annual rows include basis, gains, waterfall, IRMAA</a:t>
             </a:r>
           </a:p>
         </p:txBody>
@@ -9282,7 +9311,7 @@
         </p:nvSpPr>
         <p:spPr>
           <a:xfrm>
-            <a:off x="3218688" y="1124712"/>
+            <a:off x="3520440" y="1188720"/>
             <a:ext cx="82296" cy="4526280"/>
           </a:xfrm>
           <a:prstGeom prst="rect">
@@ -9325,170 +9354,8 @@
         </p:nvSpPr>
         <p:spPr>
           <a:xfrm>
-            <a:off x="5934456" y="1124712"/>
-            <a:ext cx="2331720" cy="4526280"/>
-          </a:xfrm>
-          <a:prstGeom prst="roundRect">
-            <a:avLst/>
-          </a:prstGeom>
-          <a:solidFill>
-            <a:srgbClr val="E9F4FF"/>
-          </a:solidFill>
-          <a:ln w="13970">
-            <a:solidFill>
-              <a:srgbClr val="266EB2"/>
-            </a:solidFill>
-          </a:ln>
-        </p:spPr>
-        <p:style>
-          <a:lnRef idx="1">
-            <a:schemeClr val="accent1"/>
-          </a:lnRef>
-          <a:fillRef idx="3">
-            <a:schemeClr val="accent1"/>
-          </a:fillRef>
-          <a:effectRef idx="2">
-            <a:schemeClr val="accent1"/>
-          </a:effectRef>
-          <a:fontRef idx="minor">
-            <a:schemeClr val="lt1"/>
-          </a:fontRef>
-        </p:style>
-        <p:txBody>
-          <a:bodyPr rtlCol="0" anchor="ctr" lIns="182880" rIns="100584" tIns="91440"/>
-          <a:lstStyle/>
-          <a:p>
-            <a:pPr algn="ctr">
-              <a:defRPr sz="1700" b="1">
-                <a:solidFill>
-                  <a:srgbClr val="232D37"/>
-                </a:solidFill>
-                <a:latin typeface="Aptos Display"/>
-              </a:defRPr>
-            </a:pPr>
-            <a:r>
-              <a:t>Input</a:t>
-            </a:r>
-          </a:p>
-          <a:p>
-            <a:pPr>
-              <a:spcBef>
-                <a:spcPts val="300"/>
-              </a:spcBef>
-              <a:defRPr sz="1200">
-                <a:solidFill>
-                  <a:srgbClr val="232D37"/>
-                </a:solidFill>
-                <a:latin typeface="Aptos"/>
-              </a:defRPr>
-            </a:pPr>
-            <a:r>
-              <a:t>Shared controls</a:t>
-            </a:r>
-          </a:p>
-          <a:p>
-            <a:pPr>
-              <a:spcBef>
-                <a:spcPts val="300"/>
-              </a:spcBef>
-              <a:defRPr sz="1200">
-                <a:solidFill>
-                  <a:srgbClr val="232D37"/>
-                </a:solidFill>
-                <a:latin typeface="Aptos"/>
-              </a:defRPr>
-            </a:pPr>
-            <a:r>
-              <a:t>Household &amp; assumptions</a:t>
-            </a:r>
-          </a:p>
-          <a:p>
-            <a:pPr>
-              <a:spcBef>
-                <a:spcPts val="300"/>
-              </a:spcBef>
-              <a:defRPr sz="1200">
-                <a:solidFill>
-                  <a:srgbClr val="232D37"/>
-                </a:solidFill>
-                <a:latin typeface="Aptos"/>
-              </a:defRPr>
-            </a:pPr>
-            <a:r>
-              <a:t>Income cards</a:t>
-            </a:r>
-          </a:p>
-          <a:p>
-            <a:pPr>
-              <a:spcBef>
-                <a:spcPts val="300"/>
-              </a:spcBef>
-              <a:defRPr sz="1200">
-                <a:solidFill>
-                  <a:srgbClr val="232D37"/>
-                </a:solidFill>
-                <a:latin typeface="Aptos"/>
-              </a:defRPr>
-            </a:pPr>
-            <a:r>
-              <a:t>Load menu</a:t>
-            </a:r>
-          </a:p>
-        </p:txBody>
-      </p:sp>
-      <p:sp>
-        <p:nvSpPr>
-          <p:cNvPr id="9" name="Rectangle 8"/>
-          <p:cNvSpPr/>
-          <p:nvPr/>
-        </p:nvSpPr>
-        <p:spPr>
-          <a:xfrm>
-            <a:off x="5934456" y="1124712"/>
-            <a:ext cx="82296" cy="4526280"/>
-          </a:xfrm>
-          <a:prstGeom prst="rect">
-            <a:avLst/>
-          </a:prstGeom>
-          <a:solidFill>
-            <a:srgbClr val="266EB2"/>
-          </a:solidFill>
-          <a:ln>
-            <a:noFill/>
-          </a:ln>
-        </p:spPr>
-        <p:style>
-          <a:lnRef idx="1">
-            <a:schemeClr val="accent1"/>
-          </a:lnRef>
-          <a:fillRef idx="3">
-            <a:schemeClr val="accent1"/>
-          </a:fillRef>
-          <a:effectRef idx="2">
-            <a:schemeClr val="accent1"/>
-          </a:effectRef>
-          <a:fontRef idx="minor">
-            <a:schemeClr val="lt1"/>
-          </a:fontRef>
-        </p:style>
-        <p:txBody>
-          <a:bodyPr rtlCol="0" anchor="ctr"/>
-          <a:lstStyle/>
-          <a:p>
-            <a:pPr algn="ctr"/>
-          </a:p>
-        </p:txBody>
-      </p:sp>
-      <p:sp>
-        <p:nvSpPr>
-          <p:cNvPr id="10" name="Rounded Rectangle 9"/>
-          <p:cNvSpPr/>
-          <p:nvPr/>
-        </p:nvSpPr>
-        <p:spPr>
-          <a:xfrm>
-            <a:off x="8650224" y="1124712"/>
-            <a:ext cx="2926080" cy="4526280"/>
+            <a:off x="6492240" y="1188720"/>
+            <a:ext cx="2606040" cy="4526280"/>
           </a:xfrm>
           <a:prstGeom prst="roundRect">
             <a:avLst/>
@@ -9529,7 +9396,7 @@
               </a:defRPr>
             </a:pPr>
             <a:r>
-              <a:t>Display &amp; export</a:t>
+              <a:t>Charts &amp; pages</a:t>
             </a:r>
           </a:p>
           <a:p>
@@ -9545,7 +9412,7 @@
               </a:defRPr>
             </a:pPr>
             <a:r>
-              <a:t>Charts / overlays / footer</a:t>
+              <a:t>Asset chart uses projection basis/gain fields</a:t>
             </a:r>
           </a:p>
           <a:p>
@@ -9561,7 +9428,7 @@
               </a:defRPr>
             </a:pPr>
             <a:r>
-              <a:t>Formulas and Notes pages</a:t>
+              <a:t>Formulas page explains math</a:t>
             </a:r>
           </a:p>
           <a:p>
@@ -9577,36 +9444,20 @@
               </a:defRPr>
             </a:pPr>
             <a:r>
-              <a:t>excelExport.js</a:t>
-            </a:r>
-          </a:p>
-          <a:p>
-            <a:pPr>
-              <a:spcBef>
-                <a:spcPts val="300"/>
-              </a:spcBef>
-              <a:defRPr sz="1200">
-                <a:solidFill>
-                  <a:srgbClr val="232D37"/>
-                </a:solidFill>
-                <a:latin typeface="Aptos"/>
-              </a:defRPr>
-            </a:pPr>
-            <a:r>
-              <a:t>SheetJS CDN dependency</a:t>
-            </a:r>
-          </a:p>
-        </p:txBody>
-      </p:sp>
-      <p:sp>
-        <p:nvSpPr>
-          <p:cNvPr id="11" name="Rectangle 10"/>
+              <a:t>Notes remain externally authored Markdown</a:t>
+            </a:r>
+          </a:p>
+        </p:txBody>
+      </p:sp>
+      <p:sp>
+        <p:nvSpPr>
+          <p:cNvPr id="9" name="Rectangle 8"/>
           <p:cNvSpPr/>
           <p:nvPr/>
         </p:nvSpPr>
         <p:spPr>
           <a:xfrm>
-            <a:off x="8650224" y="1124712"/>
+            <a:off x="6492240" y="1188720"/>
             <a:ext cx="82296" cy="4526280"/>
           </a:xfrm>
           <a:prstGeom prst="rect">
@@ -9641,6 +9492,168 @@
           </a:p>
         </p:txBody>
       </p:sp>
+      <p:sp>
+        <p:nvSpPr>
+          <p:cNvPr id="10" name="Rounded Rectangle 9"/>
+          <p:cNvSpPr/>
+          <p:nvPr/>
+        </p:nvSpPr>
+        <p:spPr>
+          <a:xfrm>
+            <a:off x="9464040" y="1188720"/>
+            <a:ext cx="2148840" cy="4526280"/>
+          </a:xfrm>
+          <a:prstGeom prst="roundRect">
+            <a:avLst/>
+          </a:prstGeom>
+          <a:solidFill>
+            <a:srgbClr val="FFF6E8"/>
+          </a:solidFill>
+          <a:ln w="13970">
+            <a:solidFill>
+              <a:srgbClr val="E5892A"/>
+            </a:solidFill>
+          </a:ln>
+        </p:spPr>
+        <p:style>
+          <a:lnRef idx="1">
+            <a:schemeClr val="accent1"/>
+          </a:lnRef>
+          <a:fillRef idx="3">
+            <a:schemeClr val="accent1"/>
+          </a:fillRef>
+          <a:effectRef idx="2">
+            <a:schemeClr val="accent1"/>
+          </a:effectRef>
+          <a:fontRef idx="minor">
+            <a:schemeClr val="lt1"/>
+          </a:fontRef>
+        </p:style>
+        <p:txBody>
+          <a:bodyPr rtlCol="0" anchor="ctr" lIns="182880" rIns="100584" tIns="91440"/>
+          <a:lstStyle/>
+          <a:p>
+            <a:pPr algn="ctr">
+              <a:defRPr sz="1700" b="1">
+                <a:solidFill>
+                  <a:srgbClr val="232D37"/>
+                </a:solidFill>
+                <a:latin typeface="Aptos Display"/>
+              </a:defRPr>
+            </a:pPr>
+            <a:r>
+              <a:t>Excel</a:t>
+            </a:r>
+          </a:p>
+          <a:p>
+            <a:pPr>
+              <a:spcBef>
+                <a:spcPts val="300"/>
+              </a:spcBef>
+              <a:defRPr sz="1200">
+                <a:solidFill>
+                  <a:srgbClr val="232D37"/>
+                </a:solidFill>
+                <a:latin typeface="Aptos"/>
+              </a:defRPr>
+            </a:pPr>
+            <a:r>
+              <a:t>Reads lastProjection</a:t>
+            </a:r>
+          </a:p>
+          <a:p>
+            <a:pPr>
+              <a:spcBef>
+                <a:spcPts val="300"/>
+              </a:spcBef>
+              <a:defRPr sz="1200">
+                <a:solidFill>
+                  <a:srgbClr val="232D37"/>
+                </a:solidFill>
+                <a:latin typeface="Aptos"/>
+              </a:defRPr>
+            </a:pPr>
+            <a:r>
+              <a:t>Projection-by-year sheet</a:t>
+            </a:r>
+          </a:p>
+          <a:p>
+            <a:pPr>
+              <a:spcBef>
+                <a:spcPts val="300"/>
+              </a:spcBef>
+              <a:defRPr sz="1200">
+                <a:solidFill>
+                  <a:srgbClr val="232D37"/>
+                </a:solidFill>
+                <a:latin typeface="Aptos"/>
+              </a:defRPr>
+            </a:pPr>
+            <a:r>
+              <a:t>Brokerage-detail sheet</a:t>
+            </a:r>
+          </a:p>
+          <a:p>
+            <a:pPr>
+              <a:spcBef>
+                <a:spcPts val="300"/>
+              </a:spcBef>
+              <a:defRPr sz="1200">
+                <a:solidFill>
+                  <a:srgbClr val="232D37"/>
+                </a:solidFill>
+                <a:latin typeface="Aptos"/>
+              </a:defRPr>
+            </a:pPr>
+            <a:r>
+              <a:t>Never mutates state</a:t>
+            </a:r>
+          </a:p>
+        </p:txBody>
+      </p:sp>
+      <p:sp>
+        <p:nvSpPr>
+          <p:cNvPr id="11" name="Rectangle 10"/>
+          <p:cNvSpPr/>
+          <p:nvPr/>
+        </p:nvSpPr>
+        <p:spPr>
+          <a:xfrm>
+            <a:off x="9464040" y="1188720"/>
+            <a:ext cx="82296" cy="4526280"/>
+          </a:xfrm>
+          <a:prstGeom prst="rect">
+            <a:avLst/>
+          </a:prstGeom>
+          <a:solidFill>
+            <a:srgbClr val="E5892A"/>
+          </a:solidFill>
+          <a:ln>
+            <a:noFill/>
+          </a:ln>
+        </p:spPr>
+        <p:style>
+          <a:lnRef idx="1">
+            <a:schemeClr val="accent1"/>
+          </a:lnRef>
+          <a:fillRef idx="3">
+            <a:schemeClr val="accent1"/>
+          </a:fillRef>
+          <a:effectRef idx="2">
+            <a:schemeClr val="accent1"/>
+          </a:effectRef>
+          <a:fontRef idx="minor">
+            <a:schemeClr val="lt1"/>
+          </a:fontRef>
+        </p:style>
+        <p:txBody>
+          <a:bodyPr rtlCol="0" anchor="ctr"/>
+          <a:lstStyle/>
+          <a:p>
+            <a:pPr algn="ctr"/>
+          </a:p>
+        </p:txBody>
+      </p:sp>
       <p:cxnSp>
         <p:nvCxnSpPr>
           <p:cNvPr id="12" name="Connector 11"/>
@@ -9649,15 +9662,15 @@
         </p:nvCxnSpPr>
         <p:spPr>
           <a:xfrm>
-            <a:off x="2880360" y="3383280"/>
-            <a:ext cx="201168" cy="0"/>
+            <a:off x="3200400" y="3383280"/>
+            <a:ext cx="256032" cy="0"/>
           </a:xfrm>
           <a:prstGeom prst="line">
             <a:avLst/>
           </a:prstGeom>
           <a:ln w="22860">
             <a:solidFill>
-              <a:srgbClr val="0F2647"/>
+              <a:srgbClr val="266EB2"/>
             </a:solidFill>
           </a:ln>
         </p:spPr>
@@ -9684,8 +9697,8 @@
         </p:nvCxnSpPr>
         <p:spPr>
           <a:xfrm>
-            <a:off x="5596128" y="3383280"/>
-            <a:ext cx="201168" cy="0"/>
+            <a:off x="6172200" y="3383280"/>
+            <a:ext cx="256032" cy="0"/>
           </a:xfrm>
           <a:prstGeom prst="line">
             <a:avLst/>
@@ -9719,15 +9732,15 @@
         </p:nvCxnSpPr>
         <p:spPr>
           <a:xfrm>
-            <a:off x="8311896" y="3383280"/>
-            <a:ext cx="201168" cy="0"/>
+            <a:off x="9144000" y="3383280"/>
+            <a:ext cx="256032" cy="0"/>
           </a:xfrm>
           <a:prstGeom prst="line">
             <a:avLst/>
           </a:prstGeom>
           <a:ln w="22860">
             <a:solidFill>
-              <a:srgbClr val="266EB2"/>
+              <a:srgbClr val="7852B0"/>
             </a:solidFill>
           </a:ln>
         </p:spPr>
@@ -9748,43 +9761,7 @@
       </p:cxnSp>
       <p:sp>
         <p:nvSpPr>
-          <p:cNvPr id="15" name="TextBox 14"/>
-          <p:cNvSpPr txBox="1"/>
-          <p:nvPr/>
-        </p:nvSpPr>
-        <p:spPr>
-          <a:xfrm>
-            <a:off x="640080" y="5943600"/>
-            <a:ext cx="10881360" cy="228600"/>
-          </a:xfrm>
-          <a:prstGeom prst="rect">
-            <a:avLst/>
-          </a:prstGeom>
-          <a:noFill/>
-        </p:spPr>
-        <p:txBody>
-          <a:bodyPr wrap="none" anchor="ctr">
-            <a:spAutoFit/>
-          </a:bodyPr>
-          <a:lstStyle/>
-          <a:p>
-            <a:pPr algn="ctr">
-              <a:defRPr sz="1200" b="1">
-                <a:solidFill>
-                  <a:srgbClr val="0F2647"/>
-                </a:solidFill>
-                <a:latin typeface="Aptos"/>
-              </a:defRPr>
-            </a:pPr>
-            <a:r>
-              <a:t>Dependency rule: load a script only after every global it needs is available.</a:t>
-            </a:r>
-          </a:p>
-        </p:txBody>
-      </p:sp>
-      <p:sp>
-        <p:nvSpPr>
-          <p:cNvPr id="16" name="Rectangle 15"/>
+          <p:cNvPr id="15" name="Rectangle 14"/>
           <p:cNvSpPr/>
           <p:nvPr/>
         </p:nvSpPr>
@@ -9827,7 +9804,7 @@
       </p:sp>
       <p:sp>
         <p:nvSpPr>
-          <p:cNvPr id="17" name="TextBox 16"/>
+          <p:cNvPr id="16" name="TextBox 15"/>
           <p:cNvSpPr txBox="1"/>
           <p:nvPr/>
         </p:nvSpPr>
@@ -9856,7 +9833,7 @@
               </a:defRPr>
             </a:pPr>
             <a:r>
-              <a:t>Retirement Income Planner • Architecture overview • IRMAA and Excel-export update</a:t>
+              <a:t>Retirement Income Planner • Architecture overview • Basis-percentage and formula-page update</a:t>
             </a:r>
           </a:p>
         </p:txBody>
@@ -9918,7 +9895,7 @@
               </a:defRPr>
             </a:pPr>
             <a:r>
-              <a:t>Implementation guardrails</a:t>
+              <a:t>Guardrails for future state-schema changes</a:t>
             </a:r>
           </a:p>
         </p:txBody>
@@ -9932,7 +9909,7 @@
         <p:spPr>
           <a:xfrm>
             <a:off x="530352" y="786384"/>
-            <a:ext cx="10972800" cy="219456"/>
+            <a:ext cx="10972800" cy="228600"/>
           </a:xfrm>
           <a:prstGeom prst="rect">
             <a:avLst/>
@@ -9954,7 +9931,7 @@
               </a:defRPr>
             </a:pPr>
             <a:r>
-              <a:t>The new features preserve the original separation of responsibilities and data contracts.</a:t>
+              <a:t>Use the same migration and contract discipline whenever an input’s units, shape, or meaning changes.</a:t>
             </a:r>
           </a:p>
         </p:txBody>
@@ -9968,6 +9945,152 @@
         <p:spPr>
           <a:xfrm>
             <a:off x="640080" y="1234440"/>
+            <a:ext cx="3383280" cy="4434840"/>
+          </a:xfrm>
+          <a:prstGeom prst="roundRect">
+            <a:avLst/>
+          </a:prstGeom>
+          <a:solidFill>
+            <a:srgbClr val="E9F4FF"/>
+          </a:solidFill>
+          <a:ln w="13970">
+            <a:solidFill>
+              <a:srgbClr val="266EB2"/>
+            </a:solidFill>
+          </a:ln>
+        </p:spPr>
+        <p:style>
+          <a:lnRef idx="1">
+            <a:schemeClr val="accent1"/>
+          </a:lnRef>
+          <a:fillRef idx="3">
+            <a:schemeClr val="accent1"/>
+          </a:fillRef>
+          <a:effectRef idx="2">
+            <a:schemeClr val="accent1"/>
+          </a:effectRef>
+          <a:fontRef idx="minor">
+            <a:schemeClr val="lt1"/>
+          </a:fontRef>
+        </p:style>
+        <p:txBody>
+          <a:bodyPr rtlCol="0" anchor="ctr" lIns="182880" rIns="100584" tIns="91440"/>
+          <a:lstStyle/>
+          <a:p>
+            <a:pPr algn="ctr">
+              <a:defRPr sz="1700" b="1">
+                <a:solidFill>
+                  <a:srgbClr val="232D37"/>
+                </a:solidFill>
+                <a:latin typeface="Aptos Display"/>
+              </a:defRPr>
+            </a:pPr>
+            <a:r>
+              <a:t>State first</a:t>
+            </a:r>
+          </a:p>
+          <a:p>
+            <a:pPr>
+              <a:spcBef>
+                <a:spcPts val="300"/>
+              </a:spcBef>
+              <a:defRPr sz="1200">
+                <a:solidFill>
+                  <a:srgbClr val="232D37"/>
+                </a:solidFill>
+                <a:latin typeface="Aptos"/>
+              </a:defRPr>
+            </a:pPr>
+            <a:r>
+              <a:t>Define the new canonical field and default in state.js.</a:t>
+            </a:r>
+          </a:p>
+          <a:p>
+            <a:pPr>
+              <a:spcBef>
+                <a:spcPts val="300"/>
+              </a:spcBef>
+              <a:defRPr sz="1200">
+                <a:solidFill>
+                  <a:srgbClr val="232D37"/>
+                </a:solidFill>
+                <a:latin typeface="Aptos"/>
+              </a:defRPr>
+            </a:pPr>
+            <a:r>
+              <a:t>Decide null semantics explicitly.</a:t>
+            </a:r>
+          </a:p>
+          <a:p>
+            <a:pPr>
+              <a:spcBef>
+                <a:spcPts val="300"/>
+              </a:spcBef>
+              <a:defRPr sz="1200">
+                <a:solidFill>
+                  <a:srgbClr val="232D37"/>
+                </a:solidFill>
+                <a:latin typeface="Aptos"/>
+              </a:defRPr>
+            </a:pPr>
+            <a:r>
+              <a:t>Provide hydration migration for meaningful legacy values.</a:t>
+            </a:r>
+          </a:p>
+        </p:txBody>
+      </p:sp>
+      <p:sp>
+        <p:nvSpPr>
+          <p:cNvPr id="5" name="Rectangle 4"/>
+          <p:cNvSpPr/>
+          <p:nvPr/>
+        </p:nvSpPr>
+        <p:spPr>
+          <a:xfrm>
+            <a:off x="640080" y="1234440"/>
+            <a:ext cx="82296" cy="4434840"/>
+          </a:xfrm>
+          <a:prstGeom prst="rect">
+            <a:avLst/>
+          </a:prstGeom>
+          <a:solidFill>
+            <a:srgbClr val="266EB2"/>
+          </a:solidFill>
+          <a:ln>
+            <a:noFill/>
+          </a:ln>
+        </p:spPr>
+        <p:style>
+          <a:lnRef idx="1">
+            <a:schemeClr val="accent1"/>
+          </a:lnRef>
+          <a:fillRef idx="3">
+            <a:schemeClr val="accent1"/>
+          </a:fillRef>
+          <a:effectRef idx="2">
+            <a:schemeClr val="accent1"/>
+          </a:effectRef>
+          <a:fontRef idx="minor">
+            <a:schemeClr val="lt1"/>
+          </a:fontRef>
+        </p:style>
+        <p:txBody>
+          <a:bodyPr rtlCol="0" anchor="ctr"/>
+          <a:lstStyle/>
+          <a:p>
+            <a:pPr algn="ctr"/>
+          </a:p>
+        </p:txBody>
+      </p:sp>
+      <p:sp>
+        <p:nvSpPr>
+          <p:cNvPr id="6" name="Rounded Rectangle 5"/>
+          <p:cNvSpPr/>
+          <p:nvPr/>
+        </p:nvSpPr>
+        <p:spPr>
+          <a:xfrm>
+            <a:off x="4407408" y="1234440"/>
             <a:ext cx="3383280" cy="4434840"/>
           </a:xfrm>
           <a:prstGeom prst="roundRect">
@@ -10009,7 +10132,7 @@
               </a:defRPr>
             </a:pPr>
             <a:r>
-              <a:t>Model correctly</a:t>
+              <a:t>Projection second</a:t>
             </a:r>
           </a:p>
           <a:p>
@@ -10025,7 +10148,7 @@
               </a:defRPr>
             </a:pPr>
             <a:r>
-              <a:t>IRMAA is a household amount, but an optional portfolio-funded expense.</a:t>
+              <a:t>Convert input units at a defined modeling boundary.</a:t>
             </a:r>
           </a:p>
           <a:p>
@@ -10041,7 +10164,7 @@
               </a:defRPr>
             </a:pPr>
             <a:r>
-              <a:t>Use prior-year AGI for surcharge tier and prior-year tax for LTCG estimation.</a:t>
+              <a:t>Keep calculation logic in Compute.</a:t>
             </a:r>
           </a:p>
           <a:p>
@@ -10057,20 +10180,20 @@
               </a:defRPr>
             </a:pPr>
             <a:r>
-              <a:t>Never fund one portfolio’s expenses with another portfolio or household income.</a:t>
-            </a:r>
-          </a:p>
-        </p:txBody>
-      </p:sp>
-      <p:sp>
-        <p:nvSpPr>
-          <p:cNvPr id="5" name="Rectangle 4"/>
+              <a:t>Add derived fields to the projection-row contract.</a:t>
+            </a:r>
+          </a:p>
+        </p:txBody>
+      </p:sp>
+      <p:sp>
+        <p:nvSpPr>
+          <p:cNvPr id="7" name="Rectangle 6"/>
           <p:cNvSpPr/>
           <p:nvPr/>
         </p:nvSpPr>
         <p:spPr>
           <a:xfrm>
-            <a:off x="640080" y="1234440"/>
+            <a:off x="4407408" y="1234440"/>
             <a:ext cx="82296" cy="4434840"/>
           </a:xfrm>
           <a:prstGeom prst="rect">
@@ -10078,152 +10201,6 @@
           </a:prstGeom>
           <a:solidFill>
             <a:srgbClr val="429761"/>
-          </a:solidFill>
-          <a:ln>
-            <a:noFill/>
-          </a:ln>
-        </p:spPr>
-        <p:style>
-          <a:lnRef idx="1">
-            <a:schemeClr val="accent1"/>
-          </a:lnRef>
-          <a:fillRef idx="3">
-            <a:schemeClr val="accent1"/>
-          </a:fillRef>
-          <a:effectRef idx="2">
-            <a:schemeClr val="accent1"/>
-          </a:effectRef>
-          <a:fontRef idx="minor">
-            <a:schemeClr val="lt1"/>
-          </a:fontRef>
-        </p:style>
-        <p:txBody>
-          <a:bodyPr rtlCol="0" anchor="ctr"/>
-          <a:lstStyle/>
-          <a:p>
-            <a:pPr algn="ctr"/>
-          </a:p>
-        </p:txBody>
-      </p:sp>
-      <p:sp>
-        <p:nvSpPr>
-          <p:cNvPr id="6" name="Rounded Rectangle 5"/>
-          <p:cNvSpPr/>
-          <p:nvPr/>
-        </p:nvSpPr>
-        <p:spPr>
-          <a:xfrm>
-            <a:off x="4407408" y="1234440"/>
-            <a:ext cx="3383280" cy="4434840"/>
-          </a:xfrm>
-          <a:prstGeom prst="roundRect">
-            <a:avLst/>
-          </a:prstGeom>
-          <a:solidFill>
-            <a:srgbClr val="E9F4FF"/>
-          </a:solidFill>
-          <a:ln w="13970">
-            <a:solidFill>
-              <a:srgbClr val="266EB2"/>
-            </a:solidFill>
-          </a:ln>
-        </p:spPr>
-        <p:style>
-          <a:lnRef idx="1">
-            <a:schemeClr val="accent1"/>
-          </a:lnRef>
-          <a:fillRef idx="3">
-            <a:schemeClr val="accent1"/>
-          </a:fillRef>
-          <a:effectRef idx="2">
-            <a:schemeClr val="accent1"/>
-          </a:effectRef>
-          <a:fontRef idx="minor">
-            <a:schemeClr val="lt1"/>
-          </a:fontRef>
-        </p:style>
-        <p:txBody>
-          <a:bodyPr rtlCol="0" anchor="ctr" lIns="182880" rIns="100584" tIns="91440"/>
-          <a:lstStyle/>
-          <a:p>
-            <a:pPr algn="ctr">
-              <a:defRPr sz="1700" b="1">
-                <a:solidFill>
-                  <a:srgbClr val="232D37"/>
-                </a:solidFill>
-                <a:latin typeface="Aptos Display"/>
-              </a:defRPr>
-            </a:pPr>
-            <a:r>
-              <a:t>Expose via rows</a:t>
-            </a:r>
-          </a:p>
-          <a:p>
-            <a:pPr>
-              <a:spcBef>
-                <a:spcPts val="300"/>
-              </a:spcBef>
-              <a:defRPr sz="1200">
-                <a:solidFill>
-                  <a:srgbClr val="232D37"/>
-                </a:solidFill>
-                <a:latin typeface="Aptos"/>
-              </a:defRPr>
-            </a:pPr>
-            <a:r>
-              <a:t>Compute owns IRMAA allocation, expense waterfall, basis, and gains.</a:t>
-            </a:r>
-          </a:p>
-          <a:p>
-            <a:pPr>
-              <a:spcBef>
-                <a:spcPts val="300"/>
-              </a:spcBef>
-              <a:defRPr sz="1200">
-                <a:solidFill>
-                  <a:srgbClr val="232D37"/>
-                </a:solidFill>
-                <a:latin typeface="Aptos"/>
-              </a:defRPr>
-            </a:pPr>
-            <a:r>
-              <a:t>Add fields to the projection contract before using them in charts or export.</a:t>
-            </a:r>
-          </a:p>
-          <a:p>
-            <a:pPr>
-              <a:spcBef>
-                <a:spcPts val="300"/>
-              </a:spcBef>
-              <a:defRPr sz="1200">
-                <a:solidFill>
-                  <a:srgbClr val="232D37"/>
-                </a:solidFill>
-                <a:latin typeface="Aptos"/>
-              </a:defRPr>
-            </a:pPr>
-            <a:r>
-              <a:t>Display remains presentation-only.</a:t>
-            </a:r>
-          </a:p>
-        </p:txBody>
-      </p:sp>
-      <p:sp>
-        <p:nvSpPr>
-          <p:cNvPr id="7" name="Rectangle 6"/>
-          <p:cNvSpPr/>
-          <p:nvPr/>
-        </p:nvSpPr>
-        <p:spPr>
-          <a:xfrm>
-            <a:off x="4407408" y="1234440"/>
-            <a:ext cx="82296" cy="4434840"/>
-          </a:xfrm>
-          <a:prstGeom prst="rect">
-            <a:avLst/>
-          </a:prstGeom>
-          <a:solidFill>
-            <a:srgbClr val="266EB2"/>
           </a:solidFill>
           <a:ln>
             <a:noFill/>
@@ -10301,7 +10278,7 @@
               </a:defRPr>
             </a:pPr>
             <a:r>
-              <a:t>Export safely</a:t>
+              <a:t>Presentation last</a:t>
             </a:r>
           </a:p>
           <a:p>
@@ -10317,7 +10294,7 @@
               </a:defRPr>
             </a:pPr>
             <a:r>
-              <a:t>Export reads lastProjection only.</a:t>
+              <a:t>Render only projection fields.</a:t>
             </a:r>
           </a:p>
           <a:p>
@@ -10333,7 +10310,7 @@
               </a:defRPr>
             </a:pPr>
             <a:r>
-              <a:t>Avoid an empty workbook if no rows exist.</a:t>
+              <a:t>Update Formula prose when math changes.</a:t>
             </a:r>
           </a:p>
           <a:p>
@@ -10349,7 +10326,7 @@
               </a:defRPr>
             </a:pPr>
             <a:r>
-              <a:t>Keep user inputs and active chart state unchanged by export.</a:t>
+              <a:t>Keep exports read-only consumers of the current projection.</a:t>
             </a:r>
           </a:p>
         </p:txBody>
@@ -10471,7 +10448,7 @@
               </a:defRPr>
             </a:pPr>
             <a:r>
-              <a:t>Retirement Income Planner • Architecture overview • IRMAA and Excel-export update</a:t>
+              <a:t>Retirement Income Planner • Architecture overview • Basis-percentage and formula-page update</a:t>
             </a:r>
           </a:p>
         </p:txBody>

--- a/docs/retirement_income_planner_architecture.pptx
+++ b/docs/retirement_income_planner_architecture.pptx
@@ -3214,7 +3214,7 @@
               </a:defRPr>
             </a:pPr>
             <a:r>
-              <a:t>Updated architecture: percentage-based cost basis, backward-compatible migration, and textbook-style formulas</a:t>
+              <a:t>Updated architecture: a plan-shaped Excel workbook with one projection sheet and dynamic account sheets</a:t>
             </a:r>
           </a:p>
         </p:txBody>
@@ -3285,7 +3285,7 @@
               </a:defRPr>
             </a:pPr>
             <a:r>
-              <a:t>Cards, controls, plan loading</a:t>
+              <a:t>Controls, plans, income sources</a:t>
             </a:r>
           </a:p>
           <a:p>
@@ -3301,7 +3301,7 @@
               </a:defRPr>
             </a:pPr>
             <a:r>
-              <a:t>Writes plan state</a:t>
+              <a:t>Writes mutable state</a:t>
             </a:r>
           </a:p>
         </p:txBody>
@@ -3431,7 +3431,7 @@
               </a:defRPr>
             </a:pPr>
             <a:r>
-              <a:t>Basis, taxes, IRMAA, balances</a:t>
+              <a:t>Single source of derived facts</a:t>
             </a:r>
           </a:p>
         </p:txBody>
@@ -3545,7 +3545,7 @@
               </a:defRPr>
             </a:pPr>
             <a:r>
-              <a:t>Charts, formula reference, notes, XLSX</a:t>
+              <a:t>Charts, reference pages, XLSX</a:t>
             </a:r>
           </a:p>
           <a:p>
@@ -3561,7 +3561,7 @@
               </a:defRPr>
             </a:pPr>
             <a:r>
-              <a:t>Reads projection output</a:t>
+              <a:t>Consumes projection rows</a:t>
             </a:r>
           </a:p>
         </p:txBody>
@@ -3801,7 +3801,7 @@
               </a:defRPr>
             </a:pPr>
             <a:r>
-              <a:t>Foundational contracts</a:t>
+              <a:t>Design boundary</a:t>
             </a:r>
           </a:p>
           <a:p>
@@ -3817,7 +3817,7 @@
               </a:defRPr>
             </a:pPr>
             <a:r>
-              <a:t>state owns user inputs; computeProjection() owns derived values; Display and export consume projection rows.</a:t>
+              <a:t>Export is read-only: it draws from lastProjection and never changes input state, calculations, or charts.</a:t>
             </a:r>
           </a:p>
         </p:txBody>
@@ -3939,7 +3939,7 @@
               </a:defRPr>
             </a:pPr>
             <a:r>
-              <a:t>Retirement Income Planner • Architecture overview • Basis-percentage and formula-page update</a:t>
+              <a:t>Retirement Income Planner • Architecture overview • Account-sheet Excel export update</a:t>
             </a:r>
           </a:p>
         </p:txBody>
@@ -4037,7 +4037,7 @@
               </a:defRPr>
             </a:pPr>
             <a:r>
-              <a:t>The latest revision changes how brokerage cost basis is entered and documented, not how the core layers interact.</a:t>
+              <a:t>Excel export now mirrors the plan’s enabled account structure rather than collapsing brokerage detail into one shared sheet.</a:t>
             </a:r>
           </a:p>
         </p:txBody>
@@ -4051,6 +4051,298 @@
         <p:spPr>
           <a:xfrm>
             <a:off x="594360" y="1234440"/>
+            <a:ext cx="3383280" cy="4480560"/>
+          </a:xfrm>
+          <a:prstGeom prst="roundRect">
+            <a:avLst/>
+          </a:prstGeom>
+          <a:solidFill>
+            <a:srgbClr val="FFF6E8"/>
+          </a:solidFill>
+          <a:ln w="13970">
+            <a:solidFill>
+              <a:srgbClr val="E5892A"/>
+            </a:solidFill>
+          </a:ln>
+        </p:spPr>
+        <p:style>
+          <a:lnRef idx="1">
+            <a:schemeClr val="accent1"/>
+          </a:lnRef>
+          <a:fillRef idx="3">
+            <a:schemeClr val="accent1"/>
+          </a:fillRef>
+          <a:effectRef idx="2">
+            <a:schemeClr val="accent1"/>
+          </a:effectRef>
+          <a:fontRef idx="minor">
+            <a:schemeClr val="lt1"/>
+          </a:fontRef>
+        </p:style>
+        <p:txBody>
+          <a:bodyPr rtlCol="0" anchor="ctr" lIns="182880" rIns="100584" tIns="91440"/>
+          <a:lstStyle/>
+          <a:p>
+            <a:pPr algn="ctr">
+              <a:defRPr sz="1800" b="1">
+                <a:solidFill>
+                  <a:srgbClr val="232D37"/>
+                </a:solidFill>
+                <a:latin typeface="Aptos Display"/>
+              </a:defRPr>
+            </a:pPr>
+            <a:r>
+              <a:t>Before</a:t>
+            </a:r>
+          </a:p>
+          <a:p>
+            <a:pPr>
+              <a:spcBef>
+                <a:spcPts val="300"/>
+              </a:spcBef>
+              <a:defRPr sz="1300">
+                <a:solidFill>
+                  <a:srgbClr val="232D37"/>
+                </a:solidFill>
+                <a:latin typeface="Aptos"/>
+              </a:defRPr>
+            </a:pPr>
+            <a:r>
+              <a:t>Projection by year</a:t>
+            </a:r>
+          </a:p>
+          <a:p>
+            <a:pPr>
+              <a:spcBef>
+                <a:spcPts val="300"/>
+              </a:spcBef>
+              <a:defRPr sz="1300">
+                <a:solidFill>
+                  <a:srgbClr val="232D37"/>
+                </a:solidFill>
+                <a:latin typeface="Aptos"/>
+              </a:defRPr>
+            </a:pPr>
+            <a:r>
+              <a:t>One combined Brokerage portfolios sheet</a:t>
+            </a:r>
+          </a:p>
+          <a:p>
+            <a:pPr>
+              <a:spcBef>
+                <a:spcPts val="300"/>
+              </a:spcBef>
+              <a:defRPr sz="1300">
+                <a:solidFill>
+                  <a:srgbClr val="232D37"/>
+                </a:solidFill>
+                <a:latin typeface="Aptos"/>
+              </a:defRPr>
+            </a:pPr>
+            <a:r>
+              <a:t>Detail mixed across people, portfolios, and years</a:t>
+            </a:r>
+          </a:p>
+        </p:txBody>
+      </p:sp>
+      <p:sp>
+        <p:nvSpPr>
+          <p:cNvPr id="5" name="Rectangle 4"/>
+          <p:cNvSpPr/>
+          <p:nvPr/>
+        </p:nvSpPr>
+        <p:spPr>
+          <a:xfrm>
+            <a:off x="594360" y="1234440"/>
+            <a:ext cx="82296" cy="4480560"/>
+          </a:xfrm>
+          <a:prstGeom prst="rect">
+            <a:avLst/>
+          </a:prstGeom>
+          <a:solidFill>
+            <a:srgbClr val="E5892A"/>
+          </a:solidFill>
+          <a:ln>
+            <a:noFill/>
+          </a:ln>
+        </p:spPr>
+        <p:style>
+          <a:lnRef idx="1">
+            <a:schemeClr val="accent1"/>
+          </a:lnRef>
+          <a:fillRef idx="3">
+            <a:schemeClr val="accent1"/>
+          </a:fillRef>
+          <a:effectRef idx="2">
+            <a:schemeClr val="accent1"/>
+          </a:effectRef>
+          <a:fontRef idx="minor">
+            <a:schemeClr val="lt1"/>
+          </a:fontRef>
+        </p:style>
+        <p:txBody>
+          <a:bodyPr rtlCol="0" anchor="ctr"/>
+          <a:lstStyle/>
+          <a:p>
+            <a:pPr algn="ctr"/>
+          </a:p>
+        </p:txBody>
+      </p:sp>
+      <p:sp>
+        <p:nvSpPr>
+          <p:cNvPr id="6" name="Rounded Rectangle 5"/>
+          <p:cNvSpPr/>
+          <p:nvPr/>
+        </p:nvSpPr>
+        <p:spPr>
+          <a:xfrm>
+            <a:off x="4407408" y="1234440"/>
+            <a:ext cx="3383280" cy="4480560"/>
+          </a:xfrm>
+          <a:prstGeom prst="roundRect">
+            <a:avLst/>
+          </a:prstGeom>
+          <a:solidFill>
+            <a:srgbClr val="EAF9F4"/>
+          </a:solidFill>
+          <a:ln w="13970">
+            <a:solidFill>
+              <a:srgbClr val="429761"/>
+            </a:solidFill>
+          </a:ln>
+        </p:spPr>
+        <p:style>
+          <a:lnRef idx="1">
+            <a:schemeClr val="accent1"/>
+          </a:lnRef>
+          <a:fillRef idx="3">
+            <a:schemeClr val="accent1"/>
+          </a:fillRef>
+          <a:effectRef idx="2">
+            <a:schemeClr val="accent1"/>
+          </a:effectRef>
+          <a:fontRef idx="minor">
+            <a:schemeClr val="lt1"/>
+          </a:fontRef>
+        </p:style>
+        <p:txBody>
+          <a:bodyPr rtlCol="0" anchor="ctr" lIns="182880" rIns="100584" tIns="91440"/>
+          <a:lstStyle/>
+          <a:p>
+            <a:pPr algn="ctr">
+              <a:defRPr sz="1800" b="1">
+                <a:solidFill>
+                  <a:srgbClr val="232D37"/>
+                </a:solidFill>
+                <a:latin typeface="Aptos Display"/>
+              </a:defRPr>
+            </a:pPr>
+            <a:r>
+              <a:t>Now</a:t>
+            </a:r>
+          </a:p>
+          <a:p>
+            <a:pPr>
+              <a:spcBef>
+                <a:spcPts val="300"/>
+              </a:spcBef>
+              <a:defRPr sz="1300">
+                <a:solidFill>
+                  <a:srgbClr val="232D37"/>
+                </a:solidFill>
+                <a:latin typeface="Aptos"/>
+              </a:defRPr>
+            </a:pPr>
+            <a:r>
+              <a:t>Projection by year remains first</a:t>
+            </a:r>
+          </a:p>
+          <a:p>
+            <a:pPr>
+              <a:spcBef>
+                <a:spcPts val="300"/>
+              </a:spcBef>
+              <a:defRPr sz="1300">
+                <a:solidFill>
+                  <a:srgbClr val="232D37"/>
+                </a:solidFill>
+                <a:latin typeface="Aptos"/>
+              </a:defRPr>
+            </a:pPr>
+            <a:r>
+              <a:t>Every enabled account gets its own sheet</a:t>
+            </a:r>
+          </a:p>
+          <a:p>
+            <a:pPr>
+              <a:spcBef>
+                <a:spcPts val="300"/>
+              </a:spcBef>
+              <a:defRPr sz="1300">
+                <a:solidFill>
+                  <a:srgbClr val="232D37"/>
+                </a:solidFill>
+                <a:latin typeface="Aptos"/>
+              </a:defRPr>
+            </a:pPr>
+            <a:r>
+              <a:t>Sheet count and names follow the plan’s active accounts</a:t>
+            </a:r>
+          </a:p>
+        </p:txBody>
+      </p:sp>
+      <p:sp>
+        <p:nvSpPr>
+          <p:cNvPr id="7" name="Rectangle 6"/>
+          <p:cNvSpPr/>
+          <p:nvPr/>
+        </p:nvSpPr>
+        <p:spPr>
+          <a:xfrm>
+            <a:off x="4407408" y="1234440"/>
+            <a:ext cx="82296" cy="4480560"/>
+          </a:xfrm>
+          <a:prstGeom prst="rect">
+            <a:avLst/>
+          </a:prstGeom>
+          <a:solidFill>
+            <a:srgbClr val="429761"/>
+          </a:solidFill>
+          <a:ln>
+            <a:noFill/>
+          </a:ln>
+        </p:spPr>
+        <p:style>
+          <a:lnRef idx="1">
+            <a:schemeClr val="accent1"/>
+          </a:lnRef>
+          <a:fillRef idx="3">
+            <a:schemeClr val="accent1"/>
+          </a:fillRef>
+          <a:effectRef idx="2">
+            <a:schemeClr val="accent1"/>
+          </a:effectRef>
+          <a:fontRef idx="minor">
+            <a:schemeClr val="lt1"/>
+          </a:fontRef>
+        </p:style>
+        <p:txBody>
+          <a:bodyPr rtlCol="0" anchor="ctr"/>
+          <a:lstStyle/>
+          <a:p>
+            <a:pPr algn="ctr"/>
+          </a:p>
+        </p:txBody>
+      </p:sp>
+      <p:sp>
+        <p:nvSpPr>
+          <p:cNvPr id="8" name="Rounded Rectangle 7"/>
+          <p:cNvSpPr/>
+          <p:nvPr/>
+        </p:nvSpPr>
+        <p:spPr>
+          <a:xfrm>
+            <a:off x="8220456" y="1234440"/>
             <a:ext cx="3383280" cy="4480560"/>
           </a:xfrm>
           <a:prstGeom prst="roundRect">
@@ -4092,7 +4384,7 @@
               </a:defRPr>
             </a:pPr>
             <a:r>
-              <a:t>Cost-basis input</a:t>
+              <a:t>Why it matters</a:t>
             </a:r>
           </a:p>
           <a:p>
@@ -4108,7 +4400,7 @@
               </a:defRPr>
             </a:pPr>
             <a:r>
-              <a:t>basisPct replaces dollar basis.</a:t>
+              <a:t>A single account has a single year-by-year view</a:t>
             </a:r>
           </a:p>
           <a:p>
@@ -4124,7 +4416,7 @@
               </a:defRPr>
             </a:pPr>
             <a:r>
-              <a:t>User enters 0–100% of start balance.</a:t>
+              <a:t>Brokerage, pre-tax IRA, and Roth IRA details are separated</a:t>
             </a:r>
           </a:p>
           <a:p>
@@ -4140,36 +4432,20 @@
               </a:defRPr>
             </a:pPr>
             <a:r>
-              <a:t>Blank remains null—not zero.</a:t>
-            </a:r>
-          </a:p>
-          <a:p>
-            <a:pPr>
-              <a:spcBef>
-                <a:spcPts val="300"/>
-              </a:spcBef>
-              <a:defRPr sz="1300">
-                <a:solidFill>
-                  <a:srgbClr val="232D37"/>
-                </a:solidFill>
-                <a:latin typeface="Aptos"/>
-              </a:defRPr>
-            </a:pPr>
-            <a:r>
-              <a:t>Input is clamped to the permitted range.</a:t>
-            </a:r>
-          </a:p>
-        </p:txBody>
-      </p:sp>
-      <p:sp>
-        <p:nvSpPr>
-          <p:cNvPr id="5" name="Rectangle 4"/>
+              <a:t>Disabled accounts never create sheets</a:t>
+            </a:r>
+          </a:p>
+        </p:txBody>
+      </p:sp>
+      <p:sp>
+        <p:nvSpPr>
+          <p:cNvPr id="9" name="Rectangle 8"/>
           <p:cNvSpPr/>
           <p:nvPr/>
         </p:nvSpPr>
         <p:spPr>
           <a:xfrm>
-            <a:off x="594360" y="1234440"/>
+            <a:off x="8220456" y="1234440"/>
             <a:ext cx="82296" cy="4480560"/>
           </a:xfrm>
           <a:prstGeom prst="rect">
@@ -4206,298 +4482,6 @@
       </p:sp>
       <p:sp>
         <p:nvSpPr>
-          <p:cNvPr id="6" name="Rounded Rectangle 5"/>
-          <p:cNvSpPr/>
-          <p:nvPr/>
-        </p:nvSpPr>
-        <p:spPr>
-          <a:xfrm>
-            <a:off x="4407408" y="1234440"/>
-            <a:ext cx="3383280" cy="4480560"/>
-          </a:xfrm>
-          <a:prstGeom prst="roundRect">
-            <a:avLst/>
-          </a:prstGeom>
-          <a:solidFill>
-            <a:srgbClr val="EAF9F4"/>
-          </a:solidFill>
-          <a:ln w="13970">
-            <a:solidFill>
-              <a:srgbClr val="429761"/>
-            </a:solidFill>
-          </a:ln>
-        </p:spPr>
-        <p:style>
-          <a:lnRef idx="1">
-            <a:schemeClr val="accent1"/>
-          </a:lnRef>
-          <a:fillRef idx="3">
-            <a:schemeClr val="accent1"/>
-          </a:fillRef>
-          <a:effectRef idx="2">
-            <a:schemeClr val="accent1"/>
-          </a:effectRef>
-          <a:fontRef idx="minor">
-            <a:schemeClr val="lt1"/>
-          </a:fontRef>
-        </p:style>
-        <p:txBody>
-          <a:bodyPr rtlCol="0" anchor="ctr" lIns="182880" rIns="100584" tIns="91440"/>
-          <a:lstStyle/>
-          <a:p>
-            <a:pPr algn="ctr">
-              <a:defRPr sz="1800" b="1">
-                <a:solidFill>
-                  <a:srgbClr val="232D37"/>
-                </a:solidFill>
-                <a:latin typeface="Aptos Display"/>
-              </a:defRPr>
-            </a:pPr>
-            <a:r>
-              <a:t>Load migration</a:t>
-            </a:r>
-          </a:p>
-          <a:p>
-            <a:pPr>
-              <a:spcBef>
-                <a:spcPts val="300"/>
-              </a:spcBef>
-              <a:defRPr sz="1300">
-                <a:solidFill>
-                  <a:srgbClr val="232D37"/>
-                </a:solidFill>
-                <a:latin typeface="Aptos"/>
-              </a:defRPr>
-            </a:pPr>
-            <a:r>
-              <a:t>Older dollar basis is converted to a percentage during hydrateState().</a:t>
-            </a:r>
-          </a:p>
-          <a:p>
-            <a:pPr>
-              <a:spcBef>
-                <a:spcPts val="300"/>
-              </a:spcBef>
-              <a:defRPr sz="1300">
-                <a:solidFill>
-                  <a:srgbClr val="232D37"/>
-                </a:solidFill>
-                <a:latin typeface="Aptos"/>
-              </a:defRPr>
-            </a:pPr>
-            <a:r>
-              <a:t>Older manual LTCG fields remain dropped.</a:t>
-            </a:r>
-          </a:p>
-          <a:p>
-            <a:pPr>
-              <a:spcBef>
-                <a:spcPts val="300"/>
-              </a:spcBef>
-              <a:defRPr sz="1300">
-                <a:solidFill>
-                  <a:srgbClr val="232D37"/>
-                </a:solidFill>
-                <a:latin typeface="Aptos"/>
-              </a:defRPr>
-            </a:pPr>
-            <a:r>
-              <a:t>Default fields and safe reset/hydration sequence stay intact.</a:t>
-            </a:r>
-          </a:p>
-        </p:txBody>
-      </p:sp>
-      <p:sp>
-        <p:nvSpPr>
-          <p:cNvPr id="7" name="Rectangle 6"/>
-          <p:cNvSpPr/>
-          <p:nvPr/>
-        </p:nvSpPr>
-        <p:spPr>
-          <a:xfrm>
-            <a:off x="4407408" y="1234440"/>
-            <a:ext cx="82296" cy="4480560"/>
-          </a:xfrm>
-          <a:prstGeom prst="rect">
-            <a:avLst/>
-          </a:prstGeom>
-          <a:solidFill>
-            <a:srgbClr val="429761"/>
-          </a:solidFill>
-          <a:ln>
-            <a:noFill/>
-          </a:ln>
-        </p:spPr>
-        <p:style>
-          <a:lnRef idx="1">
-            <a:schemeClr val="accent1"/>
-          </a:lnRef>
-          <a:fillRef idx="3">
-            <a:schemeClr val="accent1"/>
-          </a:fillRef>
-          <a:effectRef idx="2">
-            <a:schemeClr val="accent1"/>
-          </a:effectRef>
-          <a:fontRef idx="minor">
-            <a:schemeClr val="lt1"/>
-          </a:fontRef>
-        </p:style>
-        <p:txBody>
-          <a:bodyPr rtlCol="0" anchor="ctr"/>
-          <a:lstStyle/>
-          <a:p>
-            <a:pPr algn="ctr"/>
-          </a:p>
-        </p:txBody>
-      </p:sp>
-      <p:sp>
-        <p:nvSpPr>
-          <p:cNvPr id="8" name="Rounded Rectangle 7"/>
-          <p:cNvSpPr/>
-          <p:nvPr/>
-        </p:nvSpPr>
-        <p:spPr>
-          <a:xfrm>
-            <a:off x="8220456" y="1234440"/>
-            <a:ext cx="3383280" cy="4480560"/>
-          </a:xfrm>
-          <a:prstGeom prst="roundRect">
-            <a:avLst/>
-          </a:prstGeom>
-          <a:solidFill>
-            <a:srgbClr val="F7EFFF"/>
-          </a:solidFill>
-          <a:ln w="13970">
-            <a:solidFill>
-              <a:srgbClr val="7852B0"/>
-            </a:solidFill>
-          </a:ln>
-        </p:spPr>
-        <p:style>
-          <a:lnRef idx="1">
-            <a:schemeClr val="accent1"/>
-          </a:lnRef>
-          <a:fillRef idx="3">
-            <a:schemeClr val="accent1"/>
-          </a:fillRef>
-          <a:effectRef idx="2">
-            <a:schemeClr val="accent1"/>
-          </a:effectRef>
-          <a:fontRef idx="minor">
-            <a:schemeClr val="lt1"/>
-          </a:fontRef>
-        </p:style>
-        <p:txBody>
-          <a:bodyPr rtlCol="0" anchor="ctr" lIns="182880" rIns="100584" tIns="91440"/>
-          <a:lstStyle/>
-          <a:p>
-            <a:pPr algn="ctr">
-              <a:defRPr sz="1800" b="1">
-                <a:solidFill>
-                  <a:srgbClr val="232D37"/>
-                </a:solidFill>
-                <a:latin typeface="Aptos Display"/>
-              </a:defRPr>
-            </a:pPr>
-            <a:r>
-              <a:t>Formula presentation</a:t>
-            </a:r>
-          </a:p>
-          <a:p>
-            <a:pPr>
-              <a:spcBef>
-                <a:spcPts val="300"/>
-              </a:spcBef>
-              <a:defRPr sz="1300">
-                <a:solidFill>
-                  <a:srgbClr val="232D37"/>
-                </a:solidFill>
-                <a:latin typeface="Aptos"/>
-              </a:defRPr>
-            </a:pPr>
-            <a:r>
-              <a:t>Formula page now sets equations as centered display math.</a:t>
-            </a:r>
-          </a:p>
-          <a:p>
-            <a:pPr>
-              <a:spcBef>
-                <a:spcPts val="300"/>
-              </a:spcBef>
-              <a:defRPr sz="1300">
-                <a:solidFill>
-                  <a:srgbClr val="232D37"/>
-                </a:solidFill>
-                <a:latin typeface="Aptos"/>
-              </a:defRPr>
-            </a:pPr>
-            <a:r>
-              <a:t>Reusable helpers format equations, fractions, piecewise cases, and “where” captions.</a:t>
-            </a:r>
-          </a:p>
-          <a:p>
-            <a:pPr>
-              <a:spcBef>
-                <a:spcPts val="300"/>
-              </a:spcBef>
-              <a:defRPr sz="1300">
-                <a:solidFill>
-                  <a:srgbClr val="232D37"/>
-                </a:solidFill>
-                <a:latin typeface="Aptos"/>
-              </a:defRPr>
-            </a:pPr>
-            <a:r>
-              <a:t>Reference tables still come from Compute constants.</a:t>
-            </a:r>
-          </a:p>
-        </p:txBody>
-      </p:sp>
-      <p:sp>
-        <p:nvSpPr>
-          <p:cNvPr id="9" name="Rectangle 8"/>
-          <p:cNvSpPr/>
-          <p:nvPr/>
-        </p:nvSpPr>
-        <p:spPr>
-          <a:xfrm>
-            <a:off x="8220456" y="1234440"/>
-            <a:ext cx="82296" cy="4480560"/>
-          </a:xfrm>
-          <a:prstGeom prst="rect">
-            <a:avLst/>
-          </a:prstGeom>
-          <a:solidFill>
-            <a:srgbClr val="7852B0"/>
-          </a:solidFill>
-          <a:ln>
-            <a:noFill/>
-          </a:ln>
-        </p:spPr>
-        <p:style>
-          <a:lnRef idx="1">
-            <a:schemeClr val="accent1"/>
-          </a:lnRef>
-          <a:fillRef idx="3">
-            <a:schemeClr val="accent1"/>
-          </a:fillRef>
-          <a:effectRef idx="2">
-            <a:schemeClr val="accent1"/>
-          </a:effectRef>
-          <a:fontRef idx="minor">
-            <a:schemeClr val="lt1"/>
-          </a:fontRef>
-        </p:style>
-        <p:txBody>
-          <a:bodyPr rtlCol="0" anchor="ctr"/>
-          <a:lstStyle/>
-          <a:p>
-            <a:pPr algn="ctr"/>
-          </a:p>
-        </p:txBody>
-      </p:sp>
-      <p:sp>
-        <p:nvSpPr>
           <p:cNvPr id="10" name="Rectangle 9"/>
           <p:cNvSpPr/>
           <p:nvPr/>
@@ -4570,7 +4554,7 @@
               </a:defRPr>
             </a:pPr>
             <a:r>
-              <a:t>Retirement Income Planner • Architecture overview • Basis-percentage and formula-page update</a:t>
+              <a:t>Retirement Income Planner • Architecture overview • Account-sheet Excel export update</a:t>
             </a:r>
           </a:p>
         </p:txBody>
@@ -4632,7 +4616,7 @@
               </a:defRPr>
             </a:pPr>
             <a:r>
-              <a:t>Percentage-based cost basis: input-to-model flow</a:t>
+              <a:t>Workbook construction flow</a:t>
             </a:r>
           </a:p>
         </p:txBody>
@@ -4668,7 +4652,7 @@
               </a:defRPr>
             </a:pPr>
             <a:r>
-              <a:t>The UI captures an intuitive starting-basis percentage; the projection converts it to a dollar basis at the start of the plan.</a:t>
+              <a:t>The exporter transforms the cached projection into a deterministic workbook without recomputing the plan.</a:t>
             </a:r>
           </a:p>
         </p:txBody>
@@ -4681,8 +4665,8 @@
         </p:nvSpPr>
         <p:spPr>
           <a:xfrm>
-            <a:off x="548640" y="1298448"/>
-            <a:ext cx="2148840" cy="1325880"/>
+            <a:off x="502920" y="1325880"/>
+            <a:ext cx="2057400" cy="1261872"/>
           </a:xfrm>
           <a:prstGeom prst="roundRect">
             <a:avLst/>
@@ -4723,7 +4707,7 @@
               </a:defRPr>
             </a:pPr>
             <a:r>
-              <a:t>User input</a:t>
+              <a:t>lastProjection</a:t>
             </a:r>
           </a:p>
           <a:p>
@@ -4739,7 +4723,7 @@
               </a:defRPr>
             </a:pPr>
             <a:r>
-              <a:t>Cost basis % of start balance</a:t>
+              <a:t>Cached result from app.js</a:t>
             </a:r>
           </a:p>
           <a:p>
@@ -4755,23 +4739,7 @@
               </a:defRPr>
             </a:pPr>
             <a:r>
-              <a:t>Allowed range: 0–100</a:t>
-            </a:r>
-          </a:p>
-          <a:p>
-            <a:pPr>
-              <a:spcBef>
-                <a:spcPts val="300"/>
-              </a:spcBef>
-              <a:defRPr sz="1100">
-                <a:solidFill>
-                  <a:srgbClr val="232D37"/>
-                </a:solidFill>
-                <a:latin typeface="Aptos"/>
-              </a:defRPr>
-            </a:pPr>
-            <a:r>
-              <a:t>Blank = not entered</a:t>
+              <a:t>No new calculation</a:t>
             </a:r>
           </a:p>
         </p:txBody>
@@ -4784,8 +4752,8 @@
         </p:nvSpPr>
         <p:spPr>
           <a:xfrm>
-            <a:off x="548640" y="1298448"/>
-            <a:ext cx="82296" cy="1325880"/>
+            <a:off x="502920" y="1325880"/>
+            <a:ext cx="82296" cy="1261872"/>
           </a:xfrm>
           <a:prstGeom prst="rect">
             <a:avLst/>
@@ -4827,8 +4795,382 @@
         </p:nvSpPr>
         <p:spPr>
           <a:xfrm>
-            <a:off x="3154680" y="1298448"/>
-            <a:ext cx="2148840" cy="1325880"/>
+            <a:off x="2907792" y="1325880"/>
+            <a:ext cx="2057400" cy="1261872"/>
+          </a:xfrm>
+          <a:prstGeom prst="roundRect">
+            <a:avLst/>
+          </a:prstGeom>
+          <a:solidFill>
+            <a:srgbClr val="EAF9F4"/>
+          </a:solidFill>
+          <a:ln w="13970">
+            <a:solidFill>
+              <a:srgbClr val="429761"/>
+            </a:solidFill>
+          </a:ln>
+        </p:spPr>
+        <p:style>
+          <a:lnRef idx="1">
+            <a:schemeClr val="accent1"/>
+          </a:lnRef>
+          <a:fillRef idx="3">
+            <a:schemeClr val="accent1"/>
+          </a:fillRef>
+          <a:effectRef idx="2">
+            <a:schemeClr val="accent1"/>
+          </a:effectRef>
+          <a:fontRef idx="minor">
+            <a:schemeClr val="lt1"/>
+          </a:fontRef>
+        </p:style>
+        <p:txBody>
+          <a:bodyPr rtlCol="0" anchor="ctr" lIns="182880" rIns="100584" tIns="91440"/>
+          <a:lstStyle/>
+          <a:p>
+            <a:pPr algn="ctr">
+              <a:defRPr sz="1600" b="1">
+                <a:solidFill>
+                  <a:srgbClr val="232D37"/>
+                </a:solidFill>
+                <a:latin typeface="Aptos Display"/>
+              </a:defRPr>
+            </a:pPr>
+            <a:r>
+              <a:t>Projection by year</a:t>
+            </a:r>
+          </a:p>
+          <a:p>
+            <a:pPr>
+              <a:spcBef>
+                <a:spcPts val="300"/>
+              </a:spcBef>
+              <a:defRPr sz="1100">
+                <a:solidFill>
+                  <a:srgbClr val="232D37"/>
+                </a:solidFill>
+                <a:latin typeface="Aptos"/>
+              </a:defRPr>
+            </a:pPr>
+            <a:r>
+              <a:t>Always first</a:t>
+            </a:r>
+          </a:p>
+          <a:p>
+            <a:pPr>
+              <a:spcBef>
+                <a:spcPts val="300"/>
+              </a:spcBef>
+              <a:defRPr sz="1100">
+                <a:solidFill>
+                  <a:srgbClr val="232D37"/>
+                </a:solidFill>
+                <a:latin typeface="Aptos"/>
+              </a:defRPr>
+            </a:pPr>
+            <a:r>
+              <a:t>One row per modeled year</a:t>
+            </a:r>
+          </a:p>
+        </p:txBody>
+      </p:sp>
+      <p:sp>
+        <p:nvSpPr>
+          <p:cNvPr id="7" name="Rectangle 6"/>
+          <p:cNvSpPr/>
+          <p:nvPr/>
+        </p:nvSpPr>
+        <p:spPr>
+          <a:xfrm>
+            <a:off x="2907792" y="1325880"/>
+            <a:ext cx="82296" cy="1261872"/>
+          </a:xfrm>
+          <a:prstGeom prst="rect">
+            <a:avLst/>
+          </a:prstGeom>
+          <a:solidFill>
+            <a:srgbClr val="429761"/>
+          </a:solidFill>
+          <a:ln>
+            <a:noFill/>
+          </a:ln>
+        </p:spPr>
+        <p:style>
+          <a:lnRef idx="1">
+            <a:schemeClr val="accent1"/>
+          </a:lnRef>
+          <a:fillRef idx="3">
+            <a:schemeClr val="accent1"/>
+          </a:fillRef>
+          <a:effectRef idx="2">
+            <a:schemeClr val="accent1"/>
+          </a:effectRef>
+          <a:fontRef idx="minor">
+            <a:schemeClr val="lt1"/>
+          </a:fontRef>
+        </p:style>
+        <p:txBody>
+          <a:bodyPr rtlCol="0" anchor="ctr"/>
+          <a:lstStyle/>
+          <a:p>
+            <a:pPr algn="ctr"/>
+          </a:p>
+        </p:txBody>
+      </p:sp>
+      <p:sp>
+        <p:nvSpPr>
+          <p:cNvPr id="8" name="Rounded Rectangle 7"/>
+          <p:cNvSpPr/>
+          <p:nvPr/>
+        </p:nvSpPr>
+        <p:spPr>
+          <a:xfrm>
+            <a:off x="5312664" y="1325880"/>
+            <a:ext cx="2057400" cy="1261872"/>
+          </a:xfrm>
+          <a:prstGeom prst="roundRect">
+            <a:avLst/>
+          </a:prstGeom>
+          <a:solidFill>
+            <a:srgbClr val="FFF6E8"/>
+          </a:solidFill>
+          <a:ln w="13970">
+            <a:solidFill>
+              <a:srgbClr val="E5892A"/>
+            </a:solidFill>
+          </a:ln>
+        </p:spPr>
+        <p:style>
+          <a:lnRef idx="1">
+            <a:schemeClr val="accent1"/>
+          </a:lnRef>
+          <a:fillRef idx="3">
+            <a:schemeClr val="accent1"/>
+          </a:fillRef>
+          <a:effectRef idx="2">
+            <a:schemeClr val="accent1"/>
+          </a:effectRef>
+          <a:fontRef idx="minor">
+            <a:schemeClr val="lt1"/>
+          </a:fontRef>
+        </p:style>
+        <p:txBody>
+          <a:bodyPr rtlCol="0" anchor="ctr" lIns="182880" rIns="100584" tIns="91440"/>
+          <a:lstStyle/>
+          <a:p>
+            <a:pPr algn="ctr">
+              <a:defRPr sz="1600" b="1">
+                <a:solidFill>
+                  <a:srgbClr val="232D37"/>
+                </a:solidFill>
+                <a:latin typeface="Aptos Display"/>
+              </a:defRPr>
+            </a:pPr>
+            <a:r>
+              <a:t>Enabled accounts</a:t>
+            </a:r>
+          </a:p>
+          <a:p>
+            <a:pPr>
+              <a:spcBef>
+                <a:spcPts val="300"/>
+              </a:spcBef>
+              <a:defRPr sz="1100">
+                <a:solidFill>
+                  <a:srgbClr val="232D37"/>
+                </a:solidFill>
+                <a:latin typeface="Aptos"/>
+              </a:defRPr>
+            </a:pPr>
+            <a:r>
+              <a:t>Enumerate by person</a:t>
+            </a:r>
+          </a:p>
+          <a:p>
+            <a:pPr>
+              <a:spcBef>
+                <a:spcPts val="300"/>
+              </a:spcBef>
+              <a:defRPr sz="1100">
+                <a:solidFill>
+                  <a:srgbClr val="232D37"/>
+                </a:solidFill>
+                <a:latin typeface="Aptos"/>
+              </a:defRPr>
+            </a:pPr>
+            <a:r>
+              <a:t>Skip disabled items</a:t>
+            </a:r>
+          </a:p>
+        </p:txBody>
+      </p:sp>
+      <p:sp>
+        <p:nvSpPr>
+          <p:cNvPr id="9" name="Rectangle 8"/>
+          <p:cNvSpPr/>
+          <p:nvPr/>
+        </p:nvSpPr>
+        <p:spPr>
+          <a:xfrm>
+            <a:off x="5312664" y="1325880"/>
+            <a:ext cx="82296" cy="1261872"/>
+          </a:xfrm>
+          <a:prstGeom prst="rect">
+            <a:avLst/>
+          </a:prstGeom>
+          <a:solidFill>
+            <a:srgbClr val="E5892A"/>
+          </a:solidFill>
+          <a:ln>
+            <a:noFill/>
+          </a:ln>
+        </p:spPr>
+        <p:style>
+          <a:lnRef idx="1">
+            <a:schemeClr val="accent1"/>
+          </a:lnRef>
+          <a:fillRef idx="3">
+            <a:schemeClr val="accent1"/>
+          </a:fillRef>
+          <a:effectRef idx="2">
+            <a:schemeClr val="accent1"/>
+          </a:effectRef>
+          <a:fontRef idx="minor">
+            <a:schemeClr val="lt1"/>
+          </a:fontRef>
+        </p:style>
+        <p:txBody>
+          <a:bodyPr rtlCol="0" anchor="ctr"/>
+          <a:lstStyle/>
+          <a:p>
+            <a:pPr algn="ctr"/>
+          </a:p>
+        </p:txBody>
+      </p:sp>
+      <p:sp>
+        <p:nvSpPr>
+          <p:cNvPr id="10" name="Rounded Rectangle 9"/>
+          <p:cNvSpPr/>
+          <p:nvPr/>
+        </p:nvSpPr>
+        <p:spPr>
+          <a:xfrm>
+            <a:off x="7717536" y="1325880"/>
+            <a:ext cx="2057400" cy="1261872"/>
+          </a:xfrm>
+          <a:prstGeom prst="roundRect">
+            <a:avLst/>
+          </a:prstGeom>
+          <a:solidFill>
+            <a:srgbClr val="F7EFFF"/>
+          </a:solidFill>
+          <a:ln w="13970">
+            <a:solidFill>
+              <a:srgbClr val="7852B0"/>
+            </a:solidFill>
+          </a:ln>
+        </p:spPr>
+        <p:style>
+          <a:lnRef idx="1">
+            <a:schemeClr val="accent1"/>
+          </a:lnRef>
+          <a:fillRef idx="3">
+            <a:schemeClr val="accent1"/>
+          </a:fillRef>
+          <a:effectRef idx="2">
+            <a:schemeClr val="accent1"/>
+          </a:effectRef>
+          <a:fontRef idx="minor">
+            <a:schemeClr val="lt1"/>
+          </a:fontRef>
+        </p:style>
+        <p:txBody>
+          <a:bodyPr rtlCol="0" anchor="ctr" lIns="182880" rIns="100584" tIns="91440"/>
+          <a:lstStyle/>
+          <a:p>
+            <a:pPr algn="ctr">
+              <a:defRPr sz="1600" b="1">
+                <a:solidFill>
+                  <a:srgbClr val="232D37"/>
+                </a:solidFill>
+                <a:latin typeface="Aptos Display"/>
+              </a:defRPr>
+            </a:pPr>
+            <a:r>
+              <a:t>xlsxAccountSheets</a:t>
+            </a:r>
+          </a:p>
+          <a:p>
+            <a:pPr>
+              <a:spcBef>
+                <a:spcPts val="300"/>
+              </a:spcBef>
+              <a:defRPr sz="1100">
+                <a:solidFill>
+                  <a:srgbClr val="232D37"/>
+                </a:solidFill>
+                <a:latin typeface="Aptos"/>
+              </a:defRPr>
+            </a:pPr>
+            <a:r>
+              <a:t>Build one row-per-year table per account</a:t>
+            </a:r>
+          </a:p>
+        </p:txBody>
+      </p:sp>
+      <p:sp>
+        <p:nvSpPr>
+          <p:cNvPr id="11" name="Rectangle 10"/>
+          <p:cNvSpPr/>
+          <p:nvPr/>
+        </p:nvSpPr>
+        <p:spPr>
+          <a:xfrm>
+            <a:off x="7717536" y="1325880"/>
+            <a:ext cx="82296" cy="1261872"/>
+          </a:xfrm>
+          <a:prstGeom prst="rect">
+            <a:avLst/>
+          </a:prstGeom>
+          <a:solidFill>
+            <a:srgbClr val="7852B0"/>
+          </a:solidFill>
+          <a:ln>
+            <a:noFill/>
+          </a:ln>
+        </p:spPr>
+        <p:style>
+          <a:lnRef idx="1">
+            <a:schemeClr val="accent1"/>
+          </a:lnRef>
+          <a:fillRef idx="3">
+            <a:schemeClr val="accent1"/>
+          </a:fillRef>
+          <a:effectRef idx="2">
+            <a:schemeClr val="accent1"/>
+          </a:effectRef>
+          <a:fontRef idx="minor">
+            <a:schemeClr val="lt1"/>
+          </a:fontRef>
+        </p:style>
+        <p:txBody>
+          <a:bodyPr rtlCol="0" anchor="ctr"/>
+          <a:lstStyle/>
+          <a:p>
+            <a:pPr algn="ctr"/>
+          </a:p>
+        </p:txBody>
+      </p:sp>
+      <p:sp>
+        <p:nvSpPr>
+          <p:cNvPr id="12" name="Rounded Rectangle 11"/>
+          <p:cNvSpPr/>
+          <p:nvPr/>
+        </p:nvSpPr>
+        <p:spPr>
+          <a:xfrm>
+            <a:off x="10122408" y="1325880"/>
+            <a:ext cx="1554480" cy="1261872"/>
           </a:xfrm>
           <a:prstGeom prst="roundRect">
             <a:avLst/>
@@ -4861,7 +5203,7 @@
           <a:lstStyle/>
           <a:p>
             <a:pPr algn="ctr">
-              <a:defRPr sz="1600" b="1">
+              <a:defRPr sz="1500" b="1">
                 <a:solidFill>
                   <a:srgbClr val="232D37"/>
                 </a:solidFill>
@@ -4869,7 +5211,7 @@
               </a:defRPr>
             </a:pPr>
             <a:r>
-              <a:t>State</a:t>
+              <a:t>XLSX</a:t>
             </a:r>
           </a:p>
           <a:p>
@@ -4877,61 +5219,29 @@
               <a:spcBef>
                 <a:spcPts val="300"/>
               </a:spcBef>
-              <a:defRPr sz="1100">
-                <a:solidFill>
-                  <a:srgbClr val="232D37"/>
-                </a:solidFill>
-                <a:latin typeface="Aptos"/>
-              </a:defRPr>
-            </a:pPr>
-            <a:r>
-              <a:t>basisPct: number | null</a:t>
-            </a:r>
-          </a:p>
-          <a:p>
-            <a:pPr>
-              <a:spcBef>
-                <a:spcPts val="300"/>
-              </a:spcBef>
-              <a:defRPr sz="1100">
-                <a:solidFill>
-                  <a:srgbClr val="232D37"/>
-                </a:solidFill>
-                <a:latin typeface="Aptos"/>
-              </a:defRPr>
-            </a:pPr>
-            <a:r>
-              <a:t>Persisted in plan JSON</a:t>
-            </a:r>
-          </a:p>
-          <a:p>
-            <a:pPr>
-              <a:spcBef>
-                <a:spcPts val="300"/>
-              </a:spcBef>
-              <a:defRPr sz="1100">
-                <a:solidFill>
-                  <a:srgbClr val="232D37"/>
-                </a:solidFill>
-                <a:latin typeface="Aptos"/>
-              </a:defRPr>
-            </a:pPr>
-            <a:r>
-              <a:t>No dollar basis stored as input</a:t>
-            </a:r>
-          </a:p>
-        </p:txBody>
-      </p:sp>
-      <p:sp>
-        <p:nvSpPr>
-          <p:cNvPr id="7" name="Rectangle 6"/>
+              <a:defRPr sz="1000">
+                <a:solidFill>
+                  <a:srgbClr val="232D37"/>
+                </a:solidFill>
+                <a:latin typeface="Aptos"/>
+              </a:defRPr>
+            </a:pPr>
+            <a:r>
+              <a:t>Append and download</a:t>
+            </a:r>
+          </a:p>
+        </p:txBody>
+      </p:sp>
+      <p:sp>
+        <p:nvSpPr>
+          <p:cNvPr id="13" name="Rectangle 12"/>
           <p:cNvSpPr/>
           <p:nvPr/>
         </p:nvSpPr>
         <p:spPr>
           <a:xfrm>
-            <a:off x="3154680" y="1298448"/>
-            <a:ext cx="82296" cy="1325880"/>
+            <a:off x="10122408" y="1325880"/>
+            <a:ext cx="82296" cy="1261872"/>
           </a:xfrm>
           <a:prstGeom prst="rect">
             <a:avLst/>
@@ -4965,276 +5275,16 @@
           </a:p>
         </p:txBody>
       </p:sp>
-      <p:sp>
-        <p:nvSpPr>
-          <p:cNvPr id="8" name="Rounded Rectangle 7"/>
-          <p:cNvSpPr/>
-          <p:nvPr/>
-        </p:nvSpPr>
-        <p:spPr>
-          <a:xfrm>
-            <a:off x="5760720" y="1298448"/>
-            <a:ext cx="2331720" cy="1325880"/>
-          </a:xfrm>
-          <a:prstGeom prst="roundRect">
-            <a:avLst/>
-          </a:prstGeom>
-          <a:solidFill>
-            <a:srgbClr val="EAF9F4"/>
-          </a:solidFill>
-          <a:ln w="13970">
-            <a:solidFill>
-              <a:srgbClr val="429761"/>
-            </a:solidFill>
-          </a:ln>
-        </p:spPr>
-        <p:style>
-          <a:lnRef idx="1">
-            <a:schemeClr val="accent1"/>
-          </a:lnRef>
-          <a:fillRef idx="3">
-            <a:schemeClr val="accent1"/>
-          </a:fillRef>
-          <a:effectRef idx="2">
-            <a:schemeClr val="accent1"/>
-          </a:effectRef>
-          <a:fontRef idx="minor">
-            <a:schemeClr val="lt1"/>
-          </a:fontRef>
-        </p:style>
-        <p:txBody>
-          <a:bodyPr rtlCol="0" anchor="ctr" lIns="182880" rIns="100584" tIns="91440"/>
-          <a:lstStyle/>
-          <a:p>
-            <a:pPr algn="ctr">
-              <a:defRPr sz="1600" b="1">
-                <a:solidFill>
-                  <a:srgbClr val="232D37"/>
-                </a:solidFill>
-                <a:latin typeface="Aptos Display"/>
-              </a:defRPr>
-            </a:pPr>
-            <a:r>
-              <a:t>Projection start</a:t>
-            </a:r>
-          </a:p>
-          <a:p>
-            <a:pPr>
-              <a:spcBef>
-                <a:spcPts val="300"/>
-              </a:spcBef>
-              <a:defRPr sz="1100">
-                <a:solidFill>
-                  <a:srgbClr val="232D37"/>
-                </a:solidFill>
-                <a:latin typeface="Aptos"/>
-              </a:defRPr>
-            </a:pPr>
-            <a:r>
-              <a:t>basis = basisPct / 100 × balance</a:t>
-            </a:r>
-          </a:p>
-          <a:p>
-            <a:pPr>
-              <a:spcBef>
-                <a:spcPts val="300"/>
-              </a:spcBef>
-              <a:defRPr sz="1100">
-                <a:solidFill>
-                  <a:srgbClr val="232D37"/>
-                </a:solidFill>
-                <a:latin typeface="Aptos"/>
-              </a:defRPr>
-            </a:pPr>
-            <a:r>
-              <a:t>Clamp to [0, balance]</a:t>
-            </a:r>
-          </a:p>
-        </p:txBody>
-      </p:sp>
-      <p:sp>
-        <p:nvSpPr>
-          <p:cNvPr id="9" name="Rectangle 8"/>
-          <p:cNvSpPr/>
-          <p:nvPr/>
-        </p:nvSpPr>
-        <p:spPr>
-          <a:xfrm>
-            <a:off x="5760720" y="1298448"/>
-            <a:ext cx="82296" cy="1325880"/>
-          </a:xfrm>
-          <a:prstGeom prst="rect">
-            <a:avLst/>
-          </a:prstGeom>
-          <a:solidFill>
-            <a:srgbClr val="429761"/>
-          </a:solidFill>
-          <a:ln>
-            <a:noFill/>
-          </a:ln>
-        </p:spPr>
-        <p:style>
-          <a:lnRef idx="1">
-            <a:schemeClr val="accent1"/>
-          </a:lnRef>
-          <a:fillRef idx="3">
-            <a:schemeClr val="accent1"/>
-          </a:fillRef>
-          <a:effectRef idx="2">
-            <a:schemeClr val="accent1"/>
-          </a:effectRef>
-          <a:fontRef idx="minor">
-            <a:schemeClr val="lt1"/>
-          </a:fontRef>
-        </p:style>
-        <p:txBody>
-          <a:bodyPr rtlCol="0" anchor="ctr"/>
-          <a:lstStyle/>
-          <a:p>
-            <a:pPr algn="ctr"/>
-          </a:p>
-        </p:txBody>
-      </p:sp>
-      <p:sp>
-        <p:nvSpPr>
-          <p:cNvPr id="10" name="Rounded Rectangle 9"/>
-          <p:cNvSpPr/>
-          <p:nvPr/>
-        </p:nvSpPr>
-        <p:spPr>
-          <a:xfrm>
-            <a:off x="8549640" y="1298448"/>
-            <a:ext cx="3063240" cy="1325880"/>
-          </a:xfrm>
-          <a:prstGeom prst="roundRect">
-            <a:avLst/>
-          </a:prstGeom>
-          <a:solidFill>
-            <a:srgbClr val="F7EFFF"/>
-          </a:solidFill>
-          <a:ln w="13970">
-            <a:solidFill>
-              <a:srgbClr val="7852B0"/>
-            </a:solidFill>
-          </a:ln>
-        </p:spPr>
-        <p:style>
-          <a:lnRef idx="1">
-            <a:schemeClr val="accent1"/>
-          </a:lnRef>
-          <a:fillRef idx="3">
-            <a:schemeClr val="accent1"/>
-          </a:fillRef>
-          <a:effectRef idx="2">
-            <a:schemeClr val="accent1"/>
-          </a:effectRef>
-          <a:fontRef idx="minor">
-            <a:schemeClr val="lt1"/>
-          </a:fontRef>
-        </p:style>
-        <p:txBody>
-          <a:bodyPr rtlCol="0" anchor="ctr" lIns="182880" rIns="100584" tIns="91440"/>
-          <a:lstStyle/>
-          <a:p>
-            <a:pPr algn="ctr">
-              <a:defRPr sz="1600" b="1">
-                <a:solidFill>
-                  <a:srgbClr val="232D37"/>
-                </a:solidFill>
-                <a:latin typeface="Aptos Display"/>
-              </a:defRPr>
-            </a:pPr>
-            <a:r>
-              <a:t>Ongoing model</a:t>
-            </a:r>
-          </a:p>
-          <a:p>
-            <a:pPr>
-              <a:spcBef>
-                <a:spcPts val="300"/>
-              </a:spcBef>
-              <a:defRPr sz="1100">
-                <a:solidFill>
-                  <a:srgbClr val="232D37"/>
-                </a:solidFill>
-                <a:latin typeface="Aptos"/>
-              </a:defRPr>
-            </a:pPr>
-            <a:r>
-              <a:t>Average-cost basis rolls forward</a:t>
-            </a:r>
-          </a:p>
-          <a:p>
-            <a:pPr>
-              <a:spcBef>
-                <a:spcPts val="300"/>
-              </a:spcBef>
-              <a:defRPr sz="1100">
-                <a:solidFill>
-                  <a:srgbClr val="232D37"/>
-                </a:solidFill>
-                <a:latin typeface="Aptos"/>
-              </a:defRPr>
-            </a:pPr>
-            <a:r>
-              <a:t>Drives gain fraction, realized LTCG, and unrealized gain</a:t>
-            </a:r>
-          </a:p>
-        </p:txBody>
-      </p:sp>
-      <p:sp>
-        <p:nvSpPr>
-          <p:cNvPr id="11" name="Rectangle 10"/>
-          <p:cNvSpPr/>
-          <p:nvPr/>
-        </p:nvSpPr>
-        <p:spPr>
-          <a:xfrm>
-            <a:off x="8549640" y="1298448"/>
-            <a:ext cx="82296" cy="1325880"/>
-          </a:xfrm>
-          <a:prstGeom prst="rect">
-            <a:avLst/>
-          </a:prstGeom>
-          <a:solidFill>
-            <a:srgbClr val="7852B0"/>
-          </a:solidFill>
-          <a:ln>
-            <a:noFill/>
-          </a:ln>
-        </p:spPr>
-        <p:style>
-          <a:lnRef idx="1">
-            <a:schemeClr val="accent1"/>
-          </a:lnRef>
-          <a:fillRef idx="3">
-            <a:schemeClr val="accent1"/>
-          </a:fillRef>
-          <a:effectRef idx="2">
-            <a:schemeClr val="accent1"/>
-          </a:effectRef>
-          <a:fontRef idx="minor">
-            <a:schemeClr val="lt1"/>
-          </a:fontRef>
-        </p:style>
-        <p:txBody>
-          <a:bodyPr rtlCol="0" anchor="ctr"/>
-          <a:lstStyle/>
-          <a:p>
-            <a:pPr algn="ctr"/>
-          </a:p>
-        </p:txBody>
-      </p:sp>
       <p:cxnSp>
         <p:nvCxnSpPr>
-          <p:cNvPr id="12" name="Connector 11"/>
+          <p:cNvPr id="14" name="Connector 13"/>
           <p:cNvCxnSpPr/>
           <p:nvPr/>
         </p:nvCxnSpPr>
         <p:spPr>
           <a:xfrm>
-            <a:off x="2743200" y="1965960"/>
-            <a:ext cx="256032" cy="0"/>
+            <a:off x="2606040" y="1947672"/>
+            <a:ext cx="228600" cy="0"/>
           </a:xfrm>
           <a:prstGeom prst="line">
             <a:avLst/>
@@ -5262,21 +5312,21 @@
       </p:cxnSp>
       <p:cxnSp>
         <p:nvCxnSpPr>
-          <p:cNvPr id="13" name="Connector 12"/>
+          <p:cNvPr id="15" name="Connector 14"/>
           <p:cNvCxnSpPr/>
           <p:nvPr/>
         </p:nvCxnSpPr>
         <p:spPr>
           <a:xfrm>
-            <a:off x="5349240" y="1965960"/>
-            <a:ext cx="256032" cy="0"/>
+            <a:off x="5010912" y="1947672"/>
+            <a:ext cx="228600" cy="0"/>
           </a:xfrm>
           <a:prstGeom prst="line">
             <a:avLst/>
           </a:prstGeom>
           <a:ln w="22860">
             <a:solidFill>
-              <a:srgbClr val="0F2647"/>
+              <a:srgbClr val="429761"/>
             </a:solidFill>
           </a:ln>
         </p:spPr>
@@ -5297,21 +5347,21 @@
       </p:cxnSp>
       <p:cxnSp>
         <p:nvCxnSpPr>
-          <p:cNvPr id="14" name="Connector 13"/>
+          <p:cNvPr id="16" name="Connector 15"/>
           <p:cNvCxnSpPr/>
           <p:nvPr/>
         </p:nvCxnSpPr>
         <p:spPr>
           <a:xfrm>
-            <a:off x="8138160" y="1965960"/>
-            <a:ext cx="256032" cy="0"/>
+            <a:off x="7415783" y="1947672"/>
+            <a:ext cx="228600" cy="0"/>
           </a:xfrm>
           <a:prstGeom prst="line">
             <a:avLst/>
           </a:prstGeom>
           <a:ln w="22860">
             <a:solidFill>
-              <a:srgbClr val="429761"/>
+              <a:srgbClr val="E5892A"/>
             </a:solidFill>
           </a:ln>
         </p:spPr>
@@ -5330,130 +5380,51 @@
           </a:fontRef>
         </p:style>
       </p:cxnSp>
-      <p:sp>
-        <p:nvSpPr>
-          <p:cNvPr id="15" name="Rounded Rectangle 14"/>
-          <p:cNvSpPr/>
-          <p:nvPr/>
-        </p:nvSpPr>
-        <p:spPr>
-          <a:xfrm>
-            <a:off x="1234440" y="3703320"/>
-            <a:ext cx="4389120" cy="1325880"/>
-          </a:xfrm>
-          <a:prstGeom prst="roundRect">
-            <a:avLst/>
-          </a:prstGeom>
-          <a:solidFill>
-            <a:srgbClr val="FFF6E8"/>
-          </a:solidFill>
-          <a:ln w="13970">
+      <p:cxnSp>
+        <p:nvCxnSpPr>
+          <p:cNvPr id="17" name="Connector 16"/>
+          <p:cNvCxnSpPr/>
+          <p:nvPr/>
+        </p:nvCxnSpPr>
+        <p:spPr>
+          <a:xfrm>
+            <a:off x="9820656" y="1947672"/>
+            <a:ext cx="228600" cy="0"/>
+          </a:xfrm>
+          <a:prstGeom prst="line">
+            <a:avLst/>
+          </a:prstGeom>
+          <a:ln w="22860">
             <a:solidFill>
-              <a:srgbClr val="E5892A"/>
+              <a:srgbClr val="7852B0"/>
             </a:solidFill>
           </a:ln>
         </p:spPr>
         <p:style>
-          <a:lnRef idx="1">
+          <a:lnRef idx="2">
             <a:schemeClr val="accent1"/>
           </a:lnRef>
-          <a:fillRef idx="3">
+          <a:fillRef idx="0">
             <a:schemeClr val="accent1"/>
           </a:fillRef>
-          <a:effectRef idx="2">
+          <a:effectRef idx="1">
             <a:schemeClr val="accent1"/>
           </a:effectRef>
           <a:fontRef idx="minor">
-            <a:schemeClr val="lt1"/>
+            <a:schemeClr val="tx1"/>
           </a:fontRef>
         </p:style>
-        <p:txBody>
-          <a:bodyPr rtlCol="0" anchor="ctr" lIns="182880" rIns="100584" tIns="91440"/>
-          <a:lstStyle/>
-          <a:p>
-            <a:pPr algn="ctr">
-              <a:defRPr sz="1600" b="1">
-                <a:solidFill>
-                  <a:srgbClr val="232D37"/>
-                </a:solidFill>
-                <a:latin typeface="Aptos Display"/>
-              </a:defRPr>
-            </a:pPr>
-            <a:r>
-              <a:t>Blank-basis behavior</a:t>
-            </a:r>
-          </a:p>
-          <a:p>
-            <a:pPr>
-              <a:spcBef>
-                <a:spcPts val="300"/>
-              </a:spcBef>
-              <a:defRPr sz="1200">
-                <a:solidFill>
-                  <a:srgbClr val="232D37"/>
-                </a:solidFill>
-                <a:latin typeface="Aptos"/>
-              </a:defRPr>
-            </a:pPr>
-            <a:r>
-              <a:t>If Expenses is on but basisPct is blank, the model initializes basis = balance: no embedded gain today, but tracking remains active.</a:t>
-            </a:r>
-          </a:p>
-        </p:txBody>
-      </p:sp>
-      <p:sp>
-        <p:nvSpPr>
-          <p:cNvPr id="16" name="Rectangle 15"/>
+      </p:cxnSp>
+      <p:sp>
+        <p:nvSpPr>
+          <p:cNvPr id="18" name="Rounded Rectangle 17"/>
           <p:cNvSpPr/>
           <p:nvPr/>
         </p:nvSpPr>
         <p:spPr>
           <a:xfrm>
-            <a:off x="1234440" y="3703320"/>
-            <a:ext cx="82296" cy="1325880"/>
-          </a:xfrm>
-          <a:prstGeom prst="rect">
-            <a:avLst/>
-          </a:prstGeom>
-          <a:solidFill>
-            <a:srgbClr val="E5892A"/>
-          </a:solidFill>
-          <a:ln>
-            <a:noFill/>
-          </a:ln>
-        </p:spPr>
-        <p:style>
-          <a:lnRef idx="1">
-            <a:schemeClr val="accent1"/>
-          </a:lnRef>
-          <a:fillRef idx="3">
-            <a:schemeClr val="accent1"/>
-          </a:fillRef>
-          <a:effectRef idx="2">
-            <a:schemeClr val="accent1"/>
-          </a:effectRef>
-          <a:fontRef idx="minor">
-            <a:schemeClr val="lt1"/>
-          </a:fontRef>
-        </p:style>
-        <p:txBody>
-          <a:bodyPr rtlCol="0" anchor="ctr"/>
-          <a:lstStyle/>
-          <a:p>
-            <a:pPr algn="ctr"/>
-          </a:p>
-        </p:txBody>
-      </p:sp>
-      <p:sp>
-        <p:nvSpPr>
-          <p:cNvPr id="17" name="Rounded Rectangle 16"/>
-          <p:cNvSpPr/>
-          <p:nvPr/>
-        </p:nvSpPr>
-        <p:spPr>
-          <a:xfrm>
-            <a:off x="6537960" y="3703320"/>
-            <a:ext cx="4389120" cy="1325880"/>
+            <a:off x="1005840" y="3520440"/>
+            <a:ext cx="4800600" cy="1325880"/>
           </a:xfrm>
           <a:prstGeom prst="roundRect">
             <a:avLst/>
@@ -5486,7 +5457,7 @@
           <a:lstStyle/>
           <a:p>
             <a:pPr algn="ctr">
-              <a:defRPr sz="1600" b="1">
+              <a:defRPr sz="1700" b="1">
                 <a:solidFill>
                   <a:srgbClr val="232D37"/>
                 </a:solidFill>
@@ -5494,7 +5465,7 @@
               </a:defRPr>
             </a:pPr>
             <a:r>
-              <a:t>Why percentage input?</a:t>
+              <a:t>Read-only guarantee</a:t>
             </a:r>
           </a:p>
           <a:p>
@@ -5510,20 +5481,20 @@
               </a:defRPr>
             </a:pPr>
             <a:r>
-              <a:t>It communicates basis relative to the starting portfolio size and avoids presenting a dollar field that becomes context-dependent as balances change.</a:t>
-            </a:r>
-          </a:p>
-        </p:txBody>
-      </p:sp>
-      <p:sp>
-        <p:nvSpPr>
-          <p:cNvPr id="18" name="Rectangle 17"/>
+              <a:t>The exporter reads `lastProjection` only. It does not mutate state, write inputs, re-run `computeProjection()`, or rebuild charts.</a:t>
+            </a:r>
+          </a:p>
+        </p:txBody>
+      </p:sp>
+      <p:sp>
+        <p:nvSpPr>
+          <p:cNvPr id="19" name="Rectangle 18"/>
           <p:cNvSpPr/>
           <p:nvPr/>
         </p:nvSpPr>
         <p:spPr>
           <a:xfrm>
-            <a:off x="6537960" y="3703320"/>
+            <a:off x="1005840" y="3520440"/>
             <a:ext cx="82296" cy="1325880"/>
           </a:xfrm>
           <a:prstGeom prst="rect">
@@ -5560,7 +5531,121 @@
       </p:sp>
       <p:sp>
         <p:nvSpPr>
-          <p:cNvPr id="19" name="Rectangle 18"/>
+          <p:cNvPr id="20" name="Rounded Rectangle 19"/>
+          <p:cNvSpPr/>
+          <p:nvPr/>
+        </p:nvSpPr>
+        <p:spPr>
+          <a:xfrm>
+            <a:off x="6382512" y="3520440"/>
+            <a:ext cx="4800600" cy="1325880"/>
+          </a:xfrm>
+          <a:prstGeom prst="roundRect">
+            <a:avLst/>
+          </a:prstGeom>
+          <a:solidFill>
+            <a:srgbClr val="F8FAFC"/>
+          </a:solidFill>
+          <a:ln w="13970">
+            <a:solidFill>
+              <a:srgbClr val="0F2647"/>
+            </a:solidFill>
+          </a:ln>
+        </p:spPr>
+        <p:style>
+          <a:lnRef idx="1">
+            <a:schemeClr val="accent1"/>
+          </a:lnRef>
+          <a:fillRef idx="3">
+            <a:schemeClr val="accent1"/>
+          </a:fillRef>
+          <a:effectRef idx="2">
+            <a:schemeClr val="accent1"/>
+          </a:effectRef>
+          <a:fontRef idx="minor">
+            <a:schemeClr val="lt1"/>
+          </a:fontRef>
+        </p:style>
+        <p:txBody>
+          <a:bodyPr rtlCol="0" anchor="ctr" lIns="182880" rIns="100584" tIns="91440"/>
+          <a:lstStyle/>
+          <a:p>
+            <a:pPr algn="ctr">
+              <a:defRPr sz="1700" b="1">
+                <a:solidFill>
+                  <a:srgbClr val="232D37"/>
+                </a:solidFill>
+                <a:latin typeface="Aptos Display"/>
+              </a:defRPr>
+            </a:pPr>
+            <a:r>
+              <a:t>Safety checks</a:t>
+            </a:r>
+          </a:p>
+          <a:p>
+            <a:pPr>
+              <a:spcBef>
+                <a:spcPts val="300"/>
+              </a:spcBef>
+              <a:defRPr sz="1200">
+                <a:solidFill>
+                  <a:srgbClr val="232D37"/>
+                </a:solidFill>
+                <a:latin typeface="Aptos"/>
+              </a:defRPr>
+            </a:pPr>
+            <a:r>
+              <a:t>If there are no projection rows or the SheetJS XLSX library is unavailable, the app alerts rather than generating an empty or broken file.</a:t>
+            </a:r>
+          </a:p>
+        </p:txBody>
+      </p:sp>
+      <p:sp>
+        <p:nvSpPr>
+          <p:cNvPr id="21" name="Rectangle 20"/>
+          <p:cNvSpPr/>
+          <p:nvPr/>
+        </p:nvSpPr>
+        <p:spPr>
+          <a:xfrm>
+            <a:off x="6382512" y="3520440"/>
+            <a:ext cx="82296" cy="1325880"/>
+          </a:xfrm>
+          <a:prstGeom prst="rect">
+            <a:avLst/>
+          </a:prstGeom>
+          <a:solidFill>
+            <a:srgbClr val="0F2647"/>
+          </a:solidFill>
+          <a:ln>
+            <a:noFill/>
+          </a:ln>
+        </p:spPr>
+        <p:style>
+          <a:lnRef idx="1">
+            <a:schemeClr val="accent1"/>
+          </a:lnRef>
+          <a:fillRef idx="3">
+            <a:schemeClr val="accent1"/>
+          </a:fillRef>
+          <a:effectRef idx="2">
+            <a:schemeClr val="accent1"/>
+          </a:effectRef>
+          <a:fontRef idx="minor">
+            <a:schemeClr val="lt1"/>
+          </a:fontRef>
+        </p:style>
+        <p:txBody>
+          <a:bodyPr rtlCol="0" anchor="ctr"/>
+          <a:lstStyle/>
+          <a:p>
+            <a:pPr algn="ctr"/>
+          </a:p>
+        </p:txBody>
+      </p:sp>
+      <p:sp>
+        <p:nvSpPr>
+          <p:cNvPr id="22" name="Rectangle 21"/>
           <p:cNvSpPr/>
           <p:nvPr/>
         </p:nvSpPr>
@@ -5603,7 +5688,7 @@
       </p:sp>
       <p:sp>
         <p:nvSpPr>
-          <p:cNvPr id="20" name="TextBox 19"/>
+          <p:cNvPr id="23" name="TextBox 22"/>
           <p:cNvSpPr txBox="1"/>
           <p:nvPr/>
         </p:nvSpPr>
@@ -5632,7 +5717,7 @@
               </a:defRPr>
             </a:pPr>
             <a:r>
-              <a:t>Retirement Income Planner • Architecture overview • Basis-percentage and formula-page update</a:t>
+              <a:t>Retirement Income Planner • Architecture overview • Account-sheet Excel export update</a:t>
             </a:r>
           </a:p>
         </p:txBody>
@@ -5694,7 +5779,7 @@
               </a:defRPr>
             </a:pPr>
             <a:r>
-              <a:t>Backward-compatible state hydration</a:t>
+              <a:t>Workbook anatomy: one overview plus account sheets</a:t>
             </a:r>
           </a:p>
         </p:txBody>
@@ -5730,7 +5815,7 @@
               </a:defRPr>
             </a:pPr>
             <a:r>
-              <a:t>hydrateState() acts as the boundary between saved-plan versions and the current state contract.</a:t>
+              <a:t>The exported workbook is a structured projection archive that follows person order and enabled account order.</a:t>
             </a:r>
           </a:p>
         </p:txBody>
@@ -5743,8 +5828,494 @@
         </p:nvSpPr>
         <p:spPr>
           <a:xfrm>
-            <a:off x="502920" y="1143000"/>
-            <a:ext cx="2286000" cy="4526280"/>
+            <a:off x="594360" y="1143000"/>
+            <a:ext cx="2788920" cy="4526280"/>
+          </a:xfrm>
+          <a:prstGeom prst="roundRect">
+            <a:avLst/>
+          </a:prstGeom>
+          <a:solidFill>
+            <a:srgbClr val="E9F4FF"/>
+          </a:solidFill>
+          <a:ln w="13970">
+            <a:solidFill>
+              <a:srgbClr val="266EB2"/>
+            </a:solidFill>
+          </a:ln>
+        </p:spPr>
+        <p:style>
+          <a:lnRef idx="1">
+            <a:schemeClr val="accent1"/>
+          </a:lnRef>
+          <a:fillRef idx="3">
+            <a:schemeClr val="accent1"/>
+          </a:fillRef>
+          <a:effectRef idx="2">
+            <a:schemeClr val="accent1"/>
+          </a:effectRef>
+          <a:fontRef idx="minor">
+            <a:schemeClr val="lt1"/>
+          </a:fontRef>
+        </p:style>
+        <p:txBody>
+          <a:bodyPr rtlCol="0" anchor="ctr" lIns="182880" rIns="100584" tIns="91440"/>
+          <a:lstStyle/>
+          <a:p>
+            <a:pPr algn="ctr">
+              <a:defRPr sz="1700" b="1">
+                <a:solidFill>
+                  <a:srgbClr val="232D37"/>
+                </a:solidFill>
+                <a:latin typeface="Aptos Display"/>
+              </a:defRPr>
+            </a:pPr>
+            <a:r>
+              <a:t>Sheet 1: Projection by year</a:t>
+            </a:r>
+          </a:p>
+          <a:p>
+            <a:pPr>
+              <a:spcBef>
+                <a:spcPts val="300"/>
+              </a:spcBef>
+              <a:defRPr sz="1200">
+                <a:solidFill>
+                  <a:srgbClr val="232D37"/>
+                </a:solidFill>
+                <a:latin typeface="Aptos"/>
+              </a:defRPr>
+            </a:pPr>
+            <a:r>
+              <a:t>Always first</a:t>
+            </a:r>
+          </a:p>
+          <a:p>
+            <a:pPr>
+              <a:spcBef>
+                <a:spcPts val="300"/>
+              </a:spcBef>
+              <a:defRPr sz="1200">
+                <a:solidFill>
+                  <a:srgbClr val="232D37"/>
+                </a:solidFill>
+                <a:latin typeface="Aptos"/>
+              </a:defRPr>
+            </a:pPr>
+            <a:r>
+              <a:t>All plan-wide chartable fields</a:t>
+            </a:r>
+          </a:p>
+          <a:p>
+            <a:pPr>
+              <a:spcBef>
+                <a:spcPts val="300"/>
+              </a:spcBef>
+              <a:defRPr sz="1200">
+                <a:solidFill>
+                  <a:srgbClr val="232D37"/>
+                </a:solidFill>
+                <a:latin typeface="Aptos"/>
+              </a:defRPr>
+            </a:pPr>
+            <a:r>
+              <a:t>Income sources, tax, SST, NIIT, IRMAA, AGI</a:t>
+            </a:r>
+          </a:p>
+          <a:p>
+            <a:pPr>
+              <a:spcBef>
+                <a:spcPts val="300"/>
+              </a:spcBef>
+              <a:defRPr sz="1200">
+                <a:solidFill>
+                  <a:srgbClr val="232D37"/>
+                </a:solidFill>
+                <a:latin typeface="Aptos"/>
+              </a:defRPr>
+            </a:pPr>
+            <a:r>
+              <a:t>Effective/marginal rates</a:t>
+            </a:r>
+          </a:p>
+          <a:p>
+            <a:pPr>
+              <a:spcBef>
+                <a:spcPts val="300"/>
+              </a:spcBef>
+              <a:defRPr sz="1200">
+                <a:solidFill>
+                  <a:srgbClr val="232D37"/>
+                </a:solidFill>
+                <a:latin typeface="Aptos"/>
+              </a:defRPr>
+            </a:pPr>
+            <a:r>
+              <a:t>IRA, Roth, and brokerage balances</a:t>
+            </a:r>
+          </a:p>
+        </p:txBody>
+      </p:sp>
+      <p:sp>
+        <p:nvSpPr>
+          <p:cNvPr id="5" name="Rectangle 4"/>
+          <p:cNvSpPr/>
+          <p:nvPr/>
+        </p:nvSpPr>
+        <p:spPr>
+          <a:xfrm>
+            <a:off x="594360" y="1143000"/>
+            <a:ext cx="82296" cy="4526280"/>
+          </a:xfrm>
+          <a:prstGeom prst="rect">
+            <a:avLst/>
+          </a:prstGeom>
+          <a:solidFill>
+            <a:srgbClr val="266EB2"/>
+          </a:solidFill>
+          <a:ln>
+            <a:noFill/>
+          </a:ln>
+        </p:spPr>
+        <p:style>
+          <a:lnRef idx="1">
+            <a:schemeClr val="accent1"/>
+          </a:lnRef>
+          <a:fillRef idx="3">
+            <a:schemeClr val="accent1"/>
+          </a:fillRef>
+          <a:effectRef idx="2">
+            <a:schemeClr val="accent1"/>
+          </a:effectRef>
+          <a:fontRef idx="minor">
+            <a:schemeClr val="lt1"/>
+          </a:fontRef>
+        </p:style>
+        <p:txBody>
+          <a:bodyPr rtlCol="0" anchor="ctr"/>
+          <a:lstStyle/>
+          <a:p>
+            <a:pPr algn="ctr"/>
+          </a:p>
+        </p:txBody>
+      </p:sp>
+      <p:sp>
+        <p:nvSpPr>
+          <p:cNvPr id="6" name="Rounded Rectangle 5"/>
+          <p:cNvSpPr/>
+          <p:nvPr/>
+        </p:nvSpPr>
+        <p:spPr>
+          <a:xfrm>
+            <a:off x="3794760" y="1143000"/>
+            <a:ext cx="2788920" cy="4526280"/>
+          </a:xfrm>
+          <a:prstGeom prst="roundRect">
+            <a:avLst/>
+          </a:prstGeom>
+          <a:solidFill>
+            <a:srgbClr val="EAF9F4"/>
+          </a:solidFill>
+          <a:ln w="13970">
+            <a:solidFill>
+              <a:srgbClr val="429761"/>
+            </a:solidFill>
+          </a:ln>
+        </p:spPr>
+        <p:style>
+          <a:lnRef idx="1">
+            <a:schemeClr val="accent1"/>
+          </a:lnRef>
+          <a:fillRef idx="3">
+            <a:schemeClr val="accent1"/>
+          </a:fillRef>
+          <a:effectRef idx="2">
+            <a:schemeClr val="accent1"/>
+          </a:effectRef>
+          <a:fontRef idx="minor">
+            <a:schemeClr val="lt1"/>
+          </a:fontRef>
+        </p:style>
+        <p:txBody>
+          <a:bodyPr rtlCol="0" anchor="ctr" lIns="182880" rIns="100584" tIns="91440"/>
+          <a:lstStyle/>
+          <a:p>
+            <a:pPr algn="ctr">
+              <a:defRPr sz="1700" b="1">
+                <a:solidFill>
+                  <a:srgbClr val="232D37"/>
+                </a:solidFill>
+                <a:latin typeface="Aptos Display"/>
+              </a:defRPr>
+            </a:pPr>
+            <a:r>
+              <a:t>Person 1 sheets</a:t>
+            </a:r>
+          </a:p>
+          <a:p>
+            <a:pPr>
+              <a:spcBef>
+                <a:spcPts val="300"/>
+              </a:spcBef>
+              <a:defRPr sz="1200">
+                <a:solidFill>
+                  <a:srgbClr val="232D37"/>
+                </a:solidFill>
+                <a:latin typeface="Aptos"/>
+              </a:defRPr>
+            </a:pPr>
+            <a:r>
+              <a:t>Enabled brokerage portfolios</a:t>
+            </a:r>
+          </a:p>
+          <a:p>
+            <a:pPr>
+              <a:spcBef>
+                <a:spcPts val="300"/>
+              </a:spcBef>
+              <a:defRPr sz="1200">
+                <a:solidFill>
+                  <a:srgbClr val="232D37"/>
+                </a:solidFill>
+                <a:latin typeface="Aptos"/>
+              </a:defRPr>
+            </a:pPr>
+            <a:r>
+              <a:t>Then Pre-tax IRA if enabled</a:t>
+            </a:r>
+          </a:p>
+          <a:p>
+            <a:pPr>
+              <a:spcBef>
+                <a:spcPts val="300"/>
+              </a:spcBef>
+              <a:defRPr sz="1200">
+                <a:solidFill>
+                  <a:srgbClr val="232D37"/>
+                </a:solidFill>
+                <a:latin typeface="Aptos"/>
+              </a:defRPr>
+            </a:pPr>
+            <a:r>
+              <a:t>Then Roth IRA if enabled</a:t>
+            </a:r>
+          </a:p>
+          <a:p>
+            <a:pPr>
+              <a:spcBef>
+                <a:spcPts val="300"/>
+              </a:spcBef>
+              <a:defRPr sz="1200">
+                <a:solidFill>
+                  <a:srgbClr val="232D37"/>
+                </a:solidFill>
+                <a:latin typeface="Aptos"/>
+              </a:defRPr>
+            </a:pPr>
+            <a:r>
+              <a:t>One row per projected year</a:t>
+            </a:r>
+          </a:p>
+        </p:txBody>
+      </p:sp>
+      <p:sp>
+        <p:nvSpPr>
+          <p:cNvPr id="7" name="Rectangle 6"/>
+          <p:cNvSpPr/>
+          <p:nvPr/>
+        </p:nvSpPr>
+        <p:spPr>
+          <a:xfrm>
+            <a:off x="3794760" y="1143000"/>
+            <a:ext cx="82296" cy="4526280"/>
+          </a:xfrm>
+          <a:prstGeom prst="rect">
+            <a:avLst/>
+          </a:prstGeom>
+          <a:solidFill>
+            <a:srgbClr val="429761"/>
+          </a:solidFill>
+          <a:ln>
+            <a:noFill/>
+          </a:ln>
+        </p:spPr>
+        <p:style>
+          <a:lnRef idx="1">
+            <a:schemeClr val="accent1"/>
+          </a:lnRef>
+          <a:fillRef idx="3">
+            <a:schemeClr val="accent1"/>
+          </a:fillRef>
+          <a:effectRef idx="2">
+            <a:schemeClr val="accent1"/>
+          </a:effectRef>
+          <a:fontRef idx="minor">
+            <a:schemeClr val="lt1"/>
+          </a:fontRef>
+        </p:style>
+        <p:txBody>
+          <a:bodyPr rtlCol="0" anchor="ctr"/>
+          <a:lstStyle/>
+          <a:p>
+            <a:pPr algn="ctr"/>
+          </a:p>
+        </p:txBody>
+      </p:sp>
+      <p:sp>
+        <p:nvSpPr>
+          <p:cNvPr id="8" name="Rounded Rectangle 7"/>
+          <p:cNvSpPr/>
+          <p:nvPr/>
+        </p:nvSpPr>
+        <p:spPr>
+          <a:xfrm>
+            <a:off x="6995160" y="1143000"/>
+            <a:ext cx="2788920" cy="4526280"/>
+          </a:xfrm>
+          <a:prstGeom prst="roundRect">
+            <a:avLst/>
+          </a:prstGeom>
+          <a:solidFill>
+            <a:srgbClr val="F7EFFF"/>
+          </a:solidFill>
+          <a:ln w="13970">
+            <a:solidFill>
+              <a:srgbClr val="7852B0"/>
+            </a:solidFill>
+          </a:ln>
+        </p:spPr>
+        <p:style>
+          <a:lnRef idx="1">
+            <a:schemeClr val="accent1"/>
+          </a:lnRef>
+          <a:fillRef idx="3">
+            <a:schemeClr val="accent1"/>
+          </a:fillRef>
+          <a:effectRef idx="2">
+            <a:schemeClr val="accent1"/>
+          </a:effectRef>
+          <a:fontRef idx="minor">
+            <a:schemeClr val="lt1"/>
+          </a:fontRef>
+        </p:style>
+        <p:txBody>
+          <a:bodyPr rtlCol="0" anchor="ctr" lIns="182880" rIns="100584" tIns="91440"/>
+          <a:lstStyle/>
+          <a:p>
+            <a:pPr algn="ctr">
+              <a:defRPr sz="1700" b="1">
+                <a:solidFill>
+                  <a:srgbClr val="232D37"/>
+                </a:solidFill>
+                <a:latin typeface="Aptos Display"/>
+              </a:defRPr>
+            </a:pPr>
+            <a:r>
+              <a:t>Person 2 sheets</a:t>
+            </a:r>
+          </a:p>
+          <a:p>
+            <a:pPr>
+              <a:spcBef>
+                <a:spcPts val="300"/>
+              </a:spcBef>
+              <a:defRPr sz="1200">
+                <a:solidFill>
+                  <a:srgbClr val="232D37"/>
+                </a:solidFill>
+                <a:latin typeface="Aptos"/>
+              </a:defRPr>
+            </a:pPr>
+            <a:r>
+              <a:t>Same ordering</a:t>
+            </a:r>
+          </a:p>
+          <a:p>
+            <a:pPr>
+              <a:spcBef>
+                <a:spcPts val="300"/>
+              </a:spcBef>
+              <a:defRPr sz="1200">
+                <a:solidFill>
+                  <a:srgbClr val="232D37"/>
+                </a:solidFill>
+                <a:latin typeface="Aptos"/>
+              </a:defRPr>
+            </a:pPr>
+            <a:r>
+              <a:t>Created only in a married plan / when accounts are enabled</a:t>
+            </a:r>
+          </a:p>
+          <a:p>
+            <a:pPr>
+              <a:spcBef>
+                <a:spcPts val="300"/>
+              </a:spcBef>
+              <a:defRPr sz="1200">
+                <a:solidFill>
+                  <a:srgbClr val="232D37"/>
+                </a:solidFill>
+                <a:latin typeface="Aptos"/>
+              </a:defRPr>
+            </a:pPr>
+            <a:r>
+              <a:t>Disabled accounts are omitted</a:t>
+            </a:r>
+          </a:p>
+        </p:txBody>
+      </p:sp>
+      <p:sp>
+        <p:nvSpPr>
+          <p:cNvPr id="9" name="Rectangle 8"/>
+          <p:cNvSpPr/>
+          <p:nvPr/>
+        </p:nvSpPr>
+        <p:spPr>
+          <a:xfrm>
+            <a:off x="6995160" y="1143000"/>
+            <a:ext cx="82296" cy="4526280"/>
+          </a:xfrm>
+          <a:prstGeom prst="rect">
+            <a:avLst/>
+          </a:prstGeom>
+          <a:solidFill>
+            <a:srgbClr val="7852B0"/>
+          </a:solidFill>
+          <a:ln>
+            <a:noFill/>
+          </a:ln>
+        </p:spPr>
+        <p:style>
+          <a:lnRef idx="1">
+            <a:schemeClr val="accent1"/>
+          </a:lnRef>
+          <a:fillRef idx="3">
+            <a:schemeClr val="accent1"/>
+          </a:fillRef>
+          <a:effectRef idx="2">
+            <a:schemeClr val="accent1"/>
+          </a:effectRef>
+          <a:fontRef idx="minor">
+            <a:schemeClr val="lt1"/>
+          </a:fontRef>
+        </p:style>
+        <p:txBody>
+          <a:bodyPr rtlCol="0" anchor="ctr"/>
+          <a:lstStyle/>
+          <a:p>
+            <a:pPr algn="ctr"/>
+          </a:p>
+        </p:txBody>
+      </p:sp>
+      <p:sp>
+        <p:nvSpPr>
+          <p:cNvPr id="10" name="Rounded Rectangle 9"/>
+          <p:cNvSpPr/>
+          <p:nvPr/>
+        </p:nvSpPr>
+        <p:spPr>
+          <a:xfrm>
+            <a:off x="10195560" y="1143000"/>
+            <a:ext cx="1417320" cy="4526280"/>
           </a:xfrm>
           <a:prstGeom prst="roundRect">
             <a:avLst/>
@@ -5777,7 +6348,7 @@
           <a:lstStyle/>
           <a:p>
             <a:pPr algn="ctr">
-              <a:defRPr sz="1700" b="1">
+              <a:defRPr sz="1600" b="1">
                 <a:solidFill>
                   <a:srgbClr val="232D37"/>
                 </a:solidFill>
@@ -5785,7 +6356,7 @@
               </a:defRPr>
             </a:pPr>
             <a:r>
-              <a:t>Legacy plan</a:t>
+              <a:t>Result</a:t>
             </a:r>
           </a:p>
           <a:p>
@@ -5793,60 +6364,28 @@
               <a:spcBef>
                 <a:spcPts val="300"/>
               </a:spcBef>
-              <a:defRPr sz="1200">
-                <a:solidFill>
-                  <a:srgbClr val="232D37"/>
-                </a:solidFill>
-                <a:latin typeface="Aptos"/>
-              </a:defRPr>
-            </a:pPr>
-            <a:r>
-              <a:t>May contain basis in dollars</a:t>
-            </a:r>
-          </a:p>
-          <a:p>
-            <a:pPr>
-              <a:spcBef>
-                <a:spcPts val="300"/>
-              </a:spcBef>
-              <a:defRPr sz="1200">
-                <a:solidFill>
-                  <a:srgbClr val="232D37"/>
-                </a:solidFill>
-                <a:latin typeface="Aptos"/>
-              </a:defRPr>
-            </a:pPr>
-            <a:r>
-              <a:t>May contain ltcg / ltcgMode</a:t>
-            </a:r>
-          </a:p>
-          <a:p>
-            <a:pPr>
-              <a:spcBef>
-                <a:spcPts val="300"/>
-              </a:spcBef>
-              <a:defRPr sz="1200">
-                <a:solidFill>
-                  <a:srgbClr val="232D37"/>
-                </a:solidFill>
-                <a:latin typeface="Aptos"/>
-              </a:defRPr>
-            </a:pPr>
-            <a:r>
-              <a:t>May omit newer defaults</a:t>
-            </a:r>
-          </a:p>
-        </p:txBody>
-      </p:sp>
-      <p:sp>
-        <p:nvSpPr>
-          <p:cNvPr id="5" name="Rectangle 4"/>
+              <a:defRPr sz="1100">
+                <a:solidFill>
+                  <a:srgbClr val="232D37"/>
+                </a:solidFill>
+                <a:latin typeface="Aptos"/>
+              </a:defRPr>
+            </a:pPr>
+            <a:r>
+              <a:t>Workbook size adapts to the plan</a:t>
+            </a:r>
+          </a:p>
+        </p:txBody>
+      </p:sp>
+      <p:sp>
+        <p:nvSpPr>
+          <p:cNvPr id="11" name="Rectangle 10"/>
           <p:cNvSpPr/>
           <p:nvPr/>
         </p:nvSpPr>
         <p:spPr>
           <a:xfrm>
-            <a:off x="502920" y="1143000"/>
+            <a:off x="10195560" y="1143000"/>
             <a:ext cx="82296" cy="4526280"/>
           </a:xfrm>
           <a:prstGeom prst="rect">
@@ -5881,460 +6420,6 @@
           </a:p>
         </p:txBody>
       </p:sp>
-      <p:sp>
-        <p:nvSpPr>
-          <p:cNvPr id="6" name="Rounded Rectangle 5"/>
-          <p:cNvSpPr/>
-          <p:nvPr/>
-        </p:nvSpPr>
-        <p:spPr>
-          <a:xfrm>
-            <a:off x="3246120" y="1143000"/>
-            <a:ext cx="2286000" cy="4526280"/>
-          </a:xfrm>
-          <a:prstGeom prst="roundRect">
-            <a:avLst/>
-          </a:prstGeom>
-          <a:solidFill>
-            <a:srgbClr val="E9F4FF"/>
-          </a:solidFill>
-          <a:ln w="13970">
-            <a:solidFill>
-              <a:srgbClr val="266EB2"/>
-            </a:solidFill>
-          </a:ln>
-        </p:spPr>
-        <p:style>
-          <a:lnRef idx="1">
-            <a:schemeClr val="accent1"/>
-          </a:lnRef>
-          <a:fillRef idx="3">
-            <a:schemeClr val="accent1"/>
-          </a:fillRef>
-          <a:effectRef idx="2">
-            <a:schemeClr val="accent1"/>
-          </a:effectRef>
-          <a:fontRef idx="minor">
-            <a:schemeClr val="lt1"/>
-          </a:fontRef>
-        </p:style>
-        <p:txBody>
-          <a:bodyPr rtlCol="0" anchor="ctr" lIns="182880" rIns="100584" tIns="91440"/>
-          <a:lstStyle/>
-          <a:p>
-            <a:pPr algn="ctr">
-              <a:defRPr sz="1700" b="1">
-                <a:solidFill>
-                  <a:srgbClr val="232D37"/>
-                </a:solidFill>
-                <a:latin typeface="Aptos Display"/>
-              </a:defRPr>
-            </a:pPr>
-            <a:r>
-              <a:t>Hydration</a:t>
-            </a:r>
-          </a:p>
-          <a:p>
-            <a:pPr>
-              <a:spcBef>
-                <a:spcPts val="300"/>
-              </a:spcBef>
-              <a:defRPr sz="1200">
-                <a:solidFill>
-                  <a:srgbClr val="232D37"/>
-                </a:solidFill>
-                <a:latin typeface="Aptos"/>
-              </a:defRPr>
-            </a:pPr>
-            <a:r>
-              <a:t>Merge onto default state</a:t>
-            </a:r>
-          </a:p>
-          <a:p>
-            <a:pPr>
-              <a:spcBef>
-                <a:spcPts val="300"/>
-              </a:spcBef>
-              <a:defRPr sz="1200">
-                <a:solidFill>
-                  <a:srgbClr val="232D37"/>
-                </a:solidFill>
-                <a:latin typeface="Aptos"/>
-              </a:defRPr>
-            </a:pPr>
-            <a:r>
-              <a:t>Preserve array entries</a:t>
-            </a:r>
-          </a:p>
-          <a:p>
-            <a:pPr>
-              <a:spcBef>
-                <a:spcPts val="300"/>
-              </a:spcBef>
-              <a:defRPr sz="1200">
-                <a:solidFill>
-                  <a:srgbClr val="232D37"/>
-                </a:solidFill>
-                <a:latin typeface="Aptos"/>
-              </a:defRPr>
-            </a:pPr>
-            <a:r>
-              <a:t>Drop unknown or stale fields</a:t>
-            </a:r>
-          </a:p>
-        </p:txBody>
-      </p:sp>
-      <p:sp>
-        <p:nvSpPr>
-          <p:cNvPr id="7" name="Rectangle 6"/>
-          <p:cNvSpPr/>
-          <p:nvPr/>
-        </p:nvSpPr>
-        <p:spPr>
-          <a:xfrm>
-            <a:off x="3246120" y="1143000"/>
-            <a:ext cx="82296" cy="4526280"/>
-          </a:xfrm>
-          <a:prstGeom prst="rect">
-            <a:avLst/>
-          </a:prstGeom>
-          <a:solidFill>
-            <a:srgbClr val="266EB2"/>
-          </a:solidFill>
-          <a:ln>
-            <a:noFill/>
-          </a:ln>
-        </p:spPr>
-        <p:style>
-          <a:lnRef idx="1">
-            <a:schemeClr val="accent1"/>
-          </a:lnRef>
-          <a:fillRef idx="3">
-            <a:schemeClr val="accent1"/>
-          </a:fillRef>
-          <a:effectRef idx="2">
-            <a:schemeClr val="accent1"/>
-          </a:effectRef>
-          <a:fontRef idx="minor">
-            <a:schemeClr val="lt1"/>
-          </a:fontRef>
-        </p:style>
-        <p:txBody>
-          <a:bodyPr rtlCol="0" anchor="ctr"/>
-          <a:lstStyle/>
-          <a:p>
-            <a:pPr algn="ctr"/>
-          </a:p>
-        </p:txBody>
-      </p:sp>
-      <p:sp>
-        <p:nvSpPr>
-          <p:cNvPr id="8" name="Rounded Rectangle 7"/>
-          <p:cNvSpPr/>
-          <p:nvPr/>
-        </p:nvSpPr>
-        <p:spPr>
-          <a:xfrm>
-            <a:off x="5989320" y="1143000"/>
-            <a:ext cx="2286000" cy="4526280"/>
-          </a:xfrm>
-          <a:prstGeom prst="roundRect">
-            <a:avLst/>
-          </a:prstGeom>
-          <a:solidFill>
-            <a:srgbClr val="EAF9F4"/>
-          </a:solidFill>
-          <a:ln w="13970">
-            <a:solidFill>
-              <a:srgbClr val="429761"/>
-            </a:solidFill>
-          </a:ln>
-        </p:spPr>
-        <p:style>
-          <a:lnRef idx="1">
-            <a:schemeClr val="accent1"/>
-          </a:lnRef>
-          <a:fillRef idx="3">
-            <a:schemeClr val="accent1"/>
-          </a:fillRef>
-          <a:effectRef idx="2">
-            <a:schemeClr val="accent1"/>
-          </a:effectRef>
-          <a:fontRef idx="minor">
-            <a:schemeClr val="lt1"/>
-          </a:fontRef>
-        </p:style>
-        <p:txBody>
-          <a:bodyPr rtlCol="0" anchor="ctr" lIns="182880" rIns="100584" tIns="91440"/>
-          <a:lstStyle/>
-          <a:p>
-            <a:pPr algn="ctr">
-              <a:defRPr sz="1700" b="1">
-                <a:solidFill>
-                  <a:srgbClr val="232D37"/>
-                </a:solidFill>
-                <a:latin typeface="Aptos Display"/>
-              </a:defRPr>
-            </a:pPr>
-            <a:r>
-              <a:t>Migration</a:t>
-            </a:r>
-          </a:p>
-          <a:p>
-            <a:pPr>
-              <a:spcBef>
-                <a:spcPts val="300"/>
-              </a:spcBef>
-              <a:defRPr sz="1200">
-                <a:solidFill>
-                  <a:srgbClr val="232D37"/>
-                </a:solidFill>
-                <a:latin typeface="Aptos"/>
-              </a:defRPr>
-            </a:pPr>
-            <a:r>
-              <a:t>Dollar basis → basisPct</a:t>
-            </a:r>
-          </a:p>
-          <a:p>
-            <a:pPr>
-              <a:spcBef>
-                <a:spcPts val="300"/>
-              </a:spcBef>
-              <a:defRPr sz="1200">
-                <a:solidFill>
-                  <a:srgbClr val="232D37"/>
-                </a:solidFill>
-                <a:latin typeface="Aptos"/>
-              </a:defRPr>
-            </a:pPr>
-            <a:r>
-              <a:t>Blank remains null</a:t>
-            </a:r>
-          </a:p>
-          <a:p>
-            <a:pPr>
-              <a:spcBef>
-                <a:spcPts val="300"/>
-              </a:spcBef>
-              <a:defRPr sz="1200">
-                <a:solidFill>
-                  <a:srgbClr val="232D37"/>
-                </a:solidFill>
-                <a:latin typeface="Aptos"/>
-              </a:defRPr>
-            </a:pPr>
-            <a:r>
-              <a:t>Clamp valid percentage range</a:t>
-            </a:r>
-          </a:p>
-          <a:p>
-            <a:pPr>
-              <a:spcBef>
-                <a:spcPts val="300"/>
-              </a:spcBef>
-              <a:defRPr sz="1200">
-                <a:solidFill>
-                  <a:srgbClr val="232D37"/>
-                </a:solidFill>
-                <a:latin typeface="Aptos"/>
-              </a:defRPr>
-            </a:pPr>
-            <a:r>
-              <a:t>Remove retired LTCG inputs</a:t>
-            </a:r>
-          </a:p>
-        </p:txBody>
-      </p:sp>
-      <p:sp>
-        <p:nvSpPr>
-          <p:cNvPr id="9" name="Rectangle 8"/>
-          <p:cNvSpPr/>
-          <p:nvPr/>
-        </p:nvSpPr>
-        <p:spPr>
-          <a:xfrm>
-            <a:off x="5989320" y="1143000"/>
-            <a:ext cx="82296" cy="4526280"/>
-          </a:xfrm>
-          <a:prstGeom prst="rect">
-            <a:avLst/>
-          </a:prstGeom>
-          <a:solidFill>
-            <a:srgbClr val="429761"/>
-          </a:solidFill>
-          <a:ln>
-            <a:noFill/>
-          </a:ln>
-        </p:spPr>
-        <p:style>
-          <a:lnRef idx="1">
-            <a:schemeClr val="accent1"/>
-          </a:lnRef>
-          <a:fillRef idx="3">
-            <a:schemeClr val="accent1"/>
-          </a:fillRef>
-          <a:effectRef idx="2">
-            <a:schemeClr val="accent1"/>
-          </a:effectRef>
-          <a:fontRef idx="minor">
-            <a:schemeClr val="lt1"/>
-          </a:fontRef>
-        </p:style>
-        <p:txBody>
-          <a:bodyPr rtlCol="0" anchor="ctr"/>
-          <a:lstStyle/>
-          <a:p>
-            <a:pPr algn="ctr"/>
-          </a:p>
-        </p:txBody>
-      </p:sp>
-      <p:sp>
-        <p:nvSpPr>
-          <p:cNvPr id="10" name="Rounded Rectangle 9"/>
-          <p:cNvSpPr/>
-          <p:nvPr/>
-        </p:nvSpPr>
-        <p:spPr>
-          <a:xfrm>
-            <a:off x="8732520" y="1143000"/>
-            <a:ext cx="2697480" cy="4526280"/>
-          </a:xfrm>
-          <a:prstGeom prst="roundRect">
-            <a:avLst/>
-          </a:prstGeom>
-          <a:solidFill>
-            <a:srgbClr val="F7EFFF"/>
-          </a:solidFill>
-          <a:ln w="13970">
-            <a:solidFill>
-              <a:srgbClr val="7852B0"/>
-            </a:solidFill>
-          </a:ln>
-        </p:spPr>
-        <p:style>
-          <a:lnRef idx="1">
-            <a:schemeClr val="accent1"/>
-          </a:lnRef>
-          <a:fillRef idx="3">
-            <a:schemeClr val="accent1"/>
-          </a:fillRef>
-          <a:effectRef idx="2">
-            <a:schemeClr val="accent1"/>
-          </a:effectRef>
-          <a:fontRef idx="minor">
-            <a:schemeClr val="lt1"/>
-          </a:fontRef>
-        </p:style>
-        <p:txBody>
-          <a:bodyPr rtlCol="0" anchor="ctr" lIns="182880" rIns="100584" tIns="91440"/>
-          <a:lstStyle/>
-          <a:p>
-            <a:pPr algn="ctr">
-              <a:defRPr sz="1700" b="1">
-                <a:solidFill>
-                  <a:srgbClr val="232D37"/>
-                </a:solidFill>
-                <a:latin typeface="Aptos Display"/>
-              </a:defRPr>
-            </a:pPr>
-            <a:r>
-              <a:t>Current plan</a:t>
-            </a:r>
-          </a:p>
-          <a:p>
-            <a:pPr>
-              <a:spcBef>
-                <a:spcPts val="300"/>
-              </a:spcBef>
-              <a:defRPr sz="1200">
-                <a:solidFill>
-                  <a:srgbClr val="232D37"/>
-                </a:solidFill>
-                <a:latin typeface="Aptos"/>
-              </a:defRPr>
-            </a:pPr>
-            <a:r>
-              <a:t>Canonical basisPct input</a:t>
-            </a:r>
-          </a:p>
-          <a:p>
-            <a:pPr>
-              <a:spcBef>
-                <a:spcPts val="300"/>
-              </a:spcBef>
-              <a:defRPr sz="1200">
-                <a:solidFill>
-                  <a:srgbClr val="232D37"/>
-                </a:solidFill>
-                <a:latin typeface="Aptos"/>
-              </a:defRPr>
-            </a:pPr>
-            <a:r>
-              <a:t>Default hidden states applied on load/reset</a:t>
-            </a:r>
-          </a:p>
-          <a:p>
-            <a:pPr>
-              <a:spcBef>
-                <a:spcPts val="300"/>
-              </a:spcBef>
-              <a:defRPr sz="1200">
-                <a:solidFill>
-                  <a:srgbClr val="232D37"/>
-                </a:solidFill>
-                <a:latin typeface="Aptos"/>
-              </a:defRPr>
-            </a:pPr>
-            <a:r>
-              <a:t>Ready for recompute and rendering</a:t>
-            </a:r>
-          </a:p>
-        </p:txBody>
-      </p:sp>
-      <p:sp>
-        <p:nvSpPr>
-          <p:cNvPr id="11" name="Rectangle 10"/>
-          <p:cNvSpPr/>
-          <p:nvPr/>
-        </p:nvSpPr>
-        <p:spPr>
-          <a:xfrm>
-            <a:off x="8732520" y="1143000"/>
-            <a:ext cx="82296" cy="4526280"/>
-          </a:xfrm>
-          <a:prstGeom prst="rect">
-            <a:avLst/>
-          </a:prstGeom>
-          <a:solidFill>
-            <a:srgbClr val="7852B0"/>
-          </a:solidFill>
-          <a:ln>
-            <a:noFill/>
-          </a:ln>
-        </p:spPr>
-        <p:style>
-          <a:lnRef idx="1">
-            <a:schemeClr val="accent1"/>
-          </a:lnRef>
-          <a:fillRef idx="3">
-            <a:schemeClr val="accent1"/>
-          </a:fillRef>
-          <a:effectRef idx="2">
-            <a:schemeClr val="accent1"/>
-          </a:effectRef>
-          <a:fontRef idx="minor">
-            <a:schemeClr val="lt1"/>
-          </a:fontRef>
-        </p:style>
-        <p:txBody>
-          <a:bodyPr rtlCol="0" anchor="ctr"/>
-          <a:lstStyle/>
-          <a:p>
-            <a:pPr algn="ctr"/>
-          </a:p>
-        </p:txBody>
-      </p:sp>
       <p:cxnSp>
         <p:nvCxnSpPr>
           <p:cNvPr id="12" name="Connector 11"/>
@@ -6343,15 +6428,15 @@
         </p:nvCxnSpPr>
         <p:spPr>
           <a:xfrm>
-            <a:off x="2834640" y="3383280"/>
+            <a:off x="3456432" y="3401568"/>
             <a:ext cx="274320" cy="0"/>
           </a:xfrm>
           <a:prstGeom prst="line">
             <a:avLst/>
           </a:prstGeom>
-          <a:ln w="22860">
+          <a:ln w="25400">
             <a:solidFill>
-              <a:srgbClr val="E5892A"/>
+              <a:srgbClr val="266EB2"/>
             </a:solidFill>
           </a:ln>
         </p:spPr>
@@ -6378,15 +6463,15 @@
         </p:nvCxnSpPr>
         <p:spPr>
           <a:xfrm>
-            <a:off x="5577840" y="3383280"/>
-            <a:ext cx="274319" cy="0"/>
+            <a:off x="6656832" y="3401568"/>
+            <a:ext cx="274320" cy="0"/>
           </a:xfrm>
           <a:prstGeom prst="line">
             <a:avLst/>
           </a:prstGeom>
-          <a:ln w="22860">
+          <a:ln w="25400">
             <a:solidFill>
-              <a:srgbClr val="266EB2"/>
+              <a:srgbClr val="429761"/>
             </a:solidFill>
           </a:ln>
         </p:spPr>
@@ -6413,15 +6498,15 @@
         </p:nvCxnSpPr>
         <p:spPr>
           <a:xfrm>
-            <a:off x="8321040" y="3383280"/>
+            <a:off x="9857232" y="3401568"/>
             <a:ext cx="274320" cy="0"/>
           </a:xfrm>
           <a:prstGeom prst="line">
             <a:avLst/>
           </a:prstGeom>
-          <a:ln w="22860">
+          <a:ln w="25400">
             <a:solidFill>
-              <a:srgbClr val="429761"/>
+              <a:srgbClr val="7852B0"/>
             </a:solidFill>
           </a:ln>
         </p:spPr>
@@ -6442,43 +6527,7 @@
       </p:cxnSp>
       <p:sp>
         <p:nvSpPr>
-          <p:cNvPr id="15" name="TextBox 14"/>
-          <p:cNvSpPr txBox="1"/>
-          <p:nvPr/>
-        </p:nvSpPr>
-        <p:spPr>
-          <a:xfrm>
-            <a:off x="731520" y="5925312"/>
-            <a:ext cx="10698480" cy="228600"/>
-          </a:xfrm>
-          <a:prstGeom prst="rect">
-            <a:avLst/>
-          </a:prstGeom>
-          <a:noFill/>
-        </p:spPr>
-        <p:txBody>
-          <a:bodyPr wrap="none" anchor="ctr">
-            <a:spAutoFit/>
-          </a:bodyPr>
-          <a:lstStyle/>
-          <a:p>
-            <a:pPr algn="ctr">
-              <a:defRPr sz="1200" b="1">
-                <a:solidFill>
-                  <a:srgbClr val="0F2647"/>
-                </a:solidFill>
-                <a:latin typeface="Aptos"/>
-              </a:defRPr>
-            </a:pPr>
-            <a:r>
-              <a:t>Compatibility rule: state.js alone owns canonical defaults and normalizes old save formats before any computation runs.</a:t>
-            </a:r>
-          </a:p>
-        </p:txBody>
-      </p:sp>
-      <p:sp>
-        <p:nvSpPr>
-          <p:cNvPr id="16" name="Rectangle 15"/>
+          <p:cNvPr id="15" name="Rectangle 14"/>
           <p:cNvSpPr/>
           <p:nvPr/>
         </p:nvSpPr>
@@ -6521,7 +6570,7 @@
       </p:sp>
       <p:sp>
         <p:nvSpPr>
-          <p:cNvPr id="17" name="TextBox 16"/>
+          <p:cNvPr id="16" name="TextBox 15"/>
           <p:cNvSpPr txBox="1"/>
           <p:nvPr/>
         </p:nvSpPr>
@@ -6550,7 +6599,7 @@
               </a:defRPr>
             </a:pPr>
             <a:r>
-              <a:t>Retirement Income Planner • Architecture overview • Basis-percentage and formula-page update</a:t>
+              <a:t>Retirement Income Planner • Architecture overview • Account-sheet Excel export update</a:t>
             </a:r>
           </a:p>
         </p:txBody>
@@ -6612,7 +6661,7 @@
               </a:defRPr>
             </a:pPr>
             <a:r>
-              <a:t>Cost basis remains inside the annual projection</a:t>
+              <a:t>Dynamic sheet order and naming</a:t>
             </a:r>
           </a:p>
         </p:txBody>
@@ -6648,7 +6697,7 @@
               </a:defRPr>
             </a:pPr>
             <a:r>
-              <a:t>The input unit changed; the calculation contract remains an annual, today’s-dollar average-cost model.</a:t>
+              <a:t>Sheet names identify the person and account while satisfying Excel’s worksheet restrictions.</a:t>
             </a:r>
           </a:p>
         </p:txBody>
@@ -6661,14 +6710,221 @@
         </p:nvSpPr>
         <p:spPr>
           <a:xfrm>
-            <a:off x="320040" y="1298448"/>
-            <a:ext cx="2029968" cy="1965960"/>
+            <a:off x="594360" y="1234440"/>
+            <a:ext cx="3429000" cy="4480560"/>
           </a:xfrm>
           <a:prstGeom prst="roundRect">
             <a:avLst/>
           </a:prstGeom>
           <a:solidFill>
-            <a:srgbClr val="FAFBFD"/>
+            <a:srgbClr val="EAF9F4"/>
+          </a:solidFill>
+          <a:ln w="13970">
+            <a:solidFill>
+              <a:srgbClr val="429761"/>
+            </a:solidFill>
+          </a:ln>
+        </p:spPr>
+        <p:style>
+          <a:lnRef idx="1">
+            <a:schemeClr val="accent1"/>
+          </a:lnRef>
+          <a:fillRef idx="3">
+            <a:schemeClr val="accent1"/>
+          </a:fillRef>
+          <a:effectRef idx="2">
+            <a:schemeClr val="accent1"/>
+          </a:effectRef>
+          <a:fontRef idx="minor">
+            <a:schemeClr val="lt1"/>
+          </a:fontRef>
+        </p:style>
+        <p:txBody>
+          <a:bodyPr rtlCol="0" anchor="ctr" lIns="182880" rIns="100584" tIns="91440"/>
+          <a:lstStyle/>
+          <a:p>
+            <a:pPr algn="ctr">
+              <a:defRPr sz="1700" b="1">
+                <a:solidFill>
+                  <a:srgbClr val="232D37"/>
+                </a:solidFill>
+                <a:latin typeface="Aptos Display"/>
+              </a:defRPr>
+            </a:pPr>
+            <a:r>
+              <a:t>Ordering rule</a:t>
+            </a:r>
+          </a:p>
+          <a:p>
+            <a:pPr>
+              <a:spcBef>
+                <a:spcPts val="300"/>
+              </a:spcBef>
+              <a:defRPr sz="1200">
+                <a:solidFill>
+                  <a:srgbClr val="232D37"/>
+                </a:solidFill>
+                <a:latin typeface="Aptos"/>
+              </a:defRPr>
+            </a:pPr>
+            <a:r>
+              <a:t>1. Projection by year</a:t>
+            </a:r>
+          </a:p>
+          <a:p>
+            <a:pPr>
+              <a:spcBef>
+                <a:spcPts val="300"/>
+              </a:spcBef>
+              <a:defRPr sz="1200">
+                <a:solidFill>
+                  <a:srgbClr val="232D37"/>
+                </a:solidFill>
+                <a:latin typeface="Aptos"/>
+              </a:defRPr>
+            </a:pPr>
+            <a:r>
+              <a:t>2. Person 1 enabled brokerage accounts</a:t>
+            </a:r>
+          </a:p>
+          <a:p>
+            <a:pPr>
+              <a:spcBef>
+                <a:spcPts val="300"/>
+              </a:spcBef>
+              <a:defRPr sz="1200">
+                <a:solidFill>
+                  <a:srgbClr val="232D37"/>
+                </a:solidFill>
+                <a:latin typeface="Aptos"/>
+              </a:defRPr>
+            </a:pPr>
+            <a:r>
+              <a:t>3. Person 1 Pre-tax IRA</a:t>
+            </a:r>
+          </a:p>
+          <a:p>
+            <a:pPr>
+              <a:spcBef>
+                <a:spcPts val="300"/>
+              </a:spcBef>
+              <a:defRPr sz="1200">
+                <a:solidFill>
+                  <a:srgbClr val="232D37"/>
+                </a:solidFill>
+                <a:latin typeface="Aptos"/>
+              </a:defRPr>
+            </a:pPr>
+            <a:r>
+              <a:t>4. Person 1 Roth IRA</a:t>
+            </a:r>
+          </a:p>
+          <a:p>
+            <a:pPr>
+              <a:spcBef>
+                <a:spcPts val="300"/>
+              </a:spcBef>
+              <a:defRPr sz="1200">
+                <a:solidFill>
+                  <a:srgbClr val="232D37"/>
+                </a:solidFill>
+                <a:latin typeface="Aptos"/>
+              </a:defRPr>
+            </a:pPr>
+            <a:r>
+              <a:t>5. Repeat for Person 2</a:t>
+            </a:r>
+          </a:p>
+          <a:p>
+            <a:pPr>
+              <a:spcBef>
+                <a:spcPts val="300"/>
+              </a:spcBef>
+              <a:defRPr sz="1200">
+                <a:solidFill>
+                  <a:srgbClr val="232D37"/>
+                </a:solidFill>
+                <a:latin typeface="Aptos"/>
+              </a:defRPr>
+            </a:pPr>
+          </a:p>
+          <a:p>
+            <a:pPr>
+              <a:spcBef>
+                <a:spcPts val="300"/>
+              </a:spcBef>
+              <a:defRPr sz="1200">
+                <a:solidFill>
+                  <a:srgbClr val="232D37"/>
+                </a:solidFill>
+                <a:latin typeface="Aptos"/>
+              </a:defRPr>
+            </a:pPr>
+            <a:r>
+              <a:t>This order is deterministic and follows the plan.</a:t>
+            </a:r>
+          </a:p>
+        </p:txBody>
+      </p:sp>
+      <p:sp>
+        <p:nvSpPr>
+          <p:cNvPr id="5" name="Rectangle 4"/>
+          <p:cNvSpPr/>
+          <p:nvPr/>
+        </p:nvSpPr>
+        <p:spPr>
+          <a:xfrm>
+            <a:off x="594360" y="1234440"/>
+            <a:ext cx="82296" cy="4480560"/>
+          </a:xfrm>
+          <a:prstGeom prst="rect">
+            <a:avLst/>
+          </a:prstGeom>
+          <a:solidFill>
+            <a:srgbClr val="429761"/>
+          </a:solidFill>
+          <a:ln>
+            <a:noFill/>
+          </a:ln>
+        </p:spPr>
+        <p:style>
+          <a:lnRef idx="1">
+            <a:schemeClr val="accent1"/>
+          </a:lnRef>
+          <a:fillRef idx="3">
+            <a:schemeClr val="accent1"/>
+          </a:fillRef>
+          <a:effectRef idx="2">
+            <a:schemeClr val="accent1"/>
+          </a:effectRef>
+          <a:fontRef idx="minor">
+            <a:schemeClr val="lt1"/>
+          </a:fontRef>
+        </p:style>
+        <p:txBody>
+          <a:bodyPr rtlCol="0" anchor="ctr"/>
+          <a:lstStyle/>
+          <a:p>
+            <a:pPr algn="ctr"/>
+          </a:p>
+        </p:txBody>
+      </p:sp>
+      <p:sp>
+        <p:nvSpPr>
+          <p:cNvPr id="6" name="Rounded Rectangle 5"/>
+          <p:cNvSpPr/>
+          <p:nvPr/>
+        </p:nvSpPr>
+        <p:spPr>
+          <a:xfrm>
+            <a:off x="4389120" y="1234440"/>
+            <a:ext cx="3429000" cy="4480560"/>
+          </a:xfrm>
+          <a:prstGeom prst="roundRect">
+            <a:avLst/>
+          </a:prstGeom>
+          <a:solidFill>
+            <a:srgbClr val="E9F4FF"/>
           </a:solidFill>
           <a:ln w="13970">
             <a:solidFill>
@@ -6695,7 +6951,7 @@
           <a:lstStyle/>
           <a:p>
             <a:pPr algn="ctr">
-              <a:defRPr sz="1500" b="1">
+              <a:defRPr sz="1700" b="1">
                 <a:solidFill>
                   <a:srgbClr val="232D37"/>
                 </a:solidFill>
@@ -6703,7 +6959,7 @@
               </a:defRPr>
             </a:pPr>
             <a:r>
-              <a:t>Start basis</a:t>
+              <a:t>Name templates</a:t>
             </a:r>
           </a:p>
           <a:p>
@@ -6711,29 +6967,77 @@
               <a:spcBef>
                 <a:spcPts val="300"/>
               </a:spcBef>
-              <a:defRPr sz="1100">
-                <a:solidFill>
-                  <a:srgbClr val="232D37"/>
-                </a:solidFill>
-                <a:latin typeface="Aptos"/>
-              </a:defRPr>
-            </a:pPr>
-            <a:r>
-              <a:t>basisPct × balance</a:t>
-            </a:r>
-          </a:p>
-        </p:txBody>
-      </p:sp>
-      <p:sp>
-        <p:nvSpPr>
-          <p:cNvPr id="5" name="Rectangle 4"/>
+              <a:defRPr sz="1200">
+                <a:solidFill>
+                  <a:srgbClr val="232D37"/>
+                </a:solidFill>
+                <a:latin typeface="Aptos"/>
+              </a:defRPr>
+            </a:pPr>
+            <a:r>
+              <a:t>Brokerage: “&lt;Person&gt; - &lt;Portfolio&gt;”</a:t>
+            </a:r>
+          </a:p>
+          <a:p>
+            <a:pPr>
+              <a:spcBef>
+                <a:spcPts val="300"/>
+              </a:spcBef>
+              <a:defRPr sz="1200">
+                <a:solidFill>
+                  <a:srgbClr val="232D37"/>
+                </a:solidFill>
+                <a:latin typeface="Aptos"/>
+              </a:defRPr>
+            </a:pPr>
+            <a:r>
+              <a:t>IDGT brokerage adds “ (IDGT)”</a:t>
+            </a:r>
+          </a:p>
+          <a:p>
+            <a:pPr>
+              <a:spcBef>
+                <a:spcPts val="300"/>
+              </a:spcBef>
+              <a:defRPr sz="1200">
+                <a:solidFill>
+                  <a:srgbClr val="232D37"/>
+                </a:solidFill>
+                <a:latin typeface="Aptos"/>
+              </a:defRPr>
+            </a:pPr>
+            <a:r>
+              <a:t>IRA: “&lt;Person&gt; - Pre-tax IRA”</a:t>
+            </a:r>
+          </a:p>
+          <a:p>
+            <a:pPr>
+              <a:spcBef>
+                <a:spcPts val="300"/>
+              </a:spcBef>
+              <a:defRPr sz="1200">
+                <a:solidFill>
+                  <a:srgbClr val="232D37"/>
+                </a:solidFill>
+                <a:latin typeface="Aptos"/>
+              </a:defRPr>
+            </a:pPr>
+            <a:r>
+              <a:t>Roth: “&lt;Person&gt; - Roth IRA”</a:t>
+            </a:r>
+          </a:p>
+        </p:txBody>
+      </p:sp>
+      <p:sp>
+        <p:nvSpPr>
+          <p:cNvPr id="7" name="Rectangle 6"/>
           <p:cNvSpPr/>
           <p:nvPr/>
         </p:nvSpPr>
         <p:spPr>
           <a:xfrm>
-            <a:off x="320040" y="1298448"/>
-            <a:ext cx="82296" cy="1965960"/>
+            <a:off x="4389120" y="1234440"/>
+            <a:ext cx="82296" cy="4480560"/>
           </a:xfrm>
           <a:prstGeom prst="rect">
             <a:avLst/>
@@ -6767,206 +7071,22 @@
           </a:p>
         </p:txBody>
       </p:sp>
-      <p:cxnSp>
-        <p:nvCxnSpPr>
-          <p:cNvPr id="6" name="Connector 5"/>
-          <p:cNvCxnSpPr/>
-          <p:nvPr/>
-        </p:nvCxnSpPr>
-        <p:spPr>
-          <a:xfrm>
-            <a:off x="2377440" y="2286000"/>
-            <a:ext cx="228600" cy="0"/>
-          </a:xfrm>
-          <a:prstGeom prst="line">
-            <a:avLst/>
-          </a:prstGeom>
-          <a:ln w="22860">
-            <a:solidFill>
-              <a:srgbClr val="266EB2"/>
-            </a:solidFill>
-          </a:ln>
-        </p:spPr>
-        <p:style>
-          <a:lnRef idx="2">
-            <a:schemeClr val="accent1"/>
-          </a:lnRef>
-          <a:fillRef idx="0">
-            <a:schemeClr val="accent1"/>
-          </a:fillRef>
-          <a:effectRef idx="1">
-            <a:schemeClr val="accent1"/>
-          </a:effectRef>
-          <a:fontRef idx="minor">
-            <a:schemeClr val="tx1"/>
-          </a:fontRef>
-        </p:style>
-      </p:cxnSp>
-      <p:sp>
-        <p:nvSpPr>
-          <p:cNvPr id="7" name="Rounded Rectangle 6"/>
+      <p:sp>
+        <p:nvSpPr>
+          <p:cNvPr id="8" name="Rounded Rectangle 7"/>
           <p:cNvSpPr/>
           <p:nvPr/>
         </p:nvSpPr>
         <p:spPr>
           <a:xfrm>
-            <a:off x="2679192" y="1298448"/>
-            <a:ext cx="2029968" cy="1965960"/>
+            <a:off x="8183879" y="1234440"/>
+            <a:ext cx="3429000" cy="4480560"/>
           </a:xfrm>
           <a:prstGeom prst="roundRect">
             <a:avLst/>
           </a:prstGeom>
           <a:solidFill>
-            <a:srgbClr val="FAFBFD"/>
-          </a:solidFill>
-          <a:ln w="13970">
-            <a:solidFill>
-              <a:srgbClr val="168F8D"/>
-            </a:solidFill>
-          </a:ln>
-        </p:spPr>
-        <p:style>
-          <a:lnRef idx="1">
-            <a:schemeClr val="accent1"/>
-          </a:lnRef>
-          <a:fillRef idx="3">
-            <a:schemeClr val="accent1"/>
-          </a:fillRef>
-          <a:effectRef idx="2">
-            <a:schemeClr val="accent1"/>
-          </a:effectRef>
-          <a:fontRef idx="minor">
-            <a:schemeClr val="lt1"/>
-          </a:fontRef>
-        </p:style>
-        <p:txBody>
-          <a:bodyPr rtlCol="0" anchor="ctr" lIns="182880" rIns="100584" tIns="91440"/>
-          <a:lstStyle/>
-          <a:p>
-            <a:pPr algn="ctr">
-              <a:defRPr sz="1500" b="1">
-                <a:solidFill>
-                  <a:srgbClr val="232D37"/>
-                </a:solidFill>
-                <a:latin typeface="Aptos Display"/>
-              </a:defRPr>
-            </a:pPr>
-            <a:r>
-              <a:t>Gain fraction</a:t>
-            </a:r>
-          </a:p>
-          <a:p>
-            <a:pPr>
-              <a:spcBef>
-                <a:spcPts val="300"/>
-              </a:spcBef>
-              <a:defRPr sz="1100">
-                <a:solidFill>
-                  <a:srgbClr val="232D37"/>
-                </a:solidFill>
-                <a:latin typeface="Aptos"/>
-              </a:defRPr>
-            </a:pPr>
-            <a:r>
-              <a:t>(balance − basis) / balance</a:t>
-            </a:r>
-          </a:p>
-        </p:txBody>
-      </p:sp>
-      <p:sp>
-        <p:nvSpPr>
-          <p:cNvPr id="8" name="Rectangle 7"/>
-          <p:cNvSpPr/>
-          <p:nvPr/>
-        </p:nvSpPr>
-        <p:spPr>
-          <a:xfrm>
-            <a:off x="2679192" y="1298448"/>
-            <a:ext cx="82296" cy="1965960"/>
-          </a:xfrm>
-          <a:prstGeom prst="rect">
-            <a:avLst/>
-          </a:prstGeom>
-          <a:solidFill>
-            <a:srgbClr val="168F8D"/>
-          </a:solidFill>
-          <a:ln>
-            <a:noFill/>
-          </a:ln>
-        </p:spPr>
-        <p:style>
-          <a:lnRef idx="1">
-            <a:schemeClr val="accent1"/>
-          </a:lnRef>
-          <a:fillRef idx="3">
-            <a:schemeClr val="accent1"/>
-          </a:fillRef>
-          <a:effectRef idx="2">
-            <a:schemeClr val="accent1"/>
-          </a:effectRef>
-          <a:fontRef idx="minor">
-            <a:schemeClr val="lt1"/>
-          </a:fontRef>
-        </p:style>
-        <p:txBody>
-          <a:bodyPr rtlCol="0" anchor="ctr"/>
-          <a:lstStyle/>
-          <a:p>
-            <a:pPr algn="ctr"/>
-          </a:p>
-        </p:txBody>
-      </p:sp>
-      <p:cxnSp>
-        <p:nvCxnSpPr>
-          <p:cNvPr id="9" name="Connector 8"/>
-          <p:cNvCxnSpPr/>
-          <p:nvPr/>
-        </p:nvCxnSpPr>
-        <p:spPr>
-          <a:xfrm>
-            <a:off x="4736592" y="2286000"/>
-            <a:ext cx="228600" cy="0"/>
-          </a:xfrm>
-          <a:prstGeom prst="line">
-            <a:avLst/>
-          </a:prstGeom>
-          <a:ln w="22860">
-            <a:solidFill>
-              <a:srgbClr val="168F8D"/>
-            </a:solidFill>
-          </a:ln>
-        </p:spPr>
-        <p:style>
-          <a:lnRef idx="2">
-            <a:schemeClr val="accent1"/>
-          </a:lnRef>
-          <a:fillRef idx="0">
-            <a:schemeClr val="accent1"/>
-          </a:fillRef>
-          <a:effectRef idx="1">
-            <a:schemeClr val="accent1"/>
-          </a:effectRef>
-          <a:fontRef idx="minor">
-            <a:schemeClr val="tx1"/>
-          </a:fontRef>
-        </p:style>
-      </p:cxnSp>
-      <p:sp>
-        <p:nvSpPr>
-          <p:cNvPr id="10" name="Rounded Rectangle 9"/>
-          <p:cNvSpPr/>
-          <p:nvPr/>
-        </p:nvSpPr>
-        <p:spPr>
-          <a:xfrm>
-            <a:off x="5038344" y="1298448"/>
-            <a:ext cx="2029968" cy="1965960"/>
-          </a:xfrm>
-          <a:prstGeom prst="roundRect">
-            <a:avLst/>
-          </a:prstGeom>
-          <a:solidFill>
-            <a:srgbClr val="FAFBFD"/>
+            <a:srgbClr val="FFF6E8"/>
           </a:solidFill>
           <a:ln w="13970">
             <a:solidFill>
@@ -6993,7 +7113,7 @@
           <a:lstStyle/>
           <a:p>
             <a:pPr algn="ctr">
-              <a:defRPr sz="1500" b="1">
+              <a:defRPr sz="1700" b="1">
                 <a:solidFill>
                   <a:srgbClr val="232D37"/>
                 </a:solidFill>
@@ -7001,7 +7121,7 @@
               </a:defRPr>
             </a:pPr>
             <a:r>
-              <a:t>Expenses</a:t>
+              <a:t>xlsxSheetName safeguards</a:t>
             </a:r>
           </a:p>
           <a:p>
@@ -7009,29 +7129,77 @@
               <a:spcBef>
                 <a:spcPts val="300"/>
               </a:spcBef>
-              <a:defRPr sz="1100">
-                <a:solidFill>
-                  <a:srgbClr val="232D37"/>
-                </a:solidFill>
-                <a:latin typeface="Aptos"/>
-              </a:defRPr>
-            </a:pPr>
-            <a:r>
-              <a:t>Fee + tax drag + IRMAA + withdrawal</a:t>
-            </a:r>
-          </a:p>
-        </p:txBody>
-      </p:sp>
-      <p:sp>
-        <p:nvSpPr>
-          <p:cNvPr id="11" name="Rectangle 10"/>
+              <a:defRPr sz="1200">
+                <a:solidFill>
+                  <a:srgbClr val="232D37"/>
+                </a:solidFill>
+                <a:latin typeface="Aptos"/>
+              </a:defRPr>
+            </a:pPr>
+            <a:r>
+              <a:t>Sanitizes prohibited characters: [ ] : * ? / \</a:t>
+            </a:r>
+          </a:p>
+          <a:p>
+            <a:pPr>
+              <a:spcBef>
+                <a:spcPts val="300"/>
+              </a:spcBef>
+              <a:defRPr sz="1200">
+                <a:solidFill>
+                  <a:srgbClr val="232D37"/>
+                </a:solidFill>
+                <a:latin typeface="Aptos"/>
+              </a:defRPr>
+            </a:pPr>
+            <a:r>
+              <a:t>Limits names to 31 characters</a:t>
+            </a:r>
+          </a:p>
+          <a:p>
+            <a:pPr>
+              <a:spcBef>
+                <a:spcPts val="300"/>
+              </a:spcBef>
+              <a:defRPr sz="1200">
+                <a:solidFill>
+                  <a:srgbClr val="232D37"/>
+                </a:solidFill>
+                <a:latin typeface="Aptos"/>
+              </a:defRPr>
+            </a:pPr>
+            <a:r>
+              <a:t>De-duplicates collisions</a:t>
+            </a:r>
+          </a:p>
+          <a:p>
+            <a:pPr>
+              <a:spcBef>
+                <a:spcPts val="300"/>
+              </a:spcBef>
+              <a:defRPr sz="1200">
+                <a:solidFill>
+                  <a:srgbClr val="232D37"/>
+                </a:solidFill>
+                <a:latin typeface="Aptos"/>
+              </a:defRPr>
+            </a:pPr>
+            <a:r>
+              <a:t>Produces valid, predictable worksheet names</a:t>
+            </a:r>
+          </a:p>
+        </p:txBody>
+      </p:sp>
+      <p:sp>
+        <p:nvSpPr>
+          <p:cNvPr id="9" name="Rectangle 8"/>
           <p:cNvSpPr/>
           <p:nvPr/>
         </p:nvSpPr>
         <p:spPr>
           <a:xfrm>
-            <a:off x="5038344" y="1298448"/>
-            <a:ext cx="82296" cy="1965960"/>
+            <a:off x="8183879" y="1234440"/>
+            <a:ext cx="82296" cy="4480560"/>
           </a:xfrm>
           <a:prstGeom prst="rect">
             <a:avLst/>
@@ -7065,535 +7233,9 @@
           </a:p>
         </p:txBody>
       </p:sp>
-      <p:cxnSp>
-        <p:nvCxnSpPr>
-          <p:cNvPr id="12" name="Connector 11"/>
-          <p:cNvCxnSpPr/>
-          <p:nvPr/>
-        </p:nvCxnSpPr>
-        <p:spPr>
-          <a:xfrm>
-            <a:off x="7095744" y="2286000"/>
-            <a:ext cx="228600" cy="0"/>
-          </a:xfrm>
-          <a:prstGeom prst="line">
-            <a:avLst/>
-          </a:prstGeom>
-          <a:ln w="22860">
-            <a:solidFill>
-              <a:srgbClr val="E5892A"/>
-            </a:solidFill>
-          </a:ln>
-        </p:spPr>
-        <p:style>
-          <a:lnRef idx="2">
-            <a:schemeClr val="accent1"/>
-          </a:lnRef>
-          <a:fillRef idx="0">
-            <a:schemeClr val="accent1"/>
-          </a:fillRef>
-          <a:effectRef idx="1">
-            <a:schemeClr val="accent1"/>
-          </a:effectRef>
-          <a:fontRef idx="minor">
-            <a:schemeClr val="tx1"/>
-          </a:fontRef>
-        </p:style>
-      </p:cxnSp>
-      <p:sp>
-        <p:nvSpPr>
-          <p:cNvPr id="13" name="Rounded Rectangle 12"/>
-          <p:cNvSpPr/>
-          <p:nvPr/>
-        </p:nvSpPr>
-        <p:spPr>
-          <a:xfrm>
-            <a:off x="7397496" y="1298448"/>
-            <a:ext cx="2029968" cy="1965960"/>
-          </a:xfrm>
-          <a:prstGeom prst="roundRect">
-            <a:avLst/>
-          </a:prstGeom>
-          <a:solidFill>
-            <a:srgbClr val="FAFBFD"/>
-          </a:solidFill>
-          <a:ln w="13970">
-            <a:solidFill>
-              <a:srgbClr val="429761"/>
-            </a:solidFill>
-          </a:ln>
-        </p:spPr>
-        <p:style>
-          <a:lnRef idx="1">
-            <a:schemeClr val="accent1"/>
-          </a:lnRef>
-          <a:fillRef idx="3">
-            <a:schemeClr val="accent1"/>
-          </a:fillRef>
-          <a:effectRef idx="2">
-            <a:schemeClr val="accent1"/>
-          </a:effectRef>
-          <a:fontRef idx="minor">
-            <a:schemeClr val="lt1"/>
-          </a:fontRef>
-        </p:style>
-        <p:txBody>
-          <a:bodyPr rtlCol="0" anchor="ctr" lIns="182880" rIns="100584" tIns="91440"/>
-          <a:lstStyle/>
-          <a:p>
-            <a:pPr algn="ctr">
-              <a:defRPr sz="1500" b="1">
-                <a:solidFill>
-                  <a:srgbClr val="232D37"/>
-                </a:solidFill>
-                <a:latin typeface="Aptos Display"/>
-              </a:defRPr>
-            </a:pPr>
-            <a:r>
-              <a:t>Waterfall</a:t>
-            </a:r>
-          </a:p>
-          <a:p>
-            <a:pPr>
-              <a:spcBef>
-                <a:spcPts val="300"/>
-              </a:spcBef>
-              <a:defRPr sz="1100">
-                <a:solidFill>
-                  <a:srgbClr val="232D37"/>
-                </a:solidFill>
-                <a:latin typeface="Aptos"/>
-              </a:defRPr>
-            </a:pPr>
-            <a:r>
-              <a:t>Dividends first; sell shortfall</a:t>
-            </a:r>
-          </a:p>
-        </p:txBody>
-      </p:sp>
-      <p:sp>
-        <p:nvSpPr>
-          <p:cNvPr id="14" name="Rectangle 13"/>
-          <p:cNvSpPr/>
-          <p:nvPr/>
-        </p:nvSpPr>
-        <p:spPr>
-          <a:xfrm>
-            <a:off x="7397496" y="1298448"/>
-            <a:ext cx="82296" cy="1965960"/>
-          </a:xfrm>
-          <a:prstGeom prst="rect">
-            <a:avLst/>
-          </a:prstGeom>
-          <a:solidFill>
-            <a:srgbClr val="429761"/>
-          </a:solidFill>
-          <a:ln>
-            <a:noFill/>
-          </a:ln>
-        </p:spPr>
-        <p:style>
-          <a:lnRef idx="1">
-            <a:schemeClr val="accent1"/>
-          </a:lnRef>
-          <a:fillRef idx="3">
-            <a:schemeClr val="accent1"/>
-          </a:fillRef>
-          <a:effectRef idx="2">
-            <a:schemeClr val="accent1"/>
-          </a:effectRef>
-          <a:fontRef idx="minor">
-            <a:schemeClr val="lt1"/>
-          </a:fontRef>
-        </p:style>
-        <p:txBody>
-          <a:bodyPr rtlCol="0" anchor="ctr"/>
-          <a:lstStyle/>
-          <a:p>
-            <a:pPr algn="ctr"/>
-          </a:p>
-        </p:txBody>
-      </p:sp>
-      <p:cxnSp>
-        <p:nvCxnSpPr>
-          <p:cNvPr id="15" name="Connector 14"/>
-          <p:cNvCxnSpPr/>
-          <p:nvPr/>
-        </p:nvCxnSpPr>
-        <p:spPr>
-          <a:xfrm>
-            <a:off x="9454896" y="2286000"/>
-            <a:ext cx="228600" cy="0"/>
-          </a:xfrm>
-          <a:prstGeom prst="line">
-            <a:avLst/>
-          </a:prstGeom>
-          <a:ln w="22860">
-            <a:solidFill>
-              <a:srgbClr val="429761"/>
-            </a:solidFill>
-          </a:ln>
-        </p:spPr>
-        <p:style>
-          <a:lnRef idx="2">
-            <a:schemeClr val="accent1"/>
-          </a:lnRef>
-          <a:fillRef idx="0">
-            <a:schemeClr val="accent1"/>
-          </a:fillRef>
-          <a:effectRef idx="1">
-            <a:schemeClr val="accent1"/>
-          </a:effectRef>
-          <a:fontRef idx="minor">
-            <a:schemeClr val="tx1"/>
-          </a:fontRef>
-        </p:style>
-      </p:cxnSp>
-      <p:sp>
-        <p:nvSpPr>
-          <p:cNvPr id="16" name="Rounded Rectangle 15"/>
-          <p:cNvSpPr/>
-          <p:nvPr/>
-        </p:nvSpPr>
-        <p:spPr>
-          <a:xfrm>
-            <a:off x="9756648" y="1298448"/>
-            <a:ext cx="2029968" cy="1965960"/>
-          </a:xfrm>
-          <a:prstGeom prst="roundRect">
-            <a:avLst/>
-          </a:prstGeom>
-          <a:solidFill>
-            <a:srgbClr val="FAFBFD"/>
-          </a:solidFill>
-          <a:ln w="13970">
-            <a:solidFill>
-              <a:srgbClr val="7852B0"/>
-            </a:solidFill>
-          </a:ln>
-        </p:spPr>
-        <p:style>
-          <a:lnRef idx="1">
-            <a:schemeClr val="accent1"/>
-          </a:lnRef>
-          <a:fillRef idx="3">
-            <a:schemeClr val="accent1"/>
-          </a:fillRef>
-          <a:effectRef idx="2">
-            <a:schemeClr val="accent1"/>
-          </a:effectRef>
-          <a:fontRef idx="minor">
-            <a:schemeClr val="lt1"/>
-          </a:fontRef>
-        </p:style>
-        <p:txBody>
-          <a:bodyPr rtlCol="0" anchor="ctr" lIns="182880" rIns="100584" tIns="91440"/>
-          <a:lstStyle/>
-          <a:p>
-            <a:pPr algn="ctr">
-              <a:defRPr sz="1500" b="1">
-                <a:solidFill>
-                  <a:srgbClr val="232D37"/>
-                </a:solidFill>
-                <a:latin typeface="Aptos Display"/>
-              </a:defRPr>
-            </a:pPr>
-            <a:r>
-              <a:t>Basis roll</a:t>
-            </a:r>
-          </a:p>
-          <a:p>
-            <a:pPr>
-              <a:spcBef>
-                <a:spcPts val="300"/>
-              </a:spcBef>
-              <a:defRPr sz="1100">
-                <a:solidFill>
-                  <a:srgbClr val="232D37"/>
-                </a:solidFill>
-                <a:latin typeface="Aptos"/>
-              </a:defRPr>
-            </a:pPr>
-            <a:r>
-              <a:t>Cost recovery + reinvestment − inflation</a:t>
-            </a:r>
-          </a:p>
-        </p:txBody>
-      </p:sp>
-      <p:sp>
-        <p:nvSpPr>
-          <p:cNvPr id="17" name="Rectangle 16"/>
-          <p:cNvSpPr/>
-          <p:nvPr/>
-        </p:nvSpPr>
-        <p:spPr>
-          <a:xfrm>
-            <a:off x="9756648" y="1298448"/>
-            <a:ext cx="82296" cy="1965960"/>
-          </a:xfrm>
-          <a:prstGeom prst="rect">
-            <a:avLst/>
-          </a:prstGeom>
-          <a:solidFill>
-            <a:srgbClr val="7852B0"/>
-          </a:solidFill>
-          <a:ln>
-            <a:noFill/>
-          </a:ln>
-        </p:spPr>
-        <p:style>
-          <a:lnRef idx="1">
-            <a:schemeClr val="accent1"/>
-          </a:lnRef>
-          <a:fillRef idx="3">
-            <a:schemeClr val="accent1"/>
-          </a:fillRef>
-          <a:effectRef idx="2">
-            <a:schemeClr val="accent1"/>
-          </a:effectRef>
-          <a:fontRef idx="minor">
-            <a:schemeClr val="lt1"/>
-          </a:fontRef>
-        </p:style>
-        <p:txBody>
-          <a:bodyPr rtlCol="0" anchor="ctr"/>
-          <a:lstStyle/>
-          <a:p>
-            <a:pPr algn="ctr"/>
-          </a:p>
-        </p:txBody>
-      </p:sp>
-      <p:sp>
-        <p:nvSpPr>
-          <p:cNvPr id="18" name="Rounded Rectangle 17"/>
-          <p:cNvSpPr/>
-          <p:nvPr/>
-        </p:nvSpPr>
-        <p:spPr>
-          <a:xfrm>
-            <a:off x="822960" y="4069080"/>
-            <a:ext cx="5074920" cy="1188720"/>
-          </a:xfrm>
-          <a:prstGeom prst="roundRect">
-            <a:avLst/>
-          </a:prstGeom>
-          <a:solidFill>
-            <a:srgbClr val="F8FAFC"/>
-          </a:solidFill>
-          <a:ln w="13970">
-            <a:solidFill>
-              <a:srgbClr val="0F2647"/>
-            </a:solidFill>
-          </a:ln>
-        </p:spPr>
-        <p:style>
-          <a:lnRef idx="1">
-            <a:schemeClr val="accent1"/>
-          </a:lnRef>
-          <a:fillRef idx="3">
-            <a:schemeClr val="accent1"/>
-          </a:fillRef>
-          <a:effectRef idx="2">
-            <a:schemeClr val="accent1"/>
-          </a:effectRef>
-          <a:fontRef idx="minor">
-            <a:schemeClr val="lt1"/>
-          </a:fontRef>
-        </p:style>
-        <p:txBody>
-          <a:bodyPr rtlCol="0" anchor="ctr" lIns="182880" rIns="100584" tIns="91440"/>
-          <a:lstStyle/>
-          <a:p>
-            <a:pPr algn="ctr">
-              <a:defRPr sz="1600" b="1">
-                <a:solidFill>
-                  <a:srgbClr val="232D37"/>
-                </a:solidFill>
-                <a:latin typeface="Aptos Display"/>
-              </a:defRPr>
-            </a:pPr>
-            <a:r>
-              <a:t>Tax and cash-flow discipline</a:t>
-            </a:r>
-          </a:p>
-          <a:p>
-            <a:pPr>
-              <a:spcBef>
-                <a:spcPts val="300"/>
-              </a:spcBef>
-              <a:defRPr sz="1200">
-                <a:solidFill>
-                  <a:srgbClr val="232D37"/>
-                </a:solidFill>
-                <a:latin typeface="Aptos"/>
-              </a:defRPr>
-            </a:pPr>
-            <a:r>
-              <a:t>Each portfolio’s expenses are funded only by its own dividends and share sales. Realized LTCG comes only from the sold shortfall.</a:t>
-            </a:r>
-          </a:p>
-        </p:txBody>
-      </p:sp>
-      <p:sp>
-        <p:nvSpPr>
-          <p:cNvPr id="19" name="Rectangle 18"/>
-          <p:cNvSpPr/>
-          <p:nvPr/>
-        </p:nvSpPr>
-        <p:spPr>
-          <a:xfrm>
-            <a:off x="822960" y="4069080"/>
-            <a:ext cx="82296" cy="1188720"/>
-          </a:xfrm>
-          <a:prstGeom prst="rect">
-            <a:avLst/>
-          </a:prstGeom>
-          <a:solidFill>
-            <a:srgbClr val="0F2647"/>
-          </a:solidFill>
-          <a:ln>
-            <a:noFill/>
-          </a:ln>
-        </p:spPr>
-        <p:style>
-          <a:lnRef idx="1">
-            <a:schemeClr val="accent1"/>
-          </a:lnRef>
-          <a:fillRef idx="3">
-            <a:schemeClr val="accent1"/>
-          </a:fillRef>
-          <a:effectRef idx="2">
-            <a:schemeClr val="accent1"/>
-          </a:effectRef>
-          <a:fontRef idx="minor">
-            <a:schemeClr val="lt1"/>
-          </a:fontRef>
-        </p:style>
-        <p:txBody>
-          <a:bodyPr rtlCol="0" anchor="ctr"/>
-          <a:lstStyle/>
-          <a:p>
-            <a:pPr algn="ctr"/>
-          </a:p>
-        </p:txBody>
-      </p:sp>
-      <p:sp>
-        <p:nvSpPr>
-          <p:cNvPr id="20" name="Rounded Rectangle 19"/>
-          <p:cNvSpPr/>
-          <p:nvPr/>
-        </p:nvSpPr>
-        <p:spPr>
-          <a:xfrm>
-            <a:off x="6263640" y="4069080"/>
-            <a:ext cx="5074920" cy="1188720"/>
-          </a:xfrm>
-          <a:prstGeom prst="roundRect">
-            <a:avLst/>
-          </a:prstGeom>
-          <a:solidFill>
-            <a:srgbClr val="F8FAFC"/>
-          </a:solidFill>
-          <a:ln w="13970">
-            <a:solidFill>
-              <a:srgbClr val="168F8D"/>
-            </a:solidFill>
-          </a:ln>
-        </p:spPr>
-        <p:style>
-          <a:lnRef idx="1">
-            <a:schemeClr val="accent1"/>
-          </a:lnRef>
-          <a:fillRef idx="3">
-            <a:schemeClr val="accent1"/>
-          </a:fillRef>
-          <a:effectRef idx="2">
-            <a:schemeClr val="accent1"/>
-          </a:effectRef>
-          <a:fontRef idx="minor">
-            <a:schemeClr val="lt1"/>
-          </a:fontRef>
-        </p:style>
-        <p:txBody>
-          <a:bodyPr rtlCol="0" anchor="ctr" lIns="182880" rIns="100584" tIns="91440"/>
-          <a:lstStyle/>
-          <a:p>
-            <a:pPr algn="ctr">
-              <a:defRPr sz="1600" b="1">
-                <a:solidFill>
-                  <a:srgbClr val="232D37"/>
-                </a:solidFill>
-                <a:latin typeface="Aptos Display"/>
-              </a:defRPr>
-            </a:pPr>
-            <a:r>
-              <a:t>Estate and reporting continuity</a:t>
-            </a:r>
-          </a:p>
-          <a:p>
-            <a:pPr>
-              <a:spcBef>
-                <a:spcPts val="300"/>
-              </a:spcBef>
-              <a:defRPr sz="1200">
-                <a:solidFill>
-                  <a:srgbClr val="232D37"/>
-                </a:solidFill>
-                <a:latin typeface="Aptos"/>
-              </a:defRPr>
-            </a:pPr>
-            <a:r>
-              <a:t>Non-IDGT continuation can step basis up at death; IDGT retains carryover basis. Projection rows still expose basis and unrealized gain for Display and export.</a:t>
-            </a:r>
-          </a:p>
-        </p:txBody>
-      </p:sp>
-      <p:sp>
-        <p:nvSpPr>
-          <p:cNvPr id="21" name="Rectangle 20"/>
-          <p:cNvSpPr/>
-          <p:nvPr/>
-        </p:nvSpPr>
-        <p:spPr>
-          <a:xfrm>
-            <a:off x="6263640" y="4069080"/>
-            <a:ext cx="82296" cy="1188720"/>
-          </a:xfrm>
-          <a:prstGeom prst="rect">
-            <a:avLst/>
-          </a:prstGeom>
-          <a:solidFill>
-            <a:srgbClr val="168F8D"/>
-          </a:solidFill>
-          <a:ln>
-            <a:noFill/>
-          </a:ln>
-        </p:spPr>
-        <p:style>
-          <a:lnRef idx="1">
-            <a:schemeClr val="accent1"/>
-          </a:lnRef>
-          <a:fillRef idx="3">
-            <a:schemeClr val="accent1"/>
-          </a:fillRef>
-          <a:effectRef idx="2">
-            <a:schemeClr val="accent1"/>
-          </a:effectRef>
-          <a:fontRef idx="minor">
-            <a:schemeClr val="lt1"/>
-          </a:fontRef>
-        </p:style>
-        <p:txBody>
-          <a:bodyPr rtlCol="0" anchor="ctr"/>
-          <a:lstStyle/>
-          <a:p>
-            <a:pPr algn="ctr"/>
-          </a:p>
-        </p:txBody>
-      </p:sp>
-      <p:sp>
-        <p:nvSpPr>
-          <p:cNvPr id="22" name="Rectangle 21"/>
+      <p:sp>
+        <p:nvSpPr>
+          <p:cNvPr id="10" name="Rectangle 9"/>
           <p:cNvSpPr/>
           <p:nvPr/>
         </p:nvSpPr>
@@ -7636,7 +7278,7 @@
       </p:sp>
       <p:sp>
         <p:nvSpPr>
-          <p:cNvPr id="23" name="TextBox 22"/>
+          <p:cNvPr id="11" name="TextBox 10"/>
           <p:cNvSpPr txBox="1"/>
           <p:nvPr/>
         </p:nvSpPr>
@@ -7665,7 +7307,7 @@
               </a:defRPr>
             </a:pPr>
             <a:r>
-              <a:t>Retirement Income Planner • Architecture overview • Basis-percentage and formula-page update</a:t>
+              <a:t>Retirement Income Planner • Architecture overview • Account-sheet Excel export update</a:t>
             </a:r>
           </a:p>
         </p:txBody>
@@ -7727,7 +7369,7 @@
               </a:defRPr>
             </a:pPr>
             <a:r>
-              <a:t>Formulas page: a human-checkable model reference</a:t>
+              <a:t>Account-sheet content contracts</a:t>
             </a:r>
           </a:p>
         </p:txBody>
@@ -7763,7 +7405,7 @@
               </a:defRPr>
             </a:pPr>
             <a:r>
-              <a:t>The formulas reference is now designed as a mathematical document while remaining tied to live application data.</a:t>
+              <a:t>Each account-specific sheet contains one row per projected year, with fields suited to that account type.</a:t>
             </a:r>
           </a:p>
         </p:txBody>
@@ -7776,8 +7418,364 @@
         </p:nvSpPr>
         <p:spPr>
           <a:xfrm>
-            <a:off x="640080" y="1234440"/>
-            <a:ext cx="3246120" cy="4526280"/>
+            <a:off x="502920" y="1234440"/>
+            <a:ext cx="3657600" cy="4480560"/>
+          </a:xfrm>
+          <a:prstGeom prst="roundRect">
+            <a:avLst/>
+          </a:prstGeom>
+          <a:solidFill>
+            <a:srgbClr val="E9F4FF"/>
+          </a:solidFill>
+          <a:ln w="13970">
+            <a:solidFill>
+              <a:srgbClr val="266EB2"/>
+            </a:solidFill>
+          </a:ln>
+        </p:spPr>
+        <p:style>
+          <a:lnRef idx="1">
+            <a:schemeClr val="accent1"/>
+          </a:lnRef>
+          <a:fillRef idx="3">
+            <a:schemeClr val="accent1"/>
+          </a:fillRef>
+          <a:effectRef idx="2">
+            <a:schemeClr val="accent1"/>
+          </a:effectRef>
+          <a:fontRef idx="minor">
+            <a:schemeClr val="lt1"/>
+          </a:fontRef>
+        </p:style>
+        <p:txBody>
+          <a:bodyPr rtlCol="0" anchor="ctr" lIns="182880" rIns="100584" tIns="91440"/>
+          <a:lstStyle/>
+          <a:p>
+            <a:pPr algn="ctr">
+              <a:defRPr sz="1700" b="1">
+                <a:solidFill>
+                  <a:srgbClr val="232D37"/>
+                </a:solidFill>
+                <a:latin typeface="Aptos Display"/>
+              </a:defRPr>
+            </a:pPr>
+            <a:r>
+              <a:t>Brokerage portfolio sheet</a:t>
+            </a:r>
+          </a:p>
+          <a:p>
+            <a:pPr>
+              <a:spcBef>
+                <a:spcPts val="300"/>
+              </a:spcBef>
+              <a:defRPr sz="1200">
+                <a:solidFill>
+                  <a:srgbClr val="232D37"/>
+                </a:solidFill>
+                <a:latin typeface="Aptos"/>
+              </a:defRPr>
+            </a:pPr>
+            <a:r>
+              <a:t>Balance and growth percentage</a:t>
+            </a:r>
+          </a:p>
+          <a:p>
+            <a:pPr>
+              <a:spcBef>
+                <a:spcPts val="300"/>
+              </a:spcBef>
+              <a:defRPr sz="1200">
+                <a:solidFill>
+                  <a:srgbClr val="232D37"/>
+                </a:solidFill>
+                <a:latin typeface="Aptos"/>
+              </a:defRPr>
+            </a:pPr>
+            <a:r>
+              <a:t>Tax drag, fee drag, IRMAA drag, withdrawal</a:t>
+            </a:r>
+          </a:p>
+          <a:p>
+            <a:pPr>
+              <a:spcBef>
+                <a:spcPts val="300"/>
+              </a:spcBef>
+              <a:defRPr sz="1200">
+                <a:solidFill>
+                  <a:srgbClr val="232D37"/>
+                </a:solidFill>
+                <a:latin typeface="Aptos"/>
+              </a:defRPr>
+            </a:pPr>
+            <a:r>
+              <a:t>Realized LTCG</a:t>
+            </a:r>
+          </a:p>
+          <a:p>
+            <a:pPr>
+              <a:spcBef>
+                <a:spcPts val="300"/>
+              </a:spcBef>
+              <a:defRPr sz="1200">
+                <a:solidFill>
+                  <a:srgbClr val="232D37"/>
+                </a:solidFill>
+                <a:latin typeface="Aptos"/>
+              </a:defRPr>
+            </a:pPr>
+            <a:r>
+              <a:t>Cost basis and unrealized gain</a:t>
+            </a:r>
+          </a:p>
+          <a:p>
+            <a:pPr>
+              <a:spcBef>
+                <a:spcPts val="300"/>
+              </a:spcBef>
+              <a:defRPr sz="1200">
+                <a:solidFill>
+                  <a:srgbClr val="232D37"/>
+                </a:solidFill>
+                <a:latin typeface="Aptos"/>
+              </a:defRPr>
+            </a:pPr>
+            <a:r>
+              <a:t>Dividend/expense waterfall: used, reinvested, sold</a:t>
+            </a:r>
+          </a:p>
+          <a:p>
+            <a:pPr>
+              <a:spcBef>
+                <a:spcPts val="300"/>
+              </a:spcBef>
+              <a:defRPr sz="1200">
+                <a:solidFill>
+                  <a:srgbClr val="232D37"/>
+                </a:solidFill>
+                <a:latin typeface="Aptos"/>
+              </a:defRPr>
+            </a:pPr>
+            <a:r>
+              <a:t>IDGT status is reflected in sheet name</a:t>
+            </a:r>
+          </a:p>
+        </p:txBody>
+      </p:sp>
+      <p:sp>
+        <p:nvSpPr>
+          <p:cNvPr id="5" name="Rectangle 4"/>
+          <p:cNvSpPr/>
+          <p:nvPr/>
+        </p:nvSpPr>
+        <p:spPr>
+          <a:xfrm>
+            <a:off x="502920" y="1234440"/>
+            <a:ext cx="82296" cy="4480560"/>
+          </a:xfrm>
+          <a:prstGeom prst="rect">
+            <a:avLst/>
+          </a:prstGeom>
+          <a:solidFill>
+            <a:srgbClr val="266EB2"/>
+          </a:solidFill>
+          <a:ln>
+            <a:noFill/>
+          </a:ln>
+        </p:spPr>
+        <p:style>
+          <a:lnRef idx="1">
+            <a:schemeClr val="accent1"/>
+          </a:lnRef>
+          <a:fillRef idx="3">
+            <a:schemeClr val="accent1"/>
+          </a:fillRef>
+          <a:effectRef idx="2">
+            <a:schemeClr val="accent1"/>
+          </a:effectRef>
+          <a:fontRef idx="minor">
+            <a:schemeClr val="lt1"/>
+          </a:fontRef>
+        </p:style>
+        <p:txBody>
+          <a:bodyPr rtlCol="0" anchor="ctr"/>
+          <a:lstStyle/>
+          <a:p>
+            <a:pPr algn="ctr"/>
+          </a:p>
+        </p:txBody>
+      </p:sp>
+      <p:sp>
+        <p:nvSpPr>
+          <p:cNvPr id="6" name="Rounded Rectangle 5"/>
+          <p:cNvSpPr/>
+          <p:nvPr/>
+        </p:nvSpPr>
+        <p:spPr>
+          <a:xfrm>
+            <a:off x="4270248" y="1234440"/>
+            <a:ext cx="3520440" cy="4480560"/>
+          </a:xfrm>
+          <a:prstGeom prst="roundRect">
+            <a:avLst/>
+          </a:prstGeom>
+          <a:solidFill>
+            <a:srgbClr val="EAF9F4"/>
+          </a:solidFill>
+          <a:ln w="13970">
+            <a:solidFill>
+              <a:srgbClr val="429761"/>
+            </a:solidFill>
+          </a:ln>
+        </p:spPr>
+        <p:style>
+          <a:lnRef idx="1">
+            <a:schemeClr val="accent1"/>
+          </a:lnRef>
+          <a:fillRef idx="3">
+            <a:schemeClr val="accent1"/>
+          </a:fillRef>
+          <a:effectRef idx="2">
+            <a:schemeClr val="accent1"/>
+          </a:effectRef>
+          <a:fontRef idx="minor">
+            <a:schemeClr val="lt1"/>
+          </a:fontRef>
+        </p:style>
+        <p:txBody>
+          <a:bodyPr rtlCol="0" anchor="ctr" lIns="182880" rIns="100584" tIns="91440"/>
+          <a:lstStyle/>
+          <a:p>
+            <a:pPr algn="ctr">
+              <a:defRPr sz="1700" b="1">
+                <a:solidFill>
+                  <a:srgbClr val="232D37"/>
+                </a:solidFill>
+                <a:latin typeface="Aptos Display"/>
+              </a:defRPr>
+            </a:pPr>
+            <a:r>
+              <a:t>Pre-tax IRA sheet</a:t>
+            </a:r>
+          </a:p>
+          <a:p>
+            <a:pPr>
+              <a:spcBef>
+                <a:spcPts val="300"/>
+              </a:spcBef>
+              <a:defRPr sz="1200">
+                <a:solidFill>
+                  <a:srgbClr val="232D37"/>
+                </a:solidFill>
+                <a:latin typeface="Aptos"/>
+              </a:defRPr>
+            </a:pPr>
+            <a:r>
+              <a:t>Annual RMD / withdrawal</a:t>
+            </a:r>
+          </a:p>
+          <a:p>
+            <a:pPr>
+              <a:spcBef>
+                <a:spcPts val="300"/>
+              </a:spcBef>
+              <a:defRPr sz="1200">
+                <a:solidFill>
+                  <a:srgbClr val="232D37"/>
+                </a:solidFill>
+                <a:latin typeface="Aptos"/>
+              </a:defRPr>
+            </a:pPr>
+            <a:r>
+              <a:t>Roth-conversion withdrawal</a:t>
+            </a:r>
+          </a:p>
+          <a:p>
+            <a:pPr>
+              <a:spcBef>
+                <a:spcPts val="300"/>
+              </a:spcBef>
+              <a:defRPr sz="1200">
+                <a:solidFill>
+                  <a:srgbClr val="232D37"/>
+                </a:solidFill>
+                <a:latin typeface="Aptos"/>
+              </a:defRPr>
+            </a:pPr>
+            <a:r>
+              <a:t>End-of-year IRA balance</a:t>
+            </a:r>
+          </a:p>
+          <a:p>
+            <a:pPr>
+              <a:spcBef>
+                <a:spcPts val="300"/>
+              </a:spcBef>
+              <a:defRPr sz="1200">
+                <a:solidFill>
+                  <a:srgbClr val="232D37"/>
+                </a:solidFill>
+                <a:latin typeface="Aptos"/>
+              </a:defRPr>
+            </a:pPr>
+            <a:r>
+              <a:t>One row for each projection year</a:t>
+            </a:r>
+          </a:p>
+        </p:txBody>
+      </p:sp>
+      <p:sp>
+        <p:nvSpPr>
+          <p:cNvPr id="7" name="Rectangle 6"/>
+          <p:cNvSpPr/>
+          <p:nvPr/>
+        </p:nvSpPr>
+        <p:spPr>
+          <a:xfrm>
+            <a:off x="4270248" y="1234440"/>
+            <a:ext cx="82296" cy="4480560"/>
+          </a:xfrm>
+          <a:prstGeom prst="rect">
+            <a:avLst/>
+          </a:prstGeom>
+          <a:solidFill>
+            <a:srgbClr val="429761"/>
+          </a:solidFill>
+          <a:ln>
+            <a:noFill/>
+          </a:ln>
+        </p:spPr>
+        <p:style>
+          <a:lnRef idx="1">
+            <a:schemeClr val="accent1"/>
+          </a:lnRef>
+          <a:fillRef idx="3">
+            <a:schemeClr val="accent1"/>
+          </a:fillRef>
+          <a:effectRef idx="2">
+            <a:schemeClr val="accent1"/>
+          </a:effectRef>
+          <a:fontRef idx="minor">
+            <a:schemeClr val="lt1"/>
+          </a:fontRef>
+        </p:style>
+        <p:txBody>
+          <a:bodyPr rtlCol="0" anchor="ctr"/>
+          <a:lstStyle/>
+          <a:p>
+            <a:pPr algn="ctr"/>
+          </a:p>
+        </p:txBody>
+      </p:sp>
+      <p:sp>
+        <p:nvSpPr>
+          <p:cNvPr id="8" name="Rounded Rectangle 7"/>
+          <p:cNvSpPr/>
+          <p:nvPr/>
+        </p:nvSpPr>
+        <p:spPr>
+          <a:xfrm>
+            <a:off x="7900416" y="1234440"/>
+            <a:ext cx="3520440" cy="4480560"/>
           </a:xfrm>
           <a:prstGeom prst="roundRect">
             <a:avLst/>
@@ -7818,7 +7816,7 @@
               </a:defRPr>
             </a:pPr>
             <a:r>
-              <a:t>Presentation layer</a:t>
+              <a:t>Roth IRA sheet</a:t>
             </a:r>
           </a:p>
           <a:p>
@@ -7834,7 +7832,7 @@
               </a:defRPr>
             </a:pPr>
             <a:r>
-              <a:t>Centered display equations</a:t>
+              <a:t>Annual conversion received</a:t>
             </a:r>
           </a:p>
           <a:p>
@@ -7850,7 +7848,7 @@
               </a:defRPr>
             </a:pPr>
             <a:r>
-              <a:t>One equation per line</a:t>
+              <a:t>End-of-year Roth balance</a:t>
             </a:r>
           </a:p>
           <a:p>
@@ -7866,7 +7864,7 @@
               </a:defRPr>
             </a:pPr>
             <a:r>
-              <a:t>Fractions, powers, piecewise definitions</a:t>
+              <a:t>One row for each projection year</a:t>
             </a:r>
           </a:p>
           <a:p>
@@ -7882,37 +7880,21 @@
               </a:defRPr>
             </a:pPr>
             <a:r>
-              <a:t>Small “where …” captions</a:t>
-            </a:r>
-          </a:p>
-          <a:p>
-            <a:pPr>
-              <a:spcBef>
-                <a:spcPts val="300"/>
-              </a:spcBef>
-              <a:defRPr sz="1200">
-                <a:solidFill>
-                  <a:srgbClr val="232D37"/>
-                </a:solidFill>
-                <a:latin typeface="Aptos"/>
-              </a:defRPr>
-            </a:pPr>
-            <a:r>
-              <a:t>Prose introduces equations rather than embedding math inline</a:t>
-            </a:r>
-          </a:p>
-        </p:txBody>
-      </p:sp>
-      <p:sp>
-        <p:nvSpPr>
-          <p:cNvPr id="5" name="Rectangle 4"/>
+              <a:t>Included only if the Roth account is enabled</a:t>
+            </a:r>
+          </a:p>
+        </p:txBody>
+      </p:sp>
+      <p:sp>
+        <p:nvSpPr>
+          <p:cNvPr id="9" name="Rectangle 8"/>
           <p:cNvSpPr/>
           <p:nvPr/>
         </p:nvSpPr>
         <p:spPr>
           <a:xfrm>
-            <a:off x="640080" y="1234440"/>
-            <a:ext cx="82296" cy="4526280"/>
+            <a:off x="7900416" y="1234440"/>
+            <a:ext cx="82296" cy="4480560"/>
           </a:xfrm>
           <a:prstGeom prst="rect">
             <a:avLst/>
@@ -7948,330 +7930,6 @@
       </p:sp>
       <p:sp>
         <p:nvSpPr>
-          <p:cNvPr id="6" name="Rounded Rectangle 5"/>
-          <p:cNvSpPr/>
-          <p:nvPr/>
-        </p:nvSpPr>
-        <p:spPr>
-          <a:xfrm>
-            <a:off x="4480560" y="1234440"/>
-            <a:ext cx="3246120" cy="4526280"/>
-          </a:xfrm>
-          <a:prstGeom prst="roundRect">
-            <a:avLst/>
-          </a:prstGeom>
-          <a:solidFill>
-            <a:srgbClr val="EAF9F4"/>
-          </a:solidFill>
-          <a:ln w="13970">
-            <a:solidFill>
-              <a:srgbClr val="429761"/>
-            </a:solidFill>
-          </a:ln>
-        </p:spPr>
-        <p:style>
-          <a:lnRef idx="1">
-            <a:schemeClr val="accent1"/>
-          </a:lnRef>
-          <a:fillRef idx="3">
-            <a:schemeClr val="accent1"/>
-          </a:fillRef>
-          <a:effectRef idx="2">
-            <a:schemeClr val="accent1"/>
-          </a:effectRef>
-          <a:fontRef idx="minor">
-            <a:schemeClr val="lt1"/>
-          </a:fontRef>
-        </p:style>
-        <p:txBody>
-          <a:bodyPr rtlCol="0" anchor="ctr" lIns="182880" rIns="100584" tIns="91440"/>
-          <a:lstStyle/>
-          <a:p>
-            <a:pPr algn="ctr">
-              <a:defRPr sz="1700" b="1">
-                <a:solidFill>
-                  <a:srgbClr val="232D37"/>
-                </a:solidFill>
-                <a:latin typeface="Aptos Display"/>
-              </a:defRPr>
-            </a:pPr>
-            <a:r>
-              <a:t>Reference-data integrity</a:t>
-            </a:r>
-          </a:p>
-          <a:p>
-            <a:pPr>
-              <a:spcBef>
-                <a:spcPts val="300"/>
-              </a:spcBef>
-              <a:defRPr sz="1200">
-                <a:solidFill>
-                  <a:srgbClr val="232D37"/>
-                </a:solidFill>
-                <a:latin typeface="Aptos"/>
-              </a:defRPr>
-            </a:pPr>
-            <a:r>
-              <a:t>Bracket, IRMAA, and RMD tables are built directly from constants.js globals.</a:t>
-            </a:r>
-          </a:p>
-          <a:p>
-            <a:pPr>
-              <a:spcBef>
-                <a:spcPts val="300"/>
-              </a:spcBef>
-              <a:defRPr sz="1200">
-                <a:solidFill>
-                  <a:srgbClr val="232D37"/>
-                </a:solidFill>
-                <a:latin typeface="Aptos"/>
-              </a:defRPr>
-            </a:pPr>
-            <a:r>
-              <a:t>Tax-year updates automatically appear in the page.</a:t>
-            </a:r>
-          </a:p>
-          <a:p>
-            <a:pPr>
-              <a:spcBef>
-                <a:spcPts val="300"/>
-              </a:spcBef>
-              <a:defRPr sz="1200">
-                <a:solidFill>
-                  <a:srgbClr val="232D37"/>
-                </a:solidFill>
-                <a:latin typeface="Aptos"/>
-              </a:defRPr>
-            </a:pPr>
-            <a:r>
-              <a:t>Formula prose is maintained alongside computation changes.</a:t>
-            </a:r>
-          </a:p>
-        </p:txBody>
-      </p:sp>
-      <p:sp>
-        <p:nvSpPr>
-          <p:cNvPr id="7" name="Rectangle 6"/>
-          <p:cNvSpPr/>
-          <p:nvPr/>
-        </p:nvSpPr>
-        <p:spPr>
-          <a:xfrm>
-            <a:off x="4480560" y="1234440"/>
-            <a:ext cx="82296" cy="4526280"/>
-          </a:xfrm>
-          <a:prstGeom prst="rect">
-            <a:avLst/>
-          </a:prstGeom>
-          <a:solidFill>
-            <a:srgbClr val="429761"/>
-          </a:solidFill>
-          <a:ln>
-            <a:noFill/>
-          </a:ln>
-        </p:spPr>
-        <p:style>
-          <a:lnRef idx="1">
-            <a:schemeClr val="accent1"/>
-          </a:lnRef>
-          <a:fillRef idx="3">
-            <a:schemeClr val="accent1"/>
-          </a:fillRef>
-          <a:effectRef idx="2">
-            <a:schemeClr val="accent1"/>
-          </a:effectRef>
-          <a:fontRef idx="minor">
-            <a:schemeClr val="lt1"/>
-          </a:fontRef>
-        </p:style>
-        <p:txBody>
-          <a:bodyPr rtlCol="0" anchor="ctr"/>
-          <a:lstStyle/>
-          <a:p>
-            <a:pPr algn="ctr"/>
-          </a:p>
-        </p:txBody>
-      </p:sp>
-      <p:sp>
-        <p:nvSpPr>
-          <p:cNvPr id="8" name="Rounded Rectangle 7"/>
-          <p:cNvSpPr/>
-          <p:nvPr/>
-        </p:nvSpPr>
-        <p:spPr>
-          <a:xfrm>
-            <a:off x="8321040" y="1234440"/>
-            <a:ext cx="3246120" cy="4526280"/>
-          </a:xfrm>
-          <a:prstGeom prst="roundRect">
-            <a:avLst/>
-          </a:prstGeom>
-          <a:solidFill>
-            <a:srgbClr val="E9F4FF"/>
-          </a:solidFill>
-          <a:ln w="13970">
-            <a:solidFill>
-              <a:srgbClr val="266EB2"/>
-            </a:solidFill>
-          </a:ln>
-        </p:spPr>
-        <p:style>
-          <a:lnRef idx="1">
-            <a:schemeClr val="accent1"/>
-          </a:lnRef>
-          <a:fillRef idx="3">
-            <a:schemeClr val="accent1"/>
-          </a:fillRef>
-          <a:effectRef idx="2">
-            <a:schemeClr val="accent1"/>
-          </a:effectRef>
-          <a:fontRef idx="minor">
-            <a:schemeClr val="lt1"/>
-          </a:fontRef>
-        </p:style>
-        <p:txBody>
-          <a:bodyPr rtlCol="0" anchor="ctr" lIns="182880" rIns="100584" tIns="91440"/>
-          <a:lstStyle/>
-          <a:p>
-            <a:pPr algn="ctr">
-              <a:defRPr sz="1700" b="1">
-                <a:solidFill>
-                  <a:srgbClr val="232D37"/>
-                </a:solidFill>
-                <a:latin typeface="Aptos Display"/>
-              </a:defRPr>
-            </a:pPr>
-            <a:r>
-              <a:t>New helpers</a:t>
-            </a:r>
-          </a:p>
-          <a:p>
-            <a:pPr>
-              <a:spcBef>
-                <a:spcPts val="300"/>
-              </a:spcBef>
-              <a:defRPr sz="1200">
-                <a:solidFill>
-                  <a:srgbClr val="232D37"/>
-                </a:solidFill>
-                <a:latin typeface="Aptos"/>
-              </a:defRPr>
-            </a:pPr>
-            <a:r>
-              <a:t>fpEq: display equation</a:t>
-            </a:r>
-          </a:p>
-          <a:p>
-            <a:pPr>
-              <a:spcBef>
-                <a:spcPts val="300"/>
-              </a:spcBef>
-              <a:defRPr sz="1200">
-                <a:solidFill>
-                  <a:srgbClr val="232D37"/>
-                </a:solidFill>
-                <a:latin typeface="Aptos"/>
-              </a:defRPr>
-            </a:pPr>
-            <a:r>
-              <a:t>fpFr: stacked fraction</a:t>
-            </a:r>
-          </a:p>
-          <a:p>
-            <a:pPr>
-              <a:spcBef>
-                <a:spcPts val="300"/>
-              </a:spcBef>
-              <a:defRPr sz="1200">
-                <a:solidFill>
-                  <a:srgbClr val="232D37"/>
-                </a:solidFill>
-                <a:latin typeface="Aptos"/>
-              </a:defRPr>
-            </a:pPr>
-            <a:r>
-              <a:t>fpPw: piecewise expression</a:t>
-            </a:r>
-          </a:p>
-          <a:p>
-            <a:pPr>
-              <a:spcBef>
-                <a:spcPts val="300"/>
-              </a:spcBef>
-              <a:defRPr sz="1200">
-                <a:solidFill>
-                  <a:srgbClr val="232D37"/>
-                </a:solidFill>
-                <a:latin typeface="Aptos"/>
-              </a:defRPr>
-            </a:pPr>
-            <a:r>
-              <a:t>fpWhere: notation caption</a:t>
-            </a:r>
-          </a:p>
-          <a:p>
-            <a:pPr>
-              <a:spcBef>
-                <a:spcPts val="300"/>
-              </a:spcBef>
-              <a:defRPr sz="1200">
-                <a:solidFill>
-                  <a:srgbClr val="232D37"/>
-                </a:solidFill>
-                <a:latin typeface="Aptos"/>
-              </a:defRPr>
-            </a:pPr>
-            <a:r>
-              <a:t>The page remains a standalone new-tab document.</a:t>
-            </a:r>
-          </a:p>
-        </p:txBody>
-      </p:sp>
-      <p:sp>
-        <p:nvSpPr>
-          <p:cNvPr id="9" name="Rectangle 8"/>
-          <p:cNvSpPr/>
-          <p:nvPr/>
-        </p:nvSpPr>
-        <p:spPr>
-          <a:xfrm>
-            <a:off x="8321040" y="1234440"/>
-            <a:ext cx="82296" cy="4526280"/>
-          </a:xfrm>
-          <a:prstGeom prst="rect">
-            <a:avLst/>
-          </a:prstGeom>
-          <a:solidFill>
-            <a:srgbClr val="266EB2"/>
-          </a:solidFill>
-          <a:ln>
-            <a:noFill/>
-          </a:ln>
-        </p:spPr>
-        <p:style>
-          <a:lnRef idx="1">
-            <a:schemeClr val="accent1"/>
-          </a:lnRef>
-          <a:fillRef idx="3">
-            <a:schemeClr val="accent1"/>
-          </a:fillRef>
-          <a:effectRef idx="2">
-            <a:schemeClr val="accent1"/>
-          </a:effectRef>
-          <a:fontRef idx="minor">
-            <a:schemeClr val="lt1"/>
-          </a:fontRef>
-        </p:style>
-        <p:txBody>
-          <a:bodyPr rtlCol="0" anchor="ctr"/>
-          <a:lstStyle/>
-          <a:p>
-            <a:pPr algn="ctr"/>
-          </a:p>
-        </p:txBody>
-      </p:sp>
-      <p:sp>
-        <p:nvSpPr>
           <p:cNvPr id="10" name="Rectangle 9"/>
           <p:cNvSpPr/>
           <p:nvPr/>
@@ -8344,7 +8002,7 @@
               </a:defRPr>
             </a:pPr>
             <a:r>
-              <a:t>Retirement Income Planner • Architecture overview • Basis-percentage and formula-page update</a:t>
+              <a:t>Retirement Income Planner • Architecture overview • Account-sheet Excel export update</a:t>
             </a:r>
           </a:p>
         </p:txBody>
@@ -8406,7 +8064,7 @@
               </a:defRPr>
             </a:pPr>
             <a:r>
-              <a:t>Example: the same model equation, clearly documented</a:t>
+              <a:t>Export fits the existing architectural boundaries</a:t>
             </a:r>
           </a:p>
         </p:txBody>
@@ -8442,7 +8100,7 @@
               </a:defRPr>
             </a:pPr>
             <a:r>
-              <a:t>Formulas are separated from prose so a reader can compare the page with the projection logic by hand.</a:t>
+              <a:t>The enhanced workbook extends presentation capability without creating a parallel financial model.</a:t>
             </a:r>
           </a:p>
         </p:txBody>
@@ -8455,18 +8113,18 @@
         </p:nvSpPr>
         <p:spPr>
           <a:xfrm>
-            <a:off x="822960" y="1188720"/>
-            <a:ext cx="10515600" cy="731520"/>
+            <a:off x="594360" y="1234440"/>
+            <a:ext cx="3383280" cy="4434840"/>
           </a:xfrm>
           <a:prstGeom prst="roundRect">
             <a:avLst/>
           </a:prstGeom>
           <a:solidFill>
-            <a:srgbClr val="F8FAFC"/>
+            <a:srgbClr val="E9F4FF"/>
           </a:solidFill>
           <a:ln w="13970">
             <a:solidFill>
-              <a:srgbClr val="0F2647"/>
+              <a:srgbClr val="266EB2"/>
             </a:solidFill>
           </a:ln>
         </p:spPr>
@@ -8489,7 +8147,7 @@
           <a:lstStyle/>
           <a:p>
             <a:pPr algn="ctr">
-              <a:defRPr sz="1600" b="1">
+              <a:defRPr sz="1700" b="1">
                 <a:solidFill>
                   <a:srgbClr val="232D37"/>
                 </a:solidFill>
@@ -8497,7 +8155,7 @@
               </a:defRPr>
             </a:pPr>
             <a:r>
-              <a:t>Prose introduction</a:t>
+              <a:t>State and input</a:t>
             </a:r>
           </a:p>
           <a:p>
@@ -8513,7 +8171,39 @@
               </a:defRPr>
             </a:pPr>
             <a:r>
-              <a:t>The initial cost basis is calculated from the optional entered percentage and the portfolio’s opening balance.</a:t>
+              <a:t>State determines which accounts are enabled.</a:t>
+            </a:r>
+          </a:p>
+          <a:p>
+            <a:pPr>
+              <a:spcBef>
+                <a:spcPts val="300"/>
+              </a:spcBef>
+              <a:defRPr sz="1200">
+                <a:solidFill>
+                  <a:srgbClr val="232D37"/>
+                </a:solidFill>
+                <a:latin typeface="Aptos"/>
+              </a:defRPr>
+            </a:pPr>
+            <a:r>
+              <a:t>Enable/Hide remains separate: Hide affects only card appearance, not account-sheet inclusion.</a:t>
+            </a:r>
+          </a:p>
+          <a:p>
+            <a:pPr>
+              <a:spcBef>
+                <a:spcPts val="300"/>
+              </a:spcBef>
+              <a:defRPr sz="1200">
+                <a:solidFill>
+                  <a:srgbClr val="232D37"/>
+                </a:solidFill>
+                <a:latin typeface="Aptos"/>
+              </a:defRPr>
+            </a:pPr>
+            <a:r>
+              <a:t>No export-specific state is written.</a:t>
             </a:r>
           </a:p>
         </p:txBody>
@@ -8526,14 +8216,14 @@
         </p:nvSpPr>
         <p:spPr>
           <a:xfrm>
-            <a:off x="822960" y="1188720"/>
-            <a:ext cx="82296" cy="731520"/>
+            <a:off x="594360" y="1234440"/>
+            <a:ext cx="82296" cy="4434840"/>
           </a:xfrm>
           <a:prstGeom prst="rect">
             <a:avLst/>
           </a:prstGeom>
           <a:solidFill>
-            <a:srgbClr val="0F2647"/>
+            <a:srgbClr val="266EB2"/>
           </a:solidFill>
           <a:ln>
             <a:noFill/>
@@ -8563,86 +8253,14 @@
       </p:sp>
       <p:sp>
         <p:nvSpPr>
-          <p:cNvPr id="6" name="TextBox 5"/>
-          <p:cNvSpPr txBox="1"/>
-          <p:nvPr/>
-        </p:nvSpPr>
-        <p:spPr>
-          <a:xfrm>
-            <a:off x="1828800" y="2212848"/>
-            <a:ext cx="8503920" cy="457200"/>
-          </a:xfrm>
-          <a:prstGeom prst="rect">
-            <a:avLst/>
-          </a:prstGeom>
-          <a:noFill/>
-        </p:spPr>
-        <p:txBody>
-          <a:bodyPr wrap="none" anchor="ctr">
-            <a:spAutoFit/>
-          </a:bodyPr>
-          <a:lstStyle/>
-          <a:p>
-            <a:pPr algn="ctr">
-              <a:defRPr sz="2800" b="1">
-                <a:solidFill>
-                  <a:srgbClr val="0F2647"/>
-                </a:solidFill>
-                <a:latin typeface="Aptos"/>
-              </a:defRPr>
-            </a:pPr>
-            <a:r>
-              <a:t>basis₀ = (basisPct / 100) × balance₀</a:t>
-            </a:r>
-          </a:p>
-        </p:txBody>
-      </p:sp>
-      <p:sp>
-        <p:nvSpPr>
-          <p:cNvPr id="7" name="TextBox 6"/>
-          <p:cNvSpPr txBox="1"/>
-          <p:nvPr/>
-        </p:nvSpPr>
-        <p:spPr>
-          <a:xfrm>
-            <a:off x="1828800" y="2779776"/>
-            <a:ext cx="8503920" cy="274320"/>
-          </a:xfrm>
-          <a:prstGeom prst="rect">
-            <a:avLst/>
-          </a:prstGeom>
-          <a:noFill/>
-        </p:spPr>
-        <p:txBody>
-          <a:bodyPr wrap="none" anchor="ctr">
-            <a:spAutoFit/>
-          </a:bodyPr>
-          <a:lstStyle/>
-          <a:p>
-            <a:pPr algn="ctr">
-              <a:defRPr sz="1200" b="0">
-                <a:solidFill>
-                  <a:srgbClr val="5D6C7A"/>
-                </a:solidFill>
-                <a:latin typeface="Aptos"/>
-              </a:defRPr>
-            </a:pPr>
-            <a:r>
-              <a:t>where basisPct is clamped to 0–100 and basis₀ is clamped to [0, balance₀]</a:t>
-            </a:r>
-          </a:p>
-        </p:txBody>
-      </p:sp>
-      <p:sp>
-        <p:nvSpPr>
-          <p:cNvPr id="8" name="Rounded Rectangle 7"/>
+          <p:cNvPr id="6" name="Rounded Rectangle 5"/>
           <p:cNvSpPr/>
           <p:nvPr/>
         </p:nvSpPr>
         <p:spPr>
           <a:xfrm>
-            <a:off x="822960" y="3657600"/>
-            <a:ext cx="4937760" cy="1234440"/>
+            <a:off x="4407408" y="1234440"/>
+            <a:ext cx="3383280" cy="4434840"/>
           </a:xfrm>
           <a:prstGeom prst="roundRect">
             <a:avLst/>
@@ -8675,7 +8293,7 @@
           <a:lstStyle/>
           <a:p>
             <a:pPr algn="ctr">
-              <a:defRPr sz="1600" b="1">
+              <a:defRPr sz="1700" b="1">
                 <a:solidFill>
                   <a:srgbClr val="232D37"/>
                 </a:solidFill>
@@ -8683,7 +8301,7 @@
               </a:defRPr>
             </a:pPr>
             <a:r>
-              <a:t>Computational use</a:t>
+              <a:t>Compute and rows</a:t>
             </a:r>
           </a:p>
           <a:p>
@@ -8699,21 +8317,53 @@
               </a:defRPr>
             </a:pPr>
             <a:r>
-              <a:t>This basis drives the gain fraction and is subsequently rolled forward after sales, reinvested dividends, and inflation.</a:t>
-            </a:r>
-          </a:p>
-        </p:txBody>
-      </p:sp>
-      <p:sp>
-        <p:nvSpPr>
-          <p:cNvPr id="9" name="Rectangle 8"/>
+              <a:t>computeProjection() continues to produce all account-level data.</a:t>
+            </a:r>
+          </a:p>
+          <a:p>
+            <a:pPr>
+              <a:spcBef>
+                <a:spcPts val="300"/>
+              </a:spcBef>
+              <a:defRPr sz="1200">
+                <a:solidFill>
+                  <a:srgbClr val="232D37"/>
+                </a:solidFill>
+                <a:latin typeface="Aptos"/>
+              </a:defRPr>
+            </a:pPr>
+            <a:r>
+              <a:t>The projection-row schema is the source for workbook values.</a:t>
+            </a:r>
+          </a:p>
+          <a:p>
+            <a:pPr>
+              <a:spcBef>
+                <a:spcPts val="300"/>
+              </a:spcBef>
+              <a:defRPr sz="1200">
+                <a:solidFill>
+                  <a:srgbClr val="232D37"/>
+                </a:solidFill>
+                <a:latin typeface="Aptos"/>
+              </a:defRPr>
+            </a:pPr>
+            <a:r>
+              <a:t>The exporter does not reimplement tax, basis, IRMAA, or gain logic.</a:t>
+            </a:r>
+          </a:p>
+        </p:txBody>
+      </p:sp>
+      <p:sp>
+        <p:nvSpPr>
+          <p:cNvPr id="7" name="Rectangle 6"/>
           <p:cNvSpPr/>
           <p:nvPr/>
         </p:nvSpPr>
         <p:spPr>
           <a:xfrm>
-            <a:off x="822960" y="3657600"/>
-            <a:ext cx="82296" cy="1234440"/>
+            <a:off x="4407408" y="1234440"/>
+            <a:ext cx="82296" cy="4434840"/>
           </a:xfrm>
           <a:prstGeom prst="rect">
             <a:avLst/>
@@ -8749,24 +8399,24 @@
       </p:sp>
       <p:sp>
         <p:nvSpPr>
-          <p:cNvPr id="10" name="Rounded Rectangle 9"/>
+          <p:cNvPr id="8" name="Rounded Rectangle 7"/>
           <p:cNvSpPr/>
           <p:nvPr/>
         </p:nvSpPr>
         <p:spPr>
           <a:xfrm>
-            <a:off x="6400800" y="3657600"/>
-            <a:ext cx="4937760" cy="1234440"/>
+            <a:off x="8220456" y="1234440"/>
+            <a:ext cx="3383280" cy="4434840"/>
           </a:xfrm>
           <a:prstGeom prst="roundRect">
             <a:avLst/>
           </a:prstGeom>
           <a:solidFill>
-            <a:srgbClr val="E9F4FF"/>
+            <a:srgbClr val="F7EFFF"/>
           </a:solidFill>
           <a:ln w="13970">
             <a:solidFill>
-              <a:srgbClr val="266EB2"/>
+              <a:srgbClr val="7852B0"/>
             </a:solidFill>
           </a:ln>
         </p:spPr>
@@ -8789,7 +8439,7 @@
           <a:lstStyle/>
           <a:p>
             <a:pPr algn="ctr">
-              <a:defRPr sz="1600" b="1">
+              <a:defRPr sz="1700" b="1">
                 <a:solidFill>
                   <a:srgbClr val="232D37"/>
                 </a:solidFill>
@@ -8797,7 +8447,7 @@
               </a:defRPr>
             </a:pPr>
             <a:r>
-              <a:t>Documentation guarantee</a:t>
+              <a:t>Display and export</a:t>
             </a:r>
           </a:p>
           <a:p>
@@ -8813,27 +8463,43 @@
               </a:defRPr>
             </a:pPr>
             <a:r>
-              <a:t>The reference page formats the expression; projection.js remains the authoritative implementation of the behavior.</a:t>
-            </a:r>
-          </a:p>
-        </p:txBody>
-      </p:sp>
-      <p:sp>
-        <p:nvSpPr>
-          <p:cNvPr id="11" name="Rectangle 10"/>
+              <a:t>Charts and Excel are peer consumers of the same projection.</a:t>
+            </a:r>
+          </a:p>
+          <a:p>
+            <a:pPr>
+              <a:spcBef>
+                <a:spcPts val="300"/>
+              </a:spcBef>
+              <a:defRPr sz="1200">
+                <a:solidFill>
+                  <a:srgbClr val="232D37"/>
+                </a:solidFill>
+                <a:latin typeface="Aptos"/>
+              </a:defRPr>
+            </a:pPr>
+            <a:r>
+              <a:t>Excel adds account-specific views; charts preserve interactive visual analysis.</a:t>
+            </a:r>
+          </a:p>
+        </p:txBody>
+      </p:sp>
+      <p:sp>
+        <p:nvSpPr>
+          <p:cNvPr id="9" name="Rectangle 8"/>
           <p:cNvSpPr/>
           <p:nvPr/>
         </p:nvSpPr>
         <p:spPr>
           <a:xfrm>
-            <a:off x="6400800" y="3657600"/>
-            <a:ext cx="82296" cy="1234440"/>
+            <a:off x="8220456" y="1234440"/>
+            <a:ext cx="82296" cy="4434840"/>
           </a:xfrm>
           <a:prstGeom prst="rect">
             <a:avLst/>
           </a:prstGeom>
           <a:solidFill>
-            <a:srgbClr val="266EB2"/>
+            <a:srgbClr val="7852B0"/>
           </a:solidFill>
           <a:ln>
             <a:noFill/>
@@ -8863,7 +8529,7 @@
       </p:sp>
       <p:sp>
         <p:nvSpPr>
-          <p:cNvPr id="12" name="Rectangle 11"/>
+          <p:cNvPr id="10" name="Rectangle 9"/>
           <p:cNvSpPr/>
           <p:nvPr/>
         </p:nvSpPr>
@@ -8906,7 +8572,7 @@
       </p:sp>
       <p:sp>
         <p:nvSpPr>
-          <p:cNvPr id="13" name="TextBox 12"/>
+          <p:cNvPr id="11" name="TextBox 10"/>
           <p:cNvSpPr txBox="1"/>
           <p:nvPr/>
         </p:nvSpPr>
@@ -8935,7 +8601,7 @@
               </a:defRPr>
             </a:pPr>
             <a:r>
-              <a:t>Retirement Income Planner • Architecture overview • Basis-percentage and formula-page update</a:t>
+              <a:t>Retirement Income Planner • Architecture overview • Account-sheet Excel export update</a:t>
             </a:r>
           </a:p>
         </p:txBody>
@@ -8997,7 +8663,7 @@
               </a:defRPr>
             </a:pPr>
             <a:r>
-              <a:t>Inputs, outputs, and export remain aligned</a:t>
+              <a:t>Reference and implementation context</a:t>
             </a:r>
           </a:p>
         </p:txBody>
@@ -9033,7 +8699,7 @@
               </a:defRPr>
             </a:pPr>
             <a:r>
-              <a:t>The field rename does not alter the core data-flow boundary: input state → projection rows → presentation and workbook.</a:t>
+              <a:t>The export enhancement sits beside existing pages and charts in the plain-script browser application.</a:t>
             </a:r>
           </a:p>
         </p:txBody>
@@ -9046,18 +8712,18 @@
         </p:nvSpPr>
         <p:spPr>
           <a:xfrm>
-            <a:off x="548640" y="1188720"/>
-            <a:ext cx="2606040" cy="4526280"/>
+            <a:off x="594360" y="1188720"/>
+            <a:ext cx="3200400" cy="4526280"/>
           </a:xfrm>
           <a:prstGeom prst="roundRect">
             <a:avLst/>
           </a:prstGeom>
           <a:solidFill>
-            <a:srgbClr val="E9F4FF"/>
+            <a:srgbClr val="F8FAFC"/>
           </a:solidFill>
           <a:ln w="13970">
             <a:solidFill>
-              <a:srgbClr val="266EB2"/>
+              <a:srgbClr val="0F2647"/>
             </a:solidFill>
           </a:ln>
         </p:spPr>
@@ -9088,7 +8754,7 @@
               </a:defRPr>
             </a:pPr>
             <a:r>
-              <a:t>Brokerage input</a:t>
+              <a:t>Topbar actions</a:t>
             </a:r>
           </a:p>
           <a:p>
@@ -9104,7 +8770,7 @@
               </a:defRPr>
             </a:pPr>
             <a:r>
-              <a:t>basisPct % field</a:t>
+              <a:t>Save to file</a:t>
             </a:r>
           </a:p>
           <a:p>
@@ -9120,7 +8786,7 @@
               </a:defRPr>
             </a:pPr>
             <a:r>
-              <a:t>0–100, blank = null</a:t>
+              <a:t>Load file ▾</a:t>
             </a:r>
           </a:p>
           <a:p>
@@ -9136,7 +8802,7 @@
               </a:defRPr>
             </a:pPr>
             <a:r>
-              <a:t>Enable / Hide independent</a:t>
+              <a:t>Reset to defaults</a:t>
             </a:r>
           </a:p>
           <a:p>
@@ -9152,7 +8818,55 @@
               </a:defRPr>
             </a:pPr>
             <a:r>
-              <a:t>IRMAA option remains within Expenses</a:t>
+              <a:t>Formulas</a:t>
+            </a:r>
+          </a:p>
+          <a:p>
+            <a:pPr>
+              <a:spcBef>
+                <a:spcPts val="300"/>
+              </a:spcBef>
+              <a:defRPr sz="1200">
+                <a:solidFill>
+                  <a:srgbClr val="232D37"/>
+                </a:solidFill>
+                <a:latin typeface="Aptos"/>
+              </a:defRPr>
+            </a:pPr>
+            <a:r>
+              <a:t>Notes</a:t>
+            </a:r>
+          </a:p>
+          <a:p>
+            <a:pPr>
+              <a:spcBef>
+                <a:spcPts val="300"/>
+              </a:spcBef>
+              <a:defRPr sz="1200">
+                <a:solidFill>
+                  <a:srgbClr val="232D37"/>
+                </a:solidFill>
+                <a:latin typeface="Aptos"/>
+              </a:defRPr>
+            </a:pPr>
+            <a:r>
+              <a:t>Export to Excel</a:t>
+            </a:r>
+          </a:p>
+          <a:p>
+            <a:pPr>
+              <a:spcBef>
+                <a:spcPts val="300"/>
+              </a:spcBef>
+              <a:defRPr sz="1200">
+                <a:solidFill>
+                  <a:srgbClr val="232D37"/>
+                </a:solidFill>
+                <a:latin typeface="Aptos"/>
+              </a:defRPr>
+            </a:pPr>
+            <a:r>
+              <a:t>show_details toggle</a:t>
             </a:r>
           </a:p>
         </p:txBody>
@@ -9165,14 +8879,14 @@
         </p:nvSpPr>
         <p:spPr>
           <a:xfrm>
-            <a:off x="548640" y="1188720"/>
+            <a:off x="594360" y="1188720"/>
             <a:ext cx="82296" cy="4526280"/>
           </a:xfrm>
           <a:prstGeom prst="rect">
             <a:avLst/>
           </a:prstGeom>
           <a:solidFill>
-            <a:srgbClr val="266EB2"/>
+            <a:srgbClr val="0F2647"/>
           </a:solidFill>
           <a:ln>
             <a:noFill/>
@@ -9208,154 +8922,8 @@
         </p:nvSpPr>
         <p:spPr>
           <a:xfrm>
-            <a:off x="3520440" y="1188720"/>
-            <a:ext cx="2606040" cy="4526280"/>
-          </a:xfrm>
-          <a:prstGeom prst="roundRect">
-            <a:avLst/>
-          </a:prstGeom>
-          <a:solidFill>
-            <a:srgbClr val="EAF9F4"/>
-          </a:solidFill>
-          <a:ln w="13970">
-            <a:solidFill>
-              <a:srgbClr val="429761"/>
-            </a:solidFill>
-          </a:ln>
-        </p:spPr>
-        <p:style>
-          <a:lnRef idx="1">
-            <a:schemeClr val="accent1"/>
-          </a:lnRef>
-          <a:fillRef idx="3">
-            <a:schemeClr val="accent1"/>
-          </a:fillRef>
-          <a:effectRef idx="2">
-            <a:schemeClr val="accent1"/>
-          </a:effectRef>
-          <a:fontRef idx="minor">
-            <a:schemeClr val="lt1"/>
-          </a:fontRef>
-        </p:style>
-        <p:txBody>
-          <a:bodyPr rtlCol="0" anchor="ctr" lIns="182880" rIns="100584" tIns="91440"/>
-          <a:lstStyle/>
-          <a:p>
-            <a:pPr algn="ctr">
-              <a:defRPr sz="1700" b="1">
-                <a:solidFill>
-                  <a:srgbClr val="232D37"/>
-                </a:solidFill>
-                <a:latin typeface="Aptos Display"/>
-              </a:defRPr>
-            </a:pPr>
-            <a:r>
-              <a:t>State &amp; compute</a:t>
-            </a:r>
-          </a:p>
-          <a:p>
-            <a:pPr>
-              <a:spcBef>
-                <a:spcPts val="300"/>
-              </a:spcBef>
-              <a:defRPr sz="1200">
-                <a:solidFill>
-                  <a:srgbClr val="232D37"/>
-                </a:solidFill>
-                <a:latin typeface="Aptos"/>
-              </a:defRPr>
-            </a:pPr>
-            <a:r>
-              <a:t>hydrate migrates legacy data</a:t>
-            </a:r>
-          </a:p>
-          <a:p>
-            <a:pPr>
-              <a:spcBef>
-                <a:spcPts val="300"/>
-              </a:spcBef>
-              <a:defRPr sz="1200">
-                <a:solidFill>
-                  <a:srgbClr val="232D37"/>
-                </a:solidFill>
-                <a:latin typeface="Aptos"/>
-              </a:defRPr>
-            </a:pPr>
-            <a:r>
-              <a:t>projection converts % to dollar basis</a:t>
-            </a:r>
-          </a:p>
-          <a:p>
-            <a:pPr>
-              <a:spcBef>
-                <a:spcPts val="300"/>
-              </a:spcBef>
-              <a:defRPr sz="1200">
-                <a:solidFill>
-                  <a:srgbClr val="232D37"/>
-                </a:solidFill>
-                <a:latin typeface="Aptos"/>
-              </a:defRPr>
-            </a:pPr>
-            <a:r>
-              <a:t>Annual rows include basis, gains, waterfall, IRMAA</a:t>
-            </a:r>
-          </a:p>
-        </p:txBody>
-      </p:sp>
-      <p:sp>
-        <p:nvSpPr>
-          <p:cNvPr id="7" name="Rectangle 6"/>
-          <p:cNvSpPr/>
-          <p:nvPr/>
-        </p:nvSpPr>
-        <p:spPr>
-          <a:xfrm>
-            <a:off x="3520440" y="1188720"/>
-            <a:ext cx="82296" cy="4526280"/>
-          </a:xfrm>
-          <a:prstGeom prst="rect">
-            <a:avLst/>
-          </a:prstGeom>
-          <a:solidFill>
-            <a:srgbClr val="429761"/>
-          </a:solidFill>
-          <a:ln>
-            <a:noFill/>
-          </a:ln>
-        </p:spPr>
-        <p:style>
-          <a:lnRef idx="1">
-            <a:schemeClr val="accent1"/>
-          </a:lnRef>
-          <a:fillRef idx="3">
-            <a:schemeClr val="accent1"/>
-          </a:fillRef>
-          <a:effectRef idx="2">
-            <a:schemeClr val="accent1"/>
-          </a:effectRef>
-          <a:fontRef idx="minor">
-            <a:schemeClr val="lt1"/>
-          </a:fontRef>
-        </p:style>
-        <p:txBody>
-          <a:bodyPr rtlCol="0" anchor="ctr"/>
-          <a:lstStyle/>
-          <a:p>
-            <a:pPr algn="ctr"/>
-          </a:p>
-        </p:txBody>
-      </p:sp>
-      <p:sp>
-        <p:nvSpPr>
-          <p:cNvPr id="8" name="Rounded Rectangle 7"/>
-          <p:cNvSpPr/>
-          <p:nvPr/>
-        </p:nvSpPr>
-        <p:spPr>
-          <a:xfrm>
-            <a:off x="6492240" y="1188720"/>
-            <a:ext cx="2606040" cy="4526280"/>
+            <a:off x="4480560" y="1188720"/>
+            <a:ext cx="3200400" cy="4526280"/>
           </a:xfrm>
           <a:prstGeom prst="roundRect">
             <a:avLst/>
@@ -9396,7 +8964,7 @@
               </a:defRPr>
             </a:pPr>
             <a:r>
-              <a:t>Charts &amp; pages</a:t>
+              <a:t>Display utilities</a:t>
             </a:r>
           </a:p>
           <a:p>
@@ -9412,7 +8980,7 @@
               </a:defRPr>
             </a:pPr>
             <a:r>
-              <a:t>Asset chart uses projection basis/gain fields</a:t>
+              <a:t>Chart helpers and overlays</a:t>
             </a:r>
           </a:p>
           <a:p>
@@ -9428,7 +8996,7 @@
               </a:defRPr>
             </a:pPr>
             <a:r>
-              <a:t>Formulas page explains math</a:t>
+              <a:t>SS, income, taxable-SS, tax, and asset charts</a:t>
             </a:r>
           </a:p>
           <a:p>
@@ -9444,20 +9012,52 @@
               </a:defRPr>
             </a:pPr>
             <a:r>
-              <a:t>Notes remain externally authored Markdown</a:t>
-            </a:r>
-          </a:p>
-        </p:txBody>
-      </p:sp>
-      <p:sp>
-        <p:nvSpPr>
-          <p:cNvPr id="9" name="Rectangle 8"/>
+              <a:t>Formulas page</a:t>
+            </a:r>
+          </a:p>
+          <a:p>
+            <a:pPr>
+              <a:spcBef>
+                <a:spcPts val="300"/>
+              </a:spcBef>
+              <a:defRPr sz="1200">
+                <a:solidFill>
+                  <a:srgbClr val="232D37"/>
+                </a:solidFill>
+                <a:latin typeface="Aptos"/>
+              </a:defRPr>
+            </a:pPr>
+            <a:r>
+              <a:t>Notes page</a:t>
+            </a:r>
+          </a:p>
+          <a:p>
+            <a:pPr>
+              <a:spcBef>
+                <a:spcPts val="300"/>
+              </a:spcBef>
+              <a:defRPr sz="1200">
+                <a:solidFill>
+                  <a:srgbClr val="232D37"/>
+                </a:solidFill>
+                <a:latin typeface="Aptos"/>
+              </a:defRPr>
+            </a:pPr>
+            <a:r>
+              <a:t>excelExport.js</a:t>
+            </a:r>
+          </a:p>
+        </p:txBody>
+      </p:sp>
+      <p:sp>
+        <p:nvSpPr>
+          <p:cNvPr id="7" name="Rectangle 6"/>
           <p:cNvSpPr/>
           <p:nvPr/>
         </p:nvSpPr>
         <p:spPr>
           <a:xfrm>
-            <a:off x="6492240" y="1188720"/>
+            <a:off x="4480560" y="1188720"/>
             <a:ext cx="82296" cy="4526280"/>
           </a:xfrm>
           <a:prstGeom prst="rect">
@@ -9494,14 +9094,14 @@
       </p:sp>
       <p:sp>
         <p:nvSpPr>
-          <p:cNvPr id="10" name="Rounded Rectangle 9"/>
+          <p:cNvPr id="8" name="Rounded Rectangle 7"/>
           <p:cNvSpPr/>
           <p:nvPr/>
         </p:nvSpPr>
         <p:spPr>
           <a:xfrm>
-            <a:off x="9464040" y="1188720"/>
-            <a:ext cx="2148840" cy="4526280"/>
+            <a:off x="8366760" y="1188720"/>
+            <a:ext cx="3200400" cy="4526280"/>
           </a:xfrm>
           <a:prstGeom prst="roundRect">
             <a:avLst/>
@@ -9542,7 +9142,7 @@
               </a:defRPr>
             </a:pPr>
             <a:r>
-              <a:t>Excel</a:t>
+              <a:t>Browser dependencies</a:t>
             </a:r>
           </a:p>
           <a:p>
@@ -9558,7 +9158,7 @@
               </a:defRPr>
             </a:pPr>
             <a:r>
-              <a:t>Reads lastProjection</a:t>
+              <a:t>Chart.js for visualization</a:t>
             </a:r>
           </a:p>
           <a:p>
@@ -9574,7 +9174,7 @@
               </a:defRPr>
             </a:pPr>
             <a:r>
-              <a:t>Projection-by-year sheet</a:t>
+              <a:t>Pinned SheetJS CDN script for XLSX export</a:t>
             </a:r>
           </a:p>
           <a:p>
@@ -9590,36 +9190,20 @@
               </a:defRPr>
             </a:pPr>
             <a:r>
-              <a:t>Brokerage-detail sheet</a:t>
-            </a:r>
-          </a:p>
-          <a:p>
-            <a:pPr>
-              <a:spcBef>
-                <a:spcPts val="300"/>
-              </a:spcBef>
-              <a:defRPr sz="1200">
-                <a:solidFill>
-                  <a:srgbClr val="232D37"/>
-                </a:solidFill>
-                <a:latin typeface="Aptos"/>
-              </a:defRPr>
-            </a:pPr>
-            <a:r>
-              <a:t>Never mutates state</a:t>
-            </a:r>
-          </a:p>
-        </p:txBody>
-      </p:sp>
-      <p:sp>
-        <p:nvSpPr>
-          <p:cNvPr id="11" name="Rectangle 10"/>
+              <a:t>No build step: plain global scripts in dependency order</a:t>
+            </a:r>
+          </a:p>
+        </p:txBody>
+      </p:sp>
+      <p:sp>
+        <p:nvSpPr>
+          <p:cNvPr id="9" name="Rectangle 8"/>
           <p:cNvSpPr/>
           <p:nvPr/>
         </p:nvSpPr>
         <p:spPr>
           <a:xfrm>
-            <a:off x="9464040" y="1188720"/>
+            <a:off x="8366760" y="1188720"/>
             <a:ext cx="82296" cy="4526280"/>
           </a:xfrm>
           <a:prstGeom prst="rect">
@@ -9654,114 +9238,9 @@
           </a:p>
         </p:txBody>
       </p:sp>
-      <p:cxnSp>
-        <p:nvCxnSpPr>
-          <p:cNvPr id="12" name="Connector 11"/>
-          <p:cNvCxnSpPr/>
-          <p:nvPr/>
-        </p:nvCxnSpPr>
-        <p:spPr>
-          <a:xfrm>
-            <a:off x="3200400" y="3383280"/>
-            <a:ext cx="256032" cy="0"/>
-          </a:xfrm>
-          <a:prstGeom prst="line">
-            <a:avLst/>
-          </a:prstGeom>
-          <a:ln w="22860">
-            <a:solidFill>
-              <a:srgbClr val="266EB2"/>
-            </a:solidFill>
-          </a:ln>
-        </p:spPr>
-        <p:style>
-          <a:lnRef idx="2">
-            <a:schemeClr val="accent1"/>
-          </a:lnRef>
-          <a:fillRef idx="0">
-            <a:schemeClr val="accent1"/>
-          </a:fillRef>
-          <a:effectRef idx="1">
-            <a:schemeClr val="accent1"/>
-          </a:effectRef>
-          <a:fontRef idx="minor">
-            <a:schemeClr val="tx1"/>
-          </a:fontRef>
-        </p:style>
-      </p:cxnSp>
-      <p:cxnSp>
-        <p:nvCxnSpPr>
-          <p:cNvPr id="13" name="Connector 12"/>
-          <p:cNvCxnSpPr/>
-          <p:nvPr/>
-        </p:nvCxnSpPr>
-        <p:spPr>
-          <a:xfrm>
-            <a:off x="6172200" y="3383280"/>
-            <a:ext cx="256032" cy="0"/>
-          </a:xfrm>
-          <a:prstGeom prst="line">
-            <a:avLst/>
-          </a:prstGeom>
-          <a:ln w="22860">
-            <a:solidFill>
-              <a:srgbClr val="429761"/>
-            </a:solidFill>
-          </a:ln>
-        </p:spPr>
-        <p:style>
-          <a:lnRef idx="2">
-            <a:schemeClr val="accent1"/>
-          </a:lnRef>
-          <a:fillRef idx="0">
-            <a:schemeClr val="accent1"/>
-          </a:fillRef>
-          <a:effectRef idx="1">
-            <a:schemeClr val="accent1"/>
-          </a:effectRef>
-          <a:fontRef idx="minor">
-            <a:schemeClr val="tx1"/>
-          </a:fontRef>
-        </p:style>
-      </p:cxnSp>
-      <p:cxnSp>
-        <p:nvCxnSpPr>
-          <p:cNvPr id="14" name="Connector 13"/>
-          <p:cNvCxnSpPr/>
-          <p:nvPr/>
-        </p:nvCxnSpPr>
-        <p:spPr>
-          <a:xfrm>
-            <a:off x="9144000" y="3383280"/>
-            <a:ext cx="256032" cy="0"/>
-          </a:xfrm>
-          <a:prstGeom prst="line">
-            <a:avLst/>
-          </a:prstGeom>
-          <a:ln w="22860">
-            <a:solidFill>
-              <a:srgbClr val="7852B0"/>
-            </a:solidFill>
-          </a:ln>
-        </p:spPr>
-        <p:style>
-          <a:lnRef idx="2">
-            <a:schemeClr val="accent1"/>
-          </a:lnRef>
-          <a:fillRef idx="0">
-            <a:schemeClr val="accent1"/>
-          </a:fillRef>
-          <a:effectRef idx="1">
-            <a:schemeClr val="accent1"/>
-          </a:effectRef>
-          <a:fontRef idx="minor">
-            <a:schemeClr val="tx1"/>
-          </a:fontRef>
-        </p:style>
-      </p:cxnSp>
-      <p:sp>
-        <p:nvSpPr>
-          <p:cNvPr id="15" name="Rectangle 14"/>
+      <p:sp>
+        <p:nvSpPr>
+          <p:cNvPr id="10" name="Rectangle 9"/>
           <p:cNvSpPr/>
           <p:nvPr/>
         </p:nvSpPr>
@@ -9804,7 +9283,7 @@
       </p:sp>
       <p:sp>
         <p:nvSpPr>
-          <p:cNvPr id="16" name="TextBox 15"/>
+          <p:cNvPr id="11" name="TextBox 10"/>
           <p:cNvSpPr txBox="1"/>
           <p:nvPr/>
         </p:nvSpPr>
@@ -9833,7 +9312,7 @@
               </a:defRPr>
             </a:pPr>
             <a:r>
-              <a:t>Retirement Income Planner • Architecture overview • Basis-percentage and formula-page update</a:t>
+              <a:t>Retirement Income Planner • Architecture overview • Account-sheet Excel export update</a:t>
             </a:r>
           </a:p>
         </p:txBody>
@@ -9895,7 +9374,7 @@
               </a:defRPr>
             </a:pPr>
             <a:r>
-              <a:t>Guardrails for future state-schema changes</a:t>
+              <a:t>Export-design guardrails</a:t>
             </a:r>
           </a:p>
         </p:txBody>
@@ -9931,7 +9410,7 @@
               </a:defRPr>
             </a:pPr>
             <a:r>
-              <a:t>Use the same migration and contract discipline whenever an input’s units, shape, or meaning changes.</a:t>
+              <a:t>Future export changes should remain plan-aware, read-only, and projection-driven.</a:t>
             </a:r>
           </a:p>
         </p:txBody>
@@ -9945,6 +9424,298 @@
         <p:spPr>
           <a:xfrm>
             <a:off x="640080" y="1234440"/>
+            <a:ext cx="3383280" cy="4434840"/>
+          </a:xfrm>
+          <a:prstGeom prst="roundRect">
+            <a:avLst/>
+          </a:prstGeom>
+          <a:solidFill>
+            <a:srgbClr val="EAF9F4"/>
+          </a:solidFill>
+          <a:ln w="13970">
+            <a:solidFill>
+              <a:srgbClr val="429761"/>
+            </a:solidFill>
+          </a:ln>
+        </p:spPr>
+        <p:style>
+          <a:lnRef idx="1">
+            <a:schemeClr val="accent1"/>
+          </a:lnRef>
+          <a:fillRef idx="3">
+            <a:schemeClr val="accent1"/>
+          </a:fillRef>
+          <a:effectRef idx="2">
+            <a:schemeClr val="accent1"/>
+          </a:effectRef>
+          <a:fontRef idx="minor">
+            <a:schemeClr val="lt1"/>
+          </a:fontRef>
+        </p:style>
+        <p:txBody>
+          <a:bodyPr rtlCol="0" anchor="ctr" lIns="182880" rIns="100584" tIns="91440"/>
+          <a:lstStyle/>
+          <a:p>
+            <a:pPr algn="ctr">
+              <a:defRPr sz="1700" b="1">
+                <a:solidFill>
+                  <a:srgbClr val="232D37"/>
+                </a:solidFill>
+                <a:latin typeface="Aptos Display"/>
+              </a:defRPr>
+            </a:pPr>
+            <a:r>
+              <a:t>Plan-aware</a:t>
+            </a:r>
+          </a:p>
+          <a:p>
+            <a:pPr>
+              <a:spcBef>
+                <a:spcPts val="300"/>
+              </a:spcBef>
+              <a:defRPr sz="1200">
+                <a:solidFill>
+                  <a:srgbClr val="232D37"/>
+                </a:solidFill>
+                <a:latin typeface="Aptos"/>
+              </a:defRPr>
+            </a:pPr>
+            <a:r>
+              <a:t>Derive sheets from enabled accounts only.</a:t>
+            </a:r>
+          </a:p>
+          <a:p>
+            <a:pPr>
+              <a:spcBef>
+                <a:spcPts val="300"/>
+              </a:spcBef>
+              <a:defRPr sz="1200">
+                <a:solidFill>
+                  <a:srgbClr val="232D37"/>
+                </a:solidFill>
+                <a:latin typeface="Aptos"/>
+              </a:defRPr>
+            </a:pPr>
+            <a:r>
+              <a:t>Maintain deterministic person/account order.</a:t>
+            </a:r>
+          </a:p>
+          <a:p>
+            <a:pPr>
+              <a:spcBef>
+                <a:spcPts val="300"/>
+              </a:spcBef>
+              <a:defRPr sz="1200">
+                <a:solidFill>
+                  <a:srgbClr val="232D37"/>
+                </a:solidFill>
+                <a:latin typeface="Aptos"/>
+              </a:defRPr>
+            </a:pPr>
+            <a:r>
+              <a:t>Skip inactive accounts rather than exporting misleading empty worksheets.</a:t>
+            </a:r>
+          </a:p>
+        </p:txBody>
+      </p:sp>
+      <p:sp>
+        <p:nvSpPr>
+          <p:cNvPr id="5" name="Rectangle 4"/>
+          <p:cNvSpPr/>
+          <p:nvPr/>
+        </p:nvSpPr>
+        <p:spPr>
+          <a:xfrm>
+            <a:off x="640080" y="1234440"/>
+            <a:ext cx="82296" cy="4434840"/>
+          </a:xfrm>
+          <a:prstGeom prst="rect">
+            <a:avLst/>
+          </a:prstGeom>
+          <a:solidFill>
+            <a:srgbClr val="429761"/>
+          </a:solidFill>
+          <a:ln>
+            <a:noFill/>
+          </a:ln>
+        </p:spPr>
+        <p:style>
+          <a:lnRef idx="1">
+            <a:schemeClr val="accent1"/>
+          </a:lnRef>
+          <a:fillRef idx="3">
+            <a:schemeClr val="accent1"/>
+          </a:fillRef>
+          <a:effectRef idx="2">
+            <a:schemeClr val="accent1"/>
+          </a:effectRef>
+          <a:fontRef idx="minor">
+            <a:schemeClr val="lt1"/>
+          </a:fontRef>
+        </p:style>
+        <p:txBody>
+          <a:bodyPr rtlCol="0" anchor="ctr"/>
+          <a:lstStyle/>
+          <a:p>
+            <a:pPr algn="ctr"/>
+          </a:p>
+        </p:txBody>
+      </p:sp>
+      <p:sp>
+        <p:nvSpPr>
+          <p:cNvPr id="6" name="Rounded Rectangle 5"/>
+          <p:cNvSpPr/>
+          <p:nvPr/>
+        </p:nvSpPr>
+        <p:spPr>
+          <a:xfrm>
+            <a:off x="4407408" y="1234440"/>
+            <a:ext cx="3383280" cy="4434840"/>
+          </a:xfrm>
+          <a:prstGeom prst="roundRect">
+            <a:avLst/>
+          </a:prstGeom>
+          <a:solidFill>
+            <a:srgbClr val="FFF6E8"/>
+          </a:solidFill>
+          <a:ln w="13970">
+            <a:solidFill>
+              <a:srgbClr val="E5892A"/>
+            </a:solidFill>
+          </a:ln>
+        </p:spPr>
+        <p:style>
+          <a:lnRef idx="1">
+            <a:schemeClr val="accent1"/>
+          </a:lnRef>
+          <a:fillRef idx="3">
+            <a:schemeClr val="accent1"/>
+          </a:fillRef>
+          <a:effectRef idx="2">
+            <a:schemeClr val="accent1"/>
+          </a:effectRef>
+          <a:fontRef idx="minor">
+            <a:schemeClr val="lt1"/>
+          </a:fontRef>
+        </p:style>
+        <p:txBody>
+          <a:bodyPr rtlCol="0" anchor="ctr" lIns="182880" rIns="100584" tIns="91440"/>
+          <a:lstStyle/>
+          <a:p>
+            <a:pPr algn="ctr">
+              <a:defRPr sz="1700" b="1">
+                <a:solidFill>
+                  <a:srgbClr val="232D37"/>
+                </a:solidFill>
+                <a:latin typeface="Aptos Display"/>
+              </a:defRPr>
+            </a:pPr>
+            <a:r>
+              <a:t>Workbook-safe</a:t>
+            </a:r>
+          </a:p>
+          <a:p>
+            <a:pPr>
+              <a:spcBef>
+                <a:spcPts val="300"/>
+              </a:spcBef>
+              <a:defRPr sz="1200">
+                <a:solidFill>
+                  <a:srgbClr val="232D37"/>
+                </a:solidFill>
+                <a:latin typeface="Aptos"/>
+              </a:defRPr>
+            </a:pPr>
+            <a:r>
+              <a:t>Sanitize, trim, and de-duplicate worksheet names.</a:t>
+            </a:r>
+          </a:p>
+          <a:p>
+            <a:pPr>
+              <a:spcBef>
+                <a:spcPts val="300"/>
+              </a:spcBef>
+              <a:defRPr sz="1200">
+                <a:solidFill>
+                  <a:srgbClr val="232D37"/>
+                </a:solidFill>
+                <a:latin typeface="Aptos"/>
+              </a:defRPr>
+            </a:pPr>
+            <a:r>
+              <a:t>Respect the 31-character Excel sheet-name limit.</a:t>
+            </a:r>
+          </a:p>
+          <a:p>
+            <a:pPr>
+              <a:spcBef>
+                <a:spcPts val="300"/>
+              </a:spcBef>
+              <a:defRPr sz="1200">
+                <a:solidFill>
+                  <a:srgbClr val="232D37"/>
+                </a:solidFill>
+                <a:latin typeface="Aptos"/>
+              </a:defRPr>
+            </a:pPr>
+            <a:r>
+              <a:t>Protect against unavailable libraries and empty projections.</a:t>
+            </a:r>
+          </a:p>
+        </p:txBody>
+      </p:sp>
+      <p:sp>
+        <p:nvSpPr>
+          <p:cNvPr id="7" name="Rectangle 6"/>
+          <p:cNvSpPr/>
+          <p:nvPr/>
+        </p:nvSpPr>
+        <p:spPr>
+          <a:xfrm>
+            <a:off x="4407408" y="1234440"/>
+            <a:ext cx="82296" cy="4434840"/>
+          </a:xfrm>
+          <a:prstGeom prst="rect">
+            <a:avLst/>
+          </a:prstGeom>
+          <a:solidFill>
+            <a:srgbClr val="E5892A"/>
+          </a:solidFill>
+          <a:ln>
+            <a:noFill/>
+          </a:ln>
+        </p:spPr>
+        <p:style>
+          <a:lnRef idx="1">
+            <a:schemeClr val="accent1"/>
+          </a:lnRef>
+          <a:fillRef idx="3">
+            <a:schemeClr val="accent1"/>
+          </a:fillRef>
+          <a:effectRef idx="2">
+            <a:schemeClr val="accent1"/>
+          </a:effectRef>
+          <a:fontRef idx="minor">
+            <a:schemeClr val="lt1"/>
+          </a:fontRef>
+        </p:style>
+        <p:txBody>
+          <a:bodyPr rtlCol="0" anchor="ctr"/>
+          <a:lstStyle/>
+          <a:p>
+            <a:pPr algn="ctr"/>
+          </a:p>
+        </p:txBody>
+      </p:sp>
+      <p:sp>
+        <p:nvSpPr>
+          <p:cNvPr id="8" name="Rounded Rectangle 7"/>
+          <p:cNvSpPr/>
+          <p:nvPr/>
+        </p:nvSpPr>
+        <p:spPr>
+          <a:xfrm>
+            <a:off x="8174736" y="1234440"/>
             <a:ext cx="3383280" cy="4434840"/>
           </a:xfrm>
           <a:prstGeom prst="roundRect">
@@ -9986,7 +9757,7 @@
               </a:defRPr>
             </a:pPr>
             <a:r>
-              <a:t>State first</a:t>
+              <a:t>Architecture-safe</a:t>
             </a:r>
           </a:p>
           <a:p>
@@ -10002,7 +9773,7 @@
               </a:defRPr>
             </a:pPr>
             <a:r>
-              <a:t>Define the new canonical field and default in state.js.</a:t>
+              <a:t>Read lastProjection only.</a:t>
             </a:r>
           </a:p>
           <a:p>
@@ -10018,7 +9789,7 @@
               </a:defRPr>
             </a:pPr>
             <a:r>
-              <a:t>Decide null semantics explicitly.</a:t>
+              <a:t>Never alter state or recompute financial results during export.</a:t>
             </a:r>
           </a:p>
           <a:p>
@@ -10034,20 +9805,20 @@
               </a:defRPr>
             </a:pPr>
             <a:r>
-              <a:t>Provide hydration migration for meaningful legacy values.</a:t>
-            </a:r>
-          </a:p>
-        </p:txBody>
-      </p:sp>
-      <p:sp>
-        <p:nvSpPr>
-          <p:cNvPr id="5" name="Rectangle 4"/>
+              <a:t>Add new exported fields only after they exist in the projection-row contract.</a:t>
+            </a:r>
+          </a:p>
+        </p:txBody>
+      </p:sp>
+      <p:sp>
+        <p:nvSpPr>
+          <p:cNvPr id="9" name="Rectangle 8"/>
           <p:cNvSpPr/>
           <p:nvPr/>
         </p:nvSpPr>
         <p:spPr>
           <a:xfrm>
-            <a:off x="640080" y="1234440"/>
+            <a:off x="8174736" y="1234440"/>
             <a:ext cx="82296" cy="4434840"/>
           </a:xfrm>
           <a:prstGeom prst="rect">
@@ -10084,298 +9855,6 @@
       </p:sp>
       <p:sp>
         <p:nvSpPr>
-          <p:cNvPr id="6" name="Rounded Rectangle 5"/>
-          <p:cNvSpPr/>
-          <p:nvPr/>
-        </p:nvSpPr>
-        <p:spPr>
-          <a:xfrm>
-            <a:off x="4407408" y="1234440"/>
-            <a:ext cx="3383280" cy="4434840"/>
-          </a:xfrm>
-          <a:prstGeom prst="roundRect">
-            <a:avLst/>
-          </a:prstGeom>
-          <a:solidFill>
-            <a:srgbClr val="EAF9F4"/>
-          </a:solidFill>
-          <a:ln w="13970">
-            <a:solidFill>
-              <a:srgbClr val="429761"/>
-            </a:solidFill>
-          </a:ln>
-        </p:spPr>
-        <p:style>
-          <a:lnRef idx="1">
-            <a:schemeClr val="accent1"/>
-          </a:lnRef>
-          <a:fillRef idx="3">
-            <a:schemeClr val="accent1"/>
-          </a:fillRef>
-          <a:effectRef idx="2">
-            <a:schemeClr val="accent1"/>
-          </a:effectRef>
-          <a:fontRef idx="minor">
-            <a:schemeClr val="lt1"/>
-          </a:fontRef>
-        </p:style>
-        <p:txBody>
-          <a:bodyPr rtlCol="0" anchor="ctr" lIns="182880" rIns="100584" tIns="91440"/>
-          <a:lstStyle/>
-          <a:p>
-            <a:pPr algn="ctr">
-              <a:defRPr sz="1700" b="1">
-                <a:solidFill>
-                  <a:srgbClr val="232D37"/>
-                </a:solidFill>
-                <a:latin typeface="Aptos Display"/>
-              </a:defRPr>
-            </a:pPr>
-            <a:r>
-              <a:t>Projection second</a:t>
-            </a:r>
-          </a:p>
-          <a:p>
-            <a:pPr>
-              <a:spcBef>
-                <a:spcPts val="300"/>
-              </a:spcBef>
-              <a:defRPr sz="1200">
-                <a:solidFill>
-                  <a:srgbClr val="232D37"/>
-                </a:solidFill>
-                <a:latin typeface="Aptos"/>
-              </a:defRPr>
-            </a:pPr>
-            <a:r>
-              <a:t>Convert input units at a defined modeling boundary.</a:t>
-            </a:r>
-          </a:p>
-          <a:p>
-            <a:pPr>
-              <a:spcBef>
-                <a:spcPts val="300"/>
-              </a:spcBef>
-              <a:defRPr sz="1200">
-                <a:solidFill>
-                  <a:srgbClr val="232D37"/>
-                </a:solidFill>
-                <a:latin typeface="Aptos"/>
-              </a:defRPr>
-            </a:pPr>
-            <a:r>
-              <a:t>Keep calculation logic in Compute.</a:t>
-            </a:r>
-          </a:p>
-          <a:p>
-            <a:pPr>
-              <a:spcBef>
-                <a:spcPts val="300"/>
-              </a:spcBef>
-              <a:defRPr sz="1200">
-                <a:solidFill>
-                  <a:srgbClr val="232D37"/>
-                </a:solidFill>
-                <a:latin typeface="Aptos"/>
-              </a:defRPr>
-            </a:pPr>
-            <a:r>
-              <a:t>Add derived fields to the projection-row contract.</a:t>
-            </a:r>
-          </a:p>
-        </p:txBody>
-      </p:sp>
-      <p:sp>
-        <p:nvSpPr>
-          <p:cNvPr id="7" name="Rectangle 6"/>
-          <p:cNvSpPr/>
-          <p:nvPr/>
-        </p:nvSpPr>
-        <p:spPr>
-          <a:xfrm>
-            <a:off x="4407408" y="1234440"/>
-            <a:ext cx="82296" cy="4434840"/>
-          </a:xfrm>
-          <a:prstGeom prst="rect">
-            <a:avLst/>
-          </a:prstGeom>
-          <a:solidFill>
-            <a:srgbClr val="429761"/>
-          </a:solidFill>
-          <a:ln>
-            <a:noFill/>
-          </a:ln>
-        </p:spPr>
-        <p:style>
-          <a:lnRef idx="1">
-            <a:schemeClr val="accent1"/>
-          </a:lnRef>
-          <a:fillRef idx="3">
-            <a:schemeClr val="accent1"/>
-          </a:fillRef>
-          <a:effectRef idx="2">
-            <a:schemeClr val="accent1"/>
-          </a:effectRef>
-          <a:fontRef idx="minor">
-            <a:schemeClr val="lt1"/>
-          </a:fontRef>
-        </p:style>
-        <p:txBody>
-          <a:bodyPr rtlCol="0" anchor="ctr"/>
-          <a:lstStyle/>
-          <a:p>
-            <a:pPr algn="ctr"/>
-          </a:p>
-        </p:txBody>
-      </p:sp>
-      <p:sp>
-        <p:nvSpPr>
-          <p:cNvPr id="8" name="Rounded Rectangle 7"/>
-          <p:cNvSpPr/>
-          <p:nvPr/>
-        </p:nvSpPr>
-        <p:spPr>
-          <a:xfrm>
-            <a:off x="8174736" y="1234440"/>
-            <a:ext cx="3383280" cy="4434840"/>
-          </a:xfrm>
-          <a:prstGeom prst="roundRect">
-            <a:avLst/>
-          </a:prstGeom>
-          <a:solidFill>
-            <a:srgbClr val="F7EFFF"/>
-          </a:solidFill>
-          <a:ln w="13970">
-            <a:solidFill>
-              <a:srgbClr val="7852B0"/>
-            </a:solidFill>
-          </a:ln>
-        </p:spPr>
-        <p:style>
-          <a:lnRef idx="1">
-            <a:schemeClr val="accent1"/>
-          </a:lnRef>
-          <a:fillRef idx="3">
-            <a:schemeClr val="accent1"/>
-          </a:fillRef>
-          <a:effectRef idx="2">
-            <a:schemeClr val="accent1"/>
-          </a:effectRef>
-          <a:fontRef idx="minor">
-            <a:schemeClr val="lt1"/>
-          </a:fontRef>
-        </p:style>
-        <p:txBody>
-          <a:bodyPr rtlCol="0" anchor="ctr" lIns="182880" rIns="100584" tIns="91440"/>
-          <a:lstStyle/>
-          <a:p>
-            <a:pPr algn="ctr">
-              <a:defRPr sz="1700" b="1">
-                <a:solidFill>
-                  <a:srgbClr val="232D37"/>
-                </a:solidFill>
-                <a:latin typeface="Aptos Display"/>
-              </a:defRPr>
-            </a:pPr>
-            <a:r>
-              <a:t>Presentation last</a:t>
-            </a:r>
-          </a:p>
-          <a:p>
-            <a:pPr>
-              <a:spcBef>
-                <a:spcPts val="300"/>
-              </a:spcBef>
-              <a:defRPr sz="1200">
-                <a:solidFill>
-                  <a:srgbClr val="232D37"/>
-                </a:solidFill>
-                <a:latin typeface="Aptos"/>
-              </a:defRPr>
-            </a:pPr>
-            <a:r>
-              <a:t>Render only projection fields.</a:t>
-            </a:r>
-          </a:p>
-          <a:p>
-            <a:pPr>
-              <a:spcBef>
-                <a:spcPts val="300"/>
-              </a:spcBef>
-              <a:defRPr sz="1200">
-                <a:solidFill>
-                  <a:srgbClr val="232D37"/>
-                </a:solidFill>
-                <a:latin typeface="Aptos"/>
-              </a:defRPr>
-            </a:pPr>
-            <a:r>
-              <a:t>Update Formula prose when math changes.</a:t>
-            </a:r>
-          </a:p>
-          <a:p>
-            <a:pPr>
-              <a:spcBef>
-                <a:spcPts val="300"/>
-              </a:spcBef>
-              <a:defRPr sz="1200">
-                <a:solidFill>
-                  <a:srgbClr val="232D37"/>
-                </a:solidFill>
-                <a:latin typeface="Aptos"/>
-              </a:defRPr>
-            </a:pPr>
-            <a:r>
-              <a:t>Keep exports read-only consumers of the current projection.</a:t>
-            </a:r>
-          </a:p>
-        </p:txBody>
-      </p:sp>
-      <p:sp>
-        <p:nvSpPr>
-          <p:cNvPr id="9" name="Rectangle 8"/>
-          <p:cNvSpPr/>
-          <p:nvPr/>
-        </p:nvSpPr>
-        <p:spPr>
-          <a:xfrm>
-            <a:off x="8174736" y="1234440"/>
-            <a:ext cx="82296" cy="4434840"/>
-          </a:xfrm>
-          <a:prstGeom prst="rect">
-            <a:avLst/>
-          </a:prstGeom>
-          <a:solidFill>
-            <a:srgbClr val="7852B0"/>
-          </a:solidFill>
-          <a:ln>
-            <a:noFill/>
-          </a:ln>
-        </p:spPr>
-        <p:style>
-          <a:lnRef idx="1">
-            <a:schemeClr val="accent1"/>
-          </a:lnRef>
-          <a:fillRef idx="3">
-            <a:schemeClr val="accent1"/>
-          </a:fillRef>
-          <a:effectRef idx="2">
-            <a:schemeClr val="accent1"/>
-          </a:effectRef>
-          <a:fontRef idx="minor">
-            <a:schemeClr val="lt1"/>
-          </a:fontRef>
-        </p:style>
-        <p:txBody>
-          <a:bodyPr rtlCol="0" anchor="ctr"/>
-          <a:lstStyle/>
-          <a:p>
-            <a:pPr algn="ctr"/>
-          </a:p>
-        </p:txBody>
-      </p:sp>
-      <p:sp>
-        <p:nvSpPr>
           <p:cNvPr id="10" name="Rectangle 9"/>
           <p:cNvSpPr/>
           <p:nvPr/>
@@ -10448,7 +9927,7 @@
               </a:defRPr>
             </a:pPr>
             <a:r>
-              <a:t>Retirement Income Planner • Architecture overview • Basis-percentage and formula-page update</a:t>
+              <a:t>Retirement Income Planner • Architecture overview • Account-sheet Excel export update</a:t>
             </a:r>
           </a:p>
         </p:txBody>

--- a/docs/retirement_income_planner_architecture.pptx
+++ b/docs/retirement_income_planner_architecture.pptx
@@ -14,6 +14,8 @@
     <p:sldId id="262" r:id="rId13"/>
     <p:sldId id="263" r:id="rId14"/>
     <p:sldId id="264" r:id="rId15"/>
+    <p:sldId id="265" r:id="rId16"/>
+    <p:sldId id="266" r:id="rId17"/>
   </p:sldIdLst>
   <p:sldSz cx="12191695" cy="6858000" type="screen4x3"/>
   <p:notesSz cx="6858000" cy="9144000"/>
@@ -3214,7 +3216,7 @@
               </a:defRPr>
             </a:pPr>
             <a:r>
-              <a:t>Updated architecture: a plan-shaped Excel workbook with one projection sheet and dynamic account sheets</a:t>
+              <a:t>Updated architecture: household expense funding, long-term care, AUM fees, stretch IRAs, regression tests, and plan-aware chat</a:t>
             </a:r>
           </a:p>
         </p:txBody>
@@ -3285,7 +3287,7 @@
               </a:defRPr>
             </a:pPr>
             <a:r>
-              <a:t>Controls, plans, income sources</a:t>
+              <a:t>Plan assumptions, cards, controls</a:t>
             </a:r>
           </a:p>
           <a:p>
@@ -3415,7 +3417,7 @@
               </a:defRPr>
             </a:pPr>
             <a:r>
-              <a:t>Annual projection</a:t>
+              <a:t>Annual projection + tax/LTCG solver</a:t>
             </a:r>
           </a:p>
           <a:p>
@@ -3431,7 +3433,7 @@
               </a:defRPr>
             </a:pPr>
             <a:r>
-              <a:t>Single source of derived facts</a:t>
+              <a:t>Derived financial source of truth</a:t>
             </a:r>
           </a:p>
         </p:txBody>
@@ -3529,7 +3531,7 @@
               </a:defRPr>
             </a:pPr>
             <a:r>
-              <a:t>Display &amp; export</a:t>
+              <a:t>Display &amp; services</a:t>
             </a:r>
           </a:p>
           <a:p>
@@ -3545,7 +3547,7 @@
               </a:defRPr>
             </a:pPr>
             <a:r>
-              <a:t>Charts, reference pages, XLSX</a:t>
+              <a:t>Charts, export, formulas, notes, chat</a:t>
             </a:r>
           </a:p>
           <a:p>
@@ -3801,7 +3803,7 @@
               </a:defRPr>
             </a:pPr>
             <a:r>
-              <a:t>Design boundary</a:t>
+              <a:t>Core invariant</a:t>
             </a:r>
           </a:p>
           <a:p>
@@ -3817,7 +3819,7 @@
               </a:defRPr>
             </a:pPr>
             <a:r>
-              <a:t>Export is read-only: it draws from lastProjection and never changes input state, calculations, or charts.</a:t>
+              <a:t>Inputs do not calculate finance; Compute does not touch the DOM; charts, export, and chat consume the same computed projection.</a:t>
             </a:r>
           </a:p>
         </p:txBody>
@@ -3939,7 +3941,1415 @@
               </a:defRPr>
             </a:pPr>
             <a:r>
-              <a:t>Retirement Income Planner • Architecture overview • Account-sheet Excel export update</a:t>
+              <a:t>Retirement Income Planner • Architecture overview • Household-expense, LTC, and plan-chat update</a:t>
+            </a:r>
+          </a:p>
+        </p:txBody>
+      </p:sp>
+    </p:spTree>
+  </p:cSld>
+  <p:clrMapOvr>
+    <a:masterClrMapping/>
+  </p:clrMapOvr>
+</p:sld>
+</file>
+
+<file path=ppt/slides/slide10.xml><?xml version="1.0" encoding="utf-8"?>
+<p:sld xmlns:a="http://schemas.openxmlformats.org/drawingml/2006/main" xmlns:p="http://schemas.openxmlformats.org/presentationml/2006/main" xmlns:r="http://schemas.openxmlformats.org/officeDocument/2006/relationships">
+  <p:cSld>
+    <p:bg>
+      <p:bgPr>
+        <a:solidFill>
+          <a:srgbClr val="FFFFFF"/>
+        </a:solidFill>
+        <a:effectLst/>
+      </p:bgPr>
+    </p:bg>
+    <p:spTree>
+      <p:nvGrpSpPr>
+        <p:cNvPr id="1" name=""/>
+        <p:cNvGrpSpPr/>
+        <p:nvPr/>
+      </p:nvGrpSpPr>
+      <p:grpSpPr/>
+      <p:sp>
+        <p:nvSpPr>
+          <p:cNvPr id="2" name="TextBox 1"/>
+          <p:cNvSpPr txBox="1"/>
+          <p:nvPr/>
+        </p:nvSpPr>
+        <p:spPr>
+          <a:xfrm>
+            <a:off x="502920" y="246888"/>
+            <a:ext cx="11155680" cy="438912"/>
+          </a:xfrm>
+          <a:prstGeom prst="rect">
+            <a:avLst/>
+          </a:prstGeom>
+          <a:noFill/>
+        </p:spPr>
+        <p:txBody>
+          <a:bodyPr wrap="none" anchor="ctr">
+            <a:spAutoFit/>
+          </a:bodyPr>
+          <a:lstStyle/>
+          <a:p>
+            <a:pPr algn="l">
+              <a:defRPr sz="2700" b="1">
+                <a:solidFill>
+                  <a:srgbClr val="0F2647"/>
+                </a:solidFill>
+                <a:latin typeface="Aptos"/>
+              </a:defRPr>
+            </a:pPr>
+            <a:r>
+              <a:t>Expanded engineering structure and regression safety net</a:t>
+            </a:r>
+          </a:p>
+        </p:txBody>
+      </p:sp>
+      <p:sp>
+        <p:nvSpPr>
+          <p:cNvPr id="3" name="TextBox 2"/>
+          <p:cNvSpPr txBox="1"/>
+          <p:nvPr/>
+        </p:nvSpPr>
+        <p:spPr>
+          <a:xfrm>
+            <a:off x="530352" y="786384"/>
+            <a:ext cx="10972800" cy="228600"/>
+          </a:xfrm>
+          <a:prstGeom prst="rect">
+            <a:avLst/>
+          </a:prstGeom>
+          <a:noFill/>
+        </p:spPr>
+        <p:txBody>
+          <a:bodyPr wrap="none" anchor="ctr">
+            <a:spAutoFit/>
+          </a:bodyPr>
+          <a:lstStyle/>
+          <a:p>
+            <a:pPr algn="l">
+              <a:defRPr sz="1150" b="0">
+                <a:solidFill>
+                  <a:srgbClr val="5D6C7A"/>
+                </a:solidFill>
+                <a:latin typeface="Aptos"/>
+              </a:defRPr>
+            </a:pPr>
+            <a:r>
+              <a:t>The codebase remains a plain-script browser app, now paired with CSS separation and a Node regression harness.</a:t>
+            </a:r>
+          </a:p>
+        </p:txBody>
+      </p:sp>
+      <p:sp>
+        <p:nvSpPr>
+          <p:cNvPr id="4" name="Rounded Rectangle 3"/>
+          <p:cNvSpPr/>
+          <p:nvPr/>
+        </p:nvSpPr>
+        <p:spPr>
+          <a:xfrm>
+            <a:off x="502920" y="1143000"/>
+            <a:ext cx="2286000" cy="4526280"/>
+          </a:xfrm>
+          <a:prstGeom prst="roundRect">
+            <a:avLst/>
+          </a:prstGeom>
+          <a:solidFill>
+            <a:srgbClr val="F7EFFF"/>
+          </a:solidFill>
+          <a:ln w="13970">
+            <a:solidFill>
+              <a:srgbClr val="7852B0"/>
+            </a:solidFill>
+          </a:ln>
+        </p:spPr>
+        <p:style>
+          <a:lnRef idx="1">
+            <a:schemeClr val="accent1"/>
+          </a:lnRef>
+          <a:fillRef idx="3">
+            <a:schemeClr val="accent1"/>
+          </a:fillRef>
+          <a:effectRef idx="2">
+            <a:schemeClr val="accent1"/>
+          </a:effectRef>
+          <a:fontRef idx="minor">
+            <a:schemeClr val="lt1"/>
+          </a:fontRef>
+        </p:style>
+        <p:txBody>
+          <a:bodyPr rtlCol="0" anchor="ctr" lIns="182880" rIns="100584" tIns="91440"/>
+          <a:lstStyle/>
+          <a:p>
+            <a:pPr algn="ctr">
+              <a:defRPr sz="1700" b="1">
+                <a:solidFill>
+                  <a:srgbClr val="232D37"/>
+                </a:solidFill>
+                <a:latin typeface="Aptos Display"/>
+              </a:defRPr>
+            </a:pPr>
+            <a:r>
+              <a:t>Presentation</a:t>
+            </a:r>
+          </a:p>
+          <a:p>
+            <a:pPr>
+              <a:spcBef>
+                <a:spcPts val="300"/>
+              </a:spcBef>
+              <a:defRPr sz="1200">
+                <a:solidFill>
+                  <a:srgbClr val="232D37"/>
+                </a:solidFill>
+                <a:latin typeface="Aptos"/>
+              </a:defRPr>
+            </a:pPr>
+            <a:r>
+              <a:t>css/styles.css owns all styling.</a:t>
+            </a:r>
+          </a:p>
+          <a:p>
+            <a:pPr>
+              <a:spcBef>
+                <a:spcPts val="300"/>
+              </a:spcBef>
+              <a:defRPr sz="1200">
+                <a:solidFill>
+                  <a:srgbClr val="232D37"/>
+                </a:solidFill>
+                <a:latin typeface="Aptos"/>
+              </a:defRPr>
+            </a:pPr>
+            <a:r>
+              <a:t>index.html is markup only.</a:t>
+            </a:r>
+          </a:p>
+          <a:p>
+            <a:pPr>
+              <a:spcBef>
+                <a:spcPts val="300"/>
+              </a:spcBef>
+              <a:defRPr sz="1200">
+                <a:solidFill>
+                  <a:srgbClr val="232D37"/>
+                </a:solidFill>
+                <a:latin typeface="Aptos"/>
+              </a:defRPr>
+            </a:pPr>
+            <a:r>
+              <a:t>js/display adds expenseChart.js and chat.js.</a:t>
+            </a:r>
+          </a:p>
+        </p:txBody>
+      </p:sp>
+      <p:sp>
+        <p:nvSpPr>
+          <p:cNvPr id="5" name="Rectangle 4"/>
+          <p:cNvSpPr/>
+          <p:nvPr/>
+        </p:nvSpPr>
+        <p:spPr>
+          <a:xfrm>
+            <a:off x="502920" y="1143000"/>
+            <a:ext cx="82296" cy="4526280"/>
+          </a:xfrm>
+          <a:prstGeom prst="rect">
+            <a:avLst/>
+          </a:prstGeom>
+          <a:solidFill>
+            <a:srgbClr val="7852B0"/>
+          </a:solidFill>
+          <a:ln>
+            <a:noFill/>
+          </a:ln>
+        </p:spPr>
+        <p:style>
+          <a:lnRef idx="1">
+            <a:schemeClr val="accent1"/>
+          </a:lnRef>
+          <a:fillRef idx="3">
+            <a:schemeClr val="accent1"/>
+          </a:fillRef>
+          <a:effectRef idx="2">
+            <a:schemeClr val="accent1"/>
+          </a:effectRef>
+          <a:fontRef idx="minor">
+            <a:schemeClr val="lt1"/>
+          </a:fontRef>
+        </p:style>
+        <p:txBody>
+          <a:bodyPr rtlCol="0" anchor="ctr"/>
+          <a:lstStyle/>
+          <a:p>
+            <a:pPr algn="ctr"/>
+          </a:p>
+        </p:txBody>
+      </p:sp>
+      <p:sp>
+        <p:nvSpPr>
+          <p:cNvPr id="6" name="Rounded Rectangle 5"/>
+          <p:cNvSpPr/>
+          <p:nvPr/>
+        </p:nvSpPr>
+        <p:spPr>
+          <a:xfrm>
+            <a:off x="3200400" y="1143000"/>
+            <a:ext cx="2286000" cy="4526280"/>
+          </a:xfrm>
+          <a:prstGeom prst="roundRect">
+            <a:avLst/>
+          </a:prstGeom>
+          <a:solidFill>
+            <a:srgbClr val="EAF9F4"/>
+          </a:solidFill>
+          <a:ln w="13970">
+            <a:solidFill>
+              <a:srgbClr val="429761"/>
+            </a:solidFill>
+          </a:ln>
+        </p:spPr>
+        <p:style>
+          <a:lnRef idx="1">
+            <a:schemeClr val="accent1"/>
+          </a:lnRef>
+          <a:fillRef idx="3">
+            <a:schemeClr val="accent1"/>
+          </a:fillRef>
+          <a:effectRef idx="2">
+            <a:schemeClr val="accent1"/>
+          </a:effectRef>
+          <a:fontRef idx="minor">
+            <a:schemeClr val="lt1"/>
+          </a:fontRef>
+        </p:style>
+        <p:txBody>
+          <a:bodyPr rtlCol="0" anchor="ctr" lIns="182880" rIns="100584" tIns="91440"/>
+          <a:lstStyle/>
+          <a:p>
+            <a:pPr algn="ctr">
+              <a:defRPr sz="1700" b="1">
+                <a:solidFill>
+                  <a:srgbClr val="232D37"/>
+                </a:solidFill>
+                <a:latin typeface="Aptos Display"/>
+              </a:defRPr>
+            </a:pPr>
+            <a:r>
+              <a:t>Core model</a:t>
+            </a:r>
+          </a:p>
+          <a:p>
+            <a:pPr>
+              <a:spcBef>
+                <a:spcPts val="300"/>
+              </a:spcBef>
+              <a:defRPr sz="1200">
+                <a:solidFill>
+                  <a:srgbClr val="232D37"/>
+                </a:solidFill>
+                <a:latin typeface="Aptos"/>
+              </a:defRPr>
+            </a:pPr>
+            <a:r>
+              <a:t>State migration handles legacy living withdrawals, LTC shapes, hide flags, and conversion start age.</a:t>
+            </a:r>
+          </a:p>
+          <a:p>
+            <a:pPr>
+              <a:spcBef>
+                <a:spcPts val="300"/>
+              </a:spcBef>
+              <a:defRPr sz="1200">
+                <a:solidFill>
+                  <a:srgbClr val="232D37"/>
+                </a:solidFill>
+                <a:latin typeface="Aptos"/>
+              </a:defRPr>
+            </a:pPr>
+            <a:r>
+              <a:t>Projection owns waterfall, taxes, LTCG, AUM, LTC, and stretch data.</a:t>
+            </a:r>
+          </a:p>
+        </p:txBody>
+      </p:sp>
+      <p:sp>
+        <p:nvSpPr>
+          <p:cNvPr id="7" name="Rectangle 6"/>
+          <p:cNvSpPr/>
+          <p:nvPr/>
+        </p:nvSpPr>
+        <p:spPr>
+          <a:xfrm>
+            <a:off x="3200400" y="1143000"/>
+            <a:ext cx="82296" cy="4526280"/>
+          </a:xfrm>
+          <a:prstGeom prst="rect">
+            <a:avLst/>
+          </a:prstGeom>
+          <a:solidFill>
+            <a:srgbClr val="429761"/>
+          </a:solidFill>
+          <a:ln>
+            <a:noFill/>
+          </a:ln>
+        </p:spPr>
+        <p:style>
+          <a:lnRef idx="1">
+            <a:schemeClr val="accent1"/>
+          </a:lnRef>
+          <a:fillRef idx="3">
+            <a:schemeClr val="accent1"/>
+          </a:fillRef>
+          <a:effectRef idx="2">
+            <a:schemeClr val="accent1"/>
+          </a:effectRef>
+          <a:fontRef idx="minor">
+            <a:schemeClr val="lt1"/>
+          </a:fontRef>
+        </p:style>
+        <p:txBody>
+          <a:bodyPr rtlCol="0" anchor="ctr"/>
+          <a:lstStyle/>
+          <a:p>
+            <a:pPr algn="ctr"/>
+          </a:p>
+        </p:txBody>
+      </p:sp>
+      <p:sp>
+        <p:nvSpPr>
+          <p:cNvPr id="8" name="Rounded Rectangle 7"/>
+          <p:cNvSpPr/>
+          <p:nvPr/>
+        </p:nvSpPr>
+        <p:spPr>
+          <a:xfrm>
+            <a:off x="5897880" y="1143000"/>
+            <a:ext cx="2286000" cy="4526280"/>
+          </a:xfrm>
+          <a:prstGeom prst="roundRect">
+            <a:avLst/>
+          </a:prstGeom>
+          <a:solidFill>
+            <a:srgbClr val="E9F4FF"/>
+          </a:solidFill>
+          <a:ln w="13970">
+            <a:solidFill>
+              <a:srgbClr val="266EB2"/>
+            </a:solidFill>
+          </a:ln>
+        </p:spPr>
+        <p:style>
+          <a:lnRef idx="1">
+            <a:schemeClr val="accent1"/>
+          </a:lnRef>
+          <a:fillRef idx="3">
+            <a:schemeClr val="accent1"/>
+          </a:fillRef>
+          <a:effectRef idx="2">
+            <a:schemeClr val="accent1"/>
+          </a:effectRef>
+          <a:fontRef idx="minor">
+            <a:schemeClr val="lt1"/>
+          </a:fontRef>
+        </p:style>
+        <p:txBody>
+          <a:bodyPr rtlCol="0" anchor="ctr" lIns="182880" rIns="100584" tIns="91440"/>
+          <a:lstStyle/>
+          <a:p>
+            <a:pPr algn="ctr">
+              <a:defRPr sz="1700" b="1">
+                <a:solidFill>
+                  <a:srgbClr val="232D37"/>
+                </a:solidFill>
+                <a:latin typeface="Aptos Display"/>
+              </a:defRPr>
+            </a:pPr>
+            <a:r>
+              <a:t>Regression tests</a:t>
+            </a:r>
+          </a:p>
+          <a:p>
+            <a:pPr>
+              <a:spcBef>
+                <a:spcPts val="300"/>
+              </a:spcBef>
+              <a:defRPr sz="1200">
+                <a:solidFill>
+                  <a:srgbClr val="232D37"/>
+                </a:solidFill>
+                <a:latin typeface="Aptos"/>
+              </a:defRPr>
+            </a:pPr>
+            <a:r>
+              <a:t>tests/check.js</a:t>
+            </a:r>
+          </a:p>
+          <a:p>
+            <a:pPr>
+              <a:spcBef>
+                <a:spcPts val="300"/>
+              </a:spcBef>
+              <a:defRPr sz="1200">
+                <a:solidFill>
+                  <a:srgbClr val="232D37"/>
+                </a:solidFill>
+                <a:latin typeface="Aptos"/>
+              </a:defRPr>
+            </a:pPr>
+            <a:r>
+              <a:t>snapshot.js</a:t>
+            </a:r>
+          </a:p>
+          <a:p>
+            <a:pPr>
+              <a:spcBef>
+                <a:spcPts val="300"/>
+              </a:spcBef>
+              <a:defRPr sz="1200">
+                <a:solidFill>
+                  <a:srgbClr val="232D37"/>
+                </a:solidFill>
+                <a:latin typeface="Aptos"/>
+              </a:defRPr>
+            </a:pPr>
+            <a:r>
+              <a:t>compare.js</a:t>
+            </a:r>
+          </a:p>
+          <a:p>
+            <a:pPr>
+              <a:spcBef>
+                <a:spcPts val="300"/>
+              </a:spcBef>
+              <a:defRPr sz="1200">
+                <a:solidFill>
+                  <a:srgbClr val="232D37"/>
+                </a:solidFill>
+                <a:latin typeface="Aptos"/>
+              </a:defRPr>
+            </a:pPr>
+            <a:r>
+              <a:t>baseline.json</a:t>
+            </a:r>
+          </a:p>
+          <a:p>
+            <a:pPr>
+              <a:spcBef>
+                <a:spcPts val="300"/>
+              </a:spcBef>
+              <a:defRPr sz="1200">
+                <a:solidFill>
+                  <a:srgbClr val="232D37"/>
+                </a:solidFill>
+                <a:latin typeface="Aptos"/>
+              </a:defRPr>
+            </a:pPr>
+            <a:r>
+              <a:t>Node harness is not loaded by the app.</a:t>
+            </a:r>
+          </a:p>
+        </p:txBody>
+      </p:sp>
+      <p:sp>
+        <p:nvSpPr>
+          <p:cNvPr id="9" name="Rectangle 8"/>
+          <p:cNvSpPr/>
+          <p:nvPr/>
+        </p:nvSpPr>
+        <p:spPr>
+          <a:xfrm>
+            <a:off x="5897880" y="1143000"/>
+            <a:ext cx="82296" cy="4526280"/>
+          </a:xfrm>
+          <a:prstGeom prst="rect">
+            <a:avLst/>
+          </a:prstGeom>
+          <a:solidFill>
+            <a:srgbClr val="266EB2"/>
+          </a:solidFill>
+          <a:ln>
+            <a:noFill/>
+          </a:ln>
+        </p:spPr>
+        <p:style>
+          <a:lnRef idx="1">
+            <a:schemeClr val="accent1"/>
+          </a:lnRef>
+          <a:fillRef idx="3">
+            <a:schemeClr val="accent1"/>
+          </a:fillRef>
+          <a:effectRef idx="2">
+            <a:schemeClr val="accent1"/>
+          </a:effectRef>
+          <a:fontRef idx="minor">
+            <a:schemeClr val="lt1"/>
+          </a:fontRef>
+        </p:style>
+        <p:txBody>
+          <a:bodyPr rtlCol="0" anchor="ctr"/>
+          <a:lstStyle/>
+          <a:p>
+            <a:pPr algn="ctr"/>
+          </a:p>
+        </p:txBody>
+      </p:sp>
+      <p:sp>
+        <p:nvSpPr>
+          <p:cNvPr id="10" name="Rounded Rectangle 9"/>
+          <p:cNvSpPr/>
+          <p:nvPr/>
+        </p:nvSpPr>
+        <p:spPr>
+          <a:xfrm>
+            <a:off x="8595360" y="1143000"/>
+            <a:ext cx="2697480" cy="4526280"/>
+          </a:xfrm>
+          <a:prstGeom prst="roundRect">
+            <a:avLst/>
+          </a:prstGeom>
+          <a:solidFill>
+            <a:srgbClr val="FFF6E8"/>
+          </a:solidFill>
+          <a:ln w="13970">
+            <a:solidFill>
+              <a:srgbClr val="E5892A"/>
+            </a:solidFill>
+          </a:ln>
+        </p:spPr>
+        <p:style>
+          <a:lnRef idx="1">
+            <a:schemeClr val="accent1"/>
+          </a:lnRef>
+          <a:fillRef idx="3">
+            <a:schemeClr val="accent1"/>
+          </a:fillRef>
+          <a:effectRef idx="2">
+            <a:schemeClr val="accent1"/>
+          </a:effectRef>
+          <a:fontRef idx="minor">
+            <a:schemeClr val="lt1"/>
+          </a:fontRef>
+        </p:style>
+        <p:txBody>
+          <a:bodyPr rtlCol="0" anchor="ctr" lIns="182880" rIns="100584" tIns="91440"/>
+          <a:lstStyle/>
+          <a:p>
+            <a:pPr algn="ctr">
+              <a:defRPr sz="1700" b="1">
+                <a:solidFill>
+                  <a:srgbClr val="232D37"/>
+                </a:solidFill>
+                <a:latin typeface="Aptos Display"/>
+              </a:defRPr>
+            </a:pPr>
+            <a:r>
+              <a:t>Consumers</a:t>
+            </a:r>
+          </a:p>
+          <a:p>
+            <a:pPr>
+              <a:spcBef>
+                <a:spcPts val="300"/>
+              </a:spcBef>
+              <a:defRPr sz="1200">
+                <a:solidFill>
+                  <a:srgbClr val="232D37"/>
+                </a:solidFill>
+                <a:latin typeface="Aptos"/>
+              </a:defRPr>
+            </a:pPr>
+            <a:r>
+              <a:t>Charts: shared row contract</a:t>
+            </a:r>
+          </a:p>
+          <a:p>
+            <a:pPr>
+              <a:spcBef>
+                <a:spcPts val="300"/>
+              </a:spcBef>
+              <a:defRPr sz="1200">
+                <a:solidFill>
+                  <a:srgbClr val="232D37"/>
+                </a:solidFill>
+                <a:latin typeface="Aptos"/>
+              </a:defRPr>
+            </a:pPr>
+            <a:r>
+              <a:t>Excel: summary + account sheets + stretch tail</a:t>
+            </a:r>
+          </a:p>
+          <a:p>
+            <a:pPr>
+              <a:spcBef>
+                <a:spcPts val="300"/>
+              </a:spcBef>
+              <a:defRPr sz="1200">
+                <a:solidFill>
+                  <a:srgbClr val="232D37"/>
+                </a:solidFill>
+                <a:latin typeface="Aptos"/>
+              </a:defRPr>
+            </a:pPr>
+            <a:r>
+              <a:t>Chat: deliberately curated snapshot fields</a:t>
+            </a:r>
+          </a:p>
+          <a:p>
+            <a:pPr>
+              <a:spcBef>
+                <a:spcPts val="300"/>
+              </a:spcBef>
+              <a:defRPr sz="1200">
+                <a:solidFill>
+                  <a:srgbClr val="232D37"/>
+                </a:solidFill>
+                <a:latin typeface="Aptos"/>
+              </a:defRPr>
+            </a:pPr>
+            <a:r>
+              <a:t>Formula page: constants-backed tables</a:t>
+            </a:r>
+          </a:p>
+        </p:txBody>
+      </p:sp>
+      <p:sp>
+        <p:nvSpPr>
+          <p:cNvPr id="11" name="Rectangle 10"/>
+          <p:cNvSpPr/>
+          <p:nvPr/>
+        </p:nvSpPr>
+        <p:spPr>
+          <a:xfrm>
+            <a:off x="8595360" y="1143000"/>
+            <a:ext cx="82296" cy="4526280"/>
+          </a:xfrm>
+          <a:prstGeom prst="rect">
+            <a:avLst/>
+          </a:prstGeom>
+          <a:solidFill>
+            <a:srgbClr val="E5892A"/>
+          </a:solidFill>
+          <a:ln>
+            <a:noFill/>
+          </a:ln>
+        </p:spPr>
+        <p:style>
+          <a:lnRef idx="1">
+            <a:schemeClr val="accent1"/>
+          </a:lnRef>
+          <a:fillRef idx="3">
+            <a:schemeClr val="accent1"/>
+          </a:fillRef>
+          <a:effectRef idx="2">
+            <a:schemeClr val="accent1"/>
+          </a:effectRef>
+          <a:fontRef idx="minor">
+            <a:schemeClr val="lt1"/>
+          </a:fontRef>
+        </p:style>
+        <p:txBody>
+          <a:bodyPr rtlCol="0" anchor="ctr"/>
+          <a:lstStyle/>
+          <a:p>
+            <a:pPr algn="ctr"/>
+          </a:p>
+        </p:txBody>
+      </p:sp>
+      <p:sp>
+        <p:nvSpPr>
+          <p:cNvPr id="12" name="Rectangle 11"/>
+          <p:cNvSpPr/>
+          <p:nvPr/>
+        </p:nvSpPr>
+        <p:spPr>
+          <a:xfrm>
+            <a:off x="502920" y="6473952"/>
+            <a:ext cx="11183112" cy="13716"/>
+          </a:xfrm>
+          <a:prstGeom prst="rect">
+            <a:avLst/>
+          </a:prstGeom>
+          <a:solidFill>
+            <a:srgbClr val="D2DCE5"/>
+          </a:solidFill>
+          <a:ln>
+            <a:noFill/>
+          </a:ln>
+        </p:spPr>
+        <p:style>
+          <a:lnRef idx="1">
+            <a:schemeClr val="accent1"/>
+          </a:lnRef>
+          <a:fillRef idx="3">
+            <a:schemeClr val="accent1"/>
+          </a:fillRef>
+          <a:effectRef idx="2">
+            <a:schemeClr val="accent1"/>
+          </a:effectRef>
+          <a:fontRef idx="minor">
+            <a:schemeClr val="lt1"/>
+          </a:fontRef>
+        </p:style>
+        <p:txBody>
+          <a:bodyPr rtlCol="0" anchor="ctr"/>
+          <a:lstStyle/>
+          <a:p>
+            <a:pPr algn="ctr"/>
+          </a:p>
+        </p:txBody>
+      </p:sp>
+      <p:sp>
+        <p:nvSpPr>
+          <p:cNvPr id="13" name="TextBox 12"/>
+          <p:cNvSpPr txBox="1"/>
+          <p:nvPr/>
+        </p:nvSpPr>
+        <p:spPr>
+          <a:xfrm>
+            <a:off x="530352" y="6510528"/>
+            <a:ext cx="10881360" cy="146304"/>
+          </a:xfrm>
+          <a:prstGeom prst="rect">
+            <a:avLst/>
+          </a:prstGeom>
+          <a:noFill/>
+        </p:spPr>
+        <p:txBody>
+          <a:bodyPr wrap="none" anchor="ctr">
+            <a:spAutoFit/>
+          </a:bodyPr>
+          <a:lstStyle/>
+          <a:p>
+            <a:pPr algn="l">
+              <a:defRPr sz="850" b="0">
+                <a:solidFill>
+                  <a:srgbClr val="5D6C7A"/>
+                </a:solidFill>
+                <a:latin typeface="Aptos"/>
+              </a:defRPr>
+            </a:pPr>
+            <a:r>
+              <a:t>Retirement Income Planner • Architecture overview • Household-expense, LTC, and plan-chat update</a:t>
+            </a:r>
+          </a:p>
+        </p:txBody>
+      </p:sp>
+    </p:spTree>
+  </p:cSld>
+  <p:clrMapOvr>
+    <a:masterClrMapping/>
+  </p:clrMapOvr>
+</p:sld>
+</file>
+
+<file path=ppt/slides/slide11.xml><?xml version="1.0" encoding="utf-8"?>
+<p:sld xmlns:a="http://schemas.openxmlformats.org/drawingml/2006/main" xmlns:p="http://schemas.openxmlformats.org/presentationml/2006/main" xmlns:r="http://schemas.openxmlformats.org/officeDocument/2006/relationships">
+  <p:cSld>
+    <p:bg>
+      <p:bgPr>
+        <a:solidFill>
+          <a:srgbClr val="F4F7FA"/>
+        </a:solidFill>
+        <a:effectLst/>
+      </p:bgPr>
+    </p:bg>
+    <p:spTree>
+      <p:nvGrpSpPr>
+        <p:cNvPr id="1" name=""/>
+        <p:cNvGrpSpPr/>
+        <p:nvPr/>
+      </p:nvGrpSpPr>
+      <p:grpSpPr/>
+      <p:sp>
+        <p:nvSpPr>
+          <p:cNvPr id="2" name="TextBox 1"/>
+          <p:cNvSpPr txBox="1"/>
+          <p:nvPr/>
+        </p:nvSpPr>
+        <p:spPr>
+          <a:xfrm>
+            <a:off x="502920" y="246888"/>
+            <a:ext cx="11155680" cy="438912"/>
+          </a:xfrm>
+          <a:prstGeom prst="rect">
+            <a:avLst/>
+          </a:prstGeom>
+          <a:noFill/>
+        </p:spPr>
+        <p:txBody>
+          <a:bodyPr wrap="none" anchor="ctr">
+            <a:spAutoFit/>
+          </a:bodyPr>
+          <a:lstStyle/>
+          <a:p>
+            <a:pPr algn="l">
+              <a:defRPr sz="2700" b="1">
+                <a:solidFill>
+                  <a:srgbClr val="0F2647"/>
+                </a:solidFill>
+                <a:latin typeface="Aptos"/>
+              </a:defRPr>
+            </a:pPr>
+            <a:r>
+              <a:t>Guardrails for evolving the model</a:t>
+            </a:r>
+          </a:p>
+        </p:txBody>
+      </p:sp>
+      <p:sp>
+        <p:nvSpPr>
+          <p:cNvPr id="3" name="TextBox 2"/>
+          <p:cNvSpPr txBox="1"/>
+          <p:nvPr/>
+        </p:nvSpPr>
+        <p:spPr>
+          <a:xfrm>
+            <a:off x="530352" y="786384"/>
+            <a:ext cx="10972800" cy="228600"/>
+          </a:xfrm>
+          <a:prstGeom prst="rect">
+            <a:avLst/>
+          </a:prstGeom>
+          <a:noFill/>
+        </p:spPr>
+        <p:txBody>
+          <a:bodyPr wrap="none" anchor="ctr">
+            <a:spAutoFit/>
+          </a:bodyPr>
+          <a:lstStyle/>
+          <a:p>
+            <a:pPr algn="l">
+              <a:defRPr sz="1150" b="0">
+                <a:solidFill>
+                  <a:srgbClr val="5D6C7A"/>
+                </a:solidFill>
+                <a:latin typeface="Aptos"/>
+              </a:defRPr>
+            </a:pPr>
+            <a:r>
+              <a:t>The expanded design depends on explicit contracts: shared state, converged computation, row-driven consumers, and safe privacy boundaries.</a:t>
+            </a:r>
+          </a:p>
+        </p:txBody>
+      </p:sp>
+      <p:sp>
+        <p:nvSpPr>
+          <p:cNvPr id="4" name="Rounded Rectangle 3"/>
+          <p:cNvSpPr/>
+          <p:nvPr/>
+        </p:nvSpPr>
+        <p:spPr>
+          <a:xfrm>
+            <a:off x="640080" y="1188720"/>
+            <a:ext cx="3383280" cy="4526280"/>
+          </a:xfrm>
+          <a:prstGeom prst="roundRect">
+            <a:avLst/>
+          </a:prstGeom>
+          <a:solidFill>
+            <a:srgbClr val="E9F4FF"/>
+          </a:solidFill>
+          <a:ln w="13970">
+            <a:solidFill>
+              <a:srgbClr val="266EB2"/>
+            </a:solidFill>
+          </a:ln>
+        </p:spPr>
+        <p:style>
+          <a:lnRef idx="1">
+            <a:schemeClr val="accent1"/>
+          </a:lnRef>
+          <a:fillRef idx="3">
+            <a:schemeClr val="accent1"/>
+          </a:fillRef>
+          <a:effectRef idx="2">
+            <a:schemeClr val="accent1"/>
+          </a:effectRef>
+          <a:fontRef idx="minor">
+            <a:schemeClr val="lt1"/>
+          </a:fontRef>
+        </p:style>
+        <p:txBody>
+          <a:bodyPr rtlCol="0" anchor="ctr" lIns="182880" rIns="100584" tIns="91440"/>
+          <a:lstStyle/>
+          <a:p>
+            <a:pPr algn="ctr">
+              <a:defRPr sz="1700" b="1">
+                <a:solidFill>
+                  <a:srgbClr val="232D37"/>
+                </a:solidFill>
+                <a:latin typeface="Aptos Display"/>
+              </a:defRPr>
+            </a:pPr>
+            <a:r>
+              <a:t>State &amp; migration</a:t>
+            </a:r>
+          </a:p>
+          <a:p>
+            <a:pPr>
+              <a:spcBef>
+                <a:spcPts val="300"/>
+              </a:spcBef>
+              <a:defRPr sz="1200">
+                <a:solidFill>
+                  <a:srgbClr val="232D37"/>
+                </a:solidFill>
+                <a:latin typeface="Aptos"/>
+              </a:defRPr>
+            </a:pPr>
+            <a:r>
+              <a:t>Add canonical defaults in state.js.</a:t>
+            </a:r>
+          </a:p>
+          <a:p>
+            <a:pPr>
+              <a:spcBef>
+                <a:spcPts val="300"/>
+              </a:spcBef>
+              <a:defRPr sz="1200">
+                <a:solidFill>
+                  <a:srgbClr val="232D37"/>
+                </a:solidFill>
+                <a:latin typeface="Aptos"/>
+              </a:defRPr>
+            </a:pPr>
+            <a:r>
+              <a:t>Migrate older save shapes at hydrate time.</a:t>
+            </a:r>
+          </a:p>
+          <a:p>
+            <a:pPr>
+              <a:spcBef>
+                <a:spcPts val="300"/>
+              </a:spcBef>
+              <a:defRPr sz="1200">
+                <a:solidFill>
+                  <a:srgbClr val="232D37"/>
+                </a:solidFill>
+                <a:latin typeface="Aptos"/>
+              </a:defRPr>
+            </a:pPr>
+            <a:r>
+              <a:t>Keep saved UI flags as saved; do not derive them from DOM state.</a:t>
+            </a:r>
+          </a:p>
+        </p:txBody>
+      </p:sp>
+      <p:sp>
+        <p:nvSpPr>
+          <p:cNvPr id="5" name="Rectangle 4"/>
+          <p:cNvSpPr/>
+          <p:nvPr/>
+        </p:nvSpPr>
+        <p:spPr>
+          <a:xfrm>
+            <a:off x="640080" y="1188720"/>
+            <a:ext cx="82296" cy="4526280"/>
+          </a:xfrm>
+          <a:prstGeom prst="rect">
+            <a:avLst/>
+          </a:prstGeom>
+          <a:solidFill>
+            <a:srgbClr val="266EB2"/>
+          </a:solidFill>
+          <a:ln>
+            <a:noFill/>
+          </a:ln>
+        </p:spPr>
+        <p:style>
+          <a:lnRef idx="1">
+            <a:schemeClr val="accent1"/>
+          </a:lnRef>
+          <a:fillRef idx="3">
+            <a:schemeClr val="accent1"/>
+          </a:fillRef>
+          <a:effectRef idx="2">
+            <a:schemeClr val="accent1"/>
+          </a:effectRef>
+          <a:fontRef idx="minor">
+            <a:schemeClr val="lt1"/>
+          </a:fontRef>
+        </p:style>
+        <p:txBody>
+          <a:bodyPr rtlCol="0" anchor="ctr"/>
+          <a:lstStyle/>
+          <a:p>
+            <a:pPr algn="ctr"/>
+          </a:p>
+        </p:txBody>
+      </p:sp>
+      <p:sp>
+        <p:nvSpPr>
+          <p:cNvPr id="6" name="Rounded Rectangle 5"/>
+          <p:cNvSpPr/>
+          <p:nvPr/>
+        </p:nvSpPr>
+        <p:spPr>
+          <a:xfrm>
+            <a:off x="4407408" y="1188720"/>
+            <a:ext cx="3383280" cy="4526280"/>
+          </a:xfrm>
+          <a:prstGeom prst="roundRect">
+            <a:avLst/>
+          </a:prstGeom>
+          <a:solidFill>
+            <a:srgbClr val="EAF9F4"/>
+          </a:solidFill>
+          <a:ln w="13970">
+            <a:solidFill>
+              <a:srgbClr val="429761"/>
+            </a:solidFill>
+          </a:ln>
+        </p:spPr>
+        <p:style>
+          <a:lnRef idx="1">
+            <a:schemeClr val="accent1"/>
+          </a:lnRef>
+          <a:fillRef idx="3">
+            <a:schemeClr val="accent1"/>
+          </a:fillRef>
+          <a:effectRef idx="2">
+            <a:schemeClr val="accent1"/>
+          </a:effectRef>
+          <a:fontRef idx="minor">
+            <a:schemeClr val="lt1"/>
+          </a:fontRef>
+        </p:style>
+        <p:txBody>
+          <a:bodyPr rtlCol="0" anchor="ctr" lIns="182880" rIns="100584" tIns="91440"/>
+          <a:lstStyle/>
+          <a:p>
+            <a:pPr algn="ctr">
+              <a:defRPr sz="1700" b="1">
+                <a:solidFill>
+                  <a:srgbClr val="232D37"/>
+                </a:solidFill>
+                <a:latin typeface="Aptos Display"/>
+              </a:defRPr>
+            </a:pPr>
+            <a:r>
+              <a:t>Compute &amp; projection</a:t>
+            </a:r>
+          </a:p>
+          <a:p>
+            <a:pPr>
+              <a:spcBef>
+                <a:spcPts val="300"/>
+              </a:spcBef>
+              <a:defRPr sz="1200">
+                <a:solidFill>
+                  <a:srgbClr val="232D37"/>
+                </a:solidFill>
+                <a:latin typeface="Aptos"/>
+              </a:defRPr>
+            </a:pPr>
+            <a:r>
+              <a:t>Keep financial behavior in projection.js.</a:t>
+            </a:r>
+          </a:p>
+          <a:p>
+            <a:pPr>
+              <a:spcBef>
+                <a:spcPts val="300"/>
+              </a:spcBef>
+              <a:defRPr sz="1200">
+                <a:solidFill>
+                  <a:srgbClr val="232D37"/>
+                </a:solidFill>
+                <a:latin typeface="Aptos"/>
+              </a:defRPr>
+            </a:pPr>
+            <a:r>
+              <a:t>Resolve circular dependencies explicitly rather than using accidental order.</a:t>
+            </a:r>
+          </a:p>
+          <a:p>
+            <a:pPr>
+              <a:spcBef>
+                <a:spcPts val="300"/>
+              </a:spcBef>
+              <a:defRPr sz="1200">
+                <a:solidFill>
+                  <a:srgbClr val="232D37"/>
+                </a:solidFill>
+                <a:latin typeface="Aptos"/>
+              </a:defRPr>
+            </a:pPr>
+            <a:r>
+              <a:t>Add new outputs to the row contract before presenting them.</a:t>
+            </a:r>
+          </a:p>
+        </p:txBody>
+      </p:sp>
+      <p:sp>
+        <p:nvSpPr>
+          <p:cNvPr id="7" name="Rectangle 6"/>
+          <p:cNvSpPr/>
+          <p:nvPr/>
+        </p:nvSpPr>
+        <p:spPr>
+          <a:xfrm>
+            <a:off x="4407408" y="1188720"/>
+            <a:ext cx="82296" cy="4526280"/>
+          </a:xfrm>
+          <a:prstGeom prst="rect">
+            <a:avLst/>
+          </a:prstGeom>
+          <a:solidFill>
+            <a:srgbClr val="429761"/>
+          </a:solidFill>
+          <a:ln>
+            <a:noFill/>
+          </a:ln>
+        </p:spPr>
+        <p:style>
+          <a:lnRef idx="1">
+            <a:schemeClr val="accent1"/>
+          </a:lnRef>
+          <a:fillRef idx="3">
+            <a:schemeClr val="accent1"/>
+          </a:fillRef>
+          <a:effectRef idx="2">
+            <a:schemeClr val="accent1"/>
+          </a:effectRef>
+          <a:fontRef idx="minor">
+            <a:schemeClr val="lt1"/>
+          </a:fontRef>
+        </p:style>
+        <p:txBody>
+          <a:bodyPr rtlCol="0" anchor="ctr"/>
+          <a:lstStyle/>
+          <a:p>
+            <a:pPr algn="ctr"/>
+          </a:p>
+        </p:txBody>
+      </p:sp>
+      <p:sp>
+        <p:nvSpPr>
+          <p:cNvPr id="8" name="Rounded Rectangle 7"/>
+          <p:cNvSpPr/>
+          <p:nvPr/>
+        </p:nvSpPr>
+        <p:spPr>
+          <a:xfrm>
+            <a:off x="8174736" y="1188720"/>
+            <a:ext cx="3383280" cy="4526280"/>
+          </a:xfrm>
+          <a:prstGeom prst="roundRect">
+            <a:avLst/>
+          </a:prstGeom>
+          <a:solidFill>
+            <a:srgbClr val="F7EFFF"/>
+          </a:solidFill>
+          <a:ln w="13970">
+            <a:solidFill>
+              <a:srgbClr val="7852B0"/>
+            </a:solidFill>
+          </a:ln>
+        </p:spPr>
+        <p:style>
+          <a:lnRef idx="1">
+            <a:schemeClr val="accent1"/>
+          </a:lnRef>
+          <a:fillRef idx="3">
+            <a:schemeClr val="accent1"/>
+          </a:fillRef>
+          <a:effectRef idx="2">
+            <a:schemeClr val="accent1"/>
+          </a:effectRef>
+          <a:fontRef idx="minor">
+            <a:schemeClr val="lt1"/>
+          </a:fontRef>
+        </p:style>
+        <p:txBody>
+          <a:bodyPr rtlCol="0" anchor="ctr" lIns="182880" rIns="100584" tIns="91440"/>
+          <a:lstStyle/>
+          <a:p>
+            <a:pPr algn="ctr">
+              <a:defRPr sz="1700" b="1">
+                <a:solidFill>
+                  <a:srgbClr val="232D37"/>
+                </a:solidFill>
+                <a:latin typeface="Aptos Display"/>
+              </a:defRPr>
+            </a:pPr>
+            <a:r>
+              <a:t>Consumers &amp; privacy</a:t>
+            </a:r>
+          </a:p>
+          <a:p>
+            <a:pPr>
+              <a:spcBef>
+                <a:spcPts val="300"/>
+              </a:spcBef>
+              <a:defRPr sz="1200">
+                <a:solidFill>
+                  <a:srgbClr val="232D37"/>
+                </a:solidFill>
+                <a:latin typeface="Aptos"/>
+              </a:defRPr>
+            </a:pPr>
+            <a:r>
+              <a:t>Charts, export, formulas, and chat must read—not recreate—financial logic.</a:t>
+            </a:r>
+          </a:p>
+          <a:p>
+            <a:pPr>
+              <a:spcBef>
+                <a:spcPts val="300"/>
+              </a:spcBef>
+              <a:defRPr sz="1200">
+                <a:solidFill>
+                  <a:srgbClr val="232D37"/>
+                </a:solidFill>
+                <a:latin typeface="Aptos"/>
+              </a:defRPr>
+            </a:pPr>
+            <a:r>
+              <a:t>Keep chat data explicit, previewable, and absent from plan persistence.</a:t>
+            </a:r>
+          </a:p>
+          <a:p>
+            <a:pPr>
+              <a:spcBef>
+                <a:spcPts val="300"/>
+              </a:spcBef>
+              <a:defRPr sz="1200">
+                <a:solidFill>
+                  <a:srgbClr val="232D37"/>
+                </a:solidFill>
+                <a:latin typeface="Aptos"/>
+              </a:defRPr>
+            </a:pPr>
+            <a:r>
+              <a:t>Protect export and chat from mutating state.</a:t>
+            </a:r>
+          </a:p>
+        </p:txBody>
+      </p:sp>
+      <p:sp>
+        <p:nvSpPr>
+          <p:cNvPr id="9" name="Rectangle 8"/>
+          <p:cNvSpPr/>
+          <p:nvPr/>
+        </p:nvSpPr>
+        <p:spPr>
+          <a:xfrm>
+            <a:off x="8174736" y="1188720"/>
+            <a:ext cx="82296" cy="4526280"/>
+          </a:xfrm>
+          <a:prstGeom prst="rect">
+            <a:avLst/>
+          </a:prstGeom>
+          <a:solidFill>
+            <a:srgbClr val="7852B0"/>
+          </a:solidFill>
+          <a:ln>
+            <a:noFill/>
+          </a:ln>
+        </p:spPr>
+        <p:style>
+          <a:lnRef idx="1">
+            <a:schemeClr val="accent1"/>
+          </a:lnRef>
+          <a:fillRef idx="3">
+            <a:schemeClr val="accent1"/>
+          </a:fillRef>
+          <a:effectRef idx="2">
+            <a:schemeClr val="accent1"/>
+          </a:effectRef>
+          <a:fontRef idx="minor">
+            <a:schemeClr val="lt1"/>
+          </a:fontRef>
+        </p:style>
+        <p:txBody>
+          <a:bodyPr rtlCol="0" anchor="ctr"/>
+          <a:lstStyle/>
+          <a:p>
+            <a:pPr algn="ctr"/>
+          </a:p>
+        </p:txBody>
+      </p:sp>
+      <p:sp>
+        <p:nvSpPr>
+          <p:cNvPr id="10" name="Rectangle 9"/>
+          <p:cNvSpPr/>
+          <p:nvPr/>
+        </p:nvSpPr>
+        <p:spPr>
+          <a:xfrm>
+            <a:off x="502920" y="6473952"/>
+            <a:ext cx="11183112" cy="13716"/>
+          </a:xfrm>
+          <a:prstGeom prst="rect">
+            <a:avLst/>
+          </a:prstGeom>
+          <a:solidFill>
+            <a:srgbClr val="D2DCE5"/>
+          </a:solidFill>
+          <a:ln>
+            <a:noFill/>
+          </a:ln>
+        </p:spPr>
+        <p:style>
+          <a:lnRef idx="1">
+            <a:schemeClr val="accent1"/>
+          </a:lnRef>
+          <a:fillRef idx="3">
+            <a:schemeClr val="accent1"/>
+          </a:fillRef>
+          <a:effectRef idx="2">
+            <a:schemeClr val="accent1"/>
+          </a:effectRef>
+          <a:fontRef idx="minor">
+            <a:schemeClr val="lt1"/>
+          </a:fontRef>
+        </p:style>
+        <p:txBody>
+          <a:bodyPr rtlCol="0" anchor="ctr"/>
+          <a:lstStyle/>
+          <a:p>
+            <a:pPr algn="ctr"/>
+          </a:p>
+        </p:txBody>
+      </p:sp>
+      <p:sp>
+        <p:nvSpPr>
+          <p:cNvPr id="11" name="TextBox 10"/>
+          <p:cNvSpPr txBox="1"/>
+          <p:nvPr/>
+        </p:nvSpPr>
+        <p:spPr>
+          <a:xfrm>
+            <a:off x="530352" y="6510528"/>
+            <a:ext cx="10881360" cy="146304"/>
+          </a:xfrm>
+          <a:prstGeom prst="rect">
+            <a:avLst/>
+          </a:prstGeom>
+          <a:noFill/>
+        </p:spPr>
+        <p:txBody>
+          <a:bodyPr wrap="none" anchor="ctr">
+            <a:spAutoFit/>
+          </a:bodyPr>
+          <a:lstStyle/>
+          <a:p>
+            <a:pPr algn="l">
+              <a:defRPr sz="850" b="0">
+                <a:solidFill>
+                  <a:srgbClr val="5D6C7A"/>
+                </a:solidFill>
+                <a:latin typeface="Aptos"/>
+              </a:defRPr>
+            </a:pPr>
+            <a:r>
+              <a:t>Retirement Income Planner • Architecture overview • Household-expense, LTC, and plan-chat update</a:t>
             </a:r>
           </a:p>
         </p:txBody>
@@ -4037,7 +5447,7 @@
               </a:defRPr>
             </a:pPr>
             <a:r>
-              <a:t>Excel export now mirrors the plan’s enabled account structure rather than collapsing brokerage detail into one shared sheet.</a:t>
+              <a:t>The planner evolves from per-portfolio expense settings into a household cash-flow model with a converged tax-and-sale calculation.</a:t>
             </a:r>
           </a:p>
         </p:txBody>
@@ -4050,8 +5460,364 @@
         </p:nvSpPr>
         <p:spPr>
           <a:xfrm>
-            <a:off x="594360" y="1234440"/>
-            <a:ext cx="3383280" cy="4480560"/>
+            <a:off x="502920" y="1234440"/>
+            <a:ext cx="2606040" cy="4480560"/>
+          </a:xfrm>
+          <a:prstGeom prst="roundRect">
+            <a:avLst/>
+          </a:prstGeom>
+          <a:solidFill>
+            <a:srgbClr val="E9F4FF"/>
+          </a:solidFill>
+          <a:ln w="13970">
+            <a:solidFill>
+              <a:srgbClr val="266EB2"/>
+            </a:solidFill>
+          </a:ln>
+        </p:spPr>
+        <p:style>
+          <a:lnRef idx="1">
+            <a:schemeClr val="accent1"/>
+          </a:lnRef>
+          <a:fillRef idx="3">
+            <a:schemeClr val="accent1"/>
+          </a:fillRef>
+          <a:effectRef idx="2">
+            <a:schemeClr val="accent1"/>
+          </a:effectRef>
+          <a:fontRef idx="minor">
+            <a:schemeClr val="lt1"/>
+          </a:fontRef>
+        </p:style>
+        <p:txBody>
+          <a:bodyPr rtlCol="0" anchor="ctr" lIns="182880" rIns="100584" tIns="91440"/>
+          <a:lstStyle/>
+          <a:p>
+            <a:pPr algn="ctr">
+              <a:defRPr sz="1700" b="1">
+                <a:solidFill>
+                  <a:srgbClr val="232D37"/>
+                </a:solidFill>
+                <a:latin typeface="Aptos Display"/>
+              </a:defRPr>
+            </a:pPr>
+            <a:r>
+              <a:t>Household expenses</a:t>
+            </a:r>
+          </a:p>
+          <a:p>
+            <a:pPr>
+              <a:spcBef>
+                <a:spcPts val="300"/>
+              </a:spcBef>
+              <a:defRPr sz="1200">
+                <a:solidFill>
+                  <a:srgbClr val="232D37"/>
+                </a:solidFill>
+                <a:latin typeface="Aptos"/>
+              </a:defRPr>
+            </a:pPr>
+            <a:r>
+              <a:t>Living expenses</a:t>
+            </a:r>
+          </a:p>
+          <a:p>
+            <a:pPr>
+              <a:spcBef>
+                <a:spcPts val="300"/>
+              </a:spcBef>
+              <a:defRPr sz="1200">
+                <a:solidFill>
+                  <a:srgbClr val="232D37"/>
+                </a:solidFill>
+                <a:latin typeface="Aptos"/>
+              </a:defRPr>
+            </a:pPr>
+            <a:r>
+              <a:t>Long Term Care</a:t>
+            </a:r>
+          </a:p>
+          <a:p>
+            <a:pPr>
+              <a:spcBef>
+                <a:spcPts val="300"/>
+              </a:spcBef>
+              <a:defRPr sz="1200">
+                <a:solidFill>
+                  <a:srgbClr val="232D37"/>
+                </a:solidFill>
+                <a:latin typeface="Aptos"/>
+              </a:defRPr>
+            </a:pPr>
+            <a:r>
+              <a:t>Income tax</a:t>
+            </a:r>
+          </a:p>
+          <a:p>
+            <a:pPr>
+              <a:spcBef>
+                <a:spcPts val="300"/>
+              </a:spcBef>
+              <a:defRPr sz="1200">
+                <a:solidFill>
+                  <a:srgbClr val="232D37"/>
+                </a:solidFill>
+                <a:latin typeface="Aptos"/>
+              </a:defRPr>
+            </a:pPr>
+            <a:r>
+              <a:t>IRMAA surcharge</a:t>
+            </a:r>
+          </a:p>
+          <a:p>
+            <a:pPr>
+              <a:spcBef>
+                <a:spcPts val="300"/>
+              </a:spcBef>
+              <a:defRPr sz="1200">
+                <a:solidFill>
+                  <a:srgbClr val="232D37"/>
+                </a:solidFill>
+                <a:latin typeface="Aptos"/>
+              </a:defRPr>
+            </a:pPr>
+            <a:r>
+              <a:t>AUM fee</a:t>
+            </a:r>
+          </a:p>
+          <a:p>
+            <a:pPr>
+              <a:spcBef>
+                <a:spcPts val="300"/>
+              </a:spcBef>
+              <a:defRPr sz="1200">
+                <a:solidFill>
+                  <a:srgbClr val="232D37"/>
+                </a:solidFill>
+                <a:latin typeface="Aptos"/>
+              </a:defRPr>
+            </a:pPr>
+            <a:r>
+              <a:t>One shared expense pool</a:t>
+            </a:r>
+          </a:p>
+        </p:txBody>
+      </p:sp>
+      <p:sp>
+        <p:nvSpPr>
+          <p:cNvPr id="5" name="Rectangle 4"/>
+          <p:cNvSpPr/>
+          <p:nvPr/>
+        </p:nvSpPr>
+        <p:spPr>
+          <a:xfrm>
+            <a:off x="502920" y="1234440"/>
+            <a:ext cx="82296" cy="4480560"/>
+          </a:xfrm>
+          <a:prstGeom prst="rect">
+            <a:avLst/>
+          </a:prstGeom>
+          <a:solidFill>
+            <a:srgbClr val="266EB2"/>
+          </a:solidFill>
+          <a:ln>
+            <a:noFill/>
+          </a:ln>
+        </p:spPr>
+        <p:style>
+          <a:lnRef idx="1">
+            <a:schemeClr val="accent1"/>
+          </a:lnRef>
+          <a:fillRef idx="3">
+            <a:schemeClr val="accent1"/>
+          </a:fillRef>
+          <a:effectRef idx="2">
+            <a:schemeClr val="accent1"/>
+          </a:effectRef>
+          <a:fontRef idx="minor">
+            <a:schemeClr val="lt1"/>
+          </a:fontRef>
+        </p:style>
+        <p:txBody>
+          <a:bodyPr rtlCol="0" anchor="ctr"/>
+          <a:lstStyle/>
+          <a:p>
+            <a:pPr algn="ctr"/>
+          </a:p>
+        </p:txBody>
+      </p:sp>
+      <p:sp>
+        <p:nvSpPr>
+          <p:cNvPr id="6" name="Rounded Rectangle 5"/>
+          <p:cNvSpPr/>
+          <p:nvPr/>
+        </p:nvSpPr>
+        <p:spPr>
+          <a:xfrm>
+            <a:off x="3401568" y="1234440"/>
+            <a:ext cx="2606040" cy="4480560"/>
+          </a:xfrm>
+          <a:prstGeom prst="roundRect">
+            <a:avLst/>
+          </a:prstGeom>
+          <a:solidFill>
+            <a:srgbClr val="EAF9F4"/>
+          </a:solidFill>
+          <a:ln w="13970">
+            <a:solidFill>
+              <a:srgbClr val="429761"/>
+            </a:solidFill>
+          </a:ln>
+        </p:spPr>
+        <p:style>
+          <a:lnRef idx="1">
+            <a:schemeClr val="accent1"/>
+          </a:lnRef>
+          <a:fillRef idx="3">
+            <a:schemeClr val="accent1"/>
+          </a:fillRef>
+          <a:effectRef idx="2">
+            <a:schemeClr val="accent1"/>
+          </a:effectRef>
+          <a:fontRef idx="minor">
+            <a:schemeClr val="lt1"/>
+          </a:fontRef>
+        </p:style>
+        <p:txBody>
+          <a:bodyPr rtlCol="0" anchor="ctr" lIns="182880" rIns="100584" tIns="91440"/>
+          <a:lstStyle/>
+          <a:p>
+            <a:pPr algn="ctr">
+              <a:defRPr sz="1700" b="1">
+                <a:solidFill>
+                  <a:srgbClr val="232D37"/>
+                </a:solidFill>
+                <a:latin typeface="Aptos Display"/>
+              </a:defRPr>
+            </a:pPr>
+            <a:r>
+              <a:t>Funding order</a:t>
+            </a:r>
+          </a:p>
+          <a:p>
+            <a:pPr>
+              <a:spcBef>
+                <a:spcPts val="300"/>
+              </a:spcBef>
+              <a:defRPr sz="1200">
+                <a:solidFill>
+                  <a:srgbClr val="232D37"/>
+                </a:solidFill>
+                <a:latin typeface="Aptos"/>
+              </a:defRPr>
+            </a:pPr>
+            <a:r>
+              <a:t>1. Household cash income</a:t>
+            </a:r>
+          </a:p>
+          <a:p>
+            <a:pPr>
+              <a:spcBef>
+                <a:spcPts val="300"/>
+              </a:spcBef>
+              <a:defRPr sz="1200">
+                <a:solidFill>
+                  <a:srgbClr val="232D37"/>
+                </a:solidFill>
+                <a:latin typeface="Aptos"/>
+              </a:defRPr>
+            </a:pPr>
+            <a:r>
+              <a:t>2. Dividends from opted-in portfolios</a:t>
+            </a:r>
+          </a:p>
+          <a:p>
+            <a:pPr>
+              <a:spcBef>
+                <a:spcPts val="300"/>
+              </a:spcBef>
+              <a:defRPr sz="1200">
+                <a:solidFill>
+                  <a:srgbClr val="232D37"/>
+                </a:solidFill>
+                <a:latin typeface="Aptos"/>
+              </a:defRPr>
+            </a:pPr>
+            <a:r>
+              <a:t>3. Sales from opted-in portfolios</a:t>
+            </a:r>
+          </a:p>
+          <a:p>
+            <a:pPr>
+              <a:spcBef>
+                <a:spcPts val="300"/>
+              </a:spcBef>
+              <a:defRPr sz="1200">
+                <a:solidFill>
+                  <a:srgbClr val="232D37"/>
+                </a:solidFill>
+                <a:latin typeface="Aptos"/>
+              </a:defRPr>
+            </a:pPr>
+            <a:r>
+              <a:t>4. Unfunded shortfall</a:t>
+            </a:r>
+          </a:p>
+        </p:txBody>
+      </p:sp>
+      <p:sp>
+        <p:nvSpPr>
+          <p:cNvPr id="7" name="Rectangle 6"/>
+          <p:cNvSpPr/>
+          <p:nvPr/>
+        </p:nvSpPr>
+        <p:spPr>
+          <a:xfrm>
+            <a:off x="3401568" y="1234440"/>
+            <a:ext cx="82296" cy="4480560"/>
+          </a:xfrm>
+          <a:prstGeom prst="rect">
+            <a:avLst/>
+          </a:prstGeom>
+          <a:solidFill>
+            <a:srgbClr val="429761"/>
+          </a:solidFill>
+          <a:ln>
+            <a:noFill/>
+          </a:ln>
+        </p:spPr>
+        <p:style>
+          <a:lnRef idx="1">
+            <a:schemeClr val="accent1"/>
+          </a:lnRef>
+          <a:fillRef idx="3">
+            <a:schemeClr val="accent1"/>
+          </a:fillRef>
+          <a:effectRef idx="2">
+            <a:schemeClr val="accent1"/>
+          </a:effectRef>
+          <a:fontRef idx="minor">
+            <a:schemeClr val="lt1"/>
+          </a:fontRef>
+        </p:style>
+        <p:txBody>
+          <a:bodyPr rtlCol="0" anchor="ctr"/>
+          <a:lstStyle/>
+          <a:p>
+            <a:pPr algn="ctr"/>
+          </a:p>
+        </p:txBody>
+      </p:sp>
+      <p:sp>
+        <p:nvSpPr>
+          <p:cNvPr id="8" name="Rounded Rectangle 7"/>
+          <p:cNvSpPr/>
+          <p:nvPr/>
+        </p:nvSpPr>
+        <p:spPr>
+          <a:xfrm>
+            <a:off x="6300216" y="1234440"/>
+            <a:ext cx="2606040" cy="4480560"/>
           </a:xfrm>
           <a:prstGeom prst="roundRect">
             <a:avLst/>
@@ -4084,7 +5850,7 @@
           <a:lstStyle/>
           <a:p>
             <a:pPr algn="ctr">
-              <a:defRPr sz="1800" b="1">
+              <a:defRPr sz="1700" b="1">
                 <a:solidFill>
                   <a:srgbClr val="232D37"/>
                 </a:solidFill>
@@ -4092,68 +5858,68 @@
               </a:defRPr>
             </a:pPr>
             <a:r>
-              <a:t>Before</a:t>
-            </a:r>
-          </a:p>
-          <a:p>
-            <a:pPr>
-              <a:spcBef>
-                <a:spcPts val="300"/>
-              </a:spcBef>
-              <a:defRPr sz="1300">
-                <a:solidFill>
-                  <a:srgbClr val="232D37"/>
-                </a:solidFill>
-                <a:latin typeface="Aptos"/>
-              </a:defRPr>
-            </a:pPr>
-            <a:r>
-              <a:t>Projection by year</a:t>
-            </a:r>
-          </a:p>
-          <a:p>
-            <a:pPr>
-              <a:spcBef>
-                <a:spcPts val="300"/>
-              </a:spcBef>
-              <a:defRPr sz="1300">
-                <a:solidFill>
-                  <a:srgbClr val="232D37"/>
-                </a:solidFill>
-                <a:latin typeface="Aptos"/>
-              </a:defRPr>
-            </a:pPr>
-            <a:r>
-              <a:t>One combined Brokerage portfolios sheet</a:t>
-            </a:r>
-          </a:p>
-          <a:p>
-            <a:pPr>
-              <a:spcBef>
-                <a:spcPts val="300"/>
-              </a:spcBef>
-              <a:defRPr sz="1300">
-                <a:solidFill>
-                  <a:srgbClr val="232D37"/>
-                </a:solidFill>
-                <a:latin typeface="Aptos"/>
-              </a:defRPr>
-            </a:pPr>
-            <a:r>
-              <a:t>Detail mixed across people, portfolios, and years</a:t>
-            </a:r>
-          </a:p>
-        </p:txBody>
-      </p:sp>
-      <p:sp>
-        <p:nvSpPr>
-          <p:cNvPr id="5" name="Rectangle 4"/>
+              <a:t>Tax fixed point</a:t>
+            </a:r>
+          </a:p>
+          <a:p>
+            <a:pPr>
+              <a:spcBef>
+                <a:spcPts val="300"/>
+              </a:spcBef>
+              <a:defRPr sz="1200">
+                <a:solidFill>
+                  <a:srgbClr val="232D37"/>
+                </a:solidFill>
+                <a:latin typeface="Aptos"/>
+              </a:defRPr>
+            </a:pPr>
+            <a:r>
+              <a:t>Tax → expenses → sales → LTCG → tax</a:t>
+            </a:r>
+          </a:p>
+          <a:p>
+            <a:pPr>
+              <a:spcBef>
+                <a:spcPts val="300"/>
+              </a:spcBef>
+              <a:defRPr sz="1200">
+                <a:solidFill>
+                  <a:srgbClr val="232D37"/>
+                </a:solidFill>
+                <a:latin typeface="Aptos"/>
+              </a:defRPr>
+            </a:pPr>
+            <a:r>
+              <a:t>Iterates to convergence</a:t>
+            </a:r>
+          </a:p>
+          <a:p>
+            <a:pPr>
+              <a:spcBef>
+                <a:spcPts val="300"/>
+              </a:spcBef>
+              <a:defRPr sz="1200">
+                <a:solidFill>
+                  <a:srgbClr val="232D37"/>
+                </a:solidFill>
+                <a:latin typeface="Aptos"/>
+              </a:defRPr>
+            </a:pPr>
+            <a:r>
+              <a:t>SCGL consumed once after convergence</a:t>
+            </a:r>
+          </a:p>
+        </p:txBody>
+      </p:sp>
+      <p:sp>
+        <p:nvSpPr>
+          <p:cNvPr id="9" name="Rectangle 8"/>
           <p:cNvSpPr/>
           <p:nvPr/>
         </p:nvSpPr>
         <p:spPr>
           <a:xfrm>
-            <a:off x="594360" y="1234440"/>
+            <a:off x="6300216" y="1234440"/>
             <a:ext cx="82296" cy="4480560"/>
           </a:xfrm>
           <a:prstGeom prst="rect">
@@ -4190,24 +5956,24 @@
       </p:sp>
       <p:sp>
         <p:nvSpPr>
-          <p:cNvPr id="6" name="Rounded Rectangle 5"/>
+          <p:cNvPr id="10" name="Rounded Rectangle 9"/>
           <p:cNvSpPr/>
           <p:nvPr/>
         </p:nvSpPr>
         <p:spPr>
           <a:xfrm>
-            <a:off x="4407408" y="1234440"/>
-            <a:ext cx="3383280" cy="4480560"/>
+            <a:off x="9198864" y="1234440"/>
+            <a:ext cx="2606040" cy="4480560"/>
           </a:xfrm>
           <a:prstGeom prst="roundRect">
             <a:avLst/>
           </a:prstGeom>
           <a:solidFill>
-            <a:srgbClr val="EAF9F4"/>
+            <a:srgbClr val="F7EFFF"/>
           </a:solidFill>
           <a:ln w="13970">
             <a:solidFill>
-              <a:srgbClr val="429761"/>
+              <a:srgbClr val="7852B0"/>
             </a:solidFill>
           </a:ln>
         </p:spPr>
@@ -4230,7 +5996,7 @@
           <a:lstStyle/>
           <a:p>
             <a:pPr algn="ctr">
-              <a:defRPr sz="1800" b="1">
+              <a:defRPr sz="1700" b="1">
                 <a:solidFill>
                   <a:srgbClr val="232D37"/>
                 </a:solidFill>
@@ -4238,75 +6004,91 @@
               </a:defRPr>
             </a:pPr>
             <a:r>
-              <a:t>Now</a:t>
-            </a:r>
-          </a:p>
-          <a:p>
-            <a:pPr>
-              <a:spcBef>
-                <a:spcPts val="300"/>
-              </a:spcBef>
-              <a:defRPr sz="1300">
-                <a:solidFill>
-                  <a:srgbClr val="232D37"/>
-                </a:solidFill>
-                <a:latin typeface="Aptos"/>
-              </a:defRPr>
-            </a:pPr>
-            <a:r>
-              <a:t>Projection by year remains first</a:t>
-            </a:r>
-          </a:p>
-          <a:p>
-            <a:pPr>
-              <a:spcBef>
-                <a:spcPts val="300"/>
-              </a:spcBef>
-              <a:defRPr sz="1300">
-                <a:solidFill>
-                  <a:srgbClr val="232D37"/>
-                </a:solidFill>
-                <a:latin typeface="Aptos"/>
-              </a:defRPr>
-            </a:pPr>
-            <a:r>
-              <a:t>Every enabled account gets its own sheet</a:t>
-            </a:r>
-          </a:p>
-          <a:p>
-            <a:pPr>
-              <a:spcBef>
-                <a:spcPts val="300"/>
-              </a:spcBef>
-              <a:defRPr sz="1300">
-                <a:solidFill>
-                  <a:srgbClr val="232D37"/>
-                </a:solidFill>
-                <a:latin typeface="Aptos"/>
-              </a:defRPr>
-            </a:pPr>
-            <a:r>
-              <a:t>Sheet count and names follow the plan’s active accounts</a:t>
-            </a:r>
-          </a:p>
-        </p:txBody>
-      </p:sp>
-      <p:sp>
-        <p:nvSpPr>
-          <p:cNvPr id="7" name="Rectangle 6"/>
+              <a:t>New experiences</a:t>
+            </a:r>
+          </a:p>
+          <a:p>
+            <a:pPr>
+              <a:spcBef>
+                <a:spcPts val="300"/>
+              </a:spcBef>
+              <a:defRPr sz="1200">
+                <a:solidFill>
+                  <a:srgbClr val="232D37"/>
+                </a:solidFill>
+                <a:latin typeface="Aptos"/>
+              </a:defRPr>
+            </a:pPr>
+            <a:r>
+              <a:t>Expense chart</a:t>
+            </a:r>
+          </a:p>
+          <a:p>
+            <a:pPr>
+              <a:spcBef>
+                <a:spcPts val="300"/>
+              </a:spcBef>
+              <a:defRPr sz="1200">
+                <a:solidFill>
+                  <a:srgbClr val="232D37"/>
+                </a:solidFill>
+                <a:latin typeface="Aptos"/>
+              </a:defRPr>
+            </a:pPr>
+            <a:r>
+              <a:t>LTC inputs and deductions</a:t>
+            </a:r>
+          </a:p>
+          <a:p>
+            <a:pPr>
+              <a:spcBef>
+                <a:spcPts val="300"/>
+              </a:spcBef>
+              <a:defRPr sz="1200">
+                <a:solidFill>
+                  <a:srgbClr val="232D37"/>
+                </a:solidFill>
+                <a:latin typeface="Aptos"/>
+              </a:defRPr>
+            </a:pPr>
+            <a:r>
+              <a:t>AUM and IRA stretch</a:t>
+            </a:r>
+          </a:p>
+          <a:p>
+            <a:pPr>
+              <a:spcBef>
+                <a:spcPts val="300"/>
+              </a:spcBef>
+              <a:defRPr sz="1200">
+                <a:solidFill>
+                  <a:srgbClr val="232D37"/>
+                </a:solidFill>
+                <a:latin typeface="Aptos"/>
+              </a:defRPr>
+            </a:pPr>
+            <a:r>
+              <a:t>Ask about this plan chat</a:t>
+            </a:r>
+          </a:p>
+        </p:txBody>
+      </p:sp>
+      <p:sp>
+        <p:nvSpPr>
+          <p:cNvPr id="11" name="Rectangle 10"/>
           <p:cNvSpPr/>
           <p:nvPr/>
         </p:nvSpPr>
         <p:spPr>
           <a:xfrm>
-            <a:off x="4407408" y="1234440"/>
+            <a:off x="9198864" y="1234440"/>
             <a:ext cx="82296" cy="4480560"/>
           </a:xfrm>
           <a:prstGeom prst="rect">
             <a:avLst/>
           </a:prstGeom>
           <a:solidFill>
-            <a:srgbClr val="429761"/>
+            <a:srgbClr val="7852B0"/>
           </a:solidFill>
           <a:ln>
             <a:noFill/>
@@ -4336,153 +6118,7 @@
       </p:sp>
       <p:sp>
         <p:nvSpPr>
-          <p:cNvPr id="8" name="Rounded Rectangle 7"/>
-          <p:cNvSpPr/>
-          <p:nvPr/>
-        </p:nvSpPr>
-        <p:spPr>
-          <a:xfrm>
-            <a:off x="8220456" y="1234440"/>
-            <a:ext cx="3383280" cy="4480560"/>
-          </a:xfrm>
-          <a:prstGeom prst="roundRect">
-            <a:avLst/>
-          </a:prstGeom>
-          <a:solidFill>
-            <a:srgbClr val="E9F4FF"/>
-          </a:solidFill>
-          <a:ln w="13970">
-            <a:solidFill>
-              <a:srgbClr val="266EB2"/>
-            </a:solidFill>
-          </a:ln>
-        </p:spPr>
-        <p:style>
-          <a:lnRef idx="1">
-            <a:schemeClr val="accent1"/>
-          </a:lnRef>
-          <a:fillRef idx="3">
-            <a:schemeClr val="accent1"/>
-          </a:fillRef>
-          <a:effectRef idx="2">
-            <a:schemeClr val="accent1"/>
-          </a:effectRef>
-          <a:fontRef idx="minor">
-            <a:schemeClr val="lt1"/>
-          </a:fontRef>
-        </p:style>
-        <p:txBody>
-          <a:bodyPr rtlCol="0" anchor="ctr" lIns="182880" rIns="100584" tIns="91440"/>
-          <a:lstStyle/>
-          <a:p>
-            <a:pPr algn="ctr">
-              <a:defRPr sz="1800" b="1">
-                <a:solidFill>
-                  <a:srgbClr val="232D37"/>
-                </a:solidFill>
-                <a:latin typeface="Aptos Display"/>
-              </a:defRPr>
-            </a:pPr>
-            <a:r>
-              <a:t>Why it matters</a:t>
-            </a:r>
-          </a:p>
-          <a:p>
-            <a:pPr>
-              <a:spcBef>
-                <a:spcPts val="300"/>
-              </a:spcBef>
-              <a:defRPr sz="1300">
-                <a:solidFill>
-                  <a:srgbClr val="232D37"/>
-                </a:solidFill>
-                <a:latin typeface="Aptos"/>
-              </a:defRPr>
-            </a:pPr>
-            <a:r>
-              <a:t>A single account has a single year-by-year view</a:t>
-            </a:r>
-          </a:p>
-          <a:p>
-            <a:pPr>
-              <a:spcBef>
-                <a:spcPts val="300"/>
-              </a:spcBef>
-              <a:defRPr sz="1300">
-                <a:solidFill>
-                  <a:srgbClr val="232D37"/>
-                </a:solidFill>
-                <a:latin typeface="Aptos"/>
-              </a:defRPr>
-            </a:pPr>
-            <a:r>
-              <a:t>Brokerage, pre-tax IRA, and Roth IRA details are separated</a:t>
-            </a:r>
-          </a:p>
-          <a:p>
-            <a:pPr>
-              <a:spcBef>
-                <a:spcPts val="300"/>
-              </a:spcBef>
-              <a:defRPr sz="1300">
-                <a:solidFill>
-                  <a:srgbClr val="232D37"/>
-                </a:solidFill>
-                <a:latin typeface="Aptos"/>
-              </a:defRPr>
-            </a:pPr>
-            <a:r>
-              <a:t>Disabled accounts never create sheets</a:t>
-            </a:r>
-          </a:p>
-        </p:txBody>
-      </p:sp>
-      <p:sp>
-        <p:nvSpPr>
-          <p:cNvPr id="9" name="Rectangle 8"/>
-          <p:cNvSpPr/>
-          <p:nvPr/>
-        </p:nvSpPr>
-        <p:spPr>
-          <a:xfrm>
-            <a:off x="8220456" y="1234440"/>
-            <a:ext cx="82296" cy="4480560"/>
-          </a:xfrm>
-          <a:prstGeom prst="rect">
-            <a:avLst/>
-          </a:prstGeom>
-          <a:solidFill>
-            <a:srgbClr val="266EB2"/>
-          </a:solidFill>
-          <a:ln>
-            <a:noFill/>
-          </a:ln>
-        </p:spPr>
-        <p:style>
-          <a:lnRef idx="1">
-            <a:schemeClr val="accent1"/>
-          </a:lnRef>
-          <a:fillRef idx="3">
-            <a:schemeClr val="accent1"/>
-          </a:fillRef>
-          <a:effectRef idx="2">
-            <a:schemeClr val="accent1"/>
-          </a:effectRef>
-          <a:fontRef idx="minor">
-            <a:schemeClr val="lt1"/>
-          </a:fontRef>
-        </p:style>
-        <p:txBody>
-          <a:bodyPr rtlCol="0" anchor="ctr"/>
-          <a:lstStyle/>
-          <a:p>
-            <a:pPr algn="ctr"/>
-          </a:p>
-        </p:txBody>
-      </p:sp>
-      <p:sp>
-        <p:nvSpPr>
-          <p:cNvPr id="10" name="Rectangle 9"/>
+          <p:cNvPr id="12" name="Rectangle 11"/>
           <p:cNvSpPr/>
           <p:nvPr/>
         </p:nvSpPr>
@@ -4525,7 +6161,7 @@
       </p:sp>
       <p:sp>
         <p:nvSpPr>
-          <p:cNvPr id="11" name="TextBox 10"/>
+          <p:cNvPr id="13" name="TextBox 12"/>
           <p:cNvSpPr txBox="1"/>
           <p:nvPr/>
         </p:nvSpPr>
@@ -4554,7 +6190,7 @@
               </a:defRPr>
             </a:pPr>
             <a:r>
-              <a:t>Retirement Income Planner • Architecture overview • Account-sheet Excel export update</a:t>
+              <a:t>Retirement Income Planner • Architecture overview • Household-expense, LTC, and plan-chat update</a:t>
             </a:r>
           </a:p>
         </p:txBody>
@@ -4616,7 +6252,7 @@
               </a:defRPr>
             </a:pPr>
             <a:r>
-              <a:t>Workbook construction flow</a:t>
+              <a:t>Household expense funding waterfall</a:t>
             </a:r>
           </a:p>
         </p:txBody>
@@ -4652,7 +6288,7 @@
               </a:defRPr>
             </a:pPr>
             <a:r>
-              <a:t>The exporter transforms the cached projection into a deterministic workbook without recomputing the plan.</a:t>
+              <a:t>A portfolio now participates in paying expenses only when its Pay expenses setting is checked.</a:t>
             </a:r>
           </a:p>
         </p:txBody>
@@ -4665,8 +6301,122 @@
         </p:nvSpPr>
         <p:spPr>
           <a:xfrm>
-            <a:off x="502920" y="1325880"/>
-            <a:ext cx="2057400" cy="1261872"/>
+            <a:off x="502920" y="1234440"/>
+            <a:ext cx="2148840" cy="1325880"/>
+          </a:xfrm>
+          <a:prstGeom prst="roundRect">
+            <a:avLst/>
+          </a:prstGeom>
+          <a:solidFill>
+            <a:srgbClr val="FFF6E8"/>
+          </a:solidFill>
+          <a:ln w="13970">
+            <a:solidFill>
+              <a:srgbClr val="E5892A"/>
+            </a:solidFill>
+          </a:ln>
+        </p:spPr>
+        <p:style>
+          <a:lnRef idx="1">
+            <a:schemeClr val="accent1"/>
+          </a:lnRef>
+          <a:fillRef idx="3">
+            <a:schemeClr val="accent1"/>
+          </a:fillRef>
+          <a:effectRef idx="2">
+            <a:schemeClr val="accent1"/>
+          </a:effectRef>
+          <a:fontRef idx="minor">
+            <a:schemeClr val="lt1"/>
+          </a:fontRef>
+        </p:style>
+        <p:txBody>
+          <a:bodyPr rtlCol="0" anchor="ctr" lIns="182880" rIns="100584" tIns="91440"/>
+          <a:lstStyle/>
+          <a:p>
+            <a:pPr algn="ctr">
+              <a:defRPr sz="1600" b="1">
+                <a:solidFill>
+                  <a:srgbClr val="232D37"/>
+                </a:solidFill>
+                <a:latin typeface="Aptos Display"/>
+              </a:defRPr>
+            </a:pPr>
+            <a:r>
+              <a:t>Expense pool</a:t>
+            </a:r>
+          </a:p>
+          <a:p>
+            <a:pPr>
+              <a:spcBef>
+                <a:spcPts val="300"/>
+              </a:spcBef>
+              <a:defRPr sz="1100">
+                <a:solidFill>
+                  <a:srgbClr val="232D37"/>
+                </a:solidFill>
+                <a:latin typeface="Aptos"/>
+              </a:defRPr>
+            </a:pPr>
+            <a:r>
+              <a:t>Living + LTC + tax + IRMAA + AUM fee</a:t>
+            </a:r>
+          </a:p>
+        </p:txBody>
+      </p:sp>
+      <p:sp>
+        <p:nvSpPr>
+          <p:cNvPr id="5" name="Rectangle 4"/>
+          <p:cNvSpPr/>
+          <p:nvPr/>
+        </p:nvSpPr>
+        <p:spPr>
+          <a:xfrm>
+            <a:off x="502920" y="1234440"/>
+            <a:ext cx="82296" cy="1325880"/>
+          </a:xfrm>
+          <a:prstGeom prst="rect">
+            <a:avLst/>
+          </a:prstGeom>
+          <a:solidFill>
+            <a:srgbClr val="E5892A"/>
+          </a:solidFill>
+          <a:ln>
+            <a:noFill/>
+          </a:ln>
+        </p:spPr>
+        <p:style>
+          <a:lnRef idx="1">
+            <a:schemeClr val="accent1"/>
+          </a:lnRef>
+          <a:fillRef idx="3">
+            <a:schemeClr val="accent1"/>
+          </a:fillRef>
+          <a:effectRef idx="2">
+            <a:schemeClr val="accent1"/>
+          </a:effectRef>
+          <a:fontRef idx="minor">
+            <a:schemeClr val="lt1"/>
+          </a:fontRef>
+        </p:style>
+        <p:txBody>
+          <a:bodyPr rtlCol="0" anchor="ctr"/>
+          <a:lstStyle/>
+          <a:p>
+            <a:pPr algn="ctr"/>
+          </a:p>
+        </p:txBody>
+      </p:sp>
+      <p:sp>
+        <p:nvSpPr>
+          <p:cNvPr id="6" name="Rounded Rectangle 5"/>
+          <p:cNvSpPr/>
+          <p:nvPr/>
+        </p:nvSpPr>
+        <p:spPr>
+          <a:xfrm>
+            <a:off x="2971800" y="1234440"/>
+            <a:ext cx="2148840" cy="1325880"/>
           </a:xfrm>
           <a:prstGeom prst="roundRect">
             <a:avLst/>
@@ -4707,7 +6457,7 @@
               </a:defRPr>
             </a:pPr>
             <a:r>
-              <a:t>lastProjection</a:t>
+              <a:t>1. Cash income</a:t>
             </a:r>
           </a:p>
           <a:p>
@@ -4723,7 +6473,7 @@
               </a:defRPr>
             </a:pPr>
             <a:r>
-              <a:t>Cached result from app.js</a:t>
+              <a:t>Wages + SS + pension + rental + RMD</a:t>
             </a:r>
           </a:p>
           <a:p>
@@ -4739,21 +6489,21 @@
               </a:defRPr>
             </a:pPr>
             <a:r>
-              <a:t>No new calculation</a:t>
-            </a:r>
-          </a:p>
-        </p:txBody>
-      </p:sp>
-      <p:sp>
-        <p:nvSpPr>
-          <p:cNvPr id="5" name="Rectangle 4"/>
+              <a:t>Roth conversions excluded</a:t>
+            </a:r>
+          </a:p>
+        </p:txBody>
+      </p:sp>
+      <p:sp>
+        <p:nvSpPr>
+          <p:cNvPr id="7" name="Rectangle 6"/>
           <p:cNvSpPr/>
           <p:nvPr/>
         </p:nvSpPr>
         <p:spPr>
           <a:xfrm>
-            <a:off x="502920" y="1325880"/>
-            <a:ext cx="82296" cy="1261872"/>
+            <a:off x="2971800" y="1234440"/>
+            <a:ext cx="82296" cy="1325880"/>
           </a:xfrm>
           <a:prstGeom prst="rect">
             <a:avLst/>
@@ -4789,14 +6539,14 @@
       </p:sp>
       <p:sp>
         <p:nvSpPr>
-          <p:cNvPr id="6" name="Rounded Rectangle 5"/>
+          <p:cNvPr id="8" name="Rounded Rectangle 7"/>
           <p:cNvSpPr/>
           <p:nvPr/>
         </p:nvSpPr>
         <p:spPr>
           <a:xfrm>
-            <a:off x="2907792" y="1325880"/>
-            <a:ext cx="2057400" cy="1261872"/>
+            <a:off x="5440680" y="1234440"/>
+            <a:ext cx="2148840" cy="1325880"/>
           </a:xfrm>
           <a:prstGeom prst="roundRect">
             <a:avLst/>
@@ -4837,53 +6587,53 @@
               </a:defRPr>
             </a:pPr>
             <a:r>
-              <a:t>Projection by year</a:t>
-            </a:r>
-          </a:p>
-          <a:p>
-            <a:pPr>
-              <a:spcBef>
-                <a:spcPts val="300"/>
-              </a:spcBef>
-              <a:defRPr sz="1100">
-                <a:solidFill>
-                  <a:srgbClr val="232D37"/>
-                </a:solidFill>
-                <a:latin typeface="Aptos"/>
-              </a:defRPr>
-            </a:pPr>
-            <a:r>
-              <a:t>Always first</a:t>
-            </a:r>
-          </a:p>
-          <a:p>
-            <a:pPr>
-              <a:spcBef>
-                <a:spcPts val="300"/>
-              </a:spcBef>
-              <a:defRPr sz="1100">
-                <a:solidFill>
-                  <a:srgbClr val="232D37"/>
-                </a:solidFill>
-                <a:latin typeface="Aptos"/>
-              </a:defRPr>
-            </a:pPr>
-            <a:r>
-              <a:t>One row per modeled year</a:t>
-            </a:r>
-          </a:p>
-        </p:txBody>
-      </p:sp>
-      <p:sp>
-        <p:nvSpPr>
-          <p:cNvPr id="7" name="Rectangle 6"/>
+              <a:t>2. Dividends</a:t>
+            </a:r>
+          </a:p>
+          <a:p>
+            <a:pPr>
+              <a:spcBef>
+                <a:spcPts val="300"/>
+              </a:spcBef>
+              <a:defRPr sz="1000">
+                <a:solidFill>
+                  <a:srgbClr val="232D37"/>
+                </a:solidFill>
+                <a:latin typeface="Aptos"/>
+              </a:defRPr>
+            </a:pPr>
+            <a:r>
+              <a:t>Only in-range non-IDGT portfolios with Pay expenses checked</a:t>
+            </a:r>
+          </a:p>
+          <a:p>
+            <a:pPr>
+              <a:spcBef>
+                <a:spcPts val="300"/>
+              </a:spcBef>
+              <a:defRPr sz="1000">
+                <a:solidFill>
+                  <a:srgbClr val="232D37"/>
+                </a:solidFill>
+                <a:latin typeface="Aptos"/>
+              </a:defRPr>
+            </a:pPr>
+            <a:r>
+              <a:t>Shared pro rata to ODIV</a:t>
+            </a:r>
+          </a:p>
+        </p:txBody>
+      </p:sp>
+      <p:sp>
+        <p:nvSpPr>
+          <p:cNvPr id="9" name="Rectangle 8"/>
           <p:cNvSpPr/>
           <p:nvPr/>
         </p:nvSpPr>
         <p:spPr>
           <a:xfrm>
-            <a:off x="2907792" y="1325880"/>
-            <a:ext cx="82296" cy="1261872"/>
+            <a:off x="5440680" y="1234440"/>
+            <a:ext cx="82296" cy="1325880"/>
           </a:xfrm>
           <a:prstGeom prst="rect">
             <a:avLst/>
@@ -4919,144 +6669,14 @@
       </p:sp>
       <p:sp>
         <p:nvSpPr>
-          <p:cNvPr id="8" name="Rounded Rectangle 7"/>
-          <p:cNvSpPr/>
-          <p:nvPr/>
-        </p:nvSpPr>
-        <p:spPr>
-          <a:xfrm>
-            <a:off x="5312664" y="1325880"/>
-            <a:ext cx="2057400" cy="1261872"/>
-          </a:xfrm>
-          <a:prstGeom prst="roundRect">
-            <a:avLst/>
-          </a:prstGeom>
-          <a:solidFill>
-            <a:srgbClr val="FFF6E8"/>
-          </a:solidFill>
-          <a:ln w="13970">
-            <a:solidFill>
-              <a:srgbClr val="E5892A"/>
-            </a:solidFill>
-          </a:ln>
-        </p:spPr>
-        <p:style>
-          <a:lnRef idx="1">
-            <a:schemeClr val="accent1"/>
-          </a:lnRef>
-          <a:fillRef idx="3">
-            <a:schemeClr val="accent1"/>
-          </a:fillRef>
-          <a:effectRef idx="2">
-            <a:schemeClr val="accent1"/>
-          </a:effectRef>
-          <a:fontRef idx="minor">
-            <a:schemeClr val="lt1"/>
-          </a:fontRef>
-        </p:style>
-        <p:txBody>
-          <a:bodyPr rtlCol="0" anchor="ctr" lIns="182880" rIns="100584" tIns="91440"/>
-          <a:lstStyle/>
-          <a:p>
-            <a:pPr algn="ctr">
-              <a:defRPr sz="1600" b="1">
-                <a:solidFill>
-                  <a:srgbClr val="232D37"/>
-                </a:solidFill>
-                <a:latin typeface="Aptos Display"/>
-              </a:defRPr>
-            </a:pPr>
-            <a:r>
-              <a:t>Enabled accounts</a:t>
-            </a:r>
-          </a:p>
-          <a:p>
-            <a:pPr>
-              <a:spcBef>
-                <a:spcPts val="300"/>
-              </a:spcBef>
-              <a:defRPr sz="1100">
-                <a:solidFill>
-                  <a:srgbClr val="232D37"/>
-                </a:solidFill>
-                <a:latin typeface="Aptos"/>
-              </a:defRPr>
-            </a:pPr>
-            <a:r>
-              <a:t>Enumerate by person</a:t>
-            </a:r>
-          </a:p>
-          <a:p>
-            <a:pPr>
-              <a:spcBef>
-                <a:spcPts val="300"/>
-              </a:spcBef>
-              <a:defRPr sz="1100">
-                <a:solidFill>
-                  <a:srgbClr val="232D37"/>
-                </a:solidFill>
-                <a:latin typeface="Aptos"/>
-              </a:defRPr>
-            </a:pPr>
-            <a:r>
-              <a:t>Skip disabled items</a:t>
-            </a:r>
-          </a:p>
-        </p:txBody>
-      </p:sp>
-      <p:sp>
-        <p:nvSpPr>
-          <p:cNvPr id="9" name="Rectangle 8"/>
-          <p:cNvSpPr/>
-          <p:nvPr/>
-        </p:nvSpPr>
-        <p:spPr>
-          <a:xfrm>
-            <a:off x="5312664" y="1325880"/>
-            <a:ext cx="82296" cy="1261872"/>
-          </a:xfrm>
-          <a:prstGeom prst="rect">
-            <a:avLst/>
-          </a:prstGeom>
-          <a:solidFill>
-            <a:srgbClr val="E5892A"/>
-          </a:solidFill>
-          <a:ln>
-            <a:noFill/>
-          </a:ln>
-        </p:spPr>
-        <p:style>
-          <a:lnRef idx="1">
-            <a:schemeClr val="accent1"/>
-          </a:lnRef>
-          <a:fillRef idx="3">
-            <a:schemeClr val="accent1"/>
-          </a:fillRef>
-          <a:effectRef idx="2">
-            <a:schemeClr val="accent1"/>
-          </a:effectRef>
-          <a:fontRef idx="minor">
-            <a:schemeClr val="lt1"/>
-          </a:fontRef>
-        </p:style>
-        <p:txBody>
-          <a:bodyPr rtlCol="0" anchor="ctr"/>
-          <a:lstStyle/>
-          <a:p>
-            <a:pPr algn="ctr"/>
-          </a:p>
-        </p:txBody>
-      </p:sp>
-      <p:sp>
-        <p:nvSpPr>
           <p:cNvPr id="10" name="Rounded Rectangle 9"/>
           <p:cNvSpPr/>
           <p:nvPr/>
         </p:nvSpPr>
         <p:spPr>
           <a:xfrm>
-            <a:off x="7717536" y="1325880"/>
-            <a:ext cx="2057400" cy="1261872"/>
+            <a:off x="7909560" y="1234440"/>
+            <a:ext cx="2148840" cy="1325880"/>
           </a:xfrm>
           <a:prstGeom prst="roundRect">
             <a:avLst/>
@@ -5097,23 +6717,55 @@
               </a:defRPr>
             </a:pPr>
             <a:r>
-              <a:t>xlsxAccountSheets</a:t>
-            </a:r>
-          </a:p>
-          <a:p>
-            <a:pPr>
-              <a:spcBef>
-                <a:spcPts val="300"/>
-              </a:spcBef>
-              <a:defRPr sz="1100">
-                <a:solidFill>
-                  <a:srgbClr val="232D37"/>
-                </a:solidFill>
-                <a:latin typeface="Aptos"/>
-              </a:defRPr>
-            </a:pPr>
-            <a:r>
-              <a:t>Build one row-per-year table per account</a:t>
+              <a:t>3. Asset sales</a:t>
+            </a:r>
+          </a:p>
+          <a:p>
+            <a:pPr>
+              <a:spcBef>
+                <a:spcPts val="300"/>
+              </a:spcBef>
+              <a:defRPr sz="1000">
+                <a:solidFill>
+                  <a:srgbClr val="232D37"/>
+                </a:solidFill>
+                <a:latin typeface="Aptos"/>
+              </a:defRPr>
+            </a:pPr>
+            <a:r>
+              <a:t>Checked portfolios only</a:t>
+            </a:r>
+          </a:p>
+          <a:p>
+            <a:pPr>
+              <a:spcBef>
+                <a:spcPts val="300"/>
+              </a:spcBef>
+              <a:defRPr sz="1000">
+                <a:solidFill>
+                  <a:srgbClr val="232D37"/>
+                </a:solidFill>
+                <a:latin typeface="Aptos"/>
+              </a:defRPr>
+            </a:pPr>
+            <a:r>
+              <a:t>Shared pro rata to balance</a:t>
+            </a:r>
+          </a:p>
+          <a:p>
+            <a:pPr>
+              <a:spcBef>
+                <a:spcPts val="300"/>
+              </a:spcBef>
+              <a:defRPr sz="1000">
+                <a:solidFill>
+                  <a:srgbClr val="232D37"/>
+                </a:solidFill>
+                <a:latin typeface="Aptos"/>
+              </a:defRPr>
+            </a:pPr>
+            <a:r>
+              <a:t>Creates LTCG via gain fraction</a:t>
             </a:r>
           </a:p>
         </p:txBody>
@@ -5126,8 +6778,8 @@
         </p:nvSpPr>
         <p:spPr>
           <a:xfrm>
-            <a:off x="7717536" y="1325880"/>
-            <a:ext cx="82296" cy="1261872"/>
+            <a:off x="7909560" y="1234440"/>
+            <a:ext cx="82296" cy="1325880"/>
           </a:xfrm>
           <a:prstGeom prst="rect">
             <a:avLst/>
@@ -5169,8 +6821,8 @@
         </p:nvSpPr>
         <p:spPr>
           <a:xfrm>
-            <a:off x="10122408" y="1325880"/>
-            <a:ext cx="1554480" cy="1261872"/>
+            <a:off x="10378440" y="1234440"/>
+            <a:ext cx="1280160" cy="1325880"/>
           </a:xfrm>
           <a:prstGeom prst="roundRect">
             <a:avLst/>
@@ -5211,7 +6863,7 @@
               </a:defRPr>
             </a:pPr>
             <a:r>
-              <a:t>XLSX</a:t>
+              <a:t>4. Gap</a:t>
             </a:r>
           </a:p>
           <a:p>
@@ -5227,7 +6879,7 @@
               </a:defRPr>
             </a:pPr>
             <a:r>
-              <a:t>Append and download</a:t>
+              <a:t>expUnfunded</a:t>
             </a:r>
           </a:p>
         </p:txBody>
@@ -5240,8 +6892,8 @@
         </p:nvSpPr>
         <p:spPr>
           <a:xfrm>
-            <a:off x="10122408" y="1325880"/>
-            <a:ext cx="82296" cy="1261872"/>
+            <a:off x="10378440" y="1234440"/>
+            <a:ext cx="82296" cy="1325880"/>
           </a:xfrm>
           <a:prstGeom prst="rect">
             <a:avLst/>
@@ -5283,15 +6935,15 @@
         </p:nvCxnSpPr>
         <p:spPr>
           <a:xfrm>
-            <a:off x="2606040" y="1947672"/>
-            <a:ext cx="228600" cy="0"/>
+            <a:off x="2697480" y="1901952"/>
+            <a:ext cx="219456" cy="0"/>
           </a:xfrm>
           <a:prstGeom prst="line">
             <a:avLst/>
           </a:prstGeom>
-          <a:ln w="22860">
+          <a:ln w="21590">
             <a:solidFill>
-              <a:srgbClr val="266EB2"/>
+              <a:srgbClr val="E5892A"/>
             </a:solidFill>
           </a:ln>
         </p:spPr>
@@ -5318,15 +6970,15 @@
         </p:nvCxnSpPr>
         <p:spPr>
           <a:xfrm>
-            <a:off x="5010912" y="1947672"/>
-            <a:ext cx="228600" cy="0"/>
+            <a:off x="5166360" y="1901952"/>
+            <a:ext cx="219456" cy="0"/>
           </a:xfrm>
           <a:prstGeom prst="line">
             <a:avLst/>
           </a:prstGeom>
-          <a:ln w="22860">
+          <a:ln w="21590">
             <a:solidFill>
-              <a:srgbClr val="429761"/>
+              <a:srgbClr val="266EB2"/>
             </a:solidFill>
           </a:ln>
         </p:spPr>
@@ -5353,15 +7005,15 @@
         </p:nvCxnSpPr>
         <p:spPr>
           <a:xfrm>
-            <a:off x="7415783" y="1947672"/>
-            <a:ext cx="228600" cy="0"/>
+            <a:off x="7635240" y="1901952"/>
+            <a:ext cx="219456" cy="0"/>
           </a:xfrm>
           <a:prstGeom prst="line">
             <a:avLst/>
           </a:prstGeom>
-          <a:ln w="22860">
+          <a:ln w="21590">
             <a:solidFill>
-              <a:srgbClr val="E5892A"/>
+              <a:srgbClr val="429761"/>
             </a:solidFill>
           </a:ln>
         </p:spPr>
@@ -5388,13 +7040,13 @@
         </p:nvCxnSpPr>
         <p:spPr>
           <a:xfrm>
-            <a:off x="9820656" y="1947672"/>
-            <a:ext cx="228600" cy="0"/>
+            <a:off x="10104120" y="1901952"/>
+            <a:ext cx="219456" cy="0"/>
           </a:xfrm>
           <a:prstGeom prst="line">
             <a:avLst/>
           </a:prstGeom>
-          <a:ln w="22860">
+          <a:ln w="21590">
             <a:solidFill>
               <a:srgbClr val="7852B0"/>
             </a:solidFill>
@@ -5423,7 +7075,7 @@
         </p:nvSpPr>
         <p:spPr>
           <a:xfrm>
-            <a:off x="1005840" y="3520440"/>
+            <a:off x="960120" y="3429000"/>
             <a:ext cx="4800600" cy="1325880"/>
           </a:xfrm>
           <a:prstGeom prst="roundRect">
@@ -5465,7 +7117,7 @@
               </a:defRPr>
             </a:pPr>
             <a:r>
-              <a:t>Read-only guarantee</a:t>
+              <a:t>Portfolio behavior</a:t>
             </a:r>
           </a:p>
           <a:p>
@@ -5481,7 +7133,39 @@
               </a:defRPr>
             </a:pPr>
             <a:r>
-              <a:t>The exporter reads `lastProjection` only. It does not mutate state, write inputs, re-run `computeProjection()`, or rebuild charts.</a:t>
+              <a:t>Unchecked portfolio: dividends reinvest, no sale for expenses.</a:t>
+            </a:r>
+          </a:p>
+          <a:p>
+            <a:pPr>
+              <a:spcBef>
+                <a:spcPts val="300"/>
+              </a:spcBef>
+              <a:defRPr sz="1200">
+                <a:solidFill>
+                  <a:srgbClr val="232D37"/>
+                </a:solidFill>
+                <a:latin typeface="Aptos"/>
+              </a:defRPr>
+            </a:pPr>
+            <a:r>
+              <a:t>Checked portfolio: receives a pro-rata share of dividend and sale funding.</a:t>
+            </a:r>
+          </a:p>
+          <a:p>
+            <a:pPr>
+              <a:spcBef>
+                <a:spcPts val="300"/>
+              </a:spcBef>
+              <a:defRPr sz="1200">
+                <a:solidFill>
+                  <a:srgbClr val="232D37"/>
+                </a:solidFill>
+                <a:latin typeface="Aptos"/>
+              </a:defRPr>
+            </a:pPr>
+            <a:r>
+              <a:t>IDGT follows the same opt-in rule.</a:t>
             </a:r>
           </a:p>
         </p:txBody>
@@ -5494,7 +7178,7 @@
         </p:nvSpPr>
         <p:spPr>
           <a:xfrm>
-            <a:off x="1005840" y="3520440"/>
+            <a:off x="960120" y="3429000"/>
             <a:ext cx="82296" cy="1325880"/>
           </a:xfrm>
           <a:prstGeom prst="rect">
@@ -5537,7 +7221,7 @@
         </p:nvSpPr>
         <p:spPr>
           <a:xfrm>
-            <a:off x="6382512" y="3520440"/>
+            <a:off x="6355080" y="3429000"/>
             <a:ext cx="4800600" cy="1325880"/>
           </a:xfrm>
           <a:prstGeom prst="roundRect">
@@ -5579,7 +7263,7 @@
               </a:defRPr>
             </a:pPr>
             <a:r>
-              <a:t>Safety checks</a:t>
+              <a:t>New state fields</a:t>
             </a:r>
           </a:p>
           <a:p>
@@ -5595,7 +7279,39 @@
               </a:defRPr>
             </a:pPr>
             <a:r>
-              <a:t>If there are no projection rows or the SheetJS XLSX library is unavailable, the app alerts rather than generating an empty or broken file.</a:t>
+              <a:t>Household: living, ltc, aumFee, ui.hiddenSections.</a:t>
+            </a:r>
+          </a:p>
+          <a:p>
+            <a:pPr>
+              <a:spcBef>
+                <a:spcPts val="300"/>
+              </a:spcBef>
+              <a:defRPr sz="1200">
+                <a:solidFill>
+                  <a:srgbClr val="232D37"/>
+                </a:solidFill>
+                <a:latin typeface="Aptos"/>
+              </a:defRPr>
+            </a:pPr>
+            <a:r>
+              <a:t>Portfolio: payExp and aum.</a:t>
+            </a:r>
+          </a:p>
+          <a:p>
+            <a:pPr>
+              <a:spcBef>
+                <a:spcPts val="300"/>
+              </a:spcBef>
+              <a:defRPr sz="1200">
+                <a:solidFill>
+                  <a:srgbClr val="232D37"/>
+                </a:solidFill>
+                <a:latin typeface="Aptos"/>
+              </a:defRPr>
+            </a:pPr>
+            <a:r>
+              <a:t>IRA/Roth: aum and stretch; IRA adds conversion start age.</a:t>
             </a:r>
           </a:p>
         </p:txBody>
@@ -5608,7 +7324,7 @@
         </p:nvSpPr>
         <p:spPr>
           <a:xfrm>
-            <a:off x="6382512" y="3520440"/>
+            <a:off x="6355080" y="3429000"/>
             <a:ext cx="82296" cy="1325880"/>
           </a:xfrm>
           <a:prstGeom prst="rect">
@@ -5717,7 +7433,7 @@
               </a:defRPr>
             </a:pPr>
             <a:r>
-              <a:t>Retirement Income Planner • Architecture overview • Account-sheet Excel export update</a:t>
+              <a:t>Retirement Income Planner • Architecture overview • Household-expense, LTC, and plan-chat update</a:t>
             </a:r>
           </a:p>
         </p:txBody>
@@ -5779,7 +7495,7 @@
               </a:defRPr>
             </a:pPr>
             <a:r>
-              <a:t>Workbook anatomy: one overview plus account sheets</a:t>
+              <a:t>Tax ↔ LTCG fixed-point solver</a:t>
             </a:r>
           </a:p>
         </p:txBody>
@@ -5815,7 +7531,7 @@
               </a:defRPr>
             </a:pPr>
             <a:r>
-              <a:t>The exported workbook is a structured projection archive that follows person order and enabled account order.</a:t>
+              <a:t>Sales create LTCG, LTCG changes tax, and tax is itself part of the expense pool—so the model solves the loop rather than using a lagged approximation.</a:t>
             </a:r>
           </a:p>
         </p:txBody>
@@ -5828,8 +7544,8 @@
         </p:nvSpPr>
         <p:spPr>
           <a:xfrm>
-            <a:off x="594360" y="1143000"/>
-            <a:ext cx="2788920" cy="4526280"/>
+            <a:off x="640080" y="1188720"/>
+            <a:ext cx="2057400" cy="1234440"/>
           </a:xfrm>
           <a:prstGeom prst="roundRect">
             <a:avLst/>
@@ -5862,7 +7578,7 @@
           <a:lstStyle/>
           <a:p>
             <a:pPr algn="ctr">
-              <a:defRPr sz="1700" b="1">
+              <a:defRPr sz="1600" b="1">
                 <a:solidFill>
                   <a:srgbClr val="232D37"/>
                 </a:solidFill>
@@ -5870,87 +7586,39 @@
               </a:defRPr>
             </a:pPr>
             <a:r>
-              <a:t>Sheet 1: Projection by year</a:t>
-            </a:r>
-          </a:p>
-          <a:p>
-            <a:pPr>
-              <a:spcBef>
-                <a:spcPts val="300"/>
-              </a:spcBef>
-              <a:defRPr sz="1200">
-                <a:solidFill>
-                  <a:srgbClr val="232D37"/>
-                </a:solidFill>
-                <a:latin typeface="Aptos"/>
-              </a:defRPr>
-            </a:pPr>
-            <a:r>
-              <a:t>Always first</a:t>
-            </a:r>
-          </a:p>
-          <a:p>
-            <a:pPr>
-              <a:spcBef>
-                <a:spcPts val="300"/>
-              </a:spcBef>
-              <a:defRPr sz="1200">
-                <a:solidFill>
-                  <a:srgbClr val="232D37"/>
-                </a:solidFill>
-                <a:latin typeface="Aptos"/>
-              </a:defRPr>
-            </a:pPr>
-            <a:r>
-              <a:t>All plan-wide chartable fields</a:t>
-            </a:r>
-          </a:p>
-          <a:p>
-            <a:pPr>
-              <a:spcBef>
-                <a:spcPts val="300"/>
-              </a:spcBef>
-              <a:defRPr sz="1200">
-                <a:solidFill>
-                  <a:srgbClr val="232D37"/>
-                </a:solidFill>
-                <a:latin typeface="Aptos"/>
-              </a:defRPr>
-            </a:pPr>
-            <a:r>
-              <a:t>Income sources, tax, SST, NIIT, IRMAA, AGI</a:t>
-            </a:r>
-          </a:p>
-          <a:p>
-            <a:pPr>
-              <a:spcBef>
-                <a:spcPts val="300"/>
-              </a:spcBef>
-              <a:defRPr sz="1200">
-                <a:solidFill>
-                  <a:srgbClr val="232D37"/>
-                </a:solidFill>
-                <a:latin typeface="Aptos"/>
-              </a:defRPr>
-            </a:pPr>
-            <a:r>
-              <a:t>Effective/marginal rates</a:t>
-            </a:r>
-          </a:p>
-          <a:p>
-            <a:pPr>
-              <a:spcBef>
-                <a:spcPts val="300"/>
-              </a:spcBef>
-              <a:defRPr sz="1200">
-                <a:solidFill>
-                  <a:srgbClr val="232D37"/>
-                </a:solidFill>
-                <a:latin typeface="Aptos"/>
-              </a:defRPr>
-            </a:pPr>
-            <a:r>
-              <a:t>IRA, Roth, and brokerage balances</a:t>
+              <a:t>Start guess T₀</a:t>
+            </a:r>
+          </a:p>
+          <a:p>
+            <a:pPr>
+              <a:spcBef>
+                <a:spcPts val="300"/>
+              </a:spcBef>
+              <a:defRPr sz="1100">
+                <a:solidFill>
+                  <a:srgbClr val="232D37"/>
+                </a:solidFill>
+                <a:latin typeface="Aptos"/>
+              </a:defRPr>
+            </a:pPr>
+            <a:r>
+              <a:t>Prior-year total tax</a:t>
+            </a:r>
+          </a:p>
+          <a:p>
+            <a:pPr>
+              <a:spcBef>
+                <a:spcPts val="300"/>
+              </a:spcBef>
+              <a:defRPr sz="1100">
+                <a:solidFill>
+                  <a:srgbClr val="232D37"/>
+                </a:solidFill>
+                <a:latin typeface="Aptos"/>
+              </a:defRPr>
+            </a:pPr>
+            <a:r>
+              <a:t>Zero in year 0</a:t>
             </a:r>
           </a:p>
         </p:txBody>
@@ -5963,8 +7631,8 @@
         </p:nvSpPr>
         <p:spPr>
           <a:xfrm>
-            <a:off x="594360" y="1143000"/>
-            <a:ext cx="82296" cy="4526280"/>
+            <a:off x="640080" y="1188720"/>
+            <a:ext cx="82296" cy="1234440"/>
           </a:xfrm>
           <a:prstGeom prst="rect">
             <a:avLst/>
@@ -6006,8 +7674,8 @@
         </p:nvSpPr>
         <p:spPr>
           <a:xfrm>
-            <a:off x="3794760" y="1143000"/>
-            <a:ext cx="2788920" cy="4526280"/>
+            <a:off x="3063240" y="1188720"/>
+            <a:ext cx="2057400" cy="1234440"/>
           </a:xfrm>
           <a:prstGeom prst="roundRect">
             <a:avLst/>
@@ -6040,7 +7708,7 @@
           <a:lstStyle/>
           <a:p>
             <a:pPr algn="ctr">
-              <a:defRPr sz="1700" b="1">
+              <a:defRPr sz="1600" b="1">
                 <a:solidFill>
                   <a:srgbClr val="232D37"/>
                 </a:solidFill>
@@ -6048,71 +7716,39 @@
               </a:defRPr>
             </a:pPr>
             <a:r>
-              <a:t>Person 1 sheets</a:t>
-            </a:r>
-          </a:p>
-          <a:p>
-            <a:pPr>
-              <a:spcBef>
-                <a:spcPts val="300"/>
-              </a:spcBef>
-              <a:defRPr sz="1200">
-                <a:solidFill>
-                  <a:srgbClr val="232D37"/>
-                </a:solidFill>
-                <a:latin typeface="Aptos"/>
-              </a:defRPr>
-            </a:pPr>
-            <a:r>
-              <a:t>Enabled brokerage portfolios</a:t>
-            </a:r>
-          </a:p>
-          <a:p>
-            <a:pPr>
-              <a:spcBef>
-                <a:spcPts val="300"/>
-              </a:spcBef>
-              <a:defRPr sz="1200">
-                <a:solidFill>
-                  <a:srgbClr val="232D37"/>
-                </a:solidFill>
-                <a:latin typeface="Aptos"/>
-              </a:defRPr>
-            </a:pPr>
-            <a:r>
-              <a:t>Then Pre-tax IRA if enabled</a:t>
-            </a:r>
-          </a:p>
-          <a:p>
-            <a:pPr>
-              <a:spcBef>
-                <a:spcPts val="300"/>
-              </a:spcBef>
-              <a:defRPr sz="1200">
-                <a:solidFill>
-                  <a:srgbClr val="232D37"/>
-                </a:solidFill>
-                <a:latin typeface="Aptos"/>
-              </a:defRPr>
-            </a:pPr>
-            <a:r>
-              <a:t>Then Roth IRA if enabled</a:t>
-            </a:r>
-          </a:p>
-          <a:p>
-            <a:pPr>
-              <a:spcBef>
-                <a:spcPts val="300"/>
-              </a:spcBef>
-              <a:defRPr sz="1200">
-                <a:solidFill>
-                  <a:srgbClr val="232D37"/>
-                </a:solidFill>
-                <a:latin typeface="Aptos"/>
-              </a:defRPr>
-            </a:pPr>
-            <a:r>
-              <a:t>One row per projected year</a:t>
+              <a:t>Run waterfall</a:t>
+            </a:r>
+          </a:p>
+          <a:p>
+            <a:pPr>
+              <a:spcBef>
+                <a:spcPts val="300"/>
+              </a:spcBef>
+              <a:defRPr sz="1100">
+                <a:solidFill>
+                  <a:srgbClr val="232D37"/>
+                </a:solidFill>
+                <a:latin typeface="Aptos"/>
+              </a:defRPr>
+            </a:pPr>
+            <a:r>
+              <a:t>Fund expenses using candidate tax</a:t>
+            </a:r>
+          </a:p>
+          <a:p>
+            <a:pPr>
+              <a:spcBef>
+                <a:spcPts val="300"/>
+              </a:spcBef>
+              <a:defRPr sz="1100">
+                <a:solidFill>
+                  <a:srgbClr val="232D37"/>
+                </a:solidFill>
+                <a:latin typeface="Aptos"/>
+              </a:defRPr>
+            </a:pPr>
+            <a:r>
+              <a:t>Calculate dividends used and sales</a:t>
             </a:r>
           </a:p>
         </p:txBody>
@@ -6125,8 +7761,8 @@
         </p:nvSpPr>
         <p:spPr>
           <a:xfrm>
-            <a:off x="3794760" y="1143000"/>
-            <a:ext cx="82296" cy="4526280"/>
+            <a:off x="3063240" y="1188720"/>
+            <a:ext cx="82296" cy="1234440"/>
           </a:xfrm>
           <a:prstGeom prst="rect">
             <a:avLst/>
@@ -6168,8 +7804,138 @@
         </p:nvSpPr>
         <p:spPr>
           <a:xfrm>
-            <a:off x="6995160" y="1143000"/>
-            <a:ext cx="2788920" cy="4526280"/>
+            <a:off x="5486400" y="1188720"/>
+            <a:ext cx="2057400" cy="1234440"/>
+          </a:xfrm>
+          <a:prstGeom prst="roundRect">
+            <a:avLst/>
+          </a:prstGeom>
+          <a:solidFill>
+            <a:srgbClr val="FFF6E8"/>
+          </a:solidFill>
+          <a:ln w="13970">
+            <a:solidFill>
+              <a:srgbClr val="E5892A"/>
+            </a:solidFill>
+          </a:ln>
+        </p:spPr>
+        <p:style>
+          <a:lnRef idx="1">
+            <a:schemeClr val="accent1"/>
+          </a:lnRef>
+          <a:fillRef idx="3">
+            <a:schemeClr val="accent1"/>
+          </a:fillRef>
+          <a:effectRef idx="2">
+            <a:schemeClr val="accent1"/>
+          </a:effectRef>
+          <a:fontRef idx="minor">
+            <a:schemeClr val="lt1"/>
+          </a:fontRef>
+        </p:style>
+        <p:txBody>
+          <a:bodyPr rtlCol="0" anchor="ctr" lIns="182880" rIns="100584" tIns="91440"/>
+          <a:lstStyle/>
+          <a:p>
+            <a:pPr algn="ctr">
+              <a:defRPr sz="1600" b="1">
+                <a:solidFill>
+                  <a:srgbClr val="232D37"/>
+                </a:solidFill>
+                <a:latin typeface="Aptos Display"/>
+              </a:defRPr>
+            </a:pPr>
+            <a:r>
+              <a:t>Derive LTCG</a:t>
+            </a:r>
+          </a:p>
+          <a:p>
+            <a:pPr>
+              <a:spcBef>
+                <a:spcPts val="300"/>
+              </a:spcBef>
+              <a:defRPr sz="1100">
+                <a:solidFill>
+                  <a:srgbClr val="232D37"/>
+                </a:solidFill>
+                <a:latin typeface="Aptos"/>
+              </a:defRPr>
+            </a:pPr>
+            <a:r>
+              <a:t>Sales × each portfolio gain fraction</a:t>
+            </a:r>
+          </a:p>
+          <a:p>
+            <a:pPr>
+              <a:spcBef>
+                <a:spcPts val="300"/>
+              </a:spcBef>
+              <a:defRPr sz="1100">
+                <a:solidFill>
+                  <a:srgbClr val="232D37"/>
+                </a:solidFill>
+                <a:latin typeface="Aptos"/>
+              </a:defRPr>
+            </a:pPr>
+            <a:r>
+              <a:t>Apply SCGL hypothetically</a:t>
+            </a:r>
+          </a:p>
+        </p:txBody>
+      </p:sp>
+      <p:sp>
+        <p:nvSpPr>
+          <p:cNvPr id="9" name="Rectangle 8"/>
+          <p:cNvSpPr/>
+          <p:nvPr/>
+        </p:nvSpPr>
+        <p:spPr>
+          <a:xfrm>
+            <a:off x="5486400" y="1188720"/>
+            <a:ext cx="82296" cy="1234440"/>
+          </a:xfrm>
+          <a:prstGeom prst="rect">
+            <a:avLst/>
+          </a:prstGeom>
+          <a:solidFill>
+            <a:srgbClr val="E5892A"/>
+          </a:solidFill>
+          <a:ln>
+            <a:noFill/>
+          </a:ln>
+        </p:spPr>
+        <p:style>
+          <a:lnRef idx="1">
+            <a:schemeClr val="accent1"/>
+          </a:lnRef>
+          <a:fillRef idx="3">
+            <a:schemeClr val="accent1"/>
+          </a:fillRef>
+          <a:effectRef idx="2">
+            <a:schemeClr val="accent1"/>
+          </a:effectRef>
+          <a:fontRef idx="minor">
+            <a:schemeClr val="lt1"/>
+          </a:fontRef>
+        </p:style>
+        <p:txBody>
+          <a:bodyPr rtlCol="0" anchor="ctr"/>
+          <a:lstStyle/>
+          <a:p>
+            <a:pPr algn="ctr"/>
+          </a:p>
+        </p:txBody>
+      </p:sp>
+      <p:sp>
+        <p:nvSpPr>
+          <p:cNvPr id="10" name="Rounded Rectangle 9"/>
+          <p:cNvSpPr/>
+          <p:nvPr/>
+        </p:nvSpPr>
+        <p:spPr>
+          <a:xfrm>
+            <a:off x="7909560" y="1188720"/>
+            <a:ext cx="2057400" cy="1234440"/>
           </a:xfrm>
           <a:prstGeom prst="roundRect">
             <a:avLst/>
@@ -6202,7 +7968,7 @@
           <a:lstStyle/>
           <a:p>
             <a:pPr algn="ctr">
-              <a:defRPr sz="1700" b="1">
+              <a:defRPr sz="1600" b="1">
                 <a:solidFill>
                   <a:srgbClr val="232D37"/>
                 </a:solidFill>
@@ -6210,69 +7976,37 @@
               </a:defRPr>
             </a:pPr>
             <a:r>
-              <a:t>Person 2 sheets</a:t>
-            </a:r>
-          </a:p>
-          <a:p>
-            <a:pPr>
-              <a:spcBef>
-                <a:spcPts val="300"/>
-              </a:spcBef>
-              <a:defRPr sz="1200">
-                <a:solidFill>
-                  <a:srgbClr val="232D37"/>
-                </a:solidFill>
-                <a:latin typeface="Aptos"/>
-              </a:defRPr>
-            </a:pPr>
-            <a:r>
-              <a:t>Same ordering</a:t>
-            </a:r>
-          </a:p>
-          <a:p>
-            <a:pPr>
-              <a:spcBef>
-                <a:spcPts val="300"/>
-              </a:spcBef>
-              <a:defRPr sz="1200">
-                <a:solidFill>
-                  <a:srgbClr val="232D37"/>
-                </a:solidFill>
-                <a:latin typeface="Aptos"/>
-              </a:defRPr>
-            </a:pPr>
-            <a:r>
-              <a:t>Created only in a married plan / when accounts are enabled</a:t>
-            </a:r>
-          </a:p>
-          <a:p>
-            <a:pPr>
-              <a:spcBef>
-                <a:spcPts val="300"/>
-              </a:spcBef>
-              <a:defRPr sz="1200">
-                <a:solidFill>
-                  <a:srgbClr val="232D37"/>
-                </a:solidFill>
-                <a:latin typeface="Aptos"/>
-              </a:defRPr>
-            </a:pPr>
-            <a:r>
-              <a:t>Disabled accounts are omitted</a:t>
-            </a:r>
-          </a:p>
-        </p:txBody>
-      </p:sp>
-      <p:sp>
-        <p:nvSpPr>
-          <p:cNvPr id="9" name="Rectangle 8"/>
+              <a:t>Recalculate tax</a:t>
+            </a:r>
+          </a:p>
+          <a:p>
+            <a:pPr>
+              <a:spcBef>
+                <a:spcPts val="300"/>
+              </a:spcBef>
+              <a:defRPr sz="1100">
+                <a:solidFill>
+                  <a:srgbClr val="232D37"/>
+                </a:solidFill>
+                <a:latin typeface="Aptos"/>
+              </a:defRPr>
+            </a:pPr>
+            <a:r>
+              <a:t>Tax includes LTCG, deductions, NIIT, FTC</a:t>
+            </a:r>
+          </a:p>
+        </p:txBody>
+      </p:sp>
+      <p:sp>
+        <p:nvSpPr>
+          <p:cNvPr id="11" name="Rectangle 10"/>
           <p:cNvSpPr/>
           <p:nvPr/>
         </p:nvSpPr>
         <p:spPr>
           <a:xfrm>
-            <a:off x="6995160" y="1143000"/>
-            <a:ext cx="82296" cy="4526280"/>
+            <a:off x="7909560" y="1188720"/>
+            <a:ext cx="82296" cy="1234440"/>
           </a:xfrm>
           <a:prstGeom prst="rect">
             <a:avLst/>
@@ -6308,24 +8042,24 @@
       </p:sp>
       <p:sp>
         <p:nvSpPr>
-          <p:cNvPr id="10" name="Rounded Rectangle 9"/>
+          <p:cNvPr id="12" name="Rounded Rectangle 11"/>
           <p:cNvSpPr/>
           <p:nvPr/>
         </p:nvSpPr>
         <p:spPr>
           <a:xfrm>
-            <a:off x="10195560" y="1143000"/>
-            <a:ext cx="1417320" cy="4526280"/>
+            <a:off x="10332720" y="1188720"/>
+            <a:ext cx="1234440" cy="1234440"/>
           </a:xfrm>
           <a:prstGeom prst="roundRect">
             <a:avLst/>
           </a:prstGeom>
           <a:solidFill>
-            <a:srgbClr val="FFF6E8"/>
+            <a:srgbClr val="F8FAFC"/>
           </a:solidFill>
           <a:ln w="13970">
             <a:solidFill>
-              <a:srgbClr val="E5892A"/>
+              <a:srgbClr val="0F2647"/>
             </a:solidFill>
           </a:ln>
         </p:spPr>
@@ -6348,7 +8082,7 @@
           <a:lstStyle/>
           <a:p>
             <a:pPr algn="ctr">
-              <a:defRPr sz="1600" b="1">
+              <a:defRPr sz="1400" b="1">
                 <a:solidFill>
                   <a:srgbClr val="232D37"/>
                 </a:solidFill>
@@ -6356,43 +8090,59 @@
               </a:defRPr>
             </a:pPr>
             <a:r>
-              <a:t>Result</a:t>
-            </a:r>
-          </a:p>
-          <a:p>
-            <a:pPr>
-              <a:spcBef>
-                <a:spcPts val="300"/>
-              </a:spcBef>
-              <a:defRPr sz="1100">
-                <a:solidFill>
-                  <a:srgbClr val="232D37"/>
-                </a:solidFill>
-                <a:latin typeface="Aptos"/>
-              </a:defRPr>
-            </a:pPr>
-            <a:r>
-              <a:t>Workbook size adapts to the plan</a:t>
-            </a:r>
-          </a:p>
-        </p:txBody>
-      </p:sp>
-      <p:sp>
-        <p:nvSpPr>
-          <p:cNvPr id="11" name="Rectangle 10"/>
+              <a:t>Converge</a:t>
+            </a:r>
+          </a:p>
+          <a:p>
+            <a:pPr>
+              <a:spcBef>
+                <a:spcPts val="300"/>
+              </a:spcBef>
+              <a:defRPr sz="1000">
+                <a:solidFill>
+                  <a:srgbClr val="232D37"/>
+                </a:solidFill>
+                <a:latin typeface="Aptos"/>
+              </a:defRPr>
+            </a:pPr>
+            <a:r>
+              <a:t>Tolerance 0.005</a:t>
+            </a:r>
+          </a:p>
+          <a:p>
+            <a:pPr>
+              <a:spcBef>
+                <a:spcPts val="300"/>
+              </a:spcBef>
+              <a:defRPr sz="1000">
+                <a:solidFill>
+                  <a:srgbClr val="232D37"/>
+                </a:solidFill>
+                <a:latin typeface="Aptos"/>
+              </a:defRPr>
+            </a:pPr>
+            <a:r>
+              <a:t>≤30 rounds</a:t>
+            </a:r>
+          </a:p>
+        </p:txBody>
+      </p:sp>
+      <p:sp>
+        <p:nvSpPr>
+          <p:cNvPr id="13" name="Rectangle 12"/>
           <p:cNvSpPr/>
           <p:nvPr/>
         </p:nvSpPr>
         <p:spPr>
           <a:xfrm>
-            <a:off x="10195560" y="1143000"/>
-            <a:ext cx="82296" cy="4526280"/>
+            <a:off x="10332720" y="1188720"/>
+            <a:ext cx="82296" cy="1234440"/>
           </a:xfrm>
           <a:prstGeom prst="rect">
             <a:avLst/>
           </a:prstGeom>
           <a:solidFill>
-            <a:srgbClr val="E5892A"/>
+            <a:srgbClr val="0F2647"/>
           </a:solidFill>
           <a:ln>
             <a:noFill/>
@@ -6422,19 +8172,19 @@
       </p:sp>
       <p:cxnSp>
         <p:nvCxnSpPr>
-          <p:cNvPr id="12" name="Connector 11"/>
+          <p:cNvPr id="14" name="Connector 13"/>
           <p:cNvCxnSpPr/>
           <p:nvPr/>
         </p:nvCxnSpPr>
         <p:spPr>
           <a:xfrm>
-            <a:off x="3456432" y="3401568"/>
-            <a:ext cx="274320" cy="0"/>
+            <a:off x="2743200" y="1810512"/>
+            <a:ext cx="228600" cy="0"/>
           </a:xfrm>
           <a:prstGeom prst="line">
             <a:avLst/>
           </a:prstGeom>
-          <a:ln w="25400">
+          <a:ln w="21590">
             <a:solidFill>
               <a:srgbClr val="266EB2"/>
             </a:solidFill>
@@ -6457,19 +8207,19 @@
       </p:cxnSp>
       <p:cxnSp>
         <p:nvCxnSpPr>
-          <p:cNvPr id="13" name="Connector 12"/>
+          <p:cNvPr id="15" name="Connector 14"/>
           <p:cNvCxnSpPr/>
           <p:nvPr/>
         </p:nvCxnSpPr>
         <p:spPr>
           <a:xfrm>
-            <a:off x="6656832" y="3401568"/>
-            <a:ext cx="274320" cy="0"/>
+            <a:off x="5166360" y="1810512"/>
+            <a:ext cx="228600" cy="0"/>
           </a:xfrm>
           <a:prstGeom prst="line">
             <a:avLst/>
           </a:prstGeom>
-          <a:ln w="25400">
+          <a:ln w="21590">
             <a:solidFill>
               <a:srgbClr val="429761"/>
             </a:solidFill>
@@ -6492,21 +8242,21 @@
       </p:cxnSp>
       <p:cxnSp>
         <p:nvCxnSpPr>
-          <p:cNvPr id="14" name="Connector 13"/>
+          <p:cNvPr id="16" name="Connector 15"/>
           <p:cNvCxnSpPr/>
           <p:nvPr/>
         </p:nvCxnSpPr>
         <p:spPr>
           <a:xfrm>
-            <a:off x="9857232" y="3401568"/>
-            <a:ext cx="274320" cy="0"/>
+            <a:off x="7589520" y="1810512"/>
+            <a:ext cx="228600" cy="0"/>
           </a:xfrm>
           <a:prstGeom prst="line">
             <a:avLst/>
           </a:prstGeom>
-          <a:ln w="25400">
+          <a:ln w="21590">
             <a:solidFill>
-              <a:srgbClr val="7852B0"/>
+              <a:srgbClr val="E5892A"/>
             </a:solidFill>
           </a:ln>
         </p:spPr>
@@ -6525,9 +8275,288 @@
           </a:fontRef>
         </p:style>
       </p:cxnSp>
-      <p:sp>
-        <p:nvSpPr>
-          <p:cNvPr id="15" name="Rectangle 14"/>
+      <p:cxnSp>
+        <p:nvCxnSpPr>
+          <p:cNvPr id="17" name="Connector 16"/>
+          <p:cNvCxnSpPr/>
+          <p:nvPr/>
+        </p:nvCxnSpPr>
+        <p:spPr>
+          <a:xfrm>
+            <a:off x="10012680" y="1810512"/>
+            <a:ext cx="228600" cy="0"/>
+          </a:xfrm>
+          <a:prstGeom prst="line">
+            <a:avLst/>
+          </a:prstGeom>
+          <a:ln w="21590">
+            <a:solidFill>
+              <a:srgbClr val="7852B0"/>
+            </a:solidFill>
+          </a:ln>
+        </p:spPr>
+        <p:style>
+          <a:lnRef idx="2">
+            <a:schemeClr val="accent1"/>
+          </a:lnRef>
+          <a:fillRef idx="0">
+            <a:schemeClr val="accent1"/>
+          </a:fillRef>
+          <a:effectRef idx="1">
+            <a:schemeClr val="accent1"/>
+          </a:effectRef>
+          <a:fontRef idx="minor">
+            <a:schemeClr val="tx1"/>
+          </a:fontRef>
+        </p:style>
+      </p:cxnSp>
+      <p:sp>
+        <p:nvSpPr>
+          <p:cNvPr id="18" name="Rounded Rectangle 17"/>
+          <p:cNvSpPr/>
+          <p:nvPr/>
+        </p:nvSpPr>
+        <p:spPr>
+          <a:xfrm>
+            <a:off x="960120" y="3429000"/>
+            <a:ext cx="4800600" cy="1463040"/>
+          </a:xfrm>
+          <a:prstGeom prst="roundRect">
+            <a:avLst/>
+          </a:prstGeom>
+          <a:solidFill>
+            <a:srgbClr val="F8FAFC"/>
+          </a:solidFill>
+          <a:ln w="13970">
+            <a:solidFill>
+              <a:srgbClr val="168F8D"/>
+            </a:solidFill>
+          </a:ln>
+        </p:spPr>
+        <p:style>
+          <a:lnRef idx="1">
+            <a:schemeClr val="accent1"/>
+          </a:lnRef>
+          <a:fillRef idx="3">
+            <a:schemeClr val="accent1"/>
+          </a:fillRef>
+          <a:effectRef idx="2">
+            <a:schemeClr val="accent1"/>
+          </a:effectRef>
+          <a:fontRef idx="minor">
+            <a:schemeClr val="lt1"/>
+          </a:fontRef>
+        </p:style>
+        <p:txBody>
+          <a:bodyPr rtlCol="0" anchor="ctr" lIns="182880" rIns="100584" tIns="91440"/>
+          <a:lstStyle/>
+          <a:p>
+            <a:pPr algn="ctr">
+              <a:defRPr sz="1600" b="1">
+                <a:solidFill>
+                  <a:srgbClr val="232D37"/>
+                </a:solidFill>
+                <a:latin typeface="Aptos Display"/>
+              </a:defRPr>
+            </a:pPr>
+            <a:r>
+              <a:t>Convergence contract</a:t>
+            </a:r>
+          </a:p>
+          <a:p>
+            <a:pPr>
+              <a:spcBef>
+                <a:spcPts val="300"/>
+              </a:spcBef>
+              <a:defRPr sz="1200">
+                <a:solidFill>
+                  <a:srgbClr val="232D37"/>
+                </a:solidFill>
+                <a:latin typeface="Aptos"/>
+              </a:defRPr>
+            </a:pPr>
+            <a:r>
+              <a:t>Tₙ₊₁ = taxOn(runWaterfall(Tₙ).ltcgGross).totalTax</a:t>
+            </a:r>
+          </a:p>
+          <a:p>
+            <a:pPr>
+              <a:spcBef>
+                <a:spcPts val="300"/>
+              </a:spcBef>
+              <a:defRPr sz="1200">
+                <a:solidFill>
+                  <a:srgbClr val="232D37"/>
+                </a:solidFill>
+                <a:latin typeface="Aptos"/>
+              </a:defRPr>
+            </a:pPr>
+            <a:r>
+              <a:t>Stop when the change is below TAX_TOL. The tax-to-new-tax map is a contraction, typically settling in 6–8 rounds.</a:t>
+            </a:r>
+          </a:p>
+        </p:txBody>
+      </p:sp>
+      <p:sp>
+        <p:nvSpPr>
+          <p:cNvPr id="19" name="Rectangle 18"/>
+          <p:cNvSpPr/>
+          <p:nvPr/>
+        </p:nvSpPr>
+        <p:spPr>
+          <a:xfrm>
+            <a:off x="960120" y="3429000"/>
+            <a:ext cx="82296" cy="1463040"/>
+          </a:xfrm>
+          <a:prstGeom prst="rect">
+            <a:avLst/>
+          </a:prstGeom>
+          <a:solidFill>
+            <a:srgbClr val="168F8D"/>
+          </a:solidFill>
+          <a:ln>
+            <a:noFill/>
+          </a:ln>
+        </p:spPr>
+        <p:style>
+          <a:lnRef idx="1">
+            <a:schemeClr val="accent1"/>
+          </a:lnRef>
+          <a:fillRef idx="3">
+            <a:schemeClr val="accent1"/>
+          </a:fillRef>
+          <a:effectRef idx="2">
+            <a:schemeClr val="accent1"/>
+          </a:effectRef>
+          <a:fontRef idx="minor">
+            <a:schemeClr val="lt1"/>
+          </a:fontRef>
+        </p:style>
+        <p:txBody>
+          <a:bodyPr rtlCol="0" anchor="ctr"/>
+          <a:lstStyle/>
+          <a:p>
+            <a:pPr algn="ctr"/>
+          </a:p>
+        </p:txBody>
+      </p:sp>
+      <p:sp>
+        <p:nvSpPr>
+          <p:cNvPr id="20" name="Rounded Rectangle 19"/>
+          <p:cNvSpPr/>
+          <p:nvPr/>
+        </p:nvSpPr>
+        <p:spPr>
+          <a:xfrm>
+            <a:off x="6355080" y="3429000"/>
+            <a:ext cx="4800600" cy="1463040"/>
+          </a:xfrm>
+          <a:prstGeom prst="roundRect">
+            <a:avLst/>
+          </a:prstGeom>
+          <a:solidFill>
+            <a:srgbClr val="F8FAFC"/>
+          </a:solidFill>
+          <a:ln w="13970">
+            <a:solidFill>
+              <a:srgbClr val="0F2647"/>
+            </a:solidFill>
+          </a:ln>
+        </p:spPr>
+        <p:style>
+          <a:lnRef idx="1">
+            <a:schemeClr val="accent1"/>
+          </a:lnRef>
+          <a:fillRef idx="3">
+            <a:schemeClr val="accent1"/>
+          </a:fillRef>
+          <a:effectRef idx="2">
+            <a:schemeClr val="accent1"/>
+          </a:effectRef>
+          <a:fontRef idx="minor">
+            <a:schemeClr val="lt1"/>
+          </a:fontRef>
+        </p:style>
+        <p:txBody>
+          <a:bodyPr rtlCol="0" anchor="ctr" lIns="182880" rIns="100584" tIns="91440"/>
+          <a:lstStyle/>
+          <a:p>
+            <a:pPr algn="ctr">
+              <a:defRPr sz="1600" b="1">
+                <a:solidFill>
+                  <a:srgbClr val="232D37"/>
+                </a:solidFill>
+                <a:latin typeface="Aptos Display"/>
+              </a:defRPr>
+            </a:pPr>
+            <a:r>
+              <a:t>Post-solve finalization</a:t>
+            </a:r>
+          </a:p>
+          <a:p>
+            <a:pPr>
+              <a:spcBef>
+                <a:spcPts val="300"/>
+              </a:spcBef>
+              <a:defRPr sz="1200">
+                <a:solidFill>
+                  <a:srgbClr val="232D37"/>
+                </a:solidFill>
+                <a:latin typeface="Aptos"/>
+              </a:defRPr>
+            </a:pPr>
+            <a:r>
+              <a:t>Draw down SCGL once. Compute SST and marginal rate from converged LTCG. Report taxIters and taxConverged on each row.</a:t>
+            </a:r>
+          </a:p>
+        </p:txBody>
+      </p:sp>
+      <p:sp>
+        <p:nvSpPr>
+          <p:cNvPr id="21" name="Rectangle 20"/>
+          <p:cNvSpPr/>
+          <p:nvPr/>
+        </p:nvSpPr>
+        <p:spPr>
+          <a:xfrm>
+            <a:off x="6355080" y="3429000"/>
+            <a:ext cx="82296" cy="1463040"/>
+          </a:xfrm>
+          <a:prstGeom prst="rect">
+            <a:avLst/>
+          </a:prstGeom>
+          <a:solidFill>
+            <a:srgbClr val="0F2647"/>
+          </a:solidFill>
+          <a:ln>
+            <a:noFill/>
+          </a:ln>
+        </p:spPr>
+        <p:style>
+          <a:lnRef idx="1">
+            <a:schemeClr val="accent1"/>
+          </a:lnRef>
+          <a:fillRef idx="3">
+            <a:schemeClr val="accent1"/>
+          </a:fillRef>
+          <a:effectRef idx="2">
+            <a:schemeClr val="accent1"/>
+          </a:effectRef>
+          <a:fontRef idx="minor">
+            <a:schemeClr val="lt1"/>
+          </a:fontRef>
+        </p:style>
+        <p:txBody>
+          <a:bodyPr rtlCol="0" anchor="ctr"/>
+          <a:lstStyle/>
+          <a:p>
+            <a:pPr algn="ctr"/>
+          </a:p>
+        </p:txBody>
+      </p:sp>
+      <p:sp>
+        <p:nvSpPr>
+          <p:cNvPr id="22" name="Rectangle 21"/>
           <p:cNvSpPr/>
           <p:nvPr/>
         </p:nvSpPr>
@@ -6570,7 +8599,7 @@
       </p:sp>
       <p:sp>
         <p:nvSpPr>
-          <p:cNvPr id="16" name="TextBox 15"/>
+          <p:cNvPr id="23" name="TextBox 22"/>
           <p:cNvSpPr txBox="1"/>
           <p:nvPr/>
         </p:nvSpPr>
@@ -6599,7 +8628,7 @@
               </a:defRPr>
             </a:pPr>
             <a:r>
-              <a:t>Retirement Income Planner • Architecture overview • Account-sheet Excel export update</a:t>
+              <a:t>Retirement Income Planner • Architecture overview • Household-expense, LTC, and plan-chat update</a:t>
             </a:r>
           </a:p>
         </p:txBody>
@@ -6661,7 +8690,7 @@
               </a:defRPr>
             </a:pPr>
             <a:r>
-              <a:t>Dynamic sheet order and naming</a:t>
+              <a:t>Long Term Care changes expenses and deductions</a:t>
             </a:r>
           </a:p>
         </p:txBody>
@@ -6697,7 +8726,7 @@
               </a:defRPr>
             </a:pPr>
             <a:r>
-              <a:t>Sheet names identify the person and account while satisfying Excel’s worksheet restrictions.</a:t>
+              <a:t>LTC is modeled as a household expense and as the planner’s only modeled itemized deduction.</a:t>
             </a:r>
           </a:p>
         </p:txBody>
@@ -6710,8 +8739,170 @@
         </p:nvSpPr>
         <p:spPr>
           <a:xfrm>
-            <a:off x="594360" y="1234440"/>
-            <a:ext cx="3429000" cy="4480560"/>
+            <a:off x="594360" y="1188720"/>
+            <a:ext cx="3429000" cy="4526280"/>
+          </a:xfrm>
+          <a:prstGeom prst="roundRect">
+            <a:avLst/>
+          </a:prstGeom>
+          <a:solidFill>
+            <a:srgbClr val="E9F4FF"/>
+          </a:solidFill>
+          <a:ln w="13970">
+            <a:solidFill>
+              <a:srgbClr val="266EB2"/>
+            </a:solidFill>
+          </a:ln>
+        </p:spPr>
+        <p:style>
+          <a:lnRef idx="1">
+            <a:schemeClr val="accent1"/>
+          </a:lnRef>
+          <a:fillRef idx="3">
+            <a:schemeClr val="accent1"/>
+          </a:fillRef>
+          <a:effectRef idx="2">
+            <a:schemeClr val="accent1"/>
+          </a:effectRef>
+          <a:fontRef idx="minor">
+            <a:schemeClr val="lt1"/>
+          </a:fontRef>
+        </p:style>
+        <p:txBody>
+          <a:bodyPr rtlCol="0" anchor="ctr" lIns="182880" rIns="100584" tIns="91440"/>
+          <a:lstStyle/>
+          <a:p>
+            <a:pPr algn="ctr">
+              <a:defRPr sz="1700" b="1">
+                <a:solidFill>
+                  <a:srgbClr val="232D37"/>
+                </a:solidFill>
+                <a:latin typeface="Aptos Display"/>
+              </a:defRPr>
+            </a:pPr>
+            <a:r>
+              <a:t>LTC activation</a:t>
+            </a:r>
+          </a:p>
+          <a:p>
+            <a:pPr>
+              <a:spcBef>
+                <a:spcPts val="300"/>
+              </a:spcBef>
+              <a:defRPr sz="1200">
+                <a:solidFill>
+                  <a:srgbClr val="232D37"/>
+                </a:solidFill>
+                <a:latin typeface="Aptos"/>
+              </a:defRPr>
+            </a:pPr>
+            <a:r>
+              <a:t>Each person has a start age and annual cost.</a:t>
+            </a:r>
+          </a:p>
+          <a:p>
+            <a:pPr>
+              <a:spcBef>
+                <a:spcPts val="300"/>
+              </a:spcBef>
+              <a:defRPr sz="1200">
+                <a:solidFill>
+                  <a:srgbClr val="232D37"/>
+                </a:solidFill>
+                <a:latin typeface="Aptos"/>
+              </a:defRPr>
+            </a:pPr>
+            <a:r>
+              <a:t>Starts only if the age precedes that person’s passing age.</a:t>
+            </a:r>
+          </a:p>
+          <a:p>
+            <a:pPr>
+              <a:spcBef>
+                <a:spcPts val="300"/>
+              </a:spcBef>
+              <a:defRPr sz="1200">
+                <a:solidFill>
+                  <a:srgbClr val="232D37"/>
+                </a:solidFill>
+                <a:latin typeface="Aptos"/>
+              </a:defRPr>
+            </a:pPr>
+            <a:r>
+              <a:t>Once started, status remains; cost stops on death.</a:t>
+            </a:r>
+          </a:p>
+          <a:p>
+            <a:pPr>
+              <a:spcBef>
+                <a:spcPts val="300"/>
+              </a:spcBef>
+              <a:defRPr sz="1200">
+                <a:solidFill>
+                  <a:srgbClr val="232D37"/>
+                </a:solidFill>
+                <a:latin typeface="Aptos"/>
+              </a:defRPr>
+            </a:pPr>
+            <a:r>
+              <a:t>One person in a single household.</a:t>
+            </a:r>
+          </a:p>
+        </p:txBody>
+      </p:sp>
+      <p:sp>
+        <p:nvSpPr>
+          <p:cNvPr id="5" name="Rectangle 4"/>
+          <p:cNvSpPr/>
+          <p:nvPr/>
+        </p:nvSpPr>
+        <p:spPr>
+          <a:xfrm>
+            <a:off x="594360" y="1188720"/>
+            <a:ext cx="82296" cy="4526280"/>
+          </a:xfrm>
+          <a:prstGeom prst="rect">
+            <a:avLst/>
+          </a:prstGeom>
+          <a:solidFill>
+            <a:srgbClr val="266EB2"/>
+          </a:solidFill>
+          <a:ln>
+            <a:noFill/>
+          </a:ln>
+        </p:spPr>
+        <p:style>
+          <a:lnRef idx="1">
+            <a:schemeClr val="accent1"/>
+          </a:lnRef>
+          <a:fillRef idx="3">
+            <a:schemeClr val="accent1"/>
+          </a:fillRef>
+          <a:effectRef idx="2">
+            <a:schemeClr val="accent1"/>
+          </a:effectRef>
+          <a:fontRef idx="minor">
+            <a:schemeClr val="lt1"/>
+          </a:fontRef>
+        </p:style>
+        <p:txBody>
+          <a:bodyPr rtlCol="0" anchor="ctr"/>
+          <a:lstStyle/>
+          <a:p>
+            <a:pPr algn="ctr"/>
+          </a:p>
+        </p:txBody>
+      </p:sp>
+      <p:sp>
+        <p:nvSpPr>
+          <p:cNvPr id="6" name="Rounded Rectangle 5"/>
+          <p:cNvSpPr/>
+          <p:nvPr/>
+        </p:nvSpPr>
+        <p:spPr>
+          <a:xfrm>
+            <a:off x="4389120" y="1188720"/>
+            <a:ext cx="3429000" cy="4526280"/>
           </a:xfrm>
           <a:prstGeom prst="roundRect">
             <a:avLst/>
@@ -6752,7 +8943,7 @@
               </a:defRPr>
             </a:pPr>
             <a:r>
-              <a:t>Ordering rule</a:t>
+              <a:t>Living-expense switch</a:t>
             </a:r>
           </a:p>
           <a:p>
@@ -6768,7 +8959,7 @@
               </a:defRPr>
             </a:pPr>
             <a:r>
-              <a:t>1. Projection by year</a:t>
+              <a:t>Before LTC: state.living</a:t>
             </a:r>
           </a:p>
           <a:p>
@@ -6784,7 +8975,7 @@
               </a:defRPr>
             </a:pPr>
             <a:r>
-              <a:t>2. Person 1 enabled brokerage accounts</a:t>
+              <a:t>After 1st LTC: ltc.living1 or living</a:t>
             </a:r>
           </a:p>
           <a:p>
@@ -6800,7 +8991,7 @@
               </a:defRPr>
             </a:pPr>
             <a:r>
-              <a:t>3. Person 1 Pre-tax IRA</a:t>
+              <a:t>After 2nd LTC: ltc.living2</a:t>
             </a:r>
           </a:p>
           <a:p>
@@ -6816,66 +9007,21 @@
               </a:defRPr>
             </a:pPr>
             <a:r>
-              <a:t>4. Person 1 Roth IRA</a:t>
-            </a:r>
-          </a:p>
-          <a:p>
-            <a:pPr>
-              <a:spcBef>
-                <a:spcPts val="300"/>
-              </a:spcBef>
-              <a:defRPr sz="1200">
-                <a:solidFill>
-                  <a:srgbClr val="232D37"/>
-                </a:solidFill>
-                <a:latin typeface="Aptos"/>
-              </a:defRPr>
-            </a:pPr>
-            <a:r>
-              <a:t>5. Repeat for Person 2</a:t>
-            </a:r>
-          </a:p>
-          <a:p>
-            <a:pPr>
-              <a:spcBef>
-                <a:spcPts val="300"/>
-              </a:spcBef>
-              <a:defRPr sz="1200">
-                <a:solidFill>
-                  <a:srgbClr val="232D37"/>
-                </a:solidFill>
-                <a:latin typeface="Aptos"/>
-              </a:defRPr>
-            </a:pPr>
-          </a:p>
-          <a:p>
-            <a:pPr>
-              <a:spcBef>
-                <a:spcPts val="300"/>
-              </a:spcBef>
-              <a:defRPr sz="1200">
-                <a:solidFill>
-                  <a:srgbClr val="232D37"/>
-                </a:solidFill>
-                <a:latin typeface="Aptos"/>
-              </a:defRPr>
-            </a:pPr>
-            <a:r>
-              <a:t>This order is deterministic and follows the plan.</a:t>
-            </a:r>
-          </a:p>
-        </p:txBody>
-      </p:sp>
-      <p:sp>
-        <p:nvSpPr>
-          <p:cNvPr id="5" name="Rectangle 4"/>
+              <a:t>All figures are today’s dollars and flat in real terms.</a:t>
+            </a:r>
+          </a:p>
+        </p:txBody>
+      </p:sp>
+      <p:sp>
+        <p:nvSpPr>
+          <p:cNvPr id="7" name="Rectangle 6"/>
           <p:cNvSpPr/>
           <p:nvPr/>
         </p:nvSpPr>
         <p:spPr>
           <a:xfrm>
-            <a:off x="594360" y="1234440"/>
-            <a:ext cx="82296" cy="4480560"/>
+            <a:off x="4389120" y="1188720"/>
+            <a:ext cx="82296" cy="4526280"/>
           </a:xfrm>
           <a:prstGeom prst="rect">
             <a:avLst/>
@@ -6911,176 +9057,14 @@
       </p:sp>
       <p:sp>
         <p:nvSpPr>
-          <p:cNvPr id="6" name="Rounded Rectangle 5"/>
-          <p:cNvSpPr/>
-          <p:nvPr/>
-        </p:nvSpPr>
-        <p:spPr>
-          <a:xfrm>
-            <a:off x="4389120" y="1234440"/>
-            <a:ext cx="3429000" cy="4480560"/>
-          </a:xfrm>
-          <a:prstGeom prst="roundRect">
-            <a:avLst/>
-          </a:prstGeom>
-          <a:solidFill>
-            <a:srgbClr val="E9F4FF"/>
-          </a:solidFill>
-          <a:ln w="13970">
-            <a:solidFill>
-              <a:srgbClr val="266EB2"/>
-            </a:solidFill>
-          </a:ln>
-        </p:spPr>
-        <p:style>
-          <a:lnRef idx="1">
-            <a:schemeClr val="accent1"/>
-          </a:lnRef>
-          <a:fillRef idx="3">
-            <a:schemeClr val="accent1"/>
-          </a:fillRef>
-          <a:effectRef idx="2">
-            <a:schemeClr val="accent1"/>
-          </a:effectRef>
-          <a:fontRef idx="minor">
-            <a:schemeClr val="lt1"/>
-          </a:fontRef>
-        </p:style>
-        <p:txBody>
-          <a:bodyPr rtlCol="0" anchor="ctr" lIns="182880" rIns="100584" tIns="91440"/>
-          <a:lstStyle/>
-          <a:p>
-            <a:pPr algn="ctr">
-              <a:defRPr sz="1700" b="1">
-                <a:solidFill>
-                  <a:srgbClr val="232D37"/>
-                </a:solidFill>
-                <a:latin typeface="Aptos Display"/>
-              </a:defRPr>
-            </a:pPr>
-            <a:r>
-              <a:t>Name templates</a:t>
-            </a:r>
-          </a:p>
-          <a:p>
-            <a:pPr>
-              <a:spcBef>
-                <a:spcPts val="300"/>
-              </a:spcBef>
-              <a:defRPr sz="1200">
-                <a:solidFill>
-                  <a:srgbClr val="232D37"/>
-                </a:solidFill>
-                <a:latin typeface="Aptos"/>
-              </a:defRPr>
-            </a:pPr>
-            <a:r>
-              <a:t>Brokerage: “&lt;Person&gt; - &lt;Portfolio&gt;”</a:t>
-            </a:r>
-          </a:p>
-          <a:p>
-            <a:pPr>
-              <a:spcBef>
-                <a:spcPts val="300"/>
-              </a:spcBef>
-              <a:defRPr sz="1200">
-                <a:solidFill>
-                  <a:srgbClr val="232D37"/>
-                </a:solidFill>
-                <a:latin typeface="Aptos"/>
-              </a:defRPr>
-            </a:pPr>
-            <a:r>
-              <a:t>IDGT brokerage adds “ (IDGT)”</a:t>
-            </a:r>
-          </a:p>
-          <a:p>
-            <a:pPr>
-              <a:spcBef>
-                <a:spcPts val="300"/>
-              </a:spcBef>
-              <a:defRPr sz="1200">
-                <a:solidFill>
-                  <a:srgbClr val="232D37"/>
-                </a:solidFill>
-                <a:latin typeface="Aptos"/>
-              </a:defRPr>
-            </a:pPr>
-            <a:r>
-              <a:t>IRA: “&lt;Person&gt; - Pre-tax IRA”</a:t>
-            </a:r>
-          </a:p>
-          <a:p>
-            <a:pPr>
-              <a:spcBef>
-                <a:spcPts val="300"/>
-              </a:spcBef>
-              <a:defRPr sz="1200">
-                <a:solidFill>
-                  <a:srgbClr val="232D37"/>
-                </a:solidFill>
-                <a:latin typeface="Aptos"/>
-              </a:defRPr>
-            </a:pPr>
-            <a:r>
-              <a:t>Roth: “&lt;Person&gt; - Roth IRA”</a:t>
-            </a:r>
-          </a:p>
-        </p:txBody>
-      </p:sp>
-      <p:sp>
-        <p:nvSpPr>
-          <p:cNvPr id="7" name="Rectangle 6"/>
-          <p:cNvSpPr/>
-          <p:nvPr/>
-        </p:nvSpPr>
-        <p:spPr>
-          <a:xfrm>
-            <a:off x="4389120" y="1234440"/>
-            <a:ext cx="82296" cy="4480560"/>
-          </a:xfrm>
-          <a:prstGeom prst="rect">
-            <a:avLst/>
-          </a:prstGeom>
-          <a:solidFill>
-            <a:srgbClr val="266EB2"/>
-          </a:solidFill>
-          <a:ln>
-            <a:noFill/>
-          </a:ln>
-        </p:spPr>
-        <p:style>
-          <a:lnRef idx="1">
-            <a:schemeClr val="accent1"/>
-          </a:lnRef>
-          <a:fillRef idx="3">
-            <a:schemeClr val="accent1"/>
-          </a:fillRef>
-          <a:effectRef idx="2">
-            <a:schemeClr val="accent1"/>
-          </a:effectRef>
-          <a:fontRef idx="minor">
-            <a:schemeClr val="lt1"/>
-          </a:fontRef>
-        </p:style>
-        <p:txBody>
-          <a:bodyPr rtlCol="0" anchor="ctr"/>
-          <a:lstStyle/>
-          <a:p>
-            <a:pPr algn="ctr"/>
-          </a:p>
-        </p:txBody>
-      </p:sp>
-      <p:sp>
-        <p:nvSpPr>
           <p:cNvPr id="8" name="Rounded Rectangle 7"/>
           <p:cNvSpPr/>
           <p:nvPr/>
         </p:nvSpPr>
         <p:spPr>
           <a:xfrm>
-            <a:off x="8183879" y="1234440"/>
-            <a:ext cx="3429000" cy="4480560"/>
+            <a:off x="8183879" y="1188720"/>
+            <a:ext cx="3429000" cy="4526280"/>
           </a:xfrm>
           <a:prstGeom prst="roundRect">
             <a:avLst/>
@@ -7121,7 +9105,7 @@
               </a:defRPr>
             </a:pPr>
             <a:r>
-              <a:t>xlsxSheetName safeguards</a:t>
+              <a:t>Deduction logic</a:t>
             </a:r>
           </a:p>
           <a:p>
@@ -7137,7 +9121,7 @@
               </a:defRPr>
             </a:pPr>
             <a:r>
-              <a:t>Sanitizes prohibited characters: [ ] : * ? / \</a:t>
+              <a:t>Itemized = max(0, LTC cost − 7.5% × AGI)</a:t>
             </a:r>
           </a:p>
           <a:p>
@@ -7153,7 +9137,7 @@
               </a:defRPr>
             </a:pPr>
             <a:r>
-              <a:t>Limits names to 31 characters</a:t>
+              <a:t>Use the larger of itemized and standard deduction.</a:t>
             </a:r>
           </a:p>
           <a:p>
@@ -7169,23 +9153,7 @@
               </a:defRPr>
             </a:pPr>
             <a:r>
-              <a:t>De-duplicates collisions</a:t>
-            </a:r>
-          </a:p>
-          <a:p>
-            <a:pPr>
-              <a:spcBef>
-                <a:spcPts val="300"/>
-              </a:spcBef>
-              <a:defRPr sz="1200">
-                <a:solidFill>
-                  <a:srgbClr val="232D37"/>
-                </a:solidFill>
-                <a:latin typeface="Aptos"/>
-              </a:defRPr>
-            </a:pPr>
-            <a:r>
-              <a:t>Produces valid, predictable worksheet names</a:t>
+              <a:t>Because AGI includes LTCG, deduction selection lives inside the fixed-point tax calculation.</a:t>
             </a:r>
           </a:p>
         </p:txBody>
@@ -7198,8 +9166,8 @@
         </p:nvSpPr>
         <p:spPr>
           <a:xfrm>
-            <a:off x="8183879" y="1234440"/>
-            <a:ext cx="82296" cy="4480560"/>
+            <a:off x="8183879" y="1188720"/>
+            <a:ext cx="82296" cy="4526280"/>
           </a:xfrm>
           <a:prstGeom prst="rect">
             <a:avLst/>
@@ -7307,7 +9275,7 @@
               </a:defRPr>
             </a:pPr>
             <a:r>
-              <a:t>Retirement Income Planner • Architecture overview • Account-sheet Excel export update</a:t>
+              <a:t>Retirement Income Planner • Architecture overview • Household-expense, LTC, and plan-chat update</a:t>
             </a:r>
           </a:p>
         </p:txBody>
@@ -7369,7 +9337,7 @@
               </a:defRPr>
             </a:pPr>
             <a:r>
-              <a:t>Account-sheet content contracts</a:t>
+              <a:t>IRMAA and AUM become household-level expenses</a:t>
             </a:r>
           </a:p>
         </p:txBody>
@@ -7405,7 +9373,7 @@
               </a:defRPr>
             </a:pPr>
             <a:r>
-              <a:t>Each account-specific sheet contains one row per projected year, with fields suited to that account type.</a:t>
+              <a:t>Both charges join the shared pool, but their bases and timing are modeled distinctly.</a:t>
             </a:r>
           </a:p>
         </p:txBody>
@@ -7418,8 +9386,170 @@
         </p:nvSpPr>
         <p:spPr>
           <a:xfrm>
-            <a:off x="502920" y="1234440"/>
-            <a:ext cx="3657600" cy="4480560"/>
+            <a:off x="640080" y="1234440"/>
+            <a:ext cx="3291840" cy="4389120"/>
+          </a:xfrm>
+          <a:prstGeom prst="roundRect">
+            <a:avLst/>
+          </a:prstGeom>
+          <a:solidFill>
+            <a:srgbClr val="FFF6E8"/>
+          </a:solidFill>
+          <a:ln w="13970">
+            <a:solidFill>
+              <a:srgbClr val="E5892A"/>
+            </a:solidFill>
+          </a:ln>
+        </p:spPr>
+        <p:style>
+          <a:lnRef idx="1">
+            <a:schemeClr val="accent1"/>
+          </a:lnRef>
+          <a:fillRef idx="3">
+            <a:schemeClr val="accent1"/>
+          </a:fillRef>
+          <a:effectRef idx="2">
+            <a:schemeClr val="accent1"/>
+          </a:effectRef>
+          <a:fontRef idx="minor">
+            <a:schemeClr val="lt1"/>
+          </a:fontRef>
+        </p:style>
+        <p:txBody>
+          <a:bodyPr rtlCol="0" anchor="ctr" lIns="182880" rIns="100584" tIns="91440"/>
+          <a:lstStyle/>
+          <a:p>
+            <a:pPr algn="ctr">
+              <a:defRPr sz="1700" b="1">
+                <a:solidFill>
+                  <a:srgbClr val="232D37"/>
+                </a:solidFill>
+                <a:latin typeface="Aptos Display"/>
+              </a:defRPr>
+            </a:pPr>
+            <a:r>
+              <a:t>IRMAA surcharge</a:t>
+            </a:r>
+          </a:p>
+          <a:p>
+            <a:pPr>
+              <a:spcBef>
+                <a:spcPts val="300"/>
+              </a:spcBef>
+              <a:defRPr sz="1200">
+                <a:solidFill>
+                  <a:srgbClr val="232D37"/>
+                </a:solidFill>
+                <a:latin typeface="Aptos"/>
+              </a:defRPr>
+            </a:pPr>
+            <a:r>
+              <a:t>Household expense; no per-portfolio checkbox.</a:t>
+            </a:r>
+          </a:p>
+          <a:p>
+            <a:pPr>
+              <a:spcBef>
+                <a:spcPts val="300"/>
+              </a:spcBef>
+              <a:defRPr sz="1200">
+                <a:solidFill>
+                  <a:srgbClr val="232D37"/>
+                </a:solidFill>
+                <a:latin typeface="Aptos"/>
+              </a:defRPr>
+            </a:pPr>
+            <a:r>
+              <a:t>Uses AGI from two years earlier and this year’s filing status.</a:t>
+            </a:r>
+          </a:p>
+          <a:p>
+            <a:pPr>
+              <a:spcBef>
+                <a:spcPts val="300"/>
+              </a:spcBef>
+              <a:defRPr sz="1200">
+                <a:solidFill>
+                  <a:srgbClr val="232D37"/>
+                </a:solidFill>
+                <a:latin typeface="Aptos"/>
+              </a:defRPr>
+            </a:pPr>
+            <a:r>
+              <a:t>Zero for the first two projection years.</a:t>
+            </a:r>
+          </a:p>
+          <a:p>
+            <a:pPr>
+              <a:spcBef>
+                <a:spcPts val="300"/>
+              </a:spcBef>
+              <a:defRPr sz="1200">
+                <a:solidFill>
+                  <a:srgbClr val="232D37"/>
+                </a:solidFill>
+                <a:latin typeface="Aptos"/>
+              </a:defRPr>
+            </a:pPr>
+            <a:r>
+              <a:t>Paid through the normal household funding order.</a:t>
+            </a:r>
+          </a:p>
+        </p:txBody>
+      </p:sp>
+      <p:sp>
+        <p:nvSpPr>
+          <p:cNvPr id="5" name="Rectangle 4"/>
+          <p:cNvSpPr/>
+          <p:nvPr/>
+        </p:nvSpPr>
+        <p:spPr>
+          <a:xfrm>
+            <a:off x="640080" y="1234440"/>
+            <a:ext cx="82296" cy="4389120"/>
+          </a:xfrm>
+          <a:prstGeom prst="rect">
+            <a:avLst/>
+          </a:prstGeom>
+          <a:solidFill>
+            <a:srgbClr val="E5892A"/>
+          </a:solidFill>
+          <a:ln>
+            <a:noFill/>
+          </a:ln>
+        </p:spPr>
+        <p:style>
+          <a:lnRef idx="1">
+            <a:schemeClr val="accent1"/>
+          </a:lnRef>
+          <a:fillRef idx="3">
+            <a:schemeClr val="accent1"/>
+          </a:fillRef>
+          <a:effectRef idx="2">
+            <a:schemeClr val="accent1"/>
+          </a:effectRef>
+          <a:fontRef idx="minor">
+            <a:schemeClr val="lt1"/>
+          </a:fontRef>
+        </p:style>
+        <p:txBody>
+          <a:bodyPr rtlCol="0" anchor="ctr"/>
+          <a:lstStyle/>
+          <a:p>
+            <a:pPr algn="ctr"/>
+          </a:p>
+        </p:txBody>
+      </p:sp>
+      <p:sp>
+        <p:nvSpPr>
+          <p:cNvPr id="6" name="Rounded Rectangle 5"/>
+          <p:cNvSpPr/>
+          <p:nvPr/>
+        </p:nvSpPr>
+        <p:spPr>
+          <a:xfrm>
+            <a:off x="4453128" y="1234440"/>
+            <a:ext cx="3291840" cy="4389120"/>
           </a:xfrm>
           <a:prstGeom prst="roundRect">
             <a:avLst/>
@@ -7460,7 +9590,7 @@
               </a:defRPr>
             </a:pPr>
             <a:r>
-              <a:t>Brokerage portfolio sheet</a:t>
+              <a:t>AUM fee</a:t>
             </a:r>
           </a:p>
           <a:p>
@@ -7476,7 +9606,7 @@
               </a:defRPr>
             </a:pPr>
             <a:r>
-              <a:t>Balance and growth percentage</a:t>
+              <a:t>Household aumFee: percent of AUM or fixed annual $.</a:t>
             </a:r>
           </a:p>
           <a:p>
@@ -7492,7 +9622,7 @@
               </a:defRPr>
             </a:pPr>
             <a:r>
-              <a:t>Tax drag, fee drag, IRMAA drag, withdrawal</a:t>
+              <a:t>AUM balance includes checked brokerage, IRA, and Roth balances when eligible.</a:t>
             </a:r>
           </a:p>
           <a:p>
@@ -7508,69 +9638,21 @@
               </a:defRPr>
             </a:pPr>
             <a:r>
-              <a:t>Realized LTCG</a:t>
-            </a:r>
-          </a:p>
-          <a:p>
-            <a:pPr>
-              <a:spcBef>
-                <a:spcPts val="300"/>
-              </a:spcBef>
-              <a:defRPr sz="1200">
-                <a:solidFill>
-                  <a:srgbClr val="232D37"/>
-                </a:solidFill>
-                <a:latin typeface="Aptos"/>
-              </a:defRPr>
-            </a:pPr>
-            <a:r>
-              <a:t>Cost basis and unrealized gain</a:t>
-            </a:r>
-          </a:p>
-          <a:p>
-            <a:pPr>
-              <a:spcBef>
-                <a:spcPts val="300"/>
-              </a:spcBef>
-              <a:defRPr sz="1200">
-                <a:solidFill>
-                  <a:srgbClr val="232D37"/>
-                </a:solidFill>
-                <a:latin typeface="Aptos"/>
-              </a:defRPr>
-            </a:pPr>
-            <a:r>
-              <a:t>Dividend/expense waterfall: used, reinvested, sold</a:t>
-            </a:r>
-          </a:p>
-          <a:p>
-            <a:pPr>
-              <a:spcBef>
-                <a:spcPts val="300"/>
-              </a:spcBef>
-              <a:defRPr sz="1200">
-                <a:solidFill>
-                  <a:srgbClr val="232D37"/>
-                </a:solidFill>
-                <a:latin typeface="Aptos"/>
-              </a:defRPr>
-            </a:pPr>
-            <a:r>
-              <a:t>IDGT status is reflected in sheet name</a:t>
-            </a:r>
-          </a:p>
-        </p:txBody>
-      </p:sp>
-      <p:sp>
-        <p:nvSpPr>
-          <p:cNvPr id="5" name="Rectangle 4"/>
+              <a:t>IDGT can be included when checked.</a:t>
+            </a:r>
+          </a:p>
+        </p:txBody>
+      </p:sp>
+      <p:sp>
+        <p:nvSpPr>
+          <p:cNvPr id="7" name="Rectangle 6"/>
           <p:cNvSpPr/>
           <p:nvPr/>
         </p:nvSpPr>
         <p:spPr>
           <a:xfrm>
-            <a:off x="502920" y="1234440"/>
-            <a:ext cx="82296" cy="4480560"/>
+            <a:off x="4453128" y="1234440"/>
+            <a:ext cx="82296" cy="4389120"/>
           </a:xfrm>
           <a:prstGeom prst="rect">
             <a:avLst/>
@@ -7606,14 +9688,14 @@
       </p:sp>
       <p:sp>
         <p:nvSpPr>
-          <p:cNvPr id="6" name="Rounded Rectangle 5"/>
+          <p:cNvPr id="8" name="Rounded Rectangle 7"/>
           <p:cNvSpPr/>
           <p:nvPr/>
         </p:nvSpPr>
         <p:spPr>
           <a:xfrm>
-            <a:off x="4270248" y="1234440"/>
-            <a:ext cx="3520440" cy="4480560"/>
+            <a:off x="8266175" y="1234440"/>
+            <a:ext cx="3291840" cy="4389120"/>
           </a:xfrm>
           <a:prstGeom prst="roundRect">
             <a:avLst/>
@@ -7654,7 +9736,7 @@
               </a:defRPr>
             </a:pPr>
             <a:r>
-              <a:t>Pre-tax IRA sheet</a:t>
+              <a:t>Allocation principle</a:t>
             </a:r>
           </a:p>
           <a:p>
@@ -7670,7 +9752,7 @@
               </a:defRPr>
             </a:pPr>
             <a:r>
-              <a:t>Annual RMD / withdrawal</a:t>
+              <a:t>AUM fee share per account is informational.</a:t>
             </a:r>
           </a:p>
           <a:p>
@@ -7686,7 +9768,7 @@
               </a:defRPr>
             </a:pPr>
             <a:r>
-              <a:t>Roth-conversion withdrawal</a:t>
+              <a:t>The full fee is one household expense, paid only through Pay expenses portfolios.</a:t>
             </a:r>
           </a:p>
           <a:p>
@@ -7702,37 +9784,21 @@
               </a:defRPr>
             </a:pPr>
             <a:r>
-              <a:t>End-of-year IRA balance</a:t>
-            </a:r>
-          </a:p>
-          <a:p>
-            <a:pPr>
-              <a:spcBef>
-                <a:spcPts val="300"/>
-              </a:spcBef>
-              <a:defRPr sz="1200">
-                <a:solidFill>
-                  <a:srgbClr val="232D37"/>
-                </a:solidFill>
-                <a:latin typeface="Aptos"/>
-              </a:defRPr>
-            </a:pPr>
-            <a:r>
-              <a:t>One row for each projection year</a:t>
-            </a:r>
-          </a:p>
-        </p:txBody>
-      </p:sp>
-      <p:sp>
-        <p:nvSpPr>
-          <p:cNvPr id="7" name="Rectangle 6"/>
+              <a:t>A charged account does not automatically fund its own fee.</a:t>
+            </a:r>
+          </a:p>
+        </p:txBody>
+      </p:sp>
+      <p:sp>
+        <p:nvSpPr>
+          <p:cNvPr id="9" name="Rectangle 8"/>
           <p:cNvSpPr/>
           <p:nvPr/>
         </p:nvSpPr>
         <p:spPr>
           <a:xfrm>
-            <a:off x="4270248" y="1234440"/>
-            <a:ext cx="82296" cy="4480560"/>
+            <a:off x="8266175" y="1234440"/>
+            <a:ext cx="82296" cy="4389120"/>
           </a:xfrm>
           <a:prstGeom prst="rect">
             <a:avLst/>
@@ -7768,168 +9834,6 @@
       </p:sp>
       <p:sp>
         <p:nvSpPr>
-          <p:cNvPr id="8" name="Rounded Rectangle 7"/>
-          <p:cNvSpPr/>
-          <p:nvPr/>
-        </p:nvSpPr>
-        <p:spPr>
-          <a:xfrm>
-            <a:off x="7900416" y="1234440"/>
-            <a:ext cx="3520440" cy="4480560"/>
-          </a:xfrm>
-          <a:prstGeom prst="roundRect">
-            <a:avLst/>
-          </a:prstGeom>
-          <a:solidFill>
-            <a:srgbClr val="F7EFFF"/>
-          </a:solidFill>
-          <a:ln w="13970">
-            <a:solidFill>
-              <a:srgbClr val="7852B0"/>
-            </a:solidFill>
-          </a:ln>
-        </p:spPr>
-        <p:style>
-          <a:lnRef idx="1">
-            <a:schemeClr val="accent1"/>
-          </a:lnRef>
-          <a:fillRef idx="3">
-            <a:schemeClr val="accent1"/>
-          </a:fillRef>
-          <a:effectRef idx="2">
-            <a:schemeClr val="accent1"/>
-          </a:effectRef>
-          <a:fontRef idx="minor">
-            <a:schemeClr val="lt1"/>
-          </a:fontRef>
-        </p:style>
-        <p:txBody>
-          <a:bodyPr rtlCol="0" anchor="ctr" lIns="182880" rIns="100584" tIns="91440"/>
-          <a:lstStyle/>
-          <a:p>
-            <a:pPr algn="ctr">
-              <a:defRPr sz="1700" b="1">
-                <a:solidFill>
-                  <a:srgbClr val="232D37"/>
-                </a:solidFill>
-                <a:latin typeface="Aptos Display"/>
-              </a:defRPr>
-            </a:pPr>
-            <a:r>
-              <a:t>Roth IRA sheet</a:t>
-            </a:r>
-          </a:p>
-          <a:p>
-            <a:pPr>
-              <a:spcBef>
-                <a:spcPts val="300"/>
-              </a:spcBef>
-              <a:defRPr sz="1200">
-                <a:solidFill>
-                  <a:srgbClr val="232D37"/>
-                </a:solidFill>
-                <a:latin typeface="Aptos"/>
-              </a:defRPr>
-            </a:pPr>
-            <a:r>
-              <a:t>Annual conversion received</a:t>
-            </a:r>
-          </a:p>
-          <a:p>
-            <a:pPr>
-              <a:spcBef>
-                <a:spcPts val="300"/>
-              </a:spcBef>
-              <a:defRPr sz="1200">
-                <a:solidFill>
-                  <a:srgbClr val="232D37"/>
-                </a:solidFill>
-                <a:latin typeface="Aptos"/>
-              </a:defRPr>
-            </a:pPr>
-            <a:r>
-              <a:t>End-of-year Roth balance</a:t>
-            </a:r>
-          </a:p>
-          <a:p>
-            <a:pPr>
-              <a:spcBef>
-                <a:spcPts val="300"/>
-              </a:spcBef>
-              <a:defRPr sz="1200">
-                <a:solidFill>
-                  <a:srgbClr val="232D37"/>
-                </a:solidFill>
-                <a:latin typeface="Aptos"/>
-              </a:defRPr>
-            </a:pPr>
-            <a:r>
-              <a:t>One row for each projection year</a:t>
-            </a:r>
-          </a:p>
-          <a:p>
-            <a:pPr>
-              <a:spcBef>
-                <a:spcPts val="300"/>
-              </a:spcBef>
-              <a:defRPr sz="1200">
-                <a:solidFill>
-                  <a:srgbClr val="232D37"/>
-                </a:solidFill>
-                <a:latin typeface="Aptos"/>
-              </a:defRPr>
-            </a:pPr>
-            <a:r>
-              <a:t>Included only if the Roth account is enabled</a:t>
-            </a:r>
-          </a:p>
-        </p:txBody>
-      </p:sp>
-      <p:sp>
-        <p:nvSpPr>
-          <p:cNvPr id="9" name="Rectangle 8"/>
-          <p:cNvSpPr/>
-          <p:nvPr/>
-        </p:nvSpPr>
-        <p:spPr>
-          <a:xfrm>
-            <a:off x="7900416" y="1234440"/>
-            <a:ext cx="82296" cy="4480560"/>
-          </a:xfrm>
-          <a:prstGeom prst="rect">
-            <a:avLst/>
-          </a:prstGeom>
-          <a:solidFill>
-            <a:srgbClr val="7852B0"/>
-          </a:solidFill>
-          <a:ln>
-            <a:noFill/>
-          </a:ln>
-        </p:spPr>
-        <p:style>
-          <a:lnRef idx="1">
-            <a:schemeClr val="accent1"/>
-          </a:lnRef>
-          <a:fillRef idx="3">
-            <a:schemeClr val="accent1"/>
-          </a:fillRef>
-          <a:effectRef idx="2">
-            <a:schemeClr val="accent1"/>
-          </a:effectRef>
-          <a:fontRef idx="minor">
-            <a:schemeClr val="lt1"/>
-          </a:fontRef>
-        </p:style>
-        <p:txBody>
-          <a:bodyPr rtlCol="0" anchor="ctr"/>
-          <a:lstStyle/>
-          <a:p>
-            <a:pPr algn="ctr"/>
-          </a:p>
-        </p:txBody>
-      </p:sp>
-      <p:sp>
-        <p:nvSpPr>
           <p:cNvPr id="10" name="Rectangle 9"/>
           <p:cNvSpPr/>
           <p:nvPr/>
@@ -8002,7 +9906,7 @@
               </a:defRPr>
             </a:pPr>
             <a:r>
-              <a:t>Retirement Income Planner • Architecture overview • Account-sheet Excel export update</a:t>
+              <a:t>Retirement Income Planner • Architecture overview • Household-expense, LTC, and plan-chat update</a:t>
             </a:r>
           </a:p>
         </p:txBody>
@@ -8064,7 +9968,7 @@
               </a:defRPr>
             </a:pPr>
             <a:r>
-              <a:t>Export fits the existing architectural boundaries</a:t>
+              <a:t>New charts and richer visibility controls</a:t>
             </a:r>
           </a:p>
         </p:txBody>
@@ -8100,7 +10004,7 @@
               </a:defRPr>
             </a:pPr>
             <a:r>
-              <a:t>The enhanced workbook extends presentation capability without creating a parallel financial model.</a:t>
+              <a:t>The display layer adds a household-expense view, shared chart lifecycle management, and persisted section hiding.</a:t>
             </a:r>
           </a:p>
         </p:txBody>
@@ -8113,8 +10017,170 @@
         </p:nvSpPr>
         <p:spPr>
           <a:xfrm>
-            <a:off x="594360" y="1234440"/>
-            <a:ext cx="3383280" cy="4434840"/>
+            <a:off x="502920" y="1143000"/>
+            <a:ext cx="3383280" cy="4526280"/>
+          </a:xfrm>
+          <a:prstGeom prst="roundRect">
+            <a:avLst/>
+          </a:prstGeom>
+          <a:solidFill>
+            <a:srgbClr val="F7EFFF"/>
+          </a:solidFill>
+          <a:ln w="13970">
+            <a:solidFill>
+              <a:srgbClr val="7852B0"/>
+            </a:solidFill>
+          </a:ln>
+        </p:spPr>
+        <p:style>
+          <a:lnRef idx="1">
+            <a:schemeClr val="accent1"/>
+          </a:lnRef>
+          <a:fillRef idx="3">
+            <a:schemeClr val="accent1"/>
+          </a:fillRef>
+          <a:effectRef idx="2">
+            <a:schemeClr val="accent1"/>
+          </a:effectRef>
+          <a:fontRef idx="minor">
+            <a:schemeClr val="lt1"/>
+          </a:fontRef>
+        </p:style>
+        <p:txBody>
+          <a:bodyPr rtlCol="0" anchor="ctr" lIns="182880" rIns="100584" tIns="91440"/>
+          <a:lstStyle/>
+          <a:p>
+            <a:pPr algn="ctr">
+              <a:defRPr sz="1700" b="1">
+                <a:solidFill>
+                  <a:srgbClr val="232D37"/>
+                </a:solidFill>
+                <a:latin typeface="Aptos Display"/>
+              </a:defRPr>
+            </a:pPr>
+            <a:r>
+              <a:t>Expense chart</a:t>
+            </a:r>
+          </a:p>
+          <a:p>
+            <a:pPr>
+              <a:spcBef>
+                <a:spcPts val="300"/>
+              </a:spcBef>
+              <a:defRPr sz="1200">
+                <a:solidFill>
+                  <a:srgbClr val="232D37"/>
+                </a:solidFill>
+                <a:latin typeface="Aptos"/>
+              </a:defRPr>
+            </a:pPr>
+            <a:r>
+              <a:t>Stacked bands: living, LTC, income tax, IRMAA, AUM fee.</a:t>
+            </a:r>
+          </a:p>
+          <a:p>
+            <a:pPr>
+              <a:spcBef>
+                <a:spcPts val="300"/>
+              </a:spcBef>
+              <a:defRPr sz="1200">
+                <a:solidFill>
+                  <a:srgbClr val="232D37"/>
+                </a:solidFill>
+                <a:latin typeface="Aptos"/>
+              </a:defRPr>
+            </a:pPr>
+            <a:r>
+              <a:t>Height equals total expenses.</a:t>
+            </a:r>
+          </a:p>
+          <a:p>
+            <a:pPr>
+              <a:spcBef>
+                <a:spcPts val="300"/>
+              </a:spcBef>
+              <a:defRPr sz="1200">
+                <a:solidFill>
+                  <a:srgbClr val="232D37"/>
+                </a:solidFill>
+                <a:latin typeface="Aptos"/>
+              </a:defRPr>
+            </a:pPr>
+            <a:r>
+              <a:t>Tooltip explains component shares and funding: income → dividends → sales → unfunded.</a:t>
+            </a:r>
+          </a:p>
+          <a:p>
+            <a:pPr>
+              <a:spcBef>
+                <a:spcPts val="300"/>
+              </a:spcBef>
+              <a:defRPr sz="1200">
+                <a:solidFill>
+                  <a:srgbClr val="232D37"/>
+                </a:solidFill>
+                <a:latin typeface="Aptos"/>
+              </a:defRPr>
+            </a:pPr>
+            <a:r>
+              <a:t>Details show AGI, AUM, IRMAA, and iteration count.</a:t>
+            </a:r>
+          </a:p>
+        </p:txBody>
+      </p:sp>
+      <p:sp>
+        <p:nvSpPr>
+          <p:cNvPr id="5" name="Rectangle 4"/>
+          <p:cNvSpPr/>
+          <p:nvPr/>
+        </p:nvSpPr>
+        <p:spPr>
+          <a:xfrm>
+            <a:off x="502920" y="1143000"/>
+            <a:ext cx="82296" cy="4526280"/>
+          </a:xfrm>
+          <a:prstGeom prst="rect">
+            <a:avLst/>
+          </a:prstGeom>
+          <a:solidFill>
+            <a:srgbClr val="7852B0"/>
+          </a:solidFill>
+          <a:ln>
+            <a:noFill/>
+          </a:ln>
+        </p:spPr>
+        <p:style>
+          <a:lnRef idx="1">
+            <a:schemeClr val="accent1"/>
+          </a:lnRef>
+          <a:fillRef idx="3">
+            <a:schemeClr val="accent1"/>
+          </a:fillRef>
+          <a:effectRef idx="2">
+            <a:schemeClr val="accent1"/>
+          </a:effectRef>
+          <a:fontRef idx="minor">
+            <a:schemeClr val="lt1"/>
+          </a:fontRef>
+        </p:style>
+        <p:txBody>
+          <a:bodyPr rtlCol="0" anchor="ctr"/>
+          <a:lstStyle/>
+          <a:p>
+            <a:pPr algn="ctr"/>
+          </a:p>
+        </p:txBody>
+      </p:sp>
+      <p:sp>
+        <p:nvSpPr>
+          <p:cNvPr id="6" name="Rounded Rectangle 5"/>
+          <p:cNvSpPr/>
+          <p:nvPr/>
+        </p:nvSpPr>
+        <p:spPr>
+          <a:xfrm>
+            <a:off x="4407408" y="1143000"/>
+            <a:ext cx="3383280" cy="4526280"/>
           </a:xfrm>
           <a:prstGeom prst="roundRect">
             <a:avLst/>
@@ -8155,7 +10221,7 @@
               </a:defRPr>
             </a:pPr>
             <a:r>
-              <a:t>State and input</a:t>
+              <a:t>Chart registry</a:t>
             </a:r>
           </a:p>
           <a:p>
@@ -8171,7 +10237,7 @@
               </a:defRPr>
             </a:pPr>
             <a:r>
-              <a:t>State determines which accounts are enabled.</a:t>
+              <a:t>One registry for ss, income, tss, tax, expense, asset, IDGT.</a:t>
             </a:r>
           </a:p>
           <a:p>
@@ -8187,7 +10253,7 @@
               </a:defRPr>
             </a:pPr>
             <a:r>
-              <a:t>Enable/Hide remains separate: Hide affects only card appearance, not account-sheet inclusion.</a:t>
+              <a:t>upsertLineChart creates or updates each chart.</a:t>
             </a:r>
           </a:p>
           <a:p>
@@ -8203,21 +10269,21 @@
               </a:defRPr>
             </a:pPr>
             <a:r>
-              <a:t>No export-specific state is written.</a:t>
-            </a:r>
-          </a:p>
-        </p:txBody>
-      </p:sp>
-      <p:sp>
-        <p:nvSpPr>
-          <p:cNvPr id="5" name="Rectangle 4"/>
+              <a:t>Hidden sections resize on re-open; live slider drag suppresses animation.</a:t>
+            </a:r>
+          </a:p>
+        </p:txBody>
+      </p:sp>
+      <p:sp>
+        <p:nvSpPr>
+          <p:cNvPr id="7" name="Rectangle 6"/>
           <p:cNvSpPr/>
           <p:nvPr/>
         </p:nvSpPr>
         <p:spPr>
           <a:xfrm>
-            <a:off x="594360" y="1234440"/>
-            <a:ext cx="82296" cy="4434840"/>
+            <a:off x="4407408" y="1143000"/>
+            <a:ext cx="82296" cy="4526280"/>
           </a:xfrm>
           <a:prstGeom prst="rect">
             <a:avLst/>
@@ -8253,14 +10319,14 @@
       </p:sp>
       <p:sp>
         <p:nvSpPr>
-          <p:cNvPr id="6" name="Rounded Rectangle 5"/>
+          <p:cNvPr id="8" name="Rounded Rectangle 7"/>
           <p:cNvSpPr/>
           <p:nvPr/>
         </p:nvSpPr>
         <p:spPr>
           <a:xfrm>
-            <a:off x="4407408" y="1234440"/>
-            <a:ext cx="3383280" cy="4434840"/>
+            <a:off x="8311896" y="1143000"/>
+            <a:ext cx="3383280" cy="4526280"/>
           </a:xfrm>
           <a:prstGeom prst="roundRect">
             <a:avLst/>
@@ -8301,7 +10367,7 @@
               </a:defRPr>
             </a:pPr>
             <a:r>
-              <a:t>Compute and rows</a:t>
+              <a:t>Saved section hiding</a:t>
             </a:r>
           </a:p>
           <a:p>
@@ -8317,7 +10383,7 @@
               </a:defRPr>
             </a:pPr>
             <a:r>
-              <a:t>computeProjection() continues to produce all account-level data.</a:t>
+              <a:t>Assumptions and every chart section have Hide controls.</a:t>
             </a:r>
           </a:p>
           <a:p>
@@ -8333,7 +10399,7 @@
               </a:defRPr>
             </a:pPr>
             <a:r>
-              <a:t>The projection-row schema is the source for workbook values.</a:t>
+              <a:t>state.ui.hiddenSections is the only source of truth.</a:t>
             </a:r>
           </a:p>
           <a:p>
@@ -8349,21 +10415,21 @@
               </a:defRPr>
             </a:pPr>
             <a:r>
-              <a:t>The exporter does not reimplement tax, basis, IRMAA, or gain logic.</a:t>
-            </a:r>
-          </a:p>
-        </p:txBody>
-      </p:sp>
-      <p:sp>
-        <p:nvSpPr>
-          <p:cNvPr id="7" name="Rectangle 6"/>
+              <a:t>Fresh/reset plan: all sections collapsed. Saved plans restore exactly as saved.</a:t>
+            </a:r>
+          </a:p>
+        </p:txBody>
+      </p:sp>
+      <p:sp>
+        <p:nvSpPr>
+          <p:cNvPr id="9" name="Rectangle 8"/>
           <p:cNvSpPr/>
           <p:nvPr/>
         </p:nvSpPr>
         <p:spPr>
           <a:xfrm>
-            <a:off x="4407408" y="1234440"/>
-            <a:ext cx="82296" cy="4434840"/>
+            <a:off x="8311896" y="1143000"/>
+            <a:ext cx="82296" cy="4526280"/>
           </a:xfrm>
           <a:prstGeom prst="rect">
             <a:avLst/>
@@ -8399,136 +10465,6 @@
       </p:sp>
       <p:sp>
         <p:nvSpPr>
-          <p:cNvPr id="8" name="Rounded Rectangle 7"/>
-          <p:cNvSpPr/>
-          <p:nvPr/>
-        </p:nvSpPr>
-        <p:spPr>
-          <a:xfrm>
-            <a:off x="8220456" y="1234440"/>
-            <a:ext cx="3383280" cy="4434840"/>
-          </a:xfrm>
-          <a:prstGeom prst="roundRect">
-            <a:avLst/>
-          </a:prstGeom>
-          <a:solidFill>
-            <a:srgbClr val="F7EFFF"/>
-          </a:solidFill>
-          <a:ln w="13970">
-            <a:solidFill>
-              <a:srgbClr val="7852B0"/>
-            </a:solidFill>
-          </a:ln>
-        </p:spPr>
-        <p:style>
-          <a:lnRef idx="1">
-            <a:schemeClr val="accent1"/>
-          </a:lnRef>
-          <a:fillRef idx="3">
-            <a:schemeClr val="accent1"/>
-          </a:fillRef>
-          <a:effectRef idx="2">
-            <a:schemeClr val="accent1"/>
-          </a:effectRef>
-          <a:fontRef idx="minor">
-            <a:schemeClr val="lt1"/>
-          </a:fontRef>
-        </p:style>
-        <p:txBody>
-          <a:bodyPr rtlCol="0" anchor="ctr" lIns="182880" rIns="100584" tIns="91440"/>
-          <a:lstStyle/>
-          <a:p>
-            <a:pPr algn="ctr">
-              <a:defRPr sz="1700" b="1">
-                <a:solidFill>
-                  <a:srgbClr val="232D37"/>
-                </a:solidFill>
-                <a:latin typeface="Aptos Display"/>
-              </a:defRPr>
-            </a:pPr>
-            <a:r>
-              <a:t>Display and export</a:t>
-            </a:r>
-          </a:p>
-          <a:p>
-            <a:pPr>
-              <a:spcBef>
-                <a:spcPts val="300"/>
-              </a:spcBef>
-              <a:defRPr sz="1200">
-                <a:solidFill>
-                  <a:srgbClr val="232D37"/>
-                </a:solidFill>
-                <a:latin typeface="Aptos"/>
-              </a:defRPr>
-            </a:pPr>
-            <a:r>
-              <a:t>Charts and Excel are peer consumers of the same projection.</a:t>
-            </a:r>
-          </a:p>
-          <a:p>
-            <a:pPr>
-              <a:spcBef>
-                <a:spcPts val="300"/>
-              </a:spcBef>
-              <a:defRPr sz="1200">
-                <a:solidFill>
-                  <a:srgbClr val="232D37"/>
-                </a:solidFill>
-                <a:latin typeface="Aptos"/>
-              </a:defRPr>
-            </a:pPr>
-            <a:r>
-              <a:t>Excel adds account-specific views; charts preserve interactive visual analysis.</a:t>
-            </a:r>
-          </a:p>
-        </p:txBody>
-      </p:sp>
-      <p:sp>
-        <p:nvSpPr>
-          <p:cNvPr id="9" name="Rectangle 8"/>
-          <p:cNvSpPr/>
-          <p:nvPr/>
-        </p:nvSpPr>
-        <p:spPr>
-          <a:xfrm>
-            <a:off x="8220456" y="1234440"/>
-            <a:ext cx="82296" cy="4434840"/>
-          </a:xfrm>
-          <a:prstGeom prst="rect">
-            <a:avLst/>
-          </a:prstGeom>
-          <a:solidFill>
-            <a:srgbClr val="7852B0"/>
-          </a:solidFill>
-          <a:ln>
-            <a:noFill/>
-          </a:ln>
-        </p:spPr>
-        <p:style>
-          <a:lnRef idx="1">
-            <a:schemeClr val="accent1"/>
-          </a:lnRef>
-          <a:fillRef idx="3">
-            <a:schemeClr val="accent1"/>
-          </a:fillRef>
-          <a:effectRef idx="2">
-            <a:schemeClr val="accent1"/>
-          </a:effectRef>
-          <a:fontRef idx="minor">
-            <a:schemeClr val="lt1"/>
-          </a:fontRef>
-        </p:style>
-        <p:txBody>
-          <a:bodyPr rtlCol="0" anchor="ctr"/>
-          <a:lstStyle/>
-          <a:p>
-            <a:pPr algn="ctr"/>
-          </a:p>
-        </p:txBody>
-      </p:sp>
-      <p:sp>
-        <p:nvSpPr>
           <p:cNvPr id="10" name="Rectangle 9"/>
           <p:cNvSpPr/>
           <p:nvPr/>
@@ -8601,7 +10537,7 @@
               </a:defRPr>
             </a:pPr>
             <a:r>
-              <a:t>Retirement Income Planner • Architecture overview • Account-sheet Excel export update</a:t>
+              <a:t>Retirement Income Planner • Architecture overview • Household-expense, LTC, and plan-chat update</a:t>
             </a:r>
           </a:p>
         </p:txBody>
@@ -8663,7 +10599,7 @@
               </a:defRPr>
             </a:pPr>
             <a:r>
-              <a:t>Reference and implementation context</a:t>
+              <a:t>IRA enhancements: conversion timing and heir stretch</a:t>
             </a:r>
           </a:p>
         </p:txBody>
@@ -8699,7 +10635,7 @@
               </a:defRPr>
             </a:pPr>
             <a:r>
-              <a:t>The export enhancement sits beside existing pages and charts in the plain-script browser application.</a:t>
+              <a:t>The model adds account-specific AUM participation, controlled Roth-conversion timing, and post-passing IRA continuation.</a:t>
             </a:r>
           </a:p>
         </p:txBody>
@@ -8713,17 +10649,17 @@
         <p:spPr>
           <a:xfrm>
             <a:off x="594360" y="1188720"/>
-            <a:ext cx="3200400" cy="4526280"/>
+            <a:ext cx="3429000" cy="4526280"/>
           </a:xfrm>
           <a:prstGeom prst="roundRect">
             <a:avLst/>
           </a:prstGeom>
           <a:solidFill>
-            <a:srgbClr val="F8FAFC"/>
+            <a:srgbClr val="E9F4FF"/>
           </a:solidFill>
           <a:ln w="13970">
             <a:solidFill>
-              <a:srgbClr val="0F2647"/>
+              <a:srgbClr val="266EB2"/>
             </a:solidFill>
           </a:ln>
         </p:spPr>
@@ -8754,7 +10690,7 @@
               </a:defRPr>
             </a:pPr>
             <a:r>
-              <a:t>Topbar actions</a:t>
+              <a:t>Conversion start age</a:t>
             </a:r>
           </a:p>
           <a:p>
@@ -8770,7 +10706,7 @@
               </a:defRPr>
             </a:pPr>
             <a:r>
-              <a:t>Save to file</a:t>
+              <a:t>IRA conversion begins at max(current age, convStart).</a:t>
             </a:r>
           </a:p>
           <a:p>
@@ -8786,7 +10722,7 @@
               </a:defRPr>
             </a:pPr>
             <a:r>
-              <a:t>Load file ▾</a:t>
+              <a:t>Before then conversion is zero; RMD behavior is unchanged.</a:t>
             </a:r>
           </a:p>
           <a:p>
@@ -8802,71 +10738,7 @@
               </a:defRPr>
             </a:pPr>
             <a:r>
-              <a:t>Reset to defaults</a:t>
-            </a:r>
-          </a:p>
-          <a:p>
-            <a:pPr>
-              <a:spcBef>
-                <a:spcPts val="300"/>
-              </a:spcBef>
-              <a:defRPr sz="1200">
-                <a:solidFill>
-                  <a:srgbClr val="232D37"/>
-                </a:solidFill>
-                <a:latin typeface="Aptos"/>
-              </a:defRPr>
-            </a:pPr>
-            <a:r>
-              <a:t>Formulas</a:t>
-            </a:r>
-          </a:p>
-          <a:p>
-            <a:pPr>
-              <a:spcBef>
-                <a:spcPts val="300"/>
-              </a:spcBef>
-              <a:defRPr sz="1200">
-                <a:solidFill>
-                  <a:srgbClr val="232D37"/>
-                </a:solidFill>
-                <a:latin typeface="Aptos"/>
-              </a:defRPr>
-            </a:pPr>
-            <a:r>
-              <a:t>Notes</a:t>
-            </a:r>
-          </a:p>
-          <a:p>
-            <a:pPr>
-              <a:spcBef>
-                <a:spcPts val="300"/>
-              </a:spcBef>
-              <a:defRPr sz="1200">
-                <a:solidFill>
-                  <a:srgbClr val="232D37"/>
-                </a:solidFill>
-                <a:latin typeface="Aptos"/>
-              </a:defRPr>
-            </a:pPr>
-            <a:r>
-              <a:t>Export to Excel</a:t>
-            </a:r>
-          </a:p>
-          <a:p>
-            <a:pPr>
-              <a:spcBef>
-                <a:spcPts val="300"/>
-              </a:spcBef>
-              <a:defRPr sz="1200">
-                <a:solidFill>
-                  <a:srgbClr val="232D37"/>
-                </a:solidFill>
-                <a:latin typeface="Aptos"/>
-              </a:defRPr>
-            </a:pPr>
-            <a:r>
-              <a:t>show_details toggle</a:t>
+              <a:t>Paired slider + number input uses dynamic person-age bounds.</a:t>
             </a:r>
           </a:p>
         </p:txBody>
@@ -8886,7 +10758,7 @@
             <a:avLst/>
           </a:prstGeom>
           <a:solidFill>
-            <a:srgbClr val="0F2647"/>
+            <a:srgbClr val="266EB2"/>
           </a:solidFill>
           <a:ln>
             <a:noFill/>
@@ -8922,8 +10794,154 @@
         </p:nvSpPr>
         <p:spPr>
           <a:xfrm>
-            <a:off x="4480560" y="1188720"/>
-            <a:ext cx="3200400" cy="4526280"/>
+            <a:off x="4389120" y="1188720"/>
+            <a:ext cx="3429000" cy="4526280"/>
+          </a:xfrm>
+          <a:prstGeom prst="roundRect">
+            <a:avLst/>
+          </a:prstGeom>
+          <a:solidFill>
+            <a:srgbClr val="FFF6E8"/>
+          </a:solidFill>
+          <a:ln w="13970">
+            <a:solidFill>
+              <a:srgbClr val="E5892A"/>
+            </a:solidFill>
+          </a:ln>
+        </p:spPr>
+        <p:style>
+          <a:lnRef idx="1">
+            <a:schemeClr val="accent1"/>
+          </a:lnRef>
+          <a:fillRef idx="3">
+            <a:schemeClr val="accent1"/>
+          </a:fillRef>
+          <a:effectRef idx="2">
+            <a:schemeClr val="accent1"/>
+          </a:effectRef>
+          <a:fontRef idx="minor">
+            <a:schemeClr val="lt1"/>
+          </a:fontRef>
+        </p:style>
+        <p:txBody>
+          <a:bodyPr rtlCol="0" anchor="ctr" lIns="182880" rIns="100584" tIns="91440"/>
+          <a:lstStyle/>
+          <a:p>
+            <a:pPr algn="ctr">
+              <a:defRPr sz="1700" b="1">
+                <a:solidFill>
+                  <a:srgbClr val="232D37"/>
+                </a:solidFill>
+                <a:latin typeface="Aptos Display"/>
+              </a:defRPr>
+            </a:pPr>
+            <a:r>
+              <a:t>AUM participation</a:t>
+            </a:r>
+          </a:p>
+          <a:p>
+            <a:pPr>
+              <a:spcBef>
+                <a:spcPts val="300"/>
+              </a:spcBef>
+              <a:defRPr sz="1200">
+                <a:solidFill>
+                  <a:srgbClr val="232D37"/>
+                </a:solidFill>
+                <a:latin typeface="Aptos"/>
+              </a:defRPr>
+            </a:pPr>
+            <a:r>
+              <a:t>IRA and Roth may opt into the household AUM balance.</a:t>
+            </a:r>
+          </a:p>
+          <a:p>
+            <a:pPr>
+              <a:spcBef>
+                <a:spcPts val="300"/>
+              </a:spcBef>
+              <a:defRPr sz="1200">
+                <a:solidFill>
+                  <a:srgbClr val="232D37"/>
+                </a:solidFill>
+                <a:latin typeface="Aptos"/>
+              </a:defRPr>
+            </a:pPr>
+            <a:r>
+              <a:t>They count while owned or inherited by a living spouse.</a:t>
+            </a:r>
+          </a:p>
+          <a:p>
+            <a:pPr>
+              <a:spcBef>
+                <a:spcPts val="300"/>
+              </a:spcBef>
+              <a:defRPr sz="1200">
+                <a:solidFill>
+                  <a:srgbClr val="232D37"/>
+                </a:solidFill>
+                <a:latin typeface="Aptos"/>
+              </a:defRPr>
+            </a:pPr>
+            <a:r>
+              <a:t>Heir-held stretch balances do not count toward AUM.</a:t>
+            </a:r>
+          </a:p>
+        </p:txBody>
+      </p:sp>
+      <p:sp>
+        <p:nvSpPr>
+          <p:cNvPr id="7" name="Rectangle 6"/>
+          <p:cNvSpPr/>
+          <p:nvPr/>
+        </p:nvSpPr>
+        <p:spPr>
+          <a:xfrm>
+            <a:off x="4389120" y="1188720"/>
+            <a:ext cx="82296" cy="4526280"/>
+          </a:xfrm>
+          <a:prstGeom prst="rect">
+            <a:avLst/>
+          </a:prstGeom>
+          <a:solidFill>
+            <a:srgbClr val="E5892A"/>
+          </a:solidFill>
+          <a:ln>
+            <a:noFill/>
+          </a:ln>
+        </p:spPr>
+        <p:style>
+          <a:lnRef idx="1">
+            <a:schemeClr val="accent1"/>
+          </a:lnRef>
+          <a:fillRef idx="3">
+            <a:schemeClr val="accent1"/>
+          </a:fillRef>
+          <a:effectRef idx="2">
+            <a:schemeClr val="accent1"/>
+          </a:effectRef>
+          <a:fontRef idx="minor">
+            <a:schemeClr val="lt1"/>
+          </a:fontRef>
+        </p:style>
+        <p:txBody>
+          <a:bodyPr rtlCol="0" anchor="ctr"/>
+          <a:lstStyle/>
+          <a:p>
+            <a:pPr algn="ctr"/>
+          </a:p>
+        </p:txBody>
+      </p:sp>
+      <p:sp>
+        <p:nvSpPr>
+          <p:cNvPr id="8" name="Rounded Rectangle 7"/>
+          <p:cNvSpPr/>
+          <p:nvPr/>
+        </p:nvSpPr>
+        <p:spPr>
+          <a:xfrm>
+            <a:off x="8183879" y="1188720"/>
+            <a:ext cx="3429000" cy="4526280"/>
           </a:xfrm>
           <a:prstGeom prst="roundRect">
             <a:avLst/>
@@ -8964,7 +10982,7 @@
               </a:defRPr>
             </a:pPr>
             <a:r>
-              <a:t>Display utilities</a:t>
+              <a:t>IRA stretch tail</a:t>
             </a:r>
           </a:p>
           <a:p>
@@ -8980,7 +10998,7 @@
               </a:defRPr>
             </a:pPr>
             <a:r>
-              <a:t>Chart helpers and overlays</a:t>
+              <a:t>Checked accounts keep compounding for 10 years after the second passing.</a:t>
             </a:r>
           </a:p>
           <a:p>
@@ -8996,7 +11014,7 @@
               </a:defRPr>
             </a:pPr>
             <a:r>
-              <a:t>SS, income, taxable-SS, tax, and asset charts</a:t>
+              <a:t>No heir RMDs, withdrawals, conversions, or heir tax modeling.</a:t>
             </a:r>
           </a:p>
           <a:p>
@@ -9012,52 +11030,20 @@
               </a:defRPr>
             </a:pPr>
             <a:r>
-              <a:t>Formulas page</a:t>
-            </a:r>
-          </a:p>
-          <a:p>
-            <a:pPr>
-              <a:spcBef>
-                <a:spcPts val="300"/>
-              </a:spcBef>
-              <a:defRPr sz="1200">
-                <a:solidFill>
-                  <a:srgbClr val="232D37"/>
-                </a:solidFill>
-                <a:latin typeface="Aptos"/>
-              </a:defRPr>
-            </a:pPr>
-            <a:r>
-              <a:t>Notes page</a:t>
-            </a:r>
-          </a:p>
-          <a:p>
-            <a:pPr>
-              <a:spcBef>
-                <a:spcPts val="300"/>
-              </a:spcBef>
-              <a:defRPr sz="1200">
-                <a:solidFill>
-                  <a:srgbClr val="232D37"/>
-                </a:solidFill>
-                <a:latin typeface="Aptos"/>
-              </a:defRPr>
-            </a:pPr>
-            <a:r>
-              <a:t>excelExport.js</a:t>
-            </a:r>
-          </a:p>
-        </p:txBody>
-      </p:sp>
-      <p:sp>
-        <p:nvSpPr>
-          <p:cNvPr id="7" name="Rectangle 6"/>
+              <a:t>Extra pseudo-rows extend only the main Asset chart and corresponding IRA/Roth export sheets.</a:t>
+            </a:r>
+          </a:p>
+        </p:txBody>
+      </p:sp>
+      <p:sp>
+        <p:nvSpPr>
+          <p:cNvPr id="9" name="Rectangle 8"/>
           <p:cNvSpPr/>
           <p:nvPr/>
         </p:nvSpPr>
         <p:spPr>
           <a:xfrm>
-            <a:off x="4480560" y="1188720"/>
+            <a:off x="8183879" y="1188720"/>
             <a:ext cx="82296" cy="4526280"/>
           </a:xfrm>
           <a:prstGeom prst="rect">
@@ -9094,152 +11080,6 @@
       </p:sp>
       <p:sp>
         <p:nvSpPr>
-          <p:cNvPr id="8" name="Rounded Rectangle 7"/>
-          <p:cNvSpPr/>
-          <p:nvPr/>
-        </p:nvSpPr>
-        <p:spPr>
-          <a:xfrm>
-            <a:off x="8366760" y="1188720"/>
-            <a:ext cx="3200400" cy="4526280"/>
-          </a:xfrm>
-          <a:prstGeom prst="roundRect">
-            <a:avLst/>
-          </a:prstGeom>
-          <a:solidFill>
-            <a:srgbClr val="FFF6E8"/>
-          </a:solidFill>
-          <a:ln w="13970">
-            <a:solidFill>
-              <a:srgbClr val="E5892A"/>
-            </a:solidFill>
-          </a:ln>
-        </p:spPr>
-        <p:style>
-          <a:lnRef idx="1">
-            <a:schemeClr val="accent1"/>
-          </a:lnRef>
-          <a:fillRef idx="3">
-            <a:schemeClr val="accent1"/>
-          </a:fillRef>
-          <a:effectRef idx="2">
-            <a:schemeClr val="accent1"/>
-          </a:effectRef>
-          <a:fontRef idx="minor">
-            <a:schemeClr val="lt1"/>
-          </a:fontRef>
-        </p:style>
-        <p:txBody>
-          <a:bodyPr rtlCol="0" anchor="ctr" lIns="182880" rIns="100584" tIns="91440"/>
-          <a:lstStyle/>
-          <a:p>
-            <a:pPr algn="ctr">
-              <a:defRPr sz="1700" b="1">
-                <a:solidFill>
-                  <a:srgbClr val="232D37"/>
-                </a:solidFill>
-                <a:latin typeface="Aptos Display"/>
-              </a:defRPr>
-            </a:pPr>
-            <a:r>
-              <a:t>Browser dependencies</a:t>
-            </a:r>
-          </a:p>
-          <a:p>
-            <a:pPr>
-              <a:spcBef>
-                <a:spcPts val="300"/>
-              </a:spcBef>
-              <a:defRPr sz="1200">
-                <a:solidFill>
-                  <a:srgbClr val="232D37"/>
-                </a:solidFill>
-                <a:latin typeface="Aptos"/>
-              </a:defRPr>
-            </a:pPr>
-            <a:r>
-              <a:t>Chart.js for visualization</a:t>
-            </a:r>
-          </a:p>
-          <a:p>
-            <a:pPr>
-              <a:spcBef>
-                <a:spcPts val="300"/>
-              </a:spcBef>
-              <a:defRPr sz="1200">
-                <a:solidFill>
-                  <a:srgbClr val="232D37"/>
-                </a:solidFill>
-                <a:latin typeface="Aptos"/>
-              </a:defRPr>
-            </a:pPr>
-            <a:r>
-              <a:t>Pinned SheetJS CDN script for XLSX export</a:t>
-            </a:r>
-          </a:p>
-          <a:p>
-            <a:pPr>
-              <a:spcBef>
-                <a:spcPts val="300"/>
-              </a:spcBef>
-              <a:defRPr sz="1200">
-                <a:solidFill>
-                  <a:srgbClr val="232D37"/>
-                </a:solidFill>
-                <a:latin typeface="Aptos"/>
-              </a:defRPr>
-            </a:pPr>
-            <a:r>
-              <a:t>No build step: plain global scripts in dependency order</a:t>
-            </a:r>
-          </a:p>
-        </p:txBody>
-      </p:sp>
-      <p:sp>
-        <p:nvSpPr>
-          <p:cNvPr id="9" name="Rectangle 8"/>
-          <p:cNvSpPr/>
-          <p:nvPr/>
-        </p:nvSpPr>
-        <p:spPr>
-          <a:xfrm>
-            <a:off x="8366760" y="1188720"/>
-            <a:ext cx="82296" cy="4526280"/>
-          </a:xfrm>
-          <a:prstGeom prst="rect">
-            <a:avLst/>
-          </a:prstGeom>
-          <a:solidFill>
-            <a:srgbClr val="E5892A"/>
-          </a:solidFill>
-          <a:ln>
-            <a:noFill/>
-          </a:ln>
-        </p:spPr>
-        <p:style>
-          <a:lnRef idx="1">
-            <a:schemeClr val="accent1"/>
-          </a:lnRef>
-          <a:fillRef idx="3">
-            <a:schemeClr val="accent1"/>
-          </a:fillRef>
-          <a:effectRef idx="2">
-            <a:schemeClr val="accent1"/>
-          </a:effectRef>
-          <a:fontRef idx="minor">
-            <a:schemeClr val="lt1"/>
-          </a:fontRef>
-        </p:style>
-        <p:txBody>
-          <a:bodyPr rtlCol="0" anchor="ctr"/>
-          <a:lstStyle/>
-          <a:p>
-            <a:pPr algn="ctr"/>
-          </a:p>
-        </p:txBody>
-      </p:sp>
-      <p:sp>
-        <p:nvSpPr>
           <p:cNvPr id="10" name="Rectangle 9"/>
           <p:cNvSpPr/>
           <p:nvPr/>
@@ -9312,7 +11152,7 @@
               </a:defRPr>
             </a:pPr>
             <a:r>
-              <a:t>Retirement Income Planner • Architecture overview • Account-sheet Excel export update</a:t>
+              <a:t>Retirement Income Planner • Architecture overview • Household-expense, LTC, and plan-chat update</a:t>
             </a:r>
           </a:p>
         </p:txBody>
@@ -9331,7 +11171,7 @@
     <p:bg>
       <p:bgPr>
         <a:solidFill>
-          <a:srgbClr val="F4F7FA"/>
+          <a:srgbClr val="FFFFFF"/>
         </a:solidFill>
         <a:effectLst/>
       </p:bgPr>
@@ -9374,7 +11214,7 @@
               </a:defRPr>
             </a:pPr>
             <a:r>
-              <a:t>Export-design guardrails</a:t>
+              <a:t>Ask about this plan: browser-side, snapshot-grounded chat</a:t>
             </a:r>
           </a:p>
         </p:txBody>
@@ -9410,7 +11250,7 @@
               </a:defRPr>
             </a:pPr>
             <a:r>
-              <a:t>Future export changes should remain plan-aware, read-only, and projection-driven.</a:t>
+              <a:t>The new chat feature sends a freshly built, read-only plan snapshot directly from the browser to a selected provider API.</a:t>
             </a:r>
           </a:p>
         </p:txBody>
@@ -9423,18 +11263,18 @@
         </p:nvSpPr>
         <p:spPr>
           <a:xfrm>
-            <a:off x="640080" y="1234440"/>
-            <a:ext cx="3383280" cy="4434840"/>
+            <a:off x="502920" y="1143000"/>
+            <a:ext cx="3383280" cy="4526280"/>
           </a:xfrm>
           <a:prstGeom prst="roundRect">
             <a:avLst/>
           </a:prstGeom>
           <a:solidFill>
-            <a:srgbClr val="EAF9F4"/>
+            <a:srgbClr val="E9F4FF"/>
           </a:solidFill>
           <a:ln w="13970">
             <a:solidFill>
-              <a:srgbClr val="429761"/>
+              <a:srgbClr val="266EB2"/>
             </a:solidFill>
           </a:ln>
         </p:spPr>
@@ -9465,7 +11305,7 @@
               </a:defRPr>
             </a:pPr>
             <a:r>
-              <a:t>Plan-aware</a:t>
+              <a:t>Snapshot</a:t>
             </a:r>
           </a:p>
           <a:p>
@@ -9481,7 +11321,7 @@
               </a:defRPr>
             </a:pPr>
             <a:r>
-              <a:t>Derive sheets from enabled accounts only.</a:t>
+              <a:t>Assumptions, enabled sources, and annual projection CSV.</a:t>
             </a:r>
           </a:p>
           <a:p>
@@ -9497,7 +11337,7 @@
               </a:defRPr>
             </a:pPr>
             <a:r>
-              <a:t>Maintain deterministic person/account order.</a:t>
+              <a:t>Includes LTC, expenses, taxes, balances, and IRA-stretch tail.</a:t>
             </a:r>
           </a:p>
           <a:p>
@@ -9513,7 +11353,7 @@
               </a:defRPr>
             </a:pPr>
             <a:r>
-              <a:t>Skip inactive accounts rather than exporting misleading empty worksheets.</a:t>
+              <a:t>Built anew for every question from state and lastProjection.</a:t>
             </a:r>
           </a:p>
         </p:txBody>
@@ -9526,14 +11366,14 @@
         </p:nvSpPr>
         <p:spPr>
           <a:xfrm>
-            <a:off x="640080" y="1234440"/>
-            <a:ext cx="82296" cy="4434840"/>
+            <a:off x="502920" y="1143000"/>
+            <a:ext cx="82296" cy="4526280"/>
           </a:xfrm>
           <a:prstGeom prst="rect">
             <a:avLst/>
           </a:prstGeom>
           <a:solidFill>
-            <a:srgbClr val="429761"/>
+            <a:srgbClr val="266EB2"/>
           </a:solidFill>
           <a:ln>
             <a:noFill/>
@@ -9569,8 +11409,170 @@
         </p:nvSpPr>
         <p:spPr>
           <a:xfrm>
-            <a:off x="4407408" y="1234440"/>
-            <a:ext cx="3383280" cy="4434840"/>
+            <a:off x="4407408" y="1143000"/>
+            <a:ext cx="3383280" cy="4526280"/>
+          </a:xfrm>
+          <a:prstGeom prst="roundRect">
+            <a:avLst/>
+          </a:prstGeom>
+          <a:solidFill>
+            <a:srgbClr val="F7EFFF"/>
+          </a:solidFill>
+          <a:ln w="13970">
+            <a:solidFill>
+              <a:srgbClr val="7852B0"/>
+            </a:solidFill>
+          </a:ln>
+        </p:spPr>
+        <p:style>
+          <a:lnRef idx="1">
+            <a:schemeClr val="accent1"/>
+          </a:lnRef>
+          <a:fillRef idx="3">
+            <a:schemeClr val="accent1"/>
+          </a:fillRef>
+          <a:effectRef idx="2">
+            <a:schemeClr val="accent1"/>
+          </a:effectRef>
+          <a:fontRef idx="minor">
+            <a:schemeClr val="lt1"/>
+          </a:fontRef>
+        </p:style>
+        <p:txBody>
+          <a:bodyPr rtlCol="0" anchor="ctr" lIns="182880" rIns="100584" tIns="91440"/>
+          <a:lstStyle/>
+          <a:p>
+            <a:pPr algn="ctr">
+              <a:defRPr sz="1700" b="1">
+                <a:solidFill>
+                  <a:srgbClr val="232D37"/>
+                </a:solidFill>
+                <a:latin typeface="Aptos Display"/>
+              </a:defRPr>
+            </a:pPr>
+            <a:r>
+              <a:t>Provider integration</a:t>
+            </a:r>
+          </a:p>
+          <a:p>
+            <a:pPr>
+              <a:spcBef>
+                <a:spcPts val="300"/>
+              </a:spcBef>
+              <a:defRPr sz="1200">
+                <a:solidFill>
+                  <a:srgbClr val="232D37"/>
+                </a:solidFill>
+                <a:latin typeface="Aptos"/>
+              </a:defRPr>
+            </a:pPr>
+            <a:r>
+              <a:t>Anthropic Claude or Google Gemini.</a:t>
+            </a:r>
+          </a:p>
+          <a:p>
+            <a:pPr>
+              <a:spcBef>
+                <a:spcPts val="300"/>
+              </a:spcBef>
+              <a:defRPr sz="1200">
+                <a:solidFill>
+                  <a:srgbClr val="232D37"/>
+                </a:solidFill>
+                <a:latin typeface="Aptos"/>
+              </a:defRPr>
+            </a:pPr>
+            <a:r>
+              <a:t>Streaming fetch requests; no application backend.</a:t>
+            </a:r>
+          </a:p>
+          <a:p>
+            <a:pPr>
+              <a:spcBef>
+                <a:spcPts val="300"/>
+              </a:spcBef>
+              <a:defRPr sz="1200">
+                <a:solidFill>
+                  <a:srgbClr val="232D37"/>
+                </a:solidFill>
+                <a:latin typeface="Aptos"/>
+              </a:defRPr>
+            </a:pPr>
+            <a:r>
+              <a:t>Provider-specific request and SSE parsing.</a:t>
+            </a:r>
+          </a:p>
+          <a:p>
+            <a:pPr>
+              <a:spcBef>
+                <a:spcPts val="300"/>
+              </a:spcBef>
+              <a:defRPr sz="1200">
+                <a:solidFill>
+                  <a:srgbClr val="232D37"/>
+                </a:solidFill>
+                <a:latin typeface="Aptos"/>
+              </a:defRPr>
+            </a:pPr>
+            <a:r>
+              <a:t>In-memory history: last 20 messages.</a:t>
+            </a:r>
+          </a:p>
+        </p:txBody>
+      </p:sp>
+      <p:sp>
+        <p:nvSpPr>
+          <p:cNvPr id="7" name="Rectangle 6"/>
+          <p:cNvSpPr/>
+          <p:nvPr/>
+        </p:nvSpPr>
+        <p:spPr>
+          <a:xfrm>
+            <a:off x="4407408" y="1143000"/>
+            <a:ext cx="82296" cy="4526280"/>
+          </a:xfrm>
+          <a:prstGeom prst="rect">
+            <a:avLst/>
+          </a:prstGeom>
+          <a:solidFill>
+            <a:srgbClr val="7852B0"/>
+          </a:solidFill>
+          <a:ln>
+            <a:noFill/>
+          </a:ln>
+        </p:spPr>
+        <p:style>
+          <a:lnRef idx="1">
+            <a:schemeClr val="accent1"/>
+          </a:lnRef>
+          <a:fillRef idx="3">
+            <a:schemeClr val="accent1"/>
+          </a:fillRef>
+          <a:effectRef idx="2">
+            <a:schemeClr val="accent1"/>
+          </a:effectRef>
+          <a:fontRef idx="minor">
+            <a:schemeClr val="lt1"/>
+          </a:fontRef>
+        </p:style>
+        <p:txBody>
+          <a:bodyPr rtlCol="0" anchor="ctr"/>
+          <a:lstStyle/>
+          <a:p>
+            <a:pPr algn="ctr"/>
+          </a:p>
+        </p:txBody>
+      </p:sp>
+      <p:sp>
+        <p:nvSpPr>
+          <p:cNvPr id="8" name="Rounded Rectangle 7"/>
+          <p:cNvSpPr/>
+          <p:nvPr/>
+        </p:nvSpPr>
+        <p:spPr>
+          <a:xfrm>
+            <a:off x="8311896" y="1143000"/>
+            <a:ext cx="3383280" cy="4526280"/>
           </a:xfrm>
           <a:prstGeom prst="roundRect">
             <a:avLst/>
@@ -9611,7 +11613,7 @@
               </a:defRPr>
             </a:pPr>
             <a:r>
-              <a:t>Workbook-safe</a:t>
+              <a:t>Privacy boundaries</a:t>
             </a:r>
           </a:p>
           <a:p>
@@ -9627,7 +11629,7 @@
               </a:defRPr>
             </a:pPr>
             <a:r>
-              <a:t>Sanitize, trim, and de-duplicate worksheet names.</a:t>
+              <a:t>Names omitted unless Send names is selected; birth date is never sent.</a:t>
             </a:r>
           </a:p>
           <a:p>
@@ -9643,7 +11645,7 @@
               </a:defRPr>
             </a:pPr>
             <a:r>
-              <a:t>Respect the 31-character Excel sheet-name limit.</a:t>
+              <a:t>Keys stored per provider in session storage or optional local storage—not plan state.</a:t>
             </a:r>
           </a:p>
           <a:p>
@@ -9659,21 +11661,21 @@
               </a:defRPr>
             </a:pPr>
             <a:r>
-              <a:t>Protect against unavailable libraries and empty projections.</a:t>
-            </a:r>
-          </a:p>
-        </p:txBody>
-      </p:sp>
-      <p:sp>
-        <p:nvSpPr>
-          <p:cNvPr id="7" name="Rectangle 6"/>
+              <a:t>Preview exactly what is sent; provider/free-tier privacy is disclosed.</a:t>
+            </a:r>
+          </a:p>
+        </p:txBody>
+      </p:sp>
+      <p:sp>
+        <p:nvSpPr>
+          <p:cNvPr id="9" name="Rectangle 8"/>
           <p:cNvSpPr/>
           <p:nvPr/>
         </p:nvSpPr>
         <p:spPr>
           <a:xfrm>
-            <a:off x="4407408" y="1234440"/>
-            <a:ext cx="82296" cy="4434840"/>
+            <a:off x="8311896" y="1143000"/>
+            <a:ext cx="82296" cy="4526280"/>
           </a:xfrm>
           <a:prstGeom prst="rect">
             <a:avLst/>
@@ -9709,152 +11711,6 @@
       </p:sp>
       <p:sp>
         <p:nvSpPr>
-          <p:cNvPr id="8" name="Rounded Rectangle 7"/>
-          <p:cNvSpPr/>
-          <p:nvPr/>
-        </p:nvSpPr>
-        <p:spPr>
-          <a:xfrm>
-            <a:off x="8174736" y="1234440"/>
-            <a:ext cx="3383280" cy="4434840"/>
-          </a:xfrm>
-          <a:prstGeom prst="roundRect">
-            <a:avLst/>
-          </a:prstGeom>
-          <a:solidFill>
-            <a:srgbClr val="E9F4FF"/>
-          </a:solidFill>
-          <a:ln w="13970">
-            <a:solidFill>
-              <a:srgbClr val="266EB2"/>
-            </a:solidFill>
-          </a:ln>
-        </p:spPr>
-        <p:style>
-          <a:lnRef idx="1">
-            <a:schemeClr val="accent1"/>
-          </a:lnRef>
-          <a:fillRef idx="3">
-            <a:schemeClr val="accent1"/>
-          </a:fillRef>
-          <a:effectRef idx="2">
-            <a:schemeClr val="accent1"/>
-          </a:effectRef>
-          <a:fontRef idx="minor">
-            <a:schemeClr val="lt1"/>
-          </a:fontRef>
-        </p:style>
-        <p:txBody>
-          <a:bodyPr rtlCol="0" anchor="ctr" lIns="182880" rIns="100584" tIns="91440"/>
-          <a:lstStyle/>
-          <a:p>
-            <a:pPr algn="ctr">
-              <a:defRPr sz="1700" b="1">
-                <a:solidFill>
-                  <a:srgbClr val="232D37"/>
-                </a:solidFill>
-                <a:latin typeface="Aptos Display"/>
-              </a:defRPr>
-            </a:pPr>
-            <a:r>
-              <a:t>Architecture-safe</a:t>
-            </a:r>
-          </a:p>
-          <a:p>
-            <a:pPr>
-              <a:spcBef>
-                <a:spcPts val="300"/>
-              </a:spcBef>
-              <a:defRPr sz="1200">
-                <a:solidFill>
-                  <a:srgbClr val="232D37"/>
-                </a:solidFill>
-                <a:latin typeface="Aptos"/>
-              </a:defRPr>
-            </a:pPr>
-            <a:r>
-              <a:t>Read lastProjection only.</a:t>
-            </a:r>
-          </a:p>
-          <a:p>
-            <a:pPr>
-              <a:spcBef>
-                <a:spcPts val="300"/>
-              </a:spcBef>
-              <a:defRPr sz="1200">
-                <a:solidFill>
-                  <a:srgbClr val="232D37"/>
-                </a:solidFill>
-                <a:latin typeface="Aptos"/>
-              </a:defRPr>
-            </a:pPr>
-            <a:r>
-              <a:t>Never alter state or recompute financial results during export.</a:t>
-            </a:r>
-          </a:p>
-          <a:p>
-            <a:pPr>
-              <a:spcBef>
-                <a:spcPts val="300"/>
-              </a:spcBef>
-              <a:defRPr sz="1200">
-                <a:solidFill>
-                  <a:srgbClr val="232D37"/>
-                </a:solidFill>
-                <a:latin typeface="Aptos"/>
-              </a:defRPr>
-            </a:pPr>
-            <a:r>
-              <a:t>Add new exported fields only after they exist in the projection-row contract.</a:t>
-            </a:r>
-          </a:p>
-        </p:txBody>
-      </p:sp>
-      <p:sp>
-        <p:nvSpPr>
-          <p:cNvPr id="9" name="Rectangle 8"/>
-          <p:cNvSpPr/>
-          <p:nvPr/>
-        </p:nvSpPr>
-        <p:spPr>
-          <a:xfrm>
-            <a:off x="8174736" y="1234440"/>
-            <a:ext cx="82296" cy="4434840"/>
-          </a:xfrm>
-          <a:prstGeom prst="rect">
-            <a:avLst/>
-          </a:prstGeom>
-          <a:solidFill>
-            <a:srgbClr val="266EB2"/>
-          </a:solidFill>
-          <a:ln>
-            <a:noFill/>
-          </a:ln>
-        </p:spPr>
-        <p:style>
-          <a:lnRef idx="1">
-            <a:schemeClr val="accent1"/>
-          </a:lnRef>
-          <a:fillRef idx="3">
-            <a:schemeClr val="accent1"/>
-          </a:fillRef>
-          <a:effectRef idx="2">
-            <a:schemeClr val="accent1"/>
-          </a:effectRef>
-          <a:fontRef idx="minor">
-            <a:schemeClr val="lt1"/>
-          </a:fontRef>
-        </p:style>
-        <p:txBody>
-          <a:bodyPr rtlCol="0" anchor="ctr"/>
-          <a:lstStyle/>
-          <a:p>
-            <a:pPr algn="ctr"/>
-          </a:p>
-        </p:txBody>
-      </p:sp>
-      <p:sp>
-        <p:nvSpPr>
           <p:cNvPr id="10" name="Rectangle 9"/>
           <p:cNvSpPr/>
           <p:nvPr/>
@@ -9927,7 +11783,7 @@
               </a:defRPr>
             </a:pPr>
             <a:r>
-              <a:t>Retirement Income Planner • Architecture overview • Account-sheet Excel export update</a:t>
+              <a:t>Retirement Income Planner • Architecture overview • Household-expense, LTC, and plan-chat update</a:t>
             </a:r>
           </a:p>
         </p:txBody>

--- a/docs/retirement_income_planner_architecture.pptx
+++ b/docs/retirement_income_planner_architecture.pptx
@@ -3216,7 +3216,7 @@
               </a:defRPr>
             </a:pPr>
             <a:r>
-              <a:t>Updated architecture: household expense funding, long-term care, AUM fees, stretch IRAs, regression tests, and plan-aware chat</a:t>
+              <a:t>Updated architecture: multiple rentals, tax-exempt portfolio income, senior deduction, excess reinvestment, and legacy-value views</a:t>
             </a:r>
           </a:p>
         </p:txBody>
@@ -3287,7 +3287,7 @@
               </a:defRPr>
             </a:pPr>
             <a:r>
-              <a:t>Plan assumptions, cards, controls</a:t>
+              <a:t>Household assumptions and income cards</a:t>
             </a:r>
           </a:p>
           <a:p>
@@ -3303,7 +3303,7 @@
               </a:defRPr>
             </a:pPr>
             <a:r>
-              <a:t>Writes mutable state</a:t>
+              <a:t>Supports multiple rentals and portfolio options</a:t>
             </a:r>
           </a:p>
         </p:txBody>
@@ -3417,7 +3417,7 @@
               </a:defRPr>
             </a:pPr>
             <a:r>
-              <a:t>Annual projection + tax/LTCG solver</a:t>
+              <a:t>Annual projection + converged tax</a:t>
             </a:r>
           </a:p>
           <a:p>
@@ -3433,7 +3433,7 @@
               </a:defRPr>
             </a:pPr>
             <a:r>
-              <a:t>Derived financial source of truth</a:t>
+              <a:t>Income, cash flow, tax, basis, legacy tail</a:t>
             </a:r>
           </a:p>
         </p:txBody>
@@ -3547,7 +3547,7 @@
               </a:defRPr>
             </a:pPr>
             <a:r>
-              <a:t>Charts, export, formulas, notes, chat</a:t>
+              <a:t>Charts, sliders, export, formulas, notes, chat</a:t>
             </a:r>
           </a:p>
           <a:p>
@@ -3563,7 +3563,7 @@
               </a:defRPr>
             </a:pPr>
             <a:r>
-              <a:t>Consumes projection rows</a:t>
+              <a:t>Projection-row consumers</a:t>
             </a:r>
           </a:p>
         </p:txBody>
@@ -3803,7 +3803,7 @@
               </a:defRPr>
             </a:pPr>
             <a:r>
-              <a:t>Core invariant</a:t>
+              <a:t>Core boundary preserved</a:t>
             </a:r>
           </a:p>
           <a:p>
@@ -3819,7 +3819,7 @@
               </a:defRPr>
             </a:pPr>
             <a:r>
-              <a:t>Inputs do not calculate finance; Compute does not touch the DOM; charts, export, and chat consume the same computed projection.</a:t>
+              <a:t>State is the only input truth. computeProjection() remains the only source for financial outputs; all views consume its rows.</a:t>
             </a:r>
           </a:p>
         </p:txBody>
@@ -3941,7 +3941,7 @@
               </a:defRPr>
             </a:pPr>
             <a:r>
-              <a:t>Retirement Income Planner • Architecture overview • Household-expense, LTC, and plan-chat update</a:t>
+              <a:t>Retirement Income Planner • Architecture overview • Rental, tax-exempt income, and legacy-value update</a:t>
             </a:r>
           </a:p>
         </p:txBody>
@@ -4003,7 +4003,7 @@
               </a:defRPr>
             </a:pPr>
             <a:r>
-              <a:t>Expanded engineering structure and regression safety net</a:t>
+              <a:t>State migration preserves older plans</a:t>
             </a:r>
           </a:p>
         </p:txBody>
@@ -4039,7 +4039,7 @@
               </a:defRPr>
             </a:pPr>
             <a:r>
-              <a:t>The codebase remains a plain-script browser app, now paired with CSS separation and a Node regression harness.</a:t>
+              <a:t>hydrateState() remains the compatibility boundary between saved plan formats and the current canonical schema.</a:t>
             </a:r>
           </a:p>
         </p:txBody>
@@ -4053,7 +4053,397 @@
         <p:spPr>
           <a:xfrm>
             <a:off x="502920" y="1143000"/>
-            <a:ext cx="2286000" cy="4526280"/>
+            <a:ext cx="2743200" cy="4526280"/>
+          </a:xfrm>
+          <a:prstGeom prst="roundRect">
+            <a:avLst/>
+          </a:prstGeom>
+          <a:solidFill>
+            <a:srgbClr val="E9F4FF"/>
+          </a:solidFill>
+          <a:ln w="13970">
+            <a:solidFill>
+              <a:srgbClr val="266EB2"/>
+            </a:solidFill>
+          </a:ln>
+        </p:spPr>
+        <p:style>
+          <a:lnRef idx="1">
+            <a:schemeClr val="accent1"/>
+          </a:lnRef>
+          <a:fillRef idx="3">
+            <a:schemeClr val="accent1"/>
+          </a:fillRef>
+          <a:effectRef idx="2">
+            <a:schemeClr val="accent1"/>
+          </a:effectRef>
+          <a:fontRef idx="minor">
+            <a:schemeClr val="lt1"/>
+          </a:fontRef>
+        </p:style>
+        <p:txBody>
+          <a:bodyPr rtlCol="0" anchor="ctr" lIns="182880" rIns="100584" tIns="91440"/>
+          <a:lstStyle/>
+          <a:p>
+            <a:pPr algn="ctr">
+              <a:defRPr sz="1700" b="1">
+                <a:solidFill>
+                  <a:srgbClr val="232D37"/>
+                </a:solidFill>
+                <a:latin typeface="Aptos Display"/>
+              </a:defRPr>
+            </a:pPr>
+            <a:r>
+              <a:t>Legacy rental</a:t>
+            </a:r>
+          </a:p>
+          <a:p>
+            <a:pPr>
+              <a:spcBef>
+                <a:spcPts val="300"/>
+              </a:spcBef>
+              <a:defRPr sz="1200">
+                <a:solidFill>
+                  <a:srgbClr val="232D37"/>
+                </a:solidFill>
+                <a:latin typeface="Aptos"/>
+              </a:defRPr>
+            </a:pPr>
+            <a:r>
+              <a:t>Old single rental object becomes rentals[0] only when it carried meaningful income, depreciation, or enablement.</a:t>
+            </a:r>
+          </a:p>
+          <a:p>
+            <a:pPr>
+              <a:spcBef>
+                <a:spcPts val="300"/>
+              </a:spcBef>
+              <a:defRPr sz="1200">
+                <a:solidFill>
+                  <a:srgbClr val="232D37"/>
+                </a:solidFill>
+                <a:latin typeface="Aptos"/>
+              </a:defRPr>
+            </a:pPr>
+            <a:r>
+              <a:t>New plans use an array of property sub-cards.</a:t>
+            </a:r>
+          </a:p>
+        </p:txBody>
+      </p:sp>
+      <p:sp>
+        <p:nvSpPr>
+          <p:cNvPr id="5" name="Rectangle 4"/>
+          <p:cNvSpPr/>
+          <p:nvPr/>
+        </p:nvSpPr>
+        <p:spPr>
+          <a:xfrm>
+            <a:off x="502920" y="1143000"/>
+            <a:ext cx="82296" cy="4526280"/>
+          </a:xfrm>
+          <a:prstGeom prst="rect">
+            <a:avLst/>
+          </a:prstGeom>
+          <a:solidFill>
+            <a:srgbClr val="266EB2"/>
+          </a:solidFill>
+          <a:ln>
+            <a:noFill/>
+          </a:ln>
+        </p:spPr>
+        <p:style>
+          <a:lnRef idx="1">
+            <a:schemeClr val="accent1"/>
+          </a:lnRef>
+          <a:fillRef idx="3">
+            <a:schemeClr val="accent1"/>
+          </a:fillRef>
+          <a:effectRef idx="2">
+            <a:schemeClr val="accent1"/>
+          </a:effectRef>
+          <a:fontRef idx="minor">
+            <a:schemeClr val="lt1"/>
+          </a:fontRef>
+        </p:style>
+        <p:txBody>
+          <a:bodyPr rtlCol="0" anchor="ctr"/>
+          <a:lstStyle/>
+          <a:p>
+            <a:pPr algn="ctr"/>
+          </a:p>
+        </p:txBody>
+      </p:sp>
+      <p:sp>
+        <p:nvSpPr>
+          <p:cNvPr id="6" name="Rounded Rectangle 5"/>
+          <p:cNvSpPr/>
+          <p:nvPr/>
+        </p:nvSpPr>
+        <p:spPr>
+          <a:xfrm>
+            <a:off x="3520440" y="1143000"/>
+            <a:ext cx="2743200" cy="4526280"/>
+          </a:xfrm>
+          <a:prstGeom prst="roundRect">
+            <a:avLst/>
+          </a:prstGeom>
+          <a:solidFill>
+            <a:srgbClr val="EAF9F4"/>
+          </a:solidFill>
+          <a:ln w="13970">
+            <a:solidFill>
+              <a:srgbClr val="429761"/>
+            </a:solidFill>
+          </a:ln>
+        </p:spPr>
+        <p:style>
+          <a:lnRef idx="1">
+            <a:schemeClr val="accent1"/>
+          </a:lnRef>
+          <a:fillRef idx="3">
+            <a:schemeClr val="accent1"/>
+          </a:fillRef>
+          <a:effectRef idx="2">
+            <a:schemeClr val="accent1"/>
+          </a:effectRef>
+          <a:fontRef idx="minor">
+            <a:schemeClr val="lt1"/>
+          </a:fontRef>
+        </p:style>
+        <p:txBody>
+          <a:bodyPr rtlCol="0" anchor="ctr" lIns="182880" rIns="100584" tIns="91440"/>
+          <a:lstStyle/>
+          <a:p>
+            <a:pPr algn="ctr">
+              <a:defRPr sz="1700" b="1">
+                <a:solidFill>
+                  <a:srgbClr val="232D37"/>
+                </a:solidFill>
+                <a:latin typeface="Aptos Display"/>
+              </a:defRPr>
+            </a:pPr>
+            <a:r>
+              <a:t>Legacy conversion start</a:t>
+            </a:r>
+          </a:p>
+          <a:p>
+            <a:pPr>
+              <a:spcBef>
+                <a:spcPts val="300"/>
+              </a:spcBef>
+              <a:defRPr sz="1200">
+                <a:solidFill>
+                  <a:srgbClr val="232D37"/>
+                </a:solidFill>
+                <a:latin typeface="Aptos"/>
+              </a:defRPr>
+            </a:pPr>
+            <a:r>
+              <a:t>If conversion already existed: old positive start becomes custom; otherwise now.</a:t>
+            </a:r>
+          </a:p>
+          <a:p>
+            <a:pPr>
+              <a:spcBef>
+                <a:spcPts val="300"/>
+              </a:spcBef>
+              <a:defRPr sz="1200">
+                <a:solidFill>
+                  <a:srgbClr val="232D37"/>
+                </a:solidFill>
+                <a:latin typeface="Aptos"/>
+              </a:defRPr>
+            </a:pPr>
+            <a:r>
+              <a:t>No conversion: new default is RMD start.</a:t>
+            </a:r>
+          </a:p>
+        </p:txBody>
+      </p:sp>
+      <p:sp>
+        <p:nvSpPr>
+          <p:cNvPr id="7" name="Rectangle 6"/>
+          <p:cNvSpPr/>
+          <p:nvPr/>
+        </p:nvSpPr>
+        <p:spPr>
+          <a:xfrm>
+            <a:off x="3520440" y="1143000"/>
+            <a:ext cx="82296" cy="4526280"/>
+          </a:xfrm>
+          <a:prstGeom prst="rect">
+            <a:avLst/>
+          </a:prstGeom>
+          <a:solidFill>
+            <a:srgbClr val="429761"/>
+          </a:solidFill>
+          <a:ln>
+            <a:noFill/>
+          </a:ln>
+        </p:spPr>
+        <p:style>
+          <a:lnRef idx="1">
+            <a:schemeClr val="accent1"/>
+          </a:lnRef>
+          <a:fillRef idx="3">
+            <a:schemeClr val="accent1"/>
+          </a:fillRef>
+          <a:effectRef idx="2">
+            <a:schemeClr val="accent1"/>
+          </a:effectRef>
+          <a:fontRef idx="minor">
+            <a:schemeClr val="lt1"/>
+          </a:fontRef>
+        </p:style>
+        <p:txBody>
+          <a:bodyPr rtlCol="0" anchor="ctr"/>
+          <a:lstStyle/>
+          <a:p>
+            <a:pPr algn="ctr"/>
+          </a:p>
+        </p:txBody>
+      </p:sp>
+      <p:sp>
+        <p:nvSpPr>
+          <p:cNvPr id="8" name="Rounded Rectangle 7"/>
+          <p:cNvSpPr/>
+          <p:nvPr/>
+        </p:nvSpPr>
+        <p:spPr>
+          <a:xfrm>
+            <a:off x="6537960" y="1143000"/>
+            <a:ext cx="2743200" cy="4526280"/>
+          </a:xfrm>
+          <a:prstGeom prst="roundRect">
+            <a:avLst/>
+          </a:prstGeom>
+          <a:solidFill>
+            <a:srgbClr val="FFF6E8"/>
+          </a:solidFill>
+          <a:ln w="13970">
+            <a:solidFill>
+              <a:srgbClr val="E5892A"/>
+            </a:solidFill>
+          </a:ln>
+        </p:spPr>
+        <p:style>
+          <a:lnRef idx="1">
+            <a:schemeClr val="accent1"/>
+          </a:lnRef>
+          <a:fillRef idx="3">
+            <a:schemeClr val="accent1"/>
+          </a:fillRef>
+          <a:effectRef idx="2">
+            <a:schemeClr val="accent1"/>
+          </a:effectRef>
+          <a:fontRef idx="minor">
+            <a:schemeClr val="lt1"/>
+          </a:fontRef>
+        </p:style>
+        <p:txBody>
+          <a:bodyPr rtlCol="0" anchor="ctr" lIns="182880" rIns="100584" tIns="91440"/>
+          <a:lstStyle/>
+          <a:p>
+            <a:pPr algn="ctr">
+              <a:defRPr sz="1700" b="1">
+                <a:solidFill>
+                  <a:srgbClr val="232D37"/>
+                </a:solidFill>
+                <a:latin typeface="Aptos Display"/>
+              </a:defRPr>
+            </a:pPr>
+            <a:r>
+              <a:t>Legacy household settings</a:t>
+            </a:r>
+          </a:p>
+          <a:p>
+            <a:pPr>
+              <a:spcBef>
+                <a:spcPts val="300"/>
+              </a:spcBef>
+              <a:defRPr sz="1200">
+                <a:solidFill>
+                  <a:srgbClr val="232D37"/>
+                </a:solidFill>
+                <a:latin typeface="Aptos"/>
+              </a:defRPr>
+            </a:pPr>
+            <a:r>
+              <a:t>Existing living, LTC, and UI-hide migrations stay in place.</a:t>
+            </a:r>
+          </a:p>
+          <a:p>
+            <a:pPr>
+              <a:spcBef>
+                <a:spcPts val="300"/>
+              </a:spcBef>
+              <a:defRPr sz="1200">
+                <a:solidFill>
+                  <a:srgbClr val="232D37"/>
+                </a:solidFill>
+                <a:latin typeface="Aptos"/>
+              </a:defRPr>
+            </a:pPr>
+            <a:r>
+              <a:t>Missing fields receive canonical defaults; stale fields are dropped.</a:t>
+            </a:r>
+          </a:p>
+        </p:txBody>
+      </p:sp>
+      <p:sp>
+        <p:nvSpPr>
+          <p:cNvPr id="9" name="Rectangle 8"/>
+          <p:cNvSpPr/>
+          <p:nvPr/>
+        </p:nvSpPr>
+        <p:spPr>
+          <a:xfrm>
+            <a:off x="6537960" y="1143000"/>
+            <a:ext cx="82296" cy="4526280"/>
+          </a:xfrm>
+          <a:prstGeom prst="rect">
+            <a:avLst/>
+          </a:prstGeom>
+          <a:solidFill>
+            <a:srgbClr val="E5892A"/>
+          </a:solidFill>
+          <a:ln>
+            <a:noFill/>
+          </a:ln>
+        </p:spPr>
+        <p:style>
+          <a:lnRef idx="1">
+            <a:schemeClr val="accent1"/>
+          </a:lnRef>
+          <a:fillRef idx="3">
+            <a:schemeClr val="accent1"/>
+          </a:fillRef>
+          <a:effectRef idx="2">
+            <a:schemeClr val="accent1"/>
+          </a:effectRef>
+          <a:fontRef idx="minor">
+            <a:schemeClr val="lt1"/>
+          </a:fontRef>
+        </p:style>
+        <p:txBody>
+          <a:bodyPr rtlCol="0" anchor="ctr"/>
+          <a:lstStyle/>
+          <a:p>
+            <a:pPr algn="ctr"/>
+          </a:p>
+        </p:txBody>
+      </p:sp>
+      <p:sp>
+        <p:nvSpPr>
+          <p:cNvPr id="10" name="Rounded Rectangle 9"/>
+          <p:cNvSpPr/>
+          <p:nvPr/>
+        </p:nvSpPr>
+        <p:spPr>
+          <a:xfrm>
+            <a:off x="9555480" y="1143000"/>
+            <a:ext cx="2103120" cy="4526280"/>
           </a:xfrm>
           <a:prstGeom prst="roundRect">
             <a:avLst/>
@@ -4086,7 +4476,7 @@
           <a:lstStyle/>
           <a:p>
             <a:pPr algn="ctr">
-              <a:defRPr sz="1700" b="1">
+              <a:defRPr sz="1600" b="1">
                 <a:solidFill>
                   <a:srgbClr val="232D37"/>
                 </a:solidFill>
@@ -4094,7 +4484,7 @@
               </a:defRPr>
             </a:pPr>
             <a:r>
-              <a:t>Presentation</a:t>
+              <a:t>Guarantee</a:t>
             </a:r>
           </a:p>
           <a:p>
@@ -4102,15 +4492,15 @@
               <a:spcBef>
                 <a:spcPts val="300"/>
               </a:spcBef>
-              <a:defRPr sz="1200">
-                <a:solidFill>
-                  <a:srgbClr val="232D37"/>
-                </a:solidFill>
-                <a:latin typeface="Aptos"/>
-              </a:defRPr>
-            </a:pPr>
-            <a:r>
-              <a:t>css/styles.css owns all styling.</a:t>
+              <a:defRPr sz="1100">
+                <a:solidFill>
+                  <a:srgbClr val="232D37"/>
+                </a:solidFill>
+                <a:latin typeface="Aptos"/>
+              </a:defRPr>
+            </a:pPr>
+            <a:r>
+              <a:t>Hydrate before compute.</a:t>
             </a:r>
           </a:p>
           <a:p>
@@ -4118,44 +4508,28 @@
               <a:spcBef>
                 <a:spcPts val="300"/>
               </a:spcBef>
-              <a:defRPr sz="1200">
-                <a:solidFill>
-                  <a:srgbClr val="232D37"/>
-                </a:solidFill>
-                <a:latin typeface="Aptos"/>
-              </a:defRPr>
-            </a:pPr>
-            <a:r>
-              <a:t>index.html is markup only.</a:t>
-            </a:r>
-          </a:p>
-          <a:p>
-            <a:pPr>
-              <a:spcBef>
-                <a:spcPts val="300"/>
-              </a:spcBef>
-              <a:defRPr sz="1200">
-                <a:solidFill>
-                  <a:srgbClr val="232D37"/>
-                </a:solidFill>
-                <a:latin typeface="Aptos"/>
-              </a:defRPr>
-            </a:pPr>
-            <a:r>
-              <a:t>js/display adds expenseChart.js and chat.js.</a:t>
-            </a:r>
-          </a:p>
-        </p:txBody>
-      </p:sp>
-      <p:sp>
-        <p:nvSpPr>
-          <p:cNvPr id="5" name="Rectangle 4"/>
+              <a:defRPr sz="1100">
+                <a:solidFill>
+                  <a:srgbClr val="232D37"/>
+                </a:solidFill>
+                <a:latin typeface="Aptos"/>
+              </a:defRPr>
+            </a:pPr>
+            <a:r>
+              <a:t>Projection and views always see the current schema.</a:t>
+            </a:r>
+          </a:p>
+        </p:txBody>
+      </p:sp>
+      <p:sp>
+        <p:nvSpPr>
+          <p:cNvPr id="11" name="Rectangle 10"/>
           <p:cNvSpPr/>
           <p:nvPr/>
         </p:nvSpPr>
         <p:spPr>
           <a:xfrm>
-            <a:off x="502920" y="1143000"/>
+            <a:off x="9555480" y="1143000"/>
             <a:ext cx="82296" cy="4526280"/>
           </a:xfrm>
           <a:prstGeom prst="rect">
@@ -4192,25 +4566,23 @@
       </p:sp>
       <p:sp>
         <p:nvSpPr>
-          <p:cNvPr id="6" name="Rounded Rectangle 5"/>
+          <p:cNvPr id="12" name="Rectangle 11"/>
           <p:cNvSpPr/>
           <p:nvPr/>
         </p:nvSpPr>
         <p:spPr>
           <a:xfrm>
-            <a:off x="3200400" y="1143000"/>
-            <a:ext cx="2286000" cy="4526280"/>
-          </a:xfrm>
-          <a:prstGeom prst="roundRect">
-            <a:avLst/>
-          </a:prstGeom>
-          <a:solidFill>
-            <a:srgbClr val="EAF9F4"/>
-          </a:solidFill>
-          <a:ln w="13970">
-            <a:solidFill>
-              <a:srgbClr val="429761"/>
-            </a:solidFill>
+            <a:off x="502920" y="6473952"/>
+            <a:ext cx="11183112" cy="13716"/>
+          </a:xfrm>
+          <a:prstGeom prst="rect">
+            <a:avLst/>
+          </a:prstGeom>
+          <a:solidFill>
+            <a:srgbClr val="D2DCE5"/>
+          </a:solidFill>
+          <a:ln>
+            <a:noFill/>
           </a:ln>
         </p:spPr>
         <p:style>
@@ -4228,474 +4600,6 @@
           </a:fontRef>
         </p:style>
         <p:txBody>
-          <a:bodyPr rtlCol="0" anchor="ctr" lIns="182880" rIns="100584" tIns="91440"/>
-          <a:lstStyle/>
-          <a:p>
-            <a:pPr algn="ctr">
-              <a:defRPr sz="1700" b="1">
-                <a:solidFill>
-                  <a:srgbClr val="232D37"/>
-                </a:solidFill>
-                <a:latin typeface="Aptos Display"/>
-              </a:defRPr>
-            </a:pPr>
-            <a:r>
-              <a:t>Core model</a:t>
-            </a:r>
-          </a:p>
-          <a:p>
-            <a:pPr>
-              <a:spcBef>
-                <a:spcPts val="300"/>
-              </a:spcBef>
-              <a:defRPr sz="1200">
-                <a:solidFill>
-                  <a:srgbClr val="232D37"/>
-                </a:solidFill>
-                <a:latin typeface="Aptos"/>
-              </a:defRPr>
-            </a:pPr>
-            <a:r>
-              <a:t>State migration handles legacy living withdrawals, LTC shapes, hide flags, and conversion start age.</a:t>
-            </a:r>
-          </a:p>
-          <a:p>
-            <a:pPr>
-              <a:spcBef>
-                <a:spcPts val="300"/>
-              </a:spcBef>
-              <a:defRPr sz="1200">
-                <a:solidFill>
-                  <a:srgbClr val="232D37"/>
-                </a:solidFill>
-                <a:latin typeface="Aptos"/>
-              </a:defRPr>
-            </a:pPr>
-            <a:r>
-              <a:t>Projection owns waterfall, taxes, LTCG, AUM, LTC, and stretch data.</a:t>
-            </a:r>
-          </a:p>
-        </p:txBody>
-      </p:sp>
-      <p:sp>
-        <p:nvSpPr>
-          <p:cNvPr id="7" name="Rectangle 6"/>
-          <p:cNvSpPr/>
-          <p:nvPr/>
-        </p:nvSpPr>
-        <p:spPr>
-          <a:xfrm>
-            <a:off x="3200400" y="1143000"/>
-            <a:ext cx="82296" cy="4526280"/>
-          </a:xfrm>
-          <a:prstGeom prst="rect">
-            <a:avLst/>
-          </a:prstGeom>
-          <a:solidFill>
-            <a:srgbClr val="429761"/>
-          </a:solidFill>
-          <a:ln>
-            <a:noFill/>
-          </a:ln>
-        </p:spPr>
-        <p:style>
-          <a:lnRef idx="1">
-            <a:schemeClr val="accent1"/>
-          </a:lnRef>
-          <a:fillRef idx="3">
-            <a:schemeClr val="accent1"/>
-          </a:fillRef>
-          <a:effectRef idx="2">
-            <a:schemeClr val="accent1"/>
-          </a:effectRef>
-          <a:fontRef idx="minor">
-            <a:schemeClr val="lt1"/>
-          </a:fontRef>
-        </p:style>
-        <p:txBody>
-          <a:bodyPr rtlCol="0" anchor="ctr"/>
-          <a:lstStyle/>
-          <a:p>
-            <a:pPr algn="ctr"/>
-          </a:p>
-        </p:txBody>
-      </p:sp>
-      <p:sp>
-        <p:nvSpPr>
-          <p:cNvPr id="8" name="Rounded Rectangle 7"/>
-          <p:cNvSpPr/>
-          <p:nvPr/>
-        </p:nvSpPr>
-        <p:spPr>
-          <a:xfrm>
-            <a:off x="5897880" y="1143000"/>
-            <a:ext cx="2286000" cy="4526280"/>
-          </a:xfrm>
-          <a:prstGeom prst="roundRect">
-            <a:avLst/>
-          </a:prstGeom>
-          <a:solidFill>
-            <a:srgbClr val="E9F4FF"/>
-          </a:solidFill>
-          <a:ln w="13970">
-            <a:solidFill>
-              <a:srgbClr val="266EB2"/>
-            </a:solidFill>
-          </a:ln>
-        </p:spPr>
-        <p:style>
-          <a:lnRef idx="1">
-            <a:schemeClr val="accent1"/>
-          </a:lnRef>
-          <a:fillRef idx="3">
-            <a:schemeClr val="accent1"/>
-          </a:fillRef>
-          <a:effectRef idx="2">
-            <a:schemeClr val="accent1"/>
-          </a:effectRef>
-          <a:fontRef idx="minor">
-            <a:schemeClr val="lt1"/>
-          </a:fontRef>
-        </p:style>
-        <p:txBody>
-          <a:bodyPr rtlCol="0" anchor="ctr" lIns="182880" rIns="100584" tIns="91440"/>
-          <a:lstStyle/>
-          <a:p>
-            <a:pPr algn="ctr">
-              <a:defRPr sz="1700" b="1">
-                <a:solidFill>
-                  <a:srgbClr val="232D37"/>
-                </a:solidFill>
-                <a:latin typeface="Aptos Display"/>
-              </a:defRPr>
-            </a:pPr>
-            <a:r>
-              <a:t>Regression tests</a:t>
-            </a:r>
-          </a:p>
-          <a:p>
-            <a:pPr>
-              <a:spcBef>
-                <a:spcPts val="300"/>
-              </a:spcBef>
-              <a:defRPr sz="1200">
-                <a:solidFill>
-                  <a:srgbClr val="232D37"/>
-                </a:solidFill>
-                <a:latin typeface="Aptos"/>
-              </a:defRPr>
-            </a:pPr>
-            <a:r>
-              <a:t>tests/check.js</a:t>
-            </a:r>
-          </a:p>
-          <a:p>
-            <a:pPr>
-              <a:spcBef>
-                <a:spcPts val="300"/>
-              </a:spcBef>
-              <a:defRPr sz="1200">
-                <a:solidFill>
-                  <a:srgbClr val="232D37"/>
-                </a:solidFill>
-                <a:latin typeface="Aptos"/>
-              </a:defRPr>
-            </a:pPr>
-            <a:r>
-              <a:t>snapshot.js</a:t>
-            </a:r>
-          </a:p>
-          <a:p>
-            <a:pPr>
-              <a:spcBef>
-                <a:spcPts val="300"/>
-              </a:spcBef>
-              <a:defRPr sz="1200">
-                <a:solidFill>
-                  <a:srgbClr val="232D37"/>
-                </a:solidFill>
-                <a:latin typeface="Aptos"/>
-              </a:defRPr>
-            </a:pPr>
-            <a:r>
-              <a:t>compare.js</a:t>
-            </a:r>
-          </a:p>
-          <a:p>
-            <a:pPr>
-              <a:spcBef>
-                <a:spcPts val="300"/>
-              </a:spcBef>
-              <a:defRPr sz="1200">
-                <a:solidFill>
-                  <a:srgbClr val="232D37"/>
-                </a:solidFill>
-                <a:latin typeface="Aptos"/>
-              </a:defRPr>
-            </a:pPr>
-            <a:r>
-              <a:t>baseline.json</a:t>
-            </a:r>
-          </a:p>
-          <a:p>
-            <a:pPr>
-              <a:spcBef>
-                <a:spcPts val="300"/>
-              </a:spcBef>
-              <a:defRPr sz="1200">
-                <a:solidFill>
-                  <a:srgbClr val="232D37"/>
-                </a:solidFill>
-                <a:latin typeface="Aptos"/>
-              </a:defRPr>
-            </a:pPr>
-            <a:r>
-              <a:t>Node harness is not loaded by the app.</a:t>
-            </a:r>
-          </a:p>
-        </p:txBody>
-      </p:sp>
-      <p:sp>
-        <p:nvSpPr>
-          <p:cNvPr id="9" name="Rectangle 8"/>
-          <p:cNvSpPr/>
-          <p:nvPr/>
-        </p:nvSpPr>
-        <p:spPr>
-          <a:xfrm>
-            <a:off x="5897880" y="1143000"/>
-            <a:ext cx="82296" cy="4526280"/>
-          </a:xfrm>
-          <a:prstGeom prst="rect">
-            <a:avLst/>
-          </a:prstGeom>
-          <a:solidFill>
-            <a:srgbClr val="266EB2"/>
-          </a:solidFill>
-          <a:ln>
-            <a:noFill/>
-          </a:ln>
-        </p:spPr>
-        <p:style>
-          <a:lnRef idx="1">
-            <a:schemeClr val="accent1"/>
-          </a:lnRef>
-          <a:fillRef idx="3">
-            <a:schemeClr val="accent1"/>
-          </a:fillRef>
-          <a:effectRef idx="2">
-            <a:schemeClr val="accent1"/>
-          </a:effectRef>
-          <a:fontRef idx="minor">
-            <a:schemeClr val="lt1"/>
-          </a:fontRef>
-        </p:style>
-        <p:txBody>
-          <a:bodyPr rtlCol="0" anchor="ctr"/>
-          <a:lstStyle/>
-          <a:p>
-            <a:pPr algn="ctr"/>
-          </a:p>
-        </p:txBody>
-      </p:sp>
-      <p:sp>
-        <p:nvSpPr>
-          <p:cNvPr id="10" name="Rounded Rectangle 9"/>
-          <p:cNvSpPr/>
-          <p:nvPr/>
-        </p:nvSpPr>
-        <p:spPr>
-          <a:xfrm>
-            <a:off x="8595360" y="1143000"/>
-            <a:ext cx="2697480" cy="4526280"/>
-          </a:xfrm>
-          <a:prstGeom prst="roundRect">
-            <a:avLst/>
-          </a:prstGeom>
-          <a:solidFill>
-            <a:srgbClr val="FFF6E8"/>
-          </a:solidFill>
-          <a:ln w="13970">
-            <a:solidFill>
-              <a:srgbClr val="E5892A"/>
-            </a:solidFill>
-          </a:ln>
-        </p:spPr>
-        <p:style>
-          <a:lnRef idx="1">
-            <a:schemeClr val="accent1"/>
-          </a:lnRef>
-          <a:fillRef idx="3">
-            <a:schemeClr val="accent1"/>
-          </a:fillRef>
-          <a:effectRef idx="2">
-            <a:schemeClr val="accent1"/>
-          </a:effectRef>
-          <a:fontRef idx="minor">
-            <a:schemeClr val="lt1"/>
-          </a:fontRef>
-        </p:style>
-        <p:txBody>
-          <a:bodyPr rtlCol="0" anchor="ctr" lIns="182880" rIns="100584" tIns="91440"/>
-          <a:lstStyle/>
-          <a:p>
-            <a:pPr algn="ctr">
-              <a:defRPr sz="1700" b="1">
-                <a:solidFill>
-                  <a:srgbClr val="232D37"/>
-                </a:solidFill>
-                <a:latin typeface="Aptos Display"/>
-              </a:defRPr>
-            </a:pPr>
-            <a:r>
-              <a:t>Consumers</a:t>
-            </a:r>
-          </a:p>
-          <a:p>
-            <a:pPr>
-              <a:spcBef>
-                <a:spcPts val="300"/>
-              </a:spcBef>
-              <a:defRPr sz="1200">
-                <a:solidFill>
-                  <a:srgbClr val="232D37"/>
-                </a:solidFill>
-                <a:latin typeface="Aptos"/>
-              </a:defRPr>
-            </a:pPr>
-            <a:r>
-              <a:t>Charts: shared row contract</a:t>
-            </a:r>
-          </a:p>
-          <a:p>
-            <a:pPr>
-              <a:spcBef>
-                <a:spcPts val="300"/>
-              </a:spcBef>
-              <a:defRPr sz="1200">
-                <a:solidFill>
-                  <a:srgbClr val="232D37"/>
-                </a:solidFill>
-                <a:latin typeface="Aptos"/>
-              </a:defRPr>
-            </a:pPr>
-            <a:r>
-              <a:t>Excel: summary + account sheets + stretch tail</a:t>
-            </a:r>
-          </a:p>
-          <a:p>
-            <a:pPr>
-              <a:spcBef>
-                <a:spcPts val="300"/>
-              </a:spcBef>
-              <a:defRPr sz="1200">
-                <a:solidFill>
-                  <a:srgbClr val="232D37"/>
-                </a:solidFill>
-                <a:latin typeface="Aptos"/>
-              </a:defRPr>
-            </a:pPr>
-            <a:r>
-              <a:t>Chat: deliberately curated snapshot fields</a:t>
-            </a:r>
-          </a:p>
-          <a:p>
-            <a:pPr>
-              <a:spcBef>
-                <a:spcPts val="300"/>
-              </a:spcBef>
-              <a:defRPr sz="1200">
-                <a:solidFill>
-                  <a:srgbClr val="232D37"/>
-                </a:solidFill>
-                <a:latin typeface="Aptos"/>
-              </a:defRPr>
-            </a:pPr>
-            <a:r>
-              <a:t>Formula page: constants-backed tables</a:t>
-            </a:r>
-          </a:p>
-        </p:txBody>
-      </p:sp>
-      <p:sp>
-        <p:nvSpPr>
-          <p:cNvPr id="11" name="Rectangle 10"/>
-          <p:cNvSpPr/>
-          <p:nvPr/>
-        </p:nvSpPr>
-        <p:spPr>
-          <a:xfrm>
-            <a:off x="8595360" y="1143000"/>
-            <a:ext cx="82296" cy="4526280"/>
-          </a:xfrm>
-          <a:prstGeom prst="rect">
-            <a:avLst/>
-          </a:prstGeom>
-          <a:solidFill>
-            <a:srgbClr val="E5892A"/>
-          </a:solidFill>
-          <a:ln>
-            <a:noFill/>
-          </a:ln>
-        </p:spPr>
-        <p:style>
-          <a:lnRef idx="1">
-            <a:schemeClr val="accent1"/>
-          </a:lnRef>
-          <a:fillRef idx="3">
-            <a:schemeClr val="accent1"/>
-          </a:fillRef>
-          <a:effectRef idx="2">
-            <a:schemeClr val="accent1"/>
-          </a:effectRef>
-          <a:fontRef idx="minor">
-            <a:schemeClr val="lt1"/>
-          </a:fontRef>
-        </p:style>
-        <p:txBody>
-          <a:bodyPr rtlCol="0" anchor="ctr"/>
-          <a:lstStyle/>
-          <a:p>
-            <a:pPr algn="ctr"/>
-          </a:p>
-        </p:txBody>
-      </p:sp>
-      <p:sp>
-        <p:nvSpPr>
-          <p:cNvPr id="12" name="Rectangle 11"/>
-          <p:cNvSpPr/>
-          <p:nvPr/>
-        </p:nvSpPr>
-        <p:spPr>
-          <a:xfrm>
-            <a:off x="502920" y="6473952"/>
-            <a:ext cx="11183112" cy="13716"/>
-          </a:xfrm>
-          <a:prstGeom prst="rect">
-            <a:avLst/>
-          </a:prstGeom>
-          <a:solidFill>
-            <a:srgbClr val="D2DCE5"/>
-          </a:solidFill>
-          <a:ln>
-            <a:noFill/>
-          </a:ln>
-        </p:spPr>
-        <p:style>
-          <a:lnRef idx="1">
-            <a:schemeClr val="accent1"/>
-          </a:lnRef>
-          <a:fillRef idx="3">
-            <a:schemeClr val="accent1"/>
-          </a:fillRef>
-          <a:effectRef idx="2">
-            <a:schemeClr val="accent1"/>
-          </a:effectRef>
-          <a:fontRef idx="minor">
-            <a:schemeClr val="lt1"/>
-          </a:fontRef>
-        </p:style>
-        <p:txBody>
           <a:bodyPr rtlCol="0" anchor="ctr"/>
           <a:lstStyle/>
           <a:p>
@@ -4734,7 +4638,7 @@
               </a:defRPr>
             </a:pPr>
             <a:r>
-              <a:t>Retirement Income Planner • Architecture overview • Household-expense, LTC, and plan-chat update</a:t>
+              <a:t>Retirement Income Planner • Architecture overview • Rental, tax-exempt income, and legacy-value update</a:t>
             </a:r>
           </a:p>
         </p:txBody>
@@ -4796,7 +4700,7 @@
               </a:defRPr>
             </a:pPr>
             <a:r>
-              <a:t>Guardrails for evolving the model</a:t>
+              <a:t>Guardrails for the expanded model</a:t>
             </a:r>
           </a:p>
         </p:txBody>
@@ -4832,7 +4736,7 @@
               </a:defRPr>
             </a:pPr>
             <a:r>
-              <a:t>The expanded design depends on explicit contracts: shared state, converged computation, row-driven consumers, and safe privacy boundaries.</a:t>
+              <a:t>The latest features add scope, but preserve the architectural contracts that keep the planner understandable and testable.</a:t>
             </a:r>
           </a:p>
         </p:txBody>
@@ -4887,7 +4791,7 @@
               </a:defRPr>
             </a:pPr>
             <a:r>
-              <a:t>State &amp; migration</a:t>
+              <a:t>State &amp; inputs</a:t>
             </a:r>
           </a:p>
           <a:p>
@@ -4903,7 +4807,7 @@
               </a:defRPr>
             </a:pPr>
             <a:r>
-              <a:t>Add canonical defaults in state.js.</a:t>
+              <a:t>Use canonical arrays for repeatable items such as rental properties.</a:t>
             </a:r>
           </a:p>
           <a:p>
@@ -4919,7 +4823,7 @@
               </a:defRPr>
             </a:pPr>
             <a:r>
-              <a:t>Migrate older save shapes at hydrate time.</a:t>
+              <a:t>Keep unit and null semantics explicit.</a:t>
             </a:r>
           </a:p>
           <a:p>
@@ -4935,7 +4839,7 @@
               </a:defRPr>
             </a:pPr>
             <a:r>
-              <a:t>Keep saved UI flags as saved; do not derive them from DOM state.</a:t>
+              <a:t>Migrate legacy saves at hydration time, never in chart code.</a:t>
             </a:r>
           </a:p>
         </p:txBody>
@@ -5033,7 +4937,7 @@
               </a:defRPr>
             </a:pPr>
             <a:r>
-              <a:t>Compute &amp; projection</a:t>
+              <a:t>Compute &amp; rows</a:t>
             </a:r>
           </a:p>
           <a:p>
@@ -5049,7 +4953,7 @@
               </a:defRPr>
             </a:pPr>
             <a:r>
-              <a:t>Keep financial behavior in projection.js.</a:t>
+              <a:t>Keep tax, cash-flow, and legacy-tail rules in projection.js.</a:t>
             </a:r>
           </a:p>
           <a:p>
@@ -5065,7 +4969,7 @@
               </a:defRPr>
             </a:pPr>
             <a:r>
-              <a:t>Resolve circular dependencies explicitly rather than using accidental order.</a:t>
+              <a:t>Solve circular tax-and-sale dependencies explicitly.</a:t>
             </a:r>
           </a:p>
           <a:p>
@@ -5081,7 +4985,7 @@
               </a:defRPr>
             </a:pPr>
             <a:r>
-              <a:t>Add new outputs to the row contract before presenting them.</a:t>
+              <a:t>Expose every new derived result in the projection-row contract.</a:t>
             </a:r>
           </a:p>
         </p:txBody>
@@ -5179,7 +5083,7 @@
               </a:defRPr>
             </a:pPr>
             <a:r>
-              <a:t>Consumers &amp; privacy</a:t>
+              <a:t>Display &amp; user trust</a:t>
             </a:r>
           </a:p>
           <a:p>
@@ -5195,7 +5099,7 @@
               </a:defRPr>
             </a:pPr>
             <a:r>
-              <a:t>Charts, export, formulas, and chat must read—not recreate—financial logic.</a:t>
+              <a:t>Charts, Excel, Formula pages, and chat read outputs; they do not recreate finance.</a:t>
             </a:r>
           </a:p>
           <a:p>
@@ -5211,7 +5115,7 @@
               </a:defRPr>
             </a:pPr>
             <a:r>
-              <a:t>Keep chat data explicit, previewable, and absent from plan persistence.</a:t>
+              <a:t>Clearly label display-only devalue assumptions.</a:t>
             </a:r>
           </a:p>
           <a:p>
@@ -5227,7 +5131,7 @@
               </a:defRPr>
             </a:pPr>
             <a:r>
-              <a:t>Protect export and chat from mutating state.</a:t>
+              <a:t>Keep chat data curated, previewable, and outside saved plan data.</a:t>
             </a:r>
           </a:p>
         </p:txBody>
@@ -5349,7 +5253,7 @@
               </a:defRPr>
             </a:pPr>
             <a:r>
-              <a:t>Retirement Income Planner • Architecture overview • Household-expense, LTC, and plan-chat update</a:t>
+              <a:t>Retirement Income Planner • Architecture overview • Rental, tax-exempt income, and legacy-value update</a:t>
             </a:r>
           </a:p>
         </p:txBody>
@@ -5447,7 +5351,7 @@
               </a:defRPr>
             </a:pPr>
             <a:r>
-              <a:t>The planner evolves from per-portfolio expense settings into a household cash-flow model with a converged tax-and-sale calculation.</a:t>
+              <a:t>The new design extends income types, household cash flow, tax treatment, post-passing legacy views, and input migration.</a:t>
             </a:r>
           </a:p>
         </p:txBody>
@@ -5460,8 +5364,8 @@
         </p:nvSpPr>
         <p:spPr>
           <a:xfrm>
-            <a:off x="502920" y="1234440"/>
-            <a:ext cx="2606040" cy="4480560"/>
+            <a:off x="438912" y="1234440"/>
+            <a:ext cx="2286000" cy="4480560"/>
           </a:xfrm>
           <a:prstGeom prst="roundRect">
             <a:avLst/>
@@ -5494,7 +5398,7 @@
           <a:lstStyle/>
           <a:p>
             <a:pPr algn="ctr">
-              <a:defRPr sz="1700" b="1">
+              <a:defRPr sz="1600" b="1">
                 <a:solidFill>
                   <a:srgbClr val="232D37"/>
                 </a:solidFill>
@@ -5502,7 +5406,7 @@
               </a:defRPr>
             </a:pPr>
             <a:r>
-              <a:t>Household expenses</a:t>
+              <a:t>Rentals</a:t>
             </a:r>
           </a:p>
           <a:p>
@@ -5518,7 +5422,7 @@
               </a:defRPr>
             </a:pPr>
             <a:r>
-              <a:t>Living expenses</a:t>
+              <a:t>Many rental properties per person</a:t>
             </a:r>
           </a:p>
           <a:p>
@@ -5534,7 +5438,7 @@
               </a:defRPr>
             </a:pPr>
             <a:r>
-              <a:t>Long Term Care</a:t>
+              <a:t>Taxable net income + non-cash depreciation</a:t>
             </a:r>
           </a:p>
           <a:p>
@@ -5550,7 +5454,105 @@
               </a:defRPr>
             </a:pPr>
             <a:r>
-              <a:t>Income tax</a:t>
+              <a:t>Independent age range, change, survivor, enable/hide</a:t>
+            </a:r>
+          </a:p>
+        </p:txBody>
+      </p:sp>
+      <p:sp>
+        <p:nvSpPr>
+          <p:cNvPr id="5" name="Rectangle 4"/>
+          <p:cNvSpPr/>
+          <p:nvPr/>
+        </p:nvSpPr>
+        <p:spPr>
+          <a:xfrm>
+            <a:off x="438912" y="1234440"/>
+            <a:ext cx="82296" cy="4480560"/>
+          </a:xfrm>
+          <a:prstGeom prst="rect">
+            <a:avLst/>
+          </a:prstGeom>
+          <a:solidFill>
+            <a:srgbClr val="266EB2"/>
+          </a:solidFill>
+          <a:ln>
+            <a:noFill/>
+          </a:ln>
+        </p:spPr>
+        <p:style>
+          <a:lnRef idx="1">
+            <a:schemeClr val="accent1"/>
+          </a:lnRef>
+          <a:fillRef idx="3">
+            <a:schemeClr val="accent1"/>
+          </a:fillRef>
+          <a:effectRef idx="2">
+            <a:schemeClr val="accent1"/>
+          </a:effectRef>
+          <a:fontRef idx="minor">
+            <a:schemeClr val="lt1"/>
+          </a:fontRef>
+        </p:style>
+        <p:txBody>
+          <a:bodyPr rtlCol="0" anchor="ctr"/>
+          <a:lstStyle/>
+          <a:p>
+            <a:pPr algn="ctr"/>
+          </a:p>
+        </p:txBody>
+      </p:sp>
+      <p:sp>
+        <p:nvSpPr>
+          <p:cNvPr id="6" name="Rounded Rectangle 5"/>
+          <p:cNvSpPr/>
+          <p:nvPr/>
+        </p:nvSpPr>
+        <p:spPr>
+          <a:xfrm>
+            <a:off x="2926080" y="1234440"/>
+            <a:ext cx="2286000" cy="4480560"/>
+          </a:xfrm>
+          <a:prstGeom prst="roundRect">
+            <a:avLst/>
+          </a:prstGeom>
+          <a:solidFill>
+            <a:srgbClr val="EAF9F4"/>
+          </a:solidFill>
+          <a:ln w="13970">
+            <a:solidFill>
+              <a:srgbClr val="429761"/>
+            </a:solidFill>
+          </a:ln>
+        </p:spPr>
+        <p:style>
+          <a:lnRef idx="1">
+            <a:schemeClr val="accent1"/>
+          </a:lnRef>
+          <a:fillRef idx="3">
+            <a:schemeClr val="accent1"/>
+          </a:fillRef>
+          <a:effectRef idx="2">
+            <a:schemeClr val="accent1"/>
+          </a:effectRef>
+          <a:fontRef idx="minor">
+            <a:schemeClr val="lt1"/>
+          </a:fontRef>
+        </p:style>
+        <p:txBody>
+          <a:bodyPr rtlCol="0" anchor="ctr" lIns="182880" rIns="100584" tIns="91440"/>
+          <a:lstStyle/>
+          <a:p>
+            <a:pPr algn="ctr">
+              <a:defRPr sz="1600" b="1">
+                <a:solidFill>
+                  <a:srgbClr val="232D37"/>
+                </a:solidFill>
+                <a:latin typeface="Aptos Display"/>
+              </a:defRPr>
+            </a:pPr>
+            <a:r>
+              <a:t>Portfolio cash flow</a:t>
             </a:r>
           </a:p>
           <a:p>
@@ -5566,7 +5568,7 @@
               </a:defRPr>
             </a:pPr>
             <a:r>
-              <a:t>IRMAA surcharge</a:t>
+              <a:t>Tax-exempt yield</a:t>
             </a:r>
           </a:p>
           <a:p>
@@ -5582,7 +5584,7 @@
               </a:defRPr>
             </a:pPr>
             <a:r>
-              <a:t>AUM fee</a:t>
+              <a:t>Reinvest excess income</a:t>
             </a:r>
           </a:p>
           <a:p>
@@ -5598,27 +5600,27 @@
               </a:defRPr>
             </a:pPr>
             <a:r>
-              <a:t>One shared expense pool</a:t>
-            </a:r>
-          </a:p>
-        </p:txBody>
-      </p:sp>
-      <p:sp>
-        <p:nvSpPr>
-          <p:cNvPr id="5" name="Rectangle 4"/>
+              <a:t>Cash income now includes depreciation and tax-exempt payouts</a:t>
+            </a:r>
+          </a:p>
+        </p:txBody>
+      </p:sp>
+      <p:sp>
+        <p:nvSpPr>
+          <p:cNvPr id="7" name="Rectangle 6"/>
           <p:cNvSpPr/>
           <p:nvPr/>
         </p:nvSpPr>
         <p:spPr>
           <a:xfrm>
-            <a:off x="502920" y="1234440"/>
+            <a:off x="2926080" y="1234440"/>
             <a:ext cx="82296" cy="4480560"/>
           </a:xfrm>
           <a:prstGeom prst="rect">
             <a:avLst/>
           </a:prstGeom>
           <a:solidFill>
-            <a:srgbClr val="266EB2"/>
+            <a:srgbClr val="429761"/>
           </a:solidFill>
           <a:ln>
             <a:noFill/>
@@ -5648,24 +5650,24 @@
       </p:sp>
       <p:sp>
         <p:nvSpPr>
-          <p:cNvPr id="6" name="Rounded Rectangle 5"/>
+          <p:cNvPr id="8" name="Rounded Rectangle 7"/>
           <p:cNvSpPr/>
           <p:nvPr/>
         </p:nvSpPr>
         <p:spPr>
           <a:xfrm>
-            <a:off x="3401568" y="1234440"/>
-            <a:ext cx="2606040" cy="4480560"/>
+            <a:off x="5413248" y="1234440"/>
+            <a:ext cx="2286000" cy="4480560"/>
           </a:xfrm>
           <a:prstGeom prst="roundRect">
             <a:avLst/>
           </a:prstGeom>
           <a:solidFill>
-            <a:srgbClr val="EAF9F4"/>
+            <a:srgbClr val="FFF6E8"/>
           </a:solidFill>
           <a:ln w="13970">
             <a:solidFill>
-              <a:srgbClr val="429761"/>
+              <a:srgbClr val="E5892A"/>
             </a:solidFill>
           </a:ln>
         </p:spPr>
@@ -5688,7 +5690,7 @@
           <a:lstStyle/>
           <a:p>
             <a:pPr algn="ctr">
-              <a:defRPr sz="1700" b="1">
+              <a:defRPr sz="1600" b="1">
                 <a:solidFill>
                   <a:srgbClr val="232D37"/>
                 </a:solidFill>
@@ -5696,7 +5698,7 @@
               </a:defRPr>
             </a:pPr>
             <a:r>
-              <a:t>Funding order</a:t>
+              <a:t>Tax rules</a:t>
             </a:r>
           </a:p>
           <a:p>
@@ -5712,7 +5714,7 @@
               </a:defRPr>
             </a:pPr>
             <a:r>
-              <a:t>1. Household cash income</a:t>
+              <a:t>Tax-exempt income affects SS provisional income and IRMAA MAGI</a:t>
             </a:r>
           </a:p>
           <a:p>
@@ -5728,7 +5730,105 @@
               </a:defRPr>
             </a:pPr>
             <a:r>
-              <a:t>2. Dividends from opted-in portfolios</a:t>
+              <a:t>Enhanced senior deduction for 2025–2028</a:t>
+            </a:r>
+          </a:p>
+        </p:txBody>
+      </p:sp>
+      <p:sp>
+        <p:nvSpPr>
+          <p:cNvPr id="9" name="Rectangle 8"/>
+          <p:cNvSpPr/>
+          <p:nvPr/>
+        </p:nvSpPr>
+        <p:spPr>
+          <a:xfrm>
+            <a:off x="5413248" y="1234440"/>
+            <a:ext cx="82296" cy="4480560"/>
+          </a:xfrm>
+          <a:prstGeom prst="rect">
+            <a:avLst/>
+          </a:prstGeom>
+          <a:solidFill>
+            <a:srgbClr val="E5892A"/>
+          </a:solidFill>
+          <a:ln>
+            <a:noFill/>
+          </a:ln>
+        </p:spPr>
+        <p:style>
+          <a:lnRef idx="1">
+            <a:schemeClr val="accent1"/>
+          </a:lnRef>
+          <a:fillRef idx="3">
+            <a:schemeClr val="accent1"/>
+          </a:fillRef>
+          <a:effectRef idx="2">
+            <a:schemeClr val="accent1"/>
+          </a:effectRef>
+          <a:fontRef idx="minor">
+            <a:schemeClr val="lt1"/>
+          </a:fontRef>
+        </p:style>
+        <p:txBody>
+          <a:bodyPr rtlCol="0" anchor="ctr"/>
+          <a:lstStyle/>
+          <a:p>
+            <a:pPr algn="ctr"/>
+          </a:p>
+        </p:txBody>
+      </p:sp>
+      <p:sp>
+        <p:nvSpPr>
+          <p:cNvPr id="10" name="Rounded Rectangle 9"/>
+          <p:cNvSpPr/>
+          <p:nvPr/>
+        </p:nvSpPr>
+        <p:spPr>
+          <a:xfrm>
+            <a:off x="7900416" y="1234440"/>
+            <a:ext cx="2286000" cy="4480560"/>
+          </a:xfrm>
+          <a:prstGeom prst="roundRect">
+            <a:avLst/>
+          </a:prstGeom>
+          <a:solidFill>
+            <a:srgbClr val="F7EFFF"/>
+          </a:solidFill>
+          <a:ln w="13970">
+            <a:solidFill>
+              <a:srgbClr val="7852B0"/>
+            </a:solidFill>
+          </a:ln>
+        </p:spPr>
+        <p:style>
+          <a:lnRef idx="1">
+            <a:schemeClr val="accent1"/>
+          </a:lnRef>
+          <a:fillRef idx="3">
+            <a:schemeClr val="accent1"/>
+          </a:fillRef>
+          <a:effectRef idx="2">
+            <a:schemeClr val="accent1"/>
+          </a:effectRef>
+          <a:fontRef idx="minor">
+            <a:schemeClr val="lt1"/>
+          </a:fontRef>
+        </p:style>
+        <p:txBody>
+          <a:bodyPr rtlCol="0" anchor="ctr" lIns="182880" rIns="100584" tIns="91440"/>
+          <a:lstStyle/>
+          <a:p>
+            <a:pPr algn="ctr">
+              <a:defRPr sz="1600" b="1">
+                <a:solidFill>
+                  <a:srgbClr val="232D37"/>
+                </a:solidFill>
+                <a:latin typeface="Aptos Display"/>
+              </a:defRPr>
+            </a:pPr>
+            <a:r>
+              <a:t>Legacy view</a:t>
             </a:r>
           </a:p>
           <a:p>
@@ -5744,7 +5844,7 @@
               </a:defRPr>
             </a:pPr>
             <a:r>
-              <a:t>3. Sales from opted-in portfolios</a:t>
+              <a:t>10-year stretch tail includes selected IRAs and continuing non-IDGT brokerage</a:t>
             </a:r>
           </a:p>
           <a:p>
@@ -5760,27 +5860,27 @@
               </a:defRPr>
             </a:pPr>
             <a:r>
-              <a:t>4. Unfunded shortfall</a:t>
-            </a:r>
-          </a:p>
-        </p:txBody>
-      </p:sp>
-      <p:sp>
-        <p:nvSpPr>
-          <p:cNvPr id="7" name="Rectangle 6"/>
+              <a:t>Asset devalue sliders model display-only haircuts</a:t>
+            </a:r>
+          </a:p>
+        </p:txBody>
+      </p:sp>
+      <p:sp>
+        <p:nvSpPr>
+          <p:cNvPr id="11" name="Rectangle 10"/>
           <p:cNvSpPr/>
           <p:nvPr/>
         </p:nvSpPr>
         <p:spPr>
           <a:xfrm>
-            <a:off x="3401568" y="1234440"/>
+            <a:off x="7900416" y="1234440"/>
             <a:ext cx="82296" cy="4480560"/>
           </a:xfrm>
           <a:prstGeom prst="rect">
             <a:avLst/>
           </a:prstGeom>
           <a:solidFill>
-            <a:srgbClr val="429761"/>
+            <a:srgbClr val="7852B0"/>
           </a:solidFill>
           <a:ln>
             <a:noFill/>
@@ -5810,24 +5910,24 @@
       </p:sp>
       <p:sp>
         <p:nvSpPr>
-          <p:cNvPr id="8" name="Rounded Rectangle 7"/>
+          <p:cNvPr id="12" name="Rounded Rectangle 11"/>
           <p:cNvSpPr/>
           <p:nvPr/>
         </p:nvSpPr>
         <p:spPr>
           <a:xfrm>
-            <a:off x="6300216" y="1234440"/>
-            <a:ext cx="2606040" cy="4480560"/>
+            <a:off x="10387584" y="1234440"/>
+            <a:ext cx="1371600" cy="4480560"/>
           </a:xfrm>
           <a:prstGeom prst="roundRect">
             <a:avLst/>
           </a:prstGeom>
           <a:solidFill>
-            <a:srgbClr val="FFF6E8"/>
+            <a:srgbClr val="F8FAFC"/>
           </a:solidFill>
           <a:ln w="13970">
             <a:solidFill>
-              <a:srgbClr val="E5892A"/>
+              <a:srgbClr val="0F2647"/>
             </a:solidFill>
           </a:ln>
         </p:spPr>
@@ -5850,7 +5950,7 @@
           <a:lstStyle/>
           <a:p>
             <a:pPr algn="ctr">
-              <a:defRPr sz="1700" b="1">
+              <a:defRPr sz="1500" b="1">
                 <a:solidFill>
                   <a:srgbClr val="232D37"/>
                 </a:solidFill>
@@ -5858,7 +5958,7 @@
               </a:defRPr>
             </a:pPr>
             <a:r>
-              <a:t>Tax fixed point</a:t>
+              <a:t>UI &amp; migration</a:t>
             </a:r>
           </a:p>
           <a:p>
@@ -5866,15 +5966,15 @@
               <a:spcBef>
                 <a:spcPts val="300"/>
               </a:spcBef>
-              <a:defRPr sz="1200">
-                <a:solidFill>
-                  <a:srgbClr val="232D37"/>
-                </a:solidFill>
-                <a:latin typeface="Aptos"/>
-              </a:defRPr>
-            </a:pPr>
-            <a:r>
-              <a:t>Tax → expenses → sales → LTCG → tax</a:t>
+              <a:defRPr sz="1000">
+                <a:solidFill>
+                  <a:srgbClr val="232D37"/>
+                </a:solidFill>
+                <a:latin typeface="Aptos"/>
+              </a:defRPr>
+            </a:pPr>
+            <a:r>
+              <a:t>Conversion-start modes</a:t>
             </a:r>
           </a:p>
           <a:p>
@@ -5882,51 +5982,35 @@
               <a:spcBef>
                 <a:spcPts val="300"/>
               </a:spcBef>
-              <a:defRPr sz="1200">
-                <a:solidFill>
-                  <a:srgbClr val="232D37"/>
-                </a:solidFill>
-                <a:latin typeface="Aptos"/>
-              </a:defRPr>
-            </a:pPr>
-            <a:r>
-              <a:t>Iterates to convergence</a:t>
-            </a:r>
-          </a:p>
-          <a:p>
-            <a:pPr>
-              <a:spcBef>
-                <a:spcPts val="300"/>
-              </a:spcBef>
-              <a:defRPr sz="1200">
-                <a:solidFill>
-                  <a:srgbClr val="232D37"/>
-                </a:solidFill>
-                <a:latin typeface="Aptos"/>
-              </a:defRPr>
-            </a:pPr>
-            <a:r>
-              <a:t>SCGL consumed once after convergence</a:t>
-            </a:r>
-          </a:p>
-        </p:txBody>
-      </p:sp>
-      <p:sp>
-        <p:nvSpPr>
-          <p:cNvPr id="9" name="Rectangle 8"/>
+              <a:defRPr sz="1000">
+                <a:solidFill>
+                  <a:srgbClr val="232D37"/>
+                </a:solidFill>
+                <a:latin typeface="Aptos"/>
+              </a:defRPr>
+            </a:pPr>
+            <a:r>
+              <a:t>Legacy saved-plan transformations</a:t>
+            </a:r>
+          </a:p>
+        </p:txBody>
+      </p:sp>
+      <p:sp>
+        <p:nvSpPr>
+          <p:cNvPr id="13" name="Rectangle 12"/>
           <p:cNvSpPr/>
           <p:nvPr/>
         </p:nvSpPr>
         <p:spPr>
           <a:xfrm>
-            <a:off x="6300216" y="1234440"/>
+            <a:off x="10387584" y="1234440"/>
             <a:ext cx="82296" cy="4480560"/>
           </a:xfrm>
           <a:prstGeom prst="rect">
             <a:avLst/>
           </a:prstGeom>
           <a:solidFill>
-            <a:srgbClr val="E5892A"/>
+            <a:srgbClr val="0F2647"/>
           </a:solidFill>
           <a:ln>
             <a:noFill/>
@@ -5956,25 +6040,23 @@
       </p:sp>
       <p:sp>
         <p:nvSpPr>
-          <p:cNvPr id="10" name="Rounded Rectangle 9"/>
+          <p:cNvPr id="14" name="Rectangle 13"/>
           <p:cNvSpPr/>
           <p:nvPr/>
         </p:nvSpPr>
         <p:spPr>
           <a:xfrm>
-            <a:off x="9198864" y="1234440"/>
-            <a:ext cx="2606040" cy="4480560"/>
-          </a:xfrm>
-          <a:prstGeom prst="roundRect">
-            <a:avLst/>
-          </a:prstGeom>
-          <a:solidFill>
-            <a:srgbClr val="F7EFFF"/>
-          </a:solidFill>
-          <a:ln w="13970">
-            <a:solidFill>
-              <a:srgbClr val="7852B0"/>
-            </a:solidFill>
+            <a:off x="502920" y="6473952"/>
+            <a:ext cx="11183112" cy="13716"/>
+          </a:xfrm>
+          <a:prstGeom prst="rect">
+            <a:avLst/>
+          </a:prstGeom>
+          <a:solidFill>
+            <a:srgbClr val="D2DCE5"/>
+          </a:solidFill>
+          <a:ln>
+            <a:noFill/>
           </a:ln>
         </p:spPr>
         <p:style>
@@ -5992,123 +6074,6 @@
           </a:fontRef>
         </p:style>
         <p:txBody>
-          <a:bodyPr rtlCol="0" anchor="ctr" lIns="182880" rIns="100584" tIns="91440"/>
-          <a:lstStyle/>
-          <a:p>
-            <a:pPr algn="ctr">
-              <a:defRPr sz="1700" b="1">
-                <a:solidFill>
-                  <a:srgbClr val="232D37"/>
-                </a:solidFill>
-                <a:latin typeface="Aptos Display"/>
-              </a:defRPr>
-            </a:pPr>
-            <a:r>
-              <a:t>New experiences</a:t>
-            </a:r>
-          </a:p>
-          <a:p>
-            <a:pPr>
-              <a:spcBef>
-                <a:spcPts val="300"/>
-              </a:spcBef>
-              <a:defRPr sz="1200">
-                <a:solidFill>
-                  <a:srgbClr val="232D37"/>
-                </a:solidFill>
-                <a:latin typeface="Aptos"/>
-              </a:defRPr>
-            </a:pPr>
-            <a:r>
-              <a:t>Expense chart</a:t>
-            </a:r>
-          </a:p>
-          <a:p>
-            <a:pPr>
-              <a:spcBef>
-                <a:spcPts val="300"/>
-              </a:spcBef>
-              <a:defRPr sz="1200">
-                <a:solidFill>
-                  <a:srgbClr val="232D37"/>
-                </a:solidFill>
-                <a:latin typeface="Aptos"/>
-              </a:defRPr>
-            </a:pPr>
-            <a:r>
-              <a:t>LTC inputs and deductions</a:t>
-            </a:r>
-          </a:p>
-          <a:p>
-            <a:pPr>
-              <a:spcBef>
-                <a:spcPts val="300"/>
-              </a:spcBef>
-              <a:defRPr sz="1200">
-                <a:solidFill>
-                  <a:srgbClr val="232D37"/>
-                </a:solidFill>
-                <a:latin typeface="Aptos"/>
-              </a:defRPr>
-            </a:pPr>
-            <a:r>
-              <a:t>AUM and IRA stretch</a:t>
-            </a:r>
-          </a:p>
-          <a:p>
-            <a:pPr>
-              <a:spcBef>
-                <a:spcPts val="300"/>
-              </a:spcBef>
-              <a:defRPr sz="1200">
-                <a:solidFill>
-                  <a:srgbClr val="232D37"/>
-                </a:solidFill>
-                <a:latin typeface="Aptos"/>
-              </a:defRPr>
-            </a:pPr>
-            <a:r>
-              <a:t>Ask about this plan chat</a:t>
-            </a:r>
-          </a:p>
-        </p:txBody>
-      </p:sp>
-      <p:sp>
-        <p:nvSpPr>
-          <p:cNvPr id="11" name="Rectangle 10"/>
-          <p:cNvSpPr/>
-          <p:nvPr/>
-        </p:nvSpPr>
-        <p:spPr>
-          <a:xfrm>
-            <a:off x="9198864" y="1234440"/>
-            <a:ext cx="82296" cy="4480560"/>
-          </a:xfrm>
-          <a:prstGeom prst="rect">
-            <a:avLst/>
-          </a:prstGeom>
-          <a:solidFill>
-            <a:srgbClr val="7852B0"/>
-          </a:solidFill>
-          <a:ln>
-            <a:noFill/>
-          </a:ln>
-        </p:spPr>
-        <p:style>
-          <a:lnRef idx="1">
-            <a:schemeClr val="accent1"/>
-          </a:lnRef>
-          <a:fillRef idx="3">
-            <a:schemeClr val="accent1"/>
-          </a:fillRef>
-          <a:effectRef idx="2">
-            <a:schemeClr val="accent1"/>
-          </a:effectRef>
-          <a:fontRef idx="minor">
-            <a:schemeClr val="lt1"/>
-          </a:fontRef>
-        </p:style>
-        <p:txBody>
           <a:bodyPr rtlCol="0" anchor="ctr"/>
           <a:lstStyle/>
           <a:p>
@@ -6118,50 +6083,7 @@
       </p:sp>
       <p:sp>
         <p:nvSpPr>
-          <p:cNvPr id="12" name="Rectangle 11"/>
-          <p:cNvSpPr/>
-          <p:nvPr/>
-        </p:nvSpPr>
-        <p:spPr>
-          <a:xfrm>
-            <a:off x="502920" y="6473952"/>
-            <a:ext cx="11183112" cy="13716"/>
-          </a:xfrm>
-          <a:prstGeom prst="rect">
-            <a:avLst/>
-          </a:prstGeom>
-          <a:solidFill>
-            <a:srgbClr val="D2DCE5"/>
-          </a:solidFill>
-          <a:ln>
-            <a:noFill/>
-          </a:ln>
-        </p:spPr>
-        <p:style>
-          <a:lnRef idx="1">
-            <a:schemeClr val="accent1"/>
-          </a:lnRef>
-          <a:fillRef idx="3">
-            <a:schemeClr val="accent1"/>
-          </a:fillRef>
-          <a:effectRef idx="2">
-            <a:schemeClr val="accent1"/>
-          </a:effectRef>
-          <a:fontRef idx="minor">
-            <a:schemeClr val="lt1"/>
-          </a:fontRef>
-        </p:style>
-        <p:txBody>
-          <a:bodyPr rtlCol="0" anchor="ctr"/>
-          <a:lstStyle/>
-          <a:p>
-            <a:pPr algn="ctr"/>
-          </a:p>
-        </p:txBody>
-      </p:sp>
-      <p:sp>
-        <p:nvSpPr>
-          <p:cNvPr id="13" name="TextBox 12"/>
+          <p:cNvPr id="15" name="TextBox 14"/>
           <p:cNvSpPr txBox="1"/>
           <p:nvPr/>
         </p:nvSpPr>
@@ -6190,7 +6112,7 @@
               </a:defRPr>
             </a:pPr>
             <a:r>
-              <a:t>Retirement Income Planner • Architecture overview • Household-expense, LTC, and plan-chat update</a:t>
+              <a:t>Retirement Income Planner • Architecture overview • Rental, tax-exempt income, and legacy-value update</a:t>
             </a:r>
           </a:p>
         </p:txBody>
@@ -6252,7 +6174,7 @@
               </a:defRPr>
             </a:pPr>
             <a:r>
-              <a:t>Household expense funding waterfall</a:t>
+              <a:t>Rental income becomes a portfolio of properties</a:t>
             </a:r>
           </a:p>
         </p:txBody>
@@ -6288,7 +6210,7 @@
               </a:defRPr>
             </a:pPr>
             <a:r>
-              <a:t>A portfolio now participates in paying expenses only when its Pay expenses setting is checked.</a:t>
+              <a:t>Each person can add, name, enable, hide, and remove rental-property sub-cards.</a:t>
             </a:r>
           </a:p>
         </p:txBody>
@@ -6301,8 +6223,348 @@
         </p:nvSpPr>
         <p:spPr>
           <a:xfrm>
-            <a:off x="502920" y="1234440"/>
-            <a:ext cx="2148840" cy="1325880"/>
+            <a:off x="594360" y="1188720"/>
+            <a:ext cx="3337560" cy="4526280"/>
+          </a:xfrm>
+          <a:prstGeom prst="roundRect">
+            <a:avLst/>
+          </a:prstGeom>
+          <a:solidFill>
+            <a:srgbClr val="E9F4FF"/>
+          </a:solidFill>
+          <a:ln w="13970">
+            <a:solidFill>
+              <a:srgbClr val="266EB2"/>
+            </a:solidFill>
+          </a:ln>
+        </p:spPr>
+        <p:style>
+          <a:lnRef idx="1">
+            <a:schemeClr val="accent1"/>
+          </a:lnRef>
+          <a:fillRef idx="3">
+            <a:schemeClr val="accent1"/>
+          </a:fillRef>
+          <a:effectRef idx="2">
+            <a:schemeClr val="accent1"/>
+          </a:effectRef>
+          <a:fontRef idx="minor">
+            <a:schemeClr val="lt1"/>
+          </a:fontRef>
+        </p:style>
+        <p:txBody>
+          <a:bodyPr rtlCol="0" anchor="ctr" lIns="182880" rIns="100584" tIns="91440"/>
+          <a:lstStyle/>
+          <a:p>
+            <a:pPr algn="ctr">
+              <a:defRPr sz="1700" b="1">
+                <a:solidFill>
+                  <a:srgbClr val="232D37"/>
+                </a:solidFill>
+                <a:latin typeface="Aptos Display"/>
+              </a:defRPr>
+            </a:pPr>
+            <a:r>
+              <a:t>Rental property schema</a:t>
+            </a:r>
+          </a:p>
+          <a:p>
+            <a:pPr>
+              <a:spcBef>
+                <a:spcPts val="300"/>
+              </a:spcBef>
+              <a:defRPr sz="1200">
+                <a:solidFill>
+                  <a:srgbClr val="232D37"/>
+                </a:solidFill>
+                <a:latin typeface="Aptos"/>
+              </a:defRPr>
+            </a:pPr>
+            <a:r>
+              <a:t>Name</a:t>
+            </a:r>
+          </a:p>
+          <a:p>
+            <a:pPr>
+              <a:spcBef>
+                <a:spcPts val="300"/>
+              </a:spcBef>
+              <a:defRPr sz="1200">
+                <a:solidFill>
+                  <a:srgbClr val="232D37"/>
+                </a:solidFill>
+                <a:latin typeface="Aptos"/>
+              </a:defRPr>
+            </a:pPr>
+            <a:r>
+              <a:t>Taxable rental income: net of depreciation</a:t>
+            </a:r>
+          </a:p>
+          <a:p>
+            <a:pPr>
+              <a:spcBef>
+                <a:spcPts val="300"/>
+              </a:spcBef>
+              <a:defRPr sz="1200">
+                <a:solidFill>
+                  <a:srgbClr val="232D37"/>
+                </a:solidFill>
+                <a:latin typeface="Aptos"/>
+              </a:defRPr>
+            </a:pPr>
+            <a:r>
+              <a:t>Annual non-cash depreciation</a:t>
+            </a:r>
+          </a:p>
+          <a:p>
+            <a:pPr>
+              <a:spcBef>
+                <a:spcPts val="300"/>
+              </a:spcBef>
+              <a:defRPr sz="1200">
+                <a:solidFill>
+                  <a:srgbClr val="232D37"/>
+                </a:solidFill>
+                <a:latin typeface="Aptos"/>
+              </a:defRPr>
+            </a:pPr>
+            <a:r>
+              <a:t>Age range and annual change</a:t>
+            </a:r>
+          </a:p>
+          <a:p>
+            <a:pPr>
+              <a:spcBef>
+                <a:spcPts val="300"/>
+              </a:spcBef>
+              <a:defRPr sz="1200">
+                <a:solidFill>
+                  <a:srgbClr val="232D37"/>
+                </a:solidFill>
+                <a:latin typeface="Aptos"/>
+              </a:defRPr>
+            </a:pPr>
+            <a:r>
+              <a:t>Survivor continuation</a:t>
+            </a:r>
+          </a:p>
+          <a:p>
+            <a:pPr>
+              <a:spcBef>
+                <a:spcPts val="300"/>
+              </a:spcBef>
+              <a:defRPr sz="1200">
+                <a:solidFill>
+                  <a:srgbClr val="232D37"/>
+                </a:solidFill>
+                <a:latin typeface="Aptos"/>
+              </a:defRPr>
+            </a:pPr>
+            <a:r>
+              <a:t>Independent Enable / Hide / Remove</a:t>
+            </a:r>
+          </a:p>
+        </p:txBody>
+      </p:sp>
+      <p:sp>
+        <p:nvSpPr>
+          <p:cNvPr id="5" name="Rectangle 4"/>
+          <p:cNvSpPr/>
+          <p:nvPr/>
+        </p:nvSpPr>
+        <p:spPr>
+          <a:xfrm>
+            <a:off x="594360" y="1188720"/>
+            <a:ext cx="82296" cy="4526280"/>
+          </a:xfrm>
+          <a:prstGeom prst="rect">
+            <a:avLst/>
+          </a:prstGeom>
+          <a:solidFill>
+            <a:srgbClr val="266EB2"/>
+          </a:solidFill>
+          <a:ln>
+            <a:noFill/>
+          </a:ln>
+        </p:spPr>
+        <p:style>
+          <a:lnRef idx="1">
+            <a:schemeClr val="accent1"/>
+          </a:lnRef>
+          <a:fillRef idx="3">
+            <a:schemeClr val="accent1"/>
+          </a:fillRef>
+          <a:effectRef idx="2">
+            <a:schemeClr val="accent1"/>
+          </a:effectRef>
+          <a:fontRef idx="minor">
+            <a:schemeClr val="lt1"/>
+          </a:fontRef>
+        </p:style>
+        <p:txBody>
+          <a:bodyPr rtlCol="0" anchor="ctr"/>
+          <a:lstStyle/>
+          <a:p>
+            <a:pPr algn="ctr"/>
+          </a:p>
+        </p:txBody>
+      </p:sp>
+      <p:sp>
+        <p:nvSpPr>
+          <p:cNvPr id="6" name="Rounded Rectangle 5"/>
+          <p:cNvSpPr/>
+          <p:nvPr/>
+        </p:nvSpPr>
+        <p:spPr>
+          <a:xfrm>
+            <a:off x="4407408" y="1188720"/>
+            <a:ext cx="3337560" cy="4526280"/>
+          </a:xfrm>
+          <a:prstGeom prst="roundRect">
+            <a:avLst/>
+          </a:prstGeom>
+          <a:solidFill>
+            <a:srgbClr val="EAF9F4"/>
+          </a:solidFill>
+          <a:ln w="13970">
+            <a:solidFill>
+              <a:srgbClr val="429761"/>
+            </a:solidFill>
+          </a:ln>
+        </p:spPr>
+        <p:style>
+          <a:lnRef idx="1">
+            <a:schemeClr val="accent1"/>
+          </a:lnRef>
+          <a:fillRef idx="3">
+            <a:schemeClr val="accent1"/>
+          </a:fillRef>
+          <a:effectRef idx="2">
+            <a:schemeClr val="accent1"/>
+          </a:effectRef>
+          <a:fontRef idx="minor">
+            <a:schemeClr val="lt1"/>
+          </a:fontRef>
+        </p:style>
+        <p:txBody>
+          <a:bodyPr rtlCol="0" anchor="ctr" lIns="182880" rIns="100584" tIns="91440"/>
+          <a:lstStyle/>
+          <a:p>
+            <a:pPr algn="ctr">
+              <a:defRPr sz="1700" b="1">
+                <a:solidFill>
+                  <a:srgbClr val="232D37"/>
+                </a:solidFill>
+                <a:latin typeface="Aptos Display"/>
+              </a:defRPr>
+            </a:pPr>
+            <a:r>
+              <a:t>Projection treatment</a:t>
+            </a:r>
+          </a:p>
+          <a:p>
+            <a:pPr>
+              <a:spcBef>
+                <a:spcPts val="300"/>
+              </a:spcBef>
+              <a:defRPr sz="1200">
+                <a:solidFill>
+                  <a:srgbClr val="232D37"/>
+                </a:solidFill>
+                <a:latin typeface="Aptos"/>
+              </a:defRPr>
+            </a:pPr>
+            <a:r>
+              <a:t>Rental income sums across active properties.</a:t>
+            </a:r>
+          </a:p>
+          <a:p>
+            <a:pPr>
+              <a:spcBef>
+                <a:spcPts val="300"/>
+              </a:spcBef>
+              <a:defRPr sz="1200">
+                <a:solidFill>
+                  <a:srgbClr val="232D37"/>
+                </a:solidFill>
+                <a:latin typeface="Aptos"/>
+              </a:defRPr>
+            </a:pPr>
+            <a:r>
+              <a:t>Depreciation follows the same activation, age-range, and survivor rules.</a:t>
+            </a:r>
+          </a:p>
+          <a:p>
+            <a:pPr>
+              <a:spcBef>
+                <a:spcPts val="300"/>
+              </a:spcBef>
+              <a:defRPr sz="1200">
+                <a:solidFill>
+                  <a:srgbClr val="232D37"/>
+                </a:solidFill>
+                <a:latin typeface="Aptos"/>
+              </a:defRPr>
+            </a:pPr>
+            <a:r>
+              <a:t>Depreciation is deflated because it is a fixed nominal deduction.</a:t>
+            </a:r>
+          </a:p>
+        </p:txBody>
+      </p:sp>
+      <p:sp>
+        <p:nvSpPr>
+          <p:cNvPr id="7" name="Rectangle 6"/>
+          <p:cNvSpPr/>
+          <p:nvPr/>
+        </p:nvSpPr>
+        <p:spPr>
+          <a:xfrm>
+            <a:off x="4407408" y="1188720"/>
+            <a:ext cx="82296" cy="4526280"/>
+          </a:xfrm>
+          <a:prstGeom prst="rect">
+            <a:avLst/>
+          </a:prstGeom>
+          <a:solidFill>
+            <a:srgbClr val="429761"/>
+          </a:solidFill>
+          <a:ln>
+            <a:noFill/>
+          </a:ln>
+        </p:spPr>
+        <p:style>
+          <a:lnRef idx="1">
+            <a:schemeClr val="accent1"/>
+          </a:lnRef>
+          <a:fillRef idx="3">
+            <a:schemeClr val="accent1"/>
+          </a:fillRef>
+          <a:effectRef idx="2">
+            <a:schemeClr val="accent1"/>
+          </a:effectRef>
+          <a:fontRef idx="minor">
+            <a:schemeClr val="lt1"/>
+          </a:fontRef>
+        </p:style>
+        <p:txBody>
+          <a:bodyPr rtlCol="0" anchor="ctr"/>
+          <a:lstStyle/>
+          <a:p>
+            <a:pPr algn="ctr"/>
+          </a:p>
+        </p:txBody>
+      </p:sp>
+      <p:sp>
+        <p:nvSpPr>
+          <p:cNvPr id="8" name="Rounded Rectangle 7"/>
+          <p:cNvSpPr/>
+          <p:nvPr/>
+        </p:nvSpPr>
+        <p:spPr>
+          <a:xfrm>
+            <a:off x="8220456" y="1188720"/>
+            <a:ext cx="3337560" cy="4526280"/>
           </a:xfrm>
           <a:prstGeom prst="roundRect">
             <a:avLst/>
@@ -6335,7 +6597,7 @@
           <a:lstStyle/>
           <a:p>
             <a:pPr algn="ctr">
-              <a:defRPr sz="1600" b="1">
+              <a:defRPr sz="1700" b="1">
                 <a:solidFill>
                   <a:srgbClr val="232D37"/>
                 </a:solidFill>
@@ -6343,7 +6605,7 @@
               </a:defRPr>
             </a:pPr>
             <a:r>
-              <a:t>Expense pool</a:t>
+              <a:t>Cash vs. tax treatment</a:t>
             </a:r>
           </a:p>
           <a:p>
@@ -6351,29 +6613,61 @@
               <a:spcBef>
                 <a:spcPts val="300"/>
               </a:spcBef>
-              <a:defRPr sz="1100">
-                <a:solidFill>
-                  <a:srgbClr val="232D37"/>
-                </a:solidFill>
-                <a:latin typeface="Aptos"/>
-              </a:defRPr>
-            </a:pPr>
-            <a:r>
-              <a:t>Living + LTC + tax + IRMAA + AUM fee</a:t>
-            </a:r>
-          </a:p>
-        </p:txBody>
-      </p:sp>
-      <p:sp>
-        <p:nvSpPr>
-          <p:cNvPr id="5" name="Rectangle 4"/>
+              <a:defRPr sz="1200">
+                <a:solidFill>
+                  <a:srgbClr val="232D37"/>
+                </a:solidFill>
+                <a:latin typeface="Aptos"/>
+              </a:defRPr>
+            </a:pPr>
+            <a:r>
+              <a:t>Taxable rental amount enters ordinary income and AGI.</a:t>
+            </a:r>
+          </a:p>
+          <a:p>
+            <a:pPr>
+              <a:spcBef>
+                <a:spcPts val="300"/>
+              </a:spcBef>
+              <a:defRPr sz="1200">
+                <a:solidFill>
+                  <a:srgbClr val="232D37"/>
+                </a:solidFill>
+                <a:latin typeface="Aptos"/>
+              </a:defRPr>
+            </a:pPr>
+            <a:r>
+              <a:t>Depreciation is non-cash: it increases cashIncome but is never taxed.</a:t>
+            </a:r>
+          </a:p>
+          <a:p>
+            <a:pPr>
+              <a:spcBef>
+                <a:spcPts val="300"/>
+              </a:spcBef>
+              <a:defRPr sz="1200">
+                <a:solidFill>
+                  <a:srgbClr val="232D37"/>
+                </a:solidFill>
+                <a:latin typeface="Aptos"/>
+              </a:defRPr>
+            </a:pPr>
+            <a:r>
+              <a:t>Income chart shows both as distinct stacked bands.</a:t>
+            </a:r>
+          </a:p>
+        </p:txBody>
+      </p:sp>
+      <p:sp>
+        <p:nvSpPr>
+          <p:cNvPr id="9" name="Rectangle 8"/>
           <p:cNvSpPr/>
           <p:nvPr/>
         </p:nvSpPr>
         <p:spPr>
           <a:xfrm>
-            <a:off x="502920" y="1234440"/>
-            <a:ext cx="82296" cy="1325880"/>
+            <a:off x="8220456" y="1188720"/>
+            <a:ext cx="82296" cy="4526280"/>
           </a:xfrm>
           <a:prstGeom prst="rect">
             <a:avLst/>
@@ -6409,25 +6703,23 @@
       </p:sp>
       <p:sp>
         <p:nvSpPr>
-          <p:cNvPr id="6" name="Rounded Rectangle 5"/>
+          <p:cNvPr id="10" name="Rectangle 9"/>
           <p:cNvSpPr/>
           <p:nvPr/>
         </p:nvSpPr>
         <p:spPr>
           <a:xfrm>
-            <a:off x="2971800" y="1234440"/>
-            <a:ext cx="2148840" cy="1325880"/>
-          </a:xfrm>
-          <a:prstGeom prst="roundRect">
-            <a:avLst/>
-          </a:prstGeom>
-          <a:solidFill>
-            <a:srgbClr val="E9F4FF"/>
-          </a:solidFill>
-          <a:ln w="13970">
-            <a:solidFill>
-              <a:srgbClr val="266EB2"/>
-            </a:solidFill>
+            <a:off x="502920" y="6473952"/>
+            <a:ext cx="11183112" cy="13716"/>
+          </a:xfrm>
+          <a:prstGeom prst="rect">
+            <a:avLst/>
+          </a:prstGeom>
+          <a:solidFill>
+            <a:srgbClr val="D2DCE5"/>
+          </a:solidFill>
+          <a:ln>
+            <a:noFill/>
           </a:ln>
         </p:spPr>
         <p:style>
@@ -6445,91 +6737,6 @@
           </a:fontRef>
         </p:style>
         <p:txBody>
-          <a:bodyPr rtlCol="0" anchor="ctr" lIns="182880" rIns="100584" tIns="91440"/>
-          <a:lstStyle/>
-          <a:p>
-            <a:pPr algn="ctr">
-              <a:defRPr sz="1600" b="1">
-                <a:solidFill>
-                  <a:srgbClr val="232D37"/>
-                </a:solidFill>
-                <a:latin typeface="Aptos Display"/>
-              </a:defRPr>
-            </a:pPr>
-            <a:r>
-              <a:t>1. Cash income</a:t>
-            </a:r>
-          </a:p>
-          <a:p>
-            <a:pPr>
-              <a:spcBef>
-                <a:spcPts val="300"/>
-              </a:spcBef>
-              <a:defRPr sz="1100">
-                <a:solidFill>
-                  <a:srgbClr val="232D37"/>
-                </a:solidFill>
-                <a:latin typeface="Aptos"/>
-              </a:defRPr>
-            </a:pPr>
-            <a:r>
-              <a:t>Wages + SS + pension + rental + RMD</a:t>
-            </a:r>
-          </a:p>
-          <a:p>
-            <a:pPr>
-              <a:spcBef>
-                <a:spcPts val="300"/>
-              </a:spcBef>
-              <a:defRPr sz="1100">
-                <a:solidFill>
-                  <a:srgbClr val="232D37"/>
-                </a:solidFill>
-                <a:latin typeface="Aptos"/>
-              </a:defRPr>
-            </a:pPr>
-            <a:r>
-              <a:t>Roth conversions excluded</a:t>
-            </a:r>
-          </a:p>
-        </p:txBody>
-      </p:sp>
-      <p:sp>
-        <p:nvSpPr>
-          <p:cNvPr id="7" name="Rectangle 6"/>
-          <p:cNvSpPr/>
-          <p:nvPr/>
-        </p:nvSpPr>
-        <p:spPr>
-          <a:xfrm>
-            <a:off x="2971800" y="1234440"/>
-            <a:ext cx="82296" cy="1325880"/>
-          </a:xfrm>
-          <a:prstGeom prst="rect">
-            <a:avLst/>
-          </a:prstGeom>
-          <a:solidFill>
-            <a:srgbClr val="266EB2"/>
-          </a:solidFill>
-          <a:ln>
-            <a:noFill/>
-          </a:ln>
-        </p:spPr>
-        <p:style>
-          <a:lnRef idx="1">
-            <a:schemeClr val="accent1"/>
-          </a:lnRef>
-          <a:fillRef idx="3">
-            <a:schemeClr val="accent1"/>
-          </a:fillRef>
-          <a:effectRef idx="2">
-            <a:schemeClr val="accent1"/>
-          </a:effectRef>
-          <a:fontRef idx="minor">
-            <a:schemeClr val="lt1"/>
-          </a:fontRef>
-        </p:style>
-        <p:txBody>
           <a:bodyPr rtlCol="0" anchor="ctr"/>
           <a:lstStyle/>
           <a:p>
@@ -6539,872 +6746,7 @@
       </p:sp>
       <p:sp>
         <p:nvSpPr>
-          <p:cNvPr id="8" name="Rounded Rectangle 7"/>
-          <p:cNvSpPr/>
-          <p:nvPr/>
-        </p:nvSpPr>
-        <p:spPr>
-          <a:xfrm>
-            <a:off x="5440680" y="1234440"/>
-            <a:ext cx="2148840" cy="1325880"/>
-          </a:xfrm>
-          <a:prstGeom prst="roundRect">
-            <a:avLst/>
-          </a:prstGeom>
-          <a:solidFill>
-            <a:srgbClr val="EAF9F4"/>
-          </a:solidFill>
-          <a:ln w="13970">
-            <a:solidFill>
-              <a:srgbClr val="429761"/>
-            </a:solidFill>
-          </a:ln>
-        </p:spPr>
-        <p:style>
-          <a:lnRef idx="1">
-            <a:schemeClr val="accent1"/>
-          </a:lnRef>
-          <a:fillRef idx="3">
-            <a:schemeClr val="accent1"/>
-          </a:fillRef>
-          <a:effectRef idx="2">
-            <a:schemeClr val="accent1"/>
-          </a:effectRef>
-          <a:fontRef idx="minor">
-            <a:schemeClr val="lt1"/>
-          </a:fontRef>
-        </p:style>
-        <p:txBody>
-          <a:bodyPr rtlCol="0" anchor="ctr" lIns="182880" rIns="100584" tIns="91440"/>
-          <a:lstStyle/>
-          <a:p>
-            <a:pPr algn="ctr">
-              <a:defRPr sz="1600" b="1">
-                <a:solidFill>
-                  <a:srgbClr val="232D37"/>
-                </a:solidFill>
-                <a:latin typeface="Aptos Display"/>
-              </a:defRPr>
-            </a:pPr>
-            <a:r>
-              <a:t>2. Dividends</a:t>
-            </a:r>
-          </a:p>
-          <a:p>
-            <a:pPr>
-              <a:spcBef>
-                <a:spcPts val="300"/>
-              </a:spcBef>
-              <a:defRPr sz="1000">
-                <a:solidFill>
-                  <a:srgbClr val="232D37"/>
-                </a:solidFill>
-                <a:latin typeface="Aptos"/>
-              </a:defRPr>
-            </a:pPr>
-            <a:r>
-              <a:t>Only in-range non-IDGT portfolios with Pay expenses checked</a:t>
-            </a:r>
-          </a:p>
-          <a:p>
-            <a:pPr>
-              <a:spcBef>
-                <a:spcPts val="300"/>
-              </a:spcBef>
-              <a:defRPr sz="1000">
-                <a:solidFill>
-                  <a:srgbClr val="232D37"/>
-                </a:solidFill>
-                <a:latin typeface="Aptos"/>
-              </a:defRPr>
-            </a:pPr>
-            <a:r>
-              <a:t>Shared pro rata to ODIV</a:t>
-            </a:r>
-          </a:p>
-        </p:txBody>
-      </p:sp>
-      <p:sp>
-        <p:nvSpPr>
-          <p:cNvPr id="9" name="Rectangle 8"/>
-          <p:cNvSpPr/>
-          <p:nvPr/>
-        </p:nvSpPr>
-        <p:spPr>
-          <a:xfrm>
-            <a:off x="5440680" y="1234440"/>
-            <a:ext cx="82296" cy="1325880"/>
-          </a:xfrm>
-          <a:prstGeom prst="rect">
-            <a:avLst/>
-          </a:prstGeom>
-          <a:solidFill>
-            <a:srgbClr val="429761"/>
-          </a:solidFill>
-          <a:ln>
-            <a:noFill/>
-          </a:ln>
-        </p:spPr>
-        <p:style>
-          <a:lnRef idx="1">
-            <a:schemeClr val="accent1"/>
-          </a:lnRef>
-          <a:fillRef idx="3">
-            <a:schemeClr val="accent1"/>
-          </a:fillRef>
-          <a:effectRef idx="2">
-            <a:schemeClr val="accent1"/>
-          </a:effectRef>
-          <a:fontRef idx="minor">
-            <a:schemeClr val="lt1"/>
-          </a:fontRef>
-        </p:style>
-        <p:txBody>
-          <a:bodyPr rtlCol="0" anchor="ctr"/>
-          <a:lstStyle/>
-          <a:p>
-            <a:pPr algn="ctr"/>
-          </a:p>
-        </p:txBody>
-      </p:sp>
-      <p:sp>
-        <p:nvSpPr>
-          <p:cNvPr id="10" name="Rounded Rectangle 9"/>
-          <p:cNvSpPr/>
-          <p:nvPr/>
-        </p:nvSpPr>
-        <p:spPr>
-          <a:xfrm>
-            <a:off x="7909560" y="1234440"/>
-            <a:ext cx="2148840" cy="1325880"/>
-          </a:xfrm>
-          <a:prstGeom prst="roundRect">
-            <a:avLst/>
-          </a:prstGeom>
-          <a:solidFill>
-            <a:srgbClr val="F7EFFF"/>
-          </a:solidFill>
-          <a:ln w="13970">
-            <a:solidFill>
-              <a:srgbClr val="7852B0"/>
-            </a:solidFill>
-          </a:ln>
-        </p:spPr>
-        <p:style>
-          <a:lnRef idx="1">
-            <a:schemeClr val="accent1"/>
-          </a:lnRef>
-          <a:fillRef idx="3">
-            <a:schemeClr val="accent1"/>
-          </a:fillRef>
-          <a:effectRef idx="2">
-            <a:schemeClr val="accent1"/>
-          </a:effectRef>
-          <a:fontRef idx="minor">
-            <a:schemeClr val="lt1"/>
-          </a:fontRef>
-        </p:style>
-        <p:txBody>
-          <a:bodyPr rtlCol="0" anchor="ctr" lIns="182880" rIns="100584" tIns="91440"/>
-          <a:lstStyle/>
-          <a:p>
-            <a:pPr algn="ctr">
-              <a:defRPr sz="1600" b="1">
-                <a:solidFill>
-                  <a:srgbClr val="232D37"/>
-                </a:solidFill>
-                <a:latin typeface="Aptos Display"/>
-              </a:defRPr>
-            </a:pPr>
-            <a:r>
-              <a:t>3. Asset sales</a:t>
-            </a:r>
-          </a:p>
-          <a:p>
-            <a:pPr>
-              <a:spcBef>
-                <a:spcPts val="300"/>
-              </a:spcBef>
-              <a:defRPr sz="1000">
-                <a:solidFill>
-                  <a:srgbClr val="232D37"/>
-                </a:solidFill>
-                <a:latin typeface="Aptos"/>
-              </a:defRPr>
-            </a:pPr>
-            <a:r>
-              <a:t>Checked portfolios only</a:t>
-            </a:r>
-          </a:p>
-          <a:p>
-            <a:pPr>
-              <a:spcBef>
-                <a:spcPts val="300"/>
-              </a:spcBef>
-              <a:defRPr sz="1000">
-                <a:solidFill>
-                  <a:srgbClr val="232D37"/>
-                </a:solidFill>
-                <a:latin typeface="Aptos"/>
-              </a:defRPr>
-            </a:pPr>
-            <a:r>
-              <a:t>Shared pro rata to balance</a:t>
-            </a:r>
-          </a:p>
-          <a:p>
-            <a:pPr>
-              <a:spcBef>
-                <a:spcPts val="300"/>
-              </a:spcBef>
-              <a:defRPr sz="1000">
-                <a:solidFill>
-                  <a:srgbClr val="232D37"/>
-                </a:solidFill>
-                <a:latin typeface="Aptos"/>
-              </a:defRPr>
-            </a:pPr>
-            <a:r>
-              <a:t>Creates LTCG via gain fraction</a:t>
-            </a:r>
-          </a:p>
-        </p:txBody>
-      </p:sp>
-      <p:sp>
-        <p:nvSpPr>
-          <p:cNvPr id="11" name="Rectangle 10"/>
-          <p:cNvSpPr/>
-          <p:nvPr/>
-        </p:nvSpPr>
-        <p:spPr>
-          <a:xfrm>
-            <a:off x="7909560" y="1234440"/>
-            <a:ext cx="82296" cy="1325880"/>
-          </a:xfrm>
-          <a:prstGeom prst="rect">
-            <a:avLst/>
-          </a:prstGeom>
-          <a:solidFill>
-            <a:srgbClr val="7852B0"/>
-          </a:solidFill>
-          <a:ln>
-            <a:noFill/>
-          </a:ln>
-        </p:spPr>
-        <p:style>
-          <a:lnRef idx="1">
-            <a:schemeClr val="accent1"/>
-          </a:lnRef>
-          <a:fillRef idx="3">
-            <a:schemeClr val="accent1"/>
-          </a:fillRef>
-          <a:effectRef idx="2">
-            <a:schemeClr val="accent1"/>
-          </a:effectRef>
-          <a:fontRef idx="minor">
-            <a:schemeClr val="lt1"/>
-          </a:fontRef>
-        </p:style>
-        <p:txBody>
-          <a:bodyPr rtlCol="0" anchor="ctr"/>
-          <a:lstStyle/>
-          <a:p>
-            <a:pPr algn="ctr"/>
-          </a:p>
-        </p:txBody>
-      </p:sp>
-      <p:sp>
-        <p:nvSpPr>
-          <p:cNvPr id="12" name="Rounded Rectangle 11"/>
-          <p:cNvSpPr/>
-          <p:nvPr/>
-        </p:nvSpPr>
-        <p:spPr>
-          <a:xfrm>
-            <a:off x="10378440" y="1234440"/>
-            <a:ext cx="1280160" cy="1325880"/>
-          </a:xfrm>
-          <a:prstGeom prst="roundRect">
-            <a:avLst/>
-          </a:prstGeom>
-          <a:solidFill>
-            <a:srgbClr val="F8FAFC"/>
-          </a:solidFill>
-          <a:ln w="13970">
-            <a:solidFill>
-              <a:srgbClr val="0F2647"/>
-            </a:solidFill>
-          </a:ln>
-        </p:spPr>
-        <p:style>
-          <a:lnRef idx="1">
-            <a:schemeClr val="accent1"/>
-          </a:lnRef>
-          <a:fillRef idx="3">
-            <a:schemeClr val="accent1"/>
-          </a:fillRef>
-          <a:effectRef idx="2">
-            <a:schemeClr val="accent1"/>
-          </a:effectRef>
-          <a:fontRef idx="minor">
-            <a:schemeClr val="lt1"/>
-          </a:fontRef>
-        </p:style>
-        <p:txBody>
-          <a:bodyPr rtlCol="0" anchor="ctr" lIns="182880" rIns="100584" tIns="91440"/>
-          <a:lstStyle/>
-          <a:p>
-            <a:pPr algn="ctr">
-              <a:defRPr sz="1500" b="1">
-                <a:solidFill>
-                  <a:srgbClr val="232D37"/>
-                </a:solidFill>
-                <a:latin typeface="Aptos Display"/>
-              </a:defRPr>
-            </a:pPr>
-            <a:r>
-              <a:t>4. Gap</a:t>
-            </a:r>
-          </a:p>
-          <a:p>
-            <a:pPr>
-              <a:spcBef>
-                <a:spcPts val="300"/>
-              </a:spcBef>
-              <a:defRPr sz="1000">
-                <a:solidFill>
-                  <a:srgbClr val="232D37"/>
-                </a:solidFill>
-                <a:latin typeface="Aptos"/>
-              </a:defRPr>
-            </a:pPr>
-            <a:r>
-              <a:t>expUnfunded</a:t>
-            </a:r>
-          </a:p>
-        </p:txBody>
-      </p:sp>
-      <p:sp>
-        <p:nvSpPr>
-          <p:cNvPr id="13" name="Rectangle 12"/>
-          <p:cNvSpPr/>
-          <p:nvPr/>
-        </p:nvSpPr>
-        <p:spPr>
-          <a:xfrm>
-            <a:off x="10378440" y="1234440"/>
-            <a:ext cx="82296" cy="1325880"/>
-          </a:xfrm>
-          <a:prstGeom prst="rect">
-            <a:avLst/>
-          </a:prstGeom>
-          <a:solidFill>
-            <a:srgbClr val="0F2647"/>
-          </a:solidFill>
-          <a:ln>
-            <a:noFill/>
-          </a:ln>
-        </p:spPr>
-        <p:style>
-          <a:lnRef idx="1">
-            <a:schemeClr val="accent1"/>
-          </a:lnRef>
-          <a:fillRef idx="3">
-            <a:schemeClr val="accent1"/>
-          </a:fillRef>
-          <a:effectRef idx="2">
-            <a:schemeClr val="accent1"/>
-          </a:effectRef>
-          <a:fontRef idx="minor">
-            <a:schemeClr val="lt1"/>
-          </a:fontRef>
-        </p:style>
-        <p:txBody>
-          <a:bodyPr rtlCol="0" anchor="ctr"/>
-          <a:lstStyle/>
-          <a:p>
-            <a:pPr algn="ctr"/>
-          </a:p>
-        </p:txBody>
-      </p:sp>
-      <p:cxnSp>
-        <p:nvCxnSpPr>
-          <p:cNvPr id="14" name="Connector 13"/>
-          <p:cNvCxnSpPr/>
-          <p:nvPr/>
-        </p:nvCxnSpPr>
-        <p:spPr>
-          <a:xfrm>
-            <a:off x="2697480" y="1901952"/>
-            <a:ext cx="219456" cy="0"/>
-          </a:xfrm>
-          <a:prstGeom prst="line">
-            <a:avLst/>
-          </a:prstGeom>
-          <a:ln w="21590">
-            <a:solidFill>
-              <a:srgbClr val="E5892A"/>
-            </a:solidFill>
-          </a:ln>
-        </p:spPr>
-        <p:style>
-          <a:lnRef idx="2">
-            <a:schemeClr val="accent1"/>
-          </a:lnRef>
-          <a:fillRef idx="0">
-            <a:schemeClr val="accent1"/>
-          </a:fillRef>
-          <a:effectRef idx="1">
-            <a:schemeClr val="accent1"/>
-          </a:effectRef>
-          <a:fontRef idx="minor">
-            <a:schemeClr val="tx1"/>
-          </a:fontRef>
-        </p:style>
-      </p:cxnSp>
-      <p:cxnSp>
-        <p:nvCxnSpPr>
-          <p:cNvPr id="15" name="Connector 14"/>
-          <p:cNvCxnSpPr/>
-          <p:nvPr/>
-        </p:nvCxnSpPr>
-        <p:spPr>
-          <a:xfrm>
-            <a:off x="5166360" y="1901952"/>
-            <a:ext cx="219456" cy="0"/>
-          </a:xfrm>
-          <a:prstGeom prst="line">
-            <a:avLst/>
-          </a:prstGeom>
-          <a:ln w="21590">
-            <a:solidFill>
-              <a:srgbClr val="266EB2"/>
-            </a:solidFill>
-          </a:ln>
-        </p:spPr>
-        <p:style>
-          <a:lnRef idx="2">
-            <a:schemeClr val="accent1"/>
-          </a:lnRef>
-          <a:fillRef idx="0">
-            <a:schemeClr val="accent1"/>
-          </a:fillRef>
-          <a:effectRef idx="1">
-            <a:schemeClr val="accent1"/>
-          </a:effectRef>
-          <a:fontRef idx="minor">
-            <a:schemeClr val="tx1"/>
-          </a:fontRef>
-        </p:style>
-      </p:cxnSp>
-      <p:cxnSp>
-        <p:nvCxnSpPr>
-          <p:cNvPr id="16" name="Connector 15"/>
-          <p:cNvCxnSpPr/>
-          <p:nvPr/>
-        </p:nvCxnSpPr>
-        <p:spPr>
-          <a:xfrm>
-            <a:off x="7635240" y="1901952"/>
-            <a:ext cx="219456" cy="0"/>
-          </a:xfrm>
-          <a:prstGeom prst="line">
-            <a:avLst/>
-          </a:prstGeom>
-          <a:ln w="21590">
-            <a:solidFill>
-              <a:srgbClr val="429761"/>
-            </a:solidFill>
-          </a:ln>
-        </p:spPr>
-        <p:style>
-          <a:lnRef idx="2">
-            <a:schemeClr val="accent1"/>
-          </a:lnRef>
-          <a:fillRef idx="0">
-            <a:schemeClr val="accent1"/>
-          </a:fillRef>
-          <a:effectRef idx="1">
-            <a:schemeClr val="accent1"/>
-          </a:effectRef>
-          <a:fontRef idx="minor">
-            <a:schemeClr val="tx1"/>
-          </a:fontRef>
-        </p:style>
-      </p:cxnSp>
-      <p:cxnSp>
-        <p:nvCxnSpPr>
-          <p:cNvPr id="17" name="Connector 16"/>
-          <p:cNvCxnSpPr/>
-          <p:nvPr/>
-        </p:nvCxnSpPr>
-        <p:spPr>
-          <a:xfrm>
-            <a:off x="10104120" y="1901952"/>
-            <a:ext cx="219456" cy="0"/>
-          </a:xfrm>
-          <a:prstGeom prst="line">
-            <a:avLst/>
-          </a:prstGeom>
-          <a:ln w="21590">
-            <a:solidFill>
-              <a:srgbClr val="7852B0"/>
-            </a:solidFill>
-          </a:ln>
-        </p:spPr>
-        <p:style>
-          <a:lnRef idx="2">
-            <a:schemeClr val="accent1"/>
-          </a:lnRef>
-          <a:fillRef idx="0">
-            <a:schemeClr val="accent1"/>
-          </a:fillRef>
-          <a:effectRef idx="1">
-            <a:schemeClr val="accent1"/>
-          </a:effectRef>
-          <a:fontRef idx="minor">
-            <a:schemeClr val="tx1"/>
-          </a:fontRef>
-        </p:style>
-      </p:cxnSp>
-      <p:sp>
-        <p:nvSpPr>
-          <p:cNvPr id="18" name="Rounded Rectangle 17"/>
-          <p:cNvSpPr/>
-          <p:nvPr/>
-        </p:nvSpPr>
-        <p:spPr>
-          <a:xfrm>
-            <a:off x="960120" y="3429000"/>
-            <a:ext cx="4800600" cy="1325880"/>
-          </a:xfrm>
-          <a:prstGeom prst="roundRect">
-            <a:avLst/>
-          </a:prstGeom>
-          <a:solidFill>
-            <a:srgbClr val="F8FAFC"/>
-          </a:solidFill>
-          <a:ln w="13970">
-            <a:solidFill>
-              <a:srgbClr val="168F8D"/>
-            </a:solidFill>
-          </a:ln>
-        </p:spPr>
-        <p:style>
-          <a:lnRef idx="1">
-            <a:schemeClr val="accent1"/>
-          </a:lnRef>
-          <a:fillRef idx="3">
-            <a:schemeClr val="accent1"/>
-          </a:fillRef>
-          <a:effectRef idx="2">
-            <a:schemeClr val="accent1"/>
-          </a:effectRef>
-          <a:fontRef idx="minor">
-            <a:schemeClr val="lt1"/>
-          </a:fontRef>
-        </p:style>
-        <p:txBody>
-          <a:bodyPr rtlCol="0" anchor="ctr" lIns="182880" rIns="100584" tIns="91440"/>
-          <a:lstStyle/>
-          <a:p>
-            <a:pPr algn="ctr">
-              <a:defRPr sz="1700" b="1">
-                <a:solidFill>
-                  <a:srgbClr val="232D37"/>
-                </a:solidFill>
-                <a:latin typeface="Aptos Display"/>
-              </a:defRPr>
-            </a:pPr>
-            <a:r>
-              <a:t>Portfolio behavior</a:t>
-            </a:r>
-          </a:p>
-          <a:p>
-            <a:pPr>
-              <a:spcBef>
-                <a:spcPts val="300"/>
-              </a:spcBef>
-              <a:defRPr sz="1200">
-                <a:solidFill>
-                  <a:srgbClr val="232D37"/>
-                </a:solidFill>
-                <a:latin typeface="Aptos"/>
-              </a:defRPr>
-            </a:pPr>
-            <a:r>
-              <a:t>Unchecked portfolio: dividends reinvest, no sale for expenses.</a:t>
-            </a:r>
-          </a:p>
-          <a:p>
-            <a:pPr>
-              <a:spcBef>
-                <a:spcPts val="300"/>
-              </a:spcBef>
-              <a:defRPr sz="1200">
-                <a:solidFill>
-                  <a:srgbClr val="232D37"/>
-                </a:solidFill>
-                <a:latin typeface="Aptos"/>
-              </a:defRPr>
-            </a:pPr>
-            <a:r>
-              <a:t>Checked portfolio: receives a pro-rata share of dividend and sale funding.</a:t>
-            </a:r>
-          </a:p>
-          <a:p>
-            <a:pPr>
-              <a:spcBef>
-                <a:spcPts val="300"/>
-              </a:spcBef>
-              <a:defRPr sz="1200">
-                <a:solidFill>
-                  <a:srgbClr val="232D37"/>
-                </a:solidFill>
-                <a:latin typeface="Aptos"/>
-              </a:defRPr>
-            </a:pPr>
-            <a:r>
-              <a:t>IDGT follows the same opt-in rule.</a:t>
-            </a:r>
-          </a:p>
-        </p:txBody>
-      </p:sp>
-      <p:sp>
-        <p:nvSpPr>
-          <p:cNvPr id="19" name="Rectangle 18"/>
-          <p:cNvSpPr/>
-          <p:nvPr/>
-        </p:nvSpPr>
-        <p:spPr>
-          <a:xfrm>
-            <a:off x="960120" y="3429000"/>
-            <a:ext cx="82296" cy="1325880"/>
-          </a:xfrm>
-          <a:prstGeom prst="rect">
-            <a:avLst/>
-          </a:prstGeom>
-          <a:solidFill>
-            <a:srgbClr val="168F8D"/>
-          </a:solidFill>
-          <a:ln>
-            <a:noFill/>
-          </a:ln>
-        </p:spPr>
-        <p:style>
-          <a:lnRef idx="1">
-            <a:schemeClr val="accent1"/>
-          </a:lnRef>
-          <a:fillRef idx="3">
-            <a:schemeClr val="accent1"/>
-          </a:fillRef>
-          <a:effectRef idx="2">
-            <a:schemeClr val="accent1"/>
-          </a:effectRef>
-          <a:fontRef idx="minor">
-            <a:schemeClr val="lt1"/>
-          </a:fontRef>
-        </p:style>
-        <p:txBody>
-          <a:bodyPr rtlCol="0" anchor="ctr"/>
-          <a:lstStyle/>
-          <a:p>
-            <a:pPr algn="ctr"/>
-          </a:p>
-        </p:txBody>
-      </p:sp>
-      <p:sp>
-        <p:nvSpPr>
-          <p:cNvPr id="20" name="Rounded Rectangle 19"/>
-          <p:cNvSpPr/>
-          <p:nvPr/>
-        </p:nvSpPr>
-        <p:spPr>
-          <a:xfrm>
-            <a:off x="6355080" y="3429000"/>
-            <a:ext cx="4800600" cy="1325880"/>
-          </a:xfrm>
-          <a:prstGeom prst="roundRect">
-            <a:avLst/>
-          </a:prstGeom>
-          <a:solidFill>
-            <a:srgbClr val="F8FAFC"/>
-          </a:solidFill>
-          <a:ln w="13970">
-            <a:solidFill>
-              <a:srgbClr val="0F2647"/>
-            </a:solidFill>
-          </a:ln>
-        </p:spPr>
-        <p:style>
-          <a:lnRef idx="1">
-            <a:schemeClr val="accent1"/>
-          </a:lnRef>
-          <a:fillRef idx="3">
-            <a:schemeClr val="accent1"/>
-          </a:fillRef>
-          <a:effectRef idx="2">
-            <a:schemeClr val="accent1"/>
-          </a:effectRef>
-          <a:fontRef idx="minor">
-            <a:schemeClr val="lt1"/>
-          </a:fontRef>
-        </p:style>
-        <p:txBody>
-          <a:bodyPr rtlCol="0" anchor="ctr" lIns="182880" rIns="100584" tIns="91440"/>
-          <a:lstStyle/>
-          <a:p>
-            <a:pPr algn="ctr">
-              <a:defRPr sz="1700" b="1">
-                <a:solidFill>
-                  <a:srgbClr val="232D37"/>
-                </a:solidFill>
-                <a:latin typeface="Aptos Display"/>
-              </a:defRPr>
-            </a:pPr>
-            <a:r>
-              <a:t>New state fields</a:t>
-            </a:r>
-          </a:p>
-          <a:p>
-            <a:pPr>
-              <a:spcBef>
-                <a:spcPts val="300"/>
-              </a:spcBef>
-              <a:defRPr sz="1200">
-                <a:solidFill>
-                  <a:srgbClr val="232D37"/>
-                </a:solidFill>
-                <a:latin typeface="Aptos"/>
-              </a:defRPr>
-            </a:pPr>
-            <a:r>
-              <a:t>Household: living, ltc, aumFee, ui.hiddenSections.</a:t>
-            </a:r>
-          </a:p>
-          <a:p>
-            <a:pPr>
-              <a:spcBef>
-                <a:spcPts val="300"/>
-              </a:spcBef>
-              <a:defRPr sz="1200">
-                <a:solidFill>
-                  <a:srgbClr val="232D37"/>
-                </a:solidFill>
-                <a:latin typeface="Aptos"/>
-              </a:defRPr>
-            </a:pPr>
-            <a:r>
-              <a:t>Portfolio: payExp and aum.</a:t>
-            </a:r>
-          </a:p>
-          <a:p>
-            <a:pPr>
-              <a:spcBef>
-                <a:spcPts val="300"/>
-              </a:spcBef>
-              <a:defRPr sz="1200">
-                <a:solidFill>
-                  <a:srgbClr val="232D37"/>
-                </a:solidFill>
-                <a:latin typeface="Aptos"/>
-              </a:defRPr>
-            </a:pPr>
-            <a:r>
-              <a:t>IRA/Roth: aum and stretch; IRA adds conversion start age.</a:t>
-            </a:r>
-          </a:p>
-        </p:txBody>
-      </p:sp>
-      <p:sp>
-        <p:nvSpPr>
-          <p:cNvPr id="21" name="Rectangle 20"/>
-          <p:cNvSpPr/>
-          <p:nvPr/>
-        </p:nvSpPr>
-        <p:spPr>
-          <a:xfrm>
-            <a:off x="6355080" y="3429000"/>
-            <a:ext cx="82296" cy="1325880"/>
-          </a:xfrm>
-          <a:prstGeom prst="rect">
-            <a:avLst/>
-          </a:prstGeom>
-          <a:solidFill>
-            <a:srgbClr val="0F2647"/>
-          </a:solidFill>
-          <a:ln>
-            <a:noFill/>
-          </a:ln>
-        </p:spPr>
-        <p:style>
-          <a:lnRef idx="1">
-            <a:schemeClr val="accent1"/>
-          </a:lnRef>
-          <a:fillRef idx="3">
-            <a:schemeClr val="accent1"/>
-          </a:fillRef>
-          <a:effectRef idx="2">
-            <a:schemeClr val="accent1"/>
-          </a:effectRef>
-          <a:fontRef idx="minor">
-            <a:schemeClr val="lt1"/>
-          </a:fontRef>
-        </p:style>
-        <p:txBody>
-          <a:bodyPr rtlCol="0" anchor="ctr"/>
-          <a:lstStyle/>
-          <a:p>
-            <a:pPr algn="ctr"/>
-          </a:p>
-        </p:txBody>
-      </p:sp>
-      <p:sp>
-        <p:nvSpPr>
-          <p:cNvPr id="22" name="Rectangle 21"/>
-          <p:cNvSpPr/>
-          <p:nvPr/>
-        </p:nvSpPr>
-        <p:spPr>
-          <a:xfrm>
-            <a:off x="502920" y="6473952"/>
-            <a:ext cx="11183112" cy="13716"/>
-          </a:xfrm>
-          <a:prstGeom prst="rect">
-            <a:avLst/>
-          </a:prstGeom>
-          <a:solidFill>
-            <a:srgbClr val="D2DCE5"/>
-          </a:solidFill>
-          <a:ln>
-            <a:noFill/>
-          </a:ln>
-        </p:spPr>
-        <p:style>
-          <a:lnRef idx="1">
-            <a:schemeClr val="accent1"/>
-          </a:lnRef>
-          <a:fillRef idx="3">
-            <a:schemeClr val="accent1"/>
-          </a:fillRef>
-          <a:effectRef idx="2">
-            <a:schemeClr val="accent1"/>
-          </a:effectRef>
-          <a:fontRef idx="minor">
-            <a:schemeClr val="lt1"/>
-          </a:fontRef>
-        </p:style>
-        <p:txBody>
-          <a:bodyPr rtlCol="0" anchor="ctr"/>
-          <a:lstStyle/>
-          <a:p>
-            <a:pPr algn="ctr"/>
-          </a:p>
-        </p:txBody>
-      </p:sp>
-      <p:sp>
-        <p:nvSpPr>
-          <p:cNvPr id="23" name="TextBox 22"/>
+          <p:cNvPr id="11" name="TextBox 10"/>
           <p:cNvSpPr txBox="1"/>
           <p:nvPr/>
         </p:nvSpPr>
@@ -7433,7 +6775,7 @@
               </a:defRPr>
             </a:pPr>
             <a:r>
-              <a:t>Retirement Income Planner • Architecture overview • Household-expense, LTC, and plan-chat update</a:t>
+              <a:t>Retirement Income Planner • Architecture overview • Rental, tax-exempt income, and legacy-value update</a:t>
             </a:r>
           </a:p>
         </p:txBody>
@@ -7495,7 +6837,7 @@
               </a:defRPr>
             </a:pPr>
             <a:r>
-              <a:t>Tax ↔ LTCG fixed-point solver</a:t>
+              <a:t>Tax-exempt portfolio income changes cash flow, not AGI</a:t>
             </a:r>
           </a:p>
         </p:txBody>
@@ -7531,7 +6873,7 @@
               </a:defRPr>
             </a:pPr>
             <a:r>
-              <a:t>Sales create LTCG, LTCG changes tax, and tax is itself part of the expense pool—so the model solves the loop rather than using a lagged approximation.</a:t>
+              <a:t>A portfolio’s tax-exempt yield pays cash to the household and reduces the portfolio balance, while remaining excluded from ordinary taxable income.</a:t>
             </a:r>
           </a:p>
         </p:txBody>
@@ -7544,8 +6886,8 @@
         </p:nvSpPr>
         <p:spPr>
           <a:xfrm>
-            <a:off x="640080" y="1188720"/>
-            <a:ext cx="2057400" cy="1234440"/>
+            <a:off x="502920" y="1234440"/>
+            <a:ext cx="2240280" cy="1325880"/>
           </a:xfrm>
           <a:prstGeom prst="roundRect">
             <a:avLst/>
@@ -7586,7 +6928,7 @@
               </a:defRPr>
             </a:pPr>
             <a:r>
-              <a:t>Start guess T₀</a:t>
+              <a:t>Tax-exempt payout</a:t>
             </a:r>
           </a:p>
           <a:p>
@@ -7602,7 +6944,7 @@
               </a:defRPr>
             </a:pPr>
             <a:r>
-              <a:t>Prior-year total tax</a:t>
+              <a:t>teIncome = balance × teYield</a:t>
             </a:r>
           </a:p>
           <a:p>
@@ -7618,7 +6960,7 @@
               </a:defRPr>
             </a:pPr>
             <a:r>
-              <a:t>Zero in year 0</a:t>
+              <a:t>Portfolio balance falls by same amount</a:t>
             </a:r>
           </a:p>
         </p:txBody>
@@ -7631,8 +6973,8 @@
         </p:nvSpPr>
         <p:spPr>
           <a:xfrm>
-            <a:off x="640080" y="1188720"/>
-            <a:ext cx="82296" cy="1234440"/>
+            <a:off x="502920" y="1234440"/>
+            <a:ext cx="82296" cy="1325880"/>
           </a:xfrm>
           <a:prstGeom prst="rect">
             <a:avLst/>
@@ -7674,8 +7016,8 @@
         </p:nvSpPr>
         <p:spPr>
           <a:xfrm>
-            <a:off x="3063240" y="1188720"/>
-            <a:ext cx="2057400" cy="1234440"/>
+            <a:off x="3063240" y="1234440"/>
+            <a:ext cx="2240280" cy="1325880"/>
           </a:xfrm>
           <a:prstGeom prst="roundRect">
             <a:avLst/>
@@ -7716,7 +7058,7 @@
               </a:defRPr>
             </a:pPr>
             <a:r>
-              <a:t>Run waterfall</a:t>
+              <a:t>Cash flow</a:t>
             </a:r>
           </a:p>
           <a:p>
@@ -7732,7 +7074,7 @@
               </a:defRPr>
             </a:pPr>
             <a:r>
-              <a:t>Fund expenses using candidate tax</a:t>
+              <a:t>Included in cashIncome</a:t>
             </a:r>
           </a:p>
           <a:p>
@@ -7748,7 +7090,23 @@
               </a:defRPr>
             </a:pPr>
             <a:r>
-              <a:t>Calculate dividends used and sales</a:t>
+              <a:t>Can cover household expenses</a:t>
+            </a:r>
+          </a:p>
+          <a:p>
+            <a:pPr>
+              <a:spcBef>
+                <a:spcPts val="300"/>
+              </a:spcBef>
+              <a:defRPr sz="1100">
+                <a:solidFill>
+                  <a:srgbClr val="232D37"/>
+                </a:solidFill>
+                <a:latin typeface="Aptos"/>
+              </a:defRPr>
+            </a:pPr>
+            <a:r>
+              <a:t>Reduces dividend/sale funding need</a:t>
             </a:r>
           </a:p>
         </p:txBody>
@@ -7761,8 +7119,8 @@
         </p:nvSpPr>
         <p:spPr>
           <a:xfrm>
-            <a:off x="3063240" y="1188720"/>
-            <a:ext cx="82296" cy="1234440"/>
+            <a:off x="3063240" y="1234440"/>
+            <a:ext cx="82296" cy="1325880"/>
           </a:xfrm>
           <a:prstGeom prst="rect">
             <a:avLst/>
@@ -7804,8 +7162,8 @@
         </p:nvSpPr>
         <p:spPr>
           <a:xfrm>
-            <a:off x="5486400" y="1188720"/>
-            <a:ext cx="2057400" cy="1234440"/>
+            <a:off x="5623560" y="1234440"/>
+            <a:ext cx="2240280" cy="1325880"/>
           </a:xfrm>
           <a:prstGeom prst="roundRect">
             <a:avLst/>
@@ -7846,7 +7204,7 @@
               </a:defRPr>
             </a:pPr>
             <a:r>
-              <a:t>Derive LTCG</a:t>
+              <a:t>Tax treatment</a:t>
             </a:r>
           </a:p>
           <a:p>
@@ -7862,7 +7220,7 @@
               </a:defRPr>
             </a:pPr>
             <a:r>
-              <a:t>Sales × each portfolio gain fraction</a:t>
+              <a:t>Not in AGI</a:t>
             </a:r>
           </a:p>
           <a:p>
@@ -7878,7 +7236,23 @@
               </a:defRPr>
             </a:pPr>
             <a:r>
-              <a:t>Apply SCGL hypothetically</a:t>
+              <a:t>Not in ordinary or qualified taxable income</a:t>
+            </a:r>
+          </a:p>
+          <a:p>
+            <a:pPr>
+              <a:spcBef>
+                <a:spcPts val="300"/>
+              </a:spcBef>
+              <a:defRPr sz="1100">
+                <a:solidFill>
+                  <a:srgbClr val="232D37"/>
+                </a:solidFill>
+                <a:latin typeface="Aptos"/>
+              </a:defRPr>
+            </a:pPr>
+            <a:r>
+              <a:t>Not in senior-deduction MAGI</a:t>
             </a:r>
           </a:p>
         </p:txBody>
@@ -7891,8 +7265,8 @@
         </p:nvSpPr>
         <p:spPr>
           <a:xfrm>
-            <a:off x="5486400" y="1188720"/>
-            <a:ext cx="82296" cy="1234440"/>
+            <a:off x="5623560" y="1234440"/>
+            <a:ext cx="82296" cy="1325880"/>
           </a:xfrm>
           <a:prstGeom prst="rect">
             <a:avLst/>
@@ -7934,8 +7308,8 @@
         </p:nvSpPr>
         <p:spPr>
           <a:xfrm>
-            <a:off x="7909560" y="1188720"/>
-            <a:ext cx="2057400" cy="1234440"/>
+            <a:off x="8183879" y="1234440"/>
+            <a:ext cx="3337560" cy="1325880"/>
           </a:xfrm>
           <a:prstGeom prst="roundRect">
             <a:avLst/>
@@ -7976,7 +7350,7 @@
               </a:defRPr>
             </a:pPr>
             <a:r>
-              <a:t>Recalculate tax</a:t>
+              <a:t>Still affects thresholds</a:t>
             </a:r>
           </a:p>
           <a:p>
@@ -7992,7 +7366,23 @@
               </a:defRPr>
             </a:pPr>
             <a:r>
-              <a:t>Tax includes LTCG, deductions, NIIT, FTC</a:t>
+              <a:t>Included in Social Security provisional income</a:t>
+            </a:r>
+          </a:p>
+          <a:p>
+            <a:pPr>
+              <a:spcBef>
+                <a:spcPts val="300"/>
+              </a:spcBef>
+              <a:defRPr sz="1100">
+                <a:solidFill>
+                  <a:srgbClr val="232D37"/>
+                </a:solidFill>
+                <a:latin typeface="Aptos"/>
+              </a:defRPr>
+            </a:pPr>
+            <a:r>
+              <a:t>Added to MAGI for two-year IRMAA look-back</a:t>
             </a:r>
           </a:p>
         </p:txBody>
@@ -8005,8 +7395,8 @@
         </p:nvSpPr>
         <p:spPr>
           <a:xfrm>
-            <a:off x="7909560" y="1188720"/>
-            <a:ext cx="82296" cy="1234440"/>
+            <a:off x="8183879" y="1234440"/>
+            <a:ext cx="82296" cy="1325880"/>
           </a:xfrm>
           <a:prstGeom prst="rect">
             <a:avLst/>
@@ -8040,151 +7430,21 @@
           </a:p>
         </p:txBody>
       </p:sp>
-      <p:sp>
-        <p:nvSpPr>
-          <p:cNvPr id="12" name="Rounded Rectangle 11"/>
-          <p:cNvSpPr/>
-          <p:nvPr/>
-        </p:nvSpPr>
-        <p:spPr>
-          <a:xfrm>
-            <a:off x="10332720" y="1188720"/>
-            <a:ext cx="1234440" cy="1234440"/>
-          </a:xfrm>
-          <a:prstGeom prst="roundRect">
-            <a:avLst/>
-          </a:prstGeom>
-          <a:solidFill>
-            <a:srgbClr val="F8FAFC"/>
-          </a:solidFill>
-          <a:ln w="13970">
-            <a:solidFill>
-              <a:srgbClr val="0F2647"/>
-            </a:solidFill>
-          </a:ln>
-        </p:spPr>
-        <p:style>
-          <a:lnRef idx="1">
-            <a:schemeClr val="accent1"/>
-          </a:lnRef>
-          <a:fillRef idx="3">
-            <a:schemeClr val="accent1"/>
-          </a:fillRef>
-          <a:effectRef idx="2">
-            <a:schemeClr val="accent1"/>
-          </a:effectRef>
-          <a:fontRef idx="minor">
-            <a:schemeClr val="lt1"/>
-          </a:fontRef>
-        </p:style>
-        <p:txBody>
-          <a:bodyPr rtlCol="0" anchor="ctr" lIns="182880" rIns="100584" tIns="91440"/>
-          <a:lstStyle/>
-          <a:p>
-            <a:pPr algn="ctr">
-              <a:defRPr sz="1400" b="1">
-                <a:solidFill>
-                  <a:srgbClr val="232D37"/>
-                </a:solidFill>
-                <a:latin typeface="Aptos Display"/>
-              </a:defRPr>
-            </a:pPr>
-            <a:r>
-              <a:t>Converge</a:t>
-            </a:r>
-          </a:p>
-          <a:p>
-            <a:pPr>
-              <a:spcBef>
-                <a:spcPts val="300"/>
-              </a:spcBef>
-              <a:defRPr sz="1000">
-                <a:solidFill>
-                  <a:srgbClr val="232D37"/>
-                </a:solidFill>
-                <a:latin typeface="Aptos"/>
-              </a:defRPr>
-            </a:pPr>
-            <a:r>
-              <a:t>Tolerance 0.005</a:t>
-            </a:r>
-          </a:p>
-          <a:p>
-            <a:pPr>
-              <a:spcBef>
-                <a:spcPts val="300"/>
-              </a:spcBef>
-              <a:defRPr sz="1000">
-                <a:solidFill>
-                  <a:srgbClr val="232D37"/>
-                </a:solidFill>
-                <a:latin typeface="Aptos"/>
-              </a:defRPr>
-            </a:pPr>
-            <a:r>
-              <a:t>≤30 rounds</a:t>
-            </a:r>
-          </a:p>
-        </p:txBody>
-      </p:sp>
-      <p:sp>
-        <p:nvSpPr>
-          <p:cNvPr id="13" name="Rectangle 12"/>
-          <p:cNvSpPr/>
-          <p:nvPr/>
-        </p:nvSpPr>
-        <p:spPr>
-          <a:xfrm>
-            <a:off x="10332720" y="1188720"/>
-            <a:ext cx="82296" cy="1234440"/>
-          </a:xfrm>
-          <a:prstGeom prst="rect">
-            <a:avLst/>
-          </a:prstGeom>
-          <a:solidFill>
-            <a:srgbClr val="0F2647"/>
-          </a:solidFill>
-          <a:ln>
-            <a:noFill/>
-          </a:ln>
-        </p:spPr>
-        <p:style>
-          <a:lnRef idx="1">
-            <a:schemeClr val="accent1"/>
-          </a:lnRef>
-          <a:fillRef idx="3">
-            <a:schemeClr val="accent1"/>
-          </a:fillRef>
-          <a:effectRef idx="2">
-            <a:schemeClr val="accent1"/>
-          </a:effectRef>
-          <a:fontRef idx="minor">
-            <a:schemeClr val="lt1"/>
-          </a:fontRef>
-        </p:style>
-        <p:txBody>
-          <a:bodyPr rtlCol="0" anchor="ctr"/>
-          <a:lstStyle/>
-          <a:p>
-            <a:pPr algn="ctr"/>
-          </a:p>
-        </p:txBody>
-      </p:sp>
       <p:cxnSp>
         <p:nvCxnSpPr>
-          <p:cNvPr id="14" name="Connector 13"/>
+          <p:cNvPr id="12" name="Connector 11"/>
           <p:cNvCxnSpPr/>
           <p:nvPr/>
         </p:nvCxnSpPr>
         <p:spPr>
           <a:xfrm>
-            <a:off x="2743200" y="1810512"/>
-            <a:ext cx="228600" cy="0"/>
+            <a:off x="2788920" y="1901952"/>
+            <a:ext cx="201168" cy="0"/>
           </a:xfrm>
           <a:prstGeom prst="line">
             <a:avLst/>
           </a:prstGeom>
-          <a:ln w="21590">
+          <a:ln w="22860">
             <a:solidFill>
               <a:srgbClr val="266EB2"/>
             </a:solidFill>
@@ -8207,19 +7467,19 @@
       </p:cxnSp>
       <p:cxnSp>
         <p:nvCxnSpPr>
-          <p:cNvPr id="15" name="Connector 14"/>
+          <p:cNvPr id="13" name="Connector 12"/>
           <p:cNvCxnSpPr/>
           <p:nvPr/>
         </p:nvCxnSpPr>
         <p:spPr>
           <a:xfrm>
-            <a:off x="5166360" y="1810512"/>
-            <a:ext cx="228600" cy="0"/>
+            <a:off x="5349240" y="1901952"/>
+            <a:ext cx="201167" cy="0"/>
           </a:xfrm>
           <a:prstGeom prst="line">
             <a:avLst/>
           </a:prstGeom>
-          <a:ln w="21590">
+          <a:ln w="22860">
             <a:solidFill>
               <a:srgbClr val="429761"/>
             </a:solidFill>
@@ -8242,19 +7502,19 @@
       </p:cxnSp>
       <p:cxnSp>
         <p:nvCxnSpPr>
-          <p:cNvPr id="16" name="Connector 15"/>
+          <p:cNvPr id="14" name="Connector 13"/>
           <p:cNvCxnSpPr/>
           <p:nvPr/>
         </p:nvCxnSpPr>
         <p:spPr>
           <a:xfrm>
-            <a:off x="7589520" y="1810512"/>
-            <a:ext cx="228600" cy="0"/>
+            <a:off x="7909560" y="1901952"/>
+            <a:ext cx="201168" cy="0"/>
           </a:xfrm>
           <a:prstGeom prst="line">
             <a:avLst/>
           </a:prstGeom>
-          <a:ln w="21590">
+          <a:ln w="22860">
             <a:solidFill>
               <a:srgbClr val="E5892A"/>
             </a:solidFill>
@@ -8275,51 +7535,16 @@
           </a:fontRef>
         </p:style>
       </p:cxnSp>
-      <p:cxnSp>
-        <p:nvCxnSpPr>
-          <p:cNvPr id="17" name="Connector 16"/>
-          <p:cNvCxnSpPr/>
-          <p:nvPr/>
-        </p:nvCxnSpPr>
-        <p:spPr>
-          <a:xfrm>
-            <a:off x="10012680" y="1810512"/>
-            <a:ext cx="228600" cy="0"/>
-          </a:xfrm>
-          <a:prstGeom prst="line">
-            <a:avLst/>
-          </a:prstGeom>
-          <a:ln w="21590">
-            <a:solidFill>
-              <a:srgbClr val="7852B0"/>
-            </a:solidFill>
-          </a:ln>
-        </p:spPr>
-        <p:style>
-          <a:lnRef idx="2">
-            <a:schemeClr val="accent1"/>
-          </a:lnRef>
-          <a:fillRef idx="0">
-            <a:schemeClr val="accent1"/>
-          </a:fillRef>
-          <a:effectRef idx="1">
-            <a:schemeClr val="accent1"/>
-          </a:effectRef>
-          <a:fontRef idx="minor">
-            <a:schemeClr val="tx1"/>
-          </a:fontRef>
-        </p:style>
-      </p:cxnSp>
-      <p:sp>
-        <p:nvSpPr>
-          <p:cNvPr id="18" name="Rounded Rectangle 17"/>
+      <p:sp>
+        <p:nvSpPr>
+          <p:cNvPr id="15" name="Rounded Rectangle 14"/>
           <p:cNvSpPr/>
           <p:nvPr/>
         </p:nvSpPr>
         <p:spPr>
           <a:xfrm>
-            <a:off x="960120" y="3429000"/>
-            <a:ext cx="4800600" cy="1463040"/>
+            <a:off x="1143000" y="3703320"/>
+            <a:ext cx="9875520" cy="1234440"/>
           </a:xfrm>
           <a:prstGeom prst="roundRect">
             <a:avLst/>
@@ -8329,7 +7554,7 @@
           </a:solidFill>
           <a:ln w="13970">
             <a:solidFill>
-              <a:srgbClr val="168F8D"/>
+              <a:srgbClr val="0F2647"/>
             </a:solidFill>
           </a:ln>
         </p:spPr>
@@ -8360,7 +7585,7 @@
               </a:defRPr>
             </a:pPr>
             <a:r>
-              <a:t>Convergence contract</a:t>
+              <a:t>Projection contract</a:t>
             </a:r>
           </a:p>
           <a:p>
@@ -8376,43 +7601,27 @@
               </a:defRPr>
             </a:pPr>
             <a:r>
-              <a:t>Tₙ₊₁ = taxOn(runWaterfall(Tₙ).ltcgGross).totalTax</a:t>
-            </a:r>
-          </a:p>
-          <a:p>
-            <a:pPr>
-              <a:spcBef>
-                <a:spcPts val="300"/>
-              </a:spcBef>
-              <a:defRPr sz="1200">
-                <a:solidFill>
-                  <a:srgbClr val="232D37"/>
-                </a:solidFill>
-                <a:latin typeface="Aptos"/>
-              </a:defRPr>
-            </a:pPr>
-            <a:r>
-              <a:t>Stop when the change is below TAX_TOL. The tax-to-new-tax map is a contraction, typically settling in 6–8 rounds.</a:t>
-            </a:r>
-          </a:p>
-        </p:txBody>
-      </p:sp>
-      <p:sp>
-        <p:nvSpPr>
-          <p:cNvPr id="19" name="Rectangle 18"/>
+              <a:t>Rows expose teIncome, teByPerson, and magi. Each portfolio row carries its own taxExempt amount; all downstream charts, exports, and chat read those fields rather than recreating treatment.</a:t>
+            </a:r>
+          </a:p>
+        </p:txBody>
+      </p:sp>
+      <p:sp>
+        <p:nvSpPr>
+          <p:cNvPr id="16" name="Rectangle 15"/>
           <p:cNvSpPr/>
           <p:nvPr/>
         </p:nvSpPr>
         <p:spPr>
           <a:xfrm>
-            <a:off x="960120" y="3429000"/>
-            <a:ext cx="82296" cy="1463040"/>
+            <a:off x="1143000" y="3703320"/>
+            <a:ext cx="82296" cy="1234440"/>
           </a:xfrm>
           <a:prstGeom prst="rect">
             <a:avLst/>
           </a:prstGeom>
           <a:solidFill>
-            <a:srgbClr val="168F8D"/>
+            <a:srgbClr val="0F2647"/>
           </a:solidFill>
           <a:ln>
             <a:noFill/>
@@ -8442,25 +7651,23 @@
       </p:sp>
       <p:sp>
         <p:nvSpPr>
-          <p:cNvPr id="20" name="Rounded Rectangle 19"/>
+          <p:cNvPr id="17" name="Rectangle 16"/>
           <p:cNvSpPr/>
           <p:nvPr/>
         </p:nvSpPr>
         <p:spPr>
           <a:xfrm>
-            <a:off x="6355080" y="3429000"/>
-            <a:ext cx="4800600" cy="1463040"/>
-          </a:xfrm>
-          <a:prstGeom prst="roundRect">
-            <a:avLst/>
-          </a:prstGeom>
-          <a:solidFill>
-            <a:srgbClr val="F8FAFC"/>
-          </a:solidFill>
-          <a:ln w="13970">
-            <a:solidFill>
-              <a:srgbClr val="0F2647"/>
-            </a:solidFill>
+            <a:off x="502920" y="6473952"/>
+            <a:ext cx="11183112" cy="13716"/>
+          </a:xfrm>
+          <a:prstGeom prst="rect">
+            <a:avLst/>
+          </a:prstGeom>
+          <a:solidFill>
+            <a:srgbClr val="D2DCE5"/>
+          </a:solidFill>
+          <a:ln>
+            <a:noFill/>
           </a:ln>
         </p:spPr>
         <p:style>
@@ -8478,75 +7685,6 @@
           </a:fontRef>
         </p:style>
         <p:txBody>
-          <a:bodyPr rtlCol="0" anchor="ctr" lIns="182880" rIns="100584" tIns="91440"/>
-          <a:lstStyle/>
-          <a:p>
-            <a:pPr algn="ctr">
-              <a:defRPr sz="1600" b="1">
-                <a:solidFill>
-                  <a:srgbClr val="232D37"/>
-                </a:solidFill>
-                <a:latin typeface="Aptos Display"/>
-              </a:defRPr>
-            </a:pPr>
-            <a:r>
-              <a:t>Post-solve finalization</a:t>
-            </a:r>
-          </a:p>
-          <a:p>
-            <a:pPr>
-              <a:spcBef>
-                <a:spcPts val="300"/>
-              </a:spcBef>
-              <a:defRPr sz="1200">
-                <a:solidFill>
-                  <a:srgbClr val="232D37"/>
-                </a:solidFill>
-                <a:latin typeface="Aptos"/>
-              </a:defRPr>
-            </a:pPr>
-            <a:r>
-              <a:t>Draw down SCGL once. Compute SST and marginal rate from converged LTCG. Report taxIters and taxConverged on each row.</a:t>
-            </a:r>
-          </a:p>
-        </p:txBody>
-      </p:sp>
-      <p:sp>
-        <p:nvSpPr>
-          <p:cNvPr id="21" name="Rectangle 20"/>
-          <p:cNvSpPr/>
-          <p:nvPr/>
-        </p:nvSpPr>
-        <p:spPr>
-          <a:xfrm>
-            <a:off x="6355080" y="3429000"/>
-            <a:ext cx="82296" cy="1463040"/>
-          </a:xfrm>
-          <a:prstGeom prst="rect">
-            <a:avLst/>
-          </a:prstGeom>
-          <a:solidFill>
-            <a:srgbClr val="0F2647"/>
-          </a:solidFill>
-          <a:ln>
-            <a:noFill/>
-          </a:ln>
-        </p:spPr>
-        <p:style>
-          <a:lnRef idx="1">
-            <a:schemeClr val="accent1"/>
-          </a:lnRef>
-          <a:fillRef idx="3">
-            <a:schemeClr val="accent1"/>
-          </a:fillRef>
-          <a:effectRef idx="2">
-            <a:schemeClr val="accent1"/>
-          </a:effectRef>
-          <a:fontRef idx="minor">
-            <a:schemeClr val="lt1"/>
-          </a:fontRef>
-        </p:style>
-        <p:txBody>
           <a:bodyPr rtlCol="0" anchor="ctr"/>
           <a:lstStyle/>
           <a:p>
@@ -8556,50 +7694,7 @@
       </p:sp>
       <p:sp>
         <p:nvSpPr>
-          <p:cNvPr id="22" name="Rectangle 21"/>
-          <p:cNvSpPr/>
-          <p:nvPr/>
-        </p:nvSpPr>
-        <p:spPr>
-          <a:xfrm>
-            <a:off x="502920" y="6473952"/>
-            <a:ext cx="11183112" cy="13716"/>
-          </a:xfrm>
-          <a:prstGeom prst="rect">
-            <a:avLst/>
-          </a:prstGeom>
-          <a:solidFill>
-            <a:srgbClr val="D2DCE5"/>
-          </a:solidFill>
-          <a:ln>
-            <a:noFill/>
-          </a:ln>
-        </p:spPr>
-        <p:style>
-          <a:lnRef idx="1">
-            <a:schemeClr val="accent1"/>
-          </a:lnRef>
-          <a:fillRef idx="3">
-            <a:schemeClr val="accent1"/>
-          </a:fillRef>
-          <a:effectRef idx="2">
-            <a:schemeClr val="accent1"/>
-          </a:effectRef>
-          <a:fontRef idx="minor">
-            <a:schemeClr val="lt1"/>
-          </a:fontRef>
-        </p:style>
-        <p:txBody>
-          <a:bodyPr rtlCol="0" anchor="ctr"/>
-          <a:lstStyle/>
-          <a:p>
-            <a:pPr algn="ctr"/>
-          </a:p>
-        </p:txBody>
-      </p:sp>
-      <p:sp>
-        <p:nvSpPr>
-          <p:cNvPr id="23" name="TextBox 22"/>
+          <p:cNvPr id="18" name="TextBox 17"/>
           <p:cNvSpPr txBox="1"/>
           <p:nvPr/>
         </p:nvSpPr>
@@ -8628,7 +7723,7 @@
               </a:defRPr>
             </a:pPr>
             <a:r>
-              <a:t>Retirement Income Planner • Architecture overview • Household-expense, LTC, and plan-chat update</a:t>
+              <a:t>Retirement Income Planner • Architecture overview • Rental, tax-exempt income, and legacy-value update</a:t>
             </a:r>
           </a:p>
         </p:txBody>
@@ -8690,7 +7785,7 @@
               </a:defRPr>
             </a:pPr>
             <a:r>
-              <a:t>Long Term Care changes expenses and deductions</a:t>
+              <a:t>Enhanced senior deduction sits on top of other deductions</a:t>
             </a:r>
           </a:p>
         </p:txBody>
@@ -8726,7 +7821,7 @@
               </a:defRPr>
             </a:pPr>
             <a:r>
-              <a:t>LTC is modeled as a household expense and as the planner’s only modeled itemized deduction.</a:t>
+              <a:t>The compute layer adds a time-limited, income-phased deduction without changing AGI.</a:t>
             </a:r>
           </a:p>
         </p:txBody>
@@ -8781,7 +7876,7 @@
               </a:defRPr>
             </a:pPr>
             <a:r>
-              <a:t>LTC activation</a:t>
+              <a:t>Eligibility</a:t>
             </a:r>
           </a:p>
           <a:p>
@@ -8797,7 +7892,7 @@
               </a:defRPr>
             </a:pPr>
             <a:r>
-              <a:t>Each person has a start age and annual cost.</a:t>
+              <a:t>Tax years 2025–2028 only.</a:t>
             </a:r>
           </a:p>
           <a:p>
@@ -8813,7 +7908,7 @@
               </a:defRPr>
             </a:pPr>
             <a:r>
-              <a:t>Starts only if the age precedes that person’s passing age.</a:t>
+              <a:t>Each living person age 65 by year-end may qualify.</a:t>
             </a:r>
           </a:p>
           <a:p>
@@ -8829,7 +7924,105 @@
               </a:defRPr>
             </a:pPr>
             <a:r>
-              <a:t>Once started, status remains; cost stops on death.</a:t>
+              <a:t>Eligibility count is stored as seniorEligible.</a:t>
+            </a:r>
+          </a:p>
+        </p:txBody>
+      </p:sp>
+      <p:sp>
+        <p:nvSpPr>
+          <p:cNvPr id="5" name="Rectangle 4"/>
+          <p:cNvSpPr/>
+          <p:nvPr/>
+        </p:nvSpPr>
+        <p:spPr>
+          <a:xfrm>
+            <a:off x="594360" y="1188720"/>
+            <a:ext cx="82296" cy="4526280"/>
+          </a:xfrm>
+          <a:prstGeom prst="rect">
+            <a:avLst/>
+          </a:prstGeom>
+          <a:solidFill>
+            <a:srgbClr val="266EB2"/>
+          </a:solidFill>
+          <a:ln>
+            <a:noFill/>
+          </a:ln>
+        </p:spPr>
+        <p:style>
+          <a:lnRef idx="1">
+            <a:schemeClr val="accent1"/>
+          </a:lnRef>
+          <a:fillRef idx="3">
+            <a:schemeClr val="accent1"/>
+          </a:fillRef>
+          <a:effectRef idx="2">
+            <a:schemeClr val="accent1"/>
+          </a:effectRef>
+          <a:fontRef idx="minor">
+            <a:schemeClr val="lt1"/>
+          </a:fontRef>
+        </p:style>
+        <p:txBody>
+          <a:bodyPr rtlCol="0" anchor="ctr"/>
+          <a:lstStyle/>
+          <a:p>
+            <a:pPr algn="ctr"/>
+          </a:p>
+        </p:txBody>
+      </p:sp>
+      <p:sp>
+        <p:nvSpPr>
+          <p:cNvPr id="6" name="Rounded Rectangle 5"/>
+          <p:cNvSpPr/>
+          <p:nvPr/>
+        </p:nvSpPr>
+        <p:spPr>
+          <a:xfrm>
+            <a:off x="4389120" y="1188720"/>
+            <a:ext cx="3429000" cy="4526280"/>
+          </a:xfrm>
+          <a:prstGeom prst="roundRect">
+            <a:avLst/>
+          </a:prstGeom>
+          <a:solidFill>
+            <a:srgbClr val="FFF6E8"/>
+          </a:solidFill>
+          <a:ln w="13970">
+            <a:solidFill>
+              <a:srgbClr val="E5892A"/>
+            </a:solidFill>
+          </a:ln>
+        </p:spPr>
+        <p:style>
+          <a:lnRef idx="1">
+            <a:schemeClr val="accent1"/>
+          </a:lnRef>
+          <a:fillRef idx="3">
+            <a:schemeClr val="accent1"/>
+          </a:fillRef>
+          <a:effectRef idx="2">
+            <a:schemeClr val="accent1"/>
+          </a:effectRef>
+          <a:fontRef idx="minor">
+            <a:schemeClr val="lt1"/>
+          </a:fontRef>
+        </p:style>
+        <p:txBody>
+          <a:bodyPr rtlCol="0" anchor="ctr" lIns="182880" rIns="100584" tIns="91440"/>
+          <a:lstStyle/>
+          <a:p>
+            <a:pPr algn="ctr">
+              <a:defRPr sz="1700" b="1">
+                <a:solidFill>
+                  <a:srgbClr val="232D37"/>
+                </a:solidFill>
+                <a:latin typeface="Aptos Display"/>
+              </a:defRPr>
+            </a:pPr>
+            <a:r>
+              <a:t>Calculation</a:t>
             </a:r>
           </a:p>
           <a:p>
@@ -8845,27 +8038,59 @@
               </a:defRPr>
             </a:pPr>
             <a:r>
-              <a:t>One person in a single household.</a:t>
-            </a:r>
-          </a:p>
-        </p:txBody>
-      </p:sp>
-      <p:sp>
-        <p:nvSpPr>
-          <p:cNvPr id="5" name="Rectangle 4"/>
+              <a:t>Per eligible person: max(0, 6,000 − 6% × excess MAGI).</a:t>
+            </a:r>
+          </a:p>
+          <a:p>
+            <a:pPr>
+              <a:spcBef>
+                <a:spcPts val="300"/>
+              </a:spcBef>
+              <a:defRPr sz="1200">
+                <a:solidFill>
+                  <a:srgbClr val="232D37"/>
+                </a:solidFill>
+                <a:latin typeface="Aptos"/>
+              </a:defRPr>
+            </a:pPr>
+            <a:r>
+              <a:t>Single/MFJ thresholds are un-indexed but deflated into today’s dollars.</a:t>
+            </a:r>
+          </a:p>
+          <a:p>
+            <a:pPr>
+              <a:spcBef>
+                <a:spcPts val="300"/>
+              </a:spcBef>
+              <a:defRPr sz="1200">
+                <a:solidFill>
+                  <a:srgbClr val="232D37"/>
+                </a:solidFill>
+                <a:latin typeface="Aptos"/>
+              </a:defRPr>
+            </a:pPr>
+            <a:r>
+              <a:t>MAGI approximates AGI for this calculation.</a:t>
+            </a:r>
+          </a:p>
+        </p:txBody>
+      </p:sp>
+      <p:sp>
+        <p:nvSpPr>
+          <p:cNvPr id="7" name="Rectangle 6"/>
           <p:cNvSpPr/>
           <p:nvPr/>
         </p:nvSpPr>
         <p:spPr>
           <a:xfrm>
-            <a:off x="594360" y="1188720"/>
+            <a:off x="4389120" y="1188720"/>
             <a:ext cx="82296" cy="4526280"/>
           </a:xfrm>
           <a:prstGeom prst="rect">
             <a:avLst/>
           </a:prstGeom>
           <a:solidFill>
-            <a:srgbClr val="266EB2"/>
+            <a:srgbClr val="E5892A"/>
           </a:solidFill>
           <a:ln>
             <a:noFill/>
@@ -8895,13 +8120,13 @@
       </p:sp>
       <p:sp>
         <p:nvSpPr>
-          <p:cNvPr id="6" name="Rounded Rectangle 5"/>
+          <p:cNvPr id="8" name="Rounded Rectangle 7"/>
           <p:cNvSpPr/>
           <p:nvPr/>
         </p:nvSpPr>
         <p:spPr>
           <a:xfrm>
-            <a:off x="4389120" y="1188720"/>
+            <a:off x="8183879" y="1188720"/>
             <a:ext cx="3429000" cy="4526280"/>
           </a:xfrm>
           <a:prstGeom prst="roundRect">
@@ -8943,7 +8168,7 @@
               </a:defRPr>
             </a:pPr>
             <a:r>
-              <a:t>Living-expense switch</a:t>
+              <a:t>Tax integration</a:t>
             </a:r>
           </a:p>
           <a:p>
@@ -8959,7 +8184,7 @@
               </a:defRPr>
             </a:pPr>
             <a:r>
-              <a:t>Before LTC: state.living</a:t>
+              <a:t>Applied after the larger of standard or LTC itemized deduction.</a:t>
             </a:r>
           </a:p>
           <a:p>
@@ -8975,7 +8200,7 @@
               </a:defRPr>
             </a:pPr>
             <a:r>
-              <a:t>After 1st LTC: ltc.living1 or living</a:t>
+              <a:t>Does not reduce AGI.</a:t>
             </a:r>
           </a:p>
           <a:p>
@@ -8991,7 +8216,7 @@
               </a:defRPr>
             </a:pPr>
             <a:r>
-              <a:t>After 2nd LTC: ltc.living2</a:t>
+              <a:t>Marginal/SST calculation includes its phase-out behavior.</a:t>
             </a:r>
           </a:p>
           <a:p>
@@ -9007,20 +8232,20 @@
               </a:defRPr>
             </a:pPr>
             <a:r>
-              <a:t>All figures are today’s dollars and flat in real terms.</a:t>
-            </a:r>
-          </a:p>
-        </p:txBody>
-      </p:sp>
-      <p:sp>
-        <p:nvSpPr>
-          <p:cNvPr id="7" name="Rectangle 6"/>
+              <a:t>Row reports seniorDeduction.</a:t>
+            </a:r>
+          </a:p>
+        </p:txBody>
+      </p:sp>
+      <p:sp>
+        <p:nvSpPr>
+          <p:cNvPr id="9" name="Rectangle 8"/>
           <p:cNvSpPr/>
           <p:nvPr/>
         </p:nvSpPr>
         <p:spPr>
           <a:xfrm>
-            <a:off x="4389120" y="1188720"/>
+            <a:off x="8183879" y="1188720"/>
             <a:ext cx="82296" cy="4526280"/>
           </a:xfrm>
           <a:prstGeom prst="rect">
@@ -9057,25 +8282,23 @@
       </p:sp>
       <p:sp>
         <p:nvSpPr>
-          <p:cNvPr id="8" name="Rounded Rectangle 7"/>
+          <p:cNvPr id="10" name="Rectangle 9"/>
           <p:cNvSpPr/>
           <p:nvPr/>
         </p:nvSpPr>
         <p:spPr>
           <a:xfrm>
-            <a:off x="8183879" y="1188720"/>
-            <a:ext cx="3429000" cy="4526280"/>
-          </a:xfrm>
-          <a:prstGeom prst="roundRect">
-            <a:avLst/>
-          </a:prstGeom>
-          <a:solidFill>
-            <a:srgbClr val="FFF6E8"/>
-          </a:solidFill>
-          <a:ln w="13970">
-            <a:solidFill>
-              <a:srgbClr val="E5892A"/>
-            </a:solidFill>
+            <a:off x="502920" y="6473952"/>
+            <a:ext cx="11183112" cy="13716"/>
+          </a:xfrm>
+          <a:prstGeom prst="rect">
+            <a:avLst/>
+          </a:prstGeom>
+          <a:solidFill>
+            <a:srgbClr val="D2DCE5"/>
+          </a:solidFill>
+          <a:ln>
+            <a:noFill/>
           </a:ln>
         </p:spPr>
         <p:style>
@@ -9093,150 +8316,6 @@
           </a:fontRef>
         </p:style>
         <p:txBody>
-          <a:bodyPr rtlCol="0" anchor="ctr" lIns="182880" rIns="100584" tIns="91440"/>
-          <a:lstStyle/>
-          <a:p>
-            <a:pPr algn="ctr">
-              <a:defRPr sz="1700" b="1">
-                <a:solidFill>
-                  <a:srgbClr val="232D37"/>
-                </a:solidFill>
-                <a:latin typeface="Aptos Display"/>
-              </a:defRPr>
-            </a:pPr>
-            <a:r>
-              <a:t>Deduction logic</a:t>
-            </a:r>
-          </a:p>
-          <a:p>
-            <a:pPr>
-              <a:spcBef>
-                <a:spcPts val="300"/>
-              </a:spcBef>
-              <a:defRPr sz="1200">
-                <a:solidFill>
-                  <a:srgbClr val="232D37"/>
-                </a:solidFill>
-                <a:latin typeface="Aptos"/>
-              </a:defRPr>
-            </a:pPr>
-            <a:r>
-              <a:t>Itemized = max(0, LTC cost − 7.5% × AGI)</a:t>
-            </a:r>
-          </a:p>
-          <a:p>
-            <a:pPr>
-              <a:spcBef>
-                <a:spcPts val="300"/>
-              </a:spcBef>
-              <a:defRPr sz="1200">
-                <a:solidFill>
-                  <a:srgbClr val="232D37"/>
-                </a:solidFill>
-                <a:latin typeface="Aptos"/>
-              </a:defRPr>
-            </a:pPr>
-            <a:r>
-              <a:t>Use the larger of itemized and standard deduction.</a:t>
-            </a:r>
-          </a:p>
-          <a:p>
-            <a:pPr>
-              <a:spcBef>
-                <a:spcPts val="300"/>
-              </a:spcBef>
-              <a:defRPr sz="1200">
-                <a:solidFill>
-                  <a:srgbClr val="232D37"/>
-                </a:solidFill>
-                <a:latin typeface="Aptos"/>
-              </a:defRPr>
-            </a:pPr>
-            <a:r>
-              <a:t>Because AGI includes LTCG, deduction selection lives inside the fixed-point tax calculation.</a:t>
-            </a:r>
-          </a:p>
-        </p:txBody>
-      </p:sp>
-      <p:sp>
-        <p:nvSpPr>
-          <p:cNvPr id="9" name="Rectangle 8"/>
-          <p:cNvSpPr/>
-          <p:nvPr/>
-        </p:nvSpPr>
-        <p:spPr>
-          <a:xfrm>
-            <a:off x="8183879" y="1188720"/>
-            <a:ext cx="82296" cy="4526280"/>
-          </a:xfrm>
-          <a:prstGeom prst="rect">
-            <a:avLst/>
-          </a:prstGeom>
-          <a:solidFill>
-            <a:srgbClr val="E5892A"/>
-          </a:solidFill>
-          <a:ln>
-            <a:noFill/>
-          </a:ln>
-        </p:spPr>
-        <p:style>
-          <a:lnRef idx="1">
-            <a:schemeClr val="accent1"/>
-          </a:lnRef>
-          <a:fillRef idx="3">
-            <a:schemeClr val="accent1"/>
-          </a:fillRef>
-          <a:effectRef idx="2">
-            <a:schemeClr val="accent1"/>
-          </a:effectRef>
-          <a:fontRef idx="minor">
-            <a:schemeClr val="lt1"/>
-          </a:fontRef>
-        </p:style>
-        <p:txBody>
-          <a:bodyPr rtlCol="0" anchor="ctr"/>
-          <a:lstStyle/>
-          <a:p>
-            <a:pPr algn="ctr"/>
-          </a:p>
-        </p:txBody>
-      </p:sp>
-      <p:sp>
-        <p:nvSpPr>
-          <p:cNvPr id="10" name="Rectangle 9"/>
-          <p:cNvSpPr/>
-          <p:nvPr/>
-        </p:nvSpPr>
-        <p:spPr>
-          <a:xfrm>
-            <a:off x="502920" y="6473952"/>
-            <a:ext cx="11183112" cy="13716"/>
-          </a:xfrm>
-          <a:prstGeom prst="rect">
-            <a:avLst/>
-          </a:prstGeom>
-          <a:solidFill>
-            <a:srgbClr val="D2DCE5"/>
-          </a:solidFill>
-          <a:ln>
-            <a:noFill/>
-          </a:ln>
-        </p:spPr>
-        <p:style>
-          <a:lnRef idx="1">
-            <a:schemeClr val="accent1"/>
-          </a:lnRef>
-          <a:fillRef idx="3">
-            <a:schemeClr val="accent1"/>
-          </a:fillRef>
-          <a:effectRef idx="2">
-            <a:schemeClr val="accent1"/>
-          </a:effectRef>
-          <a:fontRef idx="minor">
-            <a:schemeClr val="lt1"/>
-          </a:fontRef>
-        </p:style>
-        <p:txBody>
           <a:bodyPr rtlCol="0" anchor="ctr"/>
           <a:lstStyle/>
           <a:p>
@@ -9275,7 +8354,7 @@
               </a:defRPr>
             </a:pPr>
             <a:r>
-              <a:t>Retirement Income Planner • Architecture overview • Household-expense, LTC, and plan-chat update</a:t>
+              <a:t>Retirement Income Planner • Architecture overview • Rental, tax-exempt income, and legacy-value update</a:t>
             </a:r>
           </a:p>
         </p:txBody>
@@ -9337,7 +8416,7 @@
               </a:defRPr>
             </a:pPr>
             <a:r>
-              <a:t>IRMAA and AUM become household-level expenses</a:t>
+              <a:t>Excess household income can be reinvested</a:t>
             </a:r>
           </a:p>
         </p:txBody>
@@ -9373,7 +8452,7 @@
               </a:defRPr>
             </a:pPr>
             <a:r>
-              <a:t>Both charges join the shared pool, but their bases and timing are modeled distinctly.</a:t>
+              <a:t>Reinvestment is optional, portfolio-specific, and happens only after the annual tax-and-expense solve converges.</a:t>
             </a:r>
           </a:p>
         </p:txBody>
@@ -9386,8 +8465,268 @@
         </p:nvSpPr>
         <p:spPr>
           <a:xfrm>
-            <a:off x="640080" y="1234440"/>
-            <a:ext cx="3291840" cy="4389120"/>
+            <a:off x="502920" y="1234440"/>
+            <a:ext cx="2331720" cy="1371600"/>
+          </a:xfrm>
+          <a:prstGeom prst="roundRect">
+            <a:avLst/>
+          </a:prstGeom>
+          <a:solidFill>
+            <a:srgbClr val="E9F4FF"/>
+          </a:solidFill>
+          <a:ln w="13970">
+            <a:solidFill>
+              <a:srgbClr val="266EB2"/>
+            </a:solidFill>
+          </a:ln>
+        </p:spPr>
+        <p:style>
+          <a:lnRef idx="1">
+            <a:schemeClr val="accent1"/>
+          </a:lnRef>
+          <a:fillRef idx="3">
+            <a:schemeClr val="accent1"/>
+          </a:fillRef>
+          <a:effectRef idx="2">
+            <a:schemeClr val="accent1"/>
+          </a:effectRef>
+          <a:fontRef idx="minor">
+            <a:schemeClr val="lt1"/>
+          </a:fontRef>
+        </p:style>
+        <p:txBody>
+          <a:bodyPr rtlCol="0" anchor="ctr" lIns="182880" rIns="100584" tIns="91440"/>
+          <a:lstStyle/>
+          <a:p>
+            <a:pPr algn="ctr">
+              <a:defRPr sz="1600" b="1">
+                <a:solidFill>
+                  <a:srgbClr val="232D37"/>
+                </a:solidFill>
+                <a:latin typeface="Aptos Display"/>
+              </a:defRPr>
+            </a:pPr>
+            <a:r>
+              <a:t>Condition</a:t>
+            </a:r>
+          </a:p>
+          <a:p>
+            <a:pPr>
+              <a:spcBef>
+                <a:spcPts val="300"/>
+              </a:spcBef>
+              <a:defRPr sz="1100">
+                <a:solidFill>
+                  <a:srgbClr val="232D37"/>
+                </a:solidFill>
+                <a:latin typeface="Aptos"/>
+              </a:defRPr>
+            </a:pPr>
+            <a:r>
+              <a:t>excessIncome = max(0, cashIncome − expTotal)</a:t>
+            </a:r>
+          </a:p>
+          <a:p>
+            <a:pPr>
+              <a:spcBef>
+                <a:spcPts val="300"/>
+              </a:spcBef>
+              <a:defRPr sz="1100">
+                <a:solidFill>
+                  <a:srgbClr val="232D37"/>
+                </a:solidFill>
+                <a:latin typeface="Aptos"/>
+              </a:defRPr>
+            </a:pPr>
+            <a:r>
+              <a:t>Only when cash income already covered every expense</a:t>
+            </a:r>
+          </a:p>
+        </p:txBody>
+      </p:sp>
+      <p:sp>
+        <p:nvSpPr>
+          <p:cNvPr id="5" name="Rectangle 4"/>
+          <p:cNvSpPr/>
+          <p:nvPr/>
+        </p:nvSpPr>
+        <p:spPr>
+          <a:xfrm>
+            <a:off x="502920" y="1234440"/>
+            <a:ext cx="82296" cy="1371600"/>
+          </a:xfrm>
+          <a:prstGeom prst="rect">
+            <a:avLst/>
+          </a:prstGeom>
+          <a:solidFill>
+            <a:srgbClr val="266EB2"/>
+          </a:solidFill>
+          <a:ln>
+            <a:noFill/>
+          </a:ln>
+        </p:spPr>
+        <p:style>
+          <a:lnRef idx="1">
+            <a:schemeClr val="accent1"/>
+          </a:lnRef>
+          <a:fillRef idx="3">
+            <a:schemeClr val="accent1"/>
+          </a:fillRef>
+          <a:effectRef idx="2">
+            <a:schemeClr val="accent1"/>
+          </a:effectRef>
+          <a:fontRef idx="minor">
+            <a:schemeClr val="lt1"/>
+          </a:fontRef>
+        </p:style>
+        <p:txBody>
+          <a:bodyPr rtlCol="0" anchor="ctr"/>
+          <a:lstStyle/>
+          <a:p>
+            <a:pPr algn="ctr"/>
+          </a:p>
+        </p:txBody>
+      </p:sp>
+      <p:sp>
+        <p:nvSpPr>
+          <p:cNvPr id="6" name="Rounded Rectangle 5"/>
+          <p:cNvSpPr/>
+          <p:nvPr/>
+        </p:nvSpPr>
+        <p:spPr>
+          <a:xfrm>
+            <a:off x="3246120" y="1234440"/>
+            <a:ext cx="2331720" cy="1371600"/>
+          </a:xfrm>
+          <a:prstGeom prst="roundRect">
+            <a:avLst/>
+          </a:prstGeom>
+          <a:solidFill>
+            <a:srgbClr val="EAF9F4"/>
+          </a:solidFill>
+          <a:ln w="13970">
+            <a:solidFill>
+              <a:srgbClr val="429761"/>
+            </a:solidFill>
+          </a:ln>
+        </p:spPr>
+        <p:style>
+          <a:lnRef idx="1">
+            <a:schemeClr val="accent1"/>
+          </a:lnRef>
+          <a:fillRef idx="3">
+            <a:schemeClr val="accent1"/>
+          </a:fillRef>
+          <a:effectRef idx="2">
+            <a:schemeClr val="accent1"/>
+          </a:effectRef>
+          <a:fontRef idx="minor">
+            <a:schemeClr val="lt1"/>
+          </a:fontRef>
+        </p:style>
+        <p:txBody>
+          <a:bodyPr rtlCol="0" anchor="ctr" lIns="182880" rIns="100584" tIns="91440"/>
+          <a:lstStyle/>
+          <a:p>
+            <a:pPr algn="ctr">
+              <a:defRPr sz="1600" b="1">
+                <a:solidFill>
+                  <a:srgbClr val="232D37"/>
+                </a:solidFill>
+                <a:latin typeface="Aptos Display"/>
+              </a:defRPr>
+            </a:pPr>
+            <a:r>
+              <a:t>Eligible targets</a:t>
+            </a:r>
+          </a:p>
+          <a:p>
+            <a:pPr>
+              <a:spcBef>
+                <a:spcPts val="300"/>
+              </a:spcBef>
+              <a:defRPr sz="1100">
+                <a:solidFill>
+                  <a:srgbClr val="232D37"/>
+                </a:solidFill>
+                <a:latin typeface="Aptos"/>
+              </a:defRPr>
+            </a:pPr>
+            <a:r>
+              <a:t>Live, in-range brokerage portfolios with Reinvest excess income checked</a:t>
+            </a:r>
+          </a:p>
+          <a:p>
+            <a:pPr>
+              <a:spcBef>
+                <a:spcPts val="300"/>
+              </a:spcBef>
+              <a:defRPr sz="1100">
+                <a:solidFill>
+                  <a:srgbClr val="232D37"/>
+                </a:solidFill>
+                <a:latin typeface="Aptos"/>
+              </a:defRPr>
+            </a:pPr>
+            <a:r>
+              <a:t>IDGT eligible if checked</a:t>
+            </a:r>
+          </a:p>
+        </p:txBody>
+      </p:sp>
+      <p:sp>
+        <p:nvSpPr>
+          <p:cNvPr id="7" name="Rectangle 6"/>
+          <p:cNvSpPr/>
+          <p:nvPr/>
+        </p:nvSpPr>
+        <p:spPr>
+          <a:xfrm>
+            <a:off x="3246120" y="1234440"/>
+            <a:ext cx="82296" cy="1371600"/>
+          </a:xfrm>
+          <a:prstGeom prst="rect">
+            <a:avLst/>
+          </a:prstGeom>
+          <a:solidFill>
+            <a:srgbClr val="429761"/>
+          </a:solidFill>
+          <a:ln>
+            <a:noFill/>
+          </a:ln>
+        </p:spPr>
+        <p:style>
+          <a:lnRef idx="1">
+            <a:schemeClr val="accent1"/>
+          </a:lnRef>
+          <a:fillRef idx="3">
+            <a:schemeClr val="accent1"/>
+          </a:fillRef>
+          <a:effectRef idx="2">
+            <a:schemeClr val="accent1"/>
+          </a:effectRef>
+          <a:fontRef idx="minor">
+            <a:schemeClr val="lt1"/>
+          </a:fontRef>
+        </p:style>
+        <p:txBody>
+          <a:bodyPr rtlCol="0" anchor="ctr"/>
+          <a:lstStyle/>
+          <a:p>
+            <a:pPr algn="ctr"/>
+          </a:p>
+        </p:txBody>
+      </p:sp>
+      <p:sp>
+        <p:nvSpPr>
+          <p:cNvPr id="8" name="Rounded Rectangle 7"/>
+          <p:cNvSpPr/>
+          <p:nvPr/>
+        </p:nvSpPr>
+        <p:spPr>
+          <a:xfrm>
+            <a:off x="5989320" y="1234440"/>
+            <a:ext cx="2331720" cy="1371600"/>
           </a:xfrm>
           <a:prstGeom prst="roundRect">
             <a:avLst/>
@@ -9420,7 +8759,7 @@
           <a:lstStyle/>
           <a:p>
             <a:pPr algn="ctr">
-              <a:defRPr sz="1700" b="1">
+              <a:defRPr sz="1600" b="1">
                 <a:solidFill>
                   <a:srgbClr val="232D37"/>
                 </a:solidFill>
@@ -9428,7 +8767,372 @@
               </a:defRPr>
             </a:pPr>
             <a:r>
-              <a:t>IRMAA surcharge</a:t>
+              <a:t>Allocation</a:t>
+            </a:r>
+          </a:p>
+          <a:p>
+            <a:pPr>
+              <a:spcBef>
+                <a:spcPts val="300"/>
+              </a:spcBef>
+              <a:defRPr sz="1100">
+                <a:solidFill>
+                  <a:srgbClr val="232D37"/>
+                </a:solidFill>
+                <a:latin typeface="Aptos"/>
+              </a:defRPr>
+            </a:pPr>
+            <a:r>
+              <a:t>Split pro rata by start-of-year balance</a:t>
+            </a:r>
+          </a:p>
+          <a:p>
+            <a:pPr>
+              <a:spcBef>
+                <a:spcPts val="300"/>
+              </a:spcBef>
+              <a:defRPr sz="1100">
+                <a:solidFill>
+                  <a:srgbClr val="232D37"/>
+                </a:solidFill>
+                <a:latin typeface="Aptos"/>
+              </a:defRPr>
+            </a:pPr>
+            <a:r>
+              <a:t>No eligible target → excess leaves model</a:t>
+            </a:r>
+          </a:p>
+        </p:txBody>
+      </p:sp>
+      <p:sp>
+        <p:nvSpPr>
+          <p:cNvPr id="9" name="Rectangle 8"/>
+          <p:cNvSpPr/>
+          <p:nvPr/>
+        </p:nvSpPr>
+        <p:spPr>
+          <a:xfrm>
+            <a:off x="5989320" y="1234440"/>
+            <a:ext cx="82296" cy="1371600"/>
+          </a:xfrm>
+          <a:prstGeom prst="rect">
+            <a:avLst/>
+          </a:prstGeom>
+          <a:solidFill>
+            <a:srgbClr val="E5892A"/>
+          </a:solidFill>
+          <a:ln>
+            <a:noFill/>
+          </a:ln>
+        </p:spPr>
+        <p:style>
+          <a:lnRef idx="1">
+            <a:schemeClr val="accent1"/>
+          </a:lnRef>
+          <a:fillRef idx="3">
+            <a:schemeClr val="accent1"/>
+          </a:fillRef>
+          <a:effectRef idx="2">
+            <a:schemeClr val="accent1"/>
+          </a:effectRef>
+          <a:fontRef idx="minor">
+            <a:schemeClr val="lt1"/>
+          </a:fontRef>
+        </p:style>
+        <p:txBody>
+          <a:bodyPr rtlCol="0" anchor="ctr"/>
+          <a:lstStyle/>
+          <a:p>
+            <a:pPr algn="ctr"/>
+          </a:p>
+        </p:txBody>
+      </p:sp>
+      <p:sp>
+        <p:nvSpPr>
+          <p:cNvPr id="10" name="Rounded Rectangle 9"/>
+          <p:cNvSpPr/>
+          <p:nvPr/>
+        </p:nvSpPr>
+        <p:spPr>
+          <a:xfrm>
+            <a:off x="8732520" y="1234440"/>
+            <a:ext cx="2331720" cy="1371600"/>
+          </a:xfrm>
+          <a:prstGeom prst="roundRect">
+            <a:avLst/>
+          </a:prstGeom>
+          <a:solidFill>
+            <a:srgbClr val="F7EFFF"/>
+          </a:solidFill>
+          <a:ln w="13970">
+            <a:solidFill>
+              <a:srgbClr val="7852B0"/>
+            </a:solidFill>
+          </a:ln>
+        </p:spPr>
+        <p:style>
+          <a:lnRef idx="1">
+            <a:schemeClr val="accent1"/>
+          </a:lnRef>
+          <a:fillRef idx="3">
+            <a:schemeClr val="accent1"/>
+          </a:fillRef>
+          <a:effectRef idx="2">
+            <a:schemeClr val="accent1"/>
+          </a:effectRef>
+          <a:fontRef idx="minor">
+            <a:schemeClr val="lt1"/>
+          </a:fontRef>
+        </p:style>
+        <p:txBody>
+          <a:bodyPr rtlCol="0" anchor="ctr" lIns="182880" rIns="100584" tIns="91440"/>
+          <a:lstStyle/>
+          <a:p>
+            <a:pPr algn="ctr">
+              <a:defRPr sz="1600" b="1">
+                <a:solidFill>
+                  <a:srgbClr val="232D37"/>
+                </a:solidFill>
+                <a:latin typeface="Aptos Display"/>
+              </a:defRPr>
+            </a:pPr>
+            <a:r>
+              <a:t>Roll forward</a:t>
+            </a:r>
+          </a:p>
+          <a:p>
+            <a:pPr>
+              <a:spcBef>
+                <a:spcPts val="300"/>
+              </a:spcBef>
+              <a:defRPr sz="1100">
+                <a:solidFill>
+                  <a:srgbClr val="232D37"/>
+                </a:solidFill>
+                <a:latin typeface="Aptos"/>
+              </a:defRPr>
+            </a:pPr>
+            <a:r>
+              <a:t>Adds excessIn to balance and basis</a:t>
+            </a:r>
+          </a:p>
+          <a:p>
+            <a:pPr>
+              <a:spcBef>
+                <a:spcPts val="300"/>
+              </a:spcBef>
+              <a:defRPr sz="1100">
+                <a:solidFill>
+                  <a:srgbClr val="232D37"/>
+                </a:solidFill>
+                <a:latin typeface="Aptos"/>
+              </a:defRPr>
+            </a:pPr>
+            <a:r>
+              <a:t>Never feeds back into same-year tax</a:t>
+            </a:r>
+          </a:p>
+        </p:txBody>
+      </p:sp>
+      <p:sp>
+        <p:nvSpPr>
+          <p:cNvPr id="11" name="Rectangle 10"/>
+          <p:cNvSpPr/>
+          <p:nvPr/>
+        </p:nvSpPr>
+        <p:spPr>
+          <a:xfrm>
+            <a:off x="8732520" y="1234440"/>
+            <a:ext cx="82296" cy="1371600"/>
+          </a:xfrm>
+          <a:prstGeom prst="rect">
+            <a:avLst/>
+          </a:prstGeom>
+          <a:solidFill>
+            <a:srgbClr val="7852B0"/>
+          </a:solidFill>
+          <a:ln>
+            <a:noFill/>
+          </a:ln>
+        </p:spPr>
+        <p:style>
+          <a:lnRef idx="1">
+            <a:schemeClr val="accent1"/>
+          </a:lnRef>
+          <a:fillRef idx="3">
+            <a:schemeClr val="accent1"/>
+          </a:fillRef>
+          <a:effectRef idx="2">
+            <a:schemeClr val="accent1"/>
+          </a:effectRef>
+          <a:fontRef idx="minor">
+            <a:schemeClr val="lt1"/>
+          </a:fontRef>
+        </p:style>
+        <p:txBody>
+          <a:bodyPr rtlCol="0" anchor="ctr"/>
+          <a:lstStyle/>
+          <a:p>
+            <a:pPr algn="ctr"/>
+          </a:p>
+        </p:txBody>
+      </p:sp>
+      <p:cxnSp>
+        <p:nvCxnSpPr>
+          <p:cNvPr id="12" name="Connector 11"/>
+          <p:cNvCxnSpPr/>
+          <p:nvPr/>
+        </p:nvCxnSpPr>
+        <p:spPr>
+          <a:xfrm>
+            <a:off x="2880360" y="1920240"/>
+            <a:ext cx="256031" cy="0"/>
+          </a:xfrm>
+          <a:prstGeom prst="line">
+            <a:avLst/>
+          </a:prstGeom>
+          <a:ln w="22860">
+            <a:solidFill>
+              <a:srgbClr val="266EB2"/>
+            </a:solidFill>
+          </a:ln>
+        </p:spPr>
+        <p:style>
+          <a:lnRef idx="2">
+            <a:schemeClr val="accent1"/>
+          </a:lnRef>
+          <a:fillRef idx="0">
+            <a:schemeClr val="accent1"/>
+          </a:fillRef>
+          <a:effectRef idx="1">
+            <a:schemeClr val="accent1"/>
+          </a:effectRef>
+          <a:fontRef idx="minor">
+            <a:schemeClr val="tx1"/>
+          </a:fontRef>
+        </p:style>
+      </p:cxnSp>
+      <p:cxnSp>
+        <p:nvCxnSpPr>
+          <p:cNvPr id="13" name="Connector 12"/>
+          <p:cNvCxnSpPr/>
+          <p:nvPr/>
+        </p:nvCxnSpPr>
+        <p:spPr>
+          <a:xfrm>
+            <a:off x="5623560" y="1920240"/>
+            <a:ext cx="256032" cy="0"/>
+          </a:xfrm>
+          <a:prstGeom prst="line">
+            <a:avLst/>
+          </a:prstGeom>
+          <a:ln w="22860">
+            <a:solidFill>
+              <a:srgbClr val="429761"/>
+            </a:solidFill>
+          </a:ln>
+        </p:spPr>
+        <p:style>
+          <a:lnRef idx="2">
+            <a:schemeClr val="accent1"/>
+          </a:lnRef>
+          <a:fillRef idx="0">
+            <a:schemeClr val="accent1"/>
+          </a:fillRef>
+          <a:effectRef idx="1">
+            <a:schemeClr val="accent1"/>
+          </a:effectRef>
+          <a:fontRef idx="minor">
+            <a:schemeClr val="tx1"/>
+          </a:fontRef>
+        </p:style>
+      </p:cxnSp>
+      <p:cxnSp>
+        <p:nvCxnSpPr>
+          <p:cNvPr id="14" name="Connector 13"/>
+          <p:cNvCxnSpPr/>
+          <p:nvPr/>
+        </p:nvCxnSpPr>
+        <p:spPr>
+          <a:xfrm>
+            <a:off x="8366760" y="1920240"/>
+            <a:ext cx="256032" cy="0"/>
+          </a:xfrm>
+          <a:prstGeom prst="line">
+            <a:avLst/>
+          </a:prstGeom>
+          <a:ln w="22860">
+            <a:solidFill>
+              <a:srgbClr val="E5892A"/>
+            </a:solidFill>
+          </a:ln>
+        </p:spPr>
+        <p:style>
+          <a:lnRef idx="2">
+            <a:schemeClr val="accent1"/>
+          </a:lnRef>
+          <a:fillRef idx="0">
+            <a:schemeClr val="accent1"/>
+          </a:fillRef>
+          <a:effectRef idx="1">
+            <a:schemeClr val="accent1"/>
+          </a:effectRef>
+          <a:fontRef idx="minor">
+            <a:schemeClr val="tx1"/>
+          </a:fontRef>
+        </p:style>
+      </p:cxnSp>
+      <p:sp>
+        <p:nvSpPr>
+          <p:cNvPr id="15" name="Rounded Rectangle 14"/>
+          <p:cNvSpPr/>
+          <p:nvPr/>
+        </p:nvSpPr>
+        <p:spPr>
+          <a:xfrm>
+            <a:off x="1234440" y="3886200"/>
+            <a:ext cx="9646920" cy="1097280"/>
+          </a:xfrm>
+          <a:prstGeom prst="roundRect">
+            <a:avLst/>
+          </a:prstGeom>
+          <a:solidFill>
+            <a:srgbClr val="F8FAFC"/>
+          </a:solidFill>
+          <a:ln w="13970">
+            <a:solidFill>
+              <a:srgbClr val="0F2647"/>
+            </a:solidFill>
+          </a:ln>
+        </p:spPr>
+        <p:style>
+          <a:lnRef idx="1">
+            <a:schemeClr val="accent1"/>
+          </a:lnRef>
+          <a:fillRef idx="3">
+            <a:schemeClr val="accent1"/>
+          </a:fillRef>
+          <a:effectRef idx="2">
+            <a:schemeClr val="accent1"/>
+          </a:effectRef>
+          <a:fontRef idx="minor">
+            <a:schemeClr val="lt1"/>
+          </a:fontRef>
+        </p:style>
+        <p:txBody>
+          <a:bodyPr rtlCol="0" anchor="ctr" lIns="182880" rIns="100584" tIns="91440"/>
+          <a:lstStyle/>
+          <a:p>
+            <a:pPr algn="ctr">
+              <a:defRPr sz="1600" b="1">
+                <a:solidFill>
+                  <a:srgbClr val="232D37"/>
+                </a:solidFill>
+                <a:latin typeface="Aptos Display"/>
+              </a:defRPr>
+            </a:pPr>
+            <a:r>
+              <a:t>Visibility</a:t>
             </a:r>
           </a:p>
           <a:p>
@@ -9444,75 +9148,27 @@
               </a:defRPr>
             </a:pPr>
             <a:r>
-              <a:t>Household expense; no per-portfolio checkbox.</a:t>
-            </a:r>
-          </a:p>
-          <a:p>
-            <a:pPr>
-              <a:spcBef>
-                <a:spcPts val="300"/>
-              </a:spcBef>
-              <a:defRPr sz="1200">
-                <a:solidFill>
-                  <a:srgbClr val="232D37"/>
-                </a:solidFill>
-                <a:latin typeface="Aptos"/>
-              </a:defRPr>
-            </a:pPr>
-            <a:r>
-              <a:t>Uses AGI from two years earlier and this year’s filing status.</a:t>
-            </a:r>
-          </a:p>
-          <a:p>
-            <a:pPr>
-              <a:spcBef>
-                <a:spcPts val="300"/>
-              </a:spcBef>
-              <a:defRPr sz="1200">
-                <a:solidFill>
-                  <a:srgbClr val="232D37"/>
-                </a:solidFill>
-                <a:latin typeface="Aptos"/>
-              </a:defRPr>
-            </a:pPr>
-            <a:r>
-              <a:t>Zero for the first two projection years.</a:t>
-            </a:r>
-          </a:p>
-          <a:p>
-            <a:pPr>
-              <a:spcBef>
-                <a:spcPts val="300"/>
-              </a:spcBef>
-              <a:defRPr sz="1200">
-                <a:solidFill>
-                  <a:srgbClr val="232D37"/>
-                </a:solidFill>
-                <a:latin typeface="Aptos"/>
-              </a:defRPr>
-            </a:pPr>
-            <a:r>
-              <a:t>Paid through the normal household funding order.</a:t>
-            </a:r>
-          </a:p>
-        </p:txBody>
-      </p:sp>
-      <p:sp>
-        <p:nvSpPr>
-          <p:cNvPr id="5" name="Rectangle 4"/>
+              <a:t>Projection rows report excessIncome and excessReinvested; portfolio entries record excessReinvested and reinvest. Asset tooltips, expense chart details, Excel, and chat all consume these outputs.</a:t>
+            </a:r>
+          </a:p>
+        </p:txBody>
+      </p:sp>
+      <p:sp>
+        <p:nvSpPr>
+          <p:cNvPr id="16" name="Rectangle 15"/>
           <p:cNvSpPr/>
           <p:nvPr/>
         </p:nvSpPr>
         <p:spPr>
           <a:xfrm>
-            <a:off x="640080" y="1234440"/>
-            <a:ext cx="82296" cy="4389120"/>
+            <a:off x="1234440" y="3886200"/>
+            <a:ext cx="82296" cy="1097280"/>
           </a:xfrm>
           <a:prstGeom prst="rect">
             <a:avLst/>
           </a:prstGeom>
           <a:solidFill>
-            <a:srgbClr val="E5892A"/>
+            <a:srgbClr val="0F2647"/>
           </a:solidFill>
           <a:ln>
             <a:noFill/>
@@ -9542,25 +9198,23 @@
       </p:sp>
       <p:sp>
         <p:nvSpPr>
-          <p:cNvPr id="6" name="Rounded Rectangle 5"/>
+          <p:cNvPr id="17" name="Rectangle 16"/>
           <p:cNvSpPr/>
           <p:nvPr/>
         </p:nvSpPr>
         <p:spPr>
           <a:xfrm>
-            <a:off x="4453128" y="1234440"/>
-            <a:ext cx="3291840" cy="4389120"/>
-          </a:xfrm>
-          <a:prstGeom prst="roundRect">
-            <a:avLst/>
-          </a:prstGeom>
-          <a:solidFill>
-            <a:srgbClr val="E9F4FF"/>
-          </a:solidFill>
-          <a:ln w="13970">
-            <a:solidFill>
-              <a:srgbClr val="266EB2"/>
-            </a:solidFill>
+            <a:off x="502920" y="6473952"/>
+            <a:ext cx="11183112" cy="13716"/>
+          </a:xfrm>
+          <a:prstGeom prst="rect">
+            <a:avLst/>
+          </a:prstGeom>
+          <a:solidFill>
+            <a:srgbClr val="D2DCE5"/>
+          </a:solidFill>
+          <a:ln>
+            <a:noFill/>
           </a:ln>
         </p:spPr>
         <p:style>
@@ -9578,107 +9232,6 @@
           </a:fontRef>
         </p:style>
         <p:txBody>
-          <a:bodyPr rtlCol="0" anchor="ctr" lIns="182880" rIns="100584" tIns="91440"/>
-          <a:lstStyle/>
-          <a:p>
-            <a:pPr algn="ctr">
-              <a:defRPr sz="1700" b="1">
-                <a:solidFill>
-                  <a:srgbClr val="232D37"/>
-                </a:solidFill>
-                <a:latin typeface="Aptos Display"/>
-              </a:defRPr>
-            </a:pPr>
-            <a:r>
-              <a:t>AUM fee</a:t>
-            </a:r>
-          </a:p>
-          <a:p>
-            <a:pPr>
-              <a:spcBef>
-                <a:spcPts val="300"/>
-              </a:spcBef>
-              <a:defRPr sz="1200">
-                <a:solidFill>
-                  <a:srgbClr val="232D37"/>
-                </a:solidFill>
-                <a:latin typeface="Aptos"/>
-              </a:defRPr>
-            </a:pPr>
-            <a:r>
-              <a:t>Household aumFee: percent of AUM or fixed annual $.</a:t>
-            </a:r>
-          </a:p>
-          <a:p>
-            <a:pPr>
-              <a:spcBef>
-                <a:spcPts val="300"/>
-              </a:spcBef>
-              <a:defRPr sz="1200">
-                <a:solidFill>
-                  <a:srgbClr val="232D37"/>
-                </a:solidFill>
-                <a:latin typeface="Aptos"/>
-              </a:defRPr>
-            </a:pPr>
-            <a:r>
-              <a:t>AUM balance includes checked brokerage, IRA, and Roth balances when eligible.</a:t>
-            </a:r>
-          </a:p>
-          <a:p>
-            <a:pPr>
-              <a:spcBef>
-                <a:spcPts val="300"/>
-              </a:spcBef>
-              <a:defRPr sz="1200">
-                <a:solidFill>
-                  <a:srgbClr val="232D37"/>
-                </a:solidFill>
-                <a:latin typeface="Aptos"/>
-              </a:defRPr>
-            </a:pPr>
-            <a:r>
-              <a:t>IDGT can be included when checked.</a:t>
-            </a:r>
-          </a:p>
-        </p:txBody>
-      </p:sp>
-      <p:sp>
-        <p:nvSpPr>
-          <p:cNvPr id="7" name="Rectangle 6"/>
-          <p:cNvSpPr/>
-          <p:nvPr/>
-        </p:nvSpPr>
-        <p:spPr>
-          <a:xfrm>
-            <a:off x="4453128" y="1234440"/>
-            <a:ext cx="82296" cy="4389120"/>
-          </a:xfrm>
-          <a:prstGeom prst="rect">
-            <a:avLst/>
-          </a:prstGeom>
-          <a:solidFill>
-            <a:srgbClr val="266EB2"/>
-          </a:solidFill>
-          <a:ln>
-            <a:noFill/>
-          </a:ln>
-        </p:spPr>
-        <p:style>
-          <a:lnRef idx="1">
-            <a:schemeClr val="accent1"/>
-          </a:lnRef>
-          <a:fillRef idx="3">
-            <a:schemeClr val="accent1"/>
-          </a:fillRef>
-          <a:effectRef idx="2">
-            <a:schemeClr val="accent1"/>
-          </a:effectRef>
-          <a:fontRef idx="minor">
-            <a:schemeClr val="lt1"/>
-          </a:fontRef>
-        </p:style>
-        <p:txBody>
           <a:bodyPr rtlCol="0" anchor="ctr"/>
           <a:lstStyle/>
           <a:p>
@@ -9688,196 +9241,7 @@
       </p:sp>
       <p:sp>
         <p:nvSpPr>
-          <p:cNvPr id="8" name="Rounded Rectangle 7"/>
-          <p:cNvSpPr/>
-          <p:nvPr/>
-        </p:nvSpPr>
-        <p:spPr>
-          <a:xfrm>
-            <a:off x="8266175" y="1234440"/>
-            <a:ext cx="3291840" cy="4389120"/>
-          </a:xfrm>
-          <a:prstGeom prst="roundRect">
-            <a:avLst/>
-          </a:prstGeom>
-          <a:solidFill>
-            <a:srgbClr val="EAF9F4"/>
-          </a:solidFill>
-          <a:ln w="13970">
-            <a:solidFill>
-              <a:srgbClr val="429761"/>
-            </a:solidFill>
-          </a:ln>
-        </p:spPr>
-        <p:style>
-          <a:lnRef idx="1">
-            <a:schemeClr val="accent1"/>
-          </a:lnRef>
-          <a:fillRef idx="3">
-            <a:schemeClr val="accent1"/>
-          </a:fillRef>
-          <a:effectRef idx="2">
-            <a:schemeClr val="accent1"/>
-          </a:effectRef>
-          <a:fontRef idx="minor">
-            <a:schemeClr val="lt1"/>
-          </a:fontRef>
-        </p:style>
-        <p:txBody>
-          <a:bodyPr rtlCol="0" anchor="ctr" lIns="182880" rIns="100584" tIns="91440"/>
-          <a:lstStyle/>
-          <a:p>
-            <a:pPr algn="ctr">
-              <a:defRPr sz="1700" b="1">
-                <a:solidFill>
-                  <a:srgbClr val="232D37"/>
-                </a:solidFill>
-                <a:latin typeface="Aptos Display"/>
-              </a:defRPr>
-            </a:pPr>
-            <a:r>
-              <a:t>Allocation principle</a:t>
-            </a:r>
-          </a:p>
-          <a:p>
-            <a:pPr>
-              <a:spcBef>
-                <a:spcPts val="300"/>
-              </a:spcBef>
-              <a:defRPr sz="1200">
-                <a:solidFill>
-                  <a:srgbClr val="232D37"/>
-                </a:solidFill>
-                <a:latin typeface="Aptos"/>
-              </a:defRPr>
-            </a:pPr>
-            <a:r>
-              <a:t>AUM fee share per account is informational.</a:t>
-            </a:r>
-          </a:p>
-          <a:p>
-            <a:pPr>
-              <a:spcBef>
-                <a:spcPts val="300"/>
-              </a:spcBef>
-              <a:defRPr sz="1200">
-                <a:solidFill>
-                  <a:srgbClr val="232D37"/>
-                </a:solidFill>
-                <a:latin typeface="Aptos"/>
-              </a:defRPr>
-            </a:pPr>
-            <a:r>
-              <a:t>The full fee is one household expense, paid only through Pay expenses portfolios.</a:t>
-            </a:r>
-          </a:p>
-          <a:p>
-            <a:pPr>
-              <a:spcBef>
-                <a:spcPts val="300"/>
-              </a:spcBef>
-              <a:defRPr sz="1200">
-                <a:solidFill>
-                  <a:srgbClr val="232D37"/>
-                </a:solidFill>
-                <a:latin typeface="Aptos"/>
-              </a:defRPr>
-            </a:pPr>
-            <a:r>
-              <a:t>A charged account does not automatically fund its own fee.</a:t>
-            </a:r>
-          </a:p>
-        </p:txBody>
-      </p:sp>
-      <p:sp>
-        <p:nvSpPr>
-          <p:cNvPr id="9" name="Rectangle 8"/>
-          <p:cNvSpPr/>
-          <p:nvPr/>
-        </p:nvSpPr>
-        <p:spPr>
-          <a:xfrm>
-            <a:off x="8266175" y="1234440"/>
-            <a:ext cx="82296" cy="4389120"/>
-          </a:xfrm>
-          <a:prstGeom prst="rect">
-            <a:avLst/>
-          </a:prstGeom>
-          <a:solidFill>
-            <a:srgbClr val="429761"/>
-          </a:solidFill>
-          <a:ln>
-            <a:noFill/>
-          </a:ln>
-        </p:spPr>
-        <p:style>
-          <a:lnRef idx="1">
-            <a:schemeClr val="accent1"/>
-          </a:lnRef>
-          <a:fillRef idx="3">
-            <a:schemeClr val="accent1"/>
-          </a:fillRef>
-          <a:effectRef idx="2">
-            <a:schemeClr val="accent1"/>
-          </a:effectRef>
-          <a:fontRef idx="minor">
-            <a:schemeClr val="lt1"/>
-          </a:fontRef>
-        </p:style>
-        <p:txBody>
-          <a:bodyPr rtlCol="0" anchor="ctr"/>
-          <a:lstStyle/>
-          <a:p>
-            <a:pPr algn="ctr"/>
-          </a:p>
-        </p:txBody>
-      </p:sp>
-      <p:sp>
-        <p:nvSpPr>
-          <p:cNvPr id="10" name="Rectangle 9"/>
-          <p:cNvSpPr/>
-          <p:nvPr/>
-        </p:nvSpPr>
-        <p:spPr>
-          <a:xfrm>
-            <a:off x="502920" y="6473952"/>
-            <a:ext cx="11183112" cy="13716"/>
-          </a:xfrm>
-          <a:prstGeom prst="rect">
-            <a:avLst/>
-          </a:prstGeom>
-          <a:solidFill>
-            <a:srgbClr val="D2DCE5"/>
-          </a:solidFill>
-          <a:ln>
-            <a:noFill/>
-          </a:ln>
-        </p:spPr>
-        <p:style>
-          <a:lnRef idx="1">
-            <a:schemeClr val="accent1"/>
-          </a:lnRef>
-          <a:fillRef idx="3">
-            <a:schemeClr val="accent1"/>
-          </a:fillRef>
-          <a:effectRef idx="2">
-            <a:schemeClr val="accent1"/>
-          </a:effectRef>
-          <a:fontRef idx="minor">
-            <a:schemeClr val="lt1"/>
-          </a:fontRef>
-        </p:style>
-        <p:txBody>
-          <a:bodyPr rtlCol="0" anchor="ctr"/>
-          <a:lstStyle/>
-          <a:p>
-            <a:pPr algn="ctr"/>
-          </a:p>
-        </p:txBody>
-      </p:sp>
-      <p:sp>
-        <p:nvSpPr>
-          <p:cNvPr id="11" name="TextBox 10"/>
+          <p:cNvPr id="18" name="TextBox 17"/>
           <p:cNvSpPr txBox="1"/>
           <p:nvPr/>
         </p:nvSpPr>
@@ -9906,7 +9270,7 @@
               </a:defRPr>
             </a:pPr>
             <a:r>
-              <a:t>Retirement Income Planner • Architecture overview • Household-expense, LTC, and plan-chat update</a:t>
+              <a:t>Retirement Income Planner • Architecture overview • Rental, tax-exempt income, and legacy-value update</a:t>
             </a:r>
           </a:p>
         </p:txBody>
@@ -9968,7 +9332,7 @@
               </a:defRPr>
             </a:pPr>
             <a:r>
-              <a:t>New charts and richer visibility controls</a:t>
+              <a:t>Roth conversion timing becomes a three-mode policy</a:t>
             </a:r>
           </a:p>
         </p:txBody>
@@ -10004,7 +9368,7 @@
               </a:defRPr>
             </a:pPr>
             <a:r>
-              <a:t>The display layer adds a household-expense view, shared chart lifecycle management, and persisted section hiding.</a:t>
+              <a:t>The IRA card separates “whether to convert” from “when conversions begin.”</a:t>
             </a:r>
           </a:p>
         </p:txBody>
@@ -10017,8 +9381,268 @@
         </p:nvSpPr>
         <p:spPr>
           <a:xfrm>
-            <a:off x="502920" y="1143000"/>
-            <a:ext cx="3383280" cy="4526280"/>
+            <a:off x="640080" y="1234440"/>
+            <a:ext cx="3246120" cy="4434840"/>
+          </a:xfrm>
+          <a:prstGeom prst="roundRect">
+            <a:avLst/>
+          </a:prstGeom>
+          <a:solidFill>
+            <a:srgbClr val="E9F4FF"/>
+          </a:solidFill>
+          <a:ln w="13970">
+            <a:solidFill>
+              <a:srgbClr val="266EB2"/>
+            </a:solidFill>
+          </a:ln>
+        </p:spPr>
+        <p:style>
+          <a:lnRef idx="1">
+            <a:schemeClr val="accent1"/>
+          </a:lnRef>
+          <a:fillRef idx="3">
+            <a:schemeClr val="accent1"/>
+          </a:fillRef>
+          <a:effectRef idx="2">
+            <a:schemeClr val="accent1"/>
+          </a:effectRef>
+          <a:fontRef idx="minor">
+            <a:schemeClr val="lt1"/>
+          </a:fontRef>
+        </p:style>
+        <p:txBody>
+          <a:bodyPr rtlCol="0" anchor="ctr" lIns="182880" rIns="100584" tIns="91440"/>
+          <a:lstStyle/>
+          <a:p>
+            <a:pPr algn="ctr">
+              <a:defRPr sz="1700" b="1">
+                <a:solidFill>
+                  <a:srgbClr val="232D37"/>
+                </a:solidFill>
+                <a:latin typeface="Aptos Display"/>
+              </a:defRPr>
+            </a:pPr>
+            <a:r>
+              <a:t>RMD start — default</a:t>
+            </a:r>
+          </a:p>
+          <a:p>
+            <a:pPr>
+              <a:spcBef>
+                <a:spcPts val="300"/>
+              </a:spcBef>
+              <a:defRPr sz="1200">
+                <a:solidFill>
+                  <a:srgbClr val="232D37"/>
+                </a:solidFill>
+                <a:latin typeface="Aptos"/>
+              </a:defRPr>
+            </a:pPr>
+            <a:r>
+              <a:t>Conversion begins at the IRA’s resolved Start age.</a:t>
+            </a:r>
+          </a:p>
+          <a:p>
+            <a:pPr>
+              <a:spcBef>
+                <a:spcPts val="300"/>
+              </a:spcBef>
+              <a:defRPr sz="1200">
+                <a:solidFill>
+                  <a:srgbClr val="232D37"/>
+                </a:solidFill>
+                <a:latin typeface="Aptos"/>
+              </a:defRPr>
+            </a:pPr>
+            <a:r>
+              <a:t>Default aligns the start with the account’s RMD-oriented age-range rule.</a:t>
+            </a:r>
+          </a:p>
+        </p:txBody>
+      </p:sp>
+      <p:sp>
+        <p:nvSpPr>
+          <p:cNvPr id="5" name="Rectangle 4"/>
+          <p:cNvSpPr/>
+          <p:nvPr/>
+        </p:nvSpPr>
+        <p:spPr>
+          <a:xfrm>
+            <a:off x="640080" y="1234440"/>
+            <a:ext cx="82296" cy="4434840"/>
+          </a:xfrm>
+          <a:prstGeom prst="rect">
+            <a:avLst/>
+          </a:prstGeom>
+          <a:solidFill>
+            <a:srgbClr val="266EB2"/>
+          </a:solidFill>
+          <a:ln>
+            <a:noFill/>
+          </a:ln>
+        </p:spPr>
+        <p:style>
+          <a:lnRef idx="1">
+            <a:schemeClr val="accent1"/>
+          </a:lnRef>
+          <a:fillRef idx="3">
+            <a:schemeClr val="accent1"/>
+          </a:fillRef>
+          <a:effectRef idx="2">
+            <a:schemeClr val="accent1"/>
+          </a:effectRef>
+          <a:fontRef idx="minor">
+            <a:schemeClr val="lt1"/>
+          </a:fontRef>
+        </p:style>
+        <p:txBody>
+          <a:bodyPr rtlCol="0" anchor="ctr"/>
+          <a:lstStyle/>
+          <a:p>
+            <a:pPr algn="ctr"/>
+          </a:p>
+        </p:txBody>
+      </p:sp>
+      <p:sp>
+        <p:nvSpPr>
+          <p:cNvPr id="6" name="Rounded Rectangle 5"/>
+          <p:cNvSpPr/>
+          <p:nvPr/>
+        </p:nvSpPr>
+        <p:spPr>
+          <a:xfrm>
+            <a:off x="4462272" y="1234440"/>
+            <a:ext cx="3246120" cy="4434840"/>
+          </a:xfrm>
+          <a:prstGeom prst="roundRect">
+            <a:avLst/>
+          </a:prstGeom>
+          <a:solidFill>
+            <a:srgbClr val="EAF9F4"/>
+          </a:solidFill>
+          <a:ln w="13970">
+            <a:solidFill>
+              <a:srgbClr val="429761"/>
+            </a:solidFill>
+          </a:ln>
+        </p:spPr>
+        <p:style>
+          <a:lnRef idx="1">
+            <a:schemeClr val="accent1"/>
+          </a:lnRef>
+          <a:fillRef idx="3">
+            <a:schemeClr val="accent1"/>
+          </a:fillRef>
+          <a:effectRef idx="2">
+            <a:schemeClr val="accent1"/>
+          </a:effectRef>
+          <a:fontRef idx="minor">
+            <a:schemeClr val="lt1"/>
+          </a:fontRef>
+        </p:style>
+        <p:txBody>
+          <a:bodyPr rtlCol="0" anchor="ctr" lIns="182880" rIns="100584" tIns="91440"/>
+          <a:lstStyle/>
+          <a:p>
+            <a:pPr algn="ctr">
+              <a:defRPr sz="1700" b="1">
+                <a:solidFill>
+                  <a:srgbClr val="232D37"/>
+                </a:solidFill>
+                <a:latin typeface="Aptos Display"/>
+              </a:defRPr>
+            </a:pPr>
+            <a:r>
+              <a:t>Now</a:t>
+            </a:r>
+          </a:p>
+          <a:p>
+            <a:pPr>
+              <a:spcBef>
+                <a:spcPts val="300"/>
+              </a:spcBef>
+              <a:defRPr sz="1200">
+                <a:solidFill>
+                  <a:srgbClr val="232D37"/>
+                </a:solidFill>
+                <a:latin typeface="Aptos"/>
+              </a:defRPr>
+            </a:pPr>
+            <a:r>
+              <a:t>Conversion begins at current age.</a:t>
+            </a:r>
+          </a:p>
+          <a:p>
+            <a:pPr>
+              <a:spcBef>
+                <a:spcPts val="300"/>
+              </a:spcBef>
+              <a:defRPr sz="1200">
+                <a:solidFill>
+                  <a:srgbClr val="232D37"/>
+                </a:solidFill>
+                <a:latin typeface="Aptos"/>
+              </a:defRPr>
+            </a:pPr>
+            <a:r>
+              <a:t>Effective start still cannot precede current age.</a:t>
+            </a:r>
+          </a:p>
+        </p:txBody>
+      </p:sp>
+      <p:sp>
+        <p:nvSpPr>
+          <p:cNvPr id="7" name="Rectangle 6"/>
+          <p:cNvSpPr/>
+          <p:nvPr/>
+        </p:nvSpPr>
+        <p:spPr>
+          <a:xfrm>
+            <a:off x="4462272" y="1234440"/>
+            <a:ext cx="82296" cy="4434840"/>
+          </a:xfrm>
+          <a:prstGeom prst="rect">
+            <a:avLst/>
+          </a:prstGeom>
+          <a:solidFill>
+            <a:srgbClr val="429761"/>
+          </a:solidFill>
+          <a:ln>
+            <a:noFill/>
+          </a:ln>
+        </p:spPr>
+        <p:style>
+          <a:lnRef idx="1">
+            <a:schemeClr val="accent1"/>
+          </a:lnRef>
+          <a:fillRef idx="3">
+            <a:schemeClr val="accent1"/>
+          </a:fillRef>
+          <a:effectRef idx="2">
+            <a:schemeClr val="accent1"/>
+          </a:effectRef>
+          <a:fontRef idx="minor">
+            <a:schemeClr val="lt1"/>
+          </a:fontRef>
+        </p:style>
+        <p:txBody>
+          <a:bodyPr rtlCol="0" anchor="ctr"/>
+          <a:lstStyle/>
+          <a:p>
+            <a:pPr algn="ctr"/>
+          </a:p>
+        </p:txBody>
+      </p:sp>
+      <p:sp>
+        <p:nvSpPr>
+          <p:cNvPr id="8" name="Rounded Rectangle 7"/>
+          <p:cNvSpPr/>
+          <p:nvPr/>
+        </p:nvSpPr>
+        <p:spPr>
+          <a:xfrm>
+            <a:off x="8284464" y="1234440"/>
+            <a:ext cx="3246120" cy="4434840"/>
           </a:xfrm>
           <a:prstGeom prst="roundRect">
             <a:avLst/>
@@ -10059,7 +9683,7 @@
               </a:defRPr>
             </a:pPr>
             <a:r>
-              <a:t>Expense chart</a:t>
+              <a:t>Custom age</a:t>
             </a:r>
           </a:p>
           <a:p>
@@ -10075,7 +9699,7 @@
               </a:defRPr>
             </a:pPr>
             <a:r>
-              <a:t>Stacked bands: living, LTC, income tax, IRMAA, AUM fee.</a:t>
+              <a:t>Shows paired slider + number input only when selected.</a:t>
             </a:r>
           </a:p>
           <a:p>
@@ -10091,7 +9715,7 @@
               </a:defRPr>
             </a:pPr>
             <a:r>
-              <a:t>Height equals total expenses.</a:t>
+              <a:t>Effective start is max(current age, custom age).</a:t>
             </a:r>
           </a:p>
           <a:p>
@@ -10107,37 +9731,21 @@
               </a:defRPr>
             </a:pPr>
             <a:r>
-              <a:t>Tooltip explains component shares and funding: income → dividends → sales → unfunded.</a:t>
-            </a:r>
-          </a:p>
-          <a:p>
-            <a:pPr>
-              <a:spcBef>
-                <a:spcPts val="300"/>
-              </a:spcBef>
-              <a:defRPr sz="1200">
-                <a:solidFill>
-                  <a:srgbClr val="232D37"/>
-                </a:solidFill>
-                <a:latin typeface="Aptos"/>
-              </a:defRPr>
-            </a:pPr>
-            <a:r>
-              <a:t>Details show AGI, AUM, IRMAA, and iteration count.</a:t>
-            </a:r>
-          </a:p>
-        </p:txBody>
-      </p:sp>
-      <p:sp>
-        <p:nvSpPr>
-          <p:cNvPr id="5" name="Rectangle 4"/>
+              <a:t>Migration preserves old plans: existing conversion behavior maps to custom or now.</a:t>
+            </a:r>
+          </a:p>
+        </p:txBody>
+      </p:sp>
+      <p:sp>
+        <p:nvSpPr>
+          <p:cNvPr id="9" name="Rectangle 8"/>
           <p:cNvSpPr/>
           <p:nvPr/>
         </p:nvSpPr>
         <p:spPr>
           <a:xfrm>
-            <a:off x="502920" y="1143000"/>
-            <a:ext cx="82296" cy="4526280"/>
+            <a:off x="8284464" y="1234440"/>
+            <a:ext cx="82296" cy="4434840"/>
           </a:xfrm>
           <a:prstGeom prst="rect">
             <a:avLst/>
@@ -10173,25 +9781,23 @@
       </p:sp>
       <p:sp>
         <p:nvSpPr>
-          <p:cNvPr id="6" name="Rounded Rectangle 5"/>
+          <p:cNvPr id="10" name="Rectangle 9"/>
           <p:cNvSpPr/>
           <p:nvPr/>
         </p:nvSpPr>
         <p:spPr>
           <a:xfrm>
-            <a:off x="4407408" y="1143000"/>
-            <a:ext cx="3383280" cy="4526280"/>
-          </a:xfrm>
-          <a:prstGeom prst="roundRect">
-            <a:avLst/>
-          </a:prstGeom>
-          <a:solidFill>
-            <a:srgbClr val="E9F4FF"/>
-          </a:solidFill>
-          <a:ln w="13970">
-            <a:solidFill>
-              <a:srgbClr val="266EB2"/>
-            </a:solidFill>
+            <a:off x="502920" y="6473952"/>
+            <a:ext cx="11183112" cy="13716"/>
+          </a:xfrm>
+          <a:prstGeom prst="rect">
+            <a:avLst/>
+          </a:prstGeom>
+          <a:solidFill>
+            <a:srgbClr val="D2DCE5"/>
+          </a:solidFill>
+          <a:ln>
+            <a:noFill/>
           </a:ln>
         </p:spPr>
         <p:style>
@@ -10209,296 +9815,6 @@
           </a:fontRef>
         </p:style>
         <p:txBody>
-          <a:bodyPr rtlCol="0" anchor="ctr" lIns="182880" rIns="100584" tIns="91440"/>
-          <a:lstStyle/>
-          <a:p>
-            <a:pPr algn="ctr">
-              <a:defRPr sz="1700" b="1">
-                <a:solidFill>
-                  <a:srgbClr val="232D37"/>
-                </a:solidFill>
-                <a:latin typeface="Aptos Display"/>
-              </a:defRPr>
-            </a:pPr>
-            <a:r>
-              <a:t>Chart registry</a:t>
-            </a:r>
-          </a:p>
-          <a:p>
-            <a:pPr>
-              <a:spcBef>
-                <a:spcPts val="300"/>
-              </a:spcBef>
-              <a:defRPr sz="1200">
-                <a:solidFill>
-                  <a:srgbClr val="232D37"/>
-                </a:solidFill>
-                <a:latin typeface="Aptos"/>
-              </a:defRPr>
-            </a:pPr>
-            <a:r>
-              <a:t>One registry for ss, income, tss, tax, expense, asset, IDGT.</a:t>
-            </a:r>
-          </a:p>
-          <a:p>
-            <a:pPr>
-              <a:spcBef>
-                <a:spcPts val="300"/>
-              </a:spcBef>
-              <a:defRPr sz="1200">
-                <a:solidFill>
-                  <a:srgbClr val="232D37"/>
-                </a:solidFill>
-                <a:latin typeface="Aptos"/>
-              </a:defRPr>
-            </a:pPr>
-            <a:r>
-              <a:t>upsertLineChart creates or updates each chart.</a:t>
-            </a:r>
-          </a:p>
-          <a:p>
-            <a:pPr>
-              <a:spcBef>
-                <a:spcPts val="300"/>
-              </a:spcBef>
-              <a:defRPr sz="1200">
-                <a:solidFill>
-                  <a:srgbClr val="232D37"/>
-                </a:solidFill>
-                <a:latin typeface="Aptos"/>
-              </a:defRPr>
-            </a:pPr>
-            <a:r>
-              <a:t>Hidden sections resize on re-open; live slider drag suppresses animation.</a:t>
-            </a:r>
-          </a:p>
-        </p:txBody>
-      </p:sp>
-      <p:sp>
-        <p:nvSpPr>
-          <p:cNvPr id="7" name="Rectangle 6"/>
-          <p:cNvSpPr/>
-          <p:nvPr/>
-        </p:nvSpPr>
-        <p:spPr>
-          <a:xfrm>
-            <a:off x="4407408" y="1143000"/>
-            <a:ext cx="82296" cy="4526280"/>
-          </a:xfrm>
-          <a:prstGeom prst="rect">
-            <a:avLst/>
-          </a:prstGeom>
-          <a:solidFill>
-            <a:srgbClr val="266EB2"/>
-          </a:solidFill>
-          <a:ln>
-            <a:noFill/>
-          </a:ln>
-        </p:spPr>
-        <p:style>
-          <a:lnRef idx="1">
-            <a:schemeClr val="accent1"/>
-          </a:lnRef>
-          <a:fillRef idx="3">
-            <a:schemeClr val="accent1"/>
-          </a:fillRef>
-          <a:effectRef idx="2">
-            <a:schemeClr val="accent1"/>
-          </a:effectRef>
-          <a:fontRef idx="minor">
-            <a:schemeClr val="lt1"/>
-          </a:fontRef>
-        </p:style>
-        <p:txBody>
-          <a:bodyPr rtlCol="0" anchor="ctr"/>
-          <a:lstStyle/>
-          <a:p>
-            <a:pPr algn="ctr"/>
-          </a:p>
-        </p:txBody>
-      </p:sp>
-      <p:sp>
-        <p:nvSpPr>
-          <p:cNvPr id="8" name="Rounded Rectangle 7"/>
-          <p:cNvSpPr/>
-          <p:nvPr/>
-        </p:nvSpPr>
-        <p:spPr>
-          <a:xfrm>
-            <a:off x="8311896" y="1143000"/>
-            <a:ext cx="3383280" cy="4526280"/>
-          </a:xfrm>
-          <a:prstGeom prst="roundRect">
-            <a:avLst/>
-          </a:prstGeom>
-          <a:solidFill>
-            <a:srgbClr val="EAF9F4"/>
-          </a:solidFill>
-          <a:ln w="13970">
-            <a:solidFill>
-              <a:srgbClr val="429761"/>
-            </a:solidFill>
-          </a:ln>
-        </p:spPr>
-        <p:style>
-          <a:lnRef idx="1">
-            <a:schemeClr val="accent1"/>
-          </a:lnRef>
-          <a:fillRef idx="3">
-            <a:schemeClr val="accent1"/>
-          </a:fillRef>
-          <a:effectRef idx="2">
-            <a:schemeClr val="accent1"/>
-          </a:effectRef>
-          <a:fontRef idx="minor">
-            <a:schemeClr val="lt1"/>
-          </a:fontRef>
-        </p:style>
-        <p:txBody>
-          <a:bodyPr rtlCol="0" anchor="ctr" lIns="182880" rIns="100584" tIns="91440"/>
-          <a:lstStyle/>
-          <a:p>
-            <a:pPr algn="ctr">
-              <a:defRPr sz="1700" b="1">
-                <a:solidFill>
-                  <a:srgbClr val="232D37"/>
-                </a:solidFill>
-                <a:latin typeface="Aptos Display"/>
-              </a:defRPr>
-            </a:pPr>
-            <a:r>
-              <a:t>Saved section hiding</a:t>
-            </a:r>
-          </a:p>
-          <a:p>
-            <a:pPr>
-              <a:spcBef>
-                <a:spcPts val="300"/>
-              </a:spcBef>
-              <a:defRPr sz="1200">
-                <a:solidFill>
-                  <a:srgbClr val="232D37"/>
-                </a:solidFill>
-                <a:latin typeface="Aptos"/>
-              </a:defRPr>
-            </a:pPr>
-            <a:r>
-              <a:t>Assumptions and every chart section have Hide controls.</a:t>
-            </a:r>
-          </a:p>
-          <a:p>
-            <a:pPr>
-              <a:spcBef>
-                <a:spcPts val="300"/>
-              </a:spcBef>
-              <a:defRPr sz="1200">
-                <a:solidFill>
-                  <a:srgbClr val="232D37"/>
-                </a:solidFill>
-                <a:latin typeface="Aptos"/>
-              </a:defRPr>
-            </a:pPr>
-            <a:r>
-              <a:t>state.ui.hiddenSections is the only source of truth.</a:t>
-            </a:r>
-          </a:p>
-          <a:p>
-            <a:pPr>
-              <a:spcBef>
-                <a:spcPts val="300"/>
-              </a:spcBef>
-              <a:defRPr sz="1200">
-                <a:solidFill>
-                  <a:srgbClr val="232D37"/>
-                </a:solidFill>
-                <a:latin typeface="Aptos"/>
-              </a:defRPr>
-            </a:pPr>
-            <a:r>
-              <a:t>Fresh/reset plan: all sections collapsed. Saved plans restore exactly as saved.</a:t>
-            </a:r>
-          </a:p>
-        </p:txBody>
-      </p:sp>
-      <p:sp>
-        <p:nvSpPr>
-          <p:cNvPr id="9" name="Rectangle 8"/>
-          <p:cNvSpPr/>
-          <p:nvPr/>
-        </p:nvSpPr>
-        <p:spPr>
-          <a:xfrm>
-            <a:off x="8311896" y="1143000"/>
-            <a:ext cx="82296" cy="4526280"/>
-          </a:xfrm>
-          <a:prstGeom prst="rect">
-            <a:avLst/>
-          </a:prstGeom>
-          <a:solidFill>
-            <a:srgbClr val="429761"/>
-          </a:solidFill>
-          <a:ln>
-            <a:noFill/>
-          </a:ln>
-        </p:spPr>
-        <p:style>
-          <a:lnRef idx="1">
-            <a:schemeClr val="accent1"/>
-          </a:lnRef>
-          <a:fillRef idx="3">
-            <a:schemeClr val="accent1"/>
-          </a:fillRef>
-          <a:effectRef idx="2">
-            <a:schemeClr val="accent1"/>
-          </a:effectRef>
-          <a:fontRef idx="minor">
-            <a:schemeClr val="lt1"/>
-          </a:fontRef>
-        </p:style>
-        <p:txBody>
-          <a:bodyPr rtlCol="0" anchor="ctr"/>
-          <a:lstStyle/>
-          <a:p>
-            <a:pPr algn="ctr"/>
-          </a:p>
-        </p:txBody>
-      </p:sp>
-      <p:sp>
-        <p:nvSpPr>
-          <p:cNvPr id="10" name="Rectangle 9"/>
-          <p:cNvSpPr/>
-          <p:nvPr/>
-        </p:nvSpPr>
-        <p:spPr>
-          <a:xfrm>
-            <a:off x="502920" y="6473952"/>
-            <a:ext cx="11183112" cy="13716"/>
-          </a:xfrm>
-          <a:prstGeom prst="rect">
-            <a:avLst/>
-          </a:prstGeom>
-          <a:solidFill>
-            <a:srgbClr val="D2DCE5"/>
-          </a:solidFill>
-          <a:ln>
-            <a:noFill/>
-          </a:ln>
-        </p:spPr>
-        <p:style>
-          <a:lnRef idx="1">
-            <a:schemeClr val="accent1"/>
-          </a:lnRef>
-          <a:fillRef idx="3">
-            <a:schemeClr val="accent1"/>
-          </a:fillRef>
-          <a:effectRef idx="2">
-            <a:schemeClr val="accent1"/>
-          </a:effectRef>
-          <a:fontRef idx="minor">
-            <a:schemeClr val="lt1"/>
-          </a:fontRef>
-        </p:style>
-        <p:txBody>
           <a:bodyPr rtlCol="0" anchor="ctr"/>
           <a:lstStyle/>
           <a:p>
@@ -10537,7 +9853,7 @@
               </a:defRPr>
             </a:pPr>
             <a:r>
-              <a:t>Retirement Income Planner • Architecture overview • Household-expense, LTC, and plan-chat update</a:t>
+              <a:t>Retirement Income Planner • Architecture overview • Rental, tax-exempt income, and legacy-value update</a:t>
             </a:r>
           </a:p>
         </p:txBody>
@@ -10599,7 +9915,7 @@
               </a:defRPr>
             </a:pPr>
             <a:r>
-              <a:t>IRA enhancements: conversion timing and heir stretch</a:t>
+              <a:t>Post-passing legacy tail and display-only value haircuts</a:t>
             </a:r>
           </a:p>
         </p:txBody>
@@ -10635,7 +9951,7 @@
               </a:defRPr>
             </a:pPr>
             <a:r>
-              <a:t>The model adds account-specific AUM participation, controlled Roth-conversion timing, and post-passing IRA continuation.</a:t>
+              <a:t>The main Asset chart can continue selected assets for ten legacy years and show an after-tax-value approximation without changing projection finance.</a:t>
             </a:r>
           </a:p>
         </p:txBody>
@@ -10648,8 +9964,348 @@
         </p:nvSpPr>
         <p:spPr>
           <a:xfrm>
-            <a:off x="594360" y="1188720"/>
-            <a:ext cx="3429000" cy="4526280"/>
+            <a:off x="502920" y="1097280"/>
+            <a:ext cx="2743200" cy="4617720"/>
+          </a:xfrm>
+          <a:prstGeom prst="roundRect">
+            <a:avLst/>
+          </a:prstGeom>
+          <a:solidFill>
+            <a:srgbClr val="F7EFFF"/>
+          </a:solidFill>
+          <a:ln w="13970">
+            <a:solidFill>
+              <a:srgbClr val="7852B0"/>
+            </a:solidFill>
+          </a:ln>
+        </p:spPr>
+        <p:style>
+          <a:lnRef idx="1">
+            <a:schemeClr val="accent1"/>
+          </a:lnRef>
+          <a:fillRef idx="3">
+            <a:schemeClr val="accent1"/>
+          </a:fillRef>
+          <a:effectRef idx="2">
+            <a:schemeClr val="accent1"/>
+          </a:effectRef>
+          <a:fontRef idx="minor">
+            <a:schemeClr val="lt1"/>
+          </a:fontRef>
+        </p:style>
+        <p:txBody>
+          <a:bodyPr rtlCol="0" anchor="ctr" lIns="182880" rIns="100584" tIns="91440"/>
+          <a:lstStyle/>
+          <a:p>
+            <a:pPr algn="ctr">
+              <a:defRPr sz="1700" b="1">
+                <a:solidFill>
+                  <a:srgbClr val="232D37"/>
+                </a:solidFill>
+                <a:latin typeface="Aptos Display"/>
+              </a:defRPr>
+            </a:pPr>
+            <a:r>
+              <a:t>Stretch rows</a:t>
+            </a:r>
+          </a:p>
+          <a:p>
+            <a:pPr>
+              <a:spcBef>
+                <a:spcPts val="300"/>
+              </a:spcBef>
+              <a:defRPr sz="1200">
+                <a:solidFill>
+                  <a:srgbClr val="232D37"/>
+                </a:solidFill>
+                <a:latin typeface="Aptos"/>
+              </a:defRPr>
+            </a:pPr>
+            <a:r>
+              <a:t>10 pseudo-years after final passing.</a:t>
+            </a:r>
+          </a:p>
+          <a:p>
+            <a:pPr>
+              <a:spcBef>
+                <a:spcPts val="300"/>
+              </a:spcBef>
+              <a:defRPr sz="1200">
+                <a:solidFill>
+                  <a:srgbClr val="232D37"/>
+                </a:solidFill>
+                <a:latin typeface="Aptos"/>
+              </a:defRPr>
+            </a:pPr>
+            <a:r>
+              <a:t>Selected IRA/Roth accounts compound for heirs.</a:t>
+            </a:r>
+          </a:p>
+          <a:p>
+            <a:pPr>
+              <a:spcBef>
+                <a:spcPts val="300"/>
+              </a:spcBef>
+              <a:defRPr sz="1200">
+                <a:solidFill>
+                  <a:srgbClr val="232D37"/>
+                </a:solidFill>
+                <a:latin typeface="Aptos"/>
+              </a:defRPr>
+            </a:pPr>
+            <a:r>
+              <a:t>Continuing non-IDGT brokerage also compounds.</a:t>
+            </a:r>
+          </a:p>
+          <a:p>
+            <a:pPr>
+              <a:spcBef>
+                <a:spcPts val="300"/>
+              </a:spcBef>
+              <a:defRPr sz="1200">
+                <a:solidFill>
+                  <a:srgbClr val="232D37"/>
+                </a:solidFill>
+                <a:latin typeface="Aptos"/>
+              </a:defRPr>
+            </a:pPr>
+            <a:r>
+              <a:t>No expenses, withdrawals, or heir taxes.</a:t>
+            </a:r>
+          </a:p>
+          <a:p>
+            <a:pPr>
+              <a:spcBef>
+                <a:spcPts val="300"/>
+              </a:spcBef>
+              <a:defRPr sz="1200">
+                <a:solidFill>
+                  <a:srgbClr val="232D37"/>
+                </a:solidFill>
+                <a:latin typeface="Aptos"/>
+              </a:defRPr>
+            </a:pPr>
+            <a:r>
+              <a:t>IDGT bands end with real projection rows.</a:t>
+            </a:r>
+          </a:p>
+        </p:txBody>
+      </p:sp>
+      <p:sp>
+        <p:nvSpPr>
+          <p:cNvPr id="5" name="Rectangle 4"/>
+          <p:cNvSpPr/>
+          <p:nvPr/>
+        </p:nvSpPr>
+        <p:spPr>
+          <a:xfrm>
+            <a:off x="502920" y="1097280"/>
+            <a:ext cx="82296" cy="4617720"/>
+          </a:xfrm>
+          <a:prstGeom prst="rect">
+            <a:avLst/>
+          </a:prstGeom>
+          <a:solidFill>
+            <a:srgbClr val="7852B0"/>
+          </a:solidFill>
+          <a:ln>
+            <a:noFill/>
+          </a:ln>
+        </p:spPr>
+        <p:style>
+          <a:lnRef idx="1">
+            <a:schemeClr val="accent1"/>
+          </a:lnRef>
+          <a:fillRef idx="3">
+            <a:schemeClr val="accent1"/>
+          </a:fillRef>
+          <a:effectRef idx="2">
+            <a:schemeClr val="accent1"/>
+          </a:effectRef>
+          <a:fontRef idx="minor">
+            <a:schemeClr val="lt1"/>
+          </a:fontRef>
+        </p:style>
+        <p:txBody>
+          <a:bodyPr rtlCol="0" anchor="ctr"/>
+          <a:lstStyle/>
+          <a:p>
+            <a:pPr algn="ctr"/>
+          </a:p>
+        </p:txBody>
+      </p:sp>
+      <p:sp>
+        <p:nvSpPr>
+          <p:cNvPr id="6" name="Rounded Rectangle 5"/>
+          <p:cNvSpPr/>
+          <p:nvPr/>
+        </p:nvSpPr>
+        <p:spPr>
+          <a:xfrm>
+            <a:off x="3520440" y="1097280"/>
+            <a:ext cx="2743200" cy="4617720"/>
+          </a:xfrm>
+          <a:prstGeom prst="roundRect">
+            <a:avLst/>
+          </a:prstGeom>
+          <a:solidFill>
+            <a:srgbClr val="EAF9F4"/>
+          </a:solidFill>
+          <a:ln w="13970">
+            <a:solidFill>
+              <a:srgbClr val="429761"/>
+            </a:solidFill>
+          </a:ln>
+        </p:spPr>
+        <p:style>
+          <a:lnRef idx="1">
+            <a:schemeClr val="accent1"/>
+          </a:lnRef>
+          <a:fillRef idx="3">
+            <a:schemeClr val="accent1"/>
+          </a:fillRef>
+          <a:effectRef idx="2">
+            <a:schemeClr val="accent1"/>
+          </a:effectRef>
+          <a:fontRef idx="minor">
+            <a:schemeClr val="lt1"/>
+          </a:fontRef>
+        </p:style>
+        <p:txBody>
+          <a:bodyPr rtlCol="0" anchor="ctr" lIns="182880" rIns="100584" tIns="91440"/>
+          <a:lstStyle/>
+          <a:p>
+            <a:pPr algn="ctr">
+              <a:defRPr sz="1700" b="1">
+                <a:solidFill>
+                  <a:srgbClr val="232D37"/>
+                </a:solidFill>
+                <a:latin typeface="Aptos Display"/>
+              </a:defRPr>
+            </a:pPr>
+            <a:r>
+              <a:t>Basis and brokerage</a:t>
+            </a:r>
+          </a:p>
+          <a:p>
+            <a:pPr>
+              <a:spcBef>
+                <a:spcPts val="300"/>
+              </a:spcBef>
+              <a:defRPr sz="1200">
+                <a:solidFill>
+                  <a:srgbClr val="232D37"/>
+                </a:solidFill>
+                <a:latin typeface="Aptos"/>
+              </a:defRPr>
+            </a:pPr>
+            <a:r>
+              <a:t>Non-IDGT basis steps up to value at passing.</a:t>
+            </a:r>
+          </a:p>
+          <a:p>
+            <a:pPr>
+              <a:spcBef>
+                <a:spcPts val="300"/>
+              </a:spcBef>
+              <a:defRPr sz="1200">
+                <a:solidFill>
+                  <a:srgbClr val="232D37"/>
+                </a:solidFill>
+                <a:latin typeface="Aptos"/>
+              </a:defRPr>
+            </a:pPr>
+            <a:r>
+              <a:t>Thereafter basis erodes with inflation while value grows.</a:t>
+            </a:r>
+          </a:p>
+          <a:p>
+            <a:pPr>
+              <a:spcBef>
+                <a:spcPts val="300"/>
+              </a:spcBef>
+              <a:defRPr sz="1200">
+                <a:solidFill>
+                  <a:srgbClr val="232D37"/>
+                </a:solidFill>
+                <a:latin typeface="Aptos"/>
+              </a:defRPr>
+            </a:pPr>
+            <a:r>
+              <a:t>Stretch-year unrealized gain is growth since passing.</a:t>
+            </a:r>
+          </a:p>
+          <a:p>
+            <a:pPr>
+              <a:spcBef>
+                <a:spcPts val="300"/>
+              </a:spcBef>
+              <a:defRPr sz="1200">
+                <a:solidFill>
+                  <a:srgbClr val="232D37"/>
+                </a:solidFill>
+                <a:latin typeface="Aptos"/>
+              </a:defRPr>
+            </a:pPr>
+            <a:r>
+              <a:t>Cost-basis line can show this relationship.</a:t>
+            </a:r>
+          </a:p>
+        </p:txBody>
+      </p:sp>
+      <p:sp>
+        <p:nvSpPr>
+          <p:cNvPr id="7" name="Rectangle 6"/>
+          <p:cNvSpPr/>
+          <p:nvPr/>
+        </p:nvSpPr>
+        <p:spPr>
+          <a:xfrm>
+            <a:off x="3520440" y="1097280"/>
+            <a:ext cx="82296" cy="4617720"/>
+          </a:xfrm>
+          <a:prstGeom prst="rect">
+            <a:avLst/>
+          </a:prstGeom>
+          <a:solidFill>
+            <a:srgbClr val="429761"/>
+          </a:solidFill>
+          <a:ln>
+            <a:noFill/>
+          </a:ln>
+        </p:spPr>
+        <p:style>
+          <a:lnRef idx="1">
+            <a:schemeClr val="accent1"/>
+          </a:lnRef>
+          <a:fillRef idx="3">
+            <a:schemeClr val="accent1"/>
+          </a:fillRef>
+          <a:effectRef idx="2">
+            <a:schemeClr val="accent1"/>
+          </a:effectRef>
+          <a:fontRef idx="minor">
+            <a:schemeClr val="lt1"/>
+          </a:fontRef>
+        </p:style>
+        <p:txBody>
+          <a:bodyPr rtlCol="0" anchor="ctr"/>
+          <a:lstStyle/>
+          <a:p>
+            <a:pPr algn="ctr"/>
+          </a:p>
+        </p:txBody>
+      </p:sp>
+      <p:sp>
+        <p:nvSpPr>
+          <p:cNvPr id="8" name="Rounded Rectangle 7"/>
+          <p:cNvSpPr/>
+          <p:nvPr/>
+        </p:nvSpPr>
+        <p:spPr>
+          <a:xfrm>
+            <a:off x="6537960" y="1097280"/>
+            <a:ext cx="2423160" cy="4617720"/>
           </a:xfrm>
           <a:prstGeom prst="roundRect">
             <a:avLst/>
@@ -10690,7 +10346,7 @@
               </a:defRPr>
             </a:pPr>
             <a:r>
-              <a:t>Conversion start age</a:t>
+              <a:t>Devalue pair 1</a:t>
             </a:r>
           </a:p>
           <a:p>
@@ -10706,7 +10362,7 @@
               </a:defRPr>
             </a:pPr>
             <a:r>
-              <a:t>IRA conversion begins at max(current age, convStart).</a:t>
+              <a:t>Before last passing</a:t>
             </a:r>
           </a:p>
           <a:p>
@@ -10722,7 +10378,7 @@
               </a:defRPr>
             </a:pPr>
             <a:r>
-              <a:t>Before then conversion is zero; RMD behavior is unchanged.</a:t>
+              <a:t>Default: 10% LTCG gain haircut; 10% pre-tax IRA haircut</a:t>
             </a:r>
           </a:p>
           <a:p>
@@ -10738,21 +10394,21 @@
               </a:defRPr>
             </a:pPr>
             <a:r>
-              <a:t>Paired slider + number input uses dynamic person-age bounds.</a:t>
-            </a:r>
-          </a:p>
-        </p:txBody>
-      </p:sp>
-      <p:sp>
-        <p:nvSpPr>
-          <p:cNvPr id="5" name="Rectangle 4"/>
+              <a:t>Saved display-only controls</a:t>
+            </a:r>
+          </a:p>
+        </p:txBody>
+      </p:sp>
+      <p:sp>
+        <p:nvSpPr>
+          <p:cNvPr id="9" name="Rectangle 8"/>
           <p:cNvSpPr/>
           <p:nvPr/>
         </p:nvSpPr>
         <p:spPr>
           <a:xfrm>
-            <a:off x="594360" y="1188720"/>
-            <a:ext cx="82296" cy="4526280"/>
+            <a:off x="6537960" y="1097280"/>
+            <a:ext cx="82296" cy="4617720"/>
           </a:xfrm>
           <a:prstGeom prst="rect">
             <a:avLst/>
@@ -10788,14 +10444,14 @@
       </p:sp>
       <p:sp>
         <p:nvSpPr>
-          <p:cNvPr id="6" name="Rounded Rectangle 5"/>
+          <p:cNvPr id="10" name="Rounded Rectangle 9"/>
           <p:cNvSpPr/>
           <p:nvPr/>
         </p:nvSpPr>
         <p:spPr>
           <a:xfrm>
-            <a:off x="4389120" y="1188720"/>
-            <a:ext cx="3429000" cy="4526280"/>
+            <a:off x="9235440" y="1097280"/>
+            <a:ext cx="2423160" cy="4617720"/>
           </a:xfrm>
           <a:prstGeom prst="roundRect">
             <a:avLst/>
@@ -10836,7 +10492,7 @@
               </a:defRPr>
             </a:pPr>
             <a:r>
-              <a:t>AUM participation</a:t>
+              <a:t>Devalue pair 2</a:t>
             </a:r>
           </a:p>
           <a:p>
@@ -10852,7 +10508,7 @@
               </a:defRPr>
             </a:pPr>
             <a:r>
-              <a:t>IRA and Roth may opt into the household AUM balance.</a:t>
+              <a:t>Heir years</a:t>
             </a:r>
           </a:p>
           <a:p>
@@ -10868,7 +10524,7 @@
               </a:defRPr>
             </a:pPr>
             <a:r>
-              <a:t>They count while owned or inherited by a living spouse.</a:t>
+              <a:t>Default: 24% LTCG gain haircut; 40% pre-tax IRA haircut</a:t>
             </a:r>
           </a:p>
           <a:p>
@@ -10884,21 +10540,21 @@
               </a:defRPr>
             </a:pPr>
             <a:r>
-              <a:t>Heir-held stretch balances do not count toward AUM.</a:t>
-            </a:r>
-          </a:p>
-        </p:txBody>
-      </p:sp>
-      <p:sp>
-        <p:nvSpPr>
-          <p:cNvPr id="7" name="Rectangle 6"/>
+              <a:t>Asset-band transformation only; no recompute</a:t>
+            </a:r>
+          </a:p>
+        </p:txBody>
+      </p:sp>
+      <p:sp>
+        <p:nvSpPr>
+          <p:cNvPr id="11" name="Rectangle 10"/>
           <p:cNvSpPr/>
           <p:nvPr/>
         </p:nvSpPr>
         <p:spPr>
           <a:xfrm>
-            <a:off x="4389120" y="1188720"/>
-            <a:ext cx="82296" cy="4526280"/>
+            <a:off x="9235440" y="1097280"/>
+            <a:ext cx="82296" cy="4617720"/>
           </a:xfrm>
           <a:prstGeom prst="rect">
             <a:avLst/>
@@ -10934,25 +10590,23 @@
       </p:sp>
       <p:sp>
         <p:nvSpPr>
-          <p:cNvPr id="8" name="Rounded Rectangle 7"/>
+          <p:cNvPr id="12" name="Rectangle 11"/>
           <p:cNvSpPr/>
           <p:nvPr/>
         </p:nvSpPr>
         <p:spPr>
           <a:xfrm>
-            <a:off x="8183879" y="1188720"/>
-            <a:ext cx="3429000" cy="4526280"/>
-          </a:xfrm>
-          <a:prstGeom prst="roundRect">
-            <a:avLst/>
-          </a:prstGeom>
-          <a:solidFill>
-            <a:srgbClr val="F7EFFF"/>
-          </a:solidFill>
-          <a:ln w="13970">
-            <a:solidFill>
-              <a:srgbClr val="7852B0"/>
-            </a:solidFill>
+            <a:off x="502920" y="6473952"/>
+            <a:ext cx="11183112" cy="13716"/>
+          </a:xfrm>
+          <a:prstGeom prst="rect">
+            <a:avLst/>
+          </a:prstGeom>
+          <a:solidFill>
+            <a:srgbClr val="D2DCE5"/>
+          </a:solidFill>
+          <a:ln>
+            <a:noFill/>
           </a:ln>
         </p:spPr>
         <p:style>
@@ -10970,107 +10624,6 @@
           </a:fontRef>
         </p:style>
         <p:txBody>
-          <a:bodyPr rtlCol="0" anchor="ctr" lIns="182880" rIns="100584" tIns="91440"/>
-          <a:lstStyle/>
-          <a:p>
-            <a:pPr algn="ctr">
-              <a:defRPr sz="1700" b="1">
-                <a:solidFill>
-                  <a:srgbClr val="232D37"/>
-                </a:solidFill>
-                <a:latin typeface="Aptos Display"/>
-              </a:defRPr>
-            </a:pPr>
-            <a:r>
-              <a:t>IRA stretch tail</a:t>
-            </a:r>
-          </a:p>
-          <a:p>
-            <a:pPr>
-              <a:spcBef>
-                <a:spcPts val="300"/>
-              </a:spcBef>
-              <a:defRPr sz="1200">
-                <a:solidFill>
-                  <a:srgbClr val="232D37"/>
-                </a:solidFill>
-                <a:latin typeface="Aptos"/>
-              </a:defRPr>
-            </a:pPr>
-            <a:r>
-              <a:t>Checked accounts keep compounding for 10 years after the second passing.</a:t>
-            </a:r>
-          </a:p>
-          <a:p>
-            <a:pPr>
-              <a:spcBef>
-                <a:spcPts val="300"/>
-              </a:spcBef>
-              <a:defRPr sz="1200">
-                <a:solidFill>
-                  <a:srgbClr val="232D37"/>
-                </a:solidFill>
-                <a:latin typeface="Aptos"/>
-              </a:defRPr>
-            </a:pPr>
-            <a:r>
-              <a:t>No heir RMDs, withdrawals, conversions, or heir tax modeling.</a:t>
-            </a:r>
-          </a:p>
-          <a:p>
-            <a:pPr>
-              <a:spcBef>
-                <a:spcPts val="300"/>
-              </a:spcBef>
-              <a:defRPr sz="1200">
-                <a:solidFill>
-                  <a:srgbClr val="232D37"/>
-                </a:solidFill>
-                <a:latin typeface="Aptos"/>
-              </a:defRPr>
-            </a:pPr>
-            <a:r>
-              <a:t>Extra pseudo-rows extend only the main Asset chart and corresponding IRA/Roth export sheets.</a:t>
-            </a:r>
-          </a:p>
-        </p:txBody>
-      </p:sp>
-      <p:sp>
-        <p:nvSpPr>
-          <p:cNvPr id="9" name="Rectangle 8"/>
-          <p:cNvSpPr/>
-          <p:nvPr/>
-        </p:nvSpPr>
-        <p:spPr>
-          <a:xfrm>
-            <a:off x="8183879" y="1188720"/>
-            <a:ext cx="82296" cy="4526280"/>
-          </a:xfrm>
-          <a:prstGeom prst="rect">
-            <a:avLst/>
-          </a:prstGeom>
-          <a:solidFill>
-            <a:srgbClr val="7852B0"/>
-          </a:solidFill>
-          <a:ln>
-            <a:noFill/>
-          </a:ln>
-        </p:spPr>
-        <p:style>
-          <a:lnRef idx="1">
-            <a:schemeClr val="accent1"/>
-          </a:lnRef>
-          <a:fillRef idx="3">
-            <a:schemeClr val="accent1"/>
-          </a:fillRef>
-          <a:effectRef idx="2">
-            <a:schemeClr val="accent1"/>
-          </a:effectRef>
-          <a:fontRef idx="minor">
-            <a:schemeClr val="lt1"/>
-          </a:fontRef>
-        </p:style>
-        <p:txBody>
           <a:bodyPr rtlCol="0" anchor="ctr"/>
           <a:lstStyle/>
           <a:p>
@@ -11080,50 +10633,7 @@
       </p:sp>
       <p:sp>
         <p:nvSpPr>
-          <p:cNvPr id="10" name="Rectangle 9"/>
-          <p:cNvSpPr/>
-          <p:nvPr/>
-        </p:nvSpPr>
-        <p:spPr>
-          <a:xfrm>
-            <a:off x="502920" y="6473952"/>
-            <a:ext cx="11183112" cy="13716"/>
-          </a:xfrm>
-          <a:prstGeom prst="rect">
-            <a:avLst/>
-          </a:prstGeom>
-          <a:solidFill>
-            <a:srgbClr val="D2DCE5"/>
-          </a:solidFill>
-          <a:ln>
-            <a:noFill/>
-          </a:ln>
-        </p:spPr>
-        <p:style>
-          <a:lnRef idx="1">
-            <a:schemeClr val="accent1"/>
-          </a:lnRef>
-          <a:fillRef idx="3">
-            <a:schemeClr val="accent1"/>
-          </a:fillRef>
-          <a:effectRef idx="2">
-            <a:schemeClr val="accent1"/>
-          </a:effectRef>
-          <a:fontRef idx="minor">
-            <a:schemeClr val="lt1"/>
-          </a:fontRef>
-        </p:style>
-        <p:txBody>
-          <a:bodyPr rtlCol="0" anchor="ctr"/>
-          <a:lstStyle/>
-          <a:p>
-            <a:pPr algn="ctr"/>
-          </a:p>
-        </p:txBody>
-      </p:sp>
-      <p:sp>
-        <p:nvSpPr>
-          <p:cNvPr id="11" name="TextBox 10"/>
+          <p:cNvPr id="13" name="TextBox 12"/>
           <p:cNvSpPr txBox="1"/>
           <p:nvPr/>
         </p:nvSpPr>
@@ -11152,7 +10662,7 @@
               </a:defRPr>
             </a:pPr>
             <a:r>
-              <a:t>Retirement Income Planner • Architecture overview • Household-expense, LTC, and plan-chat update</a:t>
+              <a:t>Retirement Income Planner • Architecture overview • Rental, tax-exempt income, and legacy-value update</a:t>
             </a:r>
           </a:p>
         </p:txBody>
@@ -11214,7 +10724,7 @@
               </a:defRPr>
             </a:pPr>
             <a:r>
-              <a:t>Ask about this plan: browser-side, snapshot-grounded chat</a:t>
+              <a:t>Display changes are row-driven and interactive</a:t>
             </a:r>
           </a:p>
         </p:txBody>
@@ -11250,7 +10760,7 @@
               </a:defRPr>
             </a:pPr>
             <a:r>
-              <a:t>The new chat feature sends a freshly built, read-only plan snapshot directly from the browser to a selected provider API.</a:t>
+              <a:t>New outputs are presented in income, asset, expense, export, and chat views without relocating financial logic out of Compute.</a:t>
             </a:r>
           </a:p>
         </p:txBody>
@@ -11263,8 +10773,8 @@
         </p:nvSpPr>
         <p:spPr>
           <a:xfrm>
-            <a:off x="502920" y="1143000"/>
-            <a:ext cx="3383280" cy="4526280"/>
+            <a:off x="548640" y="1143000"/>
+            <a:ext cx="3337560" cy="4526280"/>
           </a:xfrm>
           <a:prstGeom prst="roundRect">
             <a:avLst/>
@@ -11305,7 +10815,7 @@
               </a:defRPr>
             </a:pPr>
             <a:r>
-              <a:t>Snapshot</a:t>
+              <a:t>Income and tax charts</a:t>
             </a:r>
           </a:p>
           <a:p>
@@ -11321,7 +10831,7 @@
               </a:defRPr>
             </a:pPr>
             <a:r>
-              <a:t>Assumptions, enabled sources, and annual projection CSV.</a:t>
+              <a:t>Income stack adds rental depreciation and tax-exempt income.</a:t>
             </a:r>
           </a:p>
           <a:p>
@@ -11337,7 +10847,7 @@
               </a:defRPr>
             </a:pPr>
             <a:r>
-              <a:t>Includes LTC, expenses, taxes, balances, and IRA-stretch tail.</a:t>
+              <a:t>Taxable-SS calculation captures tax-exempt income in provisional income.</a:t>
             </a:r>
           </a:p>
           <a:p>
@@ -11353,7 +10863,7 @@
               </a:defRPr>
             </a:pPr>
             <a:r>
-              <a:t>Built anew for every question from state and lastProjection.</a:t>
+              <a:t>Tax tooltips use the applied deduction and tax details from rows.</a:t>
             </a:r>
           </a:p>
         </p:txBody>
@@ -11366,7 +10876,7 @@
         </p:nvSpPr>
         <p:spPr>
           <a:xfrm>
-            <a:off x="502920" y="1143000"/>
+            <a:off x="548640" y="1143000"/>
             <a:ext cx="82296" cy="4526280"/>
           </a:xfrm>
           <a:prstGeom prst="rect">
@@ -11409,8 +10919,8 @@
         </p:nvSpPr>
         <p:spPr>
           <a:xfrm>
-            <a:off x="4407408" y="1143000"/>
-            <a:ext cx="3383280" cy="4526280"/>
+            <a:off x="4416552" y="1143000"/>
+            <a:ext cx="3337560" cy="4526280"/>
           </a:xfrm>
           <a:prstGeom prst="roundRect">
             <a:avLst/>
@@ -11451,7 +10961,7 @@
               </a:defRPr>
             </a:pPr>
             <a:r>
-              <a:t>Provider integration</a:t>
+              <a:t>Asset chart</a:t>
             </a:r>
           </a:p>
           <a:p>
@@ -11467,7 +10977,7 @@
               </a:defRPr>
             </a:pPr>
             <a:r>
-              <a:t>Anthropic Claude or Google Gemini.</a:t>
+              <a:t>Adds brokerage cost-basis dashed line when meaningful.</a:t>
             </a:r>
           </a:p>
           <a:p>
@@ -11483,7 +10993,7 @@
               </a:defRPr>
             </a:pPr>
             <a:r>
-              <a:t>Streaming fetch requests; no application backend.</a:t>
+              <a:t>Four saved devalue sliders distinguish real years and heir years.</a:t>
             </a:r>
           </a:p>
           <a:p>
@@ -11499,7 +11009,105 @@
               </a:defRPr>
             </a:pPr>
             <a:r>
-              <a:t>Provider-specific request and SSE parsing.</a:t>
+              <a:t>Tooltips disclose face value before devalue and reinvested excess.</a:t>
+            </a:r>
+          </a:p>
+        </p:txBody>
+      </p:sp>
+      <p:sp>
+        <p:nvSpPr>
+          <p:cNvPr id="7" name="Rectangle 6"/>
+          <p:cNvSpPr/>
+          <p:nvPr/>
+        </p:nvSpPr>
+        <p:spPr>
+          <a:xfrm>
+            <a:off x="4416552" y="1143000"/>
+            <a:ext cx="82296" cy="4526280"/>
+          </a:xfrm>
+          <a:prstGeom prst="rect">
+            <a:avLst/>
+          </a:prstGeom>
+          <a:solidFill>
+            <a:srgbClr val="7852B0"/>
+          </a:solidFill>
+          <a:ln>
+            <a:noFill/>
+          </a:ln>
+        </p:spPr>
+        <p:style>
+          <a:lnRef idx="1">
+            <a:schemeClr val="accent1"/>
+          </a:lnRef>
+          <a:fillRef idx="3">
+            <a:schemeClr val="accent1"/>
+          </a:fillRef>
+          <a:effectRef idx="2">
+            <a:schemeClr val="accent1"/>
+          </a:effectRef>
+          <a:fontRef idx="minor">
+            <a:schemeClr val="lt1"/>
+          </a:fontRef>
+        </p:style>
+        <p:txBody>
+          <a:bodyPr rtlCol="0" anchor="ctr"/>
+          <a:lstStyle/>
+          <a:p>
+            <a:pPr algn="ctr"/>
+          </a:p>
+        </p:txBody>
+      </p:sp>
+      <p:sp>
+        <p:nvSpPr>
+          <p:cNvPr id="8" name="Rounded Rectangle 7"/>
+          <p:cNvSpPr/>
+          <p:nvPr/>
+        </p:nvSpPr>
+        <p:spPr>
+          <a:xfrm>
+            <a:off x="8284464" y="1143000"/>
+            <a:ext cx="3337560" cy="4526280"/>
+          </a:xfrm>
+          <a:prstGeom prst="roundRect">
+            <a:avLst/>
+          </a:prstGeom>
+          <a:solidFill>
+            <a:srgbClr val="EAF9F4"/>
+          </a:solidFill>
+          <a:ln w="13970">
+            <a:solidFill>
+              <a:srgbClr val="429761"/>
+            </a:solidFill>
+          </a:ln>
+        </p:spPr>
+        <p:style>
+          <a:lnRef idx="1">
+            <a:schemeClr val="accent1"/>
+          </a:lnRef>
+          <a:fillRef idx="3">
+            <a:schemeClr val="accent1"/>
+          </a:fillRef>
+          <a:effectRef idx="2">
+            <a:schemeClr val="accent1"/>
+          </a:effectRef>
+          <a:fontRef idx="minor">
+            <a:schemeClr val="lt1"/>
+          </a:fontRef>
+        </p:style>
+        <p:txBody>
+          <a:bodyPr rtlCol="0" anchor="ctr" lIns="182880" rIns="100584" tIns="91440"/>
+          <a:lstStyle/>
+          <a:p>
+            <a:pPr algn="ctr">
+              <a:defRPr sz="1700" b="1">
+                <a:solidFill>
+                  <a:srgbClr val="232D37"/>
+                </a:solidFill>
+                <a:latin typeface="Aptos Display"/>
+              </a:defRPr>
+            </a:pPr>
+            <a:r>
+              <a:t>Shared consumers</a:t>
             </a:r>
           </a:p>
           <a:p>
@@ -11515,27 +11123,59 @@
               </a:defRPr>
             </a:pPr>
             <a:r>
-              <a:t>In-memory history: last 20 messages.</a:t>
-            </a:r>
-          </a:p>
-        </p:txBody>
-      </p:sp>
-      <p:sp>
-        <p:nvSpPr>
-          <p:cNvPr id="7" name="Rectangle 6"/>
+              <a:t>Expense chart shows excess reinvestment when material.</a:t>
+            </a:r>
+          </a:p>
+          <a:p>
+            <a:pPr>
+              <a:spcBef>
+                <a:spcPts val="300"/>
+              </a:spcBef>
+              <a:defRPr sz="1200">
+                <a:solidFill>
+                  <a:srgbClr val="232D37"/>
+                </a:solidFill>
+                <a:latin typeface="Aptos"/>
+              </a:defRPr>
+            </a:pPr>
+            <a:r>
+              <a:t>Excel adds rental, tax-exempt, senior-deduction, and legacy-tail fields.</a:t>
+            </a:r>
+          </a:p>
+          <a:p>
+            <a:pPr>
+              <a:spcBef>
+                <a:spcPts val="300"/>
+              </a:spcBef>
+              <a:defRPr sz="1200">
+                <a:solidFill>
+                  <a:srgbClr val="232D37"/>
+                </a:solidFill>
+                <a:latin typeface="Aptos"/>
+              </a:defRPr>
+            </a:pPr>
+            <a:r>
+              <a:t>Chat snapshot expands only through explicit selected columns.</a:t>
+            </a:r>
+          </a:p>
+        </p:txBody>
+      </p:sp>
+      <p:sp>
+        <p:nvSpPr>
+          <p:cNvPr id="9" name="Rectangle 8"/>
           <p:cNvSpPr/>
           <p:nvPr/>
         </p:nvSpPr>
         <p:spPr>
           <a:xfrm>
-            <a:off x="4407408" y="1143000"/>
+            <a:off x="8284464" y="1143000"/>
             <a:ext cx="82296" cy="4526280"/>
           </a:xfrm>
           <a:prstGeom prst="rect">
             <a:avLst/>
           </a:prstGeom>
           <a:solidFill>
-            <a:srgbClr val="7852B0"/>
+            <a:srgbClr val="429761"/>
           </a:solidFill>
           <a:ln>
             <a:noFill/>
@@ -11565,25 +11205,23 @@
       </p:sp>
       <p:sp>
         <p:nvSpPr>
-          <p:cNvPr id="8" name="Rounded Rectangle 7"/>
+          <p:cNvPr id="10" name="Rectangle 9"/>
           <p:cNvSpPr/>
           <p:nvPr/>
         </p:nvSpPr>
         <p:spPr>
           <a:xfrm>
-            <a:off x="8311896" y="1143000"/>
-            <a:ext cx="3383280" cy="4526280"/>
-          </a:xfrm>
-          <a:prstGeom prst="roundRect">
-            <a:avLst/>
-          </a:prstGeom>
-          <a:solidFill>
-            <a:srgbClr val="FFF6E8"/>
-          </a:solidFill>
-          <a:ln w="13970">
-            <a:solidFill>
-              <a:srgbClr val="E5892A"/>
-            </a:solidFill>
+            <a:off x="502920" y="6473952"/>
+            <a:ext cx="11183112" cy="13716"/>
+          </a:xfrm>
+          <a:prstGeom prst="rect">
+            <a:avLst/>
+          </a:prstGeom>
+          <a:solidFill>
+            <a:srgbClr val="D2DCE5"/>
+          </a:solidFill>
+          <a:ln>
+            <a:noFill/>
           </a:ln>
         </p:spPr>
         <p:style>
@@ -11601,150 +11239,6 @@
           </a:fontRef>
         </p:style>
         <p:txBody>
-          <a:bodyPr rtlCol="0" anchor="ctr" lIns="182880" rIns="100584" tIns="91440"/>
-          <a:lstStyle/>
-          <a:p>
-            <a:pPr algn="ctr">
-              <a:defRPr sz="1700" b="1">
-                <a:solidFill>
-                  <a:srgbClr val="232D37"/>
-                </a:solidFill>
-                <a:latin typeface="Aptos Display"/>
-              </a:defRPr>
-            </a:pPr>
-            <a:r>
-              <a:t>Privacy boundaries</a:t>
-            </a:r>
-          </a:p>
-          <a:p>
-            <a:pPr>
-              <a:spcBef>
-                <a:spcPts val="300"/>
-              </a:spcBef>
-              <a:defRPr sz="1200">
-                <a:solidFill>
-                  <a:srgbClr val="232D37"/>
-                </a:solidFill>
-                <a:latin typeface="Aptos"/>
-              </a:defRPr>
-            </a:pPr>
-            <a:r>
-              <a:t>Names omitted unless Send names is selected; birth date is never sent.</a:t>
-            </a:r>
-          </a:p>
-          <a:p>
-            <a:pPr>
-              <a:spcBef>
-                <a:spcPts val="300"/>
-              </a:spcBef>
-              <a:defRPr sz="1200">
-                <a:solidFill>
-                  <a:srgbClr val="232D37"/>
-                </a:solidFill>
-                <a:latin typeface="Aptos"/>
-              </a:defRPr>
-            </a:pPr>
-            <a:r>
-              <a:t>Keys stored per provider in session storage or optional local storage—not plan state.</a:t>
-            </a:r>
-          </a:p>
-          <a:p>
-            <a:pPr>
-              <a:spcBef>
-                <a:spcPts val="300"/>
-              </a:spcBef>
-              <a:defRPr sz="1200">
-                <a:solidFill>
-                  <a:srgbClr val="232D37"/>
-                </a:solidFill>
-                <a:latin typeface="Aptos"/>
-              </a:defRPr>
-            </a:pPr>
-            <a:r>
-              <a:t>Preview exactly what is sent; provider/free-tier privacy is disclosed.</a:t>
-            </a:r>
-          </a:p>
-        </p:txBody>
-      </p:sp>
-      <p:sp>
-        <p:nvSpPr>
-          <p:cNvPr id="9" name="Rectangle 8"/>
-          <p:cNvSpPr/>
-          <p:nvPr/>
-        </p:nvSpPr>
-        <p:spPr>
-          <a:xfrm>
-            <a:off x="8311896" y="1143000"/>
-            <a:ext cx="82296" cy="4526280"/>
-          </a:xfrm>
-          <a:prstGeom prst="rect">
-            <a:avLst/>
-          </a:prstGeom>
-          <a:solidFill>
-            <a:srgbClr val="E5892A"/>
-          </a:solidFill>
-          <a:ln>
-            <a:noFill/>
-          </a:ln>
-        </p:spPr>
-        <p:style>
-          <a:lnRef idx="1">
-            <a:schemeClr val="accent1"/>
-          </a:lnRef>
-          <a:fillRef idx="3">
-            <a:schemeClr val="accent1"/>
-          </a:fillRef>
-          <a:effectRef idx="2">
-            <a:schemeClr val="accent1"/>
-          </a:effectRef>
-          <a:fontRef idx="minor">
-            <a:schemeClr val="lt1"/>
-          </a:fontRef>
-        </p:style>
-        <p:txBody>
-          <a:bodyPr rtlCol="0" anchor="ctr"/>
-          <a:lstStyle/>
-          <a:p>
-            <a:pPr algn="ctr"/>
-          </a:p>
-        </p:txBody>
-      </p:sp>
-      <p:sp>
-        <p:nvSpPr>
-          <p:cNvPr id="10" name="Rectangle 9"/>
-          <p:cNvSpPr/>
-          <p:nvPr/>
-        </p:nvSpPr>
-        <p:spPr>
-          <a:xfrm>
-            <a:off x="502920" y="6473952"/>
-            <a:ext cx="11183112" cy="13716"/>
-          </a:xfrm>
-          <a:prstGeom prst="rect">
-            <a:avLst/>
-          </a:prstGeom>
-          <a:solidFill>
-            <a:srgbClr val="D2DCE5"/>
-          </a:solidFill>
-          <a:ln>
-            <a:noFill/>
-          </a:ln>
-        </p:spPr>
-        <p:style>
-          <a:lnRef idx="1">
-            <a:schemeClr val="accent1"/>
-          </a:lnRef>
-          <a:fillRef idx="3">
-            <a:schemeClr val="accent1"/>
-          </a:fillRef>
-          <a:effectRef idx="2">
-            <a:schemeClr val="accent1"/>
-          </a:effectRef>
-          <a:fontRef idx="minor">
-            <a:schemeClr val="lt1"/>
-          </a:fontRef>
-        </p:style>
-        <p:txBody>
           <a:bodyPr rtlCol="0" anchor="ctr"/>
           <a:lstStyle/>
           <a:p>
@@ -11783,7 +11277,7 @@
               </a:defRPr>
             </a:pPr>
             <a:r>
-              <a:t>Retirement Income Planner • Architecture overview • Household-expense, LTC, and plan-chat update</a:t>
+              <a:t>Retirement Income Planner • Architecture overview • Rental, tax-exempt income, and legacy-value update</a:t>
             </a:r>
           </a:p>
         </p:txBody>

--- a/docs/retirement_income_planner_architecture.pptx
+++ b/docs/retirement_income_planner_architecture.pptx
@@ -14,8 +14,6 @@
     <p:sldId id="262" r:id="rId13"/>
     <p:sldId id="263" r:id="rId14"/>
     <p:sldId id="264" r:id="rId15"/>
-    <p:sldId id="265" r:id="rId16"/>
-    <p:sldId id="266" r:id="rId17"/>
   </p:sldIdLst>
   <p:sldSz cx="12191695" cy="6858000" type="screen4x3"/>
   <p:notesSz cx="6858000" cy="9144000"/>
@@ -3216,7 +3214,7 @@
               </a:defRPr>
             </a:pPr>
             <a:r>
-              <a:t>Updated architecture: multiple rentals, tax-exempt portfolio income, senior deduction, excess reinvestment, and legacy-value views</a:t>
+              <a:t>Updated architecture: independently enabled assumptions, a shared Markdown viewer, and a dedicated Usage guide</a:t>
             </a:r>
           </a:p>
         </p:txBody>
@@ -3287,7 +3285,7 @@
               </a:defRPr>
             </a:pPr>
             <a:r>
-              <a:t>Household assumptions and income cards</a:t>
+              <a:t>Household &amp; assumption controls</a:t>
             </a:r>
           </a:p>
           <a:p>
@@ -3303,7 +3301,7 @@
               </a:defRPr>
             </a:pPr>
             <a:r>
-              <a:t>Supports multiple rentals and portfolio options</a:t>
+              <a:t>Enable / Hide state saved with plan</a:t>
             </a:r>
           </a:p>
         </p:txBody>
@@ -3417,7 +3415,7 @@
               </a:defRPr>
             </a:pPr>
             <a:r>
-              <a:t>Annual projection + converged tax</a:t>
+              <a:t>Projection consumes only enabled assumptions</a:t>
             </a:r>
           </a:p>
           <a:p>
@@ -3433,7 +3431,7 @@
               </a:defRPr>
             </a:pPr>
             <a:r>
-              <a:t>Income, cash flow, tax, basis, legacy tail</a:t>
+              <a:t>One annual derived-data contract</a:t>
             </a:r>
           </a:p>
         </p:txBody>
@@ -3547,7 +3545,7 @@
               </a:defRPr>
             </a:pPr>
             <a:r>
-              <a:t>Charts, sliders, export, formulas, notes, chat</a:t>
+              <a:t>Charts, Usage, Formulas, Notes, Export, Chat</a:t>
             </a:r>
           </a:p>
           <a:p>
@@ -3563,7 +3561,7 @@
               </a:defRPr>
             </a:pPr>
             <a:r>
-              <a:t>Projection-row consumers</a:t>
+              <a:t>Read-only projection consumers</a:t>
             </a:r>
           </a:p>
         </p:txBody>
@@ -3803,7 +3801,7 @@
               </a:defRPr>
             </a:pPr>
             <a:r>
-              <a:t>Core boundary preserved</a:t>
+              <a:t>New focus</a:t>
             </a:r>
           </a:p>
           <a:p>
@@ -3819,7 +3817,7 @@
               </a:defRPr>
             </a:pPr>
             <a:r>
-              <a:t>State is the only input truth. computeProjection() remains the only source for financial outputs; all views consume its rows.</a:t>
+              <a:t>Assumptions now follow the same Enable / Hide separation as income cards, while user documentation moves into reusable Markdown pages.</a:t>
             </a:r>
           </a:p>
         </p:txBody>
@@ -3941,1319 +3939,7 @@
               </a:defRPr>
             </a:pPr>
             <a:r>
-              <a:t>Retirement Income Planner • Architecture overview • Rental, tax-exempt income, and legacy-value update</a:t>
-            </a:r>
-          </a:p>
-        </p:txBody>
-      </p:sp>
-    </p:spTree>
-  </p:cSld>
-  <p:clrMapOvr>
-    <a:masterClrMapping/>
-  </p:clrMapOvr>
-</p:sld>
-</file>
-
-<file path=ppt/slides/slide10.xml><?xml version="1.0" encoding="utf-8"?>
-<p:sld xmlns:a="http://schemas.openxmlformats.org/drawingml/2006/main" xmlns:p="http://schemas.openxmlformats.org/presentationml/2006/main" xmlns:r="http://schemas.openxmlformats.org/officeDocument/2006/relationships">
-  <p:cSld>
-    <p:bg>
-      <p:bgPr>
-        <a:solidFill>
-          <a:srgbClr val="FFFFFF"/>
-        </a:solidFill>
-        <a:effectLst/>
-      </p:bgPr>
-    </p:bg>
-    <p:spTree>
-      <p:nvGrpSpPr>
-        <p:cNvPr id="1" name=""/>
-        <p:cNvGrpSpPr/>
-        <p:nvPr/>
-      </p:nvGrpSpPr>
-      <p:grpSpPr/>
-      <p:sp>
-        <p:nvSpPr>
-          <p:cNvPr id="2" name="TextBox 1"/>
-          <p:cNvSpPr txBox="1"/>
-          <p:nvPr/>
-        </p:nvSpPr>
-        <p:spPr>
-          <a:xfrm>
-            <a:off x="502920" y="246888"/>
-            <a:ext cx="11155680" cy="438912"/>
-          </a:xfrm>
-          <a:prstGeom prst="rect">
-            <a:avLst/>
-          </a:prstGeom>
-          <a:noFill/>
-        </p:spPr>
-        <p:txBody>
-          <a:bodyPr wrap="none" anchor="ctr">
-            <a:spAutoFit/>
-          </a:bodyPr>
-          <a:lstStyle/>
-          <a:p>
-            <a:pPr algn="l">
-              <a:defRPr sz="2700" b="1">
-                <a:solidFill>
-                  <a:srgbClr val="0F2647"/>
-                </a:solidFill>
-                <a:latin typeface="Aptos"/>
-              </a:defRPr>
-            </a:pPr>
-            <a:r>
-              <a:t>State migration preserves older plans</a:t>
-            </a:r>
-          </a:p>
-        </p:txBody>
-      </p:sp>
-      <p:sp>
-        <p:nvSpPr>
-          <p:cNvPr id="3" name="TextBox 2"/>
-          <p:cNvSpPr txBox="1"/>
-          <p:nvPr/>
-        </p:nvSpPr>
-        <p:spPr>
-          <a:xfrm>
-            <a:off x="530352" y="786384"/>
-            <a:ext cx="10972800" cy="228600"/>
-          </a:xfrm>
-          <a:prstGeom prst="rect">
-            <a:avLst/>
-          </a:prstGeom>
-          <a:noFill/>
-        </p:spPr>
-        <p:txBody>
-          <a:bodyPr wrap="none" anchor="ctr">
-            <a:spAutoFit/>
-          </a:bodyPr>
-          <a:lstStyle/>
-          <a:p>
-            <a:pPr algn="l">
-              <a:defRPr sz="1150" b="0">
-                <a:solidFill>
-                  <a:srgbClr val="5D6C7A"/>
-                </a:solidFill>
-                <a:latin typeface="Aptos"/>
-              </a:defRPr>
-            </a:pPr>
-            <a:r>
-              <a:t>hydrateState() remains the compatibility boundary between saved plan formats and the current canonical schema.</a:t>
-            </a:r>
-          </a:p>
-        </p:txBody>
-      </p:sp>
-      <p:sp>
-        <p:nvSpPr>
-          <p:cNvPr id="4" name="Rounded Rectangle 3"/>
-          <p:cNvSpPr/>
-          <p:nvPr/>
-        </p:nvSpPr>
-        <p:spPr>
-          <a:xfrm>
-            <a:off x="502920" y="1143000"/>
-            <a:ext cx="2743200" cy="4526280"/>
-          </a:xfrm>
-          <a:prstGeom prst="roundRect">
-            <a:avLst/>
-          </a:prstGeom>
-          <a:solidFill>
-            <a:srgbClr val="E9F4FF"/>
-          </a:solidFill>
-          <a:ln w="13970">
-            <a:solidFill>
-              <a:srgbClr val="266EB2"/>
-            </a:solidFill>
-          </a:ln>
-        </p:spPr>
-        <p:style>
-          <a:lnRef idx="1">
-            <a:schemeClr val="accent1"/>
-          </a:lnRef>
-          <a:fillRef idx="3">
-            <a:schemeClr val="accent1"/>
-          </a:fillRef>
-          <a:effectRef idx="2">
-            <a:schemeClr val="accent1"/>
-          </a:effectRef>
-          <a:fontRef idx="minor">
-            <a:schemeClr val="lt1"/>
-          </a:fontRef>
-        </p:style>
-        <p:txBody>
-          <a:bodyPr rtlCol="0" anchor="ctr" lIns="182880" rIns="100584" tIns="91440"/>
-          <a:lstStyle/>
-          <a:p>
-            <a:pPr algn="ctr">
-              <a:defRPr sz="1700" b="1">
-                <a:solidFill>
-                  <a:srgbClr val="232D37"/>
-                </a:solidFill>
-                <a:latin typeface="Aptos Display"/>
-              </a:defRPr>
-            </a:pPr>
-            <a:r>
-              <a:t>Legacy rental</a:t>
-            </a:r>
-          </a:p>
-          <a:p>
-            <a:pPr>
-              <a:spcBef>
-                <a:spcPts val="300"/>
-              </a:spcBef>
-              <a:defRPr sz="1200">
-                <a:solidFill>
-                  <a:srgbClr val="232D37"/>
-                </a:solidFill>
-                <a:latin typeface="Aptos"/>
-              </a:defRPr>
-            </a:pPr>
-            <a:r>
-              <a:t>Old single rental object becomes rentals[0] only when it carried meaningful income, depreciation, or enablement.</a:t>
-            </a:r>
-          </a:p>
-          <a:p>
-            <a:pPr>
-              <a:spcBef>
-                <a:spcPts val="300"/>
-              </a:spcBef>
-              <a:defRPr sz="1200">
-                <a:solidFill>
-                  <a:srgbClr val="232D37"/>
-                </a:solidFill>
-                <a:latin typeface="Aptos"/>
-              </a:defRPr>
-            </a:pPr>
-            <a:r>
-              <a:t>New plans use an array of property sub-cards.</a:t>
-            </a:r>
-          </a:p>
-        </p:txBody>
-      </p:sp>
-      <p:sp>
-        <p:nvSpPr>
-          <p:cNvPr id="5" name="Rectangle 4"/>
-          <p:cNvSpPr/>
-          <p:nvPr/>
-        </p:nvSpPr>
-        <p:spPr>
-          <a:xfrm>
-            <a:off x="502920" y="1143000"/>
-            <a:ext cx="82296" cy="4526280"/>
-          </a:xfrm>
-          <a:prstGeom prst="rect">
-            <a:avLst/>
-          </a:prstGeom>
-          <a:solidFill>
-            <a:srgbClr val="266EB2"/>
-          </a:solidFill>
-          <a:ln>
-            <a:noFill/>
-          </a:ln>
-        </p:spPr>
-        <p:style>
-          <a:lnRef idx="1">
-            <a:schemeClr val="accent1"/>
-          </a:lnRef>
-          <a:fillRef idx="3">
-            <a:schemeClr val="accent1"/>
-          </a:fillRef>
-          <a:effectRef idx="2">
-            <a:schemeClr val="accent1"/>
-          </a:effectRef>
-          <a:fontRef idx="minor">
-            <a:schemeClr val="lt1"/>
-          </a:fontRef>
-        </p:style>
-        <p:txBody>
-          <a:bodyPr rtlCol="0" anchor="ctr"/>
-          <a:lstStyle/>
-          <a:p>
-            <a:pPr algn="ctr"/>
-          </a:p>
-        </p:txBody>
-      </p:sp>
-      <p:sp>
-        <p:nvSpPr>
-          <p:cNvPr id="6" name="Rounded Rectangle 5"/>
-          <p:cNvSpPr/>
-          <p:nvPr/>
-        </p:nvSpPr>
-        <p:spPr>
-          <a:xfrm>
-            <a:off x="3520440" y="1143000"/>
-            <a:ext cx="2743200" cy="4526280"/>
-          </a:xfrm>
-          <a:prstGeom prst="roundRect">
-            <a:avLst/>
-          </a:prstGeom>
-          <a:solidFill>
-            <a:srgbClr val="EAF9F4"/>
-          </a:solidFill>
-          <a:ln w="13970">
-            <a:solidFill>
-              <a:srgbClr val="429761"/>
-            </a:solidFill>
-          </a:ln>
-        </p:spPr>
-        <p:style>
-          <a:lnRef idx="1">
-            <a:schemeClr val="accent1"/>
-          </a:lnRef>
-          <a:fillRef idx="3">
-            <a:schemeClr val="accent1"/>
-          </a:fillRef>
-          <a:effectRef idx="2">
-            <a:schemeClr val="accent1"/>
-          </a:effectRef>
-          <a:fontRef idx="minor">
-            <a:schemeClr val="lt1"/>
-          </a:fontRef>
-        </p:style>
-        <p:txBody>
-          <a:bodyPr rtlCol="0" anchor="ctr" lIns="182880" rIns="100584" tIns="91440"/>
-          <a:lstStyle/>
-          <a:p>
-            <a:pPr algn="ctr">
-              <a:defRPr sz="1700" b="1">
-                <a:solidFill>
-                  <a:srgbClr val="232D37"/>
-                </a:solidFill>
-                <a:latin typeface="Aptos Display"/>
-              </a:defRPr>
-            </a:pPr>
-            <a:r>
-              <a:t>Legacy conversion start</a:t>
-            </a:r>
-          </a:p>
-          <a:p>
-            <a:pPr>
-              <a:spcBef>
-                <a:spcPts val="300"/>
-              </a:spcBef>
-              <a:defRPr sz="1200">
-                <a:solidFill>
-                  <a:srgbClr val="232D37"/>
-                </a:solidFill>
-                <a:latin typeface="Aptos"/>
-              </a:defRPr>
-            </a:pPr>
-            <a:r>
-              <a:t>If conversion already existed: old positive start becomes custom; otherwise now.</a:t>
-            </a:r>
-          </a:p>
-          <a:p>
-            <a:pPr>
-              <a:spcBef>
-                <a:spcPts val="300"/>
-              </a:spcBef>
-              <a:defRPr sz="1200">
-                <a:solidFill>
-                  <a:srgbClr val="232D37"/>
-                </a:solidFill>
-                <a:latin typeface="Aptos"/>
-              </a:defRPr>
-            </a:pPr>
-            <a:r>
-              <a:t>No conversion: new default is RMD start.</a:t>
-            </a:r>
-          </a:p>
-        </p:txBody>
-      </p:sp>
-      <p:sp>
-        <p:nvSpPr>
-          <p:cNvPr id="7" name="Rectangle 6"/>
-          <p:cNvSpPr/>
-          <p:nvPr/>
-        </p:nvSpPr>
-        <p:spPr>
-          <a:xfrm>
-            <a:off x="3520440" y="1143000"/>
-            <a:ext cx="82296" cy="4526280"/>
-          </a:xfrm>
-          <a:prstGeom prst="rect">
-            <a:avLst/>
-          </a:prstGeom>
-          <a:solidFill>
-            <a:srgbClr val="429761"/>
-          </a:solidFill>
-          <a:ln>
-            <a:noFill/>
-          </a:ln>
-        </p:spPr>
-        <p:style>
-          <a:lnRef idx="1">
-            <a:schemeClr val="accent1"/>
-          </a:lnRef>
-          <a:fillRef idx="3">
-            <a:schemeClr val="accent1"/>
-          </a:fillRef>
-          <a:effectRef idx="2">
-            <a:schemeClr val="accent1"/>
-          </a:effectRef>
-          <a:fontRef idx="minor">
-            <a:schemeClr val="lt1"/>
-          </a:fontRef>
-        </p:style>
-        <p:txBody>
-          <a:bodyPr rtlCol="0" anchor="ctr"/>
-          <a:lstStyle/>
-          <a:p>
-            <a:pPr algn="ctr"/>
-          </a:p>
-        </p:txBody>
-      </p:sp>
-      <p:sp>
-        <p:nvSpPr>
-          <p:cNvPr id="8" name="Rounded Rectangle 7"/>
-          <p:cNvSpPr/>
-          <p:nvPr/>
-        </p:nvSpPr>
-        <p:spPr>
-          <a:xfrm>
-            <a:off x="6537960" y="1143000"/>
-            <a:ext cx="2743200" cy="4526280"/>
-          </a:xfrm>
-          <a:prstGeom prst="roundRect">
-            <a:avLst/>
-          </a:prstGeom>
-          <a:solidFill>
-            <a:srgbClr val="FFF6E8"/>
-          </a:solidFill>
-          <a:ln w="13970">
-            <a:solidFill>
-              <a:srgbClr val="E5892A"/>
-            </a:solidFill>
-          </a:ln>
-        </p:spPr>
-        <p:style>
-          <a:lnRef idx="1">
-            <a:schemeClr val="accent1"/>
-          </a:lnRef>
-          <a:fillRef idx="3">
-            <a:schemeClr val="accent1"/>
-          </a:fillRef>
-          <a:effectRef idx="2">
-            <a:schemeClr val="accent1"/>
-          </a:effectRef>
-          <a:fontRef idx="minor">
-            <a:schemeClr val="lt1"/>
-          </a:fontRef>
-        </p:style>
-        <p:txBody>
-          <a:bodyPr rtlCol="0" anchor="ctr" lIns="182880" rIns="100584" tIns="91440"/>
-          <a:lstStyle/>
-          <a:p>
-            <a:pPr algn="ctr">
-              <a:defRPr sz="1700" b="1">
-                <a:solidFill>
-                  <a:srgbClr val="232D37"/>
-                </a:solidFill>
-                <a:latin typeface="Aptos Display"/>
-              </a:defRPr>
-            </a:pPr>
-            <a:r>
-              <a:t>Legacy household settings</a:t>
-            </a:r>
-          </a:p>
-          <a:p>
-            <a:pPr>
-              <a:spcBef>
-                <a:spcPts val="300"/>
-              </a:spcBef>
-              <a:defRPr sz="1200">
-                <a:solidFill>
-                  <a:srgbClr val="232D37"/>
-                </a:solidFill>
-                <a:latin typeface="Aptos"/>
-              </a:defRPr>
-            </a:pPr>
-            <a:r>
-              <a:t>Existing living, LTC, and UI-hide migrations stay in place.</a:t>
-            </a:r>
-          </a:p>
-          <a:p>
-            <a:pPr>
-              <a:spcBef>
-                <a:spcPts val="300"/>
-              </a:spcBef>
-              <a:defRPr sz="1200">
-                <a:solidFill>
-                  <a:srgbClr val="232D37"/>
-                </a:solidFill>
-                <a:latin typeface="Aptos"/>
-              </a:defRPr>
-            </a:pPr>
-            <a:r>
-              <a:t>Missing fields receive canonical defaults; stale fields are dropped.</a:t>
-            </a:r>
-          </a:p>
-        </p:txBody>
-      </p:sp>
-      <p:sp>
-        <p:nvSpPr>
-          <p:cNvPr id="9" name="Rectangle 8"/>
-          <p:cNvSpPr/>
-          <p:nvPr/>
-        </p:nvSpPr>
-        <p:spPr>
-          <a:xfrm>
-            <a:off x="6537960" y="1143000"/>
-            <a:ext cx="82296" cy="4526280"/>
-          </a:xfrm>
-          <a:prstGeom prst="rect">
-            <a:avLst/>
-          </a:prstGeom>
-          <a:solidFill>
-            <a:srgbClr val="E5892A"/>
-          </a:solidFill>
-          <a:ln>
-            <a:noFill/>
-          </a:ln>
-        </p:spPr>
-        <p:style>
-          <a:lnRef idx="1">
-            <a:schemeClr val="accent1"/>
-          </a:lnRef>
-          <a:fillRef idx="3">
-            <a:schemeClr val="accent1"/>
-          </a:fillRef>
-          <a:effectRef idx="2">
-            <a:schemeClr val="accent1"/>
-          </a:effectRef>
-          <a:fontRef idx="minor">
-            <a:schemeClr val="lt1"/>
-          </a:fontRef>
-        </p:style>
-        <p:txBody>
-          <a:bodyPr rtlCol="0" anchor="ctr"/>
-          <a:lstStyle/>
-          <a:p>
-            <a:pPr algn="ctr"/>
-          </a:p>
-        </p:txBody>
-      </p:sp>
-      <p:sp>
-        <p:nvSpPr>
-          <p:cNvPr id="10" name="Rounded Rectangle 9"/>
-          <p:cNvSpPr/>
-          <p:nvPr/>
-        </p:nvSpPr>
-        <p:spPr>
-          <a:xfrm>
-            <a:off x="9555480" y="1143000"/>
-            <a:ext cx="2103120" cy="4526280"/>
-          </a:xfrm>
-          <a:prstGeom prst="roundRect">
-            <a:avLst/>
-          </a:prstGeom>
-          <a:solidFill>
-            <a:srgbClr val="F7EFFF"/>
-          </a:solidFill>
-          <a:ln w="13970">
-            <a:solidFill>
-              <a:srgbClr val="7852B0"/>
-            </a:solidFill>
-          </a:ln>
-        </p:spPr>
-        <p:style>
-          <a:lnRef idx="1">
-            <a:schemeClr val="accent1"/>
-          </a:lnRef>
-          <a:fillRef idx="3">
-            <a:schemeClr val="accent1"/>
-          </a:fillRef>
-          <a:effectRef idx="2">
-            <a:schemeClr val="accent1"/>
-          </a:effectRef>
-          <a:fontRef idx="minor">
-            <a:schemeClr val="lt1"/>
-          </a:fontRef>
-        </p:style>
-        <p:txBody>
-          <a:bodyPr rtlCol="0" anchor="ctr" lIns="182880" rIns="100584" tIns="91440"/>
-          <a:lstStyle/>
-          <a:p>
-            <a:pPr algn="ctr">
-              <a:defRPr sz="1600" b="1">
-                <a:solidFill>
-                  <a:srgbClr val="232D37"/>
-                </a:solidFill>
-                <a:latin typeface="Aptos Display"/>
-              </a:defRPr>
-            </a:pPr>
-            <a:r>
-              <a:t>Guarantee</a:t>
-            </a:r>
-          </a:p>
-          <a:p>
-            <a:pPr>
-              <a:spcBef>
-                <a:spcPts val="300"/>
-              </a:spcBef>
-              <a:defRPr sz="1100">
-                <a:solidFill>
-                  <a:srgbClr val="232D37"/>
-                </a:solidFill>
-                <a:latin typeface="Aptos"/>
-              </a:defRPr>
-            </a:pPr>
-            <a:r>
-              <a:t>Hydrate before compute.</a:t>
-            </a:r>
-          </a:p>
-          <a:p>
-            <a:pPr>
-              <a:spcBef>
-                <a:spcPts val="300"/>
-              </a:spcBef>
-              <a:defRPr sz="1100">
-                <a:solidFill>
-                  <a:srgbClr val="232D37"/>
-                </a:solidFill>
-                <a:latin typeface="Aptos"/>
-              </a:defRPr>
-            </a:pPr>
-            <a:r>
-              <a:t>Projection and views always see the current schema.</a:t>
-            </a:r>
-          </a:p>
-        </p:txBody>
-      </p:sp>
-      <p:sp>
-        <p:nvSpPr>
-          <p:cNvPr id="11" name="Rectangle 10"/>
-          <p:cNvSpPr/>
-          <p:nvPr/>
-        </p:nvSpPr>
-        <p:spPr>
-          <a:xfrm>
-            <a:off x="9555480" y="1143000"/>
-            <a:ext cx="82296" cy="4526280"/>
-          </a:xfrm>
-          <a:prstGeom prst="rect">
-            <a:avLst/>
-          </a:prstGeom>
-          <a:solidFill>
-            <a:srgbClr val="7852B0"/>
-          </a:solidFill>
-          <a:ln>
-            <a:noFill/>
-          </a:ln>
-        </p:spPr>
-        <p:style>
-          <a:lnRef idx="1">
-            <a:schemeClr val="accent1"/>
-          </a:lnRef>
-          <a:fillRef idx="3">
-            <a:schemeClr val="accent1"/>
-          </a:fillRef>
-          <a:effectRef idx="2">
-            <a:schemeClr val="accent1"/>
-          </a:effectRef>
-          <a:fontRef idx="minor">
-            <a:schemeClr val="lt1"/>
-          </a:fontRef>
-        </p:style>
-        <p:txBody>
-          <a:bodyPr rtlCol="0" anchor="ctr"/>
-          <a:lstStyle/>
-          <a:p>
-            <a:pPr algn="ctr"/>
-          </a:p>
-        </p:txBody>
-      </p:sp>
-      <p:sp>
-        <p:nvSpPr>
-          <p:cNvPr id="12" name="Rectangle 11"/>
-          <p:cNvSpPr/>
-          <p:nvPr/>
-        </p:nvSpPr>
-        <p:spPr>
-          <a:xfrm>
-            <a:off x="502920" y="6473952"/>
-            <a:ext cx="11183112" cy="13716"/>
-          </a:xfrm>
-          <a:prstGeom prst="rect">
-            <a:avLst/>
-          </a:prstGeom>
-          <a:solidFill>
-            <a:srgbClr val="D2DCE5"/>
-          </a:solidFill>
-          <a:ln>
-            <a:noFill/>
-          </a:ln>
-        </p:spPr>
-        <p:style>
-          <a:lnRef idx="1">
-            <a:schemeClr val="accent1"/>
-          </a:lnRef>
-          <a:fillRef idx="3">
-            <a:schemeClr val="accent1"/>
-          </a:fillRef>
-          <a:effectRef idx="2">
-            <a:schemeClr val="accent1"/>
-          </a:effectRef>
-          <a:fontRef idx="minor">
-            <a:schemeClr val="lt1"/>
-          </a:fontRef>
-        </p:style>
-        <p:txBody>
-          <a:bodyPr rtlCol="0" anchor="ctr"/>
-          <a:lstStyle/>
-          <a:p>
-            <a:pPr algn="ctr"/>
-          </a:p>
-        </p:txBody>
-      </p:sp>
-      <p:sp>
-        <p:nvSpPr>
-          <p:cNvPr id="13" name="TextBox 12"/>
-          <p:cNvSpPr txBox="1"/>
-          <p:nvPr/>
-        </p:nvSpPr>
-        <p:spPr>
-          <a:xfrm>
-            <a:off x="530352" y="6510528"/>
-            <a:ext cx="10881360" cy="146304"/>
-          </a:xfrm>
-          <a:prstGeom prst="rect">
-            <a:avLst/>
-          </a:prstGeom>
-          <a:noFill/>
-        </p:spPr>
-        <p:txBody>
-          <a:bodyPr wrap="none" anchor="ctr">
-            <a:spAutoFit/>
-          </a:bodyPr>
-          <a:lstStyle/>
-          <a:p>
-            <a:pPr algn="l">
-              <a:defRPr sz="850" b="0">
-                <a:solidFill>
-                  <a:srgbClr val="5D6C7A"/>
-                </a:solidFill>
-                <a:latin typeface="Aptos"/>
-              </a:defRPr>
-            </a:pPr>
-            <a:r>
-              <a:t>Retirement Income Planner • Architecture overview • Rental, tax-exempt income, and legacy-value update</a:t>
-            </a:r>
-          </a:p>
-        </p:txBody>
-      </p:sp>
-    </p:spTree>
-  </p:cSld>
-  <p:clrMapOvr>
-    <a:masterClrMapping/>
-  </p:clrMapOvr>
-</p:sld>
-</file>
-
-<file path=ppt/slides/slide11.xml><?xml version="1.0" encoding="utf-8"?>
-<p:sld xmlns:a="http://schemas.openxmlformats.org/drawingml/2006/main" xmlns:p="http://schemas.openxmlformats.org/presentationml/2006/main" xmlns:r="http://schemas.openxmlformats.org/officeDocument/2006/relationships">
-  <p:cSld>
-    <p:bg>
-      <p:bgPr>
-        <a:solidFill>
-          <a:srgbClr val="F4F7FA"/>
-        </a:solidFill>
-        <a:effectLst/>
-      </p:bgPr>
-    </p:bg>
-    <p:spTree>
-      <p:nvGrpSpPr>
-        <p:cNvPr id="1" name=""/>
-        <p:cNvGrpSpPr/>
-        <p:nvPr/>
-      </p:nvGrpSpPr>
-      <p:grpSpPr/>
-      <p:sp>
-        <p:nvSpPr>
-          <p:cNvPr id="2" name="TextBox 1"/>
-          <p:cNvSpPr txBox="1"/>
-          <p:nvPr/>
-        </p:nvSpPr>
-        <p:spPr>
-          <a:xfrm>
-            <a:off x="502920" y="246888"/>
-            <a:ext cx="11155680" cy="438912"/>
-          </a:xfrm>
-          <a:prstGeom prst="rect">
-            <a:avLst/>
-          </a:prstGeom>
-          <a:noFill/>
-        </p:spPr>
-        <p:txBody>
-          <a:bodyPr wrap="none" anchor="ctr">
-            <a:spAutoFit/>
-          </a:bodyPr>
-          <a:lstStyle/>
-          <a:p>
-            <a:pPr algn="l">
-              <a:defRPr sz="2700" b="1">
-                <a:solidFill>
-                  <a:srgbClr val="0F2647"/>
-                </a:solidFill>
-                <a:latin typeface="Aptos"/>
-              </a:defRPr>
-            </a:pPr>
-            <a:r>
-              <a:t>Guardrails for the expanded model</a:t>
-            </a:r>
-          </a:p>
-        </p:txBody>
-      </p:sp>
-      <p:sp>
-        <p:nvSpPr>
-          <p:cNvPr id="3" name="TextBox 2"/>
-          <p:cNvSpPr txBox="1"/>
-          <p:nvPr/>
-        </p:nvSpPr>
-        <p:spPr>
-          <a:xfrm>
-            <a:off x="530352" y="786384"/>
-            <a:ext cx="10972800" cy="228600"/>
-          </a:xfrm>
-          <a:prstGeom prst="rect">
-            <a:avLst/>
-          </a:prstGeom>
-          <a:noFill/>
-        </p:spPr>
-        <p:txBody>
-          <a:bodyPr wrap="none" anchor="ctr">
-            <a:spAutoFit/>
-          </a:bodyPr>
-          <a:lstStyle/>
-          <a:p>
-            <a:pPr algn="l">
-              <a:defRPr sz="1150" b="0">
-                <a:solidFill>
-                  <a:srgbClr val="5D6C7A"/>
-                </a:solidFill>
-                <a:latin typeface="Aptos"/>
-              </a:defRPr>
-            </a:pPr>
-            <a:r>
-              <a:t>The latest features add scope, but preserve the architectural contracts that keep the planner understandable and testable.</a:t>
-            </a:r>
-          </a:p>
-        </p:txBody>
-      </p:sp>
-      <p:sp>
-        <p:nvSpPr>
-          <p:cNvPr id="4" name="Rounded Rectangle 3"/>
-          <p:cNvSpPr/>
-          <p:nvPr/>
-        </p:nvSpPr>
-        <p:spPr>
-          <a:xfrm>
-            <a:off x="640080" y="1188720"/>
-            <a:ext cx="3383280" cy="4526280"/>
-          </a:xfrm>
-          <a:prstGeom prst="roundRect">
-            <a:avLst/>
-          </a:prstGeom>
-          <a:solidFill>
-            <a:srgbClr val="E9F4FF"/>
-          </a:solidFill>
-          <a:ln w="13970">
-            <a:solidFill>
-              <a:srgbClr val="266EB2"/>
-            </a:solidFill>
-          </a:ln>
-        </p:spPr>
-        <p:style>
-          <a:lnRef idx="1">
-            <a:schemeClr val="accent1"/>
-          </a:lnRef>
-          <a:fillRef idx="3">
-            <a:schemeClr val="accent1"/>
-          </a:fillRef>
-          <a:effectRef idx="2">
-            <a:schemeClr val="accent1"/>
-          </a:effectRef>
-          <a:fontRef idx="minor">
-            <a:schemeClr val="lt1"/>
-          </a:fontRef>
-        </p:style>
-        <p:txBody>
-          <a:bodyPr rtlCol="0" anchor="ctr" lIns="182880" rIns="100584" tIns="91440"/>
-          <a:lstStyle/>
-          <a:p>
-            <a:pPr algn="ctr">
-              <a:defRPr sz="1700" b="1">
-                <a:solidFill>
-                  <a:srgbClr val="232D37"/>
-                </a:solidFill>
-                <a:latin typeface="Aptos Display"/>
-              </a:defRPr>
-            </a:pPr>
-            <a:r>
-              <a:t>State &amp; inputs</a:t>
-            </a:r>
-          </a:p>
-          <a:p>
-            <a:pPr>
-              <a:spcBef>
-                <a:spcPts val="300"/>
-              </a:spcBef>
-              <a:defRPr sz="1200">
-                <a:solidFill>
-                  <a:srgbClr val="232D37"/>
-                </a:solidFill>
-                <a:latin typeface="Aptos"/>
-              </a:defRPr>
-            </a:pPr>
-            <a:r>
-              <a:t>Use canonical arrays for repeatable items such as rental properties.</a:t>
-            </a:r>
-          </a:p>
-          <a:p>
-            <a:pPr>
-              <a:spcBef>
-                <a:spcPts val="300"/>
-              </a:spcBef>
-              <a:defRPr sz="1200">
-                <a:solidFill>
-                  <a:srgbClr val="232D37"/>
-                </a:solidFill>
-                <a:latin typeface="Aptos"/>
-              </a:defRPr>
-            </a:pPr>
-            <a:r>
-              <a:t>Keep unit and null semantics explicit.</a:t>
-            </a:r>
-          </a:p>
-          <a:p>
-            <a:pPr>
-              <a:spcBef>
-                <a:spcPts val="300"/>
-              </a:spcBef>
-              <a:defRPr sz="1200">
-                <a:solidFill>
-                  <a:srgbClr val="232D37"/>
-                </a:solidFill>
-                <a:latin typeface="Aptos"/>
-              </a:defRPr>
-            </a:pPr>
-            <a:r>
-              <a:t>Migrate legacy saves at hydration time, never in chart code.</a:t>
-            </a:r>
-          </a:p>
-        </p:txBody>
-      </p:sp>
-      <p:sp>
-        <p:nvSpPr>
-          <p:cNvPr id="5" name="Rectangle 4"/>
-          <p:cNvSpPr/>
-          <p:nvPr/>
-        </p:nvSpPr>
-        <p:spPr>
-          <a:xfrm>
-            <a:off x="640080" y="1188720"/>
-            <a:ext cx="82296" cy="4526280"/>
-          </a:xfrm>
-          <a:prstGeom prst="rect">
-            <a:avLst/>
-          </a:prstGeom>
-          <a:solidFill>
-            <a:srgbClr val="266EB2"/>
-          </a:solidFill>
-          <a:ln>
-            <a:noFill/>
-          </a:ln>
-        </p:spPr>
-        <p:style>
-          <a:lnRef idx="1">
-            <a:schemeClr val="accent1"/>
-          </a:lnRef>
-          <a:fillRef idx="3">
-            <a:schemeClr val="accent1"/>
-          </a:fillRef>
-          <a:effectRef idx="2">
-            <a:schemeClr val="accent1"/>
-          </a:effectRef>
-          <a:fontRef idx="minor">
-            <a:schemeClr val="lt1"/>
-          </a:fontRef>
-        </p:style>
-        <p:txBody>
-          <a:bodyPr rtlCol="0" anchor="ctr"/>
-          <a:lstStyle/>
-          <a:p>
-            <a:pPr algn="ctr"/>
-          </a:p>
-        </p:txBody>
-      </p:sp>
-      <p:sp>
-        <p:nvSpPr>
-          <p:cNvPr id="6" name="Rounded Rectangle 5"/>
-          <p:cNvSpPr/>
-          <p:nvPr/>
-        </p:nvSpPr>
-        <p:spPr>
-          <a:xfrm>
-            <a:off x="4407408" y="1188720"/>
-            <a:ext cx="3383280" cy="4526280"/>
-          </a:xfrm>
-          <a:prstGeom prst="roundRect">
-            <a:avLst/>
-          </a:prstGeom>
-          <a:solidFill>
-            <a:srgbClr val="EAF9F4"/>
-          </a:solidFill>
-          <a:ln w="13970">
-            <a:solidFill>
-              <a:srgbClr val="429761"/>
-            </a:solidFill>
-          </a:ln>
-        </p:spPr>
-        <p:style>
-          <a:lnRef idx="1">
-            <a:schemeClr val="accent1"/>
-          </a:lnRef>
-          <a:fillRef idx="3">
-            <a:schemeClr val="accent1"/>
-          </a:fillRef>
-          <a:effectRef idx="2">
-            <a:schemeClr val="accent1"/>
-          </a:effectRef>
-          <a:fontRef idx="minor">
-            <a:schemeClr val="lt1"/>
-          </a:fontRef>
-        </p:style>
-        <p:txBody>
-          <a:bodyPr rtlCol="0" anchor="ctr" lIns="182880" rIns="100584" tIns="91440"/>
-          <a:lstStyle/>
-          <a:p>
-            <a:pPr algn="ctr">
-              <a:defRPr sz="1700" b="1">
-                <a:solidFill>
-                  <a:srgbClr val="232D37"/>
-                </a:solidFill>
-                <a:latin typeface="Aptos Display"/>
-              </a:defRPr>
-            </a:pPr>
-            <a:r>
-              <a:t>Compute &amp; rows</a:t>
-            </a:r>
-          </a:p>
-          <a:p>
-            <a:pPr>
-              <a:spcBef>
-                <a:spcPts val="300"/>
-              </a:spcBef>
-              <a:defRPr sz="1200">
-                <a:solidFill>
-                  <a:srgbClr val="232D37"/>
-                </a:solidFill>
-                <a:latin typeface="Aptos"/>
-              </a:defRPr>
-            </a:pPr>
-            <a:r>
-              <a:t>Keep tax, cash-flow, and legacy-tail rules in projection.js.</a:t>
-            </a:r>
-          </a:p>
-          <a:p>
-            <a:pPr>
-              <a:spcBef>
-                <a:spcPts val="300"/>
-              </a:spcBef>
-              <a:defRPr sz="1200">
-                <a:solidFill>
-                  <a:srgbClr val="232D37"/>
-                </a:solidFill>
-                <a:latin typeface="Aptos"/>
-              </a:defRPr>
-            </a:pPr>
-            <a:r>
-              <a:t>Solve circular tax-and-sale dependencies explicitly.</a:t>
-            </a:r>
-          </a:p>
-          <a:p>
-            <a:pPr>
-              <a:spcBef>
-                <a:spcPts val="300"/>
-              </a:spcBef>
-              <a:defRPr sz="1200">
-                <a:solidFill>
-                  <a:srgbClr val="232D37"/>
-                </a:solidFill>
-                <a:latin typeface="Aptos"/>
-              </a:defRPr>
-            </a:pPr>
-            <a:r>
-              <a:t>Expose every new derived result in the projection-row contract.</a:t>
-            </a:r>
-          </a:p>
-        </p:txBody>
-      </p:sp>
-      <p:sp>
-        <p:nvSpPr>
-          <p:cNvPr id="7" name="Rectangle 6"/>
-          <p:cNvSpPr/>
-          <p:nvPr/>
-        </p:nvSpPr>
-        <p:spPr>
-          <a:xfrm>
-            <a:off x="4407408" y="1188720"/>
-            <a:ext cx="82296" cy="4526280"/>
-          </a:xfrm>
-          <a:prstGeom prst="rect">
-            <a:avLst/>
-          </a:prstGeom>
-          <a:solidFill>
-            <a:srgbClr val="429761"/>
-          </a:solidFill>
-          <a:ln>
-            <a:noFill/>
-          </a:ln>
-        </p:spPr>
-        <p:style>
-          <a:lnRef idx="1">
-            <a:schemeClr val="accent1"/>
-          </a:lnRef>
-          <a:fillRef idx="3">
-            <a:schemeClr val="accent1"/>
-          </a:fillRef>
-          <a:effectRef idx="2">
-            <a:schemeClr val="accent1"/>
-          </a:effectRef>
-          <a:fontRef idx="minor">
-            <a:schemeClr val="lt1"/>
-          </a:fontRef>
-        </p:style>
-        <p:txBody>
-          <a:bodyPr rtlCol="0" anchor="ctr"/>
-          <a:lstStyle/>
-          <a:p>
-            <a:pPr algn="ctr"/>
-          </a:p>
-        </p:txBody>
-      </p:sp>
-      <p:sp>
-        <p:nvSpPr>
-          <p:cNvPr id="8" name="Rounded Rectangle 7"/>
-          <p:cNvSpPr/>
-          <p:nvPr/>
-        </p:nvSpPr>
-        <p:spPr>
-          <a:xfrm>
-            <a:off x="8174736" y="1188720"/>
-            <a:ext cx="3383280" cy="4526280"/>
-          </a:xfrm>
-          <a:prstGeom prst="roundRect">
-            <a:avLst/>
-          </a:prstGeom>
-          <a:solidFill>
-            <a:srgbClr val="F7EFFF"/>
-          </a:solidFill>
-          <a:ln w="13970">
-            <a:solidFill>
-              <a:srgbClr val="7852B0"/>
-            </a:solidFill>
-          </a:ln>
-        </p:spPr>
-        <p:style>
-          <a:lnRef idx="1">
-            <a:schemeClr val="accent1"/>
-          </a:lnRef>
-          <a:fillRef idx="3">
-            <a:schemeClr val="accent1"/>
-          </a:fillRef>
-          <a:effectRef idx="2">
-            <a:schemeClr val="accent1"/>
-          </a:effectRef>
-          <a:fontRef idx="minor">
-            <a:schemeClr val="lt1"/>
-          </a:fontRef>
-        </p:style>
-        <p:txBody>
-          <a:bodyPr rtlCol="0" anchor="ctr" lIns="182880" rIns="100584" tIns="91440"/>
-          <a:lstStyle/>
-          <a:p>
-            <a:pPr algn="ctr">
-              <a:defRPr sz="1700" b="1">
-                <a:solidFill>
-                  <a:srgbClr val="232D37"/>
-                </a:solidFill>
-                <a:latin typeface="Aptos Display"/>
-              </a:defRPr>
-            </a:pPr>
-            <a:r>
-              <a:t>Display &amp; user trust</a:t>
-            </a:r>
-          </a:p>
-          <a:p>
-            <a:pPr>
-              <a:spcBef>
-                <a:spcPts val="300"/>
-              </a:spcBef>
-              <a:defRPr sz="1200">
-                <a:solidFill>
-                  <a:srgbClr val="232D37"/>
-                </a:solidFill>
-                <a:latin typeface="Aptos"/>
-              </a:defRPr>
-            </a:pPr>
-            <a:r>
-              <a:t>Charts, Excel, Formula pages, and chat read outputs; they do not recreate finance.</a:t>
-            </a:r>
-          </a:p>
-          <a:p>
-            <a:pPr>
-              <a:spcBef>
-                <a:spcPts val="300"/>
-              </a:spcBef>
-              <a:defRPr sz="1200">
-                <a:solidFill>
-                  <a:srgbClr val="232D37"/>
-                </a:solidFill>
-                <a:latin typeface="Aptos"/>
-              </a:defRPr>
-            </a:pPr>
-            <a:r>
-              <a:t>Clearly label display-only devalue assumptions.</a:t>
-            </a:r>
-          </a:p>
-          <a:p>
-            <a:pPr>
-              <a:spcBef>
-                <a:spcPts val="300"/>
-              </a:spcBef>
-              <a:defRPr sz="1200">
-                <a:solidFill>
-                  <a:srgbClr val="232D37"/>
-                </a:solidFill>
-                <a:latin typeface="Aptos"/>
-              </a:defRPr>
-            </a:pPr>
-            <a:r>
-              <a:t>Keep chat data curated, previewable, and outside saved plan data.</a:t>
-            </a:r>
-          </a:p>
-        </p:txBody>
-      </p:sp>
-      <p:sp>
-        <p:nvSpPr>
-          <p:cNvPr id="9" name="Rectangle 8"/>
-          <p:cNvSpPr/>
-          <p:nvPr/>
-        </p:nvSpPr>
-        <p:spPr>
-          <a:xfrm>
-            <a:off x="8174736" y="1188720"/>
-            <a:ext cx="82296" cy="4526280"/>
-          </a:xfrm>
-          <a:prstGeom prst="rect">
-            <a:avLst/>
-          </a:prstGeom>
-          <a:solidFill>
-            <a:srgbClr val="7852B0"/>
-          </a:solidFill>
-          <a:ln>
-            <a:noFill/>
-          </a:ln>
-        </p:spPr>
-        <p:style>
-          <a:lnRef idx="1">
-            <a:schemeClr val="accent1"/>
-          </a:lnRef>
-          <a:fillRef idx="3">
-            <a:schemeClr val="accent1"/>
-          </a:fillRef>
-          <a:effectRef idx="2">
-            <a:schemeClr val="accent1"/>
-          </a:effectRef>
-          <a:fontRef idx="minor">
-            <a:schemeClr val="lt1"/>
-          </a:fontRef>
-        </p:style>
-        <p:txBody>
-          <a:bodyPr rtlCol="0" anchor="ctr"/>
-          <a:lstStyle/>
-          <a:p>
-            <a:pPr algn="ctr"/>
-          </a:p>
-        </p:txBody>
-      </p:sp>
-      <p:sp>
-        <p:nvSpPr>
-          <p:cNvPr id="10" name="Rectangle 9"/>
-          <p:cNvSpPr/>
-          <p:nvPr/>
-        </p:nvSpPr>
-        <p:spPr>
-          <a:xfrm>
-            <a:off x="502920" y="6473952"/>
-            <a:ext cx="11183112" cy="13716"/>
-          </a:xfrm>
-          <a:prstGeom prst="rect">
-            <a:avLst/>
-          </a:prstGeom>
-          <a:solidFill>
-            <a:srgbClr val="D2DCE5"/>
-          </a:solidFill>
-          <a:ln>
-            <a:noFill/>
-          </a:ln>
-        </p:spPr>
-        <p:style>
-          <a:lnRef idx="1">
-            <a:schemeClr val="accent1"/>
-          </a:lnRef>
-          <a:fillRef idx="3">
-            <a:schemeClr val="accent1"/>
-          </a:fillRef>
-          <a:effectRef idx="2">
-            <a:schemeClr val="accent1"/>
-          </a:effectRef>
-          <a:fontRef idx="minor">
-            <a:schemeClr val="lt1"/>
-          </a:fontRef>
-        </p:style>
-        <p:txBody>
-          <a:bodyPr rtlCol="0" anchor="ctr"/>
-          <a:lstStyle/>
-          <a:p>
-            <a:pPr algn="ctr"/>
-          </a:p>
-        </p:txBody>
-      </p:sp>
-      <p:sp>
-        <p:nvSpPr>
-          <p:cNvPr id="11" name="TextBox 10"/>
-          <p:cNvSpPr txBox="1"/>
-          <p:nvPr/>
-        </p:nvSpPr>
-        <p:spPr>
-          <a:xfrm>
-            <a:off x="530352" y="6510528"/>
-            <a:ext cx="10881360" cy="146304"/>
-          </a:xfrm>
-          <a:prstGeom prst="rect">
-            <a:avLst/>
-          </a:prstGeom>
-          <a:noFill/>
-        </p:spPr>
-        <p:txBody>
-          <a:bodyPr wrap="none" anchor="ctr">
-            <a:spAutoFit/>
-          </a:bodyPr>
-          <a:lstStyle/>
-          <a:p>
-            <a:pPr algn="l">
-              <a:defRPr sz="850" b="0">
-                <a:solidFill>
-                  <a:srgbClr val="5D6C7A"/>
-                </a:solidFill>
-                <a:latin typeface="Aptos"/>
-              </a:defRPr>
-            </a:pPr>
-            <a:r>
-              <a:t>Retirement Income Planner • Architecture overview • Rental, tax-exempt income, and legacy-value update</a:t>
+              <a:t>Retirement Income Planner • Architecture overview • Assumption controls and Markdown Usage update</a:t>
             </a:r>
           </a:p>
         </p:txBody>
@@ -5351,7 +4037,7 @@
               </a:defRPr>
             </a:pPr>
             <a:r>
-              <a:t>The new design extends income types, household cash flow, tax treatment, post-passing legacy views, and input migration.</a:t>
+              <a:t>The architecture adds independently controlled household-assumption cards and a shared system for rendering Usage and Notes documentation.</a:t>
             </a:r>
           </a:p>
         </p:txBody>
@@ -5364,8 +4050,8 @@
         </p:nvSpPr>
         <p:spPr>
           <a:xfrm>
-            <a:off x="438912" y="1234440"/>
-            <a:ext cx="2286000" cy="4480560"/>
+            <a:off x="594360" y="1234440"/>
+            <a:ext cx="3383280" cy="4480560"/>
           </a:xfrm>
           <a:prstGeom prst="roundRect">
             <a:avLst/>
@@ -5398,7 +4084,7 @@
           <a:lstStyle/>
           <a:p>
             <a:pPr algn="ctr">
-              <a:defRPr sz="1600" b="1">
+              <a:defRPr sz="1800" b="1">
                 <a:solidFill>
                   <a:srgbClr val="232D37"/>
                 </a:solidFill>
@@ -5406,7 +4092,7 @@
               </a:defRPr>
             </a:pPr>
             <a:r>
-              <a:t>Rentals</a:t>
+              <a:t>Assumption cards</a:t>
             </a:r>
           </a:p>
           <a:p>
@@ -5414,15 +4100,15 @@
               <a:spcBef>
                 <a:spcPts val="300"/>
               </a:spcBef>
-              <a:defRPr sz="1200">
-                <a:solidFill>
-                  <a:srgbClr val="232D37"/>
-                </a:solidFill>
-                <a:latin typeface="Aptos"/>
-              </a:defRPr>
-            </a:pPr>
-            <a:r>
-              <a:t>Many rental properties per person</a:t>
+              <a:defRPr sz="1300">
+                <a:solidFill>
+                  <a:srgbClr val="232D37"/>
+                </a:solidFill>
+                <a:latin typeface="Aptos"/>
+              </a:defRPr>
+            </a:pPr>
+            <a:r>
+              <a:t>SCGL</a:t>
             </a:r>
           </a:p>
           <a:p>
@@ -5430,15 +4116,15 @@
               <a:spcBef>
                 <a:spcPts val="300"/>
               </a:spcBef>
-              <a:defRPr sz="1200">
-                <a:solidFill>
-                  <a:srgbClr val="232D37"/>
-                </a:solidFill>
-                <a:latin typeface="Aptos"/>
-              </a:defRPr>
-            </a:pPr>
-            <a:r>
-              <a:t>Taxable net income + non-cash depreciation</a:t>
+              <a:defRPr sz="1300">
+                <a:solidFill>
+                  <a:srgbClr val="232D37"/>
+                </a:solidFill>
+                <a:latin typeface="Aptos"/>
+              </a:defRPr>
+            </a:pPr>
+            <a:r>
+              <a:t>AUM fee</a:t>
             </a:r>
           </a:p>
           <a:p>
@@ -5446,15 +4132,47 @@
               <a:spcBef>
                 <a:spcPts val="300"/>
               </a:spcBef>
-              <a:defRPr sz="1200">
-                <a:solidFill>
-                  <a:srgbClr val="232D37"/>
-                </a:solidFill>
-                <a:latin typeface="Aptos"/>
-              </a:defRPr>
-            </a:pPr>
-            <a:r>
-              <a:t>Independent age range, change, survivor, enable/hide</a:t>
+              <a:defRPr sz="1300">
+                <a:solidFill>
+                  <a:srgbClr val="232D37"/>
+                </a:solidFill>
+                <a:latin typeface="Aptos"/>
+              </a:defRPr>
+            </a:pPr>
+            <a:r>
+              <a:t>Long Term Care</a:t>
+            </a:r>
+          </a:p>
+          <a:p>
+            <a:pPr>
+              <a:spcBef>
+                <a:spcPts val="300"/>
+              </a:spcBef>
+              <a:defRPr sz="1300">
+                <a:solidFill>
+                  <a:srgbClr val="232D37"/>
+                </a:solidFill>
+                <a:latin typeface="Aptos"/>
+              </a:defRPr>
+            </a:pPr>
+            <a:r>
+              <a:t>Future tax threshold</a:t>
+            </a:r>
+          </a:p>
+          <a:p>
+            <a:pPr>
+              <a:spcBef>
+                <a:spcPts val="300"/>
+              </a:spcBef>
+              <a:defRPr sz="1300">
+                <a:solidFill>
+                  <a:srgbClr val="232D37"/>
+                </a:solidFill>
+                <a:latin typeface="Aptos"/>
+              </a:defRPr>
+            </a:pPr>
+            <a:r>
+              <a:t>Each now has Enable + Hide controls</a:t>
             </a:r>
           </a:p>
         </p:txBody>
@@ -5467,7 +4185,7 @@
         </p:nvSpPr>
         <p:spPr>
           <a:xfrm>
-            <a:off x="438912" y="1234440"/>
+            <a:off x="594360" y="1234440"/>
             <a:ext cx="82296" cy="4480560"/>
           </a:xfrm>
           <a:prstGeom prst="rect">
@@ -5510,8 +4228,8 @@
         </p:nvSpPr>
         <p:spPr>
           <a:xfrm>
-            <a:off x="2926080" y="1234440"/>
-            <a:ext cx="2286000" cy="4480560"/>
+            <a:off x="4407408" y="1234440"/>
+            <a:ext cx="3383280" cy="4480560"/>
           </a:xfrm>
           <a:prstGeom prst="roundRect">
             <a:avLst/>
@@ -5544,7 +4262,7 @@
           <a:lstStyle/>
           <a:p>
             <a:pPr algn="ctr">
-              <a:defRPr sz="1600" b="1">
+              <a:defRPr sz="1800" b="1">
                 <a:solidFill>
                   <a:srgbClr val="232D37"/>
                 </a:solidFill>
@@ -5552,7 +4270,7 @@
               </a:defRPr>
             </a:pPr>
             <a:r>
-              <a:t>Portfolio cash flow</a:t>
+              <a:t>State behavior</a:t>
             </a:r>
           </a:p>
           <a:p>
@@ -5560,15 +4278,15 @@
               <a:spcBef>
                 <a:spcPts val="300"/>
               </a:spcBef>
-              <a:defRPr sz="1200">
-                <a:solidFill>
-                  <a:srgbClr val="232D37"/>
-                </a:solidFill>
-                <a:latin typeface="Aptos"/>
-              </a:defRPr>
-            </a:pPr>
-            <a:r>
-              <a:t>Tax-exempt yield</a:t>
+              <a:defRPr sz="1300">
+                <a:solidFill>
+                  <a:srgbClr val="232D37"/>
+                </a:solidFill>
+                <a:latin typeface="Aptos"/>
+              </a:defRPr>
+            </a:pPr>
+            <a:r>
+              <a:t>Enable flags determine whether Compute applies each item.</a:t>
             </a:r>
           </a:p>
           <a:p>
@@ -5576,15 +4294,15 @@
               <a:spcBef>
                 <a:spcPts val="300"/>
               </a:spcBef>
-              <a:defRPr sz="1200">
-                <a:solidFill>
-                  <a:srgbClr val="232D37"/>
-                </a:solidFill>
-                <a:latin typeface="Aptos"/>
-              </a:defRPr>
-            </a:pPr>
-            <a:r>
-              <a:t>Reinvest excess income</a:t>
+              <a:defRPr sz="1300">
+                <a:solidFill>
+                  <a:srgbClr val="232D37"/>
+                </a:solidFill>
+                <a:latin typeface="Aptos"/>
+              </a:defRPr>
+            </a:pPr>
+            <a:r>
+              <a:t>Hide flags affect only visual collapse.</a:t>
             </a:r>
           </a:p>
           <a:p>
@@ -5592,15 +4310,15 @@
               <a:spcBef>
                 <a:spcPts val="300"/>
               </a:spcBef>
-              <a:defRPr sz="1200">
-                <a:solidFill>
-                  <a:srgbClr val="232D37"/>
-                </a:solidFill>
-                <a:latin typeface="Aptos"/>
-              </a:defRPr>
-            </a:pPr>
-            <a:r>
-              <a:t>Cash income now includes depreciation and tax-exempt payouts</a:t>
+              <a:defRPr sz="1300">
+                <a:solidFill>
+                  <a:srgbClr val="232D37"/>
+                </a:solidFill>
+                <a:latin typeface="Aptos"/>
+              </a:defRPr>
+            </a:pPr>
+            <a:r>
+              <a:t>Values remain stored when an assumption is disabled.</a:t>
             </a:r>
           </a:p>
         </p:txBody>
@@ -5613,7 +4331,7 @@
         </p:nvSpPr>
         <p:spPr>
           <a:xfrm>
-            <a:off x="2926080" y="1234440"/>
+            <a:off x="4407408" y="1234440"/>
             <a:ext cx="82296" cy="4480560"/>
           </a:xfrm>
           <a:prstGeom prst="rect">
@@ -5656,138 +4374,8 @@
         </p:nvSpPr>
         <p:spPr>
           <a:xfrm>
-            <a:off x="5413248" y="1234440"/>
-            <a:ext cx="2286000" cy="4480560"/>
-          </a:xfrm>
-          <a:prstGeom prst="roundRect">
-            <a:avLst/>
-          </a:prstGeom>
-          <a:solidFill>
-            <a:srgbClr val="FFF6E8"/>
-          </a:solidFill>
-          <a:ln w="13970">
-            <a:solidFill>
-              <a:srgbClr val="E5892A"/>
-            </a:solidFill>
-          </a:ln>
-        </p:spPr>
-        <p:style>
-          <a:lnRef idx="1">
-            <a:schemeClr val="accent1"/>
-          </a:lnRef>
-          <a:fillRef idx="3">
-            <a:schemeClr val="accent1"/>
-          </a:fillRef>
-          <a:effectRef idx="2">
-            <a:schemeClr val="accent1"/>
-          </a:effectRef>
-          <a:fontRef idx="minor">
-            <a:schemeClr val="lt1"/>
-          </a:fontRef>
-        </p:style>
-        <p:txBody>
-          <a:bodyPr rtlCol="0" anchor="ctr" lIns="182880" rIns="100584" tIns="91440"/>
-          <a:lstStyle/>
-          <a:p>
-            <a:pPr algn="ctr">
-              <a:defRPr sz="1600" b="1">
-                <a:solidFill>
-                  <a:srgbClr val="232D37"/>
-                </a:solidFill>
-                <a:latin typeface="Aptos Display"/>
-              </a:defRPr>
-            </a:pPr>
-            <a:r>
-              <a:t>Tax rules</a:t>
-            </a:r>
-          </a:p>
-          <a:p>
-            <a:pPr>
-              <a:spcBef>
-                <a:spcPts val="300"/>
-              </a:spcBef>
-              <a:defRPr sz="1200">
-                <a:solidFill>
-                  <a:srgbClr val="232D37"/>
-                </a:solidFill>
-                <a:latin typeface="Aptos"/>
-              </a:defRPr>
-            </a:pPr>
-            <a:r>
-              <a:t>Tax-exempt income affects SS provisional income and IRMAA MAGI</a:t>
-            </a:r>
-          </a:p>
-          <a:p>
-            <a:pPr>
-              <a:spcBef>
-                <a:spcPts val="300"/>
-              </a:spcBef>
-              <a:defRPr sz="1200">
-                <a:solidFill>
-                  <a:srgbClr val="232D37"/>
-                </a:solidFill>
-                <a:latin typeface="Aptos"/>
-              </a:defRPr>
-            </a:pPr>
-            <a:r>
-              <a:t>Enhanced senior deduction for 2025–2028</a:t>
-            </a:r>
-          </a:p>
-        </p:txBody>
-      </p:sp>
-      <p:sp>
-        <p:nvSpPr>
-          <p:cNvPr id="9" name="Rectangle 8"/>
-          <p:cNvSpPr/>
-          <p:nvPr/>
-        </p:nvSpPr>
-        <p:spPr>
-          <a:xfrm>
-            <a:off x="5413248" y="1234440"/>
-            <a:ext cx="82296" cy="4480560"/>
-          </a:xfrm>
-          <a:prstGeom prst="rect">
-            <a:avLst/>
-          </a:prstGeom>
-          <a:solidFill>
-            <a:srgbClr val="E5892A"/>
-          </a:solidFill>
-          <a:ln>
-            <a:noFill/>
-          </a:ln>
-        </p:spPr>
-        <p:style>
-          <a:lnRef idx="1">
-            <a:schemeClr val="accent1"/>
-          </a:lnRef>
-          <a:fillRef idx="3">
-            <a:schemeClr val="accent1"/>
-          </a:fillRef>
-          <a:effectRef idx="2">
-            <a:schemeClr val="accent1"/>
-          </a:effectRef>
-          <a:fontRef idx="minor">
-            <a:schemeClr val="lt1"/>
-          </a:fontRef>
-        </p:style>
-        <p:txBody>
-          <a:bodyPr rtlCol="0" anchor="ctr"/>
-          <a:lstStyle/>
-          <a:p>
-            <a:pPr algn="ctr"/>
-          </a:p>
-        </p:txBody>
-      </p:sp>
-      <p:sp>
-        <p:nvSpPr>
-          <p:cNvPr id="10" name="Rounded Rectangle 9"/>
-          <p:cNvSpPr/>
-          <p:nvPr/>
-        </p:nvSpPr>
-        <p:spPr>
-          <a:xfrm>
-            <a:off x="7900416" y="1234440"/>
-            <a:ext cx="2286000" cy="4480560"/>
+            <a:off x="8220456" y="1234440"/>
+            <a:ext cx="3383280" cy="4480560"/>
           </a:xfrm>
           <a:prstGeom prst="roundRect">
             <a:avLst/>
@@ -5820,7 +4408,7 @@
           <a:lstStyle/>
           <a:p>
             <a:pPr algn="ctr">
-              <a:defRPr sz="1600" b="1">
+              <a:defRPr sz="1800" b="1">
                 <a:solidFill>
                   <a:srgbClr val="232D37"/>
                 </a:solidFill>
@@ -5828,7 +4416,7 @@
               </a:defRPr>
             </a:pPr>
             <a:r>
-              <a:t>Legacy view</a:t>
+              <a:t>Documentation pages</a:t>
             </a:r>
           </a:p>
           <a:p>
@@ -5836,15 +4424,15 @@
               <a:spcBef>
                 <a:spcPts val="300"/>
               </a:spcBef>
-              <a:defRPr sz="1200">
-                <a:solidFill>
-                  <a:srgbClr val="232D37"/>
-                </a:solidFill>
-                <a:latin typeface="Aptos"/>
-              </a:defRPr>
-            </a:pPr>
-            <a:r>
-              <a:t>10-year stretch tail includes selected IRAs and continuing non-IDGT brokerage</a:t>
+              <a:defRPr sz="1300">
+                <a:solidFill>
+                  <a:srgbClr val="232D37"/>
+                </a:solidFill>
+                <a:latin typeface="Aptos"/>
+              </a:defRPr>
+            </a:pPr>
+            <a:r>
+              <a:t>Usage button added to the topbar.</a:t>
             </a:r>
           </a:p>
           <a:p>
@@ -5852,28 +4440,44 @@
               <a:spcBef>
                 <a:spcPts val="300"/>
               </a:spcBef>
-              <a:defRPr sz="1200">
-                <a:solidFill>
-                  <a:srgbClr val="232D37"/>
-                </a:solidFill>
-                <a:latin typeface="Aptos"/>
-              </a:defRPr>
-            </a:pPr>
-            <a:r>
-              <a:t>Asset devalue sliders model display-only haircuts</a:t>
-            </a:r>
-          </a:p>
-        </p:txBody>
-      </p:sp>
-      <p:sp>
-        <p:nvSpPr>
-          <p:cNvPr id="11" name="Rectangle 10"/>
+              <a:defRPr sz="1300">
+                <a:solidFill>
+                  <a:srgbClr val="232D37"/>
+                </a:solidFill>
+                <a:latin typeface="Aptos"/>
+              </a:defRPr>
+            </a:pPr>
+            <a:r>
+              <a:t>mdPage.js becomes the shared Markdown renderer.</a:t>
+            </a:r>
+          </a:p>
+          <a:p>
+            <a:pPr>
+              <a:spcBef>
+                <a:spcPts val="300"/>
+              </a:spcBef>
+              <a:defRPr sz="1300">
+                <a:solidFill>
+                  <a:srgbClr val="232D37"/>
+                </a:solidFill>
+                <a:latin typeface="Aptos"/>
+              </a:defRPr>
+            </a:pPr>
+            <a:r>
+              <a:t>Usage.md and Note4User.md update without app-code edits.</a:t>
+            </a:r>
+          </a:p>
+        </p:txBody>
+      </p:sp>
+      <p:sp>
+        <p:nvSpPr>
+          <p:cNvPr id="9" name="Rectangle 8"/>
           <p:cNvSpPr/>
           <p:nvPr/>
         </p:nvSpPr>
         <p:spPr>
           <a:xfrm>
-            <a:off x="7900416" y="1234440"/>
+            <a:off x="8220456" y="1234440"/>
             <a:ext cx="82296" cy="4480560"/>
           </a:xfrm>
           <a:prstGeom prst="rect">
@@ -5910,137 +4514,7 @@
       </p:sp>
       <p:sp>
         <p:nvSpPr>
-          <p:cNvPr id="12" name="Rounded Rectangle 11"/>
-          <p:cNvSpPr/>
-          <p:nvPr/>
-        </p:nvSpPr>
-        <p:spPr>
-          <a:xfrm>
-            <a:off x="10387584" y="1234440"/>
-            <a:ext cx="1371600" cy="4480560"/>
-          </a:xfrm>
-          <a:prstGeom prst="roundRect">
-            <a:avLst/>
-          </a:prstGeom>
-          <a:solidFill>
-            <a:srgbClr val="F8FAFC"/>
-          </a:solidFill>
-          <a:ln w="13970">
-            <a:solidFill>
-              <a:srgbClr val="0F2647"/>
-            </a:solidFill>
-          </a:ln>
-        </p:spPr>
-        <p:style>
-          <a:lnRef idx="1">
-            <a:schemeClr val="accent1"/>
-          </a:lnRef>
-          <a:fillRef idx="3">
-            <a:schemeClr val="accent1"/>
-          </a:fillRef>
-          <a:effectRef idx="2">
-            <a:schemeClr val="accent1"/>
-          </a:effectRef>
-          <a:fontRef idx="minor">
-            <a:schemeClr val="lt1"/>
-          </a:fontRef>
-        </p:style>
-        <p:txBody>
-          <a:bodyPr rtlCol="0" anchor="ctr" lIns="182880" rIns="100584" tIns="91440"/>
-          <a:lstStyle/>
-          <a:p>
-            <a:pPr algn="ctr">
-              <a:defRPr sz="1500" b="1">
-                <a:solidFill>
-                  <a:srgbClr val="232D37"/>
-                </a:solidFill>
-                <a:latin typeface="Aptos Display"/>
-              </a:defRPr>
-            </a:pPr>
-            <a:r>
-              <a:t>UI &amp; migration</a:t>
-            </a:r>
-          </a:p>
-          <a:p>
-            <a:pPr>
-              <a:spcBef>
-                <a:spcPts val="300"/>
-              </a:spcBef>
-              <a:defRPr sz="1000">
-                <a:solidFill>
-                  <a:srgbClr val="232D37"/>
-                </a:solidFill>
-                <a:latin typeface="Aptos"/>
-              </a:defRPr>
-            </a:pPr>
-            <a:r>
-              <a:t>Conversion-start modes</a:t>
-            </a:r>
-          </a:p>
-          <a:p>
-            <a:pPr>
-              <a:spcBef>
-                <a:spcPts val="300"/>
-              </a:spcBef>
-              <a:defRPr sz="1000">
-                <a:solidFill>
-                  <a:srgbClr val="232D37"/>
-                </a:solidFill>
-                <a:latin typeface="Aptos"/>
-              </a:defRPr>
-            </a:pPr>
-            <a:r>
-              <a:t>Legacy saved-plan transformations</a:t>
-            </a:r>
-          </a:p>
-        </p:txBody>
-      </p:sp>
-      <p:sp>
-        <p:nvSpPr>
-          <p:cNvPr id="13" name="Rectangle 12"/>
-          <p:cNvSpPr/>
-          <p:nvPr/>
-        </p:nvSpPr>
-        <p:spPr>
-          <a:xfrm>
-            <a:off x="10387584" y="1234440"/>
-            <a:ext cx="82296" cy="4480560"/>
-          </a:xfrm>
-          <a:prstGeom prst="rect">
-            <a:avLst/>
-          </a:prstGeom>
-          <a:solidFill>
-            <a:srgbClr val="0F2647"/>
-          </a:solidFill>
-          <a:ln>
-            <a:noFill/>
-          </a:ln>
-        </p:spPr>
-        <p:style>
-          <a:lnRef idx="1">
-            <a:schemeClr val="accent1"/>
-          </a:lnRef>
-          <a:fillRef idx="3">
-            <a:schemeClr val="accent1"/>
-          </a:fillRef>
-          <a:effectRef idx="2">
-            <a:schemeClr val="accent1"/>
-          </a:effectRef>
-          <a:fontRef idx="minor">
-            <a:schemeClr val="lt1"/>
-          </a:fontRef>
-        </p:style>
-        <p:txBody>
-          <a:bodyPr rtlCol="0" anchor="ctr"/>
-          <a:lstStyle/>
-          <a:p>
-            <a:pPr algn="ctr"/>
-          </a:p>
-        </p:txBody>
-      </p:sp>
-      <p:sp>
-        <p:nvSpPr>
-          <p:cNvPr id="14" name="Rectangle 13"/>
+          <p:cNvPr id="10" name="Rectangle 9"/>
           <p:cNvSpPr/>
           <p:nvPr/>
         </p:nvSpPr>
@@ -6083,7 +4557,7 @@
       </p:sp>
       <p:sp>
         <p:nvSpPr>
-          <p:cNvPr id="15" name="TextBox 14"/>
+          <p:cNvPr id="11" name="TextBox 10"/>
           <p:cNvSpPr txBox="1"/>
           <p:nvPr/>
         </p:nvSpPr>
@@ -6112,7 +4586,7 @@
               </a:defRPr>
             </a:pPr>
             <a:r>
-              <a:t>Retirement Income Planner • Architecture overview • Rental, tax-exempt income, and legacy-value update</a:t>
+              <a:t>Retirement Income Planner • Architecture overview • Assumption controls and Markdown Usage update</a:t>
             </a:r>
           </a:p>
         </p:txBody>
@@ -6174,7 +4648,7 @@
               </a:defRPr>
             </a:pPr>
             <a:r>
-              <a:t>Rental income becomes a portfolio of properties</a:t>
+              <a:t>Assumption cards: Enable controls computation; Hide controls layout</a:t>
             </a:r>
           </a:p>
         </p:txBody>
@@ -6210,7 +4684,7 @@
               </a:defRPr>
             </a:pPr>
             <a:r>
-              <a:t>Each person can add, name, enable, hide, and remove rental-property sub-cards.</a:t>
+              <a:t>The app applies the established card pattern to four household-level assumptions.</a:t>
             </a:r>
           </a:p>
         </p:txBody>
@@ -6223,8 +4697,154 @@
         </p:nvSpPr>
         <p:spPr>
           <a:xfrm>
-            <a:off x="594360" y="1188720"/>
-            <a:ext cx="3337560" cy="4526280"/>
+            <a:off x="502920" y="1234440"/>
+            <a:ext cx="2377440" cy="4434840"/>
+          </a:xfrm>
+          <a:prstGeom prst="roundRect">
+            <a:avLst/>
+          </a:prstGeom>
+          <a:solidFill>
+            <a:srgbClr val="EAF9F4"/>
+          </a:solidFill>
+          <a:ln w="13970">
+            <a:solidFill>
+              <a:srgbClr val="429761"/>
+            </a:solidFill>
+          </a:ln>
+        </p:spPr>
+        <p:style>
+          <a:lnRef idx="1">
+            <a:schemeClr val="accent1"/>
+          </a:lnRef>
+          <a:fillRef idx="3">
+            <a:schemeClr val="accent1"/>
+          </a:fillRef>
+          <a:effectRef idx="2">
+            <a:schemeClr val="accent1"/>
+          </a:effectRef>
+          <a:fontRef idx="minor">
+            <a:schemeClr val="lt1"/>
+          </a:fontRef>
+        </p:style>
+        <p:txBody>
+          <a:bodyPr rtlCol="0" anchor="ctr" lIns="182880" rIns="100584" tIns="91440"/>
+          <a:lstStyle/>
+          <a:p>
+            <a:pPr algn="ctr">
+              <a:defRPr sz="1700" b="1">
+                <a:solidFill>
+                  <a:srgbClr val="232D37"/>
+                </a:solidFill>
+                <a:latin typeface="Aptos Display"/>
+              </a:defRPr>
+            </a:pPr>
+            <a:r>
+              <a:t>Enable</a:t>
+            </a:r>
+          </a:p>
+          <a:p>
+            <a:pPr>
+              <a:spcBef>
+                <a:spcPts val="300"/>
+              </a:spcBef>
+              <a:defRPr sz="1200">
+                <a:solidFill>
+                  <a:srgbClr val="232D37"/>
+                </a:solidFill>
+                <a:latin typeface="Aptos"/>
+              </a:defRPr>
+            </a:pPr>
+            <a:r>
+              <a:t>State: scglEnabled, aumFee.enabled, ltc.enabled, futureTax.enabled</a:t>
+            </a:r>
+          </a:p>
+          <a:p>
+            <a:pPr>
+              <a:spcBef>
+                <a:spcPts val="300"/>
+              </a:spcBef>
+              <a:defRPr sz="1200">
+                <a:solidFill>
+                  <a:srgbClr val="232D37"/>
+                </a:solidFill>
+                <a:latin typeface="Aptos"/>
+              </a:defRPr>
+            </a:pPr>
+            <a:r>
+              <a:t>Compute includes the item only when enabled.</a:t>
+            </a:r>
+          </a:p>
+          <a:p>
+            <a:pPr>
+              <a:spcBef>
+                <a:spcPts val="300"/>
+              </a:spcBef>
+              <a:defRPr sz="1200">
+                <a:solidFill>
+                  <a:srgbClr val="232D37"/>
+                </a:solidFill>
+                <a:latin typeface="Aptos"/>
+              </a:defRPr>
+            </a:pPr>
+            <a:r>
+              <a:t>Turning off retains all configured values.</a:t>
+            </a:r>
+          </a:p>
+        </p:txBody>
+      </p:sp>
+      <p:sp>
+        <p:nvSpPr>
+          <p:cNvPr id="5" name="Rectangle 4"/>
+          <p:cNvSpPr/>
+          <p:nvPr/>
+        </p:nvSpPr>
+        <p:spPr>
+          <a:xfrm>
+            <a:off x="502920" y="1234440"/>
+            <a:ext cx="82296" cy="4434840"/>
+          </a:xfrm>
+          <a:prstGeom prst="rect">
+            <a:avLst/>
+          </a:prstGeom>
+          <a:solidFill>
+            <a:srgbClr val="429761"/>
+          </a:solidFill>
+          <a:ln>
+            <a:noFill/>
+          </a:ln>
+        </p:spPr>
+        <p:style>
+          <a:lnRef idx="1">
+            <a:schemeClr val="accent1"/>
+          </a:lnRef>
+          <a:fillRef idx="3">
+            <a:schemeClr val="accent1"/>
+          </a:fillRef>
+          <a:effectRef idx="2">
+            <a:schemeClr val="accent1"/>
+          </a:effectRef>
+          <a:fontRef idx="minor">
+            <a:schemeClr val="lt1"/>
+          </a:fontRef>
+        </p:style>
+        <p:txBody>
+          <a:bodyPr rtlCol="0" anchor="ctr"/>
+          <a:lstStyle/>
+          <a:p>
+            <a:pPr algn="ctr"/>
+          </a:p>
+        </p:txBody>
+      </p:sp>
+      <p:sp>
+        <p:nvSpPr>
+          <p:cNvPr id="6" name="Rounded Rectangle 5"/>
+          <p:cNvSpPr/>
+          <p:nvPr/>
+        </p:nvSpPr>
+        <p:spPr>
+          <a:xfrm>
+            <a:off x="3246120" y="1234440"/>
+            <a:ext cx="2377440" cy="4434840"/>
           </a:xfrm>
           <a:prstGeom prst="roundRect">
             <a:avLst/>
@@ -6265,7 +4885,7 @@
               </a:defRPr>
             </a:pPr>
             <a:r>
-              <a:t>Rental property schema</a:t>
+              <a:t>Hide</a:t>
             </a:r>
           </a:p>
           <a:p>
@@ -6281,7 +4901,7 @@
               </a:defRPr>
             </a:pPr>
             <a:r>
-              <a:t>Name</a:t>
+              <a:t>State: ui.assumpHide.scgl|aum|ltc|future</a:t>
             </a:r>
           </a:p>
           <a:p>
@@ -6297,7 +4917,7 @@
               </a:defRPr>
             </a:pPr>
             <a:r>
-              <a:t>Taxable rental income: net of depreciation</a:t>
+              <a:t>Collapses only the body.</a:t>
             </a:r>
           </a:p>
           <a:p>
@@ -6313,7 +4933,7 @@
               </a:defRPr>
             </a:pPr>
             <a:r>
-              <a:t>Annual non-cash depreciation</a:t>
+              <a:t>All fields remain rendered and saved.</a:t>
             </a:r>
           </a:p>
           <a:p>
@@ -6329,53 +4949,21 @@
               </a:defRPr>
             </a:pPr>
             <a:r>
-              <a:t>Age range and annual change</a:t>
-            </a:r>
-          </a:p>
-          <a:p>
-            <a:pPr>
-              <a:spcBef>
-                <a:spcPts val="300"/>
-              </a:spcBef>
-              <a:defRPr sz="1200">
-                <a:solidFill>
-                  <a:srgbClr val="232D37"/>
-                </a:solidFill>
-                <a:latin typeface="Aptos"/>
-              </a:defRPr>
-            </a:pPr>
-            <a:r>
-              <a:t>Survivor continuation</a:t>
-            </a:r>
-          </a:p>
-          <a:p>
-            <a:pPr>
-              <a:spcBef>
-                <a:spcPts val="300"/>
-              </a:spcBef>
-              <a:defRPr sz="1200">
-                <a:solidFill>
-                  <a:srgbClr val="232D37"/>
-                </a:solidFill>
-                <a:latin typeface="Aptos"/>
-              </a:defRPr>
-            </a:pPr>
-            <a:r>
-              <a:t>Independent Enable / Hide / Remove</a:t>
-            </a:r>
-          </a:p>
-        </p:txBody>
-      </p:sp>
-      <p:sp>
-        <p:nvSpPr>
-          <p:cNvPr id="5" name="Rectangle 4"/>
+              <a:t>Enable never changes Hide state.</a:t>
+            </a:r>
+          </a:p>
+        </p:txBody>
+      </p:sp>
+      <p:sp>
+        <p:nvSpPr>
+          <p:cNvPr id="7" name="Rectangle 6"/>
           <p:cNvSpPr/>
           <p:nvPr/>
         </p:nvSpPr>
         <p:spPr>
           <a:xfrm>
-            <a:off x="594360" y="1188720"/>
-            <a:ext cx="82296" cy="4526280"/>
+            <a:off x="3246120" y="1234440"/>
+            <a:ext cx="82296" cy="4434840"/>
           </a:xfrm>
           <a:prstGeom prst="rect">
             <a:avLst/>
@@ -6411,24 +4999,24 @@
       </p:sp>
       <p:sp>
         <p:nvSpPr>
-          <p:cNvPr id="6" name="Rounded Rectangle 5"/>
+          <p:cNvPr id="8" name="Rounded Rectangle 7"/>
           <p:cNvSpPr/>
           <p:nvPr/>
         </p:nvSpPr>
         <p:spPr>
           <a:xfrm>
-            <a:off x="4407408" y="1188720"/>
-            <a:ext cx="3337560" cy="4526280"/>
+            <a:off x="5989320" y="1234440"/>
+            <a:ext cx="2377440" cy="4434840"/>
           </a:xfrm>
           <a:prstGeom prst="roundRect">
             <a:avLst/>
           </a:prstGeom>
           <a:solidFill>
-            <a:srgbClr val="EAF9F4"/>
+            <a:srgbClr val="F7EFFF"/>
           </a:solidFill>
           <a:ln w="13970">
             <a:solidFill>
-              <a:srgbClr val="429761"/>
+              <a:srgbClr val="7852B0"/>
             </a:solidFill>
           </a:ln>
         </p:spPr>
@@ -6459,7 +5047,7 @@
               </a:defRPr>
             </a:pPr>
             <a:r>
-              <a:t>Projection treatment</a:t>
+              <a:t>Rendering</a:t>
             </a:r>
           </a:p>
           <a:p>
@@ -6475,7 +5063,7 @@
               </a:defRPr>
             </a:pPr>
             <a:r>
-              <a:t>Rental income sums across active properties.</a:t>
+              <a:t>assumpCard() supplies standard header behavior.</a:t>
             </a:r>
           </a:p>
           <a:p>
@@ -6491,7 +5079,7 @@
               </a:defRPr>
             </a:pPr>
             <a:r>
-              <a:t>Depreciation follows the same activation, age-range, and survivor rules.</a:t>
+              <a:t>syncAssumpEnable() greys SCGL/AUM inputs when disabled.</a:t>
             </a:r>
           </a:p>
           <a:p>
@@ -6507,27 +5095,27 @@
               </a:defRPr>
             </a:pPr>
             <a:r>
-              <a:t>Depreciation is deflated because it is a fixed nominal deduction.</a:t>
-            </a:r>
-          </a:p>
-        </p:txBody>
-      </p:sp>
-      <p:sp>
-        <p:nvSpPr>
-          <p:cNvPr id="7" name="Rectangle 6"/>
+              <a:t>Body presence is not tied to enablement.</a:t>
+            </a:r>
+          </a:p>
+        </p:txBody>
+      </p:sp>
+      <p:sp>
+        <p:nvSpPr>
+          <p:cNvPr id="9" name="Rectangle 8"/>
           <p:cNvSpPr/>
           <p:nvPr/>
         </p:nvSpPr>
         <p:spPr>
           <a:xfrm>
-            <a:off x="4407408" y="1188720"/>
-            <a:ext cx="82296" cy="4526280"/>
+            <a:off x="5989320" y="1234440"/>
+            <a:ext cx="82296" cy="4434840"/>
           </a:xfrm>
           <a:prstGeom prst="rect">
             <a:avLst/>
           </a:prstGeom>
           <a:solidFill>
-            <a:srgbClr val="429761"/>
+            <a:srgbClr val="7852B0"/>
           </a:solidFill>
           <a:ln>
             <a:noFill/>
@@ -6557,14 +5145,14 @@
       </p:sp>
       <p:sp>
         <p:nvSpPr>
-          <p:cNvPr id="8" name="Rounded Rectangle 7"/>
+          <p:cNvPr id="10" name="Rounded Rectangle 9"/>
           <p:cNvSpPr/>
           <p:nvPr/>
         </p:nvSpPr>
         <p:spPr>
           <a:xfrm>
-            <a:off x="8220456" y="1188720"/>
-            <a:ext cx="3337560" cy="4526280"/>
+            <a:off x="8732520" y="1234440"/>
+            <a:ext cx="2514600" cy="4434840"/>
           </a:xfrm>
           <a:prstGeom prst="roundRect">
             <a:avLst/>
@@ -6605,7 +5193,7 @@
               </a:defRPr>
             </a:pPr>
             <a:r>
-              <a:t>Cash vs. tax treatment</a:t>
+              <a:t>Defaults &amp; legacy</a:t>
             </a:r>
           </a:p>
           <a:p>
@@ -6621,7 +5209,7 @@
               </a:defRPr>
             </a:pPr>
             <a:r>
-              <a:t>Taxable rental amount enters ordinary income and AGI.</a:t>
+              <a:t>LTC and Future Tax start hidden.</a:t>
             </a:r>
           </a:p>
           <a:p>
@@ -6637,7 +5225,7 @@
               </a:defRPr>
             </a:pPr>
             <a:r>
-              <a:t>Depreciation is non-cash: it increases cashIncome but is never taxed.</a:t>
+              <a:t>Old saves without flags default as enabled.</a:t>
             </a:r>
           </a:p>
           <a:p>
@@ -6653,21 +5241,21 @@
               </a:defRPr>
             </a:pPr>
             <a:r>
-              <a:t>Income chart shows both as distinct stacked bands.</a:t>
-            </a:r>
-          </a:p>
-        </p:txBody>
-      </p:sp>
-      <p:sp>
-        <p:nvSpPr>
-          <p:cNvPr id="9" name="Rectangle 8"/>
+              <a:t>Old saves without assumpHide open LTC/Future only if enabled.</a:t>
+            </a:r>
+          </a:p>
+        </p:txBody>
+      </p:sp>
+      <p:sp>
+        <p:nvSpPr>
+          <p:cNvPr id="11" name="Rectangle 10"/>
           <p:cNvSpPr/>
           <p:nvPr/>
         </p:nvSpPr>
         <p:spPr>
           <a:xfrm>
-            <a:off x="8220456" y="1188720"/>
-            <a:ext cx="82296" cy="4526280"/>
+            <a:off x="8732520" y="1234440"/>
+            <a:ext cx="82296" cy="4434840"/>
           </a:xfrm>
           <a:prstGeom prst="rect">
             <a:avLst/>
@@ -6701,9 +5289,44 @@
           </a:p>
         </p:txBody>
       </p:sp>
-      <p:sp>
-        <p:nvSpPr>
-          <p:cNvPr id="10" name="Rectangle 9"/>
+      <p:cxnSp>
+        <p:nvCxnSpPr>
+          <p:cNvPr id="12" name="Connector 11"/>
+          <p:cNvCxnSpPr/>
+          <p:nvPr/>
+        </p:nvCxnSpPr>
+        <p:spPr>
+          <a:xfrm>
+            <a:off x="2926080" y="3429000"/>
+            <a:ext cx="228600" cy="0"/>
+          </a:xfrm>
+          <a:prstGeom prst="line">
+            <a:avLst/>
+          </a:prstGeom>
+          <a:ln w="22860">
+            <a:solidFill>
+              <a:srgbClr val="429761"/>
+            </a:solidFill>
+          </a:ln>
+        </p:spPr>
+        <p:style>
+          <a:lnRef idx="2">
+            <a:schemeClr val="accent1"/>
+          </a:lnRef>
+          <a:fillRef idx="0">
+            <a:schemeClr val="accent1"/>
+          </a:fillRef>
+          <a:effectRef idx="1">
+            <a:schemeClr val="accent1"/>
+          </a:effectRef>
+          <a:fontRef idx="minor">
+            <a:schemeClr val="tx1"/>
+          </a:fontRef>
+        </p:style>
+      </p:cxnSp>
+      <p:sp>
+        <p:nvSpPr>
+          <p:cNvPr id="13" name="Rectangle 12"/>
           <p:cNvSpPr/>
           <p:nvPr/>
         </p:nvSpPr>
@@ -6746,7 +5369,7 @@
       </p:sp>
       <p:sp>
         <p:nvSpPr>
-          <p:cNvPr id="11" name="TextBox 10"/>
+          <p:cNvPr id="14" name="TextBox 13"/>
           <p:cNvSpPr txBox="1"/>
           <p:nvPr/>
         </p:nvSpPr>
@@ -6775,7 +5398,235 @@
               </a:defRPr>
             </a:pPr>
             <a:r>
-              <a:t>Retirement Income Planner • Architecture overview • Rental, tax-exempt income, and legacy-value update</a:t>
+              <a:t>Retirement Income Planner • Architecture overview • Assumption controls and Markdown Usage update</a:t>
+            </a:r>
+          </a:p>
+        </p:txBody>
+      </p:sp>
+      <p:cxnSp>
+        <p:nvCxnSpPr>
+          <p:cNvPr id="15" name="Connector 14"/>
+          <p:cNvCxnSpPr/>
+          <p:nvPr/>
+        </p:nvCxnSpPr>
+        <p:spPr>
+          <a:xfrm>
+            <a:off x="5669280" y="3429000"/>
+            <a:ext cx="228600" cy="0"/>
+          </a:xfrm>
+          <a:prstGeom prst="line">
+            <a:avLst/>
+          </a:prstGeom>
+          <a:ln w="22860">
+            <a:solidFill>
+              <a:srgbClr val="266EB2"/>
+            </a:solidFill>
+          </a:ln>
+        </p:spPr>
+        <p:style>
+          <a:lnRef idx="2">
+            <a:schemeClr val="accent1"/>
+          </a:lnRef>
+          <a:fillRef idx="0">
+            <a:schemeClr val="accent1"/>
+          </a:fillRef>
+          <a:effectRef idx="1">
+            <a:schemeClr val="accent1"/>
+          </a:effectRef>
+          <a:fontRef idx="minor">
+            <a:schemeClr val="tx1"/>
+          </a:fontRef>
+        </p:style>
+      </p:cxnSp>
+      <p:sp>
+        <p:nvSpPr>
+          <p:cNvPr id="16" name="Rectangle 15"/>
+          <p:cNvSpPr/>
+          <p:nvPr/>
+        </p:nvSpPr>
+        <p:spPr>
+          <a:xfrm>
+            <a:off x="502920" y="6473952"/>
+            <a:ext cx="11183112" cy="13716"/>
+          </a:xfrm>
+          <a:prstGeom prst="rect">
+            <a:avLst/>
+          </a:prstGeom>
+          <a:solidFill>
+            <a:srgbClr val="D2DCE5"/>
+          </a:solidFill>
+          <a:ln>
+            <a:noFill/>
+          </a:ln>
+        </p:spPr>
+        <p:style>
+          <a:lnRef idx="1">
+            <a:schemeClr val="accent1"/>
+          </a:lnRef>
+          <a:fillRef idx="3">
+            <a:schemeClr val="accent1"/>
+          </a:fillRef>
+          <a:effectRef idx="2">
+            <a:schemeClr val="accent1"/>
+          </a:effectRef>
+          <a:fontRef idx="minor">
+            <a:schemeClr val="lt1"/>
+          </a:fontRef>
+        </p:style>
+        <p:txBody>
+          <a:bodyPr rtlCol="0" anchor="ctr"/>
+          <a:lstStyle/>
+          <a:p>
+            <a:pPr algn="ctr"/>
+          </a:p>
+        </p:txBody>
+      </p:sp>
+      <p:sp>
+        <p:nvSpPr>
+          <p:cNvPr id="17" name="TextBox 16"/>
+          <p:cNvSpPr txBox="1"/>
+          <p:nvPr/>
+        </p:nvSpPr>
+        <p:spPr>
+          <a:xfrm>
+            <a:off x="530352" y="6510528"/>
+            <a:ext cx="10881360" cy="146304"/>
+          </a:xfrm>
+          <a:prstGeom prst="rect">
+            <a:avLst/>
+          </a:prstGeom>
+          <a:noFill/>
+        </p:spPr>
+        <p:txBody>
+          <a:bodyPr wrap="none" anchor="ctr">
+            <a:spAutoFit/>
+          </a:bodyPr>
+          <a:lstStyle/>
+          <a:p>
+            <a:pPr algn="l">
+              <a:defRPr sz="850" b="0">
+                <a:solidFill>
+                  <a:srgbClr val="5D6C7A"/>
+                </a:solidFill>
+                <a:latin typeface="Aptos"/>
+              </a:defRPr>
+            </a:pPr>
+            <a:r>
+              <a:t>Retirement Income Planner • Architecture overview • Assumption controls and Markdown Usage update</a:t>
+            </a:r>
+          </a:p>
+        </p:txBody>
+      </p:sp>
+      <p:cxnSp>
+        <p:nvCxnSpPr>
+          <p:cNvPr id="18" name="Connector 17"/>
+          <p:cNvCxnSpPr/>
+          <p:nvPr/>
+        </p:nvCxnSpPr>
+        <p:spPr>
+          <a:xfrm>
+            <a:off x="8412480" y="3429000"/>
+            <a:ext cx="228600" cy="0"/>
+          </a:xfrm>
+          <a:prstGeom prst="line">
+            <a:avLst/>
+          </a:prstGeom>
+          <a:ln w="22860">
+            <a:solidFill>
+              <a:srgbClr val="7852B0"/>
+            </a:solidFill>
+          </a:ln>
+        </p:spPr>
+        <p:style>
+          <a:lnRef idx="2">
+            <a:schemeClr val="accent1"/>
+          </a:lnRef>
+          <a:fillRef idx="0">
+            <a:schemeClr val="accent1"/>
+          </a:fillRef>
+          <a:effectRef idx="1">
+            <a:schemeClr val="accent1"/>
+          </a:effectRef>
+          <a:fontRef idx="minor">
+            <a:schemeClr val="tx1"/>
+          </a:fontRef>
+        </p:style>
+      </p:cxnSp>
+      <p:sp>
+        <p:nvSpPr>
+          <p:cNvPr id="19" name="Rectangle 18"/>
+          <p:cNvSpPr/>
+          <p:nvPr/>
+        </p:nvSpPr>
+        <p:spPr>
+          <a:xfrm>
+            <a:off x="502920" y="6473952"/>
+            <a:ext cx="11183112" cy="13716"/>
+          </a:xfrm>
+          <a:prstGeom prst="rect">
+            <a:avLst/>
+          </a:prstGeom>
+          <a:solidFill>
+            <a:srgbClr val="D2DCE5"/>
+          </a:solidFill>
+          <a:ln>
+            <a:noFill/>
+          </a:ln>
+        </p:spPr>
+        <p:style>
+          <a:lnRef idx="1">
+            <a:schemeClr val="accent1"/>
+          </a:lnRef>
+          <a:fillRef idx="3">
+            <a:schemeClr val="accent1"/>
+          </a:fillRef>
+          <a:effectRef idx="2">
+            <a:schemeClr val="accent1"/>
+          </a:effectRef>
+          <a:fontRef idx="minor">
+            <a:schemeClr val="lt1"/>
+          </a:fontRef>
+        </p:style>
+        <p:txBody>
+          <a:bodyPr rtlCol="0" anchor="ctr"/>
+          <a:lstStyle/>
+          <a:p>
+            <a:pPr algn="ctr"/>
+          </a:p>
+        </p:txBody>
+      </p:sp>
+      <p:sp>
+        <p:nvSpPr>
+          <p:cNvPr id="20" name="TextBox 19"/>
+          <p:cNvSpPr txBox="1"/>
+          <p:nvPr/>
+        </p:nvSpPr>
+        <p:spPr>
+          <a:xfrm>
+            <a:off x="530352" y="6510528"/>
+            <a:ext cx="10881360" cy="146304"/>
+          </a:xfrm>
+          <a:prstGeom prst="rect">
+            <a:avLst/>
+          </a:prstGeom>
+          <a:noFill/>
+        </p:spPr>
+        <p:txBody>
+          <a:bodyPr wrap="none" anchor="ctr">
+            <a:spAutoFit/>
+          </a:bodyPr>
+          <a:lstStyle/>
+          <a:p>
+            <a:pPr algn="l">
+              <a:defRPr sz="850" b="0">
+                <a:solidFill>
+                  <a:srgbClr val="5D6C7A"/>
+                </a:solidFill>
+                <a:latin typeface="Aptos"/>
+              </a:defRPr>
+            </a:pPr>
+            <a:r>
+              <a:t>Retirement Income Planner • Architecture overview • Assumption controls and Markdown Usage update</a:t>
             </a:r>
           </a:p>
         </p:txBody>
@@ -6837,7 +5688,7 @@
               </a:defRPr>
             </a:pPr>
             <a:r>
-              <a:t>Tax-exempt portfolio income changes cash flow, not AGI</a:t>
+              <a:t>Assumption-state flow</a:t>
             </a:r>
           </a:p>
         </p:txBody>
@@ -6873,7 +5724,7 @@
               </a:defRPr>
             </a:pPr>
             <a:r>
-              <a:t>A portfolio’s tax-exempt yield pays cash to the household and reduces the portfolio balance, while remaining excluded from ordinary taxable income.</a:t>
+              <a:t>The new flags enter the same persistence and recomputation flow as the rest of the plan.</a:t>
             </a:r>
           </a:p>
         </p:txBody>
@@ -6887,7 +5738,7 @@
         <p:spPr>
           <a:xfrm>
             <a:off x="502920" y="1234440"/>
-            <a:ext cx="2240280" cy="1325880"/>
+            <a:ext cx="2057400" cy="1280160"/>
           </a:xfrm>
           <a:prstGeom prst="roundRect">
             <a:avLst/>
@@ -6928,7 +5779,7 @@
               </a:defRPr>
             </a:pPr>
             <a:r>
-              <a:t>Tax-exempt payout</a:t>
+              <a:t>User action</a:t>
             </a:r>
           </a:p>
           <a:p>
@@ -6944,7 +5795,7 @@
               </a:defRPr>
             </a:pPr>
             <a:r>
-              <a:t>teIncome = balance × teYield</a:t>
+              <a:t>Enable / Hide checkbox</a:t>
             </a:r>
           </a:p>
           <a:p>
@@ -6960,7 +5811,7 @@
               </a:defRPr>
             </a:pPr>
             <a:r>
-              <a:t>Portfolio balance falls by same amount</a:t>
+              <a:t>Edit value</a:t>
             </a:r>
           </a:p>
         </p:txBody>
@@ -6974,7 +5825,7 @@
         <p:spPr>
           <a:xfrm>
             <a:off x="502920" y="1234440"/>
-            <a:ext cx="82296" cy="1325880"/>
+            <a:ext cx="82296" cy="1280160"/>
           </a:xfrm>
           <a:prstGeom prst="rect">
             <a:avLst/>
@@ -7016,8 +5867,138 @@
         </p:nvSpPr>
         <p:spPr>
           <a:xfrm>
-            <a:off x="3063240" y="1234440"/>
-            <a:ext cx="2240280" cy="1325880"/>
+            <a:off x="2907792" y="1234440"/>
+            <a:ext cx="2057400" cy="1280160"/>
+          </a:xfrm>
+          <a:prstGeom prst="roundRect">
+            <a:avLst/>
+          </a:prstGeom>
+          <a:solidFill>
+            <a:srgbClr val="F8FAFC"/>
+          </a:solidFill>
+          <a:ln w="13970">
+            <a:solidFill>
+              <a:srgbClr val="0F2647"/>
+            </a:solidFill>
+          </a:ln>
+        </p:spPr>
+        <p:style>
+          <a:lnRef idx="1">
+            <a:schemeClr val="accent1"/>
+          </a:lnRef>
+          <a:fillRef idx="3">
+            <a:schemeClr val="accent1"/>
+          </a:fillRef>
+          <a:effectRef idx="2">
+            <a:schemeClr val="accent1"/>
+          </a:effectRef>
+          <a:fontRef idx="minor">
+            <a:schemeClr val="lt1"/>
+          </a:fontRef>
+        </p:style>
+        <p:txBody>
+          <a:bodyPr rtlCol="0" anchor="ctr" lIns="182880" rIns="100584" tIns="91440"/>
+          <a:lstStyle/>
+          <a:p>
+            <a:pPr algn="ctr">
+              <a:defRPr sz="1600" b="1">
+                <a:solidFill>
+                  <a:srgbClr val="232D37"/>
+                </a:solidFill>
+                <a:latin typeface="Aptos Display"/>
+              </a:defRPr>
+            </a:pPr>
+            <a:r>
+              <a:t>State update</a:t>
+            </a:r>
+          </a:p>
+          <a:p>
+            <a:pPr>
+              <a:spcBef>
+                <a:spcPts val="300"/>
+              </a:spcBef>
+              <a:defRPr sz="1100">
+                <a:solidFill>
+                  <a:srgbClr val="232D37"/>
+                </a:solidFill>
+                <a:latin typeface="Aptos"/>
+              </a:defRPr>
+            </a:pPr>
+            <a:r>
+              <a:t>setPath()</a:t>
+            </a:r>
+          </a:p>
+          <a:p>
+            <a:pPr>
+              <a:spcBef>
+                <a:spcPts val="300"/>
+              </a:spcBef>
+              <a:defRPr sz="1100">
+                <a:solidFill>
+                  <a:srgbClr val="232D37"/>
+                </a:solidFill>
+                <a:latin typeface="Aptos"/>
+              </a:defRPr>
+            </a:pPr>
+            <a:r>
+              <a:t>autosave</a:t>
+            </a:r>
+          </a:p>
+        </p:txBody>
+      </p:sp>
+      <p:sp>
+        <p:nvSpPr>
+          <p:cNvPr id="7" name="Rectangle 6"/>
+          <p:cNvSpPr/>
+          <p:nvPr/>
+        </p:nvSpPr>
+        <p:spPr>
+          <a:xfrm>
+            <a:off x="2907792" y="1234440"/>
+            <a:ext cx="82296" cy="1280160"/>
+          </a:xfrm>
+          <a:prstGeom prst="rect">
+            <a:avLst/>
+          </a:prstGeom>
+          <a:solidFill>
+            <a:srgbClr val="0F2647"/>
+          </a:solidFill>
+          <a:ln>
+            <a:noFill/>
+          </a:ln>
+        </p:spPr>
+        <p:style>
+          <a:lnRef idx="1">
+            <a:schemeClr val="accent1"/>
+          </a:lnRef>
+          <a:fillRef idx="3">
+            <a:schemeClr val="accent1"/>
+          </a:fillRef>
+          <a:effectRef idx="2">
+            <a:schemeClr val="accent1"/>
+          </a:effectRef>
+          <a:fontRef idx="minor">
+            <a:schemeClr val="lt1"/>
+          </a:fontRef>
+        </p:style>
+        <p:txBody>
+          <a:bodyPr rtlCol="0" anchor="ctr"/>
+          <a:lstStyle/>
+          <a:p>
+            <a:pPr algn="ctr"/>
+          </a:p>
+        </p:txBody>
+      </p:sp>
+      <p:sp>
+        <p:nvSpPr>
+          <p:cNvPr id="8" name="Rounded Rectangle 7"/>
+          <p:cNvSpPr/>
+          <p:nvPr/>
+        </p:nvSpPr>
+        <p:spPr>
+          <a:xfrm>
+            <a:off x="5312664" y="1234440"/>
+            <a:ext cx="2057400" cy="1280160"/>
           </a:xfrm>
           <a:prstGeom prst="roundRect">
             <a:avLst/>
@@ -7058,7 +6039,7 @@
               </a:defRPr>
             </a:pPr>
             <a:r>
-              <a:t>Cash flow</a:t>
+              <a:t>Compute gate</a:t>
             </a:r>
           </a:p>
           <a:p>
@@ -7074,53 +6055,21 @@
               </a:defRPr>
             </a:pPr>
             <a:r>
-              <a:t>Included in cashIncome</a:t>
-            </a:r>
-          </a:p>
-          <a:p>
-            <a:pPr>
-              <a:spcBef>
-                <a:spcPts val="300"/>
-              </a:spcBef>
-              <a:defRPr sz="1100">
-                <a:solidFill>
-                  <a:srgbClr val="232D37"/>
-                </a:solidFill>
-                <a:latin typeface="Aptos"/>
-              </a:defRPr>
-            </a:pPr>
-            <a:r>
-              <a:t>Can cover household expenses</a:t>
-            </a:r>
-          </a:p>
-          <a:p>
-            <a:pPr>
-              <a:spcBef>
-                <a:spcPts val="300"/>
-              </a:spcBef>
-              <a:defRPr sz="1100">
-                <a:solidFill>
-                  <a:srgbClr val="232D37"/>
-                </a:solidFill>
-                <a:latin typeface="Aptos"/>
-              </a:defRPr>
-            </a:pPr>
-            <a:r>
-              <a:t>Reduces dividend/sale funding need</a:t>
-            </a:r>
-          </a:p>
-        </p:txBody>
-      </p:sp>
-      <p:sp>
-        <p:nvSpPr>
-          <p:cNvPr id="7" name="Rectangle 6"/>
+              <a:t>Enabled flag includes / excludes financial rule</a:t>
+            </a:r>
+          </a:p>
+        </p:txBody>
+      </p:sp>
+      <p:sp>
+        <p:nvSpPr>
+          <p:cNvPr id="9" name="Rectangle 8"/>
           <p:cNvSpPr/>
           <p:nvPr/>
         </p:nvSpPr>
         <p:spPr>
           <a:xfrm>
-            <a:off x="3063240" y="1234440"/>
-            <a:ext cx="82296" cy="1325880"/>
+            <a:off x="5312664" y="1234440"/>
+            <a:ext cx="82296" cy="1280160"/>
           </a:xfrm>
           <a:prstGeom prst="rect">
             <a:avLst/>
@@ -7156,14 +6105,14 @@
       </p:sp>
       <p:sp>
         <p:nvSpPr>
-          <p:cNvPr id="8" name="Rounded Rectangle 7"/>
+          <p:cNvPr id="10" name="Rounded Rectangle 9"/>
           <p:cNvSpPr/>
           <p:nvPr/>
         </p:nvSpPr>
         <p:spPr>
           <a:xfrm>
-            <a:off x="5623560" y="1234440"/>
-            <a:ext cx="2240280" cy="1325880"/>
+            <a:off x="7717536" y="1234440"/>
+            <a:ext cx="2057400" cy="1280160"/>
           </a:xfrm>
           <a:prstGeom prst="roundRect">
             <a:avLst/>
@@ -7204,7 +6153,7 @@
               </a:defRPr>
             </a:pPr>
             <a:r>
-              <a:t>Tax treatment</a:t>
+              <a:t>Projection rows</a:t>
             </a:r>
           </a:p>
           <a:p>
@@ -7220,53 +6169,21 @@
               </a:defRPr>
             </a:pPr>
             <a:r>
-              <a:t>Not in AGI</a:t>
-            </a:r>
-          </a:p>
-          <a:p>
-            <a:pPr>
-              <a:spcBef>
-                <a:spcPts val="300"/>
-              </a:spcBef>
-              <a:defRPr sz="1100">
-                <a:solidFill>
-                  <a:srgbClr val="232D37"/>
-                </a:solidFill>
-                <a:latin typeface="Aptos"/>
-              </a:defRPr>
-            </a:pPr>
-            <a:r>
-              <a:t>Not in ordinary or qualified taxable income</a:t>
-            </a:r>
-          </a:p>
-          <a:p>
-            <a:pPr>
-              <a:spcBef>
-                <a:spcPts val="300"/>
-              </a:spcBef>
-              <a:defRPr sz="1100">
-                <a:solidFill>
-                  <a:srgbClr val="232D37"/>
-                </a:solidFill>
-                <a:latin typeface="Aptos"/>
-              </a:defRPr>
-            </a:pPr>
-            <a:r>
-              <a:t>Not in senior-deduction MAGI</a:t>
-            </a:r>
-          </a:p>
-        </p:txBody>
-      </p:sp>
-      <p:sp>
-        <p:nvSpPr>
-          <p:cNvPr id="9" name="Rectangle 8"/>
+              <a:t>Annual values reflect active assumptions</a:t>
+            </a:r>
+          </a:p>
+        </p:txBody>
+      </p:sp>
+      <p:sp>
+        <p:nvSpPr>
+          <p:cNvPr id="11" name="Rectangle 10"/>
           <p:cNvSpPr/>
           <p:nvPr/>
         </p:nvSpPr>
         <p:spPr>
           <a:xfrm>
-            <a:off x="5623560" y="1234440"/>
-            <a:ext cx="82296" cy="1325880"/>
+            <a:off x="7717536" y="1234440"/>
+            <a:ext cx="82296" cy="1280160"/>
           </a:xfrm>
           <a:prstGeom prst="rect">
             <a:avLst/>
@@ -7302,14 +6219,14 @@
       </p:sp>
       <p:sp>
         <p:nvSpPr>
-          <p:cNvPr id="10" name="Rounded Rectangle 9"/>
+          <p:cNvPr id="12" name="Rounded Rectangle 11"/>
           <p:cNvSpPr/>
           <p:nvPr/>
         </p:nvSpPr>
         <p:spPr>
           <a:xfrm>
-            <a:off x="8183879" y="1234440"/>
-            <a:ext cx="3337560" cy="1325880"/>
+            <a:off x="10122408" y="1234440"/>
+            <a:ext cx="1554480" cy="1280160"/>
           </a:xfrm>
           <a:prstGeom prst="roundRect">
             <a:avLst/>
@@ -7342,7 +6259,7 @@
           <a:lstStyle/>
           <a:p>
             <a:pPr algn="ctr">
-              <a:defRPr sz="1600" b="1">
+              <a:defRPr sz="1500" b="1">
                 <a:solidFill>
                   <a:srgbClr val="232D37"/>
                 </a:solidFill>
@@ -7350,7 +6267,7 @@
               </a:defRPr>
             </a:pPr>
             <a:r>
-              <a:t>Still affects thresholds</a:t>
+              <a:t>Views</a:t>
             </a:r>
           </a:p>
           <a:p>
@@ -7358,45 +6275,29 @@
               <a:spcBef>
                 <a:spcPts val="300"/>
               </a:spcBef>
-              <a:defRPr sz="1100">
-                <a:solidFill>
-                  <a:srgbClr val="232D37"/>
-                </a:solidFill>
-                <a:latin typeface="Aptos"/>
-              </a:defRPr>
-            </a:pPr>
-            <a:r>
-              <a:t>Included in Social Security provisional income</a:t>
-            </a:r>
-          </a:p>
-          <a:p>
-            <a:pPr>
-              <a:spcBef>
-                <a:spcPts val="300"/>
-              </a:spcBef>
-              <a:defRPr sz="1100">
-                <a:solidFill>
-                  <a:srgbClr val="232D37"/>
-                </a:solidFill>
-                <a:latin typeface="Aptos"/>
-              </a:defRPr>
-            </a:pPr>
-            <a:r>
-              <a:t>Added to MAGI for two-year IRMAA look-back</a:t>
-            </a:r>
-          </a:p>
-        </p:txBody>
-      </p:sp>
-      <p:sp>
-        <p:nvSpPr>
-          <p:cNvPr id="11" name="Rectangle 10"/>
+              <a:defRPr sz="1000">
+                <a:solidFill>
+                  <a:srgbClr val="232D37"/>
+                </a:solidFill>
+                <a:latin typeface="Aptos"/>
+              </a:defRPr>
+            </a:pPr>
+            <a:r>
+              <a:t>Charts / Excel / Chat</a:t>
+            </a:r>
+          </a:p>
+        </p:txBody>
+      </p:sp>
+      <p:sp>
+        <p:nvSpPr>
+          <p:cNvPr id="13" name="Rectangle 12"/>
           <p:cNvSpPr/>
           <p:nvPr/>
         </p:nvSpPr>
         <p:spPr>
           <a:xfrm>
-            <a:off x="8183879" y="1234440"/>
-            <a:ext cx="82296" cy="1325880"/>
+            <a:off x="10122408" y="1234440"/>
+            <a:ext cx="82296" cy="1280160"/>
           </a:xfrm>
           <a:prstGeom prst="rect">
             <a:avLst/>
@@ -7432,14 +6333,14 @@
       </p:sp>
       <p:cxnSp>
         <p:nvCxnSpPr>
-          <p:cNvPr id="12" name="Connector 11"/>
+          <p:cNvPr id="14" name="Connector 13"/>
           <p:cNvCxnSpPr/>
           <p:nvPr/>
         </p:nvCxnSpPr>
         <p:spPr>
           <a:xfrm>
-            <a:off x="2788920" y="1901952"/>
-            <a:ext cx="201168" cy="0"/>
+            <a:off x="2606040" y="1892807"/>
+            <a:ext cx="219456" cy="0"/>
           </a:xfrm>
           <a:prstGeom prst="line">
             <a:avLst/>
@@ -7467,21 +6368,21 @@
       </p:cxnSp>
       <p:cxnSp>
         <p:nvCxnSpPr>
-          <p:cNvPr id="13" name="Connector 12"/>
+          <p:cNvPr id="15" name="Connector 14"/>
           <p:cNvCxnSpPr/>
           <p:nvPr/>
         </p:nvCxnSpPr>
         <p:spPr>
           <a:xfrm>
-            <a:off x="5349240" y="1901952"/>
-            <a:ext cx="201167" cy="0"/>
+            <a:off x="5010912" y="1892807"/>
+            <a:ext cx="219456" cy="0"/>
           </a:xfrm>
           <a:prstGeom prst="line">
             <a:avLst/>
           </a:prstGeom>
           <a:ln w="22860">
             <a:solidFill>
-              <a:srgbClr val="429761"/>
+              <a:srgbClr val="0F2647"/>
             </a:solidFill>
           </a:ln>
         </p:spPr>
@@ -7502,21 +6403,21 @@
       </p:cxnSp>
       <p:cxnSp>
         <p:nvCxnSpPr>
-          <p:cNvPr id="14" name="Connector 13"/>
+          <p:cNvPr id="16" name="Connector 15"/>
           <p:cNvCxnSpPr/>
           <p:nvPr/>
         </p:nvCxnSpPr>
         <p:spPr>
           <a:xfrm>
-            <a:off x="7909560" y="1901952"/>
-            <a:ext cx="201168" cy="0"/>
+            <a:off x="7415783" y="1892807"/>
+            <a:ext cx="219457" cy="0"/>
           </a:xfrm>
           <a:prstGeom prst="line">
             <a:avLst/>
           </a:prstGeom>
           <a:ln w="22860">
             <a:solidFill>
-              <a:srgbClr val="E5892A"/>
+              <a:srgbClr val="429761"/>
             </a:solidFill>
           </a:ln>
         </p:spPr>
@@ -7535,16 +6436,165 @@
           </a:fontRef>
         </p:style>
       </p:cxnSp>
-      <p:sp>
-        <p:nvSpPr>
-          <p:cNvPr id="15" name="Rounded Rectangle 14"/>
+      <p:cxnSp>
+        <p:nvCxnSpPr>
+          <p:cNvPr id="17" name="Connector 16"/>
+          <p:cNvCxnSpPr/>
+          <p:nvPr/>
+        </p:nvCxnSpPr>
+        <p:spPr>
+          <a:xfrm>
+            <a:off x="9820656" y="1892807"/>
+            <a:ext cx="219456" cy="0"/>
+          </a:xfrm>
+          <a:prstGeom prst="line">
+            <a:avLst/>
+          </a:prstGeom>
+          <a:ln w="22860">
+            <a:solidFill>
+              <a:srgbClr val="E5892A"/>
+            </a:solidFill>
+          </a:ln>
+        </p:spPr>
+        <p:style>
+          <a:lnRef idx="2">
+            <a:schemeClr val="accent1"/>
+          </a:lnRef>
+          <a:fillRef idx="0">
+            <a:schemeClr val="accent1"/>
+          </a:fillRef>
+          <a:effectRef idx="1">
+            <a:schemeClr val="accent1"/>
+          </a:effectRef>
+          <a:fontRef idx="minor">
+            <a:schemeClr val="tx1"/>
+          </a:fontRef>
+        </p:style>
+      </p:cxnSp>
+      <p:sp>
+        <p:nvSpPr>
+          <p:cNvPr id="18" name="Rounded Rectangle 17"/>
           <p:cNvSpPr/>
           <p:nvPr/>
         </p:nvSpPr>
         <p:spPr>
           <a:xfrm>
-            <a:off x="1143000" y="3703320"/>
-            <a:ext cx="9875520" cy="1234440"/>
+            <a:off x="1051560" y="3520440"/>
+            <a:ext cx="4663440" cy="1325880"/>
+          </a:xfrm>
+          <a:prstGeom prst="roundRect">
+            <a:avLst/>
+          </a:prstGeom>
+          <a:solidFill>
+            <a:srgbClr val="F8FAFC"/>
+          </a:solidFill>
+          <a:ln w="13970">
+            <a:solidFill>
+              <a:srgbClr val="168F8D"/>
+            </a:solidFill>
+          </a:ln>
+        </p:spPr>
+        <p:style>
+          <a:lnRef idx="1">
+            <a:schemeClr val="accent1"/>
+          </a:lnRef>
+          <a:fillRef idx="3">
+            <a:schemeClr val="accent1"/>
+          </a:fillRef>
+          <a:effectRef idx="2">
+            <a:schemeClr val="accent1"/>
+          </a:effectRef>
+          <a:fontRef idx="minor">
+            <a:schemeClr val="lt1"/>
+          </a:fontRef>
+        </p:style>
+        <p:txBody>
+          <a:bodyPr rtlCol="0" anchor="ctr" lIns="182880" rIns="100584" tIns="91440"/>
+          <a:lstStyle/>
+          <a:p>
+            <a:pPr algn="ctr">
+              <a:defRPr sz="1700" b="1">
+                <a:solidFill>
+                  <a:srgbClr val="232D37"/>
+                </a:solidFill>
+                <a:latin typeface="Aptos Display"/>
+              </a:defRPr>
+            </a:pPr>
+            <a:r>
+              <a:t>Persistence rule</a:t>
+            </a:r>
+          </a:p>
+          <a:p>
+            <a:pPr>
+              <a:spcBef>
+                <a:spcPts val="300"/>
+              </a:spcBef>
+              <a:defRPr sz="1200">
+                <a:solidFill>
+                  <a:srgbClr val="232D37"/>
+                </a:solidFill>
+                <a:latin typeface="Aptos"/>
+              </a:defRPr>
+            </a:pPr>
+            <a:r>
+              <a:t>Assumption Enable and Hide flags are part of plan state. Save files and autosave restore them exactly; values do not disappear when disabled.</a:t>
+            </a:r>
+          </a:p>
+        </p:txBody>
+      </p:sp>
+      <p:sp>
+        <p:nvSpPr>
+          <p:cNvPr id="19" name="Rectangle 18"/>
+          <p:cNvSpPr/>
+          <p:nvPr/>
+        </p:nvSpPr>
+        <p:spPr>
+          <a:xfrm>
+            <a:off x="1051560" y="3520440"/>
+            <a:ext cx="82296" cy="1325880"/>
+          </a:xfrm>
+          <a:prstGeom prst="rect">
+            <a:avLst/>
+          </a:prstGeom>
+          <a:solidFill>
+            <a:srgbClr val="168F8D"/>
+          </a:solidFill>
+          <a:ln>
+            <a:noFill/>
+          </a:ln>
+        </p:spPr>
+        <p:style>
+          <a:lnRef idx="1">
+            <a:schemeClr val="accent1"/>
+          </a:lnRef>
+          <a:fillRef idx="3">
+            <a:schemeClr val="accent1"/>
+          </a:fillRef>
+          <a:effectRef idx="2">
+            <a:schemeClr val="accent1"/>
+          </a:effectRef>
+          <a:fontRef idx="minor">
+            <a:schemeClr val="lt1"/>
+          </a:fontRef>
+        </p:style>
+        <p:txBody>
+          <a:bodyPr rtlCol="0" anchor="ctr"/>
+          <a:lstStyle/>
+          <a:p>
+            <a:pPr algn="ctr"/>
+          </a:p>
+        </p:txBody>
+      </p:sp>
+      <p:sp>
+        <p:nvSpPr>
+          <p:cNvPr id="20" name="Rounded Rectangle 19"/>
+          <p:cNvSpPr/>
+          <p:nvPr/>
+        </p:nvSpPr>
+        <p:spPr>
+          <a:xfrm>
+            <a:off x="6382512" y="3520440"/>
+            <a:ext cx="4663440" cy="1325880"/>
           </a:xfrm>
           <a:prstGeom prst="roundRect">
             <a:avLst/>
@@ -7577,7 +6627,7 @@
           <a:lstStyle/>
           <a:p>
             <a:pPr algn="ctr">
-              <a:defRPr sz="1600" b="1">
+              <a:defRPr sz="1700" b="1">
                 <a:solidFill>
                   <a:srgbClr val="232D37"/>
                 </a:solidFill>
@@ -7585,7 +6635,7 @@
               </a:defRPr>
             </a:pPr>
             <a:r>
-              <a:t>Projection contract</a:t>
+              <a:t>Compute examples</a:t>
             </a:r>
           </a:p>
           <a:p>
@@ -7601,21 +6651,21 @@
               </a:defRPr>
             </a:pPr>
             <a:r>
-              <a:t>Rows expose teIncome, teByPerson, and magi. Each portfolio row carries its own taxExempt amount; all downstream charts, exports, and chat read those fields rather than recreating treatment.</a:t>
-            </a:r>
-          </a:p>
-        </p:txBody>
-      </p:sp>
-      <p:sp>
-        <p:nvSpPr>
-          <p:cNvPr id="16" name="Rectangle 15"/>
+              <a:t>Disabled SCGL contributes a zero pool. Disabled AUM fee contributes zero fee. LTC and future-tax logic were already compute-gated by their enabled flags.</a:t>
+            </a:r>
+          </a:p>
+        </p:txBody>
+      </p:sp>
+      <p:sp>
+        <p:nvSpPr>
+          <p:cNvPr id="21" name="Rectangle 20"/>
           <p:cNvSpPr/>
           <p:nvPr/>
         </p:nvSpPr>
         <p:spPr>
           <a:xfrm>
-            <a:off x="1143000" y="3703320"/>
-            <a:ext cx="82296" cy="1234440"/>
+            <a:off x="6382512" y="3520440"/>
+            <a:ext cx="82296" cy="1325880"/>
           </a:xfrm>
           <a:prstGeom prst="rect">
             <a:avLst/>
@@ -7651,7 +6701,7 @@
       </p:sp>
       <p:sp>
         <p:nvSpPr>
-          <p:cNvPr id="17" name="Rectangle 16"/>
+          <p:cNvPr id="22" name="Rectangle 21"/>
           <p:cNvSpPr/>
           <p:nvPr/>
         </p:nvSpPr>
@@ -7694,7 +6744,7 @@
       </p:sp>
       <p:sp>
         <p:nvSpPr>
-          <p:cNvPr id="18" name="TextBox 17"/>
+          <p:cNvPr id="23" name="TextBox 22"/>
           <p:cNvSpPr txBox="1"/>
           <p:nvPr/>
         </p:nvSpPr>
@@ -7723,7 +6773,7 @@
               </a:defRPr>
             </a:pPr>
             <a:r>
-              <a:t>Retirement Income Planner • Architecture overview • Rental, tax-exempt income, and legacy-value update</a:t>
+              <a:t>Retirement Income Planner • Architecture overview • Assumption controls and Markdown Usage update</a:t>
             </a:r>
           </a:p>
         </p:txBody>
@@ -7785,7 +6835,7 @@
               </a:defRPr>
             </a:pPr>
             <a:r>
-              <a:t>Enhanced senior deduction sits on top of other deductions</a:t>
+              <a:t>Shared Markdown-page architecture</a:t>
             </a:r>
           </a:p>
         </p:txBody>
@@ -7821,7 +6871,7 @@
               </a:defRPr>
             </a:pPr>
             <a:r>
-              <a:t>The compute layer adds a time-limited, income-phased deduction without changing AGI.</a:t>
+              <a:t>A reusable renderer turns maintained Markdown files into standalone documentation tabs at the moment the user opens them.</a:t>
             </a:r>
           </a:p>
         </p:txBody>
@@ -7834,8 +6884,8 @@
         </p:nvSpPr>
         <p:spPr>
           <a:xfrm>
-            <a:off x="594360" y="1188720"/>
-            <a:ext cx="3429000" cy="4526280"/>
+            <a:off x="548640" y="1234440"/>
+            <a:ext cx="2377440" cy="4480560"/>
           </a:xfrm>
           <a:prstGeom prst="roundRect">
             <a:avLst/>
@@ -7876,7 +6926,7 @@
               </a:defRPr>
             </a:pPr>
             <a:r>
-              <a:t>Eligibility</a:t>
+              <a:t>Topbar action</a:t>
             </a:r>
           </a:p>
           <a:p>
@@ -7892,7 +6942,7 @@
               </a:defRPr>
             </a:pPr>
             <a:r>
-              <a:t>Tax years 2025–2028 only.</a:t>
+              <a:t>Usage</a:t>
             </a:r>
           </a:p>
           <a:p>
@@ -7908,7 +6958,7 @@
               </a:defRPr>
             </a:pPr>
             <a:r>
-              <a:t>Each living person age 65 by year-end may qualify.</a:t>
+              <a:t>Notes</a:t>
             </a:r>
           </a:p>
           <a:p>
@@ -7924,7 +6974,7 @@
               </a:defRPr>
             </a:pPr>
             <a:r>
-              <a:t>Eligibility count is stored as seniorEligible.</a:t>
+              <a:t>Each calls a small page opener rather than duplicating Markdown logic.</a:t>
             </a:r>
           </a:p>
         </p:txBody>
@@ -7937,8 +6987,8 @@
         </p:nvSpPr>
         <p:spPr>
           <a:xfrm>
-            <a:off x="594360" y="1188720"/>
-            <a:ext cx="82296" cy="4526280"/>
+            <a:off x="548640" y="1234440"/>
+            <a:ext cx="82296" cy="4480560"/>
           </a:xfrm>
           <a:prstGeom prst="rect">
             <a:avLst/>
@@ -7980,8 +7030,300 @@
         </p:nvSpPr>
         <p:spPr>
           <a:xfrm>
-            <a:off x="4389120" y="1188720"/>
-            <a:ext cx="3429000" cy="4526280"/>
+            <a:off x="3337560" y="1234440"/>
+            <a:ext cx="2377440" cy="4480560"/>
+          </a:xfrm>
+          <a:prstGeom prst="roundRect">
+            <a:avLst/>
+          </a:prstGeom>
+          <a:solidFill>
+            <a:srgbClr val="F7EFFF"/>
+          </a:solidFill>
+          <a:ln w="13970">
+            <a:solidFill>
+              <a:srgbClr val="7852B0"/>
+            </a:solidFill>
+          </a:ln>
+        </p:spPr>
+        <p:style>
+          <a:lnRef idx="1">
+            <a:schemeClr val="accent1"/>
+          </a:lnRef>
+          <a:fillRef idx="3">
+            <a:schemeClr val="accent1"/>
+          </a:fillRef>
+          <a:effectRef idx="2">
+            <a:schemeClr val="accent1"/>
+          </a:effectRef>
+          <a:fontRef idx="minor">
+            <a:schemeClr val="lt1"/>
+          </a:fontRef>
+        </p:style>
+        <p:txBody>
+          <a:bodyPr rtlCol="0" anchor="ctr" lIns="182880" rIns="100584" tIns="91440"/>
+          <a:lstStyle/>
+          <a:p>
+            <a:pPr algn="ctr">
+              <a:defRPr sz="1700" b="1">
+                <a:solidFill>
+                  <a:srgbClr val="232D37"/>
+                </a:solidFill>
+                <a:latin typeface="Aptos Display"/>
+              </a:defRPr>
+            </a:pPr>
+            <a:r>
+              <a:t>Page wrapper</a:t>
+            </a:r>
+          </a:p>
+          <a:p>
+            <a:pPr>
+              <a:spcBef>
+                <a:spcPts val="300"/>
+              </a:spcBef>
+              <a:defRPr sz="1200">
+                <a:solidFill>
+                  <a:srgbClr val="232D37"/>
+                </a:solidFill>
+                <a:latin typeface="Aptos"/>
+              </a:defRPr>
+            </a:pPr>
+            <a:r>
+              <a:t>usagePage.js → openUsagePage()</a:t>
+            </a:r>
+          </a:p>
+          <a:p>
+            <a:pPr>
+              <a:spcBef>
+                <a:spcPts val="300"/>
+              </a:spcBef>
+              <a:defRPr sz="1200">
+                <a:solidFill>
+                  <a:srgbClr val="232D37"/>
+                </a:solidFill>
+                <a:latin typeface="Aptos"/>
+              </a:defRPr>
+            </a:pPr>
+            <a:r>
+              <a:t>notesPage.js → openNotesPage()</a:t>
+            </a:r>
+          </a:p>
+          <a:p>
+            <a:pPr>
+              <a:spcBef>
+                <a:spcPts val="300"/>
+              </a:spcBef>
+              <a:defRPr sz="1200">
+                <a:solidFill>
+                  <a:srgbClr val="232D37"/>
+                </a:solidFill>
+                <a:latin typeface="Aptos"/>
+              </a:defRPr>
+            </a:pPr>
+            <a:r>
+              <a:t>Both call openMdPage(file, label).</a:t>
+            </a:r>
+          </a:p>
+        </p:txBody>
+      </p:sp>
+      <p:sp>
+        <p:nvSpPr>
+          <p:cNvPr id="7" name="Rectangle 6"/>
+          <p:cNvSpPr/>
+          <p:nvPr/>
+        </p:nvSpPr>
+        <p:spPr>
+          <a:xfrm>
+            <a:off x="3337560" y="1234440"/>
+            <a:ext cx="82296" cy="4480560"/>
+          </a:xfrm>
+          <a:prstGeom prst="rect">
+            <a:avLst/>
+          </a:prstGeom>
+          <a:solidFill>
+            <a:srgbClr val="7852B0"/>
+          </a:solidFill>
+          <a:ln>
+            <a:noFill/>
+          </a:ln>
+        </p:spPr>
+        <p:style>
+          <a:lnRef idx="1">
+            <a:schemeClr val="accent1"/>
+          </a:lnRef>
+          <a:fillRef idx="3">
+            <a:schemeClr val="accent1"/>
+          </a:fillRef>
+          <a:effectRef idx="2">
+            <a:schemeClr val="accent1"/>
+          </a:effectRef>
+          <a:fontRef idx="minor">
+            <a:schemeClr val="lt1"/>
+          </a:fontRef>
+        </p:style>
+        <p:txBody>
+          <a:bodyPr rtlCol="0" anchor="ctr"/>
+          <a:lstStyle/>
+          <a:p>
+            <a:pPr algn="ctr"/>
+          </a:p>
+        </p:txBody>
+      </p:sp>
+      <p:sp>
+        <p:nvSpPr>
+          <p:cNvPr id="8" name="Rounded Rectangle 7"/>
+          <p:cNvSpPr/>
+          <p:nvPr/>
+        </p:nvSpPr>
+        <p:spPr>
+          <a:xfrm>
+            <a:off x="6126480" y="1234440"/>
+            <a:ext cx="2377440" cy="4480560"/>
+          </a:xfrm>
+          <a:prstGeom prst="roundRect">
+            <a:avLst/>
+          </a:prstGeom>
+          <a:solidFill>
+            <a:srgbClr val="EAF9F4"/>
+          </a:solidFill>
+          <a:ln w="13970">
+            <a:solidFill>
+              <a:srgbClr val="429761"/>
+            </a:solidFill>
+          </a:ln>
+        </p:spPr>
+        <p:style>
+          <a:lnRef idx="1">
+            <a:schemeClr val="accent1"/>
+          </a:lnRef>
+          <a:fillRef idx="3">
+            <a:schemeClr val="accent1"/>
+          </a:fillRef>
+          <a:effectRef idx="2">
+            <a:schemeClr val="accent1"/>
+          </a:effectRef>
+          <a:fontRef idx="minor">
+            <a:schemeClr val="lt1"/>
+          </a:fontRef>
+        </p:style>
+        <p:txBody>
+          <a:bodyPr rtlCol="0" anchor="ctr" lIns="182880" rIns="100584" tIns="91440"/>
+          <a:lstStyle/>
+          <a:p>
+            <a:pPr algn="ctr">
+              <a:defRPr sz="1700" b="1">
+                <a:solidFill>
+                  <a:srgbClr val="232D37"/>
+                </a:solidFill>
+                <a:latin typeface="Aptos Display"/>
+              </a:defRPr>
+            </a:pPr>
+            <a:r>
+              <a:t>Shared renderer</a:t>
+            </a:r>
+          </a:p>
+          <a:p>
+            <a:pPr>
+              <a:spcBef>
+                <a:spcPts val="300"/>
+              </a:spcBef>
+              <a:defRPr sz="1200">
+                <a:solidFill>
+                  <a:srgbClr val="232D37"/>
+                </a:solidFill>
+                <a:latin typeface="Aptos"/>
+              </a:defRPr>
+            </a:pPr>
+            <a:r>
+              <a:t>mdPage.js fetches file on open.</a:t>
+            </a:r>
+          </a:p>
+          <a:p>
+            <a:pPr>
+              <a:spcBef>
+                <a:spcPts val="300"/>
+              </a:spcBef>
+              <a:defRPr sz="1200">
+                <a:solidFill>
+                  <a:srgbClr val="232D37"/>
+                </a:solidFill>
+                <a:latin typeface="Aptos"/>
+              </a:defRPr>
+            </a:pPr>
+            <a:r>
+              <a:t>mdToHtml() handles supported Markdown.</a:t>
+            </a:r>
+          </a:p>
+          <a:p>
+            <a:pPr>
+              <a:spcBef>
+                <a:spcPts val="300"/>
+              </a:spcBef>
+              <a:defRPr sz="1200">
+                <a:solidFill>
+                  <a:srgbClr val="232D37"/>
+                </a:solidFill>
+                <a:latin typeface="Aptos"/>
+              </a:defRPr>
+            </a:pPr>
+            <a:r>
+              <a:t>mdPageHtml() wraps content in page chrome.</a:t>
+            </a:r>
+          </a:p>
+        </p:txBody>
+      </p:sp>
+      <p:sp>
+        <p:nvSpPr>
+          <p:cNvPr id="9" name="Rectangle 8"/>
+          <p:cNvSpPr/>
+          <p:nvPr/>
+        </p:nvSpPr>
+        <p:spPr>
+          <a:xfrm>
+            <a:off x="6126480" y="1234440"/>
+            <a:ext cx="82296" cy="4480560"/>
+          </a:xfrm>
+          <a:prstGeom prst="rect">
+            <a:avLst/>
+          </a:prstGeom>
+          <a:solidFill>
+            <a:srgbClr val="429761"/>
+          </a:solidFill>
+          <a:ln>
+            <a:noFill/>
+          </a:ln>
+        </p:spPr>
+        <p:style>
+          <a:lnRef idx="1">
+            <a:schemeClr val="accent1"/>
+          </a:lnRef>
+          <a:fillRef idx="3">
+            <a:schemeClr val="accent1"/>
+          </a:fillRef>
+          <a:effectRef idx="2">
+            <a:schemeClr val="accent1"/>
+          </a:effectRef>
+          <a:fontRef idx="minor">
+            <a:schemeClr val="lt1"/>
+          </a:fontRef>
+        </p:style>
+        <p:txBody>
+          <a:bodyPr rtlCol="0" anchor="ctr"/>
+          <a:lstStyle/>
+          <a:p>
+            <a:pPr algn="ctr"/>
+          </a:p>
+        </p:txBody>
+      </p:sp>
+      <p:sp>
+        <p:nvSpPr>
+          <p:cNvPr id="10" name="Rounded Rectangle 9"/>
+          <p:cNvSpPr/>
+          <p:nvPr/>
+        </p:nvSpPr>
+        <p:spPr>
+          <a:xfrm>
+            <a:off x="8915400" y="1234440"/>
+            <a:ext cx="2377440" cy="4480560"/>
           </a:xfrm>
           <a:prstGeom prst="roundRect">
             <a:avLst/>
@@ -8022,7 +7364,7 @@
               </a:defRPr>
             </a:pPr>
             <a:r>
-              <a:t>Calculation</a:t>
+              <a:t>Content files</a:t>
             </a:r>
           </a:p>
           <a:p>
@@ -8038,7 +7380,7 @@
               </a:defRPr>
             </a:pPr>
             <a:r>
-              <a:t>Per eligible person: max(0, 6,000 − 6% × excess MAGI).</a:t>
+              <a:t>misc/Usage.md</a:t>
             </a:r>
           </a:p>
           <a:p>
@@ -8054,7 +7396,7 @@
               </a:defRPr>
             </a:pPr>
             <a:r>
-              <a:t>Single/MFJ thresholds are un-indexed but deflated into today’s dollars.</a:t>
+              <a:t>misc/Note4User.md</a:t>
             </a:r>
           </a:p>
           <a:p>
@@ -8070,21 +7412,21 @@
               </a:defRPr>
             </a:pPr>
             <a:r>
-              <a:t>MAGI approximates AGI for this calculation.</a:t>
-            </a:r>
-          </a:p>
-        </p:txBody>
-      </p:sp>
-      <p:sp>
-        <p:nvSpPr>
-          <p:cNvPr id="7" name="Rectangle 6"/>
+              <a:t>Edit content; next click reflects it.</a:t>
+            </a:r>
+          </a:p>
+        </p:txBody>
+      </p:sp>
+      <p:sp>
+        <p:nvSpPr>
+          <p:cNvPr id="11" name="Rectangle 10"/>
           <p:cNvSpPr/>
           <p:nvPr/>
         </p:nvSpPr>
         <p:spPr>
           <a:xfrm>
-            <a:off x="4389120" y="1188720"/>
-            <a:ext cx="82296" cy="4526280"/>
+            <a:off x="8915400" y="1234440"/>
+            <a:ext cx="82296" cy="4480560"/>
           </a:xfrm>
           <a:prstGeom prst="rect">
             <a:avLst/>
@@ -8118,171 +7460,44 @@
           </a:p>
         </p:txBody>
       </p:sp>
-      <p:sp>
-        <p:nvSpPr>
-          <p:cNvPr id="8" name="Rounded Rectangle 7"/>
-          <p:cNvSpPr/>
-          <p:nvPr/>
-        </p:nvSpPr>
-        <p:spPr>
-          <a:xfrm>
-            <a:off x="8183879" y="1188720"/>
-            <a:ext cx="3429000" cy="4526280"/>
-          </a:xfrm>
-          <a:prstGeom prst="roundRect">
-            <a:avLst/>
-          </a:prstGeom>
-          <a:solidFill>
-            <a:srgbClr val="EAF9F4"/>
-          </a:solidFill>
-          <a:ln w="13970">
+      <p:cxnSp>
+        <p:nvCxnSpPr>
+          <p:cNvPr id="12" name="Connector 11"/>
+          <p:cNvCxnSpPr/>
+          <p:nvPr/>
+        </p:nvCxnSpPr>
+        <p:spPr>
+          <a:xfrm>
+            <a:off x="2971800" y="3474720"/>
+            <a:ext cx="228600" cy="0"/>
+          </a:xfrm>
+          <a:prstGeom prst="line">
+            <a:avLst/>
+          </a:prstGeom>
+          <a:ln w="22860">
             <a:solidFill>
-              <a:srgbClr val="429761"/>
+              <a:srgbClr val="266EB2"/>
             </a:solidFill>
           </a:ln>
         </p:spPr>
         <p:style>
-          <a:lnRef idx="1">
+          <a:lnRef idx="2">
             <a:schemeClr val="accent1"/>
           </a:lnRef>
-          <a:fillRef idx="3">
+          <a:fillRef idx="0">
             <a:schemeClr val="accent1"/>
           </a:fillRef>
-          <a:effectRef idx="2">
+          <a:effectRef idx="1">
             <a:schemeClr val="accent1"/>
           </a:effectRef>
           <a:fontRef idx="minor">
-            <a:schemeClr val="lt1"/>
+            <a:schemeClr val="tx1"/>
           </a:fontRef>
         </p:style>
-        <p:txBody>
-          <a:bodyPr rtlCol="0" anchor="ctr" lIns="182880" rIns="100584" tIns="91440"/>
-          <a:lstStyle/>
-          <a:p>
-            <a:pPr algn="ctr">
-              <a:defRPr sz="1700" b="1">
-                <a:solidFill>
-                  <a:srgbClr val="232D37"/>
-                </a:solidFill>
-                <a:latin typeface="Aptos Display"/>
-              </a:defRPr>
-            </a:pPr>
-            <a:r>
-              <a:t>Tax integration</a:t>
-            </a:r>
-          </a:p>
-          <a:p>
-            <a:pPr>
-              <a:spcBef>
-                <a:spcPts val="300"/>
-              </a:spcBef>
-              <a:defRPr sz="1200">
-                <a:solidFill>
-                  <a:srgbClr val="232D37"/>
-                </a:solidFill>
-                <a:latin typeface="Aptos"/>
-              </a:defRPr>
-            </a:pPr>
-            <a:r>
-              <a:t>Applied after the larger of standard or LTC itemized deduction.</a:t>
-            </a:r>
-          </a:p>
-          <a:p>
-            <a:pPr>
-              <a:spcBef>
-                <a:spcPts val="300"/>
-              </a:spcBef>
-              <a:defRPr sz="1200">
-                <a:solidFill>
-                  <a:srgbClr val="232D37"/>
-                </a:solidFill>
-                <a:latin typeface="Aptos"/>
-              </a:defRPr>
-            </a:pPr>
-            <a:r>
-              <a:t>Does not reduce AGI.</a:t>
-            </a:r>
-          </a:p>
-          <a:p>
-            <a:pPr>
-              <a:spcBef>
-                <a:spcPts val="300"/>
-              </a:spcBef>
-              <a:defRPr sz="1200">
-                <a:solidFill>
-                  <a:srgbClr val="232D37"/>
-                </a:solidFill>
-                <a:latin typeface="Aptos"/>
-              </a:defRPr>
-            </a:pPr>
-            <a:r>
-              <a:t>Marginal/SST calculation includes its phase-out behavior.</a:t>
-            </a:r>
-          </a:p>
-          <a:p>
-            <a:pPr>
-              <a:spcBef>
-                <a:spcPts val="300"/>
-              </a:spcBef>
-              <a:defRPr sz="1200">
-                <a:solidFill>
-                  <a:srgbClr val="232D37"/>
-                </a:solidFill>
-                <a:latin typeface="Aptos"/>
-              </a:defRPr>
-            </a:pPr>
-            <a:r>
-              <a:t>Row reports seniorDeduction.</a:t>
-            </a:r>
-          </a:p>
-        </p:txBody>
-      </p:sp>
-      <p:sp>
-        <p:nvSpPr>
-          <p:cNvPr id="9" name="Rectangle 8"/>
-          <p:cNvSpPr/>
-          <p:nvPr/>
-        </p:nvSpPr>
-        <p:spPr>
-          <a:xfrm>
-            <a:off x="8183879" y="1188720"/>
-            <a:ext cx="82296" cy="4526280"/>
-          </a:xfrm>
-          <a:prstGeom prst="rect">
-            <a:avLst/>
-          </a:prstGeom>
-          <a:solidFill>
-            <a:srgbClr val="429761"/>
-          </a:solidFill>
-          <a:ln>
-            <a:noFill/>
-          </a:ln>
-        </p:spPr>
-        <p:style>
-          <a:lnRef idx="1">
-            <a:schemeClr val="accent1"/>
-          </a:lnRef>
-          <a:fillRef idx="3">
-            <a:schemeClr val="accent1"/>
-          </a:fillRef>
-          <a:effectRef idx="2">
-            <a:schemeClr val="accent1"/>
-          </a:effectRef>
-          <a:fontRef idx="minor">
-            <a:schemeClr val="lt1"/>
-          </a:fontRef>
-        </p:style>
-        <p:txBody>
-          <a:bodyPr rtlCol="0" anchor="ctr"/>
-          <a:lstStyle/>
-          <a:p>
-            <a:pPr algn="ctr"/>
-          </a:p>
-        </p:txBody>
-      </p:sp>
-      <p:sp>
-        <p:nvSpPr>
-          <p:cNvPr id="10" name="Rectangle 9"/>
+      </p:cxnSp>
+      <p:sp>
+        <p:nvSpPr>
+          <p:cNvPr id="13" name="Rectangle 12"/>
           <p:cNvSpPr/>
           <p:nvPr/>
         </p:nvSpPr>
@@ -8325,7 +7540,7 @@
       </p:sp>
       <p:sp>
         <p:nvSpPr>
-          <p:cNvPr id="11" name="TextBox 10"/>
+          <p:cNvPr id="14" name="TextBox 13"/>
           <p:cNvSpPr txBox="1"/>
           <p:nvPr/>
         </p:nvSpPr>
@@ -8354,7 +7569,235 @@
               </a:defRPr>
             </a:pPr>
             <a:r>
-              <a:t>Retirement Income Planner • Architecture overview • Rental, tax-exempt income, and legacy-value update</a:t>
+              <a:t>Retirement Income Planner • Architecture overview • Assumption controls and Markdown Usage update</a:t>
+            </a:r>
+          </a:p>
+        </p:txBody>
+      </p:sp>
+      <p:cxnSp>
+        <p:nvCxnSpPr>
+          <p:cNvPr id="15" name="Connector 14"/>
+          <p:cNvCxnSpPr/>
+          <p:nvPr/>
+        </p:nvCxnSpPr>
+        <p:spPr>
+          <a:xfrm>
+            <a:off x="5760720" y="3474720"/>
+            <a:ext cx="228600" cy="0"/>
+          </a:xfrm>
+          <a:prstGeom prst="line">
+            <a:avLst/>
+          </a:prstGeom>
+          <a:ln w="22860">
+            <a:solidFill>
+              <a:srgbClr val="7852B0"/>
+            </a:solidFill>
+          </a:ln>
+        </p:spPr>
+        <p:style>
+          <a:lnRef idx="2">
+            <a:schemeClr val="accent1"/>
+          </a:lnRef>
+          <a:fillRef idx="0">
+            <a:schemeClr val="accent1"/>
+          </a:fillRef>
+          <a:effectRef idx="1">
+            <a:schemeClr val="accent1"/>
+          </a:effectRef>
+          <a:fontRef idx="minor">
+            <a:schemeClr val="tx1"/>
+          </a:fontRef>
+        </p:style>
+      </p:cxnSp>
+      <p:sp>
+        <p:nvSpPr>
+          <p:cNvPr id="16" name="Rectangle 15"/>
+          <p:cNvSpPr/>
+          <p:nvPr/>
+        </p:nvSpPr>
+        <p:spPr>
+          <a:xfrm>
+            <a:off x="502920" y="6473952"/>
+            <a:ext cx="11183112" cy="13716"/>
+          </a:xfrm>
+          <a:prstGeom prst="rect">
+            <a:avLst/>
+          </a:prstGeom>
+          <a:solidFill>
+            <a:srgbClr val="D2DCE5"/>
+          </a:solidFill>
+          <a:ln>
+            <a:noFill/>
+          </a:ln>
+        </p:spPr>
+        <p:style>
+          <a:lnRef idx="1">
+            <a:schemeClr val="accent1"/>
+          </a:lnRef>
+          <a:fillRef idx="3">
+            <a:schemeClr val="accent1"/>
+          </a:fillRef>
+          <a:effectRef idx="2">
+            <a:schemeClr val="accent1"/>
+          </a:effectRef>
+          <a:fontRef idx="minor">
+            <a:schemeClr val="lt1"/>
+          </a:fontRef>
+        </p:style>
+        <p:txBody>
+          <a:bodyPr rtlCol="0" anchor="ctr"/>
+          <a:lstStyle/>
+          <a:p>
+            <a:pPr algn="ctr"/>
+          </a:p>
+        </p:txBody>
+      </p:sp>
+      <p:sp>
+        <p:nvSpPr>
+          <p:cNvPr id="17" name="TextBox 16"/>
+          <p:cNvSpPr txBox="1"/>
+          <p:nvPr/>
+        </p:nvSpPr>
+        <p:spPr>
+          <a:xfrm>
+            <a:off x="530352" y="6510528"/>
+            <a:ext cx="10881360" cy="146304"/>
+          </a:xfrm>
+          <a:prstGeom prst="rect">
+            <a:avLst/>
+          </a:prstGeom>
+          <a:noFill/>
+        </p:spPr>
+        <p:txBody>
+          <a:bodyPr wrap="none" anchor="ctr">
+            <a:spAutoFit/>
+          </a:bodyPr>
+          <a:lstStyle/>
+          <a:p>
+            <a:pPr algn="l">
+              <a:defRPr sz="850" b="0">
+                <a:solidFill>
+                  <a:srgbClr val="5D6C7A"/>
+                </a:solidFill>
+                <a:latin typeface="Aptos"/>
+              </a:defRPr>
+            </a:pPr>
+            <a:r>
+              <a:t>Retirement Income Planner • Architecture overview • Assumption controls and Markdown Usage update</a:t>
+            </a:r>
+          </a:p>
+        </p:txBody>
+      </p:sp>
+      <p:cxnSp>
+        <p:nvCxnSpPr>
+          <p:cNvPr id="18" name="Connector 17"/>
+          <p:cNvCxnSpPr/>
+          <p:nvPr/>
+        </p:nvCxnSpPr>
+        <p:spPr>
+          <a:xfrm>
+            <a:off x="8549640" y="3474720"/>
+            <a:ext cx="228600" cy="0"/>
+          </a:xfrm>
+          <a:prstGeom prst="line">
+            <a:avLst/>
+          </a:prstGeom>
+          <a:ln w="22860">
+            <a:solidFill>
+              <a:srgbClr val="429761"/>
+            </a:solidFill>
+          </a:ln>
+        </p:spPr>
+        <p:style>
+          <a:lnRef idx="2">
+            <a:schemeClr val="accent1"/>
+          </a:lnRef>
+          <a:fillRef idx="0">
+            <a:schemeClr val="accent1"/>
+          </a:fillRef>
+          <a:effectRef idx="1">
+            <a:schemeClr val="accent1"/>
+          </a:effectRef>
+          <a:fontRef idx="minor">
+            <a:schemeClr val="tx1"/>
+          </a:fontRef>
+        </p:style>
+      </p:cxnSp>
+      <p:sp>
+        <p:nvSpPr>
+          <p:cNvPr id="19" name="Rectangle 18"/>
+          <p:cNvSpPr/>
+          <p:nvPr/>
+        </p:nvSpPr>
+        <p:spPr>
+          <a:xfrm>
+            <a:off x="502920" y="6473952"/>
+            <a:ext cx="11183112" cy="13716"/>
+          </a:xfrm>
+          <a:prstGeom prst="rect">
+            <a:avLst/>
+          </a:prstGeom>
+          <a:solidFill>
+            <a:srgbClr val="D2DCE5"/>
+          </a:solidFill>
+          <a:ln>
+            <a:noFill/>
+          </a:ln>
+        </p:spPr>
+        <p:style>
+          <a:lnRef idx="1">
+            <a:schemeClr val="accent1"/>
+          </a:lnRef>
+          <a:fillRef idx="3">
+            <a:schemeClr val="accent1"/>
+          </a:fillRef>
+          <a:effectRef idx="2">
+            <a:schemeClr val="accent1"/>
+          </a:effectRef>
+          <a:fontRef idx="minor">
+            <a:schemeClr val="lt1"/>
+          </a:fontRef>
+        </p:style>
+        <p:txBody>
+          <a:bodyPr rtlCol="0" anchor="ctr"/>
+          <a:lstStyle/>
+          <a:p>
+            <a:pPr algn="ctr"/>
+          </a:p>
+        </p:txBody>
+      </p:sp>
+      <p:sp>
+        <p:nvSpPr>
+          <p:cNvPr id="20" name="TextBox 19"/>
+          <p:cNvSpPr txBox="1"/>
+          <p:nvPr/>
+        </p:nvSpPr>
+        <p:spPr>
+          <a:xfrm>
+            <a:off x="530352" y="6510528"/>
+            <a:ext cx="10881360" cy="146304"/>
+          </a:xfrm>
+          <a:prstGeom prst="rect">
+            <a:avLst/>
+          </a:prstGeom>
+          <a:noFill/>
+        </p:spPr>
+        <p:txBody>
+          <a:bodyPr wrap="none" anchor="ctr">
+            <a:spAutoFit/>
+          </a:bodyPr>
+          <a:lstStyle/>
+          <a:p>
+            <a:pPr algn="l">
+              <a:defRPr sz="850" b="0">
+                <a:solidFill>
+                  <a:srgbClr val="5D6C7A"/>
+                </a:solidFill>
+                <a:latin typeface="Aptos"/>
+              </a:defRPr>
+            </a:pPr>
+            <a:r>
+              <a:t>Retirement Income Planner • Architecture overview • Assumption controls and Markdown Usage update</a:t>
             </a:r>
           </a:p>
         </p:txBody>
@@ -8416,7 +7859,7 @@
               </a:defRPr>
             </a:pPr>
             <a:r>
-              <a:t>Excess household income can be reinvested</a:t>
+              <a:t>Usage and Notes: shared behavior, separate audiences</a:t>
             </a:r>
           </a:p>
         </p:txBody>
@@ -8452,7 +7895,7 @@
               </a:defRPr>
             </a:pPr>
             <a:r>
-              <a:t>Reinvestment is optional, portfolio-specific, and happens only after the annual tax-and-expense solve converges.</a:t>
+              <a:t>The new Usage guide documents app operation; the existing Notes page retains user-facing plan notes.</a:t>
             </a:r>
           </a:p>
         </p:txBody>
@@ -8465,8 +7908,8 @@
         </p:nvSpPr>
         <p:spPr>
           <a:xfrm>
-            <a:off x="502920" y="1234440"/>
-            <a:ext cx="2331720" cy="1371600"/>
+            <a:off x="640080" y="1234440"/>
+            <a:ext cx="3429000" cy="4434840"/>
           </a:xfrm>
           <a:prstGeom prst="roundRect">
             <a:avLst/>
@@ -8499,7 +7942,7 @@
           <a:lstStyle/>
           <a:p>
             <a:pPr algn="ctr">
-              <a:defRPr sz="1600" b="1">
+              <a:defRPr sz="1700" b="1">
                 <a:solidFill>
                   <a:srgbClr val="232D37"/>
                 </a:solidFill>
@@ -8507,7 +7950,7 @@
               </a:defRPr>
             </a:pPr>
             <a:r>
-              <a:t>Condition</a:t>
+              <a:t>Usage</a:t>
             </a:r>
           </a:p>
           <a:p>
@@ -8515,15 +7958,15 @@
               <a:spcBef>
                 <a:spcPts val="300"/>
               </a:spcBef>
-              <a:defRPr sz="1100">
-                <a:solidFill>
-                  <a:srgbClr val="232D37"/>
-                </a:solidFill>
-                <a:latin typeface="Aptos"/>
-              </a:defRPr>
-            </a:pPr>
-            <a:r>
-              <a:t>excessIncome = max(0, cashIncome − expTotal)</a:t>
+              <a:defRPr sz="1200">
+                <a:solidFill>
+                  <a:srgbClr val="232D37"/>
+                </a:solidFill>
+                <a:latin typeface="Aptos"/>
+              </a:defRPr>
+            </a:pPr>
+            <a:r>
+              <a:t>Topbar position: immediately left of Save to file.</a:t>
             </a:r>
           </a:p>
           <a:p>
@@ -8531,15 +7974,47 @@
               <a:spcBef>
                 <a:spcPts val="300"/>
               </a:spcBef>
-              <a:defRPr sz="1100">
-                <a:solidFill>
-                  <a:srgbClr val="232D37"/>
-                </a:solidFill>
-                <a:latin typeface="Aptos"/>
-              </a:defRPr>
-            </a:pPr>
-            <a:r>
-              <a:t>Only when cash income already covered every expense</a:t>
+              <a:defRPr sz="1200">
+                <a:solidFill>
+                  <a:srgbClr val="232D37"/>
+                </a:solidFill>
+                <a:latin typeface="Aptos"/>
+              </a:defRPr>
+            </a:pPr>
+            <a:r>
+              <a:t>Source: misc/Usage.md.</a:t>
+            </a:r>
+          </a:p>
+          <a:p>
+            <a:pPr>
+              <a:spcBef>
+                <a:spcPts val="300"/>
+              </a:spcBef>
+              <a:defRPr sz="1200">
+                <a:solidFill>
+                  <a:srgbClr val="232D37"/>
+                </a:solidFill>
+                <a:latin typeface="Aptos"/>
+              </a:defRPr>
+            </a:pPr>
+            <a:r>
+              <a:t>Purpose: explain how to operate the planner, including display-only controls such as Asset devalue sliders.</a:t>
+            </a:r>
+          </a:p>
+          <a:p>
+            <a:pPr>
+              <a:spcBef>
+                <a:spcPts val="300"/>
+              </a:spcBef>
+              <a:defRPr sz="1200">
+                <a:solidFill>
+                  <a:srgbClr val="232D37"/>
+                </a:solidFill>
+                <a:latin typeface="Aptos"/>
+              </a:defRPr>
+            </a:pPr>
+            <a:r>
+              <a:t>No code edit required to revise guidance.</a:t>
             </a:r>
           </a:p>
         </p:txBody>
@@ -8552,8 +8027,8 @@
         </p:nvSpPr>
         <p:spPr>
           <a:xfrm>
-            <a:off x="502920" y="1234440"/>
-            <a:ext cx="82296" cy="1371600"/>
+            <a:off x="640080" y="1234440"/>
+            <a:ext cx="82296" cy="4434840"/>
           </a:xfrm>
           <a:prstGeom prst="rect">
             <a:avLst/>
@@ -8595,18 +8070,18 @@
         </p:nvSpPr>
         <p:spPr>
           <a:xfrm>
-            <a:off x="3246120" y="1234440"/>
-            <a:ext cx="2331720" cy="1371600"/>
+            <a:off x="4389120" y="1234440"/>
+            <a:ext cx="3429000" cy="4434840"/>
           </a:xfrm>
           <a:prstGeom prst="roundRect">
             <a:avLst/>
           </a:prstGeom>
           <a:solidFill>
-            <a:srgbClr val="EAF9F4"/>
+            <a:srgbClr val="F7EFFF"/>
           </a:solidFill>
           <a:ln w="13970">
             <a:solidFill>
-              <a:srgbClr val="429761"/>
+              <a:srgbClr val="7852B0"/>
             </a:solidFill>
           </a:ln>
         </p:spPr>
@@ -8629,7 +8104,7 @@
           <a:lstStyle/>
           <a:p>
             <a:pPr algn="ctr">
-              <a:defRPr sz="1600" b="1">
+              <a:defRPr sz="1700" b="1">
                 <a:solidFill>
                   <a:srgbClr val="232D37"/>
                 </a:solidFill>
@@ -8637,7 +8112,7 @@
               </a:defRPr>
             </a:pPr>
             <a:r>
-              <a:t>Eligible targets</a:t>
+              <a:t>Notes</a:t>
             </a:r>
           </a:p>
           <a:p>
@@ -8645,15 +8120,15 @@
               <a:spcBef>
                 <a:spcPts val="300"/>
               </a:spcBef>
-              <a:defRPr sz="1100">
-                <a:solidFill>
-                  <a:srgbClr val="232D37"/>
-                </a:solidFill>
-                <a:latin typeface="Aptos"/>
-              </a:defRPr>
-            </a:pPr>
-            <a:r>
-              <a:t>Live, in-range brokerage portfolios with Reinvest excess income checked</a:t>
+              <a:defRPr sz="1200">
+                <a:solidFill>
+                  <a:srgbClr val="232D37"/>
+                </a:solidFill>
+                <a:latin typeface="Aptos"/>
+              </a:defRPr>
+            </a:pPr>
+            <a:r>
+              <a:t>Topbar position: right of Formulas.</a:t>
             </a:r>
           </a:p>
           <a:p>
@@ -8661,15 +8136,47 @@
               <a:spcBef>
                 <a:spcPts val="300"/>
               </a:spcBef>
-              <a:defRPr sz="1100">
-                <a:solidFill>
-                  <a:srgbClr val="232D37"/>
-                </a:solidFill>
-                <a:latin typeface="Aptos"/>
-              </a:defRPr>
-            </a:pPr>
-            <a:r>
-              <a:t>IDGT eligible if checked</a:t>
+              <a:defRPr sz="1200">
+                <a:solidFill>
+                  <a:srgbClr val="232D37"/>
+                </a:solidFill>
+                <a:latin typeface="Aptos"/>
+              </a:defRPr>
+            </a:pPr>
+            <a:r>
+              <a:t>Source: misc/Note4User.md.</a:t>
+            </a:r>
+          </a:p>
+          <a:p>
+            <a:pPr>
+              <a:spcBef>
+                <a:spcPts val="300"/>
+              </a:spcBef>
+              <a:defRPr sz="1200">
+                <a:solidFill>
+                  <a:srgbClr val="232D37"/>
+                </a:solidFill>
+                <a:latin typeface="Aptos"/>
+              </a:defRPr>
+            </a:pPr>
+            <a:r>
+              <a:t>Purpose: user-facing notes associated with the planner.</a:t>
+            </a:r>
+          </a:p>
+          <a:p>
+            <a:pPr>
+              <a:spcBef>
+                <a:spcPts val="300"/>
+              </a:spcBef>
+              <a:defRPr sz="1200">
+                <a:solidFill>
+                  <a:srgbClr val="232D37"/>
+                </a:solidFill>
+                <a:latin typeface="Aptos"/>
+              </a:defRPr>
+            </a:pPr>
+            <a:r>
+              <a:t>Uses the same shared Markdown renderer.</a:t>
             </a:r>
           </a:p>
         </p:txBody>
@@ -8682,14 +8189,14 @@
         </p:nvSpPr>
         <p:spPr>
           <a:xfrm>
-            <a:off x="3246120" y="1234440"/>
-            <a:ext cx="82296" cy="1371600"/>
+            <a:off x="4389120" y="1234440"/>
+            <a:ext cx="82296" cy="4434840"/>
           </a:xfrm>
           <a:prstGeom prst="rect">
             <a:avLst/>
           </a:prstGeom>
           <a:solidFill>
-            <a:srgbClr val="429761"/>
+            <a:srgbClr val="7852B0"/>
           </a:solidFill>
           <a:ln>
             <a:noFill/>
@@ -8725,8 +8232,8 @@
         </p:nvSpPr>
         <p:spPr>
           <a:xfrm>
-            <a:off x="5989320" y="1234440"/>
-            <a:ext cx="2331720" cy="1371600"/>
+            <a:off x="8138160" y="1234440"/>
+            <a:ext cx="3429000" cy="4434840"/>
           </a:xfrm>
           <a:prstGeom prst="roundRect">
             <a:avLst/>
@@ -8759,7 +8266,7 @@
           <a:lstStyle/>
           <a:p>
             <a:pPr algn="ctr">
-              <a:defRPr sz="1600" b="1">
+              <a:defRPr sz="1700" b="1">
                 <a:solidFill>
                   <a:srgbClr val="232D37"/>
                 </a:solidFill>
@@ -8767,7 +8274,7 @@
               </a:defRPr>
             </a:pPr>
             <a:r>
-              <a:t>Allocation</a:t>
+              <a:t>Runtime constraint</a:t>
             </a:r>
           </a:p>
           <a:p>
@@ -8775,15 +8282,15 @@
               <a:spcBef>
                 <a:spcPts val="300"/>
               </a:spcBef>
-              <a:defRPr sz="1100">
-                <a:solidFill>
-                  <a:srgbClr val="232D37"/>
-                </a:solidFill>
-                <a:latin typeface="Aptos"/>
-              </a:defRPr>
-            </a:pPr>
-            <a:r>
-              <a:t>Split pro rata by start-of-year balance</a:t>
+              <a:defRPr sz="1200">
+                <a:solidFill>
+                  <a:srgbClr val="232D37"/>
+                </a:solidFill>
+                <a:latin typeface="Aptos"/>
+              </a:defRPr>
+            </a:pPr>
+            <a:r>
+              <a:t>Sibling-file fetch works under http(s).</a:t>
             </a:r>
           </a:p>
           <a:p>
@@ -8791,15 +8298,31 @@
               <a:spcBef>
                 <a:spcPts val="300"/>
               </a:spcBef>
-              <a:defRPr sz="1100">
-                <a:solidFill>
-                  <a:srgbClr val="232D37"/>
-                </a:solidFill>
-                <a:latin typeface="Aptos"/>
-              </a:defRPr>
-            </a:pPr>
-            <a:r>
-              <a:t>No eligible target → excess leaves model</a:t>
+              <a:defRPr sz="1200">
+                <a:solidFill>
+                  <a:srgbClr val="232D37"/>
+                </a:solidFill>
+                <a:latin typeface="Aptos"/>
+              </a:defRPr>
+            </a:pPr>
+            <a:r>
+              <a:t>Chrome blocks it under file://.</a:t>
+            </a:r>
+          </a:p>
+          <a:p>
+            <a:pPr>
+              <a:spcBef>
+                <a:spcPts val="300"/>
+              </a:spcBef>
+              <a:defRPr sz="1200">
+                <a:solidFill>
+                  <a:srgbClr val="232D37"/>
+                </a:solidFill>
+                <a:latin typeface="Aptos"/>
+              </a:defRPr>
+            </a:pPr>
+            <a:r>
+              <a:t>On failure, the generated tab explains the limitation and workarounds rather than failing silently.</a:t>
             </a:r>
           </a:p>
         </p:txBody>
@@ -8812,8 +8335,8 @@
         </p:nvSpPr>
         <p:spPr>
           <a:xfrm>
-            <a:off x="5989320" y="1234440"/>
-            <a:ext cx="82296" cy="1371600"/>
+            <a:off x="8138160" y="1234440"/>
+            <a:ext cx="82296" cy="4434840"/>
           </a:xfrm>
           <a:prstGeom prst="rect">
             <a:avLst/>
@@ -8849,356 +8372,7 @@
       </p:sp>
       <p:sp>
         <p:nvSpPr>
-          <p:cNvPr id="10" name="Rounded Rectangle 9"/>
-          <p:cNvSpPr/>
-          <p:nvPr/>
-        </p:nvSpPr>
-        <p:spPr>
-          <a:xfrm>
-            <a:off x="8732520" y="1234440"/>
-            <a:ext cx="2331720" cy="1371600"/>
-          </a:xfrm>
-          <a:prstGeom prst="roundRect">
-            <a:avLst/>
-          </a:prstGeom>
-          <a:solidFill>
-            <a:srgbClr val="F7EFFF"/>
-          </a:solidFill>
-          <a:ln w="13970">
-            <a:solidFill>
-              <a:srgbClr val="7852B0"/>
-            </a:solidFill>
-          </a:ln>
-        </p:spPr>
-        <p:style>
-          <a:lnRef idx="1">
-            <a:schemeClr val="accent1"/>
-          </a:lnRef>
-          <a:fillRef idx="3">
-            <a:schemeClr val="accent1"/>
-          </a:fillRef>
-          <a:effectRef idx="2">
-            <a:schemeClr val="accent1"/>
-          </a:effectRef>
-          <a:fontRef idx="minor">
-            <a:schemeClr val="lt1"/>
-          </a:fontRef>
-        </p:style>
-        <p:txBody>
-          <a:bodyPr rtlCol="0" anchor="ctr" lIns="182880" rIns="100584" tIns="91440"/>
-          <a:lstStyle/>
-          <a:p>
-            <a:pPr algn="ctr">
-              <a:defRPr sz="1600" b="1">
-                <a:solidFill>
-                  <a:srgbClr val="232D37"/>
-                </a:solidFill>
-                <a:latin typeface="Aptos Display"/>
-              </a:defRPr>
-            </a:pPr>
-            <a:r>
-              <a:t>Roll forward</a:t>
-            </a:r>
-          </a:p>
-          <a:p>
-            <a:pPr>
-              <a:spcBef>
-                <a:spcPts val="300"/>
-              </a:spcBef>
-              <a:defRPr sz="1100">
-                <a:solidFill>
-                  <a:srgbClr val="232D37"/>
-                </a:solidFill>
-                <a:latin typeface="Aptos"/>
-              </a:defRPr>
-            </a:pPr>
-            <a:r>
-              <a:t>Adds excessIn to balance and basis</a:t>
-            </a:r>
-          </a:p>
-          <a:p>
-            <a:pPr>
-              <a:spcBef>
-                <a:spcPts val="300"/>
-              </a:spcBef>
-              <a:defRPr sz="1100">
-                <a:solidFill>
-                  <a:srgbClr val="232D37"/>
-                </a:solidFill>
-                <a:latin typeface="Aptos"/>
-              </a:defRPr>
-            </a:pPr>
-            <a:r>
-              <a:t>Never feeds back into same-year tax</a:t>
-            </a:r>
-          </a:p>
-        </p:txBody>
-      </p:sp>
-      <p:sp>
-        <p:nvSpPr>
-          <p:cNvPr id="11" name="Rectangle 10"/>
-          <p:cNvSpPr/>
-          <p:nvPr/>
-        </p:nvSpPr>
-        <p:spPr>
-          <a:xfrm>
-            <a:off x="8732520" y="1234440"/>
-            <a:ext cx="82296" cy="1371600"/>
-          </a:xfrm>
-          <a:prstGeom prst="rect">
-            <a:avLst/>
-          </a:prstGeom>
-          <a:solidFill>
-            <a:srgbClr val="7852B0"/>
-          </a:solidFill>
-          <a:ln>
-            <a:noFill/>
-          </a:ln>
-        </p:spPr>
-        <p:style>
-          <a:lnRef idx="1">
-            <a:schemeClr val="accent1"/>
-          </a:lnRef>
-          <a:fillRef idx="3">
-            <a:schemeClr val="accent1"/>
-          </a:fillRef>
-          <a:effectRef idx="2">
-            <a:schemeClr val="accent1"/>
-          </a:effectRef>
-          <a:fontRef idx="minor">
-            <a:schemeClr val="lt1"/>
-          </a:fontRef>
-        </p:style>
-        <p:txBody>
-          <a:bodyPr rtlCol="0" anchor="ctr"/>
-          <a:lstStyle/>
-          <a:p>
-            <a:pPr algn="ctr"/>
-          </a:p>
-        </p:txBody>
-      </p:sp>
-      <p:cxnSp>
-        <p:nvCxnSpPr>
-          <p:cNvPr id="12" name="Connector 11"/>
-          <p:cNvCxnSpPr/>
-          <p:nvPr/>
-        </p:nvCxnSpPr>
-        <p:spPr>
-          <a:xfrm>
-            <a:off x="2880360" y="1920240"/>
-            <a:ext cx="256031" cy="0"/>
-          </a:xfrm>
-          <a:prstGeom prst="line">
-            <a:avLst/>
-          </a:prstGeom>
-          <a:ln w="22860">
-            <a:solidFill>
-              <a:srgbClr val="266EB2"/>
-            </a:solidFill>
-          </a:ln>
-        </p:spPr>
-        <p:style>
-          <a:lnRef idx="2">
-            <a:schemeClr val="accent1"/>
-          </a:lnRef>
-          <a:fillRef idx="0">
-            <a:schemeClr val="accent1"/>
-          </a:fillRef>
-          <a:effectRef idx="1">
-            <a:schemeClr val="accent1"/>
-          </a:effectRef>
-          <a:fontRef idx="minor">
-            <a:schemeClr val="tx1"/>
-          </a:fontRef>
-        </p:style>
-      </p:cxnSp>
-      <p:cxnSp>
-        <p:nvCxnSpPr>
-          <p:cNvPr id="13" name="Connector 12"/>
-          <p:cNvCxnSpPr/>
-          <p:nvPr/>
-        </p:nvCxnSpPr>
-        <p:spPr>
-          <a:xfrm>
-            <a:off x="5623560" y="1920240"/>
-            <a:ext cx="256032" cy="0"/>
-          </a:xfrm>
-          <a:prstGeom prst="line">
-            <a:avLst/>
-          </a:prstGeom>
-          <a:ln w="22860">
-            <a:solidFill>
-              <a:srgbClr val="429761"/>
-            </a:solidFill>
-          </a:ln>
-        </p:spPr>
-        <p:style>
-          <a:lnRef idx="2">
-            <a:schemeClr val="accent1"/>
-          </a:lnRef>
-          <a:fillRef idx="0">
-            <a:schemeClr val="accent1"/>
-          </a:fillRef>
-          <a:effectRef idx="1">
-            <a:schemeClr val="accent1"/>
-          </a:effectRef>
-          <a:fontRef idx="minor">
-            <a:schemeClr val="tx1"/>
-          </a:fontRef>
-        </p:style>
-      </p:cxnSp>
-      <p:cxnSp>
-        <p:nvCxnSpPr>
-          <p:cNvPr id="14" name="Connector 13"/>
-          <p:cNvCxnSpPr/>
-          <p:nvPr/>
-        </p:nvCxnSpPr>
-        <p:spPr>
-          <a:xfrm>
-            <a:off x="8366760" y="1920240"/>
-            <a:ext cx="256032" cy="0"/>
-          </a:xfrm>
-          <a:prstGeom prst="line">
-            <a:avLst/>
-          </a:prstGeom>
-          <a:ln w="22860">
-            <a:solidFill>
-              <a:srgbClr val="E5892A"/>
-            </a:solidFill>
-          </a:ln>
-        </p:spPr>
-        <p:style>
-          <a:lnRef idx="2">
-            <a:schemeClr val="accent1"/>
-          </a:lnRef>
-          <a:fillRef idx="0">
-            <a:schemeClr val="accent1"/>
-          </a:fillRef>
-          <a:effectRef idx="1">
-            <a:schemeClr val="accent1"/>
-          </a:effectRef>
-          <a:fontRef idx="minor">
-            <a:schemeClr val="tx1"/>
-          </a:fontRef>
-        </p:style>
-      </p:cxnSp>
-      <p:sp>
-        <p:nvSpPr>
-          <p:cNvPr id="15" name="Rounded Rectangle 14"/>
-          <p:cNvSpPr/>
-          <p:nvPr/>
-        </p:nvSpPr>
-        <p:spPr>
-          <a:xfrm>
-            <a:off x="1234440" y="3886200"/>
-            <a:ext cx="9646920" cy="1097280"/>
-          </a:xfrm>
-          <a:prstGeom prst="roundRect">
-            <a:avLst/>
-          </a:prstGeom>
-          <a:solidFill>
-            <a:srgbClr val="F8FAFC"/>
-          </a:solidFill>
-          <a:ln w="13970">
-            <a:solidFill>
-              <a:srgbClr val="0F2647"/>
-            </a:solidFill>
-          </a:ln>
-        </p:spPr>
-        <p:style>
-          <a:lnRef idx="1">
-            <a:schemeClr val="accent1"/>
-          </a:lnRef>
-          <a:fillRef idx="3">
-            <a:schemeClr val="accent1"/>
-          </a:fillRef>
-          <a:effectRef idx="2">
-            <a:schemeClr val="accent1"/>
-          </a:effectRef>
-          <a:fontRef idx="minor">
-            <a:schemeClr val="lt1"/>
-          </a:fontRef>
-        </p:style>
-        <p:txBody>
-          <a:bodyPr rtlCol="0" anchor="ctr" lIns="182880" rIns="100584" tIns="91440"/>
-          <a:lstStyle/>
-          <a:p>
-            <a:pPr algn="ctr">
-              <a:defRPr sz="1600" b="1">
-                <a:solidFill>
-                  <a:srgbClr val="232D37"/>
-                </a:solidFill>
-                <a:latin typeface="Aptos Display"/>
-              </a:defRPr>
-            </a:pPr>
-            <a:r>
-              <a:t>Visibility</a:t>
-            </a:r>
-          </a:p>
-          <a:p>
-            <a:pPr>
-              <a:spcBef>
-                <a:spcPts val="300"/>
-              </a:spcBef>
-              <a:defRPr sz="1200">
-                <a:solidFill>
-                  <a:srgbClr val="232D37"/>
-                </a:solidFill>
-                <a:latin typeface="Aptos"/>
-              </a:defRPr>
-            </a:pPr>
-            <a:r>
-              <a:t>Projection rows report excessIncome and excessReinvested; portfolio entries record excessReinvested and reinvest. Asset tooltips, expense chart details, Excel, and chat all consume these outputs.</a:t>
-            </a:r>
-          </a:p>
-        </p:txBody>
-      </p:sp>
-      <p:sp>
-        <p:nvSpPr>
-          <p:cNvPr id="16" name="Rectangle 15"/>
-          <p:cNvSpPr/>
-          <p:nvPr/>
-        </p:nvSpPr>
-        <p:spPr>
-          <a:xfrm>
-            <a:off x="1234440" y="3886200"/>
-            <a:ext cx="82296" cy="1097280"/>
-          </a:xfrm>
-          <a:prstGeom prst="rect">
-            <a:avLst/>
-          </a:prstGeom>
-          <a:solidFill>
-            <a:srgbClr val="0F2647"/>
-          </a:solidFill>
-          <a:ln>
-            <a:noFill/>
-          </a:ln>
-        </p:spPr>
-        <p:style>
-          <a:lnRef idx="1">
-            <a:schemeClr val="accent1"/>
-          </a:lnRef>
-          <a:fillRef idx="3">
-            <a:schemeClr val="accent1"/>
-          </a:fillRef>
-          <a:effectRef idx="2">
-            <a:schemeClr val="accent1"/>
-          </a:effectRef>
-          <a:fontRef idx="minor">
-            <a:schemeClr val="lt1"/>
-          </a:fontRef>
-        </p:style>
-        <p:txBody>
-          <a:bodyPr rtlCol="0" anchor="ctr"/>
-          <a:lstStyle/>
-          <a:p>
-            <a:pPr algn="ctr"/>
-          </a:p>
-        </p:txBody>
-      </p:sp>
-      <p:sp>
-        <p:nvSpPr>
-          <p:cNvPr id="17" name="Rectangle 16"/>
+          <p:cNvPr id="10" name="Rectangle 9"/>
           <p:cNvSpPr/>
           <p:nvPr/>
         </p:nvSpPr>
@@ -9241,7 +8415,7 @@
       </p:sp>
       <p:sp>
         <p:nvSpPr>
-          <p:cNvPr id="18" name="TextBox 17"/>
+          <p:cNvPr id="11" name="TextBox 10"/>
           <p:cNvSpPr txBox="1"/>
           <p:nvPr/>
         </p:nvSpPr>
@@ -9270,7 +8444,7 @@
               </a:defRPr>
             </a:pPr>
             <a:r>
-              <a:t>Retirement Income Planner • Architecture overview • Rental, tax-exempt income, and legacy-value update</a:t>
+              <a:t>Retirement Income Planner • Architecture overview • Assumption controls and Markdown Usage update</a:t>
             </a:r>
           </a:p>
         </p:txBody>
@@ -9332,7 +8506,7 @@
               </a:defRPr>
             </a:pPr>
             <a:r>
-              <a:t>Roth conversion timing becomes a three-mode policy</a:t>
+              <a:t>Why this update matters to the larger architecture</a:t>
             </a:r>
           </a:p>
         </p:txBody>
@@ -9368,7 +8542,7 @@
               </a:defRPr>
             </a:pPr>
             <a:r>
-              <a:t>The IRA card separates “whether to convert” from “when conversions begin.”</a:t>
+              <a:t>These additions increase user control and documentation quality without bypassing the state → compute → projection contracts.</a:t>
             </a:r>
           </a:p>
         </p:txBody>
@@ -9381,8 +8555,154 @@
         </p:nvSpPr>
         <p:spPr>
           <a:xfrm>
-            <a:off x="640080" y="1234440"/>
-            <a:ext cx="3246120" cy="4434840"/>
+            <a:off x="594360" y="1188720"/>
+            <a:ext cx="3337560" cy="4526280"/>
+          </a:xfrm>
+          <a:prstGeom prst="roundRect">
+            <a:avLst/>
+          </a:prstGeom>
+          <a:solidFill>
+            <a:srgbClr val="EAF9F4"/>
+          </a:solidFill>
+          <a:ln w="13970">
+            <a:solidFill>
+              <a:srgbClr val="429761"/>
+            </a:solidFill>
+          </a:ln>
+        </p:spPr>
+        <p:style>
+          <a:lnRef idx="1">
+            <a:schemeClr val="accent1"/>
+          </a:lnRef>
+          <a:fillRef idx="3">
+            <a:schemeClr val="accent1"/>
+          </a:fillRef>
+          <a:effectRef idx="2">
+            <a:schemeClr val="accent1"/>
+          </a:effectRef>
+          <a:fontRef idx="minor">
+            <a:schemeClr val="lt1"/>
+          </a:fontRef>
+        </p:style>
+        <p:txBody>
+          <a:bodyPr rtlCol="0" anchor="ctr" lIns="182880" rIns="100584" tIns="91440"/>
+          <a:lstStyle/>
+          <a:p>
+            <a:pPr algn="ctr">
+              <a:defRPr sz="1700" b="1">
+                <a:solidFill>
+                  <a:srgbClr val="232D37"/>
+                </a:solidFill>
+                <a:latin typeface="Aptos Display"/>
+              </a:defRPr>
+            </a:pPr>
+            <a:r>
+              <a:t>No hidden financial behavior</a:t>
+            </a:r>
+          </a:p>
+          <a:p>
+            <a:pPr>
+              <a:spcBef>
+                <a:spcPts val="300"/>
+              </a:spcBef>
+              <a:defRPr sz="1200">
+                <a:solidFill>
+                  <a:srgbClr val="232D37"/>
+                </a:solidFill>
+                <a:latin typeface="Aptos"/>
+              </a:defRPr>
+            </a:pPr>
+            <a:r>
+              <a:t>Assumption Enable flags are explicit state fields.</a:t>
+            </a:r>
+          </a:p>
+          <a:p>
+            <a:pPr>
+              <a:spcBef>
+                <a:spcPts val="300"/>
+              </a:spcBef>
+              <a:defRPr sz="1200">
+                <a:solidFill>
+                  <a:srgbClr val="232D37"/>
+                </a:solidFill>
+                <a:latin typeface="Aptos"/>
+              </a:defRPr>
+            </a:pPr>
+            <a:r>
+              <a:t>Compute reads those fields; charts do not.</a:t>
+            </a:r>
+          </a:p>
+          <a:p>
+            <a:pPr>
+              <a:spcBef>
+                <a:spcPts val="300"/>
+              </a:spcBef>
+              <a:defRPr sz="1200">
+                <a:solidFill>
+                  <a:srgbClr val="232D37"/>
+                </a:solidFill>
+                <a:latin typeface="Aptos"/>
+              </a:defRPr>
+            </a:pPr>
+            <a:r>
+              <a:t>Disable means “ignore in model,” not “discard user input.”</a:t>
+            </a:r>
+          </a:p>
+        </p:txBody>
+      </p:sp>
+      <p:sp>
+        <p:nvSpPr>
+          <p:cNvPr id="5" name="Rectangle 4"/>
+          <p:cNvSpPr/>
+          <p:nvPr/>
+        </p:nvSpPr>
+        <p:spPr>
+          <a:xfrm>
+            <a:off x="594360" y="1188720"/>
+            <a:ext cx="82296" cy="4526280"/>
+          </a:xfrm>
+          <a:prstGeom prst="rect">
+            <a:avLst/>
+          </a:prstGeom>
+          <a:solidFill>
+            <a:srgbClr val="429761"/>
+          </a:solidFill>
+          <a:ln>
+            <a:noFill/>
+          </a:ln>
+        </p:spPr>
+        <p:style>
+          <a:lnRef idx="1">
+            <a:schemeClr val="accent1"/>
+          </a:lnRef>
+          <a:fillRef idx="3">
+            <a:schemeClr val="accent1"/>
+          </a:fillRef>
+          <a:effectRef idx="2">
+            <a:schemeClr val="accent1"/>
+          </a:effectRef>
+          <a:fontRef idx="minor">
+            <a:schemeClr val="lt1"/>
+          </a:fontRef>
+        </p:style>
+        <p:txBody>
+          <a:bodyPr rtlCol="0" anchor="ctr"/>
+          <a:lstStyle/>
+          <a:p>
+            <a:pPr algn="ctr"/>
+          </a:p>
+        </p:txBody>
+      </p:sp>
+      <p:sp>
+        <p:nvSpPr>
+          <p:cNvPr id="6" name="Rounded Rectangle 5"/>
+          <p:cNvSpPr/>
+          <p:nvPr/>
+        </p:nvSpPr>
+        <p:spPr>
+          <a:xfrm>
+            <a:off x="4407408" y="1188720"/>
+            <a:ext cx="3337560" cy="4526280"/>
           </a:xfrm>
           <a:prstGeom prst="roundRect">
             <a:avLst/>
@@ -9423,7 +8743,7 @@
               </a:defRPr>
             </a:pPr>
             <a:r>
-              <a:t>RMD start — default</a:t>
+              <a:t>No UI-state drift</a:t>
             </a:r>
           </a:p>
           <a:p>
@@ -9439,7 +8759,7 @@
               </a:defRPr>
             </a:pPr>
             <a:r>
-              <a:t>Conversion begins at the IRA’s resolved Start age.</a:t>
+              <a:t>Hide status belongs in state rather than browser checkbox state.</a:t>
             </a:r>
           </a:p>
           <a:p>
@@ -9455,21 +8775,37 @@
               </a:defRPr>
             </a:pPr>
             <a:r>
-              <a:t>Default aligns the start with the account’s RMD-oriented age-range rule.</a:t>
-            </a:r>
-          </a:p>
-        </p:txBody>
-      </p:sp>
-      <p:sp>
-        <p:nvSpPr>
-          <p:cNvPr id="5" name="Rectangle 4"/>
+              <a:t>Every body is rendered; collapse is presentation-only.</a:t>
+            </a:r>
+          </a:p>
+          <a:p>
+            <a:pPr>
+              <a:spcBef>
+                <a:spcPts val="300"/>
+              </a:spcBef>
+              <a:defRPr sz="1200">
+                <a:solidFill>
+                  <a:srgbClr val="232D37"/>
+                </a:solidFill>
+                <a:latin typeface="Aptos"/>
+              </a:defRPr>
+            </a:pPr>
+            <a:r>
+              <a:t>Save, autosave, reset, load, and legacy hydration have defined behavior.</a:t>
+            </a:r>
+          </a:p>
+        </p:txBody>
+      </p:sp>
+      <p:sp>
+        <p:nvSpPr>
+          <p:cNvPr id="7" name="Rectangle 6"/>
           <p:cNvSpPr/>
           <p:nvPr/>
         </p:nvSpPr>
         <p:spPr>
           <a:xfrm>
-            <a:off x="640080" y="1234440"/>
-            <a:ext cx="82296" cy="4434840"/>
+            <a:off x="4407408" y="1188720"/>
+            <a:ext cx="82296" cy="4526280"/>
           </a:xfrm>
           <a:prstGeom prst="rect">
             <a:avLst/>
@@ -9505,144 +8841,14 @@
       </p:sp>
       <p:sp>
         <p:nvSpPr>
-          <p:cNvPr id="6" name="Rounded Rectangle 5"/>
-          <p:cNvSpPr/>
-          <p:nvPr/>
-        </p:nvSpPr>
-        <p:spPr>
-          <a:xfrm>
-            <a:off x="4462272" y="1234440"/>
-            <a:ext cx="3246120" cy="4434840"/>
-          </a:xfrm>
-          <a:prstGeom prst="roundRect">
-            <a:avLst/>
-          </a:prstGeom>
-          <a:solidFill>
-            <a:srgbClr val="EAF9F4"/>
-          </a:solidFill>
-          <a:ln w="13970">
-            <a:solidFill>
-              <a:srgbClr val="429761"/>
-            </a:solidFill>
-          </a:ln>
-        </p:spPr>
-        <p:style>
-          <a:lnRef idx="1">
-            <a:schemeClr val="accent1"/>
-          </a:lnRef>
-          <a:fillRef idx="3">
-            <a:schemeClr val="accent1"/>
-          </a:fillRef>
-          <a:effectRef idx="2">
-            <a:schemeClr val="accent1"/>
-          </a:effectRef>
-          <a:fontRef idx="minor">
-            <a:schemeClr val="lt1"/>
-          </a:fontRef>
-        </p:style>
-        <p:txBody>
-          <a:bodyPr rtlCol="0" anchor="ctr" lIns="182880" rIns="100584" tIns="91440"/>
-          <a:lstStyle/>
-          <a:p>
-            <a:pPr algn="ctr">
-              <a:defRPr sz="1700" b="1">
-                <a:solidFill>
-                  <a:srgbClr val="232D37"/>
-                </a:solidFill>
-                <a:latin typeface="Aptos Display"/>
-              </a:defRPr>
-            </a:pPr>
-            <a:r>
-              <a:t>Now</a:t>
-            </a:r>
-          </a:p>
-          <a:p>
-            <a:pPr>
-              <a:spcBef>
-                <a:spcPts val="300"/>
-              </a:spcBef>
-              <a:defRPr sz="1200">
-                <a:solidFill>
-                  <a:srgbClr val="232D37"/>
-                </a:solidFill>
-                <a:latin typeface="Aptos"/>
-              </a:defRPr>
-            </a:pPr>
-            <a:r>
-              <a:t>Conversion begins at current age.</a:t>
-            </a:r>
-          </a:p>
-          <a:p>
-            <a:pPr>
-              <a:spcBef>
-                <a:spcPts val="300"/>
-              </a:spcBef>
-              <a:defRPr sz="1200">
-                <a:solidFill>
-                  <a:srgbClr val="232D37"/>
-                </a:solidFill>
-                <a:latin typeface="Aptos"/>
-              </a:defRPr>
-            </a:pPr>
-            <a:r>
-              <a:t>Effective start still cannot precede current age.</a:t>
-            </a:r>
-          </a:p>
-        </p:txBody>
-      </p:sp>
-      <p:sp>
-        <p:nvSpPr>
-          <p:cNvPr id="7" name="Rectangle 6"/>
-          <p:cNvSpPr/>
-          <p:nvPr/>
-        </p:nvSpPr>
-        <p:spPr>
-          <a:xfrm>
-            <a:off x="4462272" y="1234440"/>
-            <a:ext cx="82296" cy="4434840"/>
-          </a:xfrm>
-          <a:prstGeom prst="rect">
-            <a:avLst/>
-          </a:prstGeom>
-          <a:solidFill>
-            <a:srgbClr val="429761"/>
-          </a:solidFill>
-          <a:ln>
-            <a:noFill/>
-          </a:ln>
-        </p:spPr>
-        <p:style>
-          <a:lnRef idx="1">
-            <a:schemeClr val="accent1"/>
-          </a:lnRef>
-          <a:fillRef idx="3">
-            <a:schemeClr val="accent1"/>
-          </a:fillRef>
-          <a:effectRef idx="2">
-            <a:schemeClr val="accent1"/>
-          </a:effectRef>
-          <a:fontRef idx="minor">
-            <a:schemeClr val="lt1"/>
-          </a:fontRef>
-        </p:style>
-        <p:txBody>
-          <a:bodyPr rtlCol="0" anchor="ctr"/>
-          <a:lstStyle/>
-          <a:p>
-            <a:pPr algn="ctr"/>
-          </a:p>
-        </p:txBody>
-      </p:sp>
-      <p:sp>
-        <p:nvSpPr>
           <p:cNvPr id="8" name="Rounded Rectangle 7"/>
           <p:cNvSpPr/>
           <p:nvPr/>
         </p:nvSpPr>
         <p:spPr>
           <a:xfrm>
-            <a:off x="8284464" y="1234440"/>
-            <a:ext cx="3246120" cy="4434840"/>
+            <a:off x="8220456" y="1188720"/>
+            <a:ext cx="3337560" cy="4526280"/>
           </a:xfrm>
           <a:prstGeom prst="roundRect">
             <a:avLst/>
@@ -9683,7 +8889,7 @@
               </a:defRPr>
             </a:pPr>
             <a:r>
-              <a:t>Custom age</a:t>
+              <a:t>No documentation duplication</a:t>
             </a:r>
           </a:p>
           <a:p>
@@ -9699,7 +8905,7 @@
               </a:defRPr>
             </a:pPr>
             <a:r>
-              <a:t>Shows paired slider + number input only when selected.</a:t>
+              <a:t>One Markdown renderer supports multiple pages.</a:t>
             </a:r>
           </a:p>
           <a:p>
@@ -9715,7 +8921,7 @@
               </a:defRPr>
             </a:pPr>
             <a:r>
-              <a:t>Effective start is max(current age, custom age).</a:t>
+              <a:t>Content updates are separated from code deployment.</a:t>
             </a:r>
           </a:p>
           <a:p>
@@ -9731,7 +8937,7 @@
               </a:defRPr>
             </a:pPr>
             <a:r>
-              <a:t>Migration preserves old plans: existing conversion behavior maps to custom or now.</a:t>
+              <a:t>Formula reference remains distinct: it is a structured, constants-backed mathematical page.</a:t>
             </a:r>
           </a:p>
         </p:txBody>
@@ -9744,8 +8950,8 @@
         </p:nvSpPr>
         <p:spPr>
           <a:xfrm>
-            <a:off x="8284464" y="1234440"/>
-            <a:ext cx="82296" cy="4434840"/>
+            <a:off x="8220456" y="1188720"/>
+            <a:ext cx="82296" cy="4526280"/>
           </a:xfrm>
           <a:prstGeom prst="rect">
             <a:avLst/>
@@ -9853,7 +9059,7 @@
               </a:defRPr>
             </a:pPr>
             <a:r>
-              <a:t>Retirement Income Planner • Architecture overview • Rental, tax-exempt income, and legacy-value update</a:t>
+              <a:t>Retirement Income Planner • Architecture overview • Assumption controls and Markdown Usage update</a:t>
             </a:r>
           </a:p>
         </p:txBody>
@@ -9915,7 +9121,7 @@
               </a:defRPr>
             </a:pPr>
             <a:r>
-              <a:t>Post-passing legacy tail and display-only value haircuts</a:t>
+              <a:t>Updated project structure and dependency order</a:t>
             </a:r>
           </a:p>
         </p:txBody>
@@ -9951,7 +9157,7 @@
               </a:defRPr>
             </a:pPr>
             <a:r>
-              <a:t>The main Asset chart can continue selected assets for ten legacy years and show an after-tax-value approximation without changing projection finance.</a:t>
+              <a:t>The newest files are focused display utilities; they preserve the plain-script architecture and dependency-driven loading model.</a:t>
             </a:r>
           </a:p>
         </p:txBody>
@@ -9964,18 +9170,18 @@
         </p:nvSpPr>
         <p:spPr>
           <a:xfrm>
-            <a:off x="502920" y="1097280"/>
-            <a:ext cx="2743200" cy="4617720"/>
+            <a:off x="594360" y="1143000"/>
+            <a:ext cx="3200400" cy="4526280"/>
           </a:xfrm>
           <a:prstGeom prst="roundRect">
             <a:avLst/>
           </a:prstGeom>
           <a:solidFill>
-            <a:srgbClr val="F7EFFF"/>
+            <a:srgbClr val="E9F4FF"/>
           </a:solidFill>
           <a:ln w="13970">
             <a:solidFill>
-              <a:srgbClr val="7852B0"/>
+              <a:srgbClr val="266EB2"/>
             </a:solidFill>
           </a:ln>
         </p:spPr>
@@ -10006,7 +9212,7 @@
               </a:defRPr>
             </a:pPr>
             <a:r>
-              <a:t>Stretch rows</a:t>
+              <a:t>New source files</a:t>
             </a:r>
           </a:p>
           <a:p>
@@ -10022,7 +9228,7 @@
               </a:defRPr>
             </a:pPr>
             <a:r>
-              <a:t>10 pseudo-years after final passing.</a:t>
+              <a:t>display/mdPage.js</a:t>
             </a:r>
           </a:p>
           <a:p>
@@ -10038,7 +9244,7 @@
               </a:defRPr>
             </a:pPr>
             <a:r>
-              <a:t>Selected IRA/Roth accounts compound for heirs.</a:t>
+              <a:t>display/usagePage.js</a:t>
             </a:r>
           </a:p>
           <a:p>
@@ -10054,7 +9260,7 @@
               </a:defRPr>
             </a:pPr>
             <a:r>
-              <a:t>Continuing non-IDGT brokerage also compounds.</a:t>
+              <a:t>misc/Usage.md</a:t>
             </a:r>
           </a:p>
           <a:p>
@@ -10070,7 +9276,7 @@
               </a:defRPr>
             </a:pPr>
             <a:r>
-              <a:t>No expenses, withdrawals, or heir taxes.</a:t>
+              <a:t>Updated assumptions.js / controls.js</a:t>
             </a:r>
           </a:p>
           <a:p>
@@ -10086,7 +9292,7 @@
               </a:defRPr>
             </a:pPr>
             <a:r>
-              <a:t>IDGT bands end with real projection rows.</a:t>
+              <a:t>Updated index.html topbar and load order</a:t>
             </a:r>
           </a:p>
         </p:txBody>
@@ -10099,14 +9305,14 @@
         </p:nvSpPr>
         <p:spPr>
           <a:xfrm>
-            <a:off x="502920" y="1097280"/>
-            <a:ext cx="82296" cy="4617720"/>
+            <a:off x="594360" y="1143000"/>
+            <a:ext cx="82296" cy="4526280"/>
           </a:xfrm>
           <a:prstGeom prst="rect">
             <a:avLst/>
           </a:prstGeom>
           <a:solidFill>
-            <a:srgbClr val="7852B0"/>
+            <a:srgbClr val="266EB2"/>
           </a:solidFill>
           <a:ln>
             <a:noFill/>
@@ -10142,8 +9348,8 @@
         </p:nvSpPr>
         <p:spPr>
           <a:xfrm>
-            <a:off x="3520440" y="1097280"/>
-            <a:ext cx="2743200" cy="4617720"/>
+            <a:off x="4480560" y="1143000"/>
+            <a:ext cx="3200400" cy="4526280"/>
           </a:xfrm>
           <a:prstGeom prst="roundRect">
             <a:avLst/>
@@ -10184,7 +9390,7 @@
               </a:defRPr>
             </a:pPr>
             <a:r>
-              <a:t>Basis and brokerage</a:t>
+              <a:t>Script relationship</a:t>
             </a:r>
           </a:p>
           <a:p>
@@ -10200,7 +9406,7 @@
               </a:defRPr>
             </a:pPr>
             <a:r>
-              <a:t>Non-IDGT basis steps up to value at passing.</a:t>
+              <a:t>formulasPage.js remains independent.</a:t>
             </a:r>
           </a:p>
           <a:p>
@@ -10216,7 +9422,7 @@
               </a:defRPr>
             </a:pPr>
             <a:r>
-              <a:t>Thereafter basis erodes with inflation while value grows.</a:t>
+              <a:t>mdPage.js loads before notesPage.js and usagePage.js.</a:t>
             </a:r>
           </a:p>
           <a:p>
@@ -10232,7 +9438,7 @@
               </a:defRPr>
             </a:pPr>
             <a:r>
-              <a:t>Stretch-year unrealized gain is growth since passing.</a:t>
+              <a:t>notesPage.js and usagePage.js are thin adapters.</a:t>
             </a:r>
           </a:p>
           <a:p>
@@ -10248,7 +9454,7 @@
               </a:defRPr>
             </a:pPr>
             <a:r>
-              <a:t>Cost-basis line can show this relationship.</a:t>
+              <a:t>app.js remains last.</a:t>
             </a:r>
           </a:p>
         </p:txBody>
@@ -10261,8 +9467,8 @@
         </p:nvSpPr>
         <p:spPr>
           <a:xfrm>
-            <a:off x="3520440" y="1097280"/>
-            <a:ext cx="82296" cy="4617720"/>
+            <a:off x="4480560" y="1143000"/>
+            <a:ext cx="82296" cy="4526280"/>
           </a:xfrm>
           <a:prstGeom prst="rect">
             <a:avLst/>
@@ -10304,154 +9510,8 @@
         </p:nvSpPr>
         <p:spPr>
           <a:xfrm>
-            <a:off x="6537960" y="1097280"/>
-            <a:ext cx="2423160" cy="4617720"/>
-          </a:xfrm>
-          <a:prstGeom prst="roundRect">
-            <a:avLst/>
-          </a:prstGeom>
-          <a:solidFill>
-            <a:srgbClr val="E9F4FF"/>
-          </a:solidFill>
-          <a:ln w="13970">
-            <a:solidFill>
-              <a:srgbClr val="266EB2"/>
-            </a:solidFill>
-          </a:ln>
-        </p:spPr>
-        <p:style>
-          <a:lnRef idx="1">
-            <a:schemeClr val="accent1"/>
-          </a:lnRef>
-          <a:fillRef idx="3">
-            <a:schemeClr val="accent1"/>
-          </a:fillRef>
-          <a:effectRef idx="2">
-            <a:schemeClr val="accent1"/>
-          </a:effectRef>
-          <a:fontRef idx="minor">
-            <a:schemeClr val="lt1"/>
-          </a:fontRef>
-        </p:style>
-        <p:txBody>
-          <a:bodyPr rtlCol="0" anchor="ctr" lIns="182880" rIns="100584" tIns="91440"/>
-          <a:lstStyle/>
-          <a:p>
-            <a:pPr algn="ctr">
-              <a:defRPr sz="1700" b="1">
-                <a:solidFill>
-                  <a:srgbClr val="232D37"/>
-                </a:solidFill>
-                <a:latin typeface="Aptos Display"/>
-              </a:defRPr>
-            </a:pPr>
-            <a:r>
-              <a:t>Devalue pair 1</a:t>
-            </a:r>
-          </a:p>
-          <a:p>
-            <a:pPr>
-              <a:spcBef>
-                <a:spcPts val="300"/>
-              </a:spcBef>
-              <a:defRPr sz="1200">
-                <a:solidFill>
-                  <a:srgbClr val="232D37"/>
-                </a:solidFill>
-                <a:latin typeface="Aptos"/>
-              </a:defRPr>
-            </a:pPr>
-            <a:r>
-              <a:t>Before last passing</a:t>
-            </a:r>
-          </a:p>
-          <a:p>
-            <a:pPr>
-              <a:spcBef>
-                <a:spcPts val="300"/>
-              </a:spcBef>
-              <a:defRPr sz="1200">
-                <a:solidFill>
-                  <a:srgbClr val="232D37"/>
-                </a:solidFill>
-                <a:latin typeface="Aptos"/>
-              </a:defRPr>
-            </a:pPr>
-            <a:r>
-              <a:t>Default: 10% LTCG gain haircut; 10% pre-tax IRA haircut</a:t>
-            </a:r>
-          </a:p>
-          <a:p>
-            <a:pPr>
-              <a:spcBef>
-                <a:spcPts val="300"/>
-              </a:spcBef>
-              <a:defRPr sz="1200">
-                <a:solidFill>
-                  <a:srgbClr val="232D37"/>
-                </a:solidFill>
-                <a:latin typeface="Aptos"/>
-              </a:defRPr>
-            </a:pPr>
-            <a:r>
-              <a:t>Saved display-only controls</a:t>
-            </a:r>
-          </a:p>
-        </p:txBody>
-      </p:sp>
-      <p:sp>
-        <p:nvSpPr>
-          <p:cNvPr id="9" name="Rectangle 8"/>
-          <p:cNvSpPr/>
-          <p:nvPr/>
-        </p:nvSpPr>
-        <p:spPr>
-          <a:xfrm>
-            <a:off x="6537960" y="1097280"/>
-            <a:ext cx="82296" cy="4617720"/>
-          </a:xfrm>
-          <a:prstGeom prst="rect">
-            <a:avLst/>
-          </a:prstGeom>
-          <a:solidFill>
-            <a:srgbClr val="266EB2"/>
-          </a:solidFill>
-          <a:ln>
-            <a:noFill/>
-          </a:ln>
-        </p:spPr>
-        <p:style>
-          <a:lnRef idx="1">
-            <a:schemeClr val="accent1"/>
-          </a:lnRef>
-          <a:fillRef idx="3">
-            <a:schemeClr val="accent1"/>
-          </a:fillRef>
-          <a:effectRef idx="2">
-            <a:schemeClr val="accent1"/>
-          </a:effectRef>
-          <a:fontRef idx="minor">
-            <a:schemeClr val="lt1"/>
-          </a:fontRef>
-        </p:style>
-        <p:txBody>
-          <a:bodyPr rtlCol="0" anchor="ctr"/>
-          <a:lstStyle/>
-          <a:p>
-            <a:pPr algn="ctr"/>
-          </a:p>
-        </p:txBody>
-      </p:sp>
-      <p:sp>
-        <p:nvSpPr>
-          <p:cNvPr id="10" name="Rounded Rectangle 9"/>
-          <p:cNvSpPr/>
-          <p:nvPr/>
-        </p:nvSpPr>
-        <p:spPr>
-          <a:xfrm>
-            <a:off x="9235440" y="1097280"/>
-            <a:ext cx="2423160" cy="4617720"/>
+            <a:off x="8366760" y="1143000"/>
+            <a:ext cx="3200400" cy="4526280"/>
           </a:xfrm>
           <a:prstGeom prst="roundRect">
             <a:avLst/>
@@ -10492,7 +9552,7 @@
               </a:defRPr>
             </a:pPr>
             <a:r>
-              <a:t>Devalue pair 2</a:t>
+              <a:t>Topbar order</a:t>
             </a:r>
           </a:p>
           <a:p>
@@ -10508,7 +9568,7 @@
               </a:defRPr>
             </a:pPr>
             <a:r>
-              <a:t>Heir years</a:t>
+              <a:t>Usage</a:t>
             </a:r>
           </a:p>
           <a:p>
@@ -10524,7 +9584,7 @@
               </a:defRPr>
             </a:pPr>
             <a:r>
-              <a:t>Default: 24% LTCG gain haircut; 40% pre-tax IRA haircut</a:t>
+              <a:t>Save to file</a:t>
             </a:r>
           </a:p>
           <a:p>
@@ -10540,21 +9600,101 @@
               </a:defRPr>
             </a:pPr>
             <a:r>
-              <a:t>Asset-band transformation only; no recompute</a:t>
-            </a:r>
-          </a:p>
-        </p:txBody>
-      </p:sp>
-      <p:sp>
-        <p:nvSpPr>
-          <p:cNvPr id="11" name="Rectangle 10"/>
+              <a:t>Load file ▾</a:t>
+            </a:r>
+          </a:p>
+          <a:p>
+            <a:pPr>
+              <a:spcBef>
+                <a:spcPts val="300"/>
+              </a:spcBef>
+              <a:defRPr sz="1200">
+                <a:solidFill>
+                  <a:srgbClr val="232D37"/>
+                </a:solidFill>
+                <a:latin typeface="Aptos"/>
+              </a:defRPr>
+            </a:pPr>
+            <a:r>
+              <a:t>Reset to defaults</a:t>
+            </a:r>
+          </a:p>
+          <a:p>
+            <a:pPr>
+              <a:spcBef>
+                <a:spcPts val="300"/>
+              </a:spcBef>
+              <a:defRPr sz="1200">
+                <a:solidFill>
+                  <a:srgbClr val="232D37"/>
+                </a:solidFill>
+                <a:latin typeface="Aptos"/>
+              </a:defRPr>
+            </a:pPr>
+            <a:r>
+              <a:t>Formulas</a:t>
+            </a:r>
+          </a:p>
+          <a:p>
+            <a:pPr>
+              <a:spcBef>
+                <a:spcPts val="300"/>
+              </a:spcBef>
+              <a:defRPr sz="1200">
+                <a:solidFill>
+                  <a:srgbClr val="232D37"/>
+                </a:solidFill>
+                <a:latin typeface="Aptos"/>
+              </a:defRPr>
+            </a:pPr>
+            <a:r>
+              <a:t>Notes</a:t>
+            </a:r>
+          </a:p>
+          <a:p>
+            <a:pPr>
+              <a:spcBef>
+                <a:spcPts val="300"/>
+              </a:spcBef>
+              <a:defRPr sz="1200">
+                <a:solidFill>
+                  <a:srgbClr val="232D37"/>
+                </a:solidFill>
+                <a:latin typeface="Aptos"/>
+              </a:defRPr>
+            </a:pPr>
+            <a:r>
+              <a:t>Export to Excel</a:t>
+            </a:r>
+          </a:p>
+          <a:p>
+            <a:pPr>
+              <a:spcBef>
+                <a:spcPts val="300"/>
+              </a:spcBef>
+              <a:defRPr sz="1200">
+                <a:solidFill>
+                  <a:srgbClr val="232D37"/>
+                </a:solidFill>
+                <a:latin typeface="Aptos"/>
+              </a:defRPr>
+            </a:pPr>
+            <a:r>
+              <a:t>show_details</a:t>
+            </a:r>
+          </a:p>
+        </p:txBody>
+      </p:sp>
+      <p:sp>
+        <p:nvSpPr>
+          <p:cNvPr id="9" name="Rectangle 8"/>
           <p:cNvSpPr/>
           <p:nvPr/>
         </p:nvSpPr>
         <p:spPr>
           <a:xfrm>
-            <a:off x="9235440" y="1097280"/>
-            <a:ext cx="82296" cy="4617720"/>
+            <a:off x="8366760" y="1143000"/>
+            <a:ext cx="82296" cy="4526280"/>
           </a:xfrm>
           <a:prstGeom prst="rect">
             <a:avLst/>
@@ -10590,7 +9730,7 @@
       </p:sp>
       <p:sp>
         <p:nvSpPr>
-          <p:cNvPr id="12" name="Rectangle 11"/>
+          <p:cNvPr id="10" name="Rectangle 9"/>
           <p:cNvSpPr/>
           <p:nvPr/>
         </p:nvSpPr>
@@ -10633,7 +9773,7 @@
       </p:sp>
       <p:sp>
         <p:nvSpPr>
-          <p:cNvPr id="13" name="TextBox 12"/>
+          <p:cNvPr id="11" name="TextBox 10"/>
           <p:cNvSpPr txBox="1"/>
           <p:nvPr/>
         </p:nvSpPr>
@@ -10662,7 +9802,7 @@
               </a:defRPr>
             </a:pPr>
             <a:r>
-              <a:t>Retirement Income Planner • Architecture overview • Rental, tax-exempt income, and legacy-value update</a:t>
+              <a:t>Retirement Income Planner • Architecture overview • Assumption controls and Markdown Usage update</a:t>
             </a:r>
           </a:p>
         </p:txBody>
@@ -10681,7 +9821,7 @@
     <p:bg>
       <p:bgPr>
         <a:solidFill>
-          <a:srgbClr val="FFFFFF"/>
+          <a:srgbClr val="F4F7FA"/>
         </a:solidFill>
         <a:effectLst/>
       </p:bgPr>
@@ -10724,7 +9864,7 @@
               </a:defRPr>
             </a:pPr>
             <a:r>
-              <a:t>Display changes are row-driven and interactive</a:t>
+              <a:t>Guardrails for further changes</a:t>
             </a:r>
           </a:p>
         </p:txBody>
@@ -10760,7 +9900,7 @@
               </a:defRPr>
             </a:pPr>
             <a:r>
-              <a:t>New outputs are presented in income, asset, expense, export, and chat views without relocating financial logic out of Compute.</a:t>
+              <a:t>The revised design reinforces four practices: explicit state semantics, compute gating, shared utilities, and safe content delivery.</a:t>
             </a:r>
           </a:p>
         </p:txBody>
@@ -10773,8 +9913,8 @@
         </p:nvSpPr>
         <p:spPr>
           <a:xfrm>
-            <a:off x="548640" y="1143000"/>
-            <a:ext cx="3337560" cy="4526280"/>
+            <a:off x="640080" y="1188720"/>
+            <a:ext cx="2606040" cy="4526280"/>
           </a:xfrm>
           <a:prstGeom prst="roundRect">
             <a:avLst/>
@@ -10815,7 +9955,7 @@
               </a:defRPr>
             </a:pPr>
             <a:r>
-              <a:t>Income and tax charts</a:t>
+              <a:t>State</a:t>
             </a:r>
           </a:p>
           <a:p>
@@ -10831,7 +9971,7 @@
               </a:defRPr>
             </a:pPr>
             <a:r>
-              <a:t>Income stack adds rental depreciation and tax-exempt income.</a:t>
+              <a:t>Place default values and migrations in state.js.</a:t>
             </a:r>
           </a:p>
           <a:p>
@@ -10847,7 +9987,7 @@
               </a:defRPr>
             </a:pPr>
             <a:r>
-              <a:t>Taxable-SS calculation captures tax-exempt income in provisional income.</a:t>
+              <a:t>Keep Enable and Hide independent.</a:t>
             </a:r>
           </a:p>
           <a:p>
@@ -10863,7 +10003,7 @@
               </a:defRPr>
             </a:pPr>
             <a:r>
-              <a:t>Tax tooltips use the applied deduction and tax details from rows.</a:t>
+              <a:t>Preserve values when behavior is disabled.</a:t>
             </a:r>
           </a:p>
         </p:txBody>
@@ -10876,7 +10016,7 @@
         </p:nvSpPr>
         <p:spPr>
           <a:xfrm>
-            <a:off x="548640" y="1143000"/>
+            <a:off x="640080" y="1188720"/>
             <a:ext cx="82296" cy="4526280"/>
           </a:xfrm>
           <a:prstGeom prst="rect">
@@ -10919,8 +10059,154 @@
         </p:nvSpPr>
         <p:spPr>
           <a:xfrm>
-            <a:off x="4416552" y="1143000"/>
-            <a:ext cx="3337560" cy="4526280"/>
+            <a:off x="3520440" y="1188720"/>
+            <a:ext cx="2606040" cy="4526280"/>
+          </a:xfrm>
+          <a:prstGeom prst="roundRect">
+            <a:avLst/>
+          </a:prstGeom>
+          <a:solidFill>
+            <a:srgbClr val="EAF9F4"/>
+          </a:solidFill>
+          <a:ln w="13970">
+            <a:solidFill>
+              <a:srgbClr val="429761"/>
+            </a:solidFill>
+          </a:ln>
+        </p:spPr>
+        <p:style>
+          <a:lnRef idx="1">
+            <a:schemeClr val="accent1"/>
+          </a:lnRef>
+          <a:fillRef idx="3">
+            <a:schemeClr val="accent1"/>
+          </a:fillRef>
+          <a:effectRef idx="2">
+            <a:schemeClr val="accent1"/>
+          </a:effectRef>
+          <a:fontRef idx="minor">
+            <a:schemeClr val="lt1"/>
+          </a:fontRef>
+        </p:style>
+        <p:txBody>
+          <a:bodyPr rtlCol="0" anchor="ctr" lIns="182880" rIns="100584" tIns="91440"/>
+          <a:lstStyle/>
+          <a:p>
+            <a:pPr algn="ctr">
+              <a:defRPr sz="1700" b="1">
+                <a:solidFill>
+                  <a:srgbClr val="232D37"/>
+                </a:solidFill>
+                <a:latin typeface="Aptos Display"/>
+              </a:defRPr>
+            </a:pPr>
+            <a:r>
+              <a:t>Compute</a:t>
+            </a:r>
+          </a:p>
+          <a:p>
+            <a:pPr>
+              <a:spcBef>
+                <a:spcPts val="300"/>
+              </a:spcBef>
+              <a:defRPr sz="1200">
+                <a:solidFill>
+                  <a:srgbClr val="232D37"/>
+                </a:solidFill>
+                <a:latin typeface="Aptos"/>
+              </a:defRPr>
+            </a:pPr>
+            <a:r>
+              <a:t>Treat enabled flags as financial gates.</a:t>
+            </a:r>
+          </a:p>
+          <a:p>
+            <a:pPr>
+              <a:spcBef>
+                <a:spcPts val="300"/>
+              </a:spcBef>
+              <a:defRPr sz="1200">
+                <a:solidFill>
+                  <a:srgbClr val="232D37"/>
+                </a:solidFill>
+                <a:latin typeface="Aptos"/>
+              </a:defRPr>
+            </a:pPr>
+            <a:r>
+              <a:t>Keep all annual finance inside projection.js.</a:t>
+            </a:r>
+          </a:p>
+          <a:p>
+            <a:pPr>
+              <a:spcBef>
+                <a:spcPts val="300"/>
+              </a:spcBef>
+              <a:defRPr sz="1200">
+                <a:solidFill>
+                  <a:srgbClr val="232D37"/>
+                </a:solidFill>
+                <a:latin typeface="Aptos"/>
+              </a:defRPr>
+            </a:pPr>
+            <a:r>
+              <a:t>Expose results through rows.</a:t>
+            </a:r>
+          </a:p>
+        </p:txBody>
+      </p:sp>
+      <p:sp>
+        <p:nvSpPr>
+          <p:cNvPr id="7" name="Rectangle 6"/>
+          <p:cNvSpPr/>
+          <p:nvPr/>
+        </p:nvSpPr>
+        <p:spPr>
+          <a:xfrm>
+            <a:off x="3520440" y="1188720"/>
+            <a:ext cx="82296" cy="4526280"/>
+          </a:xfrm>
+          <a:prstGeom prst="rect">
+            <a:avLst/>
+          </a:prstGeom>
+          <a:solidFill>
+            <a:srgbClr val="429761"/>
+          </a:solidFill>
+          <a:ln>
+            <a:noFill/>
+          </a:ln>
+        </p:spPr>
+        <p:style>
+          <a:lnRef idx="1">
+            <a:schemeClr val="accent1"/>
+          </a:lnRef>
+          <a:fillRef idx="3">
+            <a:schemeClr val="accent1"/>
+          </a:fillRef>
+          <a:effectRef idx="2">
+            <a:schemeClr val="accent1"/>
+          </a:effectRef>
+          <a:fontRef idx="minor">
+            <a:schemeClr val="lt1"/>
+          </a:fontRef>
+        </p:style>
+        <p:txBody>
+          <a:bodyPr rtlCol="0" anchor="ctr"/>
+          <a:lstStyle/>
+          <a:p>
+            <a:pPr algn="ctr"/>
+          </a:p>
+        </p:txBody>
+      </p:sp>
+      <p:sp>
+        <p:nvSpPr>
+          <p:cNvPr id="8" name="Rounded Rectangle 7"/>
+          <p:cNvSpPr/>
+          <p:nvPr/>
+        </p:nvSpPr>
+        <p:spPr>
+          <a:xfrm>
+            <a:off x="6400800" y="1188720"/>
+            <a:ext cx="2606040" cy="4526280"/>
           </a:xfrm>
           <a:prstGeom prst="roundRect">
             <a:avLst/>
@@ -10961,7 +10247,7 @@
               </a:defRPr>
             </a:pPr>
             <a:r>
-              <a:t>Asset chart</a:t>
+              <a:t>Display</a:t>
             </a:r>
           </a:p>
           <a:p>
@@ -10977,7 +10263,7 @@
               </a:defRPr>
             </a:pPr>
             <a:r>
-              <a:t>Adds brokerage cost-basis dashed line when meaningful.</a:t>
+              <a:t>Render presentation from state or rows as appropriate.</a:t>
             </a:r>
           </a:p>
           <a:p>
@@ -10993,7 +10279,7 @@
               </a:defRPr>
             </a:pPr>
             <a:r>
-              <a:t>Four saved devalue sliders distinguish real years and heir years.</a:t>
+              <a:t>Do not encode financial rules in charts.</a:t>
             </a:r>
           </a:p>
           <a:p>
@@ -11009,20 +10295,20 @@
               </a:defRPr>
             </a:pPr>
             <a:r>
-              <a:t>Tooltips disclose face value before devalue and reinvested excess.</a:t>
-            </a:r>
-          </a:p>
-        </p:txBody>
-      </p:sp>
-      <p:sp>
-        <p:nvSpPr>
-          <p:cNvPr id="7" name="Rectangle 6"/>
+              <a:t>Use shared rendering helpers before creating duplicates.</a:t>
+            </a:r>
+          </a:p>
+        </p:txBody>
+      </p:sp>
+      <p:sp>
+        <p:nvSpPr>
+          <p:cNvPr id="9" name="Rectangle 8"/>
           <p:cNvSpPr/>
           <p:nvPr/>
         </p:nvSpPr>
         <p:spPr>
           <a:xfrm>
-            <a:off x="4416552" y="1143000"/>
+            <a:off x="6400800" y="1188720"/>
             <a:ext cx="82296" cy="4526280"/>
           </a:xfrm>
           <a:prstGeom prst="rect">
@@ -11059,24 +10345,24 @@
       </p:sp>
       <p:sp>
         <p:nvSpPr>
-          <p:cNvPr id="8" name="Rounded Rectangle 7"/>
+          <p:cNvPr id="10" name="Rounded Rectangle 9"/>
           <p:cNvSpPr/>
           <p:nvPr/>
         </p:nvSpPr>
         <p:spPr>
           <a:xfrm>
-            <a:off x="8284464" y="1143000"/>
-            <a:ext cx="3337560" cy="4526280"/>
+            <a:off x="9281160" y="1188720"/>
+            <a:ext cx="2286000" cy="4526280"/>
           </a:xfrm>
           <a:prstGeom prst="roundRect">
             <a:avLst/>
           </a:prstGeom>
           <a:solidFill>
-            <a:srgbClr val="EAF9F4"/>
+            <a:srgbClr val="FFF6E8"/>
           </a:solidFill>
           <a:ln w="13970">
             <a:solidFill>
-              <a:srgbClr val="429761"/>
+              <a:srgbClr val="E5892A"/>
             </a:solidFill>
           </a:ln>
         </p:spPr>
@@ -11099,7 +10385,7 @@
           <a:lstStyle/>
           <a:p>
             <a:pPr algn="ctr">
-              <a:defRPr sz="1700" b="1">
+              <a:defRPr sz="1600" b="1">
                 <a:solidFill>
                   <a:srgbClr val="232D37"/>
                 </a:solidFill>
@@ -11107,7 +10393,7 @@
               </a:defRPr>
             </a:pPr>
             <a:r>
-              <a:t>Shared consumers</a:t>
+              <a:t>Content</a:t>
             </a:r>
           </a:p>
           <a:p>
@@ -11115,15 +10401,15 @@
               <a:spcBef>
                 <a:spcPts val="300"/>
               </a:spcBef>
-              <a:defRPr sz="1200">
-                <a:solidFill>
-                  <a:srgbClr val="232D37"/>
-                </a:solidFill>
-                <a:latin typeface="Aptos"/>
-              </a:defRPr>
-            </a:pPr>
-            <a:r>
-              <a:t>Expense chart shows excess reinvestment when material.</a:t>
+              <a:defRPr sz="1100">
+                <a:solidFill>
+                  <a:srgbClr val="232D37"/>
+                </a:solidFill>
+                <a:latin typeface="Aptos"/>
+              </a:defRPr>
+            </a:pPr>
+            <a:r>
+              <a:t>Use Markdown files for maintainable user docs.</a:t>
             </a:r>
           </a:p>
           <a:p>
@@ -11131,15 +10417,15 @@
               <a:spcBef>
                 <a:spcPts val="300"/>
               </a:spcBef>
-              <a:defRPr sz="1200">
-                <a:solidFill>
-                  <a:srgbClr val="232D37"/>
-                </a:solidFill>
-                <a:latin typeface="Aptos"/>
-              </a:defRPr>
-            </a:pPr>
-            <a:r>
-              <a:t>Excel adds rental, tax-exempt, senior-deduction, and legacy-tail fields.</a:t>
+              <a:defRPr sz="1100">
+                <a:solidFill>
+                  <a:srgbClr val="232D37"/>
+                </a:solidFill>
+                <a:latin typeface="Aptos"/>
+              </a:defRPr>
+            </a:pPr>
+            <a:r>
+              <a:t>Fetch on opening; explain file:// limitations.</a:t>
             </a:r>
           </a:p>
           <a:p>
@@ -11147,35 +10433,35 @@
               <a:spcBef>
                 <a:spcPts val="300"/>
               </a:spcBef>
-              <a:defRPr sz="1200">
-                <a:solidFill>
-                  <a:srgbClr val="232D37"/>
-                </a:solidFill>
-                <a:latin typeface="Aptos"/>
-              </a:defRPr>
-            </a:pPr>
-            <a:r>
-              <a:t>Chat snapshot expands only through explicit selected columns.</a:t>
-            </a:r>
-          </a:p>
-        </p:txBody>
-      </p:sp>
-      <p:sp>
-        <p:nvSpPr>
-          <p:cNvPr id="9" name="Rectangle 8"/>
+              <a:defRPr sz="1100">
+                <a:solidFill>
+                  <a:srgbClr val="232D37"/>
+                </a:solidFill>
+                <a:latin typeface="Aptos"/>
+              </a:defRPr>
+            </a:pPr>
+            <a:r>
+              <a:t>Keep privacy-sensitive chat data separate from plan files.</a:t>
+            </a:r>
+          </a:p>
+        </p:txBody>
+      </p:sp>
+      <p:sp>
+        <p:nvSpPr>
+          <p:cNvPr id="11" name="Rectangle 10"/>
           <p:cNvSpPr/>
           <p:nvPr/>
         </p:nvSpPr>
         <p:spPr>
           <a:xfrm>
-            <a:off x="8284464" y="1143000"/>
+            <a:off x="9281160" y="1188720"/>
             <a:ext cx="82296" cy="4526280"/>
           </a:xfrm>
           <a:prstGeom prst="rect">
             <a:avLst/>
           </a:prstGeom>
           <a:solidFill>
-            <a:srgbClr val="429761"/>
+            <a:srgbClr val="E5892A"/>
           </a:solidFill>
           <a:ln>
             <a:noFill/>
@@ -11205,7 +10491,7 @@
       </p:sp>
       <p:sp>
         <p:nvSpPr>
-          <p:cNvPr id="10" name="Rectangle 9"/>
+          <p:cNvPr id="12" name="Rectangle 11"/>
           <p:cNvSpPr/>
           <p:nvPr/>
         </p:nvSpPr>
@@ -11248,7 +10534,7 @@
       </p:sp>
       <p:sp>
         <p:nvSpPr>
-          <p:cNvPr id="11" name="TextBox 10"/>
+          <p:cNvPr id="13" name="TextBox 12"/>
           <p:cNvSpPr txBox="1"/>
           <p:nvPr/>
         </p:nvSpPr>
@@ -11277,7 +10563,7 @@
               </a:defRPr>
             </a:pPr>
             <a:r>
-              <a:t>Retirement Income Planner • Architecture overview • Rental, tax-exempt income, and legacy-value update</a:t>
+              <a:t>Retirement Income Planner • Architecture overview • Assumption controls and Markdown Usage update</a:t>
             </a:r>
           </a:p>
         </p:txBody>

--- a/docs/retirement_income_planner_architecture.pptx
+++ b/docs/retirement_income_planner_architecture.pptx
@@ -3214,7 +3214,7 @@
               </a:defRPr>
             </a:pPr>
             <a:r>
-              <a:t>Updated architecture: independently enabled assumptions, a shared Markdown viewer, and a dedicated Usage guide</a:t>
+              <a:t>Updated architecture: modeled annuity contracts, optional living-benefit riders, payout-tax treatment, and new reporting outputs</a:t>
             </a:r>
           </a:p>
         </p:txBody>
@@ -3285,7 +3285,7 @@
               </a:defRPr>
             </a:pPr>
             <a:r>
-              <a:t>Household &amp; assumption controls</a:t>
+              <a:t>Annuity sub-cards per person</a:t>
             </a:r>
           </a:p>
           <a:p>
@@ -3301,7 +3301,7 @@
               </a:defRPr>
             </a:pPr>
             <a:r>
-              <a:t>Enable / Hide state saved with plan</a:t>
+              <a:t>Contract, payout, rider, tax, survivor settings</a:t>
             </a:r>
           </a:p>
         </p:txBody>
@@ -3415,7 +3415,7 @@
               </a:defRPr>
             </a:pPr>
             <a:r>
-              <a:t>Projection consumes only enabled assumptions</a:t>
+              <a:t>simulateAnnuity runs contracts up front</a:t>
             </a:r>
           </a:p>
           <a:p>
@@ -3431,7 +3431,7 @@
               </a:defRPr>
             </a:pPr>
             <a:r>
-              <a:t>One annual derived-data contract</a:t>
+              <a:t>Projection consumes annual contract outputs</a:t>
             </a:r>
           </a:p>
         </p:txBody>
@@ -3545,7 +3545,7 @@
               </a:defRPr>
             </a:pPr>
             <a:r>
-              <a:t>Charts, Usage, Formulas, Notes, Export, Chat</a:t>
+              <a:t>Income/asset charts, Excel, formulas, chat</a:t>
             </a:r>
           </a:p>
           <a:p>
@@ -3561,7 +3561,7 @@
               </a:defRPr>
             </a:pPr>
             <a:r>
-              <a:t>Read-only projection consumers</a:t>
+              <a:t>Read annuity fields from projection rows</a:t>
             </a:r>
           </a:p>
         </p:txBody>
@@ -3746,7 +3746,7 @@
               </a:defRPr>
             </a:pPr>
             <a:r>
-              <a:t>projection</a:t>
+              <a:t>annuity rows</a:t>
             </a:r>
           </a:p>
         </p:txBody>
@@ -3801,7 +3801,7 @@
               </a:defRPr>
             </a:pPr>
             <a:r>
-              <a:t>New focus</a:t>
+              <a:t>Architectural fit</a:t>
             </a:r>
           </a:p>
           <a:p>
@@ -3817,7 +3817,7 @@
               </a:defRPr>
             </a:pPr>
             <a:r>
-              <a:t>Assumptions now follow the same Enable / Hide separation as income cards, while user documentation moves into reusable Markdown pages.</a:t>
+              <a:t>Annuity behavior is calculated in Compute, exposed as row fields, and consumed without financial recomputation by charts, export, formula reference, and chat.</a:t>
             </a:r>
           </a:p>
         </p:txBody>
@@ -3939,7 +3939,7 @@
               </a:defRPr>
             </a:pPr>
             <a:r>
-              <a:t>Retirement Income Planner • Architecture overview • Assumption controls and Markdown Usage update</a:t>
+              <a:t>Retirement Income Planner • Architecture overview • Annuity-model update</a:t>
             </a:r>
           </a:p>
         </p:txBody>
@@ -4037,7 +4037,7 @@
               </a:defRPr>
             </a:pPr>
             <a:r>
-              <a:t>The architecture adds independently controlled household-assumption cards and a shared system for rendering Usage and Notes documentation.</a:t>
+              <a:t>The planner adds an annuity asset and income model that supports multiple contracts per person and separates contract simulation from yearly household projection.</a:t>
             </a:r>
           </a:p>
         </p:txBody>
@@ -4050,8 +4050,8 @@
         </p:nvSpPr>
         <p:spPr>
           <a:xfrm>
-            <a:off x="594360" y="1234440"/>
-            <a:ext cx="3383280" cy="4480560"/>
+            <a:off x="548640" y="1234440"/>
+            <a:ext cx="3291840" cy="4480560"/>
           </a:xfrm>
           <a:prstGeom prst="roundRect">
             <a:avLst/>
@@ -4092,7 +4092,7 @@
               </a:defRPr>
             </a:pPr>
             <a:r>
-              <a:t>Assumption cards</a:t>
+              <a:t>Annuity input model</a:t>
             </a:r>
           </a:p>
           <a:p>
@@ -4108,7 +4108,7 @@
               </a:defRPr>
             </a:pPr>
             <a:r>
-              <a:t>SCGL</a:t>
+              <a:t>Multiple annuities per person</a:t>
             </a:r>
           </a:p>
           <a:p>
@@ -4124,7 +4124,7 @@
               </a:defRPr>
             </a:pPr>
             <a:r>
-              <a:t>AUM fee</a:t>
+              <a:t>Enable / Hide / Remove card controls</a:t>
             </a:r>
           </a:p>
           <a:p>
@@ -4140,7 +4140,7 @@
               </a:defRPr>
             </a:pPr>
             <a:r>
-              <a:t>Long Term Care</a:t>
+              <a:t>Value, premium, growth, fees</a:t>
             </a:r>
           </a:p>
           <a:p>
@@ -4156,7 +4156,7 @@
               </a:defRPr>
             </a:pPr>
             <a:r>
-              <a:t>Future tax threshold</a:t>
+              <a:t>Payout schedule and tax treatment</a:t>
             </a:r>
           </a:p>
           <a:p>
@@ -4172,7 +4172,7 @@
               </a:defRPr>
             </a:pPr>
             <a:r>
-              <a:t>Each now has Enable + Hide controls</a:t>
+              <a:t>Optional living-benefit rider</a:t>
             </a:r>
           </a:p>
         </p:txBody>
@@ -4185,7 +4185,7 @@
         </p:nvSpPr>
         <p:spPr>
           <a:xfrm>
-            <a:off x="594360" y="1234440"/>
+            <a:off x="548640" y="1234440"/>
             <a:ext cx="82296" cy="4480560"/>
           </a:xfrm>
           <a:prstGeom prst="rect">
@@ -4228,8 +4228,8 @@
         </p:nvSpPr>
         <p:spPr>
           <a:xfrm>
-            <a:off x="4407408" y="1234440"/>
-            <a:ext cx="3383280" cy="4480560"/>
+            <a:off x="4453128" y="1234440"/>
+            <a:ext cx="3291840" cy="4480560"/>
           </a:xfrm>
           <a:prstGeom prst="roundRect">
             <a:avLst/>
@@ -4270,7 +4270,7 @@
               </a:defRPr>
             </a:pPr>
             <a:r>
-              <a:t>State behavior</a:t>
+              <a:t>Compute model</a:t>
             </a:r>
           </a:p>
           <a:p>
@@ -4286,7 +4286,7 @@
               </a:defRPr>
             </a:pPr>
             <a:r>
-              <a:t>Enable flags determine whether Compute applies each item.</a:t>
+              <a:t>simulateAnnuity() runs once per contract up front</a:t>
             </a:r>
           </a:p>
           <a:p>
@@ -4302,7 +4302,7 @@
               </a:defRPr>
             </a:pPr>
             <a:r>
-              <a:t>Hide flags affect only visual collapse.</a:t>
+              <a:t>Account value and rider base evolve independently</a:t>
             </a:r>
           </a:p>
           <a:p>
@@ -4318,7 +4318,23 @@
               </a:defRPr>
             </a:pPr>
             <a:r>
-              <a:t>Values remain stored when an assumption is disabled.</a:t>
+              <a:t>Annual payout decomposes into taxable and tax-exempt cash</a:t>
+            </a:r>
+          </a:p>
+          <a:p>
+            <a:pPr>
+              <a:spcBef>
+                <a:spcPts val="300"/>
+              </a:spcBef>
+              <a:defRPr sz="1300">
+                <a:solidFill>
+                  <a:srgbClr val="232D37"/>
+                </a:solidFill>
+                <a:latin typeface="Aptos"/>
+              </a:defRPr>
+            </a:pPr>
+            <a:r>
+              <a:t>Insurer-paid amounts are distinguished</a:t>
             </a:r>
           </a:p>
         </p:txBody>
@@ -4331,7 +4347,7 @@
         </p:nvSpPr>
         <p:spPr>
           <a:xfrm>
-            <a:off x="4407408" y="1234440"/>
+            <a:off x="4453128" y="1234440"/>
             <a:ext cx="82296" cy="4480560"/>
           </a:xfrm>
           <a:prstGeom prst="rect">
@@ -4374,8 +4390,8 @@
         </p:nvSpPr>
         <p:spPr>
           <a:xfrm>
-            <a:off x="8220456" y="1234440"/>
-            <a:ext cx="3383280" cy="4480560"/>
+            <a:off x="8357616" y="1234440"/>
+            <a:ext cx="3291840" cy="4480560"/>
           </a:xfrm>
           <a:prstGeom prst="roundRect">
             <a:avLst/>
@@ -4416,7 +4432,7 @@
               </a:defRPr>
             </a:pPr>
             <a:r>
-              <a:t>Documentation pages</a:t>
+              <a:t>Consumer model</a:t>
             </a:r>
           </a:p>
           <a:p>
@@ -4432,7 +4448,7 @@
               </a:defRPr>
             </a:pPr>
             <a:r>
-              <a:t>Usage button added to the topbar.</a:t>
+              <a:t>Income chart receives taxable / tax-exempt payouts</a:t>
             </a:r>
           </a:p>
           <a:p>
@@ -4448,7 +4464,7 @@
               </a:defRPr>
             </a:pPr>
             <a:r>
-              <a:t>mdPage.js becomes the shared Markdown renderer.</a:t>
+              <a:t>Asset chart plots annuity balances</a:t>
             </a:r>
           </a:p>
           <a:p>
@@ -4464,7 +4480,23 @@
               </a:defRPr>
             </a:pPr>
             <a:r>
-              <a:t>Usage.md and Note4User.md update without app-code edits.</a:t>
+              <a:t>Excel adds summary columns and contract sheets</a:t>
+            </a:r>
+          </a:p>
+          <a:p>
+            <a:pPr>
+              <a:spcBef>
+                <a:spcPts val="300"/>
+              </a:spcBef>
+              <a:defRPr sz="1300">
+                <a:solidFill>
+                  <a:srgbClr val="232D37"/>
+                </a:solidFill>
+                <a:latin typeface="Aptos"/>
+              </a:defRPr>
+            </a:pPr>
+            <a:r>
+              <a:t>Chat snapshot and formulas gain annuity content</a:t>
             </a:r>
           </a:p>
         </p:txBody>
@@ -4477,7 +4509,7 @@
         </p:nvSpPr>
         <p:spPr>
           <a:xfrm>
-            <a:off x="8220456" y="1234440"/>
+            <a:off x="8357616" y="1234440"/>
             <a:ext cx="82296" cy="4480560"/>
           </a:xfrm>
           <a:prstGeom prst="rect">
@@ -4586,7 +4618,7 @@
               </a:defRPr>
             </a:pPr>
             <a:r>
-              <a:t>Retirement Income Planner • Architecture overview • Assumption controls and Markdown Usage update</a:t>
+              <a:t>Retirement Income Planner • Architecture overview • Annuity-model update</a:t>
             </a:r>
           </a:p>
         </p:txBody>
@@ -4648,7 +4680,7 @@
               </a:defRPr>
             </a:pPr>
             <a:r>
-              <a:t>Assumption cards: Enable controls computation; Hide controls layout</a:t>
+              <a:t>Annuity state and input-card structure</a:t>
             </a:r>
           </a:p>
         </p:txBody>
@@ -4684,7 +4716,7 @@
               </a:defRPr>
             </a:pPr>
             <a:r>
-              <a:t>The app applies the established card pattern to four household-level assumptions.</a:t>
+              <a:t>Each person can hold any number of independent annuity contracts, managed like brokerage portfolios and rental properties.</a:t>
             </a:r>
           </a:p>
         </p:txBody>
@@ -4697,154 +4729,8 @@
         </p:nvSpPr>
         <p:spPr>
           <a:xfrm>
-            <a:off x="502920" y="1234440"/>
-            <a:ext cx="2377440" cy="4434840"/>
-          </a:xfrm>
-          <a:prstGeom prst="roundRect">
-            <a:avLst/>
-          </a:prstGeom>
-          <a:solidFill>
-            <a:srgbClr val="EAF9F4"/>
-          </a:solidFill>
-          <a:ln w="13970">
-            <a:solidFill>
-              <a:srgbClr val="429761"/>
-            </a:solidFill>
-          </a:ln>
-        </p:spPr>
-        <p:style>
-          <a:lnRef idx="1">
-            <a:schemeClr val="accent1"/>
-          </a:lnRef>
-          <a:fillRef idx="3">
-            <a:schemeClr val="accent1"/>
-          </a:fillRef>
-          <a:effectRef idx="2">
-            <a:schemeClr val="accent1"/>
-          </a:effectRef>
-          <a:fontRef idx="minor">
-            <a:schemeClr val="lt1"/>
-          </a:fontRef>
-        </p:style>
-        <p:txBody>
-          <a:bodyPr rtlCol="0" anchor="ctr" lIns="182880" rIns="100584" tIns="91440"/>
-          <a:lstStyle/>
-          <a:p>
-            <a:pPr algn="ctr">
-              <a:defRPr sz="1700" b="1">
-                <a:solidFill>
-                  <a:srgbClr val="232D37"/>
-                </a:solidFill>
-                <a:latin typeface="Aptos Display"/>
-              </a:defRPr>
-            </a:pPr>
-            <a:r>
-              <a:t>Enable</a:t>
-            </a:r>
-          </a:p>
-          <a:p>
-            <a:pPr>
-              <a:spcBef>
-                <a:spcPts val="300"/>
-              </a:spcBef>
-              <a:defRPr sz="1200">
-                <a:solidFill>
-                  <a:srgbClr val="232D37"/>
-                </a:solidFill>
-                <a:latin typeface="Aptos"/>
-              </a:defRPr>
-            </a:pPr>
-            <a:r>
-              <a:t>State: scglEnabled, aumFee.enabled, ltc.enabled, futureTax.enabled</a:t>
-            </a:r>
-          </a:p>
-          <a:p>
-            <a:pPr>
-              <a:spcBef>
-                <a:spcPts val="300"/>
-              </a:spcBef>
-              <a:defRPr sz="1200">
-                <a:solidFill>
-                  <a:srgbClr val="232D37"/>
-                </a:solidFill>
-                <a:latin typeface="Aptos"/>
-              </a:defRPr>
-            </a:pPr>
-            <a:r>
-              <a:t>Compute includes the item only when enabled.</a:t>
-            </a:r>
-          </a:p>
-          <a:p>
-            <a:pPr>
-              <a:spcBef>
-                <a:spcPts val="300"/>
-              </a:spcBef>
-              <a:defRPr sz="1200">
-                <a:solidFill>
-                  <a:srgbClr val="232D37"/>
-                </a:solidFill>
-                <a:latin typeface="Aptos"/>
-              </a:defRPr>
-            </a:pPr>
-            <a:r>
-              <a:t>Turning off retains all configured values.</a:t>
-            </a:r>
-          </a:p>
-        </p:txBody>
-      </p:sp>
-      <p:sp>
-        <p:nvSpPr>
-          <p:cNvPr id="5" name="Rectangle 4"/>
-          <p:cNvSpPr/>
-          <p:nvPr/>
-        </p:nvSpPr>
-        <p:spPr>
-          <a:xfrm>
-            <a:off x="502920" y="1234440"/>
-            <a:ext cx="82296" cy="4434840"/>
-          </a:xfrm>
-          <a:prstGeom prst="rect">
-            <a:avLst/>
-          </a:prstGeom>
-          <a:solidFill>
-            <a:srgbClr val="429761"/>
-          </a:solidFill>
-          <a:ln>
-            <a:noFill/>
-          </a:ln>
-        </p:spPr>
-        <p:style>
-          <a:lnRef idx="1">
-            <a:schemeClr val="accent1"/>
-          </a:lnRef>
-          <a:fillRef idx="3">
-            <a:schemeClr val="accent1"/>
-          </a:fillRef>
-          <a:effectRef idx="2">
-            <a:schemeClr val="accent1"/>
-          </a:effectRef>
-          <a:fontRef idx="minor">
-            <a:schemeClr val="lt1"/>
-          </a:fontRef>
-        </p:style>
-        <p:txBody>
-          <a:bodyPr rtlCol="0" anchor="ctr"/>
-          <a:lstStyle/>
-          <a:p>
-            <a:pPr algn="ctr"/>
-          </a:p>
-        </p:txBody>
-      </p:sp>
-      <p:sp>
-        <p:nvSpPr>
-          <p:cNvPr id="6" name="Rounded Rectangle 5"/>
-          <p:cNvSpPr/>
-          <p:nvPr/>
-        </p:nvSpPr>
-        <p:spPr>
-          <a:xfrm>
-            <a:off x="3246120" y="1234440"/>
-            <a:ext cx="2377440" cy="4434840"/>
+            <a:off x="502920" y="1188720"/>
+            <a:ext cx="3337560" cy="4526280"/>
           </a:xfrm>
           <a:prstGeom prst="roundRect">
             <a:avLst/>
@@ -4885,7 +4771,7 @@
               </a:defRPr>
             </a:pPr>
             <a:r>
-              <a:t>Hide</a:t>
+              <a:t>Core contract fields</a:t>
             </a:r>
           </a:p>
           <a:p>
@@ -4901,7 +4787,7 @@
               </a:defRPr>
             </a:pPr>
             <a:r>
-              <a:t>State: ui.assumpHide.scgl|aum|ltc|future</a:t>
+              <a:t>Name</a:t>
             </a:r>
           </a:p>
           <a:p>
@@ -4917,7 +4803,7 @@
               </a:defRPr>
             </a:pPr>
             <a:r>
-              <a:t>Collapses only the body.</a:t>
+              <a:t>Value and optional premium</a:t>
             </a:r>
           </a:p>
           <a:p>
@@ -4933,7 +4819,7 @@
               </a:defRPr>
             </a:pPr>
             <a:r>
-              <a:t>All fields remain rendered and saved.</a:t>
+              <a:t>Growth spec and fee percentage</a:t>
             </a:r>
           </a:p>
           <a:p>
@@ -4949,21 +4835,53 @@
               </a:defRPr>
             </a:pPr>
             <a:r>
-              <a:t>Enable never changes Hide state.</a:t>
-            </a:r>
-          </a:p>
-        </p:txBody>
-      </p:sp>
-      <p:sp>
-        <p:nvSpPr>
-          <p:cNvPr id="7" name="Rectangle 6"/>
+              <a:t>Payout age range, amount, annual change</a:t>
+            </a:r>
+          </a:p>
+          <a:p>
+            <a:pPr>
+              <a:spcBef>
+                <a:spcPts val="300"/>
+              </a:spcBef>
+              <a:defRPr sz="1200">
+                <a:solidFill>
+                  <a:srgbClr val="232D37"/>
+                </a:solidFill>
+                <a:latin typeface="Aptos"/>
+              </a:defRPr>
+            </a:pPr>
+            <a:r>
+              <a:t>Tax method and exempt percentage</a:t>
+            </a:r>
+          </a:p>
+          <a:p>
+            <a:pPr>
+              <a:spcBef>
+                <a:spcPts val="300"/>
+              </a:spcBef>
+              <a:defRPr sz="1200">
+                <a:solidFill>
+                  <a:srgbClr val="232D37"/>
+                </a:solidFill>
+                <a:latin typeface="Aptos"/>
+              </a:defRPr>
+            </a:pPr>
+            <a:r>
+              <a:t>Survivor benefit</a:t>
+            </a:r>
+          </a:p>
+        </p:txBody>
+      </p:sp>
+      <p:sp>
+        <p:nvSpPr>
+          <p:cNvPr id="5" name="Rectangle 4"/>
           <p:cNvSpPr/>
           <p:nvPr/>
         </p:nvSpPr>
         <p:spPr>
           <a:xfrm>
-            <a:off x="3246120" y="1234440"/>
-            <a:ext cx="82296" cy="4434840"/>
+            <a:off x="502920" y="1188720"/>
+            <a:ext cx="82296" cy="4526280"/>
           </a:xfrm>
           <a:prstGeom prst="rect">
             <a:avLst/>
@@ -4999,14 +4917,192 @@
       </p:sp>
       <p:sp>
         <p:nvSpPr>
+          <p:cNvPr id="6" name="Rounded Rectangle 5"/>
+          <p:cNvSpPr/>
+          <p:nvPr/>
+        </p:nvSpPr>
+        <p:spPr>
+          <a:xfrm>
+            <a:off x="4407408" y="1188720"/>
+            <a:ext cx="3337560" cy="4526280"/>
+          </a:xfrm>
+          <a:prstGeom prst="roundRect">
+            <a:avLst/>
+          </a:prstGeom>
+          <a:solidFill>
+            <a:srgbClr val="FFF6E8"/>
+          </a:solidFill>
+          <a:ln w="13970">
+            <a:solidFill>
+              <a:srgbClr val="E5892A"/>
+            </a:solidFill>
+          </a:ln>
+        </p:spPr>
+        <p:style>
+          <a:lnRef idx="1">
+            <a:schemeClr val="accent1"/>
+          </a:lnRef>
+          <a:fillRef idx="3">
+            <a:schemeClr val="accent1"/>
+          </a:fillRef>
+          <a:effectRef idx="2">
+            <a:schemeClr val="accent1"/>
+          </a:effectRef>
+          <a:fontRef idx="minor">
+            <a:schemeClr val="lt1"/>
+          </a:fontRef>
+        </p:style>
+        <p:txBody>
+          <a:bodyPr rtlCol="0" anchor="ctr" lIns="182880" rIns="100584" tIns="91440"/>
+          <a:lstStyle/>
+          <a:p>
+            <a:pPr algn="ctr">
+              <a:defRPr sz="1700" b="1">
+                <a:solidFill>
+                  <a:srgbClr val="232D37"/>
+                </a:solidFill>
+                <a:latin typeface="Aptos Display"/>
+              </a:defRPr>
+            </a:pPr>
+            <a:r>
+              <a:t>Tax methods</a:t>
+            </a:r>
+          </a:p>
+          <a:p>
+            <a:pPr>
+              <a:spcBef>
+                <a:spcPts val="300"/>
+              </a:spcBef>
+              <a:defRPr sz="1200">
+                <a:solidFill>
+                  <a:srgbClr val="232D37"/>
+                </a:solidFill>
+                <a:latin typeface="Aptos"/>
+              </a:defRPr>
+            </a:pPr>
+            <a:r>
+              <a:t>LIFO — default</a:t>
+            </a:r>
+          </a:p>
+          <a:p>
+            <a:pPr>
+              <a:spcBef>
+                <a:spcPts val="300"/>
+              </a:spcBef>
+              <a:defRPr sz="1200">
+                <a:solidFill>
+                  <a:srgbClr val="232D37"/>
+                </a:solidFill>
+                <a:latin typeface="Aptos"/>
+              </a:defRPr>
+            </a:pPr>
+            <a:r>
+              <a:t>Exclusion ratio</a:t>
+            </a:r>
+          </a:p>
+          <a:p>
+            <a:pPr>
+              <a:spcBef>
+                <a:spcPts val="300"/>
+              </a:spcBef>
+              <a:defRPr sz="1200">
+                <a:solidFill>
+                  <a:srgbClr val="232D37"/>
+                </a:solidFill>
+                <a:latin typeface="Aptos"/>
+              </a:defRPr>
+            </a:pPr>
+            <a:r>
+              <a:t>Fully taxable</a:t>
+            </a:r>
+          </a:p>
+          <a:p>
+            <a:pPr>
+              <a:spcBef>
+                <a:spcPts val="300"/>
+              </a:spcBef>
+              <a:defRPr sz="1200">
+                <a:solidFill>
+                  <a:srgbClr val="232D37"/>
+                </a:solidFill>
+                <a:latin typeface="Aptos"/>
+              </a:defRPr>
+            </a:pPr>
+            <a:r>
+              <a:t>Tax exempt</a:t>
+            </a:r>
+          </a:p>
+          <a:p>
+            <a:pPr>
+              <a:spcBef>
+                <a:spcPts val="300"/>
+              </a:spcBef>
+              <a:defRPr sz="1200">
+                <a:solidFill>
+                  <a:srgbClr val="232D37"/>
+                </a:solidFill>
+                <a:latin typeface="Aptos"/>
+              </a:defRPr>
+            </a:pPr>
+            <a:r>
+              <a:t>Tax-free portion is separately tracked for cash, provisional income, and MAGI behavior.</a:t>
+            </a:r>
+          </a:p>
+        </p:txBody>
+      </p:sp>
+      <p:sp>
+        <p:nvSpPr>
+          <p:cNvPr id="7" name="Rectangle 6"/>
+          <p:cNvSpPr/>
+          <p:nvPr/>
+        </p:nvSpPr>
+        <p:spPr>
+          <a:xfrm>
+            <a:off x="4407408" y="1188720"/>
+            <a:ext cx="82296" cy="4526280"/>
+          </a:xfrm>
+          <a:prstGeom prst="rect">
+            <a:avLst/>
+          </a:prstGeom>
+          <a:solidFill>
+            <a:srgbClr val="E5892A"/>
+          </a:solidFill>
+          <a:ln>
+            <a:noFill/>
+          </a:ln>
+        </p:spPr>
+        <p:style>
+          <a:lnRef idx="1">
+            <a:schemeClr val="accent1"/>
+          </a:lnRef>
+          <a:fillRef idx="3">
+            <a:schemeClr val="accent1"/>
+          </a:fillRef>
+          <a:effectRef idx="2">
+            <a:schemeClr val="accent1"/>
+          </a:effectRef>
+          <a:fontRef idx="minor">
+            <a:schemeClr val="lt1"/>
+          </a:fontRef>
+        </p:style>
+        <p:txBody>
+          <a:bodyPr rtlCol="0" anchor="ctr"/>
+          <a:lstStyle/>
+          <a:p>
+            <a:pPr algn="ctr"/>
+          </a:p>
+        </p:txBody>
+      </p:sp>
+      <p:sp>
+        <p:nvSpPr>
           <p:cNvPr id="8" name="Rounded Rectangle 7"/>
           <p:cNvSpPr/>
           <p:nvPr/>
         </p:nvSpPr>
         <p:spPr>
           <a:xfrm>
-            <a:off x="5989320" y="1234440"/>
-            <a:ext cx="2377440" cy="4434840"/>
+            <a:off x="8311896" y="1188720"/>
+            <a:ext cx="3337560" cy="4526280"/>
           </a:xfrm>
           <a:prstGeom prst="roundRect">
             <a:avLst/>
@@ -5047,7 +5143,7 @@
               </a:defRPr>
             </a:pPr>
             <a:r>
-              <a:t>Rendering</a:t>
+              <a:t>Living-benefit rider</a:t>
             </a:r>
           </a:p>
           <a:p>
@@ -5063,7 +5159,7 @@
               </a:defRPr>
             </a:pPr>
             <a:r>
-              <a:t>assumpCard() supplies standard header behavior.</a:t>
+              <a:t>Rider enable flag</a:t>
             </a:r>
           </a:p>
           <a:p>
@@ -5079,7 +5175,7 @@
               </a:defRPr>
             </a:pPr>
             <a:r>
-              <a:t>syncAssumpEnable() greys SCGL/AUM inputs when disabled.</a:t>
+              <a:t>Optional rider base</a:t>
             </a:r>
           </a:p>
           <a:p>
@@ -5095,7 +5191,71 @@
               </a:defRPr>
             </a:pPr>
             <a:r>
-              <a:t>Body presence is not tied to enablement.</a:t>
+              <a:t>Rollup rate</a:t>
+            </a:r>
+          </a:p>
+          <a:p>
+            <a:pPr>
+              <a:spcBef>
+                <a:spcPts val="300"/>
+              </a:spcBef>
+              <a:defRPr sz="1200">
+                <a:solidFill>
+                  <a:srgbClr val="232D37"/>
+                </a:solidFill>
+                <a:latin typeface="Aptos"/>
+              </a:defRPr>
+            </a:pPr>
+            <a:r>
+              <a:t>Step-up option</a:t>
+            </a:r>
+          </a:p>
+          <a:p>
+            <a:pPr>
+              <a:spcBef>
+                <a:spcPts val="300"/>
+              </a:spcBef>
+              <a:defRPr sz="1200">
+                <a:solidFill>
+                  <a:srgbClr val="232D37"/>
+                </a:solidFill>
+                <a:latin typeface="Aptos"/>
+              </a:defRPr>
+            </a:pPr>
+            <a:r>
+              <a:t>Payout rate</a:t>
+            </a:r>
+          </a:p>
+          <a:p>
+            <a:pPr>
+              <a:spcBef>
+                <a:spcPts val="300"/>
+              </a:spcBef>
+              <a:defRPr sz="1200">
+                <a:solidFill>
+                  <a:srgbClr val="232D37"/>
+                </a:solidFill>
+                <a:latin typeface="Aptos"/>
+              </a:defRPr>
+            </a:pPr>
+            <a:r>
+              <a:t>Rider fee</a:t>
+            </a:r>
+          </a:p>
+          <a:p>
+            <a:pPr>
+              <a:spcBef>
+                <a:spcPts val="300"/>
+              </a:spcBef>
+              <a:defRPr sz="1200">
+                <a:solidFill>
+                  <a:srgbClr val="232D37"/>
+                </a:solidFill>
+                <a:latin typeface="Aptos"/>
+              </a:defRPr>
+            </a:pPr>
+            <a:r>
+              <a:t>Standard payout fields hide while rider is active.</a:t>
             </a:r>
           </a:p>
         </p:txBody>
@@ -5108,8 +5268,8 @@
         </p:nvSpPr>
         <p:spPr>
           <a:xfrm>
-            <a:off x="5989320" y="1234440"/>
-            <a:ext cx="82296" cy="4434840"/>
+            <a:off x="8311896" y="1188720"/>
+            <a:ext cx="82296" cy="4526280"/>
           </a:xfrm>
           <a:prstGeom prst="rect">
             <a:avLst/>
@@ -5145,188 +5305,7 @@
       </p:sp>
       <p:sp>
         <p:nvSpPr>
-          <p:cNvPr id="10" name="Rounded Rectangle 9"/>
-          <p:cNvSpPr/>
-          <p:nvPr/>
-        </p:nvSpPr>
-        <p:spPr>
-          <a:xfrm>
-            <a:off x="8732520" y="1234440"/>
-            <a:ext cx="2514600" cy="4434840"/>
-          </a:xfrm>
-          <a:prstGeom prst="roundRect">
-            <a:avLst/>
-          </a:prstGeom>
-          <a:solidFill>
-            <a:srgbClr val="FFF6E8"/>
-          </a:solidFill>
-          <a:ln w="13970">
-            <a:solidFill>
-              <a:srgbClr val="E5892A"/>
-            </a:solidFill>
-          </a:ln>
-        </p:spPr>
-        <p:style>
-          <a:lnRef idx="1">
-            <a:schemeClr val="accent1"/>
-          </a:lnRef>
-          <a:fillRef idx="3">
-            <a:schemeClr val="accent1"/>
-          </a:fillRef>
-          <a:effectRef idx="2">
-            <a:schemeClr val="accent1"/>
-          </a:effectRef>
-          <a:fontRef idx="minor">
-            <a:schemeClr val="lt1"/>
-          </a:fontRef>
-        </p:style>
-        <p:txBody>
-          <a:bodyPr rtlCol="0" anchor="ctr" lIns="182880" rIns="100584" tIns="91440"/>
-          <a:lstStyle/>
-          <a:p>
-            <a:pPr algn="ctr">
-              <a:defRPr sz="1700" b="1">
-                <a:solidFill>
-                  <a:srgbClr val="232D37"/>
-                </a:solidFill>
-                <a:latin typeface="Aptos Display"/>
-              </a:defRPr>
-            </a:pPr>
-            <a:r>
-              <a:t>Defaults &amp; legacy</a:t>
-            </a:r>
-          </a:p>
-          <a:p>
-            <a:pPr>
-              <a:spcBef>
-                <a:spcPts val="300"/>
-              </a:spcBef>
-              <a:defRPr sz="1200">
-                <a:solidFill>
-                  <a:srgbClr val="232D37"/>
-                </a:solidFill>
-                <a:latin typeface="Aptos"/>
-              </a:defRPr>
-            </a:pPr>
-            <a:r>
-              <a:t>LTC and Future Tax start hidden.</a:t>
-            </a:r>
-          </a:p>
-          <a:p>
-            <a:pPr>
-              <a:spcBef>
-                <a:spcPts val="300"/>
-              </a:spcBef>
-              <a:defRPr sz="1200">
-                <a:solidFill>
-                  <a:srgbClr val="232D37"/>
-                </a:solidFill>
-                <a:latin typeface="Aptos"/>
-              </a:defRPr>
-            </a:pPr>
-            <a:r>
-              <a:t>Old saves without flags default as enabled.</a:t>
-            </a:r>
-          </a:p>
-          <a:p>
-            <a:pPr>
-              <a:spcBef>
-                <a:spcPts val="300"/>
-              </a:spcBef>
-              <a:defRPr sz="1200">
-                <a:solidFill>
-                  <a:srgbClr val="232D37"/>
-                </a:solidFill>
-                <a:latin typeface="Aptos"/>
-              </a:defRPr>
-            </a:pPr>
-            <a:r>
-              <a:t>Old saves without assumpHide open LTC/Future only if enabled.</a:t>
-            </a:r>
-          </a:p>
-        </p:txBody>
-      </p:sp>
-      <p:sp>
-        <p:nvSpPr>
-          <p:cNvPr id="11" name="Rectangle 10"/>
-          <p:cNvSpPr/>
-          <p:nvPr/>
-        </p:nvSpPr>
-        <p:spPr>
-          <a:xfrm>
-            <a:off x="8732520" y="1234440"/>
-            <a:ext cx="82296" cy="4434840"/>
-          </a:xfrm>
-          <a:prstGeom prst="rect">
-            <a:avLst/>
-          </a:prstGeom>
-          <a:solidFill>
-            <a:srgbClr val="E5892A"/>
-          </a:solidFill>
-          <a:ln>
-            <a:noFill/>
-          </a:ln>
-        </p:spPr>
-        <p:style>
-          <a:lnRef idx="1">
-            <a:schemeClr val="accent1"/>
-          </a:lnRef>
-          <a:fillRef idx="3">
-            <a:schemeClr val="accent1"/>
-          </a:fillRef>
-          <a:effectRef idx="2">
-            <a:schemeClr val="accent1"/>
-          </a:effectRef>
-          <a:fontRef idx="minor">
-            <a:schemeClr val="lt1"/>
-          </a:fontRef>
-        </p:style>
-        <p:txBody>
-          <a:bodyPr rtlCol="0" anchor="ctr"/>
-          <a:lstStyle/>
-          <a:p>
-            <a:pPr algn="ctr"/>
-          </a:p>
-        </p:txBody>
-      </p:sp>
-      <p:cxnSp>
-        <p:nvCxnSpPr>
-          <p:cNvPr id="12" name="Connector 11"/>
-          <p:cNvCxnSpPr/>
-          <p:nvPr/>
-        </p:nvCxnSpPr>
-        <p:spPr>
-          <a:xfrm>
-            <a:off x="2926080" y="3429000"/>
-            <a:ext cx="228600" cy="0"/>
-          </a:xfrm>
-          <a:prstGeom prst="line">
-            <a:avLst/>
-          </a:prstGeom>
-          <a:ln w="22860">
-            <a:solidFill>
-              <a:srgbClr val="429761"/>
-            </a:solidFill>
-          </a:ln>
-        </p:spPr>
-        <p:style>
-          <a:lnRef idx="2">
-            <a:schemeClr val="accent1"/>
-          </a:lnRef>
-          <a:fillRef idx="0">
-            <a:schemeClr val="accent1"/>
-          </a:fillRef>
-          <a:effectRef idx="1">
-            <a:schemeClr val="accent1"/>
-          </a:effectRef>
-          <a:fontRef idx="minor">
-            <a:schemeClr val="tx1"/>
-          </a:fontRef>
-        </p:style>
-      </p:cxnSp>
-      <p:sp>
-        <p:nvSpPr>
-          <p:cNvPr id="13" name="Rectangle 12"/>
+          <p:cNvPr id="10" name="Rectangle 9"/>
           <p:cNvSpPr/>
           <p:nvPr/>
         </p:nvSpPr>
@@ -5369,7 +5348,7 @@
       </p:sp>
       <p:sp>
         <p:nvSpPr>
-          <p:cNvPr id="14" name="TextBox 13"/>
+          <p:cNvPr id="11" name="TextBox 10"/>
           <p:cNvSpPr txBox="1"/>
           <p:nvPr/>
         </p:nvSpPr>
@@ -5398,235 +5377,7 @@
               </a:defRPr>
             </a:pPr>
             <a:r>
-              <a:t>Retirement Income Planner • Architecture overview • Assumption controls and Markdown Usage update</a:t>
-            </a:r>
-          </a:p>
-        </p:txBody>
-      </p:sp>
-      <p:cxnSp>
-        <p:nvCxnSpPr>
-          <p:cNvPr id="15" name="Connector 14"/>
-          <p:cNvCxnSpPr/>
-          <p:nvPr/>
-        </p:nvCxnSpPr>
-        <p:spPr>
-          <a:xfrm>
-            <a:off x="5669280" y="3429000"/>
-            <a:ext cx="228600" cy="0"/>
-          </a:xfrm>
-          <a:prstGeom prst="line">
-            <a:avLst/>
-          </a:prstGeom>
-          <a:ln w="22860">
-            <a:solidFill>
-              <a:srgbClr val="266EB2"/>
-            </a:solidFill>
-          </a:ln>
-        </p:spPr>
-        <p:style>
-          <a:lnRef idx="2">
-            <a:schemeClr val="accent1"/>
-          </a:lnRef>
-          <a:fillRef idx="0">
-            <a:schemeClr val="accent1"/>
-          </a:fillRef>
-          <a:effectRef idx="1">
-            <a:schemeClr val="accent1"/>
-          </a:effectRef>
-          <a:fontRef idx="minor">
-            <a:schemeClr val="tx1"/>
-          </a:fontRef>
-        </p:style>
-      </p:cxnSp>
-      <p:sp>
-        <p:nvSpPr>
-          <p:cNvPr id="16" name="Rectangle 15"/>
-          <p:cNvSpPr/>
-          <p:nvPr/>
-        </p:nvSpPr>
-        <p:spPr>
-          <a:xfrm>
-            <a:off x="502920" y="6473952"/>
-            <a:ext cx="11183112" cy="13716"/>
-          </a:xfrm>
-          <a:prstGeom prst="rect">
-            <a:avLst/>
-          </a:prstGeom>
-          <a:solidFill>
-            <a:srgbClr val="D2DCE5"/>
-          </a:solidFill>
-          <a:ln>
-            <a:noFill/>
-          </a:ln>
-        </p:spPr>
-        <p:style>
-          <a:lnRef idx="1">
-            <a:schemeClr val="accent1"/>
-          </a:lnRef>
-          <a:fillRef idx="3">
-            <a:schemeClr val="accent1"/>
-          </a:fillRef>
-          <a:effectRef idx="2">
-            <a:schemeClr val="accent1"/>
-          </a:effectRef>
-          <a:fontRef idx="minor">
-            <a:schemeClr val="lt1"/>
-          </a:fontRef>
-        </p:style>
-        <p:txBody>
-          <a:bodyPr rtlCol="0" anchor="ctr"/>
-          <a:lstStyle/>
-          <a:p>
-            <a:pPr algn="ctr"/>
-          </a:p>
-        </p:txBody>
-      </p:sp>
-      <p:sp>
-        <p:nvSpPr>
-          <p:cNvPr id="17" name="TextBox 16"/>
-          <p:cNvSpPr txBox="1"/>
-          <p:nvPr/>
-        </p:nvSpPr>
-        <p:spPr>
-          <a:xfrm>
-            <a:off x="530352" y="6510528"/>
-            <a:ext cx="10881360" cy="146304"/>
-          </a:xfrm>
-          <a:prstGeom prst="rect">
-            <a:avLst/>
-          </a:prstGeom>
-          <a:noFill/>
-        </p:spPr>
-        <p:txBody>
-          <a:bodyPr wrap="none" anchor="ctr">
-            <a:spAutoFit/>
-          </a:bodyPr>
-          <a:lstStyle/>
-          <a:p>
-            <a:pPr algn="l">
-              <a:defRPr sz="850" b="0">
-                <a:solidFill>
-                  <a:srgbClr val="5D6C7A"/>
-                </a:solidFill>
-                <a:latin typeface="Aptos"/>
-              </a:defRPr>
-            </a:pPr>
-            <a:r>
-              <a:t>Retirement Income Planner • Architecture overview • Assumption controls and Markdown Usage update</a:t>
-            </a:r>
-          </a:p>
-        </p:txBody>
-      </p:sp>
-      <p:cxnSp>
-        <p:nvCxnSpPr>
-          <p:cNvPr id="18" name="Connector 17"/>
-          <p:cNvCxnSpPr/>
-          <p:nvPr/>
-        </p:nvCxnSpPr>
-        <p:spPr>
-          <a:xfrm>
-            <a:off x="8412480" y="3429000"/>
-            <a:ext cx="228600" cy="0"/>
-          </a:xfrm>
-          <a:prstGeom prst="line">
-            <a:avLst/>
-          </a:prstGeom>
-          <a:ln w="22860">
-            <a:solidFill>
-              <a:srgbClr val="7852B0"/>
-            </a:solidFill>
-          </a:ln>
-        </p:spPr>
-        <p:style>
-          <a:lnRef idx="2">
-            <a:schemeClr val="accent1"/>
-          </a:lnRef>
-          <a:fillRef idx="0">
-            <a:schemeClr val="accent1"/>
-          </a:fillRef>
-          <a:effectRef idx="1">
-            <a:schemeClr val="accent1"/>
-          </a:effectRef>
-          <a:fontRef idx="minor">
-            <a:schemeClr val="tx1"/>
-          </a:fontRef>
-        </p:style>
-      </p:cxnSp>
-      <p:sp>
-        <p:nvSpPr>
-          <p:cNvPr id="19" name="Rectangle 18"/>
-          <p:cNvSpPr/>
-          <p:nvPr/>
-        </p:nvSpPr>
-        <p:spPr>
-          <a:xfrm>
-            <a:off x="502920" y="6473952"/>
-            <a:ext cx="11183112" cy="13716"/>
-          </a:xfrm>
-          <a:prstGeom prst="rect">
-            <a:avLst/>
-          </a:prstGeom>
-          <a:solidFill>
-            <a:srgbClr val="D2DCE5"/>
-          </a:solidFill>
-          <a:ln>
-            <a:noFill/>
-          </a:ln>
-        </p:spPr>
-        <p:style>
-          <a:lnRef idx="1">
-            <a:schemeClr val="accent1"/>
-          </a:lnRef>
-          <a:fillRef idx="3">
-            <a:schemeClr val="accent1"/>
-          </a:fillRef>
-          <a:effectRef idx="2">
-            <a:schemeClr val="accent1"/>
-          </a:effectRef>
-          <a:fontRef idx="minor">
-            <a:schemeClr val="lt1"/>
-          </a:fontRef>
-        </p:style>
-        <p:txBody>
-          <a:bodyPr rtlCol="0" anchor="ctr"/>
-          <a:lstStyle/>
-          <a:p>
-            <a:pPr algn="ctr"/>
-          </a:p>
-        </p:txBody>
-      </p:sp>
-      <p:sp>
-        <p:nvSpPr>
-          <p:cNvPr id="20" name="TextBox 19"/>
-          <p:cNvSpPr txBox="1"/>
-          <p:nvPr/>
-        </p:nvSpPr>
-        <p:spPr>
-          <a:xfrm>
-            <a:off x="530352" y="6510528"/>
-            <a:ext cx="10881360" cy="146304"/>
-          </a:xfrm>
-          <a:prstGeom prst="rect">
-            <a:avLst/>
-          </a:prstGeom>
-          <a:noFill/>
-        </p:spPr>
-        <p:txBody>
-          <a:bodyPr wrap="none" anchor="ctr">
-            <a:spAutoFit/>
-          </a:bodyPr>
-          <a:lstStyle/>
-          <a:p>
-            <a:pPr algn="l">
-              <a:defRPr sz="850" b="0">
-                <a:solidFill>
-                  <a:srgbClr val="5D6C7A"/>
-                </a:solidFill>
-                <a:latin typeface="Aptos"/>
-              </a:defRPr>
-            </a:pPr>
-            <a:r>
-              <a:t>Retirement Income Planner • Architecture overview • Assumption controls and Markdown Usage update</a:t>
+              <a:t>Retirement Income Planner • Architecture overview • Annuity-model update</a:t>
             </a:r>
           </a:p>
         </p:txBody>
@@ -5688,7 +5439,7 @@
               </a:defRPr>
             </a:pPr>
             <a:r>
-              <a:t>Assumption-state flow</a:t>
+              <a:t>Two-phase annuity computation</a:t>
             </a:r>
           </a:p>
         </p:txBody>
@@ -5724,7 +5475,7 @@
               </a:defRPr>
             </a:pPr>
             <a:r>
-              <a:t>The new flags enter the same persistence and recomputation flow as the rest of the plan.</a:t>
+              <a:t>Contract simulation is separated from the household projection so annuity-specific mechanics remain isolated and testable.</a:t>
             </a:r>
           </a:p>
         </p:txBody>
@@ -5737,8 +5488,8 @@
         </p:nvSpPr>
         <p:spPr>
           <a:xfrm>
-            <a:off x="502920" y="1234440"/>
-            <a:ext cx="2057400" cy="1280160"/>
+            <a:off x="548640" y="1280160"/>
+            <a:ext cx="2331720" cy="1371600"/>
           </a:xfrm>
           <a:prstGeom prst="roundRect">
             <a:avLst/>
@@ -5779,7 +5530,7 @@
               </a:defRPr>
             </a:pPr>
             <a:r>
-              <a:t>User action</a:t>
+              <a:t>1. State contract</a:t>
             </a:r>
           </a:p>
           <a:p>
@@ -5795,7 +5546,7 @@
               </a:defRPr>
             </a:pPr>
             <a:r>
-              <a:t>Enable / Hide checkbox</a:t>
+              <a:t>person.annuities[]</a:t>
             </a:r>
           </a:p>
           <a:p>
@@ -5811,7 +5562,7 @@
               </a:defRPr>
             </a:pPr>
             <a:r>
-              <a:t>Edit value</a:t>
+              <a:t>Inputs describe each contract</a:t>
             </a:r>
           </a:p>
         </p:txBody>
@@ -5824,8 +5575,8 @@
         </p:nvSpPr>
         <p:spPr>
           <a:xfrm>
-            <a:off x="502920" y="1234440"/>
-            <a:ext cx="82296" cy="1280160"/>
+            <a:off x="548640" y="1280160"/>
+            <a:ext cx="82296" cy="1371600"/>
           </a:xfrm>
           <a:prstGeom prst="rect">
             <a:avLst/>
@@ -5867,8 +5618,471 @@
         </p:nvSpPr>
         <p:spPr>
           <a:xfrm>
-            <a:off x="2907792" y="1234440"/>
-            <a:ext cx="2057400" cy="1280160"/>
+            <a:off x="3337560" y="1280160"/>
+            <a:ext cx="2331720" cy="1371600"/>
+          </a:xfrm>
+          <a:prstGeom prst="roundRect">
+            <a:avLst/>
+          </a:prstGeom>
+          <a:solidFill>
+            <a:srgbClr val="EAF9F4"/>
+          </a:solidFill>
+          <a:ln w="13970">
+            <a:solidFill>
+              <a:srgbClr val="429761"/>
+            </a:solidFill>
+          </a:ln>
+        </p:spPr>
+        <p:style>
+          <a:lnRef idx="1">
+            <a:schemeClr val="accent1"/>
+          </a:lnRef>
+          <a:fillRef idx="3">
+            <a:schemeClr val="accent1"/>
+          </a:fillRef>
+          <a:effectRef idx="2">
+            <a:schemeClr val="accent1"/>
+          </a:effectRef>
+          <a:fontRef idx="minor">
+            <a:schemeClr val="lt1"/>
+          </a:fontRef>
+        </p:style>
+        <p:txBody>
+          <a:bodyPr rtlCol="0" anchor="ctr" lIns="182880" rIns="100584" tIns="91440"/>
+          <a:lstStyle/>
+          <a:p>
+            <a:pPr algn="ctr">
+              <a:defRPr sz="1600" b="1">
+                <a:solidFill>
+                  <a:srgbClr val="232D37"/>
+                </a:solidFill>
+                <a:latin typeface="Aptos Display"/>
+              </a:defRPr>
+            </a:pPr>
+            <a:r>
+              <a:t>2. simulateAnnuity</a:t>
+            </a:r>
+          </a:p>
+          <a:p>
+            <a:pPr>
+              <a:spcBef>
+                <a:spcPts val="300"/>
+              </a:spcBef>
+              <a:defRPr sz="1100">
+                <a:solidFill>
+                  <a:srgbClr val="232D37"/>
+                </a:solidFill>
+                <a:latin typeface="Aptos"/>
+              </a:defRPr>
+            </a:pPr>
+            <a:r>
+              <a:t>Runs once per annuity before annual household loop</a:t>
+            </a:r>
+          </a:p>
+          <a:p>
+            <a:pPr>
+              <a:spcBef>
+                <a:spcPts val="300"/>
+              </a:spcBef>
+              <a:defRPr sz="1100">
+                <a:solidFill>
+                  <a:srgbClr val="232D37"/>
+                </a:solidFill>
+                <a:latin typeface="Aptos"/>
+              </a:defRPr>
+            </a:pPr>
+            <a:r>
+              <a:t>No tax dependency</a:t>
+            </a:r>
+          </a:p>
+        </p:txBody>
+      </p:sp>
+      <p:sp>
+        <p:nvSpPr>
+          <p:cNvPr id="7" name="Rectangle 6"/>
+          <p:cNvSpPr/>
+          <p:nvPr/>
+        </p:nvSpPr>
+        <p:spPr>
+          <a:xfrm>
+            <a:off x="3337560" y="1280160"/>
+            <a:ext cx="82296" cy="1371600"/>
+          </a:xfrm>
+          <a:prstGeom prst="rect">
+            <a:avLst/>
+          </a:prstGeom>
+          <a:solidFill>
+            <a:srgbClr val="429761"/>
+          </a:solidFill>
+          <a:ln>
+            <a:noFill/>
+          </a:ln>
+        </p:spPr>
+        <p:style>
+          <a:lnRef idx="1">
+            <a:schemeClr val="accent1"/>
+          </a:lnRef>
+          <a:fillRef idx="3">
+            <a:schemeClr val="accent1"/>
+          </a:fillRef>
+          <a:effectRef idx="2">
+            <a:schemeClr val="accent1"/>
+          </a:effectRef>
+          <a:fontRef idx="minor">
+            <a:schemeClr val="lt1"/>
+          </a:fontRef>
+        </p:style>
+        <p:txBody>
+          <a:bodyPr rtlCol="0" anchor="ctr"/>
+          <a:lstStyle/>
+          <a:p>
+            <a:pPr algn="ctr"/>
+          </a:p>
+        </p:txBody>
+      </p:sp>
+      <p:sp>
+        <p:nvSpPr>
+          <p:cNvPr id="8" name="Rounded Rectangle 7"/>
+          <p:cNvSpPr/>
+          <p:nvPr/>
+        </p:nvSpPr>
+        <p:spPr>
+          <a:xfrm>
+            <a:off x="6126480" y="1280160"/>
+            <a:ext cx="2331720" cy="1371600"/>
+          </a:xfrm>
+          <a:prstGeom prst="roundRect">
+            <a:avLst/>
+          </a:prstGeom>
+          <a:solidFill>
+            <a:srgbClr val="FFF6E8"/>
+          </a:solidFill>
+          <a:ln w="13970">
+            <a:solidFill>
+              <a:srgbClr val="E5892A"/>
+            </a:solidFill>
+          </a:ln>
+        </p:spPr>
+        <p:style>
+          <a:lnRef idx="1">
+            <a:schemeClr val="accent1"/>
+          </a:lnRef>
+          <a:fillRef idx="3">
+            <a:schemeClr val="accent1"/>
+          </a:fillRef>
+          <a:effectRef idx="2">
+            <a:schemeClr val="accent1"/>
+          </a:effectRef>
+          <a:fontRef idx="minor">
+            <a:schemeClr val="lt1"/>
+          </a:fontRef>
+        </p:style>
+        <p:txBody>
+          <a:bodyPr rtlCol="0" anchor="ctr" lIns="182880" rIns="100584" tIns="91440"/>
+          <a:lstStyle/>
+          <a:p>
+            <a:pPr algn="ctr">
+              <a:defRPr sz="1600" b="1">
+                <a:solidFill>
+                  <a:srgbClr val="232D37"/>
+                </a:solidFill>
+                <a:latin typeface="Aptos Display"/>
+              </a:defRPr>
+            </a:pPr>
+            <a:r>
+              <a:t>3. Annual sequence</a:t>
+            </a:r>
+          </a:p>
+          <a:p>
+            <a:pPr>
+              <a:spcBef>
+                <a:spcPts val="300"/>
+              </a:spcBef>
+              <a:defRPr sz="1100">
+                <a:solidFill>
+                  <a:srgbClr val="232D37"/>
+                </a:solidFill>
+                <a:latin typeface="Aptos"/>
+              </a:defRPr>
+            </a:pPr>
+            <a:r>
+              <a:t>Balance, base, payout, tax split, insurer support, rider fee</a:t>
+            </a:r>
+          </a:p>
+        </p:txBody>
+      </p:sp>
+      <p:sp>
+        <p:nvSpPr>
+          <p:cNvPr id="9" name="Rectangle 8"/>
+          <p:cNvSpPr/>
+          <p:nvPr/>
+        </p:nvSpPr>
+        <p:spPr>
+          <a:xfrm>
+            <a:off x="6126480" y="1280160"/>
+            <a:ext cx="82296" cy="1371600"/>
+          </a:xfrm>
+          <a:prstGeom prst="rect">
+            <a:avLst/>
+          </a:prstGeom>
+          <a:solidFill>
+            <a:srgbClr val="E5892A"/>
+          </a:solidFill>
+          <a:ln>
+            <a:noFill/>
+          </a:ln>
+        </p:spPr>
+        <p:style>
+          <a:lnRef idx="1">
+            <a:schemeClr val="accent1"/>
+          </a:lnRef>
+          <a:fillRef idx="3">
+            <a:schemeClr val="accent1"/>
+          </a:fillRef>
+          <a:effectRef idx="2">
+            <a:schemeClr val="accent1"/>
+          </a:effectRef>
+          <a:fontRef idx="minor">
+            <a:schemeClr val="lt1"/>
+          </a:fontRef>
+        </p:style>
+        <p:txBody>
+          <a:bodyPr rtlCol="0" anchor="ctr"/>
+          <a:lstStyle/>
+          <a:p>
+            <a:pPr algn="ctr"/>
+          </a:p>
+        </p:txBody>
+      </p:sp>
+      <p:sp>
+        <p:nvSpPr>
+          <p:cNvPr id="10" name="Rounded Rectangle 9"/>
+          <p:cNvSpPr/>
+          <p:nvPr/>
+        </p:nvSpPr>
+        <p:spPr>
+          <a:xfrm>
+            <a:off x="8915400" y="1280160"/>
+            <a:ext cx="2331720" cy="1371600"/>
+          </a:xfrm>
+          <a:prstGeom prst="roundRect">
+            <a:avLst/>
+          </a:prstGeom>
+          <a:solidFill>
+            <a:srgbClr val="F7EFFF"/>
+          </a:solidFill>
+          <a:ln w="13970">
+            <a:solidFill>
+              <a:srgbClr val="7852B0"/>
+            </a:solidFill>
+          </a:ln>
+        </p:spPr>
+        <p:style>
+          <a:lnRef idx="1">
+            <a:schemeClr val="accent1"/>
+          </a:lnRef>
+          <a:fillRef idx="3">
+            <a:schemeClr val="accent1"/>
+          </a:fillRef>
+          <a:effectRef idx="2">
+            <a:schemeClr val="accent1"/>
+          </a:effectRef>
+          <a:fontRef idx="minor">
+            <a:schemeClr val="lt1"/>
+          </a:fontRef>
+        </p:style>
+        <p:txBody>
+          <a:bodyPr rtlCol="0" anchor="ctr" lIns="182880" rIns="100584" tIns="91440"/>
+          <a:lstStyle/>
+          <a:p>
+            <a:pPr algn="ctr">
+              <a:defRPr sz="1600" b="1">
+                <a:solidFill>
+                  <a:srgbClr val="232D37"/>
+                </a:solidFill>
+                <a:latin typeface="Aptos Display"/>
+              </a:defRPr>
+            </a:pPr>
+            <a:r>
+              <a:t>4. Projection rows</a:t>
+            </a:r>
+          </a:p>
+          <a:p>
+            <a:pPr>
+              <a:spcBef>
+                <a:spcPts val="300"/>
+              </a:spcBef>
+              <a:defRPr sz="1100">
+                <a:solidFill>
+                  <a:srgbClr val="232D37"/>
+                </a:solidFill>
+                <a:latin typeface="Aptos"/>
+              </a:defRPr>
+            </a:pPr>
+            <a:r>
+              <a:t>Annuitized income and asset data join household model</a:t>
+            </a:r>
+          </a:p>
+        </p:txBody>
+      </p:sp>
+      <p:sp>
+        <p:nvSpPr>
+          <p:cNvPr id="11" name="Rectangle 10"/>
+          <p:cNvSpPr/>
+          <p:nvPr/>
+        </p:nvSpPr>
+        <p:spPr>
+          <a:xfrm>
+            <a:off x="8915400" y="1280160"/>
+            <a:ext cx="82296" cy="1371600"/>
+          </a:xfrm>
+          <a:prstGeom prst="rect">
+            <a:avLst/>
+          </a:prstGeom>
+          <a:solidFill>
+            <a:srgbClr val="7852B0"/>
+          </a:solidFill>
+          <a:ln>
+            <a:noFill/>
+          </a:ln>
+        </p:spPr>
+        <p:style>
+          <a:lnRef idx="1">
+            <a:schemeClr val="accent1"/>
+          </a:lnRef>
+          <a:fillRef idx="3">
+            <a:schemeClr val="accent1"/>
+          </a:fillRef>
+          <a:effectRef idx="2">
+            <a:schemeClr val="accent1"/>
+          </a:effectRef>
+          <a:fontRef idx="minor">
+            <a:schemeClr val="lt1"/>
+          </a:fontRef>
+        </p:style>
+        <p:txBody>
+          <a:bodyPr rtlCol="0" anchor="ctr"/>
+          <a:lstStyle/>
+          <a:p>
+            <a:pPr algn="ctr"/>
+          </a:p>
+        </p:txBody>
+      </p:sp>
+      <p:cxnSp>
+        <p:nvCxnSpPr>
+          <p:cNvPr id="12" name="Connector 11"/>
+          <p:cNvCxnSpPr/>
+          <p:nvPr/>
+        </p:nvCxnSpPr>
+        <p:spPr>
+          <a:xfrm>
+            <a:off x="2926080" y="1965960"/>
+            <a:ext cx="274320" cy="0"/>
+          </a:xfrm>
+          <a:prstGeom prst="line">
+            <a:avLst/>
+          </a:prstGeom>
+          <a:ln w="22860">
+            <a:solidFill>
+              <a:srgbClr val="266EB2"/>
+            </a:solidFill>
+          </a:ln>
+        </p:spPr>
+        <p:style>
+          <a:lnRef idx="2">
+            <a:schemeClr val="accent1"/>
+          </a:lnRef>
+          <a:fillRef idx="0">
+            <a:schemeClr val="accent1"/>
+          </a:fillRef>
+          <a:effectRef idx="1">
+            <a:schemeClr val="accent1"/>
+          </a:effectRef>
+          <a:fontRef idx="minor">
+            <a:schemeClr val="tx1"/>
+          </a:fontRef>
+        </p:style>
+      </p:cxnSp>
+      <p:cxnSp>
+        <p:nvCxnSpPr>
+          <p:cNvPr id="13" name="Connector 12"/>
+          <p:cNvCxnSpPr/>
+          <p:nvPr/>
+        </p:nvCxnSpPr>
+        <p:spPr>
+          <a:xfrm>
+            <a:off x="5715000" y="1965960"/>
+            <a:ext cx="274320" cy="0"/>
+          </a:xfrm>
+          <a:prstGeom prst="line">
+            <a:avLst/>
+          </a:prstGeom>
+          <a:ln w="22860">
+            <a:solidFill>
+              <a:srgbClr val="429761"/>
+            </a:solidFill>
+          </a:ln>
+        </p:spPr>
+        <p:style>
+          <a:lnRef idx="2">
+            <a:schemeClr val="accent1"/>
+          </a:lnRef>
+          <a:fillRef idx="0">
+            <a:schemeClr val="accent1"/>
+          </a:fillRef>
+          <a:effectRef idx="1">
+            <a:schemeClr val="accent1"/>
+          </a:effectRef>
+          <a:fontRef idx="minor">
+            <a:schemeClr val="tx1"/>
+          </a:fontRef>
+        </p:style>
+      </p:cxnSp>
+      <p:cxnSp>
+        <p:nvCxnSpPr>
+          <p:cNvPr id="14" name="Connector 13"/>
+          <p:cNvCxnSpPr/>
+          <p:nvPr/>
+        </p:nvCxnSpPr>
+        <p:spPr>
+          <a:xfrm>
+            <a:off x="8503920" y="1965960"/>
+            <a:ext cx="274320" cy="0"/>
+          </a:xfrm>
+          <a:prstGeom prst="line">
+            <a:avLst/>
+          </a:prstGeom>
+          <a:ln w="22860">
+            <a:solidFill>
+              <a:srgbClr val="E5892A"/>
+            </a:solidFill>
+          </a:ln>
+        </p:spPr>
+        <p:style>
+          <a:lnRef idx="2">
+            <a:schemeClr val="accent1"/>
+          </a:lnRef>
+          <a:fillRef idx="0">
+            <a:schemeClr val="accent1"/>
+          </a:fillRef>
+          <a:effectRef idx="1">
+            <a:schemeClr val="accent1"/>
+          </a:effectRef>
+          <a:fontRef idx="minor">
+            <a:schemeClr val="tx1"/>
+          </a:fontRef>
+        </p:style>
+      </p:cxnSp>
+      <p:sp>
+        <p:nvSpPr>
+          <p:cNvPr id="15" name="Rounded Rectangle 14"/>
+          <p:cNvSpPr/>
+          <p:nvPr/>
+        </p:nvSpPr>
+        <p:spPr>
+          <a:xfrm>
+            <a:off x="1280160" y="3657600"/>
+            <a:ext cx="9509760" cy="1325880"/>
           </a:xfrm>
           <a:prstGeom prst="roundRect">
             <a:avLst/>
@@ -5901,7 +6115,7 @@
           <a:lstStyle/>
           <a:p>
             <a:pPr algn="ctr">
-              <a:defRPr sz="1600" b="1">
+              <a:defRPr sz="1700" b="1">
                 <a:solidFill>
                   <a:srgbClr val="232D37"/>
                 </a:solidFill>
@@ -5909,7 +6123,7 @@
               </a:defRPr>
             </a:pPr>
             <a:r>
-              <a:t>State update</a:t>
+              <a:t>Boundary benefit</a:t>
             </a:r>
           </a:p>
           <a:p>
@@ -5917,45 +6131,29 @@
               <a:spcBef>
                 <a:spcPts val="300"/>
               </a:spcBef>
-              <a:defRPr sz="1100">
-                <a:solidFill>
-                  <a:srgbClr val="232D37"/>
-                </a:solidFill>
-                <a:latin typeface="Aptos"/>
-              </a:defRPr>
-            </a:pPr>
-            <a:r>
-              <a:t>setPath()</a:t>
-            </a:r>
-          </a:p>
-          <a:p>
-            <a:pPr>
-              <a:spcBef>
-                <a:spcPts val="300"/>
-              </a:spcBef>
-              <a:defRPr sz="1100">
-                <a:solidFill>
-                  <a:srgbClr val="232D37"/>
-                </a:solidFill>
-                <a:latin typeface="Aptos"/>
-              </a:defRPr>
-            </a:pPr>
-            <a:r>
-              <a:t>autosave</a:t>
-            </a:r>
-          </a:p>
-        </p:txBody>
-      </p:sp>
-      <p:sp>
-        <p:nvSpPr>
-          <p:cNvPr id="7" name="Rectangle 6"/>
+              <a:defRPr sz="1200">
+                <a:solidFill>
+                  <a:srgbClr val="232D37"/>
+                </a:solidFill>
+                <a:latin typeface="Aptos"/>
+              </a:defRPr>
+            </a:pPr>
+            <a:r>
+              <a:t>The simulator owns annuity mechanics; the main projection only reads its annual results to determine cash income, ordinary income, tax-exempt income, non-qualified investment income, and asset value.</a:t>
+            </a:r>
+          </a:p>
+        </p:txBody>
+      </p:sp>
+      <p:sp>
+        <p:nvSpPr>
+          <p:cNvPr id="16" name="Rectangle 15"/>
           <p:cNvSpPr/>
           <p:nvPr/>
         </p:nvSpPr>
         <p:spPr>
           <a:xfrm>
-            <a:off x="2907792" y="1234440"/>
-            <a:ext cx="82296" cy="1280160"/>
+            <a:off x="1280160" y="3657600"/>
+            <a:ext cx="82296" cy="1325880"/>
           </a:xfrm>
           <a:prstGeom prst="rect">
             <a:avLst/>
@@ -5991,717 +6189,7 @@
       </p:sp>
       <p:sp>
         <p:nvSpPr>
-          <p:cNvPr id="8" name="Rounded Rectangle 7"/>
-          <p:cNvSpPr/>
-          <p:nvPr/>
-        </p:nvSpPr>
-        <p:spPr>
-          <a:xfrm>
-            <a:off x="5312664" y="1234440"/>
-            <a:ext cx="2057400" cy="1280160"/>
-          </a:xfrm>
-          <a:prstGeom prst="roundRect">
-            <a:avLst/>
-          </a:prstGeom>
-          <a:solidFill>
-            <a:srgbClr val="EAF9F4"/>
-          </a:solidFill>
-          <a:ln w="13970">
-            <a:solidFill>
-              <a:srgbClr val="429761"/>
-            </a:solidFill>
-          </a:ln>
-        </p:spPr>
-        <p:style>
-          <a:lnRef idx="1">
-            <a:schemeClr val="accent1"/>
-          </a:lnRef>
-          <a:fillRef idx="3">
-            <a:schemeClr val="accent1"/>
-          </a:fillRef>
-          <a:effectRef idx="2">
-            <a:schemeClr val="accent1"/>
-          </a:effectRef>
-          <a:fontRef idx="minor">
-            <a:schemeClr val="lt1"/>
-          </a:fontRef>
-        </p:style>
-        <p:txBody>
-          <a:bodyPr rtlCol="0" anchor="ctr" lIns="182880" rIns="100584" tIns="91440"/>
-          <a:lstStyle/>
-          <a:p>
-            <a:pPr algn="ctr">
-              <a:defRPr sz="1600" b="1">
-                <a:solidFill>
-                  <a:srgbClr val="232D37"/>
-                </a:solidFill>
-                <a:latin typeface="Aptos Display"/>
-              </a:defRPr>
-            </a:pPr>
-            <a:r>
-              <a:t>Compute gate</a:t>
-            </a:r>
-          </a:p>
-          <a:p>
-            <a:pPr>
-              <a:spcBef>
-                <a:spcPts val="300"/>
-              </a:spcBef>
-              <a:defRPr sz="1100">
-                <a:solidFill>
-                  <a:srgbClr val="232D37"/>
-                </a:solidFill>
-                <a:latin typeface="Aptos"/>
-              </a:defRPr>
-            </a:pPr>
-            <a:r>
-              <a:t>Enabled flag includes / excludes financial rule</a:t>
-            </a:r>
-          </a:p>
-        </p:txBody>
-      </p:sp>
-      <p:sp>
-        <p:nvSpPr>
-          <p:cNvPr id="9" name="Rectangle 8"/>
-          <p:cNvSpPr/>
-          <p:nvPr/>
-        </p:nvSpPr>
-        <p:spPr>
-          <a:xfrm>
-            <a:off x="5312664" y="1234440"/>
-            <a:ext cx="82296" cy="1280160"/>
-          </a:xfrm>
-          <a:prstGeom prst="rect">
-            <a:avLst/>
-          </a:prstGeom>
-          <a:solidFill>
-            <a:srgbClr val="429761"/>
-          </a:solidFill>
-          <a:ln>
-            <a:noFill/>
-          </a:ln>
-        </p:spPr>
-        <p:style>
-          <a:lnRef idx="1">
-            <a:schemeClr val="accent1"/>
-          </a:lnRef>
-          <a:fillRef idx="3">
-            <a:schemeClr val="accent1"/>
-          </a:fillRef>
-          <a:effectRef idx="2">
-            <a:schemeClr val="accent1"/>
-          </a:effectRef>
-          <a:fontRef idx="minor">
-            <a:schemeClr val="lt1"/>
-          </a:fontRef>
-        </p:style>
-        <p:txBody>
-          <a:bodyPr rtlCol="0" anchor="ctr"/>
-          <a:lstStyle/>
-          <a:p>
-            <a:pPr algn="ctr"/>
-          </a:p>
-        </p:txBody>
-      </p:sp>
-      <p:sp>
-        <p:nvSpPr>
-          <p:cNvPr id="10" name="Rounded Rectangle 9"/>
-          <p:cNvSpPr/>
-          <p:nvPr/>
-        </p:nvSpPr>
-        <p:spPr>
-          <a:xfrm>
-            <a:off x="7717536" y="1234440"/>
-            <a:ext cx="2057400" cy="1280160"/>
-          </a:xfrm>
-          <a:prstGeom prst="roundRect">
-            <a:avLst/>
-          </a:prstGeom>
-          <a:solidFill>
-            <a:srgbClr val="FFF6E8"/>
-          </a:solidFill>
-          <a:ln w="13970">
-            <a:solidFill>
-              <a:srgbClr val="E5892A"/>
-            </a:solidFill>
-          </a:ln>
-        </p:spPr>
-        <p:style>
-          <a:lnRef idx="1">
-            <a:schemeClr val="accent1"/>
-          </a:lnRef>
-          <a:fillRef idx="3">
-            <a:schemeClr val="accent1"/>
-          </a:fillRef>
-          <a:effectRef idx="2">
-            <a:schemeClr val="accent1"/>
-          </a:effectRef>
-          <a:fontRef idx="minor">
-            <a:schemeClr val="lt1"/>
-          </a:fontRef>
-        </p:style>
-        <p:txBody>
-          <a:bodyPr rtlCol="0" anchor="ctr" lIns="182880" rIns="100584" tIns="91440"/>
-          <a:lstStyle/>
-          <a:p>
-            <a:pPr algn="ctr">
-              <a:defRPr sz="1600" b="1">
-                <a:solidFill>
-                  <a:srgbClr val="232D37"/>
-                </a:solidFill>
-                <a:latin typeface="Aptos Display"/>
-              </a:defRPr>
-            </a:pPr>
-            <a:r>
-              <a:t>Projection rows</a:t>
-            </a:r>
-          </a:p>
-          <a:p>
-            <a:pPr>
-              <a:spcBef>
-                <a:spcPts val="300"/>
-              </a:spcBef>
-              <a:defRPr sz="1100">
-                <a:solidFill>
-                  <a:srgbClr val="232D37"/>
-                </a:solidFill>
-                <a:latin typeface="Aptos"/>
-              </a:defRPr>
-            </a:pPr>
-            <a:r>
-              <a:t>Annual values reflect active assumptions</a:t>
-            </a:r>
-          </a:p>
-        </p:txBody>
-      </p:sp>
-      <p:sp>
-        <p:nvSpPr>
-          <p:cNvPr id="11" name="Rectangle 10"/>
-          <p:cNvSpPr/>
-          <p:nvPr/>
-        </p:nvSpPr>
-        <p:spPr>
-          <a:xfrm>
-            <a:off x="7717536" y="1234440"/>
-            <a:ext cx="82296" cy="1280160"/>
-          </a:xfrm>
-          <a:prstGeom prst="rect">
-            <a:avLst/>
-          </a:prstGeom>
-          <a:solidFill>
-            <a:srgbClr val="E5892A"/>
-          </a:solidFill>
-          <a:ln>
-            <a:noFill/>
-          </a:ln>
-        </p:spPr>
-        <p:style>
-          <a:lnRef idx="1">
-            <a:schemeClr val="accent1"/>
-          </a:lnRef>
-          <a:fillRef idx="3">
-            <a:schemeClr val="accent1"/>
-          </a:fillRef>
-          <a:effectRef idx="2">
-            <a:schemeClr val="accent1"/>
-          </a:effectRef>
-          <a:fontRef idx="minor">
-            <a:schemeClr val="lt1"/>
-          </a:fontRef>
-        </p:style>
-        <p:txBody>
-          <a:bodyPr rtlCol="0" anchor="ctr"/>
-          <a:lstStyle/>
-          <a:p>
-            <a:pPr algn="ctr"/>
-          </a:p>
-        </p:txBody>
-      </p:sp>
-      <p:sp>
-        <p:nvSpPr>
-          <p:cNvPr id="12" name="Rounded Rectangle 11"/>
-          <p:cNvSpPr/>
-          <p:nvPr/>
-        </p:nvSpPr>
-        <p:spPr>
-          <a:xfrm>
-            <a:off x="10122408" y="1234440"/>
-            <a:ext cx="1554480" cy="1280160"/>
-          </a:xfrm>
-          <a:prstGeom prst="roundRect">
-            <a:avLst/>
-          </a:prstGeom>
-          <a:solidFill>
-            <a:srgbClr val="F7EFFF"/>
-          </a:solidFill>
-          <a:ln w="13970">
-            <a:solidFill>
-              <a:srgbClr val="7852B0"/>
-            </a:solidFill>
-          </a:ln>
-        </p:spPr>
-        <p:style>
-          <a:lnRef idx="1">
-            <a:schemeClr val="accent1"/>
-          </a:lnRef>
-          <a:fillRef idx="3">
-            <a:schemeClr val="accent1"/>
-          </a:fillRef>
-          <a:effectRef idx="2">
-            <a:schemeClr val="accent1"/>
-          </a:effectRef>
-          <a:fontRef idx="minor">
-            <a:schemeClr val="lt1"/>
-          </a:fontRef>
-        </p:style>
-        <p:txBody>
-          <a:bodyPr rtlCol="0" anchor="ctr" lIns="182880" rIns="100584" tIns="91440"/>
-          <a:lstStyle/>
-          <a:p>
-            <a:pPr algn="ctr">
-              <a:defRPr sz="1500" b="1">
-                <a:solidFill>
-                  <a:srgbClr val="232D37"/>
-                </a:solidFill>
-                <a:latin typeface="Aptos Display"/>
-              </a:defRPr>
-            </a:pPr>
-            <a:r>
-              <a:t>Views</a:t>
-            </a:r>
-          </a:p>
-          <a:p>
-            <a:pPr>
-              <a:spcBef>
-                <a:spcPts val="300"/>
-              </a:spcBef>
-              <a:defRPr sz="1000">
-                <a:solidFill>
-                  <a:srgbClr val="232D37"/>
-                </a:solidFill>
-                <a:latin typeface="Aptos"/>
-              </a:defRPr>
-            </a:pPr>
-            <a:r>
-              <a:t>Charts / Excel / Chat</a:t>
-            </a:r>
-          </a:p>
-        </p:txBody>
-      </p:sp>
-      <p:sp>
-        <p:nvSpPr>
-          <p:cNvPr id="13" name="Rectangle 12"/>
-          <p:cNvSpPr/>
-          <p:nvPr/>
-        </p:nvSpPr>
-        <p:spPr>
-          <a:xfrm>
-            <a:off x="10122408" y="1234440"/>
-            <a:ext cx="82296" cy="1280160"/>
-          </a:xfrm>
-          <a:prstGeom prst="rect">
-            <a:avLst/>
-          </a:prstGeom>
-          <a:solidFill>
-            <a:srgbClr val="7852B0"/>
-          </a:solidFill>
-          <a:ln>
-            <a:noFill/>
-          </a:ln>
-        </p:spPr>
-        <p:style>
-          <a:lnRef idx="1">
-            <a:schemeClr val="accent1"/>
-          </a:lnRef>
-          <a:fillRef idx="3">
-            <a:schemeClr val="accent1"/>
-          </a:fillRef>
-          <a:effectRef idx="2">
-            <a:schemeClr val="accent1"/>
-          </a:effectRef>
-          <a:fontRef idx="minor">
-            <a:schemeClr val="lt1"/>
-          </a:fontRef>
-        </p:style>
-        <p:txBody>
-          <a:bodyPr rtlCol="0" anchor="ctr"/>
-          <a:lstStyle/>
-          <a:p>
-            <a:pPr algn="ctr"/>
-          </a:p>
-        </p:txBody>
-      </p:sp>
-      <p:cxnSp>
-        <p:nvCxnSpPr>
-          <p:cNvPr id="14" name="Connector 13"/>
-          <p:cNvCxnSpPr/>
-          <p:nvPr/>
-        </p:nvCxnSpPr>
-        <p:spPr>
-          <a:xfrm>
-            <a:off x="2606040" y="1892807"/>
-            <a:ext cx="219456" cy="0"/>
-          </a:xfrm>
-          <a:prstGeom prst="line">
-            <a:avLst/>
-          </a:prstGeom>
-          <a:ln w="22860">
-            <a:solidFill>
-              <a:srgbClr val="266EB2"/>
-            </a:solidFill>
-          </a:ln>
-        </p:spPr>
-        <p:style>
-          <a:lnRef idx="2">
-            <a:schemeClr val="accent1"/>
-          </a:lnRef>
-          <a:fillRef idx="0">
-            <a:schemeClr val="accent1"/>
-          </a:fillRef>
-          <a:effectRef idx="1">
-            <a:schemeClr val="accent1"/>
-          </a:effectRef>
-          <a:fontRef idx="minor">
-            <a:schemeClr val="tx1"/>
-          </a:fontRef>
-        </p:style>
-      </p:cxnSp>
-      <p:cxnSp>
-        <p:nvCxnSpPr>
-          <p:cNvPr id="15" name="Connector 14"/>
-          <p:cNvCxnSpPr/>
-          <p:nvPr/>
-        </p:nvCxnSpPr>
-        <p:spPr>
-          <a:xfrm>
-            <a:off x="5010912" y="1892807"/>
-            <a:ext cx="219456" cy="0"/>
-          </a:xfrm>
-          <a:prstGeom prst="line">
-            <a:avLst/>
-          </a:prstGeom>
-          <a:ln w="22860">
-            <a:solidFill>
-              <a:srgbClr val="0F2647"/>
-            </a:solidFill>
-          </a:ln>
-        </p:spPr>
-        <p:style>
-          <a:lnRef idx="2">
-            <a:schemeClr val="accent1"/>
-          </a:lnRef>
-          <a:fillRef idx="0">
-            <a:schemeClr val="accent1"/>
-          </a:fillRef>
-          <a:effectRef idx="1">
-            <a:schemeClr val="accent1"/>
-          </a:effectRef>
-          <a:fontRef idx="minor">
-            <a:schemeClr val="tx1"/>
-          </a:fontRef>
-        </p:style>
-      </p:cxnSp>
-      <p:cxnSp>
-        <p:nvCxnSpPr>
-          <p:cNvPr id="16" name="Connector 15"/>
-          <p:cNvCxnSpPr/>
-          <p:nvPr/>
-        </p:nvCxnSpPr>
-        <p:spPr>
-          <a:xfrm>
-            <a:off x="7415783" y="1892807"/>
-            <a:ext cx="219457" cy="0"/>
-          </a:xfrm>
-          <a:prstGeom prst="line">
-            <a:avLst/>
-          </a:prstGeom>
-          <a:ln w="22860">
-            <a:solidFill>
-              <a:srgbClr val="429761"/>
-            </a:solidFill>
-          </a:ln>
-        </p:spPr>
-        <p:style>
-          <a:lnRef idx="2">
-            <a:schemeClr val="accent1"/>
-          </a:lnRef>
-          <a:fillRef idx="0">
-            <a:schemeClr val="accent1"/>
-          </a:fillRef>
-          <a:effectRef idx="1">
-            <a:schemeClr val="accent1"/>
-          </a:effectRef>
-          <a:fontRef idx="minor">
-            <a:schemeClr val="tx1"/>
-          </a:fontRef>
-        </p:style>
-      </p:cxnSp>
-      <p:cxnSp>
-        <p:nvCxnSpPr>
-          <p:cNvPr id="17" name="Connector 16"/>
-          <p:cNvCxnSpPr/>
-          <p:nvPr/>
-        </p:nvCxnSpPr>
-        <p:spPr>
-          <a:xfrm>
-            <a:off x="9820656" y="1892807"/>
-            <a:ext cx="219456" cy="0"/>
-          </a:xfrm>
-          <a:prstGeom prst="line">
-            <a:avLst/>
-          </a:prstGeom>
-          <a:ln w="22860">
-            <a:solidFill>
-              <a:srgbClr val="E5892A"/>
-            </a:solidFill>
-          </a:ln>
-        </p:spPr>
-        <p:style>
-          <a:lnRef idx="2">
-            <a:schemeClr val="accent1"/>
-          </a:lnRef>
-          <a:fillRef idx="0">
-            <a:schemeClr val="accent1"/>
-          </a:fillRef>
-          <a:effectRef idx="1">
-            <a:schemeClr val="accent1"/>
-          </a:effectRef>
-          <a:fontRef idx="minor">
-            <a:schemeClr val="tx1"/>
-          </a:fontRef>
-        </p:style>
-      </p:cxnSp>
-      <p:sp>
-        <p:nvSpPr>
-          <p:cNvPr id="18" name="Rounded Rectangle 17"/>
-          <p:cNvSpPr/>
-          <p:nvPr/>
-        </p:nvSpPr>
-        <p:spPr>
-          <a:xfrm>
-            <a:off x="1051560" y="3520440"/>
-            <a:ext cx="4663440" cy="1325880"/>
-          </a:xfrm>
-          <a:prstGeom prst="roundRect">
-            <a:avLst/>
-          </a:prstGeom>
-          <a:solidFill>
-            <a:srgbClr val="F8FAFC"/>
-          </a:solidFill>
-          <a:ln w="13970">
-            <a:solidFill>
-              <a:srgbClr val="168F8D"/>
-            </a:solidFill>
-          </a:ln>
-        </p:spPr>
-        <p:style>
-          <a:lnRef idx="1">
-            <a:schemeClr val="accent1"/>
-          </a:lnRef>
-          <a:fillRef idx="3">
-            <a:schemeClr val="accent1"/>
-          </a:fillRef>
-          <a:effectRef idx="2">
-            <a:schemeClr val="accent1"/>
-          </a:effectRef>
-          <a:fontRef idx="minor">
-            <a:schemeClr val="lt1"/>
-          </a:fontRef>
-        </p:style>
-        <p:txBody>
-          <a:bodyPr rtlCol="0" anchor="ctr" lIns="182880" rIns="100584" tIns="91440"/>
-          <a:lstStyle/>
-          <a:p>
-            <a:pPr algn="ctr">
-              <a:defRPr sz="1700" b="1">
-                <a:solidFill>
-                  <a:srgbClr val="232D37"/>
-                </a:solidFill>
-                <a:latin typeface="Aptos Display"/>
-              </a:defRPr>
-            </a:pPr>
-            <a:r>
-              <a:t>Persistence rule</a:t>
-            </a:r>
-          </a:p>
-          <a:p>
-            <a:pPr>
-              <a:spcBef>
-                <a:spcPts val="300"/>
-              </a:spcBef>
-              <a:defRPr sz="1200">
-                <a:solidFill>
-                  <a:srgbClr val="232D37"/>
-                </a:solidFill>
-                <a:latin typeface="Aptos"/>
-              </a:defRPr>
-            </a:pPr>
-            <a:r>
-              <a:t>Assumption Enable and Hide flags are part of plan state. Save files and autosave restore them exactly; values do not disappear when disabled.</a:t>
-            </a:r>
-          </a:p>
-        </p:txBody>
-      </p:sp>
-      <p:sp>
-        <p:nvSpPr>
-          <p:cNvPr id="19" name="Rectangle 18"/>
-          <p:cNvSpPr/>
-          <p:nvPr/>
-        </p:nvSpPr>
-        <p:spPr>
-          <a:xfrm>
-            <a:off x="1051560" y="3520440"/>
-            <a:ext cx="82296" cy="1325880"/>
-          </a:xfrm>
-          <a:prstGeom prst="rect">
-            <a:avLst/>
-          </a:prstGeom>
-          <a:solidFill>
-            <a:srgbClr val="168F8D"/>
-          </a:solidFill>
-          <a:ln>
-            <a:noFill/>
-          </a:ln>
-        </p:spPr>
-        <p:style>
-          <a:lnRef idx="1">
-            <a:schemeClr val="accent1"/>
-          </a:lnRef>
-          <a:fillRef idx="3">
-            <a:schemeClr val="accent1"/>
-          </a:fillRef>
-          <a:effectRef idx="2">
-            <a:schemeClr val="accent1"/>
-          </a:effectRef>
-          <a:fontRef idx="minor">
-            <a:schemeClr val="lt1"/>
-          </a:fontRef>
-        </p:style>
-        <p:txBody>
-          <a:bodyPr rtlCol="0" anchor="ctr"/>
-          <a:lstStyle/>
-          <a:p>
-            <a:pPr algn="ctr"/>
-          </a:p>
-        </p:txBody>
-      </p:sp>
-      <p:sp>
-        <p:nvSpPr>
-          <p:cNvPr id="20" name="Rounded Rectangle 19"/>
-          <p:cNvSpPr/>
-          <p:nvPr/>
-        </p:nvSpPr>
-        <p:spPr>
-          <a:xfrm>
-            <a:off x="6382512" y="3520440"/>
-            <a:ext cx="4663440" cy="1325880"/>
-          </a:xfrm>
-          <a:prstGeom prst="roundRect">
-            <a:avLst/>
-          </a:prstGeom>
-          <a:solidFill>
-            <a:srgbClr val="F8FAFC"/>
-          </a:solidFill>
-          <a:ln w="13970">
-            <a:solidFill>
-              <a:srgbClr val="0F2647"/>
-            </a:solidFill>
-          </a:ln>
-        </p:spPr>
-        <p:style>
-          <a:lnRef idx="1">
-            <a:schemeClr val="accent1"/>
-          </a:lnRef>
-          <a:fillRef idx="3">
-            <a:schemeClr val="accent1"/>
-          </a:fillRef>
-          <a:effectRef idx="2">
-            <a:schemeClr val="accent1"/>
-          </a:effectRef>
-          <a:fontRef idx="minor">
-            <a:schemeClr val="lt1"/>
-          </a:fontRef>
-        </p:style>
-        <p:txBody>
-          <a:bodyPr rtlCol="0" anchor="ctr" lIns="182880" rIns="100584" tIns="91440"/>
-          <a:lstStyle/>
-          <a:p>
-            <a:pPr algn="ctr">
-              <a:defRPr sz="1700" b="1">
-                <a:solidFill>
-                  <a:srgbClr val="232D37"/>
-                </a:solidFill>
-                <a:latin typeface="Aptos Display"/>
-              </a:defRPr>
-            </a:pPr>
-            <a:r>
-              <a:t>Compute examples</a:t>
-            </a:r>
-          </a:p>
-          <a:p>
-            <a:pPr>
-              <a:spcBef>
-                <a:spcPts val="300"/>
-              </a:spcBef>
-              <a:defRPr sz="1200">
-                <a:solidFill>
-                  <a:srgbClr val="232D37"/>
-                </a:solidFill>
-                <a:latin typeface="Aptos"/>
-              </a:defRPr>
-            </a:pPr>
-            <a:r>
-              <a:t>Disabled SCGL contributes a zero pool. Disabled AUM fee contributes zero fee. LTC and future-tax logic were already compute-gated by their enabled flags.</a:t>
-            </a:r>
-          </a:p>
-        </p:txBody>
-      </p:sp>
-      <p:sp>
-        <p:nvSpPr>
-          <p:cNvPr id="21" name="Rectangle 20"/>
-          <p:cNvSpPr/>
-          <p:nvPr/>
-        </p:nvSpPr>
-        <p:spPr>
-          <a:xfrm>
-            <a:off x="6382512" y="3520440"/>
-            <a:ext cx="82296" cy="1325880"/>
-          </a:xfrm>
-          <a:prstGeom prst="rect">
-            <a:avLst/>
-          </a:prstGeom>
-          <a:solidFill>
-            <a:srgbClr val="0F2647"/>
-          </a:solidFill>
-          <a:ln>
-            <a:noFill/>
-          </a:ln>
-        </p:spPr>
-        <p:style>
-          <a:lnRef idx="1">
-            <a:schemeClr val="accent1"/>
-          </a:lnRef>
-          <a:fillRef idx="3">
-            <a:schemeClr val="accent1"/>
-          </a:fillRef>
-          <a:effectRef idx="2">
-            <a:schemeClr val="accent1"/>
-          </a:effectRef>
-          <a:fontRef idx="minor">
-            <a:schemeClr val="lt1"/>
-          </a:fontRef>
-        </p:style>
-        <p:txBody>
-          <a:bodyPr rtlCol="0" anchor="ctr"/>
-          <a:lstStyle/>
-          <a:p>
-            <a:pPr algn="ctr"/>
-          </a:p>
-        </p:txBody>
-      </p:sp>
-      <p:sp>
-        <p:nvSpPr>
-          <p:cNvPr id="22" name="Rectangle 21"/>
+          <p:cNvPr id="17" name="Rectangle 16"/>
           <p:cNvSpPr/>
           <p:nvPr/>
         </p:nvSpPr>
@@ -6744,7 +6232,7 @@
       </p:sp>
       <p:sp>
         <p:nvSpPr>
-          <p:cNvPr id="23" name="TextBox 22"/>
+          <p:cNvPr id="18" name="TextBox 17"/>
           <p:cNvSpPr txBox="1"/>
           <p:nvPr/>
         </p:nvSpPr>
@@ -6773,7 +6261,7 @@
               </a:defRPr>
             </a:pPr>
             <a:r>
-              <a:t>Retirement Income Planner • Architecture overview • Assumption controls and Markdown Usage update</a:t>
+              <a:t>Retirement Income Planner • Architecture overview • Annuity-model update</a:t>
             </a:r>
           </a:p>
         </p:txBody>
@@ -6835,7 +6323,7 @@
               </a:defRPr>
             </a:pPr>
             <a:r>
-              <a:t>Shared Markdown-page architecture</a:t>
+              <a:t>Payout, rider, and account-value logic</a:t>
             </a:r>
           </a:p>
         </p:txBody>
@@ -6871,7 +6359,7 @@
               </a:defRPr>
             </a:pPr>
             <a:r>
-              <a:t>A reusable renderer turns maintained Markdown files into standalone documentation tabs at the moment the user opens them.</a:t>
+              <a:t>The annuity model distinguishes contractual payouts, taxable character, rider support, and the remaining account value.</a:t>
             </a:r>
           </a:p>
         </p:txBody>
@@ -6884,8 +6372,8 @@
         </p:nvSpPr>
         <p:spPr>
           <a:xfrm>
-            <a:off x="548640" y="1234440"/>
-            <a:ext cx="2377440" cy="4480560"/>
+            <a:off x="502920" y="1143000"/>
+            <a:ext cx="2331720" cy="4526280"/>
           </a:xfrm>
           <a:prstGeom prst="roundRect">
             <a:avLst/>
@@ -6926,7 +6414,7 @@
               </a:defRPr>
             </a:pPr>
             <a:r>
-              <a:t>Topbar action</a:t>
+              <a:t>Payout timing</a:t>
             </a:r>
           </a:p>
           <a:p>
@@ -6942,7 +6430,7 @@
               </a:defRPr>
             </a:pPr>
             <a:r>
-              <a:t>Usage</a:t>
+              <a:t>Payout starts and ends through the contract age range.</a:t>
             </a:r>
           </a:p>
           <a:p>
@@ -6958,7 +6446,7 @@
               </a:defRPr>
             </a:pPr>
             <a:r>
-              <a:t>Notes</a:t>
+              <a:t>Survivor continuation follows the same durable age-range convention as other income sources.</a:t>
             </a:r>
           </a:p>
           <a:p>
@@ -6974,7 +6462,7 @@
               </a:defRPr>
             </a:pPr>
             <a:r>
-              <a:t>Each calls a small page opener rather than duplicating Markdown logic.</a:t>
+              <a:t>Rider payout replaces manual payout when active.</a:t>
             </a:r>
           </a:p>
         </p:txBody>
@@ -6987,8 +6475,8 @@
         </p:nvSpPr>
         <p:spPr>
           <a:xfrm>
-            <a:off x="548640" y="1234440"/>
-            <a:ext cx="82296" cy="4480560"/>
+            <a:off x="502920" y="1143000"/>
+            <a:ext cx="82296" cy="4526280"/>
           </a:xfrm>
           <a:prstGeom prst="rect">
             <a:avLst/>
@@ -7030,8 +6518,316 @@
         </p:nvSpPr>
         <p:spPr>
           <a:xfrm>
-            <a:off x="3337560" y="1234440"/>
-            <a:ext cx="2377440" cy="4480560"/>
+            <a:off x="3310128" y="1143000"/>
+            <a:ext cx="2331720" cy="4526280"/>
+          </a:xfrm>
+          <a:prstGeom prst="roundRect">
+            <a:avLst/>
+          </a:prstGeom>
+          <a:solidFill>
+            <a:srgbClr val="FFF6E8"/>
+          </a:solidFill>
+          <a:ln w="13970">
+            <a:solidFill>
+              <a:srgbClr val="E5892A"/>
+            </a:solidFill>
+          </a:ln>
+        </p:spPr>
+        <p:style>
+          <a:lnRef idx="1">
+            <a:schemeClr val="accent1"/>
+          </a:lnRef>
+          <a:fillRef idx="3">
+            <a:schemeClr val="accent1"/>
+          </a:fillRef>
+          <a:effectRef idx="2">
+            <a:schemeClr val="accent1"/>
+          </a:effectRef>
+          <a:fontRef idx="minor">
+            <a:schemeClr val="lt1"/>
+          </a:fontRef>
+        </p:style>
+        <p:txBody>
+          <a:bodyPr rtlCol="0" anchor="ctr" lIns="182880" rIns="100584" tIns="91440"/>
+          <a:lstStyle/>
+          <a:p>
+            <a:pPr algn="ctr">
+              <a:defRPr sz="1700" b="1">
+                <a:solidFill>
+                  <a:srgbClr val="232D37"/>
+                </a:solidFill>
+                <a:latin typeface="Aptos Display"/>
+              </a:defRPr>
+            </a:pPr>
+            <a:r>
+              <a:t>Tax classification</a:t>
+            </a:r>
+          </a:p>
+          <a:p>
+            <a:pPr>
+              <a:spcBef>
+                <a:spcPts val="300"/>
+              </a:spcBef>
+              <a:defRPr sz="1200">
+                <a:solidFill>
+                  <a:srgbClr val="232D37"/>
+                </a:solidFill>
+                <a:latin typeface="Aptos"/>
+              </a:defRPr>
+            </a:pPr>
+            <a:r>
+              <a:t>Taxable portion → nonSSOrdinary.</a:t>
+            </a:r>
+          </a:p>
+          <a:p>
+            <a:pPr>
+              <a:spcBef>
+                <a:spcPts val="300"/>
+              </a:spcBef>
+              <a:defRPr sz="1200">
+                <a:solidFill>
+                  <a:srgbClr val="232D37"/>
+                </a:solidFill>
+                <a:latin typeface="Aptos"/>
+              </a:defRPr>
+            </a:pPr>
+            <a:r>
+              <a:t>Tax-exempt portion → cashIncome, provisional income, and MAGI.</a:t>
+            </a:r>
+          </a:p>
+          <a:p>
+            <a:pPr>
+              <a:spcBef>
+                <a:spcPts val="300"/>
+              </a:spcBef>
+              <a:defRPr sz="1200">
+                <a:solidFill>
+                  <a:srgbClr val="232D37"/>
+                </a:solidFill>
+                <a:latin typeface="Aptos"/>
+              </a:defRPr>
+            </a:pPr>
+            <a:r>
+              <a:t>Non-qualified taxable payouts also contribute to net investment income.</a:t>
+            </a:r>
+          </a:p>
+        </p:txBody>
+      </p:sp>
+      <p:sp>
+        <p:nvSpPr>
+          <p:cNvPr id="7" name="Rectangle 6"/>
+          <p:cNvSpPr/>
+          <p:nvPr/>
+        </p:nvSpPr>
+        <p:spPr>
+          <a:xfrm>
+            <a:off x="3310128" y="1143000"/>
+            <a:ext cx="82296" cy="4526280"/>
+          </a:xfrm>
+          <a:prstGeom prst="rect">
+            <a:avLst/>
+          </a:prstGeom>
+          <a:solidFill>
+            <a:srgbClr val="E5892A"/>
+          </a:solidFill>
+          <a:ln>
+            <a:noFill/>
+          </a:ln>
+        </p:spPr>
+        <p:style>
+          <a:lnRef idx="1">
+            <a:schemeClr val="accent1"/>
+          </a:lnRef>
+          <a:fillRef idx="3">
+            <a:schemeClr val="accent1"/>
+          </a:fillRef>
+          <a:effectRef idx="2">
+            <a:schemeClr val="accent1"/>
+          </a:effectRef>
+          <a:fontRef idx="minor">
+            <a:schemeClr val="lt1"/>
+          </a:fontRef>
+        </p:style>
+        <p:txBody>
+          <a:bodyPr rtlCol="0" anchor="ctr"/>
+          <a:lstStyle/>
+          <a:p>
+            <a:pPr algn="ctr"/>
+          </a:p>
+        </p:txBody>
+      </p:sp>
+      <p:sp>
+        <p:nvSpPr>
+          <p:cNvPr id="8" name="Rounded Rectangle 7"/>
+          <p:cNvSpPr/>
+          <p:nvPr/>
+        </p:nvSpPr>
+        <p:spPr>
+          <a:xfrm>
+            <a:off x="6117336" y="1143000"/>
+            <a:ext cx="2331720" cy="4526280"/>
+          </a:xfrm>
+          <a:prstGeom prst="roundRect">
+            <a:avLst/>
+          </a:prstGeom>
+          <a:solidFill>
+            <a:srgbClr val="EAF9F4"/>
+          </a:solidFill>
+          <a:ln w="13970">
+            <a:solidFill>
+              <a:srgbClr val="429761"/>
+            </a:solidFill>
+          </a:ln>
+        </p:spPr>
+        <p:style>
+          <a:lnRef idx="1">
+            <a:schemeClr val="accent1"/>
+          </a:lnRef>
+          <a:fillRef idx="3">
+            <a:schemeClr val="accent1"/>
+          </a:fillRef>
+          <a:effectRef idx="2">
+            <a:schemeClr val="accent1"/>
+          </a:effectRef>
+          <a:fontRef idx="minor">
+            <a:schemeClr val="lt1"/>
+          </a:fontRef>
+        </p:style>
+        <p:txBody>
+          <a:bodyPr rtlCol="0" anchor="ctr" lIns="182880" rIns="100584" tIns="91440"/>
+          <a:lstStyle/>
+          <a:p>
+            <a:pPr algn="ctr">
+              <a:defRPr sz="1700" b="1">
+                <a:solidFill>
+                  <a:srgbClr val="232D37"/>
+                </a:solidFill>
+                <a:latin typeface="Aptos Display"/>
+              </a:defRPr>
+            </a:pPr>
+            <a:r>
+              <a:t>Rider mechanics</a:t>
+            </a:r>
+          </a:p>
+          <a:p>
+            <a:pPr>
+              <a:spcBef>
+                <a:spcPts val="300"/>
+              </a:spcBef>
+              <a:defRPr sz="1200">
+                <a:solidFill>
+                  <a:srgbClr val="232D37"/>
+                </a:solidFill>
+                <a:latin typeface="Aptos"/>
+              </a:defRPr>
+            </a:pPr>
+            <a:r>
+              <a:t>Rider base can roll up and step up.</a:t>
+            </a:r>
+          </a:p>
+          <a:p>
+            <a:pPr>
+              <a:spcBef>
+                <a:spcPts val="300"/>
+              </a:spcBef>
+              <a:defRPr sz="1200">
+                <a:solidFill>
+                  <a:srgbClr val="232D37"/>
+                </a:solidFill>
+                <a:latin typeface="Aptos"/>
+              </a:defRPr>
+            </a:pPr>
+            <a:r>
+              <a:t>Payout rate applies to rider base.</a:t>
+            </a:r>
+          </a:p>
+          <a:p>
+            <a:pPr>
+              <a:spcBef>
+                <a:spcPts val="300"/>
+              </a:spcBef>
+              <a:defRPr sz="1200">
+                <a:solidFill>
+                  <a:srgbClr val="232D37"/>
+                </a:solidFill>
+                <a:latin typeface="Aptos"/>
+              </a:defRPr>
+            </a:pPr>
+            <a:r>
+              <a:t>Rider fees reduce account value.</a:t>
+            </a:r>
+          </a:p>
+          <a:p>
+            <a:pPr>
+              <a:spcBef>
+                <a:spcPts val="300"/>
+              </a:spcBef>
+              <a:defRPr sz="1200">
+                <a:solidFill>
+                  <a:srgbClr val="232D37"/>
+                </a:solidFill>
+                <a:latin typeface="Aptos"/>
+              </a:defRPr>
+            </a:pPr>
+            <a:r>
+              <a:t>Insurer-paid amount captures payout beyond available account value.</a:t>
+            </a:r>
+          </a:p>
+        </p:txBody>
+      </p:sp>
+      <p:sp>
+        <p:nvSpPr>
+          <p:cNvPr id="9" name="Rectangle 8"/>
+          <p:cNvSpPr/>
+          <p:nvPr/>
+        </p:nvSpPr>
+        <p:spPr>
+          <a:xfrm>
+            <a:off x="6117336" y="1143000"/>
+            <a:ext cx="82296" cy="4526280"/>
+          </a:xfrm>
+          <a:prstGeom prst="rect">
+            <a:avLst/>
+          </a:prstGeom>
+          <a:solidFill>
+            <a:srgbClr val="429761"/>
+          </a:solidFill>
+          <a:ln>
+            <a:noFill/>
+          </a:ln>
+        </p:spPr>
+        <p:style>
+          <a:lnRef idx="1">
+            <a:schemeClr val="accent1"/>
+          </a:lnRef>
+          <a:fillRef idx="3">
+            <a:schemeClr val="accent1"/>
+          </a:fillRef>
+          <a:effectRef idx="2">
+            <a:schemeClr val="accent1"/>
+          </a:effectRef>
+          <a:fontRef idx="minor">
+            <a:schemeClr val="lt1"/>
+          </a:fontRef>
+        </p:style>
+        <p:txBody>
+          <a:bodyPr rtlCol="0" anchor="ctr"/>
+          <a:lstStyle/>
+          <a:p>
+            <a:pPr algn="ctr"/>
+          </a:p>
+        </p:txBody>
+      </p:sp>
+      <p:sp>
+        <p:nvSpPr>
+          <p:cNvPr id="10" name="Rounded Rectangle 9"/>
+          <p:cNvSpPr/>
+          <p:nvPr/>
+        </p:nvSpPr>
+        <p:spPr>
+          <a:xfrm>
+            <a:off x="8924544" y="1143000"/>
+            <a:ext cx="2331720" cy="4526280"/>
           </a:xfrm>
           <a:prstGeom prst="roundRect">
             <a:avLst/>
@@ -7072,7 +6868,7 @@
               </a:defRPr>
             </a:pPr>
             <a:r>
-              <a:t>Page wrapper</a:t>
+              <a:t>Asset continuity</a:t>
             </a:r>
           </a:p>
           <a:p>
@@ -7088,7 +6884,7 @@
               </a:defRPr>
             </a:pPr>
             <a:r>
-              <a:t>usagePage.js → openUsagePage()</a:t>
+              <a:t>Account balance is a main Asset-chart series.</a:t>
             </a:r>
           </a:p>
           <a:p>
@@ -7104,7 +6900,7 @@
               </a:defRPr>
             </a:pPr>
             <a:r>
-              <a:t>notesPage.js → openNotesPage()</a:t>
+              <a:t>Taxable amount embedded in the balance supports ordinary-income devalue presentation.</a:t>
             </a:r>
           </a:p>
           <a:p>
@@ -7120,21 +6916,21 @@
               </a:defRPr>
             </a:pPr>
             <a:r>
-              <a:t>Both call openMdPage(file, label).</a:t>
-            </a:r>
-          </a:p>
-        </p:txBody>
-      </p:sp>
-      <p:sp>
-        <p:nvSpPr>
-          <p:cNvPr id="7" name="Rectangle 6"/>
+              <a:t>The model holds annuity data separately from brokerage basis mechanics.</a:t>
+            </a:r>
+          </a:p>
+        </p:txBody>
+      </p:sp>
+      <p:sp>
+        <p:nvSpPr>
+          <p:cNvPr id="11" name="Rectangle 10"/>
           <p:cNvSpPr/>
           <p:nvPr/>
         </p:nvSpPr>
         <p:spPr>
           <a:xfrm>
-            <a:off x="3337560" y="1234440"/>
-            <a:ext cx="82296" cy="4480560"/>
+            <a:off x="8924544" y="1143000"/>
+            <a:ext cx="82296" cy="4526280"/>
           </a:xfrm>
           <a:prstGeom prst="rect">
             <a:avLst/>
@@ -7170,334 +6966,7 @@
       </p:sp>
       <p:sp>
         <p:nvSpPr>
-          <p:cNvPr id="8" name="Rounded Rectangle 7"/>
-          <p:cNvSpPr/>
-          <p:nvPr/>
-        </p:nvSpPr>
-        <p:spPr>
-          <a:xfrm>
-            <a:off x="6126480" y="1234440"/>
-            <a:ext cx="2377440" cy="4480560"/>
-          </a:xfrm>
-          <a:prstGeom prst="roundRect">
-            <a:avLst/>
-          </a:prstGeom>
-          <a:solidFill>
-            <a:srgbClr val="EAF9F4"/>
-          </a:solidFill>
-          <a:ln w="13970">
-            <a:solidFill>
-              <a:srgbClr val="429761"/>
-            </a:solidFill>
-          </a:ln>
-        </p:spPr>
-        <p:style>
-          <a:lnRef idx="1">
-            <a:schemeClr val="accent1"/>
-          </a:lnRef>
-          <a:fillRef idx="3">
-            <a:schemeClr val="accent1"/>
-          </a:fillRef>
-          <a:effectRef idx="2">
-            <a:schemeClr val="accent1"/>
-          </a:effectRef>
-          <a:fontRef idx="minor">
-            <a:schemeClr val="lt1"/>
-          </a:fontRef>
-        </p:style>
-        <p:txBody>
-          <a:bodyPr rtlCol="0" anchor="ctr" lIns="182880" rIns="100584" tIns="91440"/>
-          <a:lstStyle/>
-          <a:p>
-            <a:pPr algn="ctr">
-              <a:defRPr sz="1700" b="1">
-                <a:solidFill>
-                  <a:srgbClr val="232D37"/>
-                </a:solidFill>
-                <a:latin typeface="Aptos Display"/>
-              </a:defRPr>
-            </a:pPr>
-            <a:r>
-              <a:t>Shared renderer</a:t>
-            </a:r>
-          </a:p>
-          <a:p>
-            <a:pPr>
-              <a:spcBef>
-                <a:spcPts val="300"/>
-              </a:spcBef>
-              <a:defRPr sz="1200">
-                <a:solidFill>
-                  <a:srgbClr val="232D37"/>
-                </a:solidFill>
-                <a:latin typeface="Aptos"/>
-              </a:defRPr>
-            </a:pPr>
-            <a:r>
-              <a:t>mdPage.js fetches file on open.</a:t>
-            </a:r>
-          </a:p>
-          <a:p>
-            <a:pPr>
-              <a:spcBef>
-                <a:spcPts val="300"/>
-              </a:spcBef>
-              <a:defRPr sz="1200">
-                <a:solidFill>
-                  <a:srgbClr val="232D37"/>
-                </a:solidFill>
-                <a:latin typeface="Aptos"/>
-              </a:defRPr>
-            </a:pPr>
-            <a:r>
-              <a:t>mdToHtml() handles supported Markdown.</a:t>
-            </a:r>
-          </a:p>
-          <a:p>
-            <a:pPr>
-              <a:spcBef>
-                <a:spcPts val="300"/>
-              </a:spcBef>
-              <a:defRPr sz="1200">
-                <a:solidFill>
-                  <a:srgbClr val="232D37"/>
-                </a:solidFill>
-                <a:latin typeface="Aptos"/>
-              </a:defRPr>
-            </a:pPr>
-            <a:r>
-              <a:t>mdPageHtml() wraps content in page chrome.</a:t>
-            </a:r>
-          </a:p>
-        </p:txBody>
-      </p:sp>
-      <p:sp>
-        <p:nvSpPr>
-          <p:cNvPr id="9" name="Rectangle 8"/>
-          <p:cNvSpPr/>
-          <p:nvPr/>
-        </p:nvSpPr>
-        <p:spPr>
-          <a:xfrm>
-            <a:off x="6126480" y="1234440"/>
-            <a:ext cx="82296" cy="4480560"/>
-          </a:xfrm>
-          <a:prstGeom prst="rect">
-            <a:avLst/>
-          </a:prstGeom>
-          <a:solidFill>
-            <a:srgbClr val="429761"/>
-          </a:solidFill>
-          <a:ln>
-            <a:noFill/>
-          </a:ln>
-        </p:spPr>
-        <p:style>
-          <a:lnRef idx="1">
-            <a:schemeClr val="accent1"/>
-          </a:lnRef>
-          <a:fillRef idx="3">
-            <a:schemeClr val="accent1"/>
-          </a:fillRef>
-          <a:effectRef idx="2">
-            <a:schemeClr val="accent1"/>
-          </a:effectRef>
-          <a:fontRef idx="minor">
-            <a:schemeClr val="lt1"/>
-          </a:fontRef>
-        </p:style>
-        <p:txBody>
-          <a:bodyPr rtlCol="0" anchor="ctr"/>
-          <a:lstStyle/>
-          <a:p>
-            <a:pPr algn="ctr"/>
-          </a:p>
-        </p:txBody>
-      </p:sp>
-      <p:sp>
-        <p:nvSpPr>
-          <p:cNvPr id="10" name="Rounded Rectangle 9"/>
-          <p:cNvSpPr/>
-          <p:nvPr/>
-        </p:nvSpPr>
-        <p:spPr>
-          <a:xfrm>
-            <a:off x="8915400" y="1234440"/>
-            <a:ext cx="2377440" cy="4480560"/>
-          </a:xfrm>
-          <a:prstGeom prst="roundRect">
-            <a:avLst/>
-          </a:prstGeom>
-          <a:solidFill>
-            <a:srgbClr val="FFF6E8"/>
-          </a:solidFill>
-          <a:ln w="13970">
-            <a:solidFill>
-              <a:srgbClr val="E5892A"/>
-            </a:solidFill>
-          </a:ln>
-        </p:spPr>
-        <p:style>
-          <a:lnRef idx="1">
-            <a:schemeClr val="accent1"/>
-          </a:lnRef>
-          <a:fillRef idx="3">
-            <a:schemeClr val="accent1"/>
-          </a:fillRef>
-          <a:effectRef idx="2">
-            <a:schemeClr val="accent1"/>
-          </a:effectRef>
-          <a:fontRef idx="minor">
-            <a:schemeClr val="lt1"/>
-          </a:fontRef>
-        </p:style>
-        <p:txBody>
-          <a:bodyPr rtlCol="0" anchor="ctr" lIns="182880" rIns="100584" tIns="91440"/>
-          <a:lstStyle/>
-          <a:p>
-            <a:pPr algn="ctr">
-              <a:defRPr sz="1700" b="1">
-                <a:solidFill>
-                  <a:srgbClr val="232D37"/>
-                </a:solidFill>
-                <a:latin typeface="Aptos Display"/>
-              </a:defRPr>
-            </a:pPr>
-            <a:r>
-              <a:t>Content files</a:t>
-            </a:r>
-          </a:p>
-          <a:p>
-            <a:pPr>
-              <a:spcBef>
-                <a:spcPts val="300"/>
-              </a:spcBef>
-              <a:defRPr sz="1200">
-                <a:solidFill>
-                  <a:srgbClr val="232D37"/>
-                </a:solidFill>
-                <a:latin typeface="Aptos"/>
-              </a:defRPr>
-            </a:pPr>
-            <a:r>
-              <a:t>misc/Usage.md</a:t>
-            </a:r>
-          </a:p>
-          <a:p>
-            <a:pPr>
-              <a:spcBef>
-                <a:spcPts val="300"/>
-              </a:spcBef>
-              <a:defRPr sz="1200">
-                <a:solidFill>
-                  <a:srgbClr val="232D37"/>
-                </a:solidFill>
-                <a:latin typeface="Aptos"/>
-              </a:defRPr>
-            </a:pPr>
-            <a:r>
-              <a:t>misc/Note4User.md</a:t>
-            </a:r>
-          </a:p>
-          <a:p>
-            <a:pPr>
-              <a:spcBef>
-                <a:spcPts val="300"/>
-              </a:spcBef>
-              <a:defRPr sz="1200">
-                <a:solidFill>
-                  <a:srgbClr val="232D37"/>
-                </a:solidFill>
-                <a:latin typeface="Aptos"/>
-              </a:defRPr>
-            </a:pPr>
-            <a:r>
-              <a:t>Edit content; next click reflects it.</a:t>
-            </a:r>
-          </a:p>
-        </p:txBody>
-      </p:sp>
-      <p:sp>
-        <p:nvSpPr>
-          <p:cNvPr id="11" name="Rectangle 10"/>
-          <p:cNvSpPr/>
-          <p:nvPr/>
-        </p:nvSpPr>
-        <p:spPr>
-          <a:xfrm>
-            <a:off x="8915400" y="1234440"/>
-            <a:ext cx="82296" cy="4480560"/>
-          </a:xfrm>
-          <a:prstGeom prst="rect">
-            <a:avLst/>
-          </a:prstGeom>
-          <a:solidFill>
-            <a:srgbClr val="E5892A"/>
-          </a:solidFill>
-          <a:ln>
-            <a:noFill/>
-          </a:ln>
-        </p:spPr>
-        <p:style>
-          <a:lnRef idx="1">
-            <a:schemeClr val="accent1"/>
-          </a:lnRef>
-          <a:fillRef idx="3">
-            <a:schemeClr val="accent1"/>
-          </a:fillRef>
-          <a:effectRef idx="2">
-            <a:schemeClr val="accent1"/>
-          </a:effectRef>
-          <a:fontRef idx="minor">
-            <a:schemeClr val="lt1"/>
-          </a:fontRef>
-        </p:style>
-        <p:txBody>
-          <a:bodyPr rtlCol="0" anchor="ctr"/>
-          <a:lstStyle/>
-          <a:p>
-            <a:pPr algn="ctr"/>
-          </a:p>
-        </p:txBody>
-      </p:sp>
-      <p:cxnSp>
-        <p:nvCxnSpPr>
-          <p:cNvPr id="12" name="Connector 11"/>
-          <p:cNvCxnSpPr/>
-          <p:nvPr/>
-        </p:nvCxnSpPr>
-        <p:spPr>
-          <a:xfrm>
-            <a:off x="2971800" y="3474720"/>
-            <a:ext cx="228600" cy="0"/>
-          </a:xfrm>
-          <a:prstGeom prst="line">
-            <a:avLst/>
-          </a:prstGeom>
-          <a:ln w="22860">
-            <a:solidFill>
-              <a:srgbClr val="266EB2"/>
-            </a:solidFill>
-          </a:ln>
-        </p:spPr>
-        <p:style>
-          <a:lnRef idx="2">
-            <a:schemeClr val="accent1"/>
-          </a:lnRef>
-          <a:fillRef idx="0">
-            <a:schemeClr val="accent1"/>
-          </a:fillRef>
-          <a:effectRef idx="1">
-            <a:schemeClr val="accent1"/>
-          </a:effectRef>
-          <a:fontRef idx="minor">
-            <a:schemeClr val="tx1"/>
-          </a:fontRef>
-        </p:style>
-      </p:cxnSp>
-      <p:sp>
-        <p:nvSpPr>
-          <p:cNvPr id="13" name="Rectangle 12"/>
+          <p:cNvPr id="12" name="Rectangle 11"/>
           <p:cNvSpPr/>
           <p:nvPr/>
         </p:nvSpPr>
@@ -7540,7 +7009,7 @@
       </p:sp>
       <p:sp>
         <p:nvSpPr>
-          <p:cNvPr id="14" name="TextBox 13"/>
+          <p:cNvPr id="13" name="TextBox 12"/>
           <p:cNvSpPr txBox="1"/>
           <p:nvPr/>
         </p:nvSpPr>
@@ -7569,235 +7038,7 @@
               </a:defRPr>
             </a:pPr>
             <a:r>
-              <a:t>Retirement Income Planner • Architecture overview • Assumption controls and Markdown Usage update</a:t>
-            </a:r>
-          </a:p>
-        </p:txBody>
-      </p:sp>
-      <p:cxnSp>
-        <p:nvCxnSpPr>
-          <p:cNvPr id="15" name="Connector 14"/>
-          <p:cNvCxnSpPr/>
-          <p:nvPr/>
-        </p:nvCxnSpPr>
-        <p:spPr>
-          <a:xfrm>
-            <a:off x="5760720" y="3474720"/>
-            <a:ext cx="228600" cy="0"/>
-          </a:xfrm>
-          <a:prstGeom prst="line">
-            <a:avLst/>
-          </a:prstGeom>
-          <a:ln w="22860">
-            <a:solidFill>
-              <a:srgbClr val="7852B0"/>
-            </a:solidFill>
-          </a:ln>
-        </p:spPr>
-        <p:style>
-          <a:lnRef idx="2">
-            <a:schemeClr val="accent1"/>
-          </a:lnRef>
-          <a:fillRef idx="0">
-            <a:schemeClr val="accent1"/>
-          </a:fillRef>
-          <a:effectRef idx="1">
-            <a:schemeClr val="accent1"/>
-          </a:effectRef>
-          <a:fontRef idx="minor">
-            <a:schemeClr val="tx1"/>
-          </a:fontRef>
-        </p:style>
-      </p:cxnSp>
-      <p:sp>
-        <p:nvSpPr>
-          <p:cNvPr id="16" name="Rectangle 15"/>
-          <p:cNvSpPr/>
-          <p:nvPr/>
-        </p:nvSpPr>
-        <p:spPr>
-          <a:xfrm>
-            <a:off x="502920" y="6473952"/>
-            <a:ext cx="11183112" cy="13716"/>
-          </a:xfrm>
-          <a:prstGeom prst="rect">
-            <a:avLst/>
-          </a:prstGeom>
-          <a:solidFill>
-            <a:srgbClr val="D2DCE5"/>
-          </a:solidFill>
-          <a:ln>
-            <a:noFill/>
-          </a:ln>
-        </p:spPr>
-        <p:style>
-          <a:lnRef idx="1">
-            <a:schemeClr val="accent1"/>
-          </a:lnRef>
-          <a:fillRef idx="3">
-            <a:schemeClr val="accent1"/>
-          </a:fillRef>
-          <a:effectRef idx="2">
-            <a:schemeClr val="accent1"/>
-          </a:effectRef>
-          <a:fontRef idx="minor">
-            <a:schemeClr val="lt1"/>
-          </a:fontRef>
-        </p:style>
-        <p:txBody>
-          <a:bodyPr rtlCol="0" anchor="ctr"/>
-          <a:lstStyle/>
-          <a:p>
-            <a:pPr algn="ctr"/>
-          </a:p>
-        </p:txBody>
-      </p:sp>
-      <p:sp>
-        <p:nvSpPr>
-          <p:cNvPr id="17" name="TextBox 16"/>
-          <p:cNvSpPr txBox="1"/>
-          <p:nvPr/>
-        </p:nvSpPr>
-        <p:spPr>
-          <a:xfrm>
-            <a:off x="530352" y="6510528"/>
-            <a:ext cx="10881360" cy="146304"/>
-          </a:xfrm>
-          <a:prstGeom prst="rect">
-            <a:avLst/>
-          </a:prstGeom>
-          <a:noFill/>
-        </p:spPr>
-        <p:txBody>
-          <a:bodyPr wrap="none" anchor="ctr">
-            <a:spAutoFit/>
-          </a:bodyPr>
-          <a:lstStyle/>
-          <a:p>
-            <a:pPr algn="l">
-              <a:defRPr sz="850" b="0">
-                <a:solidFill>
-                  <a:srgbClr val="5D6C7A"/>
-                </a:solidFill>
-                <a:latin typeface="Aptos"/>
-              </a:defRPr>
-            </a:pPr>
-            <a:r>
-              <a:t>Retirement Income Planner • Architecture overview • Assumption controls and Markdown Usage update</a:t>
-            </a:r>
-          </a:p>
-        </p:txBody>
-      </p:sp>
-      <p:cxnSp>
-        <p:nvCxnSpPr>
-          <p:cNvPr id="18" name="Connector 17"/>
-          <p:cNvCxnSpPr/>
-          <p:nvPr/>
-        </p:nvCxnSpPr>
-        <p:spPr>
-          <a:xfrm>
-            <a:off x="8549640" y="3474720"/>
-            <a:ext cx="228600" cy="0"/>
-          </a:xfrm>
-          <a:prstGeom prst="line">
-            <a:avLst/>
-          </a:prstGeom>
-          <a:ln w="22860">
-            <a:solidFill>
-              <a:srgbClr val="429761"/>
-            </a:solidFill>
-          </a:ln>
-        </p:spPr>
-        <p:style>
-          <a:lnRef idx="2">
-            <a:schemeClr val="accent1"/>
-          </a:lnRef>
-          <a:fillRef idx="0">
-            <a:schemeClr val="accent1"/>
-          </a:fillRef>
-          <a:effectRef idx="1">
-            <a:schemeClr val="accent1"/>
-          </a:effectRef>
-          <a:fontRef idx="minor">
-            <a:schemeClr val="tx1"/>
-          </a:fontRef>
-        </p:style>
-      </p:cxnSp>
-      <p:sp>
-        <p:nvSpPr>
-          <p:cNvPr id="19" name="Rectangle 18"/>
-          <p:cNvSpPr/>
-          <p:nvPr/>
-        </p:nvSpPr>
-        <p:spPr>
-          <a:xfrm>
-            <a:off x="502920" y="6473952"/>
-            <a:ext cx="11183112" cy="13716"/>
-          </a:xfrm>
-          <a:prstGeom prst="rect">
-            <a:avLst/>
-          </a:prstGeom>
-          <a:solidFill>
-            <a:srgbClr val="D2DCE5"/>
-          </a:solidFill>
-          <a:ln>
-            <a:noFill/>
-          </a:ln>
-        </p:spPr>
-        <p:style>
-          <a:lnRef idx="1">
-            <a:schemeClr val="accent1"/>
-          </a:lnRef>
-          <a:fillRef idx="3">
-            <a:schemeClr val="accent1"/>
-          </a:fillRef>
-          <a:effectRef idx="2">
-            <a:schemeClr val="accent1"/>
-          </a:effectRef>
-          <a:fontRef idx="minor">
-            <a:schemeClr val="lt1"/>
-          </a:fontRef>
-        </p:style>
-        <p:txBody>
-          <a:bodyPr rtlCol="0" anchor="ctr"/>
-          <a:lstStyle/>
-          <a:p>
-            <a:pPr algn="ctr"/>
-          </a:p>
-        </p:txBody>
-      </p:sp>
-      <p:sp>
-        <p:nvSpPr>
-          <p:cNvPr id="20" name="TextBox 19"/>
-          <p:cNvSpPr txBox="1"/>
-          <p:nvPr/>
-        </p:nvSpPr>
-        <p:spPr>
-          <a:xfrm>
-            <a:off x="530352" y="6510528"/>
-            <a:ext cx="10881360" cy="146304"/>
-          </a:xfrm>
-          <a:prstGeom prst="rect">
-            <a:avLst/>
-          </a:prstGeom>
-          <a:noFill/>
-        </p:spPr>
-        <p:txBody>
-          <a:bodyPr wrap="none" anchor="ctr">
-            <a:spAutoFit/>
-          </a:bodyPr>
-          <a:lstStyle/>
-          <a:p>
-            <a:pPr algn="l">
-              <a:defRPr sz="850" b="0">
-                <a:solidFill>
-                  <a:srgbClr val="5D6C7A"/>
-                </a:solidFill>
-                <a:latin typeface="Aptos"/>
-              </a:defRPr>
-            </a:pPr>
-            <a:r>
-              <a:t>Retirement Income Planner • Architecture overview • Assumption controls and Markdown Usage update</a:t>
+              <a:t>Retirement Income Planner • Architecture overview • Annuity-model update</a:t>
             </a:r>
           </a:p>
         </p:txBody>
@@ -7859,7 +7100,7 @@
               </a:defRPr>
             </a:pPr>
             <a:r>
-              <a:t>Usage and Notes: shared behavior, separate audiences</a:t>
+              <a:t>Annuity data enters the household tax and cash-flow paths</a:t>
             </a:r>
           </a:p>
         </p:txBody>
@@ -7895,7 +7136,7 @@
               </a:defRPr>
             </a:pPr>
             <a:r>
-              <a:t>The new Usage guide documents app operation; the existing Notes page retains user-facing plan notes.</a:t>
+              <a:t>The row contract makes annuity payouts visible in exactly the places that need them, while preserving the single-projection design.</a:t>
             </a:r>
           </a:p>
         </p:txBody>
@@ -7908,8 +7149,8 @@
         </p:nvSpPr>
         <p:spPr>
           <a:xfrm>
-            <a:off x="640080" y="1234440"/>
-            <a:ext cx="3429000" cy="4434840"/>
+            <a:off x="640080" y="1188720"/>
+            <a:ext cx="3246120" cy="4526280"/>
           </a:xfrm>
           <a:prstGeom prst="roundRect">
             <a:avLst/>
@@ -7950,7 +7191,7 @@
               </a:defRPr>
             </a:pPr>
             <a:r>
-              <a:t>Usage</a:t>
+              <a:t>Income and cash</a:t>
             </a:r>
           </a:p>
           <a:p>
@@ -7966,7 +7207,7 @@
               </a:defRPr>
             </a:pPr>
             <a:r>
-              <a:t>Topbar position: immediately left of Save to file.</a:t>
+              <a:t>annuity / annuityByPerson</a:t>
             </a:r>
           </a:p>
           <a:p>
@@ -7982,7 +7223,7 @@
               </a:defRPr>
             </a:pPr>
             <a:r>
-              <a:t>Source: misc/Usage.md.</a:t>
+              <a:t>annuityTE / annuityTEByPerson</a:t>
             </a:r>
           </a:p>
           <a:p>
@@ -7998,7 +7239,7 @@
               </a:defRPr>
             </a:pPr>
             <a:r>
-              <a:t>Purpose: explain how to operate the planner, including display-only controls such as Asset devalue sliders.</a:t>
+              <a:t>Taxable + tax-exempt payouts enter cashIncome</a:t>
             </a:r>
           </a:p>
           <a:p>
@@ -8014,7 +7255,7 @@
               </a:defRPr>
             </a:pPr>
             <a:r>
-              <a:t>No code edit required to revise guidance.</a:t>
+              <a:t>Taxable payout enters nonSSOrdinary</a:t>
             </a:r>
           </a:p>
         </p:txBody>
@@ -8027,8 +7268,8 @@
         </p:nvSpPr>
         <p:spPr>
           <a:xfrm>
-            <a:off x="640080" y="1234440"/>
-            <a:ext cx="82296" cy="4434840"/>
+            <a:off x="640080" y="1188720"/>
+            <a:ext cx="82296" cy="4526280"/>
           </a:xfrm>
           <a:prstGeom prst="rect">
             <a:avLst/>
@@ -8070,170 +7311,8 @@
         </p:nvSpPr>
         <p:spPr>
           <a:xfrm>
-            <a:off x="4389120" y="1234440"/>
-            <a:ext cx="3429000" cy="4434840"/>
-          </a:xfrm>
-          <a:prstGeom prst="roundRect">
-            <a:avLst/>
-          </a:prstGeom>
-          <a:solidFill>
-            <a:srgbClr val="F7EFFF"/>
-          </a:solidFill>
-          <a:ln w="13970">
-            <a:solidFill>
-              <a:srgbClr val="7852B0"/>
-            </a:solidFill>
-          </a:ln>
-        </p:spPr>
-        <p:style>
-          <a:lnRef idx="1">
-            <a:schemeClr val="accent1"/>
-          </a:lnRef>
-          <a:fillRef idx="3">
-            <a:schemeClr val="accent1"/>
-          </a:fillRef>
-          <a:effectRef idx="2">
-            <a:schemeClr val="accent1"/>
-          </a:effectRef>
-          <a:fontRef idx="minor">
-            <a:schemeClr val="lt1"/>
-          </a:fontRef>
-        </p:style>
-        <p:txBody>
-          <a:bodyPr rtlCol="0" anchor="ctr" lIns="182880" rIns="100584" tIns="91440"/>
-          <a:lstStyle/>
-          <a:p>
-            <a:pPr algn="ctr">
-              <a:defRPr sz="1700" b="1">
-                <a:solidFill>
-                  <a:srgbClr val="232D37"/>
-                </a:solidFill>
-                <a:latin typeface="Aptos Display"/>
-              </a:defRPr>
-            </a:pPr>
-            <a:r>
-              <a:t>Notes</a:t>
-            </a:r>
-          </a:p>
-          <a:p>
-            <a:pPr>
-              <a:spcBef>
-                <a:spcPts val="300"/>
-              </a:spcBef>
-              <a:defRPr sz="1200">
-                <a:solidFill>
-                  <a:srgbClr val="232D37"/>
-                </a:solidFill>
-                <a:latin typeface="Aptos"/>
-              </a:defRPr>
-            </a:pPr>
-            <a:r>
-              <a:t>Topbar position: right of Formulas.</a:t>
-            </a:r>
-          </a:p>
-          <a:p>
-            <a:pPr>
-              <a:spcBef>
-                <a:spcPts val="300"/>
-              </a:spcBef>
-              <a:defRPr sz="1200">
-                <a:solidFill>
-                  <a:srgbClr val="232D37"/>
-                </a:solidFill>
-                <a:latin typeface="Aptos"/>
-              </a:defRPr>
-            </a:pPr>
-            <a:r>
-              <a:t>Source: misc/Note4User.md.</a:t>
-            </a:r>
-          </a:p>
-          <a:p>
-            <a:pPr>
-              <a:spcBef>
-                <a:spcPts val="300"/>
-              </a:spcBef>
-              <a:defRPr sz="1200">
-                <a:solidFill>
-                  <a:srgbClr val="232D37"/>
-                </a:solidFill>
-                <a:latin typeface="Aptos"/>
-              </a:defRPr>
-            </a:pPr>
-            <a:r>
-              <a:t>Purpose: user-facing notes associated with the planner.</a:t>
-            </a:r>
-          </a:p>
-          <a:p>
-            <a:pPr>
-              <a:spcBef>
-                <a:spcPts val="300"/>
-              </a:spcBef>
-              <a:defRPr sz="1200">
-                <a:solidFill>
-                  <a:srgbClr val="232D37"/>
-                </a:solidFill>
-                <a:latin typeface="Aptos"/>
-              </a:defRPr>
-            </a:pPr>
-            <a:r>
-              <a:t>Uses the same shared Markdown renderer.</a:t>
-            </a:r>
-          </a:p>
-        </p:txBody>
-      </p:sp>
-      <p:sp>
-        <p:nvSpPr>
-          <p:cNvPr id="7" name="Rectangle 6"/>
-          <p:cNvSpPr/>
-          <p:nvPr/>
-        </p:nvSpPr>
-        <p:spPr>
-          <a:xfrm>
-            <a:off x="4389120" y="1234440"/>
-            <a:ext cx="82296" cy="4434840"/>
-          </a:xfrm>
-          <a:prstGeom prst="rect">
-            <a:avLst/>
-          </a:prstGeom>
-          <a:solidFill>
-            <a:srgbClr val="7852B0"/>
-          </a:solidFill>
-          <a:ln>
-            <a:noFill/>
-          </a:ln>
-        </p:spPr>
-        <p:style>
-          <a:lnRef idx="1">
-            <a:schemeClr val="accent1"/>
-          </a:lnRef>
-          <a:fillRef idx="3">
-            <a:schemeClr val="accent1"/>
-          </a:fillRef>
-          <a:effectRef idx="2">
-            <a:schemeClr val="accent1"/>
-          </a:effectRef>
-          <a:fontRef idx="minor">
-            <a:schemeClr val="lt1"/>
-          </a:fontRef>
-        </p:style>
-        <p:txBody>
-          <a:bodyPr rtlCol="0" anchor="ctr"/>
-          <a:lstStyle/>
-          <a:p>
-            <a:pPr algn="ctr"/>
-          </a:p>
-        </p:txBody>
-      </p:sp>
-      <p:sp>
-        <p:nvSpPr>
-          <p:cNvPr id="8" name="Rounded Rectangle 7"/>
-          <p:cNvSpPr/>
-          <p:nvPr/>
-        </p:nvSpPr>
-        <p:spPr>
-          <a:xfrm>
-            <a:off x="8138160" y="1234440"/>
-            <a:ext cx="3429000" cy="4434840"/>
+            <a:off x="4462272" y="1188720"/>
+            <a:ext cx="3246120" cy="4526280"/>
           </a:xfrm>
           <a:prstGeom prst="roundRect">
             <a:avLst/>
@@ -8274,7 +7353,7 @@
               </a:defRPr>
             </a:pPr>
             <a:r>
-              <a:t>Runtime constraint</a:t>
+              <a:t>Tax and thresholds</a:t>
             </a:r>
           </a:p>
           <a:p>
@@ -8290,7 +7369,7 @@
               </a:defRPr>
             </a:pPr>
             <a:r>
-              <a:t>Sibling-file fetch works under http(s).</a:t>
+              <a:t>Tax-exempt payout joins provisional income.</a:t>
             </a:r>
           </a:p>
           <a:p>
@@ -8306,7 +7385,7 @@
               </a:defRPr>
             </a:pPr>
             <a:r>
-              <a:t>Chrome blocks it under file://.</a:t>
+              <a:t>Tax-exempt payout joins MAGI and IRMAA look-back.</a:t>
             </a:r>
           </a:p>
           <a:p>
@@ -8322,21 +7401,37 @@
               </a:defRPr>
             </a:pPr>
             <a:r>
-              <a:t>On failure, the generated tab explains the limitation and workarounds rather than failing silently.</a:t>
-            </a:r>
-          </a:p>
-        </p:txBody>
-      </p:sp>
-      <p:sp>
-        <p:nvSpPr>
-          <p:cNvPr id="9" name="Rectangle 8"/>
+              <a:t>Non-qualified taxable payout contributes to NII.</a:t>
+            </a:r>
+          </a:p>
+          <a:p>
+            <a:pPr>
+              <a:spcBef>
+                <a:spcPts val="300"/>
+              </a:spcBef>
+              <a:defRPr sz="1200">
+                <a:solidFill>
+                  <a:srgbClr val="232D37"/>
+                </a:solidFill>
+                <a:latin typeface="Aptos"/>
+              </a:defRPr>
+            </a:pPr>
+            <a:r>
+              <a:t>No chart or export rebuilds this treatment.</a:t>
+            </a:r>
+          </a:p>
+        </p:txBody>
+      </p:sp>
+      <p:sp>
+        <p:nvSpPr>
+          <p:cNvPr id="7" name="Rectangle 6"/>
           <p:cNvSpPr/>
           <p:nvPr/>
         </p:nvSpPr>
         <p:spPr>
           <a:xfrm>
-            <a:off x="8138160" y="1234440"/>
-            <a:ext cx="82296" cy="4434840"/>
+            <a:off x="4462272" y="1188720"/>
+            <a:ext cx="82296" cy="4526280"/>
           </a:xfrm>
           <a:prstGeom prst="rect">
             <a:avLst/>
@@ -8372,6 +7467,152 @@
       </p:sp>
       <p:sp>
         <p:nvSpPr>
+          <p:cNvPr id="8" name="Rounded Rectangle 7"/>
+          <p:cNvSpPr/>
+          <p:nvPr/>
+        </p:nvSpPr>
+        <p:spPr>
+          <a:xfrm>
+            <a:off x="8284464" y="1188720"/>
+            <a:ext cx="3246120" cy="4526280"/>
+          </a:xfrm>
+          <a:prstGeom prst="roundRect">
+            <a:avLst/>
+          </a:prstGeom>
+          <a:solidFill>
+            <a:srgbClr val="EAF9F4"/>
+          </a:solidFill>
+          <a:ln w="13970">
+            <a:solidFill>
+              <a:srgbClr val="429761"/>
+            </a:solidFill>
+          </a:ln>
+        </p:spPr>
+        <p:style>
+          <a:lnRef idx="1">
+            <a:schemeClr val="accent1"/>
+          </a:lnRef>
+          <a:fillRef idx="3">
+            <a:schemeClr val="accent1"/>
+          </a:fillRef>
+          <a:effectRef idx="2">
+            <a:schemeClr val="accent1"/>
+          </a:effectRef>
+          <a:fontRef idx="minor">
+            <a:schemeClr val="lt1"/>
+          </a:fontRef>
+        </p:style>
+        <p:txBody>
+          <a:bodyPr rtlCol="0" anchor="ctr" lIns="182880" rIns="100584" tIns="91440"/>
+          <a:lstStyle/>
+          <a:p>
+            <a:pPr algn="ctr">
+              <a:defRPr sz="1700" b="1">
+                <a:solidFill>
+                  <a:srgbClr val="232D37"/>
+                </a:solidFill>
+                <a:latin typeface="Aptos Display"/>
+              </a:defRPr>
+            </a:pPr>
+            <a:r>
+              <a:t>Asset and contract outputs</a:t>
+            </a:r>
+          </a:p>
+          <a:p>
+            <a:pPr>
+              <a:spcBef>
+                <a:spcPts val="300"/>
+              </a:spcBef>
+              <a:defRPr sz="1200">
+                <a:solidFill>
+                  <a:srgbClr val="232D37"/>
+                </a:solidFill>
+                <a:latin typeface="Aptos"/>
+              </a:defRPr>
+            </a:pPr>
+            <a:r>
+              <a:t>annuityBalance</a:t>
+            </a:r>
+          </a:p>
+          <a:p>
+            <a:pPr>
+              <a:spcBef>
+                <a:spcPts val="300"/>
+              </a:spcBef>
+              <a:defRPr sz="1200">
+                <a:solidFill>
+                  <a:srgbClr val="232D37"/>
+                </a:solidFill>
+                <a:latin typeface="Aptos"/>
+              </a:defRPr>
+            </a:pPr>
+            <a:r>
+              <a:t>annuitiesByPerson[i][ai]: balance, base, payout, taxable, taxFree, insurerPaid, riderFee, taxableEmbedded, rider, nonQual, live</a:t>
+            </a:r>
+          </a:p>
+          <a:p>
+            <a:pPr>
+              <a:spcBef>
+                <a:spcPts val="300"/>
+              </a:spcBef>
+              <a:defRPr sz="1200">
+                <a:solidFill>
+                  <a:srgbClr val="232D37"/>
+                </a:solidFill>
+                <a:latin typeface="Aptos"/>
+              </a:defRPr>
+            </a:pPr>
+            <a:r>
+              <a:t>Used by Asset chart, Excel sheet, and chat context.</a:t>
+            </a:r>
+          </a:p>
+        </p:txBody>
+      </p:sp>
+      <p:sp>
+        <p:nvSpPr>
+          <p:cNvPr id="9" name="Rectangle 8"/>
+          <p:cNvSpPr/>
+          <p:nvPr/>
+        </p:nvSpPr>
+        <p:spPr>
+          <a:xfrm>
+            <a:off x="8284464" y="1188720"/>
+            <a:ext cx="82296" cy="4526280"/>
+          </a:xfrm>
+          <a:prstGeom prst="rect">
+            <a:avLst/>
+          </a:prstGeom>
+          <a:solidFill>
+            <a:srgbClr val="429761"/>
+          </a:solidFill>
+          <a:ln>
+            <a:noFill/>
+          </a:ln>
+        </p:spPr>
+        <p:style>
+          <a:lnRef idx="1">
+            <a:schemeClr val="accent1"/>
+          </a:lnRef>
+          <a:fillRef idx="3">
+            <a:schemeClr val="accent1"/>
+          </a:fillRef>
+          <a:effectRef idx="2">
+            <a:schemeClr val="accent1"/>
+          </a:effectRef>
+          <a:fontRef idx="minor">
+            <a:schemeClr val="lt1"/>
+          </a:fontRef>
+        </p:style>
+        <p:txBody>
+          <a:bodyPr rtlCol="0" anchor="ctr"/>
+          <a:lstStyle/>
+          <a:p>
+            <a:pPr algn="ctr"/>
+          </a:p>
+        </p:txBody>
+      </p:sp>
+      <p:sp>
+        <p:nvSpPr>
           <p:cNvPr id="10" name="Rectangle 9"/>
           <p:cNvSpPr/>
           <p:nvPr/>
@@ -8444,7 +7685,7 @@
               </a:defRPr>
             </a:pPr>
             <a:r>
-              <a:t>Retirement Income Planner • Architecture overview • Assumption controls and Markdown Usage update</a:t>
+              <a:t>Retirement Income Planner • Architecture overview • Annuity-model update</a:t>
             </a:r>
           </a:p>
         </p:txBody>
@@ -8506,7 +7747,7 @@
               </a:defRPr>
             </a:pPr>
             <a:r>
-              <a:t>Why this update matters to the larger architecture</a:t>
+              <a:t>Display and reporting additions</a:t>
             </a:r>
           </a:p>
         </p:txBody>
@@ -8542,7 +7783,7 @@
               </a:defRPr>
             </a:pPr>
             <a:r>
-              <a:t>These additions increase user control and documentation quality without bypassing the state → compute → projection contracts.</a:t>
+              <a:t>The new contract output is presented consistently across interactive charts, downloads, explainers, and plan-aware chat.</a:t>
             </a:r>
           </a:p>
         </p:txBody>
@@ -8555,8 +7796,300 @@
         </p:nvSpPr>
         <p:spPr>
           <a:xfrm>
-            <a:off x="594360" y="1188720"/>
-            <a:ext cx="3337560" cy="4526280"/>
+            <a:off x="502920" y="1143000"/>
+            <a:ext cx="2514600" cy="4526280"/>
+          </a:xfrm>
+          <a:prstGeom prst="roundRect">
+            <a:avLst/>
+          </a:prstGeom>
+          <a:solidFill>
+            <a:srgbClr val="E9F4FF"/>
+          </a:solidFill>
+          <a:ln w="13970">
+            <a:solidFill>
+              <a:srgbClr val="266EB2"/>
+            </a:solidFill>
+          </a:ln>
+        </p:spPr>
+        <p:style>
+          <a:lnRef idx="1">
+            <a:schemeClr val="accent1"/>
+          </a:lnRef>
+          <a:fillRef idx="3">
+            <a:schemeClr val="accent1"/>
+          </a:fillRef>
+          <a:effectRef idx="2">
+            <a:schemeClr val="accent1"/>
+          </a:effectRef>
+          <a:fontRef idx="minor">
+            <a:schemeClr val="lt1"/>
+          </a:fontRef>
+        </p:style>
+        <p:txBody>
+          <a:bodyPr rtlCol="0" anchor="ctr" lIns="182880" rIns="100584" tIns="91440"/>
+          <a:lstStyle/>
+          <a:p>
+            <a:pPr algn="ctr">
+              <a:defRPr sz="1700" b="1">
+                <a:solidFill>
+                  <a:srgbClr val="232D37"/>
+                </a:solidFill>
+                <a:latin typeface="Aptos Display"/>
+              </a:defRPr>
+            </a:pPr>
+            <a:r>
+              <a:t>Income chart</a:t>
+            </a:r>
+          </a:p>
+          <a:p>
+            <a:pPr>
+              <a:spcBef>
+                <a:spcPts val="300"/>
+              </a:spcBef>
+              <a:defRPr sz="1200">
+                <a:solidFill>
+                  <a:srgbClr val="232D37"/>
+                </a:solidFill>
+                <a:latin typeface="Aptos"/>
+              </a:defRPr>
+            </a:pPr>
+            <a:r>
+              <a:t>Adds annuity taxable payout and tax-exempt payout bands.</a:t>
+            </a:r>
+          </a:p>
+          <a:p>
+            <a:pPr>
+              <a:spcBef>
+                <a:spcPts val="300"/>
+              </a:spcBef>
+              <a:defRPr sz="1200">
+                <a:solidFill>
+                  <a:srgbClr val="232D37"/>
+                </a:solidFill>
+                <a:latin typeface="Aptos"/>
+              </a:defRPr>
+            </a:pPr>
+            <a:r>
+              <a:t>Taxable and tax-exempt treatment stays visually distinct.</a:t>
+            </a:r>
+          </a:p>
+          <a:p>
+            <a:pPr>
+              <a:spcBef>
+                <a:spcPts val="300"/>
+              </a:spcBef>
+              <a:defRPr sz="1200">
+                <a:solidFill>
+                  <a:srgbClr val="232D37"/>
+                </a:solidFill>
+                <a:latin typeface="Aptos"/>
+              </a:defRPr>
+            </a:pPr>
+            <a:r>
+              <a:t>Income totals continue to derive from projection rows.</a:t>
+            </a:r>
+          </a:p>
+        </p:txBody>
+      </p:sp>
+      <p:sp>
+        <p:nvSpPr>
+          <p:cNvPr id="5" name="Rectangle 4"/>
+          <p:cNvSpPr/>
+          <p:nvPr/>
+        </p:nvSpPr>
+        <p:spPr>
+          <a:xfrm>
+            <a:off x="502920" y="1143000"/>
+            <a:ext cx="82296" cy="4526280"/>
+          </a:xfrm>
+          <a:prstGeom prst="rect">
+            <a:avLst/>
+          </a:prstGeom>
+          <a:solidFill>
+            <a:srgbClr val="266EB2"/>
+          </a:solidFill>
+          <a:ln>
+            <a:noFill/>
+          </a:ln>
+        </p:spPr>
+        <p:style>
+          <a:lnRef idx="1">
+            <a:schemeClr val="accent1"/>
+          </a:lnRef>
+          <a:fillRef idx="3">
+            <a:schemeClr val="accent1"/>
+          </a:fillRef>
+          <a:effectRef idx="2">
+            <a:schemeClr val="accent1"/>
+          </a:effectRef>
+          <a:fontRef idx="minor">
+            <a:schemeClr val="lt1"/>
+          </a:fontRef>
+        </p:style>
+        <p:txBody>
+          <a:bodyPr rtlCol="0" anchor="ctr"/>
+          <a:lstStyle/>
+          <a:p>
+            <a:pPr algn="ctr"/>
+          </a:p>
+        </p:txBody>
+      </p:sp>
+      <p:sp>
+        <p:nvSpPr>
+          <p:cNvPr id="6" name="Rounded Rectangle 5"/>
+          <p:cNvSpPr/>
+          <p:nvPr/>
+        </p:nvSpPr>
+        <p:spPr>
+          <a:xfrm>
+            <a:off x="3401568" y="1143000"/>
+            <a:ext cx="2514600" cy="4526280"/>
+          </a:xfrm>
+          <a:prstGeom prst="roundRect">
+            <a:avLst/>
+          </a:prstGeom>
+          <a:solidFill>
+            <a:srgbClr val="F7EFFF"/>
+          </a:solidFill>
+          <a:ln w="13970">
+            <a:solidFill>
+              <a:srgbClr val="7852B0"/>
+            </a:solidFill>
+          </a:ln>
+        </p:spPr>
+        <p:style>
+          <a:lnRef idx="1">
+            <a:schemeClr val="accent1"/>
+          </a:lnRef>
+          <a:fillRef idx="3">
+            <a:schemeClr val="accent1"/>
+          </a:fillRef>
+          <a:effectRef idx="2">
+            <a:schemeClr val="accent1"/>
+          </a:effectRef>
+          <a:fontRef idx="minor">
+            <a:schemeClr val="lt1"/>
+          </a:fontRef>
+        </p:style>
+        <p:txBody>
+          <a:bodyPr rtlCol="0" anchor="ctr" lIns="182880" rIns="100584" tIns="91440"/>
+          <a:lstStyle/>
+          <a:p>
+            <a:pPr algn="ctr">
+              <a:defRPr sz="1700" b="1">
+                <a:solidFill>
+                  <a:srgbClr val="232D37"/>
+                </a:solidFill>
+                <a:latin typeface="Aptos Display"/>
+              </a:defRPr>
+            </a:pPr>
+            <a:r>
+              <a:t>Asset chart</a:t>
+            </a:r>
+          </a:p>
+          <a:p>
+            <a:pPr>
+              <a:spcBef>
+                <a:spcPts val="300"/>
+              </a:spcBef>
+              <a:defRPr sz="1200">
+                <a:solidFill>
+                  <a:srgbClr val="232D37"/>
+                </a:solidFill>
+                <a:latin typeface="Aptos"/>
+              </a:defRPr>
+            </a:pPr>
+            <a:r>
+              <a:t>Plots annuity account value as an annuity series.</a:t>
+            </a:r>
+          </a:p>
+          <a:p>
+            <a:pPr>
+              <a:spcBef>
+                <a:spcPts val="300"/>
+              </a:spcBef>
+              <a:defRPr sz="1200">
+                <a:solidFill>
+                  <a:srgbClr val="232D37"/>
+                </a:solidFill>
+                <a:latin typeface="Aptos"/>
+              </a:defRPr>
+            </a:pPr>
+            <a:r>
+              <a:t>Ordinary-income devalue can haircut taxableEmbedded value.</a:t>
+            </a:r>
+          </a:p>
+          <a:p>
+            <a:pPr>
+              <a:spcBef>
+                <a:spcPts val="300"/>
+              </a:spcBef>
+              <a:defRPr sz="1200">
+                <a:solidFill>
+                  <a:srgbClr val="232D37"/>
+                </a:solidFill>
+                <a:latin typeface="Aptos"/>
+              </a:defRPr>
+            </a:pPr>
+            <a:r>
+              <a:t>Annuities stay on main asset chart.</a:t>
+            </a:r>
+          </a:p>
+        </p:txBody>
+      </p:sp>
+      <p:sp>
+        <p:nvSpPr>
+          <p:cNvPr id="7" name="Rectangle 6"/>
+          <p:cNvSpPr/>
+          <p:nvPr/>
+        </p:nvSpPr>
+        <p:spPr>
+          <a:xfrm>
+            <a:off x="3401568" y="1143000"/>
+            <a:ext cx="82296" cy="4526280"/>
+          </a:xfrm>
+          <a:prstGeom prst="rect">
+            <a:avLst/>
+          </a:prstGeom>
+          <a:solidFill>
+            <a:srgbClr val="7852B0"/>
+          </a:solidFill>
+          <a:ln>
+            <a:noFill/>
+          </a:ln>
+        </p:spPr>
+        <p:style>
+          <a:lnRef idx="1">
+            <a:schemeClr val="accent1"/>
+          </a:lnRef>
+          <a:fillRef idx="3">
+            <a:schemeClr val="accent1"/>
+          </a:fillRef>
+          <a:effectRef idx="2">
+            <a:schemeClr val="accent1"/>
+          </a:effectRef>
+          <a:fontRef idx="minor">
+            <a:schemeClr val="lt1"/>
+          </a:fontRef>
+        </p:style>
+        <p:txBody>
+          <a:bodyPr rtlCol="0" anchor="ctr"/>
+          <a:lstStyle/>
+          <a:p>
+            <a:pPr algn="ctr"/>
+          </a:p>
+        </p:txBody>
+      </p:sp>
+      <p:sp>
+        <p:nvSpPr>
+          <p:cNvPr id="8" name="Rounded Rectangle 7"/>
+          <p:cNvSpPr/>
+          <p:nvPr/>
+        </p:nvSpPr>
+        <p:spPr>
+          <a:xfrm>
+            <a:off x="6300216" y="1143000"/>
+            <a:ext cx="2514600" cy="4526280"/>
           </a:xfrm>
           <a:prstGeom prst="roundRect">
             <a:avLst/>
@@ -8597,7 +8130,7 @@
               </a:defRPr>
             </a:pPr>
             <a:r>
-              <a:t>No hidden financial behavior</a:t>
+              <a:t>Excel export</a:t>
             </a:r>
           </a:p>
           <a:p>
@@ -8613,7 +8146,7 @@
               </a:defRPr>
             </a:pPr>
             <a:r>
-              <a:t>Assumption Enable flags are explicit state fields.</a:t>
+              <a:t>Summary sheet includes payout, insurer-paid, rider fee, account value, and taxable-embedded columns.</a:t>
             </a:r>
           </a:p>
           <a:p>
@@ -8629,36 +8162,20 @@
               </a:defRPr>
             </a:pPr>
             <a:r>
-              <a:t>Compute reads those fields; charts do not.</a:t>
-            </a:r>
-          </a:p>
-          <a:p>
-            <a:pPr>
-              <a:spcBef>
-                <a:spcPts val="300"/>
-              </a:spcBef>
-              <a:defRPr sz="1200">
-                <a:solidFill>
-                  <a:srgbClr val="232D37"/>
-                </a:solidFill>
-                <a:latin typeface="Aptos"/>
-              </a:defRPr>
-            </a:pPr>
-            <a:r>
-              <a:t>Disable means “ignore in model,” not “discard user input.”</a:t>
-            </a:r>
-          </a:p>
-        </p:txBody>
-      </p:sp>
-      <p:sp>
-        <p:nvSpPr>
-          <p:cNvPr id="5" name="Rectangle 4"/>
+              <a:t>Each enabled annuity gets its own worksheet.</a:t>
+            </a:r>
+          </a:p>
+        </p:txBody>
+      </p:sp>
+      <p:sp>
+        <p:nvSpPr>
+          <p:cNvPr id="9" name="Rectangle 8"/>
           <p:cNvSpPr/>
           <p:nvPr/>
         </p:nvSpPr>
         <p:spPr>
           <a:xfrm>
-            <a:off x="594360" y="1188720"/>
+            <a:off x="6300216" y="1143000"/>
             <a:ext cx="82296" cy="4526280"/>
           </a:xfrm>
           <a:prstGeom prst="rect">
@@ -8695,24 +8212,24 @@
       </p:sp>
       <p:sp>
         <p:nvSpPr>
-          <p:cNvPr id="6" name="Rounded Rectangle 5"/>
+          <p:cNvPr id="10" name="Rounded Rectangle 9"/>
           <p:cNvSpPr/>
           <p:nvPr/>
         </p:nvSpPr>
         <p:spPr>
           <a:xfrm>
-            <a:off x="4407408" y="1188720"/>
-            <a:ext cx="3337560" cy="4526280"/>
+            <a:off x="9198864" y="1143000"/>
+            <a:ext cx="2514600" cy="4526280"/>
           </a:xfrm>
           <a:prstGeom prst="roundRect">
             <a:avLst/>
           </a:prstGeom>
           <a:solidFill>
-            <a:srgbClr val="E9F4FF"/>
+            <a:srgbClr val="FFF6E8"/>
           </a:solidFill>
           <a:ln w="13970">
             <a:solidFill>
-              <a:srgbClr val="266EB2"/>
+              <a:srgbClr val="E5892A"/>
             </a:solidFill>
           </a:ln>
         </p:spPr>
@@ -8743,7 +8260,7 @@
               </a:defRPr>
             </a:pPr>
             <a:r>
-              <a:t>No UI-state drift</a:t>
+              <a:t>Reference and chat</a:t>
             </a:r>
           </a:p>
           <a:p>
@@ -8759,7 +8276,7 @@
               </a:defRPr>
             </a:pPr>
             <a:r>
-              <a:t>Hide status belongs in state rather than browser checkbox state.</a:t>
+              <a:t>Formulas page adds Annuities section.</a:t>
             </a:r>
           </a:p>
           <a:p>
@@ -8775,7 +8292,7 @@
               </a:defRPr>
             </a:pPr>
             <a:r>
-              <a:t>Every body is rendered; collapse is presentation-only.</a:t>
+              <a:t>Chat snapshot includes selected annuity data only through explicit fields.</a:t>
             </a:r>
           </a:p>
           <a:p>
@@ -8791,27 +8308,27 @@
               </a:defRPr>
             </a:pPr>
             <a:r>
-              <a:t>Save, autosave, reset, load, and legacy hydration have defined behavior.</a:t>
-            </a:r>
-          </a:p>
-        </p:txBody>
-      </p:sp>
-      <p:sp>
-        <p:nvSpPr>
-          <p:cNvPr id="7" name="Rectangle 6"/>
+              <a:t>No annuity input is silently inferred in a consumer.</a:t>
+            </a:r>
+          </a:p>
+        </p:txBody>
+      </p:sp>
+      <p:sp>
+        <p:nvSpPr>
+          <p:cNvPr id="11" name="Rectangle 10"/>
           <p:cNvSpPr/>
           <p:nvPr/>
         </p:nvSpPr>
         <p:spPr>
           <a:xfrm>
-            <a:off x="4407408" y="1188720"/>
+            <a:off x="9198864" y="1143000"/>
             <a:ext cx="82296" cy="4526280"/>
           </a:xfrm>
           <a:prstGeom prst="rect">
             <a:avLst/>
           </a:prstGeom>
           <a:solidFill>
-            <a:srgbClr val="266EB2"/>
+            <a:srgbClr val="E5892A"/>
           </a:solidFill>
           <a:ln>
             <a:noFill/>
@@ -8841,153 +8358,7 @@
       </p:sp>
       <p:sp>
         <p:nvSpPr>
-          <p:cNvPr id="8" name="Rounded Rectangle 7"/>
-          <p:cNvSpPr/>
-          <p:nvPr/>
-        </p:nvSpPr>
-        <p:spPr>
-          <a:xfrm>
-            <a:off x="8220456" y="1188720"/>
-            <a:ext cx="3337560" cy="4526280"/>
-          </a:xfrm>
-          <a:prstGeom prst="roundRect">
-            <a:avLst/>
-          </a:prstGeom>
-          <a:solidFill>
-            <a:srgbClr val="F7EFFF"/>
-          </a:solidFill>
-          <a:ln w="13970">
-            <a:solidFill>
-              <a:srgbClr val="7852B0"/>
-            </a:solidFill>
-          </a:ln>
-        </p:spPr>
-        <p:style>
-          <a:lnRef idx="1">
-            <a:schemeClr val="accent1"/>
-          </a:lnRef>
-          <a:fillRef idx="3">
-            <a:schemeClr val="accent1"/>
-          </a:fillRef>
-          <a:effectRef idx="2">
-            <a:schemeClr val="accent1"/>
-          </a:effectRef>
-          <a:fontRef idx="minor">
-            <a:schemeClr val="lt1"/>
-          </a:fontRef>
-        </p:style>
-        <p:txBody>
-          <a:bodyPr rtlCol="0" anchor="ctr" lIns="182880" rIns="100584" tIns="91440"/>
-          <a:lstStyle/>
-          <a:p>
-            <a:pPr algn="ctr">
-              <a:defRPr sz="1700" b="1">
-                <a:solidFill>
-                  <a:srgbClr val="232D37"/>
-                </a:solidFill>
-                <a:latin typeface="Aptos Display"/>
-              </a:defRPr>
-            </a:pPr>
-            <a:r>
-              <a:t>No documentation duplication</a:t>
-            </a:r>
-          </a:p>
-          <a:p>
-            <a:pPr>
-              <a:spcBef>
-                <a:spcPts val="300"/>
-              </a:spcBef>
-              <a:defRPr sz="1200">
-                <a:solidFill>
-                  <a:srgbClr val="232D37"/>
-                </a:solidFill>
-                <a:latin typeface="Aptos"/>
-              </a:defRPr>
-            </a:pPr>
-            <a:r>
-              <a:t>One Markdown renderer supports multiple pages.</a:t>
-            </a:r>
-          </a:p>
-          <a:p>
-            <a:pPr>
-              <a:spcBef>
-                <a:spcPts val="300"/>
-              </a:spcBef>
-              <a:defRPr sz="1200">
-                <a:solidFill>
-                  <a:srgbClr val="232D37"/>
-                </a:solidFill>
-                <a:latin typeface="Aptos"/>
-              </a:defRPr>
-            </a:pPr>
-            <a:r>
-              <a:t>Content updates are separated from code deployment.</a:t>
-            </a:r>
-          </a:p>
-          <a:p>
-            <a:pPr>
-              <a:spcBef>
-                <a:spcPts val="300"/>
-              </a:spcBef>
-              <a:defRPr sz="1200">
-                <a:solidFill>
-                  <a:srgbClr val="232D37"/>
-                </a:solidFill>
-                <a:latin typeface="Aptos"/>
-              </a:defRPr>
-            </a:pPr>
-            <a:r>
-              <a:t>Formula reference remains distinct: it is a structured, constants-backed mathematical page.</a:t>
-            </a:r>
-          </a:p>
-        </p:txBody>
-      </p:sp>
-      <p:sp>
-        <p:nvSpPr>
-          <p:cNvPr id="9" name="Rectangle 8"/>
-          <p:cNvSpPr/>
-          <p:nvPr/>
-        </p:nvSpPr>
-        <p:spPr>
-          <a:xfrm>
-            <a:off x="8220456" y="1188720"/>
-            <a:ext cx="82296" cy="4526280"/>
-          </a:xfrm>
-          <a:prstGeom prst="rect">
-            <a:avLst/>
-          </a:prstGeom>
-          <a:solidFill>
-            <a:srgbClr val="7852B0"/>
-          </a:solidFill>
-          <a:ln>
-            <a:noFill/>
-          </a:ln>
-        </p:spPr>
-        <p:style>
-          <a:lnRef idx="1">
-            <a:schemeClr val="accent1"/>
-          </a:lnRef>
-          <a:fillRef idx="3">
-            <a:schemeClr val="accent1"/>
-          </a:fillRef>
-          <a:effectRef idx="2">
-            <a:schemeClr val="accent1"/>
-          </a:effectRef>
-          <a:fontRef idx="minor">
-            <a:schemeClr val="lt1"/>
-          </a:fontRef>
-        </p:style>
-        <p:txBody>
-          <a:bodyPr rtlCol="0" anchor="ctr"/>
-          <a:lstStyle/>
-          <a:p>
-            <a:pPr algn="ctr"/>
-          </a:p>
-        </p:txBody>
-      </p:sp>
-      <p:sp>
-        <p:nvSpPr>
-          <p:cNvPr id="10" name="Rectangle 9"/>
+          <p:cNvPr id="12" name="Rectangle 11"/>
           <p:cNvSpPr/>
           <p:nvPr/>
         </p:nvSpPr>
@@ -9030,7 +8401,7 @@
       </p:sp>
       <p:sp>
         <p:nvSpPr>
-          <p:cNvPr id="11" name="TextBox 10"/>
+          <p:cNvPr id="13" name="TextBox 12"/>
           <p:cNvSpPr txBox="1"/>
           <p:nvPr/>
         </p:nvSpPr>
@@ -9059,7 +8430,7 @@
               </a:defRPr>
             </a:pPr>
             <a:r>
-              <a:t>Retirement Income Planner • Architecture overview • Assumption controls and Markdown Usage update</a:t>
+              <a:t>Retirement Income Planner • Architecture overview • Annuity-model update</a:t>
             </a:r>
           </a:p>
         </p:txBody>
@@ -9121,7 +8492,7 @@
               </a:defRPr>
             </a:pPr>
             <a:r>
-              <a:t>Updated project structure and dependency order</a:t>
+              <a:t>Annuities fit into existing contracts</a:t>
             </a:r>
           </a:p>
         </p:txBody>
@@ -9157,7 +8528,7 @@
               </a:defRPr>
             </a:pPr>
             <a:r>
-              <a:t>The newest files are focused display utilities; they preserve the plain-script architecture and dependency-driven loading model.</a:t>
+              <a:t>The feature reuses the codebase’s established extension pattern: schema → input card → compute outputs → row-driven consumers.</a:t>
             </a:r>
           </a:p>
         </p:txBody>
@@ -9170,8 +8541,8 @@
         </p:nvSpPr>
         <p:spPr>
           <a:xfrm>
-            <a:off x="594360" y="1143000"/>
-            <a:ext cx="3200400" cy="4526280"/>
+            <a:off x="594360" y="1234440"/>
+            <a:ext cx="3383280" cy="4434840"/>
           </a:xfrm>
           <a:prstGeom prst="roundRect">
             <a:avLst/>
@@ -9212,7 +8583,7 @@
               </a:defRPr>
             </a:pPr>
             <a:r>
-              <a:t>New source files</a:t>
+              <a:t>State and migration</a:t>
             </a:r>
           </a:p>
           <a:p>
@@ -9228,7 +8599,7 @@
               </a:defRPr>
             </a:pPr>
             <a:r>
-              <a:t>display/mdPage.js</a:t>
+              <a:t>Add annuities[] under Person.</a:t>
             </a:r>
           </a:p>
           <a:p>
@@ -9244,7 +8615,7 @@
               </a:defRPr>
             </a:pPr>
             <a:r>
-              <a:t>display/usagePage.js</a:t>
+              <a:t>Canonical default shapes live in state.js.</a:t>
             </a:r>
           </a:p>
           <a:p>
@@ -9260,7 +8631,7 @@
               </a:defRPr>
             </a:pPr>
             <a:r>
-              <a:t>misc/Usage.md</a:t>
+              <a:t>Multiple instances use IDs and safe add/remove behavior.</a:t>
             </a:r>
           </a:p>
           <a:p>
@@ -9276,23 +8647,7 @@
               </a:defRPr>
             </a:pPr>
             <a:r>
-              <a:t>Updated assumptions.js / controls.js</a:t>
-            </a:r>
-          </a:p>
-          <a:p>
-            <a:pPr>
-              <a:spcBef>
-                <a:spcPts val="300"/>
-              </a:spcBef>
-              <a:defRPr sz="1200">
-                <a:solidFill>
-                  <a:srgbClr val="232D37"/>
-                </a:solidFill>
-                <a:latin typeface="Aptos"/>
-              </a:defRPr>
-            </a:pPr>
-            <a:r>
-              <a:t>Updated index.html topbar and load order</a:t>
+              <a:t>Enabled and hidden remain independent.</a:t>
             </a:r>
           </a:p>
         </p:txBody>
@@ -9305,8 +8660,8 @@
         </p:nvSpPr>
         <p:spPr>
           <a:xfrm>
-            <a:off x="594360" y="1143000"/>
-            <a:ext cx="82296" cy="4526280"/>
+            <a:off x="594360" y="1234440"/>
+            <a:ext cx="82296" cy="4434840"/>
           </a:xfrm>
           <a:prstGeom prst="rect">
             <a:avLst/>
@@ -9348,8 +8703,8 @@
         </p:nvSpPr>
         <p:spPr>
           <a:xfrm>
-            <a:off x="4480560" y="1143000"/>
-            <a:ext cx="3200400" cy="4526280"/>
+            <a:off x="4407408" y="1234440"/>
+            <a:ext cx="3383280" cy="4434840"/>
           </a:xfrm>
           <a:prstGeom prst="roundRect">
             <a:avLst/>
@@ -9390,7 +8745,7 @@
               </a:defRPr>
             </a:pPr>
             <a:r>
-              <a:t>Script relationship</a:t>
+              <a:t>Compute integration</a:t>
             </a:r>
           </a:p>
           <a:p>
@@ -9406,7 +8761,7 @@
               </a:defRPr>
             </a:pPr>
             <a:r>
-              <a:t>formulasPage.js remains independent.</a:t>
+              <a:t>simulateAnnuity isolates contract mechanics.</a:t>
             </a:r>
           </a:p>
           <a:p>
@@ -9422,7 +8777,7 @@
               </a:defRPr>
             </a:pPr>
             <a:r>
-              <a:t>mdPage.js loads before notesPage.js and usagePage.js.</a:t>
+              <a:t>projection.js aggregates each person’s result.</a:t>
             </a:r>
           </a:p>
           <a:p>
@@ -9438,23 +8793,7 @@
               </a:defRPr>
             </a:pPr>
             <a:r>
-              <a:t>notesPage.js and usagePage.js are thin adapters.</a:t>
-            </a:r>
-          </a:p>
-          <a:p>
-            <a:pPr>
-              <a:spcBef>
-                <a:spcPts val="300"/>
-              </a:spcBef>
-              <a:defRPr sz="1200">
-                <a:solidFill>
-                  <a:srgbClr val="232D37"/>
-                </a:solidFill>
-                <a:latin typeface="Aptos"/>
-              </a:defRPr>
-            </a:pPr>
-            <a:r>
-              <a:t>app.js remains last.</a:t>
+              <a:t>Tax, cash, MAGI, NII, and asset effects flow through common row fields.</a:t>
             </a:r>
           </a:p>
         </p:txBody>
@@ -9467,8 +8806,8 @@
         </p:nvSpPr>
         <p:spPr>
           <a:xfrm>
-            <a:off x="4480560" y="1143000"/>
-            <a:ext cx="82296" cy="4526280"/>
+            <a:off x="4407408" y="1234440"/>
+            <a:ext cx="82296" cy="4434840"/>
           </a:xfrm>
           <a:prstGeom prst="rect">
             <a:avLst/>
@@ -9510,18 +8849,18 @@
         </p:nvSpPr>
         <p:spPr>
           <a:xfrm>
-            <a:off x="8366760" y="1143000"/>
-            <a:ext cx="3200400" cy="4526280"/>
+            <a:off x="8220456" y="1234440"/>
+            <a:ext cx="3383280" cy="4434840"/>
           </a:xfrm>
           <a:prstGeom prst="roundRect">
             <a:avLst/>
           </a:prstGeom>
           <a:solidFill>
-            <a:srgbClr val="FFF6E8"/>
+            <a:srgbClr val="F7EFFF"/>
           </a:solidFill>
           <a:ln w="13970">
             <a:solidFill>
-              <a:srgbClr val="E5892A"/>
+              <a:srgbClr val="7852B0"/>
             </a:solidFill>
           </a:ln>
         </p:spPr>
@@ -9552,7 +8891,7 @@
               </a:defRPr>
             </a:pPr>
             <a:r>
-              <a:t>Topbar order</a:t>
+              <a:t>Presentation integration</a:t>
             </a:r>
           </a:p>
           <a:p>
@@ -9568,7 +8907,7 @@
               </a:defRPr>
             </a:pPr>
             <a:r>
-              <a:t>Usage</a:t>
+              <a:t>Input card renders only input/editing behavior.</a:t>
             </a:r>
           </a:p>
           <a:p>
@@ -9584,7 +8923,7 @@
               </a:defRPr>
             </a:pPr>
             <a:r>
-              <a:t>Save to file</a:t>
+              <a:t>Charts, Excel, Formulas, and Chat consume row fields.</a:t>
             </a:r>
           </a:p>
           <a:p>
@@ -9600,87 +8939,7 @@
               </a:defRPr>
             </a:pPr>
             <a:r>
-              <a:t>Load file ▾</a:t>
-            </a:r>
-          </a:p>
-          <a:p>
-            <a:pPr>
-              <a:spcBef>
-                <a:spcPts val="300"/>
-              </a:spcBef>
-              <a:defRPr sz="1200">
-                <a:solidFill>
-                  <a:srgbClr val="232D37"/>
-                </a:solidFill>
-                <a:latin typeface="Aptos"/>
-              </a:defRPr>
-            </a:pPr>
-            <a:r>
-              <a:t>Reset to defaults</a:t>
-            </a:r>
-          </a:p>
-          <a:p>
-            <a:pPr>
-              <a:spcBef>
-                <a:spcPts val="300"/>
-              </a:spcBef>
-              <a:defRPr sz="1200">
-                <a:solidFill>
-                  <a:srgbClr val="232D37"/>
-                </a:solidFill>
-                <a:latin typeface="Aptos"/>
-              </a:defRPr>
-            </a:pPr>
-            <a:r>
-              <a:t>Formulas</a:t>
-            </a:r>
-          </a:p>
-          <a:p>
-            <a:pPr>
-              <a:spcBef>
-                <a:spcPts val="300"/>
-              </a:spcBef>
-              <a:defRPr sz="1200">
-                <a:solidFill>
-                  <a:srgbClr val="232D37"/>
-                </a:solidFill>
-                <a:latin typeface="Aptos"/>
-              </a:defRPr>
-            </a:pPr>
-            <a:r>
-              <a:t>Notes</a:t>
-            </a:r>
-          </a:p>
-          <a:p>
-            <a:pPr>
-              <a:spcBef>
-                <a:spcPts val="300"/>
-              </a:spcBef>
-              <a:defRPr sz="1200">
-                <a:solidFill>
-                  <a:srgbClr val="232D37"/>
-                </a:solidFill>
-                <a:latin typeface="Aptos"/>
-              </a:defRPr>
-            </a:pPr>
-            <a:r>
-              <a:t>Export to Excel</a:t>
-            </a:r>
-          </a:p>
-          <a:p>
-            <a:pPr>
-              <a:spcBef>
-                <a:spcPts val="300"/>
-              </a:spcBef>
-              <a:defRPr sz="1200">
-                <a:solidFill>
-                  <a:srgbClr val="232D37"/>
-                </a:solidFill>
-                <a:latin typeface="Aptos"/>
-              </a:defRPr>
-            </a:pPr>
-            <a:r>
-              <a:t>show_details</a:t>
+              <a:t>Asset devalue remains display-only and does not alter finance.</a:t>
             </a:r>
           </a:p>
         </p:txBody>
@@ -9693,14 +8952,14 @@
         </p:nvSpPr>
         <p:spPr>
           <a:xfrm>
-            <a:off x="8366760" y="1143000"/>
-            <a:ext cx="82296" cy="4526280"/>
+            <a:off x="8220456" y="1234440"/>
+            <a:ext cx="82296" cy="4434840"/>
           </a:xfrm>
           <a:prstGeom prst="rect">
             <a:avLst/>
           </a:prstGeom>
           <a:solidFill>
-            <a:srgbClr val="E5892A"/>
+            <a:srgbClr val="7852B0"/>
           </a:solidFill>
           <a:ln>
             <a:noFill/>
@@ -9802,7 +9061,7 @@
               </a:defRPr>
             </a:pPr>
             <a:r>
-              <a:t>Retirement Income Planner • Architecture overview • Assumption controls and Markdown Usage update</a:t>
+              <a:t>Retirement Income Planner • Architecture overview • Annuity-model update</a:t>
             </a:r>
           </a:p>
         </p:txBody>
@@ -9864,7 +9123,7 @@
               </a:defRPr>
             </a:pPr>
             <a:r>
-              <a:t>Guardrails for further changes</a:t>
+              <a:t>Guardrails for future contract types</a:t>
             </a:r>
           </a:p>
         </p:txBody>
@@ -9900,7 +9159,7 @@
               </a:defRPr>
             </a:pPr>
             <a:r>
-              <a:t>The revised design reinforces four practices: explicit state semantics, compute gating, shared utilities, and safe content delivery.</a:t>
+              <a:t>The annuity implementation reinforces the design discipline needed for any additional complex financial product.</a:t>
             </a:r>
           </a:p>
         </p:txBody>
@@ -9914,153 +9173,7 @@
         <p:spPr>
           <a:xfrm>
             <a:off x="640080" y="1188720"/>
-            <a:ext cx="2606040" cy="4526280"/>
-          </a:xfrm>
-          <a:prstGeom prst="roundRect">
-            <a:avLst/>
-          </a:prstGeom>
-          <a:solidFill>
-            <a:srgbClr val="E9F4FF"/>
-          </a:solidFill>
-          <a:ln w="13970">
-            <a:solidFill>
-              <a:srgbClr val="266EB2"/>
-            </a:solidFill>
-          </a:ln>
-        </p:spPr>
-        <p:style>
-          <a:lnRef idx="1">
-            <a:schemeClr val="accent1"/>
-          </a:lnRef>
-          <a:fillRef idx="3">
-            <a:schemeClr val="accent1"/>
-          </a:fillRef>
-          <a:effectRef idx="2">
-            <a:schemeClr val="accent1"/>
-          </a:effectRef>
-          <a:fontRef idx="minor">
-            <a:schemeClr val="lt1"/>
-          </a:fontRef>
-        </p:style>
-        <p:txBody>
-          <a:bodyPr rtlCol="0" anchor="ctr" lIns="182880" rIns="100584" tIns="91440"/>
-          <a:lstStyle/>
-          <a:p>
-            <a:pPr algn="ctr">
-              <a:defRPr sz="1700" b="1">
-                <a:solidFill>
-                  <a:srgbClr val="232D37"/>
-                </a:solidFill>
-                <a:latin typeface="Aptos Display"/>
-              </a:defRPr>
-            </a:pPr>
-            <a:r>
-              <a:t>State</a:t>
-            </a:r>
-          </a:p>
-          <a:p>
-            <a:pPr>
-              <a:spcBef>
-                <a:spcPts val="300"/>
-              </a:spcBef>
-              <a:defRPr sz="1200">
-                <a:solidFill>
-                  <a:srgbClr val="232D37"/>
-                </a:solidFill>
-                <a:latin typeface="Aptos"/>
-              </a:defRPr>
-            </a:pPr>
-            <a:r>
-              <a:t>Place default values and migrations in state.js.</a:t>
-            </a:r>
-          </a:p>
-          <a:p>
-            <a:pPr>
-              <a:spcBef>
-                <a:spcPts val="300"/>
-              </a:spcBef>
-              <a:defRPr sz="1200">
-                <a:solidFill>
-                  <a:srgbClr val="232D37"/>
-                </a:solidFill>
-                <a:latin typeface="Aptos"/>
-              </a:defRPr>
-            </a:pPr>
-            <a:r>
-              <a:t>Keep Enable and Hide independent.</a:t>
-            </a:r>
-          </a:p>
-          <a:p>
-            <a:pPr>
-              <a:spcBef>
-                <a:spcPts val="300"/>
-              </a:spcBef>
-              <a:defRPr sz="1200">
-                <a:solidFill>
-                  <a:srgbClr val="232D37"/>
-                </a:solidFill>
-                <a:latin typeface="Aptos"/>
-              </a:defRPr>
-            </a:pPr>
-            <a:r>
-              <a:t>Preserve values when behavior is disabled.</a:t>
-            </a:r>
-          </a:p>
-        </p:txBody>
-      </p:sp>
-      <p:sp>
-        <p:nvSpPr>
-          <p:cNvPr id="5" name="Rectangle 4"/>
-          <p:cNvSpPr/>
-          <p:nvPr/>
-        </p:nvSpPr>
-        <p:spPr>
-          <a:xfrm>
-            <a:off x="640080" y="1188720"/>
-            <a:ext cx="82296" cy="4526280"/>
-          </a:xfrm>
-          <a:prstGeom prst="rect">
-            <a:avLst/>
-          </a:prstGeom>
-          <a:solidFill>
-            <a:srgbClr val="266EB2"/>
-          </a:solidFill>
-          <a:ln>
-            <a:noFill/>
-          </a:ln>
-        </p:spPr>
-        <p:style>
-          <a:lnRef idx="1">
-            <a:schemeClr val="accent1"/>
-          </a:lnRef>
-          <a:fillRef idx="3">
-            <a:schemeClr val="accent1"/>
-          </a:fillRef>
-          <a:effectRef idx="2">
-            <a:schemeClr val="accent1"/>
-          </a:effectRef>
-          <a:fontRef idx="minor">
-            <a:schemeClr val="lt1"/>
-          </a:fontRef>
-        </p:style>
-        <p:txBody>
-          <a:bodyPr rtlCol="0" anchor="ctr"/>
-          <a:lstStyle/>
-          <a:p>
-            <a:pPr algn="ctr"/>
-          </a:p>
-        </p:txBody>
-      </p:sp>
-      <p:sp>
-        <p:nvSpPr>
-          <p:cNvPr id="6" name="Rounded Rectangle 5"/>
-          <p:cNvSpPr/>
-          <p:nvPr/>
-        </p:nvSpPr>
-        <p:spPr>
-          <a:xfrm>
-            <a:off x="3520440" y="1188720"/>
-            <a:ext cx="2606040" cy="4526280"/>
+            <a:ext cx="3383280" cy="4526280"/>
           </a:xfrm>
           <a:prstGeom prst="roundRect">
             <a:avLst/>
@@ -10101,7 +9214,7 @@
               </a:defRPr>
             </a:pPr>
             <a:r>
-              <a:t>Compute</a:t>
+              <a:t>Isolate product mechanics</a:t>
             </a:r>
           </a:p>
           <a:p>
@@ -10117,7 +9230,7 @@
               </a:defRPr>
             </a:pPr>
             <a:r>
-              <a:t>Treat enabled flags as financial gates.</a:t>
+              <a:t>Put self-contained contract rules into a dedicated simulation routine.</a:t>
             </a:r>
           </a:p>
           <a:p>
@@ -10133,7 +9246,7 @@
               </a:defRPr>
             </a:pPr>
             <a:r>
-              <a:t>Keep all annual finance inside projection.js.</a:t>
+              <a:t>Run it at a defined stage with explicit inputs and annual outputs.</a:t>
             </a:r>
           </a:p>
           <a:p>
@@ -10149,20 +9262,20 @@
               </a:defRPr>
             </a:pPr>
             <a:r>
-              <a:t>Expose results through rows.</a:t>
-            </a:r>
-          </a:p>
-        </p:txBody>
-      </p:sp>
-      <p:sp>
-        <p:nvSpPr>
-          <p:cNvPr id="7" name="Rectangle 6"/>
+              <a:t>Avoid distributing product logic across chart code.</a:t>
+            </a:r>
+          </a:p>
+        </p:txBody>
+      </p:sp>
+      <p:sp>
+        <p:nvSpPr>
+          <p:cNvPr id="5" name="Rectangle 4"/>
           <p:cNvSpPr/>
           <p:nvPr/>
         </p:nvSpPr>
         <p:spPr>
           <a:xfrm>
-            <a:off x="3520440" y="1188720"/>
+            <a:off x="640080" y="1188720"/>
             <a:ext cx="82296" cy="4526280"/>
           </a:xfrm>
           <a:prstGeom prst="rect">
@@ -10199,14 +9312,144 @@
       </p:sp>
       <p:sp>
         <p:nvSpPr>
+          <p:cNvPr id="6" name="Rounded Rectangle 5"/>
+          <p:cNvSpPr/>
+          <p:nvPr/>
+        </p:nvSpPr>
+        <p:spPr>
+          <a:xfrm>
+            <a:off x="4407408" y="1188720"/>
+            <a:ext cx="3383280" cy="4526280"/>
+          </a:xfrm>
+          <a:prstGeom prst="roundRect">
+            <a:avLst/>
+          </a:prstGeom>
+          <a:solidFill>
+            <a:srgbClr val="FFF6E8"/>
+          </a:solidFill>
+          <a:ln w="13970">
+            <a:solidFill>
+              <a:srgbClr val="E5892A"/>
+            </a:solidFill>
+          </a:ln>
+        </p:spPr>
+        <p:style>
+          <a:lnRef idx="1">
+            <a:schemeClr val="accent1"/>
+          </a:lnRef>
+          <a:fillRef idx="3">
+            <a:schemeClr val="accent1"/>
+          </a:fillRef>
+          <a:effectRef idx="2">
+            <a:schemeClr val="accent1"/>
+          </a:effectRef>
+          <a:fontRef idx="minor">
+            <a:schemeClr val="lt1"/>
+          </a:fontRef>
+        </p:style>
+        <p:txBody>
+          <a:bodyPr rtlCol="0" anchor="ctr" lIns="182880" rIns="100584" tIns="91440"/>
+          <a:lstStyle/>
+          <a:p>
+            <a:pPr algn="ctr">
+              <a:defRPr sz="1700" b="1">
+                <a:solidFill>
+                  <a:srgbClr val="232D37"/>
+                </a:solidFill>
+                <a:latin typeface="Aptos Display"/>
+              </a:defRPr>
+            </a:pPr>
+            <a:r>
+              <a:t>Make tax character explicit</a:t>
+            </a:r>
+          </a:p>
+          <a:p>
+            <a:pPr>
+              <a:spcBef>
+                <a:spcPts val="300"/>
+              </a:spcBef>
+              <a:defRPr sz="1200">
+                <a:solidFill>
+                  <a:srgbClr val="232D37"/>
+                </a:solidFill>
+                <a:latin typeface="Aptos"/>
+              </a:defRPr>
+            </a:pPr>
+            <a:r>
+              <a:t>Separate taxable, tax-exempt, investment-income, and insurer-supported amounts.</a:t>
+            </a:r>
+          </a:p>
+          <a:p>
+            <a:pPr>
+              <a:spcBef>
+                <a:spcPts val="300"/>
+              </a:spcBef>
+              <a:defRPr sz="1200">
+                <a:solidFill>
+                  <a:srgbClr val="232D37"/>
+                </a:solidFill>
+                <a:latin typeface="Aptos"/>
+              </a:defRPr>
+            </a:pPr>
+            <a:r>
+              <a:t>Thread them into cash-flow and tax calculations through named projection fields.</a:t>
+            </a:r>
+          </a:p>
+        </p:txBody>
+      </p:sp>
+      <p:sp>
+        <p:nvSpPr>
+          <p:cNvPr id="7" name="Rectangle 6"/>
+          <p:cNvSpPr/>
+          <p:nvPr/>
+        </p:nvSpPr>
+        <p:spPr>
+          <a:xfrm>
+            <a:off x="4407408" y="1188720"/>
+            <a:ext cx="82296" cy="4526280"/>
+          </a:xfrm>
+          <a:prstGeom prst="rect">
+            <a:avLst/>
+          </a:prstGeom>
+          <a:solidFill>
+            <a:srgbClr val="E5892A"/>
+          </a:solidFill>
+          <a:ln>
+            <a:noFill/>
+          </a:ln>
+        </p:spPr>
+        <p:style>
+          <a:lnRef idx="1">
+            <a:schemeClr val="accent1"/>
+          </a:lnRef>
+          <a:fillRef idx="3">
+            <a:schemeClr val="accent1"/>
+          </a:fillRef>
+          <a:effectRef idx="2">
+            <a:schemeClr val="accent1"/>
+          </a:effectRef>
+          <a:fontRef idx="minor">
+            <a:schemeClr val="lt1"/>
+          </a:fontRef>
+        </p:style>
+        <p:txBody>
+          <a:bodyPr rtlCol="0" anchor="ctr"/>
+          <a:lstStyle/>
+          <a:p>
+            <a:pPr algn="ctr"/>
+          </a:p>
+        </p:txBody>
+      </p:sp>
+      <p:sp>
+        <p:nvSpPr>
           <p:cNvPr id="8" name="Rounded Rectangle 7"/>
           <p:cNvSpPr/>
           <p:nvPr/>
         </p:nvSpPr>
         <p:spPr>
           <a:xfrm>
-            <a:off x="6400800" y="1188720"/>
-            <a:ext cx="2606040" cy="4526280"/>
+            <a:off x="8174736" y="1188720"/>
+            <a:ext cx="3383280" cy="4526280"/>
           </a:xfrm>
           <a:prstGeom prst="roundRect">
             <a:avLst/>
@@ -10247,7 +9490,7 @@
               </a:defRPr>
             </a:pPr>
             <a:r>
-              <a:t>Display</a:t>
+              <a:t>Keep consumers passive</a:t>
             </a:r>
           </a:p>
           <a:p>
@@ -10263,7 +9506,7 @@
               </a:defRPr>
             </a:pPr>
             <a:r>
-              <a:t>Render presentation from state or rows as appropriate.</a:t>
+              <a:t>Charts, export, formulas, and chat must read the projection—not resimulate contracts.</a:t>
             </a:r>
           </a:p>
           <a:p>
@@ -10279,23 +9522,7 @@
               </a:defRPr>
             </a:pPr>
             <a:r>
-              <a:t>Do not encode financial rules in charts.</a:t>
-            </a:r>
-          </a:p>
-          <a:p>
-            <a:pPr>
-              <a:spcBef>
-                <a:spcPts val="300"/>
-              </a:spcBef>
-              <a:defRPr sz="1200">
-                <a:solidFill>
-                  <a:srgbClr val="232D37"/>
-                </a:solidFill>
-                <a:latin typeface="Aptos"/>
-              </a:defRPr>
-            </a:pPr>
-            <a:r>
-              <a:t>Use shared rendering helpers before creating duplicates.</a:t>
+              <a:t>Add every required output to the row schema before building a presentation feature.</a:t>
             </a:r>
           </a:p>
         </p:txBody>
@@ -10308,7 +9535,7 @@
         </p:nvSpPr>
         <p:spPr>
           <a:xfrm>
-            <a:off x="6400800" y="1188720"/>
+            <a:off x="8174736" y="1188720"/>
             <a:ext cx="82296" cy="4526280"/>
           </a:xfrm>
           <a:prstGeom prst="rect">
@@ -10345,153 +9572,7 @@
       </p:sp>
       <p:sp>
         <p:nvSpPr>
-          <p:cNvPr id="10" name="Rounded Rectangle 9"/>
-          <p:cNvSpPr/>
-          <p:nvPr/>
-        </p:nvSpPr>
-        <p:spPr>
-          <a:xfrm>
-            <a:off x="9281160" y="1188720"/>
-            <a:ext cx="2286000" cy="4526280"/>
-          </a:xfrm>
-          <a:prstGeom prst="roundRect">
-            <a:avLst/>
-          </a:prstGeom>
-          <a:solidFill>
-            <a:srgbClr val="FFF6E8"/>
-          </a:solidFill>
-          <a:ln w="13970">
-            <a:solidFill>
-              <a:srgbClr val="E5892A"/>
-            </a:solidFill>
-          </a:ln>
-        </p:spPr>
-        <p:style>
-          <a:lnRef idx="1">
-            <a:schemeClr val="accent1"/>
-          </a:lnRef>
-          <a:fillRef idx="3">
-            <a:schemeClr val="accent1"/>
-          </a:fillRef>
-          <a:effectRef idx="2">
-            <a:schemeClr val="accent1"/>
-          </a:effectRef>
-          <a:fontRef idx="minor">
-            <a:schemeClr val="lt1"/>
-          </a:fontRef>
-        </p:style>
-        <p:txBody>
-          <a:bodyPr rtlCol="0" anchor="ctr" lIns="182880" rIns="100584" tIns="91440"/>
-          <a:lstStyle/>
-          <a:p>
-            <a:pPr algn="ctr">
-              <a:defRPr sz="1600" b="1">
-                <a:solidFill>
-                  <a:srgbClr val="232D37"/>
-                </a:solidFill>
-                <a:latin typeface="Aptos Display"/>
-              </a:defRPr>
-            </a:pPr>
-            <a:r>
-              <a:t>Content</a:t>
-            </a:r>
-          </a:p>
-          <a:p>
-            <a:pPr>
-              <a:spcBef>
-                <a:spcPts val="300"/>
-              </a:spcBef>
-              <a:defRPr sz="1100">
-                <a:solidFill>
-                  <a:srgbClr val="232D37"/>
-                </a:solidFill>
-                <a:latin typeface="Aptos"/>
-              </a:defRPr>
-            </a:pPr>
-            <a:r>
-              <a:t>Use Markdown files for maintainable user docs.</a:t>
-            </a:r>
-          </a:p>
-          <a:p>
-            <a:pPr>
-              <a:spcBef>
-                <a:spcPts val="300"/>
-              </a:spcBef>
-              <a:defRPr sz="1100">
-                <a:solidFill>
-                  <a:srgbClr val="232D37"/>
-                </a:solidFill>
-                <a:latin typeface="Aptos"/>
-              </a:defRPr>
-            </a:pPr>
-            <a:r>
-              <a:t>Fetch on opening; explain file:// limitations.</a:t>
-            </a:r>
-          </a:p>
-          <a:p>
-            <a:pPr>
-              <a:spcBef>
-                <a:spcPts val="300"/>
-              </a:spcBef>
-              <a:defRPr sz="1100">
-                <a:solidFill>
-                  <a:srgbClr val="232D37"/>
-                </a:solidFill>
-                <a:latin typeface="Aptos"/>
-              </a:defRPr>
-            </a:pPr>
-            <a:r>
-              <a:t>Keep privacy-sensitive chat data separate from plan files.</a:t>
-            </a:r>
-          </a:p>
-        </p:txBody>
-      </p:sp>
-      <p:sp>
-        <p:nvSpPr>
-          <p:cNvPr id="11" name="Rectangle 10"/>
-          <p:cNvSpPr/>
-          <p:nvPr/>
-        </p:nvSpPr>
-        <p:spPr>
-          <a:xfrm>
-            <a:off x="9281160" y="1188720"/>
-            <a:ext cx="82296" cy="4526280"/>
-          </a:xfrm>
-          <a:prstGeom prst="rect">
-            <a:avLst/>
-          </a:prstGeom>
-          <a:solidFill>
-            <a:srgbClr val="E5892A"/>
-          </a:solidFill>
-          <a:ln>
-            <a:noFill/>
-          </a:ln>
-        </p:spPr>
-        <p:style>
-          <a:lnRef idx="1">
-            <a:schemeClr val="accent1"/>
-          </a:lnRef>
-          <a:fillRef idx="3">
-            <a:schemeClr val="accent1"/>
-          </a:fillRef>
-          <a:effectRef idx="2">
-            <a:schemeClr val="accent1"/>
-          </a:effectRef>
-          <a:fontRef idx="minor">
-            <a:schemeClr val="lt1"/>
-          </a:fontRef>
-        </p:style>
-        <p:txBody>
-          <a:bodyPr rtlCol="0" anchor="ctr"/>
-          <a:lstStyle/>
-          <a:p>
-            <a:pPr algn="ctr"/>
-          </a:p>
-        </p:txBody>
-      </p:sp>
-      <p:sp>
-        <p:nvSpPr>
-          <p:cNvPr id="12" name="Rectangle 11"/>
+          <p:cNvPr id="10" name="Rectangle 9"/>
           <p:cNvSpPr/>
           <p:nvPr/>
         </p:nvSpPr>
@@ -10534,7 +9615,7 @@
       </p:sp>
       <p:sp>
         <p:nvSpPr>
-          <p:cNvPr id="13" name="TextBox 12"/>
+          <p:cNvPr id="11" name="TextBox 10"/>
           <p:cNvSpPr txBox="1"/>
           <p:nvPr/>
         </p:nvSpPr>
@@ -10563,7 +9644,7 @@
               </a:defRPr>
             </a:pPr>
             <a:r>
-              <a:t>Retirement Income Planner • Architecture overview • Assumption controls and Markdown Usage update</a:t>
+              <a:t>Retirement Income Planner • Architecture overview • Annuity-model update</a:t>
             </a:r>
           </a:p>
         </p:txBody>

--- a/docs/retirement_income_planner_architecture.pptx
+++ b/docs/retirement_income_planner_architecture.pptx
@@ -3214,7 +3214,7 @@
               </a:defRPr>
             </a:pPr>
             <a:r>
-              <a:t>Updated architecture: modeled annuity contracts, optional living-benefit riders, payout-tax treatment, and new reporting outputs</a:t>
+              <a:t>Updated architecture: print-safe reporting, tax-detail companion charts, drag-reordered income cards, and richer Markdown rendering</a:t>
             </a:r>
           </a:p>
         </p:txBody>
@@ -3285,7 +3285,7 @@
               </a:defRPr>
             </a:pPr>
             <a:r>
-              <a:t>Annuity sub-cards per person</a:t>
+              <a:t>Cards, settings, drag-to-reorder layout</a:t>
             </a:r>
           </a:p>
           <a:p>
@@ -3301,7 +3301,7 @@
               </a:defRPr>
             </a:pPr>
             <a:r>
-              <a:t>Contract, payout, rider, tax, survivor settings</a:t>
+              <a:t>Writes plan and display-only UI state</a:t>
             </a:r>
           </a:p>
         </p:txBody>
@@ -3415,7 +3415,7 @@
               </a:defRPr>
             </a:pPr>
             <a:r>
-              <a:t>simulateAnnuity runs contracts up front</a:t>
+              <a:t>Single annual projection</a:t>
             </a:r>
           </a:p>
           <a:p>
@@ -3431,7 +3431,7 @@
               </a:defRPr>
             </a:pPr>
             <a:r>
-              <a:t>Projection consumes annual contract outputs</a:t>
+              <a:t>All financial logic and tax outputs</a:t>
             </a:r>
           </a:p>
         </p:txBody>
@@ -3529,7 +3529,7 @@
               </a:defRPr>
             </a:pPr>
             <a:r>
-              <a:t>Display &amp; services</a:t>
+              <a:t>Display &amp; report</a:t>
             </a:r>
           </a:p>
           <a:p>
@@ -3545,7 +3545,7 @@
               </a:defRPr>
             </a:pPr>
             <a:r>
-              <a:t>Income/asset charts, Excel, formulas, chat</a:t>
+              <a:t>Interactive charts, print snapshots, docs, export, chat</a:t>
             </a:r>
           </a:p>
           <a:p>
@@ -3561,7 +3561,7 @@
               </a:defRPr>
             </a:pPr>
             <a:r>
-              <a:t>Read annuity fields from projection rows</a:t>
+              <a:t>Consumes state or projection contracts</a:t>
             </a:r>
           </a:p>
         </p:txBody>
@@ -3746,7 +3746,7 @@
               </a:defRPr>
             </a:pPr>
             <a:r>
-              <a:t>annuity rows</a:t>
+              <a:t>projection</a:t>
             </a:r>
           </a:p>
         </p:txBody>
@@ -3801,7 +3801,7 @@
               </a:defRPr>
             </a:pPr>
             <a:r>
-              <a:t>Architectural fit</a:t>
+              <a:t>Core invariant</a:t>
             </a:r>
           </a:p>
           <a:p>
@@ -3817,7 +3817,7 @@
               </a:defRPr>
             </a:pPr>
             <a:r>
-              <a:t>Annuity behavior is calculated in Compute, exposed as row fields, and consumed without financial recomputation by charts, export, formula reference, and chat.</a:t>
+              <a:t>New interaction and reporting features remain passive: they do not create a second financial model or mutate plan data during presentation.</a:t>
             </a:r>
           </a:p>
         </p:txBody>
@@ -3939,7 +3939,7 @@
               </a:defRPr>
             </a:pPr>
             <a:r>
-              <a:t>Retirement Income Planner • Architecture overview • Annuity-model update</a:t>
+              <a:t>Retirement Income Planner • Architecture overview • Print, tax-detail, and customizable income-layout update</a:t>
             </a:r>
           </a:p>
         </p:txBody>
@@ -4037,7 +4037,7 @@
               </a:defRPr>
             </a:pPr>
             <a:r>
-              <a:t>The planner adds an annuity asset and income model that supports multiple contracts per person and separates contract simulation from yearly household projection.</a:t>
+              <a:t>The newest specification adds robust printing, expanded tax visualization, shared draggable income layout, and improved Markdown lists.</a:t>
             </a:r>
           </a:p>
         </p:txBody>
@@ -4050,8 +4050,8 @@
         </p:nvSpPr>
         <p:spPr>
           <a:xfrm>
-            <a:off x="548640" y="1234440"/>
-            <a:ext cx="3291840" cy="4480560"/>
+            <a:off x="502920" y="1234440"/>
+            <a:ext cx="2606040" cy="4480560"/>
           </a:xfrm>
           <a:prstGeom prst="roundRect">
             <a:avLst/>
@@ -4084,7 +4084,7 @@
           <a:lstStyle/>
           <a:p>
             <a:pPr algn="ctr">
-              <a:defRPr sz="1800" b="1">
+              <a:defRPr sz="1700" b="1">
                 <a:solidFill>
                   <a:srgbClr val="232D37"/>
                 </a:solidFill>
@@ -4092,7 +4092,7 @@
               </a:defRPr>
             </a:pPr>
             <a:r>
-              <a:t>Annuity input model</a:t>
+              <a:t>Print service</a:t>
             </a:r>
           </a:p>
           <a:p>
@@ -4100,15 +4100,15 @@
               <a:spcBef>
                 <a:spcPts val="300"/>
               </a:spcBef>
-              <a:defRPr sz="1300">
-                <a:solidFill>
-                  <a:srgbClr val="232D37"/>
-                </a:solidFill>
-                <a:latin typeface="Aptos"/>
-              </a:defRPr>
-            </a:pPr>
-            <a:r>
-              <a:t>Multiple annuities per person</a:t>
+              <a:defRPr sz="1200">
+                <a:solidFill>
+                  <a:srgbClr val="232D37"/>
+                </a:solidFill>
+                <a:latin typeface="Aptos"/>
+              </a:defRPr>
+            </a:pPr>
+            <a:r>
+              <a:t>Dedicated print.js</a:t>
             </a:r>
           </a:p>
           <a:p>
@@ -4116,15 +4116,15 @@
               <a:spcBef>
                 <a:spcPts val="300"/>
               </a:spcBef>
-              <a:defRPr sz="1300">
-                <a:solidFill>
-                  <a:srgbClr val="232D37"/>
-                </a:solidFill>
-                <a:latin typeface="Aptos"/>
-              </a:defRPr>
-            </a:pPr>
-            <a:r>
-              <a:t>Enable / Hide / Remove card controls</a:t>
+              <a:defRPr sz="1200">
+                <a:solidFill>
+                  <a:srgbClr val="232D37"/>
+                </a:solidFill>
+                <a:latin typeface="Aptos"/>
+              </a:defRPr>
+            </a:pPr>
+            <a:r>
+              <a:t>Print all hidden sections and cards</a:t>
             </a:r>
           </a:p>
           <a:p>
@@ -4132,15 +4132,15 @@
               <a:spcBef>
                 <a:spcPts val="300"/>
               </a:spcBef>
-              <a:defRPr sz="1300">
-                <a:solidFill>
-                  <a:srgbClr val="232D37"/>
-                </a:solidFill>
-                <a:latin typeface="Aptos"/>
-              </a:defRPr>
-            </a:pPr>
-            <a:r>
-              <a:t>Value, premium, growth, fees</a:t>
+              <a:defRPr sz="1200">
+                <a:solidFill>
+                  <a:srgbClr val="232D37"/>
+                </a:solidFill>
+                <a:latin typeface="Aptos"/>
+              </a:defRPr>
+            </a:pPr>
+            <a:r>
+              <a:t>Static chart bitmap copies</a:t>
             </a:r>
           </a:p>
           <a:p>
@@ -4148,31 +4148,15 @@
               <a:spcBef>
                 <a:spcPts val="300"/>
               </a:spcBef>
-              <a:defRPr sz="1300">
-                <a:solidFill>
-                  <a:srgbClr val="232D37"/>
-                </a:solidFill>
-                <a:latin typeface="Aptos"/>
-              </a:defRPr>
-            </a:pPr>
-            <a:r>
-              <a:t>Payout schedule and tax treatment</a:t>
-            </a:r>
-          </a:p>
-          <a:p>
-            <a:pPr>
-              <a:spcBef>
-                <a:spcPts val="300"/>
-              </a:spcBef>
-              <a:defRPr sz="1300">
-                <a:solidFill>
-                  <a:srgbClr val="232D37"/>
-                </a:solidFill>
-                <a:latin typeface="Aptos"/>
-              </a:defRPr>
-            </a:pPr>
-            <a:r>
-              <a:t>Optional living-benefit rider</a:t>
+              <a:defRPr sz="1200">
+                <a:solidFill>
+                  <a:srgbClr val="232D37"/>
+                </a:solidFill>
+                <a:latin typeface="Aptos"/>
+              </a:defRPr>
+            </a:pPr>
+            <a:r>
+              <a:t>Restores UI with no saved-state changes</a:t>
             </a:r>
           </a:p>
         </p:txBody>
@@ -4185,7 +4169,7 @@
         </p:nvSpPr>
         <p:spPr>
           <a:xfrm>
-            <a:off x="548640" y="1234440"/>
+            <a:off x="502920" y="1234440"/>
             <a:ext cx="82296" cy="4480560"/>
           </a:xfrm>
           <a:prstGeom prst="rect">
@@ -4228,8 +4212,8 @@
         </p:nvSpPr>
         <p:spPr>
           <a:xfrm>
-            <a:off x="4453128" y="1234440"/>
-            <a:ext cx="3291840" cy="4480560"/>
+            <a:off x="3401568" y="1234440"/>
+            <a:ext cx="2606040" cy="4480560"/>
           </a:xfrm>
           <a:prstGeom prst="roundRect">
             <a:avLst/>
@@ -4262,7 +4246,7 @@
           <a:lstStyle/>
           <a:p>
             <a:pPr algn="ctr">
-              <a:defRPr sz="1800" b="1">
+              <a:defRPr sz="1700" b="1">
                 <a:solidFill>
                   <a:srgbClr val="232D37"/>
                 </a:solidFill>
@@ -4270,7 +4254,7 @@
               </a:defRPr>
             </a:pPr>
             <a:r>
-              <a:t>Compute model</a:t>
+              <a:t>Tax details</a:t>
             </a:r>
           </a:p>
           <a:p>
@@ -4278,15 +4262,15 @@
               <a:spcBef>
                 <a:spcPts val="300"/>
               </a:spcBef>
-              <a:defRPr sz="1300">
-                <a:solidFill>
-                  <a:srgbClr val="232D37"/>
-                </a:solidFill>
-                <a:latin typeface="Aptos"/>
-              </a:defRPr>
-            </a:pPr>
-            <a:r>
-              <a:t>simulateAnnuity() runs once per contract up front</a:t>
+              <a:defRPr sz="1200">
+                <a:solidFill>
+                  <a:srgbClr val="232D37"/>
+                </a:solidFill>
+                <a:latin typeface="Aptos"/>
+              </a:defRPr>
+            </a:pPr>
+            <a:r>
+              <a:t>One primary tax chart</a:t>
             </a:r>
           </a:p>
           <a:p>
@@ -4294,15 +4278,15 @@
               <a:spcBef>
                 <a:spcPts val="300"/>
               </a:spcBef>
-              <a:defRPr sz="1300">
-                <a:solidFill>
-                  <a:srgbClr val="232D37"/>
-                </a:solidFill>
-                <a:latin typeface="Aptos"/>
-              </a:defRPr>
-            </a:pPr>
-            <a:r>
-              <a:t>Account value and rider base evolve independently</a:t>
+              <a:defRPr sz="1200">
+                <a:solidFill>
+                  <a:srgbClr val="232D37"/>
+                </a:solidFill>
+                <a:latin typeface="Aptos"/>
+              </a:defRPr>
+            </a:pPr>
+            <a:r>
+              <a:t>Ordinary-tax companion</a:t>
             </a:r>
           </a:p>
           <a:p>
@@ -4310,15 +4294,15 @@
               <a:spcBef>
                 <a:spcPts val="300"/>
               </a:spcBef>
-              <a:defRPr sz="1300">
-                <a:solidFill>
-                  <a:srgbClr val="232D37"/>
-                </a:solidFill>
-                <a:latin typeface="Aptos"/>
-              </a:defRPr>
-            </a:pPr>
-            <a:r>
-              <a:t>Annual payout decomposes into taxable and tax-exempt cash</a:t>
+              <a:defRPr sz="1200">
+                <a:solidFill>
+                  <a:srgbClr val="232D37"/>
+                </a:solidFill>
+                <a:latin typeface="Aptos"/>
+              </a:defRPr>
+            </a:pPr>
+            <a:r>
+              <a:t>Qualified-tax companion</a:t>
             </a:r>
           </a:p>
           <a:p>
@@ -4326,15 +4310,15 @@
               <a:spcBef>
                 <a:spcPts val="300"/>
               </a:spcBef>
-              <a:defRPr sz="1300">
-                <a:solidFill>
-                  <a:srgbClr val="232D37"/>
-                </a:solidFill>
-                <a:latin typeface="Aptos"/>
-              </a:defRPr>
-            </a:pPr>
-            <a:r>
-              <a:t>Insurer-paid amounts are distinguished</a:t>
+              <a:defRPr sz="1200">
+                <a:solidFill>
+                  <a:srgbClr val="232D37"/>
+                </a:solidFill>
+                <a:latin typeface="Aptos"/>
+              </a:defRPr>
+            </a:pPr>
+            <a:r>
+              <a:t>Shared scale, tooltips, and Rescale behavior</a:t>
             </a:r>
           </a:p>
         </p:txBody>
@@ -4347,7 +4331,7 @@
         </p:nvSpPr>
         <p:spPr>
           <a:xfrm>
-            <a:off x="4453128" y="1234440"/>
+            <a:off x="3401568" y="1234440"/>
             <a:ext cx="82296" cy="4480560"/>
           </a:xfrm>
           <a:prstGeom prst="rect">
@@ -4390,8 +4374,8 @@
         </p:nvSpPr>
         <p:spPr>
           <a:xfrm>
-            <a:off x="8357616" y="1234440"/>
-            <a:ext cx="3291840" cy="4480560"/>
+            <a:off x="6300216" y="1234440"/>
+            <a:ext cx="2606040" cy="4480560"/>
           </a:xfrm>
           <a:prstGeom prst="roundRect">
             <a:avLst/>
@@ -4424,7 +4408,7 @@
           <a:lstStyle/>
           <a:p>
             <a:pPr algn="ctr">
-              <a:defRPr sz="1800" b="1">
+              <a:defRPr sz="1700" b="1">
                 <a:solidFill>
                   <a:srgbClr val="232D37"/>
                 </a:solidFill>
@@ -4432,7 +4416,7 @@
               </a:defRPr>
             </a:pPr>
             <a:r>
-              <a:t>Consumer model</a:t>
+              <a:t>Income layout</a:t>
             </a:r>
           </a:p>
           <a:p>
@@ -4440,15 +4424,15 @@
               <a:spcBef>
                 <a:spcPts val="300"/>
               </a:spcBef>
-              <a:defRPr sz="1300">
-                <a:solidFill>
-                  <a:srgbClr val="232D37"/>
-                </a:solidFill>
-                <a:latin typeface="Aptos"/>
-              </a:defRPr>
-            </a:pPr>
-            <a:r>
-              <a:t>Income chart receives taxable / tax-exempt payouts</a:t>
+              <a:defRPr sz="1200">
+                <a:solidFill>
+                  <a:srgbClr val="232D37"/>
+                </a:solidFill>
+                <a:latin typeface="Aptos"/>
+              </a:defRPr>
+            </a:pPr>
+            <a:r>
+              <a:t>Shared order in state.ui.incomeOrder</a:t>
             </a:r>
           </a:p>
           <a:p>
@@ -4456,15 +4440,15 @@
               <a:spcBef>
                 <a:spcPts val="300"/>
               </a:spcBef>
-              <a:defRPr sz="1300">
-                <a:solidFill>
-                  <a:srgbClr val="232D37"/>
-                </a:solidFill>
-                <a:latin typeface="Aptos"/>
-              </a:defRPr>
-            </a:pPr>
-            <a:r>
-              <a:t>Asset chart plots annuity balances</a:t>
+              <a:defRPr sz="1200">
+                <a:solidFill>
+                  <a:srgbClr val="232D37"/>
+                </a:solidFill>
+                <a:latin typeface="Aptos"/>
+              </a:defRPr>
+            </a:pPr>
+            <a:r>
+              <a:t>HTML5 drag handles</a:t>
             </a:r>
           </a:p>
           <a:p>
@@ -4472,15 +4456,15 @@
               <a:spcBef>
                 <a:spcPts val="300"/>
               </a:spcBef>
-              <a:defRPr sz="1300">
-                <a:solidFill>
-                  <a:srgbClr val="232D37"/>
-                </a:solidFill>
-                <a:latin typeface="Aptos"/>
-              </a:defRPr>
-            </a:pPr>
-            <a:r>
-              <a:t>Excel adds summary columns and contract sheets</a:t>
+              <a:defRPr sz="1200">
+                <a:solidFill>
+                  <a:srgbClr val="232D37"/>
+                </a:solidFill>
+                <a:latin typeface="Aptos"/>
+              </a:defRPr>
+            </a:pPr>
+            <a:r>
+              <a:t>Same order in all person columns</a:t>
             </a:r>
           </a:p>
           <a:p>
@@ -4488,15 +4472,15 @@
               <a:spcBef>
                 <a:spcPts val="300"/>
               </a:spcBef>
-              <a:defRPr sz="1300">
-                <a:solidFill>
-                  <a:srgbClr val="232D37"/>
-                </a:solidFill>
-                <a:latin typeface="Aptos"/>
-              </a:defRPr>
-            </a:pPr>
-            <a:r>
-              <a:t>Chat snapshot and formulas gain annuity content</a:t>
+              <a:defRPr sz="1200">
+                <a:solidFill>
+                  <a:srgbClr val="232D37"/>
+                </a:solidFill>
+                <a:latin typeface="Aptos"/>
+              </a:defRPr>
+            </a:pPr>
+            <a:r>
+              <a:t>Display-only: no recompute</a:t>
             </a:r>
           </a:p>
         </p:txBody>
@@ -4509,7 +4493,7 @@
         </p:nvSpPr>
         <p:spPr>
           <a:xfrm>
-            <a:off x="8357616" y="1234440"/>
+            <a:off x="6300216" y="1234440"/>
             <a:ext cx="82296" cy="4480560"/>
           </a:xfrm>
           <a:prstGeom prst="rect">
@@ -4546,7 +4530,153 @@
       </p:sp>
       <p:sp>
         <p:nvSpPr>
-          <p:cNvPr id="10" name="Rectangle 9"/>
+          <p:cNvPr id="10" name="Rounded Rectangle 9"/>
+          <p:cNvSpPr/>
+          <p:nvPr/>
+        </p:nvSpPr>
+        <p:spPr>
+          <a:xfrm>
+            <a:off x="9198864" y="1234440"/>
+            <a:ext cx="2606040" cy="4480560"/>
+          </a:xfrm>
+          <a:prstGeom prst="roundRect">
+            <a:avLst/>
+          </a:prstGeom>
+          <a:solidFill>
+            <a:srgbClr val="FFF6E8"/>
+          </a:solidFill>
+          <a:ln w="13970">
+            <a:solidFill>
+              <a:srgbClr val="E5892A"/>
+            </a:solidFill>
+          </a:ln>
+        </p:spPr>
+        <p:style>
+          <a:lnRef idx="1">
+            <a:schemeClr val="accent1"/>
+          </a:lnRef>
+          <a:fillRef idx="3">
+            <a:schemeClr val="accent1"/>
+          </a:fillRef>
+          <a:effectRef idx="2">
+            <a:schemeClr val="accent1"/>
+          </a:effectRef>
+          <a:fontRef idx="minor">
+            <a:schemeClr val="lt1"/>
+          </a:fontRef>
+        </p:style>
+        <p:txBody>
+          <a:bodyPr rtlCol="0" anchor="ctr" lIns="182880" rIns="100584" tIns="91440"/>
+          <a:lstStyle/>
+          <a:p>
+            <a:pPr algn="ctr">
+              <a:defRPr sz="1700" b="1">
+                <a:solidFill>
+                  <a:srgbClr val="232D37"/>
+                </a:solidFill>
+                <a:latin typeface="Aptos Display"/>
+              </a:defRPr>
+            </a:pPr>
+            <a:r>
+              <a:t>Markdown docs</a:t>
+            </a:r>
+          </a:p>
+          <a:p>
+            <a:pPr>
+              <a:spcBef>
+                <a:spcPts val="300"/>
+              </a:spcBef>
+              <a:defRPr sz="1200">
+                <a:solidFill>
+                  <a:srgbClr val="232D37"/>
+                </a:solidFill>
+                <a:latin typeface="Aptos"/>
+              </a:defRPr>
+            </a:pPr>
+            <a:r>
+              <a:t>Nested lists by indentation</a:t>
+            </a:r>
+          </a:p>
+          <a:p>
+            <a:pPr>
+              <a:spcBef>
+                <a:spcPts val="300"/>
+              </a:spcBef>
+              <a:defRPr sz="1200">
+                <a:solidFill>
+                  <a:srgbClr val="232D37"/>
+                </a:solidFill>
+                <a:latin typeface="Aptos"/>
+              </a:defRPr>
+            </a:pPr>
+            <a:r>
+              <a:t>Shared mdPage viewer</a:t>
+            </a:r>
+          </a:p>
+          <a:p>
+            <a:pPr>
+              <a:spcBef>
+                <a:spcPts val="300"/>
+              </a:spcBef>
+              <a:defRPr sz="1200">
+                <a:solidFill>
+                  <a:srgbClr val="232D37"/>
+                </a:solidFill>
+                <a:latin typeface="Aptos"/>
+              </a:defRPr>
+            </a:pPr>
+            <a:r>
+              <a:t>Usage and Notes remain content files</a:t>
+            </a:r>
+          </a:p>
+        </p:txBody>
+      </p:sp>
+      <p:sp>
+        <p:nvSpPr>
+          <p:cNvPr id="11" name="Rectangle 10"/>
+          <p:cNvSpPr/>
+          <p:nvPr/>
+        </p:nvSpPr>
+        <p:spPr>
+          <a:xfrm>
+            <a:off x="9198864" y="1234440"/>
+            <a:ext cx="82296" cy="4480560"/>
+          </a:xfrm>
+          <a:prstGeom prst="rect">
+            <a:avLst/>
+          </a:prstGeom>
+          <a:solidFill>
+            <a:srgbClr val="E5892A"/>
+          </a:solidFill>
+          <a:ln>
+            <a:noFill/>
+          </a:ln>
+        </p:spPr>
+        <p:style>
+          <a:lnRef idx="1">
+            <a:schemeClr val="accent1"/>
+          </a:lnRef>
+          <a:fillRef idx="3">
+            <a:schemeClr val="accent1"/>
+          </a:fillRef>
+          <a:effectRef idx="2">
+            <a:schemeClr val="accent1"/>
+          </a:effectRef>
+          <a:fontRef idx="minor">
+            <a:schemeClr val="lt1"/>
+          </a:fontRef>
+        </p:style>
+        <p:txBody>
+          <a:bodyPr rtlCol="0" anchor="ctr"/>
+          <a:lstStyle/>
+          <a:p>
+            <a:pPr algn="ctr"/>
+          </a:p>
+        </p:txBody>
+      </p:sp>
+      <p:sp>
+        <p:nvSpPr>
+          <p:cNvPr id="12" name="Rectangle 11"/>
           <p:cNvSpPr/>
           <p:nvPr/>
         </p:nvSpPr>
@@ -4589,7 +4719,7 @@
       </p:sp>
       <p:sp>
         <p:nvSpPr>
-          <p:cNvPr id="11" name="TextBox 10"/>
+          <p:cNvPr id="13" name="TextBox 12"/>
           <p:cNvSpPr txBox="1"/>
           <p:nvPr/>
         </p:nvSpPr>
@@ -4618,7 +4748,7 @@
               </a:defRPr>
             </a:pPr>
             <a:r>
-              <a:t>Retirement Income Planner • Architecture overview • Annuity-model update</a:t>
+              <a:t>Retirement Income Planner • Architecture overview • Print, tax-detail, and customizable income-layout update</a:t>
             </a:r>
           </a:p>
         </p:txBody>
@@ -4680,7 +4810,7 @@
               </a:defRPr>
             </a:pPr>
             <a:r>
-              <a:t>Annuity state and input-card structure</a:t>
+              <a:t>Print architecture: generate snapshots, not side effects</a:t>
             </a:r>
           </a:p>
         </p:txBody>
@@ -4716,7 +4846,7 @@
               </a:defRPr>
             </a:pPr>
             <a:r>
-              <a:t>Each person can hold any number of independent annuity contracts, managed like brokerage portfolios and rental properties.</a:t>
+              <a:t>The Print action reveals the full plan and replaces live charts with synchronous bitmap copies only for the print lifecycle.</a:t>
             </a:r>
           </a:p>
         </p:txBody>
@@ -4730,7 +4860,7 @@
         <p:spPr>
           <a:xfrm>
             <a:off x="502920" y="1188720"/>
-            <a:ext cx="3337560" cy="4526280"/>
+            <a:ext cx="2057400" cy="1325880"/>
           </a:xfrm>
           <a:prstGeom prst="roundRect">
             <a:avLst/>
@@ -4763,7 +4893,7 @@
           <a:lstStyle/>
           <a:p>
             <a:pPr algn="ctr">
-              <a:defRPr sz="1700" b="1">
+              <a:defRPr sz="1600" b="1">
                 <a:solidFill>
                   <a:srgbClr val="232D37"/>
                 </a:solidFill>
@@ -4771,7 +4901,7 @@
               </a:defRPr>
             </a:pPr>
             <a:r>
-              <a:t>Core contract fields</a:t>
+              <a:t>Print command</a:t>
             </a:r>
           </a:p>
           <a:p>
@@ -4779,15 +4909,15 @@
               <a:spcBef>
                 <a:spcPts val="300"/>
               </a:spcBef>
-              <a:defRPr sz="1200">
-                <a:solidFill>
-                  <a:srgbClr val="232D37"/>
-                </a:solidFill>
-                <a:latin typeface="Aptos"/>
-              </a:defRPr>
-            </a:pPr>
-            <a:r>
-              <a:t>Name</a:t>
+              <a:defRPr sz="1100">
+                <a:solidFill>
+                  <a:srgbClr val="232D37"/>
+                </a:solidFill>
+                <a:latin typeface="Aptos"/>
+              </a:defRPr>
+            </a:pPr>
+            <a:r>
+              <a:t>Topbar Print button or Ctrl/Cmd+P</a:t>
             </a:r>
           </a:p>
           <a:p>
@@ -4795,79 +4925,15 @@
               <a:spcBef>
                 <a:spcPts val="300"/>
               </a:spcBef>
-              <a:defRPr sz="1200">
-                <a:solidFill>
-                  <a:srgbClr val="232D37"/>
-                </a:solidFill>
-                <a:latin typeface="Aptos"/>
-              </a:defRPr>
-            </a:pPr>
-            <a:r>
-              <a:t>Value and optional premium</a:t>
-            </a:r>
-          </a:p>
-          <a:p>
-            <a:pPr>
-              <a:spcBef>
-                <a:spcPts val="300"/>
-              </a:spcBef>
-              <a:defRPr sz="1200">
-                <a:solidFill>
-                  <a:srgbClr val="232D37"/>
-                </a:solidFill>
-                <a:latin typeface="Aptos"/>
-              </a:defRPr>
-            </a:pPr>
-            <a:r>
-              <a:t>Growth spec and fee percentage</a:t>
-            </a:r>
-          </a:p>
-          <a:p>
-            <a:pPr>
-              <a:spcBef>
-                <a:spcPts val="300"/>
-              </a:spcBef>
-              <a:defRPr sz="1200">
-                <a:solidFill>
-                  <a:srgbClr val="232D37"/>
-                </a:solidFill>
-                <a:latin typeface="Aptos"/>
-              </a:defRPr>
-            </a:pPr>
-            <a:r>
-              <a:t>Payout age range, amount, annual change</a:t>
-            </a:r>
-          </a:p>
-          <a:p>
-            <a:pPr>
-              <a:spcBef>
-                <a:spcPts val="300"/>
-              </a:spcBef>
-              <a:defRPr sz="1200">
-                <a:solidFill>
-                  <a:srgbClr val="232D37"/>
-                </a:solidFill>
-                <a:latin typeface="Aptos"/>
-              </a:defRPr>
-            </a:pPr>
-            <a:r>
-              <a:t>Tax method and exempt percentage</a:t>
-            </a:r>
-          </a:p>
-          <a:p>
-            <a:pPr>
-              <a:spcBef>
-                <a:spcPts val="300"/>
-              </a:spcBef>
-              <a:defRPr sz="1200">
-                <a:solidFill>
-                  <a:srgbClr val="232D37"/>
-                </a:solidFill>
-                <a:latin typeface="Aptos"/>
-              </a:defRPr>
-            </a:pPr>
-            <a:r>
-              <a:t>Survivor benefit</a:t>
+              <a:defRPr sz="1100">
+                <a:solidFill>
+                  <a:srgbClr val="232D37"/>
+                </a:solidFill>
+                <a:latin typeface="Aptos"/>
+              </a:defRPr>
+            </a:pPr>
+            <a:r>
+              <a:t>window.print()</a:t>
             </a:r>
           </a:p>
         </p:txBody>
@@ -4881,7 +4947,7 @@
         <p:spPr>
           <a:xfrm>
             <a:off x="502920" y="1188720"/>
-            <a:ext cx="82296" cy="4526280"/>
+            <a:ext cx="82296" cy="1325880"/>
           </a:xfrm>
           <a:prstGeom prst="rect">
             <a:avLst/>
@@ -4923,8 +4989,154 @@
         </p:nvSpPr>
         <p:spPr>
           <a:xfrm>
-            <a:off x="4407408" y="1188720"/>
-            <a:ext cx="3337560" cy="4526280"/>
+            <a:off x="2907792" y="1188720"/>
+            <a:ext cx="2057400" cy="1325880"/>
+          </a:xfrm>
+          <a:prstGeom prst="roundRect">
+            <a:avLst/>
+          </a:prstGeom>
+          <a:solidFill>
+            <a:srgbClr val="EAF9F4"/>
+          </a:solidFill>
+          <a:ln w="13970">
+            <a:solidFill>
+              <a:srgbClr val="429761"/>
+            </a:solidFill>
+          </a:ln>
+        </p:spPr>
+        <p:style>
+          <a:lnRef idx="1">
+            <a:schemeClr val="accent1"/>
+          </a:lnRef>
+          <a:fillRef idx="3">
+            <a:schemeClr val="accent1"/>
+          </a:fillRef>
+          <a:effectRef idx="2">
+            <a:schemeClr val="accent1"/>
+          </a:effectRef>
+          <a:fontRef idx="minor">
+            <a:schemeClr val="lt1"/>
+          </a:fontRef>
+        </p:style>
+        <p:txBody>
+          <a:bodyPr rtlCol="0" anchor="ctr" lIns="182880" rIns="100584" tIns="91440"/>
+          <a:lstStyle/>
+          <a:p>
+            <a:pPr algn="ctr">
+              <a:defRPr sz="1600" b="1">
+                <a:solidFill>
+                  <a:srgbClr val="232D37"/>
+                </a:solidFill>
+                <a:latin typeface="Aptos Display"/>
+              </a:defRPr>
+            </a:pPr>
+            <a:r>
+              <a:t>beforeprint</a:t>
+            </a:r>
+          </a:p>
+          <a:p>
+            <a:pPr>
+              <a:spcBef>
+                <a:spcPts val="300"/>
+              </a:spcBef>
+              <a:defRPr sz="1100">
+                <a:solidFill>
+                  <a:srgbClr val="232D37"/>
+                </a:solidFill>
+                <a:latin typeface="Aptos"/>
+              </a:defRPr>
+            </a:pPr>
+            <a:r>
+              <a:t>Open hidden sections/cards in DOM</a:t>
+            </a:r>
+          </a:p>
+          <a:p>
+            <a:pPr>
+              <a:spcBef>
+                <a:spcPts val="300"/>
+              </a:spcBef>
+              <a:defRPr sz="1100">
+                <a:solidFill>
+                  <a:srgbClr val="232D37"/>
+                </a:solidFill>
+                <a:latin typeface="Aptos"/>
+              </a:defRPr>
+            </a:pPr>
+            <a:r>
+              <a:t>Add printing-all class</a:t>
+            </a:r>
+          </a:p>
+          <a:p>
+            <a:pPr>
+              <a:spcBef>
+                <a:spcPts val="300"/>
+              </a:spcBef>
+              <a:defRPr sz="1100">
+                <a:solidFill>
+                  <a:srgbClr val="232D37"/>
+                </a:solidFill>
+                <a:latin typeface="Aptos"/>
+              </a:defRPr>
+            </a:pPr>
+            <a:r>
+              <a:t>Do not change state</a:t>
+            </a:r>
+          </a:p>
+        </p:txBody>
+      </p:sp>
+      <p:sp>
+        <p:nvSpPr>
+          <p:cNvPr id="7" name="Rectangle 6"/>
+          <p:cNvSpPr/>
+          <p:nvPr/>
+        </p:nvSpPr>
+        <p:spPr>
+          <a:xfrm>
+            <a:off x="2907792" y="1188720"/>
+            <a:ext cx="82296" cy="1325880"/>
+          </a:xfrm>
+          <a:prstGeom prst="rect">
+            <a:avLst/>
+          </a:prstGeom>
+          <a:solidFill>
+            <a:srgbClr val="429761"/>
+          </a:solidFill>
+          <a:ln>
+            <a:noFill/>
+          </a:ln>
+        </p:spPr>
+        <p:style>
+          <a:lnRef idx="1">
+            <a:schemeClr val="accent1"/>
+          </a:lnRef>
+          <a:fillRef idx="3">
+            <a:schemeClr val="accent1"/>
+          </a:fillRef>
+          <a:effectRef idx="2">
+            <a:schemeClr val="accent1"/>
+          </a:effectRef>
+          <a:fontRef idx="minor">
+            <a:schemeClr val="lt1"/>
+          </a:fontRef>
+        </p:style>
+        <p:txBody>
+          <a:bodyPr rtlCol="0" anchor="ctr"/>
+          <a:lstStyle/>
+          <a:p>
+            <a:pPr algn="ctr"/>
+          </a:p>
+        </p:txBody>
+      </p:sp>
+      <p:sp>
+        <p:nvSpPr>
+          <p:cNvPr id="8" name="Rounded Rectangle 7"/>
+          <p:cNvSpPr/>
+          <p:nvPr/>
+        </p:nvSpPr>
+        <p:spPr>
+          <a:xfrm>
+            <a:off x="5312664" y="1188720"/>
+            <a:ext cx="2057400" cy="1325880"/>
           </a:xfrm>
           <a:prstGeom prst="roundRect">
             <a:avLst/>
@@ -4957,7 +5169,7 @@
           <a:lstStyle/>
           <a:p>
             <a:pPr algn="ctr">
-              <a:defRPr sz="1700" b="1">
+              <a:defRPr sz="1600" b="1">
                 <a:solidFill>
                   <a:srgbClr val="232D37"/>
                 </a:solidFill>
@@ -4965,7 +5177,7 @@
               </a:defRPr>
             </a:pPr>
             <a:r>
-              <a:t>Tax methods</a:t>
+              <a:t>Chart cloning</a:t>
             </a:r>
           </a:p>
           <a:p>
@@ -4973,15 +5185,15 @@
               <a:spcBef>
                 <a:spcPts val="300"/>
               </a:spcBef>
-              <a:defRPr sz="1200">
-                <a:solidFill>
-                  <a:srgbClr val="232D37"/>
-                </a:solidFill>
-                <a:latin typeface="Aptos"/>
-              </a:defRPr>
-            </a:pPr>
-            <a:r>
-              <a:t>LIFO — default</a:t>
+              <a:defRPr sz="1100">
+                <a:solidFill>
+                  <a:srgbClr val="232D37"/>
+                </a:solidFill>
+                <a:latin typeface="Aptos"/>
+              </a:defRPr>
+            </a:pPr>
+            <a:r>
+              <a:t>Fresh, non-animated off-screen charts</a:t>
             </a:r>
           </a:p>
           <a:p>
@@ -4989,77 +5201,29 @@
               <a:spcBef>
                 <a:spcPts val="300"/>
               </a:spcBef>
-              <a:defRPr sz="1200">
-                <a:solidFill>
-                  <a:srgbClr val="232D37"/>
-                </a:solidFill>
-                <a:latin typeface="Aptos"/>
-              </a:defRPr>
-            </a:pPr>
-            <a:r>
-              <a:t>Exclusion ratio</a:t>
-            </a:r>
-          </a:p>
-          <a:p>
-            <a:pPr>
-              <a:spcBef>
-                <a:spcPts val="300"/>
-              </a:spcBef>
-              <a:defRPr sz="1200">
-                <a:solidFill>
-                  <a:srgbClr val="232D37"/>
-                </a:solidFill>
-                <a:latin typeface="Aptos"/>
-              </a:defRPr>
-            </a:pPr>
-            <a:r>
-              <a:t>Fully taxable</a:t>
-            </a:r>
-          </a:p>
-          <a:p>
-            <a:pPr>
-              <a:spcBef>
-                <a:spcPts val="300"/>
-              </a:spcBef>
-              <a:defRPr sz="1200">
-                <a:solidFill>
-                  <a:srgbClr val="232D37"/>
-                </a:solidFill>
-                <a:latin typeface="Aptos"/>
-              </a:defRPr>
-            </a:pPr>
-            <a:r>
-              <a:t>Tax exempt</a:t>
-            </a:r>
-          </a:p>
-          <a:p>
-            <a:pPr>
-              <a:spcBef>
-                <a:spcPts val="300"/>
-              </a:spcBef>
-              <a:defRPr sz="1200">
-                <a:solidFill>
-                  <a:srgbClr val="232D37"/>
-                </a:solidFill>
-                <a:latin typeface="Aptos"/>
-              </a:defRPr>
-            </a:pPr>
-            <a:r>
-              <a:t>Tax-free portion is separately tracked for cash, provisional income, and MAGI behavior.</a:t>
-            </a:r>
-          </a:p>
-        </p:txBody>
-      </p:sp>
-      <p:sp>
-        <p:nvSpPr>
-          <p:cNvPr id="7" name="Rectangle 6"/>
+              <a:defRPr sz="1100">
+                <a:solidFill>
+                  <a:srgbClr val="232D37"/>
+                </a:solidFill>
+                <a:latin typeface="Aptos"/>
+              </a:defRPr>
+            </a:pPr>
+            <a:r>
+              <a:t>Copy pixels to plain canvases</a:t>
+            </a:r>
+          </a:p>
+        </p:txBody>
+      </p:sp>
+      <p:sp>
+        <p:nvSpPr>
+          <p:cNvPr id="9" name="Rectangle 8"/>
           <p:cNvSpPr/>
           <p:nvPr/>
         </p:nvSpPr>
         <p:spPr>
           <a:xfrm>
-            <a:off x="4407408" y="1188720"/>
-            <a:ext cx="82296" cy="4526280"/>
+            <a:off x="5312664" y="1188720"/>
+            <a:ext cx="82296" cy="1325880"/>
           </a:xfrm>
           <a:prstGeom prst="rect">
             <a:avLst/>
@@ -5095,14 +5259,14 @@
       </p:sp>
       <p:sp>
         <p:nvSpPr>
-          <p:cNvPr id="8" name="Rounded Rectangle 7"/>
+          <p:cNvPr id="10" name="Rounded Rectangle 9"/>
           <p:cNvSpPr/>
           <p:nvPr/>
         </p:nvSpPr>
         <p:spPr>
           <a:xfrm>
-            <a:off x="8311896" y="1188720"/>
-            <a:ext cx="3337560" cy="4526280"/>
+            <a:off x="7717536" y="1188720"/>
+            <a:ext cx="2057400" cy="1325880"/>
           </a:xfrm>
           <a:prstGeom prst="roundRect">
             <a:avLst/>
@@ -5135,7 +5299,7 @@
           <a:lstStyle/>
           <a:p>
             <a:pPr algn="ctr">
-              <a:defRPr sz="1700" b="1">
+              <a:defRPr sz="1600" b="1">
                 <a:solidFill>
                   <a:srgbClr val="232D37"/>
                 </a:solidFill>
@@ -5143,7 +5307,7 @@
               </a:defRPr>
             </a:pPr>
             <a:r>
-              <a:t>Living-benefit rider</a:t>
+              <a:t>Print layout</a:t>
             </a:r>
           </a:p>
           <a:p>
@@ -5151,15 +5315,15 @@
               <a:spcBef>
                 <a:spcPts val="300"/>
               </a:spcBef>
-              <a:defRPr sz="1200">
-                <a:solidFill>
-                  <a:srgbClr val="232D37"/>
-                </a:solidFill>
-                <a:latin typeface="Aptos"/>
-              </a:defRPr>
-            </a:pPr>
-            <a:r>
-              <a:t>Rider enable flag</a:t>
+              <a:defRPr sz="1100">
+                <a:solidFill>
+                  <a:srgbClr val="232D37"/>
+                </a:solidFill>
+                <a:latin typeface="Aptos"/>
+              </a:defRPr>
+            </a:pPr>
+            <a:r>
+              <a:t>Single column</a:t>
             </a:r>
           </a:p>
           <a:p>
@@ -5167,15 +5331,15 @@
               <a:spcBef>
                 <a:spcPts val="300"/>
               </a:spcBef>
-              <a:defRPr sz="1200">
-                <a:solidFill>
-                  <a:srgbClr val="232D37"/>
-                </a:solidFill>
-                <a:latin typeface="Aptos"/>
-              </a:defRPr>
-            </a:pPr>
-            <a:r>
-              <a:t>Optional rider base</a:t>
+              <a:defRPr sz="1100">
+                <a:solidFill>
+                  <a:srgbClr val="232D37"/>
+                </a:solidFill>
+                <a:latin typeface="Aptos"/>
+              </a:defRPr>
+            </a:pPr>
+            <a:r>
+              <a:t>480px charts</a:t>
             </a:r>
           </a:p>
           <a:p>
@@ -5183,93 +5347,29 @@
               <a:spcBef>
                 <a:spcPts val="300"/>
               </a:spcBef>
-              <a:defRPr sz="1200">
-                <a:solidFill>
-                  <a:srgbClr val="232D37"/>
-                </a:solidFill>
-                <a:latin typeface="Aptos"/>
-              </a:defRPr>
-            </a:pPr>
-            <a:r>
-              <a:t>Rollup rate</a:t>
-            </a:r>
-          </a:p>
-          <a:p>
-            <a:pPr>
-              <a:spcBef>
-                <a:spcPts val="300"/>
-              </a:spcBef>
-              <a:defRPr sz="1200">
-                <a:solidFill>
-                  <a:srgbClr val="232D37"/>
-                </a:solidFill>
-                <a:latin typeface="Aptos"/>
-              </a:defRPr>
-            </a:pPr>
-            <a:r>
-              <a:t>Step-up option</a:t>
-            </a:r>
-          </a:p>
-          <a:p>
-            <a:pPr>
-              <a:spcBef>
-                <a:spcPts val="300"/>
-              </a:spcBef>
-              <a:defRPr sz="1200">
-                <a:solidFill>
-                  <a:srgbClr val="232D37"/>
-                </a:solidFill>
-                <a:latin typeface="Aptos"/>
-              </a:defRPr>
-            </a:pPr>
-            <a:r>
-              <a:t>Payout rate</a:t>
-            </a:r>
-          </a:p>
-          <a:p>
-            <a:pPr>
-              <a:spcBef>
-                <a:spcPts val="300"/>
-              </a:spcBef>
-              <a:defRPr sz="1200">
-                <a:solidFill>
-                  <a:srgbClr val="232D37"/>
-                </a:solidFill>
-                <a:latin typeface="Aptos"/>
-              </a:defRPr>
-            </a:pPr>
-            <a:r>
-              <a:t>Rider fee</a:t>
-            </a:r>
-          </a:p>
-          <a:p>
-            <a:pPr>
-              <a:spcBef>
-                <a:spcPts val="300"/>
-              </a:spcBef>
-              <a:defRPr sz="1200">
-                <a:solidFill>
-                  <a:srgbClr val="232D37"/>
-                </a:solidFill>
-                <a:latin typeface="Aptos"/>
-              </a:defRPr>
-            </a:pPr>
-            <a:r>
-              <a:t>Standard payout fields hide while rider is active.</a:t>
-            </a:r>
-          </a:p>
-        </p:txBody>
-      </p:sp>
-      <p:sp>
-        <p:nvSpPr>
-          <p:cNvPr id="9" name="Rectangle 8"/>
+              <a:defRPr sz="1100">
+                <a:solidFill>
+                  <a:srgbClr val="232D37"/>
+                </a:solidFill>
+                <a:latin typeface="Aptos"/>
+              </a:defRPr>
+            </a:pPr>
+            <a:r>
+              <a:t>No buttons or Hide controls</a:t>
+            </a:r>
+          </a:p>
+        </p:txBody>
+      </p:sp>
+      <p:sp>
+        <p:nvSpPr>
+          <p:cNvPr id="11" name="Rectangle 10"/>
           <p:cNvSpPr/>
           <p:nvPr/>
         </p:nvSpPr>
         <p:spPr>
           <a:xfrm>
-            <a:off x="8311896" y="1188720"/>
-            <a:ext cx="82296" cy="4526280"/>
+            <a:off x="7717536" y="1188720"/>
+            <a:ext cx="82296" cy="1325880"/>
           </a:xfrm>
           <a:prstGeom prst="rect">
             <a:avLst/>
@@ -5305,7 +5405,489 @@
       </p:sp>
       <p:sp>
         <p:nvSpPr>
-          <p:cNvPr id="10" name="Rectangle 9"/>
+          <p:cNvPr id="12" name="Rounded Rectangle 11"/>
+          <p:cNvSpPr/>
+          <p:nvPr/>
+        </p:nvSpPr>
+        <p:spPr>
+          <a:xfrm>
+            <a:off x="10122408" y="1188720"/>
+            <a:ext cx="1554480" cy="1325880"/>
+          </a:xfrm>
+          <a:prstGeom prst="roundRect">
+            <a:avLst/>
+          </a:prstGeom>
+          <a:solidFill>
+            <a:srgbClr val="F8FAFC"/>
+          </a:solidFill>
+          <a:ln w="13970">
+            <a:solidFill>
+              <a:srgbClr val="0F2647"/>
+            </a:solidFill>
+          </a:ln>
+        </p:spPr>
+        <p:style>
+          <a:lnRef idx="1">
+            <a:schemeClr val="accent1"/>
+          </a:lnRef>
+          <a:fillRef idx="3">
+            <a:schemeClr val="accent1"/>
+          </a:fillRef>
+          <a:effectRef idx="2">
+            <a:schemeClr val="accent1"/>
+          </a:effectRef>
+          <a:fontRef idx="minor">
+            <a:schemeClr val="lt1"/>
+          </a:fontRef>
+        </p:style>
+        <p:txBody>
+          <a:bodyPr rtlCol="0" anchor="ctr" lIns="182880" rIns="100584" tIns="91440"/>
+          <a:lstStyle/>
+          <a:p>
+            <a:pPr algn="ctr">
+              <a:defRPr sz="1500" b="1">
+                <a:solidFill>
+                  <a:srgbClr val="232D37"/>
+                </a:solidFill>
+                <a:latin typeface="Aptos Display"/>
+              </a:defRPr>
+            </a:pPr>
+            <a:r>
+              <a:t>afterprint</a:t>
+            </a:r>
+          </a:p>
+          <a:p>
+            <a:pPr>
+              <a:spcBef>
+                <a:spcPts val="300"/>
+              </a:spcBef>
+              <a:defRPr sz="1000">
+                <a:solidFill>
+                  <a:srgbClr val="232D37"/>
+                </a:solidFill>
+                <a:latin typeface="Aptos"/>
+              </a:defRPr>
+            </a:pPr>
+            <a:r>
+              <a:t>Restore live canvas/UI</a:t>
+            </a:r>
+          </a:p>
+        </p:txBody>
+      </p:sp>
+      <p:sp>
+        <p:nvSpPr>
+          <p:cNvPr id="13" name="Rectangle 12"/>
+          <p:cNvSpPr/>
+          <p:nvPr/>
+        </p:nvSpPr>
+        <p:spPr>
+          <a:xfrm>
+            <a:off x="10122408" y="1188720"/>
+            <a:ext cx="82296" cy="1325880"/>
+          </a:xfrm>
+          <a:prstGeom prst="rect">
+            <a:avLst/>
+          </a:prstGeom>
+          <a:solidFill>
+            <a:srgbClr val="0F2647"/>
+          </a:solidFill>
+          <a:ln>
+            <a:noFill/>
+          </a:ln>
+        </p:spPr>
+        <p:style>
+          <a:lnRef idx="1">
+            <a:schemeClr val="accent1"/>
+          </a:lnRef>
+          <a:fillRef idx="3">
+            <a:schemeClr val="accent1"/>
+          </a:fillRef>
+          <a:effectRef idx="2">
+            <a:schemeClr val="accent1"/>
+          </a:effectRef>
+          <a:fontRef idx="minor">
+            <a:schemeClr val="lt1"/>
+          </a:fontRef>
+        </p:style>
+        <p:txBody>
+          <a:bodyPr rtlCol="0" anchor="ctr"/>
+          <a:lstStyle/>
+          <a:p>
+            <a:pPr algn="ctr"/>
+          </a:p>
+        </p:txBody>
+      </p:sp>
+      <p:cxnSp>
+        <p:nvCxnSpPr>
+          <p:cNvPr id="14" name="Connector 13"/>
+          <p:cNvCxnSpPr/>
+          <p:nvPr/>
+        </p:nvCxnSpPr>
+        <p:spPr>
+          <a:xfrm>
+            <a:off x="2606040" y="1856231"/>
+            <a:ext cx="219456" cy="0"/>
+          </a:xfrm>
+          <a:prstGeom prst="line">
+            <a:avLst/>
+          </a:prstGeom>
+          <a:ln w="22860">
+            <a:solidFill>
+              <a:srgbClr val="266EB2"/>
+            </a:solidFill>
+          </a:ln>
+        </p:spPr>
+        <p:style>
+          <a:lnRef idx="2">
+            <a:schemeClr val="accent1"/>
+          </a:lnRef>
+          <a:fillRef idx="0">
+            <a:schemeClr val="accent1"/>
+          </a:fillRef>
+          <a:effectRef idx="1">
+            <a:schemeClr val="accent1"/>
+          </a:effectRef>
+          <a:fontRef idx="minor">
+            <a:schemeClr val="tx1"/>
+          </a:fontRef>
+        </p:style>
+      </p:cxnSp>
+      <p:cxnSp>
+        <p:nvCxnSpPr>
+          <p:cNvPr id="15" name="Connector 14"/>
+          <p:cNvCxnSpPr/>
+          <p:nvPr/>
+        </p:nvCxnSpPr>
+        <p:spPr>
+          <a:xfrm>
+            <a:off x="5010912" y="1856231"/>
+            <a:ext cx="219456" cy="0"/>
+          </a:xfrm>
+          <a:prstGeom prst="line">
+            <a:avLst/>
+          </a:prstGeom>
+          <a:ln w="22860">
+            <a:solidFill>
+              <a:srgbClr val="429761"/>
+            </a:solidFill>
+          </a:ln>
+        </p:spPr>
+        <p:style>
+          <a:lnRef idx="2">
+            <a:schemeClr val="accent1"/>
+          </a:lnRef>
+          <a:fillRef idx="0">
+            <a:schemeClr val="accent1"/>
+          </a:fillRef>
+          <a:effectRef idx="1">
+            <a:schemeClr val="accent1"/>
+          </a:effectRef>
+          <a:fontRef idx="minor">
+            <a:schemeClr val="tx1"/>
+          </a:fontRef>
+        </p:style>
+      </p:cxnSp>
+      <p:cxnSp>
+        <p:nvCxnSpPr>
+          <p:cNvPr id="16" name="Connector 15"/>
+          <p:cNvCxnSpPr/>
+          <p:nvPr/>
+        </p:nvCxnSpPr>
+        <p:spPr>
+          <a:xfrm>
+            <a:off x="7415783" y="1856231"/>
+            <a:ext cx="219457" cy="0"/>
+          </a:xfrm>
+          <a:prstGeom prst="line">
+            <a:avLst/>
+          </a:prstGeom>
+          <a:ln w="22860">
+            <a:solidFill>
+              <a:srgbClr val="E5892A"/>
+            </a:solidFill>
+          </a:ln>
+        </p:spPr>
+        <p:style>
+          <a:lnRef idx="2">
+            <a:schemeClr val="accent1"/>
+          </a:lnRef>
+          <a:fillRef idx="0">
+            <a:schemeClr val="accent1"/>
+          </a:fillRef>
+          <a:effectRef idx="1">
+            <a:schemeClr val="accent1"/>
+          </a:effectRef>
+          <a:fontRef idx="minor">
+            <a:schemeClr val="tx1"/>
+          </a:fontRef>
+        </p:style>
+      </p:cxnSp>
+      <p:cxnSp>
+        <p:nvCxnSpPr>
+          <p:cNvPr id="17" name="Connector 16"/>
+          <p:cNvCxnSpPr/>
+          <p:nvPr/>
+        </p:nvCxnSpPr>
+        <p:spPr>
+          <a:xfrm>
+            <a:off x="9820656" y="1856231"/>
+            <a:ext cx="219456" cy="0"/>
+          </a:xfrm>
+          <a:prstGeom prst="line">
+            <a:avLst/>
+          </a:prstGeom>
+          <a:ln w="22860">
+            <a:solidFill>
+              <a:srgbClr val="7852B0"/>
+            </a:solidFill>
+          </a:ln>
+        </p:spPr>
+        <p:style>
+          <a:lnRef idx="2">
+            <a:schemeClr val="accent1"/>
+          </a:lnRef>
+          <a:fillRef idx="0">
+            <a:schemeClr val="accent1"/>
+          </a:fillRef>
+          <a:effectRef idx="1">
+            <a:schemeClr val="accent1"/>
+          </a:effectRef>
+          <a:fontRef idx="minor">
+            <a:schemeClr val="tx1"/>
+          </a:fontRef>
+        </p:style>
+      </p:cxnSp>
+      <p:sp>
+        <p:nvSpPr>
+          <p:cNvPr id="18" name="Rounded Rectangle 17"/>
+          <p:cNvSpPr/>
+          <p:nvPr/>
+        </p:nvSpPr>
+        <p:spPr>
+          <a:xfrm>
+            <a:off x="1051560" y="3566160"/>
+            <a:ext cx="4709160" cy="1325880"/>
+          </a:xfrm>
+          <a:prstGeom prst="roundRect">
+            <a:avLst/>
+          </a:prstGeom>
+          <a:solidFill>
+            <a:srgbClr val="F8FAFC"/>
+          </a:solidFill>
+          <a:ln w="13970">
+            <a:solidFill>
+              <a:srgbClr val="168F8D"/>
+            </a:solidFill>
+          </a:ln>
+        </p:spPr>
+        <p:style>
+          <a:lnRef idx="1">
+            <a:schemeClr val="accent1"/>
+          </a:lnRef>
+          <a:fillRef idx="3">
+            <a:schemeClr val="accent1"/>
+          </a:fillRef>
+          <a:effectRef idx="2">
+            <a:schemeClr val="accent1"/>
+          </a:effectRef>
+          <a:fontRef idx="minor">
+            <a:schemeClr val="lt1"/>
+          </a:fontRef>
+        </p:style>
+        <p:txBody>
+          <a:bodyPr rtlCol="0" anchor="ctr" lIns="182880" rIns="100584" tIns="91440"/>
+          <a:lstStyle/>
+          <a:p>
+            <a:pPr algn="ctr">
+              <a:defRPr sz="1700" b="1">
+                <a:solidFill>
+                  <a:srgbClr val="232D37"/>
+                </a:solidFill>
+                <a:latin typeface="Aptos Display"/>
+              </a:defRPr>
+            </a:pPr>
+            <a:r>
+              <a:t>Why copies are necessary</a:t>
+            </a:r>
+          </a:p>
+          <a:p>
+            <a:pPr>
+              <a:spcBef>
+                <a:spcPts val="300"/>
+              </a:spcBef>
+              <a:defRPr sz="1200">
+                <a:solidFill>
+                  <a:srgbClr val="232D37"/>
+                </a:solidFill>
+                <a:latin typeface="Aptos"/>
+              </a:defRPr>
+            </a:pPr>
+            <a:r>
+              <a:t>Live Chart.js canvases are never resized or redrawn for printing. This avoids timing, animation, or resize races that could produce blank charts.</a:t>
+            </a:r>
+          </a:p>
+        </p:txBody>
+      </p:sp>
+      <p:sp>
+        <p:nvSpPr>
+          <p:cNvPr id="19" name="Rectangle 18"/>
+          <p:cNvSpPr/>
+          <p:nvPr/>
+        </p:nvSpPr>
+        <p:spPr>
+          <a:xfrm>
+            <a:off x="1051560" y="3566160"/>
+            <a:ext cx="82296" cy="1325880"/>
+          </a:xfrm>
+          <a:prstGeom prst="rect">
+            <a:avLst/>
+          </a:prstGeom>
+          <a:solidFill>
+            <a:srgbClr val="168F8D"/>
+          </a:solidFill>
+          <a:ln>
+            <a:noFill/>
+          </a:ln>
+        </p:spPr>
+        <p:style>
+          <a:lnRef idx="1">
+            <a:schemeClr val="accent1"/>
+          </a:lnRef>
+          <a:fillRef idx="3">
+            <a:schemeClr val="accent1"/>
+          </a:fillRef>
+          <a:effectRef idx="2">
+            <a:schemeClr val="accent1"/>
+          </a:effectRef>
+          <a:fontRef idx="minor">
+            <a:schemeClr val="lt1"/>
+          </a:fontRef>
+        </p:style>
+        <p:txBody>
+          <a:bodyPr rtlCol="0" anchor="ctr"/>
+          <a:lstStyle/>
+          <a:p>
+            <a:pPr algn="ctr"/>
+          </a:p>
+        </p:txBody>
+      </p:sp>
+      <p:sp>
+        <p:nvSpPr>
+          <p:cNvPr id="20" name="Rounded Rectangle 19"/>
+          <p:cNvSpPr/>
+          <p:nvPr/>
+        </p:nvSpPr>
+        <p:spPr>
+          <a:xfrm>
+            <a:off x="6382512" y="3566160"/>
+            <a:ext cx="4709160" cy="1325880"/>
+          </a:xfrm>
+          <a:prstGeom prst="roundRect">
+            <a:avLst/>
+          </a:prstGeom>
+          <a:solidFill>
+            <a:srgbClr val="F8FAFC"/>
+          </a:solidFill>
+          <a:ln w="13970">
+            <a:solidFill>
+              <a:srgbClr val="0F2647"/>
+            </a:solidFill>
+          </a:ln>
+        </p:spPr>
+        <p:style>
+          <a:lnRef idx="1">
+            <a:schemeClr val="accent1"/>
+          </a:lnRef>
+          <a:fillRef idx="3">
+            <a:schemeClr val="accent1"/>
+          </a:fillRef>
+          <a:effectRef idx="2">
+            <a:schemeClr val="accent1"/>
+          </a:effectRef>
+          <a:fontRef idx="minor">
+            <a:schemeClr val="lt1"/>
+          </a:fontRef>
+        </p:style>
+        <p:txBody>
+          <a:bodyPr rtlCol="0" anchor="ctr" lIns="182880" rIns="100584" tIns="91440"/>
+          <a:lstStyle/>
+          <a:p>
+            <a:pPr algn="ctr">
+              <a:defRPr sz="1700" b="1">
+                <a:solidFill>
+                  <a:srgbClr val="232D37"/>
+                </a:solidFill>
+                <a:latin typeface="Aptos Display"/>
+              </a:defRPr>
+            </a:pPr>
+            <a:r>
+              <a:t>State guarantee</a:t>
+            </a:r>
+          </a:p>
+          <a:p>
+            <a:pPr>
+              <a:spcBef>
+                <a:spcPts val="300"/>
+              </a:spcBef>
+              <a:defRPr sz="1200">
+                <a:solidFill>
+                  <a:srgbClr val="232D37"/>
+                </a:solidFill>
+                <a:latin typeface="Aptos"/>
+              </a:defRPr>
+            </a:pPr>
+            <a:r>
+              <a:t>Printing behaves as if all Hides were unchecked, but state is never touched. Saved plans, autosave, and interactive display return unchanged afterward.</a:t>
+            </a:r>
+          </a:p>
+        </p:txBody>
+      </p:sp>
+      <p:sp>
+        <p:nvSpPr>
+          <p:cNvPr id="21" name="Rectangle 20"/>
+          <p:cNvSpPr/>
+          <p:nvPr/>
+        </p:nvSpPr>
+        <p:spPr>
+          <a:xfrm>
+            <a:off x="6382512" y="3566160"/>
+            <a:ext cx="82296" cy="1325880"/>
+          </a:xfrm>
+          <a:prstGeom prst="rect">
+            <a:avLst/>
+          </a:prstGeom>
+          <a:solidFill>
+            <a:srgbClr val="0F2647"/>
+          </a:solidFill>
+          <a:ln>
+            <a:noFill/>
+          </a:ln>
+        </p:spPr>
+        <p:style>
+          <a:lnRef idx="1">
+            <a:schemeClr val="accent1"/>
+          </a:lnRef>
+          <a:fillRef idx="3">
+            <a:schemeClr val="accent1"/>
+          </a:fillRef>
+          <a:effectRef idx="2">
+            <a:schemeClr val="accent1"/>
+          </a:effectRef>
+          <a:fontRef idx="minor">
+            <a:schemeClr val="lt1"/>
+          </a:fontRef>
+        </p:style>
+        <p:txBody>
+          <a:bodyPr rtlCol="0" anchor="ctr"/>
+          <a:lstStyle/>
+          <a:p>
+            <a:pPr algn="ctr"/>
+          </a:p>
+        </p:txBody>
+      </p:sp>
+      <p:sp>
+        <p:nvSpPr>
+          <p:cNvPr id="22" name="Rectangle 21"/>
           <p:cNvSpPr/>
           <p:nvPr/>
         </p:nvSpPr>
@@ -5348,7 +5930,7 @@
       </p:sp>
       <p:sp>
         <p:nvSpPr>
-          <p:cNvPr id="11" name="TextBox 10"/>
+          <p:cNvPr id="23" name="TextBox 22"/>
           <p:cNvSpPr txBox="1"/>
           <p:nvPr/>
         </p:nvSpPr>
@@ -5377,7 +5959,7 @@
               </a:defRPr>
             </a:pPr>
             <a:r>
-              <a:t>Retirement Income Planner • Architecture overview • Annuity-model update</a:t>
+              <a:t>Retirement Income Planner • Architecture overview • Print, tax-detail, and customizable income-layout update</a:t>
             </a:r>
           </a:p>
         </p:txBody>
@@ -5439,7 +6021,7 @@
               </a:defRPr>
             </a:pPr>
             <a:r>
-              <a:t>Two-phase annuity computation</a:t>
+              <a:t>Tax section: one overview plus two diagnostic charts</a:t>
             </a:r>
           </a:p>
         </p:txBody>
@@ -5475,7 +6057,7 @@
               </a:defRPr>
             </a:pPr>
             <a:r>
-              <a:t>Contract simulation is separated from the household projection so annuity-specific mechanics remain isolated and testable.</a:t>
+              <a:t>The tax display expands from one stacked chart into an overview-and-detail layout without duplicating tax calculations.</a:t>
             </a:r>
           </a:p>
         </p:txBody>
@@ -5488,8 +6070,8 @@
         </p:nvSpPr>
         <p:spPr>
           <a:xfrm>
-            <a:off x="548640" y="1280160"/>
-            <a:ext cx="2331720" cy="1371600"/>
+            <a:off x="502920" y="1170432"/>
+            <a:ext cx="3977639" cy="4526280"/>
           </a:xfrm>
           <a:prstGeom prst="roundRect">
             <a:avLst/>
@@ -5522,7 +6104,7 @@
           <a:lstStyle/>
           <a:p>
             <a:pPr algn="ctr">
-              <a:defRPr sz="1600" b="1">
+              <a:defRPr sz="1700" b="1">
                 <a:solidFill>
                   <a:srgbClr val="232D37"/>
                 </a:solidFill>
@@ -5530,7 +6112,7 @@
               </a:defRPr>
             </a:pPr>
             <a:r>
-              <a:t>1. State contract</a:t>
+              <a:t>Primary tax chart</a:t>
             </a:r>
           </a:p>
           <a:p>
@@ -5538,15 +6120,15 @@
               <a:spcBef>
                 <a:spcPts val="300"/>
               </a:spcBef>
-              <a:defRPr sz="1100">
-                <a:solidFill>
-                  <a:srgbClr val="232D37"/>
-                </a:solidFill>
-                <a:latin typeface="Aptos"/>
-              </a:defRPr>
-            </a:pPr>
-            <a:r>
-              <a:t>person.annuities[]</a:t>
+              <a:defRPr sz="1200">
+                <a:solidFill>
+                  <a:srgbClr val="232D37"/>
+                </a:solidFill>
+                <a:latin typeface="Aptos"/>
+              </a:defRPr>
+            </a:pPr>
+            <a:r>
+              <a:t>Two-thirds width</a:t>
             </a:r>
           </a:p>
           <a:p>
@@ -5554,15 +6136,63 @@
               <a:spcBef>
                 <a:spcPts val="300"/>
               </a:spcBef>
-              <a:defRPr sz="1100">
-                <a:solidFill>
-                  <a:srgbClr val="232D37"/>
-                </a:solidFill>
-                <a:latin typeface="Aptos"/>
-              </a:defRPr>
-            </a:pPr>
-            <a:r>
-              <a:t>Inputs describe each contract</a:t>
+              <a:defRPr sz="1200">
+                <a:solidFill>
+                  <a:srgbClr val="232D37"/>
+                </a:solidFill>
+                <a:latin typeface="Aptos"/>
+              </a:defRPr>
+            </a:pPr>
+            <a:r>
+              <a:t>Stack: ordinary tax, QDIV tiers, LTCG tiers, NIIT</a:t>
+            </a:r>
+          </a:p>
+          <a:p>
+            <a:pPr>
+              <a:spcBef>
+                <a:spcPts val="300"/>
+              </a:spcBef>
+              <a:defRPr sz="1200">
+                <a:solidFill>
+                  <a:srgbClr val="232D37"/>
+                </a:solidFill>
+                <a:latin typeface="Aptos"/>
+              </a:defRPr>
+            </a:pPr>
+            <a:r>
+              <a:t>Effective and marginal-rate overlays</a:t>
+            </a:r>
+          </a:p>
+          <a:p>
+            <a:pPr>
+              <a:spcBef>
+                <a:spcPts val="300"/>
+              </a:spcBef>
+              <a:defRPr sz="1200">
+                <a:solidFill>
+                  <a:srgbClr val="232D37"/>
+                </a:solidFill>
+                <a:latin typeface="Aptos"/>
+              </a:defRPr>
+            </a:pPr>
+            <a:r>
+              <a:t>Full legend, note, and shared tooltip</a:t>
+            </a:r>
+          </a:p>
+          <a:p>
+            <a:pPr>
+              <a:spcBef>
+                <a:spcPts val="300"/>
+              </a:spcBef>
+              <a:defRPr sz="1200">
+                <a:solidFill>
+                  <a:srgbClr val="232D37"/>
+                </a:solidFill>
+                <a:latin typeface="Aptos"/>
+              </a:defRPr>
+            </a:pPr>
+            <a:r>
+              <a:t>Owns locked Y scale key: tax</a:t>
             </a:r>
           </a:p>
         </p:txBody>
@@ -5575,8 +6205,8 @@
         </p:nvSpPr>
         <p:spPr>
           <a:xfrm>
-            <a:off x="548640" y="1280160"/>
-            <a:ext cx="82296" cy="1371600"/>
+            <a:off x="502920" y="1170432"/>
+            <a:ext cx="82296" cy="4526280"/>
           </a:xfrm>
           <a:prstGeom prst="rect">
             <a:avLst/>
@@ -5618,8 +6248,8 @@
         </p:nvSpPr>
         <p:spPr>
           <a:xfrm>
-            <a:off x="3337560" y="1280160"/>
-            <a:ext cx="2331720" cy="1371600"/>
+            <a:off x="4892040" y="1170432"/>
+            <a:ext cx="2880360" cy="1920240"/>
           </a:xfrm>
           <a:prstGeom prst="roundRect">
             <a:avLst/>
@@ -5652,7 +6282,7 @@
           <a:lstStyle/>
           <a:p>
             <a:pPr algn="ctr">
-              <a:defRPr sz="1600" b="1">
+              <a:defRPr sz="1700" b="1">
                 <a:solidFill>
                   <a:srgbClr val="232D37"/>
                 </a:solidFill>
@@ -5660,7 +6290,7 @@
               </a:defRPr>
             </a:pPr>
             <a:r>
-              <a:t>2. simulateAnnuity</a:t>
+              <a:t>Ordinary-tax companion</a:t>
             </a:r>
           </a:p>
           <a:p>
@@ -5668,15 +6298,15 @@
               <a:spcBef>
                 <a:spcPts val="300"/>
               </a:spcBef>
-              <a:defRPr sz="1100">
-                <a:solidFill>
-                  <a:srgbClr val="232D37"/>
-                </a:solidFill>
-                <a:latin typeface="Aptos"/>
-              </a:defRPr>
-            </a:pPr>
-            <a:r>
-              <a:t>Runs once per annuity before annual household loop</a:t>
+              <a:defRPr sz="1200">
+                <a:solidFill>
+                  <a:srgbClr val="232D37"/>
+                </a:solidFill>
+                <a:latin typeface="Aptos"/>
+              </a:defRPr>
+            </a:pPr>
+            <a:r>
+              <a:t>Upper-right, half-size</a:t>
             </a:r>
           </a:p>
           <a:p>
@@ -5684,15 +6314,47 @@
               <a:spcBef>
                 <a:spcPts val="300"/>
               </a:spcBef>
-              <a:defRPr sz="1100">
-                <a:solidFill>
-                  <a:srgbClr val="232D37"/>
-                </a:solidFill>
-                <a:latin typeface="Aptos"/>
-              </a:defRPr>
-            </a:pPr>
-            <a:r>
-              <a:t>No tax dependency</a:t>
+              <a:defRPr sz="1200">
+                <a:solidFill>
+                  <a:srgbClr val="232D37"/>
+                </a:solidFill>
+                <a:latin typeface="Aptos"/>
+              </a:defRPr>
+            </a:pPr>
+            <a:r>
+              <a:t>Ordinary-income tax only</a:t>
+            </a:r>
+          </a:p>
+          <a:p>
+            <a:pPr>
+              <a:spcBef>
+                <a:spcPts val="300"/>
+              </a:spcBef>
+              <a:defRPr sz="1200">
+                <a:solidFill>
+                  <a:srgbClr val="232D37"/>
+                </a:solidFill>
+                <a:latin typeface="Aptos"/>
+              </a:defRPr>
+            </a:pPr>
+            <a:r>
+              <a:t>Dashed tax-bracket ceiling overlay</a:t>
+            </a:r>
+          </a:p>
+          <a:p>
+            <a:pPr>
+              <a:spcBef>
+                <a:spcPts val="300"/>
+              </a:spcBef>
+              <a:defRPr sz="1200">
+                <a:solidFill>
+                  <a:srgbClr val="232D37"/>
+                </a:solidFill>
+                <a:latin typeface="Aptos"/>
+              </a:defRPr>
+            </a:pPr>
+            <a:r>
+              <a:t>Labels show rate above each bracket</a:t>
             </a:r>
           </a:p>
         </p:txBody>
@@ -5705,8 +6367,8 @@
         </p:nvSpPr>
         <p:spPr>
           <a:xfrm>
-            <a:off x="3337560" y="1280160"/>
-            <a:ext cx="82296" cy="1371600"/>
+            <a:off x="4892040" y="1170432"/>
+            <a:ext cx="82296" cy="1920240"/>
           </a:xfrm>
           <a:prstGeom prst="rect">
             <a:avLst/>
@@ -5748,8 +6410,154 @@
         </p:nvSpPr>
         <p:spPr>
           <a:xfrm>
-            <a:off x="6126480" y="1280160"/>
-            <a:ext cx="2331720" cy="1371600"/>
+            <a:off x="4892040" y="3749039"/>
+            <a:ext cx="2880360" cy="1920240"/>
+          </a:xfrm>
+          <a:prstGeom prst="roundRect">
+            <a:avLst/>
+          </a:prstGeom>
+          <a:solidFill>
+            <a:srgbClr val="F7EFFF"/>
+          </a:solidFill>
+          <a:ln w="13970">
+            <a:solidFill>
+              <a:srgbClr val="7852B0"/>
+            </a:solidFill>
+          </a:ln>
+        </p:spPr>
+        <p:style>
+          <a:lnRef idx="1">
+            <a:schemeClr val="accent1"/>
+          </a:lnRef>
+          <a:fillRef idx="3">
+            <a:schemeClr val="accent1"/>
+          </a:fillRef>
+          <a:effectRef idx="2">
+            <a:schemeClr val="accent1"/>
+          </a:effectRef>
+          <a:fontRef idx="minor">
+            <a:schemeClr val="lt1"/>
+          </a:fontRef>
+        </p:style>
+        <p:txBody>
+          <a:bodyPr rtlCol="0" anchor="ctr" lIns="182880" rIns="100584" tIns="91440"/>
+          <a:lstStyle/>
+          <a:p>
+            <a:pPr algn="ctr">
+              <a:defRPr sz="1700" b="1">
+                <a:solidFill>
+                  <a:srgbClr val="232D37"/>
+                </a:solidFill>
+                <a:latin typeface="Aptos Display"/>
+              </a:defRPr>
+            </a:pPr>
+            <a:r>
+              <a:t>Qualified-tax companion</a:t>
+            </a:r>
+          </a:p>
+          <a:p>
+            <a:pPr>
+              <a:spcBef>
+                <a:spcPts val="300"/>
+              </a:spcBef>
+              <a:defRPr sz="1200">
+                <a:solidFill>
+                  <a:srgbClr val="232D37"/>
+                </a:solidFill>
+                <a:latin typeface="Aptos"/>
+              </a:defRPr>
+            </a:pPr>
+            <a:r>
+              <a:t>Lower-right, half-size</a:t>
+            </a:r>
+          </a:p>
+          <a:p>
+            <a:pPr>
+              <a:spcBef>
+                <a:spcPts val="300"/>
+              </a:spcBef>
+              <a:defRPr sz="1200">
+                <a:solidFill>
+                  <a:srgbClr val="232D37"/>
+                </a:solidFill>
+                <a:latin typeface="Aptos"/>
+              </a:defRPr>
+            </a:pPr>
+            <a:r>
+              <a:t>QDIV tiers + LTCG tiers + NIIT</a:t>
+            </a:r>
+          </a:p>
+          <a:p>
+            <a:pPr>
+              <a:spcBef>
+                <a:spcPts val="300"/>
+              </a:spcBef>
+              <a:defRPr sz="1200">
+                <a:solidFill>
+                  <a:srgbClr val="232D37"/>
+                </a:solidFill>
+                <a:latin typeface="Aptos"/>
+              </a:defRPr>
+            </a:pPr>
+            <a:r>
+              <a:t>Same stacking colors as primary</a:t>
+            </a:r>
+          </a:p>
+        </p:txBody>
+      </p:sp>
+      <p:sp>
+        <p:nvSpPr>
+          <p:cNvPr id="9" name="Rectangle 8"/>
+          <p:cNvSpPr/>
+          <p:nvPr/>
+        </p:nvSpPr>
+        <p:spPr>
+          <a:xfrm>
+            <a:off x="4892040" y="3749039"/>
+            <a:ext cx="82296" cy="1920240"/>
+          </a:xfrm>
+          <a:prstGeom prst="rect">
+            <a:avLst/>
+          </a:prstGeom>
+          <a:solidFill>
+            <a:srgbClr val="7852B0"/>
+          </a:solidFill>
+          <a:ln>
+            <a:noFill/>
+          </a:ln>
+        </p:spPr>
+        <p:style>
+          <a:lnRef idx="1">
+            <a:schemeClr val="accent1"/>
+          </a:lnRef>
+          <a:fillRef idx="3">
+            <a:schemeClr val="accent1"/>
+          </a:fillRef>
+          <a:effectRef idx="2">
+            <a:schemeClr val="accent1"/>
+          </a:effectRef>
+          <a:fontRef idx="minor">
+            <a:schemeClr val="lt1"/>
+          </a:fontRef>
+        </p:style>
+        <p:txBody>
+          <a:bodyPr rtlCol="0" anchor="ctr"/>
+          <a:lstStyle/>
+          <a:p>
+            <a:pPr algn="ctr"/>
+          </a:p>
+        </p:txBody>
+      </p:sp>
+      <p:sp>
+        <p:nvSpPr>
+          <p:cNvPr id="10" name="Rounded Rectangle 9"/>
+          <p:cNvSpPr/>
+          <p:nvPr/>
+        </p:nvSpPr>
+        <p:spPr>
+          <a:xfrm>
+            <a:off x="8183879" y="1170432"/>
+            <a:ext cx="3383280" cy="4526280"/>
           </a:xfrm>
           <a:prstGeom prst="roundRect">
             <a:avLst/>
@@ -5782,7 +6590,7 @@
           <a:lstStyle/>
           <a:p>
             <a:pPr algn="ctr">
-              <a:defRPr sz="1600" b="1">
+              <a:defRPr sz="1700" b="1">
                 <a:solidFill>
                   <a:srgbClr val="232D37"/>
                 </a:solidFill>
@@ -5790,7 +6598,7 @@
               </a:defRPr>
             </a:pPr>
             <a:r>
-              <a:t>3. Annual sequence</a:t>
+              <a:t>Shared behavior</a:t>
             </a:r>
           </a:p>
           <a:p>
@@ -5798,29 +6606,93 @@
               <a:spcBef>
                 <a:spcPts val="300"/>
               </a:spcBef>
-              <a:defRPr sz="1100">
-                <a:solidFill>
-                  <a:srgbClr val="232D37"/>
-                </a:solidFill>
-                <a:latin typeface="Aptos"/>
-              </a:defRPr>
-            </a:pPr>
-            <a:r>
-              <a:t>Balance, base, payout, tax split, insurer support, rider fee</a:t>
-            </a:r>
-          </a:p>
-        </p:txBody>
-      </p:sp>
-      <p:sp>
-        <p:nvSpPr>
-          <p:cNvPr id="9" name="Rectangle 8"/>
+              <a:defRPr sz="1200">
+                <a:solidFill>
+                  <a:srgbClr val="232D37"/>
+                </a:solidFill>
+                <a:latin typeface="Aptos"/>
+              </a:defRPr>
+            </a:pPr>
+            <a:r>
+              <a:t>Same X labels and tooltip semantics</a:t>
+            </a:r>
+          </a:p>
+          <a:p>
+            <a:pPr>
+              <a:spcBef>
+                <a:spcPts val="300"/>
+              </a:spcBef>
+              <a:defRPr sz="1200">
+                <a:solidFill>
+                  <a:srgbClr val="232D37"/>
+                </a:solidFill>
+                <a:latin typeface="Aptos"/>
+              </a:defRPr>
+            </a:pPr>
+            <a:r>
+              <a:t>Locked Y scale is shared across all three</a:t>
+            </a:r>
+          </a:p>
+          <a:p>
+            <a:pPr>
+              <a:spcBef>
+                <a:spcPts val="300"/>
+              </a:spcBef>
+              <a:defRPr sz="1200">
+                <a:solidFill>
+                  <a:srgbClr val="232D37"/>
+                </a:solidFill>
+                <a:latin typeface="Aptos"/>
+              </a:defRPr>
+            </a:pPr>
+            <a:r>
+              <a:t>Sparser ticks on companions</a:t>
+            </a:r>
+          </a:p>
+          <a:p>
+            <a:pPr>
+              <a:spcBef>
+                <a:spcPts val="300"/>
+              </a:spcBef>
+              <a:defRPr sz="1200">
+                <a:solidFill>
+                  <a:srgbClr val="232D37"/>
+                </a:solidFill>
+                <a:latin typeface="Aptos"/>
+              </a:defRPr>
+            </a:pPr>
+            <a:r>
+              <a:t>No legend/note on companion charts</a:t>
+            </a:r>
+          </a:p>
+          <a:p>
+            <a:pPr>
+              <a:spcBef>
+                <a:spcPts val="300"/>
+              </a:spcBef>
+              <a:defRPr sz="1200">
+                <a:solidFill>
+                  <a:srgbClr val="232D37"/>
+                </a:solidFill>
+                <a:latin typeface="Aptos"/>
+              </a:defRPr>
+            </a:pPr>
+            <a:r>
+              <a:t>One Rescale control updates the group</a:t>
+            </a:r>
+          </a:p>
+        </p:txBody>
+      </p:sp>
+      <p:sp>
+        <p:nvSpPr>
+          <p:cNvPr id="11" name="Rectangle 10"/>
           <p:cNvSpPr/>
           <p:nvPr/>
         </p:nvSpPr>
         <p:spPr>
           <a:xfrm>
-            <a:off x="6126480" y="1280160"/>
-            <a:ext cx="82296" cy="1371600"/>
+            <a:off x="8183879" y="1170432"/>
+            <a:ext cx="82296" cy="4526280"/>
           </a:xfrm>
           <a:prstGeom prst="rect">
             <a:avLst/>
@@ -5854,120 +6726,6 @@
           </a:p>
         </p:txBody>
       </p:sp>
-      <p:sp>
-        <p:nvSpPr>
-          <p:cNvPr id="10" name="Rounded Rectangle 9"/>
-          <p:cNvSpPr/>
-          <p:nvPr/>
-        </p:nvSpPr>
-        <p:spPr>
-          <a:xfrm>
-            <a:off x="8915400" y="1280160"/>
-            <a:ext cx="2331720" cy="1371600"/>
-          </a:xfrm>
-          <a:prstGeom prst="roundRect">
-            <a:avLst/>
-          </a:prstGeom>
-          <a:solidFill>
-            <a:srgbClr val="F7EFFF"/>
-          </a:solidFill>
-          <a:ln w="13970">
-            <a:solidFill>
-              <a:srgbClr val="7852B0"/>
-            </a:solidFill>
-          </a:ln>
-        </p:spPr>
-        <p:style>
-          <a:lnRef idx="1">
-            <a:schemeClr val="accent1"/>
-          </a:lnRef>
-          <a:fillRef idx="3">
-            <a:schemeClr val="accent1"/>
-          </a:fillRef>
-          <a:effectRef idx="2">
-            <a:schemeClr val="accent1"/>
-          </a:effectRef>
-          <a:fontRef idx="minor">
-            <a:schemeClr val="lt1"/>
-          </a:fontRef>
-        </p:style>
-        <p:txBody>
-          <a:bodyPr rtlCol="0" anchor="ctr" lIns="182880" rIns="100584" tIns="91440"/>
-          <a:lstStyle/>
-          <a:p>
-            <a:pPr algn="ctr">
-              <a:defRPr sz="1600" b="1">
-                <a:solidFill>
-                  <a:srgbClr val="232D37"/>
-                </a:solidFill>
-                <a:latin typeface="Aptos Display"/>
-              </a:defRPr>
-            </a:pPr>
-            <a:r>
-              <a:t>4. Projection rows</a:t>
-            </a:r>
-          </a:p>
-          <a:p>
-            <a:pPr>
-              <a:spcBef>
-                <a:spcPts val="300"/>
-              </a:spcBef>
-              <a:defRPr sz="1100">
-                <a:solidFill>
-                  <a:srgbClr val="232D37"/>
-                </a:solidFill>
-                <a:latin typeface="Aptos"/>
-              </a:defRPr>
-            </a:pPr>
-            <a:r>
-              <a:t>Annuitized income and asset data join household model</a:t>
-            </a:r>
-          </a:p>
-        </p:txBody>
-      </p:sp>
-      <p:sp>
-        <p:nvSpPr>
-          <p:cNvPr id="11" name="Rectangle 10"/>
-          <p:cNvSpPr/>
-          <p:nvPr/>
-        </p:nvSpPr>
-        <p:spPr>
-          <a:xfrm>
-            <a:off x="8915400" y="1280160"/>
-            <a:ext cx="82296" cy="1371600"/>
-          </a:xfrm>
-          <a:prstGeom prst="rect">
-            <a:avLst/>
-          </a:prstGeom>
-          <a:solidFill>
-            <a:srgbClr val="7852B0"/>
-          </a:solidFill>
-          <a:ln>
-            <a:noFill/>
-          </a:ln>
-        </p:spPr>
-        <p:style>
-          <a:lnRef idx="1">
-            <a:schemeClr val="accent1"/>
-          </a:lnRef>
-          <a:fillRef idx="3">
-            <a:schemeClr val="accent1"/>
-          </a:fillRef>
-          <a:effectRef idx="2">
-            <a:schemeClr val="accent1"/>
-          </a:effectRef>
-          <a:fontRef idx="minor">
-            <a:schemeClr val="lt1"/>
-          </a:fontRef>
-        </p:style>
-        <p:txBody>
-          <a:bodyPr rtlCol="0" anchor="ctr"/>
-          <a:lstStyle/>
-          <a:p>
-            <a:pPr algn="ctr"/>
-          </a:p>
-        </p:txBody>
-      </p:sp>
       <p:cxnSp>
         <p:nvCxnSpPr>
           <p:cNvPr id="12" name="Connector 11"/>
@@ -5975,14 +6733,14 @@
           <p:nvPr/>
         </p:nvCxnSpPr>
         <p:spPr>
-          <a:xfrm>
-            <a:off x="2926080" y="1965960"/>
-            <a:ext cx="274320" cy="0"/>
+          <a:xfrm flipV="1">
+            <a:off x="4553712" y="2148840"/>
+            <a:ext cx="246888" cy="777240"/>
           </a:xfrm>
           <a:prstGeom prst="line">
             <a:avLst/>
           </a:prstGeom>
-          <a:ln w="22860">
+          <a:ln w="25400">
             <a:solidFill>
               <a:srgbClr val="266EB2"/>
             </a:solidFill>
@@ -6011,15 +6769,15 @@
         </p:nvCxnSpPr>
         <p:spPr>
           <a:xfrm>
-            <a:off x="5715000" y="1965960"/>
-            <a:ext cx="274320" cy="0"/>
+            <a:off x="4553712" y="4297680"/>
+            <a:ext cx="246888" cy="411480"/>
           </a:xfrm>
           <a:prstGeom prst="line">
             <a:avLst/>
           </a:prstGeom>
-          <a:ln w="22860">
+          <a:ln w="25400">
             <a:solidFill>
-              <a:srgbClr val="429761"/>
+              <a:srgbClr val="266EB2"/>
             </a:solidFill>
           </a:ln>
         </p:spPr>
@@ -6038,158 +6796,9 @@
           </a:fontRef>
         </p:style>
       </p:cxnSp>
-      <p:cxnSp>
-        <p:nvCxnSpPr>
-          <p:cNvPr id="14" name="Connector 13"/>
-          <p:cNvCxnSpPr/>
-          <p:nvPr/>
-        </p:nvCxnSpPr>
-        <p:spPr>
-          <a:xfrm>
-            <a:off x="8503920" y="1965960"/>
-            <a:ext cx="274320" cy="0"/>
-          </a:xfrm>
-          <a:prstGeom prst="line">
-            <a:avLst/>
-          </a:prstGeom>
-          <a:ln w="22860">
-            <a:solidFill>
-              <a:srgbClr val="E5892A"/>
-            </a:solidFill>
-          </a:ln>
-        </p:spPr>
-        <p:style>
-          <a:lnRef idx="2">
-            <a:schemeClr val="accent1"/>
-          </a:lnRef>
-          <a:fillRef idx="0">
-            <a:schemeClr val="accent1"/>
-          </a:fillRef>
-          <a:effectRef idx="1">
-            <a:schemeClr val="accent1"/>
-          </a:effectRef>
-          <a:fontRef idx="minor">
-            <a:schemeClr val="tx1"/>
-          </a:fontRef>
-        </p:style>
-      </p:cxnSp>
-      <p:sp>
-        <p:nvSpPr>
-          <p:cNvPr id="15" name="Rounded Rectangle 14"/>
-          <p:cNvSpPr/>
-          <p:nvPr/>
-        </p:nvSpPr>
-        <p:spPr>
-          <a:xfrm>
-            <a:off x="1280160" y="3657600"/>
-            <a:ext cx="9509760" cy="1325880"/>
-          </a:xfrm>
-          <a:prstGeom prst="roundRect">
-            <a:avLst/>
-          </a:prstGeom>
-          <a:solidFill>
-            <a:srgbClr val="F8FAFC"/>
-          </a:solidFill>
-          <a:ln w="13970">
-            <a:solidFill>
-              <a:srgbClr val="0F2647"/>
-            </a:solidFill>
-          </a:ln>
-        </p:spPr>
-        <p:style>
-          <a:lnRef idx="1">
-            <a:schemeClr val="accent1"/>
-          </a:lnRef>
-          <a:fillRef idx="3">
-            <a:schemeClr val="accent1"/>
-          </a:fillRef>
-          <a:effectRef idx="2">
-            <a:schemeClr val="accent1"/>
-          </a:effectRef>
-          <a:fontRef idx="minor">
-            <a:schemeClr val="lt1"/>
-          </a:fontRef>
-        </p:style>
-        <p:txBody>
-          <a:bodyPr rtlCol="0" anchor="ctr" lIns="182880" rIns="100584" tIns="91440"/>
-          <a:lstStyle/>
-          <a:p>
-            <a:pPr algn="ctr">
-              <a:defRPr sz="1700" b="1">
-                <a:solidFill>
-                  <a:srgbClr val="232D37"/>
-                </a:solidFill>
-                <a:latin typeface="Aptos Display"/>
-              </a:defRPr>
-            </a:pPr>
-            <a:r>
-              <a:t>Boundary benefit</a:t>
-            </a:r>
-          </a:p>
-          <a:p>
-            <a:pPr>
-              <a:spcBef>
-                <a:spcPts val="300"/>
-              </a:spcBef>
-              <a:defRPr sz="1200">
-                <a:solidFill>
-                  <a:srgbClr val="232D37"/>
-                </a:solidFill>
-                <a:latin typeface="Aptos"/>
-              </a:defRPr>
-            </a:pPr>
-            <a:r>
-              <a:t>The simulator owns annuity mechanics; the main projection only reads its annual results to determine cash income, ordinary income, tax-exempt income, non-qualified investment income, and asset value.</a:t>
-            </a:r>
-          </a:p>
-        </p:txBody>
-      </p:sp>
-      <p:sp>
-        <p:nvSpPr>
-          <p:cNvPr id="16" name="Rectangle 15"/>
-          <p:cNvSpPr/>
-          <p:nvPr/>
-        </p:nvSpPr>
-        <p:spPr>
-          <a:xfrm>
-            <a:off x="1280160" y="3657600"/>
-            <a:ext cx="82296" cy="1325880"/>
-          </a:xfrm>
-          <a:prstGeom prst="rect">
-            <a:avLst/>
-          </a:prstGeom>
-          <a:solidFill>
-            <a:srgbClr val="0F2647"/>
-          </a:solidFill>
-          <a:ln>
-            <a:noFill/>
-          </a:ln>
-        </p:spPr>
-        <p:style>
-          <a:lnRef idx="1">
-            <a:schemeClr val="accent1"/>
-          </a:lnRef>
-          <a:fillRef idx="3">
-            <a:schemeClr val="accent1"/>
-          </a:fillRef>
-          <a:effectRef idx="2">
-            <a:schemeClr val="accent1"/>
-          </a:effectRef>
-          <a:fontRef idx="minor">
-            <a:schemeClr val="lt1"/>
-          </a:fontRef>
-        </p:style>
-        <p:txBody>
-          <a:bodyPr rtlCol="0" anchor="ctr"/>
-          <a:lstStyle/>
-          <a:p>
-            <a:pPr algn="ctr"/>
-          </a:p>
-        </p:txBody>
-      </p:sp>
-      <p:sp>
-        <p:nvSpPr>
-          <p:cNvPr id="17" name="Rectangle 16"/>
+      <p:sp>
+        <p:nvSpPr>
+          <p:cNvPr id="14" name="Rectangle 13"/>
           <p:cNvSpPr/>
           <p:nvPr/>
         </p:nvSpPr>
@@ -6232,7 +6841,7 @@
       </p:sp>
       <p:sp>
         <p:nvSpPr>
-          <p:cNvPr id="18" name="TextBox 17"/>
+          <p:cNvPr id="15" name="TextBox 14"/>
           <p:cNvSpPr txBox="1"/>
           <p:nvPr/>
         </p:nvSpPr>
@@ -6261,7 +6870,7 @@
               </a:defRPr>
             </a:pPr>
             <a:r>
-              <a:t>Retirement Income Planner • Architecture overview • Annuity-model update</a:t>
+              <a:t>Retirement Income Planner • Architecture overview • Print, tax-detail, and customizable income-layout update</a:t>
             </a:r>
           </a:p>
         </p:txBody>
@@ -6323,7 +6932,7 @@
               </a:defRPr>
             </a:pPr>
             <a:r>
-              <a:t>Payout, rider, and account-value logic</a:t>
+              <a:t>Income-card ordering is now user-controlled and saved</a:t>
             </a:r>
           </a:p>
         </p:txBody>
@@ -6359,7 +6968,7 @@
               </a:defRPr>
             </a:pPr>
             <a:r>
-              <a:t>The annuity model distinguishes contractual payouts, taxable character, rider support, and the remaining account value.</a:t>
+              <a:t>A single ordering vector creates a consistent card layout across both spouses while keeping financial computation untouched.</a:t>
             </a:r>
           </a:p>
         </p:txBody>
@@ -6372,8 +6981,8 @@
         </p:nvSpPr>
         <p:spPr>
           <a:xfrm>
-            <a:off x="502920" y="1143000"/>
-            <a:ext cx="2331720" cy="4526280"/>
+            <a:off x="594360" y="1170432"/>
+            <a:ext cx="3246120" cy="4526280"/>
           </a:xfrm>
           <a:prstGeom prst="roundRect">
             <a:avLst/>
@@ -6414,7 +7023,7 @@
               </a:defRPr>
             </a:pPr>
             <a:r>
-              <a:t>Payout timing</a:t>
+              <a:t>State contract</a:t>
             </a:r>
           </a:p>
           <a:p>
@@ -6430,7 +7039,7 @@
               </a:defRPr>
             </a:pPr>
             <a:r>
-              <a:t>Payout starts and ends through the contract age range.</a:t>
+              <a:t>state.ui.incomeOrder</a:t>
             </a:r>
           </a:p>
           <a:p>
@@ -6446,7 +7055,7 @@
               </a:defRPr>
             </a:pPr>
             <a:r>
-              <a:t>Survivor continuation follows the same durable age-range convention as other income sources.</a:t>
+              <a:t>Permutation of INCOME_CARD_KEYS</a:t>
             </a:r>
           </a:p>
           <a:p>
@@ -6462,7 +7071,23 @@
               </a:defRPr>
             </a:pPr>
             <a:r>
-              <a:t>Rider payout replaces manual payout when active.</a:t>
+              <a:t>Normalized in hydrateState</a:t>
+            </a:r>
+          </a:p>
+          <a:p>
+            <a:pPr>
+              <a:spcBef>
+                <a:spcPts val="300"/>
+              </a:spcBef>
+              <a:defRPr sz="1200">
+                <a:solidFill>
+                  <a:srgbClr val="232D37"/>
+                </a:solidFill>
+                <a:latin typeface="Aptos"/>
+              </a:defRPr>
+            </a:pPr>
+            <a:r>
+              <a:t>Saved, autosaved, restored, and reset with the plan</a:t>
             </a:r>
           </a:p>
         </p:txBody>
@@ -6475,7 +7100,7 @@
         </p:nvSpPr>
         <p:spPr>
           <a:xfrm>
-            <a:off x="502920" y="1143000"/>
+            <a:off x="594360" y="1170432"/>
             <a:ext cx="82296" cy="4526280"/>
           </a:xfrm>
           <a:prstGeom prst="rect">
@@ -6518,18 +7143,18 @@
         </p:nvSpPr>
         <p:spPr>
           <a:xfrm>
-            <a:off x="3310128" y="1143000"/>
-            <a:ext cx="2331720" cy="4526280"/>
+            <a:off x="4407408" y="1170432"/>
+            <a:ext cx="3246120" cy="4526280"/>
           </a:xfrm>
           <a:prstGeom prst="roundRect">
             <a:avLst/>
           </a:prstGeom>
           <a:solidFill>
-            <a:srgbClr val="FFF6E8"/>
+            <a:srgbClr val="F7EFFF"/>
           </a:solidFill>
           <a:ln w="13970">
             <a:solidFill>
-              <a:srgbClr val="E5892A"/>
+              <a:srgbClr val="7852B0"/>
             </a:solidFill>
           </a:ln>
         </p:spPr>
@@ -6560,7 +7185,7 @@
               </a:defRPr>
             </a:pPr>
             <a:r>
-              <a:t>Tax classification</a:t>
+              <a:t>Interaction model</a:t>
             </a:r>
           </a:p>
           <a:p>
@@ -6576,7 +7201,7 @@
               </a:defRPr>
             </a:pPr>
             <a:r>
-              <a:t>Taxable portion → nonSSOrdinary.</a:t>
+              <a:t>Each top-level card has a ⋮⋮ drag handle.</a:t>
             </a:r>
           </a:p>
           <a:p>
@@ -6592,7 +7217,7 @@
               </a:defRPr>
             </a:pPr>
             <a:r>
-              <a:t>Tax-exempt portion → cashIncome, provisional income, and MAGI.</a:t>
+              <a:t>Delegated HTML5 drag events move a card type.</a:t>
             </a:r>
           </a:p>
           <a:p>
@@ -6608,7 +7233,23 @@
               </a:defRPr>
             </a:pPr>
             <a:r>
-              <a:t>Non-qualified taxable payouts also contribute to net investment income.</a:t>
+              <a:t>Both spouse columns highlight the same card type.</a:t>
+            </a:r>
+          </a:p>
+          <a:p>
+            <a:pPr>
+              <a:spcBef>
+                <a:spcPts val="300"/>
+              </a:spcBef>
+              <a:defRPr sz="1200">
+                <a:solidFill>
+                  <a:srgbClr val="232D37"/>
+                </a:solidFill>
+                <a:latin typeface="Aptos"/>
+              </a:defRPr>
+            </a:pPr>
+            <a:r>
+              <a:t>Drop zones include gaps, headings, and padding.</a:t>
             </a:r>
           </a:p>
         </p:txBody>
@@ -6621,14 +7262,14 @@
         </p:nvSpPr>
         <p:spPr>
           <a:xfrm>
-            <a:off x="3310128" y="1143000"/>
+            <a:off x="4407408" y="1170432"/>
             <a:ext cx="82296" cy="4526280"/>
           </a:xfrm>
           <a:prstGeom prst="rect">
             <a:avLst/>
           </a:prstGeom>
           <a:solidFill>
-            <a:srgbClr val="E5892A"/>
+            <a:srgbClr val="7852B0"/>
           </a:solidFill>
           <a:ln>
             <a:noFill/>
@@ -6664,8 +7305,8 @@
         </p:nvSpPr>
         <p:spPr>
           <a:xfrm>
-            <a:off x="6117336" y="1143000"/>
-            <a:ext cx="2331720" cy="4526280"/>
+            <a:off x="8220456" y="1170432"/>
+            <a:ext cx="3246120" cy="4526280"/>
           </a:xfrm>
           <a:prstGeom prst="roundRect">
             <a:avLst/>
@@ -6706,7 +7347,7 @@
               </a:defRPr>
             </a:pPr>
             <a:r>
-              <a:t>Rider mechanics</a:t>
+              <a:t>Rendering result</a:t>
             </a:r>
           </a:p>
           <a:p>
@@ -6722,7 +7363,7 @@
               </a:defRPr>
             </a:pPr>
             <a:r>
-              <a:t>Rider base can roll up and step up.</a:t>
+              <a:t>renderIncomeForms builds every person column in one shared order.</a:t>
             </a:r>
           </a:p>
           <a:p>
@@ -6738,7 +7379,7 @@
               </a:defRPr>
             </a:pPr>
             <a:r>
-              <a:t>Payout rate applies to rider base.</a:t>
+              <a:t>Re-render and autosave follow a successful move.</a:t>
             </a:r>
           </a:p>
           <a:p>
@@ -6754,23 +7395,7 @@
               </a:defRPr>
             </a:pPr>
             <a:r>
-              <a:t>Rider fees reduce account value.</a:t>
-            </a:r>
-          </a:p>
-          <a:p>
-            <a:pPr>
-              <a:spcBef>
-                <a:spcPts val="300"/>
-              </a:spcBef>
-              <a:defRPr sz="1200">
-                <a:solidFill>
-                  <a:srgbClr val="232D37"/>
-                </a:solidFill>
-                <a:latin typeface="Aptos"/>
-              </a:defRPr>
-            </a:pPr>
-            <a:r>
-              <a:t>Insurer-paid amount captures payout beyond available account value.</a:t>
+              <a:t>No recompute: order is display-only and never affects financial results.</a:t>
             </a:r>
           </a:p>
         </p:txBody>
@@ -6783,7 +7408,7 @@
         </p:nvSpPr>
         <p:spPr>
           <a:xfrm>
-            <a:off x="6117336" y="1143000"/>
+            <a:off x="8220456" y="1170432"/>
             <a:ext cx="82296" cy="4526280"/>
           </a:xfrm>
           <a:prstGeom prst="rect">
@@ -6820,153 +7445,7 @@
       </p:sp>
       <p:sp>
         <p:nvSpPr>
-          <p:cNvPr id="10" name="Rounded Rectangle 9"/>
-          <p:cNvSpPr/>
-          <p:nvPr/>
-        </p:nvSpPr>
-        <p:spPr>
-          <a:xfrm>
-            <a:off x="8924544" y="1143000"/>
-            <a:ext cx="2331720" cy="4526280"/>
-          </a:xfrm>
-          <a:prstGeom prst="roundRect">
-            <a:avLst/>
-          </a:prstGeom>
-          <a:solidFill>
-            <a:srgbClr val="F7EFFF"/>
-          </a:solidFill>
-          <a:ln w="13970">
-            <a:solidFill>
-              <a:srgbClr val="7852B0"/>
-            </a:solidFill>
-          </a:ln>
-        </p:spPr>
-        <p:style>
-          <a:lnRef idx="1">
-            <a:schemeClr val="accent1"/>
-          </a:lnRef>
-          <a:fillRef idx="3">
-            <a:schemeClr val="accent1"/>
-          </a:fillRef>
-          <a:effectRef idx="2">
-            <a:schemeClr val="accent1"/>
-          </a:effectRef>
-          <a:fontRef idx="minor">
-            <a:schemeClr val="lt1"/>
-          </a:fontRef>
-        </p:style>
-        <p:txBody>
-          <a:bodyPr rtlCol="0" anchor="ctr" lIns="182880" rIns="100584" tIns="91440"/>
-          <a:lstStyle/>
-          <a:p>
-            <a:pPr algn="ctr">
-              <a:defRPr sz="1700" b="1">
-                <a:solidFill>
-                  <a:srgbClr val="232D37"/>
-                </a:solidFill>
-                <a:latin typeface="Aptos Display"/>
-              </a:defRPr>
-            </a:pPr>
-            <a:r>
-              <a:t>Asset continuity</a:t>
-            </a:r>
-          </a:p>
-          <a:p>
-            <a:pPr>
-              <a:spcBef>
-                <a:spcPts val="300"/>
-              </a:spcBef>
-              <a:defRPr sz="1200">
-                <a:solidFill>
-                  <a:srgbClr val="232D37"/>
-                </a:solidFill>
-                <a:latin typeface="Aptos"/>
-              </a:defRPr>
-            </a:pPr>
-            <a:r>
-              <a:t>Account balance is a main Asset-chart series.</a:t>
-            </a:r>
-          </a:p>
-          <a:p>
-            <a:pPr>
-              <a:spcBef>
-                <a:spcPts val="300"/>
-              </a:spcBef>
-              <a:defRPr sz="1200">
-                <a:solidFill>
-                  <a:srgbClr val="232D37"/>
-                </a:solidFill>
-                <a:latin typeface="Aptos"/>
-              </a:defRPr>
-            </a:pPr>
-            <a:r>
-              <a:t>Taxable amount embedded in the balance supports ordinary-income devalue presentation.</a:t>
-            </a:r>
-          </a:p>
-          <a:p>
-            <a:pPr>
-              <a:spcBef>
-                <a:spcPts val="300"/>
-              </a:spcBef>
-              <a:defRPr sz="1200">
-                <a:solidFill>
-                  <a:srgbClr val="232D37"/>
-                </a:solidFill>
-                <a:latin typeface="Aptos"/>
-              </a:defRPr>
-            </a:pPr>
-            <a:r>
-              <a:t>The model holds annuity data separately from brokerage basis mechanics.</a:t>
-            </a:r>
-          </a:p>
-        </p:txBody>
-      </p:sp>
-      <p:sp>
-        <p:nvSpPr>
-          <p:cNvPr id="11" name="Rectangle 10"/>
-          <p:cNvSpPr/>
-          <p:nvPr/>
-        </p:nvSpPr>
-        <p:spPr>
-          <a:xfrm>
-            <a:off x="8924544" y="1143000"/>
-            <a:ext cx="82296" cy="4526280"/>
-          </a:xfrm>
-          <a:prstGeom prst="rect">
-            <a:avLst/>
-          </a:prstGeom>
-          <a:solidFill>
-            <a:srgbClr val="7852B0"/>
-          </a:solidFill>
-          <a:ln>
-            <a:noFill/>
-          </a:ln>
-        </p:spPr>
-        <p:style>
-          <a:lnRef idx="1">
-            <a:schemeClr val="accent1"/>
-          </a:lnRef>
-          <a:fillRef idx="3">
-            <a:schemeClr val="accent1"/>
-          </a:fillRef>
-          <a:effectRef idx="2">
-            <a:schemeClr val="accent1"/>
-          </a:effectRef>
-          <a:fontRef idx="minor">
-            <a:schemeClr val="lt1"/>
-          </a:fontRef>
-        </p:style>
-        <p:txBody>
-          <a:bodyPr rtlCol="0" anchor="ctr"/>
-          <a:lstStyle/>
-          <a:p>
-            <a:pPr algn="ctr"/>
-          </a:p>
-        </p:txBody>
-      </p:sp>
-      <p:sp>
-        <p:nvSpPr>
-          <p:cNvPr id="12" name="Rectangle 11"/>
+          <p:cNvPr id="10" name="Rectangle 9"/>
           <p:cNvSpPr/>
           <p:nvPr/>
         </p:nvSpPr>
@@ -7009,7 +7488,7 @@
       </p:sp>
       <p:sp>
         <p:nvSpPr>
-          <p:cNvPr id="13" name="TextBox 12"/>
+          <p:cNvPr id="11" name="TextBox 10"/>
           <p:cNvSpPr txBox="1"/>
           <p:nvPr/>
         </p:nvSpPr>
@@ -7038,7 +7517,7 @@
               </a:defRPr>
             </a:pPr>
             <a:r>
-              <a:t>Retirement Income Planner • Architecture overview • Annuity-model update</a:t>
+              <a:t>Retirement Income Planner • Architecture overview • Print, tax-detail, and customizable income-layout update</a:t>
             </a:r>
           </a:p>
         </p:txBody>
@@ -7100,7 +7579,7 @@
               </a:defRPr>
             </a:pPr>
             <a:r>
-              <a:t>Annuity data enters the household tax and cash-flow paths</a:t>
+              <a:t>Drag-and-drop flow for the income grid</a:t>
             </a:r>
           </a:p>
         </p:txBody>
@@ -7136,7 +7615,7 @@
               </a:defRPr>
             </a:pPr>
             <a:r>
-              <a:t>The row contract makes annuity payouts visible in exactly the places that need them, while preserving the single-projection design.</a:t>
+              <a:t>The grid accepts a drop even in non-card areas, then snaps the move to the nearest card position.</a:t>
             </a:r>
           </a:p>
         </p:txBody>
@@ -7149,8 +7628,8 @@
         </p:nvSpPr>
         <p:spPr>
           <a:xfrm>
-            <a:off x="640080" y="1188720"/>
-            <a:ext cx="3246120" cy="4526280"/>
+            <a:off x="502920" y="1280160"/>
+            <a:ext cx="2148840" cy="1280160"/>
           </a:xfrm>
           <a:prstGeom prst="roundRect">
             <a:avLst/>
@@ -7183,7 +7662,7 @@
           <a:lstStyle/>
           <a:p>
             <a:pPr algn="ctr">
-              <a:defRPr sz="1700" b="1">
+              <a:defRPr sz="1600" b="1">
                 <a:solidFill>
                   <a:srgbClr val="232D37"/>
                 </a:solidFill>
@@ -7191,7 +7670,7 @@
               </a:defRPr>
             </a:pPr>
             <a:r>
-              <a:t>Income and cash</a:t>
+              <a:t>Drag start</a:t>
             </a:r>
           </a:p>
           <a:p>
@@ -7199,63 +7678,15 @@
               <a:spcBef>
                 <a:spcPts val="300"/>
               </a:spcBef>
-              <a:defRPr sz="1200">
-                <a:solidFill>
-                  <a:srgbClr val="232D37"/>
-                </a:solidFill>
-                <a:latin typeface="Aptos"/>
-              </a:defRPr>
-            </a:pPr>
-            <a:r>
-              <a:t>annuity / annuityByPerson</a:t>
-            </a:r>
-          </a:p>
-          <a:p>
-            <a:pPr>
-              <a:spcBef>
-                <a:spcPts val="300"/>
-              </a:spcBef>
-              <a:defRPr sz="1200">
-                <a:solidFill>
-                  <a:srgbClr val="232D37"/>
-                </a:solidFill>
-                <a:latin typeface="Aptos"/>
-              </a:defRPr>
-            </a:pPr>
-            <a:r>
-              <a:t>annuityTE / annuityTEByPerson</a:t>
-            </a:r>
-          </a:p>
-          <a:p>
-            <a:pPr>
-              <a:spcBef>
-                <a:spcPts val="300"/>
-              </a:spcBef>
-              <a:defRPr sz="1200">
-                <a:solidFill>
-                  <a:srgbClr val="232D37"/>
-                </a:solidFill>
-                <a:latin typeface="Aptos"/>
-              </a:defRPr>
-            </a:pPr>
-            <a:r>
-              <a:t>Taxable + tax-exempt payouts enter cashIncome</a:t>
-            </a:r>
-          </a:p>
-          <a:p>
-            <a:pPr>
-              <a:spcBef>
-                <a:spcPts val="300"/>
-              </a:spcBef>
-              <a:defRPr sz="1200">
-                <a:solidFill>
-                  <a:srgbClr val="232D37"/>
-                </a:solidFill>
-                <a:latin typeface="Aptos"/>
-              </a:defRPr>
-            </a:pPr>
-            <a:r>
-              <a:t>Taxable payout enters nonSSOrdinary</a:t>
+              <a:defRPr sz="1100">
+                <a:solidFill>
+                  <a:srgbClr val="232D37"/>
+                </a:solidFill>
+                <a:latin typeface="Aptos"/>
+              </a:defRPr>
+            </a:pPr>
+            <a:r>
+              <a:t>Top-level card handle identifies data-card key</a:t>
             </a:r>
           </a:p>
         </p:txBody>
@@ -7268,8 +7699,8 @@
         </p:nvSpPr>
         <p:spPr>
           <a:xfrm>
-            <a:off x="640080" y="1188720"/>
-            <a:ext cx="82296" cy="4526280"/>
+            <a:off x="502920" y="1280160"/>
+            <a:ext cx="82296" cy="1280160"/>
           </a:xfrm>
           <a:prstGeom prst="rect">
             <a:avLst/>
@@ -7311,8 +7742,122 @@
         </p:nvSpPr>
         <p:spPr>
           <a:xfrm>
-            <a:off x="4462272" y="1188720"/>
-            <a:ext cx="3246120" cy="4526280"/>
+            <a:off x="3017520" y="1280160"/>
+            <a:ext cx="2148840" cy="1280160"/>
+          </a:xfrm>
+          <a:prstGeom prst="roundRect">
+            <a:avLst/>
+          </a:prstGeom>
+          <a:solidFill>
+            <a:srgbClr val="F7EFFF"/>
+          </a:solidFill>
+          <a:ln w="13970">
+            <a:solidFill>
+              <a:srgbClr val="7852B0"/>
+            </a:solidFill>
+          </a:ln>
+        </p:spPr>
+        <p:style>
+          <a:lnRef idx="1">
+            <a:schemeClr val="accent1"/>
+          </a:lnRef>
+          <a:fillRef idx="3">
+            <a:schemeClr val="accent1"/>
+          </a:fillRef>
+          <a:effectRef idx="2">
+            <a:schemeClr val="accent1"/>
+          </a:effectRef>
+          <a:fontRef idx="minor">
+            <a:schemeClr val="lt1"/>
+          </a:fontRef>
+        </p:style>
+        <p:txBody>
+          <a:bodyPr rtlCol="0" anchor="ctr" lIns="182880" rIns="100584" tIns="91440"/>
+          <a:lstStyle/>
+          <a:p>
+            <a:pPr algn="ctr">
+              <a:defRPr sz="1600" b="1">
+                <a:solidFill>
+                  <a:srgbClr val="232D37"/>
+                </a:solidFill>
+                <a:latin typeface="Aptos Display"/>
+              </a:defRPr>
+            </a:pPr>
+            <a:r>
+              <a:t>Hover</a:t>
+            </a:r>
+          </a:p>
+          <a:p>
+            <a:pPr>
+              <a:spcBef>
+                <a:spcPts val="300"/>
+              </a:spcBef>
+              <a:defRPr sz="1100">
+                <a:solidFill>
+                  <a:srgbClr val="232D37"/>
+                </a:solidFill>
+                <a:latin typeface="Aptos"/>
+              </a:defRPr>
+            </a:pPr>
+            <a:r>
+              <a:t>Both person columns highlight the matching card type</a:t>
+            </a:r>
+          </a:p>
+        </p:txBody>
+      </p:sp>
+      <p:sp>
+        <p:nvSpPr>
+          <p:cNvPr id="7" name="Rectangle 6"/>
+          <p:cNvSpPr/>
+          <p:nvPr/>
+        </p:nvSpPr>
+        <p:spPr>
+          <a:xfrm>
+            <a:off x="3017520" y="1280160"/>
+            <a:ext cx="82296" cy="1280160"/>
+          </a:xfrm>
+          <a:prstGeom prst="rect">
+            <a:avLst/>
+          </a:prstGeom>
+          <a:solidFill>
+            <a:srgbClr val="7852B0"/>
+          </a:solidFill>
+          <a:ln>
+            <a:noFill/>
+          </a:ln>
+        </p:spPr>
+        <p:style>
+          <a:lnRef idx="1">
+            <a:schemeClr val="accent1"/>
+          </a:lnRef>
+          <a:fillRef idx="3">
+            <a:schemeClr val="accent1"/>
+          </a:fillRef>
+          <a:effectRef idx="2">
+            <a:schemeClr val="accent1"/>
+          </a:effectRef>
+          <a:fontRef idx="minor">
+            <a:schemeClr val="lt1"/>
+          </a:fontRef>
+        </p:style>
+        <p:txBody>
+          <a:bodyPr rtlCol="0" anchor="ctr"/>
+          <a:lstStyle/>
+          <a:p>
+            <a:pPr algn="ctr"/>
+          </a:p>
+        </p:txBody>
+      </p:sp>
+      <p:sp>
+        <p:nvSpPr>
+          <p:cNvPr id="8" name="Rounded Rectangle 7"/>
+          <p:cNvSpPr/>
+          <p:nvPr/>
+        </p:nvSpPr>
+        <p:spPr>
+          <a:xfrm>
+            <a:off x="5532120" y="1280160"/>
+            <a:ext cx="2148840" cy="1280160"/>
           </a:xfrm>
           <a:prstGeom prst="roundRect">
             <a:avLst/>
@@ -7345,7 +7890,7 @@
           <a:lstStyle/>
           <a:p>
             <a:pPr algn="ctr">
-              <a:defRPr sz="1700" b="1">
+              <a:defRPr sz="1600" b="1">
                 <a:solidFill>
                   <a:srgbClr val="232D37"/>
                 </a:solidFill>
@@ -7353,7 +7898,7 @@
               </a:defRPr>
             </a:pPr>
             <a:r>
-              <a:t>Tax and thresholds</a:t>
+              <a:t>Drop target</a:t>
             </a:r>
           </a:p>
           <a:p>
@@ -7361,77 +7906,29 @@
               <a:spcBef>
                 <a:spcPts val="300"/>
               </a:spcBef>
-              <a:defRPr sz="1200">
-                <a:solidFill>
-                  <a:srgbClr val="232D37"/>
-                </a:solidFill>
-                <a:latin typeface="Aptos"/>
-              </a:defRPr>
-            </a:pPr>
-            <a:r>
-              <a:t>Tax-exempt payout joins provisional income.</a:t>
-            </a:r>
-          </a:p>
-          <a:p>
-            <a:pPr>
-              <a:spcBef>
-                <a:spcPts val="300"/>
-              </a:spcBef>
-              <a:defRPr sz="1200">
-                <a:solidFill>
-                  <a:srgbClr val="232D37"/>
-                </a:solidFill>
-                <a:latin typeface="Aptos"/>
-              </a:defRPr>
-            </a:pPr>
-            <a:r>
-              <a:t>Tax-exempt payout joins MAGI and IRMAA look-back.</a:t>
-            </a:r>
-          </a:p>
-          <a:p>
-            <a:pPr>
-              <a:spcBef>
-                <a:spcPts val="300"/>
-              </a:spcBef>
-              <a:defRPr sz="1200">
-                <a:solidFill>
-                  <a:srgbClr val="232D37"/>
-                </a:solidFill>
-                <a:latin typeface="Aptos"/>
-              </a:defRPr>
-            </a:pPr>
-            <a:r>
-              <a:t>Non-qualified taxable payout contributes to NII.</a:t>
-            </a:r>
-          </a:p>
-          <a:p>
-            <a:pPr>
-              <a:spcBef>
-                <a:spcPts val="300"/>
-              </a:spcBef>
-              <a:defRPr sz="1200">
-                <a:solidFill>
-                  <a:srgbClr val="232D37"/>
-                </a:solidFill>
-                <a:latin typeface="Aptos"/>
-              </a:defRPr>
-            </a:pPr>
-            <a:r>
-              <a:t>No chart or export rebuilds this treatment.</a:t>
-            </a:r>
-          </a:p>
-        </p:txBody>
-      </p:sp>
-      <p:sp>
-        <p:nvSpPr>
-          <p:cNvPr id="7" name="Rectangle 6"/>
+              <a:defRPr sz="1100">
+                <a:solidFill>
+                  <a:srgbClr val="232D37"/>
+                </a:solidFill>
+                <a:latin typeface="Aptos"/>
+              </a:defRPr>
+            </a:pPr>
+            <a:r>
+              <a:t>Card, gap, column heading, or padding</a:t>
+            </a:r>
+          </a:p>
+        </p:txBody>
+      </p:sp>
+      <p:sp>
+        <p:nvSpPr>
+          <p:cNvPr id="9" name="Rectangle 8"/>
           <p:cNvSpPr/>
           <p:nvPr/>
         </p:nvSpPr>
         <p:spPr>
           <a:xfrm>
-            <a:off x="4462272" y="1188720"/>
-            <a:ext cx="82296" cy="4526280"/>
+            <a:off x="5532120" y="1280160"/>
+            <a:ext cx="82296" cy="1280160"/>
           </a:xfrm>
           <a:prstGeom prst="rect">
             <a:avLst/>
@@ -7467,14 +7964,14 @@
       </p:sp>
       <p:sp>
         <p:nvSpPr>
-          <p:cNvPr id="8" name="Rounded Rectangle 7"/>
+          <p:cNvPr id="10" name="Rounded Rectangle 9"/>
           <p:cNvSpPr/>
           <p:nvPr/>
         </p:nvSpPr>
         <p:spPr>
           <a:xfrm>
-            <a:off x="8284464" y="1188720"/>
-            <a:ext cx="3246120" cy="4526280"/>
+            <a:off x="8046720" y="1280160"/>
+            <a:ext cx="2148840" cy="1280160"/>
           </a:xfrm>
           <a:prstGeom prst="roundRect">
             <a:avLst/>
@@ -7507,7 +8004,7 @@
           <a:lstStyle/>
           <a:p>
             <a:pPr algn="ctr">
-              <a:defRPr sz="1700" b="1">
+              <a:defRPr sz="1600" b="1">
                 <a:solidFill>
                   <a:srgbClr val="232D37"/>
                 </a:solidFill>
@@ -7515,7 +8012,7 @@
               </a:defRPr>
             </a:pPr>
             <a:r>
-              <a:t>Asset and contract outputs</a:t>
+              <a:t>Nearest position</a:t>
             </a:r>
           </a:p>
           <a:p>
@@ -7523,61 +8020,29 @@
               <a:spcBef>
                 <a:spcPts val="300"/>
               </a:spcBef>
-              <a:defRPr sz="1200">
-                <a:solidFill>
-                  <a:srgbClr val="232D37"/>
-                </a:solidFill>
-                <a:latin typeface="Aptos"/>
-              </a:defRPr>
-            </a:pPr>
-            <a:r>
-              <a:t>annuityBalance</a:t>
-            </a:r>
-          </a:p>
-          <a:p>
-            <a:pPr>
-              <a:spcBef>
-                <a:spcPts val="300"/>
-              </a:spcBef>
-              <a:defRPr sz="1200">
-                <a:solidFill>
-                  <a:srgbClr val="232D37"/>
-                </a:solidFill>
-                <a:latin typeface="Aptos"/>
-              </a:defRPr>
-            </a:pPr>
-            <a:r>
-              <a:t>annuitiesByPerson[i][ai]: balance, base, payout, taxable, taxFree, insurerPaid, riderFee, taxableEmbedded, rider, nonQual, live</a:t>
-            </a:r>
-          </a:p>
-          <a:p>
-            <a:pPr>
-              <a:spcBef>
-                <a:spcPts val="300"/>
-              </a:spcBef>
-              <a:defRPr sz="1200">
-                <a:solidFill>
-                  <a:srgbClr val="232D37"/>
-                </a:solidFill>
-                <a:latin typeface="Aptos"/>
-              </a:defRPr>
-            </a:pPr>
-            <a:r>
-              <a:t>Used by Asset chart, Excel sheet, and chat context.</a:t>
-            </a:r>
-          </a:p>
-        </p:txBody>
-      </p:sp>
-      <p:sp>
-        <p:nvSpPr>
-          <p:cNvPr id="9" name="Rectangle 8"/>
+              <a:defRPr sz="1100">
+                <a:solidFill>
+                  <a:srgbClr val="232D37"/>
+                </a:solidFill>
+                <a:latin typeface="Aptos"/>
+              </a:defRPr>
+            </a:pPr>
+            <a:r>
+              <a:t>dndCardAt snaps to vertically nearest card</a:t>
+            </a:r>
+          </a:p>
+        </p:txBody>
+      </p:sp>
+      <p:sp>
+        <p:nvSpPr>
+          <p:cNvPr id="11" name="Rectangle 10"/>
           <p:cNvSpPr/>
           <p:nvPr/>
         </p:nvSpPr>
         <p:spPr>
           <a:xfrm>
-            <a:off x="8284464" y="1188720"/>
-            <a:ext cx="82296" cy="4526280"/>
+            <a:off x="8046720" y="1280160"/>
+            <a:ext cx="82296" cy="1280160"/>
           </a:xfrm>
           <a:prstGeom prst="rect">
             <a:avLst/>
@@ -7613,7 +8078,375 @@
       </p:sp>
       <p:sp>
         <p:nvSpPr>
-          <p:cNvPr id="10" name="Rectangle 9"/>
+          <p:cNvPr id="12" name="Rounded Rectangle 11"/>
+          <p:cNvSpPr/>
+          <p:nvPr/>
+        </p:nvSpPr>
+        <p:spPr>
+          <a:xfrm>
+            <a:off x="10561320" y="1280160"/>
+            <a:ext cx="1051560" cy="1280160"/>
+          </a:xfrm>
+          <a:prstGeom prst="roundRect">
+            <a:avLst/>
+          </a:prstGeom>
+          <a:solidFill>
+            <a:srgbClr val="F8FAFC"/>
+          </a:solidFill>
+          <a:ln w="13970">
+            <a:solidFill>
+              <a:srgbClr val="0F2647"/>
+            </a:solidFill>
+          </a:ln>
+        </p:spPr>
+        <p:style>
+          <a:lnRef idx="1">
+            <a:schemeClr val="accent1"/>
+          </a:lnRef>
+          <a:fillRef idx="3">
+            <a:schemeClr val="accent1"/>
+          </a:fillRef>
+          <a:effectRef idx="2">
+            <a:schemeClr val="accent1"/>
+          </a:effectRef>
+          <a:fontRef idx="minor">
+            <a:schemeClr val="lt1"/>
+          </a:fontRef>
+        </p:style>
+        <p:txBody>
+          <a:bodyPr rtlCol="0" anchor="ctr" lIns="182880" rIns="100584" tIns="91440"/>
+          <a:lstStyle/>
+          <a:p>
+            <a:pPr algn="ctr">
+              <a:defRPr sz="1400" b="1">
+                <a:solidFill>
+                  <a:srgbClr val="232D37"/>
+                </a:solidFill>
+                <a:latin typeface="Aptos Display"/>
+              </a:defRPr>
+            </a:pPr>
+            <a:r>
+              <a:t>Commit</a:t>
+            </a:r>
+          </a:p>
+          <a:p>
+            <a:pPr>
+              <a:spcBef>
+                <a:spcPts val="300"/>
+              </a:spcBef>
+              <a:defRPr sz="1000">
+                <a:solidFill>
+                  <a:srgbClr val="232D37"/>
+                </a:solidFill>
+                <a:latin typeface="Aptos"/>
+              </a:defRPr>
+            </a:pPr>
+            <a:r>
+              <a:t>move → render → save</a:t>
+            </a:r>
+          </a:p>
+        </p:txBody>
+      </p:sp>
+      <p:sp>
+        <p:nvSpPr>
+          <p:cNvPr id="13" name="Rectangle 12"/>
+          <p:cNvSpPr/>
+          <p:nvPr/>
+        </p:nvSpPr>
+        <p:spPr>
+          <a:xfrm>
+            <a:off x="10561320" y="1280160"/>
+            <a:ext cx="82296" cy="1280160"/>
+          </a:xfrm>
+          <a:prstGeom prst="rect">
+            <a:avLst/>
+          </a:prstGeom>
+          <a:solidFill>
+            <a:srgbClr val="0F2647"/>
+          </a:solidFill>
+          <a:ln>
+            <a:noFill/>
+          </a:ln>
+        </p:spPr>
+        <p:style>
+          <a:lnRef idx="1">
+            <a:schemeClr val="accent1"/>
+          </a:lnRef>
+          <a:fillRef idx="3">
+            <a:schemeClr val="accent1"/>
+          </a:fillRef>
+          <a:effectRef idx="2">
+            <a:schemeClr val="accent1"/>
+          </a:effectRef>
+          <a:fontRef idx="minor">
+            <a:schemeClr val="lt1"/>
+          </a:fontRef>
+        </p:style>
+        <p:txBody>
+          <a:bodyPr rtlCol="0" anchor="ctr"/>
+          <a:lstStyle/>
+          <a:p>
+            <a:pPr algn="ctr"/>
+          </a:p>
+        </p:txBody>
+      </p:sp>
+      <p:cxnSp>
+        <p:nvCxnSpPr>
+          <p:cNvPr id="14" name="Connector 13"/>
+          <p:cNvCxnSpPr/>
+          <p:nvPr/>
+        </p:nvCxnSpPr>
+        <p:spPr>
+          <a:xfrm>
+            <a:off x="2697480" y="1920240"/>
+            <a:ext cx="228600" cy="0"/>
+          </a:xfrm>
+          <a:prstGeom prst="line">
+            <a:avLst/>
+          </a:prstGeom>
+          <a:ln w="22860">
+            <a:solidFill>
+              <a:srgbClr val="266EB2"/>
+            </a:solidFill>
+          </a:ln>
+        </p:spPr>
+        <p:style>
+          <a:lnRef idx="2">
+            <a:schemeClr val="accent1"/>
+          </a:lnRef>
+          <a:fillRef idx="0">
+            <a:schemeClr val="accent1"/>
+          </a:fillRef>
+          <a:effectRef idx="1">
+            <a:schemeClr val="accent1"/>
+          </a:effectRef>
+          <a:fontRef idx="minor">
+            <a:schemeClr val="tx1"/>
+          </a:fontRef>
+        </p:style>
+      </p:cxnSp>
+      <p:cxnSp>
+        <p:nvCxnSpPr>
+          <p:cNvPr id="15" name="Connector 14"/>
+          <p:cNvCxnSpPr/>
+          <p:nvPr/>
+        </p:nvCxnSpPr>
+        <p:spPr>
+          <a:xfrm>
+            <a:off x="5212080" y="1920240"/>
+            <a:ext cx="228600" cy="0"/>
+          </a:xfrm>
+          <a:prstGeom prst="line">
+            <a:avLst/>
+          </a:prstGeom>
+          <a:ln w="22860">
+            <a:solidFill>
+              <a:srgbClr val="7852B0"/>
+            </a:solidFill>
+          </a:ln>
+        </p:spPr>
+        <p:style>
+          <a:lnRef idx="2">
+            <a:schemeClr val="accent1"/>
+          </a:lnRef>
+          <a:fillRef idx="0">
+            <a:schemeClr val="accent1"/>
+          </a:fillRef>
+          <a:effectRef idx="1">
+            <a:schemeClr val="accent1"/>
+          </a:effectRef>
+          <a:fontRef idx="minor">
+            <a:schemeClr val="tx1"/>
+          </a:fontRef>
+        </p:style>
+      </p:cxnSp>
+      <p:cxnSp>
+        <p:nvCxnSpPr>
+          <p:cNvPr id="16" name="Connector 15"/>
+          <p:cNvCxnSpPr/>
+          <p:nvPr/>
+        </p:nvCxnSpPr>
+        <p:spPr>
+          <a:xfrm>
+            <a:off x="7726679" y="1920240"/>
+            <a:ext cx="228600" cy="0"/>
+          </a:xfrm>
+          <a:prstGeom prst="line">
+            <a:avLst/>
+          </a:prstGeom>
+          <a:ln w="22860">
+            <a:solidFill>
+              <a:srgbClr val="E5892A"/>
+            </a:solidFill>
+          </a:ln>
+        </p:spPr>
+        <p:style>
+          <a:lnRef idx="2">
+            <a:schemeClr val="accent1"/>
+          </a:lnRef>
+          <a:fillRef idx="0">
+            <a:schemeClr val="accent1"/>
+          </a:fillRef>
+          <a:effectRef idx="1">
+            <a:schemeClr val="accent1"/>
+          </a:effectRef>
+          <a:fontRef idx="minor">
+            <a:schemeClr val="tx1"/>
+          </a:fontRef>
+        </p:style>
+      </p:cxnSp>
+      <p:cxnSp>
+        <p:nvCxnSpPr>
+          <p:cNvPr id="17" name="Connector 16"/>
+          <p:cNvCxnSpPr/>
+          <p:nvPr/>
+        </p:nvCxnSpPr>
+        <p:spPr>
+          <a:xfrm>
+            <a:off x="10241280" y="1920240"/>
+            <a:ext cx="228600" cy="0"/>
+          </a:xfrm>
+          <a:prstGeom prst="line">
+            <a:avLst/>
+          </a:prstGeom>
+          <a:ln w="22860">
+            <a:solidFill>
+              <a:srgbClr val="429761"/>
+            </a:solidFill>
+          </a:ln>
+        </p:spPr>
+        <p:style>
+          <a:lnRef idx="2">
+            <a:schemeClr val="accent1"/>
+          </a:lnRef>
+          <a:fillRef idx="0">
+            <a:schemeClr val="accent1"/>
+          </a:fillRef>
+          <a:effectRef idx="1">
+            <a:schemeClr val="accent1"/>
+          </a:effectRef>
+          <a:fontRef idx="minor">
+            <a:schemeClr val="tx1"/>
+          </a:fontRef>
+        </p:style>
+      </p:cxnSp>
+      <p:sp>
+        <p:nvSpPr>
+          <p:cNvPr id="18" name="Rounded Rectangle 17"/>
+          <p:cNvSpPr/>
+          <p:nvPr/>
+        </p:nvSpPr>
+        <p:spPr>
+          <a:xfrm>
+            <a:off x="1143000" y="3703320"/>
+            <a:ext cx="9784080" cy="1188720"/>
+          </a:xfrm>
+          <a:prstGeom prst="roundRect">
+            <a:avLst/>
+          </a:prstGeom>
+          <a:solidFill>
+            <a:srgbClr val="F8FAFC"/>
+          </a:solidFill>
+          <a:ln w="13970">
+            <a:solidFill>
+              <a:srgbClr val="168F8D"/>
+            </a:solidFill>
+          </a:ln>
+        </p:spPr>
+        <p:style>
+          <a:lnRef idx="1">
+            <a:schemeClr val="accent1"/>
+          </a:lnRef>
+          <a:fillRef idx="3">
+            <a:schemeClr val="accent1"/>
+          </a:fillRef>
+          <a:effectRef idx="2">
+            <a:schemeClr val="accent1"/>
+          </a:effectRef>
+          <a:fontRef idx="minor">
+            <a:schemeClr val="lt1"/>
+          </a:fontRef>
+        </p:style>
+        <p:txBody>
+          <a:bodyPr rtlCol="0" anchor="ctr" lIns="182880" rIns="100584" tIns="91440"/>
+          <a:lstStyle/>
+          <a:p>
+            <a:pPr algn="ctr">
+              <a:defRPr sz="1700" b="1">
+                <a:solidFill>
+                  <a:srgbClr val="232D37"/>
+                </a:solidFill>
+                <a:latin typeface="Aptos Display"/>
+              </a:defRPr>
+            </a:pPr>
+            <a:r>
+              <a:t>Pure layout rule</a:t>
+            </a:r>
+          </a:p>
+          <a:p>
+            <a:pPr>
+              <a:spcBef>
+                <a:spcPts val="300"/>
+              </a:spcBef>
+              <a:defRPr sz="1200">
+                <a:solidFill>
+                  <a:srgbClr val="232D37"/>
+                </a:solidFill>
+                <a:latin typeface="Aptos"/>
+              </a:defRPr>
+            </a:pPr>
+            <a:r>
+              <a:t>moveIncomeCard is the pure reorder operation. It changes only the shared card order; it does not mutate inputs, account balances, or any computed projection row.</a:t>
+            </a:r>
+          </a:p>
+        </p:txBody>
+      </p:sp>
+      <p:sp>
+        <p:nvSpPr>
+          <p:cNvPr id="19" name="Rectangle 18"/>
+          <p:cNvSpPr/>
+          <p:nvPr/>
+        </p:nvSpPr>
+        <p:spPr>
+          <a:xfrm>
+            <a:off x="1143000" y="3703320"/>
+            <a:ext cx="82296" cy="1188720"/>
+          </a:xfrm>
+          <a:prstGeom prst="rect">
+            <a:avLst/>
+          </a:prstGeom>
+          <a:solidFill>
+            <a:srgbClr val="168F8D"/>
+          </a:solidFill>
+          <a:ln>
+            <a:noFill/>
+          </a:ln>
+        </p:spPr>
+        <p:style>
+          <a:lnRef idx="1">
+            <a:schemeClr val="accent1"/>
+          </a:lnRef>
+          <a:fillRef idx="3">
+            <a:schemeClr val="accent1"/>
+          </a:fillRef>
+          <a:effectRef idx="2">
+            <a:schemeClr val="accent1"/>
+          </a:effectRef>
+          <a:fontRef idx="minor">
+            <a:schemeClr val="lt1"/>
+          </a:fontRef>
+        </p:style>
+        <p:txBody>
+          <a:bodyPr rtlCol="0" anchor="ctr"/>
+          <a:lstStyle/>
+          <a:p>
+            <a:pPr algn="ctr"/>
+          </a:p>
+        </p:txBody>
+      </p:sp>
+      <p:sp>
+        <p:nvSpPr>
+          <p:cNvPr id="20" name="Rectangle 19"/>
           <p:cNvSpPr/>
           <p:nvPr/>
         </p:nvSpPr>
@@ -7656,7 +8489,7 @@
       </p:sp>
       <p:sp>
         <p:nvSpPr>
-          <p:cNvPr id="11" name="TextBox 10"/>
+          <p:cNvPr id="21" name="TextBox 20"/>
           <p:cNvSpPr txBox="1"/>
           <p:nvPr/>
         </p:nvSpPr>
@@ -7685,7 +8518,7 @@
               </a:defRPr>
             </a:pPr>
             <a:r>
-              <a:t>Retirement Income Planner • Architecture overview • Annuity-model update</a:t>
+              <a:t>Retirement Income Planner • Architecture overview • Print, tax-detail, and customizable income-layout update</a:t>
             </a:r>
           </a:p>
         </p:txBody>
@@ -7747,7 +8580,7 @@
               </a:defRPr>
             </a:pPr>
             <a:r>
-              <a:t>Display and reporting additions</a:t>
+              <a:t>Markdown documentation gains nested-list support</a:t>
             </a:r>
           </a:p>
         </p:txBody>
@@ -7783,7 +8616,7 @@
               </a:defRPr>
             </a:pPr>
             <a:r>
-              <a:t>The new contract output is presented consistently across interactive charts, downloads, explainers, and plan-aware chat.</a:t>
+              <a:t>The shared Markdown renderer now represents structured guidance more faithfully without adding a network dependency.</a:t>
             </a:r>
           </a:p>
         </p:txBody>
@@ -7796,8 +8629,8 @@
         </p:nvSpPr>
         <p:spPr>
           <a:xfrm>
-            <a:off x="502920" y="1143000"/>
-            <a:ext cx="2514600" cy="4526280"/>
+            <a:off x="685800" y="1234440"/>
+            <a:ext cx="3246120" cy="4434840"/>
           </a:xfrm>
           <a:prstGeom prst="roundRect">
             <a:avLst/>
@@ -7838,7 +8671,7 @@
               </a:defRPr>
             </a:pPr>
             <a:r>
-              <a:t>Income chart</a:t>
+              <a:t>Supported list grammar</a:t>
             </a:r>
           </a:p>
           <a:p>
@@ -7854,7 +8687,7 @@
               </a:defRPr>
             </a:pPr>
             <a:r>
-              <a:t>Adds annuity taxable payout and tax-exempt payout bands.</a:t>
+              <a:t>Bullet markers: -, *, +, •</a:t>
             </a:r>
           </a:p>
           <a:p>
@@ -7870,7 +8703,7 @@
               </a:defRPr>
             </a:pPr>
             <a:r>
-              <a:t>Taxable and tax-exempt treatment stays visually distinct.</a:t>
+              <a:t>Numbered lists</a:t>
             </a:r>
           </a:p>
           <a:p>
@@ -7886,7 +8719,23 @@
               </a:defRPr>
             </a:pPr>
             <a:r>
-              <a:t>Income totals continue to derive from projection rows.</a:t>
+              <a:t>Nest with two or more spaces or one tab per level</a:t>
+            </a:r>
+          </a:p>
+          <a:p>
+            <a:pPr>
+              <a:spcBef>
+                <a:spcPts val="300"/>
+              </a:spcBef>
+              <a:defRPr sz="1200">
+                <a:solidFill>
+                  <a:srgbClr val="232D37"/>
+                </a:solidFill>
+                <a:latin typeface="Aptos"/>
+              </a:defRPr>
+            </a:pPr>
+            <a:r>
+              <a:t>Indented lines under an item continue that item</a:t>
             </a:r>
           </a:p>
         </p:txBody>
@@ -7899,8 +8748,8 @@
         </p:nvSpPr>
         <p:spPr>
           <a:xfrm>
-            <a:off x="502920" y="1143000"/>
-            <a:ext cx="82296" cy="4526280"/>
+            <a:off x="685800" y="1234440"/>
+            <a:ext cx="82296" cy="4434840"/>
           </a:xfrm>
           <a:prstGeom prst="rect">
             <a:avLst/>
@@ -7942,154 +8791,8 @@
         </p:nvSpPr>
         <p:spPr>
           <a:xfrm>
-            <a:off x="3401568" y="1143000"/>
-            <a:ext cx="2514600" cy="4526280"/>
-          </a:xfrm>
-          <a:prstGeom prst="roundRect">
-            <a:avLst/>
-          </a:prstGeom>
-          <a:solidFill>
-            <a:srgbClr val="F7EFFF"/>
-          </a:solidFill>
-          <a:ln w="13970">
-            <a:solidFill>
-              <a:srgbClr val="7852B0"/>
-            </a:solidFill>
-          </a:ln>
-        </p:spPr>
-        <p:style>
-          <a:lnRef idx="1">
-            <a:schemeClr val="accent1"/>
-          </a:lnRef>
-          <a:fillRef idx="3">
-            <a:schemeClr val="accent1"/>
-          </a:fillRef>
-          <a:effectRef idx="2">
-            <a:schemeClr val="accent1"/>
-          </a:effectRef>
-          <a:fontRef idx="minor">
-            <a:schemeClr val="lt1"/>
-          </a:fontRef>
-        </p:style>
-        <p:txBody>
-          <a:bodyPr rtlCol="0" anchor="ctr" lIns="182880" rIns="100584" tIns="91440"/>
-          <a:lstStyle/>
-          <a:p>
-            <a:pPr algn="ctr">
-              <a:defRPr sz="1700" b="1">
-                <a:solidFill>
-                  <a:srgbClr val="232D37"/>
-                </a:solidFill>
-                <a:latin typeface="Aptos Display"/>
-              </a:defRPr>
-            </a:pPr>
-            <a:r>
-              <a:t>Asset chart</a:t>
-            </a:r>
-          </a:p>
-          <a:p>
-            <a:pPr>
-              <a:spcBef>
-                <a:spcPts val="300"/>
-              </a:spcBef>
-              <a:defRPr sz="1200">
-                <a:solidFill>
-                  <a:srgbClr val="232D37"/>
-                </a:solidFill>
-                <a:latin typeface="Aptos"/>
-              </a:defRPr>
-            </a:pPr>
-            <a:r>
-              <a:t>Plots annuity account value as an annuity series.</a:t>
-            </a:r>
-          </a:p>
-          <a:p>
-            <a:pPr>
-              <a:spcBef>
-                <a:spcPts val="300"/>
-              </a:spcBef>
-              <a:defRPr sz="1200">
-                <a:solidFill>
-                  <a:srgbClr val="232D37"/>
-                </a:solidFill>
-                <a:latin typeface="Aptos"/>
-              </a:defRPr>
-            </a:pPr>
-            <a:r>
-              <a:t>Ordinary-income devalue can haircut taxableEmbedded value.</a:t>
-            </a:r>
-          </a:p>
-          <a:p>
-            <a:pPr>
-              <a:spcBef>
-                <a:spcPts val="300"/>
-              </a:spcBef>
-              <a:defRPr sz="1200">
-                <a:solidFill>
-                  <a:srgbClr val="232D37"/>
-                </a:solidFill>
-                <a:latin typeface="Aptos"/>
-              </a:defRPr>
-            </a:pPr>
-            <a:r>
-              <a:t>Annuities stay on main asset chart.</a:t>
-            </a:r>
-          </a:p>
-        </p:txBody>
-      </p:sp>
-      <p:sp>
-        <p:nvSpPr>
-          <p:cNvPr id="7" name="Rectangle 6"/>
-          <p:cNvSpPr/>
-          <p:nvPr/>
-        </p:nvSpPr>
-        <p:spPr>
-          <a:xfrm>
-            <a:off x="3401568" y="1143000"/>
-            <a:ext cx="82296" cy="4526280"/>
-          </a:xfrm>
-          <a:prstGeom prst="rect">
-            <a:avLst/>
-          </a:prstGeom>
-          <a:solidFill>
-            <a:srgbClr val="7852B0"/>
-          </a:solidFill>
-          <a:ln>
-            <a:noFill/>
-          </a:ln>
-        </p:spPr>
-        <p:style>
-          <a:lnRef idx="1">
-            <a:schemeClr val="accent1"/>
-          </a:lnRef>
-          <a:fillRef idx="3">
-            <a:schemeClr val="accent1"/>
-          </a:fillRef>
-          <a:effectRef idx="2">
-            <a:schemeClr val="accent1"/>
-          </a:effectRef>
-          <a:fontRef idx="minor">
-            <a:schemeClr val="lt1"/>
-          </a:fontRef>
-        </p:style>
-        <p:txBody>
-          <a:bodyPr rtlCol="0" anchor="ctr"/>
-          <a:lstStyle/>
-          <a:p>
-            <a:pPr algn="ctr"/>
-          </a:p>
-        </p:txBody>
-      </p:sp>
-      <p:sp>
-        <p:nvSpPr>
-          <p:cNvPr id="8" name="Rounded Rectangle 7"/>
-          <p:cNvSpPr/>
-          <p:nvPr/>
-        </p:nvSpPr>
-        <p:spPr>
-          <a:xfrm>
-            <a:off x="6300216" y="1143000"/>
-            <a:ext cx="2514600" cy="4526280"/>
+            <a:off x="4480560" y="1234440"/>
+            <a:ext cx="3246120" cy="4434840"/>
           </a:xfrm>
           <a:prstGeom prst="roundRect">
             <a:avLst/>
@@ -8130,7 +8833,7 @@
               </a:defRPr>
             </a:pPr>
             <a:r>
-              <a:t>Excel export</a:t>
+              <a:t>Shared rendering path</a:t>
             </a:r>
           </a:p>
           <a:p>
@@ -8146,7 +8849,7 @@
               </a:defRPr>
             </a:pPr>
             <a:r>
-              <a:t>Summary sheet includes payout, insurer-paid, rider fee, account value, and taxable-embedded columns.</a:t>
+              <a:t>Usage.md and Note4User.md</a:t>
             </a:r>
           </a:p>
           <a:p>
@@ -8162,21 +8865,53 @@
               </a:defRPr>
             </a:pPr>
             <a:r>
-              <a:t>Each enabled annuity gets its own worksheet.</a:t>
-            </a:r>
-          </a:p>
-        </p:txBody>
-      </p:sp>
-      <p:sp>
-        <p:nvSpPr>
-          <p:cNvPr id="9" name="Rectangle 8"/>
+              <a:t>openMdPage(file, label)</a:t>
+            </a:r>
+          </a:p>
+          <a:p>
+            <a:pPr>
+              <a:spcBef>
+                <a:spcPts val="300"/>
+              </a:spcBef>
+              <a:defRPr sz="1200">
+                <a:solidFill>
+                  <a:srgbClr val="232D37"/>
+                </a:solidFill>
+                <a:latin typeface="Aptos"/>
+              </a:defRPr>
+            </a:pPr>
+            <a:r>
+              <a:t>mdToHtml converts content at page-open time</a:t>
+            </a:r>
+          </a:p>
+          <a:p>
+            <a:pPr>
+              <a:spcBef>
+                <a:spcPts val="300"/>
+              </a:spcBef>
+              <a:defRPr sz="1200">
+                <a:solidFill>
+                  <a:srgbClr val="232D37"/>
+                </a:solidFill>
+                <a:latin typeface="Aptos"/>
+              </a:defRPr>
+            </a:pPr>
+            <a:r>
+              <a:t>mdPageHtml supplies common shell</a:t>
+            </a:r>
+          </a:p>
+        </p:txBody>
+      </p:sp>
+      <p:sp>
+        <p:nvSpPr>
+          <p:cNvPr id="7" name="Rectangle 6"/>
           <p:cNvSpPr/>
           <p:nvPr/>
         </p:nvSpPr>
         <p:spPr>
           <a:xfrm>
-            <a:off x="6300216" y="1143000"/>
-            <a:ext cx="82296" cy="4526280"/>
+            <a:off x="4480560" y="1234440"/>
+            <a:ext cx="82296" cy="4434840"/>
           </a:xfrm>
           <a:prstGeom prst="rect">
             <a:avLst/>
@@ -8212,14 +8947,14 @@
       </p:sp>
       <p:sp>
         <p:nvSpPr>
-          <p:cNvPr id="10" name="Rounded Rectangle 9"/>
+          <p:cNvPr id="8" name="Rounded Rectangle 7"/>
           <p:cNvSpPr/>
           <p:nvPr/>
         </p:nvSpPr>
         <p:spPr>
           <a:xfrm>
-            <a:off x="9198864" y="1143000"/>
-            <a:ext cx="2514600" cy="4526280"/>
+            <a:off x="8275320" y="1234440"/>
+            <a:ext cx="3246120" cy="4434840"/>
           </a:xfrm>
           <a:prstGeom prst="roundRect">
             <a:avLst/>
@@ -8260,7 +8995,7 @@
               </a:defRPr>
             </a:pPr>
             <a:r>
-              <a:t>Reference and chat</a:t>
+              <a:t>Operational benefits</a:t>
             </a:r>
           </a:p>
           <a:p>
@@ -8276,7 +9011,7 @@
               </a:defRPr>
             </a:pPr>
             <a:r>
-              <a:t>Formulas page adds Annuities section.</a:t>
+              <a:t>Docs remain editable without application-code changes.</a:t>
             </a:r>
           </a:p>
           <a:p>
@@ -8292,7 +9027,7 @@
               </a:defRPr>
             </a:pPr>
             <a:r>
-              <a:t>Chat snapshot includes selected annuity data only through explicit fields.</a:t>
+              <a:t>No CDN dependency; can work offline when served.</a:t>
             </a:r>
           </a:p>
           <a:p>
@@ -8308,21 +9043,21 @@
               </a:defRPr>
             </a:pPr>
             <a:r>
-              <a:t>No annuity input is silently inferred in a consumer.</a:t>
-            </a:r>
-          </a:p>
-        </p:txBody>
-      </p:sp>
-      <p:sp>
-        <p:nvSpPr>
-          <p:cNvPr id="11" name="Rectangle 10"/>
+              <a:t>Under file://, failure page explains browser fetch restriction and workarounds.</a:t>
+            </a:r>
+          </a:p>
+        </p:txBody>
+      </p:sp>
+      <p:sp>
+        <p:nvSpPr>
+          <p:cNvPr id="9" name="Rectangle 8"/>
           <p:cNvSpPr/>
           <p:nvPr/>
         </p:nvSpPr>
         <p:spPr>
           <a:xfrm>
-            <a:off x="9198864" y="1143000"/>
-            <a:ext cx="82296" cy="4526280"/>
+            <a:off x="8275320" y="1234440"/>
+            <a:ext cx="82296" cy="4434840"/>
           </a:xfrm>
           <a:prstGeom prst="rect">
             <a:avLst/>
@@ -8358,7 +9093,7 @@
       </p:sp>
       <p:sp>
         <p:nvSpPr>
-          <p:cNvPr id="12" name="Rectangle 11"/>
+          <p:cNvPr id="10" name="Rectangle 9"/>
           <p:cNvSpPr/>
           <p:nvPr/>
         </p:nvSpPr>
@@ -8401,7 +9136,7 @@
       </p:sp>
       <p:sp>
         <p:nvSpPr>
-          <p:cNvPr id="13" name="TextBox 12"/>
+          <p:cNvPr id="11" name="TextBox 10"/>
           <p:cNvSpPr txBox="1"/>
           <p:nvPr/>
         </p:nvSpPr>
@@ -8430,7 +9165,7 @@
               </a:defRPr>
             </a:pPr>
             <a:r>
-              <a:t>Retirement Income Planner • Architecture overview • Annuity-model update</a:t>
+              <a:t>Retirement Income Planner • Architecture overview • Print, tax-detail, and customizable income-layout update</a:t>
             </a:r>
           </a:p>
         </p:txBody>
@@ -8492,7 +9227,7 @@
               </a:defRPr>
             </a:pPr>
             <a:r>
-              <a:t>Annuities fit into existing contracts</a:t>
+              <a:t>Updated display stack and script dependencies</a:t>
             </a:r>
           </a:p>
         </p:txBody>
@@ -8528,7 +9263,7 @@
               </a:defRPr>
             </a:pPr>
             <a:r>
-              <a:t>The feature reuses the codebase’s established extension pattern: schema → input card → compute outputs → row-driven consumers.</a:t>
+              <a:t>The update adds print.js and expands tax-chart internals while preserving the global-scope, dependency-ordered loading model.</a:t>
             </a:r>
           </a:p>
         </p:txBody>
@@ -8541,8 +9276,186 @@
         </p:nvSpPr>
         <p:spPr>
           <a:xfrm>
-            <a:off x="594360" y="1234440"/>
-            <a:ext cx="3383280" cy="4434840"/>
+            <a:off x="594360" y="1170432"/>
+            <a:ext cx="3337560" cy="4526280"/>
+          </a:xfrm>
+          <a:prstGeom prst="roundRect">
+            <a:avLst/>
+          </a:prstGeom>
+          <a:solidFill>
+            <a:srgbClr val="F7EFFF"/>
+          </a:solidFill>
+          <a:ln w="13970">
+            <a:solidFill>
+              <a:srgbClr val="7852B0"/>
+            </a:solidFill>
+          </a:ln>
+        </p:spPr>
+        <p:style>
+          <a:lnRef idx="1">
+            <a:schemeClr val="accent1"/>
+          </a:lnRef>
+          <a:fillRef idx="3">
+            <a:schemeClr val="accent1"/>
+          </a:fillRef>
+          <a:effectRef idx="2">
+            <a:schemeClr val="accent1"/>
+          </a:effectRef>
+          <a:fontRef idx="minor">
+            <a:schemeClr val="lt1"/>
+          </a:fontRef>
+        </p:style>
+        <p:txBody>
+          <a:bodyPr rtlCol="0" anchor="ctr" lIns="182880" rIns="100584" tIns="91440"/>
+          <a:lstStyle/>
+          <a:p>
+            <a:pPr algn="ctr">
+              <a:defRPr sz="1700" b="1">
+                <a:solidFill>
+                  <a:srgbClr val="232D37"/>
+                </a:solidFill>
+                <a:latin typeface="Aptos Display"/>
+              </a:defRPr>
+            </a:pPr>
+            <a:r>
+              <a:t>Display additions</a:t>
+            </a:r>
+          </a:p>
+          <a:p>
+            <a:pPr>
+              <a:spcBef>
+                <a:spcPts val="300"/>
+              </a:spcBef>
+              <a:defRPr sz="1200">
+                <a:solidFill>
+                  <a:srgbClr val="232D37"/>
+                </a:solidFill>
+                <a:latin typeface="Aptos"/>
+              </a:defRPr>
+            </a:pPr>
+            <a:r>
+              <a:t>print.js</a:t>
+            </a:r>
+          </a:p>
+          <a:p>
+            <a:pPr>
+              <a:spcBef>
+                <a:spcPts val="300"/>
+              </a:spcBef>
+              <a:defRPr sz="1200">
+                <a:solidFill>
+                  <a:srgbClr val="232D37"/>
+                </a:solidFill>
+                <a:latin typeface="Aptos"/>
+              </a:defRPr>
+            </a:pPr>
+            <a:r>
+              <a:t>taxOrdChart / charts.taxOrd</a:t>
+            </a:r>
+          </a:p>
+          <a:p>
+            <a:pPr>
+              <a:spcBef>
+                <a:spcPts val="300"/>
+              </a:spcBef>
+              <a:defRPr sz="1200">
+                <a:solidFill>
+                  <a:srgbClr val="232D37"/>
+                </a:solidFill>
+                <a:latin typeface="Aptos"/>
+              </a:defRPr>
+            </a:pPr>
+            <a:r>
+              <a:t>taxQualChart / charts.taxQual</a:t>
+            </a:r>
+          </a:p>
+          <a:p>
+            <a:pPr>
+              <a:spcBef>
+                <a:spcPts val="300"/>
+              </a:spcBef>
+              <a:defRPr sz="1200">
+                <a:solidFill>
+                  <a:srgbClr val="232D37"/>
+                </a:solidFill>
+                <a:latin typeface="Aptos"/>
+              </a:defRPr>
+            </a:pPr>
+            <a:r>
+              <a:t>taxBracketOverlay</a:t>
+            </a:r>
+          </a:p>
+          <a:p>
+            <a:pPr>
+              <a:spcBef>
+                <a:spcPts val="300"/>
+              </a:spcBef>
+              <a:defRPr sz="1200">
+                <a:solidFill>
+                  <a:srgbClr val="232D37"/>
+                </a:solidFill>
+                <a:latin typeface="Aptos"/>
+              </a:defRPr>
+            </a:pPr>
+            <a:r>
+              <a:t>Improved mdPage list parser</a:t>
+            </a:r>
+          </a:p>
+        </p:txBody>
+      </p:sp>
+      <p:sp>
+        <p:nvSpPr>
+          <p:cNvPr id="5" name="Rectangle 4"/>
+          <p:cNvSpPr/>
+          <p:nvPr/>
+        </p:nvSpPr>
+        <p:spPr>
+          <a:xfrm>
+            <a:off x="594360" y="1170432"/>
+            <a:ext cx="82296" cy="4526280"/>
+          </a:xfrm>
+          <a:prstGeom prst="rect">
+            <a:avLst/>
+          </a:prstGeom>
+          <a:solidFill>
+            <a:srgbClr val="7852B0"/>
+          </a:solidFill>
+          <a:ln>
+            <a:noFill/>
+          </a:ln>
+        </p:spPr>
+        <p:style>
+          <a:lnRef idx="1">
+            <a:schemeClr val="accent1"/>
+          </a:lnRef>
+          <a:fillRef idx="3">
+            <a:schemeClr val="accent1"/>
+          </a:fillRef>
+          <a:effectRef idx="2">
+            <a:schemeClr val="accent1"/>
+          </a:effectRef>
+          <a:fontRef idx="minor">
+            <a:schemeClr val="lt1"/>
+          </a:fontRef>
+        </p:style>
+        <p:txBody>
+          <a:bodyPr rtlCol="0" anchor="ctr"/>
+          <a:lstStyle/>
+          <a:p>
+            <a:pPr algn="ctr"/>
+          </a:p>
+        </p:txBody>
+      </p:sp>
+      <p:sp>
+        <p:nvSpPr>
+          <p:cNvPr id="6" name="Rounded Rectangle 5"/>
+          <p:cNvSpPr/>
+          <p:nvPr/>
+        </p:nvSpPr>
+        <p:spPr>
+          <a:xfrm>
+            <a:off x="4407408" y="1170432"/>
+            <a:ext cx="3337560" cy="4526280"/>
           </a:xfrm>
           <a:prstGeom prst="roundRect">
             <a:avLst/>
@@ -8583,7 +9496,7 @@
               </a:defRPr>
             </a:pPr>
             <a:r>
-              <a:t>State and migration</a:t>
+              <a:t>Chart registry impact</a:t>
             </a:r>
           </a:p>
           <a:p>
@@ -8599,7 +9512,7 @@
               </a:defRPr>
             </a:pPr>
             <a:r>
-              <a:t>Add annuities[] under Person.</a:t>
+              <a:t>Registry owns primary and companion tax instances.</a:t>
             </a:r>
           </a:p>
           <a:p>
@@ -8615,7 +9528,7 @@
               </a:defRPr>
             </a:pPr>
             <a:r>
-              <a:t>Canonical default shapes live in state.js.</a:t>
+              <a:t>destroyAllCharts and resizeAllCharts cover every live chart.</a:t>
             </a:r>
           </a:p>
           <a:p>
@@ -8631,37 +9544,21 @@
               </a:defRPr>
             </a:pPr>
             <a:r>
-              <a:t>Multiple instances use IDs and safe add/remove behavior.</a:t>
-            </a:r>
-          </a:p>
-          <a:p>
-            <a:pPr>
-              <a:spcBef>
-                <a:spcPts val="300"/>
-              </a:spcBef>
-              <a:defRPr sz="1200">
-                <a:solidFill>
-                  <a:srgbClr val="232D37"/>
-                </a:solidFill>
-                <a:latin typeface="Aptos"/>
-              </a:defRPr>
-            </a:pPr>
-            <a:r>
-              <a:t>Enabled and hidden remain independent.</a:t>
-            </a:r>
-          </a:p>
-        </p:txBody>
-      </p:sp>
-      <p:sp>
-        <p:nvSpPr>
-          <p:cNvPr id="5" name="Rectangle 4"/>
+              <a:t>Print loops the registry rather than maintaining separate chart lists.</a:t>
+            </a:r>
+          </a:p>
+        </p:txBody>
+      </p:sp>
+      <p:sp>
+        <p:nvSpPr>
+          <p:cNvPr id="7" name="Rectangle 6"/>
           <p:cNvSpPr/>
           <p:nvPr/>
         </p:nvSpPr>
         <p:spPr>
           <a:xfrm>
-            <a:off x="594360" y="1234440"/>
-            <a:ext cx="82296" cy="4434840"/>
+            <a:off x="4407408" y="1170432"/>
+            <a:ext cx="82296" cy="4526280"/>
           </a:xfrm>
           <a:prstGeom prst="rect">
             <a:avLst/>
@@ -8697,14 +9594,14 @@
       </p:sp>
       <p:sp>
         <p:nvSpPr>
-          <p:cNvPr id="6" name="Rounded Rectangle 5"/>
+          <p:cNvPr id="8" name="Rounded Rectangle 7"/>
           <p:cNvSpPr/>
           <p:nvPr/>
         </p:nvSpPr>
         <p:spPr>
           <a:xfrm>
-            <a:off x="4407408" y="1234440"/>
-            <a:ext cx="3383280" cy="4434840"/>
+            <a:off x="8220456" y="1170432"/>
+            <a:ext cx="3337560" cy="4526280"/>
           </a:xfrm>
           <a:prstGeom prst="roundRect">
             <a:avLst/>
@@ -8745,7 +9642,7 @@
               </a:defRPr>
             </a:pPr>
             <a:r>
-              <a:t>Compute integration</a:t>
+              <a:t>Style and markup impact</a:t>
             </a:r>
           </a:p>
           <a:p>
@@ -8761,7 +9658,7 @@
               </a:defRPr>
             </a:pPr>
             <a:r>
-              <a:t>simulateAnnuity isolates contract mechanics.</a:t>
+              <a:t>css/styles.css holds print-ready rules outside @media print so they apply before print media.</a:t>
             </a:r>
           </a:p>
           <a:p>
@@ -8777,7 +9674,7 @@
               </a:defRPr>
             </a:pPr>
             <a:r>
-              <a:t>projection.js aggregates each person’s result.</a:t>
+              <a:t>index.html adds companion canvases and Print action.</a:t>
             </a:r>
           </a:p>
           <a:p>
@@ -8793,21 +9690,21 @@
               </a:defRPr>
             </a:pPr>
             <a:r>
-              <a:t>Tax, cash, MAGI, NII, and asset effects flow through common row fields.</a:t>
-            </a:r>
-          </a:p>
-        </p:txBody>
-      </p:sp>
-      <p:sp>
-        <p:nvSpPr>
-          <p:cNvPr id="7" name="Rectangle 6"/>
+              <a:t>Plain scripts still load in dependency order before app.js.</a:t>
+            </a:r>
+          </a:p>
+        </p:txBody>
+      </p:sp>
+      <p:sp>
+        <p:nvSpPr>
+          <p:cNvPr id="9" name="Rectangle 8"/>
           <p:cNvSpPr/>
           <p:nvPr/>
         </p:nvSpPr>
         <p:spPr>
           <a:xfrm>
-            <a:off x="4407408" y="1234440"/>
-            <a:ext cx="82296" cy="4434840"/>
+            <a:off x="8220456" y="1170432"/>
+            <a:ext cx="82296" cy="4526280"/>
           </a:xfrm>
           <a:prstGeom prst="rect">
             <a:avLst/>
@@ -8843,152 +9740,6 @@
       </p:sp>
       <p:sp>
         <p:nvSpPr>
-          <p:cNvPr id="8" name="Rounded Rectangle 7"/>
-          <p:cNvSpPr/>
-          <p:nvPr/>
-        </p:nvSpPr>
-        <p:spPr>
-          <a:xfrm>
-            <a:off x="8220456" y="1234440"/>
-            <a:ext cx="3383280" cy="4434840"/>
-          </a:xfrm>
-          <a:prstGeom prst="roundRect">
-            <a:avLst/>
-          </a:prstGeom>
-          <a:solidFill>
-            <a:srgbClr val="F7EFFF"/>
-          </a:solidFill>
-          <a:ln w="13970">
-            <a:solidFill>
-              <a:srgbClr val="7852B0"/>
-            </a:solidFill>
-          </a:ln>
-        </p:spPr>
-        <p:style>
-          <a:lnRef idx="1">
-            <a:schemeClr val="accent1"/>
-          </a:lnRef>
-          <a:fillRef idx="3">
-            <a:schemeClr val="accent1"/>
-          </a:fillRef>
-          <a:effectRef idx="2">
-            <a:schemeClr val="accent1"/>
-          </a:effectRef>
-          <a:fontRef idx="minor">
-            <a:schemeClr val="lt1"/>
-          </a:fontRef>
-        </p:style>
-        <p:txBody>
-          <a:bodyPr rtlCol="0" anchor="ctr" lIns="182880" rIns="100584" tIns="91440"/>
-          <a:lstStyle/>
-          <a:p>
-            <a:pPr algn="ctr">
-              <a:defRPr sz="1700" b="1">
-                <a:solidFill>
-                  <a:srgbClr val="232D37"/>
-                </a:solidFill>
-                <a:latin typeface="Aptos Display"/>
-              </a:defRPr>
-            </a:pPr>
-            <a:r>
-              <a:t>Presentation integration</a:t>
-            </a:r>
-          </a:p>
-          <a:p>
-            <a:pPr>
-              <a:spcBef>
-                <a:spcPts val="300"/>
-              </a:spcBef>
-              <a:defRPr sz="1200">
-                <a:solidFill>
-                  <a:srgbClr val="232D37"/>
-                </a:solidFill>
-                <a:latin typeface="Aptos"/>
-              </a:defRPr>
-            </a:pPr>
-            <a:r>
-              <a:t>Input card renders only input/editing behavior.</a:t>
-            </a:r>
-          </a:p>
-          <a:p>
-            <a:pPr>
-              <a:spcBef>
-                <a:spcPts val="300"/>
-              </a:spcBef>
-              <a:defRPr sz="1200">
-                <a:solidFill>
-                  <a:srgbClr val="232D37"/>
-                </a:solidFill>
-                <a:latin typeface="Aptos"/>
-              </a:defRPr>
-            </a:pPr>
-            <a:r>
-              <a:t>Charts, Excel, Formulas, and Chat consume row fields.</a:t>
-            </a:r>
-          </a:p>
-          <a:p>
-            <a:pPr>
-              <a:spcBef>
-                <a:spcPts val="300"/>
-              </a:spcBef>
-              <a:defRPr sz="1200">
-                <a:solidFill>
-                  <a:srgbClr val="232D37"/>
-                </a:solidFill>
-                <a:latin typeface="Aptos"/>
-              </a:defRPr>
-            </a:pPr>
-            <a:r>
-              <a:t>Asset devalue remains display-only and does not alter finance.</a:t>
-            </a:r>
-          </a:p>
-        </p:txBody>
-      </p:sp>
-      <p:sp>
-        <p:nvSpPr>
-          <p:cNvPr id="9" name="Rectangle 8"/>
-          <p:cNvSpPr/>
-          <p:nvPr/>
-        </p:nvSpPr>
-        <p:spPr>
-          <a:xfrm>
-            <a:off x="8220456" y="1234440"/>
-            <a:ext cx="82296" cy="4434840"/>
-          </a:xfrm>
-          <a:prstGeom prst="rect">
-            <a:avLst/>
-          </a:prstGeom>
-          <a:solidFill>
-            <a:srgbClr val="7852B0"/>
-          </a:solidFill>
-          <a:ln>
-            <a:noFill/>
-          </a:ln>
-        </p:spPr>
-        <p:style>
-          <a:lnRef idx="1">
-            <a:schemeClr val="accent1"/>
-          </a:lnRef>
-          <a:fillRef idx="3">
-            <a:schemeClr val="accent1"/>
-          </a:fillRef>
-          <a:effectRef idx="2">
-            <a:schemeClr val="accent1"/>
-          </a:effectRef>
-          <a:fontRef idx="minor">
-            <a:schemeClr val="lt1"/>
-          </a:fontRef>
-        </p:style>
-        <p:txBody>
-          <a:bodyPr rtlCol="0" anchor="ctr"/>
-          <a:lstStyle/>
-          <a:p>
-            <a:pPr algn="ctr"/>
-          </a:p>
-        </p:txBody>
-      </p:sp>
-      <p:sp>
-        <p:nvSpPr>
           <p:cNvPr id="10" name="Rectangle 9"/>
           <p:cNvSpPr/>
           <p:nvPr/>
@@ -9061,7 +9812,7 @@
               </a:defRPr>
             </a:pPr>
             <a:r>
-              <a:t>Retirement Income Planner • Architecture overview • Annuity-model update</a:t>
+              <a:t>Retirement Income Planner • Architecture overview • Print, tax-detail, and customizable income-layout update</a:t>
             </a:r>
           </a:p>
         </p:txBody>
@@ -9123,7 +9874,7 @@
               </a:defRPr>
             </a:pPr>
             <a:r>
-              <a:t>Guardrails for future contract types</a:t>
+              <a:t>Guardrails for interaction and reporting features</a:t>
             </a:r>
           </a:p>
         </p:txBody>
@@ -9159,7 +9910,7 @@
               </a:defRPr>
             </a:pPr>
             <a:r>
-              <a:t>The annuity implementation reinforces the design discipline needed for any additional complex financial product.</a:t>
+              <a:t>The update reinforces a consistent rule: UI conveniences may change presentation state, but not financial meaning.</a:t>
             </a:r>
           </a:p>
         </p:txBody>
@@ -9173,6 +9924,152 @@
         <p:spPr>
           <a:xfrm>
             <a:off x="640080" y="1188720"/>
+            <a:ext cx="3383280" cy="4526280"/>
+          </a:xfrm>
+          <a:prstGeom prst="roundRect">
+            <a:avLst/>
+          </a:prstGeom>
+          <a:solidFill>
+            <a:srgbClr val="E9F4FF"/>
+          </a:solidFill>
+          <a:ln w="13970">
+            <a:solidFill>
+              <a:srgbClr val="266EB2"/>
+            </a:solidFill>
+          </a:ln>
+        </p:spPr>
+        <p:style>
+          <a:lnRef idx="1">
+            <a:schemeClr val="accent1"/>
+          </a:lnRef>
+          <a:fillRef idx="3">
+            <a:schemeClr val="accent1"/>
+          </a:fillRef>
+          <a:effectRef idx="2">
+            <a:schemeClr val="accent1"/>
+          </a:effectRef>
+          <a:fontRef idx="minor">
+            <a:schemeClr val="lt1"/>
+          </a:fontRef>
+        </p:style>
+        <p:txBody>
+          <a:bodyPr rtlCol="0" anchor="ctr" lIns="182880" rIns="100584" tIns="91440"/>
+          <a:lstStyle/>
+          <a:p>
+            <a:pPr algn="ctr">
+              <a:defRPr sz="1700" b="1">
+                <a:solidFill>
+                  <a:srgbClr val="232D37"/>
+                </a:solidFill>
+                <a:latin typeface="Aptos Display"/>
+              </a:defRPr>
+            </a:pPr>
+            <a:r>
+              <a:t>Print safely</a:t>
+            </a:r>
+          </a:p>
+          <a:p>
+            <a:pPr>
+              <a:spcBef>
+                <a:spcPts val="300"/>
+              </a:spcBef>
+              <a:defRPr sz="1200">
+                <a:solidFill>
+                  <a:srgbClr val="232D37"/>
+                </a:solidFill>
+                <a:latin typeface="Aptos"/>
+              </a:defRPr>
+            </a:pPr>
+            <a:r>
+              <a:t>Treat printing as a temporary DOM presentation mode.</a:t>
+            </a:r>
+          </a:p>
+          <a:p>
+            <a:pPr>
+              <a:spcBef>
+                <a:spcPts val="300"/>
+              </a:spcBef>
+              <a:defRPr sz="1200">
+                <a:solidFill>
+                  <a:srgbClr val="232D37"/>
+                </a:solidFill>
+                <a:latin typeface="Aptos"/>
+              </a:defRPr>
+            </a:pPr>
+            <a:r>
+              <a:t>Snapshot charts synchronously.</a:t>
+            </a:r>
+          </a:p>
+          <a:p>
+            <a:pPr>
+              <a:spcBef>
+                <a:spcPts val="300"/>
+              </a:spcBef>
+              <a:defRPr sz="1200">
+                <a:solidFill>
+                  <a:srgbClr val="232D37"/>
+                </a:solidFill>
+                <a:latin typeface="Aptos"/>
+              </a:defRPr>
+            </a:pPr>
+            <a:r>
+              <a:t>Restore the live experience without writing state.</a:t>
+            </a:r>
+          </a:p>
+        </p:txBody>
+      </p:sp>
+      <p:sp>
+        <p:nvSpPr>
+          <p:cNvPr id="5" name="Rectangle 4"/>
+          <p:cNvSpPr/>
+          <p:nvPr/>
+        </p:nvSpPr>
+        <p:spPr>
+          <a:xfrm>
+            <a:off x="640080" y="1188720"/>
+            <a:ext cx="82296" cy="4526280"/>
+          </a:xfrm>
+          <a:prstGeom prst="rect">
+            <a:avLst/>
+          </a:prstGeom>
+          <a:solidFill>
+            <a:srgbClr val="266EB2"/>
+          </a:solidFill>
+          <a:ln>
+            <a:noFill/>
+          </a:ln>
+        </p:spPr>
+        <p:style>
+          <a:lnRef idx="1">
+            <a:schemeClr val="accent1"/>
+          </a:lnRef>
+          <a:fillRef idx="3">
+            <a:schemeClr val="accent1"/>
+          </a:fillRef>
+          <a:effectRef idx="2">
+            <a:schemeClr val="accent1"/>
+          </a:effectRef>
+          <a:fontRef idx="minor">
+            <a:schemeClr val="lt1"/>
+          </a:fontRef>
+        </p:style>
+        <p:txBody>
+          <a:bodyPr rtlCol="0" anchor="ctr"/>
+          <a:lstStyle/>
+          <a:p>
+            <a:pPr algn="ctr"/>
+          </a:p>
+        </p:txBody>
+      </p:sp>
+      <p:sp>
+        <p:nvSpPr>
+          <p:cNvPr id="6" name="Rounded Rectangle 5"/>
+          <p:cNvSpPr/>
+          <p:nvPr/>
+        </p:nvSpPr>
+        <p:spPr>
+          <a:xfrm>
+            <a:off x="4407408" y="1188720"/>
             <a:ext cx="3383280" cy="4526280"/>
           </a:xfrm>
           <a:prstGeom prst="roundRect">
@@ -9214,7 +10111,7 @@
               </a:defRPr>
             </a:pPr>
             <a:r>
-              <a:t>Isolate product mechanics</a:t>
+              <a:t>Visualize consistently</a:t>
             </a:r>
           </a:p>
           <a:p>
@@ -9230,7 +10127,7 @@
               </a:defRPr>
             </a:pPr>
             <a:r>
-              <a:t>Put self-contained contract rules into a dedicated simulation routine.</a:t>
+              <a:t>Detail charts must reuse projection data, colors, scale policies, and tooltips.</a:t>
             </a:r>
           </a:p>
           <a:p>
@@ -9246,36 +10143,20 @@
               </a:defRPr>
             </a:pPr>
             <a:r>
-              <a:t>Run it at a defined stage with explicit inputs and annual outputs.</a:t>
-            </a:r>
-          </a:p>
-          <a:p>
-            <a:pPr>
-              <a:spcBef>
-                <a:spcPts val="300"/>
-              </a:spcBef>
-              <a:defRPr sz="1200">
-                <a:solidFill>
-                  <a:srgbClr val="232D37"/>
-                </a:solidFill>
-                <a:latin typeface="Aptos"/>
-              </a:defRPr>
-            </a:pPr>
-            <a:r>
-              <a:t>Avoid distributing product logic across chart code.</a:t>
-            </a:r>
-          </a:p>
-        </p:txBody>
-      </p:sp>
-      <p:sp>
-        <p:nvSpPr>
-          <p:cNvPr id="5" name="Rectangle 4"/>
+              <a:t>Add charts to the registry rather than hand-maintained lifecycle lists.</a:t>
+            </a:r>
+          </a:p>
+        </p:txBody>
+      </p:sp>
+      <p:sp>
+        <p:nvSpPr>
+          <p:cNvPr id="7" name="Rectangle 6"/>
           <p:cNvSpPr/>
           <p:nvPr/>
         </p:nvSpPr>
         <p:spPr>
           <a:xfrm>
-            <a:off x="640080" y="1188720"/>
+            <a:off x="4407408" y="1188720"/>
             <a:ext cx="82296" cy="4526280"/>
           </a:xfrm>
           <a:prstGeom prst="rect">
@@ -9283,136 +10164,6 @@
           </a:prstGeom>
           <a:solidFill>
             <a:srgbClr val="429761"/>
-          </a:solidFill>
-          <a:ln>
-            <a:noFill/>
-          </a:ln>
-        </p:spPr>
-        <p:style>
-          <a:lnRef idx="1">
-            <a:schemeClr val="accent1"/>
-          </a:lnRef>
-          <a:fillRef idx="3">
-            <a:schemeClr val="accent1"/>
-          </a:fillRef>
-          <a:effectRef idx="2">
-            <a:schemeClr val="accent1"/>
-          </a:effectRef>
-          <a:fontRef idx="minor">
-            <a:schemeClr val="lt1"/>
-          </a:fontRef>
-        </p:style>
-        <p:txBody>
-          <a:bodyPr rtlCol="0" anchor="ctr"/>
-          <a:lstStyle/>
-          <a:p>
-            <a:pPr algn="ctr"/>
-          </a:p>
-        </p:txBody>
-      </p:sp>
-      <p:sp>
-        <p:nvSpPr>
-          <p:cNvPr id="6" name="Rounded Rectangle 5"/>
-          <p:cNvSpPr/>
-          <p:nvPr/>
-        </p:nvSpPr>
-        <p:spPr>
-          <a:xfrm>
-            <a:off x="4407408" y="1188720"/>
-            <a:ext cx="3383280" cy="4526280"/>
-          </a:xfrm>
-          <a:prstGeom prst="roundRect">
-            <a:avLst/>
-          </a:prstGeom>
-          <a:solidFill>
-            <a:srgbClr val="FFF6E8"/>
-          </a:solidFill>
-          <a:ln w="13970">
-            <a:solidFill>
-              <a:srgbClr val="E5892A"/>
-            </a:solidFill>
-          </a:ln>
-        </p:spPr>
-        <p:style>
-          <a:lnRef idx="1">
-            <a:schemeClr val="accent1"/>
-          </a:lnRef>
-          <a:fillRef idx="3">
-            <a:schemeClr val="accent1"/>
-          </a:fillRef>
-          <a:effectRef idx="2">
-            <a:schemeClr val="accent1"/>
-          </a:effectRef>
-          <a:fontRef idx="minor">
-            <a:schemeClr val="lt1"/>
-          </a:fontRef>
-        </p:style>
-        <p:txBody>
-          <a:bodyPr rtlCol="0" anchor="ctr" lIns="182880" rIns="100584" tIns="91440"/>
-          <a:lstStyle/>
-          <a:p>
-            <a:pPr algn="ctr">
-              <a:defRPr sz="1700" b="1">
-                <a:solidFill>
-                  <a:srgbClr val="232D37"/>
-                </a:solidFill>
-                <a:latin typeface="Aptos Display"/>
-              </a:defRPr>
-            </a:pPr>
-            <a:r>
-              <a:t>Make tax character explicit</a:t>
-            </a:r>
-          </a:p>
-          <a:p>
-            <a:pPr>
-              <a:spcBef>
-                <a:spcPts val="300"/>
-              </a:spcBef>
-              <a:defRPr sz="1200">
-                <a:solidFill>
-                  <a:srgbClr val="232D37"/>
-                </a:solidFill>
-                <a:latin typeface="Aptos"/>
-              </a:defRPr>
-            </a:pPr>
-            <a:r>
-              <a:t>Separate taxable, tax-exempt, investment-income, and insurer-supported amounts.</a:t>
-            </a:r>
-          </a:p>
-          <a:p>
-            <a:pPr>
-              <a:spcBef>
-                <a:spcPts val="300"/>
-              </a:spcBef>
-              <a:defRPr sz="1200">
-                <a:solidFill>
-                  <a:srgbClr val="232D37"/>
-                </a:solidFill>
-                <a:latin typeface="Aptos"/>
-              </a:defRPr>
-            </a:pPr>
-            <a:r>
-              <a:t>Thread them into cash-flow and tax calculations through named projection fields.</a:t>
-            </a:r>
-          </a:p>
-        </p:txBody>
-      </p:sp>
-      <p:sp>
-        <p:nvSpPr>
-          <p:cNvPr id="7" name="Rectangle 6"/>
-          <p:cNvSpPr/>
-          <p:nvPr/>
-        </p:nvSpPr>
-        <p:spPr>
-          <a:xfrm>
-            <a:off x="4407408" y="1188720"/>
-            <a:ext cx="82296" cy="4526280"/>
-          </a:xfrm>
-          <a:prstGeom prst="rect">
-            <a:avLst/>
-          </a:prstGeom>
-          <a:solidFill>
-            <a:srgbClr val="E5892A"/>
           </a:solidFill>
           <a:ln>
             <a:noFill/>
@@ -9490,7 +10241,7 @@
               </a:defRPr>
             </a:pPr>
             <a:r>
-              <a:t>Keep consumers passive</a:t>
+              <a:t>Customize transparently</a:t>
             </a:r>
           </a:p>
           <a:p>
@@ -9506,7 +10257,7 @@
               </a:defRPr>
             </a:pPr>
             <a:r>
-              <a:t>Charts, export, formulas, and chat must read the projection—not resimulate contracts.</a:t>
+              <a:t>Persist display-only preferences such as card order.</a:t>
             </a:r>
           </a:p>
           <a:p>
@@ -9522,7 +10273,23 @@
               </a:defRPr>
             </a:pPr>
             <a:r>
-              <a:t>Add every required output to the row schema before building a presentation feature.</a:t>
+              <a:t>Normalize saved UI structures during hydration.</a:t>
+            </a:r>
+          </a:p>
+          <a:p>
+            <a:pPr>
+              <a:spcBef>
+                <a:spcPts val="300"/>
+              </a:spcBef>
+              <a:defRPr sz="1200">
+                <a:solidFill>
+                  <a:srgbClr val="232D37"/>
+                </a:solidFill>
+                <a:latin typeface="Aptos"/>
+              </a:defRPr>
+            </a:pPr>
+            <a:r>
+              <a:t>Do not trigger computation for non-financial interaction changes.</a:t>
             </a:r>
           </a:p>
         </p:txBody>
@@ -9644,7 +10411,7 @@
               </a:defRPr>
             </a:pPr>
             <a:r>
-              <a:t>Retirement Income Planner • Architecture overview • Annuity-model update</a:t>
+              <a:t>Retirement Income Planner • Architecture overview • Print, tax-detail, and customizable income-layout update</a:t>
             </a:r>
           </a:p>
         </p:txBody>

--- a/docs/retirement_income_planner_architecture.pptx
+++ b/docs/retirement_income_planner_architecture.pptx
@@ -3214,7 +3214,7 @@
               </a:defRPr>
             </a:pPr>
             <a:r>
-              <a:t>Updated architecture: print-safe reporting, tax-detail companion charts, drag-reordered income cards, and richer Markdown rendering</a:t>
+              <a:t>Updated architecture: dedicated MAGI analysis, IRMAA-as-tax presentation, external companion tooltips, and unified overlay conventions</a:t>
             </a:r>
           </a:p>
         </p:txBody>
@@ -3269,7 +3269,7 @@
               </a:defRPr>
             </a:pPr>
             <a:r>
-              <a:t>Input</a:t>
+              <a:t>Input &amp; UI flags</a:t>
             </a:r>
           </a:p>
           <a:p>
@@ -3285,7 +3285,7 @@
               </a:defRPr>
             </a:pPr>
             <a:r>
-              <a:t>Cards, settings, drag-to-reorder layout</a:t>
+              <a:t>Existing financial inputs</a:t>
             </a:r>
           </a:p>
           <a:p>
@@ -3301,7 +3301,23 @@
               </a:defRPr>
             </a:pPr>
             <a:r>
-              <a:t>Writes plan and display-only UI state</a:t>
+              <a:t>View-only IRMAA-as-tax checkbox</a:t>
+            </a:r>
+          </a:p>
+          <a:p>
+            <a:pPr>
+              <a:spcBef>
+                <a:spcPts val="300"/>
+              </a:spcBef>
+              <a:defRPr sz="1400">
+                <a:solidFill>
+                  <a:srgbClr val="232D37"/>
+                </a:solidFill>
+                <a:latin typeface="Aptos"/>
+              </a:defRPr>
+            </a:pPr>
+            <a:r>
+              <a:t>No new tax computation state</a:t>
             </a:r>
           </a:p>
         </p:txBody>
@@ -3415,7 +3431,7 @@
               </a:defRPr>
             </a:pPr>
             <a:r>
-              <a:t>Single annual projection</a:t>
+              <a:t>Projection rows include MAGI, IRMAA, tax, income components</a:t>
             </a:r>
           </a:p>
           <a:p>
@@ -3431,7 +3447,7 @@
               </a:defRPr>
             </a:pPr>
             <a:r>
-              <a:t>All financial logic and tax outputs</a:t>
+              <a:t>Single financial source of truth</a:t>
             </a:r>
           </a:p>
         </p:txBody>
@@ -3529,7 +3545,7 @@
               </a:defRPr>
             </a:pPr>
             <a:r>
-              <a:t>Display &amp; report</a:t>
+              <a:t>Display</a:t>
             </a:r>
           </a:p>
           <a:p>
@@ -3545,7 +3561,7 @@
               </a:defRPr>
             </a:pPr>
             <a:r>
-              <a:t>Interactive charts, print snapshots, docs, export, chat</a:t>
+              <a:t>MAGI companion chart</a:t>
             </a:r>
           </a:p>
           <a:p>
@@ -3561,7 +3577,23 @@
               </a:defRPr>
             </a:pPr>
             <a:r>
-              <a:t>Consumes state or projection contracts</a:t>
+              <a:t>Three-chart tax detail</a:t>
+            </a:r>
+          </a:p>
+          <a:p>
+            <a:pPr>
+              <a:spcBef>
+                <a:spcPts val="300"/>
+              </a:spcBef>
+              <a:defRPr sz="1400">
+                <a:solidFill>
+                  <a:srgbClr val="232D37"/>
+                </a:solidFill>
+                <a:latin typeface="Aptos"/>
+              </a:defRPr>
+            </a:pPr>
+            <a:r>
+              <a:t>External tooltips and unified dashed overlays</a:t>
             </a:r>
           </a:p>
         </p:txBody>
@@ -3801,7 +3833,7 @@
               </a:defRPr>
             </a:pPr>
             <a:r>
-              <a:t>Core invariant</a:t>
+              <a:t>Presentation-only enhancement</a:t>
             </a:r>
           </a:p>
           <a:p>
@@ -3817,7 +3849,7 @@
               </a:defRPr>
             </a:pPr>
             <a:r>
-              <a:t>New interaction and reporting features remain passive: they do not create a second financial model or mutate plan data during presentation.</a:t>
+              <a:t>The new charts and toggle re-express existing projection values; they do not alter AGI, MAGI, IRMAA calculations, tax results, or household cash flow.</a:t>
             </a:r>
           </a:p>
         </p:txBody>
@@ -3939,7 +3971,7 @@
               </a:defRPr>
             </a:pPr>
             <a:r>
-              <a:t>Retirement Income Planner • Architecture overview • Print, tax-detail, and customizable income-layout update</a:t>
+              <a:t>Retirement Income Planner • Architecture overview • MAGI, IRMAA-as-tax, and enhanced companion-chart update</a:t>
             </a:r>
           </a:p>
         </p:txBody>
@@ -4037,7 +4069,7 @@
               </a:defRPr>
             </a:pPr>
             <a:r>
-              <a:t>The newest specification adds robust printing, expanded tax visualization, shared draggable income layout, and improved Markdown lists.</a:t>
+              <a:t>The planner adds a focused MAGI view and makes IRMAA easier to interpret alongside taxes while keeping all underlying financial logic in Compute.</a:t>
             </a:r>
           </a:p>
         </p:txBody>
@@ -4092,7 +4124,7 @@
               </a:defRPr>
             </a:pPr>
             <a:r>
-              <a:t>Print service</a:t>
+              <a:t>MAGI chart</a:t>
             </a:r>
           </a:p>
           <a:p>
@@ -4108,7 +4140,7 @@
               </a:defRPr>
             </a:pPr>
             <a:r>
-              <a:t>Dedicated print.js</a:t>
+              <a:t>Companion to annual income</a:t>
             </a:r>
           </a:p>
           <a:p>
@@ -4124,7 +4156,7 @@
               </a:defRPr>
             </a:pPr>
             <a:r>
-              <a:t>Print all hidden sections and cards</a:t>
+              <a:t>Source-colored stack sums exactly to row.magi</a:t>
             </a:r>
           </a:p>
           <a:p>
@@ -4140,7 +4172,7 @@
               </a:defRPr>
             </a:pPr>
             <a:r>
-              <a:t>Static chart bitmap copies</a:t>
+              <a:t>IRMAA thresholds and Part B premium increases</a:t>
             </a:r>
           </a:p>
           <a:p>
@@ -4156,7 +4188,7 @@
               </a:defRPr>
             </a:pPr>
             <a:r>
-              <a:t>Restores UI with no saved-state changes</a:t>
+              <a:t>Focused two-line popup</a:t>
             </a:r>
           </a:p>
         </p:txBody>
@@ -4254,7 +4286,7 @@
               </a:defRPr>
             </a:pPr>
             <a:r>
-              <a:t>Tax details</a:t>
+              <a:t>Income chart refinement</a:t>
             </a:r>
           </a:p>
           <a:p>
@@ -4270,7 +4302,7 @@
               </a:defRPr>
             </a:pPr>
             <a:r>
-              <a:t>One primary tax chart</a:t>
+              <a:t>IRMAA lines move off the primary income chart</a:t>
             </a:r>
           </a:p>
           <a:p>
@@ -4286,7 +4318,7 @@
               </a:defRPr>
             </a:pPr>
             <a:r>
-              <a:t>Ordinary-tax companion</a:t>
+              <a:t>Legend points readers to MAGI view</a:t>
             </a:r>
           </a:p>
           <a:p>
@@ -4302,23 +4334,7 @@
               </a:defRPr>
             </a:pPr>
             <a:r>
-              <a:t>Qualified-tax companion</a:t>
-            </a:r>
-          </a:p>
-          <a:p>
-            <a:pPr>
-              <a:spcBef>
-                <a:spcPts val="300"/>
-              </a:spcBef>
-              <a:defRPr sz="1200">
-                <a:solidFill>
-                  <a:srgbClr val="232D37"/>
-                </a:solidFill>
-                <a:latin typeface="Aptos"/>
-              </a:defRPr>
-            </a:pPr>
-            <a:r>
-              <a:t>Shared scale, tooltips, and Rescale behavior</a:t>
+              <a:t>Primary chart keeps income, AGI, and funding detail</a:t>
             </a:r>
           </a:p>
         </p:txBody>
@@ -4375,6 +4391,168 @@
         <p:spPr>
           <a:xfrm>
             <a:off x="6300216" y="1234440"/>
+            <a:ext cx="2606040" cy="4480560"/>
+          </a:xfrm>
+          <a:prstGeom prst="roundRect">
+            <a:avLst/>
+          </a:prstGeom>
+          <a:solidFill>
+            <a:srgbClr val="FFF6E8"/>
+          </a:solidFill>
+          <a:ln w="13970">
+            <a:solidFill>
+              <a:srgbClr val="E5892A"/>
+            </a:solidFill>
+          </a:ln>
+        </p:spPr>
+        <p:style>
+          <a:lnRef idx="1">
+            <a:schemeClr val="accent1"/>
+          </a:lnRef>
+          <a:fillRef idx="3">
+            <a:schemeClr val="accent1"/>
+          </a:fillRef>
+          <a:effectRef idx="2">
+            <a:schemeClr val="accent1"/>
+          </a:effectRef>
+          <a:fontRef idx="minor">
+            <a:schemeClr val="lt1"/>
+          </a:fontRef>
+        </p:style>
+        <p:txBody>
+          <a:bodyPr rtlCol="0" anchor="ctr" lIns="182880" rIns="100584" tIns="91440"/>
+          <a:lstStyle/>
+          <a:p>
+            <a:pPr algn="ctr">
+              <a:defRPr sz="1700" b="1">
+                <a:solidFill>
+                  <a:srgbClr val="232D37"/>
+                </a:solidFill>
+                <a:latin typeface="Aptos Display"/>
+              </a:defRPr>
+            </a:pPr>
+            <a:r>
+              <a:t>Tax view option</a:t>
+            </a:r>
+          </a:p>
+          <a:p>
+            <a:pPr>
+              <a:spcBef>
+                <a:spcPts val="300"/>
+              </a:spcBef>
+              <a:defRPr sz="1200">
+                <a:solidFill>
+                  <a:srgbClr val="232D37"/>
+                </a:solidFill>
+                <a:latin typeface="Aptos"/>
+              </a:defRPr>
+            </a:pPr>
+            <a:r>
+              <a:t>View IRMAA as tax checkbox</a:t>
+            </a:r>
+          </a:p>
+          <a:p>
+            <a:pPr>
+              <a:spcBef>
+                <a:spcPts val="300"/>
+              </a:spcBef>
+              <a:defRPr sz="1200">
+                <a:solidFill>
+                  <a:srgbClr val="232D37"/>
+                </a:solidFill>
+                <a:latin typeface="Aptos"/>
+              </a:defRPr>
+            </a:pPr>
+            <a:r>
+              <a:t>Dashed IRMAA surcharge above tax stack</a:t>
+            </a:r>
+          </a:p>
+          <a:p>
+            <a:pPr>
+              <a:spcBef>
+                <a:spcPts val="300"/>
+              </a:spcBef>
+              <a:defRPr sz="1200">
+                <a:solidFill>
+                  <a:srgbClr val="232D37"/>
+                </a:solidFill>
+                <a:latin typeface="Aptos"/>
+              </a:defRPr>
+            </a:pPr>
+            <a:r>
+              <a:t>Combined “Total tax + IRMAA” tooltip line</a:t>
+            </a:r>
+          </a:p>
+          <a:p>
+            <a:pPr>
+              <a:spcBef>
+                <a:spcPts val="300"/>
+              </a:spcBef>
+              <a:defRPr sz="1200">
+                <a:solidFill>
+                  <a:srgbClr val="232D37"/>
+                </a:solidFill>
+                <a:latin typeface="Aptos"/>
+              </a:defRPr>
+            </a:pPr>
+            <a:r>
+              <a:t>Display-only scale refresh</a:t>
+            </a:r>
+          </a:p>
+        </p:txBody>
+      </p:sp>
+      <p:sp>
+        <p:nvSpPr>
+          <p:cNvPr id="9" name="Rectangle 8"/>
+          <p:cNvSpPr/>
+          <p:nvPr/>
+        </p:nvSpPr>
+        <p:spPr>
+          <a:xfrm>
+            <a:off x="6300216" y="1234440"/>
+            <a:ext cx="82296" cy="4480560"/>
+          </a:xfrm>
+          <a:prstGeom prst="rect">
+            <a:avLst/>
+          </a:prstGeom>
+          <a:solidFill>
+            <a:srgbClr val="E5892A"/>
+          </a:solidFill>
+          <a:ln>
+            <a:noFill/>
+          </a:ln>
+        </p:spPr>
+        <p:style>
+          <a:lnRef idx="1">
+            <a:schemeClr val="accent1"/>
+          </a:lnRef>
+          <a:fillRef idx="3">
+            <a:schemeClr val="accent1"/>
+          </a:fillRef>
+          <a:effectRef idx="2">
+            <a:schemeClr val="accent1"/>
+          </a:effectRef>
+          <a:fontRef idx="minor">
+            <a:schemeClr val="lt1"/>
+          </a:fontRef>
+        </p:style>
+        <p:txBody>
+          <a:bodyPr rtlCol="0" anchor="ctr"/>
+          <a:lstStyle/>
+          <a:p>
+            <a:pPr algn="ctr"/>
+          </a:p>
+        </p:txBody>
+      </p:sp>
+      <p:sp>
+        <p:nvSpPr>
+          <p:cNvPr id="10" name="Rounded Rectangle 9"/>
+          <p:cNvSpPr/>
+          <p:nvPr/>
+        </p:nvSpPr>
+        <p:spPr>
+          <a:xfrm>
+            <a:off x="9198864" y="1234440"/>
             <a:ext cx="2606040" cy="4480560"/>
           </a:xfrm>
           <a:prstGeom prst="roundRect">
@@ -4416,7 +4594,7 @@
               </a:defRPr>
             </a:pPr>
             <a:r>
-              <a:t>Income layout</a:t>
+              <a:t>Tooltip &amp; overlay system</a:t>
             </a:r>
           </a:p>
           <a:p>
@@ -4432,7 +4610,7 @@
               </a:defRPr>
             </a:pPr>
             <a:r>
-              <a:t>Shared order in state.ui.incomeOrder</a:t>
+              <a:t>External HTML tooltips for compact companions</a:t>
             </a:r>
           </a:p>
           <a:p>
@@ -4448,7 +4626,7 @@
               </a:defRPr>
             </a:pPr>
             <a:r>
-              <a:t>HTML5 drag handles</a:t>
+              <a:t>One black dashed reference-line color</a:t>
             </a:r>
           </a:p>
           <a:p>
@@ -4464,36 +4642,20 @@
               </a:defRPr>
             </a:pPr>
             <a:r>
-              <a:t>Same order in all person columns</a:t>
-            </a:r>
-          </a:p>
-          <a:p>
-            <a:pPr>
-              <a:spcBef>
-                <a:spcPts val="300"/>
-              </a:spcBef>
-              <a:defRPr sz="1200">
-                <a:solidFill>
-                  <a:srgbClr val="232D37"/>
-                </a:solidFill>
-                <a:latin typeface="Aptos"/>
-              </a:defRPr>
-            </a:pPr>
-            <a:r>
-              <a:t>Display-only: no recompute</a:t>
-            </a:r>
-          </a:p>
-        </p:txBody>
-      </p:sp>
-      <p:sp>
-        <p:nvSpPr>
-          <p:cNvPr id="9" name="Rectangle 8"/>
+              <a:t>Reusable legend dash styles</a:t>
+            </a:r>
+          </a:p>
+        </p:txBody>
+      </p:sp>
+      <p:sp>
+        <p:nvSpPr>
+          <p:cNvPr id="11" name="Rectangle 10"/>
           <p:cNvSpPr/>
           <p:nvPr/>
         </p:nvSpPr>
         <p:spPr>
           <a:xfrm>
-            <a:off x="6300216" y="1234440"/>
+            <a:off x="9198864" y="1234440"/>
             <a:ext cx="82296" cy="4480560"/>
           </a:xfrm>
           <a:prstGeom prst="rect">
@@ -4530,152 +4692,6 @@
       </p:sp>
       <p:sp>
         <p:nvSpPr>
-          <p:cNvPr id="10" name="Rounded Rectangle 9"/>
-          <p:cNvSpPr/>
-          <p:nvPr/>
-        </p:nvSpPr>
-        <p:spPr>
-          <a:xfrm>
-            <a:off x="9198864" y="1234440"/>
-            <a:ext cx="2606040" cy="4480560"/>
-          </a:xfrm>
-          <a:prstGeom prst="roundRect">
-            <a:avLst/>
-          </a:prstGeom>
-          <a:solidFill>
-            <a:srgbClr val="FFF6E8"/>
-          </a:solidFill>
-          <a:ln w="13970">
-            <a:solidFill>
-              <a:srgbClr val="E5892A"/>
-            </a:solidFill>
-          </a:ln>
-        </p:spPr>
-        <p:style>
-          <a:lnRef idx="1">
-            <a:schemeClr val="accent1"/>
-          </a:lnRef>
-          <a:fillRef idx="3">
-            <a:schemeClr val="accent1"/>
-          </a:fillRef>
-          <a:effectRef idx="2">
-            <a:schemeClr val="accent1"/>
-          </a:effectRef>
-          <a:fontRef idx="minor">
-            <a:schemeClr val="lt1"/>
-          </a:fontRef>
-        </p:style>
-        <p:txBody>
-          <a:bodyPr rtlCol="0" anchor="ctr" lIns="182880" rIns="100584" tIns="91440"/>
-          <a:lstStyle/>
-          <a:p>
-            <a:pPr algn="ctr">
-              <a:defRPr sz="1700" b="1">
-                <a:solidFill>
-                  <a:srgbClr val="232D37"/>
-                </a:solidFill>
-                <a:latin typeface="Aptos Display"/>
-              </a:defRPr>
-            </a:pPr>
-            <a:r>
-              <a:t>Markdown docs</a:t>
-            </a:r>
-          </a:p>
-          <a:p>
-            <a:pPr>
-              <a:spcBef>
-                <a:spcPts val="300"/>
-              </a:spcBef>
-              <a:defRPr sz="1200">
-                <a:solidFill>
-                  <a:srgbClr val="232D37"/>
-                </a:solidFill>
-                <a:latin typeface="Aptos"/>
-              </a:defRPr>
-            </a:pPr>
-            <a:r>
-              <a:t>Nested lists by indentation</a:t>
-            </a:r>
-          </a:p>
-          <a:p>
-            <a:pPr>
-              <a:spcBef>
-                <a:spcPts val="300"/>
-              </a:spcBef>
-              <a:defRPr sz="1200">
-                <a:solidFill>
-                  <a:srgbClr val="232D37"/>
-                </a:solidFill>
-                <a:latin typeface="Aptos"/>
-              </a:defRPr>
-            </a:pPr>
-            <a:r>
-              <a:t>Shared mdPage viewer</a:t>
-            </a:r>
-          </a:p>
-          <a:p>
-            <a:pPr>
-              <a:spcBef>
-                <a:spcPts val="300"/>
-              </a:spcBef>
-              <a:defRPr sz="1200">
-                <a:solidFill>
-                  <a:srgbClr val="232D37"/>
-                </a:solidFill>
-                <a:latin typeface="Aptos"/>
-              </a:defRPr>
-            </a:pPr>
-            <a:r>
-              <a:t>Usage and Notes remain content files</a:t>
-            </a:r>
-          </a:p>
-        </p:txBody>
-      </p:sp>
-      <p:sp>
-        <p:nvSpPr>
-          <p:cNvPr id="11" name="Rectangle 10"/>
-          <p:cNvSpPr/>
-          <p:nvPr/>
-        </p:nvSpPr>
-        <p:spPr>
-          <a:xfrm>
-            <a:off x="9198864" y="1234440"/>
-            <a:ext cx="82296" cy="4480560"/>
-          </a:xfrm>
-          <a:prstGeom prst="rect">
-            <a:avLst/>
-          </a:prstGeom>
-          <a:solidFill>
-            <a:srgbClr val="E5892A"/>
-          </a:solidFill>
-          <a:ln>
-            <a:noFill/>
-          </a:ln>
-        </p:spPr>
-        <p:style>
-          <a:lnRef idx="1">
-            <a:schemeClr val="accent1"/>
-          </a:lnRef>
-          <a:fillRef idx="3">
-            <a:schemeClr val="accent1"/>
-          </a:fillRef>
-          <a:effectRef idx="2">
-            <a:schemeClr val="accent1"/>
-          </a:effectRef>
-          <a:fontRef idx="minor">
-            <a:schemeClr val="lt1"/>
-          </a:fontRef>
-        </p:style>
-        <p:txBody>
-          <a:bodyPr rtlCol="0" anchor="ctr"/>
-          <a:lstStyle/>
-          <a:p>
-            <a:pPr algn="ctr"/>
-          </a:p>
-        </p:txBody>
-      </p:sp>
-      <p:sp>
-        <p:nvSpPr>
           <p:cNvPr id="12" name="Rectangle 11"/>
           <p:cNvSpPr/>
           <p:nvPr/>
@@ -4748,7 +4764,7 @@
               </a:defRPr>
             </a:pPr>
             <a:r>
-              <a:t>Retirement Income Planner • Architecture overview • Print, tax-detail, and customizable income-layout update</a:t>
+              <a:t>Retirement Income Planner • Architecture overview • MAGI, IRMAA-as-tax, and enhanced companion-chart update</a:t>
             </a:r>
           </a:p>
         </p:txBody>
@@ -4810,7 +4826,7 @@
               </a:defRPr>
             </a:pPr>
             <a:r>
-              <a:t>Print architecture: generate snapshots, not side effects</a:t>
+              <a:t>MAGI companion chart: source colors plus IRMAA context</a:t>
             </a:r>
           </a:p>
         </p:txBody>
@@ -4846,7 +4862,7 @@
               </a:defRPr>
             </a:pPr>
             <a:r>
-              <a:t>The Print action reveals the full plan and replaces live charts with synchronous bitmap copies only for the print lifecycle.</a:t>
+              <a:t>The income section becomes a two-chart layout: the main income stack explains cash flow, while the MAGI chart explains surcharge exposure.</a:t>
             </a:r>
           </a:p>
         </p:txBody>
@@ -4859,8 +4875,8 @@
         </p:nvSpPr>
         <p:spPr>
           <a:xfrm>
-            <a:off x="502920" y="1188720"/>
-            <a:ext cx="2057400" cy="1325880"/>
+            <a:off x="502920" y="1170432"/>
+            <a:ext cx="3794760" cy="4526280"/>
           </a:xfrm>
           <a:prstGeom prst="roundRect">
             <a:avLst/>
@@ -4893,7 +4909,7 @@
           <a:lstStyle/>
           <a:p>
             <a:pPr algn="ctr">
-              <a:defRPr sz="1600" b="1">
+              <a:defRPr sz="1700" b="1">
                 <a:solidFill>
                   <a:srgbClr val="232D37"/>
                 </a:solidFill>
@@ -4901,7 +4917,7 @@
               </a:defRPr>
             </a:pPr>
             <a:r>
-              <a:t>Print command</a:t>
+              <a:t>Primary income chart</a:t>
             </a:r>
           </a:p>
           <a:p>
@@ -4909,15 +4925,15 @@
               <a:spcBef>
                 <a:spcPts val="300"/>
               </a:spcBef>
-              <a:defRPr sz="1100">
-                <a:solidFill>
-                  <a:srgbClr val="232D37"/>
-                </a:solidFill>
-                <a:latin typeface="Aptos"/>
-              </a:defRPr>
-            </a:pPr>
-            <a:r>
-              <a:t>Topbar Print button or Ctrl/Cmd+P</a:t>
+              <a:defRPr sz="1200">
+                <a:solidFill>
+                  <a:srgbClr val="232D37"/>
+                </a:solidFill>
+                <a:latin typeface="Aptos"/>
+              </a:defRPr>
+            </a:pPr>
+            <a:r>
+              <a:t>Two-thirds width</a:t>
             </a:r>
           </a:p>
           <a:p>
@@ -4925,15 +4941,63 @@
               <a:spcBef>
                 <a:spcPts val="300"/>
               </a:spcBef>
-              <a:defRPr sz="1100">
-                <a:solidFill>
-                  <a:srgbClr val="232D37"/>
-                </a:solidFill>
-                <a:latin typeface="Aptos"/>
-              </a:defRPr>
-            </a:pPr>
-            <a:r>
-              <a:t>window.print()</a:t>
+              <a:defRPr sz="1200">
+                <a:solidFill>
+                  <a:srgbClr val="232D37"/>
+                </a:solidFill>
+                <a:latin typeface="Aptos"/>
+              </a:defRPr>
+            </a:pPr>
+            <a:r>
+              <a:t>Income stack retains taxable and cash-flow components</a:t>
+            </a:r>
+          </a:p>
+          <a:p>
+            <a:pPr>
+              <a:spcBef>
+                <a:spcPts val="300"/>
+              </a:spcBef>
+              <a:defRPr sz="1200">
+                <a:solidFill>
+                  <a:srgbClr val="232D37"/>
+                </a:solidFill>
+                <a:latin typeface="Aptos"/>
+              </a:defRPr>
+            </a:pPr>
+            <a:r>
+              <a:t>No IRMAA bracket lines on this plot</a:t>
+            </a:r>
+          </a:p>
+          <a:p>
+            <a:pPr>
+              <a:spcBef>
+                <a:spcPts val="300"/>
+              </a:spcBef>
+              <a:defRPr sz="1200">
+                <a:solidFill>
+                  <a:srgbClr val="232D37"/>
+                </a:solidFill>
+                <a:latin typeface="Aptos"/>
+              </a:defRPr>
+            </a:pPr>
+            <a:r>
+              <a:t>Legend includes a dashed “IRMAA brackets (shown on MAGI chart)” cue</a:t>
+            </a:r>
+          </a:p>
+          <a:p>
+            <a:pPr>
+              <a:spcBef>
+                <a:spcPts val="300"/>
+              </a:spcBef>
+              <a:defRPr sz="1200">
+                <a:solidFill>
+                  <a:srgbClr val="232D37"/>
+                </a:solidFill>
+                <a:latin typeface="Aptos"/>
+              </a:defRPr>
+            </a:pPr>
+            <a:r>
+              <a:t>Details retain AGI and expense-funding information</a:t>
             </a:r>
           </a:p>
         </p:txBody>
@@ -4946,8 +5010,8 @@
         </p:nvSpPr>
         <p:spPr>
           <a:xfrm>
-            <a:off x="502920" y="1188720"/>
-            <a:ext cx="82296" cy="1325880"/>
+            <a:off x="502920" y="1170432"/>
+            <a:ext cx="82296" cy="4526280"/>
           </a:xfrm>
           <a:prstGeom prst="rect">
             <a:avLst/>
@@ -4989,8 +5053,8 @@
         </p:nvSpPr>
         <p:spPr>
           <a:xfrm>
-            <a:off x="2907792" y="1188720"/>
-            <a:ext cx="2057400" cy="1325880"/>
+            <a:off x="4617720" y="1170432"/>
+            <a:ext cx="2880360" cy="4526280"/>
           </a:xfrm>
           <a:prstGeom prst="roundRect">
             <a:avLst/>
@@ -5023,7 +5087,7 @@
           <a:lstStyle/>
           <a:p>
             <a:pPr algn="ctr">
-              <a:defRPr sz="1600" b="1">
+              <a:defRPr sz="1700" b="1">
                 <a:solidFill>
                   <a:srgbClr val="232D37"/>
                 </a:solidFill>
@@ -5031,7 +5095,7 @@
               </a:defRPr>
             </a:pPr>
             <a:r>
-              <a:t>beforeprint</a:t>
+              <a:t>MAGI chart</a:t>
             </a:r>
           </a:p>
           <a:p>
@@ -5039,15 +5103,15 @@
               <a:spcBef>
                 <a:spcPts val="300"/>
               </a:spcBef>
-              <a:defRPr sz="1100">
-                <a:solidFill>
-                  <a:srgbClr val="232D37"/>
-                </a:solidFill>
-                <a:latin typeface="Aptos"/>
-              </a:defRPr>
-            </a:pPr>
-            <a:r>
-              <a:t>Open hidden sections/cards in DOM</a:t>
+              <a:defRPr sz="1200">
+                <a:solidFill>
+                  <a:srgbClr val="232D37"/>
+                </a:solidFill>
+                <a:latin typeface="Aptos"/>
+              </a:defRPr>
+            </a:pPr>
+            <a:r>
+              <a:t>One-third width; top-aligned and 1:1</a:t>
             </a:r>
           </a:p>
           <a:p>
@@ -5055,15 +5119,15 @@
               <a:spcBef>
                 <a:spcPts val="300"/>
               </a:spcBef>
-              <a:defRPr sz="1100">
-                <a:solidFill>
-                  <a:srgbClr val="232D37"/>
-                </a:solidFill>
-                <a:latin typeface="Aptos"/>
-              </a:defRPr>
-            </a:pPr>
-            <a:r>
-              <a:t>Add printing-all class</a:t>
+              <a:defRPr sz="1200">
+                <a:solidFill>
+                  <a:srgbClr val="232D37"/>
+                </a:solidFill>
+                <a:latin typeface="Aptos"/>
+              </a:defRPr>
+            </a:pPr>
+            <a:r>
+              <a:t>Same source colors and source order where applicable</a:t>
             </a:r>
           </a:p>
           <a:p>
@@ -5071,15 +5135,47 @@
               <a:spcBef>
                 <a:spcPts val="300"/>
               </a:spcBef>
-              <a:defRPr sz="1100">
-                <a:solidFill>
-                  <a:srgbClr val="232D37"/>
-                </a:solidFill>
-                <a:latin typeface="Aptos"/>
-              </a:defRPr>
-            </a:pPr>
-            <a:r>
-              <a:t>Do not change state</a:t>
+              <a:defRPr sz="1200">
+                <a:solidFill>
+                  <a:srgbClr val="232D37"/>
+                </a:solidFill>
+                <a:latin typeface="Aptos"/>
+              </a:defRPr>
+            </a:pPr>
+            <a:r>
+              <a:t>Excludes non-cash rental depreciation</a:t>
+            </a:r>
+          </a:p>
+          <a:p>
+            <a:pPr>
+              <a:spcBef>
+                <a:spcPts val="300"/>
+              </a:spcBef>
+              <a:defRPr sz="1200">
+                <a:solidFill>
+                  <a:srgbClr val="232D37"/>
+                </a:solidFill>
+                <a:latin typeface="Aptos"/>
+              </a:defRPr>
+            </a:pPr>
+            <a:r>
+              <a:t>Counts SS only at taxable portion</a:t>
+            </a:r>
+          </a:p>
+          <a:p>
+            <a:pPr>
+              <a:spcBef>
+                <a:spcPts val="300"/>
+              </a:spcBef>
+              <a:defRPr sz="1200">
+                <a:solidFill>
+                  <a:srgbClr val="232D37"/>
+                </a:solidFill>
+                <a:latin typeface="Aptos"/>
+              </a:defRPr>
+            </a:pPr>
+            <a:r>
+              <a:t>Stack totals exactly to row.magi</a:t>
             </a:r>
           </a:p>
         </p:txBody>
@@ -5092,8 +5188,8 @@
         </p:nvSpPr>
         <p:spPr>
           <a:xfrm>
-            <a:off x="2907792" y="1188720"/>
-            <a:ext cx="82296" cy="1325880"/>
+            <a:off x="4617720" y="1170432"/>
+            <a:ext cx="82296" cy="4526280"/>
           </a:xfrm>
           <a:prstGeom prst="rect">
             <a:avLst/>
@@ -5135,8 +5231,8 @@
         </p:nvSpPr>
         <p:spPr>
           <a:xfrm>
-            <a:off x="5312664" y="1188720"/>
-            <a:ext cx="2057400" cy="1325880"/>
+            <a:off x="7818120" y="1170432"/>
+            <a:ext cx="3703320" cy="4526280"/>
           </a:xfrm>
           <a:prstGeom prst="roundRect">
             <a:avLst/>
@@ -5169,7 +5265,7 @@
           <a:lstStyle/>
           <a:p>
             <a:pPr algn="ctr">
-              <a:defRPr sz="1600" b="1">
+              <a:defRPr sz="1700" b="1">
                 <a:solidFill>
                   <a:srgbClr val="232D37"/>
                 </a:solidFill>
@@ -5177,7 +5273,7 @@
               </a:defRPr>
             </a:pPr>
             <a:r>
-              <a:t>Chart cloning</a:t>
+              <a:t>IRMAA overlay</a:t>
             </a:r>
           </a:p>
           <a:p>
@@ -5185,15 +5281,15 @@
               <a:spcBef>
                 <a:spcPts val="300"/>
               </a:spcBef>
-              <a:defRPr sz="1100">
-                <a:solidFill>
-                  <a:srgbClr val="232D37"/>
-                </a:solidFill>
-                <a:latin typeface="Aptos"/>
-              </a:defRPr>
-            </a:pPr>
-            <a:r>
-              <a:t>Fresh, non-animated off-screen charts</a:t>
+              <a:defRPr sz="1200">
+                <a:solidFill>
+                  <a:srgbClr val="232D37"/>
+                </a:solidFill>
+                <a:latin typeface="Aptos"/>
+              </a:defRPr>
+            </a:pPr>
+            <a:r>
+              <a:t>MFJ tiers until filing switch; Single tiers afterward</a:t>
             </a:r>
           </a:p>
           <a:p>
@@ -5201,15 +5297,47 @@
               <a:spcBef>
                 <a:spcPts val="300"/>
               </a:spcBef>
-              <a:defRPr sz="1100">
-                <a:solidFill>
-                  <a:srgbClr val="232D37"/>
-                </a:solidFill>
-                <a:latin typeface="Aptos"/>
-              </a:defRPr>
-            </a:pPr>
-            <a:r>
-              <a:t>Copy pixels to plain canvases</a:t>
+              <a:defRPr sz="1200">
+                <a:solidFill>
+                  <a:srgbClr val="232D37"/>
+                </a:solidFill>
+                <a:latin typeface="Aptos"/>
+              </a:defRPr>
+            </a:pPr>
+            <a:r>
+              <a:t>Labels: threshold plus Part B premium increase over standard</a:t>
+            </a:r>
+          </a:p>
+          <a:p>
+            <a:pPr>
+              <a:spcBef>
+                <a:spcPts val="300"/>
+              </a:spcBef>
+              <a:defRPr sz="1200">
+                <a:solidFill>
+                  <a:srgbClr val="232D37"/>
+                </a:solidFill>
+                <a:latin typeface="Aptos"/>
+              </a:defRPr>
+            </a:pPr>
+            <a:r>
+              <a:t>Example: $218k +40%</a:t>
+            </a:r>
+          </a:p>
+          <a:p>
+            <a:pPr>
+              <a:spcBef>
+                <a:spcPts val="300"/>
+              </a:spcBef>
+              <a:defRPr sz="1200">
+                <a:solidFill>
+                  <a:srgbClr val="232D37"/>
+                </a:solidFill>
+                <a:latin typeface="Aptos"/>
+              </a:defRPr>
+            </a:pPr>
+            <a:r>
+              <a:t>External popup: MAGI and annual IRMAA surcharge only</a:t>
             </a:r>
           </a:p>
         </p:txBody>
@@ -5222,8 +5350,8 @@
         </p:nvSpPr>
         <p:spPr>
           <a:xfrm>
-            <a:off x="5312664" y="1188720"/>
-            <a:ext cx="82296" cy="1325880"/>
+            <a:off x="7818120" y="1170432"/>
+            <a:ext cx="82296" cy="4526280"/>
           </a:xfrm>
           <a:prstGeom prst="rect">
             <a:avLst/>
@@ -5257,281 +5385,21 @@
           </a:p>
         </p:txBody>
       </p:sp>
-      <p:sp>
-        <p:nvSpPr>
-          <p:cNvPr id="10" name="Rounded Rectangle 9"/>
-          <p:cNvSpPr/>
-          <p:nvPr/>
-        </p:nvSpPr>
-        <p:spPr>
-          <a:xfrm>
-            <a:off x="7717536" y="1188720"/>
-            <a:ext cx="2057400" cy="1325880"/>
-          </a:xfrm>
-          <a:prstGeom prst="roundRect">
-            <a:avLst/>
-          </a:prstGeom>
-          <a:solidFill>
-            <a:srgbClr val="F7EFFF"/>
-          </a:solidFill>
-          <a:ln w="13970">
-            <a:solidFill>
-              <a:srgbClr val="7852B0"/>
-            </a:solidFill>
-          </a:ln>
-        </p:spPr>
-        <p:style>
-          <a:lnRef idx="1">
-            <a:schemeClr val="accent1"/>
-          </a:lnRef>
-          <a:fillRef idx="3">
-            <a:schemeClr val="accent1"/>
-          </a:fillRef>
-          <a:effectRef idx="2">
-            <a:schemeClr val="accent1"/>
-          </a:effectRef>
-          <a:fontRef idx="minor">
-            <a:schemeClr val="lt1"/>
-          </a:fontRef>
-        </p:style>
-        <p:txBody>
-          <a:bodyPr rtlCol="0" anchor="ctr" lIns="182880" rIns="100584" tIns="91440"/>
-          <a:lstStyle/>
-          <a:p>
-            <a:pPr algn="ctr">
-              <a:defRPr sz="1600" b="1">
-                <a:solidFill>
-                  <a:srgbClr val="232D37"/>
-                </a:solidFill>
-                <a:latin typeface="Aptos Display"/>
-              </a:defRPr>
-            </a:pPr>
-            <a:r>
-              <a:t>Print layout</a:t>
-            </a:r>
-          </a:p>
-          <a:p>
-            <a:pPr>
-              <a:spcBef>
-                <a:spcPts val="300"/>
-              </a:spcBef>
-              <a:defRPr sz="1100">
-                <a:solidFill>
-                  <a:srgbClr val="232D37"/>
-                </a:solidFill>
-                <a:latin typeface="Aptos"/>
-              </a:defRPr>
-            </a:pPr>
-            <a:r>
-              <a:t>Single column</a:t>
-            </a:r>
-          </a:p>
-          <a:p>
-            <a:pPr>
-              <a:spcBef>
-                <a:spcPts val="300"/>
-              </a:spcBef>
-              <a:defRPr sz="1100">
-                <a:solidFill>
-                  <a:srgbClr val="232D37"/>
-                </a:solidFill>
-                <a:latin typeface="Aptos"/>
-              </a:defRPr>
-            </a:pPr>
-            <a:r>
-              <a:t>480px charts</a:t>
-            </a:r>
-          </a:p>
-          <a:p>
-            <a:pPr>
-              <a:spcBef>
-                <a:spcPts val="300"/>
-              </a:spcBef>
-              <a:defRPr sz="1100">
-                <a:solidFill>
-                  <a:srgbClr val="232D37"/>
-                </a:solidFill>
-                <a:latin typeface="Aptos"/>
-              </a:defRPr>
-            </a:pPr>
-            <a:r>
-              <a:t>No buttons or Hide controls</a:t>
-            </a:r>
-          </a:p>
-        </p:txBody>
-      </p:sp>
-      <p:sp>
-        <p:nvSpPr>
-          <p:cNvPr id="11" name="Rectangle 10"/>
-          <p:cNvSpPr/>
-          <p:nvPr/>
-        </p:nvSpPr>
-        <p:spPr>
-          <a:xfrm>
-            <a:off x="7717536" y="1188720"/>
-            <a:ext cx="82296" cy="1325880"/>
-          </a:xfrm>
-          <a:prstGeom prst="rect">
-            <a:avLst/>
-          </a:prstGeom>
-          <a:solidFill>
-            <a:srgbClr val="7852B0"/>
-          </a:solidFill>
-          <a:ln>
-            <a:noFill/>
-          </a:ln>
-        </p:spPr>
-        <p:style>
-          <a:lnRef idx="1">
-            <a:schemeClr val="accent1"/>
-          </a:lnRef>
-          <a:fillRef idx="3">
-            <a:schemeClr val="accent1"/>
-          </a:fillRef>
-          <a:effectRef idx="2">
-            <a:schemeClr val="accent1"/>
-          </a:effectRef>
-          <a:fontRef idx="minor">
-            <a:schemeClr val="lt1"/>
-          </a:fontRef>
-        </p:style>
-        <p:txBody>
-          <a:bodyPr rtlCol="0" anchor="ctr"/>
-          <a:lstStyle/>
-          <a:p>
-            <a:pPr algn="ctr"/>
-          </a:p>
-        </p:txBody>
-      </p:sp>
-      <p:sp>
-        <p:nvSpPr>
-          <p:cNvPr id="12" name="Rounded Rectangle 11"/>
-          <p:cNvSpPr/>
-          <p:nvPr/>
-        </p:nvSpPr>
-        <p:spPr>
-          <a:xfrm>
-            <a:off x="10122408" y="1188720"/>
-            <a:ext cx="1554480" cy="1325880"/>
-          </a:xfrm>
-          <a:prstGeom prst="roundRect">
-            <a:avLst/>
-          </a:prstGeom>
-          <a:solidFill>
-            <a:srgbClr val="F8FAFC"/>
-          </a:solidFill>
-          <a:ln w="13970">
-            <a:solidFill>
-              <a:srgbClr val="0F2647"/>
-            </a:solidFill>
-          </a:ln>
-        </p:spPr>
-        <p:style>
-          <a:lnRef idx="1">
-            <a:schemeClr val="accent1"/>
-          </a:lnRef>
-          <a:fillRef idx="3">
-            <a:schemeClr val="accent1"/>
-          </a:fillRef>
-          <a:effectRef idx="2">
-            <a:schemeClr val="accent1"/>
-          </a:effectRef>
-          <a:fontRef idx="minor">
-            <a:schemeClr val="lt1"/>
-          </a:fontRef>
-        </p:style>
-        <p:txBody>
-          <a:bodyPr rtlCol="0" anchor="ctr" lIns="182880" rIns="100584" tIns="91440"/>
-          <a:lstStyle/>
-          <a:p>
-            <a:pPr algn="ctr">
-              <a:defRPr sz="1500" b="1">
-                <a:solidFill>
-                  <a:srgbClr val="232D37"/>
-                </a:solidFill>
-                <a:latin typeface="Aptos Display"/>
-              </a:defRPr>
-            </a:pPr>
-            <a:r>
-              <a:t>afterprint</a:t>
-            </a:r>
-          </a:p>
-          <a:p>
-            <a:pPr>
-              <a:spcBef>
-                <a:spcPts val="300"/>
-              </a:spcBef>
-              <a:defRPr sz="1000">
-                <a:solidFill>
-                  <a:srgbClr val="232D37"/>
-                </a:solidFill>
-                <a:latin typeface="Aptos"/>
-              </a:defRPr>
-            </a:pPr>
-            <a:r>
-              <a:t>Restore live canvas/UI</a:t>
-            </a:r>
-          </a:p>
-        </p:txBody>
-      </p:sp>
-      <p:sp>
-        <p:nvSpPr>
-          <p:cNvPr id="13" name="Rectangle 12"/>
-          <p:cNvSpPr/>
-          <p:nvPr/>
-        </p:nvSpPr>
-        <p:spPr>
-          <a:xfrm>
-            <a:off x="10122408" y="1188720"/>
-            <a:ext cx="82296" cy="1325880"/>
-          </a:xfrm>
-          <a:prstGeom prst="rect">
-            <a:avLst/>
-          </a:prstGeom>
-          <a:solidFill>
-            <a:srgbClr val="0F2647"/>
-          </a:solidFill>
-          <a:ln>
-            <a:noFill/>
-          </a:ln>
-        </p:spPr>
-        <p:style>
-          <a:lnRef idx="1">
-            <a:schemeClr val="accent1"/>
-          </a:lnRef>
-          <a:fillRef idx="3">
-            <a:schemeClr val="accent1"/>
-          </a:fillRef>
-          <a:effectRef idx="2">
-            <a:schemeClr val="accent1"/>
-          </a:effectRef>
-          <a:fontRef idx="minor">
-            <a:schemeClr val="lt1"/>
-          </a:fontRef>
-        </p:style>
-        <p:txBody>
-          <a:bodyPr rtlCol="0" anchor="ctr"/>
-          <a:lstStyle/>
-          <a:p>
-            <a:pPr algn="ctr"/>
-          </a:p>
-        </p:txBody>
-      </p:sp>
       <p:cxnSp>
         <p:nvCxnSpPr>
-          <p:cNvPr id="14" name="Connector 13"/>
+          <p:cNvPr id="10" name="Connector 9"/>
           <p:cNvCxnSpPr/>
           <p:nvPr/>
         </p:nvCxnSpPr>
         <p:spPr>
           <a:xfrm>
-            <a:off x="2606040" y="1856231"/>
-            <a:ext cx="219456" cy="0"/>
+            <a:off x="4370832" y="3383280"/>
+            <a:ext cx="182880" cy="0"/>
           </a:xfrm>
           <a:prstGeom prst="line">
             <a:avLst/>
           </a:prstGeom>
-          <a:ln w="22860">
+          <a:ln w="25400">
             <a:solidFill>
               <a:srgbClr val="266EB2"/>
             </a:solidFill>
@@ -5554,19 +5422,19 @@
       </p:cxnSp>
       <p:cxnSp>
         <p:nvCxnSpPr>
-          <p:cNvPr id="15" name="Connector 14"/>
+          <p:cNvPr id="11" name="Connector 10"/>
           <p:cNvCxnSpPr/>
           <p:nvPr/>
         </p:nvCxnSpPr>
         <p:spPr>
           <a:xfrm>
-            <a:off x="5010912" y="1856231"/>
-            <a:ext cx="219456" cy="0"/>
+            <a:off x="7562088" y="3383280"/>
+            <a:ext cx="192024" cy="0"/>
           </a:xfrm>
           <a:prstGeom prst="line">
             <a:avLst/>
           </a:prstGeom>
-          <a:ln w="22860">
+          <a:ln w="25400">
             <a:solidFill>
               <a:srgbClr val="429761"/>
             </a:solidFill>
@@ -5587,307 +5455,9 @@
           </a:fontRef>
         </p:style>
       </p:cxnSp>
-      <p:cxnSp>
-        <p:nvCxnSpPr>
-          <p:cNvPr id="16" name="Connector 15"/>
-          <p:cNvCxnSpPr/>
-          <p:nvPr/>
-        </p:nvCxnSpPr>
-        <p:spPr>
-          <a:xfrm>
-            <a:off x="7415783" y="1856231"/>
-            <a:ext cx="219457" cy="0"/>
-          </a:xfrm>
-          <a:prstGeom prst="line">
-            <a:avLst/>
-          </a:prstGeom>
-          <a:ln w="22860">
-            <a:solidFill>
-              <a:srgbClr val="E5892A"/>
-            </a:solidFill>
-          </a:ln>
-        </p:spPr>
-        <p:style>
-          <a:lnRef idx="2">
-            <a:schemeClr val="accent1"/>
-          </a:lnRef>
-          <a:fillRef idx="0">
-            <a:schemeClr val="accent1"/>
-          </a:fillRef>
-          <a:effectRef idx="1">
-            <a:schemeClr val="accent1"/>
-          </a:effectRef>
-          <a:fontRef idx="minor">
-            <a:schemeClr val="tx1"/>
-          </a:fontRef>
-        </p:style>
-      </p:cxnSp>
-      <p:cxnSp>
-        <p:nvCxnSpPr>
-          <p:cNvPr id="17" name="Connector 16"/>
-          <p:cNvCxnSpPr/>
-          <p:nvPr/>
-        </p:nvCxnSpPr>
-        <p:spPr>
-          <a:xfrm>
-            <a:off x="9820656" y="1856231"/>
-            <a:ext cx="219456" cy="0"/>
-          </a:xfrm>
-          <a:prstGeom prst="line">
-            <a:avLst/>
-          </a:prstGeom>
-          <a:ln w="22860">
-            <a:solidFill>
-              <a:srgbClr val="7852B0"/>
-            </a:solidFill>
-          </a:ln>
-        </p:spPr>
-        <p:style>
-          <a:lnRef idx="2">
-            <a:schemeClr val="accent1"/>
-          </a:lnRef>
-          <a:fillRef idx="0">
-            <a:schemeClr val="accent1"/>
-          </a:fillRef>
-          <a:effectRef idx="1">
-            <a:schemeClr val="accent1"/>
-          </a:effectRef>
-          <a:fontRef idx="minor">
-            <a:schemeClr val="tx1"/>
-          </a:fontRef>
-        </p:style>
-      </p:cxnSp>
-      <p:sp>
-        <p:nvSpPr>
-          <p:cNvPr id="18" name="Rounded Rectangle 17"/>
-          <p:cNvSpPr/>
-          <p:nvPr/>
-        </p:nvSpPr>
-        <p:spPr>
-          <a:xfrm>
-            <a:off x="1051560" y="3566160"/>
-            <a:ext cx="4709160" cy="1325880"/>
-          </a:xfrm>
-          <a:prstGeom prst="roundRect">
-            <a:avLst/>
-          </a:prstGeom>
-          <a:solidFill>
-            <a:srgbClr val="F8FAFC"/>
-          </a:solidFill>
-          <a:ln w="13970">
-            <a:solidFill>
-              <a:srgbClr val="168F8D"/>
-            </a:solidFill>
-          </a:ln>
-        </p:spPr>
-        <p:style>
-          <a:lnRef idx="1">
-            <a:schemeClr val="accent1"/>
-          </a:lnRef>
-          <a:fillRef idx="3">
-            <a:schemeClr val="accent1"/>
-          </a:fillRef>
-          <a:effectRef idx="2">
-            <a:schemeClr val="accent1"/>
-          </a:effectRef>
-          <a:fontRef idx="minor">
-            <a:schemeClr val="lt1"/>
-          </a:fontRef>
-        </p:style>
-        <p:txBody>
-          <a:bodyPr rtlCol="0" anchor="ctr" lIns="182880" rIns="100584" tIns="91440"/>
-          <a:lstStyle/>
-          <a:p>
-            <a:pPr algn="ctr">
-              <a:defRPr sz="1700" b="1">
-                <a:solidFill>
-                  <a:srgbClr val="232D37"/>
-                </a:solidFill>
-                <a:latin typeface="Aptos Display"/>
-              </a:defRPr>
-            </a:pPr>
-            <a:r>
-              <a:t>Why copies are necessary</a:t>
-            </a:r>
-          </a:p>
-          <a:p>
-            <a:pPr>
-              <a:spcBef>
-                <a:spcPts val="300"/>
-              </a:spcBef>
-              <a:defRPr sz="1200">
-                <a:solidFill>
-                  <a:srgbClr val="232D37"/>
-                </a:solidFill>
-                <a:latin typeface="Aptos"/>
-              </a:defRPr>
-            </a:pPr>
-            <a:r>
-              <a:t>Live Chart.js canvases are never resized or redrawn for printing. This avoids timing, animation, or resize races that could produce blank charts.</a:t>
-            </a:r>
-          </a:p>
-        </p:txBody>
-      </p:sp>
-      <p:sp>
-        <p:nvSpPr>
-          <p:cNvPr id="19" name="Rectangle 18"/>
-          <p:cNvSpPr/>
-          <p:nvPr/>
-        </p:nvSpPr>
-        <p:spPr>
-          <a:xfrm>
-            <a:off x="1051560" y="3566160"/>
-            <a:ext cx="82296" cy="1325880"/>
-          </a:xfrm>
-          <a:prstGeom prst="rect">
-            <a:avLst/>
-          </a:prstGeom>
-          <a:solidFill>
-            <a:srgbClr val="168F8D"/>
-          </a:solidFill>
-          <a:ln>
-            <a:noFill/>
-          </a:ln>
-        </p:spPr>
-        <p:style>
-          <a:lnRef idx="1">
-            <a:schemeClr val="accent1"/>
-          </a:lnRef>
-          <a:fillRef idx="3">
-            <a:schemeClr val="accent1"/>
-          </a:fillRef>
-          <a:effectRef idx="2">
-            <a:schemeClr val="accent1"/>
-          </a:effectRef>
-          <a:fontRef idx="minor">
-            <a:schemeClr val="lt1"/>
-          </a:fontRef>
-        </p:style>
-        <p:txBody>
-          <a:bodyPr rtlCol="0" anchor="ctr"/>
-          <a:lstStyle/>
-          <a:p>
-            <a:pPr algn="ctr"/>
-          </a:p>
-        </p:txBody>
-      </p:sp>
-      <p:sp>
-        <p:nvSpPr>
-          <p:cNvPr id="20" name="Rounded Rectangle 19"/>
-          <p:cNvSpPr/>
-          <p:nvPr/>
-        </p:nvSpPr>
-        <p:spPr>
-          <a:xfrm>
-            <a:off x="6382512" y="3566160"/>
-            <a:ext cx="4709160" cy="1325880"/>
-          </a:xfrm>
-          <a:prstGeom prst="roundRect">
-            <a:avLst/>
-          </a:prstGeom>
-          <a:solidFill>
-            <a:srgbClr val="F8FAFC"/>
-          </a:solidFill>
-          <a:ln w="13970">
-            <a:solidFill>
-              <a:srgbClr val="0F2647"/>
-            </a:solidFill>
-          </a:ln>
-        </p:spPr>
-        <p:style>
-          <a:lnRef idx="1">
-            <a:schemeClr val="accent1"/>
-          </a:lnRef>
-          <a:fillRef idx="3">
-            <a:schemeClr val="accent1"/>
-          </a:fillRef>
-          <a:effectRef idx="2">
-            <a:schemeClr val="accent1"/>
-          </a:effectRef>
-          <a:fontRef idx="minor">
-            <a:schemeClr val="lt1"/>
-          </a:fontRef>
-        </p:style>
-        <p:txBody>
-          <a:bodyPr rtlCol="0" anchor="ctr" lIns="182880" rIns="100584" tIns="91440"/>
-          <a:lstStyle/>
-          <a:p>
-            <a:pPr algn="ctr">
-              <a:defRPr sz="1700" b="1">
-                <a:solidFill>
-                  <a:srgbClr val="232D37"/>
-                </a:solidFill>
-                <a:latin typeface="Aptos Display"/>
-              </a:defRPr>
-            </a:pPr>
-            <a:r>
-              <a:t>State guarantee</a:t>
-            </a:r>
-          </a:p>
-          <a:p>
-            <a:pPr>
-              <a:spcBef>
-                <a:spcPts val="300"/>
-              </a:spcBef>
-              <a:defRPr sz="1200">
-                <a:solidFill>
-                  <a:srgbClr val="232D37"/>
-                </a:solidFill>
-                <a:latin typeface="Aptos"/>
-              </a:defRPr>
-            </a:pPr>
-            <a:r>
-              <a:t>Printing behaves as if all Hides were unchecked, but state is never touched. Saved plans, autosave, and interactive display return unchanged afterward.</a:t>
-            </a:r>
-          </a:p>
-        </p:txBody>
-      </p:sp>
-      <p:sp>
-        <p:nvSpPr>
-          <p:cNvPr id="21" name="Rectangle 20"/>
-          <p:cNvSpPr/>
-          <p:nvPr/>
-        </p:nvSpPr>
-        <p:spPr>
-          <a:xfrm>
-            <a:off x="6382512" y="3566160"/>
-            <a:ext cx="82296" cy="1325880"/>
-          </a:xfrm>
-          <a:prstGeom prst="rect">
-            <a:avLst/>
-          </a:prstGeom>
-          <a:solidFill>
-            <a:srgbClr val="0F2647"/>
-          </a:solidFill>
-          <a:ln>
-            <a:noFill/>
-          </a:ln>
-        </p:spPr>
-        <p:style>
-          <a:lnRef idx="1">
-            <a:schemeClr val="accent1"/>
-          </a:lnRef>
-          <a:fillRef idx="3">
-            <a:schemeClr val="accent1"/>
-          </a:fillRef>
-          <a:effectRef idx="2">
-            <a:schemeClr val="accent1"/>
-          </a:effectRef>
-          <a:fontRef idx="minor">
-            <a:schemeClr val="lt1"/>
-          </a:fontRef>
-        </p:style>
-        <p:txBody>
-          <a:bodyPr rtlCol="0" anchor="ctr"/>
-          <a:lstStyle/>
-          <a:p>
-            <a:pPr algn="ctr"/>
-          </a:p>
-        </p:txBody>
-      </p:sp>
-      <p:sp>
-        <p:nvSpPr>
-          <p:cNvPr id="22" name="Rectangle 21"/>
+      <p:sp>
+        <p:nvSpPr>
+          <p:cNvPr id="12" name="Rectangle 11"/>
           <p:cNvSpPr/>
           <p:nvPr/>
         </p:nvSpPr>
@@ -5930,7 +5500,7 @@
       </p:sp>
       <p:sp>
         <p:nvSpPr>
-          <p:cNvPr id="23" name="TextBox 22"/>
+          <p:cNvPr id="13" name="TextBox 12"/>
           <p:cNvSpPr txBox="1"/>
           <p:nvPr/>
         </p:nvSpPr>
@@ -5959,7 +5529,7 @@
               </a:defRPr>
             </a:pPr>
             <a:r>
-              <a:t>Retirement Income Planner • Architecture overview • Print, tax-detail, and customizable income-layout update</a:t>
+              <a:t>Retirement Income Planner • Architecture overview • MAGI, IRMAA-as-tax, and enhanced companion-chart update</a:t>
             </a:r>
           </a:p>
         </p:txBody>
@@ -6021,7 +5591,7 @@
               </a:defRPr>
             </a:pPr>
             <a:r>
-              <a:t>Tax section: one overview plus two diagnostic charts</a:t>
+              <a:t>MAGI composition and IRMAA timing</a:t>
             </a:r>
           </a:p>
         </p:txBody>
@@ -6057,7 +5627,7 @@
               </a:defRPr>
             </a:pPr>
             <a:r>
-              <a:t>The tax display expands from one stacked chart into an overview-and-detail layout without duplicating tax calculations.</a:t>
+              <a:t>The companion view is display-driven, but it exposes the relationships already present in the annual projection contract.</a:t>
             </a:r>
           </a:p>
         </p:txBody>
@@ -6070,8 +5640,8 @@
         </p:nvSpPr>
         <p:spPr>
           <a:xfrm>
-            <a:off x="502920" y="1170432"/>
-            <a:ext cx="3977639" cy="4526280"/>
+            <a:off x="502920" y="1234440"/>
+            <a:ext cx="2148840" cy="1325880"/>
           </a:xfrm>
           <a:prstGeom prst="roundRect">
             <a:avLst/>
@@ -6104,7 +5674,7 @@
           <a:lstStyle/>
           <a:p>
             <a:pPr algn="ctr">
-              <a:defRPr sz="1700" b="1">
+              <a:defRPr sz="1600" b="1">
                 <a:solidFill>
                   <a:srgbClr val="232D37"/>
                 </a:solidFill>
@@ -6112,7 +5682,7 @@
               </a:defRPr>
             </a:pPr>
             <a:r>
-              <a:t>Primary tax chart</a:t>
+              <a:t>Income sources</a:t>
             </a:r>
           </a:p>
           <a:p>
@@ -6120,15 +5690,15 @@
               <a:spcBef>
                 <a:spcPts val="300"/>
               </a:spcBef>
-              <a:defRPr sz="1200">
-                <a:solidFill>
-                  <a:srgbClr val="232D37"/>
-                </a:solidFill>
-                <a:latin typeface="Aptos"/>
-              </a:defRPr>
-            </a:pPr>
-            <a:r>
-              <a:t>Two-thirds width</a:t>
+              <a:defRPr sz="1100">
+                <a:solidFill>
+                  <a:srgbClr val="232D37"/>
+                </a:solidFill>
+                <a:latin typeface="Aptos"/>
+              </a:defRPr>
+            </a:pPr>
+            <a:r>
+              <a:t>Taxable income components</a:t>
             </a:r>
           </a:p>
           <a:p>
@@ -6136,15 +5706,15 @@
               <a:spcBef>
                 <a:spcPts val="300"/>
               </a:spcBef>
-              <a:defRPr sz="1200">
-                <a:solidFill>
-                  <a:srgbClr val="232D37"/>
-                </a:solidFill>
-                <a:latin typeface="Aptos"/>
-              </a:defRPr>
-            </a:pPr>
-            <a:r>
-              <a:t>Stack: ordinary tax, QDIV tiers, LTCG tiers, NIIT</a:t>
+              <a:defRPr sz="1100">
+                <a:solidFill>
+                  <a:srgbClr val="232D37"/>
+                </a:solidFill>
+                <a:latin typeface="Aptos"/>
+              </a:defRPr>
+            </a:pPr>
+            <a:r>
+              <a:t>Qualified income</a:t>
             </a:r>
           </a:p>
           <a:p>
@@ -6152,15 +5722,15 @@
               <a:spcBef>
                 <a:spcPts val="300"/>
               </a:spcBef>
-              <a:defRPr sz="1200">
-                <a:solidFill>
-                  <a:srgbClr val="232D37"/>
-                </a:solidFill>
-                <a:latin typeface="Aptos"/>
-              </a:defRPr>
-            </a:pPr>
-            <a:r>
-              <a:t>Effective and marginal-rate overlays</a:t>
+              <a:defRPr sz="1100">
+                <a:solidFill>
+                  <a:srgbClr val="232D37"/>
+                </a:solidFill>
+                <a:latin typeface="Aptos"/>
+              </a:defRPr>
+            </a:pPr>
+            <a:r>
+              <a:t>Realized gains</a:t>
             </a:r>
           </a:p>
           <a:p>
@@ -6168,31 +5738,15 @@
               <a:spcBef>
                 <a:spcPts val="300"/>
               </a:spcBef>
-              <a:defRPr sz="1200">
-                <a:solidFill>
-                  <a:srgbClr val="232D37"/>
-                </a:solidFill>
-                <a:latin typeface="Aptos"/>
-              </a:defRPr>
-            </a:pPr>
-            <a:r>
-              <a:t>Full legend, note, and shared tooltip</a:t>
-            </a:r>
-          </a:p>
-          <a:p>
-            <a:pPr>
-              <a:spcBef>
-                <a:spcPts val="300"/>
-              </a:spcBef>
-              <a:defRPr sz="1200">
-                <a:solidFill>
-                  <a:srgbClr val="232D37"/>
-                </a:solidFill>
-                <a:latin typeface="Aptos"/>
-              </a:defRPr>
-            </a:pPr>
-            <a:r>
-              <a:t>Owns locked Y scale key: tax</a:t>
+              <a:defRPr sz="1100">
+                <a:solidFill>
+                  <a:srgbClr val="232D37"/>
+                </a:solidFill>
+                <a:latin typeface="Aptos"/>
+              </a:defRPr>
+            </a:pPr>
+            <a:r>
+              <a:t>Taxable SS share</a:t>
             </a:r>
           </a:p>
         </p:txBody>
@@ -6205,8 +5759,8 @@
         </p:nvSpPr>
         <p:spPr>
           <a:xfrm>
-            <a:off x="502920" y="1170432"/>
-            <a:ext cx="82296" cy="4526280"/>
+            <a:off x="502920" y="1234440"/>
+            <a:ext cx="82296" cy="1325880"/>
           </a:xfrm>
           <a:prstGeom prst="rect">
             <a:avLst/>
@@ -6248,8 +5802,8 @@
         </p:nvSpPr>
         <p:spPr>
           <a:xfrm>
-            <a:off x="4892040" y="1170432"/>
-            <a:ext cx="2880360" cy="1920240"/>
+            <a:off x="3017520" y="1234440"/>
+            <a:ext cx="2148840" cy="1325880"/>
           </a:xfrm>
           <a:prstGeom prst="roundRect">
             <a:avLst/>
@@ -6282,7 +5836,7 @@
           <a:lstStyle/>
           <a:p>
             <a:pPr algn="ctr">
-              <a:defRPr sz="1700" b="1">
+              <a:defRPr sz="1600" b="1">
                 <a:solidFill>
                   <a:srgbClr val="232D37"/>
                 </a:solidFill>
@@ -6290,7 +5844,7 @@
               </a:defRPr>
             </a:pPr>
             <a:r>
-              <a:t>Ordinary-tax companion</a:t>
+              <a:t>MAGI row field</a:t>
             </a:r>
           </a:p>
           <a:p>
@@ -6298,15 +5852,15 @@
               <a:spcBef>
                 <a:spcPts val="300"/>
               </a:spcBef>
-              <a:defRPr sz="1200">
-                <a:solidFill>
-                  <a:srgbClr val="232D37"/>
-                </a:solidFill>
-                <a:latin typeface="Aptos"/>
-              </a:defRPr>
-            </a:pPr>
-            <a:r>
-              <a:t>Upper-right, half-size</a:t>
+              <a:defRPr sz="1100">
+                <a:solidFill>
+                  <a:srgbClr val="232D37"/>
+                </a:solidFill>
+                <a:latin typeface="Aptos"/>
+              </a:defRPr>
+            </a:pPr>
+            <a:r>
+              <a:t>magi = AGI + tax-exempt income</a:t>
             </a:r>
           </a:p>
           <a:p>
@@ -6314,47 +5868,15 @@
               <a:spcBef>
                 <a:spcPts val="300"/>
               </a:spcBef>
-              <a:defRPr sz="1200">
-                <a:solidFill>
-                  <a:srgbClr val="232D37"/>
-                </a:solidFill>
-                <a:latin typeface="Aptos"/>
-              </a:defRPr>
-            </a:pPr>
-            <a:r>
-              <a:t>Ordinary-income tax only</a:t>
-            </a:r>
-          </a:p>
-          <a:p>
-            <a:pPr>
-              <a:spcBef>
-                <a:spcPts val="300"/>
-              </a:spcBef>
-              <a:defRPr sz="1200">
-                <a:solidFill>
-                  <a:srgbClr val="232D37"/>
-                </a:solidFill>
-                <a:latin typeface="Aptos"/>
-              </a:defRPr>
-            </a:pPr>
-            <a:r>
-              <a:t>Dashed tax-bracket ceiling overlay</a:t>
-            </a:r>
-          </a:p>
-          <a:p>
-            <a:pPr>
-              <a:spcBef>
-                <a:spcPts val="300"/>
-              </a:spcBef>
-              <a:defRPr sz="1200">
-                <a:solidFill>
-                  <a:srgbClr val="232D37"/>
-                </a:solidFill>
-                <a:latin typeface="Aptos"/>
-              </a:defRPr>
-            </a:pPr>
-            <a:r>
-              <a:t>Labels show rate above each bracket</a:t>
+              <a:defRPr sz="1100">
+                <a:solidFill>
+                  <a:srgbClr val="232D37"/>
+                </a:solidFill>
+                <a:latin typeface="Aptos"/>
+              </a:defRPr>
+            </a:pPr>
+            <a:r>
+              <a:t>Tax-exempt income stays out of AGI but enters MAGI</a:t>
             </a:r>
           </a:p>
         </p:txBody>
@@ -6367,8 +5889,8 @@
         </p:nvSpPr>
         <p:spPr>
           <a:xfrm>
-            <a:off x="4892040" y="1170432"/>
-            <a:ext cx="82296" cy="1920240"/>
+            <a:off x="3017520" y="1234440"/>
+            <a:ext cx="82296" cy="1325880"/>
           </a:xfrm>
           <a:prstGeom prst="rect">
             <a:avLst/>
@@ -6410,8 +5932,138 @@
         </p:nvSpPr>
         <p:spPr>
           <a:xfrm>
-            <a:off x="4892040" y="3749039"/>
-            <a:ext cx="2880360" cy="1920240"/>
+            <a:off x="5532120" y="1234440"/>
+            <a:ext cx="2148840" cy="1325880"/>
+          </a:xfrm>
+          <a:prstGeom prst="roundRect">
+            <a:avLst/>
+          </a:prstGeom>
+          <a:solidFill>
+            <a:srgbClr val="FFF6E8"/>
+          </a:solidFill>
+          <a:ln w="13970">
+            <a:solidFill>
+              <a:srgbClr val="E5892A"/>
+            </a:solidFill>
+          </a:ln>
+        </p:spPr>
+        <p:style>
+          <a:lnRef idx="1">
+            <a:schemeClr val="accent1"/>
+          </a:lnRef>
+          <a:fillRef idx="3">
+            <a:schemeClr val="accent1"/>
+          </a:fillRef>
+          <a:effectRef idx="2">
+            <a:schemeClr val="accent1"/>
+          </a:effectRef>
+          <a:fontRef idx="minor">
+            <a:schemeClr val="lt1"/>
+          </a:fontRef>
+        </p:style>
+        <p:txBody>
+          <a:bodyPr rtlCol="0" anchor="ctr" lIns="182880" rIns="100584" tIns="91440"/>
+          <a:lstStyle/>
+          <a:p>
+            <a:pPr algn="ctr">
+              <a:defRPr sz="1600" b="1">
+                <a:solidFill>
+                  <a:srgbClr val="232D37"/>
+                </a:solidFill>
+                <a:latin typeface="Aptos Display"/>
+              </a:defRPr>
+            </a:pPr>
+            <a:r>
+              <a:t>Two-year look-back</a:t>
+            </a:r>
+          </a:p>
+          <a:p>
+            <a:pPr>
+              <a:spcBef>
+                <a:spcPts val="300"/>
+              </a:spcBef>
+              <a:defRPr sz="1100">
+                <a:solidFill>
+                  <a:srgbClr val="232D37"/>
+                </a:solidFill>
+                <a:latin typeface="Aptos"/>
+              </a:defRPr>
+            </a:pPr>
+            <a:r>
+              <a:t>IRMAA uses MAGI from two years earlier</a:t>
+            </a:r>
+          </a:p>
+          <a:p>
+            <a:pPr>
+              <a:spcBef>
+                <a:spcPts val="300"/>
+              </a:spcBef>
+              <a:defRPr sz="1100">
+                <a:solidFill>
+                  <a:srgbClr val="232D37"/>
+                </a:solidFill>
+                <a:latin typeface="Aptos"/>
+              </a:defRPr>
+            </a:pPr>
+            <a:r>
+              <a:t>Years 0–1 have no modeled surcharge</a:t>
+            </a:r>
+          </a:p>
+        </p:txBody>
+      </p:sp>
+      <p:sp>
+        <p:nvSpPr>
+          <p:cNvPr id="9" name="Rectangle 8"/>
+          <p:cNvSpPr/>
+          <p:nvPr/>
+        </p:nvSpPr>
+        <p:spPr>
+          <a:xfrm>
+            <a:off x="5532120" y="1234440"/>
+            <a:ext cx="82296" cy="1325880"/>
+          </a:xfrm>
+          <a:prstGeom prst="rect">
+            <a:avLst/>
+          </a:prstGeom>
+          <a:solidFill>
+            <a:srgbClr val="E5892A"/>
+          </a:solidFill>
+          <a:ln>
+            <a:noFill/>
+          </a:ln>
+        </p:spPr>
+        <p:style>
+          <a:lnRef idx="1">
+            <a:schemeClr val="accent1"/>
+          </a:lnRef>
+          <a:fillRef idx="3">
+            <a:schemeClr val="accent1"/>
+          </a:fillRef>
+          <a:effectRef idx="2">
+            <a:schemeClr val="accent1"/>
+          </a:effectRef>
+          <a:fontRef idx="minor">
+            <a:schemeClr val="lt1"/>
+          </a:fontRef>
+        </p:style>
+        <p:txBody>
+          <a:bodyPr rtlCol="0" anchor="ctr"/>
+          <a:lstStyle/>
+          <a:p>
+            <a:pPr algn="ctr"/>
+          </a:p>
+        </p:txBody>
+      </p:sp>
+      <p:sp>
+        <p:nvSpPr>
+          <p:cNvPr id="10" name="Rounded Rectangle 9"/>
+          <p:cNvSpPr/>
+          <p:nvPr/>
+        </p:nvSpPr>
+        <p:spPr>
+          <a:xfrm>
+            <a:off x="8046720" y="1234440"/>
+            <a:ext cx="2148840" cy="1325880"/>
           </a:xfrm>
           <a:prstGeom prst="roundRect">
             <a:avLst/>
@@ -6444,7 +6096,7 @@
           <a:lstStyle/>
           <a:p>
             <a:pPr algn="ctr">
-              <a:defRPr sz="1700" b="1">
+              <a:defRPr sz="1600" b="1">
                 <a:solidFill>
                   <a:srgbClr val="232D37"/>
                 </a:solidFill>
@@ -6452,7 +6104,7 @@
               </a:defRPr>
             </a:pPr>
             <a:r>
-              <a:t>Qualified-tax companion</a:t>
+              <a:t>Current-year tier view</a:t>
             </a:r>
           </a:p>
           <a:p>
@@ -6460,15 +6112,15 @@
               <a:spcBef>
                 <a:spcPts val="300"/>
               </a:spcBef>
-              <a:defRPr sz="1200">
-                <a:solidFill>
-                  <a:srgbClr val="232D37"/>
-                </a:solidFill>
-                <a:latin typeface="Aptos"/>
-              </a:defRPr>
-            </a:pPr>
-            <a:r>
-              <a:t>Lower-right, half-size</a:t>
+              <a:defRPr sz="1100">
+                <a:solidFill>
+                  <a:srgbClr val="232D37"/>
+                </a:solidFill>
+                <a:latin typeface="Aptos"/>
+              </a:defRPr>
+            </a:pPr>
+            <a:r>
+              <a:t>Overlay uses filing status in force for displayed year</a:t>
             </a:r>
           </a:p>
           <a:p>
@@ -6476,45 +6128,29 @@
               <a:spcBef>
                 <a:spcPts val="300"/>
               </a:spcBef>
-              <a:defRPr sz="1200">
-                <a:solidFill>
-                  <a:srgbClr val="232D37"/>
-                </a:solidFill>
-                <a:latin typeface="Aptos"/>
-              </a:defRPr>
-            </a:pPr>
-            <a:r>
-              <a:t>QDIV tiers + LTCG tiers + NIIT</a:t>
-            </a:r>
-          </a:p>
-          <a:p>
-            <a:pPr>
-              <a:spcBef>
-                <a:spcPts val="300"/>
-              </a:spcBef>
-              <a:defRPr sz="1200">
-                <a:solidFill>
-                  <a:srgbClr val="232D37"/>
-                </a:solidFill>
-                <a:latin typeface="Aptos"/>
-              </a:defRPr>
-            </a:pPr>
-            <a:r>
-              <a:t>Same stacking colors as primary</a:t>
-            </a:r>
-          </a:p>
-        </p:txBody>
-      </p:sp>
-      <p:sp>
-        <p:nvSpPr>
-          <p:cNvPr id="9" name="Rectangle 8"/>
+              <a:defRPr sz="1100">
+                <a:solidFill>
+                  <a:srgbClr val="232D37"/>
+                </a:solidFill>
+                <a:latin typeface="Aptos"/>
+              </a:defRPr>
+            </a:pPr>
+            <a:r>
+              <a:t>Tiers and premium increases are visual reference</a:t>
+            </a:r>
+          </a:p>
+        </p:txBody>
+      </p:sp>
+      <p:sp>
+        <p:nvSpPr>
+          <p:cNvPr id="11" name="Rectangle 10"/>
           <p:cNvSpPr/>
           <p:nvPr/>
         </p:nvSpPr>
         <p:spPr>
           <a:xfrm>
-            <a:off x="4892040" y="3749039"/>
-            <a:ext cx="82296" cy="1920240"/>
+            <a:off x="8046720" y="1234440"/>
+            <a:ext cx="82296" cy="1325880"/>
           </a:xfrm>
           <a:prstGeom prst="rect">
             <a:avLst/>
@@ -6550,24 +6186,24 @@
       </p:sp>
       <p:sp>
         <p:nvSpPr>
-          <p:cNvPr id="10" name="Rounded Rectangle 9"/>
+          <p:cNvPr id="12" name="Rounded Rectangle 11"/>
           <p:cNvSpPr/>
           <p:nvPr/>
         </p:nvSpPr>
         <p:spPr>
           <a:xfrm>
-            <a:off x="8183879" y="1170432"/>
-            <a:ext cx="3383280" cy="4526280"/>
+            <a:off x="10561320" y="1234440"/>
+            <a:ext cx="1051560" cy="1325880"/>
           </a:xfrm>
           <a:prstGeom prst="roundRect">
             <a:avLst/>
           </a:prstGeom>
           <a:solidFill>
-            <a:srgbClr val="FFF6E8"/>
+            <a:srgbClr val="F8FAFC"/>
           </a:solidFill>
           <a:ln w="13970">
             <a:solidFill>
-              <a:srgbClr val="E5892A"/>
+              <a:srgbClr val="0F2647"/>
             </a:solidFill>
           </a:ln>
         </p:spPr>
@@ -6590,7 +6226,7 @@
           <a:lstStyle/>
           <a:p>
             <a:pPr algn="ctr">
-              <a:defRPr sz="1700" b="1">
+              <a:defRPr sz="1400" b="1">
                 <a:solidFill>
                   <a:srgbClr val="232D37"/>
                 </a:solidFill>
@@ -6598,7 +6234,7 @@
               </a:defRPr>
             </a:pPr>
             <a:r>
-              <a:t>Shared behavior</a:t>
+              <a:t>Expense</a:t>
             </a:r>
           </a:p>
           <a:p>
@@ -6606,99 +6242,35 @@
               <a:spcBef>
                 <a:spcPts val="300"/>
               </a:spcBef>
-              <a:defRPr sz="1200">
-                <a:solidFill>
-                  <a:srgbClr val="232D37"/>
-                </a:solidFill>
-                <a:latin typeface="Aptos"/>
-              </a:defRPr>
-            </a:pPr>
-            <a:r>
-              <a:t>Same X labels and tooltip semantics</a:t>
-            </a:r>
-          </a:p>
-          <a:p>
-            <a:pPr>
-              <a:spcBef>
-                <a:spcPts val="300"/>
-              </a:spcBef>
-              <a:defRPr sz="1200">
-                <a:solidFill>
-                  <a:srgbClr val="232D37"/>
-                </a:solidFill>
-                <a:latin typeface="Aptos"/>
-              </a:defRPr>
-            </a:pPr>
-            <a:r>
-              <a:t>Locked Y scale is shared across all three</a:t>
-            </a:r>
-          </a:p>
-          <a:p>
-            <a:pPr>
-              <a:spcBef>
-                <a:spcPts val="300"/>
-              </a:spcBef>
-              <a:defRPr sz="1200">
-                <a:solidFill>
-                  <a:srgbClr val="232D37"/>
-                </a:solidFill>
-                <a:latin typeface="Aptos"/>
-              </a:defRPr>
-            </a:pPr>
-            <a:r>
-              <a:t>Sparser ticks on companions</a:t>
-            </a:r>
-          </a:p>
-          <a:p>
-            <a:pPr>
-              <a:spcBef>
-                <a:spcPts val="300"/>
-              </a:spcBef>
-              <a:defRPr sz="1200">
-                <a:solidFill>
-                  <a:srgbClr val="232D37"/>
-                </a:solidFill>
-                <a:latin typeface="Aptos"/>
-              </a:defRPr>
-            </a:pPr>
-            <a:r>
-              <a:t>No legend/note on companion charts</a:t>
-            </a:r>
-          </a:p>
-          <a:p>
-            <a:pPr>
-              <a:spcBef>
-                <a:spcPts val="300"/>
-              </a:spcBef>
-              <a:defRPr sz="1200">
-                <a:solidFill>
-                  <a:srgbClr val="232D37"/>
-                </a:solidFill>
-                <a:latin typeface="Aptos"/>
-              </a:defRPr>
-            </a:pPr>
-            <a:r>
-              <a:t>One Rescale control updates the group</a:t>
-            </a:r>
-          </a:p>
-        </p:txBody>
-      </p:sp>
-      <p:sp>
-        <p:nvSpPr>
-          <p:cNvPr id="11" name="Rectangle 10"/>
+              <a:defRPr sz="1000">
+                <a:solidFill>
+                  <a:srgbClr val="232D37"/>
+                </a:solidFill>
+                <a:latin typeface="Aptos"/>
+              </a:defRPr>
+            </a:pPr>
+            <a:r>
+              <a:t>IRMAA surcharge enters household expense pool</a:t>
+            </a:r>
+          </a:p>
+        </p:txBody>
+      </p:sp>
+      <p:sp>
+        <p:nvSpPr>
+          <p:cNvPr id="13" name="Rectangle 12"/>
           <p:cNvSpPr/>
           <p:nvPr/>
         </p:nvSpPr>
         <p:spPr>
           <a:xfrm>
-            <a:off x="8183879" y="1170432"/>
-            <a:ext cx="82296" cy="4526280"/>
+            <a:off x="10561320" y="1234440"/>
+            <a:ext cx="82296" cy="1325880"/>
           </a:xfrm>
           <a:prstGeom prst="rect">
             <a:avLst/>
           </a:prstGeom>
           <a:solidFill>
-            <a:srgbClr val="E5892A"/>
+            <a:srgbClr val="0F2647"/>
           </a:solidFill>
           <a:ln>
             <a:noFill/>
@@ -6728,19 +6300,19 @@
       </p:sp>
       <p:cxnSp>
         <p:nvCxnSpPr>
-          <p:cNvPr id="12" name="Connector 11"/>
+          <p:cNvPr id="14" name="Connector 13"/>
           <p:cNvCxnSpPr/>
           <p:nvPr/>
         </p:nvCxnSpPr>
         <p:spPr>
-          <a:xfrm flipV="1">
-            <a:off x="4553712" y="2148840"/>
-            <a:ext cx="246888" cy="777240"/>
+          <a:xfrm>
+            <a:off x="2697480" y="1920240"/>
+            <a:ext cx="228600" cy="0"/>
           </a:xfrm>
           <a:prstGeom prst="line">
             <a:avLst/>
           </a:prstGeom>
-          <a:ln w="25400">
+          <a:ln w="22860">
             <a:solidFill>
               <a:srgbClr val="266EB2"/>
             </a:solidFill>
@@ -6763,21 +6335,21 @@
       </p:cxnSp>
       <p:cxnSp>
         <p:nvCxnSpPr>
-          <p:cNvPr id="13" name="Connector 12"/>
+          <p:cNvPr id="15" name="Connector 14"/>
           <p:cNvCxnSpPr/>
           <p:nvPr/>
         </p:nvCxnSpPr>
         <p:spPr>
           <a:xfrm>
-            <a:off x="4553712" y="4297680"/>
-            <a:ext cx="246888" cy="411480"/>
+            <a:off x="5212080" y="1920240"/>
+            <a:ext cx="228600" cy="0"/>
           </a:xfrm>
           <a:prstGeom prst="line">
             <a:avLst/>
           </a:prstGeom>
-          <a:ln w="25400">
+          <a:ln w="22860">
             <a:solidFill>
-              <a:srgbClr val="266EB2"/>
+              <a:srgbClr val="429761"/>
             </a:solidFill>
           </a:ln>
         </p:spPr>
@@ -6796,9 +6368,193 @@
           </a:fontRef>
         </p:style>
       </p:cxnSp>
-      <p:sp>
-        <p:nvSpPr>
-          <p:cNvPr id="14" name="Rectangle 13"/>
+      <p:cxnSp>
+        <p:nvCxnSpPr>
+          <p:cNvPr id="16" name="Connector 15"/>
+          <p:cNvCxnSpPr/>
+          <p:nvPr/>
+        </p:nvCxnSpPr>
+        <p:spPr>
+          <a:xfrm>
+            <a:off x="7726679" y="1920240"/>
+            <a:ext cx="228600" cy="0"/>
+          </a:xfrm>
+          <a:prstGeom prst="line">
+            <a:avLst/>
+          </a:prstGeom>
+          <a:ln w="22860">
+            <a:solidFill>
+              <a:srgbClr val="E5892A"/>
+            </a:solidFill>
+          </a:ln>
+        </p:spPr>
+        <p:style>
+          <a:lnRef idx="2">
+            <a:schemeClr val="accent1"/>
+          </a:lnRef>
+          <a:fillRef idx="0">
+            <a:schemeClr val="accent1"/>
+          </a:fillRef>
+          <a:effectRef idx="1">
+            <a:schemeClr val="accent1"/>
+          </a:effectRef>
+          <a:fontRef idx="minor">
+            <a:schemeClr val="tx1"/>
+          </a:fontRef>
+        </p:style>
+      </p:cxnSp>
+      <p:cxnSp>
+        <p:nvCxnSpPr>
+          <p:cNvPr id="17" name="Connector 16"/>
+          <p:cNvCxnSpPr/>
+          <p:nvPr/>
+        </p:nvCxnSpPr>
+        <p:spPr>
+          <a:xfrm>
+            <a:off x="10241280" y="1920240"/>
+            <a:ext cx="228600" cy="0"/>
+          </a:xfrm>
+          <a:prstGeom prst="line">
+            <a:avLst/>
+          </a:prstGeom>
+          <a:ln w="22860">
+            <a:solidFill>
+              <a:srgbClr val="7852B0"/>
+            </a:solidFill>
+          </a:ln>
+        </p:spPr>
+        <p:style>
+          <a:lnRef idx="2">
+            <a:schemeClr val="accent1"/>
+          </a:lnRef>
+          <a:fillRef idx="0">
+            <a:schemeClr val="accent1"/>
+          </a:fillRef>
+          <a:effectRef idx="1">
+            <a:schemeClr val="accent1"/>
+          </a:effectRef>
+          <a:fontRef idx="minor">
+            <a:schemeClr val="tx1"/>
+          </a:fontRef>
+        </p:style>
+      </p:cxnSp>
+      <p:sp>
+        <p:nvSpPr>
+          <p:cNvPr id="18" name="Rounded Rectangle 17"/>
+          <p:cNvSpPr/>
+          <p:nvPr/>
+        </p:nvSpPr>
+        <p:spPr>
+          <a:xfrm>
+            <a:off x="1051560" y="3794760"/>
+            <a:ext cx="9921240" cy="1143000"/>
+          </a:xfrm>
+          <a:prstGeom prst="roundRect">
+            <a:avLst/>
+          </a:prstGeom>
+          <a:solidFill>
+            <a:srgbClr val="F8FAFC"/>
+          </a:solidFill>
+          <a:ln w="13970">
+            <a:solidFill>
+              <a:srgbClr val="168F8D"/>
+            </a:solidFill>
+          </a:ln>
+        </p:spPr>
+        <p:style>
+          <a:lnRef idx="1">
+            <a:schemeClr val="accent1"/>
+          </a:lnRef>
+          <a:fillRef idx="3">
+            <a:schemeClr val="accent1"/>
+          </a:fillRef>
+          <a:effectRef idx="2">
+            <a:schemeClr val="accent1"/>
+          </a:effectRef>
+          <a:fontRef idx="minor">
+            <a:schemeClr val="lt1"/>
+          </a:fontRef>
+        </p:style>
+        <p:txBody>
+          <a:bodyPr rtlCol="0" anchor="ctr" lIns="182880" rIns="100584" tIns="91440"/>
+          <a:lstStyle/>
+          <a:p>
+            <a:pPr algn="ctr">
+              <a:defRPr sz="1700" b="1">
+                <a:solidFill>
+                  <a:srgbClr val="232D37"/>
+                </a:solidFill>
+                <a:latin typeface="Aptos Display"/>
+              </a:defRPr>
+            </a:pPr>
+            <a:r>
+              <a:t>Boundary rule</a:t>
+            </a:r>
+          </a:p>
+          <a:p>
+            <a:pPr>
+              <a:spcBef>
+                <a:spcPts val="300"/>
+              </a:spcBef>
+              <a:defRPr sz="1200">
+                <a:solidFill>
+                  <a:srgbClr val="232D37"/>
+                </a:solidFill>
+                <a:latin typeface="Aptos"/>
+              </a:defRPr>
+            </a:pPr>
+            <a:r>
+              <a:t>The MAGI chart reads row.magi and row.irmaaSurcharge. It does not recreate the look-back calculation, determine premium tiers, or alter the expense waterfall.</a:t>
+            </a:r>
+          </a:p>
+        </p:txBody>
+      </p:sp>
+      <p:sp>
+        <p:nvSpPr>
+          <p:cNvPr id="19" name="Rectangle 18"/>
+          <p:cNvSpPr/>
+          <p:nvPr/>
+        </p:nvSpPr>
+        <p:spPr>
+          <a:xfrm>
+            <a:off x="1051560" y="3794760"/>
+            <a:ext cx="82296" cy="1143000"/>
+          </a:xfrm>
+          <a:prstGeom prst="rect">
+            <a:avLst/>
+          </a:prstGeom>
+          <a:solidFill>
+            <a:srgbClr val="168F8D"/>
+          </a:solidFill>
+          <a:ln>
+            <a:noFill/>
+          </a:ln>
+        </p:spPr>
+        <p:style>
+          <a:lnRef idx="1">
+            <a:schemeClr val="accent1"/>
+          </a:lnRef>
+          <a:fillRef idx="3">
+            <a:schemeClr val="accent1"/>
+          </a:fillRef>
+          <a:effectRef idx="2">
+            <a:schemeClr val="accent1"/>
+          </a:effectRef>
+          <a:fontRef idx="minor">
+            <a:schemeClr val="lt1"/>
+          </a:fontRef>
+        </p:style>
+        <p:txBody>
+          <a:bodyPr rtlCol="0" anchor="ctr"/>
+          <a:lstStyle/>
+          <a:p>
+            <a:pPr algn="ctr"/>
+          </a:p>
+        </p:txBody>
+      </p:sp>
+      <p:sp>
+        <p:nvSpPr>
+          <p:cNvPr id="20" name="Rectangle 19"/>
           <p:cNvSpPr/>
           <p:nvPr/>
         </p:nvSpPr>
@@ -6841,7 +6597,7 @@
       </p:sp>
       <p:sp>
         <p:nvSpPr>
-          <p:cNvPr id="15" name="TextBox 14"/>
+          <p:cNvPr id="21" name="TextBox 20"/>
           <p:cNvSpPr txBox="1"/>
           <p:nvPr/>
         </p:nvSpPr>
@@ -6870,7 +6626,7 @@
               </a:defRPr>
             </a:pPr>
             <a:r>
-              <a:t>Retirement Income Planner • Architecture overview • Print, tax-detail, and customizable income-layout update</a:t>
+              <a:t>Retirement Income Planner • Architecture overview • MAGI, IRMAA-as-tax, and enhanced companion-chart update</a:t>
             </a:r>
           </a:p>
         </p:txBody>
@@ -6932,7 +6688,7 @@
               </a:defRPr>
             </a:pPr>
             <a:r>
-              <a:t>Income-card ordering is now user-controlled and saved</a:t>
+              <a:t>IRMAA as tax: an optional presentation layer</a:t>
             </a:r>
           </a:p>
         </p:txBody>
@@ -6968,7 +6724,7 @@
               </a:defRPr>
             </a:pPr>
             <a:r>
-              <a:t>A single ordering vector creates a consistent card layout across both spouses while keeping financial computation untouched.</a:t>
+              <a:t>A header checkbox lets the user see the Medicare surcharge alongside income tax without changing total tax or the expense model.</a:t>
             </a:r>
           </a:p>
         </p:txBody>
@@ -6981,8 +6737,8 @@
         </p:nvSpPr>
         <p:spPr>
           <a:xfrm>
-            <a:off x="594360" y="1170432"/>
-            <a:ext cx="3246120" cy="4526280"/>
+            <a:off x="594360" y="1188720"/>
+            <a:ext cx="3383280" cy="4526280"/>
           </a:xfrm>
           <a:prstGeom prst="roundRect">
             <a:avLst/>
@@ -7023,7 +6779,7 @@
               </a:defRPr>
             </a:pPr>
             <a:r>
-              <a:t>State contract</a:t>
+              <a:t>Unchecked: tax view</a:t>
             </a:r>
           </a:p>
           <a:p>
@@ -7039,7 +6795,7 @@
               </a:defRPr>
             </a:pPr>
             <a:r>
-              <a:t>state.ui.incomeOrder</a:t>
+              <a:t>Primary tax stack contains ordinary tax, qualified-income tiers, LTCG tiers, and NIIT.</a:t>
             </a:r>
           </a:p>
           <a:p>
@@ -7055,39 +6811,7 @@
               </a:defRPr>
             </a:pPr>
             <a:r>
-              <a:t>Permutation of INCOME_CARD_KEYS</a:t>
-            </a:r>
-          </a:p>
-          <a:p>
-            <a:pPr>
-              <a:spcBef>
-                <a:spcPts val="300"/>
-              </a:spcBef>
-              <a:defRPr sz="1200">
-                <a:solidFill>
-                  <a:srgbClr val="232D37"/>
-                </a:solidFill>
-                <a:latin typeface="Aptos"/>
-              </a:defRPr>
-            </a:pPr>
-            <a:r>
-              <a:t>Normalized in hydrateState</a:t>
-            </a:r>
-          </a:p>
-          <a:p>
-            <a:pPr>
-              <a:spcBef>
-                <a:spcPts val="300"/>
-              </a:spcBef>
-              <a:defRPr sz="1200">
-                <a:solidFill>
-                  <a:srgbClr val="232D37"/>
-                </a:solidFill>
-                <a:latin typeface="Aptos"/>
-              </a:defRPr>
-            </a:pPr>
-            <a:r>
-              <a:t>Saved, autosaved, restored, and reset with the plan</a:t>
+              <a:t>IRMAA remains visible in expense analysis, where it is modeled as a household expense.</a:t>
             </a:r>
           </a:p>
         </p:txBody>
@@ -7100,7 +6824,7 @@
         </p:nvSpPr>
         <p:spPr>
           <a:xfrm>
-            <a:off x="594360" y="1170432"/>
+            <a:off x="594360" y="1188720"/>
             <a:ext cx="82296" cy="4526280"/>
           </a:xfrm>
           <a:prstGeom prst="rect">
@@ -7143,18 +6867,18 @@
         </p:nvSpPr>
         <p:spPr>
           <a:xfrm>
-            <a:off x="4407408" y="1170432"/>
-            <a:ext cx="3246120" cy="4526280"/>
+            <a:off x="4407408" y="1188720"/>
+            <a:ext cx="3383280" cy="4526280"/>
           </a:xfrm>
           <a:prstGeom prst="roundRect">
             <a:avLst/>
           </a:prstGeom>
           <a:solidFill>
-            <a:srgbClr val="F7EFFF"/>
+            <a:srgbClr val="FFF6E8"/>
           </a:solidFill>
           <a:ln w="13970">
             <a:solidFill>
-              <a:srgbClr val="7852B0"/>
+              <a:srgbClr val="E5892A"/>
             </a:solidFill>
           </a:ln>
         </p:spPr>
@@ -7185,7 +6909,7 @@
               </a:defRPr>
             </a:pPr>
             <a:r>
-              <a:t>Interaction model</a:t>
+              <a:t>Checked: combined view</a:t>
             </a:r>
           </a:p>
           <a:p>
@@ -7201,7 +6925,7 @@
               </a:defRPr>
             </a:pPr>
             <a:r>
-              <a:t>Each top-level card has a ⋮⋮ drag handle.</a:t>
+              <a:t>Adds a dashed black IRMAA surcharge dataset above the tax stack.</a:t>
             </a:r>
           </a:p>
           <a:p>
@@ -7217,7 +6941,7 @@
               </a:defRPr>
             </a:pPr>
             <a:r>
-              <a:t>Delegated HTML5 drag events move a card type.</a:t>
+              <a:t>No fill: visually distinct from tax segments.</a:t>
             </a:r>
           </a:p>
           <a:p>
@@ -7233,7 +6957,7 @@
               </a:defRPr>
             </a:pPr>
             <a:r>
-              <a:t>Both spouse columns highlight the same card type.</a:t>
+              <a:t>Legend adds a dashed IRMAA entry.</a:t>
             </a:r>
           </a:p>
           <a:p>
@@ -7249,7 +6973,7 @@
               </a:defRPr>
             </a:pPr>
             <a:r>
-              <a:t>Drop zones include gaps, headings, and padding.</a:t>
+              <a:t>Popup adds Total tax + IRMAA.</a:t>
             </a:r>
           </a:p>
         </p:txBody>
@@ -7262,14 +6986,14 @@
         </p:nvSpPr>
         <p:spPr>
           <a:xfrm>
-            <a:off x="4407408" y="1170432"/>
+            <a:off x="4407408" y="1188720"/>
             <a:ext cx="82296" cy="4526280"/>
           </a:xfrm>
           <a:prstGeom prst="rect">
             <a:avLst/>
           </a:prstGeom>
           <a:solidFill>
-            <a:srgbClr val="7852B0"/>
+            <a:srgbClr val="E5892A"/>
           </a:solidFill>
           <a:ln>
             <a:noFill/>
@@ -7305,8 +7029,8 @@
         </p:nvSpPr>
         <p:spPr>
           <a:xfrm>
-            <a:off x="8220456" y="1170432"/>
-            <a:ext cx="3246120" cy="4526280"/>
+            <a:off x="8220456" y="1188720"/>
+            <a:ext cx="3383280" cy="4526280"/>
           </a:xfrm>
           <a:prstGeom prst="roundRect">
             <a:avLst/>
@@ -7347,7 +7071,7 @@
               </a:defRPr>
             </a:pPr>
             <a:r>
-              <a:t>Rendering result</a:t>
+              <a:t>Scale and state behavior</a:t>
             </a:r>
           </a:p>
           <a:p>
@@ -7363,7 +7087,7 @@
               </a:defRPr>
             </a:pPr>
             <a:r>
-              <a:t>renderIncomeForms builds every person column in one shared order.</a:t>
+              <a:t>The Tax Rescale key is reset to include IRMAA when enabled.</a:t>
             </a:r>
           </a:p>
           <a:p>
@@ -7379,7 +7103,7 @@
               </a:defRPr>
             </a:pPr>
             <a:r>
-              <a:t>Re-render and autosave follow a successful move.</a:t>
+              <a:t>viewIrmaaAsTax is a live display flag, not a projection input.</a:t>
             </a:r>
           </a:p>
           <a:p>
@@ -7395,7 +7119,7 @@
               </a:defRPr>
             </a:pPr>
             <a:r>
-              <a:t>No recompute: order is display-only and never affects financial results.</a:t>
+              <a:t>Expense chart and computed totalTax remain unchanged.</a:t>
             </a:r>
           </a:p>
         </p:txBody>
@@ -7408,7 +7132,7 @@
         </p:nvSpPr>
         <p:spPr>
           <a:xfrm>
-            <a:off x="8220456" y="1170432"/>
+            <a:off x="8220456" y="1188720"/>
             <a:ext cx="82296" cy="4526280"/>
           </a:xfrm>
           <a:prstGeom prst="rect">
@@ -7517,7 +7241,7 @@
               </a:defRPr>
             </a:pPr>
             <a:r>
-              <a:t>Retirement Income Planner • Architecture overview • Print, tax-detail, and customizable income-layout update</a:t>
+              <a:t>Retirement Income Planner • Architecture overview • MAGI, IRMAA-as-tax, and enhanced companion-chart update</a:t>
             </a:r>
           </a:p>
         </p:txBody>
@@ -7579,7 +7303,7 @@
               </a:defRPr>
             </a:pPr>
             <a:r>
-              <a:t>Drag-and-drop flow for the income grid</a:t>
+              <a:t>Companion-chart tooltips: compact, external, and consistent</a:t>
             </a:r>
           </a:p>
         </p:txBody>
@@ -7615,7 +7339,7 @@
               </a:defRPr>
             </a:pPr>
             <a:r>
-              <a:t>The grid accepts a drop even in non-card areas, then snaps the move to the nearest card position.</a:t>
+              <a:t>Small charts use a shared external tooltip mechanism so detail can remain readable beyond the boundaries of a compact canvas.</a:t>
             </a:r>
           </a:p>
         </p:txBody>
@@ -7628,8 +7352,8 @@
         </p:nvSpPr>
         <p:spPr>
           <a:xfrm>
-            <a:off x="502920" y="1280160"/>
-            <a:ext cx="2148840" cy="1280160"/>
+            <a:off x="640080" y="1234440"/>
+            <a:ext cx="3246120" cy="4434840"/>
           </a:xfrm>
           <a:prstGeom prst="roundRect">
             <a:avLst/>
@@ -7662,7 +7386,7 @@
           <a:lstStyle/>
           <a:p>
             <a:pPr algn="ctr">
-              <a:defRPr sz="1600" b="1">
+              <a:defRPr sz="1700" b="1">
                 <a:solidFill>
                   <a:srgbClr val="232D37"/>
                 </a:solidFill>
@@ -7670,7 +7394,7 @@
               </a:defRPr>
             </a:pPr>
             <a:r>
-              <a:t>Drag start</a:t>
+              <a:t>Why external</a:t>
             </a:r>
           </a:p>
           <a:p>
@@ -7678,15 +7402,47 @@
               <a:spcBef>
                 <a:spcPts val="300"/>
               </a:spcBef>
-              <a:defRPr sz="1100">
-                <a:solidFill>
-                  <a:srgbClr val="232D37"/>
-                </a:solidFill>
-                <a:latin typeface="Aptos"/>
-              </a:defRPr>
-            </a:pPr>
-            <a:r>
-              <a:t>Top-level card handle identifies data-card key</a:t>
+              <a:defRPr sz="1200">
+                <a:solidFill>
+                  <a:srgbClr val="232D37"/>
+                </a:solidFill>
+                <a:latin typeface="Aptos"/>
+              </a:defRPr>
+            </a:pPr>
+            <a:r>
+              <a:t>Built-in Chart.js tooltips are clipped to their canvas.</a:t>
+            </a:r>
+          </a:p>
+          <a:p>
+            <a:pPr>
+              <a:spcBef>
+                <a:spcPts val="300"/>
+              </a:spcBef>
+              <a:defRPr sz="1200">
+                <a:solidFill>
+                  <a:srgbClr val="232D37"/>
+                </a:solidFill>
+                <a:latin typeface="Aptos"/>
+              </a:defRPr>
+            </a:pPr>
+            <a:r>
+              <a:t>Small companion panels need compact information that can overflow safely.</a:t>
+            </a:r>
+          </a:p>
+          <a:p>
+            <a:pPr>
+              <a:spcBef>
+                <a:spcPts val="300"/>
+              </a:spcBef>
+              <a:defRPr sz="1200">
+                <a:solidFill>
+                  <a:srgbClr val="232D37"/>
+                </a:solidFill>
+                <a:latin typeface="Aptos"/>
+              </a:defRPr>
+            </a:pPr>
+            <a:r>
+              <a:t>External tooltip renders into a floating monospace element.</a:t>
             </a:r>
           </a:p>
         </p:txBody>
@@ -7699,8 +7455,8 @@
         </p:nvSpPr>
         <p:spPr>
           <a:xfrm>
-            <a:off x="502920" y="1280160"/>
-            <a:ext cx="82296" cy="1280160"/>
+            <a:off x="640080" y="1234440"/>
+            <a:ext cx="82296" cy="4434840"/>
           </a:xfrm>
           <a:prstGeom prst="rect">
             <a:avLst/>
@@ -7742,8 +7498,8 @@
         </p:nvSpPr>
         <p:spPr>
           <a:xfrm>
-            <a:off x="3017520" y="1280160"/>
-            <a:ext cx="2148840" cy="1280160"/>
+            <a:off x="4462272" y="1234440"/>
+            <a:ext cx="3246120" cy="4434840"/>
           </a:xfrm>
           <a:prstGeom prst="roundRect">
             <a:avLst/>
@@ -7776,7 +7532,7 @@
           <a:lstStyle/>
           <a:p>
             <a:pPr algn="ctr">
-              <a:defRPr sz="1600" b="1">
+              <a:defRPr sz="1700" b="1">
                 <a:solidFill>
                   <a:srgbClr val="232D37"/>
                 </a:solidFill>
@@ -7784,7 +7540,7 @@
               </a:defRPr>
             </a:pPr>
             <a:r>
-              <a:t>Hover</a:t>
+              <a:t>External tooltip behavior</a:t>
             </a:r>
           </a:p>
           <a:p>
@@ -7792,15 +7548,63 @@
               <a:spcBef>
                 <a:spcPts val="300"/>
               </a:spcBef>
-              <a:defRPr sz="1100">
-                <a:solidFill>
-                  <a:srgbClr val="232D37"/>
-                </a:solidFill>
-                <a:latin typeface="Aptos"/>
-              </a:defRPr>
-            </a:pPr>
-            <a:r>
-              <a:t>Both person columns highlight the matching card type</a:t>
+              <a:defRPr sz="1200">
+                <a:solidFill>
+                  <a:srgbClr val="232D37"/>
+                </a:solidFill>
+                <a:latin typeface="Aptos"/>
+              </a:defRPr>
+            </a:pPr>
+            <a:r>
+              <a:t>Receives pre-padded lines from justifyTip.</a:t>
+            </a:r>
+          </a:p>
+          <a:p>
+            <a:pPr>
+              <a:spcBef>
+                <a:spcPts val="300"/>
+              </a:spcBef>
+              <a:defRPr sz="1200">
+                <a:solidFill>
+                  <a:srgbClr val="232D37"/>
+                </a:solidFill>
+                <a:latin typeface="Aptos"/>
+              </a:defRPr>
+            </a:pPr>
+            <a:r>
+              <a:t>Flips left near the viewport edge.</a:t>
+            </a:r>
+          </a:p>
+          <a:p>
+            <a:pPr>
+              <a:spcBef>
+                <a:spcPts val="300"/>
+              </a:spcBef>
+              <a:defRPr sz="1200">
+                <a:solidFill>
+                  <a:srgbClr val="232D37"/>
+                </a:solidFill>
+                <a:latin typeface="Aptos"/>
+              </a:defRPr>
+            </a:pPr>
+            <a:r>
+              <a:t>Glides between positions with CSS transition.</a:t>
+            </a:r>
+          </a:p>
+          <a:p>
+            <a:pPr>
+              <a:spcBef>
+                <a:spcPts val="300"/>
+              </a:spcBef>
+              <a:defRPr sz="1200">
+                <a:solidFill>
+                  <a:srgbClr val="232D37"/>
+                </a:solidFill>
+                <a:latin typeface="Aptos"/>
+              </a:defRPr>
+            </a:pPr>
+            <a:r>
+              <a:t>Appears immediately on first display.</a:t>
             </a:r>
           </a:p>
         </p:txBody>
@@ -7813,8 +7617,8 @@
         </p:nvSpPr>
         <p:spPr>
           <a:xfrm>
-            <a:off x="3017520" y="1280160"/>
-            <a:ext cx="82296" cy="1280160"/>
+            <a:off x="4462272" y="1234440"/>
+            <a:ext cx="82296" cy="4434840"/>
           </a:xfrm>
           <a:prstGeom prst="rect">
             <a:avLst/>
@@ -7856,122 +7660,8 @@
         </p:nvSpPr>
         <p:spPr>
           <a:xfrm>
-            <a:off x="5532120" y="1280160"/>
-            <a:ext cx="2148840" cy="1280160"/>
-          </a:xfrm>
-          <a:prstGeom prst="roundRect">
-            <a:avLst/>
-          </a:prstGeom>
-          <a:solidFill>
-            <a:srgbClr val="FFF6E8"/>
-          </a:solidFill>
-          <a:ln w="13970">
-            <a:solidFill>
-              <a:srgbClr val="E5892A"/>
-            </a:solidFill>
-          </a:ln>
-        </p:spPr>
-        <p:style>
-          <a:lnRef idx="1">
-            <a:schemeClr val="accent1"/>
-          </a:lnRef>
-          <a:fillRef idx="3">
-            <a:schemeClr val="accent1"/>
-          </a:fillRef>
-          <a:effectRef idx="2">
-            <a:schemeClr val="accent1"/>
-          </a:effectRef>
-          <a:fontRef idx="minor">
-            <a:schemeClr val="lt1"/>
-          </a:fontRef>
-        </p:style>
-        <p:txBody>
-          <a:bodyPr rtlCol="0" anchor="ctr" lIns="182880" rIns="100584" tIns="91440"/>
-          <a:lstStyle/>
-          <a:p>
-            <a:pPr algn="ctr">
-              <a:defRPr sz="1600" b="1">
-                <a:solidFill>
-                  <a:srgbClr val="232D37"/>
-                </a:solidFill>
-                <a:latin typeface="Aptos Display"/>
-              </a:defRPr>
-            </a:pPr>
-            <a:r>
-              <a:t>Drop target</a:t>
-            </a:r>
-          </a:p>
-          <a:p>
-            <a:pPr>
-              <a:spcBef>
-                <a:spcPts val="300"/>
-              </a:spcBef>
-              <a:defRPr sz="1100">
-                <a:solidFill>
-                  <a:srgbClr val="232D37"/>
-                </a:solidFill>
-                <a:latin typeface="Aptos"/>
-              </a:defRPr>
-            </a:pPr>
-            <a:r>
-              <a:t>Card, gap, column heading, or padding</a:t>
-            </a:r>
-          </a:p>
-        </p:txBody>
-      </p:sp>
-      <p:sp>
-        <p:nvSpPr>
-          <p:cNvPr id="9" name="Rectangle 8"/>
-          <p:cNvSpPr/>
-          <p:nvPr/>
-        </p:nvSpPr>
-        <p:spPr>
-          <a:xfrm>
-            <a:off x="5532120" y="1280160"/>
-            <a:ext cx="82296" cy="1280160"/>
-          </a:xfrm>
-          <a:prstGeom prst="rect">
-            <a:avLst/>
-          </a:prstGeom>
-          <a:solidFill>
-            <a:srgbClr val="E5892A"/>
-          </a:solidFill>
-          <a:ln>
-            <a:noFill/>
-          </a:ln>
-        </p:spPr>
-        <p:style>
-          <a:lnRef idx="1">
-            <a:schemeClr val="accent1"/>
-          </a:lnRef>
-          <a:fillRef idx="3">
-            <a:schemeClr val="accent1"/>
-          </a:fillRef>
-          <a:effectRef idx="2">
-            <a:schemeClr val="accent1"/>
-          </a:effectRef>
-          <a:fontRef idx="minor">
-            <a:schemeClr val="lt1"/>
-          </a:fontRef>
-        </p:style>
-        <p:txBody>
-          <a:bodyPr rtlCol="0" anchor="ctr"/>
-          <a:lstStyle/>
-          <a:p>
-            <a:pPr algn="ctr"/>
-          </a:p>
-        </p:txBody>
-      </p:sp>
-      <p:sp>
-        <p:nvSpPr>
-          <p:cNvPr id="10" name="Rounded Rectangle 9"/>
-          <p:cNvSpPr/>
-          <p:nvPr/>
-        </p:nvSpPr>
-        <p:spPr>
-          <a:xfrm>
-            <a:off x="8046720" y="1280160"/>
-            <a:ext cx="2148840" cy="1280160"/>
+            <a:off x="8284464" y="1234440"/>
+            <a:ext cx="3246120" cy="4434840"/>
           </a:xfrm>
           <a:prstGeom prst="roundRect">
             <a:avLst/>
@@ -8004,7 +7694,7 @@
           <a:lstStyle/>
           <a:p>
             <a:pPr algn="ctr">
-              <a:defRPr sz="1600" b="1">
+              <a:defRPr sz="1700" b="1">
                 <a:solidFill>
                   <a:srgbClr val="232D37"/>
                 </a:solidFill>
@@ -8012,7 +7702,7 @@
               </a:defRPr>
             </a:pPr>
             <a:r>
-              <a:t>Nearest position</a:t>
+              <a:t>Focused content</a:t>
             </a:r>
           </a:p>
           <a:p>
@@ -8020,29 +7710,77 @@
               <a:spcBef>
                 <a:spcPts val="300"/>
               </a:spcBef>
-              <a:defRPr sz="1100">
-                <a:solidFill>
-                  <a:srgbClr val="232D37"/>
-                </a:solidFill>
-                <a:latin typeface="Aptos"/>
-              </a:defRPr>
-            </a:pPr>
-            <a:r>
-              <a:t>dndCardAt snaps to vertically nearest card</a:t>
-            </a:r>
-          </a:p>
-        </p:txBody>
-      </p:sp>
-      <p:sp>
-        <p:nvSpPr>
-          <p:cNvPr id="11" name="Rectangle 10"/>
+              <a:defRPr sz="1200">
+                <a:solidFill>
+                  <a:srgbClr val="232D37"/>
+                </a:solidFill>
+                <a:latin typeface="Aptos"/>
+              </a:defRPr>
+            </a:pPr>
+            <a:r>
+              <a:t>MAGI chart: MAGI and IRMAA surcharge only.</a:t>
+            </a:r>
+          </a:p>
+          <a:p>
+            <a:pPr>
+              <a:spcBef>
+                <a:spcPts val="300"/>
+              </a:spcBef>
+              <a:defRPr sz="1200">
+                <a:solidFill>
+                  <a:srgbClr val="232D37"/>
+                </a:solidFill>
+                <a:latin typeface="Aptos"/>
+              </a:defRPr>
+            </a:pPr>
+            <a:r>
+              <a:t>Ordinary tax chart: ordinary income tax only.</a:t>
+            </a:r>
+          </a:p>
+          <a:p>
+            <a:pPr>
+              <a:spcBef>
+                <a:spcPts val="300"/>
+              </a:spcBef>
+              <a:defRPr sz="1200">
+                <a:solidFill>
+                  <a:srgbClr val="232D37"/>
+                </a:solidFill>
+                <a:latin typeface="Aptos"/>
+              </a:defRPr>
+            </a:pPr>
+            <a:r>
+              <a:t>Qualified chart: non-zero QDIV/LTCG/NIIT layers only.</a:t>
+            </a:r>
+          </a:p>
+          <a:p>
+            <a:pPr>
+              <a:spcBef>
+                <a:spcPts val="300"/>
+              </a:spcBef>
+              <a:defRPr sz="1200">
+                <a:solidFill>
+                  <a:srgbClr val="232D37"/>
+                </a:solidFill>
+                <a:latin typeface="Aptos"/>
+              </a:defRPr>
+            </a:pPr>
+            <a:r>
+              <a:t>Show Details does not expand companion popups.</a:t>
+            </a:r>
+          </a:p>
+        </p:txBody>
+      </p:sp>
+      <p:sp>
+        <p:nvSpPr>
+          <p:cNvPr id="9" name="Rectangle 8"/>
           <p:cNvSpPr/>
           <p:nvPr/>
         </p:nvSpPr>
         <p:spPr>
           <a:xfrm>
-            <a:off x="8046720" y="1280160"/>
-            <a:ext cx="82296" cy="1280160"/>
+            <a:off x="8284464" y="1234440"/>
+            <a:ext cx="82296" cy="4434840"/>
           </a:xfrm>
           <a:prstGeom prst="rect">
             <a:avLst/>
@@ -8078,375 +7816,7 @@
       </p:sp>
       <p:sp>
         <p:nvSpPr>
-          <p:cNvPr id="12" name="Rounded Rectangle 11"/>
-          <p:cNvSpPr/>
-          <p:nvPr/>
-        </p:nvSpPr>
-        <p:spPr>
-          <a:xfrm>
-            <a:off x="10561320" y="1280160"/>
-            <a:ext cx="1051560" cy="1280160"/>
-          </a:xfrm>
-          <a:prstGeom prst="roundRect">
-            <a:avLst/>
-          </a:prstGeom>
-          <a:solidFill>
-            <a:srgbClr val="F8FAFC"/>
-          </a:solidFill>
-          <a:ln w="13970">
-            <a:solidFill>
-              <a:srgbClr val="0F2647"/>
-            </a:solidFill>
-          </a:ln>
-        </p:spPr>
-        <p:style>
-          <a:lnRef idx="1">
-            <a:schemeClr val="accent1"/>
-          </a:lnRef>
-          <a:fillRef idx="3">
-            <a:schemeClr val="accent1"/>
-          </a:fillRef>
-          <a:effectRef idx="2">
-            <a:schemeClr val="accent1"/>
-          </a:effectRef>
-          <a:fontRef idx="minor">
-            <a:schemeClr val="lt1"/>
-          </a:fontRef>
-        </p:style>
-        <p:txBody>
-          <a:bodyPr rtlCol="0" anchor="ctr" lIns="182880" rIns="100584" tIns="91440"/>
-          <a:lstStyle/>
-          <a:p>
-            <a:pPr algn="ctr">
-              <a:defRPr sz="1400" b="1">
-                <a:solidFill>
-                  <a:srgbClr val="232D37"/>
-                </a:solidFill>
-                <a:latin typeface="Aptos Display"/>
-              </a:defRPr>
-            </a:pPr>
-            <a:r>
-              <a:t>Commit</a:t>
-            </a:r>
-          </a:p>
-          <a:p>
-            <a:pPr>
-              <a:spcBef>
-                <a:spcPts val="300"/>
-              </a:spcBef>
-              <a:defRPr sz="1000">
-                <a:solidFill>
-                  <a:srgbClr val="232D37"/>
-                </a:solidFill>
-                <a:latin typeface="Aptos"/>
-              </a:defRPr>
-            </a:pPr>
-            <a:r>
-              <a:t>move → render → save</a:t>
-            </a:r>
-          </a:p>
-        </p:txBody>
-      </p:sp>
-      <p:sp>
-        <p:nvSpPr>
-          <p:cNvPr id="13" name="Rectangle 12"/>
-          <p:cNvSpPr/>
-          <p:nvPr/>
-        </p:nvSpPr>
-        <p:spPr>
-          <a:xfrm>
-            <a:off x="10561320" y="1280160"/>
-            <a:ext cx="82296" cy="1280160"/>
-          </a:xfrm>
-          <a:prstGeom prst="rect">
-            <a:avLst/>
-          </a:prstGeom>
-          <a:solidFill>
-            <a:srgbClr val="0F2647"/>
-          </a:solidFill>
-          <a:ln>
-            <a:noFill/>
-          </a:ln>
-        </p:spPr>
-        <p:style>
-          <a:lnRef idx="1">
-            <a:schemeClr val="accent1"/>
-          </a:lnRef>
-          <a:fillRef idx="3">
-            <a:schemeClr val="accent1"/>
-          </a:fillRef>
-          <a:effectRef idx="2">
-            <a:schemeClr val="accent1"/>
-          </a:effectRef>
-          <a:fontRef idx="minor">
-            <a:schemeClr val="lt1"/>
-          </a:fontRef>
-        </p:style>
-        <p:txBody>
-          <a:bodyPr rtlCol="0" anchor="ctr"/>
-          <a:lstStyle/>
-          <a:p>
-            <a:pPr algn="ctr"/>
-          </a:p>
-        </p:txBody>
-      </p:sp>
-      <p:cxnSp>
-        <p:nvCxnSpPr>
-          <p:cNvPr id="14" name="Connector 13"/>
-          <p:cNvCxnSpPr/>
-          <p:nvPr/>
-        </p:nvCxnSpPr>
-        <p:spPr>
-          <a:xfrm>
-            <a:off x="2697480" y="1920240"/>
-            <a:ext cx="228600" cy="0"/>
-          </a:xfrm>
-          <a:prstGeom prst="line">
-            <a:avLst/>
-          </a:prstGeom>
-          <a:ln w="22860">
-            <a:solidFill>
-              <a:srgbClr val="266EB2"/>
-            </a:solidFill>
-          </a:ln>
-        </p:spPr>
-        <p:style>
-          <a:lnRef idx="2">
-            <a:schemeClr val="accent1"/>
-          </a:lnRef>
-          <a:fillRef idx="0">
-            <a:schemeClr val="accent1"/>
-          </a:fillRef>
-          <a:effectRef idx="1">
-            <a:schemeClr val="accent1"/>
-          </a:effectRef>
-          <a:fontRef idx="minor">
-            <a:schemeClr val="tx1"/>
-          </a:fontRef>
-        </p:style>
-      </p:cxnSp>
-      <p:cxnSp>
-        <p:nvCxnSpPr>
-          <p:cNvPr id="15" name="Connector 14"/>
-          <p:cNvCxnSpPr/>
-          <p:nvPr/>
-        </p:nvCxnSpPr>
-        <p:spPr>
-          <a:xfrm>
-            <a:off x="5212080" y="1920240"/>
-            <a:ext cx="228600" cy="0"/>
-          </a:xfrm>
-          <a:prstGeom prst="line">
-            <a:avLst/>
-          </a:prstGeom>
-          <a:ln w="22860">
-            <a:solidFill>
-              <a:srgbClr val="7852B0"/>
-            </a:solidFill>
-          </a:ln>
-        </p:spPr>
-        <p:style>
-          <a:lnRef idx="2">
-            <a:schemeClr val="accent1"/>
-          </a:lnRef>
-          <a:fillRef idx="0">
-            <a:schemeClr val="accent1"/>
-          </a:fillRef>
-          <a:effectRef idx="1">
-            <a:schemeClr val="accent1"/>
-          </a:effectRef>
-          <a:fontRef idx="minor">
-            <a:schemeClr val="tx1"/>
-          </a:fontRef>
-        </p:style>
-      </p:cxnSp>
-      <p:cxnSp>
-        <p:nvCxnSpPr>
-          <p:cNvPr id="16" name="Connector 15"/>
-          <p:cNvCxnSpPr/>
-          <p:nvPr/>
-        </p:nvCxnSpPr>
-        <p:spPr>
-          <a:xfrm>
-            <a:off x="7726679" y="1920240"/>
-            <a:ext cx="228600" cy="0"/>
-          </a:xfrm>
-          <a:prstGeom prst="line">
-            <a:avLst/>
-          </a:prstGeom>
-          <a:ln w="22860">
-            <a:solidFill>
-              <a:srgbClr val="E5892A"/>
-            </a:solidFill>
-          </a:ln>
-        </p:spPr>
-        <p:style>
-          <a:lnRef idx="2">
-            <a:schemeClr val="accent1"/>
-          </a:lnRef>
-          <a:fillRef idx="0">
-            <a:schemeClr val="accent1"/>
-          </a:fillRef>
-          <a:effectRef idx="1">
-            <a:schemeClr val="accent1"/>
-          </a:effectRef>
-          <a:fontRef idx="minor">
-            <a:schemeClr val="tx1"/>
-          </a:fontRef>
-        </p:style>
-      </p:cxnSp>
-      <p:cxnSp>
-        <p:nvCxnSpPr>
-          <p:cNvPr id="17" name="Connector 16"/>
-          <p:cNvCxnSpPr/>
-          <p:nvPr/>
-        </p:nvCxnSpPr>
-        <p:spPr>
-          <a:xfrm>
-            <a:off x="10241280" y="1920240"/>
-            <a:ext cx="228600" cy="0"/>
-          </a:xfrm>
-          <a:prstGeom prst="line">
-            <a:avLst/>
-          </a:prstGeom>
-          <a:ln w="22860">
-            <a:solidFill>
-              <a:srgbClr val="429761"/>
-            </a:solidFill>
-          </a:ln>
-        </p:spPr>
-        <p:style>
-          <a:lnRef idx="2">
-            <a:schemeClr val="accent1"/>
-          </a:lnRef>
-          <a:fillRef idx="0">
-            <a:schemeClr val="accent1"/>
-          </a:fillRef>
-          <a:effectRef idx="1">
-            <a:schemeClr val="accent1"/>
-          </a:effectRef>
-          <a:fontRef idx="minor">
-            <a:schemeClr val="tx1"/>
-          </a:fontRef>
-        </p:style>
-      </p:cxnSp>
-      <p:sp>
-        <p:nvSpPr>
-          <p:cNvPr id="18" name="Rounded Rectangle 17"/>
-          <p:cNvSpPr/>
-          <p:nvPr/>
-        </p:nvSpPr>
-        <p:spPr>
-          <a:xfrm>
-            <a:off x="1143000" y="3703320"/>
-            <a:ext cx="9784080" cy="1188720"/>
-          </a:xfrm>
-          <a:prstGeom prst="roundRect">
-            <a:avLst/>
-          </a:prstGeom>
-          <a:solidFill>
-            <a:srgbClr val="F8FAFC"/>
-          </a:solidFill>
-          <a:ln w="13970">
-            <a:solidFill>
-              <a:srgbClr val="168F8D"/>
-            </a:solidFill>
-          </a:ln>
-        </p:spPr>
-        <p:style>
-          <a:lnRef idx="1">
-            <a:schemeClr val="accent1"/>
-          </a:lnRef>
-          <a:fillRef idx="3">
-            <a:schemeClr val="accent1"/>
-          </a:fillRef>
-          <a:effectRef idx="2">
-            <a:schemeClr val="accent1"/>
-          </a:effectRef>
-          <a:fontRef idx="minor">
-            <a:schemeClr val="lt1"/>
-          </a:fontRef>
-        </p:style>
-        <p:txBody>
-          <a:bodyPr rtlCol="0" anchor="ctr" lIns="182880" rIns="100584" tIns="91440"/>
-          <a:lstStyle/>
-          <a:p>
-            <a:pPr algn="ctr">
-              <a:defRPr sz="1700" b="1">
-                <a:solidFill>
-                  <a:srgbClr val="232D37"/>
-                </a:solidFill>
-                <a:latin typeface="Aptos Display"/>
-              </a:defRPr>
-            </a:pPr>
-            <a:r>
-              <a:t>Pure layout rule</a:t>
-            </a:r>
-          </a:p>
-          <a:p>
-            <a:pPr>
-              <a:spcBef>
-                <a:spcPts val="300"/>
-              </a:spcBef>
-              <a:defRPr sz="1200">
-                <a:solidFill>
-                  <a:srgbClr val="232D37"/>
-                </a:solidFill>
-                <a:latin typeface="Aptos"/>
-              </a:defRPr>
-            </a:pPr>
-            <a:r>
-              <a:t>moveIncomeCard is the pure reorder operation. It changes only the shared card order; it does not mutate inputs, account balances, or any computed projection row.</a:t>
-            </a:r>
-          </a:p>
-        </p:txBody>
-      </p:sp>
-      <p:sp>
-        <p:nvSpPr>
-          <p:cNvPr id="19" name="Rectangle 18"/>
-          <p:cNvSpPr/>
-          <p:nvPr/>
-        </p:nvSpPr>
-        <p:spPr>
-          <a:xfrm>
-            <a:off x="1143000" y="3703320"/>
-            <a:ext cx="82296" cy="1188720"/>
-          </a:xfrm>
-          <a:prstGeom prst="rect">
-            <a:avLst/>
-          </a:prstGeom>
-          <a:solidFill>
-            <a:srgbClr val="168F8D"/>
-          </a:solidFill>
-          <a:ln>
-            <a:noFill/>
-          </a:ln>
-        </p:spPr>
-        <p:style>
-          <a:lnRef idx="1">
-            <a:schemeClr val="accent1"/>
-          </a:lnRef>
-          <a:fillRef idx="3">
-            <a:schemeClr val="accent1"/>
-          </a:fillRef>
-          <a:effectRef idx="2">
-            <a:schemeClr val="accent1"/>
-          </a:effectRef>
-          <a:fontRef idx="minor">
-            <a:schemeClr val="lt1"/>
-          </a:fontRef>
-        </p:style>
-        <p:txBody>
-          <a:bodyPr rtlCol="0" anchor="ctr"/>
-          <a:lstStyle/>
-          <a:p>
-            <a:pPr algn="ctr"/>
-          </a:p>
-        </p:txBody>
-      </p:sp>
-      <p:sp>
-        <p:nvSpPr>
-          <p:cNvPr id="20" name="Rectangle 19"/>
+          <p:cNvPr id="10" name="Rectangle 9"/>
           <p:cNvSpPr/>
           <p:nvPr/>
         </p:nvSpPr>
@@ -8489,7 +7859,7 @@
       </p:sp>
       <p:sp>
         <p:nvSpPr>
-          <p:cNvPr id="21" name="TextBox 20"/>
+          <p:cNvPr id="11" name="TextBox 10"/>
           <p:cNvSpPr txBox="1"/>
           <p:nvPr/>
         </p:nvSpPr>
@@ -8518,7 +7888,7 @@
               </a:defRPr>
             </a:pPr>
             <a:r>
-              <a:t>Retirement Income Planner • Architecture overview • Print, tax-detail, and customizable income-layout update</a:t>
+              <a:t>Retirement Income Planner • Architecture overview • MAGI, IRMAA-as-tax, and enhanced companion-chart update</a:t>
             </a:r>
           </a:p>
         </p:txBody>
@@ -8580,7 +7950,7 @@
               </a:defRPr>
             </a:pPr>
             <a:r>
-              <a:t>Markdown documentation gains nested-list support</a:t>
+              <a:t>Unified overlays and legend conventions</a:t>
             </a:r>
           </a:p>
         </p:txBody>
@@ -8616,7 +7986,7 @@
               </a:defRPr>
             </a:pPr>
             <a:r>
-              <a:t>The shared Markdown renderer now represents structured guidance more faithfully without adding a network dependency.</a:t>
+              <a:t>Reference lines now use one visual language across income, MAGI, tax, and Social Security views.</a:t>
             </a:r>
           </a:p>
         </p:txBody>
@@ -8629,8 +7999,170 @@
         </p:nvSpPr>
         <p:spPr>
           <a:xfrm>
-            <a:off x="685800" y="1234440"/>
-            <a:ext cx="3246120" cy="4434840"/>
+            <a:off x="502920" y="1170432"/>
+            <a:ext cx="3337560" cy="4526280"/>
+          </a:xfrm>
+          <a:prstGeom prst="roundRect">
+            <a:avLst/>
+          </a:prstGeom>
+          <a:solidFill>
+            <a:srgbClr val="F7EFFF"/>
+          </a:solidFill>
+          <a:ln w="13970">
+            <a:solidFill>
+              <a:srgbClr val="7852B0"/>
+            </a:solidFill>
+          </a:ln>
+        </p:spPr>
+        <p:style>
+          <a:lnRef idx="1">
+            <a:schemeClr val="accent1"/>
+          </a:lnRef>
+          <a:fillRef idx="3">
+            <a:schemeClr val="accent1"/>
+          </a:fillRef>
+          <a:effectRef idx="2">
+            <a:schemeClr val="accent1"/>
+          </a:effectRef>
+          <a:fontRef idx="minor">
+            <a:schemeClr val="lt1"/>
+          </a:fontRef>
+        </p:style>
+        <p:txBody>
+          <a:bodyPr rtlCol="0" anchor="ctr" lIns="182880" rIns="100584" tIns="91440"/>
+          <a:lstStyle/>
+          <a:p>
+            <a:pPr algn="ctr">
+              <a:defRPr sz="1700" b="1">
+                <a:solidFill>
+                  <a:srgbClr val="232D37"/>
+                </a:solidFill>
+                <a:latin typeface="Aptos Display"/>
+              </a:defRPr>
+            </a:pPr>
+            <a:r>
+              <a:t>Overlay convention</a:t>
+            </a:r>
+          </a:p>
+          <a:p>
+            <a:pPr>
+              <a:spcBef>
+                <a:spcPts val="300"/>
+              </a:spcBef>
+              <a:defRPr sz="1200">
+                <a:solidFill>
+                  <a:srgbClr val="232D37"/>
+                </a:solidFill>
+                <a:latin typeface="Aptos"/>
+              </a:defRPr>
+            </a:pPr>
+            <a:r>
+              <a:t>OVERLAY_COLOR is black.</a:t>
+            </a:r>
+          </a:p>
+          <a:p>
+            <a:pPr>
+              <a:spcBef>
+                <a:spcPts val="300"/>
+              </a:spcBef>
+              <a:defRPr sz="1200">
+                <a:solidFill>
+                  <a:srgbClr val="232D37"/>
+                </a:solidFill>
+                <a:latin typeface="Aptos"/>
+              </a:defRPr>
+            </a:pPr>
+            <a:r>
+              <a:t>Dashed horizontal lines are labeled with de-cluttered text.</a:t>
+            </a:r>
+          </a:p>
+          <a:p>
+            <a:pPr>
+              <a:spcBef>
+                <a:spcPts val="300"/>
+              </a:spcBef>
+              <a:defRPr sz="1200">
+                <a:solidFill>
+                  <a:srgbClr val="232D37"/>
+                </a:solidFill>
+                <a:latin typeface="Aptos"/>
+              </a:defRPr>
+            </a:pPr>
+            <a:r>
+              <a:t>Income IRMAA overlay is registered again as magiOverlay.</a:t>
+            </a:r>
+          </a:p>
+          <a:p>
+            <a:pPr>
+              <a:spcBef>
+                <a:spcPts val="300"/>
+              </a:spcBef>
+              <a:defRPr sz="1200">
+                <a:solidFill>
+                  <a:srgbClr val="232D37"/>
+                </a:solidFill>
+                <a:latin typeface="Aptos"/>
+              </a:defRPr>
+            </a:pPr>
+            <a:r>
+              <a:t>Tax bracket overlay marks ordinary-tax ceilings.</a:t>
+            </a:r>
+          </a:p>
+        </p:txBody>
+      </p:sp>
+      <p:sp>
+        <p:nvSpPr>
+          <p:cNvPr id="5" name="Rectangle 4"/>
+          <p:cNvSpPr/>
+          <p:nvPr/>
+        </p:nvSpPr>
+        <p:spPr>
+          <a:xfrm>
+            <a:off x="502920" y="1170432"/>
+            <a:ext cx="82296" cy="4526280"/>
+          </a:xfrm>
+          <a:prstGeom prst="rect">
+            <a:avLst/>
+          </a:prstGeom>
+          <a:solidFill>
+            <a:srgbClr val="7852B0"/>
+          </a:solidFill>
+          <a:ln>
+            <a:noFill/>
+          </a:ln>
+        </p:spPr>
+        <p:style>
+          <a:lnRef idx="1">
+            <a:schemeClr val="accent1"/>
+          </a:lnRef>
+          <a:fillRef idx="3">
+            <a:schemeClr val="accent1"/>
+          </a:fillRef>
+          <a:effectRef idx="2">
+            <a:schemeClr val="accent1"/>
+          </a:effectRef>
+          <a:fontRef idx="minor">
+            <a:schemeClr val="lt1"/>
+          </a:fontRef>
+        </p:style>
+        <p:txBody>
+          <a:bodyPr rtlCol="0" anchor="ctr"/>
+          <a:lstStyle/>
+          <a:p>
+            <a:pPr algn="ctr"/>
+          </a:p>
+        </p:txBody>
+      </p:sp>
+      <p:sp>
+        <p:nvSpPr>
+          <p:cNvPr id="6" name="Rounded Rectangle 5"/>
+          <p:cNvSpPr/>
+          <p:nvPr/>
+        </p:nvSpPr>
+        <p:spPr>
+          <a:xfrm>
+            <a:off x="4407408" y="1170432"/>
+            <a:ext cx="3337560" cy="4526280"/>
           </a:xfrm>
           <a:prstGeom prst="roundRect">
             <a:avLst/>
@@ -8671,7 +8203,7 @@
               </a:defRPr>
             </a:pPr>
             <a:r>
-              <a:t>Supported list grammar</a:t>
+              <a:t>Legend convention</a:t>
             </a:r>
           </a:p>
           <a:p>
@@ -8687,7 +8219,7 @@
               </a:defRPr>
             </a:pPr>
             <a:r>
-              <a:t>Bullet markers: -, *, +, •</a:t>
+              <a:t>legendItem renders all legend entries.</a:t>
             </a:r>
           </a:p>
           <a:p>
@@ -8703,7 +8235,7 @@
               </a:defRPr>
             </a:pPr>
             <a:r>
-              <a:t>Numbered lists</a:t>
+              <a:t>legendDashStyle creates a matching dashed swatch.</a:t>
             </a:r>
           </a:p>
           <a:p>
@@ -8719,37 +8251,21 @@
               </a:defRPr>
             </a:pPr>
             <a:r>
-              <a:t>Nest with two or more spaces or one tab per level</a:t>
-            </a:r>
-          </a:p>
-          <a:p>
-            <a:pPr>
-              <a:spcBef>
-                <a:spcPts val="300"/>
-              </a:spcBef>
-              <a:defRPr sz="1200">
-                <a:solidFill>
-                  <a:srgbClr val="232D37"/>
-                </a:solidFill>
-                <a:latin typeface="Aptos"/>
-              </a:defRPr>
-            </a:pPr>
-            <a:r>
-              <a:t>Indented lines under an item continue that item</a:t>
-            </a:r>
-          </a:p>
-        </p:txBody>
-      </p:sp>
-      <p:sp>
-        <p:nvSpPr>
-          <p:cNvPr id="5" name="Rectangle 4"/>
+              <a:t>Used for IRMAA brackets, ordinary tax brackets, and SS start-age reference lines.</a:t>
+            </a:r>
+          </a:p>
+        </p:txBody>
+      </p:sp>
+      <p:sp>
+        <p:nvSpPr>
+          <p:cNvPr id="7" name="Rectangle 6"/>
           <p:cNvSpPr/>
           <p:nvPr/>
         </p:nvSpPr>
         <p:spPr>
           <a:xfrm>
-            <a:off x="685800" y="1234440"/>
-            <a:ext cx="82296" cy="4434840"/>
+            <a:off x="4407408" y="1170432"/>
+            <a:ext cx="82296" cy="4526280"/>
           </a:xfrm>
           <a:prstGeom prst="rect">
             <a:avLst/>
@@ -8785,14 +8301,14 @@
       </p:sp>
       <p:sp>
         <p:nvSpPr>
-          <p:cNvPr id="6" name="Rounded Rectangle 5"/>
+          <p:cNvPr id="8" name="Rounded Rectangle 7"/>
           <p:cNvSpPr/>
           <p:nvPr/>
         </p:nvSpPr>
         <p:spPr>
           <a:xfrm>
-            <a:off x="4480560" y="1234440"/>
-            <a:ext cx="3246120" cy="4434840"/>
+            <a:off x="8311896" y="1170432"/>
+            <a:ext cx="3337560" cy="4526280"/>
           </a:xfrm>
           <a:prstGeom prst="roundRect">
             <a:avLst/>
@@ -8833,7 +8349,7 @@
               </a:defRPr>
             </a:pPr>
             <a:r>
-              <a:t>Shared rendering path</a:t>
+              <a:t>Readability convention</a:t>
             </a:r>
           </a:p>
           <a:p>
@@ -8849,7 +8365,7 @@
               </a:defRPr>
             </a:pPr>
             <a:r>
-              <a:t>Usage.md and Note4User.md</a:t>
+              <a:t>Companion charts use sparse axis ticks and no redundant legends or notes.</a:t>
             </a:r>
           </a:p>
           <a:p>
@@ -8865,53 +8381,21 @@
               </a:defRPr>
             </a:pPr>
             <a:r>
-              <a:t>openMdPage(file, label)</a:t>
-            </a:r>
-          </a:p>
-          <a:p>
-            <a:pPr>
-              <a:spcBef>
-                <a:spcPts val="300"/>
-              </a:spcBef>
-              <a:defRPr sz="1200">
-                <a:solidFill>
-                  <a:srgbClr val="232D37"/>
-                </a:solidFill>
-                <a:latin typeface="Aptos"/>
-              </a:defRPr>
-            </a:pPr>
-            <a:r>
-              <a:t>mdToHtml converts content at page-open time</a:t>
-            </a:r>
-          </a:p>
-          <a:p>
-            <a:pPr>
-              <a:spcBef>
-                <a:spcPts val="300"/>
-              </a:spcBef>
-              <a:defRPr sz="1200">
-                <a:solidFill>
-                  <a:srgbClr val="232D37"/>
-                </a:solidFill>
-                <a:latin typeface="Aptos"/>
-              </a:defRPr>
-            </a:pPr>
-            <a:r>
-              <a:t>mdPageHtml supplies common shell</a:t>
-            </a:r>
-          </a:p>
-        </p:txBody>
-      </p:sp>
-      <p:sp>
-        <p:nvSpPr>
-          <p:cNvPr id="7" name="Rectangle 6"/>
+              <a:t>Primary charts provide the full story; companions isolate one analytical question.</a:t>
+            </a:r>
+          </a:p>
+        </p:txBody>
+      </p:sp>
+      <p:sp>
+        <p:nvSpPr>
+          <p:cNvPr id="9" name="Rectangle 8"/>
           <p:cNvSpPr/>
           <p:nvPr/>
         </p:nvSpPr>
         <p:spPr>
           <a:xfrm>
-            <a:off x="4480560" y="1234440"/>
-            <a:ext cx="82296" cy="4434840"/>
+            <a:off x="8311896" y="1170432"/>
+            <a:ext cx="82296" cy="4526280"/>
           </a:xfrm>
           <a:prstGeom prst="rect">
             <a:avLst/>
@@ -8947,152 +8431,6 @@
       </p:sp>
       <p:sp>
         <p:nvSpPr>
-          <p:cNvPr id="8" name="Rounded Rectangle 7"/>
-          <p:cNvSpPr/>
-          <p:nvPr/>
-        </p:nvSpPr>
-        <p:spPr>
-          <a:xfrm>
-            <a:off x="8275320" y="1234440"/>
-            <a:ext cx="3246120" cy="4434840"/>
-          </a:xfrm>
-          <a:prstGeom prst="roundRect">
-            <a:avLst/>
-          </a:prstGeom>
-          <a:solidFill>
-            <a:srgbClr val="FFF6E8"/>
-          </a:solidFill>
-          <a:ln w="13970">
-            <a:solidFill>
-              <a:srgbClr val="E5892A"/>
-            </a:solidFill>
-          </a:ln>
-        </p:spPr>
-        <p:style>
-          <a:lnRef idx="1">
-            <a:schemeClr val="accent1"/>
-          </a:lnRef>
-          <a:fillRef idx="3">
-            <a:schemeClr val="accent1"/>
-          </a:fillRef>
-          <a:effectRef idx="2">
-            <a:schemeClr val="accent1"/>
-          </a:effectRef>
-          <a:fontRef idx="minor">
-            <a:schemeClr val="lt1"/>
-          </a:fontRef>
-        </p:style>
-        <p:txBody>
-          <a:bodyPr rtlCol="0" anchor="ctr" lIns="182880" rIns="100584" tIns="91440"/>
-          <a:lstStyle/>
-          <a:p>
-            <a:pPr algn="ctr">
-              <a:defRPr sz="1700" b="1">
-                <a:solidFill>
-                  <a:srgbClr val="232D37"/>
-                </a:solidFill>
-                <a:latin typeface="Aptos Display"/>
-              </a:defRPr>
-            </a:pPr>
-            <a:r>
-              <a:t>Operational benefits</a:t>
-            </a:r>
-          </a:p>
-          <a:p>
-            <a:pPr>
-              <a:spcBef>
-                <a:spcPts val="300"/>
-              </a:spcBef>
-              <a:defRPr sz="1200">
-                <a:solidFill>
-                  <a:srgbClr val="232D37"/>
-                </a:solidFill>
-                <a:latin typeface="Aptos"/>
-              </a:defRPr>
-            </a:pPr>
-            <a:r>
-              <a:t>Docs remain editable without application-code changes.</a:t>
-            </a:r>
-          </a:p>
-          <a:p>
-            <a:pPr>
-              <a:spcBef>
-                <a:spcPts val="300"/>
-              </a:spcBef>
-              <a:defRPr sz="1200">
-                <a:solidFill>
-                  <a:srgbClr val="232D37"/>
-                </a:solidFill>
-                <a:latin typeface="Aptos"/>
-              </a:defRPr>
-            </a:pPr>
-            <a:r>
-              <a:t>No CDN dependency; can work offline when served.</a:t>
-            </a:r>
-          </a:p>
-          <a:p>
-            <a:pPr>
-              <a:spcBef>
-                <a:spcPts val="300"/>
-              </a:spcBef>
-              <a:defRPr sz="1200">
-                <a:solidFill>
-                  <a:srgbClr val="232D37"/>
-                </a:solidFill>
-                <a:latin typeface="Aptos"/>
-              </a:defRPr>
-            </a:pPr>
-            <a:r>
-              <a:t>Under file://, failure page explains browser fetch restriction and workarounds.</a:t>
-            </a:r>
-          </a:p>
-        </p:txBody>
-      </p:sp>
-      <p:sp>
-        <p:nvSpPr>
-          <p:cNvPr id="9" name="Rectangle 8"/>
-          <p:cNvSpPr/>
-          <p:nvPr/>
-        </p:nvSpPr>
-        <p:spPr>
-          <a:xfrm>
-            <a:off x="8275320" y="1234440"/>
-            <a:ext cx="82296" cy="4434840"/>
-          </a:xfrm>
-          <a:prstGeom prst="rect">
-            <a:avLst/>
-          </a:prstGeom>
-          <a:solidFill>
-            <a:srgbClr val="E5892A"/>
-          </a:solidFill>
-          <a:ln>
-            <a:noFill/>
-          </a:ln>
-        </p:spPr>
-        <p:style>
-          <a:lnRef idx="1">
-            <a:schemeClr val="accent1"/>
-          </a:lnRef>
-          <a:fillRef idx="3">
-            <a:schemeClr val="accent1"/>
-          </a:fillRef>
-          <a:effectRef idx="2">
-            <a:schemeClr val="accent1"/>
-          </a:effectRef>
-          <a:fontRef idx="minor">
-            <a:schemeClr val="lt1"/>
-          </a:fontRef>
-        </p:style>
-        <p:txBody>
-          <a:bodyPr rtlCol="0" anchor="ctr"/>
-          <a:lstStyle/>
-          <a:p>
-            <a:pPr algn="ctr"/>
-          </a:p>
-        </p:txBody>
-      </p:sp>
-      <p:sp>
-        <p:nvSpPr>
           <p:cNvPr id="10" name="Rectangle 9"/>
           <p:cNvSpPr/>
           <p:nvPr/>
@@ -9165,7 +8503,7 @@
               </a:defRPr>
             </a:pPr>
             <a:r>
-              <a:t>Retirement Income Planner • Architecture overview • Print, tax-detail, and customizable income-layout update</a:t>
+              <a:t>Retirement Income Planner • Architecture overview • MAGI, IRMAA-as-tax, and enhanced companion-chart update</a:t>
             </a:r>
           </a:p>
         </p:txBody>
@@ -9227,7 +8565,7 @@
               </a:defRPr>
             </a:pPr>
             <a:r>
-              <a:t>Updated display stack and script dependencies</a:t>
+              <a:t>Expanded display architecture</a:t>
             </a:r>
           </a:p>
         </p:txBody>
@@ -9263,7 +8601,7 @@
               </a:defRPr>
             </a:pPr>
             <a:r>
-              <a:t>The update adds print.js and expands tax-chart internals while preserving the global-scope, dependency-ordered loading model.</a:t>
+              <a:t>The display layer gains analytical companion charts without weakening its role as a projection consumer.</a:t>
             </a:r>
           </a:p>
         </p:txBody>
@@ -9276,8 +8614,380 @@
         </p:nvSpPr>
         <p:spPr>
           <a:xfrm>
-            <a:off x="594360" y="1170432"/>
-            <a:ext cx="3337560" cy="4526280"/>
+            <a:off x="502920" y="1143000"/>
+            <a:ext cx="2286000" cy="4526280"/>
+          </a:xfrm>
+          <a:prstGeom prst="roundRect">
+            <a:avLst/>
+          </a:prstGeom>
+          <a:solidFill>
+            <a:srgbClr val="EAF9F4"/>
+          </a:solidFill>
+          <a:ln w="13970">
+            <a:solidFill>
+              <a:srgbClr val="429761"/>
+            </a:solidFill>
+          </a:ln>
+        </p:spPr>
+        <p:style>
+          <a:lnRef idx="1">
+            <a:schemeClr val="accent1"/>
+          </a:lnRef>
+          <a:fillRef idx="3">
+            <a:schemeClr val="accent1"/>
+          </a:fillRef>
+          <a:effectRef idx="2">
+            <a:schemeClr val="accent1"/>
+          </a:effectRef>
+          <a:fontRef idx="minor">
+            <a:schemeClr val="lt1"/>
+          </a:fontRef>
+        </p:style>
+        <p:txBody>
+          <a:bodyPr rtlCol="0" anchor="ctr" lIns="182880" rIns="100584" tIns="91440"/>
+          <a:lstStyle/>
+          <a:p>
+            <a:pPr algn="ctr">
+              <a:defRPr sz="1700" b="1">
+                <a:solidFill>
+                  <a:srgbClr val="232D37"/>
+                </a:solidFill>
+                <a:latin typeface="Aptos Display"/>
+              </a:defRPr>
+            </a:pPr>
+            <a:r>
+              <a:t>Projection rows</a:t>
+            </a:r>
+          </a:p>
+          <a:p>
+            <a:pPr>
+              <a:spcBef>
+                <a:spcPts val="300"/>
+              </a:spcBef>
+              <a:defRPr sz="1200">
+                <a:solidFill>
+                  <a:srgbClr val="232D37"/>
+                </a:solidFill>
+                <a:latin typeface="Aptos"/>
+              </a:defRPr>
+            </a:pPr>
+            <a:r>
+              <a:t>magi</a:t>
+            </a:r>
+          </a:p>
+          <a:p>
+            <a:pPr>
+              <a:spcBef>
+                <a:spcPts val="300"/>
+              </a:spcBef>
+              <a:defRPr sz="1200">
+                <a:solidFill>
+                  <a:srgbClr val="232D37"/>
+                </a:solidFill>
+                <a:latin typeface="Aptos"/>
+              </a:defRPr>
+            </a:pPr>
+            <a:r>
+              <a:t>irmaaSurcharge</a:t>
+            </a:r>
+          </a:p>
+          <a:p>
+            <a:pPr>
+              <a:spcBef>
+                <a:spcPts val="300"/>
+              </a:spcBef>
+              <a:defRPr sz="1200">
+                <a:solidFill>
+                  <a:srgbClr val="232D37"/>
+                </a:solidFill>
+                <a:latin typeface="Aptos"/>
+              </a:defRPr>
+            </a:pPr>
+            <a:r>
+              <a:t>Tax-stack fields</a:t>
+            </a:r>
+          </a:p>
+          <a:p>
+            <a:pPr>
+              <a:spcBef>
+                <a:spcPts val="300"/>
+              </a:spcBef>
+              <a:defRPr sz="1200">
+                <a:solidFill>
+                  <a:srgbClr val="232D37"/>
+                </a:solidFill>
+                <a:latin typeface="Aptos"/>
+              </a:defRPr>
+            </a:pPr>
+            <a:r>
+              <a:t>Income components</a:t>
+            </a:r>
+          </a:p>
+          <a:p>
+            <a:pPr>
+              <a:spcBef>
+                <a:spcPts val="300"/>
+              </a:spcBef>
+              <a:defRPr sz="1200">
+                <a:solidFill>
+                  <a:srgbClr val="232D37"/>
+                </a:solidFill>
+                <a:latin typeface="Aptos"/>
+              </a:defRPr>
+            </a:pPr>
+            <a:r>
+              <a:t>Filing status and ages</a:t>
+            </a:r>
+          </a:p>
+        </p:txBody>
+      </p:sp>
+      <p:sp>
+        <p:nvSpPr>
+          <p:cNvPr id="5" name="Rectangle 4"/>
+          <p:cNvSpPr/>
+          <p:nvPr/>
+        </p:nvSpPr>
+        <p:spPr>
+          <a:xfrm>
+            <a:off x="502920" y="1143000"/>
+            <a:ext cx="82296" cy="4526280"/>
+          </a:xfrm>
+          <a:prstGeom prst="rect">
+            <a:avLst/>
+          </a:prstGeom>
+          <a:solidFill>
+            <a:srgbClr val="429761"/>
+          </a:solidFill>
+          <a:ln>
+            <a:noFill/>
+          </a:ln>
+        </p:spPr>
+        <p:style>
+          <a:lnRef idx="1">
+            <a:schemeClr val="accent1"/>
+          </a:lnRef>
+          <a:fillRef idx="3">
+            <a:schemeClr val="accent1"/>
+          </a:fillRef>
+          <a:effectRef idx="2">
+            <a:schemeClr val="accent1"/>
+          </a:effectRef>
+          <a:fontRef idx="minor">
+            <a:schemeClr val="lt1"/>
+          </a:fontRef>
+        </p:style>
+        <p:txBody>
+          <a:bodyPr rtlCol="0" anchor="ctr"/>
+          <a:lstStyle/>
+          <a:p>
+            <a:pPr algn="ctr"/>
+          </a:p>
+        </p:txBody>
+      </p:sp>
+      <p:sp>
+        <p:nvSpPr>
+          <p:cNvPr id="6" name="Rounded Rectangle 5"/>
+          <p:cNvSpPr/>
+          <p:nvPr/>
+        </p:nvSpPr>
+        <p:spPr>
+          <a:xfrm>
+            <a:off x="3200400" y="1143000"/>
+            <a:ext cx="2286000" cy="4526280"/>
+          </a:xfrm>
+          <a:prstGeom prst="roundRect">
+            <a:avLst/>
+          </a:prstGeom>
+          <a:solidFill>
+            <a:srgbClr val="E9F4FF"/>
+          </a:solidFill>
+          <a:ln w="13970">
+            <a:solidFill>
+              <a:srgbClr val="266EB2"/>
+            </a:solidFill>
+          </a:ln>
+        </p:spPr>
+        <p:style>
+          <a:lnRef idx="1">
+            <a:schemeClr val="accent1"/>
+          </a:lnRef>
+          <a:fillRef idx="3">
+            <a:schemeClr val="accent1"/>
+          </a:fillRef>
+          <a:effectRef idx="2">
+            <a:schemeClr val="accent1"/>
+          </a:effectRef>
+          <a:fontRef idx="minor">
+            <a:schemeClr val="lt1"/>
+          </a:fontRef>
+        </p:style>
+        <p:txBody>
+          <a:bodyPr rtlCol="0" anchor="ctr" lIns="182880" rIns="100584" tIns="91440"/>
+          <a:lstStyle/>
+          <a:p>
+            <a:pPr algn="ctr">
+              <a:defRPr sz="1700" b="1">
+                <a:solidFill>
+                  <a:srgbClr val="232D37"/>
+                </a:solidFill>
+                <a:latin typeface="Aptos Display"/>
+              </a:defRPr>
+            </a:pPr>
+            <a:r>
+              <a:t>Primary charts</a:t>
+            </a:r>
+          </a:p>
+          <a:p>
+            <a:pPr>
+              <a:spcBef>
+                <a:spcPts val="300"/>
+              </a:spcBef>
+              <a:defRPr sz="1200">
+                <a:solidFill>
+                  <a:srgbClr val="232D37"/>
+                </a:solidFill>
+                <a:latin typeface="Aptos"/>
+              </a:defRPr>
+            </a:pPr>
+            <a:r>
+              <a:t>Income</a:t>
+            </a:r>
+          </a:p>
+          <a:p>
+            <a:pPr>
+              <a:spcBef>
+                <a:spcPts val="300"/>
+              </a:spcBef>
+              <a:defRPr sz="1200">
+                <a:solidFill>
+                  <a:srgbClr val="232D37"/>
+                </a:solidFill>
+                <a:latin typeface="Aptos"/>
+              </a:defRPr>
+            </a:pPr>
+            <a:r>
+              <a:t>Tax</a:t>
+            </a:r>
+          </a:p>
+          <a:p>
+            <a:pPr>
+              <a:spcBef>
+                <a:spcPts val="300"/>
+              </a:spcBef>
+              <a:defRPr sz="1200">
+                <a:solidFill>
+                  <a:srgbClr val="232D37"/>
+                </a:solidFill>
+                <a:latin typeface="Aptos"/>
+              </a:defRPr>
+            </a:pPr>
+            <a:r>
+              <a:t>Expense</a:t>
+            </a:r>
+          </a:p>
+          <a:p>
+            <a:pPr>
+              <a:spcBef>
+                <a:spcPts val="300"/>
+              </a:spcBef>
+              <a:defRPr sz="1200">
+                <a:solidFill>
+                  <a:srgbClr val="232D37"/>
+                </a:solidFill>
+                <a:latin typeface="Aptos"/>
+              </a:defRPr>
+            </a:pPr>
+            <a:r>
+              <a:t>Asset</a:t>
+            </a:r>
+          </a:p>
+          <a:p>
+            <a:pPr>
+              <a:spcBef>
+                <a:spcPts val="300"/>
+              </a:spcBef>
+              <a:defRPr sz="1200">
+                <a:solidFill>
+                  <a:srgbClr val="232D37"/>
+                </a:solidFill>
+                <a:latin typeface="Aptos"/>
+              </a:defRPr>
+            </a:pPr>
+            <a:r>
+              <a:t>SS / TSS</a:t>
+            </a:r>
+          </a:p>
+          <a:p>
+            <a:pPr>
+              <a:spcBef>
+                <a:spcPts val="300"/>
+              </a:spcBef>
+              <a:defRPr sz="1200">
+                <a:solidFill>
+                  <a:srgbClr val="232D37"/>
+                </a:solidFill>
+                <a:latin typeface="Aptos"/>
+              </a:defRPr>
+            </a:pPr>
+            <a:r>
+              <a:t>Full context, legends, notes</a:t>
+            </a:r>
+          </a:p>
+        </p:txBody>
+      </p:sp>
+      <p:sp>
+        <p:nvSpPr>
+          <p:cNvPr id="7" name="Rectangle 6"/>
+          <p:cNvSpPr/>
+          <p:nvPr/>
+        </p:nvSpPr>
+        <p:spPr>
+          <a:xfrm>
+            <a:off x="3200400" y="1143000"/>
+            <a:ext cx="82296" cy="4526280"/>
+          </a:xfrm>
+          <a:prstGeom prst="rect">
+            <a:avLst/>
+          </a:prstGeom>
+          <a:solidFill>
+            <a:srgbClr val="266EB2"/>
+          </a:solidFill>
+          <a:ln>
+            <a:noFill/>
+          </a:ln>
+        </p:spPr>
+        <p:style>
+          <a:lnRef idx="1">
+            <a:schemeClr val="accent1"/>
+          </a:lnRef>
+          <a:fillRef idx="3">
+            <a:schemeClr val="accent1"/>
+          </a:fillRef>
+          <a:effectRef idx="2">
+            <a:schemeClr val="accent1"/>
+          </a:effectRef>
+          <a:fontRef idx="minor">
+            <a:schemeClr val="lt1"/>
+          </a:fontRef>
+        </p:style>
+        <p:txBody>
+          <a:bodyPr rtlCol="0" anchor="ctr"/>
+          <a:lstStyle/>
+          <a:p>
+            <a:pPr algn="ctr"/>
+          </a:p>
+        </p:txBody>
+      </p:sp>
+      <p:sp>
+        <p:nvSpPr>
+          <p:cNvPr id="8" name="Rounded Rectangle 7"/>
+          <p:cNvSpPr/>
+          <p:nvPr/>
+        </p:nvSpPr>
+        <p:spPr>
+          <a:xfrm>
+            <a:off x="5897880" y="1143000"/>
+            <a:ext cx="2286000" cy="4526280"/>
           </a:xfrm>
           <a:prstGeom prst="roundRect">
             <a:avLst/>
@@ -9318,7 +9028,7 @@
               </a:defRPr>
             </a:pPr>
             <a:r>
-              <a:t>Display additions</a:t>
+              <a:t>Companions</a:t>
             </a:r>
           </a:p>
           <a:p>
@@ -9334,7 +9044,7 @@
               </a:defRPr>
             </a:pPr>
             <a:r>
-              <a:t>print.js</a:t>
+              <a:t>MAGI analysis</a:t>
             </a:r>
           </a:p>
           <a:p>
@@ -9350,7 +9060,7 @@
               </a:defRPr>
             </a:pPr>
             <a:r>
-              <a:t>taxOrdChart / charts.taxOrd</a:t>
+              <a:t>Ordinary-tax detail</a:t>
             </a:r>
           </a:p>
           <a:p>
@@ -9366,7 +9076,7 @@
               </a:defRPr>
             </a:pPr>
             <a:r>
-              <a:t>taxQualChart / charts.taxQual</a:t>
+              <a:t>Qualified-tax detail</a:t>
             </a:r>
           </a:p>
           <a:p>
@@ -9382,36 +9092,20 @@
               </a:defRPr>
             </a:pPr>
             <a:r>
-              <a:t>taxBracketOverlay</a:t>
-            </a:r>
-          </a:p>
-          <a:p>
-            <a:pPr>
-              <a:spcBef>
-                <a:spcPts val="300"/>
-              </a:spcBef>
-              <a:defRPr sz="1200">
-                <a:solidFill>
-                  <a:srgbClr val="232D37"/>
-                </a:solidFill>
-                <a:latin typeface="Aptos"/>
-              </a:defRPr>
-            </a:pPr>
-            <a:r>
-              <a:t>Improved mdPage list parser</a:t>
-            </a:r>
-          </a:p>
-        </p:txBody>
-      </p:sp>
-      <p:sp>
-        <p:nvSpPr>
-          <p:cNvPr id="5" name="Rectangle 4"/>
+              <a:t>Focused external popups</a:t>
+            </a:r>
+          </a:p>
+        </p:txBody>
+      </p:sp>
+      <p:sp>
+        <p:nvSpPr>
+          <p:cNvPr id="9" name="Rectangle 8"/>
           <p:cNvSpPr/>
           <p:nvPr/>
         </p:nvSpPr>
         <p:spPr>
           <a:xfrm>
-            <a:off x="594360" y="1170432"/>
+            <a:off x="5897880" y="1143000"/>
             <a:ext cx="82296" cy="4526280"/>
           </a:xfrm>
           <a:prstGeom prst="rect">
@@ -9448,24 +9142,24 @@
       </p:sp>
       <p:sp>
         <p:nvSpPr>
-          <p:cNvPr id="6" name="Rounded Rectangle 5"/>
+          <p:cNvPr id="10" name="Rounded Rectangle 9"/>
           <p:cNvSpPr/>
           <p:nvPr/>
         </p:nvSpPr>
         <p:spPr>
           <a:xfrm>
-            <a:off x="4407408" y="1170432"/>
-            <a:ext cx="3337560" cy="4526280"/>
+            <a:off x="8595360" y="1143000"/>
+            <a:ext cx="2697480" cy="4526280"/>
           </a:xfrm>
           <a:prstGeom prst="roundRect">
             <a:avLst/>
           </a:prstGeom>
           <a:solidFill>
-            <a:srgbClr val="E9F4FF"/>
+            <a:srgbClr val="FFF6E8"/>
           </a:solidFill>
           <a:ln w="13970">
             <a:solidFill>
-              <a:srgbClr val="266EB2"/>
+              <a:srgbClr val="E5892A"/>
             </a:solidFill>
           </a:ln>
         </p:spPr>
@@ -9496,7 +9190,7 @@
               </a:defRPr>
             </a:pPr>
             <a:r>
-              <a:t>Chart registry impact</a:t>
+              <a:t>Shared services</a:t>
             </a:r>
           </a:p>
           <a:p>
@@ -9512,7 +9206,7 @@
               </a:defRPr>
             </a:pPr>
             <a:r>
-              <a:t>Registry owns primary and companion tax instances.</a:t>
+              <a:t>Chart registry lifecycle</a:t>
             </a:r>
           </a:p>
           <a:p>
@@ -9528,7 +9222,7 @@
               </a:defRPr>
             </a:pPr>
             <a:r>
-              <a:t>destroyAllCharts and resizeAllCharts cover every live chart.</a:t>
+              <a:t>upsertLineChart updates</a:t>
             </a:r>
           </a:p>
           <a:p>
@@ -9544,27 +9238,59 @@
               </a:defRPr>
             </a:pPr>
             <a:r>
-              <a:t>Print loops the registry rather than maintaining separate chart lists.</a:t>
-            </a:r>
-          </a:p>
-        </p:txBody>
-      </p:sp>
-      <p:sp>
-        <p:nvSpPr>
-          <p:cNvPr id="7" name="Rectangle 6"/>
+              <a:t>Overlay plugins</a:t>
+            </a:r>
+          </a:p>
+          <a:p>
+            <a:pPr>
+              <a:spcBef>
+                <a:spcPts val="300"/>
+              </a:spcBef>
+              <a:defRPr sz="1200">
+                <a:solidFill>
+                  <a:srgbClr val="232D37"/>
+                </a:solidFill>
+                <a:latin typeface="Aptos"/>
+              </a:defRPr>
+            </a:pPr>
+            <a:r>
+              <a:t>External tooltip handler</a:t>
+            </a:r>
+          </a:p>
+          <a:p>
+            <a:pPr>
+              <a:spcBef>
+                <a:spcPts val="300"/>
+              </a:spcBef>
+              <a:defRPr sz="1200">
+                <a:solidFill>
+                  <a:srgbClr val="232D37"/>
+                </a:solidFill>
+                <a:latin typeface="Aptos"/>
+              </a:defRPr>
+            </a:pPr>
+            <a:r>
+              <a:t>Locked scales and Rescale</a:t>
+            </a:r>
+          </a:p>
+        </p:txBody>
+      </p:sp>
+      <p:sp>
+        <p:nvSpPr>
+          <p:cNvPr id="11" name="Rectangle 10"/>
           <p:cNvSpPr/>
           <p:nvPr/>
         </p:nvSpPr>
         <p:spPr>
           <a:xfrm>
-            <a:off x="4407408" y="1170432"/>
+            <a:off x="8595360" y="1143000"/>
             <a:ext cx="82296" cy="4526280"/>
           </a:xfrm>
           <a:prstGeom prst="rect">
             <a:avLst/>
           </a:prstGeom>
           <a:solidFill>
-            <a:srgbClr val="266EB2"/>
+            <a:srgbClr val="E5892A"/>
           </a:solidFill>
           <a:ln>
             <a:noFill/>
@@ -9592,155 +9318,44 @@
           </a:p>
         </p:txBody>
       </p:sp>
-      <p:sp>
-        <p:nvSpPr>
-          <p:cNvPr id="8" name="Rounded Rectangle 7"/>
-          <p:cNvSpPr/>
-          <p:nvPr/>
-        </p:nvSpPr>
-        <p:spPr>
-          <a:xfrm>
-            <a:off x="8220456" y="1170432"/>
-            <a:ext cx="3337560" cy="4526280"/>
-          </a:xfrm>
-          <a:prstGeom prst="roundRect">
-            <a:avLst/>
-          </a:prstGeom>
-          <a:solidFill>
-            <a:srgbClr val="EAF9F4"/>
-          </a:solidFill>
-          <a:ln w="13970">
+      <p:cxnSp>
+        <p:nvCxnSpPr>
+          <p:cNvPr id="12" name="Connector 11"/>
+          <p:cNvCxnSpPr/>
+          <p:nvPr/>
+        </p:nvCxnSpPr>
+        <p:spPr>
+          <a:xfrm>
+            <a:off x="2834640" y="3383280"/>
+            <a:ext cx="228600" cy="0"/>
+          </a:xfrm>
+          <a:prstGeom prst="line">
+            <a:avLst/>
+          </a:prstGeom>
+          <a:ln w="22860">
             <a:solidFill>
               <a:srgbClr val="429761"/>
             </a:solidFill>
           </a:ln>
         </p:spPr>
         <p:style>
-          <a:lnRef idx="1">
+          <a:lnRef idx="2">
             <a:schemeClr val="accent1"/>
           </a:lnRef>
-          <a:fillRef idx="3">
+          <a:fillRef idx="0">
             <a:schemeClr val="accent1"/>
           </a:fillRef>
-          <a:effectRef idx="2">
+          <a:effectRef idx="1">
             <a:schemeClr val="accent1"/>
           </a:effectRef>
           <a:fontRef idx="minor">
-            <a:schemeClr val="lt1"/>
+            <a:schemeClr val="tx1"/>
           </a:fontRef>
         </p:style>
-        <p:txBody>
-          <a:bodyPr rtlCol="0" anchor="ctr" lIns="182880" rIns="100584" tIns="91440"/>
-          <a:lstStyle/>
-          <a:p>
-            <a:pPr algn="ctr">
-              <a:defRPr sz="1700" b="1">
-                <a:solidFill>
-                  <a:srgbClr val="232D37"/>
-                </a:solidFill>
-                <a:latin typeface="Aptos Display"/>
-              </a:defRPr>
-            </a:pPr>
-            <a:r>
-              <a:t>Style and markup impact</a:t>
-            </a:r>
-          </a:p>
-          <a:p>
-            <a:pPr>
-              <a:spcBef>
-                <a:spcPts val="300"/>
-              </a:spcBef>
-              <a:defRPr sz="1200">
-                <a:solidFill>
-                  <a:srgbClr val="232D37"/>
-                </a:solidFill>
-                <a:latin typeface="Aptos"/>
-              </a:defRPr>
-            </a:pPr>
-            <a:r>
-              <a:t>css/styles.css holds print-ready rules outside @media print so they apply before print media.</a:t>
-            </a:r>
-          </a:p>
-          <a:p>
-            <a:pPr>
-              <a:spcBef>
-                <a:spcPts val="300"/>
-              </a:spcBef>
-              <a:defRPr sz="1200">
-                <a:solidFill>
-                  <a:srgbClr val="232D37"/>
-                </a:solidFill>
-                <a:latin typeface="Aptos"/>
-              </a:defRPr>
-            </a:pPr>
-            <a:r>
-              <a:t>index.html adds companion canvases and Print action.</a:t>
-            </a:r>
-          </a:p>
-          <a:p>
-            <a:pPr>
-              <a:spcBef>
-                <a:spcPts val="300"/>
-              </a:spcBef>
-              <a:defRPr sz="1200">
-                <a:solidFill>
-                  <a:srgbClr val="232D37"/>
-                </a:solidFill>
-                <a:latin typeface="Aptos"/>
-              </a:defRPr>
-            </a:pPr>
-            <a:r>
-              <a:t>Plain scripts still load in dependency order before app.js.</a:t>
-            </a:r>
-          </a:p>
-        </p:txBody>
-      </p:sp>
-      <p:sp>
-        <p:nvSpPr>
-          <p:cNvPr id="9" name="Rectangle 8"/>
-          <p:cNvSpPr/>
-          <p:nvPr/>
-        </p:nvSpPr>
-        <p:spPr>
-          <a:xfrm>
-            <a:off x="8220456" y="1170432"/>
-            <a:ext cx="82296" cy="4526280"/>
-          </a:xfrm>
-          <a:prstGeom prst="rect">
-            <a:avLst/>
-          </a:prstGeom>
-          <a:solidFill>
-            <a:srgbClr val="429761"/>
-          </a:solidFill>
-          <a:ln>
-            <a:noFill/>
-          </a:ln>
-        </p:spPr>
-        <p:style>
-          <a:lnRef idx="1">
-            <a:schemeClr val="accent1"/>
-          </a:lnRef>
-          <a:fillRef idx="3">
-            <a:schemeClr val="accent1"/>
-          </a:fillRef>
-          <a:effectRef idx="2">
-            <a:schemeClr val="accent1"/>
-          </a:effectRef>
-          <a:fontRef idx="minor">
-            <a:schemeClr val="lt1"/>
-          </a:fontRef>
-        </p:style>
-        <p:txBody>
-          <a:bodyPr rtlCol="0" anchor="ctr"/>
-          <a:lstStyle/>
-          <a:p>
-            <a:pPr algn="ctr"/>
-          </a:p>
-        </p:txBody>
-      </p:sp>
-      <p:sp>
-        <p:nvSpPr>
-          <p:cNvPr id="10" name="Rectangle 9"/>
+      </p:cxnSp>
+      <p:sp>
+        <p:nvSpPr>
+          <p:cNvPr id="13" name="Rectangle 12"/>
           <p:cNvSpPr/>
           <p:nvPr/>
         </p:nvSpPr>
@@ -9783,7 +9398,7 @@
       </p:sp>
       <p:sp>
         <p:nvSpPr>
-          <p:cNvPr id="11" name="TextBox 10"/>
+          <p:cNvPr id="14" name="TextBox 13"/>
           <p:cNvSpPr txBox="1"/>
           <p:nvPr/>
         </p:nvSpPr>
@@ -9812,7 +9427,235 @@
               </a:defRPr>
             </a:pPr>
             <a:r>
-              <a:t>Retirement Income Planner • Architecture overview • Print, tax-detail, and customizable income-layout update</a:t>
+              <a:t>Retirement Income Planner • Architecture overview • MAGI, IRMAA-as-tax, and enhanced companion-chart update</a:t>
+            </a:r>
+          </a:p>
+        </p:txBody>
+      </p:sp>
+      <p:cxnSp>
+        <p:nvCxnSpPr>
+          <p:cNvPr id="15" name="Connector 14"/>
+          <p:cNvCxnSpPr/>
+          <p:nvPr/>
+        </p:nvCxnSpPr>
+        <p:spPr>
+          <a:xfrm>
+            <a:off x="5532120" y="3383280"/>
+            <a:ext cx="228600" cy="0"/>
+          </a:xfrm>
+          <a:prstGeom prst="line">
+            <a:avLst/>
+          </a:prstGeom>
+          <a:ln w="22860">
+            <a:solidFill>
+              <a:srgbClr val="266EB2"/>
+            </a:solidFill>
+          </a:ln>
+        </p:spPr>
+        <p:style>
+          <a:lnRef idx="2">
+            <a:schemeClr val="accent1"/>
+          </a:lnRef>
+          <a:fillRef idx="0">
+            <a:schemeClr val="accent1"/>
+          </a:fillRef>
+          <a:effectRef idx="1">
+            <a:schemeClr val="accent1"/>
+          </a:effectRef>
+          <a:fontRef idx="minor">
+            <a:schemeClr val="tx1"/>
+          </a:fontRef>
+        </p:style>
+      </p:cxnSp>
+      <p:sp>
+        <p:nvSpPr>
+          <p:cNvPr id="16" name="Rectangle 15"/>
+          <p:cNvSpPr/>
+          <p:nvPr/>
+        </p:nvSpPr>
+        <p:spPr>
+          <a:xfrm>
+            <a:off x="502920" y="6473952"/>
+            <a:ext cx="11183112" cy="13716"/>
+          </a:xfrm>
+          <a:prstGeom prst="rect">
+            <a:avLst/>
+          </a:prstGeom>
+          <a:solidFill>
+            <a:srgbClr val="D2DCE5"/>
+          </a:solidFill>
+          <a:ln>
+            <a:noFill/>
+          </a:ln>
+        </p:spPr>
+        <p:style>
+          <a:lnRef idx="1">
+            <a:schemeClr val="accent1"/>
+          </a:lnRef>
+          <a:fillRef idx="3">
+            <a:schemeClr val="accent1"/>
+          </a:fillRef>
+          <a:effectRef idx="2">
+            <a:schemeClr val="accent1"/>
+          </a:effectRef>
+          <a:fontRef idx="minor">
+            <a:schemeClr val="lt1"/>
+          </a:fontRef>
+        </p:style>
+        <p:txBody>
+          <a:bodyPr rtlCol="0" anchor="ctr"/>
+          <a:lstStyle/>
+          <a:p>
+            <a:pPr algn="ctr"/>
+          </a:p>
+        </p:txBody>
+      </p:sp>
+      <p:sp>
+        <p:nvSpPr>
+          <p:cNvPr id="17" name="TextBox 16"/>
+          <p:cNvSpPr txBox="1"/>
+          <p:nvPr/>
+        </p:nvSpPr>
+        <p:spPr>
+          <a:xfrm>
+            <a:off x="530352" y="6510528"/>
+            <a:ext cx="10881360" cy="146304"/>
+          </a:xfrm>
+          <a:prstGeom prst="rect">
+            <a:avLst/>
+          </a:prstGeom>
+          <a:noFill/>
+        </p:spPr>
+        <p:txBody>
+          <a:bodyPr wrap="none" anchor="ctr">
+            <a:spAutoFit/>
+          </a:bodyPr>
+          <a:lstStyle/>
+          <a:p>
+            <a:pPr algn="l">
+              <a:defRPr sz="850" b="0">
+                <a:solidFill>
+                  <a:srgbClr val="5D6C7A"/>
+                </a:solidFill>
+                <a:latin typeface="Aptos"/>
+              </a:defRPr>
+            </a:pPr>
+            <a:r>
+              <a:t>Retirement Income Planner • Architecture overview • MAGI, IRMAA-as-tax, and enhanced companion-chart update</a:t>
+            </a:r>
+          </a:p>
+        </p:txBody>
+      </p:sp>
+      <p:cxnSp>
+        <p:nvCxnSpPr>
+          <p:cNvPr id="18" name="Connector 17"/>
+          <p:cNvCxnSpPr/>
+          <p:nvPr/>
+        </p:nvCxnSpPr>
+        <p:spPr>
+          <a:xfrm>
+            <a:off x="8229600" y="3383280"/>
+            <a:ext cx="228600" cy="0"/>
+          </a:xfrm>
+          <a:prstGeom prst="line">
+            <a:avLst/>
+          </a:prstGeom>
+          <a:ln w="22860">
+            <a:solidFill>
+              <a:srgbClr val="7852B0"/>
+            </a:solidFill>
+          </a:ln>
+        </p:spPr>
+        <p:style>
+          <a:lnRef idx="2">
+            <a:schemeClr val="accent1"/>
+          </a:lnRef>
+          <a:fillRef idx="0">
+            <a:schemeClr val="accent1"/>
+          </a:fillRef>
+          <a:effectRef idx="1">
+            <a:schemeClr val="accent1"/>
+          </a:effectRef>
+          <a:fontRef idx="minor">
+            <a:schemeClr val="tx1"/>
+          </a:fontRef>
+        </p:style>
+      </p:cxnSp>
+      <p:sp>
+        <p:nvSpPr>
+          <p:cNvPr id="19" name="Rectangle 18"/>
+          <p:cNvSpPr/>
+          <p:nvPr/>
+        </p:nvSpPr>
+        <p:spPr>
+          <a:xfrm>
+            <a:off x="502920" y="6473952"/>
+            <a:ext cx="11183112" cy="13716"/>
+          </a:xfrm>
+          <a:prstGeom prst="rect">
+            <a:avLst/>
+          </a:prstGeom>
+          <a:solidFill>
+            <a:srgbClr val="D2DCE5"/>
+          </a:solidFill>
+          <a:ln>
+            <a:noFill/>
+          </a:ln>
+        </p:spPr>
+        <p:style>
+          <a:lnRef idx="1">
+            <a:schemeClr val="accent1"/>
+          </a:lnRef>
+          <a:fillRef idx="3">
+            <a:schemeClr val="accent1"/>
+          </a:fillRef>
+          <a:effectRef idx="2">
+            <a:schemeClr val="accent1"/>
+          </a:effectRef>
+          <a:fontRef idx="minor">
+            <a:schemeClr val="lt1"/>
+          </a:fontRef>
+        </p:style>
+        <p:txBody>
+          <a:bodyPr rtlCol="0" anchor="ctr"/>
+          <a:lstStyle/>
+          <a:p>
+            <a:pPr algn="ctr"/>
+          </a:p>
+        </p:txBody>
+      </p:sp>
+      <p:sp>
+        <p:nvSpPr>
+          <p:cNvPr id="20" name="TextBox 19"/>
+          <p:cNvSpPr txBox="1"/>
+          <p:nvPr/>
+        </p:nvSpPr>
+        <p:spPr>
+          <a:xfrm>
+            <a:off x="530352" y="6510528"/>
+            <a:ext cx="10881360" cy="146304"/>
+          </a:xfrm>
+          <a:prstGeom prst="rect">
+            <a:avLst/>
+          </a:prstGeom>
+          <a:noFill/>
+        </p:spPr>
+        <p:txBody>
+          <a:bodyPr wrap="none" anchor="ctr">
+            <a:spAutoFit/>
+          </a:bodyPr>
+          <a:lstStyle/>
+          <a:p>
+            <a:pPr algn="l">
+              <a:defRPr sz="850" b="0">
+                <a:solidFill>
+                  <a:srgbClr val="5D6C7A"/>
+                </a:solidFill>
+                <a:latin typeface="Aptos"/>
+              </a:defRPr>
+            </a:pPr>
+            <a:r>
+              <a:t>Retirement Income Planner • Architecture overview • MAGI, IRMAA-as-tax, and enhanced companion-chart update</a:t>
             </a:r>
           </a:p>
         </p:txBody>
@@ -9874,7 +9717,7 @@
               </a:defRPr>
             </a:pPr>
             <a:r>
-              <a:t>Guardrails for interaction and reporting features</a:t>
+              <a:t>Guardrails for future analytical views</a:t>
             </a:r>
           </a:p>
         </p:txBody>
@@ -9910,7 +9753,7 @@
               </a:defRPr>
             </a:pPr>
             <a:r>
-              <a:t>The update reinforces a consistent rule: UI conveniences may change presentation state, but not financial meaning.</a:t>
+              <a:t>The MAGI and IRMAA enhancements preserve the essential architecture: Compute owns facts; Display improves interpretation.</a:t>
             </a:r>
           </a:p>
         </p:txBody>
@@ -9924,6 +9767,136 @@
         <p:spPr>
           <a:xfrm>
             <a:off x="640080" y="1188720"/>
+            <a:ext cx="3383280" cy="4526280"/>
+          </a:xfrm>
+          <a:prstGeom prst="roundRect">
+            <a:avLst/>
+          </a:prstGeom>
+          <a:solidFill>
+            <a:srgbClr val="EAF9F4"/>
+          </a:solidFill>
+          <a:ln w="13970">
+            <a:solidFill>
+              <a:srgbClr val="429761"/>
+            </a:solidFill>
+          </a:ln>
+        </p:spPr>
+        <p:style>
+          <a:lnRef idx="1">
+            <a:schemeClr val="accent1"/>
+          </a:lnRef>
+          <a:fillRef idx="3">
+            <a:schemeClr val="accent1"/>
+          </a:fillRef>
+          <a:effectRef idx="2">
+            <a:schemeClr val="accent1"/>
+          </a:effectRef>
+          <a:fontRef idx="minor">
+            <a:schemeClr val="lt1"/>
+          </a:fontRef>
+        </p:style>
+        <p:txBody>
+          <a:bodyPr rtlCol="0" anchor="ctr" lIns="182880" rIns="100584" tIns="91440"/>
+          <a:lstStyle/>
+          <a:p>
+            <a:pPr algn="ctr">
+              <a:defRPr sz="1700" b="1">
+                <a:solidFill>
+                  <a:srgbClr val="232D37"/>
+                </a:solidFill>
+                <a:latin typeface="Aptos Display"/>
+              </a:defRPr>
+            </a:pPr>
+            <a:r>
+              <a:t>Add to projection first</a:t>
+            </a:r>
+          </a:p>
+          <a:p>
+            <a:pPr>
+              <a:spcBef>
+                <a:spcPts val="300"/>
+              </a:spcBef>
+              <a:defRPr sz="1200">
+                <a:solidFill>
+                  <a:srgbClr val="232D37"/>
+                </a:solidFill>
+                <a:latin typeface="Aptos"/>
+              </a:defRPr>
+            </a:pPr>
+            <a:r>
+              <a:t>Any new financial measure belongs in projection rows before it appears in a chart.</a:t>
+            </a:r>
+          </a:p>
+          <a:p>
+            <a:pPr>
+              <a:spcBef>
+                <a:spcPts val="300"/>
+              </a:spcBef>
+              <a:defRPr sz="1200">
+                <a:solidFill>
+                  <a:srgbClr val="232D37"/>
+                </a:solidFill>
+                <a:latin typeface="Aptos"/>
+              </a:defRPr>
+            </a:pPr>
+            <a:r>
+              <a:t>Keep look-back logic, thresholds, and tax calculation inside Compute.</a:t>
+            </a:r>
+          </a:p>
+        </p:txBody>
+      </p:sp>
+      <p:sp>
+        <p:nvSpPr>
+          <p:cNvPr id="5" name="Rectangle 4"/>
+          <p:cNvSpPr/>
+          <p:nvPr/>
+        </p:nvSpPr>
+        <p:spPr>
+          <a:xfrm>
+            <a:off x="640080" y="1188720"/>
+            <a:ext cx="82296" cy="4526280"/>
+          </a:xfrm>
+          <a:prstGeom prst="rect">
+            <a:avLst/>
+          </a:prstGeom>
+          <a:solidFill>
+            <a:srgbClr val="429761"/>
+          </a:solidFill>
+          <a:ln>
+            <a:noFill/>
+          </a:ln>
+        </p:spPr>
+        <p:style>
+          <a:lnRef idx="1">
+            <a:schemeClr val="accent1"/>
+          </a:lnRef>
+          <a:fillRef idx="3">
+            <a:schemeClr val="accent1"/>
+          </a:fillRef>
+          <a:effectRef idx="2">
+            <a:schemeClr val="accent1"/>
+          </a:effectRef>
+          <a:fontRef idx="minor">
+            <a:schemeClr val="lt1"/>
+          </a:fontRef>
+        </p:style>
+        <p:txBody>
+          <a:bodyPr rtlCol="0" anchor="ctr"/>
+          <a:lstStyle/>
+          <a:p>
+            <a:pPr algn="ctr"/>
+          </a:p>
+        </p:txBody>
+      </p:sp>
+      <p:sp>
+        <p:nvSpPr>
+          <p:cNvPr id="6" name="Rounded Rectangle 5"/>
+          <p:cNvSpPr/>
+          <p:nvPr/>
+        </p:nvSpPr>
+        <p:spPr>
+          <a:xfrm>
+            <a:off x="4407408" y="1188720"/>
             <a:ext cx="3383280" cy="4526280"/>
           </a:xfrm>
           <a:prstGeom prst="roundRect">
@@ -9965,7 +9938,7 @@
               </a:defRPr>
             </a:pPr>
             <a:r>
-              <a:t>Print safely</a:t>
+              <a:t>Keep visual toggles visual</a:t>
             </a:r>
           </a:p>
           <a:p>
@@ -9981,7 +9954,7 @@
               </a:defRPr>
             </a:pPr>
             <a:r>
-              <a:t>Treat printing as a temporary DOM presentation mode.</a:t>
+              <a:t>A presentation checkbox can change datasets, legends, and scale locks.</a:t>
             </a:r>
           </a:p>
           <a:p>
@@ -9997,36 +9970,20 @@
               </a:defRPr>
             </a:pPr>
             <a:r>
-              <a:t>Snapshot charts synchronously.</a:t>
-            </a:r>
-          </a:p>
-          <a:p>
-            <a:pPr>
-              <a:spcBef>
-                <a:spcPts val="300"/>
-              </a:spcBef>
-              <a:defRPr sz="1200">
-                <a:solidFill>
-                  <a:srgbClr val="232D37"/>
-                </a:solidFill>
-                <a:latin typeface="Aptos"/>
-              </a:defRPr>
-            </a:pPr>
-            <a:r>
-              <a:t>Restore the live experience without writing state.</a:t>
-            </a:r>
-          </a:p>
-        </p:txBody>
-      </p:sp>
-      <p:sp>
-        <p:nvSpPr>
-          <p:cNvPr id="5" name="Rectangle 4"/>
+              <a:t>It must not mutate financial inputs or recompute an alternative model.</a:t>
+            </a:r>
+          </a:p>
+        </p:txBody>
+      </p:sp>
+      <p:sp>
+        <p:nvSpPr>
+          <p:cNvPr id="7" name="Rectangle 6"/>
           <p:cNvSpPr/>
           <p:nvPr/>
         </p:nvSpPr>
         <p:spPr>
           <a:xfrm>
-            <a:off x="640080" y="1188720"/>
+            <a:off x="4407408" y="1188720"/>
             <a:ext cx="82296" cy="4526280"/>
           </a:xfrm>
           <a:prstGeom prst="rect">
@@ -10034,136 +9991,6 @@
           </a:prstGeom>
           <a:solidFill>
             <a:srgbClr val="266EB2"/>
-          </a:solidFill>
-          <a:ln>
-            <a:noFill/>
-          </a:ln>
-        </p:spPr>
-        <p:style>
-          <a:lnRef idx="1">
-            <a:schemeClr val="accent1"/>
-          </a:lnRef>
-          <a:fillRef idx="3">
-            <a:schemeClr val="accent1"/>
-          </a:fillRef>
-          <a:effectRef idx="2">
-            <a:schemeClr val="accent1"/>
-          </a:effectRef>
-          <a:fontRef idx="minor">
-            <a:schemeClr val="lt1"/>
-          </a:fontRef>
-        </p:style>
-        <p:txBody>
-          <a:bodyPr rtlCol="0" anchor="ctr"/>
-          <a:lstStyle/>
-          <a:p>
-            <a:pPr algn="ctr"/>
-          </a:p>
-        </p:txBody>
-      </p:sp>
-      <p:sp>
-        <p:nvSpPr>
-          <p:cNvPr id="6" name="Rounded Rectangle 5"/>
-          <p:cNvSpPr/>
-          <p:nvPr/>
-        </p:nvSpPr>
-        <p:spPr>
-          <a:xfrm>
-            <a:off x="4407408" y="1188720"/>
-            <a:ext cx="3383280" cy="4526280"/>
-          </a:xfrm>
-          <a:prstGeom prst="roundRect">
-            <a:avLst/>
-          </a:prstGeom>
-          <a:solidFill>
-            <a:srgbClr val="EAF9F4"/>
-          </a:solidFill>
-          <a:ln w="13970">
-            <a:solidFill>
-              <a:srgbClr val="429761"/>
-            </a:solidFill>
-          </a:ln>
-        </p:spPr>
-        <p:style>
-          <a:lnRef idx="1">
-            <a:schemeClr val="accent1"/>
-          </a:lnRef>
-          <a:fillRef idx="3">
-            <a:schemeClr val="accent1"/>
-          </a:fillRef>
-          <a:effectRef idx="2">
-            <a:schemeClr val="accent1"/>
-          </a:effectRef>
-          <a:fontRef idx="minor">
-            <a:schemeClr val="lt1"/>
-          </a:fontRef>
-        </p:style>
-        <p:txBody>
-          <a:bodyPr rtlCol="0" anchor="ctr" lIns="182880" rIns="100584" tIns="91440"/>
-          <a:lstStyle/>
-          <a:p>
-            <a:pPr algn="ctr">
-              <a:defRPr sz="1700" b="1">
-                <a:solidFill>
-                  <a:srgbClr val="232D37"/>
-                </a:solidFill>
-                <a:latin typeface="Aptos Display"/>
-              </a:defRPr>
-            </a:pPr>
-            <a:r>
-              <a:t>Visualize consistently</a:t>
-            </a:r>
-          </a:p>
-          <a:p>
-            <a:pPr>
-              <a:spcBef>
-                <a:spcPts val="300"/>
-              </a:spcBef>
-              <a:defRPr sz="1200">
-                <a:solidFill>
-                  <a:srgbClr val="232D37"/>
-                </a:solidFill>
-                <a:latin typeface="Aptos"/>
-              </a:defRPr>
-            </a:pPr>
-            <a:r>
-              <a:t>Detail charts must reuse projection data, colors, scale policies, and tooltips.</a:t>
-            </a:r>
-          </a:p>
-          <a:p>
-            <a:pPr>
-              <a:spcBef>
-                <a:spcPts val="300"/>
-              </a:spcBef>
-              <a:defRPr sz="1200">
-                <a:solidFill>
-                  <a:srgbClr val="232D37"/>
-                </a:solidFill>
-                <a:latin typeface="Aptos"/>
-              </a:defRPr>
-            </a:pPr>
-            <a:r>
-              <a:t>Add charts to the registry rather than hand-maintained lifecycle lists.</a:t>
-            </a:r>
-          </a:p>
-        </p:txBody>
-      </p:sp>
-      <p:sp>
-        <p:nvSpPr>
-          <p:cNvPr id="7" name="Rectangle 6"/>
-          <p:cNvSpPr/>
-          <p:nvPr/>
-        </p:nvSpPr>
-        <p:spPr>
-          <a:xfrm>
-            <a:off x="4407408" y="1188720"/>
-            <a:ext cx="82296" cy="4526280"/>
-          </a:xfrm>
-          <a:prstGeom prst="rect">
-            <a:avLst/>
-          </a:prstGeom>
-          <a:solidFill>
-            <a:srgbClr val="429761"/>
           </a:solidFill>
           <a:ln>
             <a:noFill/>
@@ -10241,7 +10068,7 @@
               </a:defRPr>
             </a:pPr>
             <a:r>
-              <a:t>Customize transparently</a:t>
+              <a:t>Design companion charts narrowly</a:t>
             </a:r>
           </a:p>
           <a:p>
@@ -10257,7 +10084,7 @@
               </a:defRPr>
             </a:pPr>
             <a:r>
-              <a:t>Persist display-only preferences such as card order.</a:t>
+              <a:t>Give small charts one analytic job.</a:t>
             </a:r>
           </a:p>
           <a:p>
@@ -10273,7 +10100,7 @@
               </a:defRPr>
             </a:pPr>
             <a:r>
-              <a:t>Normalize saved UI structures during hydration.</a:t>
+              <a:t>Reuse colors, rows, overlay conventions, tooltips, and scale policies.</a:t>
             </a:r>
           </a:p>
           <a:p>
@@ -10289,7 +10116,7 @@
               </a:defRPr>
             </a:pPr>
             <a:r>
-              <a:t>Do not trigger computation for non-financial interaction changes.</a:t>
+              <a:t>Avoid duplicated information and duplicate financial logic.</a:t>
             </a:r>
           </a:p>
         </p:txBody>
@@ -10411,7 +10238,7 @@
               </a:defRPr>
             </a:pPr>
             <a:r>
-              <a:t>Retirement Income Planner • Architecture overview • Print, tax-detail, and customizable income-layout update</a:t>
+              <a:t>Retirement Income Planner • Architecture overview • MAGI, IRMAA-as-tax, and enhanced companion-chart update</a:t>
             </a:r>
           </a:p>
         </p:txBody>

--- a/docs/retirement_income_planner_architecture.pptx
+++ b/docs/retirement_income_planner_architecture.pptx
@@ -3214,7 +3214,7 @@
               </a:defRPr>
             </a:pPr>
             <a:r>
-              <a:t>Updated architecture: dedicated MAGI analysis, IRMAA-as-tax presentation, external companion tooltips, and unified overlay conventions</a:t>
+              <a:t>Updated architecture: bracket-aware Roth conversion optimization, coupled tax-and-sale solving, and conversion-focused asset analysis</a:t>
             </a:r>
           </a:p>
         </p:txBody>
@@ -3269,7 +3269,7 @@
               </a:defRPr>
             </a:pPr>
             <a:r>
-              <a:t>Input &amp; UI flags</a:t>
+              <a:t>Input</a:t>
             </a:r>
           </a:p>
           <a:p>
@@ -3285,7 +3285,7 @@
               </a:defRPr>
             </a:pPr>
             <a:r>
-              <a:t>Existing financial inputs</a:t>
+              <a:t>IRA conversion mode: fixed or bracket-aware</a:t>
             </a:r>
           </a:p>
           <a:p>
@@ -3301,7 +3301,7 @@
               </a:defRPr>
             </a:pPr>
             <a:r>
-              <a:t>View-only IRMAA-as-tax checkbox</a:t>
+              <a:t>Ordinary-tax and IRMAA stop selectors</a:t>
             </a:r>
           </a:p>
           <a:p>
@@ -3317,7 +3317,7 @@
               </a:defRPr>
             </a:pPr>
             <a:r>
-              <a:t>No new tax computation state</a:t>
+              <a:t>Conversion start policy remains separate</a:t>
             </a:r>
           </a:p>
         </p:txBody>
@@ -3431,7 +3431,7 @@
               </a:defRPr>
             </a:pPr>
             <a:r>
-              <a:t>Projection rows include MAGI, IRMAA, tax, income components</a:t>
+              <a:t>Nested conversion search inside annual tax/LTCG solve</a:t>
             </a:r>
           </a:p>
           <a:p>
@@ -3447,7 +3447,23 @@
               </a:defRPr>
             </a:pPr>
             <a:r>
-              <a:t>Single financial source of truth</a:t>
+              <a:t>One-year-at-a-time IRA/Roth simulation</a:t>
+            </a:r>
+          </a:p>
+          <a:p>
+            <a:pPr>
+              <a:spcBef>
+                <a:spcPts val="300"/>
+              </a:spcBef>
+              <a:defRPr sz="1400">
+                <a:solidFill>
+                  <a:srgbClr val="232D37"/>
+                </a:solidFill>
+                <a:latin typeface="Aptos"/>
+              </a:defRPr>
+            </a:pPr>
+            <a:r>
+              <a:t>Projection rows record solved conversions</a:t>
             </a:r>
           </a:p>
         </p:txBody>
@@ -3545,7 +3561,7 @@
               </a:defRPr>
             </a:pPr>
             <a:r>
-              <a:t>Display</a:t>
+              <a:t>Display &amp; export</a:t>
             </a:r>
           </a:p>
           <a:p>
@@ -3561,7 +3577,7 @@
               </a:defRPr>
             </a:pPr>
             <a:r>
-              <a:t>MAGI companion chart</a:t>
+              <a:t>Roth conversion companion chart</a:t>
             </a:r>
           </a:p>
           <a:p>
@@ -3577,7 +3593,7 @@
               </a:defRPr>
             </a:pPr>
             <a:r>
-              <a:t>Three-chart tax detail</a:t>
+              <a:t>Rows feed charts, Excel, formula reference, and chat</a:t>
             </a:r>
           </a:p>
           <a:p>
@@ -3593,7 +3609,7 @@
               </a:defRPr>
             </a:pPr>
             <a:r>
-              <a:t>External tooltips and unified dashed overlays</a:t>
+              <a:t>No consumer recalculates conversion logic</a:t>
             </a:r>
           </a:p>
         </p:txBody>
@@ -3833,7 +3849,7 @@
               </a:defRPr>
             </a:pPr>
             <a:r>
-              <a:t>Presentation-only enhancement</a:t>
+              <a:t>Core capability</a:t>
             </a:r>
           </a:p>
           <a:p>
@@ -3849,7 +3865,7 @@
               </a:defRPr>
             </a:pPr>
             <a:r>
-              <a:t>The new charts and toggle re-express existing projection values; they do not alter AGI, MAGI, IRMAA calculations, tax results, or household cash flow.</a:t>
+              <a:t>The planner can now choose the largest Roth conversion that fits simultaneously under selected ordinary-income and IRMAA limits, while respecting tax, LTCG, and asset-sale interactions.</a:t>
             </a:r>
           </a:p>
         </p:txBody>
@@ -3971,7 +3987,7 @@
               </a:defRPr>
             </a:pPr>
             <a:r>
-              <a:t>Retirement Income Planner • Architecture overview • MAGI, IRMAA-as-tax, and enhanced companion-chart update</a:t>
+              <a:t>Retirement Income Planner • Architecture overview • Bracket-aware Roth-conversion update</a:t>
             </a:r>
           </a:p>
         </p:txBody>
@@ -4069,7 +4085,7 @@
               </a:defRPr>
             </a:pPr>
             <a:r>
-              <a:t>The planner adds a focused MAGI view and makes IRMAA easier to interpret alongside taxes while keeping all underlying financial logic in Compute.</a:t>
+              <a:t>Roth conversions evolve from a fixed annual amount into an optional bracket-aware optimization with explicit limits and convergence diagnostics.</a:t>
             </a:r>
           </a:p>
         </p:txBody>
@@ -4124,7 +4140,7 @@
               </a:defRPr>
             </a:pPr>
             <a:r>
-              <a:t>MAGI chart</a:t>
+              <a:t>Conversion modes</a:t>
             </a:r>
           </a:p>
           <a:p>
@@ -4140,7 +4156,7 @@
               </a:defRPr>
             </a:pPr>
             <a:r>
-              <a:t>Companion to annual income</a:t>
+              <a:t>Fixed: flat annual today’s-dollar amount</a:t>
             </a:r>
           </a:p>
           <a:p>
@@ -4156,7 +4172,7 @@
               </a:defRPr>
             </a:pPr>
             <a:r>
-              <a:t>Source-colored stack sums exactly to row.magi</a:t>
+              <a:t>Bracket: solve largest amount under selected limits</a:t>
             </a:r>
           </a:p>
           <a:p>
@@ -4172,23 +4188,7 @@
               </a:defRPr>
             </a:pPr>
             <a:r>
-              <a:t>IRMAA thresholds and Part B premium increases</a:t>
-            </a:r>
-          </a:p>
-          <a:p>
-            <a:pPr>
-              <a:spcBef>
-                <a:spcPts val="300"/>
-              </a:spcBef>
-              <a:defRPr sz="1200">
-                <a:solidFill>
-                  <a:srgbClr val="232D37"/>
-                </a:solidFill>
-                <a:latin typeface="Aptos"/>
-              </a:defRPr>
-            </a:pPr>
-            <a:r>
-              <a:t>Focused two-line popup</a:t>
+              <a:t>Fixed remains default for backward compatibility</a:t>
             </a:r>
           </a:p>
         </p:txBody>
@@ -4245,6 +4245,152 @@
         <p:spPr>
           <a:xfrm>
             <a:off x="3401568" y="1234440"/>
+            <a:ext cx="2606040" cy="4480560"/>
+          </a:xfrm>
+          <a:prstGeom prst="roundRect">
+            <a:avLst/>
+          </a:prstGeom>
+          <a:solidFill>
+            <a:srgbClr val="FFF6E8"/>
+          </a:solidFill>
+          <a:ln w="13970">
+            <a:solidFill>
+              <a:srgbClr val="E5892A"/>
+            </a:solidFill>
+          </a:ln>
+        </p:spPr>
+        <p:style>
+          <a:lnRef idx="1">
+            <a:schemeClr val="accent1"/>
+          </a:lnRef>
+          <a:fillRef idx="3">
+            <a:schemeClr val="accent1"/>
+          </a:fillRef>
+          <a:effectRef idx="2">
+            <a:schemeClr val="accent1"/>
+          </a:effectRef>
+          <a:fontRef idx="minor">
+            <a:schemeClr val="lt1"/>
+          </a:fontRef>
+        </p:style>
+        <p:txBody>
+          <a:bodyPr rtlCol="0" anchor="ctr" lIns="182880" rIns="100584" tIns="91440"/>
+          <a:lstStyle/>
+          <a:p>
+            <a:pPr algn="ctr">
+              <a:defRPr sz="1700" b="1">
+                <a:solidFill>
+                  <a:srgbClr val="232D37"/>
+                </a:solidFill>
+                <a:latin typeface="Aptos Display"/>
+              </a:defRPr>
+            </a:pPr>
+            <a:r>
+              <a:t>Two limits</a:t>
+            </a:r>
+          </a:p>
+          <a:p>
+            <a:pPr>
+              <a:spcBef>
+                <a:spcPts val="300"/>
+              </a:spcBef>
+              <a:defRPr sz="1200">
+                <a:solidFill>
+                  <a:srgbClr val="232D37"/>
+                </a:solidFill>
+                <a:latin typeface="Aptos"/>
+              </a:defRPr>
+            </a:pPr>
+            <a:r>
+              <a:t>Ordinary taxable-income bracket start</a:t>
+            </a:r>
+          </a:p>
+          <a:p>
+            <a:pPr>
+              <a:spcBef>
+                <a:spcPts val="300"/>
+              </a:spcBef>
+              <a:defRPr sz="1200">
+                <a:solidFill>
+                  <a:srgbClr val="232D37"/>
+                </a:solidFill>
+                <a:latin typeface="Aptos"/>
+              </a:defRPr>
+            </a:pPr>
+            <a:r>
+              <a:t>IRMAA Part B percentage stop</a:t>
+            </a:r>
+          </a:p>
+          <a:p>
+            <a:pPr>
+              <a:spcBef>
+                <a:spcPts val="300"/>
+              </a:spcBef>
+              <a:defRPr sz="1200">
+                <a:solidFill>
+                  <a:srgbClr val="232D37"/>
+                </a:solidFill>
+                <a:latin typeface="Aptos"/>
+              </a:defRPr>
+            </a:pPr>
+            <a:r>
+              <a:t>Both active limits apply with AND logic</a:t>
+            </a:r>
+          </a:p>
+        </p:txBody>
+      </p:sp>
+      <p:sp>
+        <p:nvSpPr>
+          <p:cNvPr id="7" name="Rectangle 6"/>
+          <p:cNvSpPr/>
+          <p:nvPr/>
+        </p:nvSpPr>
+        <p:spPr>
+          <a:xfrm>
+            <a:off x="3401568" y="1234440"/>
+            <a:ext cx="82296" cy="4480560"/>
+          </a:xfrm>
+          <a:prstGeom prst="rect">
+            <a:avLst/>
+          </a:prstGeom>
+          <a:solidFill>
+            <a:srgbClr val="E5892A"/>
+          </a:solidFill>
+          <a:ln>
+            <a:noFill/>
+          </a:ln>
+        </p:spPr>
+        <p:style>
+          <a:lnRef idx="1">
+            <a:schemeClr val="accent1"/>
+          </a:lnRef>
+          <a:fillRef idx="3">
+            <a:schemeClr val="accent1"/>
+          </a:fillRef>
+          <a:effectRef idx="2">
+            <a:schemeClr val="accent1"/>
+          </a:effectRef>
+          <a:fontRef idx="minor">
+            <a:schemeClr val="lt1"/>
+          </a:fontRef>
+        </p:style>
+        <p:txBody>
+          <a:bodyPr rtlCol="0" anchor="ctr"/>
+          <a:lstStyle/>
+          <a:p>
+            <a:pPr algn="ctr"/>
+          </a:p>
+        </p:txBody>
+      </p:sp>
+      <p:sp>
+        <p:nvSpPr>
+          <p:cNvPr id="8" name="Rounded Rectangle 7"/>
+          <p:cNvSpPr/>
+          <p:nvPr/>
+        </p:nvSpPr>
+        <p:spPr>
+          <a:xfrm>
+            <a:off x="6300216" y="1234440"/>
             <a:ext cx="2606040" cy="4480560"/>
           </a:xfrm>
           <a:prstGeom prst="roundRect">
@@ -4286,7 +4432,7 @@
               </a:defRPr>
             </a:pPr>
             <a:r>
-              <a:t>Income chart refinement</a:t>
+              <a:t>Nested solve</a:t>
             </a:r>
           </a:p>
           <a:p>
@@ -4302,7 +4448,7 @@
               </a:defRPr>
             </a:pPr>
             <a:r>
-              <a:t>IRMAA lines move off the primary income chart</a:t>
+              <a:t>Every conversion trial runs full tax ↔ LTCG iteration</a:t>
             </a:r>
           </a:p>
           <a:p>
@@ -4318,7 +4464,7 @@
               </a:defRPr>
             </a:pPr>
             <a:r>
-              <a:t>Legend points readers to MAGI view</a:t>
+              <a:t>Slack is monotonic as conversion rises</a:t>
             </a:r>
           </a:p>
           <a:p>
@@ -4334,20 +4480,20 @@
               </a:defRPr>
             </a:pPr>
             <a:r>
-              <a:t>Primary chart keeps income, AGI, and funding detail</a:t>
-            </a:r>
-          </a:p>
-        </p:txBody>
-      </p:sp>
-      <p:sp>
-        <p:nvSpPr>
-          <p:cNvPr id="7" name="Rectangle 6"/>
+              <a:t>False-position / Illinois search with bisection safeguards</a:t>
+            </a:r>
+          </a:p>
+        </p:txBody>
+      </p:sp>
+      <p:sp>
+        <p:nvSpPr>
+          <p:cNvPr id="9" name="Rectangle 8"/>
           <p:cNvSpPr/>
           <p:nvPr/>
         </p:nvSpPr>
         <p:spPr>
           <a:xfrm>
-            <a:off x="3401568" y="1234440"/>
+            <a:off x="6300216" y="1234440"/>
             <a:ext cx="82296" cy="4480560"/>
           </a:xfrm>
           <a:prstGeom prst="rect">
@@ -4355,168 +4501,6 @@
           </a:prstGeom>
           <a:solidFill>
             <a:srgbClr val="429761"/>
-          </a:solidFill>
-          <a:ln>
-            <a:noFill/>
-          </a:ln>
-        </p:spPr>
-        <p:style>
-          <a:lnRef idx="1">
-            <a:schemeClr val="accent1"/>
-          </a:lnRef>
-          <a:fillRef idx="3">
-            <a:schemeClr val="accent1"/>
-          </a:fillRef>
-          <a:effectRef idx="2">
-            <a:schemeClr val="accent1"/>
-          </a:effectRef>
-          <a:fontRef idx="minor">
-            <a:schemeClr val="lt1"/>
-          </a:fontRef>
-        </p:style>
-        <p:txBody>
-          <a:bodyPr rtlCol="0" anchor="ctr"/>
-          <a:lstStyle/>
-          <a:p>
-            <a:pPr algn="ctr"/>
-          </a:p>
-        </p:txBody>
-      </p:sp>
-      <p:sp>
-        <p:nvSpPr>
-          <p:cNvPr id="8" name="Rounded Rectangle 7"/>
-          <p:cNvSpPr/>
-          <p:nvPr/>
-        </p:nvSpPr>
-        <p:spPr>
-          <a:xfrm>
-            <a:off x="6300216" y="1234440"/>
-            <a:ext cx="2606040" cy="4480560"/>
-          </a:xfrm>
-          <a:prstGeom prst="roundRect">
-            <a:avLst/>
-          </a:prstGeom>
-          <a:solidFill>
-            <a:srgbClr val="FFF6E8"/>
-          </a:solidFill>
-          <a:ln w="13970">
-            <a:solidFill>
-              <a:srgbClr val="E5892A"/>
-            </a:solidFill>
-          </a:ln>
-        </p:spPr>
-        <p:style>
-          <a:lnRef idx="1">
-            <a:schemeClr val="accent1"/>
-          </a:lnRef>
-          <a:fillRef idx="3">
-            <a:schemeClr val="accent1"/>
-          </a:fillRef>
-          <a:effectRef idx="2">
-            <a:schemeClr val="accent1"/>
-          </a:effectRef>
-          <a:fontRef idx="minor">
-            <a:schemeClr val="lt1"/>
-          </a:fontRef>
-        </p:style>
-        <p:txBody>
-          <a:bodyPr rtlCol="0" anchor="ctr" lIns="182880" rIns="100584" tIns="91440"/>
-          <a:lstStyle/>
-          <a:p>
-            <a:pPr algn="ctr">
-              <a:defRPr sz="1700" b="1">
-                <a:solidFill>
-                  <a:srgbClr val="232D37"/>
-                </a:solidFill>
-                <a:latin typeface="Aptos Display"/>
-              </a:defRPr>
-            </a:pPr>
-            <a:r>
-              <a:t>Tax view option</a:t>
-            </a:r>
-          </a:p>
-          <a:p>
-            <a:pPr>
-              <a:spcBef>
-                <a:spcPts val="300"/>
-              </a:spcBef>
-              <a:defRPr sz="1200">
-                <a:solidFill>
-                  <a:srgbClr val="232D37"/>
-                </a:solidFill>
-                <a:latin typeface="Aptos"/>
-              </a:defRPr>
-            </a:pPr>
-            <a:r>
-              <a:t>View IRMAA as tax checkbox</a:t>
-            </a:r>
-          </a:p>
-          <a:p>
-            <a:pPr>
-              <a:spcBef>
-                <a:spcPts val="300"/>
-              </a:spcBef>
-              <a:defRPr sz="1200">
-                <a:solidFill>
-                  <a:srgbClr val="232D37"/>
-                </a:solidFill>
-                <a:latin typeface="Aptos"/>
-              </a:defRPr>
-            </a:pPr>
-            <a:r>
-              <a:t>Dashed IRMAA surcharge above tax stack</a:t>
-            </a:r>
-          </a:p>
-          <a:p>
-            <a:pPr>
-              <a:spcBef>
-                <a:spcPts val="300"/>
-              </a:spcBef>
-              <a:defRPr sz="1200">
-                <a:solidFill>
-                  <a:srgbClr val="232D37"/>
-                </a:solidFill>
-                <a:latin typeface="Aptos"/>
-              </a:defRPr>
-            </a:pPr>
-            <a:r>
-              <a:t>Combined “Total tax + IRMAA” tooltip line</a:t>
-            </a:r>
-          </a:p>
-          <a:p>
-            <a:pPr>
-              <a:spcBef>
-                <a:spcPts val="300"/>
-              </a:spcBef>
-              <a:defRPr sz="1200">
-                <a:solidFill>
-                  <a:srgbClr val="232D37"/>
-                </a:solidFill>
-                <a:latin typeface="Aptos"/>
-              </a:defRPr>
-            </a:pPr>
-            <a:r>
-              <a:t>Display-only scale refresh</a:t>
-            </a:r>
-          </a:p>
-        </p:txBody>
-      </p:sp>
-      <p:sp>
-        <p:nvSpPr>
-          <p:cNvPr id="9" name="Rectangle 8"/>
-          <p:cNvSpPr/>
-          <p:nvPr/>
-        </p:nvSpPr>
-        <p:spPr>
-          <a:xfrm>
-            <a:off x="6300216" y="1234440"/>
-            <a:ext cx="82296" cy="4480560"/>
-          </a:xfrm>
-          <a:prstGeom prst="rect">
-            <a:avLst/>
-          </a:prstGeom>
-          <a:solidFill>
-            <a:srgbClr val="E5892A"/>
           </a:solidFill>
           <a:ln>
             <a:noFill/>
@@ -4594,7 +4578,7 @@
               </a:defRPr>
             </a:pPr>
             <a:r>
-              <a:t>Tooltip &amp; overlay system</a:t>
+              <a:t>New presentation</a:t>
             </a:r>
           </a:p>
           <a:p>
@@ -4610,7 +4594,7 @@
               </a:defRPr>
             </a:pPr>
             <a:r>
-              <a:t>External HTML tooltips for compact companions</a:t>
+              <a:t>Income chart retains conversion band</a:t>
             </a:r>
           </a:p>
           <a:p>
@@ -4626,7 +4610,7 @@
               </a:defRPr>
             </a:pPr>
             <a:r>
-              <a:t>One black dashed reference-line color</a:t>
+              <a:t>Asset section adds Roth conversion companion chart</a:t>
             </a:r>
           </a:p>
           <a:p>
@@ -4642,7 +4626,7 @@
               </a:defRPr>
             </a:pPr>
             <a:r>
-              <a:t>Reusable legend dash styles</a:t>
+              <a:t>Rows expose convTrials for diagnostic visibility</a:t>
             </a:r>
           </a:p>
         </p:txBody>
@@ -4764,7 +4748,7 @@
               </a:defRPr>
             </a:pPr>
             <a:r>
-              <a:t>Retirement Income Planner • Architecture overview • MAGI, IRMAA-as-tax, and enhanced companion-chart update</a:t>
+              <a:t>Retirement Income Planner • Architecture overview • Bracket-aware Roth-conversion update</a:t>
             </a:r>
           </a:p>
         </p:txBody>
@@ -4826,7 +4810,7 @@
               </a:defRPr>
             </a:pPr>
             <a:r>
-              <a:t>MAGI companion chart: source colors plus IRMAA context</a:t>
+              <a:t>Roth conversion configuration model</a:t>
             </a:r>
           </a:p>
         </p:txBody>
@@ -4862,7 +4846,7 @@
               </a:defRPr>
             </a:pPr>
             <a:r>
-              <a:t>The income section becomes a two-chart layout: the main income stack explains cash flow, while the MAGI chart explains surcharge exposure.</a:t>
+              <a:t>The IRA card separates three independent choices: how much to convert, which thresholds to respect, and when to start.</a:t>
             </a:r>
           </a:p>
         </p:txBody>
@@ -4875,8 +4859,8 @@
         </p:nvSpPr>
         <p:spPr>
           <a:xfrm>
-            <a:off x="502920" y="1170432"/>
-            <a:ext cx="3794760" cy="4526280"/>
+            <a:off x="594360" y="1188720"/>
+            <a:ext cx="3337560" cy="4526280"/>
           </a:xfrm>
           <a:prstGeom prst="roundRect">
             <a:avLst/>
@@ -4917,7 +4901,7 @@
               </a:defRPr>
             </a:pPr>
             <a:r>
-              <a:t>Primary income chart</a:t>
+              <a:t>1. Conversion mode</a:t>
             </a:r>
           </a:p>
           <a:p>
@@ -4933,7 +4917,7 @@
               </a:defRPr>
             </a:pPr>
             <a:r>
-              <a:t>Two-thirds width</a:t>
+              <a:t>Fixed $ / year</a:t>
             </a:r>
           </a:p>
           <a:p>
@@ -4949,7 +4933,7 @@
               </a:defRPr>
             </a:pPr>
             <a:r>
-              <a:t>Income stack retains taxable and cash-flow components</a:t>
+              <a:t>Bracket-aware conversion</a:t>
             </a:r>
           </a:p>
           <a:p>
@@ -4965,7 +4949,7 @@
               </a:defRPr>
             </a:pPr>
             <a:r>
-              <a:t>No IRMAA bracket lines on this plot</a:t>
+              <a:t>Fixed uses conv amount directly, capped after RMD</a:t>
             </a:r>
           </a:p>
           <a:p>
@@ -4981,23 +4965,7 @@
               </a:defRPr>
             </a:pPr>
             <a:r>
-              <a:t>Legend includes a dashed “IRMAA brackets (shown on MAGI chart)” cue</a:t>
-            </a:r>
-          </a:p>
-          <a:p>
-            <a:pPr>
-              <a:spcBef>
-                <a:spcPts val="300"/>
-              </a:spcBef>
-              <a:defRPr sz="1200">
-                <a:solidFill>
-                  <a:srgbClr val="232D37"/>
-                </a:solidFill>
-                <a:latin typeface="Aptos"/>
-              </a:defRPr>
-            </a:pPr>
-            <a:r>
-              <a:t>Details retain AGI and expense-funding information</a:t>
+              <a:t>Bracket mode exposes two discrete stop controls</a:t>
             </a:r>
           </a:p>
         </p:txBody>
@@ -5010,7 +4978,7 @@
         </p:nvSpPr>
         <p:spPr>
           <a:xfrm>
-            <a:off x="502920" y="1170432"/>
+            <a:off x="594360" y="1188720"/>
             <a:ext cx="82296" cy="4526280"/>
           </a:xfrm>
           <a:prstGeom prst="rect">
@@ -5053,186 +5021,8 @@
         </p:nvSpPr>
         <p:spPr>
           <a:xfrm>
-            <a:off x="4617720" y="1170432"/>
-            <a:ext cx="2880360" cy="4526280"/>
-          </a:xfrm>
-          <a:prstGeom prst="roundRect">
-            <a:avLst/>
-          </a:prstGeom>
-          <a:solidFill>
-            <a:srgbClr val="EAF9F4"/>
-          </a:solidFill>
-          <a:ln w="13970">
-            <a:solidFill>
-              <a:srgbClr val="429761"/>
-            </a:solidFill>
-          </a:ln>
-        </p:spPr>
-        <p:style>
-          <a:lnRef idx="1">
-            <a:schemeClr val="accent1"/>
-          </a:lnRef>
-          <a:fillRef idx="3">
-            <a:schemeClr val="accent1"/>
-          </a:fillRef>
-          <a:effectRef idx="2">
-            <a:schemeClr val="accent1"/>
-          </a:effectRef>
-          <a:fontRef idx="minor">
-            <a:schemeClr val="lt1"/>
-          </a:fontRef>
-        </p:style>
-        <p:txBody>
-          <a:bodyPr rtlCol="0" anchor="ctr" lIns="182880" rIns="100584" tIns="91440"/>
-          <a:lstStyle/>
-          <a:p>
-            <a:pPr algn="ctr">
-              <a:defRPr sz="1700" b="1">
-                <a:solidFill>
-                  <a:srgbClr val="232D37"/>
-                </a:solidFill>
-                <a:latin typeface="Aptos Display"/>
-              </a:defRPr>
-            </a:pPr>
-            <a:r>
-              <a:t>MAGI chart</a:t>
-            </a:r>
-          </a:p>
-          <a:p>
-            <a:pPr>
-              <a:spcBef>
-                <a:spcPts val="300"/>
-              </a:spcBef>
-              <a:defRPr sz="1200">
-                <a:solidFill>
-                  <a:srgbClr val="232D37"/>
-                </a:solidFill>
-                <a:latin typeface="Aptos"/>
-              </a:defRPr>
-            </a:pPr>
-            <a:r>
-              <a:t>One-third width; top-aligned and 1:1</a:t>
-            </a:r>
-          </a:p>
-          <a:p>
-            <a:pPr>
-              <a:spcBef>
-                <a:spcPts val="300"/>
-              </a:spcBef>
-              <a:defRPr sz="1200">
-                <a:solidFill>
-                  <a:srgbClr val="232D37"/>
-                </a:solidFill>
-                <a:latin typeface="Aptos"/>
-              </a:defRPr>
-            </a:pPr>
-            <a:r>
-              <a:t>Same source colors and source order where applicable</a:t>
-            </a:r>
-          </a:p>
-          <a:p>
-            <a:pPr>
-              <a:spcBef>
-                <a:spcPts val="300"/>
-              </a:spcBef>
-              <a:defRPr sz="1200">
-                <a:solidFill>
-                  <a:srgbClr val="232D37"/>
-                </a:solidFill>
-                <a:latin typeface="Aptos"/>
-              </a:defRPr>
-            </a:pPr>
-            <a:r>
-              <a:t>Excludes non-cash rental depreciation</a:t>
-            </a:r>
-          </a:p>
-          <a:p>
-            <a:pPr>
-              <a:spcBef>
-                <a:spcPts val="300"/>
-              </a:spcBef>
-              <a:defRPr sz="1200">
-                <a:solidFill>
-                  <a:srgbClr val="232D37"/>
-                </a:solidFill>
-                <a:latin typeface="Aptos"/>
-              </a:defRPr>
-            </a:pPr>
-            <a:r>
-              <a:t>Counts SS only at taxable portion</a:t>
-            </a:r>
-          </a:p>
-          <a:p>
-            <a:pPr>
-              <a:spcBef>
-                <a:spcPts val="300"/>
-              </a:spcBef>
-              <a:defRPr sz="1200">
-                <a:solidFill>
-                  <a:srgbClr val="232D37"/>
-                </a:solidFill>
-                <a:latin typeface="Aptos"/>
-              </a:defRPr>
-            </a:pPr>
-            <a:r>
-              <a:t>Stack totals exactly to row.magi</a:t>
-            </a:r>
-          </a:p>
-        </p:txBody>
-      </p:sp>
-      <p:sp>
-        <p:nvSpPr>
-          <p:cNvPr id="7" name="Rectangle 6"/>
-          <p:cNvSpPr/>
-          <p:nvPr/>
-        </p:nvSpPr>
-        <p:spPr>
-          <a:xfrm>
-            <a:off x="4617720" y="1170432"/>
-            <a:ext cx="82296" cy="4526280"/>
-          </a:xfrm>
-          <a:prstGeom prst="rect">
-            <a:avLst/>
-          </a:prstGeom>
-          <a:solidFill>
-            <a:srgbClr val="429761"/>
-          </a:solidFill>
-          <a:ln>
-            <a:noFill/>
-          </a:ln>
-        </p:spPr>
-        <p:style>
-          <a:lnRef idx="1">
-            <a:schemeClr val="accent1"/>
-          </a:lnRef>
-          <a:fillRef idx="3">
-            <a:schemeClr val="accent1"/>
-          </a:fillRef>
-          <a:effectRef idx="2">
-            <a:schemeClr val="accent1"/>
-          </a:effectRef>
-          <a:fontRef idx="minor">
-            <a:schemeClr val="lt1"/>
-          </a:fontRef>
-        </p:style>
-        <p:txBody>
-          <a:bodyPr rtlCol="0" anchor="ctr"/>
-          <a:lstStyle/>
-          <a:p>
-            <a:pPr algn="ctr"/>
-          </a:p>
-        </p:txBody>
-      </p:sp>
-      <p:sp>
-        <p:nvSpPr>
-          <p:cNvPr id="8" name="Rounded Rectangle 7"/>
-          <p:cNvSpPr/>
-          <p:nvPr/>
-        </p:nvSpPr>
-        <p:spPr>
-          <a:xfrm>
-            <a:off x="7818120" y="1170432"/>
-            <a:ext cx="3703320" cy="4526280"/>
+            <a:off x="4407408" y="1188720"/>
+            <a:ext cx="3337560" cy="4526280"/>
           </a:xfrm>
           <a:prstGeom prst="roundRect">
             <a:avLst/>
@@ -5273,7 +5063,7 @@
               </a:defRPr>
             </a:pPr>
             <a:r>
-              <a:t>IRMAA overlay</a:t>
+              <a:t>2. Bracket stops</a:t>
             </a:r>
           </a:p>
           <a:p>
@@ -5289,7 +5079,7 @@
               </a:defRPr>
             </a:pPr>
             <a:r>
-              <a:t>MFJ tiers until filing switch; Single tiers afterward</a:t>
+              <a:t>convOrdPct: ordinary-tax rate stop</a:t>
             </a:r>
           </a:p>
           <a:p>
@@ -5305,7 +5095,7 @@
               </a:defRPr>
             </a:pPr>
             <a:r>
-              <a:t>Labels: threshold plus Part B premium increase over standard</a:t>
+              <a:t>convIrmaaPct: Part B increase stop</a:t>
             </a:r>
           </a:p>
           <a:p>
@@ -5321,7 +5111,7 @@
               </a:defRPr>
             </a:pPr>
             <a:r>
-              <a:t>Example: $218k +40%</a:t>
+              <a:t>0 = no conversion</a:t>
             </a:r>
           </a:p>
           <a:p>
@@ -5337,20 +5127,36 @@
               </a:defRPr>
             </a:pPr>
             <a:r>
-              <a:t>External popup: MAGI and annual IRMAA surcharge only</a:t>
-            </a:r>
-          </a:p>
-        </p:txBody>
-      </p:sp>
-      <p:sp>
-        <p:nvSpPr>
-          <p:cNvPr id="9" name="Rectangle 8"/>
+              <a:t>null = no limit</a:t>
+            </a:r>
+          </a:p>
+          <a:p>
+            <a:pPr>
+              <a:spcBef>
+                <a:spcPts val="300"/>
+              </a:spcBef>
+              <a:defRPr sz="1200">
+                <a:solidFill>
+                  <a:srgbClr val="232D37"/>
+                </a:solidFill>
+                <a:latin typeface="Aptos"/>
+              </a:defRPr>
+            </a:pPr>
+            <a:r>
+              <a:t>Default: 32% ordinary / +40% Part B</a:t>
+            </a:r>
+          </a:p>
+        </p:txBody>
+      </p:sp>
+      <p:sp>
+        <p:nvSpPr>
+          <p:cNvPr id="7" name="Rectangle 6"/>
           <p:cNvSpPr/>
           <p:nvPr/>
         </p:nvSpPr>
         <p:spPr>
           <a:xfrm>
-            <a:off x="7818120" y="1170432"/>
+            <a:off x="4407408" y="1188720"/>
             <a:ext cx="82296" cy="4526280"/>
           </a:xfrm>
           <a:prstGeom prst="rect">
@@ -5385,79 +5191,187 @@
           </a:p>
         </p:txBody>
       </p:sp>
-      <p:cxnSp>
-        <p:nvCxnSpPr>
-          <p:cNvPr id="10" name="Connector 9"/>
-          <p:cNvCxnSpPr/>
-          <p:nvPr/>
-        </p:nvCxnSpPr>
-        <p:spPr>
-          <a:xfrm>
-            <a:off x="4370832" y="3383280"/>
-            <a:ext cx="182880" cy="0"/>
-          </a:xfrm>
-          <a:prstGeom prst="line">
-            <a:avLst/>
-          </a:prstGeom>
-          <a:ln w="25400">
+      <p:sp>
+        <p:nvSpPr>
+          <p:cNvPr id="8" name="Rounded Rectangle 7"/>
+          <p:cNvSpPr/>
+          <p:nvPr/>
+        </p:nvSpPr>
+        <p:spPr>
+          <a:xfrm>
+            <a:off x="8220456" y="1188720"/>
+            <a:ext cx="3337560" cy="4526280"/>
+          </a:xfrm>
+          <a:prstGeom prst="roundRect">
+            <a:avLst/>
+          </a:prstGeom>
+          <a:solidFill>
+            <a:srgbClr val="F7EFFF"/>
+          </a:solidFill>
+          <a:ln w="13970">
             <a:solidFill>
-              <a:srgbClr val="266EB2"/>
+              <a:srgbClr val="7852B0"/>
             </a:solidFill>
           </a:ln>
         </p:spPr>
         <p:style>
-          <a:lnRef idx="2">
+          <a:lnRef idx="1">
             <a:schemeClr val="accent1"/>
           </a:lnRef>
-          <a:fillRef idx="0">
+          <a:fillRef idx="3">
             <a:schemeClr val="accent1"/>
           </a:fillRef>
-          <a:effectRef idx="1">
+          <a:effectRef idx="2">
             <a:schemeClr val="accent1"/>
           </a:effectRef>
           <a:fontRef idx="minor">
-            <a:schemeClr val="tx1"/>
+            <a:schemeClr val="lt1"/>
           </a:fontRef>
         </p:style>
-      </p:cxnSp>
-      <p:cxnSp>
-        <p:nvCxnSpPr>
-          <p:cNvPr id="11" name="Connector 10"/>
-          <p:cNvCxnSpPr/>
-          <p:nvPr/>
-        </p:nvCxnSpPr>
-        <p:spPr>
-          <a:xfrm>
-            <a:off x="7562088" y="3383280"/>
-            <a:ext cx="192024" cy="0"/>
-          </a:xfrm>
-          <a:prstGeom prst="line">
-            <a:avLst/>
-          </a:prstGeom>
-          <a:ln w="25400">
-            <a:solidFill>
-              <a:srgbClr val="429761"/>
-            </a:solidFill>
+        <p:txBody>
+          <a:bodyPr rtlCol="0" anchor="ctr" lIns="182880" rIns="100584" tIns="91440"/>
+          <a:lstStyle/>
+          <a:p>
+            <a:pPr algn="ctr">
+              <a:defRPr sz="1700" b="1">
+                <a:solidFill>
+                  <a:srgbClr val="232D37"/>
+                </a:solidFill>
+                <a:latin typeface="Aptos Display"/>
+              </a:defRPr>
+            </a:pPr>
+            <a:r>
+              <a:t>3. Start policy</a:t>
+            </a:r>
+          </a:p>
+          <a:p>
+            <a:pPr>
+              <a:spcBef>
+                <a:spcPts val="300"/>
+              </a:spcBef>
+              <a:defRPr sz="1200">
+                <a:solidFill>
+                  <a:srgbClr val="232D37"/>
+                </a:solidFill>
+                <a:latin typeface="Aptos"/>
+              </a:defRPr>
+            </a:pPr>
+            <a:r>
+              <a:t>RMD start — default</a:t>
+            </a:r>
+          </a:p>
+          <a:p>
+            <a:pPr>
+              <a:spcBef>
+                <a:spcPts val="300"/>
+              </a:spcBef>
+              <a:defRPr sz="1200">
+                <a:solidFill>
+                  <a:srgbClr val="232D37"/>
+                </a:solidFill>
+                <a:latin typeface="Aptos"/>
+              </a:defRPr>
+            </a:pPr>
+            <a:r>
+              <a:t>Now</a:t>
+            </a:r>
+          </a:p>
+          <a:p>
+            <a:pPr>
+              <a:spcBef>
+                <a:spcPts val="300"/>
+              </a:spcBef>
+              <a:defRPr sz="1200">
+                <a:solidFill>
+                  <a:srgbClr val="232D37"/>
+                </a:solidFill>
+                <a:latin typeface="Aptos"/>
+              </a:defRPr>
+            </a:pPr>
+            <a:r>
+              <a:t>Custom age</a:t>
+            </a:r>
+          </a:p>
+          <a:p>
+            <a:pPr>
+              <a:spcBef>
+                <a:spcPts val="300"/>
+              </a:spcBef>
+              <a:defRPr sz="1200">
+                <a:solidFill>
+                  <a:srgbClr val="232D37"/>
+                </a:solidFill>
+                <a:latin typeface="Aptos"/>
+              </a:defRPr>
+            </a:pPr>
+            <a:r>
+              <a:t>Effective start is never earlier than current age</a:t>
+            </a:r>
+          </a:p>
+          <a:p>
+            <a:pPr>
+              <a:spcBef>
+                <a:spcPts val="300"/>
+              </a:spcBef>
+              <a:defRPr sz="1200">
+                <a:solidFill>
+                  <a:srgbClr val="232D37"/>
+                </a:solidFill>
+                <a:latin typeface="Aptos"/>
+              </a:defRPr>
+            </a:pPr>
+            <a:r>
+              <a:t>RMD behavior is not changed by conversion timing</a:t>
+            </a:r>
+          </a:p>
+        </p:txBody>
+      </p:sp>
+      <p:sp>
+        <p:nvSpPr>
+          <p:cNvPr id="9" name="Rectangle 8"/>
+          <p:cNvSpPr/>
+          <p:nvPr/>
+        </p:nvSpPr>
+        <p:spPr>
+          <a:xfrm>
+            <a:off x="8220456" y="1188720"/>
+            <a:ext cx="82296" cy="4526280"/>
+          </a:xfrm>
+          <a:prstGeom prst="rect">
+            <a:avLst/>
+          </a:prstGeom>
+          <a:solidFill>
+            <a:srgbClr val="7852B0"/>
+          </a:solidFill>
+          <a:ln>
+            <a:noFill/>
           </a:ln>
         </p:spPr>
         <p:style>
-          <a:lnRef idx="2">
+          <a:lnRef idx="1">
             <a:schemeClr val="accent1"/>
           </a:lnRef>
-          <a:fillRef idx="0">
+          <a:fillRef idx="3">
             <a:schemeClr val="accent1"/>
           </a:fillRef>
-          <a:effectRef idx="1">
+          <a:effectRef idx="2">
             <a:schemeClr val="accent1"/>
           </a:effectRef>
           <a:fontRef idx="minor">
-            <a:schemeClr val="tx1"/>
+            <a:schemeClr val="lt1"/>
           </a:fontRef>
         </p:style>
-      </p:cxnSp>
-      <p:sp>
-        <p:nvSpPr>
-          <p:cNvPr id="12" name="Rectangle 11"/>
+        <p:txBody>
+          <a:bodyPr rtlCol="0" anchor="ctr"/>
+          <a:lstStyle/>
+          <a:p>
+            <a:pPr algn="ctr"/>
+          </a:p>
+        </p:txBody>
+      </p:sp>
+      <p:sp>
+        <p:nvSpPr>
+          <p:cNvPr id="10" name="Rectangle 9"/>
           <p:cNvSpPr/>
           <p:nvPr/>
         </p:nvSpPr>
@@ -5500,7 +5414,7 @@
       </p:sp>
       <p:sp>
         <p:nvSpPr>
-          <p:cNvPr id="13" name="TextBox 12"/>
+          <p:cNvPr id="11" name="TextBox 10"/>
           <p:cNvSpPr txBox="1"/>
           <p:nvPr/>
         </p:nvSpPr>
@@ -5529,7 +5443,7 @@
               </a:defRPr>
             </a:pPr>
             <a:r>
-              <a:t>Retirement Income Planner • Architecture overview • MAGI, IRMAA-as-tax, and enhanced companion-chart update</a:t>
+              <a:t>Retirement Income Planner • Architecture overview • Bracket-aware Roth-conversion update</a:t>
             </a:r>
           </a:p>
         </p:txBody>
@@ -5591,7 +5505,7 @@
               </a:defRPr>
             </a:pPr>
             <a:r>
-              <a:t>MAGI composition and IRMAA timing</a:t>
+              <a:t>Bracket conversion: two ceilings, one chosen amount</a:t>
             </a:r>
           </a:p>
         </p:txBody>
@@ -5627,7 +5541,7 @@
               </a:defRPr>
             </a:pPr>
             <a:r>
-              <a:t>The companion view is display-driven, but it exposes the relationships already present in the annual projection contract.</a:t>
+              <a:t>The solver seeks the maximum conversion that keeps all active guardrails satisfied.</a:t>
             </a:r>
           </a:p>
         </p:txBody>
@@ -5640,8 +5554,8 @@
         </p:nvSpPr>
         <p:spPr>
           <a:xfrm>
-            <a:off x="502920" y="1234440"/>
-            <a:ext cx="2148840" cy="1325880"/>
+            <a:off x="594360" y="1143000"/>
+            <a:ext cx="3337560" cy="1417320"/>
           </a:xfrm>
           <a:prstGeom prst="roundRect">
             <a:avLst/>
@@ -5674,7 +5588,7 @@
           <a:lstStyle/>
           <a:p>
             <a:pPr algn="ctr">
-              <a:defRPr sz="1600" b="1">
+              <a:defRPr sz="1700" b="1">
                 <a:solidFill>
                   <a:srgbClr val="232D37"/>
                 </a:solidFill>
@@ -5682,7 +5596,7 @@
               </a:defRPr>
             </a:pPr>
             <a:r>
-              <a:t>Income sources</a:t>
+              <a:t>Ordinary-income ceiling</a:t>
             </a:r>
           </a:p>
           <a:p>
@@ -5690,15 +5604,15 @@
               <a:spcBef>
                 <a:spcPts val="300"/>
               </a:spcBef>
-              <a:defRPr sz="1100">
-                <a:solidFill>
-                  <a:srgbClr val="232D37"/>
-                </a:solidFill>
-                <a:latin typeface="Aptos"/>
-              </a:defRPr>
-            </a:pPr>
-            <a:r>
-              <a:t>Taxable income components</a:t>
+              <a:defRPr sz="1200">
+                <a:solidFill>
+                  <a:srgbClr val="232D37"/>
+                </a:solidFill>
+                <a:latin typeface="Aptos"/>
+              </a:defRPr>
+            </a:pPr>
+            <a:r>
+              <a:t>ordTI ≤ convOrdTop</a:t>
             </a:r>
           </a:p>
           <a:p>
@@ -5706,15 +5620,15 @@
               <a:spcBef>
                 <a:spcPts val="300"/>
               </a:spcBef>
-              <a:defRPr sz="1100">
-                <a:solidFill>
-                  <a:srgbClr val="232D37"/>
-                </a:solidFill>
-                <a:latin typeface="Aptos"/>
-              </a:defRPr>
-            </a:pPr>
-            <a:r>
-              <a:t>Qualified income</a:t>
+              <a:defRPr sz="1200">
+                <a:solidFill>
+                  <a:srgbClr val="232D37"/>
+                </a:solidFill>
+                <a:latin typeface="Aptos"/>
+              </a:defRPr>
+            </a:pPr>
+            <a:r>
+              <a:t>convOrdTop is the start of the selected ordinary-rate bracket</a:t>
             </a:r>
           </a:p>
           <a:p>
@@ -5722,31 +5636,15 @@
               <a:spcBef>
                 <a:spcPts val="300"/>
               </a:spcBef>
-              <a:defRPr sz="1100">
-                <a:solidFill>
-                  <a:srgbClr val="232D37"/>
-                </a:solidFill>
-                <a:latin typeface="Aptos"/>
-              </a:defRPr>
-            </a:pPr>
-            <a:r>
-              <a:t>Realized gains</a:t>
-            </a:r>
-          </a:p>
-          <a:p>
-            <a:pPr>
-              <a:spcBef>
-                <a:spcPts val="300"/>
-              </a:spcBef>
-              <a:defRPr sz="1100">
-                <a:solidFill>
-                  <a:srgbClr val="232D37"/>
-                </a:solidFill>
-                <a:latin typeface="Aptos"/>
-              </a:defRPr>
-            </a:pPr>
-            <a:r>
-              <a:t>Taxable SS share</a:t>
+              <a:defRPr sz="1200">
+                <a:solidFill>
+                  <a:srgbClr val="232D37"/>
+                </a:solidFill>
+                <a:latin typeface="Aptos"/>
+              </a:defRPr>
+            </a:pPr>
+            <a:r>
+              <a:t>Example: select 32% to remain below the 32% bracket start</a:t>
             </a:r>
           </a:p>
         </p:txBody>
@@ -5759,8 +5657,8 @@
         </p:nvSpPr>
         <p:spPr>
           <a:xfrm>
-            <a:off x="502920" y="1234440"/>
-            <a:ext cx="82296" cy="1325880"/>
+            <a:off x="594360" y="1143000"/>
+            <a:ext cx="82296" cy="1417320"/>
           </a:xfrm>
           <a:prstGeom prst="rect">
             <a:avLst/>
@@ -5802,8 +5700,154 @@
         </p:nvSpPr>
         <p:spPr>
           <a:xfrm>
-            <a:off x="3017520" y="1234440"/>
-            <a:ext cx="2148840" cy="1325880"/>
+            <a:off x="4434840" y="1143000"/>
+            <a:ext cx="3337560" cy="1417320"/>
+          </a:xfrm>
+          <a:prstGeom prst="roundRect">
+            <a:avLst/>
+          </a:prstGeom>
+          <a:solidFill>
+            <a:srgbClr val="FFF6E8"/>
+          </a:solidFill>
+          <a:ln w="13970">
+            <a:solidFill>
+              <a:srgbClr val="E5892A"/>
+            </a:solidFill>
+          </a:ln>
+        </p:spPr>
+        <p:style>
+          <a:lnRef idx="1">
+            <a:schemeClr val="accent1"/>
+          </a:lnRef>
+          <a:fillRef idx="3">
+            <a:schemeClr val="accent1"/>
+          </a:fillRef>
+          <a:effectRef idx="2">
+            <a:schemeClr val="accent1"/>
+          </a:effectRef>
+          <a:fontRef idx="minor">
+            <a:schemeClr val="lt1"/>
+          </a:fontRef>
+        </p:style>
+        <p:txBody>
+          <a:bodyPr rtlCol="0" anchor="ctr" lIns="182880" rIns="100584" tIns="91440"/>
+          <a:lstStyle/>
+          <a:p>
+            <a:pPr algn="ctr">
+              <a:defRPr sz="1700" b="1">
+                <a:solidFill>
+                  <a:srgbClr val="232D37"/>
+                </a:solidFill>
+                <a:latin typeface="Aptos Display"/>
+              </a:defRPr>
+            </a:pPr>
+            <a:r>
+              <a:t>IRMAA/MAGI ceiling</a:t>
+            </a:r>
+          </a:p>
+          <a:p>
+            <a:pPr>
+              <a:spcBef>
+                <a:spcPts val="300"/>
+              </a:spcBef>
+              <a:defRPr sz="1200">
+                <a:solidFill>
+                  <a:srgbClr val="232D37"/>
+                </a:solidFill>
+                <a:latin typeface="Aptos"/>
+              </a:defRPr>
+            </a:pPr>
+            <a:r>
+              <a:t>MAGI &lt; convMagiCap</a:t>
+            </a:r>
+          </a:p>
+          <a:p>
+            <a:pPr>
+              <a:spcBef>
+                <a:spcPts val="300"/>
+              </a:spcBef>
+              <a:defRPr sz="1200">
+                <a:solidFill>
+                  <a:srgbClr val="232D37"/>
+                </a:solidFill>
+                <a:latin typeface="Aptos"/>
+              </a:defRPr>
+            </a:pPr>
+            <a:r>
+              <a:t>Cap is the selected Part B premium-increase threshold</a:t>
+            </a:r>
+          </a:p>
+          <a:p>
+            <a:pPr>
+              <a:spcBef>
+                <a:spcPts val="300"/>
+              </a:spcBef>
+              <a:defRPr sz="1200">
+                <a:solidFill>
+                  <a:srgbClr val="232D37"/>
+                </a:solidFill>
+                <a:latin typeface="Aptos"/>
+              </a:defRPr>
+            </a:pPr>
+            <a:r>
+              <a:t>Null means no IRMAA limit</a:t>
+            </a:r>
+          </a:p>
+        </p:txBody>
+      </p:sp>
+      <p:sp>
+        <p:nvSpPr>
+          <p:cNvPr id="7" name="Rectangle 6"/>
+          <p:cNvSpPr/>
+          <p:nvPr/>
+        </p:nvSpPr>
+        <p:spPr>
+          <a:xfrm>
+            <a:off x="4434840" y="1143000"/>
+            <a:ext cx="82296" cy="1417320"/>
+          </a:xfrm>
+          <a:prstGeom prst="rect">
+            <a:avLst/>
+          </a:prstGeom>
+          <a:solidFill>
+            <a:srgbClr val="E5892A"/>
+          </a:solidFill>
+          <a:ln>
+            <a:noFill/>
+          </a:ln>
+        </p:spPr>
+        <p:style>
+          <a:lnRef idx="1">
+            <a:schemeClr val="accent1"/>
+          </a:lnRef>
+          <a:fillRef idx="3">
+            <a:schemeClr val="accent1"/>
+          </a:fillRef>
+          <a:effectRef idx="2">
+            <a:schemeClr val="accent1"/>
+          </a:effectRef>
+          <a:fontRef idx="minor">
+            <a:schemeClr val="lt1"/>
+          </a:fontRef>
+        </p:style>
+        <p:txBody>
+          <a:bodyPr rtlCol="0" anchor="ctr"/>
+          <a:lstStyle/>
+          <a:p>
+            <a:pPr algn="ctr"/>
+          </a:p>
+        </p:txBody>
+      </p:sp>
+      <p:sp>
+        <p:nvSpPr>
+          <p:cNvPr id="8" name="Rounded Rectangle 7"/>
+          <p:cNvSpPr/>
+          <p:nvPr/>
+        </p:nvSpPr>
+        <p:spPr>
+          <a:xfrm>
+            <a:off x="8275320" y="1143000"/>
+            <a:ext cx="3337560" cy="1417320"/>
           </a:xfrm>
           <a:prstGeom prst="roundRect">
             <a:avLst/>
@@ -5836,7 +5880,7 @@
           <a:lstStyle/>
           <a:p>
             <a:pPr algn="ctr">
-              <a:defRPr sz="1600" b="1">
+              <a:defRPr sz="1700" b="1">
                 <a:solidFill>
                   <a:srgbClr val="232D37"/>
                 </a:solidFill>
@@ -5844,7 +5888,7 @@
               </a:defRPr>
             </a:pPr>
             <a:r>
-              <a:t>MAGI row field</a:t>
+              <a:t>Combined slack</a:t>
             </a:r>
           </a:p>
           <a:p>
@@ -5852,15 +5896,15 @@
               <a:spcBef>
                 <a:spcPts val="300"/>
               </a:spcBef>
-              <a:defRPr sz="1100">
-                <a:solidFill>
-                  <a:srgbClr val="232D37"/>
-                </a:solidFill>
-                <a:latin typeface="Aptos"/>
-              </a:defRPr>
-            </a:pPr>
-            <a:r>
-              <a:t>magi = AGI + tax-exempt income</a:t>
+              <a:defRPr sz="1200">
+                <a:solidFill>
+                  <a:srgbClr val="232D37"/>
+                </a:solidFill>
+                <a:latin typeface="Aptos"/>
+              </a:defRPr>
+            </a:pPr>
+            <a:r>
+              <a:t>slack(c) = min(ordinary headroom, MAGI headroom)</a:t>
             </a:r>
           </a:p>
           <a:p>
@@ -5868,29 +5912,45 @@
               <a:spcBef>
                 <a:spcPts val="300"/>
               </a:spcBef>
-              <a:defRPr sz="1100">
-                <a:solidFill>
-                  <a:srgbClr val="232D37"/>
-                </a:solidFill>
-                <a:latin typeface="Aptos"/>
-              </a:defRPr>
-            </a:pPr>
-            <a:r>
-              <a:t>Tax-exempt income stays out of AGI but enters MAGI</a:t>
-            </a:r>
-          </a:p>
-        </p:txBody>
-      </p:sp>
-      <p:sp>
-        <p:nvSpPr>
-          <p:cNvPr id="7" name="Rectangle 6"/>
+              <a:defRPr sz="1200">
+                <a:solidFill>
+                  <a:srgbClr val="232D37"/>
+                </a:solidFill>
+                <a:latin typeface="Aptos"/>
+              </a:defRPr>
+            </a:pPr>
+            <a:r>
+              <a:t>Both limits bind: the stricter one wins</a:t>
+            </a:r>
+          </a:p>
+          <a:p>
+            <a:pPr>
+              <a:spcBef>
+                <a:spcPts val="300"/>
+              </a:spcBef>
+              <a:defRPr sz="1200">
+                <a:solidFill>
+                  <a:srgbClr val="232D37"/>
+                </a:solidFill>
+                <a:latin typeface="Aptos"/>
+              </a:defRPr>
+            </a:pPr>
+            <a:r>
+              <a:t>Negative slack at zero means no conversion</a:t>
+            </a:r>
+          </a:p>
+        </p:txBody>
+      </p:sp>
+      <p:sp>
+        <p:nvSpPr>
+          <p:cNvPr id="9" name="Rectangle 8"/>
           <p:cNvSpPr/>
           <p:nvPr/>
         </p:nvSpPr>
         <p:spPr>
           <a:xfrm>
-            <a:off x="3017520" y="1234440"/>
-            <a:ext cx="82296" cy="1325880"/>
+            <a:off x="8275320" y="1143000"/>
+            <a:ext cx="82296" cy="1417320"/>
           </a:xfrm>
           <a:prstGeom prst="rect">
             <a:avLst/>
@@ -5924,266 +5984,76 @@
           </a:p>
         </p:txBody>
       </p:sp>
-      <p:sp>
-        <p:nvSpPr>
-          <p:cNvPr id="8" name="Rounded Rectangle 7"/>
-          <p:cNvSpPr/>
-          <p:nvPr/>
-        </p:nvSpPr>
-        <p:spPr>
-          <a:xfrm>
-            <a:off x="5532120" y="1234440"/>
-            <a:ext cx="2148840" cy="1325880"/>
-          </a:xfrm>
-          <a:prstGeom prst="roundRect">
-            <a:avLst/>
-          </a:prstGeom>
-          <a:solidFill>
-            <a:srgbClr val="FFF6E8"/>
-          </a:solidFill>
-          <a:ln w="13970">
+      <p:cxnSp>
+        <p:nvCxnSpPr>
+          <p:cNvPr id="10" name="Connector 9"/>
+          <p:cNvCxnSpPr/>
+          <p:nvPr/>
+        </p:nvCxnSpPr>
+        <p:spPr>
+          <a:xfrm>
+            <a:off x="4023360" y="1847088"/>
+            <a:ext cx="338328" cy="0"/>
+          </a:xfrm>
+          <a:prstGeom prst="line">
+            <a:avLst/>
+          </a:prstGeom>
+          <a:ln w="25400">
+            <a:solidFill>
+              <a:srgbClr val="266EB2"/>
+            </a:solidFill>
+          </a:ln>
+        </p:spPr>
+        <p:style>
+          <a:lnRef idx="2">
+            <a:schemeClr val="accent1"/>
+          </a:lnRef>
+          <a:fillRef idx="0">
+            <a:schemeClr val="accent1"/>
+          </a:fillRef>
+          <a:effectRef idx="1">
+            <a:schemeClr val="accent1"/>
+          </a:effectRef>
+          <a:fontRef idx="minor">
+            <a:schemeClr val="tx1"/>
+          </a:fontRef>
+        </p:style>
+      </p:cxnSp>
+      <p:cxnSp>
+        <p:nvCxnSpPr>
+          <p:cNvPr id="11" name="Connector 10"/>
+          <p:cNvCxnSpPr/>
+          <p:nvPr/>
+        </p:nvCxnSpPr>
+        <p:spPr>
+          <a:xfrm>
+            <a:off x="7863840" y="1847088"/>
+            <a:ext cx="338328" cy="0"/>
+          </a:xfrm>
+          <a:prstGeom prst="line">
+            <a:avLst/>
+          </a:prstGeom>
+          <a:ln w="25400">
             <a:solidFill>
               <a:srgbClr val="E5892A"/>
             </a:solidFill>
           </a:ln>
         </p:spPr>
         <p:style>
-          <a:lnRef idx="1">
+          <a:lnRef idx="2">
             <a:schemeClr val="accent1"/>
           </a:lnRef>
-          <a:fillRef idx="3">
+          <a:fillRef idx="0">
             <a:schemeClr val="accent1"/>
           </a:fillRef>
-          <a:effectRef idx="2">
+          <a:effectRef idx="1">
             <a:schemeClr val="accent1"/>
           </a:effectRef>
           <a:fontRef idx="minor">
-            <a:schemeClr val="lt1"/>
+            <a:schemeClr val="tx1"/>
           </a:fontRef>
         </p:style>
-        <p:txBody>
-          <a:bodyPr rtlCol="0" anchor="ctr" lIns="182880" rIns="100584" tIns="91440"/>
-          <a:lstStyle/>
-          <a:p>
-            <a:pPr algn="ctr">
-              <a:defRPr sz="1600" b="1">
-                <a:solidFill>
-                  <a:srgbClr val="232D37"/>
-                </a:solidFill>
-                <a:latin typeface="Aptos Display"/>
-              </a:defRPr>
-            </a:pPr>
-            <a:r>
-              <a:t>Two-year look-back</a:t>
-            </a:r>
-          </a:p>
-          <a:p>
-            <a:pPr>
-              <a:spcBef>
-                <a:spcPts val="300"/>
-              </a:spcBef>
-              <a:defRPr sz="1100">
-                <a:solidFill>
-                  <a:srgbClr val="232D37"/>
-                </a:solidFill>
-                <a:latin typeface="Aptos"/>
-              </a:defRPr>
-            </a:pPr>
-            <a:r>
-              <a:t>IRMAA uses MAGI from two years earlier</a:t>
-            </a:r>
-          </a:p>
-          <a:p>
-            <a:pPr>
-              <a:spcBef>
-                <a:spcPts val="300"/>
-              </a:spcBef>
-              <a:defRPr sz="1100">
-                <a:solidFill>
-                  <a:srgbClr val="232D37"/>
-                </a:solidFill>
-                <a:latin typeface="Aptos"/>
-              </a:defRPr>
-            </a:pPr>
-            <a:r>
-              <a:t>Years 0–1 have no modeled surcharge</a:t>
-            </a:r>
-          </a:p>
-        </p:txBody>
-      </p:sp>
-      <p:sp>
-        <p:nvSpPr>
-          <p:cNvPr id="9" name="Rectangle 8"/>
-          <p:cNvSpPr/>
-          <p:nvPr/>
-        </p:nvSpPr>
-        <p:spPr>
-          <a:xfrm>
-            <a:off x="5532120" y="1234440"/>
-            <a:ext cx="82296" cy="1325880"/>
-          </a:xfrm>
-          <a:prstGeom prst="rect">
-            <a:avLst/>
-          </a:prstGeom>
-          <a:solidFill>
-            <a:srgbClr val="E5892A"/>
-          </a:solidFill>
-          <a:ln>
-            <a:noFill/>
-          </a:ln>
-        </p:spPr>
-        <p:style>
-          <a:lnRef idx="1">
-            <a:schemeClr val="accent1"/>
-          </a:lnRef>
-          <a:fillRef idx="3">
-            <a:schemeClr val="accent1"/>
-          </a:fillRef>
-          <a:effectRef idx="2">
-            <a:schemeClr val="accent1"/>
-          </a:effectRef>
-          <a:fontRef idx="minor">
-            <a:schemeClr val="lt1"/>
-          </a:fontRef>
-        </p:style>
-        <p:txBody>
-          <a:bodyPr rtlCol="0" anchor="ctr"/>
-          <a:lstStyle/>
-          <a:p>
-            <a:pPr algn="ctr"/>
-          </a:p>
-        </p:txBody>
-      </p:sp>
-      <p:sp>
-        <p:nvSpPr>
-          <p:cNvPr id="10" name="Rounded Rectangle 9"/>
-          <p:cNvSpPr/>
-          <p:nvPr/>
-        </p:nvSpPr>
-        <p:spPr>
-          <a:xfrm>
-            <a:off x="8046720" y="1234440"/>
-            <a:ext cx="2148840" cy="1325880"/>
-          </a:xfrm>
-          <a:prstGeom prst="roundRect">
-            <a:avLst/>
-          </a:prstGeom>
-          <a:solidFill>
-            <a:srgbClr val="F7EFFF"/>
-          </a:solidFill>
-          <a:ln w="13970">
-            <a:solidFill>
-              <a:srgbClr val="7852B0"/>
-            </a:solidFill>
-          </a:ln>
-        </p:spPr>
-        <p:style>
-          <a:lnRef idx="1">
-            <a:schemeClr val="accent1"/>
-          </a:lnRef>
-          <a:fillRef idx="3">
-            <a:schemeClr val="accent1"/>
-          </a:fillRef>
-          <a:effectRef idx="2">
-            <a:schemeClr val="accent1"/>
-          </a:effectRef>
-          <a:fontRef idx="minor">
-            <a:schemeClr val="lt1"/>
-          </a:fontRef>
-        </p:style>
-        <p:txBody>
-          <a:bodyPr rtlCol="0" anchor="ctr" lIns="182880" rIns="100584" tIns="91440"/>
-          <a:lstStyle/>
-          <a:p>
-            <a:pPr algn="ctr">
-              <a:defRPr sz="1600" b="1">
-                <a:solidFill>
-                  <a:srgbClr val="232D37"/>
-                </a:solidFill>
-                <a:latin typeface="Aptos Display"/>
-              </a:defRPr>
-            </a:pPr>
-            <a:r>
-              <a:t>Current-year tier view</a:t>
-            </a:r>
-          </a:p>
-          <a:p>
-            <a:pPr>
-              <a:spcBef>
-                <a:spcPts val="300"/>
-              </a:spcBef>
-              <a:defRPr sz="1100">
-                <a:solidFill>
-                  <a:srgbClr val="232D37"/>
-                </a:solidFill>
-                <a:latin typeface="Aptos"/>
-              </a:defRPr>
-            </a:pPr>
-            <a:r>
-              <a:t>Overlay uses filing status in force for displayed year</a:t>
-            </a:r>
-          </a:p>
-          <a:p>
-            <a:pPr>
-              <a:spcBef>
-                <a:spcPts val="300"/>
-              </a:spcBef>
-              <a:defRPr sz="1100">
-                <a:solidFill>
-                  <a:srgbClr val="232D37"/>
-                </a:solidFill>
-                <a:latin typeface="Aptos"/>
-              </a:defRPr>
-            </a:pPr>
-            <a:r>
-              <a:t>Tiers and premium increases are visual reference</a:t>
-            </a:r>
-          </a:p>
-        </p:txBody>
-      </p:sp>
-      <p:sp>
-        <p:nvSpPr>
-          <p:cNvPr id="11" name="Rectangle 10"/>
-          <p:cNvSpPr/>
-          <p:nvPr/>
-        </p:nvSpPr>
-        <p:spPr>
-          <a:xfrm>
-            <a:off x="8046720" y="1234440"/>
-            <a:ext cx="82296" cy="1325880"/>
-          </a:xfrm>
-          <a:prstGeom prst="rect">
-            <a:avLst/>
-          </a:prstGeom>
-          <a:solidFill>
-            <a:srgbClr val="7852B0"/>
-          </a:solidFill>
-          <a:ln>
-            <a:noFill/>
-          </a:ln>
-        </p:spPr>
-        <p:style>
-          <a:lnRef idx="1">
-            <a:schemeClr val="accent1"/>
-          </a:lnRef>
-          <a:fillRef idx="3">
-            <a:schemeClr val="accent1"/>
-          </a:fillRef>
-          <a:effectRef idx="2">
-            <a:schemeClr val="accent1"/>
-          </a:effectRef>
-          <a:fontRef idx="minor">
-            <a:schemeClr val="lt1"/>
-          </a:fontRef>
-        </p:style>
-        <p:txBody>
-          <a:bodyPr rtlCol="0" anchor="ctr"/>
-          <a:lstStyle/>
-          <a:p>
-            <a:pPr algn="ctr"/>
-          </a:p>
-        </p:txBody>
-      </p:sp>
+      </p:cxnSp>
       <p:sp>
         <p:nvSpPr>
           <p:cNvPr id="12" name="Rounded Rectangle 11"/>
@@ -6192,8 +6062,8 @@
         </p:nvSpPr>
         <p:spPr>
           <a:xfrm>
-            <a:off x="10561320" y="1234440"/>
-            <a:ext cx="1051560" cy="1325880"/>
+            <a:off x="1143000" y="3794760"/>
+            <a:ext cx="9829800" cy="1234440"/>
           </a:xfrm>
           <a:prstGeom prst="roundRect">
             <a:avLst/>
@@ -6226,7 +6096,7 @@
           <a:lstStyle/>
           <a:p>
             <a:pPr algn="ctr">
-              <a:defRPr sz="1400" b="1">
+              <a:defRPr sz="1700" b="1">
                 <a:solidFill>
                   <a:srgbClr val="232D37"/>
                 </a:solidFill>
@@ -6234,7 +6104,7 @@
               </a:defRPr>
             </a:pPr>
             <a:r>
-              <a:t>Expense</a:t>
+              <a:t>IRMAA exposure rule</a:t>
             </a:r>
           </a:p>
           <a:p>
@@ -6242,15 +6112,15 @@
               <a:spcBef>
                 <a:spcPts val="300"/>
               </a:spcBef>
-              <a:defRPr sz="1000">
-                <a:solidFill>
-                  <a:srgbClr val="232D37"/>
-                </a:solidFill>
-                <a:latin typeface="Aptos"/>
-              </a:defRPr>
-            </a:pPr>
-            <a:r>
-              <a:t>IRMAA surcharge enters household expense pool</a:t>
+              <a:defRPr sz="1200">
+                <a:solidFill>
+                  <a:srgbClr val="232D37"/>
+                </a:solidFill>
+                <a:latin typeface="Aptos"/>
+              </a:defRPr>
+            </a:pPr>
+            <a:r>
+              <a:t>The IRMAA cap applies whenever anyone will be alive and age 63+ in year k+2. This keeps the look-ahead active through the end of the plan and avoids a last-years conversion spike.</a:t>
             </a:r>
           </a:p>
         </p:txBody>
@@ -6263,8 +6133,8 @@
         </p:nvSpPr>
         <p:spPr>
           <a:xfrm>
-            <a:off x="10561320" y="1234440"/>
-            <a:ext cx="82296" cy="1325880"/>
+            <a:off x="1143000" y="3794760"/>
+            <a:ext cx="82296" cy="1234440"/>
           </a:xfrm>
           <a:prstGeom prst="rect">
             <a:avLst/>
@@ -6298,263 +6168,9 @@
           </a:p>
         </p:txBody>
       </p:sp>
-      <p:cxnSp>
-        <p:nvCxnSpPr>
-          <p:cNvPr id="14" name="Connector 13"/>
-          <p:cNvCxnSpPr/>
-          <p:nvPr/>
-        </p:nvCxnSpPr>
-        <p:spPr>
-          <a:xfrm>
-            <a:off x="2697480" y="1920240"/>
-            <a:ext cx="228600" cy="0"/>
-          </a:xfrm>
-          <a:prstGeom prst="line">
-            <a:avLst/>
-          </a:prstGeom>
-          <a:ln w="22860">
-            <a:solidFill>
-              <a:srgbClr val="266EB2"/>
-            </a:solidFill>
-          </a:ln>
-        </p:spPr>
-        <p:style>
-          <a:lnRef idx="2">
-            <a:schemeClr val="accent1"/>
-          </a:lnRef>
-          <a:fillRef idx="0">
-            <a:schemeClr val="accent1"/>
-          </a:fillRef>
-          <a:effectRef idx="1">
-            <a:schemeClr val="accent1"/>
-          </a:effectRef>
-          <a:fontRef idx="minor">
-            <a:schemeClr val="tx1"/>
-          </a:fontRef>
-        </p:style>
-      </p:cxnSp>
-      <p:cxnSp>
-        <p:nvCxnSpPr>
-          <p:cNvPr id="15" name="Connector 14"/>
-          <p:cNvCxnSpPr/>
-          <p:nvPr/>
-        </p:nvCxnSpPr>
-        <p:spPr>
-          <a:xfrm>
-            <a:off x="5212080" y="1920240"/>
-            <a:ext cx="228600" cy="0"/>
-          </a:xfrm>
-          <a:prstGeom prst="line">
-            <a:avLst/>
-          </a:prstGeom>
-          <a:ln w="22860">
-            <a:solidFill>
-              <a:srgbClr val="429761"/>
-            </a:solidFill>
-          </a:ln>
-        </p:spPr>
-        <p:style>
-          <a:lnRef idx="2">
-            <a:schemeClr val="accent1"/>
-          </a:lnRef>
-          <a:fillRef idx="0">
-            <a:schemeClr val="accent1"/>
-          </a:fillRef>
-          <a:effectRef idx="1">
-            <a:schemeClr val="accent1"/>
-          </a:effectRef>
-          <a:fontRef idx="minor">
-            <a:schemeClr val="tx1"/>
-          </a:fontRef>
-        </p:style>
-      </p:cxnSp>
-      <p:cxnSp>
-        <p:nvCxnSpPr>
-          <p:cNvPr id="16" name="Connector 15"/>
-          <p:cNvCxnSpPr/>
-          <p:nvPr/>
-        </p:nvCxnSpPr>
-        <p:spPr>
-          <a:xfrm>
-            <a:off x="7726679" y="1920240"/>
-            <a:ext cx="228600" cy="0"/>
-          </a:xfrm>
-          <a:prstGeom prst="line">
-            <a:avLst/>
-          </a:prstGeom>
-          <a:ln w="22860">
-            <a:solidFill>
-              <a:srgbClr val="E5892A"/>
-            </a:solidFill>
-          </a:ln>
-        </p:spPr>
-        <p:style>
-          <a:lnRef idx="2">
-            <a:schemeClr val="accent1"/>
-          </a:lnRef>
-          <a:fillRef idx="0">
-            <a:schemeClr val="accent1"/>
-          </a:fillRef>
-          <a:effectRef idx="1">
-            <a:schemeClr val="accent1"/>
-          </a:effectRef>
-          <a:fontRef idx="minor">
-            <a:schemeClr val="tx1"/>
-          </a:fontRef>
-        </p:style>
-      </p:cxnSp>
-      <p:cxnSp>
-        <p:nvCxnSpPr>
-          <p:cNvPr id="17" name="Connector 16"/>
-          <p:cNvCxnSpPr/>
-          <p:nvPr/>
-        </p:nvCxnSpPr>
-        <p:spPr>
-          <a:xfrm>
-            <a:off x="10241280" y="1920240"/>
-            <a:ext cx="228600" cy="0"/>
-          </a:xfrm>
-          <a:prstGeom prst="line">
-            <a:avLst/>
-          </a:prstGeom>
-          <a:ln w="22860">
-            <a:solidFill>
-              <a:srgbClr val="7852B0"/>
-            </a:solidFill>
-          </a:ln>
-        </p:spPr>
-        <p:style>
-          <a:lnRef idx="2">
-            <a:schemeClr val="accent1"/>
-          </a:lnRef>
-          <a:fillRef idx="0">
-            <a:schemeClr val="accent1"/>
-          </a:fillRef>
-          <a:effectRef idx="1">
-            <a:schemeClr val="accent1"/>
-          </a:effectRef>
-          <a:fontRef idx="minor">
-            <a:schemeClr val="tx1"/>
-          </a:fontRef>
-        </p:style>
-      </p:cxnSp>
-      <p:sp>
-        <p:nvSpPr>
-          <p:cNvPr id="18" name="Rounded Rectangle 17"/>
-          <p:cNvSpPr/>
-          <p:nvPr/>
-        </p:nvSpPr>
-        <p:spPr>
-          <a:xfrm>
-            <a:off x="1051560" y="3794760"/>
-            <a:ext cx="9921240" cy="1143000"/>
-          </a:xfrm>
-          <a:prstGeom prst="roundRect">
-            <a:avLst/>
-          </a:prstGeom>
-          <a:solidFill>
-            <a:srgbClr val="F8FAFC"/>
-          </a:solidFill>
-          <a:ln w="13970">
-            <a:solidFill>
-              <a:srgbClr val="168F8D"/>
-            </a:solidFill>
-          </a:ln>
-        </p:spPr>
-        <p:style>
-          <a:lnRef idx="1">
-            <a:schemeClr val="accent1"/>
-          </a:lnRef>
-          <a:fillRef idx="3">
-            <a:schemeClr val="accent1"/>
-          </a:fillRef>
-          <a:effectRef idx="2">
-            <a:schemeClr val="accent1"/>
-          </a:effectRef>
-          <a:fontRef idx="minor">
-            <a:schemeClr val="lt1"/>
-          </a:fontRef>
-        </p:style>
-        <p:txBody>
-          <a:bodyPr rtlCol="0" anchor="ctr" lIns="182880" rIns="100584" tIns="91440"/>
-          <a:lstStyle/>
-          <a:p>
-            <a:pPr algn="ctr">
-              <a:defRPr sz="1700" b="1">
-                <a:solidFill>
-                  <a:srgbClr val="232D37"/>
-                </a:solidFill>
-                <a:latin typeface="Aptos Display"/>
-              </a:defRPr>
-            </a:pPr>
-            <a:r>
-              <a:t>Boundary rule</a:t>
-            </a:r>
-          </a:p>
-          <a:p>
-            <a:pPr>
-              <a:spcBef>
-                <a:spcPts val="300"/>
-              </a:spcBef>
-              <a:defRPr sz="1200">
-                <a:solidFill>
-                  <a:srgbClr val="232D37"/>
-                </a:solidFill>
-                <a:latin typeface="Aptos"/>
-              </a:defRPr>
-            </a:pPr>
-            <a:r>
-              <a:t>The MAGI chart reads row.magi and row.irmaaSurcharge. It does not recreate the look-back calculation, determine premium tiers, or alter the expense waterfall.</a:t>
-            </a:r>
-          </a:p>
-        </p:txBody>
-      </p:sp>
-      <p:sp>
-        <p:nvSpPr>
-          <p:cNvPr id="19" name="Rectangle 18"/>
-          <p:cNvSpPr/>
-          <p:nvPr/>
-        </p:nvSpPr>
-        <p:spPr>
-          <a:xfrm>
-            <a:off x="1051560" y="3794760"/>
-            <a:ext cx="82296" cy="1143000"/>
-          </a:xfrm>
-          <a:prstGeom prst="rect">
-            <a:avLst/>
-          </a:prstGeom>
-          <a:solidFill>
-            <a:srgbClr val="168F8D"/>
-          </a:solidFill>
-          <a:ln>
-            <a:noFill/>
-          </a:ln>
-        </p:spPr>
-        <p:style>
-          <a:lnRef idx="1">
-            <a:schemeClr val="accent1"/>
-          </a:lnRef>
-          <a:fillRef idx="3">
-            <a:schemeClr val="accent1"/>
-          </a:fillRef>
-          <a:effectRef idx="2">
-            <a:schemeClr val="accent1"/>
-          </a:effectRef>
-          <a:fontRef idx="minor">
-            <a:schemeClr val="lt1"/>
-          </a:fontRef>
-        </p:style>
-        <p:txBody>
-          <a:bodyPr rtlCol="0" anchor="ctr"/>
-          <a:lstStyle/>
-          <a:p>
-            <a:pPr algn="ctr"/>
-          </a:p>
-        </p:txBody>
-      </p:sp>
-      <p:sp>
-        <p:nvSpPr>
-          <p:cNvPr id="20" name="Rectangle 19"/>
+      <p:sp>
+        <p:nvSpPr>
+          <p:cNvPr id="14" name="Rectangle 13"/>
           <p:cNvSpPr/>
           <p:nvPr/>
         </p:nvSpPr>
@@ -6597,7 +6213,7 @@
       </p:sp>
       <p:sp>
         <p:nvSpPr>
-          <p:cNvPr id="21" name="TextBox 20"/>
+          <p:cNvPr id="15" name="TextBox 14"/>
           <p:cNvSpPr txBox="1"/>
           <p:nvPr/>
         </p:nvSpPr>
@@ -6626,7 +6242,7 @@
               </a:defRPr>
             </a:pPr>
             <a:r>
-              <a:t>Retirement Income Planner • Architecture overview • MAGI, IRMAA-as-tax, and enhanced companion-chart update</a:t>
+              <a:t>Retirement Income Planner • Architecture overview • Bracket-aware Roth-conversion update</a:t>
             </a:r>
           </a:p>
         </p:txBody>
@@ -6688,7 +6304,7 @@
               </a:defRPr>
             </a:pPr>
             <a:r>
-              <a:t>IRMAA as tax: an optional presentation layer</a:t>
+              <a:t>Nested solve: conversion search inside tax/LTCG convergence</a:t>
             </a:r>
           </a:p>
         </p:txBody>
@@ -6724,7 +6340,7 @@
               </a:defRPr>
             </a:pPr>
             <a:r>
-              <a:t>A header checkbox lets the user see the Medicare surcharge alongside income tax without changing total tax or the expense model.</a:t>
+              <a:t>The conversion amount changes taxable Social Security, tax, asset sales, and realized capital gain, so its optimization must invoke the full annual financial solve.</a:t>
             </a:r>
           </a:p>
         </p:txBody>
@@ -6737,8 +6353,8 @@
         </p:nvSpPr>
         <p:spPr>
           <a:xfrm>
-            <a:off x="594360" y="1188720"/>
-            <a:ext cx="3383280" cy="4526280"/>
+            <a:off x="502920" y="1188720"/>
+            <a:ext cx="2103120" cy="1325880"/>
           </a:xfrm>
           <a:prstGeom prst="roundRect">
             <a:avLst/>
@@ -6771,7 +6387,7 @@
           <a:lstStyle/>
           <a:p>
             <a:pPr algn="ctr">
-              <a:defRPr sz="1700" b="1">
+              <a:defRPr sz="1600" b="1">
                 <a:solidFill>
                   <a:srgbClr val="232D37"/>
                 </a:solidFill>
@@ -6779,7 +6395,7 @@
               </a:defRPr>
             </a:pPr>
             <a:r>
-              <a:t>Unchecked: tax view</a:t>
+              <a:t>Precompute</a:t>
             </a:r>
           </a:p>
           <a:p>
@@ -6787,15 +6403,15 @@
               <a:spcBef>
                 <a:spcPts val="300"/>
               </a:spcBef>
-              <a:defRPr sz="1200">
-                <a:solidFill>
-                  <a:srgbClr val="232D37"/>
-                </a:solidFill>
-                <a:latin typeface="Aptos"/>
-              </a:defRPr>
-            </a:pPr>
-            <a:r>
-              <a:t>Primary tax stack contains ordinary tax, qualified-income tiers, LTCG tiers, and NIIT.</a:t>
+              <a:defRPr sz="1100">
+                <a:solidFill>
+                  <a:srgbClr val="232D37"/>
+                </a:solidFill>
+                <a:latin typeface="Aptos"/>
+              </a:defRPr>
+            </a:pPr>
+            <a:r>
+              <a:t>NonSS base independent of LTCG/conversion</a:t>
             </a:r>
           </a:p>
           <a:p>
@@ -6803,15 +6419,15 @@
               <a:spcBef>
                 <a:spcPts val="300"/>
               </a:spcBef>
-              <a:defRPr sz="1200">
-                <a:solidFill>
-                  <a:srgbClr val="232D37"/>
-                </a:solidFill>
-                <a:latin typeface="Aptos"/>
-              </a:defRPr>
-            </a:pPr>
-            <a:r>
-              <a:t>IRMAA remains visible in expense analysis, where it is modeled as a household expense.</a:t>
+              <a:defRPr sz="1100">
+                <a:solidFill>
+                  <a:srgbClr val="232D37"/>
+                </a:solidFill>
+                <a:latin typeface="Aptos"/>
+              </a:defRPr>
+            </a:pPr>
+            <a:r>
+              <a:t>IRA pre-state: RMD, AUM, conversion room</a:t>
             </a:r>
           </a:p>
         </p:txBody>
@@ -6824,8 +6440,8 @@
         </p:nvSpPr>
         <p:spPr>
           <a:xfrm>
-            <a:off x="594360" y="1188720"/>
-            <a:ext cx="82296" cy="4526280"/>
+            <a:off x="502920" y="1188720"/>
+            <a:ext cx="82296" cy="1325880"/>
           </a:xfrm>
           <a:prstGeom prst="rect">
             <a:avLst/>
@@ -6867,8 +6483,8 @@
         </p:nvSpPr>
         <p:spPr>
           <a:xfrm>
-            <a:off x="4407408" y="1188720"/>
-            <a:ext cx="3383280" cy="4526280"/>
+            <a:off x="2944368" y="1188720"/>
+            <a:ext cx="2103120" cy="1325880"/>
           </a:xfrm>
           <a:prstGeom prst="roundRect">
             <a:avLst/>
@@ -6901,7 +6517,7 @@
           <a:lstStyle/>
           <a:p>
             <a:pPr algn="ctr">
-              <a:defRPr sz="1700" b="1">
+              <a:defRPr sz="1600" b="1">
                 <a:solidFill>
                   <a:srgbClr val="232D37"/>
                 </a:solidFill>
@@ -6909,7 +6525,7 @@
               </a:defRPr>
             </a:pPr>
             <a:r>
-              <a:t>Checked: combined view</a:t>
+              <a:t>Trial conversion c</a:t>
             </a:r>
           </a:p>
           <a:p>
@@ -6917,15 +6533,15 @@
               <a:spcBef>
                 <a:spcPts val="300"/>
               </a:spcBef>
-              <a:defRPr sz="1200">
-                <a:solidFill>
-                  <a:srgbClr val="232D37"/>
-                </a:solidFill>
-                <a:latin typeface="Aptos"/>
-              </a:defRPr>
-            </a:pPr>
-            <a:r>
-              <a:t>Adds a dashed black IRMAA surcharge dataset above the tax stack.</a:t>
+              <a:defRPr sz="1100">
+                <a:solidFill>
+                  <a:srgbClr val="232D37"/>
+                </a:solidFill>
+                <a:latin typeface="Aptos"/>
+              </a:defRPr>
+            </a:pPr>
+            <a:r>
+              <a:t>Add proposed conversion</a:t>
             </a:r>
           </a:p>
           <a:p>
@@ -6933,47 +6549,15 @@
               <a:spcBef>
                 <a:spcPts val="300"/>
               </a:spcBef>
-              <a:defRPr sz="1200">
-                <a:solidFill>
-                  <a:srgbClr val="232D37"/>
-                </a:solidFill>
-                <a:latin typeface="Aptos"/>
-              </a:defRPr>
-            </a:pPr>
-            <a:r>
-              <a:t>No fill: visually distinct from tax segments.</a:t>
-            </a:r>
-          </a:p>
-          <a:p>
-            <a:pPr>
-              <a:spcBef>
-                <a:spcPts val="300"/>
-              </a:spcBef>
-              <a:defRPr sz="1200">
-                <a:solidFill>
-                  <a:srgbClr val="232D37"/>
-                </a:solidFill>
-                <a:latin typeface="Aptos"/>
-              </a:defRPr>
-            </a:pPr>
-            <a:r>
-              <a:t>Legend adds a dashed IRMAA entry.</a:t>
-            </a:r>
-          </a:p>
-          <a:p>
-            <a:pPr>
-              <a:spcBef>
-                <a:spcPts val="300"/>
-              </a:spcBef>
-              <a:defRPr sz="1200">
-                <a:solidFill>
-                  <a:srgbClr val="232D37"/>
-                </a:solidFill>
-                <a:latin typeface="Aptos"/>
-              </a:defRPr>
-            </a:pPr>
-            <a:r>
-              <a:t>Popup adds Total tax + IRMAA.</a:t>
+              <a:defRPr sz="1100">
+                <a:solidFill>
+                  <a:srgbClr val="232D37"/>
+                </a:solidFill>
+                <a:latin typeface="Aptos"/>
+              </a:defRPr>
+            </a:pPr>
+            <a:r>
+              <a:t>Run taxOn(ltcgGross, c)</a:t>
             </a:r>
           </a:p>
         </p:txBody>
@@ -6986,8 +6570,8 @@
         </p:nvSpPr>
         <p:spPr>
           <a:xfrm>
-            <a:off x="4407408" y="1188720"/>
-            <a:ext cx="82296" cy="4526280"/>
+            <a:off x="2944368" y="1188720"/>
+            <a:ext cx="82296" cy="1325880"/>
           </a:xfrm>
           <a:prstGeom prst="rect">
             <a:avLst/>
@@ -7029,8 +6613,8 @@
         </p:nvSpPr>
         <p:spPr>
           <a:xfrm>
-            <a:off x="8220456" y="1188720"/>
-            <a:ext cx="3383280" cy="4526280"/>
+            <a:off x="5385816" y="1188720"/>
+            <a:ext cx="2103120" cy="1325880"/>
           </a:xfrm>
           <a:prstGeom prst="roundRect">
             <a:avLst/>
@@ -7063,7 +6647,7 @@
           <a:lstStyle/>
           <a:p>
             <a:pPr algn="ctr">
-              <a:defRPr sz="1700" b="1">
+              <a:defRPr sz="1600" b="1">
                 <a:solidFill>
                   <a:srgbClr val="232D37"/>
                 </a:solidFill>
@@ -7071,7 +6655,7 @@
               </a:defRPr>
             </a:pPr>
             <a:r>
-              <a:t>Scale and state behavior</a:t>
+              <a:t>Tax ↔ LTCG loop</a:t>
             </a:r>
           </a:p>
           <a:p>
@@ -7079,15 +6663,15 @@
               <a:spcBef>
                 <a:spcPts val="300"/>
               </a:spcBef>
-              <a:defRPr sz="1200">
-                <a:solidFill>
-                  <a:srgbClr val="232D37"/>
-                </a:solidFill>
-                <a:latin typeface="Aptos"/>
-              </a:defRPr>
-            </a:pPr>
-            <a:r>
-              <a:t>The Tax Rescale key is reset to include IRMAA when enabled.</a:t>
+              <a:defRPr sz="1100">
+                <a:solidFill>
+                  <a:srgbClr val="232D37"/>
+                </a:solidFill>
+                <a:latin typeface="Aptos"/>
+              </a:defRPr>
+            </a:pPr>
+            <a:r>
+              <a:t>Tax → expenses → sales → LTCG → tax</a:t>
             </a:r>
           </a:p>
           <a:p>
@@ -7095,31 +6679,15 @@
               <a:spcBef>
                 <a:spcPts val="300"/>
               </a:spcBef>
-              <a:defRPr sz="1200">
-                <a:solidFill>
-                  <a:srgbClr val="232D37"/>
-                </a:solidFill>
-                <a:latin typeface="Aptos"/>
-              </a:defRPr>
-            </a:pPr>
-            <a:r>
-              <a:t>viewIrmaaAsTax is a live display flag, not a projection input.</a:t>
-            </a:r>
-          </a:p>
-          <a:p>
-            <a:pPr>
-              <a:spcBef>
-                <a:spcPts val="300"/>
-              </a:spcBef>
-              <a:defRPr sz="1200">
-                <a:solidFill>
-                  <a:srgbClr val="232D37"/>
-                </a:solidFill>
-                <a:latin typeface="Aptos"/>
-              </a:defRPr>
-            </a:pPr>
-            <a:r>
-              <a:t>Expense chart and computed totalTax remain unchanged.</a:t>
+              <a:defRPr sz="1100">
+                <a:solidFill>
+                  <a:srgbClr val="232D37"/>
+                </a:solidFill>
+                <a:latin typeface="Aptos"/>
+              </a:defRPr>
+            </a:pPr>
+            <a:r>
+              <a:t>Converge for this trial c</a:t>
             </a:r>
           </a:p>
         </p:txBody>
@@ -7132,8 +6700,8 @@
         </p:nvSpPr>
         <p:spPr>
           <a:xfrm>
-            <a:off x="8220456" y="1188720"/>
-            <a:ext cx="82296" cy="4526280"/>
+            <a:off x="5385816" y="1188720"/>
+            <a:ext cx="82296" cy="1325880"/>
           </a:xfrm>
           <a:prstGeom prst="rect">
             <a:avLst/>
@@ -7169,7 +6737,603 @@
       </p:sp>
       <p:sp>
         <p:nvSpPr>
-          <p:cNvPr id="10" name="Rectangle 9"/>
+          <p:cNvPr id="10" name="Rounded Rectangle 9"/>
+          <p:cNvSpPr/>
+          <p:nvPr/>
+        </p:nvSpPr>
+        <p:spPr>
+          <a:xfrm>
+            <a:off x="7827264" y="1188720"/>
+            <a:ext cx="2103120" cy="1325880"/>
+          </a:xfrm>
+          <a:prstGeom prst="roundRect">
+            <a:avLst/>
+          </a:prstGeom>
+          <a:solidFill>
+            <a:srgbClr val="F7EFFF"/>
+          </a:solidFill>
+          <a:ln w="13970">
+            <a:solidFill>
+              <a:srgbClr val="7852B0"/>
+            </a:solidFill>
+          </a:ln>
+        </p:spPr>
+        <p:style>
+          <a:lnRef idx="1">
+            <a:schemeClr val="accent1"/>
+          </a:lnRef>
+          <a:fillRef idx="3">
+            <a:schemeClr val="accent1"/>
+          </a:fillRef>
+          <a:effectRef idx="2">
+            <a:schemeClr val="accent1"/>
+          </a:effectRef>
+          <a:fontRef idx="minor">
+            <a:schemeClr val="lt1"/>
+          </a:fontRef>
+        </p:style>
+        <p:txBody>
+          <a:bodyPr rtlCol="0" anchor="ctr" lIns="182880" rIns="100584" tIns="91440"/>
+          <a:lstStyle/>
+          <a:p>
+            <a:pPr algn="ctr">
+              <a:defRPr sz="1600" b="1">
+                <a:solidFill>
+                  <a:srgbClr val="232D37"/>
+                </a:solidFill>
+                <a:latin typeface="Aptos Display"/>
+              </a:defRPr>
+            </a:pPr>
+            <a:r>
+              <a:t>Measure slack</a:t>
+            </a:r>
+          </a:p>
+          <a:p>
+            <a:pPr>
+              <a:spcBef>
+                <a:spcPts val="300"/>
+              </a:spcBef>
+              <a:defRPr sz="1100">
+                <a:solidFill>
+                  <a:srgbClr val="232D37"/>
+                </a:solidFill>
+                <a:latin typeface="Aptos"/>
+              </a:defRPr>
+            </a:pPr>
+            <a:r>
+              <a:t>Compare resulting ordTI and MAGI to active caps</a:t>
+            </a:r>
+          </a:p>
+        </p:txBody>
+      </p:sp>
+      <p:sp>
+        <p:nvSpPr>
+          <p:cNvPr id="11" name="Rectangle 10"/>
+          <p:cNvSpPr/>
+          <p:nvPr/>
+        </p:nvSpPr>
+        <p:spPr>
+          <a:xfrm>
+            <a:off x="7827264" y="1188720"/>
+            <a:ext cx="82296" cy="1325880"/>
+          </a:xfrm>
+          <a:prstGeom prst="rect">
+            <a:avLst/>
+          </a:prstGeom>
+          <a:solidFill>
+            <a:srgbClr val="7852B0"/>
+          </a:solidFill>
+          <a:ln>
+            <a:noFill/>
+          </a:ln>
+        </p:spPr>
+        <p:style>
+          <a:lnRef idx="1">
+            <a:schemeClr val="accent1"/>
+          </a:lnRef>
+          <a:fillRef idx="3">
+            <a:schemeClr val="accent1"/>
+          </a:fillRef>
+          <a:effectRef idx="2">
+            <a:schemeClr val="accent1"/>
+          </a:effectRef>
+          <a:fontRef idx="minor">
+            <a:schemeClr val="lt1"/>
+          </a:fontRef>
+        </p:style>
+        <p:txBody>
+          <a:bodyPr rtlCol="0" anchor="ctr"/>
+          <a:lstStyle/>
+          <a:p>
+            <a:pPr algn="ctr"/>
+          </a:p>
+        </p:txBody>
+      </p:sp>
+      <p:sp>
+        <p:nvSpPr>
+          <p:cNvPr id="12" name="Rounded Rectangle 11"/>
+          <p:cNvSpPr/>
+          <p:nvPr/>
+        </p:nvSpPr>
+        <p:spPr>
+          <a:xfrm>
+            <a:off x="10268712" y="1188720"/>
+            <a:ext cx="1325880" cy="1325880"/>
+          </a:xfrm>
+          <a:prstGeom prst="roundRect">
+            <a:avLst/>
+          </a:prstGeom>
+          <a:solidFill>
+            <a:srgbClr val="F8FAFC"/>
+          </a:solidFill>
+          <a:ln w="13970">
+            <a:solidFill>
+              <a:srgbClr val="0F2647"/>
+            </a:solidFill>
+          </a:ln>
+        </p:spPr>
+        <p:style>
+          <a:lnRef idx="1">
+            <a:schemeClr val="accent1"/>
+          </a:lnRef>
+          <a:fillRef idx="3">
+            <a:schemeClr val="accent1"/>
+          </a:fillRef>
+          <a:effectRef idx="2">
+            <a:schemeClr val="accent1"/>
+          </a:effectRef>
+          <a:fontRef idx="minor">
+            <a:schemeClr val="lt1"/>
+          </a:fontRef>
+        </p:style>
+        <p:txBody>
+          <a:bodyPr rtlCol="0" anchor="ctr" lIns="182880" rIns="100584" tIns="91440"/>
+          <a:lstStyle/>
+          <a:p>
+            <a:pPr algn="ctr">
+              <a:defRPr sz="1400" b="1">
+                <a:solidFill>
+                  <a:srgbClr val="232D37"/>
+                </a:solidFill>
+                <a:latin typeface="Aptos Display"/>
+              </a:defRPr>
+            </a:pPr>
+            <a:r>
+              <a:t>Search</a:t>
+            </a:r>
+          </a:p>
+          <a:p>
+            <a:pPr>
+              <a:spcBef>
+                <a:spcPts val="300"/>
+              </a:spcBef>
+              <a:defRPr sz="1000">
+                <a:solidFill>
+                  <a:srgbClr val="232D37"/>
+                </a:solidFill>
+                <a:latin typeface="Aptos"/>
+              </a:defRPr>
+            </a:pPr>
+            <a:r>
+              <a:t>Find maximum non-negative slack</a:t>
+            </a:r>
+          </a:p>
+        </p:txBody>
+      </p:sp>
+      <p:sp>
+        <p:nvSpPr>
+          <p:cNvPr id="13" name="Rectangle 12"/>
+          <p:cNvSpPr/>
+          <p:nvPr/>
+        </p:nvSpPr>
+        <p:spPr>
+          <a:xfrm>
+            <a:off x="10268712" y="1188720"/>
+            <a:ext cx="82296" cy="1325880"/>
+          </a:xfrm>
+          <a:prstGeom prst="rect">
+            <a:avLst/>
+          </a:prstGeom>
+          <a:solidFill>
+            <a:srgbClr val="0F2647"/>
+          </a:solidFill>
+          <a:ln>
+            <a:noFill/>
+          </a:ln>
+        </p:spPr>
+        <p:style>
+          <a:lnRef idx="1">
+            <a:schemeClr val="accent1"/>
+          </a:lnRef>
+          <a:fillRef idx="3">
+            <a:schemeClr val="accent1"/>
+          </a:fillRef>
+          <a:effectRef idx="2">
+            <a:schemeClr val="accent1"/>
+          </a:effectRef>
+          <a:fontRef idx="minor">
+            <a:schemeClr val="lt1"/>
+          </a:fontRef>
+        </p:style>
+        <p:txBody>
+          <a:bodyPr rtlCol="0" anchor="ctr"/>
+          <a:lstStyle/>
+          <a:p>
+            <a:pPr algn="ctr"/>
+          </a:p>
+        </p:txBody>
+      </p:sp>
+      <p:cxnSp>
+        <p:nvCxnSpPr>
+          <p:cNvPr id="14" name="Connector 13"/>
+          <p:cNvCxnSpPr/>
+          <p:nvPr/>
+        </p:nvCxnSpPr>
+        <p:spPr>
+          <a:xfrm>
+            <a:off x="2651760" y="1847088"/>
+            <a:ext cx="228600" cy="0"/>
+          </a:xfrm>
+          <a:prstGeom prst="line">
+            <a:avLst/>
+          </a:prstGeom>
+          <a:ln w="22860">
+            <a:solidFill>
+              <a:srgbClr val="266EB2"/>
+            </a:solidFill>
+          </a:ln>
+        </p:spPr>
+        <p:style>
+          <a:lnRef idx="2">
+            <a:schemeClr val="accent1"/>
+          </a:lnRef>
+          <a:fillRef idx="0">
+            <a:schemeClr val="accent1"/>
+          </a:fillRef>
+          <a:effectRef idx="1">
+            <a:schemeClr val="accent1"/>
+          </a:effectRef>
+          <a:fontRef idx="minor">
+            <a:schemeClr val="tx1"/>
+          </a:fontRef>
+        </p:style>
+      </p:cxnSp>
+      <p:cxnSp>
+        <p:nvCxnSpPr>
+          <p:cNvPr id="15" name="Connector 14"/>
+          <p:cNvCxnSpPr/>
+          <p:nvPr/>
+        </p:nvCxnSpPr>
+        <p:spPr>
+          <a:xfrm>
+            <a:off x="5093208" y="1847088"/>
+            <a:ext cx="228600" cy="0"/>
+          </a:xfrm>
+          <a:prstGeom prst="line">
+            <a:avLst/>
+          </a:prstGeom>
+          <a:ln w="22860">
+            <a:solidFill>
+              <a:srgbClr val="E5892A"/>
+            </a:solidFill>
+          </a:ln>
+        </p:spPr>
+        <p:style>
+          <a:lnRef idx="2">
+            <a:schemeClr val="accent1"/>
+          </a:lnRef>
+          <a:fillRef idx="0">
+            <a:schemeClr val="accent1"/>
+          </a:fillRef>
+          <a:effectRef idx="1">
+            <a:schemeClr val="accent1"/>
+          </a:effectRef>
+          <a:fontRef idx="minor">
+            <a:schemeClr val="tx1"/>
+          </a:fontRef>
+        </p:style>
+      </p:cxnSp>
+      <p:cxnSp>
+        <p:nvCxnSpPr>
+          <p:cNvPr id="16" name="Connector 15"/>
+          <p:cNvCxnSpPr/>
+          <p:nvPr/>
+        </p:nvCxnSpPr>
+        <p:spPr>
+          <a:xfrm>
+            <a:off x="7534656" y="1847088"/>
+            <a:ext cx="228600" cy="0"/>
+          </a:xfrm>
+          <a:prstGeom prst="line">
+            <a:avLst/>
+          </a:prstGeom>
+          <a:ln w="22860">
+            <a:solidFill>
+              <a:srgbClr val="429761"/>
+            </a:solidFill>
+          </a:ln>
+        </p:spPr>
+        <p:style>
+          <a:lnRef idx="2">
+            <a:schemeClr val="accent1"/>
+          </a:lnRef>
+          <a:fillRef idx="0">
+            <a:schemeClr val="accent1"/>
+          </a:fillRef>
+          <a:effectRef idx="1">
+            <a:schemeClr val="accent1"/>
+          </a:effectRef>
+          <a:fontRef idx="minor">
+            <a:schemeClr val="tx1"/>
+          </a:fontRef>
+        </p:style>
+      </p:cxnSp>
+      <p:cxnSp>
+        <p:nvCxnSpPr>
+          <p:cNvPr id="17" name="Connector 16"/>
+          <p:cNvCxnSpPr/>
+          <p:nvPr/>
+        </p:nvCxnSpPr>
+        <p:spPr>
+          <a:xfrm>
+            <a:off x="9976104" y="1847088"/>
+            <a:ext cx="228600" cy="0"/>
+          </a:xfrm>
+          <a:prstGeom prst="line">
+            <a:avLst/>
+          </a:prstGeom>
+          <a:ln w="22860">
+            <a:solidFill>
+              <a:srgbClr val="7852B0"/>
+            </a:solidFill>
+          </a:ln>
+        </p:spPr>
+        <p:style>
+          <a:lnRef idx="2">
+            <a:schemeClr val="accent1"/>
+          </a:lnRef>
+          <a:fillRef idx="0">
+            <a:schemeClr val="accent1"/>
+          </a:fillRef>
+          <a:effectRef idx="1">
+            <a:schemeClr val="accent1"/>
+          </a:effectRef>
+          <a:fontRef idx="minor">
+            <a:schemeClr val="tx1"/>
+          </a:fontRef>
+        </p:style>
+      </p:cxnSp>
+      <p:sp>
+        <p:nvSpPr>
+          <p:cNvPr id="18" name="Rounded Rectangle 17"/>
+          <p:cNvSpPr/>
+          <p:nvPr/>
+        </p:nvSpPr>
+        <p:spPr>
+          <a:xfrm>
+            <a:off x="868680" y="3703320"/>
+            <a:ext cx="5074920" cy="1325880"/>
+          </a:xfrm>
+          <a:prstGeom prst="roundRect">
+            <a:avLst/>
+          </a:prstGeom>
+          <a:solidFill>
+            <a:srgbClr val="F8FAFC"/>
+          </a:solidFill>
+          <a:ln w="13970">
+            <a:solidFill>
+              <a:srgbClr val="168F8D"/>
+            </a:solidFill>
+          </a:ln>
+        </p:spPr>
+        <p:style>
+          <a:lnRef idx="1">
+            <a:schemeClr val="accent1"/>
+          </a:lnRef>
+          <a:fillRef idx="3">
+            <a:schemeClr val="accent1"/>
+          </a:fillRef>
+          <a:effectRef idx="2">
+            <a:schemeClr val="accent1"/>
+          </a:effectRef>
+          <a:fontRef idx="minor">
+            <a:schemeClr val="lt1"/>
+          </a:fontRef>
+        </p:style>
+        <p:txBody>
+          <a:bodyPr rtlCol="0" anchor="ctr" lIns="182880" rIns="100584" tIns="91440"/>
+          <a:lstStyle/>
+          <a:p>
+            <a:pPr algn="ctr">
+              <a:defRPr sz="1600" b="1">
+                <a:solidFill>
+                  <a:srgbClr val="232D37"/>
+                </a:solidFill>
+                <a:latin typeface="Aptos Display"/>
+              </a:defRPr>
+            </a:pPr>
+            <a:r>
+              <a:t>Search strategy</a:t>
+            </a:r>
+          </a:p>
+          <a:p>
+            <a:pPr>
+              <a:spcBef>
+                <a:spcPts val="300"/>
+              </a:spcBef>
+              <a:defRPr sz="1200">
+                <a:solidFill>
+                  <a:srgbClr val="232D37"/>
+                </a:solidFill>
+                <a:latin typeface="Aptos"/>
+              </a:defRPr>
+            </a:pPr>
+            <a:r>
+              <a:t>Use false position / Illinois updates, with bisection safeguards. Stop when bracket width is under one cent or headroom is within 0.005. Slack is non-increasing as conversion rises.</a:t>
+            </a:r>
+          </a:p>
+        </p:txBody>
+      </p:sp>
+      <p:sp>
+        <p:nvSpPr>
+          <p:cNvPr id="19" name="Rectangle 18"/>
+          <p:cNvSpPr/>
+          <p:nvPr/>
+        </p:nvSpPr>
+        <p:spPr>
+          <a:xfrm>
+            <a:off x="868680" y="3703320"/>
+            <a:ext cx="82296" cy="1325880"/>
+          </a:xfrm>
+          <a:prstGeom prst="rect">
+            <a:avLst/>
+          </a:prstGeom>
+          <a:solidFill>
+            <a:srgbClr val="168F8D"/>
+          </a:solidFill>
+          <a:ln>
+            <a:noFill/>
+          </a:ln>
+        </p:spPr>
+        <p:style>
+          <a:lnRef idx="1">
+            <a:schemeClr val="accent1"/>
+          </a:lnRef>
+          <a:fillRef idx="3">
+            <a:schemeClr val="accent1"/>
+          </a:fillRef>
+          <a:effectRef idx="2">
+            <a:schemeClr val="accent1"/>
+          </a:effectRef>
+          <a:fontRef idx="minor">
+            <a:schemeClr val="lt1"/>
+          </a:fontRef>
+        </p:style>
+        <p:txBody>
+          <a:bodyPr rtlCol="0" anchor="ctr"/>
+          <a:lstStyle/>
+          <a:p>
+            <a:pPr algn="ctr"/>
+          </a:p>
+        </p:txBody>
+      </p:sp>
+      <p:sp>
+        <p:nvSpPr>
+          <p:cNvPr id="20" name="Rounded Rectangle 19"/>
+          <p:cNvSpPr/>
+          <p:nvPr/>
+        </p:nvSpPr>
+        <p:spPr>
+          <a:xfrm>
+            <a:off x="6263640" y="3703320"/>
+            <a:ext cx="5074920" cy="1325880"/>
+          </a:xfrm>
+          <a:prstGeom prst="roundRect">
+            <a:avLst/>
+          </a:prstGeom>
+          <a:solidFill>
+            <a:srgbClr val="F8FAFC"/>
+          </a:solidFill>
+          <a:ln w="13970">
+            <a:solidFill>
+              <a:srgbClr val="0F2647"/>
+            </a:solidFill>
+          </a:ln>
+        </p:spPr>
+        <p:style>
+          <a:lnRef idx="1">
+            <a:schemeClr val="accent1"/>
+          </a:lnRef>
+          <a:fillRef idx="3">
+            <a:schemeClr val="accent1"/>
+          </a:fillRef>
+          <a:effectRef idx="2">
+            <a:schemeClr val="accent1"/>
+          </a:effectRef>
+          <a:fontRef idx="minor">
+            <a:schemeClr val="lt1"/>
+          </a:fontRef>
+        </p:style>
+        <p:txBody>
+          <a:bodyPr rtlCol="0" anchor="ctr" lIns="182880" rIns="100584" tIns="91440"/>
+          <a:lstStyle/>
+          <a:p>
+            <a:pPr algn="ctr">
+              <a:defRPr sz="1600" b="1">
+                <a:solidFill>
+                  <a:srgbClr val="232D37"/>
+                </a:solidFill>
+                <a:latin typeface="Aptos Display"/>
+              </a:defRPr>
+            </a:pPr>
+            <a:r>
+              <a:t>Boundary outcomes</a:t>
+            </a:r>
+          </a:p>
+          <a:p>
+            <a:pPr>
+              <a:spcBef>
+                <a:spcPts val="300"/>
+              </a:spcBef>
+              <a:defRPr sz="1200">
+                <a:solidFill>
+                  <a:srgbClr val="232D37"/>
+                </a:solidFill>
+                <a:latin typeface="Aptos"/>
+              </a:defRPr>
+            </a:pPr>
+            <a:r>
+              <a:t>If c = 0 already violates a limit: convert 0. If the whole post-RMD balance fits: convert all. Otherwise, return the largest feasible amount.</a:t>
+            </a:r>
+          </a:p>
+        </p:txBody>
+      </p:sp>
+      <p:sp>
+        <p:nvSpPr>
+          <p:cNvPr id="21" name="Rectangle 20"/>
+          <p:cNvSpPr/>
+          <p:nvPr/>
+        </p:nvSpPr>
+        <p:spPr>
+          <a:xfrm>
+            <a:off x="6263640" y="3703320"/>
+            <a:ext cx="82296" cy="1325880"/>
+          </a:xfrm>
+          <a:prstGeom prst="rect">
+            <a:avLst/>
+          </a:prstGeom>
+          <a:solidFill>
+            <a:srgbClr val="0F2647"/>
+          </a:solidFill>
+          <a:ln>
+            <a:noFill/>
+          </a:ln>
+        </p:spPr>
+        <p:style>
+          <a:lnRef idx="1">
+            <a:schemeClr val="accent1"/>
+          </a:lnRef>
+          <a:fillRef idx="3">
+            <a:schemeClr val="accent1"/>
+          </a:fillRef>
+          <a:effectRef idx="2">
+            <a:schemeClr val="accent1"/>
+          </a:effectRef>
+          <a:fontRef idx="minor">
+            <a:schemeClr val="lt1"/>
+          </a:fontRef>
+        </p:style>
+        <p:txBody>
+          <a:bodyPr rtlCol="0" anchor="ctr"/>
+          <a:lstStyle/>
+          <a:p>
+            <a:pPr algn="ctr"/>
+          </a:p>
+        </p:txBody>
+      </p:sp>
+      <p:sp>
+        <p:nvSpPr>
+          <p:cNvPr id="22" name="Rectangle 21"/>
           <p:cNvSpPr/>
           <p:nvPr/>
         </p:nvSpPr>
@@ -7212,7 +7376,7 @@
       </p:sp>
       <p:sp>
         <p:nvSpPr>
-          <p:cNvPr id="11" name="TextBox 10"/>
+          <p:cNvPr id="23" name="TextBox 22"/>
           <p:cNvSpPr txBox="1"/>
           <p:nvPr/>
         </p:nvSpPr>
@@ -7241,7 +7405,7 @@
               </a:defRPr>
             </a:pPr>
             <a:r>
-              <a:t>Retirement Income Planner • Architecture overview • MAGI, IRMAA-as-tax, and enhanced companion-chart update</a:t>
+              <a:t>Retirement Income Planner • Architecture overview • Bracket-aware Roth-conversion update</a:t>
             </a:r>
           </a:p>
         </p:txBody>
@@ -7303,7 +7467,7 @@
               </a:defRPr>
             </a:pPr>
             <a:r>
-              <a:t>Companion-chart tooltips: compact, external, and consistent</a:t>
+              <a:t>Account simulation becomes one-year-at-a-time</a:t>
             </a:r>
           </a:p>
         </p:txBody>
@@ -7339,7 +7503,7 @@
               </a:defRPr>
             </a:pPr>
             <a:r>
-              <a:t>Small charts use a shared external tooltip mechanism so detail can remain readable beyond the boundaries of a compact canvas.</a:t>
+              <a:t>Bracket-aware conversions require pre- and post-account balances to be evaluated within each annual projection iteration.</a:t>
             </a:r>
           </a:p>
         </p:txBody>
@@ -7394,7 +7558,7 @@
               </a:defRPr>
             </a:pPr>
             <a:r>
-              <a:t>Why external</a:t>
+              <a:t>Why change the simulation?</a:t>
             </a:r>
           </a:p>
           <a:p>
@@ -7410,7 +7574,7 @@
               </a:defRPr>
             </a:pPr>
             <a:r>
-              <a:t>Built-in Chart.js tooltips are clipped to their canvas.</a:t>
+              <a:t>Conversion is no longer a predetermined withdrawal.</a:t>
             </a:r>
           </a:p>
           <a:p>
@@ -7426,7 +7590,7 @@
               </a:defRPr>
             </a:pPr>
             <a:r>
-              <a:t>Small companion panels need compact information that can overflow safely.</a:t>
+              <a:t>The amount depends on same-year taxable SS, LTCG, tax, and MAGI.</a:t>
             </a:r>
           </a:p>
           <a:p>
@@ -7442,7 +7606,7 @@
               </a:defRPr>
             </a:pPr>
             <a:r>
-              <a:t>External tooltip renders into a floating monospace element.</a:t>
+              <a:t>A full up-front IRA/Roth schedule would be stale before the solve completes.</a:t>
             </a:r>
           </a:p>
         </p:txBody>
@@ -7499,6 +7663,184 @@
         <p:spPr>
           <a:xfrm>
             <a:off x="4462272" y="1234440"/>
+            <a:ext cx="3246120" cy="4434840"/>
+          </a:xfrm>
+          <a:prstGeom prst="roundRect">
+            <a:avLst/>
+          </a:prstGeom>
+          <a:solidFill>
+            <a:srgbClr val="EAF9F4"/>
+          </a:solidFill>
+          <a:ln w="13970">
+            <a:solidFill>
+              <a:srgbClr val="429761"/>
+            </a:solidFill>
+          </a:ln>
+        </p:spPr>
+        <p:style>
+          <a:lnRef idx="1">
+            <a:schemeClr val="accent1"/>
+          </a:lnRef>
+          <a:fillRef idx="3">
+            <a:schemeClr val="accent1"/>
+          </a:fillRef>
+          <a:effectRef idx="2">
+            <a:schemeClr val="accent1"/>
+          </a:effectRef>
+          <a:fontRef idx="minor">
+            <a:schemeClr val="lt1"/>
+          </a:fontRef>
+        </p:style>
+        <p:txBody>
+          <a:bodyPr rtlCol="0" anchor="ctr" lIns="182880" rIns="100584" tIns="91440"/>
+          <a:lstStyle/>
+          <a:p>
+            <a:pPr algn="ctr">
+              <a:defRPr sz="1700" b="1">
+                <a:solidFill>
+                  <a:srgbClr val="232D37"/>
+                </a:solidFill>
+                <a:latin typeface="Aptos Display"/>
+              </a:defRPr>
+            </a:pPr>
+            <a:r>
+              <a:t>IRA pre(k)</a:t>
+            </a:r>
+          </a:p>
+          <a:p>
+            <a:pPr>
+              <a:spcBef>
+                <a:spcPts val="300"/>
+              </a:spcBef>
+              <a:defRPr sz="1200">
+                <a:solidFill>
+                  <a:srgbClr val="232D37"/>
+                </a:solidFill>
+                <a:latin typeface="Aptos"/>
+              </a:defRPr>
+            </a:pPr>
+            <a:r>
+              <a:t>Start-of-year IRA balance</a:t>
+            </a:r>
+          </a:p>
+          <a:p>
+            <a:pPr>
+              <a:spcBef>
+                <a:spcPts val="300"/>
+              </a:spcBef>
+              <a:defRPr sz="1200">
+                <a:solidFill>
+                  <a:srgbClr val="232D37"/>
+                </a:solidFill>
+                <a:latin typeface="Aptos"/>
+              </a:defRPr>
+            </a:pPr>
+            <a:r>
+              <a:t>AUM balance contribution</a:t>
+            </a:r>
+          </a:p>
+          <a:p>
+            <a:pPr>
+              <a:spcBef>
+                <a:spcPts val="300"/>
+              </a:spcBef>
+              <a:defRPr sz="1200">
+                <a:solidFill>
+                  <a:srgbClr val="232D37"/>
+                </a:solidFill>
+                <a:latin typeface="Aptos"/>
+              </a:defRPr>
+            </a:pPr>
+            <a:r>
+              <a:t>RMD amount</a:t>
+            </a:r>
+          </a:p>
+          <a:p>
+            <a:pPr>
+              <a:spcBef>
+                <a:spcPts val="300"/>
+              </a:spcBef>
+              <a:defRPr sz="1200">
+                <a:solidFill>
+                  <a:srgbClr val="232D37"/>
+                </a:solidFill>
+                <a:latin typeface="Aptos"/>
+              </a:defRPr>
+            </a:pPr>
+            <a:r>
+              <a:t>Post-RMD conversion room</a:t>
+            </a:r>
+          </a:p>
+          <a:p>
+            <a:pPr>
+              <a:spcBef>
+                <a:spcPts val="300"/>
+              </a:spcBef>
+              <a:defRPr sz="1200">
+                <a:solidFill>
+                  <a:srgbClr val="232D37"/>
+                </a:solidFill>
+                <a:latin typeface="Aptos"/>
+              </a:defRPr>
+            </a:pPr>
+            <a:r>
+              <a:t>Owner/survivor eligibility</a:t>
+            </a:r>
+          </a:p>
+        </p:txBody>
+      </p:sp>
+      <p:sp>
+        <p:nvSpPr>
+          <p:cNvPr id="7" name="Rectangle 6"/>
+          <p:cNvSpPr/>
+          <p:nvPr/>
+        </p:nvSpPr>
+        <p:spPr>
+          <a:xfrm>
+            <a:off x="4462272" y="1234440"/>
+            <a:ext cx="82296" cy="4434840"/>
+          </a:xfrm>
+          <a:prstGeom prst="rect">
+            <a:avLst/>
+          </a:prstGeom>
+          <a:solidFill>
+            <a:srgbClr val="429761"/>
+          </a:solidFill>
+          <a:ln>
+            <a:noFill/>
+          </a:ln>
+        </p:spPr>
+        <p:style>
+          <a:lnRef idx="1">
+            <a:schemeClr val="accent1"/>
+          </a:lnRef>
+          <a:fillRef idx="3">
+            <a:schemeClr val="accent1"/>
+          </a:fillRef>
+          <a:effectRef idx="2">
+            <a:schemeClr val="accent1"/>
+          </a:effectRef>
+          <a:fontRef idx="minor">
+            <a:schemeClr val="lt1"/>
+          </a:fontRef>
+        </p:style>
+        <p:txBody>
+          <a:bodyPr rtlCol="0" anchor="ctr"/>
+          <a:lstStyle/>
+          <a:p>
+            <a:pPr algn="ctr"/>
+          </a:p>
+        </p:txBody>
+      </p:sp>
+      <p:sp>
+        <p:nvSpPr>
+          <p:cNvPr id="8" name="Rounded Rectangle 7"/>
+          <p:cNvSpPr/>
+          <p:nvPr/>
+        </p:nvSpPr>
+        <p:spPr>
+          <a:xfrm>
+            <a:off x="8284464" y="1234440"/>
             <a:ext cx="3246120" cy="4434840"/>
           </a:xfrm>
           <a:prstGeom prst="roundRect">
@@ -7540,7 +7882,7 @@
               </a:defRPr>
             </a:pPr>
             <a:r>
-              <a:t>External tooltip behavior</a:t>
+              <a:t>IRA/Roth post(k, conv)</a:t>
             </a:r>
           </a:p>
           <a:p>
@@ -7556,7 +7898,7 @@
               </a:defRPr>
             </a:pPr>
             <a:r>
-              <a:t>Receives pre-padded lines from justifyTip.</a:t>
+              <a:t>Apply solved conversion after RMD.</a:t>
             </a:r>
           </a:p>
           <a:p>
@@ -7572,7 +7914,7 @@
               </a:defRPr>
             </a:pPr>
             <a:r>
-              <a:t>Flips left near the viewport edge.</a:t>
+              <a:t>Advance IRA and Roth balances for the year.</a:t>
             </a:r>
           </a:p>
           <a:p>
@@ -7588,7 +7930,7 @@
               </a:defRPr>
             </a:pPr>
             <a:r>
-              <a:t>Glides between positions with CSS transition.</a:t>
+              <a:t>Roth receives conversion and grows tax-free.</a:t>
             </a:r>
           </a:p>
           <a:p>
@@ -7604,20 +7946,20 @@
               </a:defRPr>
             </a:pPr>
             <a:r>
-              <a:t>Appears immediately on first display.</a:t>
-            </a:r>
-          </a:p>
-        </p:txBody>
-      </p:sp>
-      <p:sp>
-        <p:nvSpPr>
-          <p:cNvPr id="7" name="Rectangle 6"/>
+              <a:t>Next year starts from these settled balances.</a:t>
+            </a:r>
+          </a:p>
+        </p:txBody>
+      </p:sp>
+      <p:sp>
+        <p:nvSpPr>
+          <p:cNvPr id="9" name="Rectangle 8"/>
           <p:cNvSpPr/>
           <p:nvPr/>
         </p:nvSpPr>
         <p:spPr>
           <a:xfrm>
-            <a:off x="4462272" y="1234440"/>
+            <a:off x="8284464" y="1234440"/>
             <a:ext cx="82296" cy="4434840"/>
           </a:xfrm>
           <a:prstGeom prst="rect">
@@ -7654,168 +7996,6 @@
       </p:sp>
       <p:sp>
         <p:nvSpPr>
-          <p:cNvPr id="8" name="Rounded Rectangle 7"/>
-          <p:cNvSpPr/>
-          <p:nvPr/>
-        </p:nvSpPr>
-        <p:spPr>
-          <a:xfrm>
-            <a:off x="8284464" y="1234440"/>
-            <a:ext cx="3246120" cy="4434840"/>
-          </a:xfrm>
-          <a:prstGeom prst="roundRect">
-            <a:avLst/>
-          </a:prstGeom>
-          <a:solidFill>
-            <a:srgbClr val="EAF9F4"/>
-          </a:solidFill>
-          <a:ln w="13970">
-            <a:solidFill>
-              <a:srgbClr val="429761"/>
-            </a:solidFill>
-          </a:ln>
-        </p:spPr>
-        <p:style>
-          <a:lnRef idx="1">
-            <a:schemeClr val="accent1"/>
-          </a:lnRef>
-          <a:fillRef idx="3">
-            <a:schemeClr val="accent1"/>
-          </a:fillRef>
-          <a:effectRef idx="2">
-            <a:schemeClr val="accent1"/>
-          </a:effectRef>
-          <a:fontRef idx="minor">
-            <a:schemeClr val="lt1"/>
-          </a:fontRef>
-        </p:style>
-        <p:txBody>
-          <a:bodyPr rtlCol="0" anchor="ctr" lIns="182880" rIns="100584" tIns="91440"/>
-          <a:lstStyle/>
-          <a:p>
-            <a:pPr algn="ctr">
-              <a:defRPr sz="1700" b="1">
-                <a:solidFill>
-                  <a:srgbClr val="232D37"/>
-                </a:solidFill>
-                <a:latin typeface="Aptos Display"/>
-              </a:defRPr>
-            </a:pPr>
-            <a:r>
-              <a:t>Focused content</a:t>
-            </a:r>
-          </a:p>
-          <a:p>
-            <a:pPr>
-              <a:spcBef>
-                <a:spcPts val="300"/>
-              </a:spcBef>
-              <a:defRPr sz="1200">
-                <a:solidFill>
-                  <a:srgbClr val="232D37"/>
-                </a:solidFill>
-                <a:latin typeface="Aptos"/>
-              </a:defRPr>
-            </a:pPr>
-            <a:r>
-              <a:t>MAGI chart: MAGI and IRMAA surcharge only.</a:t>
-            </a:r>
-          </a:p>
-          <a:p>
-            <a:pPr>
-              <a:spcBef>
-                <a:spcPts val="300"/>
-              </a:spcBef>
-              <a:defRPr sz="1200">
-                <a:solidFill>
-                  <a:srgbClr val="232D37"/>
-                </a:solidFill>
-                <a:latin typeface="Aptos"/>
-              </a:defRPr>
-            </a:pPr>
-            <a:r>
-              <a:t>Ordinary tax chart: ordinary income tax only.</a:t>
-            </a:r>
-          </a:p>
-          <a:p>
-            <a:pPr>
-              <a:spcBef>
-                <a:spcPts val="300"/>
-              </a:spcBef>
-              <a:defRPr sz="1200">
-                <a:solidFill>
-                  <a:srgbClr val="232D37"/>
-                </a:solidFill>
-                <a:latin typeface="Aptos"/>
-              </a:defRPr>
-            </a:pPr>
-            <a:r>
-              <a:t>Qualified chart: non-zero QDIV/LTCG/NIIT layers only.</a:t>
-            </a:r>
-          </a:p>
-          <a:p>
-            <a:pPr>
-              <a:spcBef>
-                <a:spcPts val="300"/>
-              </a:spcBef>
-              <a:defRPr sz="1200">
-                <a:solidFill>
-                  <a:srgbClr val="232D37"/>
-                </a:solidFill>
-                <a:latin typeface="Aptos"/>
-              </a:defRPr>
-            </a:pPr>
-            <a:r>
-              <a:t>Show Details does not expand companion popups.</a:t>
-            </a:r>
-          </a:p>
-        </p:txBody>
-      </p:sp>
-      <p:sp>
-        <p:nvSpPr>
-          <p:cNvPr id="9" name="Rectangle 8"/>
-          <p:cNvSpPr/>
-          <p:nvPr/>
-        </p:nvSpPr>
-        <p:spPr>
-          <a:xfrm>
-            <a:off x="8284464" y="1234440"/>
-            <a:ext cx="82296" cy="4434840"/>
-          </a:xfrm>
-          <a:prstGeom prst="rect">
-            <a:avLst/>
-          </a:prstGeom>
-          <a:solidFill>
-            <a:srgbClr val="429761"/>
-          </a:solidFill>
-          <a:ln>
-            <a:noFill/>
-          </a:ln>
-        </p:spPr>
-        <p:style>
-          <a:lnRef idx="1">
-            <a:schemeClr val="accent1"/>
-          </a:lnRef>
-          <a:fillRef idx="3">
-            <a:schemeClr val="accent1"/>
-          </a:fillRef>
-          <a:effectRef idx="2">
-            <a:schemeClr val="accent1"/>
-          </a:effectRef>
-          <a:fontRef idx="minor">
-            <a:schemeClr val="lt1"/>
-          </a:fontRef>
-        </p:style>
-        <p:txBody>
-          <a:bodyPr rtlCol="0" anchor="ctr"/>
-          <a:lstStyle/>
-          <a:p>
-            <a:pPr algn="ctr"/>
-          </a:p>
-        </p:txBody>
-      </p:sp>
-      <p:sp>
-        <p:nvSpPr>
           <p:cNvPr id="10" name="Rectangle 9"/>
           <p:cNvSpPr/>
           <p:nvPr/>
@@ -7888,7 +8068,7 @@
               </a:defRPr>
             </a:pPr>
             <a:r>
-              <a:t>Retirement Income Planner • Architecture overview • MAGI, IRMAA-as-tax, and enhanced companion-chart update</a:t>
+              <a:t>Retirement Income Planner • Architecture overview • Bracket-aware Roth-conversion update</a:t>
             </a:r>
           </a:p>
         </p:txBody>
@@ -7950,7 +8130,7 @@
               </a:defRPr>
             </a:pPr>
             <a:r>
-              <a:t>Unified overlays and legend conventions</a:t>
+              <a:t>Projection contract and conversion diagnostics</a:t>
             </a:r>
           </a:p>
         </p:txBody>
@@ -7986,7 +8166,7 @@
               </a:defRPr>
             </a:pPr>
             <a:r>
-              <a:t>Reference lines now use one visual language across income, MAGI, tax, and Social Security views.</a:t>
+              <a:t>The annual row now records the selected conversion result and how much solver work was needed to establish it.</a:t>
             </a:r>
           </a:p>
         </p:txBody>
@@ -7999,8 +8179,332 @@
         </p:nvSpPr>
         <p:spPr>
           <a:xfrm>
-            <a:off x="502920" y="1170432"/>
-            <a:ext cx="3337560" cy="4526280"/>
+            <a:off x="594360" y="1188720"/>
+            <a:ext cx="3383280" cy="4526280"/>
+          </a:xfrm>
+          <a:prstGeom prst="roundRect">
+            <a:avLst/>
+          </a:prstGeom>
+          <a:solidFill>
+            <a:srgbClr val="E9F4FF"/>
+          </a:solidFill>
+          <a:ln w="13970">
+            <a:solidFill>
+              <a:srgbClr val="266EB2"/>
+            </a:solidFill>
+          </a:ln>
+        </p:spPr>
+        <p:style>
+          <a:lnRef idx="1">
+            <a:schemeClr val="accent1"/>
+          </a:lnRef>
+          <a:fillRef idx="3">
+            <a:schemeClr val="accent1"/>
+          </a:fillRef>
+          <a:effectRef idx="2">
+            <a:schemeClr val="accent1"/>
+          </a:effectRef>
+          <a:fontRef idx="minor">
+            <a:schemeClr val="lt1"/>
+          </a:fontRef>
+        </p:style>
+        <p:txBody>
+          <a:bodyPr rtlCol="0" anchor="ctr" lIns="182880" rIns="100584" tIns="91440"/>
+          <a:lstStyle/>
+          <a:p>
+            <a:pPr algn="ctr">
+              <a:defRPr sz="1700" b="1">
+                <a:solidFill>
+                  <a:srgbClr val="232D37"/>
+                </a:solidFill>
+                <a:latin typeface="Aptos Display"/>
+              </a:defRPr>
+            </a:pPr>
+            <a:r>
+              <a:t>Existing conversion outputs</a:t>
+            </a:r>
+          </a:p>
+          <a:p>
+            <a:pPr>
+              <a:spcBef>
+                <a:spcPts val="300"/>
+              </a:spcBef>
+              <a:defRPr sz="1200">
+                <a:solidFill>
+                  <a:srgbClr val="232D37"/>
+                </a:solidFill>
+                <a:latin typeface="Aptos"/>
+              </a:defRPr>
+            </a:pPr>
+            <a:r>
+              <a:t>rothConvByPerson</a:t>
+            </a:r>
+          </a:p>
+          <a:p>
+            <a:pPr>
+              <a:spcBef>
+                <a:spcPts val="300"/>
+              </a:spcBef>
+              <a:defRPr sz="1200">
+                <a:solidFill>
+                  <a:srgbClr val="232D37"/>
+                </a:solidFill>
+                <a:latin typeface="Aptos"/>
+              </a:defRPr>
+            </a:pPr>
+            <a:r>
+              <a:t>rothConvTotal</a:t>
+            </a:r>
+          </a:p>
+          <a:p>
+            <a:pPr>
+              <a:spcBef>
+                <a:spcPts val="300"/>
+              </a:spcBef>
+              <a:defRPr sz="1200">
+                <a:solidFill>
+                  <a:srgbClr val="232D37"/>
+                </a:solidFill>
+                <a:latin typeface="Aptos"/>
+              </a:defRPr>
+            </a:pPr>
+            <a:r>
+              <a:t>rothBalByPerson</a:t>
+            </a:r>
+          </a:p>
+          <a:p>
+            <a:pPr>
+              <a:spcBef>
+                <a:spcPts val="300"/>
+              </a:spcBef>
+              <a:defRPr sz="1200">
+                <a:solidFill>
+                  <a:srgbClr val="232D37"/>
+                </a:solidFill>
+                <a:latin typeface="Aptos"/>
+              </a:defRPr>
+            </a:pPr>
+            <a:r>
+              <a:t>IRA RMD/withdrawal fields</a:t>
+            </a:r>
+          </a:p>
+          <a:p>
+            <a:pPr>
+              <a:spcBef>
+                <a:spcPts val="300"/>
+              </a:spcBef>
+              <a:defRPr sz="1200">
+                <a:solidFill>
+                  <a:srgbClr val="232D37"/>
+                </a:solidFill>
+                <a:latin typeface="Aptos"/>
+              </a:defRPr>
+            </a:pPr>
+            <a:r>
+              <a:t>Tax and AGI fields that reflect the conversion</a:t>
+            </a:r>
+          </a:p>
+        </p:txBody>
+      </p:sp>
+      <p:sp>
+        <p:nvSpPr>
+          <p:cNvPr id="5" name="Rectangle 4"/>
+          <p:cNvSpPr/>
+          <p:nvPr/>
+        </p:nvSpPr>
+        <p:spPr>
+          <a:xfrm>
+            <a:off x="594360" y="1188720"/>
+            <a:ext cx="82296" cy="4526280"/>
+          </a:xfrm>
+          <a:prstGeom prst="rect">
+            <a:avLst/>
+          </a:prstGeom>
+          <a:solidFill>
+            <a:srgbClr val="266EB2"/>
+          </a:solidFill>
+          <a:ln>
+            <a:noFill/>
+          </a:ln>
+        </p:spPr>
+        <p:style>
+          <a:lnRef idx="1">
+            <a:schemeClr val="accent1"/>
+          </a:lnRef>
+          <a:fillRef idx="3">
+            <a:schemeClr val="accent1"/>
+          </a:fillRef>
+          <a:effectRef idx="2">
+            <a:schemeClr val="accent1"/>
+          </a:effectRef>
+          <a:fontRef idx="minor">
+            <a:schemeClr val="lt1"/>
+          </a:fontRef>
+        </p:style>
+        <p:txBody>
+          <a:bodyPr rtlCol="0" anchor="ctr"/>
+          <a:lstStyle/>
+          <a:p>
+            <a:pPr algn="ctr"/>
+          </a:p>
+        </p:txBody>
+      </p:sp>
+      <p:sp>
+        <p:nvSpPr>
+          <p:cNvPr id="6" name="Rounded Rectangle 5"/>
+          <p:cNvSpPr/>
+          <p:nvPr/>
+        </p:nvSpPr>
+        <p:spPr>
+          <a:xfrm>
+            <a:off x="4407408" y="1188720"/>
+            <a:ext cx="3383280" cy="4526280"/>
+          </a:xfrm>
+          <a:prstGeom prst="roundRect">
+            <a:avLst/>
+          </a:prstGeom>
+          <a:solidFill>
+            <a:srgbClr val="EAF9F4"/>
+          </a:solidFill>
+          <a:ln w="13970">
+            <a:solidFill>
+              <a:srgbClr val="429761"/>
+            </a:solidFill>
+          </a:ln>
+        </p:spPr>
+        <p:style>
+          <a:lnRef idx="1">
+            <a:schemeClr val="accent1"/>
+          </a:lnRef>
+          <a:fillRef idx="3">
+            <a:schemeClr val="accent1"/>
+          </a:fillRef>
+          <a:effectRef idx="2">
+            <a:schemeClr val="accent1"/>
+          </a:effectRef>
+          <a:fontRef idx="minor">
+            <a:schemeClr val="lt1"/>
+          </a:fontRef>
+        </p:style>
+        <p:txBody>
+          <a:bodyPr rtlCol="0" anchor="ctr" lIns="182880" rIns="100584" tIns="91440"/>
+          <a:lstStyle/>
+          <a:p>
+            <a:pPr algn="ctr">
+              <a:defRPr sz="1700" b="1">
+                <a:solidFill>
+                  <a:srgbClr val="232D37"/>
+                </a:solidFill>
+                <a:latin typeface="Aptos Display"/>
+              </a:defRPr>
+            </a:pPr>
+            <a:r>
+              <a:t>New diagnostic field</a:t>
+            </a:r>
+          </a:p>
+          <a:p>
+            <a:pPr>
+              <a:spcBef>
+                <a:spcPts val="300"/>
+              </a:spcBef>
+              <a:defRPr sz="1200">
+                <a:solidFill>
+                  <a:srgbClr val="232D37"/>
+                </a:solidFill>
+                <a:latin typeface="Aptos"/>
+              </a:defRPr>
+            </a:pPr>
+            <a:r>
+              <a:t>convTrials</a:t>
+            </a:r>
+          </a:p>
+          <a:p>
+            <a:pPr>
+              <a:spcBef>
+                <a:spcPts val="300"/>
+              </a:spcBef>
+              <a:defRPr sz="1200">
+                <a:solidFill>
+                  <a:srgbClr val="232D37"/>
+                </a:solidFill>
+                <a:latin typeface="Aptos"/>
+              </a:defRPr>
+            </a:pPr>
+            <a:r>
+              <a:t>Counts full trial tax solves used by bracket conversion search</a:t>
+            </a:r>
+          </a:p>
+          <a:p>
+            <a:pPr>
+              <a:spcBef>
+                <a:spcPts val="300"/>
+              </a:spcBef>
+              <a:defRPr sz="1200">
+                <a:solidFill>
+                  <a:srgbClr val="232D37"/>
+                </a:solidFill>
+                <a:latin typeface="Aptos"/>
+              </a:defRPr>
+            </a:pPr>
+            <a:r>
+              <a:t>Supports transparency and regression analysis without exposing solver internals to chart logic</a:t>
+            </a:r>
+          </a:p>
+        </p:txBody>
+      </p:sp>
+      <p:sp>
+        <p:nvSpPr>
+          <p:cNvPr id="7" name="Rectangle 6"/>
+          <p:cNvSpPr/>
+          <p:nvPr/>
+        </p:nvSpPr>
+        <p:spPr>
+          <a:xfrm>
+            <a:off x="4407408" y="1188720"/>
+            <a:ext cx="82296" cy="4526280"/>
+          </a:xfrm>
+          <a:prstGeom prst="rect">
+            <a:avLst/>
+          </a:prstGeom>
+          <a:solidFill>
+            <a:srgbClr val="429761"/>
+          </a:solidFill>
+          <a:ln>
+            <a:noFill/>
+          </a:ln>
+        </p:spPr>
+        <p:style>
+          <a:lnRef idx="1">
+            <a:schemeClr val="accent1"/>
+          </a:lnRef>
+          <a:fillRef idx="3">
+            <a:schemeClr val="accent1"/>
+          </a:fillRef>
+          <a:effectRef idx="2">
+            <a:schemeClr val="accent1"/>
+          </a:effectRef>
+          <a:fontRef idx="minor">
+            <a:schemeClr val="lt1"/>
+          </a:fontRef>
+        </p:style>
+        <p:txBody>
+          <a:bodyPr rtlCol="0" anchor="ctr"/>
+          <a:lstStyle/>
+          <a:p>
+            <a:pPr algn="ctr"/>
+          </a:p>
+        </p:txBody>
+      </p:sp>
+      <p:sp>
+        <p:nvSpPr>
+          <p:cNvPr id="8" name="Rounded Rectangle 7"/>
+          <p:cNvSpPr/>
+          <p:nvPr/>
+        </p:nvSpPr>
+        <p:spPr>
+          <a:xfrm>
+            <a:off x="8220456" y="1188720"/>
+            <a:ext cx="3383280" cy="4526280"/>
           </a:xfrm>
           <a:prstGeom prst="roundRect">
             <a:avLst/>
@@ -8041,7 +8545,7 @@
               </a:defRPr>
             </a:pPr>
             <a:r>
-              <a:t>Overlay convention</a:t>
+              <a:t>Consumer contract</a:t>
             </a:r>
           </a:p>
           <a:p>
@@ -8057,7 +8561,7 @@
               </a:defRPr>
             </a:pPr>
             <a:r>
-              <a:t>OVERLAY_COLOR is black.</a:t>
+              <a:t>Income chart shows a dedicated pre-tax IRA withdrawal band.</a:t>
             </a:r>
           </a:p>
           <a:p>
@@ -8073,7 +8577,7 @@
               </a:defRPr>
             </a:pPr>
             <a:r>
-              <a:t>Dashed horizontal lines are labeled with de-cluttered text.</a:t>
+              <a:t>Asset conversion companion reads row.rothConvByPerson.</a:t>
             </a:r>
           </a:p>
           <a:p>
@@ -8089,36 +8593,20 @@
               </a:defRPr>
             </a:pPr>
             <a:r>
-              <a:t>Income IRMAA overlay is registered again as magiOverlay.</a:t>
-            </a:r>
-          </a:p>
-          <a:p>
-            <a:pPr>
-              <a:spcBef>
-                <a:spcPts val="300"/>
-              </a:spcBef>
-              <a:defRPr sz="1200">
-                <a:solidFill>
-                  <a:srgbClr val="232D37"/>
-                </a:solidFill>
-                <a:latin typeface="Aptos"/>
-              </a:defRPr>
-            </a:pPr>
-            <a:r>
-              <a:t>Tax bracket overlay marks ordinary-tax ceilings.</a:t>
-            </a:r>
-          </a:p>
-        </p:txBody>
-      </p:sp>
-      <p:sp>
-        <p:nvSpPr>
-          <p:cNvPr id="5" name="Rectangle 4"/>
+              <a:t>Excel, chat, and formulas receive conversion fields through defined interfaces.</a:t>
+            </a:r>
+          </a:p>
+        </p:txBody>
+      </p:sp>
+      <p:sp>
+        <p:nvSpPr>
+          <p:cNvPr id="9" name="Rectangle 8"/>
           <p:cNvSpPr/>
           <p:nvPr/>
         </p:nvSpPr>
         <p:spPr>
           <a:xfrm>
-            <a:off x="502920" y="1170432"/>
+            <a:off x="8220456" y="1188720"/>
             <a:ext cx="82296" cy="4526280"/>
           </a:xfrm>
           <a:prstGeom prst="rect">
@@ -8155,282 +8643,6 @@
       </p:sp>
       <p:sp>
         <p:nvSpPr>
-          <p:cNvPr id="6" name="Rounded Rectangle 5"/>
-          <p:cNvSpPr/>
-          <p:nvPr/>
-        </p:nvSpPr>
-        <p:spPr>
-          <a:xfrm>
-            <a:off x="4407408" y="1170432"/>
-            <a:ext cx="3337560" cy="4526280"/>
-          </a:xfrm>
-          <a:prstGeom prst="roundRect">
-            <a:avLst/>
-          </a:prstGeom>
-          <a:solidFill>
-            <a:srgbClr val="E9F4FF"/>
-          </a:solidFill>
-          <a:ln w="13970">
-            <a:solidFill>
-              <a:srgbClr val="266EB2"/>
-            </a:solidFill>
-          </a:ln>
-        </p:spPr>
-        <p:style>
-          <a:lnRef idx="1">
-            <a:schemeClr val="accent1"/>
-          </a:lnRef>
-          <a:fillRef idx="3">
-            <a:schemeClr val="accent1"/>
-          </a:fillRef>
-          <a:effectRef idx="2">
-            <a:schemeClr val="accent1"/>
-          </a:effectRef>
-          <a:fontRef idx="minor">
-            <a:schemeClr val="lt1"/>
-          </a:fontRef>
-        </p:style>
-        <p:txBody>
-          <a:bodyPr rtlCol="0" anchor="ctr" lIns="182880" rIns="100584" tIns="91440"/>
-          <a:lstStyle/>
-          <a:p>
-            <a:pPr algn="ctr">
-              <a:defRPr sz="1700" b="1">
-                <a:solidFill>
-                  <a:srgbClr val="232D37"/>
-                </a:solidFill>
-                <a:latin typeface="Aptos Display"/>
-              </a:defRPr>
-            </a:pPr>
-            <a:r>
-              <a:t>Legend convention</a:t>
-            </a:r>
-          </a:p>
-          <a:p>
-            <a:pPr>
-              <a:spcBef>
-                <a:spcPts val="300"/>
-              </a:spcBef>
-              <a:defRPr sz="1200">
-                <a:solidFill>
-                  <a:srgbClr val="232D37"/>
-                </a:solidFill>
-                <a:latin typeface="Aptos"/>
-              </a:defRPr>
-            </a:pPr>
-            <a:r>
-              <a:t>legendItem renders all legend entries.</a:t>
-            </a:r>
-          </a:p>
-          <a:p>
-            <a:pPr>
-              <a:spcBef>
-                <a:spcPts val="300"/>
-              </a:spcBef>
-              <a:defRPr sz="1200">
-                <a:solidFill>
-                  <a:srgbClr val="232D37"/>
-                </a:solidFill>
-                <a:latin typeface="Aptos"/>
-              </a:defRPr>
-            </a:pPr>
-            <a:r>
-              <a:t>legendDashStyle creates a matching dashed swatch.</a:t>
-            </a:r>
-          </a:p>
-          <a:p>
-            <a:pPr>
-              <a:spcBef>
-                <a:spcPts val="300"/>
-              </a:spcBef>
-              <a:defRPr sz="1200">
-                <a:solidFill>
-                  <a:srgbClr val="232D37"/>
-                </a:solidFill>
-                <a:latin typeface="Aptos"/>
-              </a:defRPr>
-            </a:pPr>
-            <a:r>
-              <a:t>Used for IRMAA brackets, ordinary tax brackets, and SS start-age reference lines.</a:t>
-            </a:r>
-          </a:p>
-        </p:txBody>
-      </p:sp>
-      <p:sp>
-        <p:nvSpPr>
-          <p:cNvPr id="7" name="Rectangle 6"/>
-          <p:cNvSpPr/>
-          <p:nvPr/>
-        </p:nvSpPr>
-        <p:spPr>
-          <a:xfrm>
-            <a:off x="4407408" y="1170432"/>
-            <a:ext cx="82296" cy="4526280"/>
-          </a:xfrm>
-          <a:prstGeom prst="rect">
-            <a:avLst/>
-          </a:prstGeom>
-          <a:solidFill>
-            <a:srgbClr val="266EB2"/>
-          </a:solidFill>
-          <a:ln>
-            <a:noFill/>
-          </a:ln>
-        </p:spPr>
-        <p:style>
-          <a:lnRef idx="1">
-            <a:schemeClr val="accent1"/>
-          </a:lnRef>
-          <a:fillRef idx="3">
-            <a:schemeClr val="accent1"/>
-          </a:fillRef>
-          <a:effectRef idx="2">
-            <a:schemeClr val="accent1"/>
-          </a:effectRef>
-          <a:fontRef idx="minor">
-            <a:schemeClr val="lt1"/>
-          </a:fontRef>
-        </p:style>
-        <p:txBody>
-          <a:bodyPr rtlCol="0" anchor="ctr"/>
-          <a:lstStyle/>
-          <a:p>
-            <a:pPr algn="ctr"/>
-          </a:p>
-        </p:txBody>
-      </p:sp>
-      <p:sp>
-        <p:nvSpPr>
-          <p:cNvPr id="8" name="Rounded Rectangle 7"/>
-          <p:cNvSpPr/>
-          <p:nvPr/>
-        </p:nvSpPr>
-        <p:spPr>
-          <a:xfrm>
-            <a:off x="8311896" y="1170432"/>
-            <a:ext cx="3337560" cy="4526280"/>
-          </a:xfrm>
-          <a:prstGeom prst="roundRect">
-            <a:avLst/>
-          </a:prstGeom>
-          <a:solidFill>
-            <a:srgbClr val="EAF9F4"/>
-          </a:solidFill>
-          <a:ln w="13970">
-            <a:solidFill>
-              <a:srgbClr val="429761"/>
-            </a:solidFill>
-          </a:ln>
-        </p:spPr>
-        <p:style>
-          <a:lnRef idx="1">
-            <a:schemeClr val="accent1"/>
-          </a:lnRef>
-          <a:fillRef idx="3">
-            <a:schemeClr val="accent1"/>
-          </a:fillRef>
-          <a:effectRef idx="2">
-            <a:schemeClr val="accent1"/>
-          </a:effectRef>
-          <a:fontRef idx="minor">
-            <a:schemeClr val="lt1"/>
-          </a:fontRef>
-        </p:style>
-        <p:txBody>
-          <a:bodyPr rtlCol="0" anchor="ctr" lIns="182880" rIns="100584" tIns="91440"/>
-          <a:lstStyle/>
-          <a:p>
-            <a:pPr algn="ctr">
-              <a:defRPr sz="1700" b="1">
-                <a:solidFill>
-                  <a:srgbClr val="232D37"/>
-                </a:solidFill>
-                <a:latin typeface="Aptos Display"/>
-              </a:defRPr>
-            </a:pPr>
-            <a:r>
-              <a:t>Readability convention</a:t>
-            </a:r>
-          </a:p>
-          <a:p>
-            <a:pPr>
-              <a:spcBef>
-                <a:spcPts val="300"/>
-              </a:spcBef>
-              <a:defRPr sz="1200">
-                <a:solidFill>
-                  <a:srgbClr val="232D37"/>
-                </a:solidFill>
-                <a:latin typeface="Aptos"/>
-              </a:defRPr>
-            </a:pPr>
-            <a:r>
-              <a:t>Companion charts use sparse axis ticks and no redundant legends or notes.</a:t>
-            </a:r>
-          </a:p>
-          <a:p>
-            <a:pPr>
-              <a:spcBef>
-                <a:spcPts val="300"/>
-              </a:spcBef>
-              <a:defRPr sz="1200">
-                <a:solidFill>
-                  <a:srgbClr val="232D37"/>
-                </a:solidFill>
-                <a:latin typeface="Aptos"/>
-              </a:defRPr>
-            </a:pPr>
-            <a:r>
-              <a:t>Primary charts provide the full story; companions isolate one analytical question.</a:t>
-            </a:r>
-          </a:p>
-        </p:txBody>
-      </p:sp>
-      <p:sp>
-        <p:nvSpPr>
-          <p:cNvPr id="9" name="Rectangle 8"/>
-          <p:cNvSpPr/>
-          <p:nvPr/>
-        </p:nvSpPr>
-        <p:spPr>
-          <a:xfrm>
-            <a:off x="8311896" y="1170432"/>
-            <a:ext cx="82296" cy="4526280"/>
-          </a:xfrm>
-          <a:prstGeom prst="rect">
-            <a:avLst/>
-          </a:prstGeom>
-          <a:solidFill>
-            <a:srgbClr val="429761"/>
-          </a:solidFill>
-          <a:ln>
-            <a:noFill/>
-          </a:ln>
-        </p:spPr>
-        <p:style>
-          <a:lnRef idx="1">
-            <a:schemeClr val="accent1"/>
-          </a:lnRef>
-          <a:fillRef idx="3">
-            <a:schemeClr val="accent1"/>
-          </a:fillRef>
-          <a:effectRef idx="2">
-            <a:schemeClr val="accent1"/>
-          </a:effectRef>
-          <a:fontRef idx="minor">
-            <a:schemeClr val="lt1"/>
-          </a:fontRef>
-        </p:style>
-        <p:txBody>
-          <a:bodyPr rtlCol="0" anchor="ctr"/>
-          <a:lstStyle/>
-          <a:p>
-            <a:pPr algn="ctr"/>
-          </a:p>
-        </p:txBody>
-      </p:sp>
-      <p:sp>
-        <p:nvSpPr>
           <p:cNvPr id="10" name="Rectangle 9"/>
           <p:cNvSpPr/>
           <p:nvPr/>
@@ -8503,7 +8715,7 @@
               </a:defRPr>
             </a:pPr>
             <a:r>
-              <a:t>Retirement Income Planner • Architecture overview • MAGI, IRMAA-as-tax, and enhanced companion-chart update</a:t>
+              <a:t>Retirement Income Planner • Architecture overview • Bracket-aware Roth-conversion update</a:t>
             </a:r>
           </a:p>
         </p:txBody>
@@ -8565,7 +8777,7 @@
               </a:defRPr>
             </a:pPr>
             <a:r>
-              <a:t>Expanded display architecture</a:t>
+              <a:t>Asset section adds a Roth conversion companion chart</a:t>
             </a:r>
           </a:p>
         </p:txBody>
@@ -8601,7 +8813,7 @@
               </a:defRPr>
             </a:pPr>
             <a:r>
-              <a:t>The display layer gains analytical companion charts without weakening its role as a projection consumer.</a:t>
+              <a:t>The main asset view remains the balance story; the companion isolates conversion timing and amounts.</a:t>
             </a:r>
           </a:p>
         </p:txBody>
@@ -8615,185 +8827,7 @@
         <p:spPr>
           <a:xfrm>
             <a:off x="502920" y="1143000"/>
-            <a:ext cx="2286000" cy="4526280"/>
-          </a:xfrm>
-          <a:prstGeom prst="roundRect">
-            <a:avLst/>
-          </a:prstGeom>
-          <a:solidFill>
-            <a:srgbClr val="EAF9F4"/>
-          </a:solidFill>
-          <a:ln w="13970">
-            <a:solidFill>
-              <a:srgbClr val="429761"/>
-            </a:solidFill>
-          </a:ln>
-        </p:spPr>
-        <p:style>
-          <a:lnRef idx="1">
-            <a:schemeClr val="accent1"/>
-          </a:lnRef>
-          <a:fillRef idx="3">
-            <a:schemeClr val="accent1"/>
-          </a:fillRef>
-          <a:effectRef idx="2">
-            <a:schemeClr val="accent1"/>
-          </a:effectRef>
-          <a:fontRef idx="minor">
-            <a:schemeClr val="lt1"/>
-          </a:fontRef>
-        </p:style>
-        <p:txBody>
-          <a:bodyPr rtlCol="0" anchor="ctr" lIns="182880" rIns="100584" tIns="91440"/>
-          <a:lstStyle/>
-          <a:p>
-            <a:pPr algn="ctr">
-              <a:defRPr sz="1700" b="1">
-                <a:solidFill>
-                  <a:srgbClr val="232D37"/>
-                </a:solidFill>
-                <a:latin typeface="Aptos Display"/>
-              </a:defRPr>
-            </a:pPr>
-            <a:r>
-              <a:t>Projection rows</a:t>
-            </a:r>
-          </a:p>
-          <a:p>
-            <a:pPr>
-              <a:spcBef>
-                <a:spcPts val="300"/>
-              </a:spcBef>
-              <a:defRPr sz="1200">
-                <a:solidFill>
-                  <a:srgbClr val="232D37"/>
-                </a:solidFill>
-                <a:latin typeface="Aptos"/>
-              </a:defRPr>
-            </a:pPr>
-      